--- a/python_2/presentation_python_2.pptx
+++ b/python_2/presentation_python_2.pptx
@@ -5,7 +5,7 @@
     <p:sldMasterId id="2147483648" r:id="rId1"/>
   </p:sldMasterIdLst>
   <p:notesMasterIdLst>
-    <p:notesMasterId r:id="rId36"/>
+    <p:notesMasterId r:id="rId38"/>
   </p:notesMasterIdLst>
   <p:sldIdLst>
     <p:sldId id="256" r:id="rId2"/>
@@ -13,35 +13,37 @@
     <p:sldId id="296" r:id="rId4"/>
     <p:sldId id="298" r:id="rId5"/>
     <p:sldId id="299" r:id="rId6"/>
-    <p:sldId id="297" r:id="rId7"/>
-    <p:sldId id="294" r:id="rId8"/>
-    <p:sldId id="259" r:id="rId9"/>
-    <p:sldId id="263" r:id="rId10"/>
-    <p:sldId id="260" r:id="rId11"/>
-    <p:sldId id="261" r:id="rId12"/>
-    <p:sldId id="264" r:id="rId13"/>
-    <p:sldId id="265" r:id="rId14"/>
-    <p:sldId id="266" r:id="rId15"/>
-    <p:sldId id="268" r:id="rId16"/>
-    <p:sldId id="269" r:id="rId17"/>
-    <p:sldId id="271" r:id="rId18"/>
-    <p:sldId id="272" r:id="rId19"/>
-    <p:sldId id="273" r:id="rId20"/>
-    <p:sldId id="274" r:id="rId21"/>
-    <p:sldId id="275" r:id="rId22"/>
-    <p:sldId id="276" r:id="rId23"/>
-    <p:sldId id="277" r:id="rId24"/>
-    <p:sldId id="278" r:id="rId25"/>
-    <p:sldId id="282" r:id="rId26"/>
-    <p:sldId id="283" r:id="rId27"/>
-    <p:sldId id="280" r:id="rId28"/>
-    <p:sldId id="279" r:id="rId29"/>
-    <p:sldId id="288" r:id="rId30"/>
-    <p:sldId id="289" r:id="rId31"/>
-    <p:sldId id="292" r:id="rId32"/>
-    <p:sldId id="291" r:id="rId33"/>
-    <p:sldId id="281" r:id="rId34"/>
-    <p:sldId id="290" r:id="rId35"/>
+    <p:sldId id="300" r:id="rId7"/>
+    <p:sldId id="301" r:id="rId8"/>
+    <p:sldId id="297" r:id="rId9"/>
+    <p:sldId id="294" r:id="rId10"/>
+    <p:sldId id="259" r:id="rId11"/>
+    <p:sldId id="263" r:id="rId12"/>
+    <p:sldId id="260" r:id="rId13"/>
+    <p:sldId id="261" r:id="rId14"/>
+    <p:sldId id="264" r:id="rId15"/>
+    <p:sldId id="265" r:id="rId16"/>
+    <p:sldId id="266" r:id="rId17"/>
+    <p:sldId id="268" r:id="rId18"/>
+    <p:sldId id="269" r:id="rId19"/>
+    <p:sldId id="271" r:id="rId20"/>
+    <p:sldId id="272" r:id="rId21"/>
+    <p:sldId id="273" r:id="rId22"/>
+    <p:sldId id="274" r:id="rId23"/>
+    <p:sldId id="275" r:id="rId24"/>
+    <p:sldId id="276" r:id="rId25"/>
+    <p:sldId id="277" r:id="rId26"/>
+    <p:sldId id="278" r:id="rId27"/>
+    <p:sldId id="282" r:id="rId28"/>
+    <p:sldId id="283" r:id="rId29"/>
+    <p:sldId id="280" r:id="rId30"/>
+    <p:sldId id="279" r:id="rId31"/>
+    <p:sldId id="288" r:id="rId32"/>
+    <p:sldId id="289" r:id="rId33"/>
+    <p:sldId id="292" r:id="rId34"/>
+    <p:sldId id="291" r:id="rId35"/>
+    <p:sldId id="281" r:id="rId36"/>
+    <p:sldId id="290" r:id="rId37"/>
   </p:sldIdLst>
   <p:sldSz cx="12192000" cy="6858000"/>
   <p:notesSz cx="6858000" cy="9144000"/>
@@ -4372,6 +4374,1794 @@
         <p:cNvPr id="1" name="">
           <a:extLst>
             <a:ext uri="{FF2B5EF4-FFF2-40B4-BE49-F238E27FC236}">
+              <a16:creationId xmlns:a16="http://schemas.microsoft.com/office/drawing/2014/main" id="{E62BFDAB-C1F4-2C90-C57C-9F000B0B4330}"/>
+            </a:ext>
+          </a:extLst>
+        </p:cNvPr>
+        <p:cNvGrpSpPr/>
+        <p:nvPr/>
+      </p:nvGrpSpPr>
+      <p:grpSpPr>
+        <a:xfrm>
+          <a:off x="0" y="0"/>
+          <a:ext cx="0" cy="0"/>
+          <a:chOff x="0" y="0"/>
+          <a:chExt cx="0" cy="0"/>
+        </a:xfrm>
+      </p:grpSpPr>
+      <p:sp>
+        <p:nvSpPr>
+          <p:cNvPr id="2" name="Title 1">
+            <a:extLst>
+              <a:ext uri="{FF2B5EF4-FFF2-40B4-BE49-F238E27FC236}">
+                <a16:creationId xmlns:a16="http://schemas.microsoft.com/office/drawing/2014/main" id="{6DB834E1-6328-58D0-AD5B-7735B2301249}"/>
+              </a:ext>
+            </a:extLst>
+          </p:cNvPr>
+          <p:cNvSpPr>
+            <a:spLocks noGrp="1"/>
+          </p:cNvSpPr>
+          <p:nvPr>
+            <p:ph type="title"/>
+          </p:nvPr>
+        </p:nvSpPr>
+        <p:spPr/>
+        <p:txBody>
+          <a:bodyPr/>
+          <a:lstStyle/>
+          <a:p>
+            <a:r>
+              <a:rPr lang="en-US" dirty="0">
+                <a:latin typeface="Arial Rounded MT Bold" panose="020F0704030504030204" pitchFamily="34" charset="0"/>
+              </a:rPr>
+              <a:t>Types</a:t>
+            </a:r>
+            <a:endParaRPr lang="fr-CA" dirty="0">
+              <a:latin typeface="Arial Rounded MT Bold" panose="020F0704030504030204" pitchFamily="34" charset="0"/>
+            </a:endParaRPr>
+          </a:p>
+        </p:txBody>
+      </p:sp>
+      <mc:AlternateContent xmlns:mc="http://schemas.openxmlformats.org/markup-compatibility/2006" xmlns:a14="http://schemas.microsoft.com/office/drawing/2010/main">
+        <mc:Choice Requires="a14">
+          <p:sp>
+            <p:nvSpPr>
+              <p:cNvPr id="3" name="Content Placeholder 2">
+                <a:extLst>
+                  <a:ext uri="{FF2B5EF4-FFF2-40B4-BE49-F238E27FC236}">
+                    <a16:creationId xmlns:a16="http://schemas.microsoft.com/office/drawing/2014/main" id="{E958FDEE-6B55-8774-B700-C58B12F5572A}"/>
+                  </a:ext>
+                </a:extLst>
+              </p:cNvPr>
+              <p:cNvSpPr>
+                <a:spLocks noGrp="1"/>
+              </p:cNvSpPr>
+              <p:nvPr>
+                <p:ph idx="1"/>
+              </p:nvPr>
+            </p:nvSpPr>
+            <p:spPr/>
+            <p:txBody>
+              <a:bodyPr>
+                <a:normAutofit/>
+              </a:bodyPr>
+              <a:lstStyle/>
+              <a:p>
+                <a:pPr marL="0" indent="0" algn="just">
+                  <a:buNone/>
+                </a:pPr>
+                <a:r>
+                  <a:rPr lang="fr-CA" sz="2600" b="1" dirty="0">
+                    <a:latin typeface="Consolas" panose="020B0609020204030204" pitchFamily="49" charset="0"/>
+                  </a:rPr>
+                  <a:t>&gt;&gt;&gt; type(1)		</a:t>
+                </a:r>
+                <a14:m>
+                  <m:oMath xmlns:m="http://schemas.openxmlformats.org/officeDocument/2006/math">
+                    <m:r>
+                      <a:rPr lang="fr-CA" sz="2600" i="1" smtClean="0">
+                        <a:latin typeface="Cambria Math" panose="02040503050406030204" pitchFamily="18" charset="0"/>
+                        <a:ea typeface="Cambria Math" panose="02040503050406030204" pitchFamily="18" charset="0"/>
+                      </a:rPr>
+                      <m:t>←</m:t>
+                    </m:r>
+                  </m:oMath>
+                </a14:m>
+                <a:r>
+                  <a:rPr lang="fr-CA" sz="2600" dirty="0">
+                    <a:latin typeface="Consolas" panose="020B0609020204030204" pitchFamily="49" charset="0"/>
+                  </a:rPr>
+                  <a:t> </a:t>
+                </a:r>
+                <a:r>
+                  <a:rPr lang="fr-CA" sz="2600" b="1" dirty="0">
+                    <a:solidFill>
+                      <a:srgbClr val="FF2500"/>
+                    </a:solidFill>
+                    <a:latin typeface="Consolas" panose="020B0609020204030204" pitchFamily="49" charset="0"/>
+                  </a:rPr>
+                  <a:t>entiers</a:t>
+                </a:r>
+              </a:p>
+              <a:p>
+                <a:pPr marL="0" indent="0" algn="just">
+                  <a:buNone/>
+                </a:pPr>
+                <a:r>
+                  <a:rPr lang="fr-CA" sz="2600" dirty="0">
+                    <a:solidFill>
+                      <a:schemeClr val="bg1">
+                        <a:lumMod val="50000"/>
+                      </a:schemeClr>
+                    </a:solidFill>
+                    <a:latin typeface="Consolas" panose="020B0609020204030204" pitchFamily="49" charset="0"/>
+                  </a:rPr>
+                  <a:t>&lt;class 'int'&gt;</a:t>
+                </a:r>
+              </a:p>
+              <a:p>
+                <a:pPr marL="0" indent="0" algn="just">
+                  <a:buNone/>
+                </a:pPr>
+                <a:r>
+                  <a:rPr lang="fr-CA" sz="2600" b="1" dirty="0">
+                    <a:latin typeface="Consolas" panose="020B0609020204030204" pitchFamily="49" charset="0"/>
+                  </a:rPr>
+                  <a:t>&gt;&gt;&gt; type(1.0)		</a:t>
+                </a:r>
+                <a14:m>
+                  <m:oMath xmlns:m="http://schemas.openxmlformats.org/officeDocument/2006/math">
+                    <m:r>
+                      <a:rPr lang="fr-CA" sz="2600" i="1" smtClean="0">
+                        <a:latin typeface="Cambria Math" panose="02040503050406030204" pitchFamily="18" charset="0"/>
+                        <a:ea typeface="Cambria Math" panose="02040503050406030204" pitchFamily="18" charset="0"/>
+                      </a:rPr>
+                      <m:t>←</m:t>
+                    </m:r>
+                  </m:oMath>
+                </a14:m>
+                <a:r>
+                  <a:rPr lang="fr-CA" sz="2600" b="1" dirty="0">
+                    <a:solidFill>
+                      <a:srgbClr val="FF2500"/>
+                    </a:solidFill>
+                    <a:latin typeface="Consolas" panose="020B0609020204030204" pitchFamily="49" charset="0"/>
+                  </a:rPr>
+                  <a:t> rationnels</a:t>
+                </a:r>
+              </a:p>
+              <a:p>
+                <a:pPr marL="0" indent="0" algn="just">
+                  <a:buNone/>
+                </a:pPr>
+                <a:r>
+                  <a:rPr lang="fr-CA" sz="2600" dirty="0">
+                    <a:solidFill>
+                      <a:schemeClr val="bg1">
+                        <a:lumMod val="50000"/>
+                      </a:schemeClr>
+                    </a:solidFill>
+                    <a:latin typeface="Consolas" panose="020B0609020204030204" pitchFamily="49" charset="0"/>
+                  </a:rPr>
+                  <a:t>&lt;class '</a:t>
+                </a:r>
+                <a:r>
+                  <a:rPr lang="fr-CA" sz="2600" dirty="0" err="1">
+                    <a:solidFill>
+                      <a:schemeClr val="bg1">
+                        <a:lumMod val="50000"/>
+                      </a:schemeClr>
+                    </a:solidFill>
+                    <a:latin typeface="Consolas" panose="020B0609020204030204" pitchFamily="49" charset="0"/>
+                  </a:rPr>
+                  <a:t>float</a:t>
+                </a:r>
+                <a:r>
+                  <a:rPr lang="fr-CA" sz="2600" dirty="0">
+                    <a:solidFill>
+                      <a:schemeClr val="bg1">
+                        <a:lumMod val="50000"/>
+                      </a:schemeClr>
+                    </a:solidFill>
+                    <a:latin typeface="Consolas" panose="020B0609020204030204" pitchFamily="49" charset="0"/>
+                  </a:rPr>
+                  <a:t>'&gt;</a:t>
+                </a:r>
+              </a:p>
+              <a:p>
+                <a:pPr marL="0" indent="0" algn="just">
+                  <a:buNone/>
+                </a:pPr>
+                <a:r>
+                  <a:rPr lang="fr-CA" sz="2600" b="1" dirty="0">
+                    <a:latin typeface="Consolas" panose="020B0609020204030204" pitchFamily="49" charset="0"/>
+                  </a:rPr>
+                  <a:t>&gt;&gt;&gt; type(</a:t>
+                </a:r>
+                <a:r>
+                  <a:rPr lang="fr-CA" sz="2600" b="1" dirty="0" err="1">
+                    <a:latin typeface="Consolas" panose="020B0609020204030204" pitchFamily="49" charset="0"/>
+                  </a:rPr>
+                  <a:t>True</a:t>
+                </a:r>
+                <a:r>
+                  <a:rPr lang="fr-CA" sz="2600" b="1" dirty="0">
+                    <a:latin typeface="Consolas" panose="020B0609020204030204" pitchFamily="49" charset="0"/>
+                  </a:rPr>
+                  <a:t>)		</a:t>
+                </a:r>
+                <a14:m>
+                  <m:oMath xmlns:m="http://schemas.openxmlformats.org/officeDocument/2006/math">
+                    <m:r>
+                      <a:rPr lang="fr-CA" sz="2600" i="1" smtClean="0">
+                        <a:latin typeface="Cambria Math" panose="02040503050406030204" pitchFamily="18" charset="0"/>
+                        <a:ea typeface="Cambria Math" panose="02040503050406030204" pitchFamily="18" charset="0"/>
+                      </a:rPr>
+                      <m:t>←</m:t>
+                    </m:r>
+                  </m:oMath>
+                </a14:m>
+                <a:r>
+                  <a:rPr lang="fr-CA" sz="2600" b="1" dirty="0">
+                    <a:solidFill>
+                      <a:srgbClr val="FF2500"/>
+                    </a:solidFill>
+                    <a:latin typeface="Consolas" panose="020B0609020204030204" pitchFamily="49" charset="0"/>
+                  </a:rPr>
+                  <a:t> </a:t>
+                </a:r>
+                <a:r>
+                  <a:rPr lang="fr-CA" sz="2600" b="1" dirty="0" err="1">
+                    <a:solidFill>
+                      <a:srgbClr val="FF2500"/>
+                    </a:solidFill>
+                    <a:latin typeface="Consolas" panose="020B0609020204030204" pitchFamily="49" charset="0"/>
+                  </a:rPr>
+                  <a:t>bool</a:t>
+                </a:r>
+                <a:r>
+                  <a:rPr lang="en-US" sz="2600" b="1" dirty="0" err="1">
+                    <a:solidFill>
+                      <a:srgbClr val="FF2500"/>
+                    </a:solidFill>
+                    <a:latin typeface="Consolas" panose="020B0609020204030204" pitchFamily="49" charset="0"/>
+                  </a:rPr>
+                  <a:t>éens</a:t>
+                </a:r>
+                <a:endParaRPr lang="fr-CA" sz="2600" b="1" dirty="0">
+                  <a:solidFill>
+                    <a:srgbClr val="FF2500"/>
+                  </a:solidFill>
+                  <a:latin typeface="Consolas" panose="020B0609020204030204" pitchFamily="49" charset="0"/>
+                </a:endParaRPr>
+              </a:p>
+              <a:p>
+                <a:pPr marL="0" indent="0" algn="just">
+                  <a:buNone/>
+                </a:pPr>
+                <a:r>
+                  <a:rPr lang="fr-CA" sz="2600" dirty="0">
+                    <a:solidFill>
+                      <a:schemeClr val="bg1">
+                        <a:lumMod val="50000"/>
+                      </a:schemeClr>
+                    </a:solidFill>
+                    <a:latin typeface="Consolas" panose="020B0609020204030204" pitchFamily="49" charset="0"/>
+                  </a:rPr>
+                  <a:t>&lt;class '</a:t>
+                </a:r>
+                <a:r>
+                  <a:rPr lang="fr-CA" sz="2600" dirty="0" err="1">
+                    <a:solidFill>
+                      <a:schemeClr val="bg1">
+                        <a:lumMod val="50000"/>
+                      </a:schemeClr>
+                    </a:solidFill>
+                    <a:latin typeface="Consolas" panose="020B0609020204030204" pitchFamily="49" charset="0"/>
+                  </a:rPr>
+                  <a:t>bool</a:t>
+                </a:r>
+                <a:r>
+                  <a:rPr lang="fr-CA" sz="2600" dirty="0">
+                    <a:solidFill>
+                      <a:schemeClr val="bg1">
+                        <a:lumMod val="50000"/>
+                      </a:schemeClr>
+                    </a:solidFill>
+                    <a:latin typeface="Consolas" panose="020B0609020204030204" pitchFamily="49" charset="0"/>
+                  </a:rPr>
+                  <a:t>'&gt;</a:t>
+                </a:r>
+              </a:p>
+              <a:p>
+                <a:pPr marL="0" indent="0" algn="just">
+                  <a:buNone/>
+                </a:pPr>
+                <a:r>
+                  <a:rPr lang="fr-CA" sz="2600" b="1" dirty="0">
+                    <a:latin typeface="Consolas" panose="020B0609020204030204" pitchFamily="49" charset="0"/>
+                  </a:rPr>
+                  <a:t>&gt;&gt;&gt; type('a')		</a:t>
+                </a:r>
+                <a14:m>
+                  <m:oMath xmlns:m="http://schemas.openxmlformats.org/officeDocument/2006/math">
+                    <m:r>
+                      <a:rPr lang="fr-CA" sz="2600" i="1" smtClean="0">
+                        <a:latin typeface="Cambria Math" panose="02040503050406030204" pitchFamily="18" charset="0"/>
+                        <a:ea typeface="Cambria Math" panose="02040503050406030204" pitchFamily="18" charset="0"/>
+                      </a:rPr>
+                      <m:t>←</m:t>
+                    </m:r>
+                  </m:oMath>
+                </a14:m>
+                <a:r>
+                  <a:rPr lang="fr-CA" sz="2600" dirty="0">
+                    <a:latin typeface="Consolas" panose="020B0609020204030204" pitchFamily="49" charset="0"/>
+                  </a:rPr>
+                  <a:t> </a:t>
+                </a:r>
+                <a:r>
+                  <a:rPr lang="fr-CA" sz="2600" b="1" dirty="0">
+                    <a:solidFill>
+                      <a:srgbClr val="FF2500"/>
+                    </a:solidFill>
+                    <a:latin typeface="Consolas" panose="020B0609020204030204" pitchFamily="49" charset="0"/>
+                  </a:rPr>
+                  <a:t>chaînes de caractères</a:t>
+                </a:r>
+              </a:p>
+              <a:p>
+                <a:pPr marL="0" indent="0" algn="just">
+                  <a:buNone/>
+                </a:pPr>
+                <a:r>
+                  <a:rPr lang="fr-CA" sz="2600" dirty="0">
+                    <a:solidFill>
+                      <a:schemeClr val="bg1">
+                        <a:lumMod val="50000"/>
+                      </a:schemeClr>
+                    </a:solidFill>
+                    <a:latin typeface="Consolas" panose="020B0609020204030204" pitchFamily="49" charset="0"/>
+                  </a:rPr>
+                  <a:t>&lt;class 'str'&gt;</a:t>
+                </a:r>
+              </a:p>
+              <a:p>
+                <a:pPr marL="0" indent="0" algn="just">
+                  <a:buNone/>
+                </a:pPr>
+                <a:endParaRPr lang="fr-CA" i="1" dirty="0">
+                  <a:latin typeface="Consolas" panose="020B0609020204030204" pitchFamily="49" charset="0"/>
+                </a:endParaRPr>
+              </a:p>
+            </p:txBody>
+          </p:sp>
+        </mc:Choice>
+        <mc:Fallback xmlns="">
+          <p:sp>
+            <p:nvSpPr>
+              <p:cNvPr id="3" name="Content Placeholder 2">
+                <a:extLst>
+                  <a:ext uri="{FF2B5EF4-FFF2-40B4-BE49-F238E27FC236}">
+                    <a16:creationId xmlns:a16="http://schemas.microsoft.com/office/drawing/2014/main" id="{E958FDEE-6B55-8774-B700-C58B12F5572A}"/>
+                  </a:ext>
+                </a:extLst>
+              </p:cNvPr>
+              <p:cNvSpPr>
+                <a:spLocks noGrp="1" noRot="1" noChangeAspect="1" noMove="1" noResize="1" noEditPoints="1" noAdjustHandles="1" noChangeArrowheads="1" noChangeShapeType="1" noTextEdit="1"/>
+              </p:cNvSpPr>
+              <p:nvPr>
+                <p:ph idx="1"/>
+              </p:nvPr>
+            </p:nvSpPr>
+            <p:spPr>
+              <a:blipFill>
+                <a:blip r:embed="rId2"/>
+                <a:stretch>
+                  <a:fillRect l="-1043" t="-2101"/>
+                </a:stretch>
+              </a:blipFill>
+            </p:spPr>
+            <p:txBody>
+              <a:bodyPr/>
+              <a:lstStyle/>
+              <a:p>
+                <a:r>
+                  <a:rPr lang="fr-CA">
+                    <a:noFill/>
+                  </a:rPr>
+                  <a:t> </a:t>
+                </a:r>
+              </a:p>
+            </p:txBody>
+          </p:sp>
+        </mc:Fallback>
+      </mc:AlternateContent>
+      <p:sp>
+        <p:nvSpPr>
+          <p:cNvPr id="4" name="TextBox 3">
+            <a:extLst>
+              <a:ext uri="{FF2B5EF4-FFF2-40B4-BE49-F238E27FC236}">
+                <a16:creationId xmlns:a16="http://schemas.microsoft.com/office/drawing/2014/main" id="{3411B9CF-30C0-4D7D-B26B-6558857625D2}"/>
+              </a:ext>
+            </a:extLst>
+          </p:cNvPr>
+          <p:cNvSpPr txBox="1"/>
+          <p:nvPr/>
+        </p:nvSpPr>
+        <p:spPr>
+          <a:xfrm>
+            <a:off x="838199" y="6176963"/>
+            <a:ext cx="10515599" cy="369332"/>
+          </a:xfrm>
+          <a:prstGeom prst="rect">
+            <a:avLst/>
+          </a:prstGeom>
+          <a:noFill/>
+        </p:spPr>
+        <p:txBody>
+          <a:bodyPr wrap="square">
+            <a:spAutoFit/>
+          </a:bodyPr>
+          <a:lstStyle/>
+          <a:p>
+            <a:pPr algn="ctr"/>
+            <a:r>
+              <a:rPr lang="fr-CA" sz="1800" b="1" dirty="0">
+                <a:latin typeface="Consolas" panose="020B0609020204030204" pitchFamily="49" charset="0"/>
+              </a:rPr>
+              <a:t>SOURCE: </a:t>
+            </a:r>
+            <a:r>
+              <a:rPr lang="fr-CA" b="1" dirty="0">
+                <a:latin typeface="Consolas" panose="020B0609020204030204" pitchFamily="49" charset="0"/>
+                <a:hlinkClick r:id="rId3"/>
+              </a:rPr>
+              <a:t>https://docs.python.org/3/library/stdtypes.html</a:t>
+            </a:r>
+            <a:endParaRPr lang="fr-CA" sz="1800" b="1" dirty="0">
+              <a:latin typeface="Consolas" panose="020B0609020204030204" pitchFamily="49" charset="0"/>
+            </a:endParaRPr>
+          </a:p>
+        </p:txBody>
+      </p:sp>
+      <p:sp>
+        <p:nvSpPr>
+          <p:cNvPr id="5" name="Slide Number Placeholder 4">
+            <a:extLst>
+              <a:ext uri="{FF2B5EF4-FFF2-40B4-BE49-F238E27FC236}">
+                <a16:creationId xmlns:a16="http://schemas.microsoft.com/office/drawing/2014/main" id="{E5513B3C-7CEF-8A58-5F38-6B1B29F9C08E}"/>
+              </a:ext>
+            </a:extLst>
+          </p:cNvPr>
+          <p:cNvSpPr>
+            <a:spLocks noGrp="1"/>
+          </p:cNvSpPr>
+          <p:nvPr>
+            <p:ph type="sldNum" sz="quarter" idx="12"/>
+          </p:nvPr>
+        </p:nvSpPr>
+        <p:spPr/>
+        <p:txBody>
+          <a:bodyPr/>
+          <a:lstStyle/>
+          <a:p>
+            <a:fld id="{846B06B1-1179-491F-A487-8E0C403F7C13}" type="slidenum">
+              <a:rPr lang="fr-CA" smtClean="0"/>
+              <a:t>10</a:t>
+            </a:fld>
+            <a:endParaRPr lang="fr-CA"/>
+          </a:p>
+        </p:txBody>
+      </p:sp>
+    </p:spTree>
+    <p:extLst>
+      <p:ext uri="{BB962C8B-B14F-4D97-AF65-F5344CB8AC3E}">
+        <p14:creationId xmlns:p14="http://schemas.microsoft.com/office/powerpoint/2010/main" val="3404311213"/>
+      </p:ext>
+    </p:extLst>
+  </p:cSld>
+  <p:clrMapOvr>
+    <a:masterClrMapping/>
+  </p:clrMapOvr>
+  <p:timing>
+    <p:tnLst>
+      <p:par>
+        <p:cTn id="1" dur="indefinite" restart="never" nodeType="tmRoot">
+          <p:childTnLst>
+            <p:seq concurrent="1" nextAc="seek">
+              <p:cTn id="2" dur="indefinite" nodeType="mainSeq">
+                <p:childTnLst>
+                  <p:par>
+                    <p:cTn id="3" fill="hold">
+                      <p:stCondLst>
+                        <p:cond delay="indefinite"/>
+                      </p:stCondLst>
+                      <p:childTnLst>
+                        <p:par>
+                          <p:cTn id="4" fill="hold">
+                            <p:stCondLst>
+                              <p:cond delay="0"/>
+                            </p:stCondLst>
+                            <p:childTnLst>
+                              <p:par>
+                                <p:cTn id="5" presetID="10" presetClass="entr" presetSubtype="0" fill="hold" nodeType="clickEffect">
+                                  <p:stCondLst>
+                                    <p:cond delay="0"/>
+                                  </p:stCondLst>
+                                  <p:childTnLst>
+                                    <p:set>
+                                      <p:cBhvr>
+                                        <p:cTn id="6" dur="1" fill="hold">
+                                          <p:stCondLst>
+                                            <p:cond delay="0"/>
+                                          </p:stCondLst>
+                                        </p:cTn>
+                                        <p:tgtEl>
+                                          <p:spTgt spid="3">
+                                            <p:txEl>
+                                              <p:pRg st="0" end="0"/>
+                                            </p:txEl>
+                                          </p:spTgt>
+                                        </p:tgtEl>
+                                        <p:attrNameLst>
+                                          <p:attrName>style.visibility</p:attrName>
+                                        </p:attrNameLst>
+                                      </p:cBhvr>
+                                      <p:to>
+                                        <p:strVal val="visible"/>
+                                      </p:to>
+                                    </p:set>
+                                    <p:animEffect transition="in" filter="fade">
+                                      <p:cBhvr>
+                                        <p:cTn id="7" dur="500"/>
+                                        <p:tgtEl>
+                                          <p:spTgt spid="3">
+                                            <p:txEl>
+                                              <p:pRg st="0" end="0"/>
+                                            </p:txEl>
+                                          </p:spTgt>
+                                        </p:tgtEl>
+                                      </p:cBhvr>
+                                    </p:animEffect>
+                                  </p:childTnLst>
+                                </p:cTn>
+                              </p:par>
+                            </p:childTnLst>
+                          </p:cTn>
+                        </p:par>
+                      </p:childTnLst>
+                    </p:cTn>
+                  </p:par>
+                  <p:par>
+                    <p:cTn id="8" fill="hold">
+                      <p:stCondLst>
+                        <p:cond delay="indefinite"/>
+                      </p:stCondLst>
+                      <p:childTnLst>
+                        <p:par>
+                          <p:cTn id="9" fill="hold">
+                            <p:stCondLst>
+                              <p:cond delay="0"/>
+                            </p:stCondLst>
+                            <p:childTnLst>
+                              <p:par>
+                                <p:cTn id="10" presetID="10" presetClass="entr" presetSubtype="0" fill="hold" nodeType="clickEffect">
+                                  <p:stCondLst>
+                                    <p:cond delay="0"/>
+                                  </p:stCondLst>
+                                  <p:childTnLst>
+                                    <p:set>
+                                      <p:cBhvr>
+                                        <p:cTn id="11" dur="1" fill="hold">
+                                          <p:stCondLst>
+                                            <p:cond delay="0"/>
+                                          </p:stCondLst>
+                                        </p:cTn>
+                                        <p:tgtEl>
+                                          <p:spTgt spid="3">
+                                            <p:txEl>
+                                              <p:pRg st="1" end="1"/>
+                                            </p:txEl>
+                                          </p:spTgt>
+                                        </p:tgtEl>
+                                        <p:attrNameLst>
+                                          <p:attrName>style.visibility</p:attrName>
+                                        </p:attrNameLst>
+                                      </p:cBhvr>
+                                      <p:to>
+                                        <p:strVal val="visible"/>
+                                      </p:to>
+                                    </p:set>
+                                    <p:animEffect transition="in" filter="fade">
+                                      <p:cBhvr>
+                                        <p:cTn id="12" dur="500"/>
+                                        <p:tgtEl>
+                                          <p:spTgt spid="3">
+                                            <p:txEl>
+                                              <p:pRg st="1" end="1"/>
+                                            </p:txEl>
+                                          </p:spTgt>
+                                        </p:tgtEl>
+                                      </p:cBhvr>
+                                    </p:animEffect>
+                                  </p:childTnLst>
+                                </p:cTn>
+                              </p:par>
+                            </p:childTnLst>
+                          </p:cTn>
+                        </p:par>
+                      </p:childTnLst>
+                    </p:cTn>
+                  </p:par>
+                  <p:par>
+                    <p:cTn id="13" fill="hold">
+                      <p:stCondLst>
+                        <p:cond delay="indefinite"/>
+                      </p:stCondLst>
+                      <p:childTnLst>
+                        <p:par>
+                          <p:cTn id="14" fill="hold">
+                            <p:stCondLst>
+                              <p:cond delay="0"/>
+                            </p:stCondLst>
+                            <p:childTnLst>
+                              <p:par>
+                                <p:cTn id="15" presetID="10" presetClass="entr" presetSubtype="0" fill="hold" nodeType="clickEffect">
+                                  <p:stCondLst>
+                                    <p:cond delay="0"/>
+                                  </p:stCondLst>
+                                  <p:childTnLst>
+                                    <p:set>
+                                      <p:cBhvr>
+                                        <p:cTn id="16" dur="1" fill="hold">
+                                          <p:stCondLst>
+                                            <p:cond delay="0"/>
+                                          </p:stCondLst>
+                                        </p:cTn>
+                                        <p:tgtEl>
+                                          <p:spTgt spid="3">
+                                            <p:txEl>
+                                              <p:pRg st="2" end="2"/>
+                                            </p:txEl>
+                                          </p:spTgt>
+                                        </p:tgtEl>
+                                        <p:attrNameLst>
+                                          <p:attrName>style.visibility</p:attrName>
+                                        </p:attrNameLst>
+                                      </p:cBhvr>
+                                      <p:to>
+                                        <p:strVal val="visible"/>
+                                      </p:to>
+                                    </p:set>
+                                    <p:animEffect transition="in" filter="fade">
+                                      <p:cBhvr>
+                                        <p:cTn id="17" dur="500"/>
+                                        <p:tgtEl>
+                                          <p:spTgt spid="3">
+                                            <p:txEl>
+                                              <p:pRg st="2" end="2"/>
+                                            </p:txEl>
+                                          </p:spTgt>
+                                        </p:tgtEl>
+                                      </p:cBhvr>
+                                    </p:animEffect>
+                                  </p:childTnLst>
+                                </p:cTn>
+                              </p:par>
+                            </p:childTnLst>
+                          </p:cTn>
+                        </p:par>
+                      </p:childTnLst>
+                    </p:cTn>
+                  </p:par>
+                  <p:par>
+                    <p:cTn id="18" fill="hold">
+                      <p:stCondLst>
+                        <p:cond delay="indefinite"/>
+                      </p:stCondLst>
+                      <p:childTnLst>
+                        <p:par>
+                          <p:cTn id="19" fill="hold">
+                            <p:stCondLst>
+                              <p:cond delay="0"/>
+                            </p:stCondLst>
+                            <p:childTnLst>
+                              <p:par>
+                                <p:cTn id="20" presetID="10" presetClass="entr" presetSubtype="0" fill="hold" nodeType="clickEffect">
+                                  <p:stCondLst>
+                                    <p:cond delay="0"/>
+                                  </p:stCondLst>
+                                  <p:childTnLst>
+                                    <p:set>
+                                      <p:cBhvr>
+                                        <p:cTn id="21" dur="1" fill="hold">
+                                          <p:stCondLst>
+                                            <p:cond delay="0"/>
+                                          </p:stCondLst>
+                                        </p:cTn>
+                                        <p:tgtEl>
+                                          <p:spTgt spid="3">
+                                            <p:txEl>
+                                              <p:pRg st="3" end="3"/>
+                                            </p:txEl>
+                                          </p:spTgt>
+                                        </p:tgtEl>
+                                        <p:attrNameLst>
+                                          <p:attrName>style.visibility</p:attrName>
+                                        </p:attrNameLst>
+                                      </p:cBhvr>
+                                      <p:to>
+                                        <p:strVal val="visible"/>
+                                      </p:to>
+                                    </p:set>
+                                    <p:animEffect transition="in" filter="fade">
+                                      <p:cBhvr>
+                                        <p:cTn id="22" dur="500"/>
+                                        <p:tgtEl>
+                                          <p:spTgt spid="3">
+                                            <p:txEl>
+                                              <p:pRg st="3" end="3"/>
+                                            </p:txEl>
+                                          </p:spTgt>
+                                        </p:tgtEl>
+                                      </p:cBhvr>
+                                    </p:animEffect>
+                                  </p:childTnLst>
+                                </p:cTn>
+                              </p:par>
+                            </p:childTnLst>
+                          </p:cTn>
+                        </p:par>
+                      </p:childTnLst>
+                    </p:cTn>
+                  </p:par>
+                  <p:par>
+                    <p:cTn id="23" fill="hold">
+                      <p:stCondLst>
+                        <p:cond delay="indefinite"/>
+                      </p:stCondLst>
+                      <p:childTnLst>
+                        <p:par>
+                          <p:cTn id="24" fill="hold">
+                            <p:stCondLst>
+                              <p:cond delay="0"/>
+                            </p:stCondLst>
+                            <p:childTnLst>
+                              <p:par>
+                                <p:cTn id="25" presetID="10" presetClass="entr" presetSubtype="0" fill="hold" nodeType="clickEffect">
+                                  <p:stCondLst>
+                                    <p:cond delay="0"/>
+                                  </p:stCondLst>
+                                  <p:childTnLst>
+                                    <p:set>
+                                      <p:cBhvr>
+                                        <p:cTn id="26" dur="1" fill="hold">
+                                          <p:stCondLst>
+                                            <p:cond delay="0"/>
+                                          </p:stCondLst>
+                                        </p:cTn>
+                                        <p:tgtEl>
+                                          <p:spTgt spid="3">
+                                            <p:txEl>
+                                              <p:pRg st="4" end="4"/>
+                                            </p:txEl>
+                                          </p:spTgt>
+                                        </p:tgtEl>
+                                        <p:attrNameLst>
+                                          <p:attrName>style.visibility</p:attrName>
+                                        </p:attrNameLst>
+                                      </p:cBhvr>
+                                      <p:to>
+                                        <p:strVal val="visible"/>
+                                      </p:to>
+                                    </p:set>
+                                    <p:animEffect transition="in" filter="fade">
+                                      <p:cBhvr>
+                                        <p:cTn id="27" dur="500"/>
+                                        <p:tgtEl>
+                                          <p:spTgt spid="3">
+                                            <p:txEl>
+                                              <p:pRg st="4" end="4"/>
+                                            </p:txEl>
+                                          </p:spTgt>
+                                        </p:tgtEl>
+                                      </p:cBhvr>
+                                    </p:animEffect>
+                                  </p:childTnLst>
+                                </p:cTn>
+                              </p:par>
+                            </p:childTnLst>
+                          </p:cTn>
+                        </p:par>
+                      </p:childTnLst>
+                    </p:cTn>
+                  </p:par>
+                  <p:par>
+                    <p:cTn id="28" fill="hold">
+                      <p:stCondLst>
+                        <p:cond delay="indefinite"/>
+                      </p:stCondLst>
+                      <p:childTnLst>
+                        <p:par>
+                          <p:cTn id="29" fill="hold">
+                            <p:stCondLst>
+                              <p:cond delay="0"/>
+                            </p:stCondLst>
+                            <p:childTnLst>
+                              <p:par>
+                                <p:cTn id="30" presetID="10" presetClass="entr" presetSubtype="0" fill="hold" nodeType="clickEffect">
+                                  <p:stCondLst>
+                                    <p:cond delay="0"/>
+                                  </p:stCondLst>
+                                  <p:childTnLst>
+                                    <p:set>
+                                      <p:cBhvr>
+                                        <p:cTn id="31" dur="1" fill="hold">
+                                          <p:stCondLst>
+                                            <p:cond delay="0"/>
+                                          </p:stCondLst>
+                                        </p:cTn>
+                                        <p:tgtEl>
+                                          <p:spTgt spid="3">
+                                            <p:txEl>
+                                              <p:pRg st="5" end="5"/>
+                                            </p:txEl>
+                                          </p:spTgt>
+                                        </p:tgtEl>
+                                        <p:attrNameLst>
+                                          <p:attrName>style.visibility</p:attrName>
+                                        </p:attrNameLst>
+                                      </p:cBhvr>
+                                      <p:to>
+                                        <p:strVal val="visible"/>
+                                      </p:to>
+                                    </p:set>
+                                    <p:animEffect transition="in" filter="fade">
+                                      <p:cBhvr>
+                                        <p:cTn id="32" dur="500"/>
+                                        <p:tgtEl>
+                                          <p:spTgt spid="3">
+                                            <p:txEl>
+                                              <p:pRg st="5" end="5"/>
+                                            </p:txEl>
+                                          </p:spTgt>
+                                        </p:tgtEl>
+                                      </p:cBhvr>
+                                    </p:animEffect>
+                                  </p:childTnLst>
+                                </p:cTn>
+                              </p:par>
+                            </p:childTnLst>
+                          </p:cTn>
+                        </p:par>
+                      </p:childTnLst>
+                    </p:cTn>
+                  </p:par>
+                  <p:par>
+                    <p:cTn id="33" fill="hold">
+                      <p:stCondLst>
+                        <p:cond delay="indefinite"/>
+                      </p:stCondLst>
+                      <p:childTnLst>
+                        <p:par>
+                          <p:cTn id="34" fill="hold">
+                            <p:stCondLst>
+                              <p:cond delay="0"/>
+                            </p:stCondLst>
+                            <p:childTnLst>
+                              <p:par>
+                                <p:cTn id="35" presetID="10" presetClass="entr" presetSubtype="0" fill="hold" nodeType="clickEffect">
+                                  <p:stCondLst>
+                                    <p:cond delay="0"/>
+                                  </p:stCondLst>
+                                  <p:childTnLst>
+                                    <p:set>
+                                      <p:cBhvr>
+                                        <p:cTn id="36" dur="1" fill="hold">
+                                          <p:stCondLst>
+                                            <p:cond delay="0"/>
+                                          </p:stCondLst>
+                                        </p:cTn>
+                                        <p:tgtEl>
+                                          <p:spTgt spid="3">
+                                            <p:txEl>
+                                              <p:pRg st="6" end="6"/>
+                                            </p:txEl>
+                                          </p:spTgt>
+                                        </p:tgtEl>
+                                        <p:attrNameLst>
+                                          <p:attrName>style.visibility</p:attrName>
+                                        </p:attrNameLst>
+                                      </p:cBhvr>
+                                      <p:to>
+                                        <p:strVal val="visible"/>
+                                      </p:to>
+                                    </p:set>
+                                    <p:animEffect transition="in" filter="fade">
+                                      <p:cBhvr>
+                                        <p:cTn id="37" dur="500"/>
+                                        <p:tgtEl>
+                                          <p:spTgt spid="3">
+                                            <p:txEl>
+                                              <p:pRg st="6" end="6"/>
+                                            </p:txEl>
+                                          </p:spTgt>
+                                        </p:tgtEl>
+                                      </p:cBhvr>
+                                    </p:animEffect>
+                                  </p:childTnLst>
+                                </p:cTn>
+                              </p:par>
+                            </p:childTnLst>
+                          </p:cTn>
+                        </p:par>
+                      </p:childTnLst>
+                    </p:cTn>
+                  </p:par>
+                  <p:par>
+                    <p:cTn id="38" fill="hold">
+                      <p:stCondLst>
+                        <p:cond delay="indefinite"/>
+                      </p:stCondLst>
+                      <p:childTnLst>
+                        <p:par>
+                          <p:cTn id="39" fill="hold">
+                            <p:stCondLst>
+                              <p:cond delay="0"/>
+                            </p:stCondLst>
+                            <p:childTnLst>
+                              <p:par>
+                                <p:cTn id="40" presetID="10" presetClass="entr" presetSubtype="0" fill="hold" nodeType="clickEffect">
+                                  <p:stCondLst>
+                                    <p:cond delay="0"/>
+                                  </p:stCondLst>
+                                  <p:childTnLst>
+                                    <p:set>
+                                      <p:cBhvr>
+                                        <p:cTn id="41" dur="1" fill="hold">
+                                          <p:stCondLst>
+                                            <p:cond delay="0"/>
+                                          </p:stCondLst>
+                                        </p:cTn>
+                                        <p:tgtEl>
+                                          <p:spTgt spid="3">
+                                            <p:txEl>
+                                              <p:pRg st="7" end="7"/>
+                                            </p:txEl>
+                                          </p:spTgt>
+                                        </p:tgtEl>
+                                        <p:attrNameLst>
+                                          <p:attrName>style.visibility</p:attrName>
+                                        </p:attrNameLst>
+                                      </p:cBhvr>
+                                      <p:to>
+                                        <p:strVal val="visible"/>
+                                      </p:to>
+                                    </p:set>
+                                    <p:animEffect transition="in" filter="fade">
+                                      <p:cBhvr>
+                                        <p:cTn id="42" dur="500"/>
+                                        <p:tgtEl>
+                                          <p:spTgt spid="3">
+                                            <p:txEl>
+                                              <p:pRg st="7" end="7"/>
+                                            </p:txEl>
+                                          </p:spTgt>
+                                        </p:tgtEl>
+                                      </p:cBhvr>
+                                    </p:animEffect>
+                                  </p:childTnLst>
+                                </p:cTn>
+                              </p:par>
+                            </p:childTnLst>
+                          </p:cTn>
+                        </p:par>
+                      </p:childTnLst>
+                    </p:cTn>
+                  </p:par>
+                </p:childTnLst>
+              </p:cTn>
+              <p:prevCondLst>
+                <p:cond evt="onPrev" delay="0">
+                  <p:tgtEl>
+                    <p:sldTgt/>
+                  </p:tgtEl>
+                </p:cond>
+              </p:prevCondLst>
+              <p:nextCondLst>
+                <p:cond evt="onNext" delay="0">
+                  <p:tgtEl>
+                    <p:sldTgt/>
+                  </p:tgtEl>
+                </p:cond>
+              </p:nextCondLst>
+            </p:seq>
+          </p:childTnLst>
+        </p:cTn>
+      </p:par>
+    </p:tnLst>
+  </p:timing>
+</p:sld>
+</file>
+
+<file path=ppt/slides/slide11.xml><?xml version="1.0" encoding="utf-8"?>
+<p:sld xmlns:a="http://schemas.openxmlformats.org/drawingml/2006/main" xmlns:r="http://schemas.openxmlformats.org/officeDocument/2006/relationships" xmlns:p="http://schemas.openxmlformats.org/presentationml/2006/main">
+  <p:cSld>
+    <p:bg>
+      <p:bgPr>
+        <a:solidFill>
+          <a:srgbClr val="F5F5F5"/>
+        </a:solidFill>
+        <a:effectLst/>
+      </p:bgPr>
+    </p:bg>
+    <p:spTree>
+      <p:nvGrpSpPr>
+        <p:cNvPr id="1" name="">
+          <a:extLst>
+            <a:ext uri="{FF2B5EF4-FFF2-40B4-BE49-F238E27FC236}">
+              <a16:creationId xmlns:a16="http://schemas.microsoft.com/office/drawing/2014/main" id="{C01E4878-BF94-39E3-90FB-BBA565A551D7}"/>
+            </a:ext>
+          </a:extLst>
+        </p:cNvPr>
+        <p:cNvGrpSpPr/>
+        <p:nvPr/>
+      </p:nvGrpSpPr>
+      <p:grpSpPr>
+        <a:xfrm>
+          <a:off x="0" y="0"/>
+          <a:ext cx="0" cy="0"/>
+          <a:chOff x="0" y="0"/>
+          <a:chExt cx="0" cy="0"/>
+        </a:xfrm>
+      </p:grpSpPr>
+      <p:sp>
+        <p:nvSpPr>
+          <p:cNvPr id="2" name="Title 1">
+            <a:extLst>
+              <a:ext uri="{FF2B5EF4-FFF2-40B4-BE49-F238E27FC236}">
+                <a16:creationId xmlns:a16="http://schemas.microsoft.com/office/drawing/2014/main" id="{FCEA15DC-E97C-0874-E85A-F52A461FDB6B}"/>
+              </a:ext>
+            </a:extLst>
+          </p:cNvPr>
+          <p:cNvSpPr>
+            <a:spLocks noGrp="1"/>
+          </p:cNvSpPr>
+          <p:nvPr>
+            <p:ph type="title"/>
+          </p:nvPr>
+        </p:nvSpPr>
+        <p:spPr/>
+        <p:txBody>
+          <a:bodyPr/>
+          <a:lstStyle/>
+          <a:p>
+            <a:r>
+              <a:rPr lang="en-US" dirty="0" err="1">
+                <a:latin typeface="Arial Rounded MT Bold" panose="020F0704030504030204" pitchFamily="34" charset="0"/>
+              </a:rPr>
+              <a:t>Affichage</a:t>
+            </a:r>
+            <a:r>
+              <a:rPr lang="en-US" dirty="0">
+                <a:latin typeface="Arial Rounded MT Bold" panose="020F0704030504030204" pitchFamily="34" charset="0"/>
+              </a:rPr>
+              <a:t> simple (</a:t>
+            </a:r>
+            <a:r>
+              <a:rPr lang="en-US" dirty="0">
+                <a:latin typeface="Consolas" panose="020B0609020204030204" pitchFamily="49" charset="0"/>
+              </a:rPr>
+              <a:t>print</a:t>
+            </a:r>
+            <a:r>
+              <a:rPr lang="en-US" dirty="0">
+                <a:latin typeface="Arial Rounded MT Bold" panose="020F0704030504030204" pitchFamily="34" charset="0"/>
+              </a:rPr>
+              <a:t>)</a:t>
+            </a:r>
+            <a:endParaRPr lang="fr-CA" dirty="0">
+              <a:latin typeface="Arial Rounded MT Bold" panose="020F0704030504030204" pitchFamily="34" charset="0"/>
+            </a:endParaRPr>
+          </a:p>
+        </p:txBody>
+      </p:sp>
+      <p:sp>
+        <p:nvSpPr>
+          <p:cNvPr id="3" name="Content Placeholder 2">
+            <a:extLst>
+              <a:ext uri="{FF2B5EF4-FFF2-40B4-BE49-F238E27FC236}">
+                <a16:creationId xmlns:a16="http://schemas.microsoft.com/office/drawing/2014/main" id="{6CD2EEBF-4B33-1557-80E4-42DCF94B468F}"/>
+              </a:ext>
+            </a:extLst>
+          </p:cNvPr>
+          <p:cNvSpPr>
+            <a:spLocks noGrp="1"/>
+          </p:cNvSpPr>
+          <p:nvPr>
+            <p:ph idx="1"/>
+          </p:nvPr>
+        </p:nvSpPr>
+        <p:spPr/>
+        <p:txBody>
+          <a:bodyPr>
+            <a:normAutofit/>
+          </a:bodyPr>
+          <a:lstStyle/>
+          <a:p>
+            <a:pPr marL="0" indent="0">
+              <a:buNone/>
+            </a:pPr>
+            <a:endParaRPr lang="en-US" b="1" dirty="0">
+              <a:latin typeface="Consolas" panose="020B0609020204030204" pitchFamily="49" charset="0"/>
+            </a:endParaRPr>
+          </a:p>
+          <a:p>
+            <a:pPr marL="0" indent="0">
+              <a:buNone/>
+            </a:pPr>
+            <a:endParaRPr lang="en-US" b="1" dirty="0">
+              <a:latin typeface="Consolas" panose="020B0609020204030204" pitchFamily="49" charset="0"/>
+            </a:endParaRPr>
+          </a:p>
+          <a:p>
+            <a:pPr marL="0" indent="0">
+              <a:buNone/>
+            </a:pPr>
+            <a:r>
+              <a:rPr lang="en-CA" sz="2600" b="1" dirty="0">
+                <a:latin typeface="Consolas" panose="020B0609020204030204" pitchFamily="49" charset="0"/>
+              </a:rPr>
+              <a:t>&gt;&gt;&gt; x = 0</a:t>
+            </a:r>
+          </a:p>
+          <a:p>
+            <a:pPr marL="0" indent="0">
+              <a:buNone/>
+            </a:pPr>
+            <a:r>
+              <a:rPr lang="en-CA" sz="2600" b="1" dirty="0">
+                <a:latin typeface="Consolas" panose="020B0609020204030204" pitchFamily="49" charset="0"/>
+              </a:rPr>
+              <a:t>&gt;&gt;&gt; y = 1</a:t>
+            </a:r>
+          </a:p>
+          <a:p>
+            <a:pPr marL="0" indent="0">
+              <a:buNone/>
+            </a:pPr>
+            <a:r>
+              <a:rPr lang="en-CA" sz="2600" b="1" dirty="0">
+                <a:latin typeface="Consolas" panose="020B0609020204030204" pitchFamily="49" charset="0"/>
+              </a:rPr>
+              <a:t>&gt;&gt;&gt; print(x, y)</a:t>
+            </a:r>
+          </a:p>
+          <a:p>
+            <a:pPr marL="0" indent="0" algn="just">
+              <a:buNone/>
+            </a:pPr>
+            <a:r>
+              <a:rPr lang="en-CA" sz="2600" dirty="0">
+                <a:solidFill>
+                  <a:schemeClr val="bg1">
+                    <a:lumMod val="50000"/>
+                  </a:schemeClr>
+                </a:solidFill>
+                <a:latin typeface="Consolas" panose="020B0609020204030204" pitchFamily="49" charset="0"/>
+              </a:rPr>
+              <a:t>0 1</a:t>
+            </a:r>
+          </a:p>
+          <a:p>
+            <a:pPr marL="0" indent="0">
+              <a:buNone/>
+            </a:pPr>
+            <a:r>
+              <a:rPr lang="en-CA" sz="2600" b="1" dirty="0">
+                <a:latin typeface="Consolas" panose="020B0609020204030204" pitchFamily="49" charset="0"/>
+              </a:rPr>
+              <a:t>&gt;&gt;&gt; print(x, y, </a:t>
+            </a:r>
+            <a:r>
+              <a:rPr lang="en-CA" sz="2600" b="1" dirty="0" err="1">
+                <a:latin typeface="Consolas" panose="020B0609020204030204" pitchFamily="49" charset="0"/>
+              </a:rPr>
+              <a:t>sep</a:t>
+            </a:r>
+            <a:r>
+              <a:rPr lang="en-CA" sz="2600" b="1" dirty="0">
+                <a:latin typeface="Consolas" panose="020B0609020204030204" pitchFamily="49" charset="0"/>
+              </a:rPr>
+              <a:t>='</a:t>
+            </a:r>
+            <a:r>
+              <a:rPr lang="fr-CA" sz="2600" b="1" dirty="0">
+                <a:latin typeface="Consolas" panose="020B0609020204030204" pitchFamily="49" charset="0"/>
+              </a:rPr>
+              <a:t>,')</a:t>
+            </a:r>
+          </a:p>
+          <a:p>
+            <a:pPr marL="0" indent="0" algn="just">
+              <a:buNone/>
+            </a:pPr>
+            <a:r>
+              <a:rPr lang="fr-CA" sz="2600" dirty="0">
+                <a:solidFill>
+                  <a:schemeClr val="bg1">
+                    <a:lumMod val="50000"/>
+                  </a:schemeClr>
+                </a:solidFill>
+                <a:latin typeface="Consolas" panose="020B0609020204030204" pitchFamily="49" charset="0"/>
+              </a:rPr>
+              <a:t>0,1</a:t>
+            </a:r>
+            <a:endParaRPr lang="en-CA" sz="2600" dirty="0">
+              <a:solidFill>
+                <a:schemeClr val="bg1">
+                  <a:lumMod val="50000"/>
+                </a:schemeClr>
+              </a:solidFill>
+              <a:latin typeface="Consolas" panose="020B0609020204030204" pitchFamily="49" charset="0"/>
+            </a:endParaRPr>
+          </a:p>
+        </p:txBody>
+      </p:sp>
+      <p:sp>
+        <p:nvSpPr>
+          <p:cNvPr id="5" name="TextBox 4">
+            <a:extLst>
+              <a:ext uri="{FF2B5EF4-FFF2-40B4-BE49-F238E27FC236}">
+                <a16:creationId xmlns:a16="http://schemas.microsoft.com/office/drawing/2014/main" id="{E3C1657E-FC6D-7B8B-D26B-AA5F96BD622F}"/>
+              </a:ext>
+            </a:extLst>
+          </p:cNvPr>
+          <p:cNvSpPr txBox="1"/>
+          <p:nvPr/>
+        </p:nvSpPr>
+        <p:spPr>
+          <a:xfrm>
+            <a:off x="838199" y="6176963"/>
+            <a:ext cx="10515599" cy="369332"/>
+          </a:xfrm>
+          <a:prstGeom prst="rect">
+            <a:avLst/>
+          </a:prstGeom>
+          <a:noFill/>
+        </p:spPr>
+        <p:txBody>
+          <a:bodyPr wrap="square">
+            <a:spAutoFit/>
+          </a:bodyPr>
+          <a:lstStyle/>
+          <a:p>
+            <a:pPr marL="0" indent="0" algn="ctr">
+              <a:buNone/>
+            </a:pPr>
+            <a:r>
+              <a:rPr lang="fr-CA" sz="1800" b="1" dirty="0">
+                <a:latin typeface="Consolas" panose="020B0609020204030204" pitchFamily="49" charset="0"/>
+              </a:rPr>
+              <a:t>SOURCE: </a:t>
+            </a:r>
+            <a:r>
+              <a:rPr lang="fr-CA" sz="1800" b="1" dirty="0">
+                <a:latin typeface="Consolas" panose="020B0609020204030204" pitchFamily="49" charset="0"/>
+                <a:hlinkClick r:id="rId2"/>
+              </a:rPr>
+              <a:t>https://docs.python.org/3/library/functions.html#print</a:t>
+            </a:r>
+            <a:endParaRPr lang="fr-CA" sz="1800" b="1" dirty="0">
+              <a:latin typeface="Consolas" panose="020B0609020204030204" pitchFamily="49" charset="0"/>
+            </a:endParaRPr>
+          </a:p>
+        </p:txBody>
+      </p:sp>
+      <p:sp>
+        <p:nvSpPr>
+          <p:cNvPr id="10" name="TextBox 9">
+            <a:extLst>
+              <a:ext uri="{FF2B5EF4-FFF2-40B4-BE49-F238E27FC236}">
+                <a16:creationId xmlns:a16="http://schemas.microsoft.com/office/drawing/2014/main" id="{08A5E896-FFF2-6AB8-D61E-F137C1EE3810}"/>
+              </a:ext>
+            </a:extLst>
+          </p:cNvPr>
+          <p:cNvSpPr txBox="1"/>
+          <p:nvPr/>
+        </p:nvSpPr>
+        <p:spPr>
+          <a:xfrm>
+            <a:off x="2230873" y="1728788"/>
+            <a:ext cx="7730249" cy="578837"/>
+          </a:xfrm>
+          <a:prstGeom prst="roundRect">
+            <a:avLst/>
+          </a:prstGeom>
+          <a:solidFill>
+            <a:srgbClr val="FFF2CC">
+              <a:alpha val="49803"/>
+            </a:srgbClr>
+          </a:solidFill>
+          <a:ln w="9525" cap="flat" cmpd="sng">
+            <a:solidFill>
+              <a:schemeClr val="dk1"/>
+            </a:solidFill>
+            <a:prstDash val="solid"/>
+            <a:round/>
+            <a:headEnd type="none" w="sm" len="sm"/>
+            <a:tailEnd type="none" w="sm" len="sm"/>
+          </a:ln>
+        </p:spPr>
+        <p:txBody>
+          <a:bodyPr spcFirstLastPara="1" wrap="square" lIns="91425" tIns="45700" rIns="91425" bIns="45700" anchor="t" anchorCtr="0">
+            <a:spAutoFit/>
+          </a:bodyPr>
+          <a:lstStyle>
+            <a:defPPr>
+              <a:defRPr lang="en-US"/>
+            </a:defPPr>
+            <a:lvl1pPr marR="0" lvl="0" indent="0" algn="ctr">
+              <a:lnSpc>
+                <a:spcPct val="100000"/>
+              </a:lnSpc>
+              <a:spcBef>
+                <a:spcPts val="0"/>
+              </a:spcBef>
+              <a:spcAft>
+                <a:spcPts val="0"/>
+              </a:spcAft>
+              <a:buClr>
+                <a:srgbClr val="000000"/>
+              </a:buClr>
+              <a:buSzPts val="1400"/>
+              <a:buFont typeface="Consolas"/>
+              <a:buNone/>
+              <a:defRPr sz="2800" b="1" i="0" u="none" strike="noStrike" cap="none">
+                <a:solidFill>
+                  <a:srgbClr val="000000"/>
+                </a:solidFill>
+                <a:latin typeface="Consolas"/>
+                <a:ea typeface="Consolas"/>
+                <a:cs typeface="Consolas"/>
+              </a:defRPr>
+            </a:lvl1pPr>
+          </a:lstStyle>
+          <a:p>
+            <a:r>
+              <a:rPr lang="en-US" dirty="0"/>
+              <a:t>print(*objects, </a:t>
+            </a:r>
+            <a:r>
+              <a:rPr lang="en-US" dirty="0" err="1"/>
+              <a:t>sep</a:t>
+            </a:r>
+            <a:r>
+              <a:rPr lang="en-US" dirty="0"/>
+              <a:t>=' ', end='\n')</a:t>
+            </a:r>
+          </a:p>
+        </p:txBody>
+      </p:sp>
+      <p:sp>
+        <p:nvSpPr>
+          <p:cNvPr id="11" name="Slide Number Placeholder 10">
+            <a:extLst>
+              <a:ext uri="{FF2B5EF4-FFF2-40B4-BE49-F238E27FC236}">
+                <a16:creationId xmlns:a16="http://schemas.microsoft.com/office/drawing/2014/main" id="{F9741A87-5FEE-359B-F056-0D27CE849F3D}"/>
+              </a:ext>
+            </a:extLst>
+          </p:cNvPr>
+          <p:cNvSpPr>
+            <a:spLocks noGrp="1"/>
+          </p:cNvSpPr>
+          <p:nvPr>
+            <p:ph type="sldNum" sz="quarter" idx="12"/>
+          </p:nvPr>
+        </p:nvSpPr>
+        <p:spPr/>
+        <p:txBody>
+          <a:bodyPr/>
+          <a:lstStyle/>
+          <a:p>
+            <a:fld id="{846B06B1-1179-491F-A487-8E0C403F7C13}" type="slidenum">
+              <a:rPr lang="fr-CA" smtClean="0"/>
+              <a:t>11</a:t>
+            </a:fld>
+            <a:endParaRPr lang="fr-CA"/>
+          </a:p>
+        </p:txBody>
+      </p:sp>
+    </p:spTree>
+    <p:extLst>
+      <p:ext uri="{BB962C8B-B14F-4D97-AF65-F5344CB8AC3E}">
+        <p14:creationId xmlns:p14="http://schemas.microsoft.com/office/powerpoint/2010/main" val="210974741"/>
+      </p:ext>
+    </p:extLst>
+  </p:cSld>
+  <p:clrMapOvr>
+    <a:masterClrMapping/>
+  </p:clrMapOvr>
+  <p:timing>
+    <p:tnLst>
+      <p:par>
+        <p:cTn id="1" dur="indefinite" restart="never" nodeType="tmRoot">
+          <p:childTnLst>
+            <p:seq concurrent="1" nextAc="seek">
+              <p:cTn id="2" dur="indefinite" nodeType="mainSeq">
+                <p:childTnLst>
+                  <p:par>
+                    <p:cTn id="3" fill="hold">
+                      <p:stCondLst>
+                        <p:cond delay="indefinite"/>
+                      </p:stCondLst>
+                      <p:childTnLst>
+                        <p:par>
+                          <p:cTn id="4" fill="hold">
+                            <p:stCondLst>
+                              <p:cond delay="0"/>
+                            </p:stCondLst>
+                            <p:childTnLst>
+                              <p:par>
+                                <p:cTn id="5" presetID="10" presetClass="entr" presetSubtype="0" fill="hold" nodeType="clickEffect">
+                                  <p:stCondLst>
+                                    <p:cond delay="0"/>
+                                  </p:stCondLst>
+                                  <p:childTnLst>
+                                    <p:set>
+                                      <p:cBhvr>
+                                        <p:cTn id="6" dur="1" fill="hold">
+                                          <p:stCondLst>
+                                            <p:cond delay="0"/>
+                                          </p:stCondLst>
+                                        </p:cTn>
+                                        <p:tgtEl>
+                                          <p:spTgt spid="3">
+                                            <p:txEl>
+                                              <p:pRg st="2" end="2"/>
+                                            </p:txEl>
+                                          </p:spTgt>
+                                        </p:tgtEl>
+                                        <p:attrNameLst>
+                                          <p:attrName>style.visibility</p:attrName>
+                                        </p:attrNameLst>
+                                      </p:cBhvr>
+                                      <p:to>
+                                        <p:strVal val="visible"/>
+                                      </p:to>
+                                    </p:set>
+                                    <p:animEffect transition="in" filter="fade">
+                                      <p:cBhvr>
+                                        <p:cTn id="7" dur="500"/>
+                                        <p:tgtEl>
+                                          <p:spTgt spid="3">
+                                            <p:txEl>
+                                              <p:pRg st="2" end="2"/>
+                                            </p:txEl>
+                                          </p:spTgt>
+                                        </p:tgtEl>
+                                      </p:cBhvr>
+                                    </p:animEffect>
+                                  </p:childTnLst>
+                                </p:cTn>
+                              </p:par>
+                              <p:par>
+                                <p:cTn id="8" presetID="10" presetClass="entr" presetSubtype="0" fill="hold" nodeType="withEffect">
+                                  <p:stCondLst>
+                                    <p:cond delay="0"/>
+                                  </p:stCondLst>
+                                  <p:childTnLst>
+                                    <p:set>
+                                      <p:cBhvr>
+                                        <p:cTn id="9" dur="1" fill="hold">
+                                          <p:stCondLst>
+                                            <p:cond delay="0"/>
+                                          </p:stCondLst>
+                                        </p:cTn>
+                                        <p:tgtEl>
+                                          <p:spTgt spid="3">
+                                            <p:txEl>
+                                              <p:pRg st="3" end="3"/>
+                                            </p:txEl>
+                                          </p:spTgt>
+                                        </p:tgtEl>
+                                        <p:attrNameLst>
+                                          <p:attrName>style.visibility</p:attrName>
+                                        </p:attrNameLst>
+                                      </p:cBhvr>
+                                      <p:to>
+                                        <p:strVal val="visible"/>
+                                      </p:to>
+                                    </p:set>
+                                    <p:animEffect transition="in" filter="fade">
+                                      <p:cBhvr>
+                                        <p:cTn id="10" dur="500"/>
+                                        <p:tgtEl>
+                                          <p:spTgt spid="3">
+                                            <p:txEl>
+                                              <p:pRg st="3" end="3"/>
+                                            </p:txEl>
+                                          </p:spTgt>
+                                        </p:tgtEl>
+                                      </p:cBhvr>
+                                    </p:animEffect>
+                                  </p:childTnLst>
+                                </p:cTn>
+                              </p:par>
+                              <p:par>
+                                <p:cTn id="11" presetID="10" presetClass="entr" presetSubtype="0" fill="hold" nodeType="withEffect">
+                                  <p:stCondLst>
+                                    <p:cond delay="0"/>
+                                  </p:stCondLst>
+                                  <p:childTnLst>
+                                    <p:set>
+                                      <p:cBhvr>
+                                        <p:cTn id="12" dur="1" fill="hold">
+                                          <p:stCondLst>
+                                            <p:cond delay="0"/>
+                                          </p:stCondLst>
+                                        </p:cTn>
+                                        <p:tgtEl>
+                                          <p:spTgt spid="3">
+                                            <p:txEl>
+                                              <p:pRg st="4" end="4"/>
+                                            </p:txEl>
+                                          </p:spTgt>
+                                        </p:tgtEl>
+                                        <p:attrNameLst>
+                                          <p:attrName>style.visibility</p:attrName>
+                                        </p:attrNameLst>
+                                      </p:cBhvr>
+                                      <p:to>
+                                        <p:strVal val="visible"/>
+                                      </p:to>
+                                    </p:set>
+                                    <p:animEffect transition="in" filter="fade">
+                                      <p:cBhvr>
+                                        <p:cTn id="13" dur="500"/>
+                                        <p:tgtEl>
+                                          <p:spTgt spid="3">
+                                            <p:txEl>
+                                              <p:pRg st="4" end="4"/>
+                                            </p:txEl>
+                                          </p:spTgt>
+                                        </p:tgtEl>
+                                      </p:cBhvr>
+                                    </p:animEffect>
+                                  </p:childTnLst>
+                                </p:cTn>
+                              </p:par>
+                            </p:childTnLst>
+                          </p:cTn>
+                        </p:par>
+                      </p:childTnLst>
+                    </p:cTn>
+                  </p:par>
+                  <p:par>
+                    <p:cTn id="14" fill="hold">
+                      <p:stCondLst>
+                        <p:cond delay="indefinite"/>
+                      </p:stCondLst>
+                      <p:childTnLst>
+                        <p:par>
+                          <p:cTn id="15" fill="hold">
+                            <p:stCondLst>
+                              <p:cond delay="0"/>
+                            </p:stCondLst>
+                            <p:childTnLst>
+                              <p:par>
+                                <p:cTn id="16" presetID="10" presetClass="entr" presetSubtype="0" fill="hold" nodeType="clickEffect">
+                                  <p:stCondLst>
+                                    <p:cond delay="0"/>
+                                  </p:stCondLst>
+                                  <p:childTnLst>
+                                    <p:set>
+                                      <p:cBhvr>
+                                        <p:cTn id="17" dur="1" fill="hold">
+                                          <p:stCondLst>
+                                            <p:cond delay="0"/>
+                                          </p:stCondLst>
+                                        </p:cTn>
+                                        <p:tgtEl>
+                                          <p:spTgt spid="3">
+                                            <p:txEl>
+                                              <p:pRg st="5" end="5"/>
+                                            </p:txEl>
+                                          </p:spTgt>
+                                        </p:tgtEl>
+                                        <p:attrNameLst>
+                                          <p:attrName>style.visibility</p:attrName>
+                                        </p:attrNameLst>
+                                      </p:cBhvr>
+                                      <p:to>
+                                        <p:strVal val="visible"/>
+                                      </p:to>
+                                    </p:set>
+                                    <p:animEffect transition="in" filter="fade">
+                                      <p:cBhvr>
+                                        <p:cTn id="18" dur="500"/>
+                                        <p:tgtEl>
+                                          <p:spTgt spid="3">
+                                            <p:txEl>
+                                              <p:pRg st="5" end="5"/>
+                                            </p:txEl>
+                                          </p:spTgt>
+                                        </p:tgtEl>
+                                      </p:cBhvr>
+                                    </p:animEffect>
+                                  </p:childTnLst>
+                                </p:cTn>
+                              </p:par>
+                            </p:childTnLst>
+                          </p:cTn>
+                        </p:par>
+                      </p:childTnLst>
+                    </p:cTn>
+                  </p:par>
+                  <p:par>
+                    <p:cTn id="19" fill="hold">
+                      <p:stCondLst>
+                        <p:cond delay="indefinite"/>
+                      </p:stCondLst>
+                      <p:childTnLst>
+                        <p:par>
+                          <p:cTn id="20" fill="hold">
+                            <p:stCondLst>
+                              <p:cond delay="0"/>
+                            </p:stCondLst>
+                            <p:childTnLst>
+                              <p:par>
+                                <p:cTn id="21" presetID="10" presetClass="entr" presetSubtype="0" fill="hold" nodeType="clickEffect">
+                                  <p:stCondLst>
+                                    <p:cond delay="0"/>
+                                  </p:stCondLst>
+                                  <p:childTnLst>
+                                    <p:set>
+                                      <p:cBhvr>
+                                        <p:cTn id="22" dur="1" fill="hold">
+                                          <p:stCondLst>
+                                            <p:cond delay="0"/>
+                                          </p:stCondLst>
+                                        </p:cTn>
+                                        <p:tgtEl>
+                                          <p:spTgt spid="3">
+                                            <p:txEl>
+                                              <p:pRg st="6" end="6"/>
+                                            </p:txEl>
+                                          </p:spTgt>
+                                        </p:tgtEl>
+                                        <p:attrNameLst>
+                                          <p:attrName>style.visibility</p:attrName>
+                                        </p:attrNameLst>
+                                      </p:cBhvr>
+                                      <p:to>
+                                        <p:strVal val="visible"/>
+                                      </p:to>
+                                    </p:set>
+                                    <p:animEffect transition="in" filter="fade">
+                                      <p:cBhvr>
+                                        <p:cTn id="23" dur="500"/>
+                                        <p:tgtEl>
+                                          <p:spTgt spid="3">
+                                            <p:txEl>
+                                              <p:pRg st="6" end="6"/>
+                                            </p:txEl>
+                                          </p:spTgt>
+                                        </p:tgtEl>
+                                      </p:cBhvr>
+                                    </p:animEffect>
+                                  </p:childTnLst>
+                                </p:cTn>
+                              </p:par>
+                            </p:childTnLst>
+                          </p:cTn>
+                        </p:par>
+                      </p:childTnLst>
+                    </p:cTn>
+                  </p:par>
+                  <p:par>
+                    <p:cTn id="24" fill="hold">
+                      <p:stCondLst>
+                        <p:cond delay="indefinite"/>
+                      </p:stCondLst>
+                      <p:childTnLst>
+                        <p:par>
+                          <p:cTn id="25" fill="hold">
+                            <p:stCondLst>
+                              <p:cond delay="0"/>
+                            </p:stCondLst>
+                            <p:childTnLst>
+                              <p:par>
+                                <p:cTn id="26" presetID="10" presetClass="entr" presetSubtype="0" fill="hold" nodeType="clickEffect">
+                                  <p:stCondLst>
+                                    <p:cond delay="0"/>
+                                  </p:stCondLst>
+                                  <p:childTnLst>
+                                    <p:set>
+                                      <p:cBhvr>
+                                        <p:cTn id="27" dur="1" fill="hold">
+                                          <p:stCondLst>
+                                            <p:cond delay="0"/>
+                                          </p:stCondLst>
+                                        </p:cTn>
+                                        <p:tgtEl>
+                                          <p:spTgt spid="3">
+                                            <p:txEl>
+                                              <p:pRg st="7" end="7"/>
+                                            </p:txEl>
+                                          </p:spTgt>
+                                        </p:tgtEl>
+                                        <p:attrNameLst>
+                                          <p:attrName>style.visibility</p:attrName>
+                                        </p:attrNameLst>
+                                      </p:cBhvr>
+                                      <p:to>
+                                        <p:strVal val="visible"/>
+                                      </p:to>
+                                    </p:set>
+                                    <p:animEffect transition="in" filter="fade">
+                                      <p:cBhvr>
+                                        <p:cTn id="28" dur="500"/>
+                                        <p:tgtEl>
+                                          <p:spTgt spid="3">
+                                            <p:txEl>
+                                              <p:pRg st="7" end="7"/>
+                                            </p:txEl>
+                                          </p:spTgt>
+                                        </p:tgtEl>
+                                      </p:cBhvr>
+                                    </p:animEffect>
+                                  </p:childTnLst>
+                                </p:cTn>
+                              </p:par>
+                            </p:childTnLst>
+                          </p:cTn>
+                        </p:par>
+                      </p:childTnLst>
+                    </p:cTn>
+                  </p:par>
+                </p:childTnLst>
+              </p:cTn>
+              <p:prevCondLst>
+                <p:cond evt="onPrev" delay="0">
+                  <p:tgtEl>
+                    <p:sldTgt/>
+                  </p:tgtEl>
+                </p:cond>
+              </p:prevCondLst>
+              <p:nextCondLst>
+                <p:cond evt="onNext" delay="0">
+                  <p:tgtEl>
+                    <p:sldTgt/>
+                  </p:tgtEl>
+                </p:cond>
+              </p:nextCondLst>
+            </p:seq>
+          </p:childTnLst>
+        </p:cTn>
+      </p:par>
+    </p:tnLst>
+  </p:timing>
+</p:sld>
+</file>
+
+<file path=ppt/slides/slide12.xml><?xml version="1.0" encoding="utf-8"?>
+<p:sld xmlns:a="http://schemas.openxmlformats.org/drawingml/2006/main" xmlns:r="http://schemas.openxmlformats.org/officeDocument/2006/relationships" xmlns:p="http://schemas.openxmlformats.org/presentationml/2006/main">
+  <p:cSld>
+    <p:bg>
+      <p:bgPr>
+        <a:solidFill>
+          <a:srgbClr val="F5F5F5"/>
+        </a:solidFill>
+        <a:effectLst/>
+      </p:bgPr>
+    </p:bg>
+    <p:spTree>
+      <p:nvGrpSpPr>
+        <p:cNvPr id="1" name="">
+          <a:extLst>
+            <a:ext uri="{FF2B5EF4-FFF2-40B4-BE49-F238E27FC236}">
               <a16:creationId xmlns:a16="http://schemas.microsoft.com/office/drawing/2014/main" id="{3B7CD11F-32AF-FD94-F5D2-ACEBE12648F5}"/>
             </a:ext>
           </a:extLst>
@@ -4823,7 +6613,7 @@
           <a:p>
             <a:fld id="{846B06B1-1179-491F-A487-8E0C403F7C13}" type="slidenum">
               <a:rPr lang="fr-CA" smtClean="0"/>
-              <a:t>10</a:t>
+              <a:t>12</a:t>
             </a:fld>
             <a:endParaRPr lang="fr-CA"/>
           </a:p>
@@ -5437,7 +7227,7 @@
 </p:sld>
 </file>
 
-<file path=ppt/slides/slide11.xml><?xml version="1.0" encoding="utf-8"?>
+<file path=ppt/slides/slide13.xml><?xml version="1.0" encoding="utf-8"?>
 <p:sld xmlns:a="http://schemas.openxmlformats.org/drawingml/2006/main" xmlns:r="http://schemas.openxmlformats.org/officeDocument/2006/relationships" xmlns:p="http://schemas.openxmlformats.org/presentationml/2006/main">
   <p:cSld>
     <p:bg>
@@ -6172,7 +7962,7 @@
           <a:p>
             <a:fld id="{846B06B1-1179-491F-A487-8E0C403F7C13}" type="slidenum">
               <a:rPr lang="fr-CA" smtClean="0"/>
-              <a:t>11</a:t>
+              <a:t>13</a:t>
             </a:fld>
             <a:endParaRPr lang="fr-CA"/>
           </a:p>
@@ -6191,7 +7981,7 @@
 </p:sld>
 </file>
 
-<file path=ppt/slides/slide12.xml><?xml version="1.0" encoding="utf-8"?>
+<file path=ppt/slides/slide14.xml><?xml version="1.0" encoding="utf-8"?>
 <p:sld xmlns:a="http://schemas.openxmlformats.org/drawingml/2006/main" xmlns:r="http://schemas.openxmlformats.org/officeDocument/2006/relationships" xmlns:p="http://schemas.openxmlformats.org/presentationml/2006/main">
   <p:cSld>
     <p:bg>
@@ -6299,7 +8089,7 @@
           <a:p>
             <a:fld id="{846B06B1-1179-491F-A487-8E0C403F7C13}" type="slidenum">
               <a:rPr lang="fr-CA" smtClean="0"/>
-              <a:t>12</a:t>
+              <a:t>14</a:t>
             </a:fld>
             <a:endParaRPr lang="fr-CA"/>
           </a:p>
@@ -6942,7 +8732,7 @@
 </p:sld>
 </file>
 
-<file path=ppt/slides/slide13.xml><?xml version="1.0" encoding="utf-8"?>
+<file path=ppt/slides/slide15.xml><?xml version="1.0" encoding="utf-8"?>
 <p:sld xmlns:a="http://schemas.openxmlformats.org/drawingml/2006/main" xmlns:r="http://schemas.openxmlformats.org/officeDocument/2006/relationships" xmlns:p="http://schemas.openxmlformats.org/presentationml/2006/main">
   <p:cSld>
     <p:bg>
@@ -7198,7 +8988,7 @@
           <a:p>
             <a:fld id="{846B06B1-1179-491F-A487-8E0C403F7C13}" type="slidenum">
               <a:rPr lang="fr-CA" smtClean="0"/>
-              <a:t>13</a:t>
+              <a:t>15</a:t>
             </a:fld>
             <a:endParaRPr lang="fr-CA"/>
           </a:p>
@@ -8223,7 +10013,7 @@
 </p:sld>
 </file>
 
-<file path=ppt/slides/slide14.xml><?xml version="1.0" encoding="utf-8"?>
+<file path=ppt/slides/slide16.xml><?xml version="1.0" encoding="utf-8"?>
 <p:sld xmlns:a="http://schemas.openxmlformats.org/drawingml/2006/main" xmlns:r="http://schemas.openxmlformats.org/officeDocument/2006/relationships" xmlns:p="http://schemas.openxmlformats.org/presentationml/2006/main">
   <p:cSld>
     <p:bg>
@@ -8490,7 +10280,7 @@
           <a:p>
             <a:fld id="{846B06B1-1179-491F-A487-8E0C403F7C13}" type="slidenum">
               <a:rPr lang="fr-CA" smtClean="0"/>
-              <a:t>14</a:t>
+              <a:t>16</a:t>
             </a:fld>
             <a:endParaRPr lang="fr-CA"/>
           </a:p>
@@ -9014,7 +10804,7 @@
 </p:sld>
 </file>
 
-<file path=ppt/slides/slide15.xml><?xml version="1.0" encoding="utf-8"?>
+<file path=ppt/slides/slide17.xml><?xml version="1.0" encoding="utf-8"?>
 <p:sld xmlns:a="http://schemas.openxmlformats.org/drawingml/2006/main" xmlns:r="http://schemas.openxmlformats.org/officeDocument/2006/relationships" xmlns:p="http://schemas.openxmlformats.org/presentationml/2006/main">
   <p:cSld>
     <p:bg>
@@ -9068,7 +10858,7 @@
           <a:p>
             <a:fld id="{846B06B1-1179-491F-A487-8E0C403F7C13}" type="slidenum">
               <a:rPr lang="fr-CA" smtClean="0"/>
-              <a:t>15</a:t>
+              <a:t>17</a:t>
             </a:fld>
             <a:endParaRPr lang="fr-CA"/>
           </a:p>
@@ -10124,7 +11914,7 @@
 </p:sld>
 </file>
 
-<file path=ppt/slides/slide16.xml><?xml version="1.0" encoding="utf-8"?>
+<file path=ppt/slides/slide18.xml><?xml version="1.0" encoding="utf-8"?>
 <p:sld xmlns:a="http://schemas.openxmlformats.org/drawingml/2006/main" xmlns:r="http://schemas.openxmlformats.org/officeDocument/2006/relationships" xmlns:p="http://schemas.openxmlformats.org/presentationml/2006/main">
   <p:cSld>
     <p:bg>
@@ -10248,7 +12038,7 @@
           <a:p>
             <a:fld id="{846B06B1-1179-491F-A487-8E0C403F7C13}" type="slidenum">
               <a:rPr lang="fr-CA" smtClean="0"/>
-              <a:t>16</a:t>
+              <a:t>18</a:t>
             </a:fld>
             <a:endParaRPr lang="fr-CA"/>
           </a:p>
@@ -11232,7 +13022,7 @@
 </p:sld>
 </file>
 
-<file path=ppt/slides/slide17.xml><?xml version="1.0" encoding="utf-8"?>
+<file path=ppt/slides/slide19.xml><?xml version="1.0" encoding="utf-8"?>
 <p:sld xmlns:a="http://schemas.openxmlformats.org/drawingml/2006/main" xmlns:r="http://schemas.openxmlformats.org/officeDocument/2006/relationships" xmlns:p="http://schemas.openxmlformats.org/presentationml/2006/main">
   <p:cSld>
     <p:bg>
@@ -11333,7 +13123,7 @@
           <a:p>
             <a:fld id="{846B06B1-1179-491F-A487-8E0C403F7C13}" type="slidenum">
               <a:rPr lang="fr-CA" smtClean="0"/>
-              <a:t>17</a:t>
+              <a:t>19</a:t>
             </a:fld>
             <a:endParaRPr lang="fr-CA"/>
           </a:p>
@@ -12306,7 +14096,468 @@
 </p:sld>
 </file>
 
-<file path=ppt/slides/slide18.xml><?xml version="1.0" encoding="utf-8"?>
+<file path=ppt/slides/slide2.xml><?xml version="1.0" encoding="utf-8"?>
+<p:sld xmlns:a="http://schemas.openxmlformats.org/drawingml/2006/main" xmlns:r="http://schemas.openxmlformats.org/officeDocument/2006/relationships" xmlns:p="http://schemas.openxmlformats.org/presentationml/2006/main">
+  <p:cSld>
+    <p:bg>
+      <p:bgPr>
+        <a:solidFill>
+          <a:srgbClr val="F5F5F5"/>
+        </a:solidFill>
+        <a:effectLst/>
+      </p:bgPr>
+    </p:bg>
+    <p:spTree>
+      <p:nvGrpSpPr>
+        <p:cNvPr id="1" name="">
+          <a:extLst>
+            <a:ext uri="{FF2B5EF4-FFF2-40B4-BE49-F238E27FC236}">
+              <a16:creationId xmlns:a16="http://schemas.microsoft.com/office/drawing/2014/main" id="{9787BE08-8E87-BDAC-AA37-B1440F99BBB3}"/>
+            </a:ext>
+          </a:extLst>
+        </p:cNvPr>
+        <p:cNvGrpSpPr/>
+        <p:nvPr/>
+      </p:nvGrpSpPr>
+      <p:grpSpPr>
+        <a:xfrm>
+          <a:off x="0" y="0"/>
+          <a:ext cx="0" cy="0"/>
+          <a:chOff x="0" y="0"/>
+          <a:chExt cx="0" cy="0"/>
+        </a:xfrm>
+      </p:grpSpPr>
+      <p:sp>
+        <p:nvSpPr>
+          <p:cNvPr id="2" name="Title 1">
+            <a:extLst>
+              <a:ext uri="{FF2B5EF4-FFF2-40B4-BE49-F238E27FC236}">
+                <a16:creationId xmlns:a16="http://schemas.microsoft.com/office/drawing/2014/main" id="{2539027E-795E-A7E7-3EF9-F5DE694B487D}"/>
+              </a:ext>
+            </a:extLst>
+          </p:cNvPr>
+          <p:cNvSpPr>
+            <a:spLocks noGrp="1"/>
+          </p:cNvSpPr>
+          <p:nvPr>
+            <p:ph type="title"/>
+          </p:nvPr>
+        </p:nvSpPr>
+        <p:spPr/>
+        <p:txBody>
+          <a:bodyPr/>
+          <a:lstStyle/>
+          <a:p>
+            <a:r>
+              <a:rPr lang="en-US" dirty="0">
+                <a:latin typeface="Arial Rounded MT Bold" panose="020F0704030504030204" pitchFamily="34" charset="0"/>
+              </a:rPr>
+              <a:t>Plan</a:t>
+            </a:r>
+            <a:endParaRPr lang="fr-CA" dirty="0">
+              <a:latin typeface="Arial Rounded MT Bold" panose="020F0704030504030204" pitchFamily="34" charset="0"/>
+            </a:endParaRPr>
+          </a:p>
+        </p:txBody>
+      </p:sp>
+      <p:sp>
+        <p:nvSpPr>
+          <p:cNvPr id="3" name="Content Placeholder 2">
+            <a:extLst>
+              <a:ext uri="{FF2B5EF4-FFF2-40B4-BE49-F238E27FC236}">
+                <a16:creationId xmlns:a16="http://schemas.microsoft.com/office/drawing/2014/main" id="{1A2C692D-48DA-2C5B-C433-961FD8C3D9A4}"/>
+              </a:ext>
+            </a:extLst>
+          </p:cNvPr>
+          <p:cNvSpPr>
+            <a:spLocks noGrp="1"/>
+          </p:cNvSpPr>
+          <p:nvPr>
+            <p:ph idx="1"/>
+          </p:nvPr>
+        </p:nvSpPr>
+        <p:spPr/>
+        <p:txBody>
+          <a:bodyPr>
+            <a:normAutofit/>
+          </a:bodyPr>
+          <a:lstStyle/>
+          <a:p>
+            <a:pPr algn="just"/>
+            <a:r>
+              <a:rPr lang="en-US" sz="2000" dirty="0">
+                <a:latin typeface="Consolas" panose="020B0609020204030204" pitchFamily="49" charset="0"/>
+              </a:rPr>
+              <a:t>Notions </a:t>
+            </a:r>
+            <a:r>
+              <a:rPr lang="en-US" sz="2000" dirty="0" err="1">
+                <a:latin typeface="Consolas" panose="020B0609020204030204" pitchFamily="49" charset="0"/>
+              </a:rPr>
+              <a:t>intermédiaires</a:t>
+            </a:r>
+            <a:endParaRPr lang="en-US" sz="2000" dirty="0">
+              <a:latin typeface="Consolas" panose="020B0609020204030204" pitchFamily="49" charset="0"/>
+            </a:endParaRPr>
+          </a:p>
+          <a:p>
+            <a:pPr algn="just"/>
+            <a:r>
+              <a:rPr lang="fr-CA" sz="2000" dirty="0">
+                <a:latin typeface="Consolas" panose="020B0609020204030204" pitchFamily="49" charset="0"/>
+              </a:rPr>
+              <a:t>É</a:t>
+            </a:r>
+            <a:r>
+              <a:rPr lang="en-US" sz="2000" dirty="0" err="1">
+                <a:latin typeface="Consolas" panose="020B0609020204030204" pitchFamily="49" charset="0"/>
+              </a:rPr>
+              <a:t>crire</a:t>
+            </a:r>
+            <a:r>
+              <a:rPr lang="en-US" sz="2000" dirty="0">
+                <a:latin typeface="Consolas" panose="020B0609020204030204" pitchFamily="49" charset="0"/>
+              </a:rPr>
+              <a:t> du</a:t>
+            </a:r>
+            <a:r>
+              <a:rPr lang="fr-CA" sz="2000" dirty="0">
+                <a:latin typeface="Consolas" panose="020B0609020204030204" pitchFamily="49" charset="0"/>
+              </a:rPr>
+              <a:t> "vrai"</a:t>
+            </a:r>
+            <a:r>
+              <a:rPr lang="en-US" sz="2000" i="1" dirty="0">
+                <a:latin typeface="Consolas" panose="020B0609020204030204" pitchFamily="49" charset="0"/>
+              </a:rPr>
+              <a:t> </a:t>
+            </a:r>
+            <a:r>
+              <a:rPr lang="en-US" sz="2000" dirty="0">
+                <a:latin typeface="Consolas" panose="020B0609020204030204" pitchFamily="49" charset="0"/>
+              </a:rPr>
+              <a:t>code</a:t>
+            </a:r>
+          </a:p>
+          <a:p>
+            <a:pPr algn="just"/>
+            <a:r>
+              <a:rPr lang="fr-CA" sz="2000" dirty="0">
+                <a:latin typeface="Consolas" panose="020B0609020204030204" pitchFamily="49" charset="0"/>
+              </a:rPr>
+              <a:t>S'amuser</a:t>
+            </a:r>
+          </a:p>
+        </p:txBody>
+      </p:sp>
+      <p:sp>
+        <p:nvSpPr>
+          <p:cNvPr id="5" name="Slide Number Placeholder 4">
+            <a:extLst>
+              <a:ext uri="{FF2B5EF4-FFF2-40B4-BE49-F238E27FC236}">
+                <a16:creationId xmlns:a16="http://schemas.microsoft.com/office/drawing/2014/main" id="{30A9ACC9-0207-BF8C-83A4-76A47041FF41}"/>
+              </a:ext>
+            </a:extLst>
+          </p:cNvPr>
+          <p:cNvSpPr>
+            <a:spLocks noGrp="1"/>
+          </p:cNvSpPr>
+          <p:nvPr>
+            <p:ph type="sldNum" sz="quarter" idx="12"/>
+          </p:nvPr>
+        </p:nvSpPr>
+        <p:spPr/>
+        <p:txBody>
+          <a:bodyPr/>
+          <a:lstStyle/>
+          <a:p>
+            <a:fld id="{846B06B1-1179-491F-A487-8E0C403F7C13}" type="slidenum">
+              <a:rPr lang="fr-CA" smtClean="0"/>
+              <a:t>2</a:t>
+            </a:fld>
+            <a:endParaRPr lang="fr-CA" dirty="0"/>
+          </a:p>
+        </p:txBody>
+      </p:sp>
+      <p:pic>
+        <p:nvPicPr>
+          <p:cNvPr id="6" name="Picture 2" descr="Generated QR Image">
+            <a:extLst>
+              <a:ext uri="{FF2B5EF4-FFF2-40B4-BE49-F238E27FC236}">
+                <a16:creationId xmlns:a16="http://schemas.microsoft.com/office/drawing/2014/main" id="{55503CE9-4B4C-6B08-7AE7-D706357A15F7}"/>
+              </a:ext>
+            </a:extLst>
+          </p:cNvPr>
+          <p:cNvPicPr>
+            <a:picLocks noChangeAspect="1" noChangeArrowheads="1"/>
+          </p:cNvPicPr>
+          <p:nvPr/>
+        </p:nvPicPr>
+        <p:blipFill>
+          <a:blip r:embed="rId3">
+            <a:extLst>
+              <a:ext uri="{28A0092B-C50C-407E-A947-70E740481C1C}">
+                <a14:useLocalDpi xmlns:a14="http://schemas.microsoft.com/office/drawing/2010/main" val="0"/>
+              </a:ext>
+            </a:extLst>
+          </a:blip>
+          <a:srcRect/>
+          <a:stretch>
+            <a:fillRect/>
+          </a:stretch>
+        </p:blipFill>
+        <p:spPr bwMode="auto">
+          <a:xfrm>
+            <a:off x="6095999" y="1825625"/>
+            <a:ext cx="4105275" cy="4105275"/>
+          </a:xfrm>
+          <a:prstGeom prst="rect">
+            <a:avLst/>
+          </a:prstGeom>
+          <a:noFill/>
+          <a:extLst>
+            <a:ext uri="{909E8E84-426E-40DD-AFC4-6F175D3DCCD1}">
+              <a14:hiddenFill xmlns:a14="http://schemas.microsoft.com/office/drawing/2010/main">
+                <a:solidFill>
+                  <a:srgbClr val="FFFFFF"/>
+                </a:solidFill>
+              </a14:hiddenFill>
+            </a:ext>
+          </a:extLst>
+        </p:spPr>
+      </p:pic>
+    </p:spTree>
+    <p:extLst>
+      <p:ext uri="{BB962C8B-B14F-4D97-AF65-F5344CB8AC3E}">
+        <p14:creationId xmlns:p14="http://schemas.microsoft.com/office/powerpoint/2010/main" val="1707187834"/>
+      </p:ext>
+    </p:extLst>
+  </p:cSld>
+  <p:clrMapOvr>
+    <a:masterClrMapping/>
+  </p:clrMapOvr>
+  <p:timing>
+    <p:tnLst>
+      <p:par>
+        <p:cTn id="1" dur="indefinite" restart="never" nodeType="tmRoot">
+          <p:childTnLst>
+            <p:seq concurrent="1" nextAc="seek">
+              <p:cTn id="2" dur="indefinite" nodeType="mainSeq">
+                <p:childTnLst>
+                  <p:par>
+                    <p:cTn id="3" fill="hold">
+                      <p:stCondLst>
+                        <p:cond delay="indefinite"/>
+                      </p:stCondLst>
+                      <p:childTnLst>
+                        <p:par>
+                          <p:cTn id="4" fill="hold">
+                            <p:stCondLst>
+                              <p:cond delay="0"/>
+                            </p:stCondLst>
+                            <p:childTnLst>
+                              <p:par>
+                                <p:cTn id="5" presetID="10" presetClass="entr" presetSubtype="0" fill="hold" nodeType="clickEffect">
+                                  <p:stCondLst>
+                                    <p:cond delay="0"/>
+                                  </p:stCondLst>
+                                  <p:childTnLst>
+                                    <p:set>
+                                      <p:cBhvr>
+                                        <p:cTn id="6" dur="1" fill="hold">
+                                          <p:stCondLst>
+                                            <p:cond delay="0"/>
+                                          </p:stCondLst>
+                                        </p:cTn>
+                                        <p:tgtEl>
+                                          <p:spTgt spid="3">
+                                            <p:txEl>
+                                              <p:pRg st="0" end="0"/>
+                                            </p:txEl>
+                                          </p:spTgt>
+                                        </p:tgtEl>
+                                        <p:attrNameLst>
+                                          <p:attrName>style.visibility</p:attrName>
+                                        </p:attrNameLst>
+                                      </p:cBhvr>
+                                      <p:to>
+                                        <p:strVal val="visible"/>
+                                      </p:to>
+                                    </p:set>
+                                    <p:animEffect transition="in" filter="fade">
+                                      <p:cBhvr>
+                                        <p:cTn id="7" dur="500"/>
+                                        <p:tgtEl>
+                                          <p:spTgt spid="3">
+                                            <p:txEl>
+                                              <p:pRg st="0" end="0"/>
+                                            </p:txEl>
+                                          </p:spTgt>
+                                        </p:tgtEl>
+                                      </p:cBhvr>
+                                    </p:animEffect>
+                                  </p:childTnLst>
+                                </p:cTn>
+                              </p:par>
+                            </p:childTnLst>
+                          </p:cTn>
+                        </p:par>
+                      </p:childTnLst>
+                    </p:cTn>
+                  </p:par>
+                  <p:par>
+                    <p:cTn id="8" fill="hold">
+                      <p:stCondLst>
+                        <p:cond delay="indefinite"/>
+                      </p:stCondLst>
+                      <p:childTnLst>
+                        <p:par>
+                          <p:cTn id="9" fill="hold">
+                            <p:stCondLst>
+                              <p:cond delay="0"/>
+                            </p:stCondLst>
+                            <p:childTnLst>
+                              <p:par>
+                                <p:cTn id="10" presetID="10" presetClass="entr" presetSubtype="0" fill="hold" nodeType="clickEffect">
+                                  <p:stCondLst>
+                                    <p:cond delay="0"/>
+                                  </p:stCondLst>
+                                  <p:childTnLst>
+                                    <p:set>
+                                      <p:cBhvr>
+                                        <p:cTn id="11" dur="1" fill="hold">
+                                          <p:stCondLst>
+                                            <p:cond delay="0"/>
+                                          </p:stCondLst>
+                                        </p:cTn>
+                                        <p:tgtEl>
+                                          <p:spTgt spid="3">
+                                            <p:txEl>
+                                              <p:pRg st="1" end="1"/>
+                                            </p:txEl>
+                                          </p:spTgt>
+                                        </p:tgtEl>
+                                        <p:attrNameLst>
+                                          <p:attrName>style.visibility</p:attrName>
+                                        </p:attrNameLst>
+                                      </p:cBhvr>
+                                      <p:to>
+                                        <p:strVal val="visible"/>
+                                      </p:to>
+                                    </p:set>
+                                    <p:animEffect transition="in" filter="fade">
+                                      <p:cBhvr>
+                                        <p:cTn id="12" dur="500"/>
+                                        <p:tgtEl>
+                                          <p:spTgt spid="3">
+                                            <p:txEl>
+                                              <p:pRg st="1" end="1"/>
+                                            </p:txEl>
+                                          </p:spTgt>
+                                        </p:tgtEl>
+                                      </p:cBhvr>
+                                    </p:animEffect>
+                                  </p:childTnLst>
+                                </p:cTn>
+                              </p:par>
+                            </p:childTnLst>
+                          </p:cTn>
+                        </p:par>
+                      </p:childTnLst>
+                    </p:cTn>
+                  </p:par>
+                  <p:par>
+                    <p:cTn id="13" fill="hold">
+                      <p:stCondLst>
+                        <p:cond delay="indefinite"/>
+                      </p:stCondLst>
+                      <p:childTnLst>
+                        <p:par>
+                          <p:cTn id="14" fill="hold">
+                            <p:stCondLst>
+                              <p:cond delay="0"/>
+                            </p:stCondLst>
+                            <p:childTnLst>
+                              <p:par>
+                                <p:cTn id="15" presetID="10" presetClass="entr" presetSubtype="0" fill="hold" nodeType="clickEffect">
+                                  <p:stCondLst>
+                                    <p:cond delay="0"/>
+                                  </p:stCondLst>
+                                  <p:childTnLst>
+                                    <p:set>
+                                      <p:cBhvr>
+                                        <p:cTn id="16" dur="1" fill="hold">
+                                          <p:stCondLst>
+                                            <p:cond delay="0"/>
+                                          </p:stCondLst>
+                                        </p:cTn>
+                                        <p:tgtEl>
+                                          <p:spTgt spid="3">
+                                            <p:txEl>
+                                              <p:pRg st="2" end="2"/>
+                                            </p:txEl>
+                                          </p:spTgt>
+                                        </p:tgtEl>
+                                        <p:attrNameLst>
+                                          <p:attrName>style.visibility</p:attrName>
+                                        </p:attrNameLst>
+                                      </p:cBhvr>
+                                      <p:to>
+                                        <p:strVal val="visible"/>
+                                      </p:to>
+                                    </p:set>
+                                    <p:animEffect transition="in" filter="fade">
+                                      <p:cBhvr>
+                                        <p:cTn id="17" dur="500"/>
+                                        <p:tgtEl>
+                                          <p:spTgt spid="3">
+                                            <p:txEl>
+                                              <p:pRg st="2" end="2"/>
+                                            </p:txEl>
+                                          </p:spTgt>
+                                        </p:tgtEl>
+                                      </p:cBhvr>
+                                    </p:animEffect>
+                                  </p:childTnLst>
+                                </p:cTn>
+                              </p:par>
+                            </p:childTnLst>
+                          </p:cTn>
+                        </p:par>
+                      </p:childTnLst>
+                    </p:cTn>
+                  </p:par>
+                </p:childTnLst>
+              </p:cTn>
+              <p:prevCondLst>
+                <p:cond evt="onPrev" delay="0">
+                  <p:tgtEl>
+                    <p:sldTgt/>
+                  </p:tgtEl>
+                </p:cond>
+              </p:prevCondLst>
+              <p:nextCondLst>
+                <p:cond evt="onNext" delay="0">
+                  <p:tgtEl>
+                    <p:sldTgt/>
+                  </p:tgtEl>
+                </p:cond>
+              </p:nextCondLst>
+            </p:seq>
+          </p:childTnLst>
+        </p:cTn>
+      </p:par>
+    </p:tnLst>
+  </p:timing>
+  <p:extLst>
+    <p:ext uri="{6950BFC3-D8DA-4A85-94F7-54DA5524770B}">
+      <p188:commentRel xmlns:p188="http://schemas.microsoft.com/office/powerpoint/2018/8/main" r:id="rId2"/>
+    </p:ext>
+  </p:extLst>
+</p:sld>
+</file>
+
+<file path=ppt/slides/slide20.xml><?xml version="1.0" encoding="utf-8"?>
 <p:sld xmlns:a="http://schemas.openxmlformats.org/drawingml/2006/main" xmlns:r="http://schemas.openxmlformats.org/officeDocument/2006/relationships" xmlns:p="http://schemas.openxmlformats.org/presentationml/2006/main">
   <p:cSld>
     <p:bg>
@@ -12755,7 +15006,7 @@
           <a:p>
             <a:fld id="{846B06B1-1179-491F-A487-8E0C403F7C13}" type="slidenum">
               <a:rPr lang="fr-CA" smtClean="0"/>
-              <a:t>18</a:t>
+              <a:t>20</a:t>
             </a:fld>
             <a:endParaRPr lang="fr-CA"/>
           </a:p>
@@ -12774,7 +15025,7 @@
 </p:sld>
 </file>
 
-<file path=ppt/slides/slide19.xml><?xml version="1.0" encoding="utf-8"?>
+<file path=ppt/slides/slide21.xml><?xml version="1.0" encoding="utf-8"?>
 <p:sld xmlns:a="http://schemas.openxmlformats.org/drawingml/2006/main" xmlns:r="http://schemas.openxmlformats.org/officeDocument/2006/relationships" xmlns:p="http://schemas.openxmlformats.org/presentationml/2006/main">
   <p:cSld>
     <p:bg>
@@ -13402,7 +15653,7 @@
           <a:p>
             <a:fld id="{846B06B1-1179-491F-A487-8E0C403F7C13}" type="slidenum">
               <a:rPr lang="fr-CA" smtClean="0"/>
-              <a:t>19</a:t>
+              <a:t>21</a:t>
             </a:fld>
             <a:endParaRPr lang="fr-CA"/>
           </a:p>
@@ -14662,468 +16913,7 @@
 </p:sld>
 </file>
 
-<file path=ppt/slides/slide2.xml><?xml version="1.0" encoding="utf-8"?>
-<p:sld xmlns:a="http://schemas.openxmlformats.org/drawingml/2006/main" xmlns:r="http://schemas.openxmlformats.org/officeDocument/2006/relationships" xmlns:p="http://schemas.openxmlformats.org/presentationml/2006/main">
-  <p:cSld>
-    <p:bg>
-      <p:bgPr>
-        <a:solidFill>
-          <a:srgbClr val="F5F5F5"/>
-        </a:solidFill>
-        <a:effectLst/>
-      </p:bgPr>
-    </p:bg>
-    <p:spTree>
-      <p:nvGrpSpPr>
-        <p:cNvPr id="1" name="">
-          <a:extLst>
-            <a:ext uri="{FF2B5EF4-FFF2-40B4-BE49-F238E27FC236}">
-              <a16:creationId xmlns:a16="http://schemas.microsoft.com/office/drawing/2014/main" id="{9787BE08-8E87-BDAC-AA37-B1440F99BBB3}"/>
-            </a:ext>
-          </a:extLst>
-        </p:cNvPr>
-        <p:cNvGrpSpPr/>
-        <p:nvPr/>
-      </p:nvGrpSpPr>
-      <p:grpSpPr>
-        <a:xfrm>
-          <a:off x="0" y="0"/>
-          <a:ext cx="0" cy="0"/>
-          <a:chOff x="0" y="0"/>
-          <a:chExt cx="0" cy="0"/>
-        </a:xfrm>
-      </p:grpSpPr>
-      <p:sp>
-        <p:nvSpPr>
-          <p:cNvPr id="2" name="Title 1">
-            <a:extLst>
-              <a:ext uri="{FF2B5EF4-FFF2-40B4-BE49-F238E27FC236}">
-                <a16:creationId xmlns:a16="http://schemas.microsoft.com/office/drawing/2014/main" id="{2539027E-795E-A7E7-3EF9-F5DE694B487D}"/>
-              </a:ext>
-            </a:extLst>
-          </p:cNvPr>
-          <p:cNvSpPr>
-            <a:spLocks noGrp="1"/>
-          </p:cNvSpPr>
-          <p:nvPr>
-            <p:ph type="title"/>
-          </p:nvPr>
-        </p:nvSpPr>
-        <p:spPr/>
-        <p:txBody>
-          <a:bodyPr/>
-          <a:lstStyle/>
-          <a:p>
-            <a:r>
-              <a:rPr lang="en-US" dirty="0">
-                <a:latin typeface="Arial Rounded MT Bold" panose="020F0704030504030204" pitchFamily="34" charset="0"/>
-              </a:rPr>
-              <a:t>Plan</a:t>
-            </a:r>
-            <a:endParaRPr lang="fr-CA" dirty="0">
-              <a:latin typeface="Arial Rounded MT Bold" panose="020F0704030504030204" pitchFamily="34" charset="0"/>
-            </a:endParaRPr>
-          </a:p>
-        </p:txBody>
-      </p:sp>
-      <p:sp>
-        <p:nvSpPr>
-          <p:cNvPr id="3" name="Content Placeholder 2">
-            <a:extLst>
-              <a:ext uri="{FF2B5EF4-FFF2-40B4-BE49-F238E27FC236}">
-                <a16:creationId xmlns:a16="http://schemas.microsoft.com/office/drawing/2014/main" id="{1A2C692D-48DA-2C5B-C433-961FD8C3D9A4}"/>
-              </a:ext>
-            </a:extLst>
-          </p:cNvPr>
-          <p:cNvSpPr>
-            <a:spLocks noGrp="1"/>
-          </p:cNvSpPr>
-          <p:nvPr>
-            <p:ph idx="1"/>
-          </p:nvPr>
-        </p:nvSpPr>
-        <p:spPr/>
-        <p:txBody>
-          <a:bodyPr>
-            <a:normAutofit/>
-          </a:bodyPr>
-          <a:lstStyle/>
-          <a:p>
-            <a:pPr algn="just"/>
-            <a:r>
-              <a:rPr lang="en-US" sz="2000" dirty="0">
-                <a:latin typeface="Consolas" panose="020B0609020204030204" pitchFamily="49" charset="0"/>
-              </a:rPr>
-              <a:t>Notions </a:t>
-            </a:r>
-            <a:r>
-              <a:rPr lang="en-US" sz="2000" dirty="0" err="1">
-                <a:latin typeface="Consolas" panose="020B0609020204030204" pitchFamily="49" charset="0"/>
-              </a:rPr>
-              <a:t>intermédiaires</a:t>
-            </a:r>
-            <a:endParaRPr lang="en-US" sz="2000" dirty="0">
-              <a:latin typeface="Consolas" panose="020B0609020204030204" pitchFamily="49" charset="0"/>
-            </a:endParaRPr>
-          </a:p>
-          <a:p>
-            <a:pPr algn="just"/>
-            <a:r>
-              <a:rPr lang="fr-CA" sz="2000" dirty="0">
-                <a:latin typeface="Consolas" panose="020B0609020204030204" pitchFamily="49" charset="0"/>
-              </a:rPr>
-              <a:t>É</a:t>
-            </a:r>
-            <a:r>
-              <a:rPr lang="en-US" sz="2000" dirty="0" err="1">
-                <a:latin typeface="Consolas" panose="020B0609020204030204" pitchFamily="49" charset="0"/>
-              </a:rPr>
-              <a:t>crire</a:t>
-            </a:r>
-            <a:r>
-              <a:rPr lang="en-US" sz="2000" dirty="0">
-                <a:latin typeface="Consolas" panose="020B0609020204030204" pitchFamily="49" charset="0"/>
-              </a:rPr>
-              <a:t> du</a:t>
-            </a:r>
-            <a:r>
-              <a:rPr lang="fr-CA" sz="2000" dirty="0">
-                <a:latin typeface="Consolas" panose="020B0609020204030204" pitchFamily="49" charset="0"/>
-              </a:rPr>
-              <a:t> "vrai"</a:t>
-            </a:r>
-            <a:r>
-              <a:rPr lang="en-US" sz="2000" i="1" dirty="0">
-                <a:latin typeface="Consolas" panose="020B0609020204030204" pitchFamily="49" charset="0"/>
-              </a:rPr>
-              <a:t> </a:t>
-            </a:r>
-            <a:r>
-              <a:rPr lang="en-US" sz="2000" dirty="0">
-                <a:latin typeface="Consolas" panose="020B0609020204030204" pitchFamily="49" charset="0"/>
-              </a:rPr>
-              <a:t>code</a:t>
-            </a:r>
-          </a:p>
-          <a:p>
-            <a:pPr algn="just"/>
-            <a:r>
-              <a:rPr lang="fr-CA" sz="2000" dirty="0">
-                <a:latin typeface="Consolas" panose="020B0609020204030204" pitchFamily="49" charset="0"/>
-              </a:rPr>
-              <a:t>S'amuser</a:t>
-            </a:r>
-          </a:p>
-        </p:txBody>
-      </p:sp>
-      <p:sp>
-        <p:nvSpPr>
-          <p:cNvPr id="5" name="Slide Number Placeholder 4">
-            <a:extLst>
-              <a:ext uri="{FF2B5EF4-FFF2-40B4-BE49-F238E27FC236}">
-                <a16:creationId xmlns:a16="http://schemas.microsoft.com/office/drawing/2014/main" id="{30A9ACC9-0207-BF8C-83A4-76A47041FF41}"/>
-              </a:ext>
-            </a:extLst>
-          </p:cNvPr>
-          <p:cNvSpPr>
-            <a:spLocks noGrp="1"/>
-          </p:cNvSpPr>
-          <p:nvPr>
-            <p:ph type="sldNum" sz="quarter" idx="12"/>
-          </p:nvPr>
-        </p:nvSpPr>
-        <p:spPr/>
-        <p:txBody>
-          <a:bodyPr/>
-          <a:lstStyle/>
-          <a:p>
-            <a:fld id="{846B06B1-1179-491F-A487-8E0C403F7C13}" type="slidenum">
-              <a:rPr lang="fr-CA" smtClean="0"/>
-              <a:t>2</a:t>
-            </a:fld>
-            <a:endParaRPr lang="fr-CA" dirty="0"/>
-          </a:p>
-        </p:txBody>
-      </p:sp>
-      <p:pic>
-        <p:nvPicPr>
-          <p:cNvPr id="1026" name="Picture 2" descr="Generated QR Image">
-            <a:extLst>
-              <a:ext uri="{FF2B5EF4-FFF2-40B4-BE49-F238E27FC236}">
-                <a16:creationId xmlns:a16="http://schemas.microsoft.com/office/drawing/2014/main" id="{3722898A-7CE8-0284-840C-631F7F72CC4B}"/>
-              </a:ext>
-            </a:extLst>
-          </p:cNvPr>
-          <p:cNvPicPr>
-            <a:picLocks noChangeAspect="1" noChangeArrowheads="1"/>
-          </p:cNvPicPr>
-          <p:nvPr/>
-        </p:nvPicPr>
-        <p:blipFill>
-          <a:blip r:embed="rId3">
-            <a:extLst>
-              <a:ext uri="{28A0092B-C50C-407E-A947-70E740481C1C}">
-                <a14:useLocalDpi xmlns:a14="http://schemas.microsoft.com/office/drawing/2010/main" val="0"/>
-              </a:ext>
-            </a:extLst>
-          </a:blip>
-          <a:srcRect/>
-          <a:stretch>
-            <a:fillRect/>
-          </a:stretch>
-        </p:blipFill>
-        <p:spPr bwMode="auto">
-          <a:xfrm>
-            <a:off x="6096000" y="1825625"/>
-            <a:ext cx="4105275" cy="4105275"/>
-          </a:xfrm>
-          <a:prstGeom prst="rect">
-            <a:avLst/>
-          </a:prstGeom>
-          <a:noFill/>
-          <a:extLst>
-            <a:ext uri="{909E8E84-426E-40DD-AFC4-6F175D3DCCD1}">
-              <a14:hiddenFill xmlns:a14="http://schemas.microsoft.com/office/drawing/2010/main">
-                <a:solidFill>
-                  <a:srgbClr val="FFFFFF"/>
-                </a:solidFill>
-              </a14:hiddenFill>
-            </a:ext>
-          </a:extLst>
-        </p:spPr>
-      </p:pic>
-    </p:spTree>
-    <p:extLst>
-      <p:ext uri="{BB962C8B-B14F-4D97-AF65-F5344CB8AC3E}">
-        <p14:creationId xmlns:p14="http://schemas.microsoft.com/office/powerpoint/2010/main" val="1707187834"/>
-      </p:ext>
-    </p:extLst>
-  </p:cSld>
-  <p:clrMapOvr>
-    <a:masterClrMapping/>
-  </p:clrMapOvr>
-  <p:timing>
-    <p:tnLst>
-      <p:par>
-        <p:cTn id="1" dur="indefinite" restart="never" nodeType="tmRoot">
-          <p:childTnLst>
-            <p:seq concurrent="1" nextAc="seek">
-              <p:cTn id="2" dur="indefinite" nodeType="mainSeq">
-                <p:childTnLst>
-                  <p:par>
-                    <p:cTn id="3" fill="hold">
-                      <p:stCondLst>
-                        <p:cond delay="indefinite"/>
-                      </p:stCondLst>
-                      <p:childTnLst>
-                        <p:par>
-                          <p:cTn id="4" fill="hold">
-                            <p:stCondLst>
-                              <p:cond delay="0"/>
-                            </p:stCondLst>
-                            <p:childTnLst>
-                              <p:par>
-                                <p:cTn id="5" presetID="10" presetClass="entr" presetSubtype="0" fill="hold" nodeType="clickEffect">
-                                  <p:stCondLst>
-                                    <p:cond delay="0"/>
-                                  </p:stCondLst>
-                                  <p:childTnLst>
-                                    <p:set>
-                                      <p:cBhvr>
-                                        <p:cTn id="6" dur="1" fill="hold">
-                                          <p:stCondLst>
-                                            <p:cond delay="0"/>
-                                          </p:stCondLst>
-                                        </p:cTn>
-                                        <p:tgtEl>
-                                          <p:spTgt spid="3">
-                                            <p:txEl>
-                                              <p:pRg st="0" end="0"/>
-                                            </p:txEl>
-                                          </p:spTgt>
-                                        </p:tgtEl>
-                                        <p:attrNameLst>
-                                          <p:attrName>style.visibility</p:attrName>
-                                        </p:attrNameLst>
-                                      </p:cBhvr>
-                                      <p:to>
-                                        <p:strVal val="visible"/>
-                                      </p:to>
-                                    </p:set>
-                                    <p:animEffect transition="in" filter="fade">
-                                      <p:cBhvr>
-                                        <p:cTn id="7" dur="500"/>
-                                        <p:tgtEl>
-                                          <p:spTgt spid="3">
-                                            <p:txEl>
-                                              <p:pRg st="0" end="0"/>
-                                            </p:txEl>
-                                          </p:spTgt>
-                                        </p:tgtEl>
-                                      </p:cBhvr>
-                                    </p:animEffect>
-                                  </p:childTnLst>
-                                </p:cTn>
-                              </p:par>
-                            </p:childTnLst>
-                          </p:cTn>
-                        </p:par>
-                      </p:childTnLst>
-                    </p:cTn>
-                  </p:par>
-                  <p:par>
-                    <p:cTn id="8" fill="hold">
-                      <p:stCondLst>
-                        <p:cond delay="indefinite"/>
-                      </p:stCondLst>
-                      <p:childTnLst>
-                        <p:par>
-                          <p:cTn id="9" fill="hold">
-                            <p:stCondLst>
-                              <p:cond delay="0"/>
-                            </p:stCondLst>
-                            <p:childTnLst>
-                              <p:par>
-                                <p:cTn id="10" presetID="10" presetClass="entr" presetSubtype="0" fill="hold" nodeType="clickEffect">
-                                  <p:stCondLst>
-                                    <p:cond delay="0"/>
-                                  </p:stCondLst>
-                                  <p:childTnLst>
-                                    <p:set>
-                                      <p:cBhvr>
-                                        <p:cTn id="11" dur="1" fill="hold">
-                                          <p:stCondLst>
-                                            <p:cond delay="0"/>
-                                          </p:stCondLst>
-                                        </p:cTn>
-                                        <p:tgtEl>
-                                          <p:spTgt spid="3">
-                                            <p:txEl>
-                                              <p:pRg st="1" end="1"/>
-                                            </p:txEl>
-                                          </p:spTgt>
-                                        </p:tgtEl>
-                                        <p:attrNameLst>
-                                          <p:attrName>style.visibility</p:attrName>
-                                        </p:attrNameLst>
-                                      </p:cBhvr>
-                                      <p:to>
-                                        <p:strVal val="visible"/>
-                                      </p:to>
-                                    </p:set>
-                                    <p:animEffect transition="in" filter="fade">
-                                      <p:cBhvr>
-                                        <p:cTn id="12" dur="500"/>
-                                        <p:tgtEl>
-                                          <p:spTgt spid="3">
-                                            <p:txEl>
-                                              <p:pRg st="1" end="1"/>
-                                            </p:txEl>
-                                          </p:spTgt>
-                                        </p:tgtEl>
-                                      </p:cBhvr>
-                                    </p:animEffect>
-                                  </p:childTnLst>
-                                </p:cTn>
-                              </p:par>
-                            </p:childTnLst>
-                          </p:cTn>
-                        </p:par>
-                      </p:childTnLst>
-                    </p:cTn>
-                  </p:par>
-                  <p:par>
-                    <p:cTn id="13" fill="hold">
-                      <p:stCondLst>
-                        <p:cond delay="indefinite"/>
-                      </p:stCondLst>
-                      <p:childTnLst>
-                        <p:par>
-                          <p:cTn id="14" fill="hold">
-                            <p:stCondLst>
-                              <p:cond delay="0"/>
-                            </p:stCondLst>
-                            <p:childTnLst>
-                              <p:par>
-                                <p:cTn id="15" presetID="10" presetClass="entr" presetSubtype="0" fill="hold" nodeType="clickEffect">
-                                  <p:stCondLst>
-                                    <p:cond delay="0"/>
-                                  </p:stCondLst>
-                                  <p:childTnLst>
-                                    <p:set>
-                                      <p:cBhvr>
-                                        <p:cTn id="16" dur="1" fill="hold">
-                                          <p:stCondLst>
-                                            <p:cond delay="0"/>
-                                          </p:stCondLst>
-                                        </p:cTn>
-                                        <p:tgtEl>
-                                          <p:spTgt spid="3">
-                                            <p:txEl>
-                                              <p:pRg st="2" end="2"/>
-                                            </p:txEl>
-                                          </p:spTgt>
-                                        </p:tgtEl>
-                                        <p:attrNameLst>
-                                          <p:attrName>style.visibility</p:attrName>
-                                        </p:attrNameLst>
-                                      </p:cBhvr>
-                                      <p:to>
-                                        <p:strVal val="visible"/>
-                                      </p:to>
-                                    </p:set>
-                                    <p:animEffect transition="in" filter="fade">
-                                      <p:cBhvr>
-                                        <p:cTn id="17" dur="500"/>
-                                        <p:tgtEl>
-                                          <p:spTgt spid="3">
-                                            <p:txEl>
-                                              <p:pRg st="2" end="2"/>
-                                            </p:txEl>
-                                          </p:spTgt>
-                                        </p:tgtEl>
-                                      </p:cBhvr>
-                                    </p:animEffect>
-                                  </p:childTnLst>
-                                </p:cTn>
-                              </p:par>
-                            </p:childTnLst>
-                          </p:cTn>
-                        </p:par>
-                      </p:childTnLst>
-                    </p:cTn>
-                  </p:par>
-                </p:childTnLst>
-              </p:cTn>
-              <p:prevCondLst>
-                <p:cond evt="onPrev" delay="0">
-                  <p:tgtEl>
-                    <p:sldTgt/>
-                  </p:tgtEl>
-                </p:cond>
-              </p:prevCondLst>
-              <p:nextCondLst>
-                <p:cond evt="onNext" delay="0">
-                  <p:tgtEl>
-                    <p:sldTgt/>
-                  </p:tgtEl>
-                </p:cond>
-              </p:nextCondLst>
-            </p:seq>
-          </p:childTnLst>
-        </p:cTn>
-      </p:par>
-    </p:tnLst>
-  </p:timing>
-  <p:extLst>
-    <p:ext uri="{6950BFC3-D8DA-4A85-94F7-54DA5524770B}">
-      <p188:commentRel xmlns:p188="http://schemas.microsoft.com/office/powerpoint/2018/8/main" r:id="rId2"/>
-    </p:ext>
-  </p:extLst>
-</p:sld>
-</file>
-
-<file path=ppt/slides/slide20.xml><?xml version="1.0" encoding="utf-8"?>
+<file path=ppt/slides/slide22.xml><?xml version="1.0" encoding="utf-8"?>
 <p:sld xmlns:a="http://schemas.openxmlformats.org/drawingml/2006/main" xmlns:r="http://schemas.openxmlformats.org/officeDocument/2006/relationships" xmlns:p="http://schemas.openxmlformats.org/presentationml/2006/main">
   <p:cSld>
     <p:bg>
@@ -15564,7 +17354,7 @@
           <a:p>
             <a:fld id="{846B06B1-1179-491F-A487-8E0C403F7C13}" type="slidenum">
               <a:rPr lang="fr-CA" smtClean="0"/>
-              <a:t>20</a:t>
+              <a:t>22</a:t>
             </a:fld>
             <a:endParaRPr lang="fr-CA"/>
           </a:p>
@@ -16196,7 +17986,7 @@
 </p:sld>
 </file>
 
-<file path=ppt/slides/slide21.xml><?xml version="1.0" encoding="utf-8"?>
+<file path=ppt/slides/slide23.xml><?xml version="1.0" encoding="utf-8"?>
 <p:sld xmlns:a="http://schemas.openxmlformats.org/drawingml/2006/main" xmlns:r="http://schemas.openxmlformats.org/officeDocument/2006/relationships" xmlns:p="http://schemas.openxmlformats.org/presentationml/2006/main">
   <p:cSld>
     <p:bg>
@@ -16693,7 +18483,7 @@
           <a:p>
             <a:fld id="{846B06B1-1179-491F-A487-8E0C403F7C13}" type="slidenum">
               <a:rPr lang="fr-CA" smtClean="0"/>
-              <a:t>21</a:t>
+              <a:t>23</a:t>
             </a:fld>
             <a:endParaRPr lang="fr-CA"/>
           </a:p>
@@ -17108,7 +18898,7 @@
 </p:sld>
 </file>
 
-<file path=ppt/slides/slide22.xml><?xml version="1.0" encoding="utf-8"?>
+<file path=ppt/slides/slide24.xml><?xml version="1.0" encoding="utf-8"?>
 <p:sld xmlns:a="http://schemas.openxmlformats.org/drawingml/2006/main" xmlns:r="http://schemas.openxmlformats.org/officeDocument/2006/relationships" xmlns:p="http://schemas.openxmlformats.org/presentationml/2006/main">
   <p:cSld>
     <p:bg>
@@ -17686,7 +19476,7 @@
           <a:p>
             <a:fld id="{846B06B1-1179-491F-A487-8E0C403F7C13}" type="slidenum">
               <a:rPr lang="fr-CA" smtClean="0"/>
-              <a:t>22</a:t>
+              <a:t>24</a:t>
             </a:fld>
             <a:endParaRPr lang="fr-CA"/>
           </a:p>
@@ -18424,7 +20214,7 @@
 </p:sld>
 </file>
 
-<file path=ppt/slides/slide23.xml><?xml version="1.0" encoding="utf-8"?>
+<file path=ppt/slides/slide25.xml><?xml version="1.0" encoding="utf-8"?>
 <p:sld xmlns:a="http://schemas.openxmlformats.org/drawingml/2006/main" xmlns:r="http://schemas.openxmlformats.org/officeDocument/2006/relationships" xmlns:p="http://schemas.openxmlformats.org/presentationml/2006/main">
   <p:cSld>
     <p:bg>
@@ -18942,7 +20732,7 @@
           <a:p>
             <a:fld id="{846B06B1-1179-491F-A487-8E0C403F7C13}" type="slidenum">
               <a:rPr lang="fr-CA" smtClean="0"/>
-              <a:t>23</a:t>
+              <a:t>25</a:t>
             </a:fld>
             <a:endParaRPr lang="fr-CA"/>
           </a:p>
@@ -19656,7 +21446,7 @@
 </p:sld>
 </file>
 
-<file path=ppt/slides/slide24.xml><?xml version="1.0" encoding="utf-8"?>
+<file path=ppt/slides/slide26.xml><?xml version="1.0" encoding="utf-8"?>
 <p:sld xmlns:a="http://schemas.openxmlformats.org/drawingml/2006/main" xmlns:r="http://schemas.openxmlformats.org/officeDocument/2006/relationships" xmlns:p="http://schemas.openxmlformats.org/presentationml/2006/main">
   <p:cSld>
     <p:bg>
@@ -19938,7 +21728,7 @@
           <a:p>
             <a:fld id="{846B06B1-1179-491F-A487-8E0C403F7C13}" type="slidenum">
               <a:rPr lang="fr-CA" smtClean="0"/>
-              <a:t>24</a:t>
+              <a:t>26</a:t>
             </a:fld>
             <a:endParaRPr lang="fr-CA"/>
           </a:p>
@@ -20370,7 +22160,7 @@
 </p:sld>
 </file>
 
-<file path=ppt/slides/slide25.xml><?xml version="1.0" encoding="utf-8"?>
+<file path=ppt/slides/slide27.xml><?xml version="1.0" encoding="utf-8"?>
 <p:sld xmlns:a="http://schemas.openxmlformats.org/drawingml/2006/main" xmlns:r="http://schemas.openxmlformats.org/officeDocument/2006/relationships" xmlns:p="http://schemas.openxmlformats.org/presentationml/2006/main">
   <p:cSld>
     <p:bg>
@@ -21012,7 +22802,7 @@
           <a:p>
             <a:fld id="{846B06B1-1179-491F-A487-8E0C403F7C13}" type="slidenum">
               <a:rPr lang="fr-CA" smtClean="0"/>
-              <a:t>25</a:t>
+              <a:t>27</a:t>
             </a:fld>
             <a:endParaRPr lang="fr-CA"/>
           </a:p>
@@ -21574,7 +23364,7 @@
 </p:sld>
 </file>
 
-<file path=ppt/slides/slide26.xml><?xml version="1.0" encoding="utf-8"?>
+<file path=ppt/slides/slide28.xml><?xml version="1.0" encoding="utf-8"?>
 <p:sld xmlns:a="http://schemas.openxmlformats.org/drawingml/2006/main" xmlns:r="http://schemas.openxmlformats.org/officeDocument/2006/relationships" xmlns:p="http://schemas.openxmlformats.org/presentationml/2006/main">
   <p:cSld>
     <p:bg>
@@ -22018,7 +23808,7 @@
           <a:p>
             <a:fld id="{846B06B1-1179-491F-A487-8E0C403F7C13}" type="slidenum">
               <a:rPr lang="fr-CA" smtClean="0"/>
-              <a:t>26</a:t>
+              <a:t>28</a:t>
             </a:fld>
             <a:endParaRPr lang="fr-CA"/>
           </a:p>
@@ -22037,7 +23827,7 @@
 </p:sld>
 </file>
 
-<file path=ppt/slides/slide27.xml><?xml version="1.0" encoding="utf-8"?>
+<file path=ppt/slides/slide29.xml><?xml version="1.0" encoding="utf-8"?>
 <p:sld xmlns:a="http://schemas.openxmlformats.org/drawingml/2006/main" xmlns:r="http://schemas.openxmlformats.org/officeDocument/2006/relationships" xmlns:p="http://schemas.openxmlformats.org/presentationml/2006/main">
   <p:cSld>
     <p:bg>
@@ -22338,7 +24128,7 @@
           <a:p>
             <a:fld id="{846B06B1-1179-491F-A487-8E0C403F7C13}" type="slidenum">
               <a:rPr lang="fr-CA" smtClean="0"/>
-              <a:t>27</a:t>
+              <a:t>29</a:t>
             </a:fld>
             <a:endParaRPr lang="fr-CA"/>
           </a:p>
@@ -23110,7 +24900,1392 @@
 </p:sld>
 </file>
 
-<file path=ppt/slides/slide28.xml><?xml version="1.0" encoding="utf-8"?>
+<file path=ppt/slides/slide3.xml><?xml version="1.0" encoding="utf-8"?>
+<p:sld xmlns:a="http://schemas.openxmlformats.org/drawingml/2006/main" xmlns:r="http://schemas.openxmlformats.org/officeDocument/2006/relationships" xmlns:p="http://schemas.openxmlformats.org/presentationml/2006/main">
+  <p:cSld>
+    <p:bg>
+      <p:bgPr>
+        <a:solidFill>
+          <a:srgbClr val="F5F5F5"/>
+        </a:solidFill>
+        <a:effectLst/>
+      </p:bgPr>
+    </p:bg>
+    <p:spTree>
+      <p:nvGrpSpPr>
+        <p:cNvPr id="1" name="">
+          <a:extLst>
+            <a:ext uri="{FF2B5EF4-FFF2-40B4-BE49-F238E27FC236}">
+              <a16:creationId xmlns:a16="http://schemas.microsoft.com/office/drawing/2014/main" id="{7AE562C1-DEBE-120A-68B7-9B3CEE9F8CF7}"/>
+            </a:ext>
+          </a:extLst>
+        </p:cNvPr>
+        <p:cNvGrpSpPr/>
+        <p:nvPr/>
+      </p:nvGrpSpPr>
+      <p:grpSpPr>
+        <a:xfrm>
+          <a:off x="0" y="0"/>
+          <a:ext cx="0" cy="0"/>
+          <a:chOff x="0" y="0"/>
+          <a:chExt cx="0" cy="0"/>
+        </a:xfrm>
+      </p:grpSpPr>
+      <p:sp>
+        <p:nvSpPr>
+          <p:cNvPr id="2" name="Title 1">
+            <a:extLst>
+              <a:ext uri="{FF2B5EF4-FFF2-40B4-BE49-F238E27FC236}">
+                <a16:creationId xmlns:a16="http://schemas.microsoft.com/office/drawing/2014/main" id="{9DD94D18-8A9D-0F83-56A0-3E229B4F30F4}"/>
+              </a:ext>
+            </a:extLst>
+          </p:cNvPr>
+          <p:cNvSpPr>
+            <a:spLocks noGrp="1"/>
+          </p:cNvSpPr>
+          <p:nvPr>
+            <p:ph type="title"/>
+          </p:nvPr>
+        </p:nvSpPr>
+        <p:spPr/>
+        <p:txBody>
+          <a:bodyPr/>
+          <a:lstStyle/>
+          <a:p>
+            <a:r>
+              <a:rPr lang="en-US" dirty="0">
+                <a:latin typeface="Arial Rounded MT Bold" panose="020F0704030504030204" pitchFamily="34" charset="0"/>
+              </a:rPr>
+              <a:t>Tests: Assertions</a:t>
+            </a:r>
+            <a:endParaRPr lang="fr-CA" dirty="0">
+              <a:latin typeface="Arial Rounded MT Bold" panose="020F0704030504030204" pitchFamily="34" charset="0"/>
+            </a:endParaRPr>
+          </a:p>
+        </p:txBody>
+      </p:sp>
+      <p:sp>
+        <p:nvSpPr>
+          <p:cNvPr id="3" name="Content Placeholder 2">
+            <a:extLst>
+              <a:ext uri="{FF2B5EF4-FFF2-40B4-BE49-F238E27FC236}">
+                <a16:creationId xmlns:a16="http://schemas.microsoft.com/office/drawing/2014/main" id="{4CF6E5EC-3D7E-2CEA-1F5C-3BC34F96A110}"/>
+              </a:ext>
+            </a:extLst>
+          </p:cNvPr>
+          <p:cNvSpPr>
+            <a:spLocks noGrp="1"/>
+          </p:cNvSpPr>
+          <p:nvPr>
+            <p:ph idx="1"/>
+          </p:nvPr>
+        </p:nvSpPr>
+        <p:spPr/>
+        <p:txBody>
+          <a:bodyPr>
+            <a:normAutofit/>
+          </a:bodyPr>
+          <a:lstStyle/>
+          <a:p>
+            <a:pPr algn="just"/>
+            <a:br>
+              <a:rPr lang="fr-CA" sz="1600" dirty="0">
+                <a:latin typeface="Consolas" panose="020B0609020204030204" pitchFamily="49" charset="0"/>
+              </a:rPr>
+            </a:br>
+            <a:endParaRPr lang="fr-CA" sz="1600" dirty="0">
+              <a:latin typeface="Consolas" panose="020B0609020204030204" pitchFamily="49" charset="0"/>
+            </a:endParaRPr>
+          </a:p>
+          <a:p>
+            <a:pPr algn="just">
+              <a:lnSpc>
+                <a:spcPct val="110000"/>
+              </a:lnSpc>
+            </a:pPr>
+            <a:r>
+              <a:rPr lang="fr-CA" sz="1600" dirty="0">
+                <a:latin typeface="Consolas" panose="020B0609020204030204" pitchFamily="49" charset="0"/>
+              </a:rPr>
+              <a:t>Lance une erreur (</a:t>
+            </a:r>
+            <a:r>
+              <a:rPr lang="fr-CA" sz="1600" dirty="0" err="1">
+                <a:latin typeface="Consolas" panose="020B0609020204030204" pitchFamily="49" charset="0"/>
+              </a:rPr>
+              <a:t>AssertionError</a:t>
+            </a:r>
+            <a:r>
+              <a:rPr lang="fr-CA" sz="1600" dirty="0">
+                <a:latin typeface="Consolas" panose="020B0609020204030204" pitchFamily="49" charset="0"/>
+              </a:rPr>
+              <a:t>) lorsqu'une condition est fausse</a:t>
+            </a:r>
+          </a:p>
+          <a:p>
+            <a:pPr lvl="1" algn="just">
+              <a:lnSpc>
+                <a:spcPct val="110000"/>
+              </a:lnSpc>
+            </a:pPr>
+            <a:r>
+              <a:rPr lang="fr-CA" sz="1600" dirty="0">
+                <a:latin typeface="Consolas" panose="020B0609020204030204" pitchFamily="49" charset="0"/>
+              </a:rPr>
+              <a:t>Modèle mental: </a:t>
+            </a:r>
+            <a:r>
+              <a:rPr lang="fr-CA" sz="1600" b="1" dirty="0">
+                <a:latin typeface="Consolas" panose="020B0609020204030204" pitchFamily="49" charset="0"/>
+              </a:rPr>
+              <a:t>Lorsqu'un test échoue</a:t>
+            </a:r>
+          </a:p>
+          <a:p>
+            <a:pPr algn="just">
+              <a:lnSpc>
+                <a:spcPct val="160000"/>
+              </a:lnSpc>
+            </a:pPr>
+            <a:r>
+              <a:rPr lang="fr-CA" sz="1600" dirty="0">
+                <a:latin typeface="Consolas" panose="020B0609020204030204" pitchFamily="49" charset="0"/>
+              </a:rPr>
+              <a:t>Pour </a:t>
+            </a:r>
+            <a:r>
+              <a:rPr lang="fr-CA" sz="1600" b="1" dirty="0">
+                <a:latin typeface="Consolas" panose="020B0609020204030204" pitchFamily="49" charset="0"/>
+              </a:rPr>
+              <a:t>ce qui doit absolument être vrai</a:t>
+            </a:r>
+            <a:endParaRPr lang="fr-CA" sz="1600" dirty="0">
+              <a:latin typeface="Consolas" panose="020B0609020204030204" pitchFamily="49" charset="0"/>
+            </a:endParaRPr>
+          </a:p>
+          <a:p>
+            <a:pPr algn="just">
+              <a:lnSpc>
+                <a:spcPct val="150000"/>
+              </a:lnSpc>
+            </a:pPr>
+            <a:r>
+              <a:rPr lang="fr-CA" sz="1600" dirty="0">
+                <a:latin typeface="Consolas" panose="020B0609020204030204" pitchFamily="49" charset="0"/>
+              </a:rPr>
+              <a:t>Peut être désactivé à l'exécution (</a:t>
+            </a:r>
+            <a:r>
+              <a:rPr lang="fr-CA" sz="1600" b="1" dirty="0">
+                <a:latin typeface="Consolas" panose="020B0609020204030204" pitchFamily="49" charset="0"/>
+              </a:rPr>
+              <a:t>python -O</a:t>
+            </a:r>
+            <a:r>
+              <a:rPr lang="fr-CA" sz="1600" dirty="0">
+                <a:latin typeface="Consolas" panose="020B0609020204030204" pitchFamily="49" charset="0"/>
+              </a:rPr>
+              <a:t>) ... sauf pour la NASA</a:t>
+            </a:r>
+          </a:p>
+          <a:p>
+            <a:pPr marL="0" indent="0" algn="ctr">
+              <a:buNone/>
+            </a:pPr>
+            <a:r>
+              <a:rPr lang="fr-CA" sz="1400" dirty="0">
+                <a:latin typeface="Consolas" panose="020B0609020204030204" pitchFamily="49" charset="0"/>
+                <a:hlinkClick r:id="rId2"/>
+              </a:rPr>
+              <a:t>https://fr.wikipedia.org/wiki/The_Power_of_10:_Rules_for_Developing_Safety-Critical_Code</a:t>
+            </a:r>
+            <a:endParaRPr lang="fr-CA" sz="1400" dirty="0">
+              <a:latin typeface="Consolas" panose="020B0609020204030204" pitchFamily="49" charset="0"/>
+            </a:endParaRPr>
+          </a:p>
+        </p:txBody>
+      </p:sp>
+      <p:sp>
+        <p:nvSpPr>
+          <p:cNvPr id="5" name="Slide Number Placeholder 4">
+            <a:extLst>
+              <a:ext uri="{FF2B5EF4-FFF2-40B4-BE49-F238E27FC236}">
+                <a16:creationId xmlns:a16="http://schemas.microsoft.com/office/drawing/2014/main" id="{1FA2DB27-CAC8-7766-F85F-45770DF3095A}"/>
+              </a:ext>
+            </a:extLst>
+          </p:cNvPr>
+          <p:cNvSpPr>
+            <a:spLocks noGrp="1"/>
+          </p:cNvSpPr>
+          <p:nvPr>
+            <p:ph type="sldNum" sz="quarter" idx="12"/>
+          </p:nvPr>
+        </p:nvSpPr>
+        <p:spPr/>
+        <p:txBody>
+          <a:bodyPr/>
+          <a:lstStyle/>
+          <a:p>
+            <a:fld id="{846B06B1-1179-491F-A487-8E0C403F7C13}" type="slidenum">
+              <a:rPr lang="fr-CA" smtClean="0"/>
+              <a:t>3</a:t>
+            </a:fld>
+            <a:endParaRPr lang="fr-CA" dirty="0"/>
+          </a:p>
+        </p:txBody>
+      </p:sp>
+      <p:sp>
+        <p:nvSpPr>
+          <p:cNvPr id="4" name="TextBox 3">
+            <a:extLst>
+              <a:ext uri="{FF2B5EF4-FFF2-40B4-BE49-F238E27FC236}">
+                <a16:creationId xmlns:a16="http://schemas.microsoft.com/office/drawing/2014/main" id="{57A8D393-74C1-0C40-F408-06525D65E091}"/>
+              </a:ext>
+            </a:extLst>
+          </p:cNvPr>
+          <p:cNvSpPr txBox="1"/>
+          <p:nvPr/>
+        </p:nvSpPr>
+        <p:spPr>
+          <a:xfrm>
+            <a:off x="2230873" y="1728788"/>
+            <a:ext cx="7730249" cy="442630"/>
+          </a:xfrm>
+          <a:prstGeom prst="roundRect">
+            <a:avLst/>
+          </a:prstGeom>
+          <a:solidFill>
+            <a:srgbClr val="FFF2CC">
+              <a:alpha val="49803"/>
+            </a:srgbClr>
+          </a:solidFill>
+          <a:ln w="9525" cap="flat" cmpd="sng">
+            <a:solidFill>
+              <a:schemeClr val="dk1"/>
+            </a:solidFill>
+            <a:prstDash val="solid"/>
+            <a:round/>
+            <a:headEnd type="none" w="sm" len="sm"/>
+            <a:tailEnd type="none" w="sm" len="sm"/>
+          </a:ln>
+        </p:spPr>
+        <p:txBody>
+          <a:bodyPr spcFirstLastPara="1" wrap="square" lIns="91425" tIns="45700" rIns="91425" bIns="45700" anchor="t" anchorCtr="0">
+            <a:spAutoFit/>
+          </a:bodyPr>
+          <a:lstStyle>
+            <a:defPPr>
+              <a:defRPr lang="en-US"/>
+            </a:defPPr>
+            <a:lvl1pPr marR="0" lvl="0" indent="0" algn="ctr">
+              <a:lnSpc>
+                <a:spcPct val="100000"/>
+              </a:lnSpc>
+              <a:spcBef>
+                <a:spcPts val="0"/>
+              </a:spcBef>
+              <a:spcAft>
+                <a:spcPts val="0"/>
+              </a:spcAft>
+              <a:buClr>
+                <a:srgbClr val="000000"/>
+              </a:buClr>
+              <a:buSzPts val="1400"/>
+              <a:buFont typeface="Consolas"/>
+              <a:buNone/>
+              <a:defRPr sz="2800" b="1" i="0" u="none" strike="noStrike" cap="none">
+                <a:solidFill>
+                  <a:srgbClr val="000000"/>
+                </a:solidFill>
+                <a:latin typeface="Consolas"/>
+                <a:ea typeface="Consolas"/>
+                <a:cs typeface="Consolas"/>
+              </a:defRPr>
+            </a:lvl1pPr>
+          </a:lstStyle>
+          <a:p>
+            <a:r>
+              <a:rPr lang="en-US" sz="2000" dirty="0"/>
+              <a:t>assert </a:t>
+            </a:r>
+            <a:r>
+              <a:rPr lang="en-US" sz="2000" dirty="0" err="1"/>
+              <a:t>expression_booleenne</a:t>
+            </a:r>
+            <a:r>
+              <a:rPr lang="en-US" sz="2000" dirty="0"/>
+              <a:t>, </a:t>
+            </a:r>
+            <a:r>
+              <a:rPr lang="en-US" sz="2000" dirty="0" err="1"/>
+              <a:t>message_si_faux</a:t>
+            </a:r>
+            <a:endParaRPr lang="en-US" sz="2000" dirty="0"/>
+          </a:p>
+        </p:txBody>
+      </p:sp>
+      <p:grpSp>
+        <p:nvGrpSpPr>
+          <p:cNvPr id="6" name="Google Shape;354;p18">
+            <a:extLst>
+              <a:ext uri="{FF2B5EF4-FFF2-40B4-BE49-F238E27FC236}">
+                <a16:creationId xmlns:a16="http://schemas.microsoft.com/office/drawing/2014/main" id="{530A920A-ECA4-8FCD-A08E-677BC9DD3228}"/>
+              </a:ext>
+            </a:extLst>
+          </p:cNvPr>
+          <p:cNvGrpSpPr/>
+          <p:nvPr/>
+        </p:nvGrpSpPr>
+        <p:grpSpPr>
+          <a:xfrm>
+            <a:off x="2306240" y="4664961"/>
+            <a:ext cx="7579514" cy="1512002"/>
+            <a:chOff x="6682372" y="3766184"/>
+            <a:chExt cx="8984825" cy="691201"/>
+          </a:xfrm>
+        </p:grpSpPr>
+        <p:sp>
+          <p:nvSpPr>
+            <p:cNvPr id="7" name="Google Shape;355;p18">
+              <a:extLst>
+                <a:ext uri="{FF2B5EF4-FFF2-40B4-BE49-F238E27FC236}">
+                  <a16:creationId xmlns:a16="http://schemas.microsoft.com/office/drawing/2014/main" id="{87D4FF6B-A94D-24FE-EF28-D0E429EA4110}"/>
+                </a:ext>
+              </a:extLst>
+            </p:cNvPr>
+            <p:cNvSpPr/>
+            <p:nvPr/>
+          </p:nvSpPr>
+          <p:spPr>
+            <a:xfrm>
+              <a:off x="6682372" y="3766184"/>
+              <a:ext cx="256567" cy="691200"/>
+            </a:xfrm>
+            <a:prstGeom prst="rect">
+              <a:avLst/>
+            </a:prstGeom>
+            <a:solidFill>
+              <a:srgbClr val="7F7F7F"/>
+            </a:solidFill>
+            <a:ln w="12700" cap="flat" cmpd="sng">
+              <a:solidFill>
+                <a:schemeClr val="dk1"/>
+              </a:solidFill>
+              <a:prstDash val="solid"/>
+              <a:miter lim="800000"/>
+              <a:headEnd type="none" w="sm" len="sm"/>
+              <a:tailEnd type="none" w="sm" len="sm"/>
+            </a:ln>
+          </p:spPr>
+          <p:txBody>
+            <a:bodyPr spcFirstLastPara="1" wrap="square" lIns="91425" tIns="45700" rIns="91425" bIns="45700" anchor="ctr" anchorCtr="0">
+              <a:noAutofit/>
+            </a:bodyPr>
+            <a:lstStyle/>
+            <a:p>
+              <a:pPr marL="0" marR="0" lvl="0" indent="0" algn="ctr" rtl="0">
+                <a:spcBef>
+                  <a:spcPts val="0"/>
+                </a:spcBef>
+                <a:spcAft>
+                  <a:spcPts val="0"/>
+                </a:spcAft>
+                <a:buNone/>
+              </a:pPr>
+              <a:r>
+                <a:rPr lang="fr-CA" sz="1400" dirty="0">
+                  <a:solidFill>
+                    <a:schemeClr val="lt1"/>
+                  </a:solidFill>
+                  <a:latin typeface="Calibri"/>
+                  <a:ea typeface="Calibri"/>
+                  <a:cs typeface="Calibri"/>
+                  <a:sym typeface="Calibri"/>
+                </a:rPr>
+                <a:t>1</a:t>
+              </a:r>
+              <a:endParaRPr dirty="0"/>
+            </a:p>
+            <a:p>
+              <a:pPr marL="0" marR="0" lvl="0" indent="0" algn="ctr" rtl="0">
+                <a:spcBef>
+                  <a:spcPts val="0"/>
+                </a:spcBef>
+                <a:spcAft>
+                  <a:spcPts val="0"/>
+                </a:spcAft>
+                <a:buNone/>
+              </a:pPr>
+              <a:r>
+                <a:rPr lang="fr-CA" sz="1400" dirty="0">
+                  <a:solidFill>
+                    <a:schemeClr val="lt1"/>
+                  </a:solidFill>
+                  <a:latin typeface="Calibri"/>
+                  <a:ea typeface="Calibri"/>
+                  <a:cs typeface="Calibri"/>
+                  <a:sym typeface="Calibri"/>
+                </a:rPr>
+                <a:t>23</a:t>
+              </a:r>
+              <a:endParaRPr dirty="0"/>
+            </a:p>
+            <a:p>
+              <a:pPr marL="0" marR="0" lvl="0" indent="0" algn="ctr" rtl="0">
+                <a:spcBef>
+                  <a:spcPts val="0"/>
+                </a:spcBef>
+                <a:spcAft>
+                  <a:spcPts val="0"/>
+                </a:spcAft>
+                <a:buNone/>
+              </a:pPr>
+              <a:r>
+                <a:rPr lang="fr-CA" sz="1400" dirty="0">
+                  <a:solidFill>
+                    <a:schemeClr val="lt1"/>
+                  </a:solidFill>
+                  <a:latin typeface="Calibri"/>
+                  <a:ea typeface="Calibri"/>
+                  <a:cs typeface="Calibri"/>
+                  <a:sym typeface="Calibri"/>
+                </a:rPr>
+                <a:t>4</a:t>
+              </a:r>
+              <a:endParaRPr dirty="0"/>
+            </a:p>
+            <a:p>
+              <a:pPr marL="0" marR="0" lvl="0" indent="0" algn="ctr" rtl="0">
+                <a:spcBef>
+                  <a:spcPts val="0"/>
+                </a:spcBef>
+                <a:spcAft>
+                  <a:spcPts val="0"/>
+                </a:spcAft>
+                <a:buNone/>
+              </a:pPr>
+              <a:r>
+                <a:rPr lang="fr-CA" sz="1400" dirty="0">
+                  <a:solidFill>
+                    <a:schemeClr val="lt1"/>
+                  </a:solidFill>
+                  <a:latin typeface="Calibri"/>
+                  <a:ea typeface="Calibri"/>
+                  <a:cs typeface="Calibri"/>
+                  <a:sym typeface="Calibri"/>
+                </a:rPr>
+                <a:t>5</a:t>
+              </a:r>
+            </a:p>
+            <a:p>
+              <a:pPr marL="0" marR="0" lvl="0" indent="0" algn="ctr" rtl="0">
+                <a:spcBef>
+                  <a:spcPts val="0"/>
+                </a:spcBef>
+                <a:spcAft>
+                  <a:spcPts val="0"/>
+                </a:spcAft>
+                <a:buNone/>
+              </a:pPr>
+              <a:r>
+                <a:rPr lang="fr-CA" sz="1400" dirty="0">
+                  <a:solidFill>
+                    <a:schemeClr val="lt1"/>
+                  </a:solidFill>
+                  <a:latin typeface="Calibri"/>
+                  <a:ea typeface="Calibri"/>
+                  <a:cs typeface="Calibri"/>
+                  <a:sym typeface="Calibri"/>
+                </a:rPr>
+                <a:t>6</a:t>
+              </a:r>
+              <a:endParaRPr dirty="0"/>
+            </a:p>
+          </p:txBody>
+        </p:sp>
+        <p:sp>
+          <p:nvSpPr>
+            <p:cNvPr id="8" name="Google Shape;356;p18">
+              <a:extLst>
+                <a:ext uri="{FF2B5EF4-FFF2-40B4-BE49-F238E27FC236}">
+                  <a16:creationId xmlns:a16="http://schemas.microsoft.com/office/drawing/2014/main" id="{4C789759-180C-72BA-D687-8BF5005AF9F0}"/>
+                </a:ext>
+              </a:extLst>
+            </p:cNvPr>
+            <p:cNvSpPr/>
+            <p:nvPr/>
+          </p:nvSpPr>
+          <p:spPr>
+            <a:xfrm>
+              <a:off x="6938939" y="3766185"/>
+              <a:ext cx="8728258" cy="691200"/>
+            </a:xfrm>
+            <a:prstGeom prst="rect">
+              <a:avLst/>
+            </a:prstGeom>
+            <a:solidFill>
+              <a:schemeClr val="dk1"/>
+            </a:solidFill>
+            <a:ln w="12700" cap="flat" cmpd="sng">
+              <a:solidFill>
+                <a:schemeClr val="dk1"/>
+              </a:solidFill>
+              <a:prstDash val="solid"/>
+              <a:miter lim="800000"/>
+              <a:headEnd type="none" w="sm" len="sm"/>
+              <a:tailEnd type="none" w="sm" len="sm"/>
+            </a:ln>
+          </p:spPr>
+          <p:txBody>
+            <a:bodyPr spcFirstLastPara="1" wrap="square" lIns="91425" tIns="45700" rIns="91425" bIns="45700" anchor="ctr" anchorCtr="0">
+              <a:noAutofit/>
+            </a:bodyPr>
+            <a:lstStyle/>
+            <a:p>
+              <a:r>
+                <a:rPr lang="en-CA" sz="1400" b="1" dirty="0">
+                  <a:solidFill>
+                    <a:schemeClr val="bg1"/>
+                  </a:solidFill>
+                  <a:latin typeface="Consolas" panose="020B0609020204030204" pitchFamily="49" charset="0"/>
+                </a:rPr>
+                <a:t>&gt;&gt;&gt; valeur_1 = int(input('</a:t>
+              </a:r>
+              <a:r>
+                <a:rPr lang="en-CA" sz="1400" b="1" dirty="0" err="1">
+                  <a:solidFill>
+                    <a:schemeClr val="bg1"/>
+                  </a:solidFill>
+                  <a:latin typeface="Consolas" panose="020B0609020204030204" pitchFamily="49" charset="0"/>
+                </a:rPr>
+                <a:t>Saisir</a:t>
+              </a:r>
+              <a:r>
+                <a:rPr lang="en-CA" sz="1400" b="1" dirty="0">
+                  <a:solidFill>
+                    <a:schemeClr val="bg1"/>
+                  </a:solidFill>
+                  <a:latin typeface="Consolas" panose="020B0609020204030204" pitchFamily="49" charset="0"/>
+                </a:rPr>
+                <a:t> un </a:t>
+              </a:r>
+              <a:r>
+                <a:rPr lang="en-CA" sz="1400" b="1" dirty="0" err="1">
+                  <a:solidFill>
+                    <a:schemeClr val="bg1"/>
+                  </a:solidFill>
+                  <a:latin typeface="Consolas" panose="020B0609020204030204" pitchFamily="49" charset="0"/>
+                </a:rPr>
+                <a:t>entier</a:t>
+              </a:r>
+              <a:r>
+                <a:rPr lang="en-CA" sz="1400" b="1" dirty="0">
+                  <a:solidFill>
+                    <a:schemeClr val="bg1"/>
+                  </a:solidFill>
+                  <a:latin typeface="Consolas" panose="020B0609020204030204" pitchFamily="49" charset="0"/>
+                </a:rPr>
+                <a:t>: '))</a:t>
+              </a:r>
+            </a:p>
+            <a:p>
+              <a:r>
+                <a:rPr lang="en-CA" sz="1400" b="1" dirty="0" err="1">
+                  <a:solidFill>
+                    <a:schemeClr val="bg1"/>
+                  </a:solidFill>
+                  <a:latin typeface="Consolas" panose="020B0609020204030204" pitchFamily="49" charset="0"/>
+                </a:rPr>
+                <a:t>Saisir</a:t>
+              </a:r>
+              <a:r>
+                <a:rPr lang="en-CA" sz="1400" b="1" dirty="0">
+                  <a:solidFill>
+                    <a:schemeClr val="bg1"/>
+                  </a:solidFill>
+                  <a:latin typeface="Consolas" panose="020B0609020204030204" pitchFamily="49" charset="0"/>
+                </a:rPr>
+                <a:t> un </a:t>
+              </a:r>
+              <a:r>
+                <a:rPr lang="en-CA" sz="1400" b="1" dirty="0" err="1">
+                  <a:solidFill>
+                    <a:schemeClr val="bg1"/>
+                  </a:solidFill>
+                  <a:latin typeface="Consolas" panose="020B0609020204030204" pitchFamily="49" charset="0"/>
+                </a:rPr>
+                <a:t>entier</a:t>
+              </a:r>
+              <a:r>
+                <a:rPr lang="en-CA" sz="1400" b="1" dirty="0">
+                  <a:solidFill>
+                    <a:schemeClr val="bg1"/>
+                  </a:solidFill>
+                  <a:latin typeface="Consolas" panose="020B0609020204030204" pitchFamily="49" charset="0"/>
+                </a:rPr>
+                <a:t>: 1</a:t>
+              </a:r>
+            </a:p>
+            <a:p>
+              <a:r>
+                <a:rPr lang="en-CA" sz="1400" b="1" dirty="0">
+                  <a:solidFill>
+                    <a:schemeClr val="bg1"/>
+                  </a:solidFill>
+                  <a:latin typeface="Consolas" panose="020B0609020204030204" pitchFamily="49" charset="0"/>
+                </a:rPr>
+                <a:t>&gt;&gt;&gt; valeur_2 = int(input('</a:t>
+              </a:r>
+              <a:r>
+                <a:rPr lang="en-CA" sz="1400" b="1" dirty="0" err="1">
+                  <a:solidFill>
+                    <a:schemeClr val="bg1"/>
+                  </a:solidFill>
+                  <a:latin typeface="Consolas" panose="020B0609020204030204" pitchFamily="49" charset="0"/>
+                </a:rPr>
+                <a:t>Saisir</a:t>
+              </a:r>
+              <a:r>
+                <a:rPr lang="en-CA" sz="1400" b="1" dirty="0">
+                  <a:solidFill>
+                    <a:schemeClr val="bg1"/>
+                  </a:solidFill>
+                  <a:latin typeface="Consolas" panose="020B0609020204030204" pitchFamily="49" charset="0"/>
+                </a:rPr>
+                <a:t> un </a:t>
+              </a:r>
+              <a:r>
+                <a:rPr lang="en-CA" sz="1400" b="1" dirty="0" err="1">
+                  <a:solidFill>
+                    <a:schemeClr val="bg1"/>
+                  </a:solidFill>
+                  <a:latin typeface="Consolas" panose="020B0609020204030204" pitchFamily="49" charset="0"/>
+                </a:rPr>
+                <a:t>entier</a:t>
+              </a:r>
+              <a:r>
+                <a:rPr lang="en-CA" sz="1400" b="1" dirty="0">
+                  <a:solidFill>
+                    <a:schemeClr val="bg1"/>
+                  </a:solidFill>
+                  <a:latin typeface="Consolas" panose="020B0609020204030204" pitchFamily="49" charset="0"/>
+                </a:rPr>
+                <a:t> diff</a:t>
+              </a:r>
+              <a:r>
+                <a:rPr lang="fr-CA" sz="1400" b="1" dirty="0" err="1">
+                  <a:solidFill>
+                    <a:schemeClr val="bg1"/>
+                  </a:solidFill>
+                  <a:latin typeface="Consolas" panose="020B0609020204030204" pitchFamily="49" charset="0"/>
+                </a:rPr>
+                <a:t>érent</a:t>
+              </a:r>
+              <a:r>
+                <a:rPr lang="fr-CA" sz="1400" b="1" dirty="0">
+                  <a:solidFill>
+                    <a:schemeClr val="bg1"/>
+                  </a:solidFill>
+                  <a:latin typeface="Consolas" panose="020B0609020204030204" pitchFamily="49" charset="0"/>
+                </a:rPr>
+                <a:t>: '))</a:t>
+              </a:r>
+            </a:p>
+            <a:p>
+              <a:r>
+                <a:rPr lang="en-CA" sz="1400" b="1" dirty="0" err="1">
+                  <a:solidFill>
+                    <a:schemeClr val="bg1"/>
+                  </a:solidFill>
+                  <a:latin typeface="Consolas" panose="020B0609020204030204" pitchFamily="49" charset="0"/>
+                </a:rPr>
+                <a:t>Saisir</a:t>
+              </a:r>
+              <a:r>
+                <a:rPr lang="en-CA" sz="1400" b="1" dirty="0">
+                  <a:solidFill>
+                    <a:schemeClr val="bg1"/>
+                  </a:solidFill>
+                  <a:latin typeface="Consolas" panose="020B0609020204030204" pitchFamily="49" charset="0"/>
+                </a:rPr>
+                <a:t> un </a:t>
+              </a:r>
+              <a:r>
+                <a:rPr lang="en-CA" sz="1400" b="1" dirty="0" err="1">
+                  <a:solidFill>
+                    <a:schemeClr val="bg1"/>
+                  </a:solidFill>
+                  <a:latin typeface="Consolas" panose="020B0609020204030204" pitchFamily="49" charset="0"/>
+                </a:rPr>
+                <a:t>entier</a:t>
+              </a:r>
+              <a:r>
+                <a:rPr lang="en-CA" sz="1400" b="1" dirty="0">
+                  <a:solidFill>
+                    <a:schemeClr val="bg1"/>
+                  </a:solidFill>
+                  <a:latin typeface="Consolas" panose="020B0609020204030204" pitchFamily="49" charset="0"/>
+                </a:rPr>
+                <a:t> diff</a:t>
+              </a:r>
+              <a:r>
+                <a:rPr lang="fr-CA" sz="1400" b="1" dirty="0" err="1">
+                  <a:solidFill>
+                    <a:schemeClr val="bg1"/>
+                  </a:solidFill>
+                  <a:latin typeface="Consolas" panose="020B0609020204030204" pitchFamily="49" charset="0"/>
+                </a:rPr>
+                <a:t>érent</a:t>
+              </a:r>
+              <a:r>
+                <a:rPr lang="fr-CA" sz="1400" b="1" dirty="0">
+                  <a:solidFill>
+                    <a:schemeClr val="bg1"/>
+                  </a:solidFill>
+                  <a:latin typeface="Consolas" panose="020B0609020204030204" pitchFamily="49" charset="0"/>
+                </a:rPr>
+                <a:t>: 1</a:t>
+              </a:r>
+            </a:p>
+            <a:p>
+              <a:r>
+                <a:rPr lang="en-CA" sz="1400" b="1" dirty="0">
+                  <a:solidFill>
+                    <a:schemeClr val="bg1"/>
+                  </a:solidFill>
+                  <a:latin typeface="Consolas" panose="020B0609020204030204" pitchFamily="49" charset="0"/>
+                </a:rPr>
+                <a:t>&gt;&gt;&gt; </a:t>
+              </a:r>
+              <a:r>
+                <a:rPr lang="en-CA" sz="1400" b="1" dirty="0">
+                  <a:solidFill>
+                    <a:srgbClr val="FF2500"/>
+                  </a:solidFill>
+                  <a:latin typeface="Consolas" panose="020B0609020204030204" pitchFamily="49" charset="0"/>
+                </a:rPr>
+                <a:t>assert</a:t>
+              </a:r>
+              <a:r>
+                <a:rPr lang="en-CA" sz="1400" b="1" dirty="0">
+                  <a:solidFill>
+                    <a:schemeClr val="bg1"/>
+                  </a:solidFill>
+                  <a:latin typeface="Consolas" panose="020B0609020204030204" pitchFamily="49" charset="0"/>
+                </a:rPr>
+                <a:t> valeur_1 != valeur_2, 'Les </a:t>
+              </a:r>
+              <a:r>
+                <a:rPr lang="en-CA" sz="1400" b="1" dirty="0" err="1">
+                  <a:solidFill>
+                    <a:schemeClr val="bg1"/>
+                  </a:solidFill>
+                  <a:latin typeface="Consolas" panose="020B0609020204030204" pitchFamily="49" charset="0"/>
+                </a:rPr>
+                <a:t>valeurs</a:t>
+              </a:r>
+              <a:r>
+                <a:rPr lang="en-CA" sz="1400" b="1" dirty="0">
+                  <a:solidFill>
+                    <a:schemeClr val="bg1"/>
+                  </a:solidFill>
+                  <a:latin typeface="Consolas" panose="020B0609020204030204" pitchFamily="49" charset="0"/>
+                </a:rPr>
+                <a:t> </a:t>
+              </a:r>
+              <a:r>
+                <a:rPr lang="en-CA" sz="1400" b="1" dirty="0" err="1">
+                  <a:solidFill>
+                    <a:schemeClr val="bg1"/>
+                  </a:solidFill>
+                  <a:latin typeface="Consolas" panose="020B0609020204030204" pitchFamily="49" charset="0"/>
+                </a:rPr>
+                <a:t>doivent</a:t>
+              </a:r>
+              <a:r>
+                <a:rPr lang="en-CA" sz="1400" b="1" dirty="0">
+                  <a:solidFill>
+                    <a:schemeClr val="bg1"/>
+                  </a:solidFill>
+                  <a:latin typeface="Consolas" panose="020B0609020204030204" pitchFamily="49" charset="0"/>
+                </a:rPr>
+                <a:t> </a:t>
+              </a:r>
+              <a:r>
+                <a:rPr lang="en-CA" sz="1400" b="1" dirty="0" err="1">
+                  <a:solidFill>
+                    <a:schemeClr val="bg1"/>
+                  </a:solidFill>
+                  <a:latin typeface="Consolas" panose="020B0609020204030204" pitchFamily="49" charset="0"/>
+                </a:rPr>
+                <a:t>être</a:t>
+              </a:r>
+              <a:r>
+                <a:rPr lang="en-CA" sz="1400" b="1" dirty="0">
+                  <a:solidFill>
+                    <a:schemeClr val="bg1"/>
+                  </a:solidFill>
+                  <a:latin typeface="Consolas" panose="020B0609020204030204" pitchFamily="49" charset="0"/>
+                </a:rPr>
+                <a:t> </a:t>
+              </a:r>
+              <a:r>
+                <a:rPr lang="en-CA" sz="1400" b="1" dirty="0" err="1">
+                  <a:solidFill>
+                    <a:schemeClr val="bg1"/>
+                  </a:solidFill>
+                  <a:latin typeface="Consolas" panose="020B0609020204030204" pitchFamily="49" charset="0"/>
+                </a:rPr>
+                <a:t>différentes</a:t>
+              </a:r>
+              <a:r>
+                <a:rPr lang="en-CA" sz="1400" b="1" dirty="0">
+                  <a:solidFill>
+                    <a:schemeClr val="bg1"/>
+                  </a:solidFill>
+                  <a:latin typeface="Consolas" panose="020B0609020204030204" pitchFamily="49" charset="0"/>
+                </a:rPr>
+                <a:t>'</a:t>
+              </a:r>
+            </a:p>
+            <a:p>
+              <a:pPr algn="just"/>
+              <a:r>
+                <a:rPr lang="en-CA" sz="1400" b="1" dirty="0" err="1">
+                  <a:solidFill>
+                    <a:schemeClr val="bg1"/>
+                  </a:solidFill>
+                  <a:latin typeface="Consolas" panose="020B0609020204030204" pitchFamily="49" charset="0"/>
+                </a:rPr>
+                <a:t>AssertionError</a:t>
+              </a:r>
+              <a:r>
+                <a:rPr lang="en-CA" sz="1400" b="1" dirty="0">
+                  <a:solidFill>
+                    <a:schemeClr val="bg1"/>
+                  </a:solidFill>
+                  <a:latin typeface="Consolas" panose="020B0609020204030204" pitchFamily="49" charset="0"/>
+                </a:rPr>
+                <a:t>: Les </a:t>
+              </a:r>
+              <a:r>
+                <a:rPr lang="en-CA" sz="1400" b="1" dirty="0" err="1">
+                  <a:solidFill>
+                    <a:schemeClr val="bg1"/>
+                  </a:solidFill>
+                  <a:latin typeface="Consolas" panose="020B0609020204030204" pitchFamily="49" charset="0"/>
+                </a:rPr>
+                <a:t>valeurs</a:t>
+              </a:r>
+              <a:r>
+                <a:rPr lang="en-CA" sz="1400" b="1" dirty="0">
+                  <a:solidFill>
+                    <a:schemeClr val="bg1"/>
+                  </a:solidFill>
+                  <a:latin typeface="Consolas" panose="020B0609020204030204" pitchFamily="49" charset="0"/>
+                </a:rPr>
+                <a:t> </a:t>
+              </a:r>
+              <a:r>
+                <a:rPr lang="en-CA" sz="1400" b="1" dirty="0" err="1">
+                  <a:solidFill>
+                    <a:schemeClr val="bg1"/>
+                  </a:solidFill>
+                  <a:latin typeface="Consolas" panose="020B0609020204030204" pitchFamily="49" charset="0"/>
+                </a:rPr>
+                <a:t>doivent</a:t>
+              </a:r>
+              <a:r>
+                <a:rPr lang="en-CA" sz="1400" b="1" dirty="0">
+                  <a:solidFill>
+                    <a:schemeClr val="bg1"/>
+                  </a:solidFill>
+                  <a:latin typeface="Consolas" panose="020B0609020204030204" pitchFamily="49" charset="0"/>
+                </a:rPr>
+                <a:t> </a:t>
+              </a:r>
+              <a:r>
+                <a:rPr lang="en-CA" sz="1400" b="1" dirty="0" err="1">
+                  <a:solidFill>
+                    <a:schemeClr val="bg1"/>
+                  </a:solidFill>
+                  <a:latin typeface="Consolas" panose="020B0609020204030204" pitchFamily="49" charset="0"/>
+                </a:rPr>
+                <a:t>être</a:t>
+              </a:r>
+              <a:r>
+                <a:rPr lang="en-CA" sz="1400" b="1" dirty="0">
+                  <a:solidFill>
+                    <a:schemeClr val="bg1"/>
+                  </a:solidFill>
+                  <a:latin typeface="Consolas" panose="020B0609020204030204" pitchFamily="49" charset="0"/>
+                </a:rPr>
+                <a:t> </a:t>
+              </a:r>
+              <a:r>
+                <a:rPr lang="en-CA" sz="1400" b="1" dirty="0" err="1">
+                  <a:solidFill>
+                    <a:schemeClr val="bg1"/>
+                  </a:solidFill>
+                  <a:latin typeface="Consolas" panose="020B0609020204030204" pitchFamily="49" charset="0"/>
+                </a:rPr>
+                <a:t>différentes</a:t>
+              </a:r>
+              <a:endParaRPr lang="fr-CA" sz="1400" dirty="0">
+                <a:solidFill>
+                  <a:schemeClr val="bg1"/>
+                </a:solidFill>
+                <a:latin typeface="Consolas" panose="020B0609020204030204" pitchFamily="49" charset="0"/>
+              </a:endParaRPr>
+            </a:p>
+          </p:txBody>
+        </p:sp>
+      </p:grpSp>
+    </p:spTree>
+    <p:extLst>
+      <p:ext uri="{BB962C8B-B14F-4D97-AF65-F5344CB8AC3E}">
+        <p14:creationId xmlns:p14="http://schemas.microsoft.com/office/powerpoint/2010/main" val="3696665868"/>
+      </p:ext>
+    </p:extLst>
+  </p:cSld>
+  <p:clrMapOvr>
+    <a:masterClrMapping/>
+  </p:clrMapOvr>
+  <p:timing>
+    <p:tnLst>
+      <p:par>
+        <p:cTn id="1" dur="indefinite" restart="never" nodeType="tmRoot">
+          <p:childTnLst>
+            <p:seq concurrent="1" nextAc="seek">
+              <p:cTn id="2" dur="indefinite" nodeType="mainSeq">
+                <p:childTnLst>
+                  <p:par>
+                    <p:cTn id="3" fill="hold">
+                      <p:stCondLst>
+                        <p:cond delay="indefinite"/>
+                      </p:stCondLst>
+                      <p:childTnLst>
+                        <p:par>
+                          <p:cTn id="4" fill="hold">
+                            <p:stCondLst>
+                              <p:cond delay="0"/>
+                            </p:stCondLst>
+                            <p:childTnLst>
+                              <p:par>
+                                <p:cTn id="5" presetID="10" presetClass="entr" presetSubtype="0" fill="hold" nodeType="clickEffect">
+                                  <p:stCondLst>
+                                    <p:cond delay="0"/>
+                                  </p:stCondLst>
+                                  <p:childTnLst>
+                                    <p:set>
+                                      <p:cBhvr>
+                                        <p:cTn id="6" dur="1" fill="hold">
+                                          <p:stCondLst>
+                                            <p:cond delay="0"/>
+                                          </p:stCondLst>
+                                        </p:cTn>
+                                        <p:tgtEl>
+                                          <p:spTgt spid="3">
+                                            <p:txEl>
+                                              <p:pRg st="0" end="0"/>
+                                            </p:txEl>
+                                          </p:spTgt>
+                                        </p:tgtEl>
+                                        <p:attrNameLst>
+                                          <p:attrName>style.visibility</p:attrName>
+                                        </p:attrNameLst>
+                                      </p:cBhvr>
+                                      <p:to>
+                                        <p:strVal val="visible"/>
+                                      </p:to>
+                                    </p:set>
+                                    <p:animEffect transition="in" filter="fade">
+                                      <p:cBhvr>
+                                        <p:cTn id="7" dur="500"/>
+                                        <p:tgtEl>
+                                          <p:spTgt spid="3">
+                                            <p:txEl>
+                                              <p:pRg st="0" end="0"/>
+                                            </p:txEl>
+                                          </p:spTgt>
+                                        </p:tgtEl>
+                                      </p:cBhvr>
+                                    </p:animEffect>
+                                  </p:childTnLst>
+                                </p:cTn>
+                              </p:par>
+                            </p:childTnLst>
+                          </p:cTn>
+                        </p:par>
+                      </p:childTnLst>
+                    </p:cTn>
+                  </p:par>
+                  <p:par>
+                    <p:cTn id="8" fill="hold">
+                      <p:stCondLst>
+                        <p:cond delay="indefinite"/>
+                      </p:stCondLst>
+                      <p:childTnLst>
+                        <p:par>
+                          <p:cTn id="9" fill="hold">
+                            <p:stCondLst>
+                              <p:cond delay="0"/>
+                            </p:stCondLst>
+                            <p:childTnLst>
+                              <p:par>
+                                <p:cTn id="10" presetID="10" presetClass="entr" presetSubtype="0" fill="hold" nodeType="clickEffect">
+                                  <p:stCondLst>
+                                    <p:cond delay="0"/>
+                                  </p:stCondLst>
+                                  <p:childTnLst>
+                                    <p:set>
+                                      <p:cBhvr>
+                                        <p:cTn id="11" dur="1" fill="hold">
+                                          <p:stCondLst>
+                                            <p:cond delay="0"/>
+                                          </p:stCondLst>
+                                        </p:cTn>
+                                        <p:tgtEl>
+                                          <p:spTgt spid="3">
+                                            <p:txEl>
+                                              <p:pRg st="1" end="1"/>
+                                            </p:txEl>
+                                          </p:spTgt>
+                                        </p:tgtEl>
+                                        <p:attrNameLst>
+                                          <p:attrName>style.visibility</p:attrName>
+                                        </p:attrNameLst>
+                                      </p:cBhvr>
+                                      <p:to>
+                                        <p:strVal val="visible"/>
+                                      </p:to>
+                                    </p:set>
+                                    <p:animEffect transition="in" filter="fade">
+                                      <p:cBhvr>
+                                        <p:cTn id="12" dur="500"/>
+                                        <p:tgtEl>
+                                          <p:spTgt spid="3">
+                                            <p:txEl>
+                                              <p:pRg st="1" end="1"/>
+                                            </p:txEl>
+                                          </p:spTgt>
+                                        </p:tgtEl>
+                                      </p:cBhvr>
+                                    </p:animEffect>
+                                  </p:childTnLst>
+                                </p:cTn>
+                              </p:par>
+                            </p:childTnLst>
+                          </p:cTn>
+                        </p:par>
+                      </p:childTnLst>
+                    </p:cTn>
+                  </p:par>
+                  <p:par>
+                    <p:cTn id="13" fill="hold">
+                      <p:stCondLst>
+                        <p:cond delay="indefinite"/>
+                      </p:stCondLst>
+                      <p:childTnLst>
+                        <p:par>
+                          <p:cTn id="14" fill="hold">
+                            <p:stCondLst>
+                              <p:cond delay="0"/>
+                            </p:stCondLst>
+                            <p:childTnLst>
+                              <p:par>
+                                <p:cTn id="15" presetID="10" presetClass="entr" presetSubtype="0" fill="hold" nodeType="clickEffect">
+                                  <p:stCondLst>
+                                    <p:cond delay="0"/>
+                                  </p:stCondLst>
+                                  <p:childTnLst>
+                                    <p:set>
+                                      <p:cBhvr>
+                                        <p:cTn id="16" dur="1" fill="hold">
+                                          <p:stCondLst>
+                                            <p:cond delay="0"/>
+                                          </p:stCondLst>
+                                        </p:cTn>
+                                        <p:tgtEl>
+                                          <p:spTgt spid="3">
+                                            <p:txEl>
+                                              <p:pRg st="2" end="2"/>
+                                            </p:txEl>
+                                          </p:spTgt>
+                                        </p:tgtEl>
+                                        <p:attrNameLst>
+                                          <p:attrName>style.visibility</p:attrName>
+                                        </p:attrNameLst>
+                                      </p:cBhvr>
+                                      <p:to>
+                                        <p:strVal val="visible"/>
+                                      </p:to>
+                                    </p:set>
+                                    <p:animEffect transition="in" filter="fade">
+                                      <p:cBhvr>
+                                        <p:cTn id="17" dur="500"/>
+                                        <p:tgtEl>
+                                          <p:spTgt spid="3">
+                                            <p:txEl>
+                                              <p:pRg st="2" end="2"/>
+                                            </p:txEl>
+                                          </p:spTgt>
+                                        </p:tgtEl>
+                                      </p:cBhvr>
+                                    </p:animEffect>
+                                  </p:childTnLst>
+                                </p:cTn>
+                              </p:par>
+                            </p:childTnLst>
+                          </p:cTn>
+                        </p:par>
+                      </p:childTnLst>
+                    </p:cTn>
+                  </p:par>
+                  <p:par>
+                    <p:cTn id="18" fill="hold">
+                      <p:stCondLst>
+                        <p:cond delay="indefinite"/>
+                      </p:stCondLst>
+                      <p:childTnLst>
+                        <p:par>
+                          <p:cTn id="19" fill="hold">
+                            <p:stCondLst>
+                              <p:cond delay="0"/>
+                            </p:stCondLst>
+                            <p:childTnLst>
+                              <p:par>
+                                <p:cTn id="20" presetID="10" presetClass="entr" presetSubtype="0" fill="hold" nodeType="clickEffect">
+                                  <p:stCondLst>
+                                    <p:cond delay="0"/>
+                                  </p:stCondLst>
+                                  <p:childTnLst>
+                                    <p:set>
+                                      <p:cBhvr>
+                                        <p:cTn id="21" dur="1" fill="hold">
+                                          <p:stCondLst>
+                                            <p:cond delay="0"/>
+                                          </p:stCondLst>
+                                        </p:cTn>
+                                        <p:tgtEl>
+                                          <p:spTgt spid="3">
+                                            <p:txEl>
+                                              <p:pRg st="3" end="3"/>
+                                            </p:txEl>
+                                          </p:spTgt>
+                                        </p:tgtEl>
+                                        <p:attrNameLst>
+                                          <p:attrName>style.visibility</p:attrName>
+                                        </p:attrNameLst>
+                                      </p:cBhvr>
+                                      <p:to>
+                                        <p:strVal val="visible"/>
+                                      </p:to>
+                                    </p:set>
+                                    <p:animEffect transition="in" filter="fade">
+                                      <p:cBhvr>
+                                        <p:cTn id="22" dur="500"/>
+                                        <p:tgtEl>
+                                          <p:spTgt spid="3">
+                                            <p:txEl>
+                                              <p:pRg st="3" end="3"/>
+                                            </p:txEl>
+                                          </p:spTgt>
+                                        </p:tgtEl>
+                                      </p:cBhvr>
+                                    </p:animEffect>
+                                  </p:childTnLst>
+                                </p:cTn>
+                              </p:par>
+                            </p:childTnLst>
+                          </p:cTn>
+                        </p:par>
+                      </p:childTnLst>
+                    </p:cTn>
+                  </p:par>
+                  <p:par>
+                    <p:cTn id="23" fill="hold">
+                      <p:stCondLst>
+                        <p:cond delay="indefinite"/>
+                      </p:stCondLst>
+                      <p:childTnLst>
+                        <p:par>
+                          <p:cTn id="24" fill="hold">
+                            <p:stCondLst>
+                              <p:cond delay="0"/>
+                            </p:stCondLst>
+                            <p:childTnLst>
+                              <p:par>
+                                <p:cTn id="25" presetID="10" presetClass="entr" presetSubtype="0" fill="hold" nodeType="clickEffect">
+                                  <p:stCondLst>
+                                    <p:cond delay="0"/>
+                                  </p:stCondLst>
+                                  <p:childTnLst>
+                                    <p:set>
+                                      <p:cBhvr>
+                                        <p:cTn id="26" dur="1" fill="hold">
+                                          <p:stCondLst>
+                                            <p:cond delay="0"/>
+                                          </p:stCondLst>
+                                        </p:cTn>
+                                        <p:tgtEl>
+                                          <p:spTgt spid="3">
+                                            <p:txEl>
+                                              <p:pRg st="4" end="4"/>
+                                            </p:txEl>
+                                          </p:spTgt>
+                                        </p:tgtEl>
+                                        <p:attrNameLst>
+                                          <p:attrName>style.visibility</p:attrName>
+                                        </p:attrNameLst>
+                                      </p:cBhvr>
+                                      <p:to>
+                                        <p:strVal val="visible"/>
+                                      </p:to>
+                                    </p:set>
+                                    <p:animEffect transition="in" filter="fade">
+                                      <p:cBhvr>
+                                        <p:cTn id="27" dur="500"/>
+                                        <p:tgtEl>
+                                          <p:spTgt spid="3">
+                                            <p:txEl>
+                                              <p:pRg st="4" end="4"/>
+                                            </p:txEl>
+                                          </p:spTgt>
+                                        </p:tgtEl>
+                                      </p:cBhvr>
+                                    </p:animEffect>
+                                  </p:childTnLst>
+                                </p:cTn>
+                              </p:par>
+                              <p:par>
+                                <p:cTn id="28" presetID="10" presetClass="entr" presetSubtype="0" fill="hold" nodeType="withEffect">
+                                  <p:stCondLst>
+                                    <p:cond delay="0"/>
+                                  </p:stCondLst>
+                                  <p:childTnLst>
+                                    <p:set>
+                                      <p:cBhvr>
+                                        <p:cTn id="29" dur="1" fill="hold">
+                                          <p:stCondLst>
+                                            <p:cond delay="0"/>
+                                          </p:stCondLst>
+                                        </p:cTn>
+                                        <p:tgtEl>
+                                          <p:spTgt spid="3">
+                                            <p:txEl>
+                                              <p:pRg st="5" end="5"/>
+                                            </p:txEl>
+                                          </p:spTgt>
+                                        </p:tgtEl>
+                                        <p:attrNameLst>
+                                          <p:attrName>style.visibility</p:attrName>
+                                        </p:attrNameLst>
+                                      </p:cBhvr>
+                                      <p:to>
+                                        <p:strVal val="visible"/>
+                                      </p:to>
+                                    </p:set>
+                                    <p:animEffect transition="in" filter="fade">
+                                      <p:cBhvr>
+                                        <p:cTn id="30" dur="500"/>
+                                        <p:tgtEl>
+                                          <p:spTgt spid="3">
+                                            <p:txEl>
+                                              <p:pRg st="5" end="5"/>
+                                            </p:txEl>
+                                          </p:spTgt>
+                                        </p:tgtEl>
+                                      </p:cBhvr>
+                                    </p:animEffect>
+                                  </p:childTnLst>
+                                </p:cTn>
+                              </p:par>
+                            </p:childTnLst>
+                          </p:cTn>
+                        </p:par>
+                      </p:childTnLst>
+                    </p:cTn>
+                  </p:par>
+                  <p:par>
+                    <p:cTn id="31" fill="hold">
+                      <p:stCondLst>
+                        <p:cond delay="indefinite"/>
+                      </p:stCondLst>
+                      <p:childTnLst>
+                        <p:par>
+                          <p:cTn id="32" fill="hold">
+                            <p:stCondLst>
+                              <p:cond delay="0"/>
+                            </p:stCondLst>
+                            <p:childTnLst>
+                              <p:par>
+                                <p:cTn id="33" presetID="10" presetClass="entr" presetSubtype="0" fill="hold" nodeType="clickEffect">
+                                  <p:stCondLst>
+                                    <p:cond delay="0"/>
+                                  </p:stCondLst>
+                                  <p:childTnLst>
+                                    <p:set>
+                                      <p:cBhvr>
+                                        <p:cTn id="34" dur="1" fill="hold">
+                                          <p:stCondLst>
+                                            <p:cond delay="0"/>
+                                          </p:stCondLst>
+                                        </p:cTn>
+                                        <p:tgtEl>
+                                          <p:spTgt spid="6"/>
+                                        </p:tgtEl>
+                                        <p:attrNameLst>
+                                          <p:attrName>style.visibility</p:attrName>
+                                        </p:attrNameLst>
+                                      </p:cBhvr>
+                                      <p:to>
+                                        <p:strVal val="visible"/>
+                                      </p:to>
+                                    </p:set>
+                                    <p:animEffect transition="in" filter="fade">
+                                      <p:cBhvr>
+                                        <p:cTn id="35" dur="500"/>
+                                        <p:tgtEl>
+                                          <p:spTgt spid="6"/>
+                                        </p:tgtEl>
+                                      </p:cBhvr>
+                                    </p:animEffect>
+                                  </p:childTnLst>
+                                </p:cTn>
+                              </p:par>
+                            </p:childTnLst>
+                          </p:cTn>
+                        </p:par>
+                      </p:childTnLst>
+                    </p:cTn>
+                  </p:par>
+                </p:childTnLst>
+              </p:cTn>
+              <p:prevCondLst>
+                <p:cond evt="onPrev" delay="0">
+                  <p:tgtEl>
+                    <p:sldTgt/>
+                  </p:tgtEl>
+                </p:cond>
+              </p:prevCondLst>
+              <p:nextCondLst>
+                <p:cond evt="onNext" delay="0">
+                  <p:tgtEl>
+                    <p:sldTgt/>
+                  </p:tgtEl>
+                </p:cond>
+              </p:nextCondLst>
+            </p:seq>
+          </p:childTnLst>
+        </p:cTn>
+      </p:par>
+    </p:tnLst>
+  </p:timing>
+</p:sld>
+</file>
+
+<file path=ppt/slides/slide30.xml><?xml version="1.0" encoding="utf-8"?>
 <p:sld xmlns:a="http://schemas.openxmlformats.org/drawingml/2006/main" xmlns:r="http://schemas.openxmlformats.org/officeDocument/2006/relationships" xmlns:p="http://schemas.openxmlformats.org/presentationml/2006/main">
   <p:cSld>
     <p:bg>
@@ -23680,7 +26855,7 @@
           <a:p>
             <a:fld id="{846B06B1-1179-491F-A487-8E0C403F7C13}" type="slidenum">
               <a:rPr lang="fr-CA" smtClean="0"/>
-              <a:t>28</a:t>
+              <a:t>30</a:t>
             </a:fld>
             <a:endParaRPr lang="fr-CA"/>
           </a:p>
@@ -23959,7 +27134,7 @@
                 <a:buNone/>
               </a:pPr>
               <a:r>
-                <a:rPr lang="fr-CA" sz="1400">
+                <a:rPr lang="fr-CA" sz="1400" dirty="0">
                   <a:solidFill>
                     <a:schemeClr val="lt1"/>
                   </a:solidFill>
@@ -23970,7 +27145,7 @@
                 </a:rPr>
                 <a:t>1</a:t>
               </a:r>
-              <a:endParaRPr sz="1400">
+              <a:endParaRPr sz="1400" dirty="0">
                 <a:solidFill>
                   <a:schemeClr val="lt1"/>
                 </a:solidFill>
@@ -23991,7 +27166,7 @@
                 <a:buNone/>
               </a:pPr>
               <a:r>
-                <a:rPr lang="fr-CA" sz="1400">
+                <a:rPr lang="fr-CA" sz="1400" dirty="0">
                   <a:solidFill>
                     <a:schemeClr val="lt1"/>
                   </a:solidFill>
@@ -24002,7 +27177,7 @@
                 </a:rPr>
                 <a:t>2</a:t>
               </a:r>
-              <a:endParaRPr/>
+              <a:endParaRPr dirty="0"/>
             </a:p>
             <a:p>
               <a:pPr marL="0" marR="0" lvl="0" indent="0" algn="ctr" rtl="0">
@@ -24015,7 +27190,7 @@
                 <a:buNone/>
               </a:pPr>
               <a:r>
-                <a:rPr lang="fr-CA" sz="1400">
+                <a:rPr lang="fr-CA" sz="1400" dirty="0">
                   <a:solidFill>
                     <a:schemeClr val="lt1"/>
                   </a:solidFill>
@@ -24026,7 +27201,7 @@
                 </a:rPr>
                 <a:t>3</a:t>
               </a:r>
-              <a:endParaRPr/>
+              <a:endParaRPr dirty="0"/>
             </a:p>
           </p:txBody>
         </p:sp>
@@ -24501,7 +27676,7 @@
                 <a:buNone/>
               </a:pPr>
               <a:r>
-                <a:rPr lang="fr-CA" sz="1400">
+                <a:rPr lang="fr-CA" sz="1400" dirty="0">
                   <a:solidFill>
                     <a:schemeClr val="lt1"/>
                   </a:solidFill>
@@ -24512,7 +27687,7 @@
                 </a:rPr>
                 <a:t>1</a:t>
               </a:r>
-              <a:endParaRPr/>
+              <a:endParaRPr dirty="0"/>
             </a:p>
             <a:p>
               <a:pPr marL="0" marR="0" lvl="0" indent="0" algn="ctr" rtl="0">
@@ -24525,7 +27700,7 @@
                 <a:buNone/>
               </a:pPr>
               <a:r>
-                <a:rPr lang="fr-CA" sz="1400">
+                <a:rPr lang="fr-CA" sz="1400" dirty="0">
                   <a:solidFill>
                     <a:schemeClr val="lt1"/>
                   </a:solidFill>
@@ -24536,7 +27711,7 @@
                 </a:rPr>
                 <a:t>23</a:t>
               </a:r>
-              <a:endParaRPr/>
+              <a:endParaRPr dirty="0"/>
             </a:p>
             <a:p>
               <a:pPr marL="0" marR="0" lvl="0" indent="0" algn="ctr" rtl="0">
@@ -24549,7 +27724,7 @@
                 <a:buNone/>
               </a:pPr>
               <a:r>
-                <a:rPr lang="fr-CA" sz="1400">
+                <a:rPr lang="fr-CA" sz="1400" dirty="0">
                   <a:solidFill>
                     <a:schemeClr val="lt1"/>
                   </a:solidFill>
@@ -24560,7 +27735,7 @@
                 </a:rPr>
                 <a:t>4</a:t>
               </a:r>
-              <a:endParaRPr/>
+              <a:endParaRPr dirty="0"/>
             </a:p>
             <a:p>
               <a:pPr marL="0" marR="0" lvl="0" indent="0" algn="ctr" rtl="0">
@@ -24573,7 +27748,7 @@
                 <a:buNone/>
               </a:pPr>
               <a:r>
-                <a:rPr lang="fr-CA" sz="1400">
+                <a:rPr lang="fr-CA" sz="1400" dirty="0">
                   <a:solidFill>
                     <a:schemeClr val="lt1"/>
                   </a:solidFill>
@@ -24584,7 +27759,7 @@
                 </a:rPr>
                 <a:t>5</a:t>
               </a:r>
-              <a:endParaRPr/>
+              <a:endParaRPr dirty="0"/>
             </a:p>
           </p:txBody>
         </p:sp>
@@ -26140,7 +29315,7 @@
 </p:sld>
 </file>
 
-<file path=ppt/slides/slide29.xml><?xml version="1.0" encoding="utf-8"?>
+<file path=ppt/slides/slide31.xml><?xml version="1.0" encoding="utf-8"?>
 <p:sld xmlns:a="http://schemas.openxmlformats.org/drawingml/2006/main" xmlns:r="http://schemas.openxmlformats.org/officeDocument/2006/relationships" xmlns:p="http://schemas.openxmlformats.org/presentationml/2006/main">
   <p:cSld>
     <p:bg>
@@ -26505,7 +29680,7 @@
           <a:p>
             <a:fld id="{846B06B1-1179-491F-A487-8E0C403F7C13}" type="slidenum">
               <a:rPr lang="fr-CA" smtClean="0"/>
-              <a:t>29</a:t>
+              <a:t>31</a:t>
             </a:fld>
             <a:endParaRPr lang="fr-CA"/>
           </a:p>
@@ -26524,1392 +29699,7 @@
 </p:sld>
 </file>
 
-<file path=ppt/slides/slide3.xml><?xml version="1.0" encoding="utf-8"?>
-<p:sld xmlns:a="http://schemas.openxmlformats.org/drawingml/2006/main" xmlns:r="http://schemas.openxmlformats.org/officeDocument/2006/relationships" xmlns:p="http://schemas.openxmlformats.org/presentationml/2006/main">
-  <p:cSld>
-    <p:bg>
-      <p:bgPr>
-        <a:solidFill>
-          <a:srgbClr val="F5F5F5"/>
-        </a:solidFill>
-        <a:effectLst/>
-      </p:bgPr>
-    </p:bg>
-    <p:spTree>
-      <p:nvGrpSpPr>
-        <p:cNvPr id="1" name="">
-          <a:extLst>
-            <a:ext uri="{FF2B5EF4-FFF2-40B4-BE49-F238E27FC236}">
-              <a16:creationId xmlns:a16="http://schemas.microsoft.com/office/drawing/2014/main" id="{7AE562C1-DEBE-120A-68B7-9B3CEE9F8CF7}"/>
-            </a:ext>
-          </a:extLst>
-        </p:cNvPr>
-        <p:cNvGrpSpPr/>
-        <p:nvPr/>
-      </p:nvGrpSpPr>
-      <p:grpSpPr>
-        <a:xfrm>
-          <a:off x="0" y="0"/>
-          <a:ext cx="0" cy="0"/>
-          <a:chOff x="0" y="0"/>
-          <a:chExt cx="0" cy="0"/>
-        </a:xfrm>
-      </p:grpSpPr>
-      <p:sp>
-        <p:nvSpPr>
-          <p:cNvPr id="2" name="Title 1">
-            <a:extLst>
-              <a:ext uri="{FF2B5EF4-FFF2-40B4-BE49-F238E27FC236}">
-                <a16:creationId xmlns:a16="http://schemas.microsoft.com/office/drawing/2014/main" id="{9DD94D18-8A9D-0F83-56A0-3E229B4F30F4}"/>
-              </a:ext>
-            </a:extLst>
-          </p:cNvPr>
-          <p:cNvSpPr>
-            <a:spLocks noGrp="1"/>
-          </p:cNvSpPr>
-          <p:nvPr>
-            <p:ph type="title"/>
-          </p:nvPr>
-        </p:nvSpPr>
-        <p:spPr/>
-        <p:txBody>
-          <a:bodyPr/>
-          <a:lstStyle/>
-          <a:p>
-            <a:r>
-              <a:rPr lang="en-US" dirty="0">
-                <a:latin typeface="Arial Rounded MT Bold" panose="020F0704030504030204" pitchFamily="34" charset="0"/>
-              </a:rPr>
-              <a:t>Tests: Assertions</a:t>
-            </a:r>
-            <a:endParaRPr lang="fr-CA" dirty="0">
-              <a:latin typeface="Arial Rounded MT Bold" panose="020F0704030504030204" pitchFamily="34" charset="0"/>
-            </a:endParaRPr>
-          </a:p>
-        </p:txBody>
-      </p:sp>
-      <p:sp>
-        <p:nvSpPr>
-          <p:cNvPr id="3" name="Content Placeholder 2">
-            <a:extLst>
-              <a:ext uri="{FF2B5EF4-FFF2-40B4-BE49-F238E27FC236}">
-                <a16:creationId xmlns:a16="http://schemas.microsoft.com/office/drawing/2014/main" id="{4CF6E5EC-3D7E-2CEA-1F5C-3BC34F96A110}"/>
-              </a:ext>
-            </a:extLst>
-          </p:cNvPr>
-          <p:cNvSpPr>
-            <a:spLocks noGrp="1"/>
-          </p:cNvSpPr>
-          <p:nvPr>
-            <p:ph idx="1"/>
-          </p:nvPr>
-        </p:nvSpPr>
-        <p:spPr/>
-        <p:txBody>
-          <a:bodyPr>
-            <a:normAutofit/>
-          </a:bodyPr>
-          <a:lstStyle/>
-          <a:p>
-            <a:pPr algn="just"/>
-            <a:br>
-              <a:rPr lang="fr-CA" sz="1600" dirty="0">
-                <a:latin typeface="Consolas" panose="020B0609020204030204" pitchFamily="49" charset="0"/>
-              </a:rPr>
-            </a:br>
-            <a:endParaRPr lang="fr-CA" sz="1600" dirty="0">
-              <a:latin typeface="Consolas" panose="020B0609020204030204" pitchFamily="49" charset="0"/>
-            </a:endParaRPr>
-          </a:p>
-          <a:p>
-            <a:pPr algn="just">
-              <a:lnSpc>
-                <a:spcPct val="110000"/>
-              </a:lnSpc>
-            </a:pPr>
-            <a:r>
-              <a:rPr lang="fr-CA" sz="1600" dirty="0">
-                <a:latin typeface="Consolas" panose="020B0609020204030204" pitchFamily="49" charset="0"/>
-              </a:rPr>
-              <a:t>Lance une erreur (</a:t>
-            </a:r>
-            <a:r>
-              <a:rPr lang="fr-CA" sz="1600" dirty="0" err="1">
-                <a:latin typeface="Consolas" panose="020B0609020204030204" pitchFamily="49" charset="0"/>
-              </a:rPr>
-              <a:t>AssertionError</a:t>
-            </a:r>
-            <a:r>
-              <a:rPr lang="fr-CA" sz="1600" dirty="0">
-                <a:latin typeface="Consolas" panose="020B0609020204030204" pitchFamily="49" charset="0"/>
-              </a:rPr>
-              <a:t>) lorsqu'une condition est fausse</a:t>
-            </a:r>
-          </a:p>
-          <a:p>
-            <a:pPr lvl="1" algn="just">
-              <a:lnSpc>
-                <a:spcPct val="110000"/>
-              </a:lnSpc>
-            </a:pPr>
-            <a:r>
-              <a:rPr lang="fr-CA" sz="1600" dirty="0">
-                <a:latin typeface="Consolas" panose="020B0609020204030204" pitchFamily="49" charset="0"/>
-              </a:rPr>
-              <a:t>Modèle mental: </a:t>
-            </a:r>
-            <a:r>
-              <a:rPr lang="fr-CA" sz="1600" b="1" dirty="0">
-                <a:latin typeface="Consolas" panose="020B0609020204030204" pitchFamily="49" charset="0"/>
-              </a:rPr>
-              <a:t>Lorsqu'un test échoue</a:t>
-            </a:r>
-          </a:p>
-          <a:p>
-            <a:pPr algn="just">
-              <a:lnSpc>
-                <a:spcPct val="160000"/>
-              </a:lnSpc>
-            </a:pPr>
-            <a:r>
-              <a:rPr lang="fr-CA" sz="1600" dirty="0">
-                <a:latin typeface="Consolas" panose="020B0609020204030204" pitchFamily="49" charset="0"/>
-              </a:rPr>
-              <a:t>Pour </a:t>
-            </a:r>
-            <a:r>
-              <a:rPr lang="fr-CA" sz="1600" b="1" dirty="0">
-                <a:latin typeface="Consolas" panose="020B0609020204030204" pitchFamily="49" charset="0"/>
-              </a:rPr>
-              <a:t>ce qui doit absolument être vrai</a:t>
-            </a:r>
-            <a:endParaRPr lang="fr-CA" sz="1600" dirty="0">
-              <a:latin typeface="Consolas" panose="020B0609020204030204" pitchFamily="49" charset="0"/>
-            </a:endParaRPr>
-          </a:p>
-          <a:p>
-            <a:pPr algn="just">
-              <a:lnSpc>
-                <a:spcPct val="150000"/>
-              </a:lnSpc>
-            </a:pPr>
-            <a:r>
-              <a:rPr lang="fr-CA" sz="1600" dirty="0">
-                <a:latin typeface="Consolas" panose="020B0609020204030204" pitchFamily="49" charset="0"/>
-              </a:rPr>
-              <a:t>Peut être désactivé à l'exécution (</a:t>
-            </a:r>
-            <a:r>
-              <a:rPr lang="fr-CA" sz="1600" b="1" dirty="0">
-                <a:latin typeface="Consolas" panose="020B0609020204030204" pitchFamily="49" charset="0"/>
-              </a:rPr>
-              <a:t>python -O</a:t>
-            </a:r>
-            <a:r>
-              <a:rPr lang="fr-CA" sz="1600" dirty="0">
-                <a:latin typeface="Consolas" panose="020B0609020204030204" pitchFamily="49" charset="0"/>
-              </a:rPr>
-              <a:t>) ... sauf pour la NASA</a:t>
-            </a:r>
-          </a:p>
-          <a:p>
-            <a:pPr marL="0" indent="0" algn="ctr">
-              <a:buNone/>
-            </a:pPr>
-            <a:r>
-              <a:rPr lang="fr-CA" sz="1400" dirty="0">
-                <a:latin typeface="Consolas" panose="020B0609020204030204" pitchFamily="49" charset="0"/>
-                <a:hlinkClick r:id="rId2"/>
-              </a:rPr>
-              <a:t>https://fr.wikipedia.org/wiki/The_Power_of_10:_Rules_for_Developing_Safety-Critical_Code</a:t>
-            </a:r>
-            <a:endParaRPr lang="fr-CA" sz="1400" dirty="0">
-              <a:latin typeface="Consolas" panose="020B0609020204030204" pitchFamily="49" charset="0"/>
-            </a:endParaRPr>
-          </a:p>
-        </p:txBody>
-      </p:sp>
-      <p:sp>
-        <p:nvSpPr>
-          <p:cNvPr id="5" name="Slide Number Placeholder 4">
-            <a:extLst>
-              <a:ext uri="{FF2B5EF4-FFF2-40B4-BE49-F238E27FC236}">
-                <a16:creationId xmlns:a16="http://schemas.microsoft.com/office/drawing/2014/main" id="{1FA2DB27-CAC8-7766-F85F-45770DF3095A}"/>
-              </a:ext>
-            </a:extLst>
-          </p:cNvPr>
-          <p:cNvSpPr>
-            <a:spLocks noGrp="1"/>
-          </p:cNvSpPr>
-          <p:nvPr>
-            <p:ph type="sldNum" sz="quarter" idx="12"/>
-          </p:nvPr>
-        </p:nvSpPr>
-        <p:spPr/>
-        <p:txBody>
-          <a:bodyPr/>
-          <a:lstStyle/>
-          <a:p>
-            <a:fld id="{846B06B1-1179-491F-A487-8E0C403F7C13}" type="slidenum">
-              <a:rPr lang="fr-CA" smtClean="0"/>
-              <a:t>3</a:t>
-            </a:fld>
-            <a:endParaRPr lang="fr-CA" dirty="0"/>
-          </a:p>
-        </p:txBody>
-      </p:sp>
-      <p:sp>
-        <p:nvSpPr>
-          <p:cNvPr id="4" name="TextBox 3">
-            <a:extLst>
-              <a:ext uri="{FF2B5EF4-FFF2-40B4-BE49-F238E27FC236}">
-                <a16:creationId xmlns:a16="http://schemas.microsoft.com/office/drawing/2014/main" id="{57A8D393-74C1-0C40-F408-06525D65E091}"/>
-              </a:ext>
-            </a:extLst>
-          </p:cNvPr>
-          <p:cNvSpPr txBox="1"/>
-          <p:nvPr/>
-        </p:nvSpPr>
-        <p:spPr>
-          <a:xfrm>
-            <a:off x="2230873" y="1728788"/>
-            <a:ext cx="7730249" cy="442630"/>
-          </a:xfrm>
-          <a:prstGeom prst="roundRect">
-            <a:avLst/>
-          </a:prstGeom>
-          <a:solidFill>
-            <a:srgbClr val="FFF2CC">
-              <a:alpha val="49803"/>
-            </a:srgbClr>
-          </a:solidFill>
-          <a:ln w="9525" cap="flat" cmpd="sng">
-            <a:solidFill>
-              <a:schemeClr val="dk1"/>
-            </a:solidFill>
-            <a:prstDash val="solid"/>
-            <a:round/>
-            <a:headEnd type="none" w="sm" len="sm"/>
-            <a:tailEnd type="none" w="sm" len="sm"/>
-          </a:ln>
-        </p:spPr>
-        <p:txBody>
-          <a:bodyPr spcFirstLastPara="1" wrap="square" lIns="91425" tIns="45700" rIns="91425" bIns="45700" anchor="t" anchorCtr="0">
-            <a:spAutoFit/>
-          </a:bodyPr>
-          <a:lstStyle>
-            <a:defPPr>
-              <a:defRPr lang="en-US"/>
-            </a:defPPr>
-            <a:lvl1pPr marR="0" lvl="0" indent="0" algn="ctr">
-              <a:lnSpc>
-                <a:spcPct val="100000"/>
-              </a:lnSpc>
-              <a:spcBef>
-                <a:spcPts val="0"/>
-              </a:spcBef>
-              <a:spcAft>
-                <a:spcPts val="0"/>
-              </a:spcAft>
-              <a:buClr>
-                <a:srgbClr val="000000"/>
-              </a:buClr>
-              <a:buSzPts val="1400"/>
-              <a:buFont typeface="Consolas"/>
-              <a:buNone/>
-              <a:defRPr sz="2800" b="1" i="0" u="none" strike="noStrike" cap="none">
-                <a:solidFill>
-                  <a:srgbClr val="000000"/>
-                </a:solidFill>
-                <a:latin typeface="Consolas"/>
-                <a:ea typeface="Consolas"/>
-                <a:cs typeface="Consolas"/>
-              </a:defRPr>
-            </a:lvl1pPr>
-          </a:lstStyle>
-          <a:p>
-            <a:r>
-              <a:rPr lang="en-US" sz="2000" dirty="0"/>
-              <a:t>assert </a:t>
-            </a:r>
-            <a:r>
-              <a:rPr lang="en-US" sz="2000" dirty="0" err="1"/>
-              <a:t>expression_booleenne</a:t>
-            </a:r>
-            <a:r>
-              <a:rPr lang="en-US" sz="2000" dirty="0"/>
-              <a:t>, </a:t>
-            </a:r>
-            <a:r>
-              <a:rPr lang="en-US" sz="2000" dirty="0" err="1"/>
-              <a:t>message_si_faux</a:t>
-            </a:r>
-            <a:endParaRPr lang="en-US" sz="2000" dirty="0"/>
-          </a:p>
-        </p:txBody>
-      </p:sp>
-      <p:grpSp>
-        <p:nvGrpSpPr>
-          <p:cNvPr id="6" name="Google Shape;354;p18">
-            <a:extLst>
-              <a:ext uri="{FF2B5EF4-FFF2-40B4-BE49-F238E27FC236}">
-                <a16:creationId xmlns:a16="http://schemas.microsoft.com/office/drawing/2014/main" id="{530A920A-ECA4-8FCD-A08E-677BC9DD3228}"/>
-              </a:ext>
-            </a:extLst>
-          </p:cNvPr>
-          <p:cNvGrpSpPr/>
-          <p:nvPr/>
-        </p:nvGrpSpPr>
-        <p:grpSpPr>
-          <a:xfrm>
-            <a:off x="2306240" y="4664961"/>
-            <a:ext cx="7579514" cy="1512002"/>
-            <a:chOff x="6682372" y="3766184"/>
-            <a:chExt cx="8984825" cy="691201"/>
-          </a:xfrm>
-        </p:grpSpPr>
-        <p:sp>
-          <p:nvSpPr>
-            <p:cNvPr id="7" name="Google Shape;355;p18">
-              <a:extLst>
-                <a:ext uri="{FF2B5EF4-FFF2-40B4-BE49-F238E27FC236}">
-                  <a16:creationId xmlns:a16="http://schemas.microsoft.com/office/drawing/2014/main" id="{87D4FF6B-A94D-24FE-EF28-D0E429EA4110}"/>
-                </a:ext>
-              </a:extLst>
-            </p:cNvPr>
-            <p:cNvSpPr/>
-            <p:nvPr/>
-          </p:nvSpPr>
-          <p:spPr>
-            <a:xfrm>
-              <a:off x="6682372" y="3766184"/>
-              <a:ext cx="256567" cy="691200"/>
-            </a:xfrm>
-            <a:prstGeom prst="rect">
-              <a:avLst/>
-            </a:prstGeom>
-            <a:solidFill>
-              <a:srgbClr val="7F7F7F"/>
-            </a:solidFill>
-            <a:ln w="12700" cap="flat" cmpd="sng">
-              <a:solidFill>
-                <a:schemeClr val="dk1"/>
-              </a:solidFill>
-              <a:prstDash val="solid"/>
-              <a:miter lim="800000"/>
-              <a:headEnd type="none" w="sm" len="sm"/>
-              <a:tailEnd type="none" w="sm" len="sm"/>
-            </a:ln>
-          </p:spPr>
-          <p:txBody>
-            <a:bodyPr spcFirstLastPara="1" wrap="square" lIns="91425" tIns="45700" rIns="91425" bIns="45700" anchor="ctr" anchorCtr="0">
-              <a:noAutofit/>
-            </a:bodyPr>
-            <a:lstStyle/>
-            <a:p>
-              <a:pPr marL="0" marR="0" lvl="0" indent="0" algn="ctr" rtl="0">
-                <a:spcBef>
-                  <a:spcPts val="0"/>
-                </a:spcBef>
-                <a:spcAft>
-                  <a:spcPts val="0"/>
-                </a:spcAft>
-                <a:buNone/>
-              </a:pPr>
-              <a:r>
-                <a:rPr lang="fr-CA" sz="1400" dirty="0">
-                  <a:solidFill>
-                    <a:schemeClr val="lt1"/>
-                  </a:solidFill>
-                  <a:latin typeface="Calibri"/>
-                  <a:ea typeface="Calibri"/>
-                  <a:cs typeface="Calibri"/>
-                  <a:sym typeface="Calibri"/>
-                </a:rPr>
-                <a:t>1</a:t>
-              </a:r>
-              <a:endParaRPr dirty="0"/>
-            </a:p>
-            <a:p>
-              <a:pPr marL="0" marR="0" lvl="0" indent="0" algn="ctr" rtl="0">
-                <a:spcBef>
-                  <a:spcPts val="0"/>
-                </a:spcBef>
-                <a:spcAft>
-                  <a:spcPts val="0"/>
-                </a:spcAft>
-                <a:buNone/>
-              </a:pPr>
-              <a:r>
-                <a:rPr lang="fr-CA" sz="1400" dirty="0">
-                  <a:solidFill>
-                    <a:schemeClr val="lt1"/>
-                  </a:solidFill>
-                  <a:latin typeface="Calibri"/>
-                  <a:ea typeface="Calibri"/>
-                  <a:cs typeface="Calibri"/>
-                  <a:sym typeface="Calibri"/>
-                </a:rPr>
-                <a:t>23</a:t>
-              </a:r>
-              <a:endParaRPr dirty="0"/>
-            </a:p>
-            <a:p>
-              <a:pPr marL="0" marR="0" lvl="0" indent="0" algn="ctr" rtl="0">
-                <a:spcBef>
-                  <a:spcPts val="0"/>
-                </a:spcBef>
-                <a:spcAft>
-                  <a:spcPts val="0"/>
-                </a:spcAft>
-                <a:buNone/>
-              </a:pPr>
-              <a:r>
-                <a:rPr lang="fr-CA" sz="1400" dirty="0">
-                  <a:solidFill>
-                    <a:schemeClr val="lt1"/>
-                  </a:solidFill>
-                  <a:latin typeface="Calibri"/>
-                  <a:ea typeface="Calibri"/>
-                  <a:cs typeface="Calibri"/>
-                  <a:sym typeface="Calibri"/>
-                </a:rPr>
-                <a:t>4</a:t>
-              </a:r>
-              <a:endParaRPr dirty="0"/>
-            </a:p>
-            <a:p>
-              <a:pPr marL="0" marR="0" lvl="0" indent="0" algn="ctr" rtl="0">
-                <a:spcBef>
-                  <a:spcPts val="0"/>
-                </a:spcBef>
-                <a:spcAft>
-                  <a:spcPts val="0"/>
-                </a:spcAft>
-                <a:buNone/>
-              </a:pPr>
-              <a:r>
-                <a:rPr lang="fr-CA" sz="1400" dirty="0">
-                  <a:solidFill>
-                    <a:schemeClr val="lt1"/>
-                  </a:solidFill>
-                  <a:latin typeface="Calibri"/>
-                  <a:ea typeface="Calibri"/>
-                  <a:cs typeface="Calibri"/>
-                  <a:sym typeface="Calibri"/>
-                </a:rPr>
-                <a:t>5</a:t>
-              </a:r>
-            </a:p>
-            <a:p>
-              <a:pPr marL="0" marR="0" lvl="0" indent="0" algn="ctr" rtl="0">
-                <a:spcBef>
-                  <a:spcPts val="0"/>
-                </a:spcBef>
-                <a:spcAft>
-                  <a:spcPts val="0"/>
-                </a:spcAft>
-                <a:buNone/>
-              </a:pPr>
-              <a:r>
-                <a:rPr lang="fr-CA" sz="1400" dirty="0">
-                  <a:solidFill>
-                    <a:schemeClr val="lt1"/>
-                  </a:solidFill>
-                  <a:latin typeface="Calibri"/>
-                  <a:ea typeface="Calibri"/>
-                  <a:cs typeface="Calibri"/>
-                  <a:sym typeface="Calibri"/>
-                </a:rPr>
-                <a:t>6</a:t>
-              </a:r>
-              <a:endParaRPr dirty="0"/>
-            </a:p>
-          </p:txBody>
-        </p:sp>
-        <p:sp>
-          <p:nvSpPr>
-            <p:cNvPr id="8" name="Google Shape;356;p18">
-              <a:extLst>
-                <a:ext uri="{FF2B5EF4-FFF2-40B4-BE49-F238E27FC236}">
-                  <a16:creationId xmlns:a16="http://schemas.microsoft.com/office/drawing/2014/main" id="{4C789759-180C-72BA-D687-8BF5005AF9F0}"/>
-                </a:ext>
-              </a:extLst>
-            </p:cNvPr>
-            <p:cNvSpPr/>
-            <p:nvPr/>
-          </p:nvSpPr>
-          <p:spPr>
-            <a:xfrm>
-              <a:off x="6938939" y="3766185"/>
-              <a:ext cx="8728258" cy="691200"/>
-            </a:xfrm>
-            <a:prstGeom prst="rect">
-              <a:avLst/>
-            </a:prstGeom>
-            <a:solidFill>
-              <a:schemeClr val="dk1"/>
-            </a:solidFill>
-            <a:ln w="12700" cap="flat" cmpd="sng">
-              <a:solidFill>
-                <a:schemeClr val="dk1"/>
-              </a:solidFill>
-              <a:prstDash val="solid"/>
-              <a:miter lim="800000"/>
-              <a:headEnd type="none" w="sm" len="sm"/>
-              <a:tailEnd type="none" w="sm" len="sm"/>
-            </a:ln>
-          </p:spPr>
-          <p:txBody>
-            <a:bodyPr spcFirstLastPara="1" wrap="square" lIns="91425" tIns="45700" rIns="91425" bIns="45700" anchor="ctr" anchorCtr="0">
-              <a:noAutofit/>
-            </a:bodyPr>
-            <a:lstStyle/>
-            <a:p>
-              <a:r>
-                <a:rPr lang="en-CA" sz="1400" b="1" dirty="0">
-                  <a:solidFill>
-                    <a:schemeClr val="bg1"/>
-                  </a:solidFill>
-                  <a:latin typeface="Consolas" panose="020B0609020204030204" pitchFamily="49" charset="0"/>
-                </a:rPr>
-                <a:t>&gt;&gt;&gt; valeur_1 = int(input('</a:t>
-              </a:r>
-              <a:r>
-                <a:rPr lang="en-CA" sz="1400" b="1" dirty="0" err="1">
-                  <a:solidFill>
-                    <a:schemeClr val="bg1"/>
-                  </a:solidFill>
-                  <a:latin typeface="Consolas" panose="020B0609020204030204" pitchFamily="49" charset="0"/>
-                </a:rPr>
-                <a:t>Saisir</a:t>
-              </a:r>
-              <a:r>
-                <a:rPr lang="en-CA" sz="1400" b="1" dirty="0">
-                  <a:solidFill>
-                    <a:schemeClr val="bg1"/>
-                  </a:solidFill>
-                  <a:latin typeface="Consolas" panose="020B0609020204030204" pitchFamily="49" charset="0"/>
-                </a:rPr>
-                <a:t> un </a:t>
-              </a:r>
-              <a:r>
-                <a:rPr lang="en-CA" sz="1400" b="1" dirty="0" err="1">
-                  <a:solidFill>
-                    <a:schemeClr val="bg1"/>
-                  </a:solidFill>
-                  <a:latin typeface="Consolas" panose="020B0609020204030204" pitchFamily="49" charset="0"/>
-                </a:rPr>
-                <a:t>entier</a:t>
-              </a:r>
-              <a:r>
-                <a:rPr lang="en-CA" sz="1400" b="1" dirty="0">
-                  <a:solidFill>
-                    <a:schemeClr val="bg1"/>
-                  </a:solidFill>
-                  <a:latin typeface="Consolas" panose="020B0609020204030204" pitchFamily="49" charset="0"/>
-                </a:rPr>
-                <a:t>: '))</a:t>
-              </a:r>
-            </a:p>
-            <a:p>
-              <a:r>
-                <a:rPr lang="en-CA" sz="1400" b="1" dirty="0" err="1">
-                  <a:solidFill>
-                    <a:schemeClr val="bg1"/>
-                  </a:solidFill>
-                  <a:latin typeface="Consolas" panose="020B0609020204030204" pitchFamily="49" charset="0"/>
-                </a:rPr>
-                <a:t>Saisir</a:t>
-              </a:r>
-              <a:r>
-                <a:rPr lang="en-CA" sz="1400" b="1" dirty="0">
-                  <a:solidFill>
-                    <a:schemeClr val="bg1"/>
-                  </a:solidFill>
-                  <a:latin typeface="Consolas" panose="020B0609020204030204" pitchFamily="49" charset="0"/>
-                </a:rPr>
-                <a:t> un </a:t>
-              </a:r>
-              <a:r>
-                <a:rPr lang="en-CA" sz="1400" b="1" dirty="0" err="1">
-                  <a:solidFill>
-                    <a:schemeClr val="bg1"/>
-                  </a:solidFill>
-                  <a:latin typeface="Consolas" panose="020B0609020204030204" pitchFamily="49" charset="0"/>
-                </a:rPr>
-                <a:t>entier</a:t>
-              </a:r>
-              <a:r>
-                <a:rPr lang="en-CA" sz="1400" b="1" dirty="0">
-                  <a:solidFill>
-                    <a:schemeClr val="bg1"/>
-                  </a:solidFill>
-                  <a:latin typeface="Consolas" panose="020B0609020204030204" pitchFamily="49" charset="0"/>
-                </a:rPr>
-                <a:t>: 1</a:t>
-              </a:r>
-            </a:p>
-            <a:p>
-              <a:r>
-                <a:rPr lang="en-CA" sz="1400" b="1" dirty="0">
-                  <a:solidFill>
-                    <a:schemeClr val="bg1"/>
-                  </a:solidFill>
-                  <a:latin typeface="Consolas" panose="020B0609020204030204" pitchFamily="49" charset="0"/>
-                </a:rPr>
-                <a:t>&gt;&gt;&gt; valeur_2 = int(input('</a:t>
-              </a:r>
-              <a:r>
-                <a:rPr lang="en-CA" sz="1400" b="1" dirty="0" err="1">
-                  <a:solidFill>
-                    <a:schemeClr val="bg1"/>
-                  </a:solidFill>
-                  <a:latin typeface="Consolas" panose="020B0609020204030204" pitchFamily="49" charset="0"/>
-                </a:rPr>
-                <a:t>Saisir</a:t>
-              </a:r>
-              <a:r>
-                <a:rPr lang="en-CA" sz="1400" b="1" dirty="0">
-                  <a:solidFill>
-                    <a:schemeClr val="bg1"/>
-                  </a:solidFill>
-                  <a:latin typeface="Consolas" panose="020B0609020204030204" pitchFamily="49" charset="0"/>
-                </a:rPr>
-                <a:t> un </a:t>
-              </a:r>
-              <a:r>
-                <a:rPr lang="en-CA" sz="1400" b="1" dirty="0" err="1">
-                  <a:solidFill>
-                    <a:schemeClr val="bg1"/>
-                  </a:solidFill>
-                  <a:latin typeface="Consolas" panose="020B0609020204030204" pitchFamily="49" charset="0"/>
-                </a:rPr>
-                <a:t>entier</a:t>
-              </a:r>
-              <a:r>
-                <a:rPr lang="en-CA" sz="1400" b="1" dirty="0">
-                  <a:solidFill>
-                    <a:schemeClr val="bg1"/>
-                  </a:solidFill>
-                  <a:latin typeface="Consolas" panose="020B0609020204030204" pitchFamily="49" charset="0"/>
-                </a:rPr>
-                <a:t> diff</a:t>
-              </a:r>
-              <a:r>
-                <a:rPr lang="fr-CA" sz="1400" b="1" dirty="0" err="1">
-                  <a:solidFill>
-                    <a:schemeClr val="bg1"/>
-                  </a:solidFill>
-                  <a:latin typeface="Consolas" panose="020B0609020204030204" pitchFamily="49" charset="0"/>
-                </a:rPr>
-                <a:t>érent</a:t>
-              </a:r>
-              <a:r>
-                <a:rPr lang="fr-CA" sz="1400" b="1" dirty="0">
-                  <a:solidFill>
-                    <a:schemeClr val="bg1"/>
-                  </a:solidFill>
-                  <a:latin typeface="Consolas" panose="020B0609020204030204" pitchFamily="49" charset="0"/>
-                </a:rPr>
-                <a:t>: '))</a:t>
-              </a:r>
-            </a:p>
-            <a:p>
-              <a:r>
-                <a:rPr lang="en-CA" sz="1400" b="1" dirty="0" err="1">
-                  <a:solidFill>
-                    <a:schemeClr val="bg1"/>
-                  </a:solidFill>
-                  <a:latin typeface="Consolas" panose="020B0609020204030204" pitchFamily="49" charset="0"/>
-                </a:rPr>
-                <a:t>Saisir</a:t>
-              </a:r>
-              <a:r>
-                <a:rPr lang="en-CA" sz="1400" b="1" dirty="0">
-                  <a:solidFill>
-                    <a:schemeClr val="bg1"/>
-                  </a:solidFill>
-                  <a:latin typeface="Consolas" panose="020B0609020204030204" pitchFamily="49" charset="0"/>
-                </a:rPr>
-                <a:t> un </a:t>
-              </a:r>
-              <a:r>
-                <a:rPr lang="en-CA" sz="1400" b="1" dirty="0" err="1">
-                  <a:solidFill>
-                    <a:schemeClr val="bg1"/>
-                  </a:solidFill>
-                  <a:latin typeface="Consolas" panose="020B0609020204030204" pitchFamily="49" charset="0"/>
-                </a:rPr>
-                <a:t>entier</a:t>
-              </a:r>
-              <a:r>
-                <a:rPr lang="en-CA" sz="1400" b="1" dirty="0">
-                  <a:solidFill>
-                    <a:schemeClr val="bg1"/>
-                  </a:solidFill>
-                  <a:latin typeface="Consolas" panose="020B0609020204030204" pitchFamily="49" charset="0"/>
-                </a:rPr>
-                <a:t> diff</a:t>
-              </a:r>
-              <a:r>
-                <a:rPr lang="fr-CA" sz="1400" b="1" dirty="0" err="1">
-                  <a:solidFill>
-                    <a:schemeClr val="bg1"/>
-                  </a:solidFill>
-                  <a:latin typeface="Consolas" panose="020B0609020204030204" pitchFamily="49" charset="0"/>
-                </a:rPr>
-                <a:t>érent</a:t>
-              </a:r>
-              <a:r>
-                <a:rPr lang="fr-CA" sz="1400" b="1" dirty="0">
-                  <a:solidFill>
-                    <a:schemeClr val="bg1"/>
-                  </a:solidFill>
-                  <a:latin typeface="Consolas" panose="020B0609020204030204" pitchFamily="49" charset="0"/>
-                </a:rPr>
-                <a:t>: 1</a:t>
-              </a:r>
-            </a:p>
-            <a:p>
-              <a:r>
-                <a:rPr lang="en-CA" sz="1400" b="1" dirty="0">
-                  <a:solidFill>
-                    <a:schemeClr val="bg1"/>
-                  </a:solidFill>
-                  <a:latin typeface="Consolas" panose="020B0609020204030204" pitchFamily="49" charset="0"/>
-                </a:rPr>
-                <a:t>&gt;&gt;&gt; </a:t>
-              </a:r>
-              <a:r>
-                <a:rPr lang="en-CA" sz="1400" b="1" dirty="0">
-                  <a:solidFill>
-                    <a:srgbClr val="FF2500"/>
-                  </a:solidFill>
-                  <a:latin typeface="Consolas" panose="020B0609020204030204" pitchFamily="49" charset="0"/>
-                </a:rPr>
-                <a:t>assert</a:t>
-              </a:r>
-              <a:r>
-                <a:rPr lang="en-CA" sz="1400" b="1" dirty="0">
-                  <a:solidFill>
-                    <a:schemeClr val="bg1"/>
-                  </a:solidFill>
-                  <a:latin typeface="Consolas" panose="020B0609020204030204" pitchFamily="49" charset="0"/>
-                </a:rPr>
-                <a:t> valeur_1 != valeur_2, 'Les </a:t>
-              </a:r>
-              <a:r>
-                <a:rPr lang="en-CA" sz="1400" b="1" dirty="0" err="1">
-                  <a:solidFill>
-                    <a:schemeClr val="bg1"/>
-                  </a:solidFill>
-                  <a:latin typeface="Consolas" panose="020B0609020204030204" pitchFamily="49" charset="0"/>
-                </a:rPr>
-                <a:t>valeurs</a:t>
-              </a:r>
-              <a:r>
-                <a:rPr lang="en-CA" sz="1400" b="1" dirty="0">
-                  <a:solidFill>
-                    <a:schemeClr val="bg1"/>
-                  </a:solidFill>
-                  <a:latin typeface="Consolas" panose="020B0609020204030204" pitchFamily="49" charset="0"/>
-                </a:rPr>
-                <a:t> </a:t>
-              </a:r>
-              <a:r>
-                <a:rPr lang="en-CA" sz="1400" b="1" dirty="0" err="1">
-                  <a:solidFill>
-                    <a:schemeClr val="bg1"/>
-                  </a:solidFill>
-                  <a:latin typeface="Consolas" panose="020B0609020204030204" pitchFamily="49" charset="0"/>
-                </a:rPr>
-                <a:t>doivent</a:t>
-              </a:r>
-              <a:r>
-                <a:rPr lang="en-CA" sz="1400" b="1" dirty="0">
-                  <a:solidFill>
-                    <a:schemeClr val="bg1"/>
-                  </a:solidFill>
-                  <a:latin typeface="Consolas" panose="020B0609020204030204" pitchFamily="49" charset="0"/>
-                </a:rPr>
-                <a:t> </a:t>
-              </a:r>
-              <a:r>
-                <a:rPr lang="en-CA" sz="1400" b="1" dirty="0" err="1">
-                  <a:solidFill>
-                    <a:schemeClr val="bg1"/>
-                  </a:solidFill>
-                  <a:latin typeface="Consolas" panose="020B0609020204030204" pitchFamily="49" charset="0"/>
-                </a:rPr>
-                <a:t>être</a:t>
-              </a:r>
-              <a:r>
-                <a:rPr lang="en-CA" sz="1400" b="1" dirty="0">
-                  <a:solidFill>
-                    <a:schemeClr val="bg1"/>
-                  </a:solidFill>
-                  <a:latin typeface="Consolas" panose="020B0609020204030204" pitchFamily="49" charset="0"/>
-                </a:rPr>
-                <a:t> </a:t>
-              </a:r>
-              <a:r>
-                <a:rPr lang="en-CA" sz="1400" b="1" dirty="0" err="1">
-                  <a:solidFill>
-                    <a:schemeClr val="bg1"/>
-                  </a:solidFill>
-                  <a:latin typeface="Consolas" panose="020B0609020204030204" pitchFamily="49" charset="0"/>
-                </a:rPr>
-                <a:t>différentes</a:t>
-              </a:r>
-              <a:r>
-                <a:rPr lang="en-CA" sz="1400" b="1" dirty="0">
-                  <a:solidFill>
-                    <a:schemeClr val="bg1"/>
-                  </a:solidFill>
-                  <a:latin typeface="Consolas" panose="020B0609020204030204" pitchFamily="49" charset="0"/>
-                </a:rPr>
-                <a:t>'</a:t>
-              </a:r>
-            </a:p>
-            <a:p>
-              <a:pPr algn="just"/>
-              <a:r>
-                <a:rPr lang="en-CA" sz="1400" b="1" dirty="0" err="1">
-                  <a:solidFill>
-                    <a:schemeClr val="bg1"/>
-                  </a:solidFill>
-                  <a:latin typeface="Consolas" panose="020B0609020204030204" pitchFamily="49" charset="0"/>
-                </a:rPr>
-                <a:t>AssertionError</a:t>
-              </a:r>
-              <a:r>
-                <a:rPr lang="en-CA" sz="1400" b="1" dirty="0">
-                  <a:solidFill>
-                    <a:schemeClr val="bg1"/>
-                  </a:solidFill>
-                  <a:latin typeface="Consolas" panose="020B0609020204030204" pitchFamily="49" charset="0"/>
-                </a:rPr>
-                <a:t>: Les </a:t>
-              </a:r>
-              <a:r>
-                <a:rPr lang="en-CA" sz="1400" b="1" dirty="0" err="1">
-                  <a:solidFill>
-                    <a:schemeClr val="bg1"/>
-                  </a:solidFill>
-                  <a:latin typeface="Consolas" panose="020B0609020204030204" pitchFamily="49" charset="0"/>
-                </a:rPr>
-                <a:t>valeurs</a:t>
-              </a:r>
-              <a:r>
-                <a:rPr lang="en-CA" sz="1400" b="1" dirty="0">
-                  <a:solidFill>
-                    <a:schemeClr val="bg1"/>
-                  </a:solidFill>
-                  <a:latin typeface="Consolas" panose="020B0609020204030204" pitchFamily="49" charset="0"/>
-                </a:rPr>
-                <a:t> </a:t>
-              </a:r>
-              <a:r>
-                <a:rPr lang="en-CA" sz="1400" b="1" dirty="0" err="1">
-                  <a:solidFill>
-                    <a:schemeClr val="bg1"/>
-                  </a:solidFill>
-                  <a:latin typeface="Consolas" panose="020B0609020204030204" pitchFamily="49" charset="0"/>
-                </a:rPr>
-                <a:t>doivent</a:t>
-              </a:r>
-              <a:r>
-                <a:rPr lang="en-CA" sz="1400" b="1" dirty="0">
-                  <a:solidFill>
-                    <a:schemeClr val="bg1"/>
-                  </a:solidFill>
-                  <a:latin typeface="Consolas" panose="020B0609020204030204" pitchFamily="49" charset="0"/>
-                </a:rPr>
-                <a:t> </a:t>
-              </a:r>
-              <a:r>
-                <a:rPr lang="en-CA" sz="1400" b="1" dirty="0" err="1">
-                  <a:solidFill>
-                    <a:schemeClr val="bg1"/>
-                  </a:solidFill>
-                  <a:latin typeface="Consolas" panose="020B0609020204030204" pitchFamily="49" charset="0"/>
-                </a:rPr>
-                <a:t>être</a:t>
-              </a:r>
-              <a:r>
-                <a:rPr lang="en-CA" sz="1400" b="1" dirty="0">
-                  <a:solidFill>
-                    <a:schemeClr val="bg1"/>
-                  </a:solidFill>
-                  <a:latin typeface="Consolas" panose="020B0609020204030204" pitchFamily="49" charset="0"/>
-                </a:rPr>
-                <a:t> </a:t>
-              </a:r>
-              <a:r>
-                <a:rPr lang="en-CA" sz="1400" b="1" dirty="0" err="1">
-                  <a:solidFill>
-                    <a:schemeClr val="bg1"/>
-                  </a:solidFill>
-                  <a:latin typeface="Consolas" panose="020B0609020204030204" pitchFamily="49" charset="0"/>
-                </a:rPr>
-                <a:t>différentes</a:t>
-              </a:r>
-              <a:endParaRPr lang="fr-CA" sz="1400" dirty="0">
-                <a:solidFill>
-                  <a:schemeClr val="bg1"/>
-                </a:solidFill>
-                <a:latin typeface="Consolas" panose="020B0609020204030204" pitchFamily="49" charset="0"/>
-              </a:endParaRPr>
-            </a:p>
-          </p:txBody>
-        </p:sp>
-      </p:grpSp>
-    </p:spTree>
-    <p:extLst>
-      <p:ext uri="{BB962C8B-B14F-4D97-AF65-F5344CB8AC3E}">
-        <p14:creationId xmlns:p14="http://schemas.microsoft.com/office/powerpoint/2010/main" val="3696665868"/>
-      </p:ext>
-    </p:extLst>
-  </p:cSld>
-  <p:clrMapOvr>
-    <a:masterClrMapping/>
-  </p:clrMapOvr>
-  <p:timing>
-    <p:tnLst>
-      <p:par>
-        <p:cTn id="1" dur="indefinite" restart="never" nodeType="tmRoot">
-          <p:childTnLst>
-            <p:seq concurrent="1" nextAc="seek">
-              <p:cTn id="2" dur="indefinite" nodeType="mainSeq">
-                <p:childTnLst>
-                  <p:par>
-                    <p:cTn id="3" fill="hold">
-                      <p:stCondLst>
-                        <p:cond delay="indefinite"/>
-                      </p:stCondLst>
-                      <p:childTnLst>
-                        <p:par>
-                          <p:cTn id="4" fill="hold">
-                            <p:stCondLst>
-                              <p:cond delay="0"/>
-                            </p:stCondLst>
-                            <p:childTnLst>
-                              <p:par>
-                                <p:cTn id="5" presetID="10" presetClass="entr" presetSubtype="0" fill="hold" nodeType="clickEffect">
-                                  <p:stCondLst>
-                                    <p:cond delay="0"/>
-                                  </p:stCondLst>
-                                  <p:childTnLst>
-                                    <p:set>
-                                      <p:cBhvr>
-                                        <p:cTn id="6" dur="1" fill="hold">
-                                          <p:stCondLst>
-                                            <p:cond delay="0"/>
-                                          </p:stCondLst>
-                                        </p:cTn>
-                                        <p:tgtEl>
-                                          <p:spTgt spid="3">
-                                            <p:txEl>
-                                              <p:pRg st="0" end="0"/>
-                                            </p:txEl>
-                                          </p:spTgt>
-                                        </p:tgtEl>
-                                        <p:attrNameLst>
-                                          <p:attrName>style.visibility</p:attrName>
-                                        </p:attrNameLst>
-                                      </p:cBhvr>
-                                      <p:to>
-                                        <p:strVal val="visible"/>
-                                      </p:to>
-                                    </p:set>
-                                    <p:animEffect transition="in" filter="fade">
-                                      <p:cBhvr>
-                                        <p:cTn id="7" dur="500"/>
-                                        <p:tgtEl>
-                                          <p:spTgt spid="3">
-                                            <p:txEl>
-                                              <p:pRg st="0" end="0"/>
-                                            </p:txEl>
-                                          </p:spTgt>
-                                        </p:tgtEl>
-                                      </p:cBhvr>
-                                    </p:animEffect>
-                                  </p:childTnLst>
-                                </p:cTn>
-                              </p:par>
-                            </p:childTnLst>
-                          </p:cTn>
-                        </p:par>
-                      </p:childTnLst>
-                    </p:cTn>
-                  </p:par>
-                  <p:par>
-                    <p:cTn id="8" fill="hold">
-                      <p:stCondLst>
-                        <p:cond delay="indefinite"/>
-                      </p:stCondLst>
-                      <p:childTnLst>
-                        <p:par>
-                          <p:cTn id="9" fill="hold">
-                            <p:stCondLst>
-                              <p:cond delay="0"/>
-                            </p:stCondLst>
-                            <p:childTnLst>
-                              <p:par>
-                                <p:cTn id="10" presetID="10" presetClass="entr" presetSubtype="0" fill="hold" nodeType="clickEffect">
-                                  <p:stCondLst>
-                                    <p:cond delay="0"/>
-                                  </p:stCondLst>
-                                  <p:childTnLst>
-                                    <p:set>
-                                      <p:cBhvr>
-                                        <p:cTn id="11" dur="1" fill="hold">
-                                          <p:stCondLst>
-                                            <p:cond delay="0"/>
-                                          </p:stCondLst>
-                                        </p:cTn>
-                                        <p:tgtEl>
-                                          <p:spTgt spid="3">
-                                            <p:txEl>
-                                              <p:pRg st="1" end="1"/>
-                                            </p:txEl>
-                                          </p:spTgt>
-                                        </p:tgtEl>
-                                        <p:attrNameLst>
-                                          <p:attrName>style.visibility</p:attrName>
-                                        </p:attrNameLst>
-                                      </p:cBhvr>
-                                      <p:to>
-                                        <p:strVal val="visible"/>
-                                      </p:to>
-                                    </p:set>
-                                    <p:animEffect transition="in" filter="fade">
-                                      <p:cBhvr>
-                                        <p:cTn id="12" dur="500"/>
-                                        <p:tgtEl>
-                                          <p:spTgt spid="3">
-                                            <p:txEl>
-                                              <p:pRg st="1" end="1"/>
-                                            </p:txEl>
-                                          </p:spTgt>
-                                        </p:tgtEl>
-                                      </p:cBhvr>
-                                    </p:animEffect>
-                                  </p:childTnLst>
-                                </p:cTn>
-                              </p:par>
-                            </p:childTnLst>
-                          </p:cTn>
-                        </p:par>
-                      </p:childTnLst>
-                    </p:cTn>
-                  </p:par>
-                  <p:par>
-                    <p:cTn id="13" fill="hold">
-                      <p:stCondLst>
-                        <p:cond delay="indefinite"/>
-                      </p:stCondLst>
-                      <p:childTnLst>
-                        <p:par>
-                          <p:cTn id="14" fill="hold">
-                            <p:stCondLst>
-                              <p:cond delay="0"/>
-                            </p:stCondLst>
-                            <p:childTnLst>
-                              <p:par>
-                                <p:cTn id="15" presetID="10" presetClass="entr" presetSubtype="0" fill="hold" nodeType="clickEffect">
-                                  <p:stCondLst>
-                                    <p:cond delay="0"/>
-                                  </p:stCondLst>
-                                  <p:childTnLst>
-                                    <p:set>
-                                      <p:cBhvr>
-                                        <p:cTn id="16" dur="1" fill="hold">
-                                          <p:stCondLst>
-                                            <p:cond delay="0"/>
-                                          </p:stCondLst>
-                                        </p:cTn>
-                                        <p:tgtEl>
-                                          <p:spTgt spid="3">
-                                            <p:txEl>
-                                              <p:pRg st="2" end="2"/>
-                                            </p:txEl>
-                                          </p:spTgt>
-                                        </p:tgtEl>
-                                        <p:attrNameLst>
-                                          <p:attrName>style.visibility</p:attrName>
-                                        </p:attrNameLst>
-                                      </p:cBhvr>
-                                      <p:to>
-                                        <p:strVal val="visible"/>
-                                      </p:to>
-                                    </p:set>
-                                    <p:animEffect transition="in" filter="fade">
-                                      <p:cBhvr>
-                                        <p:cTn id="17" dur="500"/>
-                                        <p:tgtEl>
-                                          <p:spTgt spid="3">
-                                            <p:txEl>
-                                              <p:pRg st="2" end="2"/>
-                                            </p:txEl>
-                                          </p:spTgt>
-                                        </p:tgtEl>
-                                      </p:cBhvr>
-                                    </p:animEffect>
-                                  </p:childTnLst>
-                                </p:cTn>
-                              </p:par>
-                            </p:childTnLst>
-                          </p:cTn>
-                        </p:par>
-                      </p:childTnLst>
-                    </p:cTn>
-                  </p:par>
-                  <p:par>
-                    <p:cTn id="18" fill="hold">
-                      <p:stCondLst>
-                        <p:cond delay="indefinite"/>
-                      </p:stCondLst>
-                      <p:childTnLst>
-                        <p:par>
-                          <p:cTn id="19" fill="hold">
-                            <p:stCondLst>
-                              <p:cond delay="0"/>
-                            </p:stCondLst>
-                            <p:childTnLst>
-                              <p:par>
-                                <p:cTn id="20" presetID="10" presetClass="entr" presetSubtype="0" fill="hold" nodeType="clickEffect">
-                                  <p:stCondLst>
-                                    <p:cond delay="0"/>
-                                  </p:stCondLst>
-                                  <p:childTnLst>
-                                    <p:set>
-                                      <p:cBhvr>
-                                        <p:cTn id="21" dur="1" fill="hold">
-                                          <p:stCondLst>
-                                            <p:cond delay="0"/>
-                                          </p:stCondLst>
-                                        </p:cTn>
-                                        <p:tgtEl>
-                                          <p:spTgt spid="3">
-                                            <p:txEl>
-                                              <p:pRg st="3" end="3"/>
-                                            </p:txEl>
-                                          </p:spTgt>
-                                        </p:tgtEl>
-                                        <p:attrNameLst>
-                                          <p:attrName>style.visibility</p:attrName>
-                                        </p:attrNameLst>
-                                      </p:cBhvr>
-                                      <p:to>
-                                        <p:strVal val="visible"/>
-                                      </p:to>
-                                    </p:set>
-                                    <p:animEffect transition="in" filter="fade">
-                                      <p:cBhvr>
-                                        <p:cTn id="22" dur="500"/>
-                                        <p:tgtEl>
-                                          <p:spTgt spid="3">
-                                            <p:txEl>
-                                              <p:pRg st="3" end="3"/>
-                                            </p:txEl>
-                                          </p:spTgt>
-                                        </p:tgtEl>
-                                      </p:cBhvr>
-                                    </p:animEffect>
-                                  </p:childTnLst>
-                                </p:cTn>
-                              </p:par>
-                            </p:childTnLst>
-                          </p:cTn>
-                        </p:par>
-                      </p:childTnLst>
-                    </p:cTn>
-                  </p:par>
-                  <p:par>
-                    <p:cTn id="23" fill="hold">
-                      <p:stCondLst>
-                        <p:cond delay="indefinite"/>
-                      </p:stCondLst>
-                      <p:childTnLst>
-                        <p:par>
-                          <p:cTn id="24" fill="hold">
-                            <p:stCondLst>
-                              <p:cond delay="0"/>
-                            </p:stCondLst>
-                            <p:childTnLst>
-                              <p:par>
-                                <p:cTn id="25" presetID="10" presetClass="entr" presetSubtype="0" fill="hold" nodeType="clickEffect">
-                                  <p:stCondLst>
-                                    <p:cond delay="0"/>
-                                  </p:stCondLst>
-                                  <p:childTnLst>
-                                    <p:set>
-                                      <p:cBhvr>
-                                        <p:cTn id="26" dur="1" fill="hold">
-                                          <p:stCondLst>
-                                            <p:cond delay="0"/>
-                                          </p:stCondLst>
-                                        </p:cTn>
-                                        <p:tgtEl>
-                                          <p:spTgt spid="3">
-                                            <p:txEl>
-                                              <p:pRg st="4" end="4"/>
-                                            </p:txEl>
-                                          </p:spTgt>
-                                        </p:tgtEl>
-                                        <p:attrNameLst>
-                                          <p:attrName>style.visibility</p:attrName>
-                                        </p:attrNameLst>
-                                      </p:cBhvr>
-                                      <p:to>
-                                        <p:strVal val="visible"/>
-                                      </p:to>
-                                    </p:set>
-                                    <p:animEffect transition="in" filter="fade">
-                                      <p:cBhvr>
-                                        <p:cTn id="27" dur="500"/>
-                                        <p:tgtEl>
-                                          <p:spTgt spid="3">
-                                            <p:txEl>
-                                              <p:pRg st="4" end="4"/>
-                                            </p:txEl>
-                                          </p:spTgt>
-                                        </p:tgtEl>
-                                      </p:cBhvr>
-                                    </p:animEffect>
-                                  </p:childTnLst>
-                                </p:cTn>
-                              </p:par>
-                              <p:par>
-                                <p:cTn id="28" presetID="10" presetClass="entr" presetSubtype="0" fill="hold" nodeType="withEffect">
-                                  <p:stCondLst>
-                                    <p:cond delay="0"/>
-                                  </p:stCondLst>
-                                  <p:childTnLst>
-                                    <p:set>
-                                      <p:cBhvr>
-                                        <p:cTn id="29" dur="1" fill="hold">
-                                          <p:stCondLst>
-                                            <p:cond delay="0"/>
-                                          </p:stCondLst>
-                                        </p:cTn>
-                                        <p:tgtEl>
-                                          <p:spTgt spid="3">
-                                            <p:txEl>
-                                              <p:pRg st="5" end="5"/>
-                                            </p:txEl>
-                                          </p:spTgt>
-                                        </p:tgtEl>
-                                        <p:attrNameLst>
-                                          <p:attrName>style.visibility</p:attrName>
-                                        </p:attrNameLst>
-                                      </p:cBhvr>
-                                      <p:to>
-                                        <p:strVal val="visible"/>
-                                      </p:to>
-                                    </p:set>
-                                    <p:animEffect transition="in" filter="fade">
-                                      <p:cBhvr>
-                                        <p:cTn id="30" dur="500"/>
-                                        <p:tgtEl>
-                                          <p:spTgt spid="3">
-                                            <p:txEl>
-                                              <p:pRg st="5" end="5"/>
-                                            </p:txEl>
-                                          </p:spTgt>
-                                        </p:tgtEl>
-                                      </p:cBhvr>
-                                    </p:animEffect>
-                                  </p:childTnLst>
-                                </p:cTn>
-                              </p:par>
-                            </p:childTnLst>
-                          </p:cTn>
-                        </p:par>
-                      </p:childTnLst>
-                    </p:cTn>
-                  </p:par>
-                  <p:par>
-                    <p:cTn id="31" fill="hold">
-                      <p:stCondLst>
-                        <p:cond delay="indefinite"/>
-                      </p:stCondLst>
-                      <p:childTnLst>
-                        <p:par>
-                          <p:cTn id="32" fill="hold">
-                            <p:stCondLst>
-                              <p:cond delay="0"/>
-                            </p:stCondLst>
-                            <p:childTnLst>
-                              <p:par>
-                                <p:cTn id="33" presetID="10" presetClass="entr" presetSubtype="0" fill="hold" nodeType="clickEffect">
-                                  <p:stCondLst>
-                                    <p:cond delay="0"/>
-                                  </p:stCondLst>
-                                  <p:childTnLst>
-                                    <p:set>
-                                      <p:cBhvr>
-                                        <p:cTn id="34" dur="1" fill="hold">
-                                          <p:stCondLst>
-                                            <p:cond delay="0"/>
-                                          </p:stCondLst>
-                                        </p:cTn>
-                                        <p:tgtEl>
-                                          <p:spTgt spid="6"/>
-                                        </p:tgtEl>
-                                        <p:attrNameLst>
-                                          <p:attrName>style.visibility</p:attrName>
-                                        </p:attrNameLst>
-                                      </p:cBhvr>
-                                      <p:to>
-                                        <p:strVal val="visible"/>
-                                      </p:to>
-                                    </p:set>
-                                    <p:animEffect transition="in" filter="fade">
-                                      <p:cBhvr>
-                                        <p:cTn id="35" dur="500"/>
-                                        <p:tgtEl>
-                                          <p:spTgt spid="6"/>
-                                        </p:tgtEl>
-                                      </p:cBhvr>
-                                    </p:animEffect>
-                                  </p:childTnLst>
-                                </p:cTn>
-                              </p:par>
-                            </p:childTnLst>
-                          </p:cTn>
-                        </p:par>
-                      </p:childTnLst>
-                    </p:cTn>
-                  </p:par>
-                </p:childTnLst>
-              </p:cTn>
-              <p:prevCondLst>
-                <p:cond evt="onPrev" delay="0">
-                  <p:tgtEl>
-                    <p:sldTgt/>
-                  </p:tgtEl>
-                </p:cond>
-              </p:prevCondLst>
-              <p:nextCondLst>
-                <p:cond evt="onNext" delay="0">
-                  <p:tgtEl>
-                    <p:sldTgt/>
-                  </p:tgtEl>
-                </p:cond>
-              </p:nextCondLst>
-            </p:seq>
-          </p:childTnLst>
-        </p:cTn>
-      </p:par>
-    </p:tnLst>
-  </p:timing>
-</p:sld>
-</file>
-
-<file path=ppt/slides/slide30.xml><?xml version="1.0" encoding="utf-8"?>
+<file path=ppt/slides/slide32.xml><?xml version="1.0" encoding="utf-8"?>
 <p:sld xmlns:a="http://schemas.openxmlformats.org/drawingml/2006/main" xmlns:r="http://schemas.openxmlformats.org/officeDocument/2006/relationships" xmlns:p="http://schemas.openxmlformats.org/presentationml/2006/main">
   <p:cSld>
     <p:bg>
@@ -28008,7 +29798,7 @@
           <a:p>
             <a:fld id="{846B06B1-1179-491F-A487-8E0C403F7C13}" type="slidenum">
               <a:rPr lang="fr-CA" smtClean="0"/>
-              <a:t>30</a:t>
+              <a:t>32</a:t>
             </a:fld>
             <a:endParaRPr lang="fr-CA"/>
           </a:p>
@@ -28877,7 +30667,7 @@
                 </a:rPr>
                 <a:t>2</a:t>
               </a:r>
-              <a:endParaRPr dirty="0"/>
+              <a:endParaRPr sz="1400" dirty="0"/>
             </a:p>
             <a:p>
               <a:pPr marL="0" marR="0" lvl="0" indent="0" algn="ctr" rtl="0">
@@ -28970,7 +30760,7 @@
                 </a:rPr>
                 <a:t>6</a:t>
               </a:r>
-              <a:endParaRPr dirty="0"/>
+              <a:endParaRPr sz="1400" dirty="0"/>
             </a:p>
           </p:txBody>
         </p:sp>
@@ -30016,7 +31806,7 @@
 </p:sld>
 </file>
 
-<file path=ppt/slides/slide31.xml><?xml version="1.0" encoding="utf-8"?>
+<file path=ppt/slides/slide33.xml><?xml version="1.0" encoding="utf-8"?>
 <p:sld xmlns:a="http://schemas.openxmlformats.org/drawingml/2006/main" xmlns:r="http://schemas.openxmlformats.org/officeDocument/2006/relationships" xmlns:p="http://schemas.openxmlformats.org/presentationml/2006/main">
   <p:cSld>
     <p:bg>
@@ -30234,7 +32024,7 @@
           <a:p>
             <a:fld id="{846B06B1-1179-491F-A487-8E0C403F7C13}" type="slidenum">
               <a:rPr lang="fr-CA" smtClean="0"/>
-              <a:t>31</a:t>
+              <a:t>33</a:t>
             </a:fld>
             <a:endParaRPr lang="fr-CA"/>
           </a:p>
@@ -30510,7 +32300,7 @@
 </p:sld>
 </file>
 
-<file path=ppt/slides/slide32.xml><?xml version="1.0" encoding="utf-8"?>
+<file path=ppt/slides/slide34.xml><?xml version="1.0" encoding="utf-8"?>
 <p:sld xmlns:a="http://schemas.openxmlformats.org/drawingml/2006/main" xmlns:r="http://schemas.openxmlformats.org/officeDocument/2006/relationships" xmlns:p="http://schemas.openxmlformats.org/presentationml/2006/main">
   <p:cSld>
     <p:bg>
@@ -30956,7 +32746,7 @@
           <a:p>
             <a:fld id="{846B06B1-1179-491F-A487-8E0C403F7C13}" type="slidenum">
               <a:rPr lang="fr-CA" smtClean="0"/>
-              <a:t>32</a:t>
+              <a:t>34</a:t>
             </a:fld>
             <a:endParaRPr lang="fr-CA" dirty="0"/>
           </a:p>
@@ -31835,7 +33625,7 @@
 </p:sld>
 </file>
 
-<file path=ppt/slides/slide33.xml><?xml version="1.0" encoding="utf-8"?>
+<file path=ppt/slides/slide35.xml><?xml version="1.0" encoding="utf-8"?>
 <p:sld xmlns:a="http://schemas.openxmlformats.org/drawingml/2006/main" xmlns:r="http://schemas.openxmlformats.org/officeDocument/2006/relationships" xmlns:p="http://schemas.openxmlformats.org/presentationml/2006/main">
   <p:cSld>
     <p:bg>
@@ -32381,7 +34171,7 @@
           <a:p>
             <a:fld id="{846B06B1-1179-491F-A487-8E0C403F7C13}" type="slidenum">
               <a:rPr lang="fr-CA" smtClean="0"/>
-              <a:t>33</a:t>
+              <a:t>35</a:t>
             </a:fld>
             <a:endParaRPr lang="fr-CA"/>
           </a:p>
@@ -32776,7 +34566,7 @@
                 <a:buNone/>
               </a:pPr>
               <a:r>
-                <a:rPr lang="fr-CA" sz="1400" b="0" i="0" u="none" strike="noStrike" cap="none">
+                <a:rPr lang="fr-CA" sz="1400" b="0" i="0" u="none" strike="noStrike" cap="none" dirty="0">
                   <a:solidFill>
                     <a:srgbClr val="FFFFFF"/>
                   </a:solidFill>
@@ -32787,7 +34577,7 @@
                 </a:rPr>
                 <a:t>1</a:t>
               </a:r>
-              <a:endParaRPr/>
+              <a:endParaRPr dirty="0"/>
             </a:p>
             <a:p>
               <a:pPr marL="0" marR="0" lvl="0" indent="0" algn="ctr" rtl="0">
@@ -32808,7 +34598,7 @@
                 <a:buNone/>
               </a:pPr>
               <a:r>
-                <a:rPr lang="fr-CA" sz="1400" b="0" i="0" u="none" strike="noStrike" cap="none">
+                <a:rPr lang="fr-CA" sz="1400" b="0" i="0" u="none" strike="noStrike" cap="none" dirty="0">
                   <a:solidFill>
                     <a:srgbClr val="FFFFFF"/>
                   </a:solidFill>
@@ -32819,7 +34609,7 @@
                 </a:rPr>
                 <a:t>23</a:t>
               </a:r>
-              <a:endParaRPr/>
+              <a:endParaRPr dirty="0"/>
             </a:p>
             <a:p>
               <a:pPr marL="0" marR="0" lvl="0" indent="0" algn="ctr" rtl="0">
@@ -32840,7 +34630,7 @@
                 <a:buNone/>
               </a:pPr>
               <a:r>
-                <a:rPr lang="fr-CA" sz="1400" b="0" i="0" u="none" strike="noStrike" cap="none">
+                <a:rPr lang="fr-CA" sz="1400" b="0" i="0" u="none" strike="noStrike" cap="none" dirty="0">
                   <a:solidFill>
                     <a:srgbClr val="FFFFFF"/>
                   </a:solidFill>
@@ -32851,7 +34641,7 @@
                 </a:rPr>
                 <a:t>4</a:t>
               </a:r>
-              <a:endParaRPr/>
+              <a:endParaRPr dirty="0"/>
             </a:p>
           </p:txBody>
         </p:sp>
@@ -33406,7 +35196,7 @@
 </p:sld>
 </file>
 
-<file path=ppt/slides/slide34.xml><?xml version="1.0" encoding="utf-8"?>
+<file path=ppt/slides/slide36.xml><?xml version="1.0" encoding="utf-8"?>
 <p:sld xmlns:a="http://schemas.openxmlformats.org/drawingml/2006/main" xmlns:r="http://schemas.openxmlformats.org/officeDocument/2006/relationships" xmlns:p="http://schemas.openxmlformats.org/presentationml/2006/main">
   <p:cSld>
     <p:bg>
@@ -33847,7 +35637,7 @@
           <a:p>
             <a:fld id="{846B06B1-1179-491F-A487-8E0C403F7C13}" type="slidenum">
               <a:rPr lang="fr-CA" smtClean="0"/>
-              <a:t>34</a:t>
+              <a:t>36</a:t>
             </a:fld>
             <a:endParaRPr lang="fr-CA"/>
           </a:p>
@@ -33936,8 +35726,8 @@
           </a:p>
         </p:txBody>
       </p:sp>
-      <mc:AlternateContent xmlns:mc="http://schemas.openxmlformats.org/markup-compatibility/2006">
-        <mc:Choice xmlns:a14="http://schemas.microsoft.com/office/drawing/2010/main" Requires="a14">
+      <mc:AlternateContent xmlns:mc="http://schemas.openxmlformats.org/markup-compatibility/2006" xmlns:a14="http://schemas.microsoft.com/office/drawing/2010/main">
+        <mc:Choice Requires="a14">
           <p:sp>
             <p:nvSpPr>
               <p:cNvPr id="3" name="Content Placeholder 2">
@@ -34313,7 +36103,7 @@
             </p:txBody>
           </p:sp>
         </mc:Choice>
-        <mc:Fallback>
+        <mc:Fallback xmlns="">
           <p:sp>
             <p:nvSpPr>
               <p:cNvPr id="3" name="Content Placeholder 2">
@@ -35743,6 +37533,1784 @@
     <p:bg>
       <p:bgPr>
         <a:solidFill>
+          <a:srgbClr val="F5F5F5"/>
+        </a:solidFill>
+        <a:effectLst/>
+      </p:bgPr>
+    </p:bg>
+    <p:spTree>
+      <p:nvGrpSpPr>
+        <p:cNvPr id="1" name="">
+          <a:extLst>
+            <a:ext uri="{FF2B5EF4-FFF2-40B4-BE49-F238E27FC236}">
+              <a16:creationId xmlns:a16="http://schemas.microsoft.com/office/drawing/2014/main" id="{DA9C3796-197F-ED06-1FE6-037894381CC0}"/>
+            </a:ext>
+          </a:extLst>
+        </p:cNvPr>
+        <p:cNvGrpSpPr/>
+        <p:nvPr/>
+      </p:nvGrpSpPr>
+      <p:grpSpPr>
+        <a:xfrm>
+          <a:off x="0" y="0"/>
+          <a:ext cx="0" cy="0"/>
+          <a:chOff x="0" y="0"/>
+          <a:chExt cx="0" cy="0"/>
+        </a:xfrm>
+      </p:grpSpPr>
+      <p:sp>
+        <p:nvSpPr>
+          <p:cNvPr id="2" name="Title 1">
+            <a:extLst>
+              <a:ext uri="{FF2B5EF4-FFF2-40B4-BE49-F238E27FC236}">
+                <a16:creationId xmlns:a16="http://schemas.microsoft.com/office/drawing/2014/main" id="{98BCEFD1-C3D7-6458-6DB2-56316E3E2A1F}"/>
+              </a:ext>
+            </a:extLst>
+          </p:cNvPr>
+          <p:cNvSpPr>
+            <a:spLocks noGrp="1"/>
+          </p:cNvSpPr>
+          <p:nvPr>
+            <p:ph type="title"/>
+          </p:nvPr>
+        </p:nvSpPr>
+        <p:spPr/>
+        <p:txBody>
+          <a:bodyPr/>
+          <a:lstStyle/>
+          <a:p>
+            <a:r>
+              <a:rPr lang="en-US" dirty="0">
+                <a:latin typeface="Arial Rounded MT Bold" panose="020F0704030504030204" pitchFamily="34" charset="0"/>
+              </a:rPr>
+              <a:t>Exceptions</a:t>
+            </a:r>
+            <a:endParaRPr lang="fr-CA" dirty="0">
+              <a:latin typeface="Arial Rounded MT Bold" panose="020F0704030504030204" pitchFamily="34" charset="0"/>
+            </a:endParaRPr>
+          </a:p>
+        </p:txBody>
+      </p:sp>
+      <p:sp>
+        <p:nvSpPr>
+          <p:cNvPr id="3" name="Content Placeholder 2">
+            <a:extLst>
+              <a:ext uri="{FF2B5EF4-FFF2-40B4-BE49-F238E27FC236}">
+                <a16:creationId xmlns:a16="http://schemas.microsoft.com/office/drawing/2014/main" id="{2FBC37DF-71CE-1564-1929-70335FDA5B2F}"/>
+              </a:ext>
+            </a:extLst>
+          </p:cNvPr>
+          <p:cNvSpPr>
+            <a:spLocks noGrp="1"/>
+          </p:cNvSpPr>
+          <p:nvPr>
+            <p:ph idx="1"/>
+          </p:nvPr>
+        </p:nvSpPr>
+        <p:spPr>
+          <a:xfrm>
+            <a:off x="838200" y="1818566"/>
+            <a:ext cx="10515600" cy="4351338"/>
+          </a:xfrm>
+        </p:spPr>
+        <p:txBody>
+          <a:bodyPr>
+            <a:normAutofit/>
+          </a:bodyPr>
+          <a:lstStyle/>
+          <a:p>
+            <a:pPr algn="just">
+              <a:lnSpc>
+                <a:spcPct val="110000"/>
+              </a:lnSpc>
+            </a:pPr>
+            <a:r>
+              <a:rPr lang="fr-CA" sz="1600" dirty="0">
+                <a:latin typeface="Consolas" panose="020B0609020204030204" pitchFamily="49" charset="0"/>
+              </a:rPr>
+              <a:t>Mécanisme qui permet de </a:t>
+            </a:r>
+            <a:r>
+              <a:rPr lang="fr-CA" sz="1600" b="1" dirty="0">
+                <a:latin typeface="Consolas" panose="020B0609020204030204" pitchFamily="49" charset="0"/>
+              </a:rPr>
+              <a:t>signaler qu'un problème est survenu </a:t>
+            </a:r>
+            <a:r>
+              <a:rPr lang="fr-CA" sz="1600" dirty="0">
+                <a:latin typeface="Consolas" panose="020B0609020204030204" pitchFamily="49" charset="0"/>
+              </a:rPr>
+              <a:t>pendant l'exécution (</a:t>
+            </a:r>
+            <a:r>
+              <a:rPr lang="fr-CA" sz="1600" b="1" dirty="0" err="1">
+                <a:latin typeface="Consolas" panose="020B0609020204030204" pitchFamily="49" charset="0"/>
+              </a:rPr>
+              <a:t>raise</a:t>
+            </a:r>
+            <a:r>
+              <a:rPr lang="fr-CA" sz="1600" dirty="0">
+                <a:latin typeface="Consolas" panose="020B0609020204030204" pitchFamily="49" charset="0"/>
+              </a:rPr>
+              <a:t>)</a:t>
+            </a:r>
+            <a:endParaRPr lang="fr-CA" sz="1200" dirty="0">
+              <a:latin typeface="Consolas" panose="020B0609020204030204" pitchFamily="49" charset="0"/>
+            </a:endParaRPr>
+          </a:p>
+          <a:p>
+            <a:pPr algn="just">
+              <a:lnSpc>
+                <a:spcPct val="110000"/>
+              </a:lnSpc>
+            </a:pPr>
+            <a:r>
+              <a:rPr lang="fr-CA" sz="1600" dirty="0">
+                <a:latin typeface="Consolas" panose="020B0609020204030204" pitchFamily="49" charset="0"/>
+              </a:rPr>
+              <a:t>Interrompt l'exécution (et remonte jusqu'au </a:t>
+            </a:r>
+            <a:r>
+              <a:rPr lang="fr-CA" sz="1600" b="1" dirty="0" err="1">
+                <a:latin typeface="Consolas" panose="020B0609020204030204" pitchFamily="49" charset="0"/>
+              </a:rPr>
+              <a:t>try-except</a:t>
+            </a:r>
+            <a:r>
+              <a:rPr lang="fr-CA" sz="1600" b="1" dirty="0">
+                <a:latin typeface="Consolas" panose="020B0609020204030204" pitchFamily="49" charset="0"/>
+              </a:rPr>
+              <a:t> </a:t>
+            </a:r>
+            <a:r>
+              <a:rPr lang="fr-CA" sz="1600" dirty="0">
+                <a:latin typeface="Consolas" panose="020B0609020204030204" pitchFamily="49" charset="0"/>
+              </a:rPr>
+              <a:t>le plus proche)</a:t>
+            </a:r>
+          </a:p>
+          <a:p>
+            <a:pPr algn="just">
+              <a:lnSpc>
+                <a:spcPct val="110000"/>
+              </a:lnSpc>
+            </a:pPr>
+            <a:endParaRPr lang="fr-CA" sz="1600" dirty="0">
+              <a:latin typeface="Consolas" panose="020B0609020204030204" pitchFamily="49" charset="0"/>
+            </a:endParaRPr>
+          </a:p>
+          <a:p>
+            <a:pPr algn="just">
+              <a:lnSpc>
+                <a:spcPct val="110000"/>
+              </a:lnSpc>
+            </a:pPr>
+            <a:endParaRPr lang="fr-CA" sz="1600" dirty="0">
+              <a:latin typeface="Consolas" panose="020B0609020204030204" pitchFamily="49" charset="0"/>
+            </a:endParaRPr>
+          </a:p>
+          <a:p>
+            <a:pPr algn="just">
+              <a:lnSpc>
+                <a:spcPct val="110000"/>
+              </a:lnSpc>
+            </a:pPr>
+            <a:endParaRPr lang="fr-CA" sz="1600" dirty="0">
+              <a:latin typeface="Consolas" panose="020B0609020204030204" pitchFamily="49" charset="0"/>
+            </a:endParaRPr>
+          </a:p>
+          <a:p>
+            <a:pPr marL="0" indent="0" algn="just">
+              <a:lnSpc>
+                <a:spcPct val="110000"/>
+              </a:lnSpc>
+              <a:buNone/>
+            </a:pPr>
+            <a:endParaRPr lang="fr-CA" sz="1600" dirty="0">
+              <a:latin typeface="Consolas" panose="020B0609020204030204" pitchFamily="49" charset="0"/>
+            </a:endParaRPr>
+          </a:p>
+          <a:p>
+            <a:pPr algn="just">
+              <a:lnSpc>
+                <a:spcPct val="110000"/>
+              </a:lnSpc>
+            </a:pPr>
+            <a:r>
+              <a:rPr lang="fr-CA" sz="1600" dirty="0">
+                <a:latin typeface="Consolas" panose="020B0609020204030204" pitchFamily="49" charset="0"/>
+              </a:rPr>
+              <a:t>L'instruction '</a:t>
+            </a:r>
+            <a:r>
+              <a:rPr lang="en-CA" sz="1600" b="1" dirty="0">
+                <a:solidFill>
+                  <a:srgbClr val="008800"/>
+                </a:solidFill>
+                <a:latin typeface="Consolas" panose="020B0609020204030204" pitchFamily="49" charset="0"/>
+              </a:rPr>
+              <a:t>as</a:t>
+            </a:r>
+            <a:r>
+              <a:rPr lang="en-CA" sz="1600" dirty="0">
+                <a:solidFill>
+                  <a:srgbClr val="333333"/>
+                </a:solidFill>
+                <a:latin typeface="Consolas" panose="020B0609020204030204" pitchFamily="49" charset="0"/>
+              </a:rPr>
+              <a:t> err' (</a:t>
+            </a:r>
+            <a:r>
+              <a:rPr lang="en-CA" sz="1600" dirty="0" err="1">
+                <a:solidFill>
+                  <a:srgbClr val="333333"/>
+                </a:solidFill>
+                <a:latin typeface="Consolas" panose="020B0609020204030204" pitchFamily="49" charset="0"/>
+              </a:rPr>
+              <a:t>ligne</a:t>
+            </a:r>
+            <a:r>
+              <a:rPr lang="en-CA" sz="1600" dirty="0">
+                <a:solidFill>
+                  <a:srgbClr val="333333"/>
+                </a:solidFill>
+                <a:latin typeface="Consolas" panose="020B0609020204030204" pitchFamily="49" charset="0"/>
+              </a:rPr>
+              <a:t> 3) </a:t>
+            </a:r>
+            <a:r>
+              <a:rPr lang="fr-CA" sz="1600" dirty="0">
+                <a:latin typeface="Consolas" panose="020B0609020204030204" pitchFamily="49" charset="0"/>
+              </a:rPr>
+              <a:t>stocke l'erreur (un objet) dans la variable '</a:t>
+            </a:r>
+            <a:r>
+              <a:rPr lang="fr-CA" sz="1600" dirty="0" err="1">
+                <a:latin typeface="Consolas" panose="020B0609020204030204" pitchFamily="49" charset="0"/>
+              </a:rPr>
+              <a:t>err</a:t>
+            </a:r>
+            <a:r>
+              <a:rPr lang="fr-CA" sz="1600" dirty="0">
+                <a:latin typeface="Consolas" panose="020B0609020204030204" pitchFamily="49" charset="0"/>
+              </a:rPr>
+              <a:t>'</a:t>
+            </a:r>
+          </a:p>
+          <a:p>
+            <a:pPr algn="just">
+              <a:lnSpc>
+                <a:spcPct val="110000"/>
+              </a:lnSpc>
+            </a:pPr>
+            <a:r>
+              <a:rPr lang="fr-CA" sz="1600" dirty="0">
+                <a:latin typeface="Consolas" panose="020B0609020204030204" pitchFamily="49" charset="0"/>
+              </a:rPr>
+              <a:t>L'instruction '</a:t>
+            </a:r>
+            <a:r>
+              <a:rPr lang="en-CA" sz="1600" b="1" dirty="0">
+                <a:solidFill>
+                  <a:srgbClr val="008800"/>
+                </a:solidFill>
+                <a:latin typeface="Consolas" panose="020B0609020204030204" pitchFamily="49" charset="0"/>
+              </a:rPr>
+              <a:t>from</a:t>
+            </a:r>
+            <a:r>
+              <a:rPr lang="en-CA" sz="1600" dirty="0">
+                <a:solidFill>
+                  <a:srgbClr val="BBBBBB"/>
+                </a:solidFill>
+                <a:latin typeface="Consolas" panose="020B0609020204030204" pitchFamily="49" charset="0"/>
+              </a:rPr>
+              <a:t> </a:t>
+            </a:r>
+            <a:r>
+              <a:rPr lang="en-CA" sz="1600" b="1" dirty="0">
+                <a:solidFill>
+                  <a:srgbClr val="0E84B5"/>
+                </a:solidFill>
+                <a:latin typeface="Consolas" panose="020B0609020204030204" pitchFamily="49" charset="0"/>
+              </a:rPr>
+              <a:t>e</a:t>
+            </a:r>
+            <a:r>
+              <a:rPr lang="fr-CA" sz="1600" dirty="0">
+                <a:latin typeface="Consolas" panose="020B0609020204030204" pitchFamily="49" charset="0"/>
+              </a:rPr>
+              <a:t>' (ligne 4) permet de conserver l'origine</a:t>
+            </a:r>
+          </a:p>
+          <a:p>
+            <a:pPr marL="0" indent="0" algn="just">
+              <a:lnSpc>
+                <a:spcPct val="110000"/>
+              </a:lnSpc>
+              <a:buNone/>
+            </a:pPr>
+            <a:endParaRPr lang="fr-CA" sz="1600" dirty="0">
+              <a:latin typeface="Consolas" panose="020B0609020204030204" pitchFamily="49" charset="0"/>
+            </a:endParaRPr>
+          </a:p>
+          <a:p>
+            <a:pPr marL="0" indent="0" algn="ctr">
+              <a:lnSpc>
+                <a:spcPct val="110000"/>
+              </a:lnSpc>
+              <a:buNone/>
+            </a:pPr>
+            <a:r>
+              <a:rPr lang="fr-CA" sz="1600" b="1" dirty="0">
+                <a:latin typeface="Consolas" panose="020B0609020204030204" pitchFamily="49" charset="0"/>
+              </a:rPr>
+              <a:t>VOIR L'EXEMPLE DANS LE CARNET</a:t>
+            </a:r>
+          </a:p>
+          <a:p>
+            <a:pPr marL="0" indent="0" algn="ctr">
+              <a:lnSpc>
+                <a:spcPct val="110000"/>
+              </a:lnSpc>
+              <a:buNone/>
+            </a:pPr>
+            <a:r>
+              <a:rPr lang="fr-CA" sz="1600" b="1" u="sng" dirty="0">
+                <a:latin typeface="Consolas" panose="020B0609020204030204" pitchFamily="49" charset="0"/>
+              </a:rPr>
+              <a:t>PRENEZ LE TEMPS DE LIRE LE MESSAGE D'ERREUR!</a:t>
+            </a:r>
+          </a:p>
+          <a:p>
+            <a:pPr marL="0" indent="0" algn="just">
+              <a:lnSpc>
+                <a:spcPct val="110000"/>
+              </a:lnSpc>
+              <a:buNone/>
+            </a:pPr>
+            <a:endParaRPr lang="fr-CA" sz="1600" dirty="0">
+              <a:latin typeface="Consolas" panose="020B0609020204030204" pitchFamily="49" charset="0"/>
+            </a:endParaRPr>
+          </a:p>
+        </p:txBody>
+      </p:sp>
+      <p:sp>
+        <p:nvSpPr>
+          <p:cNvPr id="5" name="Slide Number Placeholder 4">
+            <a:extLst>
+              <a:ext uri="{FF2B5EF4-FFF2-40B4-BE49-F238E27FC236}">
+                <a16:creationId xmlns:a16="http://schemas.microsoft.com/office/drawing/2014/main" id="{2F02EFBE-6AB2-CEC6-2448-19D1F527434A}"/>
+              </a:ext>
+            </a:extLst>
+          </p:cNvPr>
+          <p:cNvSpPr>
+            <a:spLocks noGrp="1"/>
+          </p:cNvSpPr>
+          <p:nvPr>
+            <p:ph type="sldNum" sz="quarter" idx="12"/>
+          </p:nvPr>
+        </p:nvSpPr>
+        <p:spPr/>
+        <p:txBody>
+          <a:bodyPr/>
+          <a:lstStyle/>
+          <a:p>
+            <a:fld id="{846B06B1-1179-491F-A487-8E0C403F7C13}" type="slidenum">
+              <a:rPr lang="fr-CA" smtClean="0"/>
+              <a:t>6</a:t>
+            </a:fld>
+            <a:endParaRPr lang="fr-CA" dirty="0"/>
+          </a:p>
+        </p:txBody>
+      </p:sp>
+      <p:grpSp>
+        <p:nvGrpSpPr>
+          <p:cNvPr id="35" name="Google Shape;368;p19">
+            <a:extLst>
+              <a:ext uri="{FF2B5EF4-FFF2-40B4-BE49-F238E27FC236}">
+                <a16:creationId xmlns:a16="http://schemas.microsoft.com/office/drawing/2014/main" id="{063CA494-026D-35E5-4FE0-AFE31272EDC7}"/>
+              </a:ext>
+            </a:extLst>
+          </p:cNvPr>
+          <p:cNvGrpSpPr/>
+          <p:nvPr/>
+        </p:nvGrpSpPr>
+        <p:grpSpPr>
+          <a:xfrm>
+            <a:off x="1664970" y="2775966"/>
+            <a:ext cx="6145530" cy="1260001"/>
+            <a:chOff x="6665982" y="3766183"/>
+            <a:chExt cx="6710373" cy="1800001"/>
+          </a:xfrm>
+        </p:grpSpPr>
+        <p:sp>
+          <p:nvSpPr>
+            <p:cNvPr id="36" name="Google Shape;369;p19">
+              <a:extLst>
+                <a:ext uri="{FF2B5EF4-FFF2-40B4-BE49-F238E27FC236}">
+                  <a16:creationId xmlns:a16="http://schemas.microsoft.com/office/drawing/2014/main" id="{B29CFD9A-FEA8-FC2B-A014-F7B8A8BC2AE9}"/>
+                </a:ext>
+              </a:extLst>
+            </p:cNvPr>
+            <p:cNvSpPr/>
+            <p:nvPr/>
+          </p:nvSpPr>
+          <p:spPr>
+            <a:xfrm>
+              <a:off x="6665982" y="3766184"/>
+              <a:ext cx="180000" cy="1800000"/>
+            </a:xfrm>
+            <a:prstGeom prst="rect">
+              <a:avLst/>
+            </a:prstGeom>
+            <a:solidFill>
+              <a:srgbClr val="7F7F7F"/>
+            </a:solidFill>
+            <a:ln w="12700" cap="flat" cmpd="sng">
+              <a:solidFill>
+                <a:srgbClr val="7F7F7F"/>
+              </a:solidFill>
+              <a:prstDash val="solid"/>
+              <a:miter lim="800000"/>
+              <a:headEnd type="none" w="sm" len="sm"/>
+              <a:tailEnd type="none" w="sm" len="sm"/>
+            </a:ln>
+          </p:spPr>
+          <p:txBody>
+            <a:bodyPr spcFirstLastPara="1" wrap="square" lIns="91425" tIns="45700" rIns="91425" bIns="45700" anchor="ctr" anchorCtr="0">
+              <a:noAutofit/>
+            </a:bodyPr>
+            <a:lstStyle/>
+            <a:p>
+              <a:pPr marL="0" marR="0" lvl="0" indent="0" algn="ctr" rtl="0">
+                <a:spcBef>
+                  <a:spcPts val="0"/>
+                </a:spcBef>
+                <a:spcAft>
+                  <a:spcPts val="0"/>
+                </a:spcAft>
+                <a:buNone/>
+              </a:pPr>
+              <a:r>
+                <a:rPr lang="fr-CA" sz="1400" dirty="0">
+                  <a:solidFill>
+                    <a:schemeClr val="lt1"/>
+                  </a:solidFill>
+                  <a:latin typeface="Calibri"/>
+                  <a:ea typeface="Calibri"/>
+                  <a:cs typeface="Calibri"/>
+                  <a:sym typeface="Calibri"/>
+                </a:rPr>
+                <a:t>1</a:t>
+              </a:r>
+              <a:endParaRPr sz="1400" dirty="0">
+                <a:solidFill>
+                  <a:schemeClr val="lt1"/>
+                </a:solidFill>
+                <a:latin typeface="Calibri"/>
+                <a:ea typeface="Calibri"/>
+                <a:cs typeface="Calibri"/>
+                <a:sym typeface="Calibri"/>
+              </a:endParaRPr>
+            </a:p>
+            <a:p>
+              <a:pPr marL="0" marR="0" lvl="0" indent="0" algn="ctr" rtl="0">
+                <a:spcBef>
+                  <a:spcPts val="0"/>
+                </a:spcBef>
+                <a:spcAft>
+                  <a:spcPts val="0"/>
+                </a:spcAft>
+                <a:buNone/>
+              </a:pPr>
+              <a:r>
+                <a:rPr lang="fr-CA" sz="1400" dirty="0">
+                  <a:solidFill>
+                    <a:schemeClr val="lt1"/>
+                  </a:solidFill>
+                  <a:latin typeface="Calibri"/>
+                  <a:ea typeface="Calibri"/>
+                  <a:cs typeface="Calibri"/>
+                  <a:sym typeface="Calibri"/>
+                </a:rPr>
+                <a:t>2</a:t>
+              </a:r>
+              <a:endParaRPr sz="1400" dirty="0"/>
+            </a:p>
+            <a:p>
+              <a:pPr marL="0" marR="0" lvl="0" indent="0" algn="ctr" rtl="0">
+                <a:spcBef>
+                  <a:spcPts val="0"/>
+                </a:spcBef>
+                <a:spcAft>
+                  <a:spcPts val="0"/>
+                </a:spcAft>
+                <a:buNone/>
+              </a:pPr>
+              <a:r>
+                <a:rPr lang="fr-CA" sz="1400" dirty="0">
+                  <a:solidFill>
+                    <a:schemeClr val="lt1"/>
+                  </a:solidFill>
+                  <a:latin typeface="Calibri"/>
+                  <a:ea typeface="Calibri"/>
+                  <a:cs typeface="Calibri"/>
+                  <a:sym typeface="Calibri"/>
+                </a:rPr>
+                <a:t>3</a:t>
+              </a:r>
+            </a:p>
+            <a:p>
+              <a:pPr marL="0" marR="0" lvl="0" indent="0" algn="ctr" rtl="0">
+                <a:spcBef>
+                  <a:spcPts val="0"/>
+                </a:spcBef>
+                <a:spcAft>
+                  <a:spcPts val="0"/>
+                </a:spcAft>
+                <a:buNone/>
+              </a:pPr>
+              <a:r>
+                <a:rPr lang="fr-CA" sz="1400" dirty="0">
+                  <a:solidFill>
+                    <a:schemeClr val="lt1"/>
+                  </a:solidFill>
+                  <a:latin typeface="Calibri"/>
+                  <a:ea typeface="Calibri"/>
+                  <a:cs typeface="Calibri"/>
+                  <a:sym typeface="Calibri"/>
+                </a:rPr>
+                <a:t>4</a:t>
+              </a:r>
+            </a:p>
+            <a:p>
+              <a:pPr marL="0" marR="0" lvl="0" indent="0" algn="ctr" rtl="0">
+                <a:spcBef>
+                  <a:spcPts val="0"/>
+                </a:spcBef>
+                <a:spcAft>
+                  <a:spcPts val="0"/>
+                </a:spcAft>
+                <a:buNone/>
+              </a:pPr>
+              <a:r>
+                <a:rPr lang="fr-CA" sz="1400" dirty="0">
+                  <a:solidFill>
+                    <a:schemeClr val="lt1"/>
+                  </a:solidFill>
+                  <a:latin typeface="Calibri"/>
+                  <a:ea typeface="Calibri"/>
+                  <a:cs typeface="Calibri"/>
+                  <a:sym typeface="Calibri"/>
+                </a:rPr>
+                <a:t>5</a:t>
+              </a:r>
+            </a:p>
+          </p:txBody>
+        </p:sp>
+        <p:sp>
+          <p:nvSpPr>
+            <p:cNvPr id="37" name="Google Shape;370;p19">
+              <a:extLst>
+                <a:ext uri="{FF2B5EF4-FFF2-40B4-BE49-F238E27FC236}">
+                  <a16:creationId xmlns:a16="http://schemas.microsoft.com/office/drawing/2014/main" id="{8169BDA0-F360-227C-65B8-6D80DB7C2A08}"/>
+                </a:ext>
+              </a:extLst>
+            </p:cNvPr>
+            <p:cNvSpPr/>
+            <p:nvPr/>
+          </p:nvSpPr>
+          <p:spPr>
+            <a:xfrm>
+              <a:off x="6845982" y="3766183"/>
+              <a:ext cx="6530373" cy="1800000"/>
+            </a:xfrm>
+            <a:prstGeom prst="rect">
+              <a:avLst/>
+            </a:prstGeom>
+            <a:solidFill>
+              <a:srgbClr val="F2F2F2"/>
+            </a:solidFill>
+            <a:ln w="12700" cap="flat" cmpd="sng">
+              <a:solidFill>
+                <a:srgbClr val="7F7F7F"/>
+              </a:solidFill>
+              <a:prstDash val="solid"/>
+              <a:miter lim="800000"/>
+              <a:headEnd type="none" w="sm" len="sm"/>
+              <a:tailEnd type="none" w="sm" len="sm"/>
+            </a:ln>
+          </p:spPr>
+          <p:txBody>
+            <a:bodyPr spcFirstLastPara="1" wrap="square" lIns="91425" tIns="45700" rIns="91425" bIns="45700" anchor="ctr" anchorCtr="0">
+              <a:noAutofit/>
+            </a:bodyPr>
+            <a:lstStyle/>
+            <a:p>
+              <a:r>
+                <a:rPr lang="en-CA" sz="1400" b="1" dirty="0">
+                  <a:solidFill>
+                    <a:srgbClr val="008800"/>
+                  </a:solidFill>
+                  <a:latin typeface="Consolas" panose="020B0609020204030204" pitchFamily="49" charset="0"/>
+                </a:rPr>
+                <a:t>try</a:t>
+              </a:r>
+              <a:r>
+                <a:rPr lang="en-CA" sz="1400" dirty="0">
+                  <a:solidFill>
+                    <a:srgbClr val="333333"/>
+                  </a:solidFill>
+                  <a:latin typeface="Consolas" panose="020B0609020204030204" pitchFamily="49" charset="0"/>
+                </a:rPr>
+                <a:t>:</a:t>
+              </a:r>
+            </a:p>
+            <a:p>
+              <a:r>
+                <a:rPr lang="en-CA" sz="1400" b="1" dirty="0">
+                  <a:solidFill>
+                    <a:srgbClr val="008800"/>
+                  </a:solidFill>
+                  <a:latin typeface="Consolas" panose="020B0609020204030204" pitchFamily="49" charset="0"/>
+                </a:rPr>
+                <a:t>  raise</a:t>
+              </a:r>
+              <a:r>
+                <a:rPr lang="en-CA" sz="1400" dirty="0">
+                  <a:solidFill>
+                    <a:srgbClr val="333333"/>
+                  </a:solidFill>
+                  <a:latin typeface="Consolas" panose="020B0609020204030204" pitchFamily="49" charset="0"/>
+                </a:rPr>
+                <a:t> </a:t>
+              </a:r>
+              <a:r>
+                <a:rPr lang="en-CA" sz="1400" b="1" dirty="0" err="1">
+                  <a:solidFill>
+                    <a:srgbClr val="FF0000"/>
+                  </a:solidFill>
+                  <a:latin typeface="Consolas" panose="020B0609020204030204" pitchFamily="49" charset="0"/>
+                </a:rPr>
+                <a:t>ValueError</a:t>
+              </a:r>
+              <a:r>
+                <a:rPr lang="en-CA" sz="1400" dirty="0">
+                  <a:solidFill>
+                    <a:srgbClr val="333333"/>
+                  </a:solidFill>
+                  <a:latin typeface="Consolas" panose="020B0609020204030204" pitchFamily="49" charset="0"/>
+                </a:rPr>
+                <a:t>("</a:t>
+              </a:r>
+              <a:r>
+                <a:rPr lang="en-CA" sz="1400" dirty="0" err="1">
+                  <a:solidFill>
+                    <a:srgbClr val="333333"/>
+                  </a:solidFill>
+                  <a:latin typeface="Consolas" panose="020B0609020204030204" pitchFamily="49" charset="0"/>
+                </a:rPr>
+                <a:t>J'ai</a:t>
+              </a:r>
+              <a:r>
+                <a:rPr lang="en-CA" sz="1400" dirty="0">
+                  <a:solidFill>
+                    <a:srgbClr val="333333"/>
+                  </a:solidFill>
+                  <a:latin typeface="Consolas" panose="020B0609020204030204" pitchFamily="49" charset="0"/>
+                </a:rPr>
+                <a:t> </a:t>
+              </a:r>
+              <a:r>
+                <a:rPr lang="en-CA" sz="1400" dirty="0" err="1">
+                  <a:solidFill>
+                    <a:srgbClr val="333333"/>
+                  </a:solidFill>
+                  <a:latin typeface="Consolas" panose="020B0609020204030204" pitchFamily="49" charset="0"/>
+                </a:rPr>
+                <a:t>lancé</a:t>
+              </a:r>
+              <a:r>
+                <a:rPr lang="en-CA" sz="1400" dirty="0">
+                  <a:solidFill>
+                    <a:srgbClr val="333333"/>
+                  </a:solidFill>
+                  <a:latin typeface="Consolas" panose="020B0609020204030204" pitchFamily="49" charset="0"/>
+                </a:rPr>
+                <a:t> la </a:t>
+              </a:r>
+              <a:r>
+                <a:rPr lang="en-CA" sz="1400" dirty="0" err="1">
+                  <a:solidFill>
+                    <a:srgbClr val="333333"/>
+                  </a:solidFill>
+                  <a:latin typeface="Consolas" panose="020B0609020204030204" pitchFamily="49" charset="0"/>
+                </a:rPr>
+                <a:t>ValueError</a:t>
+              </a:r>
+              <a:r>
+                <a:rPr lang="en-CA" sz="1400" dirty="0">
+                  <a:solidFill>
+                    <a:srgbClr val="333333"/>
+                  </a:solidFill>
+                  <a:latin typeface="Consolas" panose="020B0609020204030204" pitchFamily="49" charset="0"/>
+                </a:rPr>
+                <a:t>!")</a:t>
+              </a:r>
+            </a:p>
+            <a:p>
+              <a:r>
+                <a:rPr lang="en-CA" sz="1400" b="1" dirty="0">
+                  <a:solidFill>
+                    <a:srgbClr val="008800"/>
+                  </a:solidFill>
+                  <a:latin typeface="Consolas" panose="020B0609020204030204" pitchFamily="49" charset="0"/>
+                </a:rPr>
+                <a:t>except</a:t>
+              </a:r>
+              <a:r>
+                <a:rPr lang="en-CA" sz="1400" dirty="0">
+                  <a:solidFill>
+                    <a:srgbClr val="333333"/>
+                  </a:solidFill>
+                  <a:latin typeface="Consolas" panose="020B0609020204030204" pitchFamily="49" charset="0"/>
+                </a:rPr>
+                <a:t> </a:t>
+              </a:r>
+              <a:r>
+                <a:rPr lang="en-CA" sz="1400" b="1" dirty="0" err="1">
+                  <a:solidFill>
+                    <a:srgbClr val="FF0000"/>
+                  </a:solidFill>
+                  <a:latin typeface="Consolas" panose="020B0609020204030204" pitchFamily="49" charset="0"/>
+                </a:rPr>
+                <a:t>ValueError</a:t>
+              </a:r>
+              <a:r>
+                <a:rPr lang="en-CA" sz="1400" dirty="0">
+                  <a:solidFill>
+                    <a:srgbClr val="333333"/>
+                  </a:solidFill>
+                  <a:latin typeface="Consolas" panose="020B0609020204030204" pitchFamily="49" charset="0"/>
+                </a:rPr>
+                <a:t> </a:t>
+              </a:r>
+              <a:r>
+                <a:rPr lang="en-CA" sz="1400" b="1" dirty="0">
+                  <a:solidFill>
+                    <a:srgbClr val="008800"/>
+                  </a:solidFill>
+                  <a:latin typeface="Consolas" panose="020B0609020204030204" pitchFamily="49" charset="0"/>
+                </a:rPr>
+                <a:t>as</a:t>
+              </a:r>
+              <a:r>
+                <a:rPr lang="en-CA" sz="1400" dirty="0">
+                  <a:solidFill>
+                    <a:srgbClr val="333333"/>
+                  </a:solidFill>
+                  <a:latin typeface="Consolas" panose="020B0609020204030204" pitchFamily="49" charset="0"/>
+                </a:rPr>
+                <a:t> err:</a:t>
+              </a:r>
+            </a:p>
+            <a:p>
+              <a:r>
+                <a:rPr lang="en-CA" sz="1400" dirty="0">
+                  <a:solidFill>
+                    <a:srgbClr val="333333"/>
+                  </a:solidFill>
+                  <a:latin typeface="Consolas" panose="020B0609020204030204" pitchFamily="49" charset="0"/>
+                </a:rPr>
+                <a:t>  </a:t>
+              </a:r>
+              <a:r>
+                <a:rPr lang="en-CA" sz="1400" b="1" dirty="0">
+                  <a:solidFill>
+                    <a:srgbClr val="008800"/>
+                  </a:solidFill>
+                  <a:latin typeface="Consolas" panose="020B0609020204030204" pitchFamily="49" charset="0"/>
+                </a:rPr>
+                <a:t>raise</a:t>
+              </a:r>
+              <a:r>
+                <a:rPr lang="en-CA" sz="1400" dirty="0">
+                  <a:solidFill>
+                    <a:srgbClr val="333333"/>
+                  </a:solidFill>
+                  <a:latin typeface="Consolas" panose="020B0609020204030204" pitchFamily="49" charset="0"/>
+                </a:rPr>
+                <a:t> </a:t>
+              </a:r>
+              <a:r>
+                <a:rPr lang="en-CA" sz="1400" b="1" dirty="0" err="1">
+                  <a:solidFill>
+                    <a:srgbClr val="FF0000"/>
+                  </a:solidFill>
+                  <a:latin typeface="Consolas" panose="020B0609020204030204" pitchFamily="49" charset="0"/>
+                </a:rPr>
+                <a:t>ValueError</a:t>
+              </a:r>
+              <a:r>
+                <a:rPr lang="en-CA" sz="1400" dirty="0">
+                  <a:solidFill>
+                    <a:srgbClr val="333333"/>
+                  </a:solidFill>
+                  <a:latin typeface="Consolas" panose="020B0609020204030204" pitchFamily="49" charset="0"/>
+                </a:rPr>
+                <a:t>("</a:t>
+              </a:r>
+              <a:r>
+                <a:rPr lang="en-CA" sz="1400" dirty="0" err="1">
+                  <a:solidFill>
+                    <a:srgbClr val="333333"/>
+                  </a:solidFill>
+                  <a:latin typeface="Consolas" panose="020B0609020204030204" pitchFamily="49" charset="0"/>
+                </a:rPr>
+                <a:t>J'ai</a:t>
+              </a:r>
+              <a:r>
+                <a:rPr lang="en-CA" sz="1400" dirty="0">
+                  <a:solidFill>
+                    <a:srgbClr val="333333"/>
+                  </a:solidFill>
+                  <a:latin typeface="Consolas" panose="020B0609020204030204" pitchFamily="49" charset="0"/>
+                </a:rPr>
+                <a:t> </a:t>
+              </a:r>
+              <a:r>
+                <a:rPr lang="en-CA" sz="1400" dirty="0" err="1">
+                  <a:solidFill>
+                    <a:srgbClr val="333333"/>
+                  </a:solidFill>
+                  <a:latin typeface="Consolas" panose="020B0609020204030204" pitchFamily="49" charset="0"/>
+                </a:rPr>
+                <a:t>attrapé</a:t>
+              </a:r>
+              <a:r>
+                <a:rPr lang="en-CA" sz="1400" dirty="0">
+                  <a:solidFill>
+                    <a:srgbClr val="333333"/>
+                  </a:solidFill>
+                  <a:latin typeface="Consolas" panose="020B0609020204030204" pitchFamily="49" charset="0"/>
+                </a:rPr>
+                <a:t> la </a:t>
+              </a:r>
+              <a:r>
+                <a:rPr lang="en-CA" sz="1400" dirty="0" err="1">
+                  <a:solidFill>
+                    <a:srgbClr val="333333"/>
+                  </a:solidFill>
+                  <a:latin typeface="Consolas" panose="020B0609020204030204" pitchFamily="49" charset="0"/>
+                </a:rPr>
+                <a:t>ValueError</a:t>
+              </a:r>
+              <a:r>
+                <a:rPr lang="en-CA" sz="1400" dirty="0">
+                  <a:solidFill>
+                    <a:srgbClr val="333333"/>
+                  </a:solidFill>
+                  <a:latin typeface="Consolas" panose="020B0609020204030204" pitchFamily="49" charset="0"/>
+                </a:rPr>
+                <a:t>!") </a:t>
+              </a:r>
+              <a:r>
+                <a:rPr lang="en-CA" sz="1400" b="1" dirty="0">
+                  <a:solidFill>
+                    <a:srgbClr val="008800"/>
+                  </a:solidFill>
+                  <a:latin typeface="Consolas" panose="020B0609020204030204" pitchFamily="49" charset="0"/>
+                </a:rPr>
+                <a:t>from</a:t>
+              </a:r>
+              <a:r>
+                <a:rPr lang="en-CA" sz="1400" dirty="0">
+                  <a:solidFill>
+                    <a:srgbClr val="BBBBBB"/>
+                  </a:solidFill>
+                  <a:latin typeface="Consolas" panose="020B0609020204030204" pitchFamily="49" charset="0"/>
+                </a:rPr>
+                <a:t> </a:t>
+              </a:r>
+              <a:r>
+                <a:rPr lang="en-CA" sz="1400" b="1" dirty="0">
+                  <a:solidFill>
+                    <a:srgbClr val="0E84B5"/>
+                  </a:solidFill>
+                  <a:latin typeface="Consolas" panose="020B0609020204030204" pitchFamily="49" charset="0"/>
+                </a:rPr>
+                <a:t>err</a:t>
+              </a:r>
+              <a:endParaRPr lang="en-CA" sz="1400" dirty="0">
+                <a:solidFill>
+                  <a:srgbClr val="333333"/>
+                </a:solidFill>
+                <a:latin typeface="Consolas" panose="020B0609020204030204" pitchFamily="49" charset="0"/>
+              </a:endParaRPr>
+            </a:p>
+            <a:p>
+              <a:r>
+                <a:rPr lang="en-CA" sz="1400" dirty="0">
+                  <a:solidFill>
+                    <a:srgbClr val="007020"/>
+                  </a:solidFill>
+                  <a:latin typeface="Consolas" panose="020B0609020204030204" pitchFamily="49" charset="0"/>
+                </a:rPr>
+                <a:t>print</a:t>
+              </a:r>
+              <a:r>
+                <a:rPr lang="en-CA" sz="1400" dirty="0">
+                  <a:solidFill>
+                    <a:srgbClr val="333333"/>
+                  </a:solidFill>
+                  <a:latin typeface="Consolas" panose="020B0609020204030204" pitchFamily="49" charset="0"/>
+                </a:rPr>
+                <a:t>('Ce message ne sera pas </a:t>
+              </a:r>
+              <a:r>
+                <a:rPr lang="en-CA" sz="1400" dirty="0" err="1">
+                  <a:solidFill>
+                    <a:srgbClr val="333333"/>
+                  </a:solidFill>
+                  <a:latin typeface="Consolas" panose="020B0609020204030204" pitchFamily="49" charset="0"/>
+                </a:rPr>
+                <a:t>affiché</a:t>
+              </a:r>
+              <a:r>
+                <a:rPr lang="en-CA" sz="1400" dirty="0">
+                  <a:solidFill>
+                    <a:srgbClr val="333333"/>
+                  </a:solidFill>
+                  <a:latin typeface="Consolas" panose="020B0609020204030204" pitchFamily="49" charset="0"/>
+                </a:rPr>
+                <a:t>')</a:t>
+              </a:r>
+            </a:p>
+          </p:txBody>
+        </p:sp>
+      </p:grpSp>
+    </p:spTree>
+    <p:extLst>
+      <p:ext uri="{BB962C8B-B14F-4D97-AF65-F5344CB8AC3E}">
+        <p14:creationId xmlns:p14="http://schemas.microsoft.com/office/powerpoint/2010/main" val="1109924805"/>
+      </p:ext>
+    </p:extLst>
+  </p:cSld>
+  <p:clrMapOvr>
+    <a:masterClrMapping/>
+  </p:clrMapOvr>
+  <p:timing>
+    <p:tnLst>
+      <p:par>
+        <p:cTn id="1" dur="indefinite" restart="never" nodeType="tmRoot">
+          <p:childTnLst>
+            <p:seq concurrent="1" nextAc="seek">
+              <p:cTn id="2" dur="indefinite" nodeType="mainSeq">
+                <p:childTnLst>
+                  <p:par>
+                    <p:cTn id="3" fill="hold">
+                      <p:stCondLst>
+                        <p:cond delay="indefinite"/>
+                      </p:stCondLst>
+                      <p:childTnLst>
+                        <p:par>
+                          <p:cTn id="4" fill="hold">
+                            <p:stCondLst>
+                              <p:cond delay="0"/>
+                            </p:stCondLst>
+                            <p:childTnLst>
+                              <p:par>
+                                <p:cTn id="5" presetID="10" presetClass="entr" presetSubtype="0" fill="hold" nodeType="clickEffect">
+                                  <p:stCondLst>
+                                    <p:cond delay="0"/>
+                                  </p:stCondLst>
+                                  <p:childTnLst>
+                                    <p:set>
+                                      <p:cBhvr>
+                                        <p:cTn id="6" dur="1" fill="hold">
+                                          <p:stCondLst>
+                                            <p:cond delay="0"/>
+                                          </p:stCondLst>
+                                        </p:cTn>
+                                        <p:tgtEl>
+                                          <p:spTgt spid="3">
+                                            <p:txEl>
+                                              <p:pRg st="0" end="0"/>
+                                            </p:txEl>
+                                          </p:spTgt>
+                                        </p:tgtEl>
+                                        <p:attrNameLst>
+                                          <p:attrName>style.visibility</p:attrName>
+                                        </p:attrNameLst>
+                                      </p:cBhvr>
+                                      <p:to>
+                                        <p:strVal val="visible"/>
+                                      </p:to>
+                                    </p:set>
+                                    <p:animEffect transition="in" filter="fade">
+                                      <p:cBhvr>
+                                        <p:cTn id="7" dur="500"/>
+                                        <p:tgtEl>
+                                          <p:spTgt spid="3">
+                                            <p:txEl>
+                                              <p:pRg st="0" end="0"/>
+                                            </p:txEl>
+                                          </p:spTgt>
+                                        </p:tgtEl>
+                                      </p:cBhvr>
+                                    </p:animEffect>
+                                  </p:childTnLst>
+                                </p:cTn>
+                              </p:par>
+                            </p:childTnLst>
+                          </p:cTn>
+                        </p:par>
+                      </p:childTnLst>
+                    </p:cTn>
+                  </p:par>
+                  <p:par>
+                    <p:cTn id="8" fill="hold">
+                      <p:stCondLst>
+                        <p:cond delay="indefinite"/>
+                      </p:stCondLst>
+                      <p:childTnLst>
+                        <p:par>
+                          <p:cTn id="9" fill="hold">
+                            <p:stCondLst>
+                              <p:cond delay="0"/>
+                            </p:stCondLst>
+                            <p:childTnLst>
+                              <p:par>
+                                <p:cTn id="10" presetID="10" presetClass="entr" presetSubtype="0" fill="hold" nodeType="clickEffect">
+                                  <p:stCondLst>
+                                    <p:cond delay="0"/>
+                                  </p:stCondLst>
+                                  <p:childTnLst>
+                                    <p:set>
+                                      <p:cBhvr>
+                                        <p:cTn id="11" dur="1" fill="hold">
+                                          <p:stCondLst>
+                                            <p:cond delay="0"/>
+                                          </p:stCondLst>
+                                        </p:cTn>
+                                        <p:tgtEl>
+                                          <p:spTgt spid="3">
+                                            <p:txEl>
+                                              <p:pRg st="1" end="1"/>
+                                            </p:txEl>
+                                          </p:spTgt>
+                                        </p:tgtEl>
+                                        <p:attrNameLst>
+                                          <p:attrName>style.visibility</p:attrName>
+                                        </p:attrNameLst>
+                                      </p:cBhvr>
+                                      <p:to>
+                                        <p:strVal val="visible"/>
+                                      </p:to>
+                                    </p:set>
+                                    <p:animEffect transition="in" filter="fade">
+                                      <p:cBhvr>
+                                        <p:cTn id="12" dur="500"/>
+                                        <p:tgtEl>
+                                          <p:spTgt spid="3">
+                                            <p:txEl>
+                                              <p:pRg st="1" end="1"/>
+                                            </p:txEl>
+                                          </p:spTgt>
+                                        </p:tgtEl>
+                                      </p:cBhvr>
+                                    </p:animEffect>
+                                  </p:childTnLst>
+                                </p:cTn>
+                              </p:par>
+                            </p:childTnLst>
+                          </p:cTn>
+                        </p:par>
+                      </p:childTnLst>
+                    </p:cTn>
+                  </p:par>
+                  <p:par>
+                    <p:cTn id="13" fill="hold">
+                      <p:stCondLst>
+                        <p:cond delay="indefinite"/>
+                      </p:stCondLst>
+                      <p:childTnLst>
+                        <p:par>
+                          <p:cTn id="14" fill="hold">
+                            <p:stCondLst>
+                              <p:cond delay="0"/>
+                            </p:stCondLst>
+                            <p:childTnLst>
+                              <p:par>
+                                <p:cTn id="15" presetID="10" presetClass="entr" presetSubtype="0" fill="hold" nodeType="clickEffect">
+                                  <p:stCondLst>
+                                    <p:cond delay="0"/>
+                                  </p:stCondLst>
+                                  <p:childTnLst>
+                                    <p:set>
+                                      <p:cBhvr>
+                                        <p:cTn id="16" dur="1" fill="hold">
+                                          <p:stCondLst>
+                                            <p:cond delay="0"/>
+                                          </p:stCondLst>
+                                        </p:cTn>
+                                        <p:tgtEl>
+                                          <p:spTgt spid="35"/>
+                                        </p:tgtEl>
+                                        <p:attrNameLst>
+                                          <p:attrName>style.visibility</p:attrName>
+                                        </p:attrNameLst>
+                                      </p:cBhvr>
+                                      <p:to>
+                                        <p:strVal val="visible"/>
+                                      </p:to>
+                                    </p:set>
+                                    <p:animEffect transition="in" filter="fade">
+                                      <p:cBhvr>
+                                        <p:cTn id="17" dur="500"/>
+                                        <p:tgtEl>
+                                          <p:spTgt spid="35"/>
+                                        </p:tgtEl>
+                                      </p:cBhvr>
+                                    </p:animEffect>
+                                  </p:childTnLst>
+                                </p:cTn>
+                              </p:par>
+                            </p:childTnLst>
+                          </p:cTn>
+                        </p:par>
+                      </p:childTnLst>
+                    </p:cTn>
+                  </p:par>
+                  <p:par>
+                    <p:cTn id="18" fill="hold">
+                      <p:stCondLst>
+                        <p:cond delay="indefinite"/>
+                      </p:stCondLst>
+                      <p:childTnLst>
+                        <p:par>
+                          <p:cTn id="19" fill="hold">
+                            <p:stCondLst>
+                              <p:cond delay="0"/>
+                            </p:stCondLst>
+                            <p:childTnLst>
+                              <p:par>
+                                <p:cTn id="20" presetID="10" presetClass="entr" presetSubtype="0" fill="hold" nodeType="clickEffect">
+                                  <p:stCondLst>
+                                    <p:cond delay="0"/>
+                                  </p:stCondLst>
+                                  <p:childTnLst>
+                                    <p:set>
+                                      <p:cBhvr>
+                                        <p:cTn id="21" dur="1" fill="hold">
+                                          <p:stCondLst>
+                                            <p:cond delay="0"/>
+                                          </p:stCondLst>
+                                        </p:cTn>
+                                        <p:tgtEl>
+                                          <p:spTgt spid="3">
+                                            <p:txEl>
+                                              <p:pRg st="6" end="6"/>
+                                            </p:txEl>
+                                          </p:spTgt>
+                                        </p:tgtEl>
+                                        <p:attrNameLst>
+                                          <p:attrName>style.visibility</p:attrName>
+                                        </p:attrNameLst>
+                                      </p:cBhvr>
+                                      <p:to>
+                                        <p:strVal val="visible"/>
+                                      </p:to>
+                                    </p:set>
+                                    <p:animEffect transition="in" filter="fade">
+                                      <p:cBhvr>
+                                        <p:cTn id="22" dur="500"/>
+                                        <p:tgtEl>
+                                          <p:spTgt spid="3">
+                                            <p:txEl>
+                                              <p:pRg st="6" end="6"/>
+                                            </p:txEl>
+                                          </p:spTgt>
+                                        </p:tgtEl>
+                                      </p:cBhvr>
+                                    </p:animEffect>
+                                  </p:childTnLst>
+                                </p:cTn>
+                              </p:par>
+                            </p:childTnLst>
+                          </p:cTn>
+                        </p:par>
+                      </p:childTnLst>
+                    </p:cTn>
+                  </p:par>
+                  <p:par>
+                    <p:cTn id="23" fill="hold">
+                      <p:stCondLst>
+                        <p:cond delay="indefinite"/>
+                      </p:stCondLst>
+                      <p:childTnLst>
+                        <p:par>
+                          <p:cTn id="24" fill="hold">
+                            <p:stCondLst>
+                              <p:cond delay="0"/>
+                            </p:stCondLst>
+                            <p:childTnLst>
+                              <p:par>
+                                <p:cTn id="25" presetID="10" presetClass="entr" presetSubtype="0" fill="hold" nodeType="clickEffect">
+                                  <p:stCondLst>
+                                    <p:cond delay="0"/>
+                                  </p:stCondLst>
+                                  <p:childTnLst>
+                                    <p:set>
+                                      <p:cBhvr>
+                                        <p:cTn id="26" dur="1" fill="hold">
+                                          <p:stCondLst>
+                                            <p:cond delay="0"/>
+                                          </p:stCondLst>
+                                        </p:cTn>
+                                        <p:tgtEl>
+                                          <p:spTgt spid="3">
+                                            <p:txEl>
+                                              <p:pRg st="7" end="7"/>
+                                            </p:txEl>
+                                          </p:spTgt>
+                                        </p:tgtEl>
+                                        <p:attrNameLst>
+                                          <p:attrName>style.visibility</p:attrName>
+                                        </p:attrNameLst>
+                                      </p:cBhvr>
+                                      <p:to>
+                                        <p:strVal val="visible"/>
+                                      </p:to>
+                                    </p:set>
+                                    <p:animEffect transition="in" filter="fade">
+                                      <p:cBhvr>
+                                        <p:cTn id="27" dur="500"/>
+                                        <p:tgtEl>
+                                          <p:spTgt spid="3">
+                                            <p:txEl>
+                                              <p:pRg st="7" end="7"/>
+                                            </p:txEl>
+                                          </p:spTgt>
+                                        </p:tgtEl>
+                                      </p:cBhvr>
+                                    </p:animEffect>
+                                  </p:childTnLst>
+                                </p:cTn>
+                              </p:par>
+                            </p:childTnLst>
+                          </p:cTn>
+                        </p:par>
+                      </p:childTnLst>
+                    </p:cTn>
+                  </p:par>
+                  <p:par>
+                    <p:cTn id="28" fill="hold">
+                      <p:stCondLst>
+                        <p:cond delay="indefinite"/>
+                      </p:stCondLst>
+                      <p:childTnLst>
+                        <p:par>
+                          <p:cTn id="29" fill="hold">
+                            <p:stCondLst>
+                              <p:cond delay="0"/>
+                            </p:stCondLst>
+                            <p:childTnLst>
+                              <p:par>
+                                <p:cTn id="30" presetID="10" presetClass="entr" presetSubtype="0" fill="hold" nodeType="clickEffect">
+                                  <p:stCondLst>
+                                    <p:cond delay="0"/>
+                                  </p:stCondLst>
+                                  <p:childTnLst>
+                                    <p:set>
+                                      <p:cBhvr>
+                                        <p:cTn id="31" dur="1" fill="hold">
+                                          <p:stCondLst>
+                                            <p:cond delay="0"/>
+                                          </p:stCondLst>
+                                        </p:cTn>
+                                        <p:tgtEl>
+                                          <p:spTgt spid="3">
+                                            <p:txEl>
+                                              <p:pRg st="9" end="9"/>
+                                            </p:txEl>
+                                          </p:spTgt>
+                                        </p:tgtEl>
+                                        <p:attrNameLst>
+                                          <p:attrName>style.visibility</p:attrName>
+                                        </p:attrNameLst>
+                                      </p:cBhvr>
+                                      <p:to>
+                                        <p:strVal val="visible"/>
+                                      </p:to>
+                                    </p:set>
+                                    <p:animEffect transition="in" filter="fade">
+                                      <p:cBhvr>
+                                        <p:cTn id="32" dur="500"/>
+                                        <p:tgtEl>
+                                          <p:spTgt spid="3">
+                                            <p:txEl>
+                                              <p:pRg st="9" end="9"/>
+                                            </p:txEl>
+                                          </p:spTgt>
+                                        </p:tgtEl>
+                                      </p:cBhvr>
+                                    </p:animEffect>
+                                  </p:childTnLst>
+                                </p:cTn>
+                              </p:par>
+                            </p:childTnLst>
+                          </p:cTn>
+                        </p:par>
+                      </p:childTnLst>
+                    </p:cTn>
+                  </p:par>
+                  <p:par>
+                    <p:cTn id="33" fill="hold">
+                      <p:stCondLst>
+                        <p:cond delay="indefinite"/>
+                      </p:stCondLst>
+                      <p:childTnLst>
+                        <p:par>
+                          <p:cTn id="34" fill="hold">
+                            <p:stCondLst>
+                              <p:cond delay="0"/>
+                            </p:stCondLst>
+                            <p:childTnLst>
+                              <p:par>
+                                <p:cTn id="35" presetID="10" presetClass="entr" presetSubtype="0" fill="hold" nodeType="clickEffect">
+                                  <p:stCondLst>
+                                    <p:cond delay="0"/>
+                                  </p:stCondLst>
+                                  <p:childTnLst>
+                                    <p:set>
+                                      <p:cBhvr>
+                                        <p:cTn id="36" dur="1" fill="hold">
+                                          <p:stCondLst>
+                                            <p:cond delay="0"/>
+                                          </p:stCondLst>
+                                        </p:cTn>
+                                        <p:tgtEl>
+                                          <p:spTgt spid="3">
+                                            <p:txEl>
+                                              <p:pRg st="10" end="10"/>
+                                            </p:txEl>
+                                          </p:spTgt>
+                                        </p:tgtEl>
+                                        <p:attrNameLst>
+                                          <p:attrName>style.visibility</p:attrName>
+                                        </p:attrNameLst>
+                                      </p:cBhvr>
+                                      <p:to>
+                                        <p:strVal val="visible"/>
+                                      </p:to>
+                                    </p:set>
+                                    <p:animEffect transition="in" filter="fade">
+                                      <p:cBhvr>
+                                        <p:cTn id="37" dur="500"/>
+                                        <p:tgtEl>
+                                          <p:spTgt spid="3">
+                                            <p:txEl>
+                                              <p:pRg st="10" end="10"/>
+                                            </p:txEl>
+                                          </p:spTgt>
+                                        </p:tgtEl>
+                                      </p:cBhvr>
+                                    </p:animEffect>
+                                  </p:childTnLst>
+                                </p:cTn>
+                              </p:par>
+                            </p:childTnLst>
+                          </p:cTn>
+                        </p:par>
+                      </p:childTnLst>
+                    </p:cTn>
+                  </p:par>
+                </p:childTnLst>
+              </p:cTn>
+              <p:prevCondLst>
+                <p:cond evt="onPrev" delay="0">
+                  <p:tgtEl>
+                    <p:sldTgt/>
+                  </p:tgtEl>
+                </p:cond>
+              </p:prevCondLst>
+              <p:nextCondLst>
+                <p:cond evt="onNext" delay="0">
+                  <p:tgtEl>
+                    <p:sldTgt/>
+                  </p:tgtEl>
+                </p:cond>
+              </p:nextCondLst>
+            </p:seq>
+          </p:childTnLst>
+        </p:cTn>
+      </p:par>
+    </p:tnLst>
+  </p:timing>
+</p:sld>
+</file>
+
+<file path=ppt/slides/slide7.xml><?xml version="1.0" encoding="utf-8"?>
+<p:sld xmlns:a="http://schemas.openxmlformats.org/drawingml/2006/main" xmlns:r="http://schemas.openxmlformats.org/officeDocument/2006/relationships" xmlns:p="http://schemas.openxmlformats.org/presentationml/2006/main">
+  <p:cSld>
+    <p:bg>
+      <p:bgPr>
+        <a:solidFill>
+          <a:schemeClr val="accent6">
+            <a:lumMod val="20000"/>
+            <a:lumOff val="80000"/>
+          </a:schemeClr>
+        </a:solidFill>
+        <a:effectLst/>
+      </p:bgPr>
+    </p:bg>
+    <p:spTree>
+      <p:nvGrpSpPr>
+        <p:cNvPr id="1" name="">
+          <a:extLst>
+            <a:ext uri="{FF2B5EF4-FFF2-40B4-BE49-F238E27FC236}">
+              <a16:creationId xmlns:a16="http://schemas.microsoft.com/office/drawing/2014/main" id="{B6F62E7D-F1C9-04D0-8386-A26753E396AB}"/>
+            </a:ext>
+          </a:extLst>
+        </p:cNvPr>
+        <p:cNvGrpSpPr/>
+        <p:nvPr/>
+      </p:nvGrpSpPr>
+      <p:grpSpPr>
+        <a:xfrm>
+          <a:off x="0" y="0"/>
+          <a:ext cx="0" cy="0"/>
+          <a:chOff x="0" y="0"/>
+          <a:chExt cx="0" cy="0"/>
+        </a:xfrm>
+      </p:grpSpPr>
+      <p:sp>
+        <p:nvSpPr>
+          <p:cNvPr id="2" name="Title 1">
+            <a:extLst>
+              <a:ext uri="{FF2B5EF4-FFF2-40B4-BE49-F238E27FC236}">
+                <a16:creationId xmlns:a16="http://schemas.microsoft.com/office/drawing/2014/main" id="{62728A02-6A54-91A3-EB53-15A01E27911D}"/>
+              </a:ext>
+            </a:extLst>
+          </p:cNvPr>
+          <p:cNvSpPr>
+            <a:spLocks noGrp="1"/>
+          </p:cNvSpPr>
+          <p:nvPr>
+            <p:ph type="title"/>
+          </p:nvPr>
+        </p:nvSpPr>
+        <p:spPr/>
+        <p:txBody>
+          <a:bodyPr/>
+          <a:lstStyle/>
+          <a:p>
+            <a:r>
+              <a:rPr lang="en-US" dirty="0">
+                <a:latin typeface="Arial Rounded MT Bold" panose="020F0704030504030204" pitchFamily="34" charset="0"/>
+              </a:rPr>
+              <a:t>XR6 – </a:t>
+            </a:r>
+            <a:r>
+              <a:rPr lang="fr-CA" dirty="0">
+                <a:latin typeface="Arial Rounded MT Bold" panose="020F0704030504030204" pitchFamily="34" charset="0"/>
+              </a:rPr>
+              <a:t>Gestion d'exceptions</a:t>
+            </a:r>
+          </a:p>
+        </p:txBody>
+      </p:sp>
+      <mc:AlternateContent xmlns:mc="http://schemas.openxmlformats.org/markup-compatibility/2006">
+        <mc:Choice xmlns:a14="http://schemas.microsoft.com/office/drawing/2010/main" Requires="a14">
+          <p:sp>
+            <p:nvSpPr>
+              <p:cNvPr id="3" name="Content Placeholder 2">
+                <a:extLst>
+                  <a:ext uri="{FF2B5EF4-FFF2-40B4-BE49-F238E27FC236}">
+                    <a16:creationId xmlns:a16="http://schemas.microsoft.com/office/drawing/2014/main" id="{D383AFDE-A9D8-1CDD-103F-72A5D25E3A37}"/>
+                  </a:ext>
+                </a:extLst>
+              </p:cNvPr>
+              <p:cNvSpPr>
+                <a:spLocks noGrp="1"/>
+              </p:cNvSpPr>
+              <p:nvPr>
+                <p:ph idx="1"/>
+              </p:nvPr>
+            </p:nvSpPr>
+            <p:spPr/>
+            <p:txBody>
+              <a:bodyPr>
+                <a:normAutofit/>
+              </a:bodyPr>
+              <a:lstStyle/>
+              <a:p>
+                <a:pPr algn="just">
+                  <a:lnSpc>
+                    <a:spcPct val="100000"/>
+                  </a:lnSpc>
+                </a:pPr>
+                <a:r>
+                  <a:rPr lang="fr-CA" sz="1800" dirty="0">
+                    <a:latin typeface="Consolas" panose="020B0609020204030204" pitchFamily="49" charset="0"/>
+                  </a:rPr>
+                  <a:t>Dans la fonction </a:t>
+                </a:r>
+                <a:r>
+                  <a:rPr lang="fr-CA" sz="1800" b="1" dirty="0" err="1">
+                    <a:latin typeface="Consolas" panose="020B0609020204030204" pitchFamily="49" charset="0"/>
+                  </a:rPr>
+                  <a:t>calculer_afficher_racines</a:t>
+                </a:r>
+                <a:r>
+                  <a:rPr lang="fr-CA" sz="1800" b="1" dirty="0">
+                    <a:latin typeface="Consolas" panose="020B0609020204030204" pitchFamily="49" charset="0"/>
+                  </a:rPr>
+                  <a:t>()</a:t>
+                </a:r>
+                <a:r>
+                  <a:rPr lang="fr-CA" sz="1800" dirty="0">
+                    <a:latin typeface="Consolas" panose="020B0609020204030204" pitchFamily="49" charset="0"/>
+                  </a:rPr>
+                  <a:t>, levez une exception de type </a:t>
+                </a:r>
+                <a:r>
+                  <a:rPr lang="fr-CA" sz="1800" dirty="0" err="1">
+                    <a:latin typeface="Consolas" panose="020B0609020204030204" pitchFamily="49" charset="0"/>
+                  </a:rPr>
+                  <a:t>ValueError</a:t>
+                </a:r>
+                <a:r>
+                  <a:rPr lang="fr-CA" sz="1800" dirty="0">
+                    <a:latin typeface="Consolas" panose="020B0609020204030204" pitchFamily="49" charset="0"/>
+                  </a:rPr>
+                  <a:t> si le coefficient </a:t>
+                </a:r>
+                <a14:m>
+                  <m:oMath xmlns:m="http://schemas.openxmlformats.org/officeDocument/2006/math">
+                    <m:r>
+                      <a:rPr lang="fr-CA" sz="1800" b="0" i="1" smtClean="0">
+                        <a:latin typeface="Cambria Math" panose="02040503050406030204" pitchFamily="18" charset="0"/>
+                      </a:rPr>
+                      <m:t>𝑎</m:t>
+                    </m:r>
+                  </m:oMath>
+                </a14:m>
+                <a:r>
+                  <a:rPr lang="fr-CA" sz="1800" dirty="0">
+                    <a:latin typeface="Consolas" panose="020B0609020204030204" pitchFamily="49" charset="0"/>
+                  </a:rPr>
+                  <a:t> est nul.</a:t>
+                </a:r>
+              </a:p>
+              <a:p>
+                <a:pPr algn="just">
+                  <a:lnSpc>
+                    <a:spcPct val="100000"/>
+                  </a:lnSpc>
+                </a:pPr>
+                <a:r>
+                  <a:rPr lang="fr-CA" sz="1800" dirty="0">
+                    <a:latin typeface="Consolas" panose="020B0609020204030204" pitchFamily="49" charset="0"/>
+                  </a:rPr>
+                  <a:t>Dans la procédure principale nommée </a:t>
+                </a:r>
+                <a:r>
+                  <a:rPr lang="fr-CA" sz="1800" b="1" dirty="0">
+                    <a:latin typeface="Consolas" panose="020B0609020204030204" pitchFamily="49" charset="0"/>
+                  </a:rPr>
+                  <a:t>main()</a:t>
+                </a:r>
+                <a:r>
+                  <a:rPr lang="fr-CA" sz="1800" dirty="0">
+                    <a:latin typeface="Consolas" panose="020B0609020204030204" pitchFamily="49" charset="0"/>
+                  </a:rPr>
+                  <a:t>, faites appel à </a:t>
+                </a:r>
+                <a:r>
+                  <a:rPr lang="fr-CA" sz="1800" b="1" dirty="0" err="1">
+                    <a:latin typeface="Consolas" panose="020B0609020204030204" pitchFamily="49" charset="0"/>
+                  </a:rPr>
+                  <a:t>calculer_afficher_racines</a:t>
+                </a:r>
+                <a:r>
+                  <a:rPr lang="fr-CA" sz="1800" b="1" dirty="0">
+                    <a:latin typeface="Consolas" panose="020B0609020204030204" pitchFamily="49" charset="0"/>
+                  </a:rPr>
+                  <a:t>()</a:t>
+                </a:r>
+                <a:r>
+                  <a:rPr lang="fr-CA" sz="1800" dirty="0">
+                    <a:latin typeface="Consolas" panose="020B0609020204030204" pitchFamily="49" charset="0"/>
+                  </a:rPr>
+                  <a:t> avec </a:t>
+                </a:r>
+                <a14:m>
+                  <m:oMath xmlns:m="http://schemas.openxmlformats.org/officeDocument/2006/math">
+                    <m:r>
+                      <a:rPr lang="fr-CA" sz="1800" b="0" i="1" smtClean="0">
+                        <a:latin typeface="Cambria Math" panose="02040503050406030204" pitchFamily="18" charset="0"/>
+                      </a:rPr>
+                      <m:t>𝑎</m:t>
+                    </m:r>
+                    <m:r>
+                      <a:rPr lang="fr-CA" sz="1800" b="0" i="1" smtClean="0">
+                        <a:latin typeface="Cambria Math" panose="02040503050406030204" pitchFamily="18" charset="0"/>
+                      </a:rPr>
+                      <m:t>=0</m:t>
+                    </m:r>
+                  </m:oMath>
+                </a14:m>
+                <a:r>
+                  <a:rPr lang="fr-CA" sz="1800" dirty="0">
+                    <a:latin typeface="Consolas" panose="020B0609020204030204" pitchFamily="49" charset="0"/>
+                  </a:rPr>
+                  <a:t> dans un bloc </a:t>
+                </a:r>
+                <a:r>
+                  <a:rPr lang="fr-CA" sz="1800" b="1" dirty="0" err="1">
+                    <a:latin typeface="Consolas" panose="020B0609020204030204" pitchFamily="49" charset="0"/>
+                  </a:rPr>
+                  <a:t>try-except</a:t>
+                </a:r>
+                <a:r>
+                  <a:rPr lang="fr-CA" sz="1800" dirty="0">
+                    <a:latin typeface="Consolas" panose="020B0609020204030204" pitchFamily="49" charset="0"/>
+                  </a:rPr>
+                  <a:t>.</a:t>
+                </a:r>
+              </a:p>
+              <a:p>
+                <a:pPr lvl="1" algn="just">
+                  <a:lnSpc>
+                    <a:spcPct val="100000"/>
+                  </a:lnSpc>
+                </a:pPr>
+                <a:r>
+                  <a:rPr lang="fr-CA" sz="1800" dirty="0">
+                    <a:latin typeface="Consolas" panose="020B0609020204030204" pitchFamily="49" charset="0"/>
+                  </a:rPr>
+                  <a:t>Signalez qu'une erreur est survenue en levant une </a:t>
+                </a:r>
+                <a:r>
+                  <a:rPr lang="fr-CA" sz="1800" b="1" dirty="0" err="1">
+                    <a:latin typeface="Consolas" panose="020B0609020204030204" pitchFamily="49" charset="0"/>
+                  </a:rPr>
+                  <a:t>RuntimeError</a:t>
+                </a:r>
+                <a:r>
+                  <a:rPr lang="fr-CA" sz="1800" dirty="0">
+                    <a:latin typeface="Consolas" panose="020B0609020204030204" pitchFamily="49" charset="0"/>
+                  </a:rPr>
+                  <a:t>.</a:t>
+                </a:r>
+              </a:p>
+              <a:p>
+                <a:pPr lvl="1" algn="just">
+                  <a:lnSpc>
+                    <a:spcPct val="100000"/>
+                  </a:lnSpc>
+                </a:pPr>
+                <a:r>
+                  <a:rPr lang="fr-CA" sz="1800" dirty="0">
+                    <a:latin typeface="Consolas" panose="020B0609020204030204" pitchFamily="49" charset="0"/>
+                  </a:rPr>
+                  <a:t>Préservez l'origine de l'erreur.</a:t>
+                </a:r>
+              </a:p>
+            </p:txBody>
+          </p:sp>
+        </mc:Choice>
+        <mc:Fallback>
+          <p:sp>
+            <p:nvSpPr>
+              <p:cNvPr id="3" name="Content Placeholder 2">
+                <a:extLst>
+                  <a:ext uri="{FF2B5EF4-FFF2-40B4-BE49-F238E27FC236}">
+                    <a16:creationId xmlns:a16="http://schemas.microsoft.com/office/drawing/2014/main" id="{D383AFDE-A9D8-1CDD-103F-72A5D25E3A37}"/>
+                  </a:ext>
+                </a:extLst>
+              </p:cNvPr>
+              <p:cNvSpPr>
+                <a:spLocks noGrp="1" noRot="1" noChangeAspect="1" noMove="1" noResize="1" noEditPoints="1" noAdjustHandles="1" noChangeArrowheads="1" noChangeShapeType="1" noTextEdit="1"/>
+              </p:cNvSpPr>
+              <p:nvPr>
+                <p:ph idx="1"/>
+              </p:nvPr>
+            </p:nvSpPr>
+            <p:spPr>
+              <a:blipFill>
+                <a:blip r:embed="rId2"/>
+                <a:stretch>
+                  <a:fillRect l="-406" t="-700" r="-464"/>
+                </a:stretch>
+              </a:blipFill>
+            </p:spPr>
+            <p:txBody>
+              <a:bodyPr/>
+              <a:lstStyle/>
+              <a:p>
+                <a:r>
+                  <a:rPr lang="fr-CA">
+                    <a:noFill/>
+                  </a:rPr>
+                  <a:t> </a:t>
+                </a:r>
+              </a:p>
+            </p:txBody>
+          </p:sp>
+        </mc:Fallback>
+      </mc:AlternateContent>
+      <p:sp>
+        <p:nvSpPr>
+          <p:cNvPr id="4" name="Slide Number Placeholder 3">
+            <a:extLst>
+              <a:ext uri="{FF2B5EF4-FFF2-40B4-BE49-F238E27FC236}">
+                <a16:creationId xmlns:a16="http://schemas.microsoft.com/office/drawing/2014/main" id="{315C62E8-4F79-31D8-E0E7-77F44B1E7352}"/>
+              </a:ext>
+            </a:extLst>
+          </p:cNvPr>
+          <p:cNvSpPr>
+            <a:spLocks noGrp="1"/>
+          </p:cNvSpPr>
+          <p:nvPr>
+            <p:ph type="sldNum" sz="quarter" idx="12"/>
+          </p:nvPr>
+        </p:nvSpPr>
+        <p:spPr/>
+        <p:txBody>
+          <a:bodyPr/>
+          <a:lstStyle/>
+          <a:p>
+            <a:fld id="{846B06B1-1179-491F-A487-8E0C403F7C13}" type="slidenum">
+              <a:rPr lang="fr-CA" smtClean="0"/>
+              <a:t>7</a:t>
+            </a:fld>
+            <a:endParaRPr lang="fr-CA"/>
+          </a:p>
+        </p:txBody>
+      </p:sp>
+    </p:spTree>
+    <p:extLst>
+      <p:ext uri="{BB962C8B-B14F-4D97-AF65-F5344CB8AC3E}">
+        <p14:creationId xmlns:p14="http://schemas.microsoft.com/office/powerpoint/2010/main" val="2560486360"/>
+      </p:ext>
+    </p:extLst>
+  </p:cSld>
+  <p:clrMapOvr>
+    <a:masterClrMapping/>
+  </p:clrMapOvr>
+</p:sld>
+</file>
+
+<file path=ppt/slides/slide8.xml><?xml version="1.0" encoding="utf-8"?>
+<p:sld xmlns:a="http://schemas.openxmlformats.org/drawingml/2006/main" xmlns:r="http://schemas.openxmlformats.org/officeDocument/2006/relationships" xmlns:p="http://schemas.openxmlformats.org/presentationml/2006/main">
+  <p:cSld>
+    <p:bg>
+      <p:bgPr>
+        <a:solidFill>
           <a:srgbClr val="FFFF00"/>
         </a:solidFill>
         <a:effectLst/>
@@ -35768,6 +39336,52 @@
           <a:chExt cx="0" cy="0"/>
         </a:xfrm>
       </p:grpSpPr>
+      <p:sp>
+        <p:nvSpPr>
+          <p:cNvPr id="15" name="Rectangle 14">
+            <a:extLst>
+              <a:ext uri="{FF2B5EF4-FFF2-40B4-BE49-F238E27FC236}">
+                <a16:creationId xmlns:a16="http://schemas.microsoft.com/office/drawing/2014/main" id="{AED2F8D1-AEB0-E659-5BE9-F91783BAB484}"/>
+              </a:ext>
+            </a:extLst>
+          </p:cNvPr>
+          <p:cNvSpPr/>
+          <p:nvPr/>
+        </p:nvSpPr>
+        <p:spPr>
+          <a:xfrm>
+            <a:off x="61649" y="3761964"/>
+            <a:ext cx="726332" cy="171230"/>
+          </a:xfrm>
+          <a:prstGeom prst="rect">
+            <a:avLst/>
+          </a:prstGeom>
+        </p:spPr>
+        <p:style>
+          <a:lnRef idx="2">
+            <a:schemeClr val="accent1">
+              <a:shade val="15000"/>
+            </a:schemeClr>
+          </a:lnRef>
+          <a:fillRef idx="1">
+            <a:schemeClr val="accent1"/>
+          </a:fillRef>
+          <a:effectRef idx="0">
+            <a:schemeClr val="accent1"/>
+          </a:effectRef>
+          <a:fontRef idx="minor">
+            <a:schemeClr val="lt1"/>
+          </a:fontRef>
+        </p:style>
+        <p:txBody>
+          <a:bodyPr rtlCol="0" anchor="ctr"/>
+          <a:lstStyle/>
+          <a:p>
+            <a:pPr algn="ctr"/>
+            <a:endParaRPr lang="fr-CA"/>
+          </a:p>
+        </p:txBody>
+      </p:sp>
     </p:spTree>
     <p:extLst>
       <p:ext uri="{BB962C8B-B14F-4D97-AF65-F5344CB8AC3E}">
@@ -35781,7 +39395,7 @@
 </p:sld>
 </file>
 
-<file path=ppt/slides/slide7.xml><?xml version="1.0" encoding="utf-8"?>
+<file path=ppt/slides/slide9.xml><?xml version="1.0" encoding="utf-8"?>
 <p:sld xmlns:a="http://schemas.openxmlformats.org/drawingml/2006/main" xmlns:r="http://schemas.openxmlformats.org/officeDocument/2006/relationships" xmlns:p="http://schemas.openxmlformats.org/presentationml/2006/main">
   <p:cSld>
     <p:bg>
@@ -36421,7 +40035,7 @@
           <a:p>
             <a:fld id="{846B06B1-1179-491F-A487-8E0C403F7C13}" type="slidenum">
               <a:rPr lang="fr-CA" smtClean="0"/>
-              <a:t>7</a:t>
+              <a:t>9</a:t>
             </a:fld>
             <a:endParaRPr lang="fr-CA"/>
           </a:p>
@@ -36879,1794 +40493,6 @@
                                     <p:animEffect transition="in" filter="fade">
                                       <p:cBhvr>
                                         <p:cTn id="38" dur="500"/>
-                                        <p:tgtEl>
-                                          <p:spTgt spid="3">
-                                            <p:txEl>
-                                              <p:pRg st="7" end="7"/>
-                                            </p:txEl>
-                                          </p:spTgt>
-                                        </p:tgtEl>
-                                      </p:cBhvr>
-                                    </p:animEffect>
-                                  </p:childTnLst>
-                                </p:cTn>
-                              </p:par>
-                            </p:childTnLst>
-                          </p:cTn>
-                        </p:par>
-                      </p:childTnLst>
-                    </p:cTn>
-                  </p:par>
-                </p:childTnLst>
-              </p:cTn>
-              <p:prevCondLst>
-                <p:cond evt="onPrev" delay="0">
-                  <p:tgtEl>
-                    <p:sldTgt/>
-                  </p:tgtEl>
-                </p:cond>
-              </p:prevCondLst>
-              <p:nextCondLst>
-                <p:cond evt="onNext" delay="0">
-                  <p:tgtEl>
-                    <p:sldTgt/>
-                  </p:tgtEl>
-                </p:cond>
-              </p:nextCondLst>
-            </p:seq>
-          </p:childTnLst>
-        </p:cTn>
-      </p:par>
-    </p:tnLst>
-  </p:timing>
-</p:sld>
-</file>
-
-<file path=ppt/slides/slide8.xml><?xml version="1.0" encoding="utf-8"?>
-<p:sld xmlns:a="http://schemas.openxmlformats.org/drawingml/2006/main" xmlns:r="http://schemas.openxmlformats.org/officeDocument/2006/relationships" xmlns:p="http://schemas.openxmlformats.org/presentationml/2006/main">
-  <p:cSld>
-    <p:bg>
-      <p:bgPr>
-        <a:solidFill>
-          <a:srgbClr val="F5F5F5"/>
-        </a:solidFill>
-        <a:effectLst/>
-      </p:bgPr>
-    </p:bg>
-    <p:spTree>
-      <p:nvGrpSpPr>
-        <p:cNvPr id="1" name="">
-          <a:extLst>
-            <a:ext uri="{FF2B5EF4-FFF2-40B4-BE49-F238E27FC236}">
-              <a16:creationId xmlns:a16="http://schemas.microsoft.com/office/drawing/2014/main" id="{E62BFDAB-C1F4-2C90-C57C-9F000B0B4330}"/>
-            </a:ext>
-          </a:extLst>
-        </p:cNvPr>
-        <p:cNvGrpSpPr/>
-        <p:nvPr/>
-      </p:nvGrpSpPr>
-      <p:grpSpPr>
-        <a:xfrm>
-          <a:off x="0" y="0"/>
-          <a:ext cx="0" cy="0"/>
-          <a:chOff x="0" y="0"/>
-          <a:chExt cx="0" cy="0"/>
-        </a:xfrm>
-      </p:grpSpPr>
-      <p:sp>
-        <p:nvSpPr>
-          <p:cNvPr id="2" name="Title 1">
-            <a:extLst>
-              <a:ext uri="{FF2B5EF4-FFF2-40B4-BE49-F238E27FC236}">
-                <a16:creationId xmlns:a16="http://schemas.microsoft.com/office/drawing/2014/main" id="{6DB834E1-6328-58D0-AD5B-7735B2301249}"/>
-              </a:ext>
-            </a:extLst>
-          </p:cNvPr>
-          <p:cNvSpPr>
-            <a:spLocks noGrp="1"/>
-          </p:cNvSpPr>
-          <p:nvPr>
-            <p:ph type="title"/>
-          </p:nvPr>
-        </p:nvSpPr>
-        <p:spPr/>
-        <p:txBody>
-          <a:bodyPr/>
-          <a:lstStyle/>
-          <a:p>
-            <a:r>
-              <a:rPr lang="en-US" dirty="0">
-                <a:latin typeface="Arial Rounded MT Bold" panose="020F0704030504030204" pitchFamily="34" charset="0"/>
-              </a:rPr>
-              <a:t>Types</a:t>
-            </a:r>
-            <a:endParaRPr lang="fr-CA" dirty="0">
-              <a:latin typeface="Arial Rounded MT Bold" panose="020F0704030504030204" pitchFamily="34" charset="0"/>
-            </a:endParaRPr>
-          </a:p>
-        </p:txBody>
-      </p:sp>
-      <mc:AlternateContent xmlns:mc="http://schemas.openxmlformats.org/markup-compatibility/2006" xmlns:a14="http://schemas.microsoft.com/office/drawing/2010/main">
-        <mc:Choice Requires="a14">
-          <p:sp>
-            <p:nvSpPr>
-              <p:cNvPr id="3" name="Content Placeholder 2">
-                <a:extLst>
-                  <a:ext uri="{FF2B5EF4-FFF2-40B4-BE49-F238E27FC236}">
-                    <a16:creationId xmlns:a16="http://schemas.microsoft.com/office/drawing/2014/main" id="{E958FDEE-6B55-8774-B700-C58B12F5572A}"/>
-                  </a:ext>
-                </a:extLst>
-              </p:cNvPr>
-              <p:cNvSpPr>
-                <a:spLocks noGrp="1"/>
-              </p:cNvSpPr>
-              <p:nvPr>
-                <p:ph idx="1"/>
-              </p:nvPr>
-            </p:nvSpPr>
-            <p:spPr/>
-            <p:txBody>
-              <a:bodyPr>
-                <a:normAutofit/>
-              </a:bodyPr>
-              <a:lstStyle/>
-              <a:p>
-                <a:pPr marL="0" indent="0" algn="just">
-                  <a:buNone/>
-                </a:pPr>
-                <a:r>
-                  <a:rPr lang="fr-CA" sz="2600" b="1" dirty="0">
-                    <a:latin typeface="Consolas" panose="020B0609020204030204" pitchFamily="49" charset="0"/>
-                  </a:rPr>
-                  <a:t>&gt;&gt;&gt; type(1)		</a:t>
-                </a:r>
-                <a14:m>
-                  <m:oMath xmlns:m="http://schemas.openxmlformats.org/officeDocument/2006/math">
-                    <m:r>
-                      <a:rPr lang="fr-CA" sz="2600" i="1" smtClean="0">
-                        <a:latin typeface="Cambria Math" panose="02040503050406030204" pitchFamily="18" charset="0"/>
-                        <a:ea typeface="Cambria Math" panose="02040503050406030204" pitchFamily="18" charset="0"/>
-                      </a:rPr>
-                      <m:t>←</m:t>
-                    </m:r>
-                  </m:oMath>
-                </a14:m>
-                <a:r>
-                  <a:rPr lang="fr-CA" sz="2600" dirty="0">
-                    <a:latin typeface="Consolas" panose="020B0609020204030204" pitchFamily="49" charset="0"/>
-                  </a:rPr>
-                  <a:t> </a:t>
-                </a:r>
-                <a:r>
-                  <a:rPr lang="fr-CA" sz="2600" b="1" dirty="0">
-                    <a:solidFill>
-                      <a:srgbClr val="FF2500"/>
-                    </a:solidFill>
-                    <a:latin typeface="Consolas" panose="020B0609020204030204" pitchFamily="49" charset="0"/>
-                  </a:rPr>
-                  <a:t>entiers</a:t>
-                </a:r>
-              </a:p>
-              <a:p>
-                <a:pPr marL="0" indent="0" algn="just">
-                  <a:buNone/>
-                </a:pPr>
-                <a:r>
-                  <a:rPr lang="fr-CA" sz="2600" dirty="0">
-                    <a:solidFill>
-                      <a:schemeClr val="bg1">
-                        <a:lumMod val="50000"/>
-                      </a:schemeClr>
-                    </a:solidFill>
-                    <a:latin typeface="Consolas" panose="020B0609020204030204" pitchFamily="49" charset="0"/>
-                  </a:rPr>
-                  <a:t>&lt;class 'int'&gt;</a:t>
-                </a:r>
-              </a:p>
-              <a:p>
-                <a:pPr marL="0" indent="0" algn="just">
-                  <a:buNone/>
-                </a:pPr>
-                <a:r>
-                  <a:rPr lang="fr-CA" sz="2600" b="1" dirty="0">
-                    <a:latin typeface="Consolas" panose="020B0609020204030204" pitchFamily="49" charset="0"/>
-                  </a:rPr>
-                  <a:t>&gt;&gt;&gt; type(1.0)		</a:t>
-                </a:r>
-                <a14:m>
-                  <m:oMath xmlns:m="http://schemas.openxmlformats.org/officeDocument/2006/math">
-                    <m:r>
-                      <a:rPr lang="fr-CA" sz="2600" i="1" smtClean="0">
-                        <a:latin typeface="Cambria Math" panose="02040503050406030204" pitchFamily="18" charset="0"/>
-                        <a:ea typeface="Cambria Math" panose="02040503050406030204" pitchFamily="18" charset="0"/>
-                      </a:rPr>
-                      <m:t>←</m:t>
-                    </m:r>
-                  </m:oMath>
-                </a14:m>
-                <a:r>
-                  <a:rPr lang="fr-CA" sz="2600" b="1" dirty="0">
-                    <a:solidFill>
-                      <a:srgbClr val="FF2500"/>
-                    </a:solidFill>
-                    <a:latin typeface="Consolas" panose="020B0609020204030204" pitchFamily="49" charset="0"/>
-                  </a:rPr>
-                  <a:t> rationnels</a:t>
-                </a:r>
-              </a:p>
-              <a:p>
-                <a:pPr marL="0" indent="0" algn="just">
-                  <a:buNone/>
-                </a:pPr>
-                <a:r>
-                  <a:rPr lang="fr-CA" sz="2600" dirty="0">
-                    <a:solidFill>
-                      <a:schemeClr val="bg1">
-                        <a:lumMod val="50000"/>
-                      </a:schemeClr>
-                    </a:solidFill>
-                    <a:latin typeface="Consolas" panose="020B0609020204030204" pitchFamily="49" charset="0"/>
-                  </a:rPr>
-                  <a:t>&lt;class '</a:t>
-                </a:r>
-                <a:r>
-                  <a:rPr lang="fr-CA" sz="2600" dirty="0" err="1">
-                    <a:solidFill>
-                      <a:schemeClr val="bg1">
-                        <a:lumMod val="50000"/>
-                      </a:schemeClr>
-                    </a:solidFill>
-                    <a:latin typeface="Consolas" panose="020B0609020204030204" pitchFamily="49" charset="0"/>
-                  </a:rPr>
-                  <a:t>float</a:t>
-                </a:r>
-                <a:r>
-                  <a:rPr lang="fr-CA" sz="2600" dirty="0">
-                    <a:solidFill>
-                      <a:schemeClr val="bg1">
-                        <a:lumMod val="50000"/>
-                      </a:schemeClr>
-                    </a:solidFill>
-                    <a:latin typeface="Consolas" panose="020B0609020204030204" pitchFamily="49" charset="0"/>
-                  </a:rPr>
-                  <a:t>'&gt;</a:t>
-                </a:r>
-              </a:p>
-              <a:p>
-                <a:pPr marL="0" indent="0" algn="just">
-                  <a:buNone/>
-                </a:pPr>
-                <a:r>
-                  <a:rPr lang="fr-CA" sz="2600" b="1" dirty="0">
-                    <a:latin typeface="Consolas" panose="020B0609020204030204" pitchFamily="49" charset="0"/>
-                  </a:rPr>
-                  <a:t>&gt;&gt;&gt; type(</a:t>
-                </a:r>
-                <a:r>
-                  <a:rPr lang="fr-CA" sz="2600" b="1" dirty="0" err="1">
-                    <a:latin typeface="Consolas" panose="020B0609020204030204" pitchFamily="49" charset="0"/>
-                  </a:rPr>
-                  <a:t>True</a:t>
-                </a:r>
-                <a:r>
-                  <a:rPr lang="fr-CA" sz="2600" b="1" dirty="0">
-                    <a:latin typeface="Consolas" panose="020B0609020204030204" pitchFamily="49" charset="0"/>
-                  </a:rPr>
-                  <a:t>)		</a:t>
-                </a:r>
-                <a14:m>
-                  <m:oMath xmlns:m="http://schemas.openxmlformats.org/officeDocument/2006/math">
-                    <m:r>
-                      <a:rPr lang="fr-CA" sz="2600" i="1" smtClean="0">
-                        <a:latin typeface="Cambria Math" panose="02040503050406030204" pitchFamily="18" charset="0"/>
-                        <a:ea typeface="Cambria Math" panose="02040503050406030204" pitchFamily="18" charset="0"/>
-                      </a:rPr>
-                      <m:t>←</m:t>
-                    </m:r>
-                  </m:oMath>
-                </a14:m>
-                <a:r>
-                  <a:rPr lang="fr-CA" sz="2600" b="1" dirty="0">
-                    <a:solidFill>
-                      <a:srgbClr val="FF2500"/>
-                    </a:solidFill>
-                    <a:latin typeface="Consolas" panose="020B0609020204030204" pitchFamily="49" charset="0"/>
-                  </a:rPr>
-                  <a:t> </a:t>
-                </a:r>
-                <a:r>
-                  <a:rPr lang="fr-CA" sz="2600" b="1" dirty="0" err="1">
-                    <a:solidFill>
-                      <a:srgbClr val="FF2500"/>
-                    </a:solidFill>
-                    <a:latin typeface="Consolas" panose="020B0609020204030204" pitchFamily="49" charset="0"/>
-                  </a:rPr>
-                  <a:t>bool</a:t>
-                </a:r>
-                <a:r>
-                  <a:rPr lang="en-US" sz="2600" b="1" dirty="0" err="1">
-                    <a:solidFill>
-                      <a:srgbClr val="FF2500"/>
-                    </a:solidFill>
-                    <a:latin typeface="Consolas" panose="020B0609020204030204" pitchFamily="49" charset="0"/>
-                  </a:rPr>
-                  <a:t>éens</a:t>
-                </a:r>
-                <a:endParaRPr lang="fr-CA" sz="2600" b="1" dirty="0">
-                  <a:solidFill>
-                    <a:srgbClr val="FF2500"/>
-                  </a:solidFill>
-                  <a:latin typeface="Consolas" panose="020B0609020204030204" pitchFamily="49" charset="0"/>
-                </a:endParaRPr>
-              </a:p>
-              <a:p>
-                <a:pPr marL="0" indent="0" algn="just">
-                  <a:buNone/>
-                </a:pPr>
-                <a:r>
-                  <a:rPr lang="fr-CA" sz="2600" dirty="0">
-                    <a:solidFill>
-                      <a:schemeClr val="bg1">
-                        <a:lumMod val="50000"/>
-                      </a:schemeClr>
-                    </a:solidFill>
-                    <a:latin typeface="Consolas" panose="020B0609020204030204" pitchFamily="49" charset="0"/>
-                  </a:rPr>
-                  <a:t>&lt;class '</a:t>
-                </a:r>
-                <a:r>
-                  <a:rPr lang="fr-CA" sz="2600" dirty="0" err="1">
-                    <a:solidFill>
-                      <a:schemeClr val="bg1">
-                        <a:lumMod val="50000"/>
-                      </a:schemeClr>
-                    </a:solidFill>
-                    <a:latin typeface="Consolas" panose="020B0609020204030204" pitchFamily="49" charset="0"/>
-                  </a:rPr>
-                  <a:t>bool</a:t>
-                </a:r>
-                <a:r>
-                  <a:rPr lang="fr-CA" sz="2600" dirty="0">
-                    <a:solidFill>
-                      <a:schemeClr val="bg1">
-                        <a:lumMod val="50000"/>
-                      </a:schemeClr>
-                    </a:solidFill>
-                    <a:latin typeface="Consolas" panose="020B0609020204030204" pitchFamily="49" charset="0"/>
-                  </a:rPr>
-                  <a:t>'&gt;</a:t>
-                </a:r>
-              </a:p>
-              <a:p>
-                <a:pPr marL="0" indent="0" algn="just">
-                  <a:buNone/>
-                </a:pPr>
-                <a:r>
-                  <a:rPr lang="fr-CA" sz="2600" b="1" dirty="0">
-                    <a:latin typeface="Consolas" panose="020B0609020204030204" pitchFamily="49" charset="0"/>
-                  </a:rPr>
-                  <a:t>&gt;&gt;&gt; type('a')		</a:t>
-                </a:r>
-                <a14:m>
-                  <m:oMath xmlns:m="http://schemas.openxmlformats.org/officeDocument/2006/math">
-                    <m:r>
-                      <a:rPr lang="fr-CA" sz="2600" i="1" smtClean="0">
-                        <a:latin typeface="Cambria Math" panose="02040503050406030204" pitchFamily="18" charset="0"/>
-                        <a:ea typeface="Cambria Math" panose="02040503050406030204" pitchFamily="18" charset="0"/>
-                      </a:rPr>
-                      <m:t>←</m:t>
-                    </m:r>
-                  </m:oMath>
-                </a14:m>
-                <a:r>
-                  <a:rPr lang="fr-CA" sz="2600" dirty="0">
-                    <a:latin typeface="Consolas" panose="020B0609020204030204" pitchFamily="49" charset="0"/>
-                  </a:rPr>
-                  <a:t> </a:t>
-                </a:r>
-                <a:r>
-                  <a:rPr lang="fr-CA" sz="2600" b="1" dirty="0">
-                    <a:solidFill>
-                      <a:srgbClr val="FF2500"/>
-                    </a:solidFill>
-                    <a:latin typeface="Consolas" panose="020B0609020204030204" pitchFamily="49" charset="0"/>
-                  </a:rPr>
-                  <a:t>chaînes de caractères</a:t>
-                </a:r>
-              </a:p>
-              <a:p>
-                <a:pPr marL="0" indent="0" algn="just">
-                  <a:buNone/>
-                </a:pPr>
-                <a:r>
-                  <a:rPr lang="fr-CA" sz="2600" dirty="0">
-                    <a:solidFill>
-                      <a:schemeClr val="bg1">
-                        <a:lumMod val="50000"/>
-                      </a:schemeClr>
-                    </a:solidFill>
-                    <a:latin typeface="Consolas" panose="020B0609020204030204" pitchFamily="49" charset="0"/>
-                  </a:rPr>
-                  <a:t>&lt;class 'str'&gt;</a:t>
-                </a:r>
-              </a:p>
-              <a:p>
-                <a:pPr marL="0" indent="0" algn="just">
-                  <a:buNone/>
-                </a:pPr>
-                <a:endParaRPr lang="fr-CA" i="1" dirty="0">
-                  <a:latin typeface="Consolas" panose="020B0609020204030204" pitchFamily="49" charset="0"/>
-                </a:endParaRPr>
-              </a:p>
-            </p:txBody>
-          </p:sp>
-        </mc:Choice>
-        <mc:Fallback xmlns="">
-          <p:sp>
-            <p:nvSpPr>
-              <p:cNvPr id="3" name="Content Placeholder 2">
-                <a:extLst>
-                  <a:ext uri="{FF2B5EF4-FFF2-40B4-BE49-F238E27FC236}">
-                    <a16:creationId xmlns:a16="http://schemas.microsoft.com/office/drawing/2014/main" id="{E958FDEE-6B55-8774-B700-C58B12F5572A}"/>
-                  </a:ext>
-                </a:extLst>
-              </p:cNvPr>
-              <p:cNvSpPr>
-                <a:spLocks noGrp="1" noRot="1" noChangeAspect="1" noMove="1" noResize="1" noEditPoints="1" noAdjustHandles="1" noChangeArrowheads="1" noChangeShapeType="1" noTextEdit="1"/>
-              </p:cNvSpPr>
-              <p:nvPr>
-                <p:ph idx="1"/>
-              </p:nvPr>
-            </p:nvSpPr>
-            <p:spPr>
-              <a:blipFill>
-                <a:blip r:embed="rId2"/>
-                <a:stretch>
-                  <a:fillRect l="-1043" t="-2101"/>
-                </a:stretch>
-              </a:blipFill>
-            </p:spPr>
-            <p:txBody>
-              <a:bodyPr/>
-              <a:lstStyle/>
-              <a:p>
-                <a:r>
-                  <a:rPr lang="fr-CA">
-                    <a:noFill/>
-                  </a:rPr>
-                  <a:t> </a:t>
-                </a:r>
-              </a:p>
-            </p:txBody>
-          </p:sp>
-        </mc:Fallback>
-      </mc:AlternateContent>
-      <p:sp>
-        <p:nvSpPr>
-          <p:cNvPr id="4" name="TextBox 3">
-            <a:extLst>
-              <a:ext uri="{FF2B5EF4-FFF2-40B4-BE49-F238E27FC236}">
-                <a16:creationId xmlns:a16="http://schemas.microsoft.com/office/drawing/2014/main" id="{3411B9CF-30C0-4D7D-B26B-6558857625D2}"/>
-              </a:ext>
-            </a:extLst>
-          </p:cNvPr>
-          <p:cNvSpPr txBox="1"/>
-          <p:nvPr/>
-        </p:nvSpPr>
-        <p:spPr>
-          <a:xfrm>
-            <a:off x="838199" y="6176963"/>
-            <a:ext cx="10515599" cy="369332"/>
-          </a:xfrm>
-          <a:prstGeom prst="rect">
-            <a:avLst/>
-          </a:prstGeom>
-          <a:noFill/>
-        </p:spPr>
-        <p:txBody>
-          <a:bodyPr wrap="square">
-            <a:spAutoFit/>
-          </a:bodyPr>
-          <a:lstStyle/>
-          <a:p>
-            <a:pPr algn="ctr"/>
-            <a:r>
-              <a:rPr lang="fr-CA" sz="1800" b="1" dirty="0">
-                <a:latin typeface="Consolas" panose="020B0609020204030204" pitchFamily="49" charset="0"/>
-              </a:rPr>
-              <a:t>SOURCE: </a:t>
-            </a:r>
-            <a:r>
-              <a:rPr lang="fr-CA" b="1" dirty="0">
-                <a:latin typeface="Consolas" panose="020B0609020204030204" pitchFamily="49" charset="0"/>
-                <a:hlinkClick r:id="rId3"/>
-              </a:rPr>
-              <a:t>https://docs.python.org/3/library/stdtypes.html</a:t>
-            </a:r>
-            <a:endParaRPr lang="fr-CA" sz="1800" b="1" dirty="0">
-              <a:latin typeface="Consolas" panose="020B0609020204030204" pitchFamily="49" charset="0"/>
-            </a:endParaRPr>
-          </a:p>
-        </p:txBody>
-      </p:sp>
-      <p:sp>
-        <p:nvSpPr>
-          <p:cNvPr id="5" name="Slide Number Placeholder 4">
-            <a:extLst>
-              <a:ext uri="{FF2B5EF4-FFF2-40B4-BE49-F238E27FC236}">
-                <a16:creationId xmlns:a16="http://schemas.microsoft.com/office/drawing/2014/main" id="{E5513B3C-7CEF-8A58-5F38-6B1B29F9C08E}"/>
-              </a:ext>
-            </a:extLst>
-          </p:cNvPr>
-          <p:cNvSpPr>
-            <a:spLocks noGrp="1"/>
-          </p:cNvSpPr>
-          <p:nvPr>
-            <p:ph type="sldNum" sz="quarter" idx="12"/>
-          </p:nvPr>
-        </p:nvSpPr>
-        <p:spPr/>
-        <p:txBody>
-          <a:bodyPr/>
-          <a:lstStyle/>
-          <a:p>
-            <a:fld id="{846B06B1-1179-491F-A487-8E0C403F7C13}" type="slidenum">
-              <a:rPr lang="fr-CA" smtClean="0"/>
-              <a:t>8</a:t>
-            </a:fld>
-            <a:endParaRPr lang="fr-CA"/>
-          </a:p>
-        </p:txBody>
-      </p:sp>
-    </p:spTree>
-    <p:extLst>
-      <p:ext uri="{BB962C8B-B14F-4D97-AF65-F5344CB8AC3E}">
-        <p14:creationId xmlns:p14="http://schemas.microsoft.com/office/powerpoint/2010/main" val="3404311213"/>
-      </p:ext>
-    </p:extLst>
-  </p:cSld>
-  <p:clrMapOvr>
-    <a:masterClrMapping/>
-  </p:clrMapOvr>
-  <p:timing>
-    <p:tnLst>
-      <p:par>
-        <p:cTn id="1" dur="indefinite" restart="never" nodeType="tmRoot">
-          <p:childTnLst>
-            <p:seq concurrent="1" nextAc="seek">
-              <p:cTn id="2" dur="indefinite" nodeType="mainSeq">
-                <p:childTnLst>
-                  <p:par>
-                    <p:cTn id="3" fill="hold">
-                      <p:stCondLst>
-                        <p:cond delay="indefinite"/>
-                      </p:stCondLst>
-                      <p:childTnLst>
-                        <p:par>
-                          <p:cTn id="4" fill="hold">
-                            <p:stCondLst>
-                              <p:cond delay="0"/>
-                            </p:stCondLst>
-                            <p:childTnLst>
-                              <p:par>
-                                <p:cTn id="5" presetID="10" presetClass="entr" presetSubtype="0" fill="hold" nodeType="clickEffect">
-                                  <p:stCondLst>
-                                    <p:cond delay="0"/>
-                                  </p:stCondLst>
-                                  <p:childTnLst>
-                                    <p:set>
-                                      <p:cBhvr>
-                                        <p:cTn id="6" dur="1" fill="hold">
-                                          <p:stCondLst>
-                                            <p:cond delay="0"/>
-                                          </p:stCondLst>
-                                        </p:cTn>
-                                        <p:tgtEl>
-                                          <p:spTgt spid="3">
-                                            <p:txEl>
-                                              <p:pRg st="0" end="0"/>
-                                            </p:txEl>
-                                          </p:spTgt>
-                                        </p:tgtEl>
-                                        <p:attrNameLst>
-                                          <p:attrName>style.visibility</p:attrName>
-                                        </p:attrNameLst>
-                                      </p:cBhvr>
-                                      <p:to>
-                                        <p:strVal val="visible"/>
-                                      </p:to>
-                                    </p:set>
-                                    <p:animEffect transition="in" filter="fade">
-                                      <p:cBhvr>
-                                        <p:cTn id="7" dur="500"/>
-                                        <p:tgtEl>
-                                          <p:spTgt spid="3">
-                                            <p:txEl>
-                                              <p:pRg st="0" end="0"/>
-                                            </p:txEl>
-                                          </p:spTgt>
-                                        </p:tgtEl>
-                                      </p:cBhvr>
-                                    </p:animEffect>
-                                  </p:childTnLst>
-                                </p:cTn>
-                              </p:par>
-                            </p:childTnLst>
-                          </p:cTn>
-                        </p:par>
-                      </p:childTnLst>
-                    </p:cTn>
-                  </p:par>
-                  <p:par>
-                    <p:cTn id="8" fill="hold">
-                      <p:stCondLst>
-                        <p:cond delay="indefinite"/>
-                      </p:stCondLst>
-                      <p:childTnLst>
-                        <p:par>
-                          <p:cTn id="9" fill="hold">
-                            <p:stCondLst>
-                              <p:cond delay="0"/>
-                            </p:stCondLst>
-                            <p:childTnLst>
-                              <p:par>
-                                <p:cTn id="10" presetID="10" presetClass="entr" presetSubtype="0" fill="hold" nodeType="clickEffect">
-                                  <p:stCondLst>
-                                    <p:cond delay="0"/>
-                                  </p:stCondLst>
-                                  <p:childTnLst>
-                                    <p:set>
-                                      <p:cBhvr>
-                                        <p:cTn id="11" dur="1" fill="hold">
-                                          <p:stCondLst>
-                                            <p:cond delay="0"/>
-                                          </p:stCondLst>
-                                        </p:cTn>
-                                        <p:tgtEl>
-                                          <p:spTgt spid="3">
-                                            <p:txEl>
-                                              <p:pRg st="1" end="1"/>
-                                            </p:txEl>
-                                          </p:spTgt>
-                                        </p:tgtEl>
-                                        <p:attrNameLst>
-                                          <p:attrName>style.visibility</p:attrName>
-                                        </p:attrNameLst>
-                                      </p:cBhvr>
-                                      <p:to>
-                                        <p:strVal val="visible"/>
-                                      </p:to>
-                                    </p:set>
-                                    <p:animEffect transition="in" filter="fade">
-                                      <p:cBhvr>
-                                        <p:cTn id="12" dur="500"/>
-                                        <p:tgtEl>
-                                          <p:spTgt spid="3">
-                                            <p:txEl>
-                                              <p:pRg st="1" end="1"/>
-                                            </p:txEl>
-                                          </p:spTgt>
-                                        </p:tgtEl>
-                                      </p:cBhvr>
-                                    </p:animEffect>
-                                  </p:childTnLst>
-                                </p:cTn>
-                              </p:par>
-                            </p:childTnLst>
-                          </p:cTn>
-                        </p:par>
-                      </p:childTnLst>
-                    </p:cTn>
-                  </p:par>
-                  <p:par>
-                    <p:cTn id="13" fill="hold">
-                      <p:stCondLst>
-                        <p:cond delay="indefinite"/>
-                      </p:stCondLst>
-                      <p:childTnLst>
-                        <p:par>
-                          <p:cTn id="14" fill="hold">
-                            <p:stCondLst>
-                              <p:cond delay="0"/>
-                            </p:stCondLst>
-                            <p:childTnLst>
-                              <p:par>
-                                <p:cTn id="15" presetID="10" presetClass="entr" presetSubtype="0" fill="hold" nodeType="clickEffect">
-                                  <p:stCondLst>
-                                    <p:cond delay="0"/>
-                                  </p:stCondLst>
-                                  <p:childTnLst>
-                                    <p:set>
-                                      <p:cBhvr>
-                                        <p:cTn id="16" dur="1" fill="hold">
-                                          <p:stCondLst>
-                                            <p:cond delay="0"/>
-                                          </p:stCondLst>
-                                        </p:cTn>
-                                        <p:tgtEl>
-                                          <p:spTgt spid="3">
-                                            <p:txEl>
-                                              <p:pRg st="2" end="2"/>
-                                            </p:txEl>
-                                          </p:spTgt>
-                                        </p:tgtEl>
-                                        <p:attrNameLst>
-                                          <p:attrName>style.visibility</p:attrName>
-                                        </p:attrNameLst>
-                                      </p:cBhvr>
-                                      <p:to>
-                                        <p:strVal val="visible"/>
-                                      </p:to>
-                                    </p:set>
-                                    <p:animEffect transition="in" filter="fade">
-                                      <p:cBhvr>
-                                        <p:cTn id="17" dur="500"/>
-                                        <p:tgtEl>
-                                          <p:spTgt spid="3">
-                                            <p:txEl>
-                                              <p:pRg st="2" end="2"/>
-                                            </p:txEl>
-                                          </p:spTgt>
-                                        </p:tgtEl>
-                                      </p:cBhvr>
-                                    </p:animEffect>
-                                  </p:childTnLst>
-                                </p:cTn>
-                              </p:par>
-                            </p:childTnLst>
-                          </p:cTn>
-                        </p:par>
-                      </p:childTnLst>
-                    </p:cTn>
-                  </p:par>
-                  <p:par>
-                    <p:cTn id="18" fill="hold">
-                      <p:stCondLst>
-                        <p:cond delay="indefinite"/>
-                      </p:stCondLst>
-                      <p:childTnLst>
-                        <p:par>
-                          <p:cTn id="19" fill="hold">
-                            <p:stCondLst>
-                              <p:cond delay="0"/>
-                            </p:stCondLst>
-                            <p:childTnLst>
-                              <p:par>
-                                <p:cTn id="20" presetID="10" presetClass="entr" presetSubtype="0" fill="hold" nodeType="clickEffect">
-                                  <p:stCondLst>
-                                    <p:cond delay="0"/>
-                                  </p:stCondLst>
-                                  <p:childTnLst>
-                                    <p:set>
-                                      <p:cBhvr>
-                                        <p:cTn id="21" dur="1" fill="hold">
-                                          <p:stCondLst>
-                                            <p:cond delay="0"/>
-                                          </p:stCondLst>
-                                        </p:cTn>
-                                        <p:tgtEl>
-                                          <p:spTgt spid="3">
-                                            <p:txEl>
-                                              <p:pRg st="3" end="3"/>
-                                            </p:txEl>
-                                          </p:spTgt>
-                                        </p:tgtEl>
-                                        <p:attrNameLst>
-                                          <p:attrName>style.visibility</p:attrName>
-                                        </p:attrNameLst>
-                                      </p:cBhvr>
-                                      <p:to>
-                                        <p:strVal val="visible"/>
-                                      </p:to>
-                                    </p:set>
-                                    <p:animEffect transition="in" filter="fade">
-                                      <p:cBhvr>
-                                        <p:cTn id="22" dur="500"/>
-                                        <p:tgtEl>
-                                          <p:spTgt spid="3">
-                                            <p:txEl>
-                                              <p:pRg st="3" end="3"/>
-                                            </p:txEl>
-                                          </p:spTgt>
-                                        </p:tgtEl>
-                                      </p:cBhvr>
-                                    </p:animEffect>
-                                  </p:childTnLst>
-                                </p:cTn>
-                              </p:par>
-                            </p:childTnLst>
-                          </p:cTn>
-                        </p:par>
-                      </p:childTnLst>
-                    </p:cTn>
-                  </p:par>
-                  <p:par>
-                    <p:cTn id="23" fill="hold">
-                      <p:stCondLst>
-                        <p:cond delay="indefinite"/>
-                      </p:stCondLst>
-                      <p:childTnLst>
-                        <p:par>
-                          <p:cTn id="24" fill="hold">
-                            <p:stCondLst>
-                              <p:cond delay="0"/>
-                            </p:stCondLst>
-                            <p:childTnLst>
-                              <p:par>
-                                <p:cTn id="25" presetID="10" presetClass="entr" presetSubtype="0" fill="hold" nodeType="clickEffect">
-                                  <p:stCondLst>
-                                    <p:cond delay="0"/>
-                                  </p:stCondLst>
-                                  <p:childTnLst>
-                                    <p:set>
-                                      <p:cBhvr>
-                                        <p:cTn id="26" dur="1" fill="hold">
-                                          <p:stCondLst>
-                                            <p:cond delay="0"/>
-                                          </p:stCondLst>
-                                        </p:cTn>
-                                        <p:tgtEl>
-                                          <p:spTgt spid="3">
-                                            <p:txEl>
-                                              <p:pRg st="4" end="4"/>
-                                            </p:txEl>
-                                          </p:spTgt>
-                                        </p:tgtEl>
-                                        <p:attrNameLst>
-                                          <p:attrName>style.visibility</p:attrName>
-                                        </p:attrNameLst>
-                                      </p:cBhvr>
-                                      <p:to>
-                                        <p:strVal val="visible"/>
-                                      </p:to>
-                                    </p:set>
-                                    <p:animEffect transition="in" filter="fade">
-                                      <p:cBhvr>
-                                        <p:cTn id="27" dur="500"/>
-                                        <p:tgtEl>
-                                          <p:spTgt spid="3">
-                                            <p:txEl>
-                                              <p:pRg st="4" end="4"/>
-                                            </p:txEl>
-                                          </p:spTgt>
-                                        </p:tgtEl>
-                                      </p:cBhvr>
-                                    </p:animEffect>
-                                  </p:childTnLst>
-                                </p:cTn>
-                              </p:par>
-                            </p:childTnLst>
-                          </p:cTn>
-                        </p:par>
-                      </p:childTnLst>
-                    </p:cTn>
-                  </p:par>
-                  <p:par>
-                    <p:cTn id="28" fill="hold">
-                      <p:stCondLst>
-                        <p:cond delay="indefinite"/>
-                      </p:stCondLst>
-                      <p:childTnLst>
-                        <p:par>
-                          <p:cTn id="29" fill="hold">
-                            <p:stCondLst>
-                              <p:cond delay="0"/>
-                            </p:stCondLst>
-                            <p:childTnLst>
-                              <p:par>
-                                <p:cTn id="30" presetID="10" presetClass="entr" presetSubtype="0" fill="hold" nodeType="clickEffect">
-                                  <p:stCondLst>
-                                    <p:cond delay="0"/>
-                                  </p:stCondLst>
-                                  <p:childTnLst>
-                                    <p:set>
-                                      <p:cBhvr>
-                                        <p:cTn id="31" dur="1" fill="hold">
-                                          <p:stCondLst>
-                                            <p:cond delay="0"/>
-                                          </p:stCondLst>
-                                        </p:cTn>
-                                        <p:tgtEl>
-                                          <p:spTgt spid="3">
-                                            <p:txEl>
-                                              <p:pRg st="5" end="5"/>
-                                            </p:txEl>
-                                          </p:spTgt>
-                                        </p:tgtEl>
-                                        <p:attrNameLst>
-                                          <p:attrName>style.visibility</p:attrName>
-                                        </p:attrNameLst>
-                                      </p:cBhvr>
-                                      <p:to>
-                                        <p:strVal val="visible"/>
-                                      </p:to>
-                                    </p:set>
-                                    <p:animEffect transition="in" filter="fade">
-                                      <p:cBhvr>
-                                        <p:cTn id="32" dur="500"/>
-                                        <p:tgtEl>
-                                          <p:spTgt spid="3">
-                                            <p:txEl>
-                                              <p:pRg st="5" end="5"/>
-                                            </p:txEl>
-                                          </p:spTgt>
-                                        </p:tgtEl>
-                                      </p:cBhvr>
-                                    </p:animEffect>
-                                  </p:childTnLst>
-                                </p:cTn>
-                              </p:par>
-                            </p:childTnLst>
-                          </p:cTn>
-                        </p:par>
-                      </p:childTnLst>
-                    </p:cTn>
-                  </p:par>
-                  <p:par>
-                    <p:cTn id="33" fill="hold">
-                      <p:stCondLst>
-                        <p:cond delay="indefinite"/>
-                      </p:stCondLst>
-                      <p:childTnLst>
-                        <p:par>
-                          <p:cTn id="34" fill="hold">
-                            <p:stCondLst>
-                              <p:cond delay="0"/>
-                            </p:stCondLst>
-                            <p:childTnLst>
-                              <p:par>
-                                <p:cTn id="35" presetID="10" presetClass="entr" presetSubtype="0" fill="hold" nodeType="clickEffect">
-                                  <p:stCondLst>
-                                    <p:cond delay="0"/>
-                                  </p:stCondLst>
-                                  <p:childTnLst>
-                                    <p:set>
-                                      <p:cBhvr>
-                                        <p:cTn id="36" dur="1" fill="hold">
-                                          <p:stCondLst>
-                                            <p:cond delay="0"/>
-                                          </p:stCondLst>
-                                        </p:cTn>
-                                        <p:tgtEl>
-                                          <p:spTgt spid="3">
-                                            <p:txEl>
-                                              <p:pRg st="6" end="6"/>
-                                            </p:txEl>
-                                          </p:spTgt>
-                                        </p:tgtEl>
-                                        <p:attrNameLst>
-                                          <p:attrName>style.visibility</p:attrName>
-                                        </p:attrNameLst>
-                                      </p:cBhvr>
-                                      <p:to>
-                                        <p:strVal val="visible"/>
-                                      </p:to>
-                                    </p:set>
-                                    <p:animEffect transition="in" filter="fade">
-                                      <p:cBhvr>
-                                        <p:cTn id="37" dur="500"/>
-                                        <p:tgtEl>
-                                          <p:spTgt spid="3">
-                                            <p:txEl>
-                                              <p:pRg st="6" end="6"/>
-                                            </p:txEl>
-                                          </p:spTgt>
-                                        </p:tgtEl>
-                                      </p:cBhvr>
-                                    </p:animEffect>
-                                  </p:childTnLst>
-                                </p:cTn>
-                              </p:par>
-                            </p:childTnLst>
-                          </p:cTn>
-                        </p:par>
-                      </p:childTnLst>
-                    </p:cTn>
-                  </p:par>
-                  <p:par>
-                    <p:cTn id="38" fill="hold">
-                      <p:stCondLst>
-                        <p:cond delay="indefinite"/>
-                      </p:stCondLst>
-                      <p:childTnLst>
-                        <p:par>
-                          <p:cTn id="39" fill="hold">
-                            <p:stCondLst>
-                              <p:cond delay="0"/>
-                            </p:stCondLst>
-                            <p:childTnLst>
-                              <p:par>
-                                <p:cTn id="40" presetID="10" presetClass="entr" presetSubtype="0" fill="hold" nodeType="clickEffect">
-                                  <p:stCondLst>
-                                    <p:cond delay="0"/>
-                                  </p:stCondLst>
-                                  <p:childTnLst>
-                                    <p:set>
-                                      <p:cBhvr>
-                                        <p:cTn id="41" dur="1" fill="hold">
-                                          <p:stCondLst>
-                                            <p:cond delay="0"/>
-                                          </p:stCondLst>
-                                        </p:cTn>
-                                        <p:tgtEl>
-                                          <p:spTgt spid="3">
-                                            <p:txEl>
-                                              <p:pRg st="7" end="7"/>
-                                            </p:txEl>
-                                          </p:spTgt>
-                                        </p:tgtEl>
-                                        <p:attrNameLst>
-                                          <p:attrName>style.visibility</p:attrName>
-                                        </p:attrNameLst>
-                                      </p:cBhvr>
-                                      <p:to>
-                                        <p:strVal val="visible"/>
-                                      </p:to>
-                                    </p:set>
-                                    <p:animEffect transition="in" filter="fade">
-                                      <p:cBhvr>
-                                        <p:cTn id="42" dur="500"/>
-                                        <p:tgtEl>
-                                          <p:spTgt spid="3">
-                                            <p:txEl>
-                                              <p:pRg st="7" end="7"/>
-                                            </p:txEl>
-                                          </p:spTgt>
-                                        </p:tgtEl>
-                                      </p:cBhvr>
-                                    </p:animEffect>
-                                  </p:childTnLst>
-                                </p:cTn>
-                              </p:par>
-                            </p:childTnLst>
-                          </p:cTn>
-                        </p:par>
-                      </p:childTnLst>
-                    </p:cTn>
-                  </p:par>
-                </p:childTnLst>
-              </p:cTn>
-              <p:prevCondLst>
-                <p:cond evt="onPrev" delay="0">
-                  <p:tgtEl>
-                    <p:sldTgt/>
-                  </p:tgtEl>
-                </p:cond>
-              </p:prevCondLst>
-              <p:nextCondLst>
-                <p:cond evt="onNext" delay="0">
-                  <p:tgtEl>
-                    <p:sldTgt/>
-                  </p:tgtEl>
-                </p:cond>
-              </p:nextCondLst>
-            </p:seq>
-          </p:childTnLst>
-        </p:cTn>
-      </p:par>
-    </p:tnLst>
-  </p:timing>
-</p:sld>
-</file>
-
-<file path=ppt/slides/slide9.xml><?xml version="1.0" encoding="utf-8"?>
-<p:sld xmlns:a="http://schemas.openxmlformats.org/drawingml/2006/main" xmlns:r="http://schemas.openxmlformats.org/officeDocument/2006/relationships" xmlns:p="http://schemas.openxmlformats.org/presentationml/2006/main">
-  <p:cSld>
-    <p:bg>
-      <p:bgPr>
-        <a:solidFill>
-          <a:srgbClr val="F5F5F5"/>
-        </a:solidFill>
-        <a:effectLst/>
-      </p:bgPr>
-    </p:bg>
-    <p:spTree>
-      <p:nvGrpSpPr>
-        <p:cNvPr id="1" name="">
-          <a:extLst>
-            <a:ext uri="{FF2B5EF4-FFF2-40B4-BE49-F238E27FC236}">
-              <a16:creationId xmlns:a16="http://schemas.microsoft.com/office/drawing/2014/main" id="{C01E4878-BF94-39E3-90FB-BBA565A551D7}"/>
-            </a:ext>
-          </a:extLst>
-        </p:cNvPr>
-        <p:cNvGrpSpPr/>
-        <p:nvPr/>
-      </p:nvGrpSpPr>
-      <p:grpSpPr>
-        <a:xfrm>
-          <a:off x="0" y="0"/>
-          <a:ext cx="0" cy="0"/>
-          <a:chOff x="0" y="0"/>
-          <a:chExt cx="0" cy="0"/>
-        </a:xfrm>
-      </p:grpSpPr>
-      <p:sp>
-        <p:nvSpPr>
-          <p:cNvPr id="2" name="Title 1">
-            <a:extLst>
-              <a:ext uri="{FF2B5EF4-FFF2-40B4-BE49-F238E27FC236}">
-                <a16:creationId xmlns:a16="http://schemas.microsoft.com/office/drawing/2014/main" id="{FCEA15DC-E97C-0874-E85A-F52A461FDB6B}"/>
-              </a:ext>
-            </a:extLst>
-          </p:cNvPr>
-          <p:cNvSpPr>
-            <a:spLocks noGrp="1"/>
-          </p:cNvSpPr>
-          <p:nvPr>
-            <p:ph type="title"/>
-          </p:nvPr>
-        </p:nvSpPr>
-        <p:spPr/>
-        <p:txBody>
-          <a:bodyPr/>
-          <a:lstStyle/>
-          <a:p>
-            <a:r>
-              <a:rPr lang="en-US" dirty="0" err="1">
-                <a:latin typeface="Arial Rounded MT Bold" panose="020F0704030504030204" pitchFamily="34" charset="0"/>
-              </a:rPr>
-              <a:t>Affichage</a:t>
-            </a:r>
-            <a:r>
-              <a:rPr lang="en-US" dirty="0">
-                <a:latin typeface="Arial Rounded MT Bold" panose="020F0704030504030204" pitchFamily="34" charset="0"/>
-              </a:rPr>
-              <a:t> simple (</a:t>
-            </a:r>
-            <a:r>
-              <a:rPr lang="en-US" dirty="0">
-                <a:latin typeface="Consolas" panose="020B0609020204030204" pitchFamily="49" charset="0"/>
-              </a:rPr>
-              <a:t>print</a:t>
-            </a:r>
-            <a:r>
-              <a:rPr lang="en-US" dirty="0">
-                <a:latin typeface="Arial Rounded MT Bold" panose="020F0704030504030204" pitchFamily="34" charset="0"/>
-              </a:rPr>
-              <a:t>)</a:t>
-            </a:r>
-            <a:endParaRPr lang="fr-CA" dirty="0">
-              <a:latin typeface="Arial Rounded MT Bold" panose="020F0704030504030204" pitchFamily="34" charset="0"/>
-            </a:endParaRPr>
-          </a:p>
-        </p:txBody>
-      </p:sp>
-      <p:sp>
-        <p:nvSpPr>
-          <p:cNvPr id="3" name="Content Placeholder 2">
-            <a:extLst>
-              <a:ext uri="{FF2B5EF4-FFF2-40B4-BE49-F238E27FC236}">
-                <a16:creationId xmlns:a16="http://schemas.microsoft.com/office/drawing/2014/main" id="{6CD2EEBF-4B33-1557-80E4-42DCF94B468F}"/>
-              </a:ext>
-            </a:extLst>
-          </p:cNvPr>
-          <p:cNvSpPr>
-            <a:spLocks noGrp="1"/>
-          </p:cNvSpPr>
-          <p:nvPr>
-            <p:ph idx="1"/>
-          </p:nvPr>
-        </p:nvSpPr>
-        <p:spPr/>
-        <p:txBody>
-          <a:bodyPr>
-            <a:normAutofit/>
-          </a:bodyPr>
-          <a:lstStyle/>
-          <a:p>
-            <a:pPr marL="0" indent="0">
-              <a:buNone/>
-            </a:pPr>
-            <a:endParaRPr lang="en-US" b="1" dirty="0">
-              <a:latin typeface="Consolas" panose="020B0609020204030204" pitchFamily="49" charset="0"/>
-            </a:endParaRPr>
-          </a:p>
-          <a:p>
-            <a:pPr marL="0" indent="0">
-              <a:buNone/>
-            </a:pPr>
-            <a:endParaRPr lang="en-US" b="1" dirty="0">
-              <a:latin typeface="Consolas" panose="020B0609020204030204" pitchFamily="49" charset="0"/>
-            </a:endParaRPr>
-          </a:p>
-          <a:p>
-            <a:pPr marL="0" indent="0">
-              <a:buNone/>
-            </a:pPr>
-            <a:r>
-              <a:rPr lang="en-CA" sz="2600" b="1" dirty="0">
-                <a:latin typeface="Consolas" panose="020B0609020204030204" pitchFamily="49" charset="0"/>
-              </a:rPr>
-              <a:t>&gt;&gt;&gt; x = 0</a:t>
-            </a:r>
-          </a:p>
-          <a:p>
-            <a:pPr marL="0" indent="0">
-              <a:buNone/>
-            </a:pPr>
-            <a:r>
-              <a:rPr lang="en-CA" sz="2600" b="1" dirty="0">
-                <a:latin typeface="Consolas" panose="020B0609020204030204" pitchFamily="49" charset="0"/>
-              </a:rPr>
-              <a:t>&gt;&gt;&gt; y = 1</a:t>
-            </a:r>
-          </a:p>
-          <a:p>
-            <a:pPr marL="0" indent="0">
-              <a:buNone/>
-            </a:pPr>
-            <a:r>
-              <a:rPr lang="en-CA" sz="2600" b="1" dirty="0">
-                <a:latin typeface="Consolas" panose="020B0609020204030204" pitchFamily="49" charset="0"/>
-              </a:rPr>
-              <a:t>&gt;&gt;&gt; print(x, y)</a:t>
-            </a:r>
-          </a:p>
-          <a:p>
-            <a:pPr marL="0" indent="0" algn="just">
-              <a:buNone/>
-            </a:pPr>
-            <a:r>
-              <a:rPr lang="en-CA" sz="2600" dirty="0">
-                <a:solidFill>
-                  <a:schemeClr val="bg1">
-                    <a:lumMod val="50000"/>
-                  </a:schemeClr>
-                </a:solidFill>
-                <a:latin typeface="Consolas" panose="020B0609020204030204" pitchFamily="49" charset="0"/>
-              </a:rPr>
-              <a:t>0 1</a:t>
-            </a:r>
-          </a:p>
-          <a:p>
-            <a:pPr marL="0" indent="0">
-              <a:buNone/>
-            </a:pPr>
-            <a:r>
-              <a:rPr lang="en-CA" sz="2600" b="1" dirty="0">
-                <a:latin typeface="Consolas" panose="020B0609020204030204" pitchFamily="49" charset="0"/>
-              </a:rPr>
-              <a:t>&gt;&gt;&gt; print(x, y, </a:t>
-            </a:r>
-            <a:r>
-              <a:rPr lang="en-CA" sz="2600" b="1" dirty="0" err="1">
-                <a:latin typeface="Consolas" panose="020B0609020204030204" pitchFamily="49" charset="0"/>
-              </a:rPr>
-              <a:t>sep</a:t>
-            </a:r>
-            <a:r>
-              <a:rPr lang="en-CA" sz="2600" b="1" dirty="0">
-                <a:latin typeface="Consolas" panose="020B0609020204030204" pitchFamily="49" charset="0"/>
-              </a:rPr>
-              <a:t>='</a:t>
-            </a:r>
-            <a:r>
-              <a:rPr lang="fr-CA" sz="2600" b="1" dirty="0">
-                <a:latin typeface="Consolas" panose="020B0609020204030204" pitchFamily="49" charset="0"/>
-              </a:rPr>
-              <a:t>,')</a:t>
-            </a:r>
-          </a:p>
-          <a:p>
-            <a:pPr marL="0" indent="0" algn="just">
-              <a:buNone/>
-            </a:pPr>
-            <a:r>
-              <a:rPr lang="fr-CA" sz="2600" dirty="0">
-                <a:solidFill>
-                  <a:schemeClr val="bg1">
-                    <a:lumMod val="50000"/>
-                  </a:schemeClr>
-                </a:solidFill>
-                <a:latin typeface="Consolas" panose="020B0609020204030204" pitchFamily="49" charset="0"/>
-              </a:rPr>
-              <a:t>0,1</a:t>
-            </a:r>
-            <a:endParaRPr lang="en-CA" sz="2600" dirty="0">
-              <a:solidFill>
-                <a:schemeClr val="bg1">
-                  <a:lumMod val="50000"/>
-                </a:schemeClr>
-              </a:solidFill>
-              <a:latin typeface="Consolas" panose="020B0609020204030204" pitchFamily="49" charset="0"/>
-            </a:endParaRPr>
-          </a:p>
-        </p:txBody>
-      </p:sp>
-      <p:sp>
-        <p:nvSpPr>
-          <p:cNvPr id="5" name="TextBox 4">
-            <a:extLst>
-              <a:ext uri="{FF2B5EF4-FFF2-40B4-BE49-F238E27FC236}">
-                <a16:creationId xmlns:a16="http://schemas.microsoft.com/office/drawing/2014/main" id="{E3C1657E-FC6D-7B8B-D26B-AA5F96BD622F}"/>
-              </a:ext>
-            </a:extLst>
-          </p:cNvPr>
-          <p:cNvSpPr txBox="1"/>
-          <p:nvPr/>
-        </p:nvSpPr>
-        <p:spPr>
-          <a:xfrm>
-            <a:off x="838199" y="6176963"/>
-            <a:ext cx="10515599" cy="369332"/>
-          </a:xfrm>
-          <a:prstGeom prst="rect">
-            <a:avLst/>
-          </a:prstGeom>
-          <a:noFill/>
-        </p:spPr>
-        <p:txBody>
-          <a:bodyPr wrap="square">
-            <a:spAutoFit/>
-          </a:bodyPr>
-          <a:lstStyle/>
-          <a:p>
-            <a:pPr marL="0" indent="0" algn="ctr">
-              <a:buNone/>
-            </a:pPr>
-            <a:r>
-              <a:rPr lang="fr-CA" sz="1800" b="1" dirty="0">
-                <a:latin typeface="Consolas" panose="020B0609020204030204" pitchFamily="49" charset="0"/>
-              </a:rPr>
-              <a:t>SOURCE: </a:t>
-            </a:r>
-            <a:r>
-              <a:rPr lang="fr-CA" sz="1800" b="1" dirty="0">
-                <a:latin typeface="Consolas" panose="020B0609020204030204" pitchFamily="49" charset="0"/>
-                <a:hlinkClick r:id="rId2"/>
-              </a:rPr>
-              <a:t>https://docs.python.org/3/library/functions.html#print</a:t>
-            </a:r>
-            <a:endParaRPr lang="fr-CA" sz="1800" b="1" dirty="0">
-              <a:latin typeface="Consolas" panose="020B0609020204030204" pitchFamily="49" charset="0"/>
-            </a:endParaRPr>
-          </a:p>
-        </p:txBody>
-      </p:sp>
-      <p:sp>
-        <p:nvSpPr>
-          <p:cNvPr id="10" name="TextBox 9">
-            <a:extLst>
-              <a:ext uri="{FF2B5EF4-FFF2-40B4-BE49-F238E27FC236}">
-                <a16:creationId xmlns:a16="http://schemas.microsoft.com/office/drawing/2014/main" id="{08A5E896-FFF2-6AB8-D61E-F137C1EE3810}"/>
-              </a:ext>
-            </a:extLst>
-          </p:cNvPr>
-          <p:cNvSpPr txBox="1"/>
-          <p:nvPr/>
-        </p:nvSpPr>
-        <p:spPr>
-          <a:xfrm>
-            <a:off x="2230873" y="1728788"/>
-            <a:ext cx="7730249" cy="578837"/>
-          </a:xfrm>
-          <a:prstGeom prst="roundRect">
-            <a:avLst/>
-          </a:prstGeom>
-          <a:solidFill>
-            <a:srgbClr val="FFF2CC">
-              <a:alpha val="49803"/>
-            </a:srgbClr>
-          </a:solidFill>
-          <a:ln w="9525" cap="flat" cmpd="sng">
-            <a:solidFill>
-              <a:schemeClr val="dk1"/>
-            </a:solidFill>
-            <a:prstDash val="solid"/>
-            <a:round/>
-            <a:headEnd type="none" w="sm" len="sm"/>
-            <a:tailEnd type="none" w="sm" len="sm"/>
-          </a:ln>
-        </p:spPr>
-        <p:txBody>
-          <a:bodyPr spcFirstLastPara="1" wrap="square" lIns="91425" tIns="45700" rIns="91425" bIns="45700" anchor="t" anchorCtr="0">
-            <a:spAutoFit/>
-          </a:bodyPr>
-          <a:lstStyle>
-            <a:defPPr>
-              <a:defRPr lang="en-US"/>
-            </a:defPPr>
-            <a:lvl1pPr marR="0" lvl="0" indent="0" algn="ctr">
-              <a:lnSpc>
-                <a:spcPct val="100000"/>
-              </a:lnSpc>
-              <a:spcBef>
-                <a:spcPts val="0"/>
-              </a:spcBef>
-              <a:spcAft>
-                <a:spcPts val="0"/>
-              </a:spcAft>
-              <a:buClr>
-                <a:srgbClr val="000000"/>
-              </a:buClr>
-              <a:buSzPts val="1400"/>
-              <a:buFont typeface="Consolas"/>
-              <a:buNone/>
-              <a:defRPr sz="2800" b="1" i="0" u="none" strike="noStrike" cap="none">
-                <a:solidFill>
-                  <a:srgbClr val="000000"/>
-                </a:solidFill>
-                <a:latin typeface="Consolas"/>
-                <a:ea typeface="Consolas"/>
-                <a:cs typeface="Consolas"/>
-              </a:defRPr>
-            </a:lvl1pPr>
-          </a:lstStyle>
-          <a:p>
-            <a:r>
-              <a:rPr lang="en-US" dirty="0"/>
-              <a:t>print(*objects, </a:t>
-            </a:r>
-            <a:r>
-              <a:rPr lang="en-US" dirty="0" err="1"/>
-              <a:t>sep</a:t>
-            </a:r>
-            <a:r>
-              <a:rPr lang="en-US" dirty="0"/>
-              <a:t>=' ', end='\n')</a:t>
-            </a:r>
-          </a:p>
-        </p:txBody>
-      </p:sp>
-      <p:sp>
-        <p:nvSpPr>
-          <p:cNvPr id="11" name="Slide Number Placeholder 10">
-            <a:extLst>
-              <a:ext uri="{FF2B5EF4-FFF2-40B4-BE49-F238E27FC236}">
-                <a16:creationId xmlns:a16="http://schemas.microsoft.com/office/drawing/2014/main" id="{F9741A87-5FEE-359B-F056-0D27CE849F3D}"/>
-              </a:ext>
-            </a:extLst>
-          </p:cNvPr>
-          <p:cNvSpPr>
-            <a:spLocks noGrp="1"/>
-          </p:cNvSpPr>
-          <p:nvPr>
-            <p:ph type="sldNum" sz="quarter" idx="12"/>
-          </p:nvPr>
-        </p:nvSpPr>
-        <p:spPr/>
-        <p:txBody>
-          <a:bodyPr/>
-          <a:lstStyle/>
-          <a:p>
-            <a:fld id="{846B06B1-1179-491F-A487-8E0C403F7C13}" type="slidenum">
-              <a:rPr lang="fr-CA" smtClean="0"/>
-              <a:t>9</a:t>
-            </a:fld>
-            <a:endParaRPr lang="fr-CA"/>
-          </a:p>
-        </p:txBody>
-      </p:sp>
-    </p:spTree>
-    <p:extLst>
-      <p:ext uri="{BB962C8B-B14F-4D97-AF65-F5344CB8AC3E}">
-        <p14:creationId xmlns:p14="http://schemas.microsoft.com/office/powerpoint/2010/main" val="210974741"/>
-      </p:ext>
-    </p:extLst>
-  </p:cSld>
-  <p:clrMapOvr>
-    <a:masterClrMapping/>
-  </p:clrMapOvr>
-  <p:timing>
-    <p:tnLst>
-      <p:par>
-        <p:cTn id="1" dur="indefinite" restart="never" nodeType="tmRoot">
-          <p:childTnLst>
-            <p:seq concurrent="1" nextAc="seek">
-              <p:cTn id="2" dur="indefinite" nodeType="mainSeq">
-                <p:childTnLst>
-                  <p:par>
-                    <p:cTn id="3" fill="hold">
-                      <p:stCondLst>
-                        <p:cond delay="indefinite"/>
-                      </p:stCondLst>
-                      <p:childTnLst>
-                        <p:par>
-                          <p:cTn id="4" fill="hold">
-                            <p:stCondLst>
-                              <p:cond delay="0"/>
-                            </p:stCondLst>
-                            <p:childTnLst>
-                              <p:par>
-                                <p:cTn id="5" presetID="10" presetClass="entr" presetSubtype="0" fill="hold" nodeType="clickEffect">
-                                  <p:stCondLst>
-                                    <p:cond delay="0"/>
-                                  </p:stCondLst>
-                                  <p:childTnLst>
-                                    <p:set>
-                                      <p:cBhvr>
-                                        <p:cTn id="6" dur="1" fill="hold">
-                                          <p:stCondLst>
-                                            <p:cond delay="0"/>
-                                          </p:stCondLst>
-                                        </p:cTn>
-                                        <p:tgtEl>
-                                          <p:spTgt spid="3">
-                                            <p:txEl>
-                                              <p:pRg st="2" end="2"/>
-                                            </p:txEl>
-                                          </p:spTgt>
-                                        </p:tgtEl>
-                                        <p:attrNameLst>
-                                          <p:attrName>style.visibility</p:attrName>
-                                        </p:attrNameLst>
-                                      </p:cBhvr>
-                                      <p:to>
-                                        <p:strVal val="visible"/>
-                                      </p:to>
-                                    </p:set>
-                                    <p:animEffect transition="in" filter="fade">
-                                      <p:cBhvr>
-                                        <p:cTn id="7" dur="500"/>
-                                        <p:tgtEl>
-                                          <p:spTgt spid="3">
-                                            <p:txEl>
-                                              <p:pRg st="2" end="2"/>
-                                            </p:txEl>
-                                          </p:spTgt>
-                                        </p:tgtEl>
-                                      </p:cBhvr>
-                                    </p:animEffect>
-                                  </p:childTnLst>
-                                </p:cTn>
-                              </p:par>
-                              <p:par>
-                                <p:cTn id="8" presetID="10" presetClass="entr" presetSubtype="0" fill="hold" nodeType="withEffect">
-                                  <p:stCondLst>
-                                    <p:cond delay="0"/>
-                                  </p:stCondLst>
-                                  <p:childTnLst>
-                                    <p:set>
-                                      <p:cBhvr>
-                                        <p:cTn id="9" dur="1" fill="hold">
-                                          <p:stCondLst>
-                                            <p:cond delay="0"/>
-                                          </p:stCondLst>
-                                        </p:cTn>
-                                        <p:tgtEl>
-                                          <p:spTgt spid="3">
-                                            <p:txEl>
-                                              <p:pRg st="3" end="3"/>
-                                            </p:txEl>
-                                          </p:spTgt>
-                                        </p:tgtEl>
-                                        <p:attrNameLst>
-                                          <p:attrName>style.visibility</p:attrName>
-                                        </p:attrNameLst>
-                                      </p:cBhvr>
-                                      <p:to>
-                                        <p:strVal val="visible"/>
-                                      </p:to>
-                                    </p:set>
-                                    <p:animEffect transition="in" filter="fade">
-                                      <p:cBhvr>
-                                        <p:cTn id="10" dur="500"/>
-                                        <p:tgtEl>
-                                          <p:spTgt spid="3">
-                                            <p:txEl>
-                                              <p:pRg st="3" end="3"/>
-                                            </p:txEl>
-                                          </p:spTgt>
-                                        </p:tgtEl>
-                                      </p:cBhvr>
-                                    </p:animEffect>
-                                  </p:childTnLst>
-                                </p:cTn>
-                              </p:par>
-                              <p:par>
-                                <p:cTn id="11" presetID="10" presetClass="entr" presetSubtype="0" fill="hold" nodeType="withEffect">
-                                  <p:stCondLst>
-                                    <p:cond delay="0"/>
-                                  </p:stCondLst>
-                                  <p:childTnLst>
-                                    <p:set>
-                                      <p:cBhvr>
-                                        <p:cTn id="12" dur="1" fill="hold">
-                                          <p:stCondLst>
-                                            <p:cond delay="0"/>
-                                          </p:stCondLst>
-                                        </p:cTn>
-                                        <p:tgtEl>
-                                          <p:spTgt spid="3">
-                                            <p:txEl>
-                                              <p:pRg st="4" end="4"/>
-                                            </p:txEl>
-                                          </p:spTgt>
-                                        </p:tgtEl>
-                                        <p:attrNameLst>
-                                          <p:attrName>style.visibility</p:attrName>
-                                        </p:attrNameLst>
-                                      </p:cBhvr>
-                                      <p:to>
-                                        <p:strVal val="visible"/>
-                                      </p:to>
-                                    </p:set>
-                                    <p:animEffect transition="in" filter="fade">
-                                      <p:cBhvr>
-                                        <p:cTn id="13" dur="500"/>
-                                        <p:tgtEl>
-                                          <p:spTgt spid="3">
-                                            <p:txEl>
-                                              <p:pRg st="4" end="4"/>
-                                            </p:txEl>
-                                          </p:spTgt>
-                                        </p:tgtEl>
-                                      </p:cBhvr>
-                                    </p:animEffect>
-                                  </p:childTnLst>
-                                </p:cTn>
-                              </p:par>
-                            </p:childTnLst>
-                          </p:cTn>
-                        </p:par>
-                      </p:childTnLst>
-                    </p:cTn>
-                  </p:par>
-                  <p:par>
-                    <p:cTn id="14" fill="hold">
-                      <p:stCondLst>
-                        <p:cond delay="indefinite"/>
-                      </p:stCondLst>
-                      <p:childTnLst>
-                        <p:par>
-                          <p:cTn id="15" fill="hold">
-                            <p:stCondLst>
-                              <p:cond delay="0"/>
-                            </p:stCondLst>
-                            <p:childTnLst>
-                              <p:par>
-                                <p:cTn id="16" presetID="10" presetClass="entr" presetSubtype="0" fill="hold" nodeType="clickEffect">
-                                  <p:stCondLst>
-                                    <p:cond delay="0"/>
-                                  </p:stCondLst>
-                                  <p:childTnLst>
-                                    <p:set>
-                                      <p:cBhvr>
-                                        <p:cTn id="17" dur="1" fill="hold">
-                                          <p:stCondLst>
-                                            <p:cond delay="0"/>
-                                          </p:stCondLst>
-                                        </p:cTn>
-                                        <p:tgtEl>
-                                          <p:spTgt spid="3">
-                                            <p:txEl>
-                                              <p:pRg st="5" end="5"/>
-                                            </p:txEl>
-                                          </p:spTgt>
-                                        </p:tgtEl>
-                                        <p:attrNameLst>
-                                          <p:attrName>style.visibility</p:attrName>
-                                        </p:attrNameLst>
-                                      </p:cBhvr>
-                                      <p:to>
-                                        <p:strVal val="visible"/>
-                                      </p:to>
-                                    </p:set>
-                                    <p:animEffect transition="in" filter="fade">
-                                      <p:cBhvr>
-                                        <p:cTn id="18" dur="500"/>
-                                        <p:tgtEl>
-                                          <p:spTgt spid="3">
-                                            <p:txEl>
-                                              <p:pRg st="5" end="5"/>
-                                            </p:txEl>
-                                          </p:spTgt>
-                                        </p:tgtEl>
-                                      </p:cBhvr>
-                                    </p:animEffect>
-                                  </p:childTnLst>
-                                </p:cTn>
-                              </p:par>
-                            </p:childTnLst>
-                          </p:cTn>
-                        </p:par>
-                      </p:childTnLst>
-                    </p:cTn>
-                  </p:par>
-                  <p:par>
-                    <p:cTn id="19" fill="hold">
-                      <p:stCondLst>
-                        <p:cond delay="indefinite"/>
-                      </p:stCondLst>
-                      <p:childTnLst>
-                        <p:par>
-                          <p:cTn id="20" fill="hold">
-                            <p:stCondLst>
-                              <p:cond delay="0"/>
-                            </p:stCondLst>
-                            <p:childTnLst>
-                              <p:par>
-                                <p:cTn id="21" presetID="10" presetClass="entr" presetSubtype="0" fill="hold" nodeType="clickEffect">
-                                  <p:stCondLst>
-                                    <p:cond delay="0"/>
-                                  </p:stCondLst>
-                                  <p:childTnLst>
-                                    <p:set>
-                                      <p:cBhvr>
-                                        <p:cTn id="22" dur="1" fill="hold">
-                                          <p:stCondLst>
-                                            <p:cond delay="0"/>
-                                          </p:stCondLst>
-                                        </p:cTn>
-                                        <p:tgtEl>
-                                          <p:spTgt spid="3">
-                                            <p:txEl>
-                                              <p:pRg st="6" end="6"/>
-                                            </p:txEl>
-                                          </p:spTgt>
-                                        </p:tgtEl>
-                                        <p:attrNameLst>
-                                          <p:attrName>style.visibility</p:attrName>
-                                        </p:attrNameLst>
-                                      </p:cBhvr>
-                                      <p:to>
-                                        <p:strVal val="visible"/>
-                                      </p:to>
-                                    </p:set>
-                                    <p:animEffect transition="in" filter="fade">
-                                      <p:cBhvr>
-                                        <p:cTn id="23" dur="500"/>
-                                        <p:tgtEl>
-                                          <p:spTgt spid="3">
-                                            <p:txEl>
-                                              <p:pRg st="6" end="6"/>
-                                            </p:txEl>
-                                          </p:spTgt>
-                                        </p:tgtEl>
-                                      </p:cBhvr>
-                                    </p:animEffect>
-                                  </p:childTnLst>
-                                </p:cTn>
-                              </p:par>
-                            </p:childTnLst>
-                          </p:cTn>
-                        </p:par>
-                      </p:childTnLst>
-                    </p:cTn>
-                  </p:par>
-                  <p:par>
-                    <p:cTn id="24" fill="hold">
-                      <p:stCondLst>
-                        <p:cond delay="indefinite"/>
-                      </p:stCondLst>
-                      <p:childTnLst>
-                        <p:par>
-                          <p:cTn id="25" fill="hold">
-                            <p:stCondLst>
-                              <p:cond delay="0"/>
-                            </p:stCondLst>
-                            <p:childTnLst>
-                              <p:par>
-                                <p:cTn id="26" presetID="10" presetClass="entr" presetSubtype="0" fill="hold" nodeType="clickEffect">
-                                  <p:stCondLst>
-                                    <p:cond delay="0"/>
-                                  </p:stCondLst>
-                                  <p:childTnLst>
-                                    <p:set>
-                                      <p:cBhvr>
-                                        <p:cTn id="27" dur="1" fill="hold">
-                                          <p:stCondLst>
-                                            <p:cond delay="0"/>
-                                          </p:stCondLst>
-                                        </p:cTn>
-                                        <p:tgtEl>
-                                          <p:spTgt spid="3">
-                                            <p:txEl>
-                                              <p:pRg st="7" end="7"/>
-                                            </p:txEl>
-                                          </p:spTgt>
-                                        </p:tgtEl>
-                                        <p:attrNameLst>
-                                          <p:attrName>style.visibility</p:attrName>
-                                        </p:attrNameLst>
-                                      </p:cBhvr>
-                                      <p:to>
-                                        <p:strVal val="visible"/>
-                                      </p:to>
-                                    </p:set>
-                                    <p:animEffect transition="in" filter="fade">
-                                      <p:cBhvr>
-                                        <p:cTn id="28" dur="500"/>
                                         <p:tgtEl>
                                           <p:spTgt spid="3">
                                             <p:txEl>

--- a/python_2/presentation_python_2.pptx
+++ b/python_2/presentation_python_2.pptx
@@ -5,7 +5,7 @@
     <p:sldMasterId id="2147483648" r:id="rId1"/>
   </p:sldMasterIdLst>
   <p:notesMasterIdLst>
-    <p:notesMasterId r:id="rId38"/>
+    <p:notesMasterId r:id="rId39"/>
   </p:notesMasterIdLst>
   <p:sldIdLst>
     <p:sldId id="256" r:id="rId2"/>
@@ -15,35 +15,36 @@
     <p:sldId id="299" r:id="rId6"/>
     <p:sldId id="300" r:id="rId7"/>
     <p:sldId id="301" r:id="rId8"/>
-    <p:sldId id="297" r:id="rId9"/>
-    <p:sldId id="294" r:id="rId10"/>
-    <p:sldId id="259" r:id="rId11"/>
-    <p:sldId id="263" r:id="rId12"/>
-    <p:sldId id="260" r:id="rId13"/>
-    <p:sldId id="261" r:id="rId14"/>
-    <p:sldId id="264" r:id="rId15"/>
-    <p:sldId id="265" r:id="rId16"/>
-    <p:sldId id="266" r:id="rId17"/>
-    <p:sldId id="268" r:id="rId18"/>
-    <p:sldId id="269" r:id="rId19"/>
-    <p:sldId id="271" r:id="rId20"/>
-    <p:sldId id="272" r:id="rId21"/>
-    <p:sldId id="273" r:id="rId22"/>
-    <p:sldId id="274" r:id="rId23"/>
-    <p:sldId id="275" r:id="rId24"/>
-    <p:sldId id="276" r:id="rId25"/>
-    <p:sldId id="277" r:id="rId26"/>
-    <p:sldId id="278" r:id="rId27"/>
-    <p:sldId id="282" r:id="rId28"/>
-    <p:sldId id="283" r:id="rId29"/>
-    <p:sldId id="280" r:id="rId30"/>
-    <p:sldId id="279" r:id="rId31"/>
-    <p:sldId id="288" r:id="rId32"/>
-    <p:sldId id="289" r:id="rId33"/>
-    <p:sldId id="292" r:id="rId34"/>
-    <p:sldId id="291" r:id="rId35"/>
-    <p:sldId id="281" r:id="rId36"/>
-    <p:sldId id="290" r:id="rId37"/>
+    <p:sldId id="302" r:id="rId9"/>
+    <p:sldId id="297" r:id="rId10"/>
+    <p:sldId id="294" r:id="rId11"/>
+    <p:sldId id="259" r:id="rId12"/>
+    <p:sldId id="263" r:id="rId13"/>
+    <p:sldId id="260" r:id="rId14"/>
+    <p:sldId id="261" r:id="rId15"/>
+    <p:sldId id="264" r:id="rId16"/>
+    <p:sldId id="265" r:id="rId17"/>
+    <p:sldId id="266" r:id="rId18"/>
+    <p:sldId id="268" r:id="rId19"/>
+    <p:sldId id="269" r:id="rId20"/>
+    <p:sldId id="271" r:id="rId21"/>
+    <p:sldId id="272" r:id="rId22"/>
+    <p:sldId id="273" r:id="rId23"/>
+    <p:sldId id="274" r:id="rId24"/>
+    <p:sldId id="275" r:id="rId25"/>
+    <p:sldId id="276" r:id="rId26"/>
+    <p:sldId id="277" r:id="rId27"/>
+    <p:sldId id="278" r:id="rId28"/>
+    <p:sldId id="282" r:id="rId29"/>
+    <p:sldId id="283" r:id="rId30"/>
+    <p:sldId id="280" r:id="rId31"/>
+    <p:sldId id="279" r:id="rId32"/>
+    <p:sldId id="288" r:id="rId33"/>
+    <p:sldId id="289" r:id="rId34"/>
+    <p:sldId id="292" r:id="rId35"/>
+    <p:sldId id="291" r:id="rId36"/>
+    <p:sldId id="281" r:id="rId37"/>
+    <p:sldId id="290" r:id="rId38"/>
   </p:sldIdLst>
   <p:sldSz cx="12192000" cy="6858000"/>
   <p:notesSz cx="6858000" cy="9144000"/>
@@ -260,7 +261,7 @@
           <a:p>
             <a:fld id="{17426931-AE65-4D08-8B32-62FCBDE55937}" type="datetimeFigureOut">
               <a:rPr lang="fr-CA" smtClean="0"/>
-              <a:t>2026-04-18</a:t>
+              <a:t>2026-04-19</a:t>
             </a:fld>
             <a:endParaRPr lang="fr-CA"/>
           </a:p>
@@ -528,6 +529,90 @@
 </p:notesMaster>
 </file>
 
+<file path=ppt/notesSlides/notesSlide1.xml><?xml version="1.0" encoding="utf-8"?>
+<p:notes xmlns:a="http://schemas.openxmlformats.org/drawingml/2006/main" xmlns:r="http://schemas.openxmlformats.org/officeDocument/2006/relationships" xmlns:p="http://schemas.openxmlformats.org/presentationml/2006/main">
+  <p:cSld>
+    <p:spTree>
+      <p:nvGrpSpPr>
+        <p:cNvPr id="1" name=""/>
+        <p:cNvGrpSpPr/>
+        <p:nvPr/>
+      </p:nvGrpSpPr>
+      <p:grpSpPr>
+        <a:xfrm>
+          <a:off x="0" y="0"/>
+          <a:ext cx="0" cy="0"/>
+          <a:chOff x="0" y="0"/>
+          <a:chExt cx="0" cy="0"/>
+        </a:xfrm>
+      </p:grpSpPr>
+      <p:sp>
+        <p:nvSpPr>
+          <p:cNvPr id="2" name="Slide Image Placeholder 1"/>
+          <p:cNvSpPr>
+            <a:spLocks noGrp="1" noRot="1" noChangeAspect="1"/>
+          </p:cNvSpPr>
+          <p:nvPr>
+            <p:ph type="sldImg"/>
+          </p:nvPr>
+        </p:nvSpPr>
+        <p:spPr/>
+      </p:sp>
+      <p:sp>
+        <p:nvSpPr>
+          <p:cNvPr id="3" name="Notes Placeholder 2"/>
+          <p:cNvSpPr>
+            <a:spLocks noGrp="1"/>
+          </p:cNvSpPr>
+          <p:nvPr>
+            <p:ph type="body" idx="1"/>
+          </p:nvPr>
+        </p:nvSpPr>
+        <p:spPr/>
+        <p:txBody>
+          <a:bodyPr/>
+          <a:lstStyle/>
+          <a:p>
+            <a:endParaRPr lang="fr-CA" dirty="0"/>
+          </a:p>
+        </p:txBody>
+      </p:sp>
+      <p:sp>
+        <p:nvSpPr>
+          <p:cNvPr id="4" name="Slide Number Placeholder 3"/>
+          <p:cNvSpPr>
+            <a:spLocks noGrp="1"/>
+          </p:cNvSpPr>
+          <p:nvPr>
+            <p:ph type="sldNum" sz="quarter" idx="5"/>
+          </p:nvPr>
+        </p:nvSpPr>
+        <p:spPr/>
+        <p:txBody>
+          <a:bodyPr/>
+          <a:lstStyle/>
+          <a:p>
+            <a:fld id="{D755565A-1FEC-4FFE-8425-B731D92946D0}" type="slidenum">
+              <a:rPr lang="fr-CA" smtClean="0"/>
+              <a:t>8</a:t>
+            </a:fld>
+            <a:endParaRPr lang="fr-CA"/>
+          </a:p>
+        </p:txBody>
+      </p:sp>
+    </p:spTree>
+    <p:extLst>
+      <p:ext uri="{BB962C8B-B14F-4D97-AF65-F5344CB8AC3E}">
+        <p14:creationId xmlns:p14="http://schemas.microsoft.com/office/powerpoint/2010/main" val="506805993"/>
+      </p:ext>
+    </p:extLst>
+  </p:cSld>
+  <p:clrMapOvr>
+    <a:masterClrMapping/>
+  </p:clrMapOvr>
+</p:notes>
+</file>
+
 <file path=ppt/slideLayouts/slideLayout1.xml><?xml version="1.0" encoding="utf-8"?>
 <p:sldLayout xmlns:a="http://schemas.openxmlformats.org/drawingml/2006/main" xmlns:r="http://schemas.openxmlformats.org/officeDocument/2006/relationships" xmlns:p="http://schemas.openxmlformats.org/presentationml/2006/main" type="title" preserve="1">
   <p:cSld name="Title Slide">
@@ -677,7 +762,7 @@
           <a:p>
             <a:fld id="{73720E39-F9E6-45F4-9AF3-0670893E0E05}" type="datetime1">
               <a:rPr lang="fr-CA" smtClean="0"/>
-              <a:t>2026-04-18</a:t>
+              <a:t>2026-04-19</a:t>
             </a:fld>
             <a:endParaRPr lang="fr-CA"/>
           </a:p>
@@ -877,7 +962,7 @@
           <a:p>
             <a:fld id="{2A86A87F-FCE1-414B-898E-E056954DFB53}" type="datetime1">
               <a:rPr lang="fr-CA" smtClean="0"/>
-              <a:t>2026-04-18</a:t>
+              <a:t>2026-04-19</a:t>
             </a:fld>
             <a:endParaRPr lang="fr-CA"/>
           </a:p>
@@ -1087,7 +1172,7 @@
           <a:p>
             <a:fld id="{86217A25-A768-4FB5-8838-4C76F4A4D771}" type="datetime1">
               <a:rPr lang="fr-CA" smtClean="0"/>
-              <a:t>2026-04-18</a:t>
+              <a:t>2026-04-19</a:t>
             </a:fld>
             <a:endParaRPr lang="fr-CA"/>
           </a:p>
@@ -1287,7 +1372,7 @@
           <a:p>
             <a:fld id="{6DF5E9B1-F4B4-44A9-8978-A50A0AD8373C}" type="datetime1">
               <a:rPr lang="fr-CA" smtClean="0"/>
-              <a:t>2026-04-18</a:t>
+              <a:t>2026-04-19</a:t>
             </a:fld>
             <a:endParaRPr lang="fr-CA"/>
           </a:p>
@@ -1563,7 +1648,7 @@
           <a:p>
             <a:fld id="{5DE8FE0D-E91C-47AE-8B70-2B0ABA5D1B1E}" type="datetime1">
               <a:rPr lang="fr-CA" smtClean="0"/>
-              <a:t>2026-04-18</a:t>
+              <a:t>2026-04-19</a:t>
             </a:fld>
             <a:endParaRPr lang="fr-CA"/>
           </a:p>
@@ -1831,7 +1916,7 @@
           <a:p>
             <a:fld id="{F3AB8F30-8420-4011-A9ED-ED2F47883C93}" type="datetime1">
               <a:rPr lang="fr-CA" smtClean="0"/>
-              <a:t>2026-04-18</a:t>
+              <a:t>2026-04-19</a:t>
             </a:fld>
             <a:endParaRPr lang="fr-CA"/>
           </a:p>
@@ -2246,7 +2331,7 @@
           <a:p>
             <a:fld id="{852876F1-672F-46E4-BC46-E9D4C880BFEF}" type="datetime1">
               <a:rPr lang="fr-CA" smtClean="0"/>
-              <a:t>2026-04-18</a:t>
+              <a:t>2026-04-19</a:t>
             </a:fld>
             <a:endParaRPr lang="fr-CA"/>
           </a:p>
@@ -2388,7 +2473,7 @@
           <a:p>
             <a:fld id="{05494588-57AE-4A88-AA7D-14590C8ABB1D}" type="datetime1">
               <a:rPr lang="fr-CA" smtClean="0"/>
-              <a:t>2026-04-18</a:t>
+              <a:t>2026-04-19</a:t>
             </a:fld>
             <a:endParaRPr lang="fr-CA"/>
           </a:p>
@@ -2501,7 +2586,7 @@
           <a:p>
             <a:fld id="{70596107-F84A-4D89-B7EE-30826EF0EE70}" type="datetime1">
               <a:rPr lang="fr-CA" smtClean="0"/>
-              <a:t>2026-04-18</a:t>
+              <a:t>2026-04-19</a:t>
             </a:fld>
             <a:endParaRPr lang="fr-CA"/>
           </a:p>
@@ -2814,7 +2899,7 @@
           <a:p>
             <a:fld id="{12C269CA-6797-4965-A975-3F40F12DAD06}" type="datetime1">
               <a:rPr lang="fr-CA" smtClean="0"/>
-              <a:t>2026-04-18</a:t>
+              <a:t>2026-04-19</a:t>
             </a:fld>
             <a:endParaRPr lang="fr-CA"/>
           </a:p>
@@ -3103,7 +3188,7 @@
           <a:p>
             <a:fld id="{3F5AE234-69D2-4522-AB7A-F911A65753A0}" type="datetime1">
               <a:rPr lang="fr-CA" smtClean="0"/>
-              <a:t>2026-04-18</a:t>
+              <a:t>2026-04-19</a:t>
             </a:fld>
             <a:endParaRPr lang="fr-CA"/>
           </a:p>
@@ -3346,7 +3431,7 @@
           <a:p>
             <a:fld id="{30546B8D-50B2-4CF7-ACAA-221A68F8C882}" type="datetime1">
               <a:rPr lang="fr-CA" smtClean="0"/>
-              <a:t>2026-04-18</a:t>
+              <a:t>2026-04-19</a:t>
             </a:fld>
             <a:endParaRPr lang="fr-CA"/>
           </a:p>
@@ -4359,6 +4444,1147 @@
 </file>
 
 <file path=ppt/slides/slide10.xml><?xml version="1.0" encoding="utf-8"?>
+<p:sld xmlns:a="http://schemas.openxmlformats.org/drawingml/2006/main" xmlns:r="http://schemas.openxmlformats.org/officeDocument/2006/relationships" xmlns:p="http://schemas.openxmlformats.org/presentationml/2006/main">
+  <p:cSld>
+    <p:bg>
+      <p:bgPr>
+        <a:solidFill>
+          <a:srgbClr val="F5F5F5"/>
+        </a:solidFill>
+        <a:effectLst/>
+      </p:bgPr>
+    </p:bg>
+    <p:spTree>
+      <p:nvGrpSpPr>
+        <p:cNvPr id="1" name="">
+          <a:extLst>
+            <a:ext uri="{FF2B5EF4-FFF2-40B4-BE49-F238E27FC236}">
+              <a16:creationId xmlns:a16="http://schemas.microsoft.com/office/drawing/2014/main" id="{87A9263D-4807-E836-9D35-A8E842603F50}"/>
+            </a:ext>
+          </a:extLst>
+        </p:cNvPr>
+        <p:cNvGrpSpPr/>
+        <p:nvPr/>
+      </p:nvGrpSpPr>
+      <p:grpSpPr>
+        <a:xfrm>
+          <a:off x="0" y="0"/>
+          <a:ext cx="0" cy="0"/>
+          <a:chOff x="0" y="0"/>
+          <a:chExt cx="0" cy="0"/>
+        </a:xfrm>
+      </p:grpSpPr>
+      <p:sp>
+        <p:nvSpPr>
+          <p:cNvPr id="2" name="Title 1">
+            <a:extLst>
+              <a:ext uri="{FF2B5EF4-FFF2-40B4-BE49-F238E27FC236}">
+                <a16:creationId xmlns:a16="http://schemas.microsoft.com/office/drawing/2014/main" id="{40528DB6-96D7-8C66-AD82-44F79CA8B635}"/>
+              </a:ext>
+            </a:extLst>
+          </p:cNvPr>
+          <p:cNvSpPr>
+            <a:spLocks noGrp="1"/>
+          </p:cNvSpPr>
+          <p:nvPr>
+            <p:ph type="title"/>
+          </p:nvPr>
+        </p:nvSpPr>
+        <p:spPr/>
+        <p:txBody>
+          <a:bodyPr/>
+          <a:lstStyle/>
+          <a:p>
+            <a:r>
+              <a:rPr lang="en-US" dirty="0">
+                <a:latin typeface="Arial Rounded MT Bold" panose="020F0704030504030204" pitchFamily="34" charset="0"/>
+              </a:rPr>
+              <a:t>  Tests: Assertions</a:t>
+            </a:r>
+            <a:endParaRPr lang="fr-CA" dirty="0">
+              <a:latin typeface="Arial Rounded MT Bold" panose="020F0704030504030204" pitchFamily="34" charset="0"/>
+            </a:endParaRPr>
+          </a:p>
+        </p:txBody>
+      </p:sp>
+      <mc:AlternateContent xmlns:mc="http://schemas.openxmlformats.org/markup-compatibility/2006" xmlns:a14="http://schemas.microsoft.com/office/drawing/2010/main">
+        <mc:Choice Requires="a14">
+          <p:sp>
+            <p:nvSpPr>
+              <p:cNvPr id="3" name="Content Placeholder 2">
+                <a:extLst>
+                  <a:ext uri="{FF2B5EF4-FFF2-40B4-BE49-F238E27FC236}">
+                    <a16:creationId xmlns:a16="http://schemas.microsoft.com/office/drawing/2014/main" id="{14A7F48A-C092-F259-986D-A7CD6ECB62B5}"/>
+                  </a:ext>
+                </a:extLst>
+              </p:cNvPr>
+              <p:cNvSpPr>
+                <a:spLocks noGrp="1"/>
+              </p:cNvSpPr>
+              <p:nvPr>
+                <p:ph idx="1"/>
+              </p:nvPr>
+            </p:nvSpPr>
+            <p:spPr/>
+            <p:txBody>
+              <a:bodyPr>
+                <a:normAutofit fontScale="92500"/>
+              </a:bodyPr>
+              <a:lstStyle/>
+              <a:p>
+                <a:pPr marL="0" indent="0" algn="just">
+                  <a:buNone/>
+                </a:pPr>
+                <a:r>
+                  <a:rPr lang="fr-CA" b="1" dirty="0">
+                    <a:latin typeface="Consolas" panose="020B0609020204030204" pitchFamily="49" charset="0"/>
+                  </a:rPr>
+                  <a:t>&gt;&gt;&gt; x = 10      	</a:t>
+                </a:r>
+                <a14:m>
+                  <m:oMath xmlns:m="http://schemas.openxmlformats.org/officeDocument/2006/math">
+                    <m:r>
+                      <a:rPr lang="fr-CA" i="1" smtClean="0">
+                        <a:latin typeface="Cambria Math" panose="02040503050406030204" pitchFamily="18" charset="0"/>
+                        <a:ea typeface="Cambria Math" panose="02040503050406030204" pitchFamily="18" charset="0"/>
+                      </a:rPr>
+                      <m:t>←</m:t>
+                    </m:r>
+                  </m:oMath>
+                </a14:m>
+                <a:r>
+                  <a:rPr lang="fr-CA" dirty="0">
+                    <a:latin typeface="Consolas" panose="020B0609020204030204" pitchFamily="49" charset="0"/>
+                  </a:rPr>
+                  <a:t> </a:t>
+                </a:r>
+                <a:r>
+                  <a:rPr lang="fr-CA" b="1" dirty="0">
+                    <a:solidFill>
+                      <a:srgbClr val="FF2500"/>
+                    </a:solidFill>
+                    <a:latin typeface="Consolas" panose="020B0609020204030204" pitchFamily="49" charset="0"/>
+                  </a:rPr>
+                  <a:t>d</a:t>
+                </a:r>
+                <a:r>
+                  <a:rPr lang="en-US" b="1" dirty="0">
+                    <a:solidFill>
+                      <a:srgbClr val="FF2500"/>
+                    </a:solidFill>
+                    <a:latin typeface="Consolas" panose="020B0609020204030204" pitchFamily="49" charset="0"/>
+                  </a:rPr>
+                  <a:t>éclaration</a:t>
+                </a:r>
+                <a:r>
+                  <a:rPr lang="en-US" b="1" dirty="0">
+                    <a:latin typeface="Consolas" panose="020B0609020204030204" pitchFamily="49" charset="0"/>
+                  </a:rPr>
+                  <a:t> </a:t>
+                </a:r>
+                <a:r>
+                  <a:rPr lang="en-US" dirty="0">
+                    <a:latin typeface="Consolas" panose="020B0609020204030204" pitchFamily="49" charset="0"/>
+                  </a:rPr>
+                  <a:t>+ </a:t>
+                </a:r>
+                <a:r>
+                  <a:rPr lang="en-US" b="1" dirty="0">
+                    <a:solidFill>
+                      <a:srgbClr val="FF2500"/>
+                    </a:solidFill>
+                    <a:latin typeface="Consolas" panose="020B0609020204030204" pitchFamily="49" charset="0"/>
+                  </a:rPr>
+                  <a:t>affectation</a:t>
+                </a:r>
+                <a:endParaRPr lang="fr-CA" b="1" dirty="0">
+                  <a:solidFill>
+                    <a:srgbClr val="FF2500"/>
+                  </a:solidFill>
+                  <a:latin typeface="Consolas" panose="020B0609020204030204" pitchFamily="49" charset="0"/>
+                </a:endParaRPr>
+              </a:p>
+              <a:p>
+                <a:pPr marL="0" indent="0" algn="just">
+                  <a:buNone/>
+                </a:pPr>
+                <a:r>
+                  <a:rPr lang="fr-CA" b="1" dirty="0">
+                    <a:latin typeface="Consolas" panose="020B0609020204030204" pitchFamily="49" charset="0"/>
+                  </a:rPr>
+                  <a:t>&gt;&gt;&gt; id(x)</a:t>
+                </a:r>
+                <a:r>
+                  <a:rPr lang="fr-CA" b="1" dirty="0">
+                    <a:ea typeface="Cambria Math" panose="02040503050406030204" pitchFamily="18" charset="0"/>
+                  </a:rPr>
+                  <a:t>                           	</a:t>
+                </a:r>
+                <a14:m>
+                  <m:oMath xmlns:m="http://schemas.openxmlformats.org/officeDocument/2006/math">
+                    <m:r>
+                      <a:rPr lang="fr-CA" i="1" smtClean="0">
+                        <a:latin typeface="Cambria Math" panose="02040503050406030204" pitchFamily="18" charset="0"/>
+                        <a:ea typeface="Cambria Math" panose="02040503050406030204" pitchFamily="18" charset="0"/>
+                      </a:rPr>
+                      <m:t>←</m:t>
+                    </m:r>
+                  </m:oMath>
+                </a14:m>
+                <a:r>
+                  <a:rPr lang="fr-CA" dirty="0">
+                    <a:latin typeface="Consolas" panose="020B0609020204030204" pitchFamily="49" charset="0"/>
+                  </a:rPr>
+                  <a:t> </a:t>
+                </a:r>
+                <a:r>
+                  <a:rPr lang="en-US" dirty="0">
+                    <a:latin typeface="Consolas" panose="020B0609020204030204" pitchFamily="49" charset="0"/>
+                  </a:rPr>
+                  <a:t>afficher l'</a:t>
+                </a:r>
+                <a:r>
+                  <a:rPr lang="en-US" b="1" dirty="0">
+                    <a:solidFill>
+                      <a:srgbClr val="FF2500"/>
+                    </a:solidFill>
+                    <a:latin typeface="Consolas" panose="020B0609020204030204" pitchFamily="49" charset="0"/>
+                  </a:rPr>
+                  <a:t>adresse</a:t>
+                </a:r>
+                <a:r>
+                  <a:rPr lang="en-US" b="1" dirty="0">
+                    <a:latin typeface="Consolas" panose="020B0609020204030204" pitchFamily="49" charset="0"/>
+                  </a:rPr>
+                  <a:t> </a:t>
+                </a:r>
+                <a:r>
+                  <a:rPr lang="en-US" b="1" dirty="0" err="1">
+                    <a:solidFill>
+                      <a:srgbClr val="FF2500"/>
+                    </a:solidFill>
+                    <a:latin typeface="Consolas" panose="020B0609020204030204" pitchFamily="49" charset="0"/>
+                  </a:rPr>
+                  <a:t>mémoire</a:t>
+                </a:r>
+                <a:r>
+                  <a:rPr lang="en-US" dirty="0">
+                    <a:latin typeface="Consolas" panose="020B0609020204030204" pitchFamily="49" charset="0"/>
+                  </a:rPr>
+                  <a:t> de </a:t>
+                </a:r>
+                <a14:m>
+                  <m:oMath xmlns:m="http://schemas.openxmlformats.org/officeDocument/2006/math">
+                    <m:r>
+                      <a:rPr lang="en-US" i="1" dirty="0" smtClean="0">
+                        <a:latin typeface="Cambria Math" panose="02040503050406030204" pitchFamily="18" charset="0"/>
+                      </a:rPr>
+                      <m:t>𝑥</m:t>
+                    </m:r>
+                  </m:oMath>
+                </a14:m>
+                <a:endParaRPr lang="fr-CA" dirty="0">
+                  <a:latin typeface="Consolas" panose="020B0609020204030204" pitchFamily="49" charset="0"/>
+                </a:endParaRPr>
+              </a:p>
+              <a:p>
+                <a:pPr marL="0" indent="0" algn="just">
+                  <a:buNone/>
+                </a:pPr>
+                <a:r>
+                  <a:rPr lang="fr-CA" dirty="0">
+                    <a:solidFill>
+                      <a:schemeClr val="bg1">
+                        <a:lumMod val="50000"/>
+                      </a:schemeClr>
+                    </a:solidFill>
+                    <a:latin typeface="Consolas" panose="020B0609020204030204" pitchFamily="49" charset="0"/>
+                  </a:rPr>
+                  <a:t>140737066136648</a:t>
+                </a:r>
+              </a:p>
+              <a:p>
+                <a:pPr marL="0" indent="0" algn="just">
+                  <a:buNone/>
+                </a:pPr>
+                <a:r>
+                  <a:rPr lang="fr-CA" b="1" dirty="0">
+                    <a:latin typeface="Consolas" panose="020B0609020204030204" pitchFamily="49" charset="0"/>
+                  </a:rPr>
+                  <a:t>&gt;&gt;&gt; type(x)</a:t>
+                </a:r>
+                <a:r>
+                  <a:rPr lang="fr-CA" b="1" dirty="0">
+                    <a:ea typeface="Cambria Math" panose="02040503050406030204" pitchFamily="18" charset="0"/>
+                  </a:rPr>
+                  <a:t>                      	</a:t>
+                </a:r>
+                <a14:m>
+                  <m:oMath xmlns:m="http://schemas.openxmlformats.org/officeDocument/2006/math">
+                    <m:r>
+                      <a:rPr lang="fr-CA" i="1" smtClean="0">
+                        <a:latin typeface="Cambria Math" panose="02040503050406030204" pitchFamily="18" charset="0"/>
+                        <a:ea typeface="Cambria Math" panose="02040503050406030204" pitchFamily="18" charset="0"/>
+                      </a:rPr>
+                      <m:t>←</m:t>
+                    </m:r>
+                  </m:oMath>
+                </a14:m>
+                <a:r>
+                  <a:rPr lang="fr-CA" dirty="0">
+                    <a:latin typeface="Consolas" panose="020B0609020204030204" pitchFamily="49" charset="0"/>
+                  </a:rPr>
+                  <a:t> </a:t>
+                </a:r>
+                <a:r>
+                  <a:rPr lang="en-US" dirty="0" err="1">
+                    <a:latin typeface="Consolas" panose="020B0609020204030204" pitchFamily="49" charset="0"/>
+                  </a:rPr>
+                  <a:t>afficher</a:t>
+                </a:r>
+                <a:r>
+                  <a:rPr lang="en-US" dirty="0">
+                    <a:latin typeface="Consolas" panose="020B0609020204030204" pitchFamily="49" charset="0"/>
+                  </a:rPr>
+                  <a:t> le </a:t>
+                </a:r>
+                <a:r>
+                  <a:rPr lang="en-US" b="1" dirty="0">
+                    <a:solidFill>
+                      <a:srgbClr val="FF2500"/>
+                    </a:solidFill>
+                    <a:latin typeface="Consolas" panose="020B0609020204030204" pitchFamily="49" charset="0"/>
+                  </a:rPr>
+                  <a:t>type</a:t>
+                </a:r>
+                <a:r>
+                  <a:rPr lang="en-US" dirty="0">
+                    <a:latin typeface="Consolas" panose="020B0609020204030204" pitchFamily="49" charset="0"/>
+                  </a:rPr>
+                  <a:t> de </a:t>
+                </a:r>
+                <a14:m>
+                  <m:oMath xmlns:m="http://schemas.openxmlformats.org/officeDocument/2006/math">
+                    <m:r>
+                      <a:rPr lang="en-US" i="1" dirty="0" smtClean="0">
+                        <a:latin typeface="Cambria Math" panose="02040503050406030204" pitchFamily="18" charset="0"/>
+                      </a:rPr>
+                      <m:t>𝑥</m:t>
+                    </m:r>
+                  </m:oMath>
+                </a14:m>
+                <a:endParaRPr lang="fr-CA" dirty="0">
+                  <a:latin typeface="Consolas" panose="020B0609020204030204" pitchFamily="49" charset="0"/>
+                </a:endParaRPr>
+              </a:p>
+              <a:p>
+                <a:pPr marL="0" indent="0" algn="just">
+                  <a:buNone/>
+                </a:pPr>
+                <a:r>
+                  <a:rPr lang="fr-CA" dirty="0">
+                    <a:solidFill>
+                      <a:schemeClr val="bg1">
+                        <a:lumMod val="50000"/>
+                      </a:schemeClr>
+                    </a:solidFill>
+                    <a:latin typeface="Consolas" panose="020B0609020204030204" pitchFamily="49" charset="0"/>
+                  </a:rPr>
+                  <a:t>&lt;class '</a:t>
+                </a:r>
+                <a:r>
+                  <a:rPr lang="fr-CA" dirty="0" err="1">
+                    <a:solidFill>
+                      <a:schemeClr val="bg1">
+                        <a:lumMod val="50000"/>
+                      </a:schemeClr>
+                    </a:solidFill>
+                    <a:latin typeface="Consolas" panose="020B0609020204030204" pitchFamily="49" charset="0"/>
+                  </a:rPr>
+                  <a:t>int</a:t>
+                </a:r>
+                <a:r>
+                  <a:rPr lang="fr-CA" dirty="0">
+                    <a:solidFill>
+                      <a:schemeClr val="bg1">
+                        <a:lumMod val="50000"/>
+                      </a:schemeClr>
+                    </a:solidFill>
+                    <a:latin typeface="Consolas" panose="020B0609020204030204" pitchFamily="49" charset="0"/>
+                  </a:rPr>
+                  <a:t>'&gt;</a:t>
+                </a:r>
+              </a:p>
+              <a:p>
+                <a:pPr marL="0" indent="0" algn="just">
+                  <a:buNone/>
+                </a:pPr>
+                <a:r>
+                  <a:rPr lang="en-CA" b="1" dirty="0">
+                    <a:latin typeface="Consolas" panose="020B0609020204030204" pitchFamily="49" charset="0"/>
+                  </a:rPr>
+                  <a:t>&gt;&gt;&gt; x = x / 2</a:t>
+                </a:r>
+                <a:r>
+                  <a:rPr lang="fr-CA" dirty="0">
+                    <a:ea typeface="Cambria Math" panose="02040503050406030204" pitchFamily="18" charset="0"/>
+                  </a:rPr>
+                  <a:t>		</a:t>
+                </a:r>
+                <a14:m>
+                  <m:oMath xmlns:m="http://schemas.openxmlformats.org/officeDocument/2006/math">
+                    <m:r>
+                      <a:rPr lang="fr-CA" i="1" smtClean="0">
+                        <a:latin typeface="Cambria Math" panose="02040503050406030204" pitchFamily="18" charset="0"/>
+                        <a:ea typeface="Cambria Math" panose="02040503050406030204" pitchFamily="18" charset="0"/>
+                      </a:rPr>
+                      <m:t>←</m:t>
+                    </m:r>
+                  </m:oMath>
+                </a14:m>
+                <a:r>
+                  <a:rPr lang="en-CA" b="1" dirty="0">
+                    <a:latin typeface="Consolas" panose="020B0609020204030204" pitchFamily="49" charset="0"/>
+                  </a:rPr>
+                  <a:t> </a:t>
+                </a:r>
+                <a:r>
+                  <a:rPr lang="en-CA" dirty="0">
+                    <a:latin typeface="Consolas" panose="020B0609020204030204" pitchFamily="49" charset="0"/>
+                  </a:rPr>
+                  <a:t>re</a:t>
+                </a:r>
+                <a:r>
+                  <a:rPr lang="fr-CA" dirty="0">
+                    <a:latin typeface="Consolas" panose="020B0609020204030204" pitchFamily="49" charset="0"/>
+                  </a:rPr>
+                  <a:t>-affectation (</a:t>
+                </a:r>
+                <a14:m>
+                  <m:oMath xmlns:m="http://schemas.openxmlformats.org/officeDocument/2006/math">
+                    <m:r>
+                      <a:rPr lang="fr-CA" b="0" i="1" smtClean="0">
+                        <a:latin typeface="Cambria Math" panose="02040503050406030204" pitchFamily="18" charset="0"/>
+                      </a:rPr>
+                      <m:t>≠</m:t>
+                    </m:r>
+                  </m:oMath>
+                </a14:m>
+                <a:r>
+                  <a:rPr lang="fr-CA" dirty="0">
+                    <a:latin typeface="Consolas" panose="020B0609020204030204" pitchFamily="49" charset="0"/>
+                  </a:rPr>
+                  <a:t> initialisation)</a:t>
+                </a:r>
+                <a:endParaRPr lang="en-CA" dirty="0">
+                  <a:latin typeface="Consolas" panose="020B0609020204030204" pitchFamily="49" charset="0"/>
+                </a:endParaRPr>
+              </a:p>
+              <a:p>
+                <a:pPr marL="0" indent="0" algn="just">
+                  <a:buNone/>
+                </a:pPr>
+                <a:r>
+                  <a:rPr lang="en-CA" b="1" dirty="0">
+                    <a:latin typeface="Consolas" panose="020B0609020204030204" pitchFamily="49" charset="0"/>
+                  </a:rPr>
+                  <a:t>&gt;&gt;&gt; type(x)</a:t>
+                </a:r>
+              </a:p>
+              <a:p>
+                <a:pPr marL="0" indent="0" algn="just">
+                  <a:buNone/>
+                </a:pPr>
+                <a:r>
+                  <a:rPr lang="fr-CA" dirty="0">
+                    <a:solidFill>
+                      <a:schemeClr val="bg1">
+                        <a:lumMod val="50000"/>
+                      </a:schemeClr>
+                    </a:solidFill>
+                    <a:latin typeface="Consolas" panose="020B0609020204030204" pitchFamily="49" charset="0"/>
+                  </a:rPr>
+                  <a:t>&lt;class '</a:t>
+                </a:r>
+                <a:r>
+                  <a:rPr lang="fr-CA" dirty="0" err="1">
+                    <a:solidFill>
+                      <a:schemeClr val="bg1">
+                        <a:lumMod val="50000"/>
+                      </a:schemeClr>
+                    </a:solidFill>
+                    <a:latin typeface="Consolas" panose="020B0609020204030204" pitchFamily="49" charset="0"/>
+                  </a:rPr>
+                  <a:t>float</a:t>
+                </a:r>
+                <a:r>
+                  <a:rPr lang="fr-CA" dirty="0">
+                    <a:solidFill>
+                      <a:schemeClr val="bg1">
+                        <a:lumMod val="50000"/>
+                      </a:schemeClr>
+                    </a:solidFill>
+                    <a:latin typeface="Consolas" panose="020B0609020204030204" pitchFamily="49" charset="0"/>
+                  </a:rPr>
+                  <a:t>'&gt;</a:t>
+                </a:r>
+                <a:r>
+                  <a:rPr lang="fr-CA" dirty="0">
+                    <a:ea typeface="Cambria Math" panose="02040503050406030204" pitchFamily="18" charset="0"/>
+                  </a:rPr>
+                  <a:t>		</a:t>
+                </a:r>
+                <a14:m>
+                  <m:oMath xmlns:m="http://schemas.openxmlformats.org/officeDocument/2006/math">
+                    <m:r>
+                      <a:rPr lang="fr-CA" i="1" smtClean="0">
+                        <a:latin typeface="Cambria Math" panose="02040503050406030204" pitchFamily="18" charset="0"/>
+                        <a:ea typeface="Cambria Math" panose="02040503050406030204" pitchFamily="18" charset="0"/>
+                      </a:rPr>
+                      <m:t>←</m:t>
+                    </m:r>
+                  </m:oMath>
+                </a14:m>
+                <a:r>
+                  <a:rPr lang="fr-CA" dirty="0">
+                    <a:latin typeface="Consolas" panose="020B0609020204030204" pitchFamily="49" charset="0"/>
+                  </a:rPr>
+                  <a:t> </a:t>
+                </a:r>
+                <a:r>
+                  <a:rPr lang="fr-CA" b="1" dirty="0">
+                    <a:solidFill>
+                      <a:srgbClr val="FF2500"/>
+                    </a:solidFill>
+                    <a:latin typeface="Consolas" panose="020B0609020204030204" pitchFamily="49" charset="0"/>
+                  </a:rPr>
+                  <a:t>typage dynamique</a:t>
+                </a:r>
+              </a:p>
+              <a:p>
+                <a:pPr marL="0" indent="0" algn="just">
+                  <a:buNone/>
+                </a:pPr>
+                <a:endParaRPr lang="fr-CA" dirty="0">
+                  <a:latin typeface="Consolas" panose="020B0609020204030204" pitchFamily="49" charset="0"/>
+                </a:endParaRPr>
+              </a:p>
+            </p:txBody>
+          </p:sp>
+        </mc:Choice>
+        <mc:Fallback xmlns="">
+          <p:sp>
+            <p:nvSpPr>
+              <p:cNvPr id="3" name="Content Placeholder 2">
+                <a:extLst>
+                  <a:ext uri="{FF2B5EF4-FFF2-40B4-BE49-F238E27FC236}">
+                    <a16:creationId xmlns:a16="http://schemas.microsoft.com/office/drawing/2014/main" id="{14A7F48A-C092-F259-986D-A7CD6ECB62B5}"/>
+                  </a:ext>
+                </a:extLst>
+              </p:cNvPr>
+              <p:cNvSpPr>
+                <a:spLocks noGrp="1" noRot="1" noChangeAspect="1" noMove="1" noResize="1" noEditPoints="1" noAdjustHandles="1" noChangeArrowheads="1" noChangeShapeType="1" noTextEdit="1"/>
+              </p:cNvSpPr>
+              <p:nvPr>
+                <p:ph idx="1"/>
+              </p:nvPr>
+            </p:nvSpPr>
+            <p:spPr>
+              <a:blipFill>
+                <a:blip r:embed="rId2"/>
+                <a:stretch>
+                  <a:fillRect l="-1043" t="-2101"/>
+                </a:stretch>
+              </a:blipFill>
+            </p:spPr>
+            <p:txBody>
+              <a:bodyPr/>
+              <a:lstStyle/>
+              <a:p>
+                <a:r>
+                  <a:rPr lang="fr-CA">
+                    <a:noFill/>
+                  </a:rPr>
+                  <a:t> </a:t>
+                </a:r>
+              </a:p>
+            </p:txBody>
+          </p:sp>
+        </mc:Fallback>
+      </mc:AlternateContent>
+      <p:sp>
+        <p:nvSpPr>
+          <p:cNvPr id="4" name="TextBox 3">
+            <a:extLst>
+              <a:ext uri="{FF2B5EF4-FFF2-40B4-BE49-F238E27FC236}">
+                <a16:creationId xmlns:a16="http://schemas.microsoft.com/office/drawing/2014/main" id="{DAF4FBA2-0961-5626-9EB2-09EE5BBB250C}"/>
+              </a:ext>
+            </a:extLst>
+          </p:cNvPr>
+          <p:cNvSpPr txBox="1"/>
+          <p:nvPr/>
+        </p:nvSpPr>
+        <p:spPr>
+          <a:xfrm>
+            <a:off x="838199" y="6176963"/>
+            <a:ext cx="10515599" cy="369332"/>
+          </a:xfrm>
+          <a:prstGeom prst="rect">
+            <a:avLst/>
+          </a:prstGeom>
+          <a:noFill/>
+        </p:spPr>
+        <p:txBody>
+          <a:bodyPr wrap="square">
+            <a:spAutoFit/>
+          </a:bodyPr>
+          <a:lstStyle/>
+          <a:p>
+            <a:pPr algn="ctr"/>
+            <a:r>
+              <a:rPr lang="fr-CA" sz="1800" b="1" dirty="0">
+                <a:latin typeface="Consolas" panose="020B0609020204030204" pitchFamily="49" charset="0"/>
+              </a:rPr>
+              <a:t>SOURCE: </a:t>
+            </a:r>
+            <a:r>
+              <a:rPr lang="fr-CA" b="1" dirty="0">
+                <a:latin typeface="Consolas" panose="020B0609020204030204" pitchFamily="49" charset="0"/>
+                <a:hlinkClick r:id="rId3"/>
+              </a:rPr>
+              <a:t>https://docs.python.org/3/library/functions.html</a:t>
+            </a:r>
+            <a:endParaRPr lang="fr-CA" sz="1800" b="1" dirty="0">
+              <a:latin typeface="Consolas" panose="020B0609020204030204" pitchFamily="49" charset="0"/>
+            </a:endParaRPr>
+          </a:p>
+        </p:txBody>
+      </p:sp>
+      <p:sp>
+        <p:nvSpPr>
+          <p:cNvPr id="5" name="Slide Number Placeholder 4">
+            <a:extLst>
+              <a:ext uri="{FF2B5EF4-FFF2-40B4-BE49-F238E27FC236}">
+                <a16:creationId xmlns:a16="http://schemas.microsoft.com/office/drawing/2014/main" id="{4ECBB37B-8121-D232-E8C3-6CE634C1FC51}"/>
+              </a:ext>
+            </a:extLst>
+          </p:cNvPr>
+          <p:cNvSpPr>
+            <a:spLocks noGrp="1"/>
+          </p:cNvSpPr>
+          <p:nvPr>
+            <p:ph type="sldNum" sz="quarter" idx="12"/>
+          </p:nvPr>
+        </p:nvSpPr>
+        <p:spPr/>
+        <p:txBody>
+          <a:bodyPr/>
+          <a:lstStyle/>
+          <a:p>
+            <a:fld id="{846B06B1-1179-491F-A487-8E0C403F7C13}" type="slidenum">
+              <a:rPr lang="fr-CA" smtClean="0"/>
+              <a:t>10</a:t>
+            </a:fld>
+            <a:endParaRPr lang="fr-CA"/>
+          </a:p>
+        </p:txBody>
+      </p:sp>
+    </p:spTree>
+    <p:extLst>
+      <p:ext uri="{BB962C8B-B14F-4D97-AF65-F5344CB8AC3E}">
+        <p14:creationId xmlns:p14="http://schemas.microsoft.com/office/powerpoint/2010/main" val="2272323523"/>
+      </p:ext>
+    </p:extLst>
+  </p:cSld>
+  <p:clrMapOvr>
+    <a:masterClrMapping/>
+  </p:clrMapOvr>
+  <p:timing>
+    <p:tnLst>
+      <p:par>
+        <p:cTn id="1" dur="indefinite" restart="never" nodeType="tmRoot">
+          <p:childTnLst>
+            <p:seq concurrent="1" nextAc="seek">
+              <p:cTn id="2" dur="indefinite" nodeType="mainSeq">
+                <p:childTnLst>
+                  <p:par>
+                    <p:cTn id="3" fill="hold">
+                      <p:stCondLst>
+                        <p:cond delay="indefinite"/>
+                      </p:stCondLst>
+                      <p:childTnLst>
+                        <p:par>
+                          <p:cTn id="4" fill="hold">
+                            <p:stCondLst>
+                              <p:cond delay="0"/>
+                            </p:stCondLst>
+                            <p:childTnLst>
+                              <p:par>
+                                <p:cTn id="5" presetID="10" presetClass="entr" presetSubtype="0" fill="hold" nodeType="clickEffect">
+                                  <p:stCondLst>
+                                    <p:cond delay="0"/>
+                                  </p:stCondLst>
+                                  <p:childTnLst>
+                                    <p:set>
+                                      <p:cBhvr>
+                                        <p:cTn id="6" dur="1" fill="hold">
+                                          <p:stCondLst>
+                                            <p:cond delay="0"/>
+                                          </p:stCondLst>
+                                        </p:cTn>
+                                        <p:tgtEl>
+                                          <p:spTgt spid="3">
+                                            <p:txEl>
+                                              <p:pRg st="0" end="0"/>
+                                            </p:txEl>
+                                          </p:spTgt>
+                                        </p:tgtEl>
+                                        <p:attrNameLst>
+                                          <p:attrName>style.visibility</p:attrName>
+                                        </p:attrNameLst>
+                                      </p:cBhvr>
+                                      <p:to>
+                                        <p:strVal val="visible"/>
+                                      </p:to>
+                                    </p:set>
+                                    <p:animEffect transition="in" filter="fade">
+                                      <p:cBhvr>
+                                        <p:cTn id="7" dur="500"/>
+                                        <p:tgtEl>
+                                          <p:spTgt spid="3">
+                                            <p:txEl>
+                                              <p:pRg st="0" end="0"/>
+                                            </p:txEl>
+                                          </p:spTgt>
+                                        </p:tgtEl>
+                                      </p:cBhvr>
+                                    </p:animEffect>
+                                  </p:childTnLst>
+                                </p:cTn>
+                              </p:par>
+                              <p:par>
+                                <p:cTn id="8" presetID="10" presetClass="entr" presetSubtype="0" fill="hold" nodeType="withEffect">
+                                  <p:stCondLst>
+                                    <p:cond delay="0"/>
+                                  </p:stCondLst>
+                                  <p:childTnLst>
+                                    <p:set>
+                                      <p:cBhvr>
+                                        <p:cTn id="9" dur="1" fill="hold">
+                                          <p:stCondLst>
+                                            <p:cond delay="0"/>
+                                          </p:stCondLst>
+                                        </p:cTn>
+                                        <p:tgtEl>
+                                          <p:spTgt spid="3">
+                                            <p:txEl>
+                                              <p:pRg st="1" end="1"/>
+                                            </p:txEl>
+                                          </p:spTgt>
+                                        </p:tgtEl>
+                                        <p:attrNameLst>
+                                          <p:attrName>style.visibility</p:attrName>
+                                        </p:attrNameLst>
+                                      </p:cBhvr>
+                                      <p:to>
+                                        <p:strVal val="visible"/>
+                                      </p:to>
+                                    </p:set>
+                                    <p:animEffect transition="in" filter="fade">
+                                      <p:cBhvr>
+                                        <p:cTn id="10" dur="500"/>
+                                        <p:tgtEl>
+                                          <p:spTgt spid="3">
+                                            <p:txEl>
+                                              <p:pRg st="1" end="1"/>
+                                            </p:txEl>
+                                          </p:spTgt>
+                                        </p:tgtEl>
+                                      </p:cBhvr>
+                                    </p:animEffect>
+                                  </p:childTnLst>
+                                </p:cTn>
+                              </p:par>
+                            </p:childTnLst>
+                          </p:cTn>
+                        </p:par>
+                      </p:childTnLst>
+                    </p:cTn>
+                  </p:par>
+                  <p:par>
+                    <p:cTn id="11" fill="hold">
+                      <p:stCondLst>
+                        <p:cond delay="indefinite"/>
+                      </p:stCondLst>
+                      <p:childTnLst>
+                        <p:par>
+                          <p:cTn id="12" fill="hold">
+                            <p:stCondLst>
+                              <p:cond delay="0"/>
+                            </p:stCondLst>
+                            <p:childTnLst>
+                              <p:par>
+                                <p:cTn id="13" presetID="10" presetClass="entr" presetSubtype="0" fill="hold" nodeType="clickEffect">
+                                  <p:stCondLst>
+                                    <p:cond delay="0"/>
+                                  </p:stCondLst>
+                                  <p:childTnLst>
+                                    <p:set>
+                                      <p:cBhvr>
+                                        <p:cTn id="14" dur="1" fill="hold">
+                                          <p:stCondLst>
+                                            <p:cond delay="0"/>
+                                          </p:stCondLst>
+                                        </p:cTn>
+                                        <p:tgtEl>
+                                          <p:spTgt spid="3">
+                                            <p:txEl>
+                                              <p:pRg st="2" end="2"/>
+                                            </p:txEl>
+                                          </p:spTgt>
+                                        </p:tgtEl>
+                                        <p:attrNameLst>
+                                          <p:attrName>style.visibility</p:attrName>
+                                        </p:attrNameLst>
+                                      </p:cBhvr>
+                                      <p:to>
+                                        <p:strVal val="visible"/>
+                                      </p:to>
+                                    </p:set>
+                                    <p:animEffect transition="in" filter="fade">
+                                      <p:cBhvr>
+                                        <p:cTn id="15" dur="500"/>
+                                        <p:tgtEl>
+                                          <p:spTgt spid="3">
+                                            <p:txEl>
+                                              <p:pRg st="2" end="2"/>
+                                            </p:txEl>
+                                          </p:spTgt>
+                                        </p:tgtEl>
+                                      </p:cBhvr>
+                                    </p:animEffect>
+                                  </p:childTnLst>
+                                </p:cTn>
+                              </p:par>
+                            </p:childTnLst>
+                          </p:cTn>
+                        </p:par>
+                      </p:childTnLst>
+                    </p:cTn>
+                  </p:par>
+                  <p:par>
+                    <p:cTn id="16" fill="hold">
+                      <p:stCondLst>
+                        <p:cond delay="indefinite"/>
+                      </p:stCondLst>
+                      <p:childTnLst>
+                        <p:par>
+                          <p:cTn id="17" fill="hold">
+                            <p:stCondLst>
+                              <p:cond delay="0"/>
+                            </p:stCondLst>
+                            <p:childTnLst>
+                              <p:par>
+                                <p:cTn id="18" presetID="10" presetClass="entr" presetSubtype="0" fill="hold" nodeType="clickEffect">
+                                  <p:stCondLst>
+                                    <p:cond delay="0"/>
+                                  </p:stCondLst>
+                                  <p:childTnLst>
+                                    <p:set>
+                                      <p:cBhvr>
+                                        <p:cTn id="19" dur="1" fill="hold">
+                                          <p:stCondLst>
+                                            <p:cond delay="0"/>
+                                          </p:stCondLst>
+                                        </p:cTn>
+                                        <p:tgtEl>
+                                          <p:spTgt spid="3">
+                                            <p:txEl>
+                                              <p:pRg st="3" end="3"/>
+                                            </p:txEl>
+                                          </p:spTgt>
+                                        </p:tgtEl>
+                                        <p:attrNameLst>
+                                          <p:attrName>style.visibility</p:attrName>
+                                        </p:attrNameLst>
+                                      </p:cBhvr>
+                                      <p:to>
+                                        <p:strVal val="visible"/>
+                                      </p:to>
+                                    </p:set>
+                                    <p:animEffect transition="in" filter="fade">
+                                      <p:cBhvr>
+                                        <p:cTn id="20" dur="500"/>
+                                        <p:tgtEl>
+                                          <p:spTgt spid="3">
+                                            <p:txEl>
+                                              <p:pRg st="3" end="3"/>
+                                            </p:txEl>
+                                          </p:spTgt>
+                                        </p:tgtEl>
+                                      </p:cBhvr>
+                                    </p:animEffect>
+                                  </p:childTnLst>
+                                </p:cTn>
+                              </p:par>
+                            </p:childTnLst>
+                          </p:cTn>
+                        </p:par>
+                      </p:childTnLst>
+                    </p:cTn>
+                  </p:par>
+                  <p:par>
+                    <p:cTn id="21" fill="hold">
+                      <p:stCondLst>
+                        <p:cond delay="indefinite"/>
+                      </p:stCondLst>
+                      <p:childTnLst>
+                        <p:par>
+                          <p:cTn id="22" fill="hold">
+                            <p:stCondLst>
+                              <p:cond delay="0"/>
+                            </p:stCondLst>
+                            <p:childTnLst>
+                              <p:par>
+                                <p:cTn id="23" presetID="10" presetClass="entr" presetSubtype="0" fill="hold" nodeType="clickEffect">
+                                  <p:stCondLst>
+                                    <p:cond delay="0"/>
+                                  </p:stCondLst>
+                                  <p:childTnLst>
+                                    <p:set>
+                                      <p:cBhvr>
+                                        <p:cTn id="24" dur="1" fill="hold">
+                                          <p:stCondLst>
+                                            <p:cond delay="0"/>
+                                          </p:stCondLst>
+                                        </p:cTn>
+                                        <p:tgtEl>
+                                          <p:spTgt spid="3">
+                                            <p:txEl>
+                                              <p:pRg st="4" end="4"/>
+                                            </p:txEl>
+                                          </p:spTgt>
+                                        </p:tgtEl>
+                                        <p:attrNameLst>
+                                          <p:attrName>style.visibility</p:attrName>
+                                        </p:attrNameLst>
+                                      </p:cBhvr>
+                                      <p:to>
+                                        <p:strVal val="visible"/>
+                                      </p:to>
+                                    </p:set>
+                                    <p:animEffect transition="in" filter="fade">
+                                      <p:cBhvr>
+                                        <p:cTn id="25" dur="500"/>
+                                        <p:tgtEl>
+                                          <p:spTgt spid="3">
+                                            <p:txEl>
+                                              <p:pRg st="4" end="4"/>
+                                            </p:txEl>
+                                          </p:spTgt>
+                                        </p:tgtEl>
+                                      </p:cBhvr>
+                                    </p:animEffect>
+                                  </p:childTnLst>
+                                </p:cTn>
+                              </p:par>
+                            </p:childTnLst>
+                          </p:cTn>
+                        </p:par>
+                      </p:childTnLst>
+                    </p:cTn>
+                  </p:par>
+                  <p:par>
+                    <p:cTn id="26" fill="hold">
+                      <p:stCondLst>
+                        <p:cond delay="indefinite"/>
+                      </p:stCondLst>
+                      <p:childTnLst>
+                        <p:par>
+                          <p:cTn id="27" fill="hold">
+                            <p:stCondLst>
+                              <p:cond delay="0"/>
+                            </p:stCondLst>
+                            <p:childTnLst>
+                              <p:par>
+                                <p:cTn id="28" presetID="10" presetClass="entr" presetSubtype="0" fill="hold" nodeType="clickEffect">
+                                  <p:stCondLst>
+                                    <p:cond delay="0"/>
+                                  </p:stCondLst>
+                                  <p:childTnLst>
+                                    <p:set>
+                                      <p:cBhvr>
+                                        <p:cTn id="29" dur="1" fill="hold">
+                                          <p:stCondLst>
+                                            <p:cond delay="0"/>
+                                          </p:stCondLst>
+                                        </p:cTn>
+                                        <p:tgtEl>
+                                          <p:spTgt spid="3">
+                                            <p:txEl>
+                                              <p:pRg st="5" end="5"/>
+                                            </p:txEl>
+                                          </p:spTgt>
+                                        </p:tgtEl>
+                                        <p:attrNameLst>
+                                          <p:attrName>style.visibility</p:attrName>
+                                        </p:attrNameLst>
+                                      </p:cBhvr>
+                                      <p:to>
+                                        <p:strVal val="visible"/>
+                                      </p:to>
+                                    </p:set>
+                                    <p:animEffect transition="in" filter="fade">
+                                      <p:cBhvr>
+                                        <p:cTn id="30" dur="500"/>
+                                        <p:tgtEl>
+                                          <p:spTgt spid="3">
+                                            <p:txEl>
+                                              <p:pRg st="5" end="5"/>
+                                            </p:txEl>
+                                          </p:spTgt>
+                                        </p:tgtEl>
+                                      </p:cBhvr>
+                                    </p:animEffect>
+                                  </p:childTnLst>
+                                </p:cTn>
+                              </p:par>
+                              <p:par>
+                                <p:cTn id="31" presetID="10" presetClass="entr" presetSubtype="0" fill="hold" nodeType="withEffect">
+                                  <p:stCondLst>
+                                    <p:cond delay="0"/>
+                                  </p:stCondLst>
+                                  <p:childTnLst>
+                                    <p:set>
+                                      <p:cBhvr>
+                                        <p:cTn id="32" dur="1" fill="hold">
+                                          <p:stCondLst>
+                                            <p:cond delay="0"/>
+                                          </p:stCondLst>
+                                        </p:cTn>
+                                        <p:tgtEl>
+                                          <p:spTgt spid="3">
+                                            <p:txEl>
+                                              <p:pRg st="6" end="6"/>
+                                            </p:txEl>
+                                          </p:spTgt>
+                                        </p:tgtEl>
+                                        <p:attrNameLst>
+                                          <p:attrName>style.visibility</p:attrName>
+                                        </p:attrNameLst>
+                                      </p:cBhvr>
+                                      <p:to>
+                                        <p:strVal val="visible"/>
+                                      </p:to>
+                                    </p:set>
+                                    <p:animEffect transition="in" filter="fade">
+                                      <p:cBhvr>
+                                        <p:cTn id="33" dur="500"/>
+                                        <p:tgtEl>
+                                          <p:spTgt spid="3">
+                                            <p:txEl>
+                                              <p:pRg st="6" end="6"/>
+                                            </p:txEl>
+                                          </p:spTgt>
+                                        </p:tgtEl>
+                                      </p:cBhvr>
+                                    </p:animEffect>
+                                  </p:childTnLst>
+                                </p:cTn>
+                              </p:par>
+                            </p:childTnLst>
+                          </p:cTn>
+                        </p:par>
+                      </p:childTnLst>
+                    </p:cTn>
+                  </p:par>
+                  <p:par>
+                    <p:cTn id="34" fill="hold">
+                      <p:stCondLst>
+                        <p:cond delay="indefinite"/>
+                      </p:stCondLst>
+                      <p:childTnLst>
+                        <p:par>
+                          <p:cTn id="35" fill="hold">
+                            <p:stCondLst>
+                              <p:cond delay="0"/>
+                            </p:stCondLst>
+                            <p:childTnLst>
+                              <p:par>
+                                <p:cTn id="36" presetID="10" presetClass="entr" presetSubtype="0" fill="hold" nodeType="clickEffect">
+                                  <p:stCondLst>
+                                    <p:cond delay="0"/>
+                                  </p:stCondLst>
+                                  <p:childTnLst>
+                                    <p:set>
+                                      <p:cBhvr>
+                                        <p:cTn id="37" dur="1" fill="hold">
+                                          <p:stCondLst>
+                                            <p:cond delay="0"/>
+                                          </p:stCondLst>
+                                        </p:cTn>
+                                        <p:tgtEl>
+                                          <p:spTgt spid="3">
+                                            <p:txEl>
+                                              <p:pRg st="7" end="7"/>
+                                            </p:txEl>
+                                          </p:spTgt>
+                                        </p:tgtEl>
+                                        <p:attrNameLst>
+                                          <p:attrName>style.visibility</p:attrName>
+                                        </p:attrNameLst>
+                                      </p:cBhvr>
+                                      <p:to>
+                                        <p:strVal val="visible"/>
+                                      </p:to>
+                                    </p:set>
+                                    <p:animEffect transition="in" filter="fade">
+                                      <p:cBhvr>
+                                        <p:cTn id="38" dur="500"/>
+                                        <p:tgtEl>
+                                          <p:spTgt spid="3">
+                                            <p:txEl>
+                                              <p:pRg st="7" end="7"/>
+                                            </p:txEl>
+                                          </p:spTgt>
+                                        </p:tgtEl>
+                                      </p:cBhvr>
+                                    </p:animEffect>
+                                  </p:childTnLst>
+                                </p:cTn>
+                              </p:par>
+                            </p:childTnLst>
+                          </p:cTn>
+                        </p:par>
+                      </p:childTnLst>
+                    </p:cTn>
+                  </p:par>
+                </p:childTnLst>
+              </p:cTn>
+              <p:prevCondLst>
+                <p:cond evt="onPrev" delay="0">
+                  <p:tgtEl>
+                    <p:sldTgt/>
+                  </p:tgtEl>
+                </p:cond>
+              </p:prevCondLst>
+              <p:nextCondLst>
+                <p:cond evt="onNext" delay="0">
+                  <p:tgtEl>
+                    <p:sldTgt/>
+                  </p:tgtEl>
+                </p:cond>
+              </p:nextCondLst>
+            </p:seq>
+          </p:childTnLst>
+        </p:cTn>
+      </p:par>
+    </p:tnLst>
+  </p:timing>
+</p:sld>
+</file>
+
+<file path=ppt/slides/slide11.xml><?xml version="1.0" encoding="utf-8"?>
 <p:sld xmlns:a="http://schemas.openxmlformats.org/drawingml/2006/main" xmlns:r="http://schemas.openxmlformats.org/officeDocument/2006/relationships" xmlns:p="http://schemas.openxmlformats.org/presentationml/2006/main">
   <p:cSld>
     <p:bg>
@@ -4848,7 +6074,7 @@
           <a:p>
             <a:fld id="{846B06B1-1179-491F-A487-8E0C403F7C13}" type="slidenum">
               <a:rPr lang="fr-CA" smtClean="0"/>
-              <a:t>10</a:t>
+              <a:t>11</a:t>
             </a:fld>
             <a:endParaRPr lang="fr-CA"/>
           </a:p>
@@ -5385,7 +6611,7 @@
 </p:sld>
 </file>
 
-<file path=ppt/slides/slide11.xml><?xml version="1.0" encoding="utf-8"?>
+<file path=ppt/slides/slide12.xml><?xml version="1.0" encoding="utf-8"?>
 <p:sld xmlns:a="http://schemas.openxmlformats.org/drawingml/2006/main" xmlns:r="http://schemas.openxmlformats.org/officeDocument/2006/relationships" xmlns:p="http://schemas.openxmlformats.org/presentationml/2006/main">
   <p:cSld>
     <p:bg>
@@ -5767,7 +6993,7 @@
           <a:p>
             <a:fld id="{846B06B1-1179-491F-A487-8E0C403F7C13}" type="slidenum">
               <a:rPr lang="fr-CA" smtClean="0"/>
-              <a:t>11</a:t>
+              <a:t>12</a:t>
             </a:fld>
             <a:endParaRPr lang="fr-CA"/>
           </a:p>
@@ -6146,7 +7372,7 @@
 </p:sld>
 </file>
 
-<file path=ppt/slides/slide12.xml><?xml version="1.0" encoding="utf-8"?>
+<file path=ppt/slides/slide13.xml><?xml version="1.0" encoding="utf-8"?>
 <p:sld xmlns:a="http://schemas.openxmlformats.org/drawingml/2006/main" xmlns:r="http://schemas.openxmlformats.org/officeDocument/2006/relationships" xmlns:p="http://schemas.openxmlformats.org/presentationml/2006/main">
   <p:cSld>
     <p:bg>
@@ -6613,7 +7839,7 @@
           <a:p>
             <a:fld id="{846B06B1-1179-491F-A487-8E0C403F7C13}" type="slidenum">
               <a:rPr lang="fr-CA" smtClean="0"/>
-              <a:t>12</a:t>
+              <a:t>13</a:t>
             </a:fld>
             <a:endParaRPr lang="fr-CA"/>
           </a:p>
@@ -7227,7 +8453,7 @@
 </p:sld>
 </file>
 
-<file path=ppt/slides/slide13.xml><?xml version="1.0" encoding="utf-8"?>
+<file path=ppt/slides/slide14.xml><?xml version="1.0" encoding="utf-8"?>
 <p:sld xmlns:a="http://schemas.openxmlformats.org/drawingml/2006/main" xmlns:r="http://schemas.openxmlformats.org/officeDocument/2006/relationships" xmlns:p="http://schemas.openxmlformats.org/presentationml/2006/main">
   <p:cSld>
     <p:bg>
@@ -7962,7 +9188,7 @@
           <a:p>
             <a:fld id="{846B06B1-1179-491F-A487-8E0C403F7C13}" type="slidenum">
               <a:rPr lang="fr-CA" smtClean="0"/>
-              <a:t>13</a:t>
+              <a:t>14</a:t>
             </a:fld>
             <a:endParaRPr lang="fr-CA"/>
           </a:p>
@@ -7981,7 +9207,7 @@
 </p:sld>
 </file>
 
-<file path=ppt/slides/slide14.xml><?xml version="1.0" encoding="utf-8"?>
+<file path=ppt/slides/slide15.xml><?xml version="1.0" encoding="utf-8"?>
 <p:sld xmlns:a="http://schemas.openxmlformats.org/drawingml/2006/main" xmlns:r="http://schemas.openxmlformats.org/officeDocument/2006/relationships" xmlns:p="http://schemas.openxmlformats.org/presentationml/2006/main">
   <p:cSld>
     <p:bg>
@@ -8089,7 +9315,7 @@
           <a:p>
             <a:fld id="{846B06B1-1179-491F-A487-8E0C403F7C13}" type="slidenum">
               <a:rPr lang="fr-CA" smtClean="0"/>
-              <a:t>14</a:t>
+              <a:t>15</a:t>
             </a:fld>
             <a:endParaRPr lang="fr-CA"/>
           </a:p>
@@ -8732,7 +9958,7 @@
 </p:sld>
 </file>
 
-<file path=ppt/slides/slide15.xml><?xml version="1.0" encoding="utf-8"?>
+<file path=ppt/slides/slide16.xml><?xml version="1.0" encoding="utf-8"?>
 <p:sld xmlns:a="http://schemas.openxmlformats.org/drawingml/2006/main" xmlns:r="http://schemas.openxmlformats.org/officeDocument/2006/relationships" xmlns:p="http://schemas.openxmlformats.org/presentationml/2006/main">
   <p:cSld>
     <p:bg>
@@ -8988,7 +10214,7 @@
           <a:p>
             <a:fld id="{846B06B1-1179-491F-A487-8E0C403F7C13}" type="slidenum">
               <a:rPr lang="fr-CA" smtClean="0"/>
-              <a:t>15</a:t>
+              <a:t>16</a:t>
             </a:fld>
             <a:endParaRPr lang="fr-CA"/>
           </a:p>
@@ -10013,7 +11239,7 @@
 </p:sld>
 </file>
 
-<file path=ppt/slides/slide16.xml><?xml version="1.0" encoding="utf-8"?>
+<file path=ppt/slides/slide17.xml><?xml version="1.0" encoding="utf-8"?>
 <p:sld xmlns:a="http://schemas.openxmlformats.org/drawingml/2006/main" xmlns:r="http://schemas.openxmlformats.org/officeDocument/2006/relationships" xmlns:p="http://schemas.openxmlformats.org/presentationml/2006/main">
   <p:cSld>
     <p:bg>
@@ -10280,7 +11506,7 @@
           <a:p>
             <a:fld id="{846B06B1-1179-491F-A487-8E0C403F7C13}" type="slidenum">
               <a:rPr lang="fr-CA" smtClean="0"/>
-              <a:t>16</a:t>
+              <a:t>17</a:t>
             </a:fld>
             <a:endParaRPr lang="fr-CA"/>
           </a:p>
@@ -10804,7 +12030,7 @@
 </p:sld>
 </file>
 
-<file path=ppt/slides/slide17.xml><?xml version="1.0" encoding="utf-8"?>
+<file path=ppt/slides/slide18.xml><?xml version="1.0" encoding="utf-8"?>
 <p:sld xmlns:a="http://schemas.openxmlformats.org/drawingml/2006/main" xmlns:r="http://schemas.openxmlformats.org/officeDocument/2006/relationships" xmlns:p="http://schemas.openxmlformats.org/presentationml/2006/main">
   <p:cSld>
     <p:bg>
@@ -10858,7 +12084,7 @@
           <a:p>
             <a:fld id="{846B06B1-1179-491F-A487-8E0C403F7C13}" type="slidenum">
               <a:rPr lang="fr-CA" smtClean="0"/>
-              <a:t>17</a:t>
+              <a:t>18</a:t>
             </a:fld>
             <a:endParaRPr lang="fr-CA"/>
           </a:p>
@@ -11914,7 +13140,7 @@
 </p:sld>
 </file>
 
-<file path=ppt/slides/slide18.xml><?xml version="1.0" encoding="utf-8"?>
+<file path=ppt/slides/slide19.xml><?xml version="1.0" encoding="utf-8"?>
 <p:sld xmlns:a="http://schemas.openxmlformats.org/drawingml/2006/main" xmlns:r="http://schemas.openxmlformats.org/officeDocument/2006/relationships" xmlns:p="http://schemas.openxmlformats.org/presentationml/2006/main">
   <p:cSld>
     <p:bg>
@@ -12038,7 +13264,7 @@
           <a:p>
             <a:fld id="{846B06B1-1179-491F-A487-8E0C403F7C13}" type="slidenum">
               <a:rPr lang="fr-CA" smtClean="0"/>
-              <a:t>18</a:t>
+              <a:t>19</a:t>
             </a:fld>
             <a:endParaRPr lang="fr-CA"/>
           </a:p>
@@ -13022,7 +14248,468 @@
 </p:sld>
 </file>
 
-<file path=ppt/slides/slide19.xml><?xml version="1.0" encoding="utf-8"?>
+<file path=ppt/slides/slide2.xml><?xml version="1.0" encoding="utf-8"?>
+<p:sld xmlns:a="http://schemas.openxmlformats.org/drawingml/2006/main" xmlns:r="http://schemas.openxmlformats.org/officeDocument/2006/relationships" xmlns:p="http://schemas.openxmlformats.org/presentationml/2006/main">
+  <p:cSld>
+    <p:bg>
+      <p:bgPr>
+        <a:solidFill>
+          <a:srgbClr val="F5F5F5"/>
+        </a:solidFill>
+        <a:effectLst/>
+      </p:bgPr>
+    </p:bg>
+    <p:spTree>
+      <p:nvGrpSpPr>
+        <p:cNvPr id="1" name="">
+          <a:extLst>
+            <a:ext uri="{FF2B5EF4-FFF2-40B4-BE49-F238E27FC236}">
+              <a16:creationId xmlns:a16="http://schemas.microsoft.com/office/drawing/2014/main" id="{9787BE08-8E87-BDAC-AA37-B1440F99BBB3}"/>
+            </a:ext>
+          </a:extLst>
+        </p:cNvPr>
+        <p:cNvGrpSpPr/>
+        <p:nvPr/>
+      </p:nvGrpSpPr>
+      <p:grpSpPr>
+        <a:xfrm>
+          <a:off x="0" y="0"/>
+          <a:ext cx="0" cy="0"/>
+          <a:chOff x="0" y="0"/>
+          <a:chExt cx="0" cy="0"/>
+        </a:xfrm>
+      </p:grpSpPr>
+      <p:sp>
+        <p:nvSpPr>
+          <p:cNvPr id="2" name="Title 1">
+            <a:extLst>
+              <a:ext uri="{FF2B5EF4-FFF2-40B4-BE49-F238E27FC236}">
+                <a16:creationId xmlns:a16="http://schemas.microsoft.com/office/drawing/2014/main" id="{2539027E-795E-A7E7-3EF9-F5DE694B487D}"/>
+              </a:ext>
+            </a:extLst>
+          </p:cNvPr>
+          <p:cNvSpPr>
+            <a:spLocks noGrp="1"/>
+          </p:cNvSpPr>
+          <p:nvPr>
+            <p:ph type="title"/>
+          </p:nvPr>
+        </p:nvSpPr>
+        <p:spPr/>
+        <p:txBody>
+          <a:bodyPr/>
+          <a:lstStyle/>
+          <a:p>
+            <a:r>
+              <a:rPr lang="en-US" dirty="0">
+                <a:latin typeface="Arial Rounded MT Bold" panose="020F0704030504030204" pitchFamily="34" charset="0"/>
+              </a:rPr>
+              <a:t>Plan</a:t>
+            </a:r>
+            <a:endParaRPr lang="fr-CA" dirty="0">
+              <a:latin typeface="Arial Rounded MT Bold" panose="020F0704030504030204" pitchFamily="34" charset="0"/>
+            </a:endParaRPr>
+          </a:p>
+        </p:txBody>
+      </p:sp>
+      <p:sp>
+        <p:nvSpPr>
+          <p:cNvPr id="3" name="Content Placeholder 2">
+            <a:extLst>
+              <a:ext uri="{FF2B5EF4-FFF2-40B4-BE49-F238E27FC236}">
+                <a16:creationId xmlns:a16="http://schemas.microsoft.com/office/drawing/2014/main" id="{1A2C692D-48DA-2C5B-C433-961FD8C3D9A4}"/>
+              </a:ext>
+            </a:extLst>
+          </p:cNvPr>
+          <p:cNvSpPr>
+            <a:spLocks noGrp="1"/>
+          </p:cNvSpPr>
+          <p:nvPr>
+            <p:ph idx="1"/>
+          </p:nvPr>
+        </p:nvSpPr>
+        <p:spPr/>
+        <p:txBody>
+          <a:bodyPr>
+            <a:normAutofit/>
+          </a:bodyPr>
+          <a:lstStyle/>
+          <a:p>
+            <a:pPr algn="just"/>
+            <a:r>
+              <a:rPr lang="en-US" sz="2000" dirty="0">
+                <a:latin typeface="Consolas" panose="020B0609020204030204" pitchFamily="49" charset="0"/>
+              </a:rPr>
+              <a:t>Notions </a:t>
+            </a:r>
+            <a:r>
+              <a:rPr lang="en-US" sz="2000" dirty="0" err="1">
+                <a:latin typeface="Consolas" panose="020B0609020204030204" pitchFamily="49" charset="0"/>
+              </a:rPr>
+              <a:t>intermédiaires</a:t>
+            </a:r>
+            <a:endParaRPr lang="en-US" sz="2000" dirty="0">
+              <a:latin typeface="Consolas" panose="020B0609020204030204" pitchFamily="49" charset="0"/>
+            </a:endParaRPr>
+          </a:p>
+          <a:p>
+            <a:pPr algn="just"/>
+            <a:r>
+              <a:rPr lang="fr-CA" sz="2000" dirty="0">
+                <a:latin typeface="Consolas" panose="020B0609020204030204" pitchFamily="49" charset="0"/>
+              </a:rPr>
+              <a:t>É</a:t>
+            </a:r>
+            <a:r>
+              <a:rPr lang="en-US" sz="2000" dirty="0" err="1">
+                <a:latin typeface="Consolas" panose="020B0609020204030204" pitchFamily="49" charset="0"/>
+              </a:rPr>
+              <a:t>crire</a:t>
+            </a:r>
+            <a:r>
+              <a:rPr lang="en-US" sz="2000" dirty="0">
+                <a:latin typeface="Consolas" panose="020B0609020204030204" pitchFamily="49" charset="0"/>
+              </a:rPr>
+              <a:t> du</a:t>
+            </a:r>
+            <a:r>
+              <a:rPr lang="fr-CA" sz="2000" dirty="0">
+                <a:latin typeface="Consolas" panose="020B0609020204030204" pitchFamily="49" charset="0"/>
+              </a:rPr>
+              <a:t> "vrai"</a:t>
+            </a:r>
+            <a:r>
+              <a:rPr lang="en-US" sz="2000" i="1" dirty="0">
+                <a:latin typeface="Consolas" panose="020B0609020204030204" pitchFamily="49" charset="0"/>
+              </a:rPr>
+              <a:t> </a:t>
+            </a:r>
+            <a:r>
+              <a:rPr lang="en-US" sz="2000" dirty="0">
+                <a:latin typeface="Consolas" panose="020B0609020204030204" pitchFamily="49" charset="0"/>
+              </a:rPr>
+              <a:t>code</a:t>
+            </a:r>
+          </a:p>
+          <a:p>
+            <a:pPr algn="just"/>
+            <a:r>
+              <a:rPr lang="fr-CA" sz="2000" dirty="0">
+                <a:latin typeface="Consolas" panose="020B0609020204030204" pitchFamily="49" charset="0"/>
+              </a:rPr>
+              <a:t>S'amuser</a:t>
+            </a:r>
+          </a:p>
+        </p:txBody>
+      </p:sp>
+      <p:sp>
+        <p:nvSpPr>
+          <p:cNvPr id="5" name="Slide Number Placeholder 4">
+            <a:extLst>
+              <a:ext uri="{FF2B5EF4-FFF2-40B4-BE49-F238E27FC236}">
+                <a16:creationId xmlns:a16="http://schemas.microsoft.com/office/drawing/2014/main" id="{30A9ACC9-0207-BF8C-83A4-76A47041FF41}"/>
+              </a:ext>
+            </a:extLst>
+          </p:cNvPr>
+          <p:cNvSpPr>
+            <a:spLocks noGrp="1"/>
+          </p:cNvSpPr>
+          <p:nvPr>
+            <p:ph type="sldNum" sz="quarter" idx="12"/>
+          </p:nvPr>
+        </p:nvSpPr>
+        <p:spPr/>
+        <p:txBody>
+          <a:bodyPr/>
+          <a:lstStyle/>
+          <a:p>
+            <a:fld id="{846B06B1-1179-491F-A487-8E0C403F7C13}" type="slidenum">
+              <a:rPr lang="fr-CA" smtClean="0"/>
+              <a:t>2</a:t>
+            </a:fld>
+            <a:endParaRPr lang="fr-CA" dirty="0"/>
+          </a:p>
+        </p:txBody>
+      </p:sp>
+      <p:pic>
+        <p:nvPicPr>
+          <p:cNvPr id="6" name="Picture 2" descr="Generated QR Image">
+            <a:extLst>
+              <a:ext uri="{FF2B5EF4-FFF2-40B4-BE49-F238E27FC236}">
+                <a16:creationId xmlns:a16="http://schemas.microsoft.com/office/drawing/2014/main" id="{55503CE9-4B4C-6B08-7AE7-D706357A15F7}"/>
+              </a:ext>
+            </a:extLst>
+          </p:cNvPr>
+          <p:cNvPicPr>
+            <a:picLocks noChangeAspect="1" noChangeArrowheads="1"/>
+          </p:cNvPicPr>
+          <p:nvPr/>
+        </p:nvPicPr>
+        <p:blipFill>
+          <a:blip r:embed="rId3">
+            <a:extLst>
+              <a:ext uri="{28A0092B-C50C-407E-A947-70E740481C1C}">
+                <a14:useLocalDpi xmlns:a14="http://schemas.microsoft.com/office/drawing/2010/main" val="0"/>
+              </a:ext>
+            </a:extLst>
+          </a:blip>
+          <a:srcRect/>
+          <a:stretch>
+            <a:fillRect/>
+          </a:stretch>
+        </p:blipFill>
+        <p:spPr bwMode="auto">
+          <a:xfrm>
+            <a:off x="6095999" y="1825625"/>
+            <a:ext cx="4105275" cy="4105275"/>
+          </a:xfrm>
+          <a:prstGeom prst="rect">
+            <a:avLst/>
+          </a:prstGeom>
+          <a:noFill/>
+          <a:extLst>
+            <a:ext uri="{909E8E84-426E-40DD-AFC4-6F175D3DCCD1}">
+              <a14:hiddenFill xmlns:a14="http://schemas.microsoft.com/office/drawing/2010/main">
+                <a:solidFill>
+                  <a:srgbClr val="FFFFFF"/>
+                </a:solidFill>
+              </a14:hiddenFill>
+            </a:ext>
+          </a:extLst>
+        </p:spPr>
+      </p:pic>
+    </p:spTree>
+    <p:extLst>
+      <p:ext uri="{BB962C8B-B14F-4D97-AF65-F5344CB8AC3E}">
+        <p14:creationId xmlns:p14="http://schemas.microsoft.com/office/powerpoint/2010/main" val="1707187834"/>
+      </p:ext>
+    </p:extLst>
+  </p:cSld>
+  <p:clrMapOvr>
+    <a:masterClrMapping/>
+  </p:clrMapOvr>
+  <p:timing>
+    <p:tnLst>
+      <p:par>
+        <p:cTn id="1" dur="indefinite" restart="never" nodeType="tmRoot">
+          <p:childTnLst>
+            <p:seq concurrent="1" nextAc="seek">
+              <p:cTn id="2" dur="indefinite" nodeType="mainSeq">
+                <p:childTnLst>
+                  <p:par>
+                    <p:cTn id="3" fill="hold">
+                      <p:stCondLst>
+                        <p:cond delay="indefinite"/>
+                      </p:stCondLst>
+                      <p:childTnLst>
+                        <p:par>
+                          <p:cTn id="4" fill="hold">
+                            <p:stCondLst>
+                              <p:cond delay="0"/>
+                            </p:stCondLst>
+                            <p:childTnLst>
+                              <p:par>
+                                <p:cTn id="5" presetID="10" presetClass="entr" presetSubtype="0" fill="hold" nodeType="clickEffect">
+                                  <p:stCondLst>
+                                    <p:cond delay="0"/>
+                                  </p:stCondLst>
+                                  <p:childTnLst>
+                                    <p:set>
+                                      <p:cBhvr>
+                                        <p:cTn id="6" dur="1" fill="hold">
+                                          <p:stCondLst>
+                                            <p:cond delay="0"/>
+                                          </p:stCondLst>
+                                        </p:cTn>
+                                        <p:tgtEl>
+                                          <p:spTgt spid="3">
+                                            <p:txEl>
+                                              <p:pRg st="0" end="0"/>
+                                            </p:txEl>
+                                          </p:spTgt>
+                                        </p:tgtEl>
+                                        <p:attrNameLst>
+                                          <p:attrName>style.visibility</p:attrName>
+                                        </p:attrNameLst>
+                                      </p:cBhvr>
+                                      <p:to>
+                                        <p:strVal val="visible"/>
+                                      </p:to>
+                                    </p:set>
+                                    <p:animEffect transition="in" filter="fade">
+                                      <p:cBhvr>
+                                        <p:cTn id="7" dur="500"/>
+                                        <p:tgtEl>
+                                          <p:spTgt spid="3">
+                                            <p:txEl>
+                                              <p:pRg st="0" end="0"/>
+                                            </p:txEl>
+                                          </p:spTgt>
+                                        </p:tgtEl>
+                                      </p:cBhvr>
+                                    </p:animEffect>
+                                  </p:childTnLst>
+                                </p:cTn>
+                              </p:par>
+                            </p:childTnLst>
+                          </p:cTn>
+                        </p:par>
+                      </p:childTnLst>
+                    </p:cTn>
+                  </p:par>
+                  <p:par>
+                    <p:cTn id="8" fill="hold">
+                      <p:stCondLst>
+                        <p:cond delay="indefinite"/>
+                      </p:stCondLst>
+                      <p:childTnLst>
+                        <p:par>
+                          <p:cTn id="9" fill="hold">
+                            <p:stCondLst>
+                              <p:cond delay="0"/>
+                            </p:stCondLst>
+                            <p:childTnLst>
+                              <p:par>
+                                <p:cTn id="10" presetID="10" presetClass="entr" presetSubtype="0" fill="hold" nodeType="clickEffect">
+                                  <p:stCondLst>
+                                    <p:cond delay="0"/>
+                                  </p:stCondLst>
+                                  <p:childTnLst>
+                                    <p:set>
+                                      <p:cBhvr>
+                                        <p:cTn id="11" dur="1" fill="hold">
+                                          <p:stCondLst>
+                                            <p:cond delay="0"/>
+                                          </p:stCondLst>
+                                        </p:cTn>
+                                        <p:tgtEl>
+                                          <p:spTgt spid="3">
+                                            <p:txEl>
+                                              <p:pRg st="1" end="1"/>
+                                            </p:txEl>
+                                          </p:spTgt>
+                                        </p:tgtEl>
+                                        <p:attrNameLst>
+                                          <p:attrName>style.visibility</p:attrName>
+                                        </p:attrNameLst>
+                                      </p:cBhvr>
+                                      <p:to>
+                                        <p:strVal val="visible"/>
+                                      </p:to>
+                                    </p:set>
+                                    <p:animEffect transition="in" filter="fade">
+                                      <p:cBhvr>
+                                        <p:cTn id="12" dur="500"/>
+                                        <p:tgtEl>
+                                          <p:spTgt spid="3">
+                                            <p:txEl>
+                                              <p:pRg st="1" end="1"/>
+                                            </p:txEl>
+                                          </p:spTgt>
+                                        </p:tgtEl>
+                                      </p:cBhvr>
+                                    </p:animEffect>
+                                  </p:childTnLst>
+                                </p:cTn>
+                              </p:par>
+                            </p:childTnLst>
+                          </p:cTn>
+                        </p:par>
+                      </p:childTnLst>
+                    </p:cTn>
+                  </p:par>
+                  <p:par>
+                    <p:cTn id="13" fill="hold">
+                      <p:stCondLst>
+                        <p:cond delay="indefinite"/>
+                      </p:stCondLst>
+                      <p:childTnLst>
+                        <p:par>
+                          <p:cTn id="14" fill="hold">
+                            <p:stCondLst>
+                              <p:cond delay="0"/>
+                            </p:stCondLst>
+                            <p:childTnLst>
+                              <p:par>
+                                <p:cTn id="15" presetID="10" presetClass="entr" presetSubtype="0" fill="hold" nodeType="clickEffect">
+                                  <p:stCondLst>
+                                    <p:cond delay="0"/>
+                                  </p:stCondLst>
+                                  <p:childTnLst>
+                                    <p:set>
+                                      <p:cBhvr>
+                                        <p:cTn id="16" dur="1" fill="hold">
+                                          <p:stCondLst>
+                                            <p:cond delay="0"/>
+                                          </p:stCondLst>
+                                        </p:cTn>
+                                        <p:tgtEl>
+                                          <p:spTgt spid="3">
+                                            <p:txEl>
+                                              <p:pRg st="2" end="2"/>
+                                            </p:txEl>
+                                          </p:spTgt>
+                                        </p:tgtEl>
+                                        <p:attrNameLst>
+                                          <p:attrName>style.visibility</p:attrName>
+                                        </p:attrNameLst>
+                                      </p:cBhvr>
+                                      <p:to>
+                                        <p:strVal val="visible"/>
+                                      </p:to>
+                                    </p:set>
+                                    <p:animEffect transition="in" filter="fade">
+                                      <p:cBhvr>
+                                        <p:cTn id="17" dur="500"/>
+                                        <p:tgtEl>
+                                          <p:spTgt spid="3">
+                                            <p:txEl>
+                                              <p:pRg st="2" end="2"/>
+                                            </p:txEl>
+                                          </p:spTgt>
+                                        </p:tgtEl>
+                                      </p:cBhvr>
+                                    </p:animEffect>
+                                  </p:childTnLst>
+                                </p:cTn>
+                              </p:par>
+                            </p:childTnLst>
+                          </p:cTn>
+                        </p:par>
+                      </p:childTnLst>
+                    </p:cTn>
+                  </p:par>
+                </p:childTnLst>
+              </p:cTn>
+              <p:prevCondLst>
+                <p:cond evt="onPrev" delay="0">
+                  <p:tgtEl>
+                    <p:sldTgt/>
+                  </p:tgtEl>
+                </p:cond>
+              </p:prevCondLst>
+              <p:nextCondLst>
+                <p:cond evt="onNext" delay="0">
+                  <p:tgtEl>
+                    <p:sldTgt/>
+                  </p:tgtEl>
+                </p:cond>
+              </p:nextCondLst>
+            </p:seq>
+          </p:childTnLst>
+        </p:cTn>
+      </p:par>
+    </p:tnLst>
+  </p:timing>
+  <p:extLst>
+    <p:ext uri="{6950BFC3-D8DA-4A85-94F7-54DA5524770B}">
+      <p188:commentRel xmlns:p188="http://schemas.microsoft.com/office/powerpoint/2018/8/main" r:id="rId2"/>
+    </p:ext>
+  </p:extLst>
+</p:sld>
+</file>
+
+<file path=ppt/slides/slide20.xml><?xml version="1.0" encoding="utf-8"?>
 <p:sld xmlns:a="http://schemas.openxmlformats.org/drawingml/2006/main" xmlns:r="http://schemas.openxmlformats.org/officeDocument/2006/relationships" xmlns:p="http://schemas.openxmlformats.org/presentationml/2006/main">
   <p:cSld>
     <p:bg>
@@ -13123,7 +14810,7 @@
           <a:p>
             <a:fld id="{846B06B1-1179-491F-A487-8E0C403F7C13}" type="slidenum">
               <a:rPr lang="fr-CA" smtClean="0"/>
-              <a:t>19</a:t>
+              <a:t>20</a:t>
             </a:fld>
             <a:endParaRPr lang="fr-CA"/>
           </a:p>
@@ -14096,468 +15783,7 @@
 </p:sld>
 </file>
 
-<file path=ppt/slides/slide2.xml><?xml version="1.0" encoding="utf-8"?>
-<p:sld xmlns:a="http://schemas.openxmlformats.org/drawingml/2006/main" xmlns:r="http://schemas.openxmlformats.org/officeDocument/2006/relationships" xmlns:p="http://schemas.openxmlformats.org/presentationml/2006/main">
-  <p:cSld>
-    <p:bg>
-      <p:bgPr>
-        <a:solidFill>
-          <a:srgbClr val="F5F5F5"/>
-        </a:solidFill>
-        <a:effectLst/>
-      </p:bgPr>
-    </p:bg>
-    <p:spTree>
-      <p:nvGrpSpPr>
-        <p:cNvPr id="1" name="">
-          <a:extLst>
-            <a:ext uri="{FF2B5EF4-FFF2-40B4-BE49-F238E27FC236}">
-              <a16:creationId xmlns:a16="http://schemas.microsoft.com/office/drawing/2014/main" id="{9787BE08-8E87-BDAC-AA37-B1440F99BBB3}"/>
-            </a:ext>
-          </a:extLst>
-        </p:cNvPr>
-        <p:cNvGrpSpPr/>
-        <p:nvPr/>
-      </p:nvGrpSpPr>
-      <p:grpSpPr>
-        <a:xfrm>
-          <a:off x="0" y="0"/>
-          <a:ext cx="0" cy="0"/>
-          <a:chOff x="0" y="0"/>
-          <a:chExt cx="0" cy="0"/>
-        </a:xfrm>
-      </p:grpSpPr>
-      <p:sp>
-        <p:nvSpPr>
-          <p:cNvPr id="2" name="Title 1">
-            <a:extLst>
-              <a:ext uri="{FF2B5EF4-FFF2-40B4-BE49-F238E27FC236}">
-                <a16:creationId xmlns:a16="http://schemas.microsoft.com/office/drawing/2014/main" id="{2539027E-795E-A7E7-3EF9-F5DE694B487D}"/>
-              </a:ext>
-            </a:extLst>
-          </p:cNvPr>
-          <p:cNvSpPr>
-            <a:spLocks noGrp="1"/>
-          </p:cNvSpPr>
-          <p:nvPr>
-            <p:ph type="title"/>
-          </p:nvPr>
-        </p:nvSpPr>
-        <p:spPr/>
-        <p:txBody>
-          <a:bodyPr/>
-          <a:lstStyle/>
-          <a:p>
-            <a:r>
-              <a:rPr lang="en-US" dirty="0">
-                <a:latin typeface="Arial Rounded MT Bold" panose="020F0704030504030204" pitchFamily="34" charset="0"/>
-              </a:rPr>
-              <a:t>Plan</a:t>
-            </a:r>
-            <a:endParaRPr lang="fr-CA" dirty="0">
-              <a:latin typeface="Arial Rounded MT Bold" panose="020F0704030504030204" pitchFamily="34" charset="0"/>
-            </a:endParaRPr>
-          </a:p>
-        </p:txBody>
-      </p:sp>
-      <p:sp>
-        <p:nvSpPr>
-          <p:cNvPr id="3" name="Content Placeholder 2">
-            <a:extLst>
-              <a:ext uri="{FF2B5EF4-FFF2-40B4-BE49-F238E27FC236}">
-                <a16:creationId xmlns:a16="http://schemas.microsoft.com/office/drawing/2014/main" id="{1A2C692D-48DA-2C5B-C433-961FD8C3D9A4}"/>
-              </a:ext>
-            </a:extLst>
-          </p:cNvPr>
-          <p:cNvSpPr>
-            <a:spLocks noGrp="1"/>
-          </p:cNvSpPr>
-          <p:nvPr>
-            <p:ph idx="1"/>
-          </p:nvPr>
-        </p:nvSpPr>
-        <p:spPr/>
-        <p:txBody>
-          <a:bodyPr>
-            <a:normAutofit/>
-          </a:bodyPr>
-          <a:lstStyle/>
-          <a:p>
-            <a:pPr algn="just"/>
-            <a:r>
-              <a:rPr lang="en-US" sz="2000" dirty="0">
-                <a:latin typeface="Consolas" panose="020B0609020204030204" pitchFamily="49" charset="0"/>
-              </a:rPr>
-              <a:t>Notions </a:t>
-            </a:r>
-            <a:r>
-              <a:rPr lang="en-US" sz="2000" dirty="0" err="1">
-                <a:latin typeface="Consolas" panose="020B0609020204030204" pitchFamily="49" charset="0"/>
-              </a:rPr>
-              <a:t>intermédiaires</a:t>
-            </a:r>
-            <a:endParaRPr lang="en-US" sz="2000" dirty="0">
-              <a:latin typeface="Consolas" panose="020B0609020204030204" pitchFamily="49" charset="0"/>
-            </a:endParaRPr>
-          </a:p>
-          <a:p>
-            <a:pPr algn="just"/>
-            <a:r>
-              <a:rPr lang="fr-CA" sz="2000" dirty="0">
-                <a:latin typeface="Consolas" panose="020B0609020204030204" pitchFamily="49" charset="0"/>
-              </a:rPr>
-              <a:t>É</a:t>
-            </a:r>
-            <a:r>
-              <a:rPr lang="en-US" sz="2000" dirty="0" err="1">
-                <a:latin typeface="Consolas" panose="020B0609020204030204" pitchFamily="49" charset="0"/>
-              </a:rPr>
-              <a:t>crire</a:t>
-            </a:r>
-            <a:r>
-              <a:rPr lang="en-US" sz="2000" dirty="0">
-                <a:latin typeface="Consolas" panose="020B0609020204030204" pitchFamily="49" charset="0"/>
-              </a:rPr>
-              <a:t> du</a:t>
-            </a:r>
-            <a:r>
-              <a:rPr lang="fr-CA" sz="2000" dirty="0">
-                <a:latin typeface="Consolas" panose="020B0609020204030204" pitchFamily="49" charset="0"/>
-              </a:rPr>
-              <a:t> "vrai"</a:t>
-            </a:r>
-            <a:r>
-              <a:rPr lang="en-US" sz="2000" i="1" dirty="0">
-                <a:latin typeface="Consolas" panose="020B0609020204030204" pitchFamily="49" charset="0"/>
-              </a:rPr>
-              <a:t> </a:t>
-            </a:r>
-            <a:r>
-              <a:rPr lang="en-US" sz="2000" dirty="0">
-                <a:latin typeface="Consolas" panose="020B0609020204030204" pitchFamily="49" charset="0"/>
-              </a:rPr>
-              <a:t>code</a:t>
-            </a:r>
-          </a:p>
-          <a:p>
-            <a:pPr algn="just"/>
-            <a:r>
-              <a:rPr lang="fr-CA" sz="2000" dirty="0">
-                <a:latin typeface="Consolas" panose="020B0609020204030204" pitchFamily="49" charset="0"/>
-              </a:rPr>
-              <a:t>S'amuser</a:t>
-            </a:r>
-          </a:p>
-        </p:txBody>
-      </p:sp>
-      <p:sp>
-        <p:nvSpPr>
-          <p:cNvPr id="5" name="Slide Number Placeholder 4">
-            <a:extLst>
-              <a:ext uri="{FF2B5EF4-FFF2-40B4-BE49-F238E27FC236}">
-                <a16:creationId xmlns:a16="http://schemas.microsoft.com/office/drawing/2014/main" id="{30A9ACC9-0207-BF8C-83A4-76A47041FF41}"/>
-              </a:ext>
-            </a:extLst>
-          </p:cNvPr>
-          <p:cNvSpPr>
-            <a:spLocks noGrp="1"/>
-          </p:cNvSpPr>
-          <p:nvPr>
-            <p:ph type="sldNum" sz="quarter" idx="12"/>
-          </p:nvPr>
-        </p:nvSpPr>
-        <p:spPr/>
-        <p:txBody>
-          <a:bodyPr/>
-          <a:lstStyle/>
-          <a:p>
-            <a:fld id="{846B06B1-1179-491F-A487-8E0C403F7C13}" type="slidenum">
-              <a:rPr lang="fr-CA" smtClean="0"/>
-              <a:t>2</a:t>
-            </a:fld>
-            <a:endParaRPr lang="fr-CA" dirty="0"/>
-          </a:p>
-        </p:txBody>
-      </p:sp>
-      <p:pic>
-        <p:nvPicPr>
-          <p:cNvPr id="6" name="Picture 2" descr="Generated QR Image">
-            <a:extLst>
-              <a:ext uri="{FF2B5EF4-FFF2-40B4-BE49-F238E27FC236}">
-                <a16:creationId xmlns:a16="http://schemas.microsoft.com/office/drawing/2014/main" id="{55503CE9-4B4C-6B08-7AE7-D706357A15F7}"/>
-              </a:ext>
-            </a:extLst>
-          </p:cNvPr>
-          <p:cNvPicPr>
-            <a:picLocks noChangeAspect="1" noChangeArrowheads="1"/>
-          </p:cNvPicPr>
-          <p:nvPr/>
-        </p:nvPicPr>
-        <p:blipFill>
-          <a:blip r:embed="rId3">
-            <a:extLst>
-              <a:ext uri="{28A0092B-C50C-407E-A947-70E740481C1C}">
-                <a14:useLocalDpi xmlns:a14="http://schemas.microsoft.com/office/drawing/2010/main" val="0"/>
-              </a:ext>
-            </a:extLst>
-          </a:blip>
-          <a:srcRect/>
-          <a:stretch>
-            <a:fillRect/>
-          </a:stretch>
-        </p:blipFill>
-        <p:spPr bwMode="auto">
-          <a:xfrm>
-            <a:off x="6095999" y="1825625"/>
-            <a:ext cx="4105275" cy="4105275"/>
-          </a:xfrm>
-          <a:prstGeom prst="rect">
-            <a:avLst/>
-          </a:prstGeom>
-          <a:noFill/>
-          <a:extLst>
-            <a:ext uri="{909E8E84-426E-40DD-AFC4-6F175D3DCCD1}">
-              <a14:hiddenFill xmlns:a14="http://schemas.microsoft.com/office/drawing/2010/main">
-                <a:solidFill>
-                  <a:srgbClr val="FFFFFF"/>
-                </a:solidFill>
-              </a14:hiddenFill>
-            </a:ext>
-          </a:extLst>
-        </p:spPr>
-      </p:pic>
-    </p:spTree>
-    <p:extLst>
-      <p:ext uri="{BB962C8B-B14F-4D97-AF65-F5344CB8AC3E}">
-        <p14:creationId xmlns:p14="http://schemas.microsoft.com/office/powerpoint/2010/main" val="1707187834"/>
-      </p:ext>
-    </p:extLst>
-  </p:cSld>
-  <p:clrMapOvr>
-    <a:masterClrMapping/>
-  </p:clrMapOvr>
-  <p:timing>
-    <p:tnLst>
-      <p:par>
-        <p:cTn id="1" dur="indefinite" restart="never" nodeType="tmRoot">
-          <p:childTnLst>
-            <p:seq concurrent="1" nextAc="seek">
-              <p:cTn id="2" dur="indefinite" nodeType="mainSeq">
-                <p:childTnLst>
-                  <p:par>
-                    <p:cTn id="3" fill="hold">
-                      <p:stCondLst>
-                        <p:cond delay="indefinite"/>
-                      </p:stCondLst>
-                      <p:childTnLst>
-                        <p:par>
-                          <p:cTn id="4" fill="hold">
-                            <p:stCondLst>
-                              <p:cond delay="0"/>
-                            </p:stCondLst>
-                            <p:childTnLst>
-                              <p:par>
-                                <p:cTn id="5" presetID="10" presetClass="entr" presetSubtype="0" fill="hold" nodeType="clickEffect">
-                                  <p:stCondLst>
-                                    <p:cond delay="0"/>
-                                  </p:stCondLst>
-                                  <p:childTnLst>
-                                    <p:set>
-                                      <p:cBhvr>
-                                        <p:cTn id="6" dur="1" fill="hold">
-                                          <p:stCondLst>
-                                            <p:cond delay="0"/>
-                                          </p:stCondLst>
-                                        </p:cTn>
-                                        <p:tgtEl>
-                                          <p:spTgt spid="3">
-                                            <p:txEl>
-                                              <p:pRg st="0" end="0"/>
-                                            </p:txEl>
-                                          </p:spTgt>
-                                        </p:tgtEl>
-                                        <p:attrNameLst>
-                                          <p:attrName>style.visibility</p:attrName>
-                                        </p:attrNameLst>
-                                      </p:cBhvr>
-                                      <p:to>
-                                        <p:strVal val="visible"/>
-                                      </p:to>
-                                    </p:set>
-                                    <p:animEffect transition="in" filter="fade">
-                                      <p:cBhvr>
-                                        <p:cTn id="7" dur="500"/>
-                                        <p:tgtEl>
-                                          <p:spTgt spid="3">
-                                            <p:txEl>
-                                              <p:pRg st="0" end="0"/>
-                                            </p:txEl>
-                                          </p:spTgt>
-                                        </p:tgtEl>
-                                      </p:cBhvr>
-                                    </p:animEffect>
-                                  </p:childTnLst>
-                                </p:cTn>
-                              </p:par>
-                            </p:childTnLst>
-                          </p:cTn>
-                        </p:par>
-                      </p:childTnLst>
-                    </p:cTn>
-                  </p:par>
-                  <p:par>
-                    <p:cTn id="8" fill="hold">
-                      <p:stCondLst>
-                        <p:cond delay="indefinite"/>
-                      </p:stCondLst>
-                      <p:childTnLst>
-                        <p:par>
-                          <p:cTn id="9" fill="hold">
-                            <p:stCondLst>
-                              <p:cond delay="0"/>
-                            </p:stCondLst>
-                            <p:childTnLst>
-                              <p:par>
-                                <p:cTn id="10" presetID="10" presetClass="entr" presetSubtype="0" fill="hold" nodeType="clickEffect">
-                                  <p:stCondLst>
-                                    <p:cond delay="0"/>
-                                  </p:stCondLst>
-                                  <p:childTnLst>
-                                    <p:set>
-                                      <p:cBhvr>
-                                        <p:cTn id="11" dur="1" fill="hold">
-                                          <p:stCondLst>
-                                            <p:cond delay="0"/>
-                                          </p:stCondLst>
-                                        </p:cTn>
-                                        <p:tgtEl>
-                                          <p:spTgt spid="3">
-                                            <p:txEl>
-                                              <p:pRg st="1" end="1"/>
-                                            </p:txEl>
-                                          </p:spTgt>
-                                        </p:tgtEl>
-                                        <p:attrNameLst>
-                                          <p:attrName>style.visibility</p:attrName>
-                                        </p:attrNameLst>
-                                      </p:cBhvr>
-                                      <p:to>
-                                        <p:strVal val="visible"/>
-                                      </p:to>
-                                    </p:set>
-                                    <p:animEffect transition="in" filter="fade">
-                                      <p:cBhvr>
-                                        <p:cTn id="12" dur="500"/>
-                                        <p:tgtEl>
-                                          <p:spTgt spid="3">
-                                            <p:txEl>
-                                              <p:pRg st="1" end="1"/>
-                                            </p:txEl>
-                                          </p:spTgt>
-                                        </p:tgtEl>
-                                      </p:cBhvr>
-                                    </p:animEffect>
-                                  </p:childTnLst>
-                                </p:cTn>
-                              </p:par>
-                            </p:childTnLst>
-                          </p:cTn>
-                        </p:par>
-                      </p:childTnLst>
-                    </p:cTn>
-                  </p:par>
-                  <p:par>
-                    <p:cTn id="13" fill="hold">
-                      <p:stCondLst>
-                        <p:cond delay="indefinite"/>
-                      </p:stCondLst>
-                      <p:childTnLst>
-                        <p:par>
-                          <p:cTn id="14" fill="hold">
-                            <p:stCondLst>
-                              <p:cond delay="0"/>
-                            </p:stCondLst>
-                            <p:childTnLst>
-                              <p:par>
-                                <p:cTn id="15" presetID="10" presetClass="entr" presetSubtype="0" fill="hold" nodeType="clickEffect">
-                                  <p:stCondLst>
-                                    <p:cond delay="0"/>
-                                  </p:stCondLst>
-                                  <p:childTnLst>
-                                    <p:set>
-                                      <p:cBhvr>
-                                        <p:cTn id="16" dur="1" fill="hold">
-                                          <p:stCondLst>
-                                            <p:cond delay="0"/>
-                                          </p:stCondLst>
-                                        </p:cTn>
-                                        <p:tgtEl>
-                                          <p:spTgt spid="3">
-                                            <p:txEl>
-                                              <p:pRg st="2" end="2"/>
-                                            </p:txEl>
-                                          </p:spTgt>
-                                        </p:tgtEl>
-                                        <p:attrNameLst>
-                                          <p:attrName>style.visibility</p:attrName>
-                                        </p:attrNameLst>
-                                      </p:cBhvr>
-                                      <p:to>
-                                        <p:strVal val="visible"/>
-                                      </p:to>
-                                    </p:set>
-                                    <p:animEffect transition="in" filter="fade">
-                                      <p:cBhvr>
-                                        <p:cTn id="17" dur="500"/>
-                                        <p:tgtEl>
-                                          <p:spTgt spid="3">
-                                            <p:txEl>
-                                              <p:pRg st="2" end="2"/>
-                                            </p:txEl>
-                                          </p:spTgt>
-                                        </p:tgtEl>
-                                      </p:cBhvr>
-                                    </p:animEffect>
-                                  </p:childTnLst>
-                                </p:cTn>
-                              </p:par>
-                            </p:childTnLst>
-                          </p:cTn>
-                        </p:par>
-                      </p:childTnLst>
-                    </p:cTn>
-                  </p:par>
-                </p:childTnLst>
-              </p:cTn>
-              <p:prevCondLst>
-                <p:cond evt="onPrev" delay="0">
-                  <p:tgtEl>
-                    <p:sldTgt/>
-                  </p:tgtEl>
-                </p:cond>
-              </p:prevCondLst>
-              <p:nextCondLst>
-                <p:cond evt="onNext" delay="0">
-                  <p:tgtEl>
-                    <p:sldTgt/>
-                  </p:tgtEl>
-                </p:cond>
-              </p:nextCondLst>
-            </p:seq>
-          </p:childTnLst>
-        </p:cTn>
-      </p:par>
-    </p:tnLst>
-  </p:timing>
-  <p:extLst>
-    <p:ext uri="{6950BFC3-D8DA-4A85-94F7-54DA5524770B}">
-      <p188:commentRel xmlns:p188="http://schemas.microsoft.com/office/powerpoint/2018/8/main" r:id="rId2"/>
-    </p:ext>
-  </p:extLst>
-</p:sld>
-</file>
-
-<file path=ppt/slides/slide20.xml><?xml version="1.0" encoding="utf-8"?>
+<file path=ppt/slides/slide21.xml><?xml version="1.0" encoding="utf-8"?>
 <p:sld xmlns:a="http://schemas.openxmlformats.org/drawingml/2006/main" xmlns:r="http://schemas.openxmlformats.org/officeDocument/2006/relationships" xmlns:p="http://schemas.openxmlformats.org/presentationml/2006/main">
   <p:cSld>
     <p:bg>
@@ -15006,7 +16232,7 @@
           <a:p>
             <a:fld id="{846B06B1-1179-491F-A487-8E0C403F7C13}" type="slidenum">
               <a:rPr lang="fr-CA" smtClean="0"/>
-              <a:t>20</a:t>
+              <a:t>21</a:t>
             </a:fld>
             <a:endParaRPr lang="fr-CA"/>
           </a:p>
@@ -15025,7 +16251,7 @@
 </p:sld>
 </file>
 
-<file path=ppt/slides/slide21.xml><?xml version="1.0" encoding="utf-8"?>
+<file path=ppt/slides/slide22.xml><?xml version="1.0" encoding="utf-8"?>
 <p:sld xmlns:a="http://schemas.openxmlformats.org/drawingml/2006/main" xmlns:r="http://schemas.openxmlformats.org/officeDocument/2006/relationships" xmlns:p="http://schemas.openxmlformats.org/presentationml/2006/main">
   <p:cSld>
     <p:bg>
@@ -15653,7 +16879,7 @@
           <a:p>
             <a:fld id="{846B06B1-1179-491F-A487-8E0C403F7C13}" type="slidenum">
               <a:rPr lang="fr-CA" smtClean="0"/>
-              <a:t>21</a:t>
+              <a:t>22</a:t>
             </a:fld>
             <a:endParaRPr lang="fr-CA"/>
           </a:p>
@@ -16913,7 +18139,7 @@
 </p:sld>
 </file>
 
-<file path=ppt/slides/slide22.xml><?xml version="1.0" encoding="utf-8"?>
+<file path=ppt/slides/slide23.xml><?xml version="1.0" encoding="utf-8"?>
 <p:sld xmlns:a="http://schemas.openxmlformats.org/drawingml/2006/main" xmlns:r="http://schemas.openxmlformats.org/officeDocument/2006/relationships" xmlns:p="http://schemas.openxmlformats.org/presentationml/2006/main">
   <p:cSld>
     <p:bg>
@@ -17354,7 +18580,7 @@
           <a:p>
             <a:fld id="{846B06B1-1179-491F-A487-8E0C403F7C13}" type="slidenum">
               <a:rPr lang="fr-CA" smtClean="0"/>
-              <a:t>22</a:t>
+              <a:t>23</a:t>
             </a:fld>
             <a:endParaRPr lang="fr-CA"/>
           </a:p>
@@ -17986,7 +19212,7 @@
 </p:sld>
 </file>
 
-<file path=ppt/slides/slide23.xml><?xml version="1.0" encoding="utf-8"?>
+<file path=ppt/slides/slide24.xml><?xml version="1.0" encoding="utf-8"?>
 <p:sld xmlns:a="http://schemas.openxmlformats.org/drawingml/2006/main" xmlns:r="http://schemas.openxmlformats.org/officeDocument/2006/relationships" xmlns:p="http://schemas.openxmlformats.org/presentationml/2006/main">
   <p:cSld>
     <p:bg>
@@ -18483,7 +19709,7 @@
           <a:p>
             <a:fld id="{846B06B1-1179-491F-A487-8E0C403F7C13}" type="slidenum">
               <a:rPr lang="fr-CA" smtClean="0"/>
-              <a:t>23</a:t>
+              <a:t>24</a:t>
             </a:fld>
             <a:endParaRPr lang="fr-CA"/>
           </a:p>
@@ -18898,7 +20124,7 @@
 </p:sld>
 </file>
 
-<file path=ppt/slides/slide24.xml><?xml version="1.0" encoding="utf-8"?>
+<file path=ppt/slides/slide25.xml><?xml version="1.0" encoding="utf-8"?>
 <p:sld xmlns:a="http://schemas.openxmlformats.org/drawingml/2006/main" xmlns:r="http://schemas.openxmlformats.org/officeDocument/2006/relationships" xmlns:p="http://schemas.openxmlformats.org/presentationml/2006/main">
   <p:cSld>
     <p:bg>
@@ -19476,7 +20702,7 @@
           <a:p>
             <a:fld id="{846B06B1-1179-491F-A487-8E0C403F7C13}" type="slidenum">
               <a:rPr lang="fr-CA" smtClean="0"/>
-              <a:t>24</a:t>
+              <a:t>25</a:t>
             </a:fld>
             <a:endParaRPr lang="fr-CA"/>
           </a:p>
@@ -20214,7 +21440,7 @@
 </p:sld>
 </file>
 
-<file path=ppt/slides/slide25.xml><?xml version="1.0" encoding="utf-8"?>
+<file path=ppt/slides/slide26.xml><?xml version="1.0" encoding="utf-8"?>
 <p:sld xmlns:a="http://schemas.openxmlformats.org/drawingml/2006/main" xmlns:r="http://schemas.openxmlformats.org/officeDocument/2006/relationships" xmlns:p="http://schemas.openxmlformats.org/presentationml/2006/main">
   <p:cSld>
     <p:bg>
@@ -20732,7 +21958,7 @@
           <a:p>
             <a:fld id="{846B06B1-1179-491F-A487-8E0C403F7C13}" type="slidenum">
               <a:rPr lang="fr-CA" smtClean="0"/>
-              <a:t>25</a:t>
+              <a:t>26</a:t>
             </a:fld>
             <a:endParaRPr lang="fr-CA"/>
           </a:p>
@@ -21446,7 +22672,7 @@
 </p:sld>
 </file>
 
-<file path=ppt/slides/slide26.xml><?xml version="1.0" encoding="utf-8"?>
+<file path=ppt/slides/slide27.xml><?xml version="1.0" encoding="utf-8"?>
 <p:sld xmlns:a="http://schemas.openxmlformats.org/drawingml/2006/main" xmlns:r="http://schemas.openxmlformats.org/officeDocument/2006/relationships" xmlns:p="http://schemas.openxmlformats.org/presentationml/2006/main">
   <p:cSld>
     <p:bg>
@@ -21728,7 +22954,7 @@
           <a:p>
             <a:fld id="{846B06B1-1179-491F-A487-8E0C403F7C13}" type="slidenum">
               <a:rPr lang="fr-CA" smtClean="0"/>
-              <a:t>26</a:t>
+              <a:t>27</a:t>
             </a:fld>
             <a:endParaRPr lang="fr-CA"/>
           </a:p>
@@ -22160,7 +23386,7 @@
 </p:sld>
 </file>
 
-<file path=ppt/slides/slide27.xml><?xml version="1.0" encoding="utf-8"?>
+<file path=ppt/slides/slide28.xml><?xml version="1.0" encoding="utf-8"?>
 <p:sld xmlns:a="http://schemas.openxmlformats.org/drawingml/2006/main" xmlns:r="http://schemas.openxmlformats.org/officeDocument/2006/relationships" xmlns:p="http://schemas.openxmlformats.org/presentationml/2006/main">
   <p:cSld>
     <p:bg>
@@ -22802,7 +24028,7 @@
           <a:p>
             <a:fld id="{846B06B1-1179-491F-A487-8E0C403F7C13}" type="slidenum">
               <a:rPr lang="fr-CA" smtClean="0"/>
-              <a:t>27</a:t>
+              <a:t>28</a:t>
             </a:fld>
             <a:endParaRPr lang="fr-CA"/>
           </a:p>
@@ -23364,7 +24590,7 @@
 </p:sld>
 </file>
 
-<file path=ppt/slides/slide28.xml><?xml version="1.0" encoding="utf-8"?>
+<file path=ppt/slides/slide29.xml><?xml version="1.0" encoding="utf-8"?>
 <p:sld xmlns:a="http://schemas.openxmlformats.org/drawingml/2006/main" xmlns:r="http://schemas.openxmlformats.org/officeDocument/2006/relationships" xmlns:p="http://schemas.openxmlformats.org/presentationml/2006/main">
   <p:cSld>
     <p:bg>
@@ -23808,7 +25034,7 @@
           <a:p>
             <a:fld id="{846B06B1-1179-491F-A487-8E0C403F7C13}" type="slidenum">
               <a:rPr lang="fr-CA" smtClean="0"/>
-              <a:t>28</a:t>
+              <a:t>29</a:t>
             </a:fld>
             <a:endParaRPr lang="fr-CA"/>
           </a:p>
@@ -23824,1079 +25050,6 @@
   <p:clrMapOvr>
     <a:masterClrMapping/>
   </p:clrMapOvr>
-</p:sld>
-</file>
-
-<file path=ppt/slides/slide29.xml><?xml version="1.0" encoding="utf-8"?>
-<p:sld xmlns:a="http://schemas.openxmlformats.org/drawingml/2006/main" xmlns:r="http://schemas.openxmlformats.org/officeDocument/2006/relationships" xmlns:p="http://schemas.openxmlformats.org/presentationml/2006/main">
-  <p:cSld>
-    <p:bg>
-      <p:bgPr>
-        <a:solidFill>
-          <a:srgbClr val="F5F5F5"/>
-        </a:solidFill>
-        <a:effectLst/>
-      </p:bgPr>
-    </p:bg>
-    <p:spTree>
-      <p:nvGrpSpPr>
-        <p:cNvPr id="1" name="">
-          <a:extLst>
-            <a:ext uri="{FF2B5EF4-FFF2-40B4-BE49-F238E27FC236}">
-              <a16:creationId xmlns:a16="http://schemas.microsoft.com/office/drawing/2014/main" id="{5CEED507-E097-7B00-F3A4-E611BBC1F638}"/>
-            </a:ext>
-          </a:extLst>
-        </p:cNvPr>
-        <p:cNvGrpSpPr/>
-        <p:nvPr/>
-      </p:nvGrpSpPr>
-      <p:grpSpPr>
-        <a:xfrm>
-          <a:off x="0" y="0"/>
-          <a:ext cx="0" cy="0"/>
-          <a:chOff x="0" y="0"/>
-          <a:chExt cx="0" cy="0"/>
-        </a:xfrm>
-      </p:grpSpPr>
-      <p:sp>
-        <p:nvSpPr>
-          <p:cNvPr id="2" name="Title 1">
-            <a:extLst>
-              <a:ext uri="{FF2B5EF4-FFF2-40B4-BE49-F238E27FC236}">
-                <a16:creationId xmlns:a16="http://schemas.microsoft.com/office/drawing/2014/main" id="{D99048F4-2C75-F498-3CD0-A110F9271C6D}"/>
-              </a:ext>
-            </a:extLst>
-          </p:cNvPr>
-          <p:cNvSpPr>
-            <a:spLocks noGrp="1"/>
-          </p:cNvSpPr>
-          <p:nvPr>
-            <p:ph type="title"/>
-          </p:nvPr>
-        </p:nvSpPr>
-        <p:spPr/>
-        <p:txBody>
-          <a:bodyPr>
-            <a:normAutofit/>
-          </a:bodyPr>
-          <a:lstStyle/>
-          <a:p>
-            <a:r>
-              <a:rPr lang="en-US" sz="3600" dirty="0">
-                <a:latin typeface="Arial Rounded MT Bold" panose="020F0704030504030204" pitchFamily="34" charset="0"/>
-              </a:rPr>
-              <a:t>Choix: SI-SINON </a:t>
-            </a:r>
-            <a:r>
-              <a:rPr lang="en-US" sz="3600" dirty="0" err="1">
-                <a:latin typeface="Arial Rounded MT Bold" panose="020F0704030504030204" pitchFamily="34" charset="0"/>
-              </a:rPr>
-              <a:t>SI-SINON</a:t>
-            </a:r>
-            <a:r>
-              <a:rPr lang="en-US" sz="3600" dirty="0">
-                <a:latin typeface="Arial Rounded MT Bold" panose="020F0704030504030204" pitchFamily="34" charset="0"/>
-              </a:rPr>
-              <a:t> (</a:t>
-            </a:r>
-            <a:r>
-              <a:rPr lang="en-US" sz="3600" dirty="0">
-                <a:latin typeface="Consolas" panose="020B0609020204030204" pitchFamily="49" charset="0"/>
-              </a:rPr>
-              <a:t>if-</a:t>
-            </a:r>
-            <a:r>
-              <a:rPr lang="en-US" sz="3600" dirty="0" err="1">
-                <a:latin typeface="Consolas" panose="020B0609020204030204" pitchFamily="49" charset="0"/>
-              </a:rPr>
-              <a:t>elif</a:t>
-            </a:r>
-            <a:r>
-              <a:rPr lang="en-US" sz="3600" dirty="0">
-                <a:latin typeface="Consolas" panose="020B0609020204030204" pitchFamily="49" charset="0"/>
-              </a:rPr>
-              <a:t>-else</a:t>
-            </a:r>
-            <a:r>
-              <a:rPr lang="en-US" sz="3600" dirty="0">
-                <a:latin typeface="Arial Rounded MT Bold" panose="020F0704030504030204" pitchFamily="34" charset="0"/>
-              </a:rPr>
-              <a:t>) </a:t>
-            </a:r>
-            <a:endParaRPr lang="fr-CA" sz="3600" dirty="0">
-              <a:latin typeface="Arial Rounded MT Bold" panose="020F0704030504030204" pitchFamily="34" charset="0"/>
-            </a:endParaRPr>
-          </a:p>
-        </p:txBody>
-      </p:sp>
-      <p:sp>
-        <p:nvSpPr>
-          <p:cNvPr id="3" name="Content Placeholder 2">
-            <a:extLst>
-              <a:ext uri="{FF2B5EF4-FFF2-40B4-BE49-F238E27FC236}">
-                <a16:creationId xmlns:a16="http://schemas.microsoft.com/office/drawing/2014/main" id="{9F02AA3A-E71B-559F-13C8-1F1127571700}"/>
-              </a:ext>
-            </a:extLst>
-          </p:cNvPr>
-          <p:cNvSpPr>
-            <a:spLocks noGrp="1"/>
-          </p:cNvSpPr>
-          <p:nvPr>
-            <p:ph idx="1"/>
-          </p:nvPr>
-        </p:nvSpPr>
-        <p:spPr/>
-        <p:txBody>
-          <a:bodyPr>
-            <a:normAutofit/>
-          </a:bodyPr>
-          <a:lstStyle/>
-          <a:p>
-            <a:pPr algn="just">
-              <a:lnSpc>
-                <a:spcPct val="100000"/>
-              </a:lnSpc>
-            </a:pPr>
-            <a:r>
-              <a:rPr lang="en-CA" sz="2200" dirty="0">
-                <a:latin typeface="Consolas" panose="020B0609020204030204" pitchFamily="49" charset="0"/>
-              </a:rPr>
-              <a:t>E</a:t>
-            </a:r>
-            <a:r>
-              <a:rPr lang="fr-CA" sz="2200" dirty="0">
-                <a:latin typeface="Consolas" panose="020B0609020204030204" pitchFamily="49" charset="0"/>
-              </a:rPr>
-              <a:t>x</a:t>
-            </a:r>
-            <a:r>
-              <a:rPr lang="en-US" sz="2200" dirty="0" err="1">
-                <a:latin typeface="Consolas" panose="020B0609020204030204" pitchFamily="49" charset="0"/>
-              </a:rPr>
-              <a:t>écuter</a:t>
-            </a:r>
-            <a:r>
-              <a:rPr lang="en-US" sz="2200" dirty="0">
-                <a:latin typeface="Consolas" panose="020B0609020204030204" pitchFamily="49" charset="0"/>
-              </a:rPr>
-              <a:t> du code </a:t>
-            </a:r>
-            <a:r>
-              <a:rPr lang="en-US" sz="2200" b="1" dirty="0" err="1">
-                <a:latin typeface="Consolas" panose="020B0609020204030204" pitchFamily="49" charset="0"/>
-              </a:rPr>
-              <a:t>si</a:t>
-            </a:r>
-            <a:r>
-              <a:rPr lang="en-US" sz="2200" b="1" dirty="0">
-                <a:latin typeface="Consolas" panose="020B0609020204030204" pitchFamily="49" charset="0"/>
-              </a:rPr>
-              <a:t> </a:t>
-            </a:r>
-            <a:r>
-              <a:rPr lang="en-US" sz="2200" b="1" dirty="0" err="1">
-                <a:latin typeface="Consolas" panose="020B0609020204030204" pitchFamily="49" charset="0"/>
-              </a:rPr>
-              <a:t>une</a:t>
-            </a:r>
-            <a:r>
-              <a:rPr lang="en-US" sz="2200" b="1" dirty="0">
-                <a:latin typeface="Consolas" panose="020B0609020204030204" pitchFamily="49" charset="0"/>
-              </a:rPr>
-              <a:t> condition bool</a:t>
-            </a:r>
-            <a:r>
-              <a:rPr lang="fr-CA" sz="2200" b="1" dirty="0" err="1">
-                <a:latin typeface="Consolas" panose="020B0609020204030204" pitchFamily="49" charset="0"/>
-              </a:rPr>
-              <a:t>éenne</a:t>
-            </a:r>
-            <a:r>
-              <a:rPr lang="en-US" sz="2200" b="1" dirty="0">
-                <a:latin typeface="Consolas" panose="020B0609020204030204" pitchFamily="49" charset="0"/>
-              </a:rPr>
-              <a:t> est </a:t>
-            </a:r>
-            <a:r>
-              <a:rPr lang="en-US" sz="2200" b="1" dirty="0" err="1">
-                <a:latin typeface="Consolas" panose="020B0609020204030204" pitchFamily="49" charset="0"/>
-              </a:rPr>
-              <a:t>vraie</a:t>
-            </a:r>
-            <a:endParaRPr lang="en-US" sz="2200" b="1" dirty="0">
-              <a:latin typeface="Consolas" panose="020B0609020204030204" pitchFamily="49" charset="0"/>
-            </a:endParaRPr>
-          </a:p>
-          <a:p>
-            <a:pPr lvl="1" algn="just">
-              <a:lnSpc>
-                <a:spcPct val="100000"/>
-              </a:lnSpc>
-            </a:pPr>
-            <a:r>
-              <a:rPr lang="en-US" sz="1800" dirty="0" err="1">
-                <a:latin typeface="Consolas" panose="020B0609020204030204" pitchFamily="49" charset="0"/>
-              </a:rPr>
-              <a:t>Implique</a:t>
-            </a:r>
-            <a:r>
-              <a:rPr lang="en-US" sz="1800" dirty="0">
-                <a:latin typeface="Consolas" panose="020B0609020204030204" pitchFamily="49" charset="0"/>
-              </a:rPr>
-              <a:t> </a:t>
-            </a:r>
-            <a:r>
-              <a:rPr lang="en-US" sz="1800" dirty="0" err="1">
-                <a:latin typeface="Consolas" panose="020B0609020204030204" pitchFamily="49" charset="0"/>
-              </a:rPr>
-              <a:t>généralement</a:t>
-            </a:r>
-            <a:r>
-              <a:rPr lang="en-US" sz="1800" dirty="0">
-                <a:latin typeface="Consolas" panose="020B0609020204030204" pitchFamily="49" charset="0"/>
-              </a:rPr>
-              <a:t> les </a:t>
-            </a:r>
-            <a:r>
-              <a:rPr lang="en-US" sz="1800" b="1" dirty="0" err="1">
-                <a:latin typeface="Consolas" panose="020B0609020204030204" pitchFamily="49" charset="0"/>
-              </a:rPr>
-              <a:t>opérateurs</a:t>
-            </a:r>
-            <a:r>
-              <a:rPr lang="en-US" sz="1800" b="1" dirty="0">
-                <a:latin typeface="Consolas" panose="020B0609020204030204" pitchFamily="49" charset="0"/>
-              </a:rPr>
-              <a:t> de </a:t>
-            </a:r>
-            <a:r>
-              <a:rPr lang="en-US" sz="1800" b="1" dirty="0" err="1">
-                <a:latin typeface="Consolas" panose="020B0609020204030204" pitchFamily="49" charset="0"/>
-              </a:rPr>
-              <a:t>comparaison</a:t>
-            </a:r>
-            <a:r>
-              <a:rPr lang="en-US" sz="1800" dirty="0">
-                <a:latin typeface="Consolas" panose="020B0609020204030204" pitchFamily="49" charset="0"/>
-              </a:rPr>
-              <a:t> et/</a:t>
-            </a:r>
-            <a:r>
-              <a:rPr lang="en-US" sz="1800" dirty="0" err="1">
-                <a:latin typeface="Consolas" panose="020B0609020204030204" pitchFamily="49" charset="0"/>
-              </a:rPr>
-              <a:t>ou</a:t>
-            </a:r>
-            <a:r>
-              <a:rPr lang="en-US" sz="1800" dirty="0">
-                <a:latin typeface="Consolas" panose="020B0609020204030204" pitchFamily="49" charset="0"/>
-              </a:rPr>
-              <a:t> </a:t>
-            </a:r>
-            <a:r>
-              <a:rPr lang="en-US" sz="1800" b="1" dirty="0" err="1">
-                <a:latin typeface="Consolas" panose="020B0609020204030204" pitchFamily="49" charset="0"/>
-              </a:rPr>
-              <a:t>logiques</a:t>
-            </a:r>
-            <a:endParaRPr lang="en-US" sz="1800" b="1" dirty="0">
-              <a:latin typeface="Consolas" panose="020B0609020204030204" pitchFamily="49" charset="0"/>
-            </a:endParaRPr>
-          </a:p>
-        </p:txBody>
-      </p:sp>
-      <p:sp>
-        <p:nvSpPr>
-          <p:cNvPr id="5" name="Slide Number Placeholder 4">
-            <a:extLst>
-              <a:ext uri="{FF2B5EF4-FFF2-40B4-BE49-F238E27FC236}">
-                <a16:creationId xmlns:a16="http://schemas.microsoft.com/office/drawing/2014/main" id="{BFBB4537-5FEB-352D-F1CE-F0BFF9A61AC0}"/>
-              </a:ext>
-            </a:extLst>
-          </p:cNvPr>
-          <p:cNvSpPr>
-            <a:spLocks noGrp="1"/>
-          </p:cNvSpPr>
-          <p:nvPr>
-            <p:ph type="sldNum" sz="quarter" idx="12"/>
-          </p:nvPr>
-        </p:nvSpPr>
-        <p:spPr/>
-        <p:txBody>
-          <a:bodyPr/>
-          <a:lstStyle/>
-          <a:p>
-            <a:fld id="{846B06B1-1179-491F-A487-8E0C403F7C13}" type="slidenum">
-              <a:rPr lang="fr-CA" smtClean="0"/>
-              <a:t>29</a:t>
-            </a:fld>
-            <a:endParaRPr lang="fr-CA"/>
-          </a:p>
-        </p:txBody>
-      </p:sp>
-      <p:sp>
-        <p:nvSpPr>
-          <p:cNvPr id="7" name="TextBox 6">
-            <a:extLst>
-              <a:ext uri="{FF2B5EF4-FFF2-40B4-BE49-F238E27FC236}">
-                <a16:creationId xmlns:a16="http://schemas.microsoft.com/office/drawing/2014/main" id="{3CDE5BC8-A607-67FF-CE61-7F2C4B64D8FD}"/>
-              </a:ext>
-            </a:extLst>
-          </p:cNvPr>
-          <p:cNvSpPr txBox="1"/>
-          <p:nvPr/>
-        </p:nvSpPr>
-        <p:spPr>
-          <a:xfrm>
-            <a:off x="838200" y="2921248"/>
-            <a:ext cx="3240000" cy="1200329"/>
-          </a:xfrm>
-          <a:prstGeom prst="rect">
-            <a:avLst/>
-          </a:prstGeom>
-          <a:noFill/>
-        </p:spPr>
-        <p:txBody>
-          <a:bodyPr wrap="square">
-            <a:spAutoFit/>
-          </a:bodyPr>
-          <a:lstStyle/>
-          <a:p>
-            <a:pPr algn="just"/>
-            <a:r>
-              <a:rPr lang="en-CA" b="1" dirty="0">
-                <a:latin typeface="Consolas" panose="020B0609020204030204" pitchFamily="49" charset="0"/>
-              </a:rPr>
-              <a:t>&gt;&gt;&gt; </a:t>
-            </a:r>
-            <a:r>
-              <a:rPr lang="en-CA" b="1" dirty="0" err="1">
-                <a:latin typeface="Consolas" panose="020B0609020204030204" pitchFamily="49" charset="0"/>
-              </a:rPr>
-              <a:t>valeur</a:t>
-            </a:r>
-            <a:r>
-              <a:rPr lang="en-CA" b="1" dirty="0">
-                <a:latin typeface="Consolas" panose="020B0609020204030204" pitchFamily="49" charset="0"/>
-              </a:rPr>
-              <a:t> = 1</a:t>
-            </a:r>
-          </a:p>
-          <a:p>
-            <a:pPr algn="just"/>
-            <a:r>
-              <a:rPr lang="en-CA" b="1" dirty="0">
-                <a:latin typeface="Consolas" panose="020B0609020204030204" pitchFamily="49" charset="0"/>
-              </a:rPr>
-              <a:t>&gt;&gt;&gt; </a:t>
-            </a:r>
-            <a:r>
-              <a:rPr lang="en-CA" b="1" dirty="0">
-                <a:solidFill>
-                  <a:srgbClr val="FF2500"/>
-                </a:solidFill>
-                <a:latin typeface="Consolas" panose="020B0609020204030204" pitchFamily="49" charset="0"/>
-              </a:rPr>
-              <a:t>if</a:t>
-            </a:r>
-            <a:r>
-              <a:rPr lang="en-CA" b="1" dirty="0">
-                <a:latin typeface="Consolas" panose="020B0609020204030204" pitchFamily="49" charset="0"/>
-              </a:rPr>
-              <a:t> </a:t>
-            </a:r>
-            <a:r>
-              <a:rPr lang="en-CA" b="1" dirty="0" err="1">
-                <a:latin typeface="Consolas" panose="020B0609020204030204" pitchFamily="49" charset="0"/>
-              </a:rPr>
-              <a:t>valeur</a:t>
-            </a:r>
-            <a:r>
-              <a:rPr lang="en-CA" b="1" dirty="0">
-                <a:latin typeface="Consolas" panose="020B0609020204030204" pitchFamily="49" charset="0"/>
-              </a:rPr>
-              <a:t> % 2 == 1:</a:t>
-            </a:r>
-          </a:p>
-          <a:p>
-            <a:pPr algn="just"/>
-            <a:r>
-              <a:rPr lang="en-CA" b="1" dirty="0">
-                <a:latin typeface="Consolas" panose="020B0609020204030204" pitchFamily="49" charset="0"/>
-              </a:rPr>
-              <a:t>...   print("Impair")</a:t>
-            </a:r>
-          </a:p>
-          <a:p>
-            <a:pPr algn="just"/>
-            <a:r>
-              <a:rPr lang="en-CA" dirty="0">
-                <a:solidFill>
-                  <a:schemeClr val="bg1">
-                    <a:lumMod val="50000"/>
-                  </a:schemeClr>
-                </a:solidFill>
-                <a:latin typeface="Consolas" panose="020B0609020204030204" pitchFamily="49" charset="0"/>
-              </a:rPr>
-              <a:t>Impair</a:t>
-            </a:r>
-          </a:p>
-        </p:txBody>
-      </p:sp>
-      <p:sp>
-        <p:nvSpPr>
-          <p:cNvPr id="8" name="TextBox 7">
-            <a:extLst>
-              <a:ext uri="{FF2B5EF4-FFF2-40B4-BE49-F238E27FC236}">
-                <a16:creationId xmlns:a16="http://schemas.microsoft.com/office/drawing/2014/main" id="{549273C0-9324-FD1F-06B2-8803B8C48585}"/>
-              </a:ext>
-            </a:extLst>
-          </p:cNvPr>
-          <p:cNvSpPr txBox="1"/>
-          <p:nvPr/>
-        </p:nvSpPr>
-        <p:spPr>
-          <a:xfrm>
-            <a:off x="4078199" y="2921248"/>
-            <a:ext cx="3548285" cy="1754326"/>
-          </a:xfrm>
-          <a:prstGeom prst="rect">
-            <a:avLst/>
-          </a:prstGeom>
-          <a:noFill/>
-        </p:spPr>
-        <p:txBody>
-          <a:bodyPr wrap="square">
-            <a:spAutoFit/>
-          </a:bodyPr>
-          <a:lstStyle/>
-          <a:p>
-            <a:pPr algn="just"/>
-            <a:r>
-              <a:rPr lang="en-CA" b="1" dirty="0">
-                <a:latin typeface="Consolas" panose="020B0609020204030204" pitchFamily="49" charset="0"/>
-              </a:rPr>
-              <a:t>&gt;&gt;&gt; </a:t>
-            </a:r>
-            <a:r>
-              <a:rPr lang="en-CA" b="1" dirty="0" err="1">
-                <a:latin typeface="Consolas" panose="020B0609020204030204" pitchFamily="49" charset="0"/>
-              </a:rPr>
-              <a:t>valeur</a:t>
-            </a:r>
-            <a:r>
-              <a:rPr lang="en-CA" b="1" dirty="0">
-                <a:latin typeface="Consolas" panose="020B0609020204030204" pitchFamily="49" charset="0"/>
-              </a:rPr>
-              <a:t> = 10</a:t>
-            </a:r>
-          </a:p>
-          <a:p>
-            <a:pPr algn="just"/>
-            <a:r>
-              <a:rPr lang="en-CA" b="1" dirty="0">
-                <a:latin typeface="Consolas" panose="020B0609020204030204" pitchFamily="49" charset="0"/>
-              </a:rPr>
-              <a:t>&gt;&gt;&gt; if </a:t>
-            </a:r>
-            <a:r>
-              <a:rPr lang="en-CA" b="1" dirty="0" err="1">
-                <a:latin typeface="Consolas" panose="020B0609020204030204" pitchFamily="49" charset="0"/>
-              </a:rPr>
-              <a:t>valeur</a:t>
-            </a:r>
-            <a:r>
-              <a:rPr lang="en-CA" b="1" dirty="0">
-                <a:latin typeface="Consolas" panose="020B0609020204030204" pitchFamily="49" charset="0"/>
-              </a:rPr>
-              <a:t> % 2 == 1:</a:t>
-            </a:r>
-          </a:p>
-          <a:p>
-            <a:pPr algn="just"/>
-            <a:r>
-              <a:rPr lang="en-CA" b="1" dirty="0">
-                <a:latin typeface="Consolas" panose="020B0609020204030204" pitchFamily="49" charset="0"/>
-              </a:rPr>
-              <a:t>...   print("Pair")</a:t>
-            </a:r>
-          </a:p>
-          <a:p>
-            <a:pPr algn="just"/>
-            <a:r>
-              <a:rPr lang="en-CA" b="1" dirty="0">
-                <a:latin typeface="Consolas" panose="020B0609020204030204" pitchFamily="49" charset="0"/>
-              </a:rPr>
-              <a:t>... </a:t>
-            </a:r>
-            <a:r>
-              <a:rPr lang="en-CA" b="1" dirty="0" err="1">
-                <a:solidFill>
-                  <a:srgbClr val="FF2500"/>
-                </a:solidFill>
-                <a:latin typeface="Consolas" panose="020B0609020204030204" pitchFamily="49" charset="0"/>
-              </a:rPr>
-              <a:t>elif</a:t>
-            </a:r>
-            <a:r>
-              <a:rPr lang="en-CA" b="1" dirty="0">
-                <a:latin typeface="Consolas" panose="020B0609020204030204" pitchFamily="49" charset="0"/>
-              </a:rPr>
-              <a:t> </a:t>
-            </a:r>
-            <a:r>
-              <a:rPr lang="en-CA" b="1" dirty="0" err="1">
-                <a:latin typeface="Consolas" panose="020B0609020204030204" pitchFamily="49" charset="0"/>
-              </a:rPr>
-              <a:t>valeur</a:t>
-            </a:r>
-            <a:r>
-              <a:rPr lang="en-CA" b="1" dirty="0">
-                <a:latin typeface="Consolas" panose="020B0609020204030204" pitchFamily="49" charset="0"/>
-              </a:rPr>
-              <a:t> % 2 == 0:</a:t>
-            </a:r>
-          </a:p>
-          <a:p>
-            <a:pPr algn="just"/>
-            <a:r>
-              <a:rPr lang="en-CA" b="1" dirty="0">
-                <a:latin typeface="Consolas" panose="020B0609020204030204" pitchFamily="49" charset="0"/>
-              </a:rPr>
-              <a:t>...   print("Impair")</a:t>
-            </a:r>
-          </a:p>
-          <a:p>
-            <a:pPr algn="just"/>
-            <a:r>
-              <a:rPr lang="en-CA" dirty="0">
-                <a:solidFill>
-                  <a:schemeClr val="bg1">
-                    <a:lumMod val="50000"/>
-                  </a:schemeClr>
-                </a:solidFill>
-                <a:latin typeface="Consolas" panose="020B0609020204030204" pitchFamily="49" charset="0"/>
-              </a:rPr>
-              <a:t>Pair</a:t>
-            </a:r>
-          </a:p>
-        </p:txBody>
-      </p:sp>
-      <p:sp>
-        <p:nvSpPr>
-          <p:cNvPr id="9" name="TextBox 8">
-            <a:extLst>
-              <a:ext uri="{FF2B5EF4-FFF2-40B4-BE49-F238E27FC236}">
-                <a16:creationId xmlns:a16="http://schemas.microsoft.com/office/drawing/2014/main" id="{3D11E67C-C431-DFC0-79E4-BF393002DF38}"/>
-              </a:ext>
-            </a:extLst>
-          </p:cNvPr>
-          <p:cNvSpPr txBox="1"/>
-          <p:nvPr/>
-        </p:nvSpPr>
-        <p:spPr>
-          <a:xfrm>
-            <a:off x="7626484" y="2921248"/>
-            <a:ext cx="3548285" cy="2308324"/>
-          </a:xfrm>
-          <a:prstGeom prst="rect">
-            <a:avLst/>
-          </a:prstGeom>
-          <a:noFill/>
-        </p:spPr>
-        <p:txBody>
-          <a:bodyPr wrap="square">
-            <a:spAutoFit/>
-          </a:bodyPr>
-          <a:lstStyle/>
-          <a:p>
-            <a:pPr algn="just"/>
-            <a:r>
-              <a:rPr lang="en-CA" b="1" dirty="0">
-                <a:latin typeface="Consolas" panose="020B0609020204030204" pitchFamily="49" charset="0"/>
-              </a:rPr>
-              <a:t>&gt;&gt;&gt; </a:t>
-            </a:r>
-            <a:r>
-              <a:rPr lang="en-CA" b="1" dirty="0" err="1">
-                <a:latin typeface="Consolas" panose="020B0609020204030204" pitchFamily="49" charset="0"/>
-              </a:rPr>
-              <a:t>valeur</a:t>
-            </a:r>
-            <a:r>
-              <a:rPr lang="en-CA" b="1" dirty="0">
-                <a:latin typeface="Consolas" panose="020B0609020204030204" pitchFamily="49" charset="0"/>
-              </a:rPr>
-              <a:t> = 1.5</a:t>
-            </a:r>
-          </a:p>
-          <a:p>
-            <a:pPr algn="just"/>
-            <a:r>
-              <a:rPr lang="en-CA" b="1" dirty="0">
-                <a:latin typeface="Consolas" panose="020B0609020204030204" pitchFamily="49" charset="0"/>
-              </a:rPr>
-              <a:t>&gt;&gt;&gt; if </a:t>
-            </a:r>
-            <a:r>
-              <a:rPr lang="en-CA" b="1" dirty="0" err="1">
-                <a:latin typeface="Consolas" panose="020B0609020204030204" pitchFamily="49" charset="0"/>
-              </a:rPr>
-              <a:t>valeur</a:t>
-            </a:r>
-            <a:r>
-              <a:rPr lang="en-CA" b="1" dirty="0">
-                <a:latin typeface="Consolas" panose="020B0609020204030204" pitchFamily="49" charset="0"/>
-              </a:rPr>
-              <a:t> % 2 == 1:</a:t>
-            </a:r>
-          </a:p>
-          <a:p>
-            <a:pPr algn="just"/>
-            <a:r>
-              <a:rPr lang="en-CA" b="1" dirty="0">
-                <a:latin typeface="Consolas" panose="020B0609020204030204" pitchFamily="49" charset="0"/>
-              </a:rPr>
-              <a:t>...   print("Pair")</a:t>
-            </a:r>
-          </a:p>
-          <a:p>
-            <a:pPr algn="just"/>
-            <a:r>
-              <a:rPr lang="en-CA" b="1" dirty="0">
-                <a:latin typeface="Consolas" panose="020B0609020204030204" pitchFamily="49" charset="0"/>
-              </a:rPr>
-              <a:t>... </a:t>
-            </a:r>
-            <a:r>
-              <a:rPr lang="en-CA" b="1" dirty="0" err="1">
-                <a:latin typeface="Consolas" panose="020B0609020204030204" pitchFamily="49" charset="0"/>
-              </a:rPr>
-              <a:t>elif</a:t>
-            </a:r>
-            <a:r>
-              <a:rPr lang="en-CA" b="1" dirty="0">
-                <a:latin typeface="Consolas" panose="020B0609020204030204" pitchFamily="49" charset="0"/>
-              </a:rPr>
-              <a:t> </a:t>
-            </a:r>
-            <a:r>
-              <a:rPr lang="en-CA" b="1" dirty="0" err="1">
-                <a:latin typeface="Consolas" panose="020B0609020204030204" pitchFamily="49" charset="0"/>
-              </a:rPr>
-              <a:t>valeur</a:t>
-            </a:r>
-            <a:r>
-              <a:rPr lang="en-CA" b="1" dirty="0">
-                <a:latin typeface="Consolas" panose="020B0609020204030204" pitchFamily="49" charset="0"/>
-              </a:rPr>
-              <a:t> % 2 == 0:</a:t>
-            </a:r>
-          </a:p>
-          <a:p>
-            <a:pPr algn="just"/>
-            <a:r>
-              <a:rPr lang="en-CA" b="1" dirty="0">
-                <a:latin typeface="Consolas" panose="020B0609020204030204" pitchFamily="49" charset="0"/>
-              </a:rPr>
-              <a:t>...   print("Impair")</a:t>
-            </a:r>
-          </a:p>
-          <a:p>
-            <a:pPr algn="just"/>
-            <a:r>
-              <a:rPr lang="en-CA" b="1" dirty="0">
-                <a:latin typeface="Consolas" panose="020B0609020204030204" pitchFamily="49" charset="0"/>
-              </a:rPr>
-              <a:t>... </a:t>
-            </a:r>
-            <a:r>
-              <a:rPr lang="en-CA" b="1" dirty="0">
-                <a:solidFill>
-                  <a:srgbClr val="FF2500"/>
-                </a:solidFill>
-                <a:latin typeface="Consolas" panose="020B0609020204030204" pitchFamily="49" charset="0"/>
-              </a:rPr>
-              <a:t>else</a:t>
-            </a:r>
-            <a:r>
-              <a:rPr lang="en-CA" b="1" dirty="0">
-                <a:latin typeface="Consolas" panose="020B0609020204030204" pitchFamily="49" charset="0"/>
-              </a:rPr>
-              <a:t>:</a:t>
-            </a:r>
-          </a:p>
-          <a:p>
-            <a:pPr algn="just"/>
-            <a:r>
-              <a:rPr lang="en-CA" b="1" dirty="0">
-                <a:latin typeface="Consolas" panose="020B0609020204030204" pitchFamily="49" charset="0"/>
-              </a:rPr>
-              <a:t>...   print("</a:t>
-            </a:r>
-            <a:r>
-              <a:rPr lang="en-CA" b="1" dirty="0" err="1">
-                <a:latin typeface="Consolas" panose="020B0609020204030204" pitchFamily="49" charset="0"/>
-              </a:rPr>
-              <a:t>Autre</a:t>
-            </a:r>
-            <a:r>
-              <a:rPr lang="en-CA" b="1" dirty="0">
-                <a:latin typeface="Consolas" panose="020B0609020204030204" pitchFamily="49" charset="0"/>
-              </a:rPr>
-              <a:t>")</a:t>
-            </a:r>
-          </a:p>
-          <a:p>
-            <a:pPr algn="just"/>
-            <a:r>
-              <a:rPr lang="en-CA" dirty="0" err="1">
-                <a:solidFill>
-                  <a:schemeClr val="bg1">
-                    <a:lumMod val="50000"/>
-                  </a:schemeClr>
-                </a:solidFill>
-                <a:latin typeface="Consolas" panose="020B0609020204030204" pitchFamily="49" charset="0"/>
-              </a:rPr>
-              <a:t>Autre</a:t>
-            </a:r>
-            <a:endParaRPr lang="en-CA" dirty="0">
-              <a:solidFill>
-                <a:schemeClr val="bg1">
-                  <a:lumMod val="50000"/>
-                </a:schemeClr>
-              </a:solidFill>
-              <a:latin typeface="Consolas" panose="020B0609020204030204" pitchFamily="49" charset="0"/>
-            </a:endParaRPr>
-          </a:p>
-        </p:txBody>
-      </p:sp>
-    </p:spTree>
-    <p:extLst>
-      <p:ext uri="{BB962C8B-B14F-4D97-AF65-F5344CB8AC3E}">
-        <p14:creationId xmlns:p14="http://schemas.microsoft.com/office/powerpoint/2010/main" val="331786654"/>
-      </p:ext>
-    </p:extLst>
-  </p:cSld>
-  <p:clrMapOvr>
-    <a:masterClrMapping/>
-  </p:clrMapOvr>
-  <p:timing>
-    <p:tnLst>
-      <p:par>
-        <p:cTn id="1" dur="indefinite" restart="never" nodeType="tmRoot">
-          <p:childTnLst>
-            <p:seq concurrent="1" nextAc="seek">
-              <p:cTn id="2" dur="indefinite" nodeType="mainSeq">
-                <p:childTnLst>
-                  <p:par>
-                    <p:cTn id="3" fill="hold">
-                      <p:stCondLst>
-                        <p:cond delay="indefinite"/>
-                      </p:stCondLst>
-                      <p:childTnLst>
-                        <p:par>
-                          <p:cTn id="4" fill="hold">
-                            <p:stCondLst>
-                              <p:cond delay="0"/>
-                            </p:stCondLst>
-                            <p:childTnLst>
-                              <p:par>
-                                <p:cTn id="5" presetID="10" presetClass="entr" presetSubtype="0" fill="hold" nodeType="clickEffect">
-                                  <p:stCondLst>
-                                    <p:cond delay="0"/>
-                                  </p:stCondLst>
-                                  <p:childTnLst>
-                                    <p:set>
-                                      <p:cBhvr>
-                                        <p:cTn id="6" dur="1" fill="hold">
-                                          <p:stCondLst>
-                                            <p:cond delay="0"/>
-                                          </p:stCondLst>
-                                        </p:cTn>
-                                        <p:tgtEl>
-                                          <p:spTgt spid="3">
-                                            <p:txEl>
-                                              <p:pRg st="0" end="0"/>
-                                            </p:txEl>
-                                          </p:spTgt>
-                                        </p:tgtEl>
-                                        <p:attrNameLst>
-                                          <p:attrName>style.visibility</p:attrName>
-                                        </p:attrNameLst>
-                                      </p:cBhvr>
-                                      <p:to>
-                                        <p:strVal val="visible"/>
-                                      </p:to>
-                                    </p:set>
-                                    <p:animEffect transition="in" filter="fade">
-                                      <p:cBhvr>
-                                        <p:cTn id="7" dur="500"/>
-                                        <p:tgtEl>
-                                          <p:spTgt spid="3">
-                                            <p:txEl>
-                                              <p:pRg st="0" end="0"/>
-                                            </p:txEl>
-                                          </p:spTgt>
-                                        </p:tgtEl>
-                                      </p:cBhvr>
-                                    </p:animEffect>
-                                  </p:childTnLst>
-                                </p:cTn>
-                              </p:par>
-                            </p:childTnLst>
-                          </p:cTn>
-                        </p:par>
-                      </p:childTnLst>
-                    </p:cTn>
-                  </p:par>
-                  <p:par>
-                    <p:cTn id="8" fill="hold">
-                      <p:stCondLst>
-                        <p:cond delay="indefinite"/>
-                      </p:stCondLst>
-                      <p:childTnLst>
-                        <p:par>
-                          <p:cTn id="9" fill="hold">
-                            <p:stCondLst>
-                              <p:cond delay="0"/>
-                            </p:stCondLst>
-                            <p:childTnLst>
-                              <p:par>
-                                <p:cTn id="10" presetID="10" presetClass="entr" presetSubtype="0" fill="hold" nodeType="clickEffect">
-                                  <p:stCondLst>
-                                    <p:cond delay="0"/>
-                                  </p:stCondLst>
-                                  <p:childTnLst>
-                                    <p:set>
-                                      <p:cBhvr>
-                                        <p:cTn id="11" dur="1" fill="hold">
-                                          <p:stCondLst>
-                                            <p:cond delay="0"/>
-                                          </p:stCondLst>
-                                        </p:cTn>
-                                        <p:tgtEl>
-                                          <p:spTgt spid="3">
-                                            <p:txEl>
-                                              <p:pRg st="1" end="1"/>
-                                            </p:txEl>
-                                          </p:spTgt>
-                                        </p:tgtEl>
-                                        <p:attrNameLst>
-                                          <p:attrName>style.visibility</p:attrName>
-                                        </p:attrNameLst>
-                                      </p:cBhvr>
-                                      <p:to>
-                                        <p:strVal val="visible"/>
-                                      </p:to>
-                                    </p:set>
-                                    <p:animEffect transition="in" filter="fade">
-                                      <p:cBhvr>
-                                        <p:cTn id="12" dur="500"/>
-                                        <p:tgtEl>
-                                          <p:spTgt spid="3">
-                                            <p:txEl>
-                                              <p:pRg st="1" end="1"/>
-                                            </p:txEl>
-                                          </p:spTgt>
-                                        </p:tgtEl>
-                                      </p:cBhvr>
-                                    </p:animEffect>
-                                  </p:childTnLst>
-                                </p:cTn>
-                              </p:par>
-                            </p:childTnLst>
-                          </p:cTn>
-                        </p:par>
-                      </p:childTnLst>
-                    </p:cTn>
-                  </p:par>
-                  <p:par>
-                    <p:cTn id="13" fill="hold">
-                      <p:stCondLst>
-                        <p:cond delay="indefinite"/>
-                      </p:stCondLst>
-                      <p:childTnLst>
-                        <p:par>
-                          <p:cTn id="14" fill="hold">
-                            <p:stCondLst>
-                              <p:cond delay="0"/>
-                            </p:stCondLst>
-                            <p:childTnLst>
-                              <p:par>
-                                <p:cTn id="15" presetID="10" presetClass="entr" presetSubtype="0" fill="hold" grpId="0" nodeType="clickEffect">
-                                  <p:stCondLst>
-                                    <p:cond delay="0"/>
-                                  </p:stCondLst>
-                                  <p:childTnLst>
-                                    <p:set>
-                                      <p:cBhvr>
-                                        <p:cTn id="16" dur="1" fill="hold">
-                                          <p:stCondLst>
-                                            <p:cond delay="0"/>
-                                          </p:stCondLst>
-                                        </p:cTn>
-                                        <p:tgtEl>
-                                          <p:spTgt spid="7"/>
-                                        </p:tgtEl>
-                                        <p:attrNameLst>
-                                          <p:attrName>style.visibility</p:attrName>
-                                        </p:attrNameLst>
-                                      </p:cBhvr>
-                                      <p:to>
-                                        <p:strVal val="visible"/>
-                                      </p:to>
-                                    </p:set>
-                                    <p:animEffect transition="in" filter="fade">
-                                      <p:cBhvr>
-                                        <p:cTn id="17" dur="500"/>
-                                        <p:tgtEl>
-                                          <p:spTgt spid="7"/>
-                                        </p:tgtEl>
-                                      </p:cBhvr>
-                                    </p:animEffect>
-                                  </p:childTnLst>
-                                </p:cTn>
-                              </p:par>
-                            </p:childTnLst>
-                          </p:cTn>
-                        </p:par>
-                      </p:childTnLst>
-                    </p:cTn>
-                  </p:par>
-                  <p:par>
-                    <p:cTn id="18" fill="hold">
-                      <p:stCondLst>
-                        <p:cond delay="indefinite"/>
-                      </p:stCondLst>
-                      <p:childTnLst>
-                        <p:par>
-                          <p:cTn id="19" fill="hold">
-                            <p:stCondLst>
-                              <p:cond delay="0"/>
-                            </p:stCondLst>
-                            <p:childTnLst>
-                              <p:par>
-                                <p:cTn id="20" presetID="10" presetClass="entr" presetSubtype="0" fill="hold" grpId="0" nodeType="clickEffect">
-                                  <p:stCondLst>
-                                    <p:cond delay="0"/>
-                                  </p:stCondLst>
-                                  <p:childTnLst>
-                                    <p:set>
-                                      <p:cBhvr>
-                                        <p:cTn id="21" dur="1" fill="hold">
-                                          <p:stCondLst>
-                                            <p:cond delay="0"/>
-                                          </p:stCondLst>
-                                        </p:cTn>
-                                        <p:tgtEl>
-                                          <p:spTgt spid="8"/>
-                                        </p:tgtEl>
-                                        <p:attrNameLst>
-                                          <p:attrName>style.visibility</p:attrName>
-                                        </p:attrNameLst>
-                                      </p:cBhvr>
-                                      <p:to>
-                                        <p:strVal val="visible"/>
-                                      </p:to>
-                                    </p:set>
-                                    <p:animEffect transition="in" filter="fade">
-                                      <p:cBhvr>
-                                        <p:cTn id="22" dur="500"/>
-                                        <p:tgtEl>
-                                          <p:spTgt spid="8"/>
-                                        </p:tgtEl>
-                                      </p:cBhvr>
-                                    </p:animEffect>
-                                  </p:childTnLst>
-                                </p:cTn>
-                              </p:par>
-                            </p:childTnLst>
-                          </p:cTn>
-                        </p:par>
-                      </p:childTnLst>
-                    </p:cTn>
-                  </p:par>
-                  <p:par>
-                    <p:cTn id="23" fill="hold">
-                      <p:stCondLst>
-                        <p:cond delay="indefinite"/>
-                      </p:stCondLst>
-                      <p:childTnLst>
-                        <p:par>
-                          <p:cTn id="24" fill="hold">
-                            <p:stCondLst>
-                              <p:cond delay="0"/>
-                            </p:stCondLst>
-                            <p:childTnLst>
-                              <p:par>
-                                <p:cTn id="25" presetID="10" presetClass="entr" presetSubtype="0" fill="hold" grpId="0" nodeType="clickEffect">
-                                  <p:stCondLst>
-                                    <p:cond delay="0"/>
-                                  </p:stCondLst>
-                                  <p:childTnLst>
-                                    <p:set>
-                                      <p:cBhvr>
-                                        <p:cTn id="26" dur="1" fill="hold">
-                                          <p:stCondLst>
-                                            <p:cond delay="0"/>
-                                          </p:stCondLst>
-                                        </p:cTn>
-                                        <p:tgtEl>
-                                          <p:spTgt spid="9"/>
-                                        </p:tgtEl>
-                                        <p:attrNameLst>
-                                          <p:attrName>style.visibility</p:attrName>
-                                        </p:attrNameLst>
-                                      </p:cBhvr>
-                                      <p:to>
-                                        <p:strVal val="visible"/>
-                                      </p:to>
-                                    </p:set>
-                                    <p:animEffect transition="in" filter="fade">
-                                      <p:cBhvr>
-                                        <p:cTn id="27" dur="500"/>
-                                        <p:tgtEl>
-                                          <p:spTgt spid="9"/>
-                                        </p:tgtEl>
-                                      </p:cBhvr>
-                                    </p:animEffect>
-                                  </p:childTnLst>
-                                </p:cTn>
-                              </p:par>
-                            </p:childTnLst>
-                          </p:cTn>
-                        </p:par>
-                      </p:childTnLst>
-                    </p:cTn>
-                  </p:par>
-                </p:childTnLst>
-              </p:cTn>
-              <p:prevCondLst>
-                <p:cond evt="onPrev" delay="0">
-                  <p:tgtEl>
-                    <p:sldTgt/>
-                  </p:tgtEl>
-                </p:cond>
-              </p:prevCondLst>
-              <p:nextCondLst>
-                <p:cond evt="onNext" delay="0">
-                  <p:tgtEl>
-                    <p:sldTgt/>
-                  </p:tgtEl>
-                </p:cond>
-              </p:nextCondLst>
-            </p:seq>
-          </p:childTnLst>
-        </p:cTn>
-      </p:par>
-    </p:tnLst>
-    <p:bldLst>
-      <p:bldP spid="7" grpId="0"/>
-      <p:bldP spid="8" grpId="0"/>
-      <p:bldP spid="9" grpId="0"/>
-    </p:bldLst>
-  </p:timing>
 </p:sld>
 </file>
 
@@ -26301,6 +26454,1079 @@
         <p:cNvPr id="1" name="">
           <a:extLst>
             <a:ext uri="{FF2B5EF4-FFF2-40B4-BE49-F238E27FC236}">
+              <a16:creationId xmlns:a16="http://schemas.microsoft.com/office/drawing/2014/main" id="{5CEED507-E097-7B00-F3A4-E611BBC1F638}"/>
+            </a:ext>
+          </a:extLst>
+        </p:cNvPr>
+        <p:cNvGrpSpPr/>
+        <p:nvPr/>
+      </p:nvGrpSpPr>
+      <p:grpSpPr>
+        <a:xfrm>
+          <a:off x="0" y="0"/>
+          <a:ext cx="0" cy="0"/>
+          <a:chOff x="0" y="0"/>
+          <a:chExt cx="0" cy="0"/>
+        </a:xfrm>
+      </p:grpSpPr>
+      <p:sp>
+        <p:nvSpPr>
+          <p:cNvPr id="2" name="Title 1">
+            <a:extLst>
+              <a:ext uri="{FF2B5EF4-FFF2-40B4-BE49-F238E27FC236}">
+                <a16:creationId xmlns:a16="http://schemas.microsoft.com/office/drawing/2014/main" id="{D99048F4-2C75-F498-3CD0-A110F9271C6D}"/>
+              </a:ext>
+            </a:extLst>
+          </p:cNvPr>
+          <p:cNvSpPr>
+            <a:spLocks noGrp="1"/>
+          </p:cNvSpPr>
+          <p:nvPr>
+            <p:ph type="title"/>
+          </p:nvPr>
+        </p:nvSpPr>
+        <p:spPr/>
+        <p:txBody>
+          <a:bodyPr>
+            <a:normAutofit/>
+          </a:bodyPr>
+          <a:lstStyle/>
+          <a:p>
+            <a:r>
+              <a:rPr lang="en-US" sz="3600" dirty="0">
+                <a:latin typeface="Arial Rounded MT Bold" panose="020F0704030504030204" pitchFamily="34" charset="0"/>
+              </a:rPr>
+              <a:t>Choix: SI-SINON </a:t>
+            </a:r>
+            <a:r>
+              <a:rPr lang="en-US" sz="3600" dirty="0" err="1">
+                <a:latin typeface="Arial Rounded MT Bold" panose="020F0704030504030204" pitchFamily="34" charset="0"/>
+              </a:rPr>
+              <a:t>SI-SINON</a:t>
+            </a:r>
+            <a:r>
+              <a:rPr lang="en-US" sz="3600" dirty="0">
+                <a:latin typeface="Arial Rounded MT Bold" panose="020F0704030504030204" pitchFamily="34" charset="0"/>
+              </a:rPr>
+              <a:t> (</a:t>
+            </a:r>
+            <a:r>
+              <a:rPr lang="en-US" sz="3600" dirty="0">
+                <a:latin typeface="Consolas" panose="020B0609020204030204" pitchFamily="49" charset="0"/>
+              </a:rPr>
+              <a:t>if-</a:t>
+            </a:r>
+            <a:r>
+              <a:rPr lang="en-US" sz="3600" dirty="0" err="1">
+                <a:latin typeface="Consolas" panose="020B0609020204030204" pitchFamily="49" charset="0"/>
+              </a:rPr>
+              <a:t>elif</a:t>
+            </a:r>
+            <a:r>
+              <a:rPr lang="en-US" sz="3600" dirty="0">
+                <a:latin typeface="Consolas" panose="020B0609020204030204" pitchFamily="49" charset="0"/>
+              </a:rPr>
+              <a:t>-else</a:t>
+            </a:r>
+            <a:r>
+              <a:rPr lang="en-US" sz="3600" dirty="0">
+                <a:latin typeface="Arial Rounded MT Bold" panose="020F0704030504030204" pitchFamily="34" charset="0"/>
+              </a:rPr>
+              <a:t>) </a:t>
+            </a:r>
+            <a:endParaRPr lang="fr-CA" sz="3600" dirty="0">
+              <a:latin typeface="Arial Rounded MT Bold" panose="020F0704030504030204" pitchFamily="34" charset="0"/>
+            </a:endParaRPr>
+          </a:p>
+        </p:txBody>
+      </p:sp>
+      <p:sp>
+        <p:nvSpPr>
+          <p:cNvPr id="3" name="Content Placeholder 2">
+            <a:extLst>
+              <a:ext uri="{FF2B5EF4-FFF2-40B4-BE49-F238E27FC236}">
+                <a16:creationId xmlns:a16="http://schemas.microsoft.com/office/drawing/2014/main" id="{9F02AA3A-E71B-559F-13C8-1F1127571700}"/>
+              </a:ext>
+            </a:extLst>
+          </p:cNvPr>
+          <p:cNvSpPr>
+            <a:spLocks noGrp="1"/>
+          </p:cNvSpPr>
+          <p:nvPr>
+            <p:ph idx="1"/>
+          </p:nvPr>
+        </p:nvSpPr>
+        <p:spPr/>
+        <p:txBody>
+          <a:bodyPr>
+            <a:normAutofit/>
+          </a:bodyPr>
+          <a:lstStyle/>
+          <a:p>
+            <a:pPr algn="just">
+              <a:lnSpc>
+                <a:spcPct val="100000"/>
+              </a:lnSpc>
+            </a:pPr>
+            <a:r>
+              <a:rPr lang="en-CA" sz="2200" dirty="0">
+                <a:latin typeface="Consolas" panose="020B0609020204030204" pitchFamily="49" charset="0"/>
+              </a:rPr>
+              <a:t>E</a:t>
+            </a:r>
+            <a:r>
+              <a:rPr lang="fr-CA" sz="2200" dirty="0">
+                <a:latin typeface="Consolas" panose="020B0609020204030204" pitchFamily="49" charset="0"/>
+              </a:rPr>
+              <a:t>x</a:t>
+            </a:r>
+            <a:r>
+              <a:rPr lang="en-US" sz="2200" dirty="0" err="1">
+                <a:latin typeface="Consolas" panose="020B0609020204030204" pitchFamily="49" charset="0"/>
+              </a:rPr>
+              <a:t>écuter</a:t>
+            </a:r>
+            <a:r>
+              <a:rPr lang="en-US" sz="2200" dirty="0">
+                <a:latin typeface="Consolas" panose="020B0609020204030204" pitchFamily="49" charset="0"/>
+              </a:rPr>
+              <a:t> du code </a:t>
+            </a:r>
+            <a:r>
+              <a:rPr lang="en-US" sz="2200" b="1" dirty="0" err="1">
+                <a:latin typeface="Consolas" panose="020B0609020204030204" pitchFamily="49" charset="0"/>
+              </a:rPr>
+              <a:t>si</a:t>
+            </a:r>
+            <a:r>
+              <a:rPr lang="en-US" sz="2200" b="1" dirty="0">
+                <a:latin typeface="Consolas" panose="020B0609020204030204" pitchFamily="49" charset="0"/>
+              </a:rPr>
+              <a:t> </a:t>
+            </a:r>
+            <a:r>
+              <a:rPr lang="en-US" sz="2200" b="1" dirty="0" err="1">
+                <a:latin typeface="Consolas" panose="020B0609020204030204" pitchFamily="49" charset="0"/>
+              </a:rPr>
+              <a:t>une</a:t>
+            </a:r>
+            <a:r>
+              <a:rPr lang="en-US" sz="2200" b="1" dirty="0">
+                <a:latin typeface="Consolas" panose="020B0609020204030204" pitchFamily="49" charset="0"/>
+              </a:rPr>
+              <a:t> condition bool</a:t>
+            </a:r>
+            <a:r>
+              <a:rPr lang="fr-CA" sz="2200" b="1" dirty="0" err="1">
+                <a:latin typeface="Consolas" panose="020B0609020204030204" pitchFamily="49" charset="0"/>
+              </a:rPr>
+              <a:t>éenne</a:t>
+            </a:r>
+            <a:r>
+              <a:rPr lang="en-US" sz="2200" b="1" dirty="0">
+                <a:latin typeface="Consolas" panose="020B0609020204030204" pitchFamily="49" charset="0"/>
+              </a:rPr>
+              <a:t> est </a:t>
+            </a:r>
+            <a:r>
+              <a:rPr lang="en-US" sz="2200" b="1" dirty="0" err="1">
+                <a:latin typeface="Consolas" panose="020B0609020204030204" pitchFamily="49" charset="0"/>
+              </a:rPr>
+              <a:t>vraie</a:t>
+            </a:r>
+            <a:endParaRPr lang="en-US" sz="2200" b="1" dirty="0">
+              <a:latin typeface="Consolas" panose="020B0609020204030204" pitchFamily="49" charset="0"/>
+            </a:endParaRPr>
+          </a:p>
+          <a:p>
+            <a:pPr lvl="1" algn="just">
+              <a:lnSpc>
+                <a:spcPct val="100000"/>
+              </a:lnSpc>
+            </a:pPr>
+            <a:r>
+              <a:rPr lang="en-US" sz="1800" dirty="0" err="1">
+                <a:latin typeface="Consolas" panose="020B0609020204030204" pitchFamily="49" charset="0"/>
+              </a:rPr>
+              <a:t>Implique</a:t>
+            </a:r>
+            <a:r>
+              <a:rPr lang="en-US" sz="1800" dirty="0">
+                <a:latin typeface="Consolas" panose="020B0609020204030204" pitchFamily="49" charset="0"/>
+              </a:rPr>
+              <a:t> </a:t>
+            </a:r>
+            <a:r>
+              <a:rPr lang="en-US" sz="1800" dirty="0" err="1">
+                <a:latin typeface="Consolas" panose="020B0609020204030204" pitchFamily="49" charset="0"/>
+              </a:rPr>
+              <a:t>généralement</a:t>
+            </a:r>
+            <a:r>
+              <a:rPr lang="en-US" sz="1800" dirty="0">
+                <a:latin typeface="Consolas" panose="020B0609020204030204" pitchFamily="49" charset="0"/>
+              </a:rPr>
+              <a:t> les </a:t>
+            </a:r>
+            <a:r>
+              <a:rPr lang="en-US" sz="1800" b="1" dirty="0" err="1">
+                <a:latin typeface="Consolas" panose="020B0609020204030204" pitchFamily="49" charset="0"/>
+              </a:rPr>
+              <a:t>opérateurs</a:t>
+            </a:r>
+            <a:r>
+              <a:rPr lang="en-US" sz="1800" b="1" dirty="0">
+                <a:latin typeface="Consolas" panose="020B0609020204030204" pitchFamily="49" charset="0"/>
+              </a:rPr>
+              <a:t> de </a:t>
+            </a:r>
+            <a:r>
+              <a:rPr lang="en-US" sz="1800" b="1" dirty="0" err="1">
+                <a:latin typeface="Consolas" panose="020B0609020204030204" pitchFamily="49" charset="0"/>
+              </a:rPr>
+              <a:t>comparaison</a:t>
+            </a:r>
+            <a:r>
+              <a:rPr lang="en-US" sz="1800" dirty="0">
+                <a:latin typeface="Consolas" panose="020B0609020204030204" pitchFamily="49" charset="0"/>
+              </a:rPr>
+              <a:t> et/</a:t>
+            </a:r>
+            <a:r>
+              <a:rPr lang="en-US" sz="1800" dirty="0" err="1">
+                <a:latin typeface="Consolas" panose="020B0609020204030204" pitchFamily="49" charset="0"/>
+              </a:rPr>
+              <a:t>ou</a:t>
+            </a:r>
+            <a:r>
+              <a:rPr lang="en-US" sz="1800" dirty="0">
+                <a:latin typeface="Consolas" panose="020B0609020204030204" pitchFamily="49" charset="0"/>
+              </a:rPr>
+              <a:t> </a:t>
+            </a:r>
+            <a:r>
+              <a:rPr lang="en-US" sz="1800" b="1" dirty="0" err="1">
+                <a:latin typeface="Consolas" panose="020B0609020204030204" pitchFamily="49" charset="0"/>
+              </a:rPr>
+              <a:t>logiques</a:t>
+            </a:r>
+            <a:endParaRPr lang="en-US" sz="1800" b="1" dirty="0">
+              <a:latin typeface="Consolas" panose="020B0609020204030204" pitchFamily="49" charset="0"/>
+            </a:endParaRPr>
+          </a:p>
+        </p:txBody>
+      </p:sp>
+      <p:sp>
+        <p:nvSpPr>
+          <p:cNvPr id="5" name="Slide Number Placeholder 4">
+            <a:extLst>
+              <a:ext uri="{FF2B5EF4-FFF2-40B4-BE49-F238E27FC236}">
+                <a16:creationId xmlns:a16="http://schemas.microsoft.com/office/drawing/2014/main" id="{BFBB4537-5FEB-352D-F1CE-F0BFF9A61AC0}"/>
+              </a:ext>
+            </a:extLst>
+          </p:cNvPr>
+          <p:cNvSpPr>
+            <a:spLocks noGrp="1"/>
+          </p:cNvSpPr>
+          <p:nvPr>
+            <p:ph type="sldNum" sz="quarter" idx="12"/>
+          </p:nvPr>
+        </p:nvSpPr>
+        <p:spPr/>
+        <p:txBody>
+          <a:bodyPr/>
+          <a:lstStyle/>
+          <a:p>
+            <a:fld id="{846B06B1-1179-491F-A487-8E0C403F7C13}" type="slidenum">
+              <a:rPr lang="fr-CA" smtClean="0"/>
+              <a:t>30</a:t>
+            </a:fld>
+            <a:endParaRPr lang="fr-CA"/>
+          </a:p>
+        </p:txBody>
+      </p:sp>
+      <p:sp>
+        <p:nvSpPr>
+          <p:cNvPr id="7" name="TextBox 6">
+            <a:extLst>
+              <a:ext uri="{FF2B5EF4-FFF2-40B4-BE49-F238E27FC236}">
+                <a16:creationId xmlns:a16="http://schemas.microsoft.com/office/drawing/2014/main" id="{3CDE5BC8-A607-67FF-CE61-7F2C4B64D8FD}"/>
+              </a:ext>
+            </a:extLst>
+          </p:cNvPr>
+          <p:cNvSpPr txBox="1"/>
+          <p:nvPr/>
+        </p:nvSpPr>
+        <p:spPr>
+          <a:xfrm>
+            <a:off x="838200" y="2921248"/>
+            <a:ext cx="3240000" cy="1200329"/>
+          </a:xfrm>
+          <a:prstGeom prst="rect">
+            <a:avLst/>
+          </a:prstGeom>
+          <a:noFill/>
+        </p:spPr>
+        <p:txBody>
+          <a:bodyPr wrap="square">
+            <a:spAutoFit/>
+          </a:bodyPr>
+          <a:lstStyle/>
+          <a:p>
+            <a:pPr algn="just"/>
+            <a:r>
+              <a:rPr lang="en-CA" b="1" dirty="0">
+                <a:latin typeface="Consolas" panose="020B0609020204030204" pitchFamily="49" charset="0"/>
+              </a:rPr>
+              <a:t>&gt;&gt;&gt; </a:t>
+            </a:r>
+            <a:r>
+              <a:rPr lang="en-CA" b="1" dirty="0" err="1">
+                <a:latin typeface="Consolas" panose="020B0609020204030204" pitchFamily="49" charset="0"/>
+              </a:rPr>
+              <a:t>valeur</a:t>
+            </a:r>
+            <a:r>
+              <a:rPr lang="en-CA" b="1" dirty="0">
+                <a:latin typeface="Consolas" panose="020B0609020204030204" pitchFamily="49" charset="0"/>
+              </a:rPr>
+              <a:t> = 1</a:t>
+            </a:r>
+          </a:p>
+          <a:p>
+            <a:pPr algn="just"/>
+            <a:r>
+              <a:rPr lang="en-CA" b="1" dirty="0">
+                <a:latin typeface="Consolas" panose="020B0609020204030204" pitchFamily="49" charset="0"/>
+              </a:rPr>
+              <a:t>&gt;&gt;&gt; </a:t>
+            </a:r>
+            <a:r>
+              <a:rPr lang="en-CA" b="1" dirty="0">
+                <a:solidFill>
+                  <a:srgbClr val="FF2500"/>
+                </a:solidFill>
+                <a:latin typeface="Consolas" panose="020B0609020204030204" pitchFamily="49" charset="0"/>
+              </a:rPr>
+              <a:t>if</a:t>
+            </a:r>
+            <a:r>
+              <a:rPr lang="en-CA" b="1" dirty="0">
+                <a:latin typeface="Consolas" panose="020B0609020204030204" pitchFamily="49" charset="0"/>
+              </a:rPr>
+              <a:t> </a:t>
+            </a:r>
+            <a:r>
+              <a:rPr lang="en-CA" b="1" dirty="0" err="1">
+                <a:latin typeface="Consolas" panose="020B0609020204030204" pitchFamily="49" charset="0"/>
+              </a:rPr>
+              <a:t>valeur</a:t>
+            </a:r>
+            <a:r>
+              <a:rPr lang="en-CA" b="1" dirty="0">
+                <a:latin typeface="Consolas" panose="020B0609020204030204" pitchFamily="49" charset="0"/>
+              </a:rPr>
+              <a:t> % 2 == 1:</a:t>
+            </a:r>
+          </a:p>
+          <a:p>
+            <a:pPr algn="just"/>
+            <a:r>
+              <a:rPr lang="en-CA" b="1" dirty="0">
+                <a:latin typeface="Consolas" panose="020B0609020204030204" pitchFamily="49" charset="0"/>
+              </a:rPr>
+              <a:t>...   print("Impair")</a:t>
+            </a:r>
+          </a:p>
+          <a:p>
+            <a:pPr algn="just"/>
+            <a:r>
+              <a:rPr lang="en-CA" dirty="0">
+                <a:solidFill>
+                  <a:schemeClr val="bg1">
+                    <a:lumMod val="50000"/>
+                  </a:schemeClr>
+                </a:solidFill>
+                <a:latin typeface="Consolas" panose="020B0609020204030204" pitchFamily="49" charset="0"/>
+              </a:rPr>
+              <a:t>Impair</a:t>
+            </a:r>
+          </a:p>
+        </p:txBody>
+      </p:sp>
+      <p:sp>
+        <p:nvSpPr>
+          <p:cNvPr id="8" name="TextBox 7">
+            <a:extLst>
+              <a:ext uri="{FF2B5EF4-FFF2-40B4-BE49-F238E27FC236}">
+                <a16:creationId xmlns:a16="http://schemas.microsoft.com/office/drawing/2014/main" id="{549273C0-9324-FD1F-06B2-8803B8C48585}"/>
+              </a:ext>
+            </a:extLst>
+          </p:cNvPr>
+          <p:cNvSpPr txBox="1"/>
+          <p:nvPr/>
+        </p:nvSpPr>
+        <p:spPr>
+          <a:xfrm>
+            <a:off x="4078199" y="2921248"/>
+            <a:ext cx="3548285" cy="1754326"/>
+          </a:xfrm>
+          <a:prstGeom prst="rect">
+            <a:avLst/>
+          </a:prstGeom>
+          <a:noFill/>
+        </p:spPr>
+        <p:txBody>
+          <a:bodyPr wrap="square">
+            <a:spAutoFit/>
+          </a:bodyPr>
+          <a:lstStyle/>
+          <a:p>
+            <a:pPr algn="just"/>
+            <a:r>
+              <a:rPr lang="en-CA" b="1" dirty="0">
+                <a:latin typeface="Consolas" panose="020B0609020204030204" pitchFamily="49" charset="0"/>
+              </a:rPr>
+              <a:t>&gt;&gt;&gt; </a:t>
+            </a:r>
+            <a:r>
+              <a:rPr lang="en-CA" b="1" dirty="0" err="1">
+                <a:latin typeface="Consolas" panose="020B0609020204030204" pitchFamily="49" charset="0"/>
+              </a:rPr>
+              <a:t>valeur</a:t>
+            </a:r>
+            <a:r>
+              <a:rPr lang="en-CA" b="1" dirty="0">
+                <a:latin typeface="Consolas" panose="020B0609020204030204" pitchFamily="49" charset="0"/>
+              </a:rPr>
+              <a:t> = 10</a:t>
+            </a:r>
+          </a:p>
+          <a:p>
+            <a:pPr algn="just"/>
+            <a:r>
+              <a:rPr lang="en-CA" b="1" dirty="0">
+                <a:latin typeface="Consolas" panose="020B0609020204030204" pitchFamily="49" charset="0"/>
+              </a:rPr>
+              <a:t>&gt;&gt;&gt; if </a:t>
+            </a:r>
+            <a:r>
+              <a:rPr lang="en-CA" b="1" dirty="0" err="1">
+                <a:latin typeface="Consolas" panose="020B0609020204030204" pitchFamily="49" charset="0"/>
+              </a:rPr>
+              <a:t>valeur</a:t>
+            </a:r>
+            <a:r>
+              <a:rPr lang="en-CA" b="1" dirty="0">
+                <a:latin typeface="Consolas" panose="020B0609020204030204" pitchFamily="49" charset="0"/>
+              </a:rPr>
+              <a:t> % 2 == 1:</a:t>
+            </a:r>
+          </a:p>
+          <a:p>
+            <a:pPr algn="just"/>
+            <a:r>
+              <a:rPr lang="en-CA" b="1" dirty="0">
+                <a:latin typeface="Consolas" panose="020B0609020204030204" pitchFamily="49" charset="0"/>
+              </a:rPr>
+              <a:t>...   print("Pair")</a:t>
+            </a:r>
+          </a:p>
+          <a:p>
+            <a:pPr algn="just"/>
+            <a:r>
+              <a:rPr lang="en-CA" b="1" dirty="0">
+                <a:latin typeface="Consolas" panose="020B0609020204030204" pitchFamily="49" charset="0"/>
+              </a:rPr>
+              <a:t>... </a:t>
+            </a:r>
+            <a:r>
+              <a:rPr lang="en-CA" b="1" dirty="0" err="1">
+                <a:solidFill>
+                  <a:srgbClr val="FF2500"/>
+                </a:solidFill>
+                <a:latin typeface="Consolas" panose="020B0609020204030204" pitchFamily="49" charset="0"/>
+              </a:rPr>
+              <a:t>elif</a:t>
+            </a:r>
+            <a:r>
+              <a:rPr lang="en-CA" b="1" dirty="0">
+                <a:latin typeface="Consolas" panose="020B0609020204030204" pitchFamily="49" charset="0"/>
+              </a:rPr>
+              <a:t> </a:t>
+            </a:r>
+            <a:r>
+              <a:rPr lang="en-CA" b="1" dirty="0" err="1">
+                <a:latin typeface="Consolas" panose="020B0609020204030204" pitchFamily="49" charset="0"/>
+              </a:rPr>
+              <a:t>valeur</a:t>
+            </a:r>
+            <a:r>
+              <a:rPr lang="en-CA" b="1" dirty="0">
+                <a:latin typeface="Consolas" panose="020B0609020204030204" pitchFamily="49" charset="0"/>
+              </a:rPr>
+              <a:t> % 2 == 0:</a:t>
+            </a:r>
+          </a:p>
+          <a:p>
+            <a:pPr algn="just"/>
+            <a:r>
+              <a:rPr lang="en-CA" b="1" dirty="0">
+                <a:latin typeface="Consolas" panose="020B0609020204030204" pitchFamily="49" charset="0"/>
+              </a:rPr>
+              <a:t>...   print("Impair")</a:t>
+            </a:r>
+          </a:p>
+          <a:p>
+            <a:pPr algn="just"/>
+            <a:r>
+              <a:rPr lang="en-CA" dirty="0">
+                <a:solidFill>
+                  <a:schemeClr val="bg1">
+                    <a:lumMod val="50000"/>
+                  </a:schemeClr>
+                </a:solidFill>
+                <a:latin typeface="Consolas" panose="020B0609020204030204" pitchFamily="49" charset="0"/>
+              </a:rPr>
+              <a:t>Pair</a:t>
+            </a:r>
+          </a:p>
+        </p:txBody>
+      </p:sp>
+      <p:sp>
+        <p:nvSpPr>
+          <p:cNvPr id="9" name="TextBox 8">
+            <a:extLst>
+              <a:ext uri="{FF2B5EF4-FFF2-40B4-BE49-F238E27FC236}">
+                <a16:creationId xmlns:a16="http://schemas.microsoft.com/office/drawing/2014/main" id="{3D11E67C-C431-DFC0-79E4-BF393002DF38}"/>
+              </a:ext>
+            </a:extLst>
+          </p:cNvPr>
+          <p:cNvSpPr txBox="1"/>
+          <p:nvPr/>
+        </p:nvSpPr>
+        <p:spPr>
+          <a:xfrm>
+            <a:off x="7626484" y="2921248"/>
+            <a:ext cx="3548285" cy="2308324"/>
+          </a:xfrm>
+          <a:prstGeom prst="rect">
+            <a:avLst/>
+          </a:prstGeom>
+          <a:noFill/>
+        </p:spPr>
+        <p:txBody>
+          <a:bodyPr wrap="square">
+            <a:spAutoFit/>
+          </a:bodyPr>
+          <a:lstStyle/>
+          <a:p>
+            <a:pPr algn="just"/>
+            <a:r>
+              <a:rPr lang="en-CA" b="1" dirty="0">
+                <a:latin typeface="Consolas" panose="020B0609020204030204" pitchFamily="49" charset="0"/>
+              </a:rPr>
+              <a:t>&gt;&gt;&gt; </a:t>
+            </a:r>
+            <a:r>
+              <a:rPr lang="en-CA" b="1" dirty="0" err="1">
+                <a:latin typeface="Consolas" panose="020B0609020204030204" pitchFamily="49" charset="0"/>
+              </a:rPr>
+              <a:t>valeur</a:t>
+            </a:r>
+            <a:r>
+              <a:rPr lang="en-CA" b="1" dirty="0">
+                <a:latin typeface="Consolas" panose="020B0609020204030204" pitchFamily="49" charset="0"/>
+              </a:rPr>
+              <a:t> = 1.5</a:t>
+            </a:r>
+          </a:p>
+          <a:p>
+            <a:pPr algn="just"/>
+            <a:r>
+              <a:rPr lang="en-CA" b="1" dirty="0">
+                <a:latin typeface="Consolas" panose="020B0609020204030204" pitchFamily="49" charset="0"/>
+              </a:rPr>
+              <a:t>&gt;&gt;&gt; if </a:t>
+            </a:r>
+            <a:r>
+              <a:rPr lang="en-CA" b="1" dirty="0" err="1">
+                <a:latin typeface="Consolas" panose="020B0609020204030204" pitchFamily="49" charset="0"/>
+              </a:rPr>
+              <a:t>valeur</a:t>
+            </a:r>
+            <a:r>
+              <a:rPr lang="en-CA" b="1" dirty="0">
+                <a:latin typeface="Consolas" panose="020B0609020204030204" pitchFamily="49" charset="0"/>
+              </a:rPr>
+              <a:t> % 2 == 1:</a:t>
+            </a:r>
+          </a:p>
+          <a:p>
+            <a:pPr algn="just"/>
+            <a:r>
+              <a:rPr lang="en-CA" b="1" dirty="0">
+                <a:latin typeface="Consolas" panose="020B0609020204030204" pitchFamily="49" charset="0"/>
+              </a:rPr>
+              <a:t>...   print("Pair")</a:t>
+            </a:r>
+          </a:p>
+          <a:p>
+            <a:pPr algn="just"/>
+            <a:r>
+              <a:rPr lang="en-CA" b="1" dirty="0">
+                <a:latin typeface="Consolas" panose="020B0609020204030204" pitchFamily="49" charset="0"/>
+              </a:rPr>
+              <a:t>... </a:t>
+            </a:r>
+            <a:r>
+              <a:rPr lang="en-CA" b="1" dirty="0" err="1">
+                <a:latin typeface="Consolas" panose="020B0609020204030204" pitchFamily="49" charset="0"/>
+              </a:rPr>
+              <a:t>elif</a:t>
+            </a:r>
+            <a:r>
+              <a:rPr lang="en-CA" b="1" dirty="0">
+                <a:latin typeface="Consolas" panose="020B0609020204030204" pitchFamily="49" charset="0"/>
+              </a:rPr>
+              <a:t> </a:t>
+            </a:r>
+            <a:r>
+              <a:rPr lang="en-CA" b="1" dirty="0" err="1">
+                <a:latin typeface="Consolas" panose="020B0609020204030204" pitchFamily="49" charset="0"/>
+              </a:rPr>
+              <a:t>valeur</a:t>
+            </a:r>
+            <a:r>
+              <a:rPr lang="en-CA" b="1" dirty="0">
+                <a:latin typeface="Consolas" panose="020B0609020204030204" pitchFamily="49" charset="0"/>
+              </a:rPr>
+              <a:t> % 2 == 0:</a:t>
+            </a:r>
+          </a:p>
+          <a:p>
+            <a:pPr algn="just"/>
+            <a:r>
+              <a:rPr lang="en-CA" b="1" dirty="0">
+                <a:latin typeface="Consolas" panose="020B0609020204030204" pitchFamily="49" charset="0"/>
+              </a:rPr>
+              <a:t>...   print("Impair")</a:t>
+            </a:r>
+          </a:p>
+          <a:p>
+            <a:pPr algn="just"/>
+            <a:r>
+              <a:rPr lang="en-CA" b="1" dirty="0">
+                <a:latin typeface="Consolas" panose="020B0609020204030204" pitchFamily="49" charset="0"/>
+              </a:rPr>
+              <a:t>... </a:t>
+            </a:r>
+            <a:r>
+              <a:rPr lang="en-CA" b="1" dirty="0">
+                <a:solidFill>
+                  <a:srgbClr val="FF2500"/>
+                </a:solidFill>
+                <a:latin typeface="Consolas" panose="020B0609020204030204" pitchFamily="49" charset="0"/>
+              </a:rPr>
+              <a:t>else</a:t>
+            </a:r>
+            <a:r>
+              <a:rPr lang="en-CA" b="1" dirty="0">
+                <a:latin typeface="Consolas" panose="020B0609020204030204" pitchFamily="49" charset="0"/>
+              </a:rPr>
+              <a:t>:</a:t>
+            </a:r>
+          </a:p>
+          <a:p>
+            <a:pPr algn="just"/>
+            <a:r>
+              <a:rPr lang="en-CA" b="1" dirty="0">
+                <a:latin typeface="Consolas" panose="020B0609020204030204" pitchFamily="49" charset="0"/>
+              </a:rPr>
+              <a:t>...   print("</a:t>
+            </a:r>
+            <a:r>
+              <a:rPr lang="en-CA" b="1" dirty="0" err="1">
+                <a:latin typeface="Consolas" panose="020B0609020204030204" pitchFamily="49" charset="0"/>
+              </a:rPr>
+              <a:t>Autre</a:t>
+            </a:r>
+            <a:r>
+              <a:rPr lang="en-CA" b="1" dirty="0">
+                <a:latin typeface="Consolas" panose="020B0609020204030204" pitchFamily="49" charset="0"/>
+              </a:rPr>
+              <a:t>")</a:t>
+            </a:r>
+          </a:p>
+          <a:p>
+            <a:pPr algn="just"/>
+            <a:r>
+              <a:rPr lang="en-CA" dirty="0" err="1">
+                <a:solidFill>
+                  <a:schemeClr val="bg1">
+                    <a:lumMod val="50000"/>
+                  </a:schemeClr>
+                </a:solidFill>
+                <a:latin typeface="Consolas" panose="020B0609020204030204" pitchFamily="49" charset="0"/>
+              </a:rPr>
+              <a:t>Autre</a:t>
+            </a:r>
+            <a:endParaRPr lang="en-CA" dirty="0">
+              <a:solidFill>
+                <a:schemeClr val="bg1">
+                  <a:lumMod val="50000"/>
+                </a:schemeClr>
+              </a:solidFill>
+              <a:latin typeface="Consolas" panose="020B0609020204030204" pitchFamily="49" charset="0"/>
+            </a:endParaRPr>
+          </a:p>
+        </p:txBody>
+      </p:sp>
+    </p:spTree>
+    <p:extLst>
+      <p:ext uri="{BB962C8B-B14F-4D97-AF65-F5344CB8AC3E}">
+        <p14:creationId xmlns:p14="http://schemas.microsoft.com/office/powerpoint/2010/main" val="331786654"/>
+      </p:ext>
+    </p:extLst>
+  </p:cSld>
+  <p:clrMapOvr>
+    <a:masterClrMapping/>
+  </p:clrMapOvr>
+  <p:timing>
+    <p:tnLst>
+      <p:par>
+        <p:cTn id="1" dur="indefinite" restart="never" nodeType="tmRoot">
+          <p:childTnLst>
+            <p:seq concurrent="1" nextAc="seek">
+              <p:cTn id="2" dur="indefinite" nodeType="mainSeq">
+                <p:childTnLst>
+                  <p:par>
+                    <p:cTn id="3" fill="hold">
+                      <p:stCondLst>
+                        <p:cond delay="indefinite"/>
+                      </p:stCondLst>
+                      <p:childTnLst>
+                        <p:par>
+                          <p:cTn id="4" fill="hold">
+                            <p:stCondLst>
+                              <p:cond delay="0"/>
+                            </p:stCondLst>
+                            <p:childTnLst>
+                              <p:par>
+                                <p:cTn id="5" presetID="10" presetClass="entr" presetSubtype="0" fill="hold" nodeType="clickEffect">
+                                  <p:stCondLst>
+                                    <p:cond delay="0"/>
+                                  </p:stCondLst>
+                                  <p:childTnLst>
+                                    <p:set>
+                                      <p:cBhvr>
+                                        <p:cTn id="6" dur="1" fill="hold">
+                                          <p:stCondLst>
+                                            <p:cond delay="0"/>
+                                          </p:stCondLst>
+                                        </p:cTn>
+                                        <p:tgtEl>
+                                          <p:spTgt spid="3">
+                                            <p:txEl>
+                                              <p:pRg st="0" end="0"/>
+                                            </p:txEl>
+                                          </p:spTgt>
+                                        </p:tgtEl>
+                                        <p:attrNameLst>
+                                          <p:attrName>style.visibility</p:attrName>
+                                        </p:attrNameLst>
+                                      </p:cBhvr>
+                                      <p:to>
+                                        <p:strVal val="visible"/>
+                                      </p:to>
+                                    </p:set>
+                                    <p:animEffect transition="in" filter="fade">
+                                      <p:cBhvr>
+                                        <p:cTn id="7" dur="500"/>
+                                        <p:tgtEl>
+                                          <p:spTgt spid="3">
+                                            <p:txEl>
+                                              <p:pRg st="0" end="0"/>
+                                            </p:txEl>
+                                          </p:spTgt>
+                                        </p:tgtEl>
+                                      </p:cBhvr>
+                                    </p:animEffect>
+                                  </p:childTnLst>
+                                </p:cTn>
+                              </p:par>
+                            </p:childTnLst>
+                          </p:cTn>
+                        </p:par>
+                      </p:childTnLst>
+                    </p:cTn>
+                  </p:par>
+                  <p:par>
+                    <p:cTn id="8" fill="hold">
+                      <p:stCondLst>
+                        <p:cond delay="indefinite"/>
+                      </p:stCondLst>
+                      <p:childTnLst>
+                        <p:par>
+                          <p:cTn id="9" fill="hold">
+                            <p:stCondLst>
+                              <p:cond delay="0"/>
+                            </p:stCondLst>
+                            <p:childTnLst>
+                              <p:par>
+                                <p:cTn id="10" presetID="10" presetClass="entr" presetSubtype="0" fill="hold" nodeType="clickEffect">
+                                  <p:stCondLst>
+                                    <p:cond delay="0"/>
+                                  </p:stCondLst>
+                                  <p:childTnLst>
+                                    <p:set>
+                                      <p:cBhvr>
+                                        <p:cTn id="11" dur="1" fill="hold">
+                                          <p:stCondLst>
+                                            <p:cond delay="0"/>
+                                          </p:stCondLst>
+                                        </p:cTn>
+                                        <p:tgtEl>
+                                          <p:spTgt spid="3">
+                                            <p:txEl>
+                                              <p:pRg st="1" end="1"/>
+                                            </p:txEl>
+                                          </p:spTgt>
+                                        </p:tgtEl>
+                                        <p:attrNameLst>
+                                          <p:attrName>style.visibility</p:attrName>
+                                        </p:attrNameLst>
+                                      </p:cBhvr>
+                                      <p:to>
+                                        <p:strVal val="visible"/>
+                                      </p:to>
+                                    </p:set>
+                                    <p:animEffect transition="in" filter="fade">
+                                      <p:cBhvr>
+                                        <p:cTn id="12" dur="500"/>
+                                        <p:tgtEl>
+                                          <p:spTgt spid="3">
+                                            <p:txEl>
+                                              <p:pRg st="1" end="1"/>
+                                            </p:txEl>
+                                          </p:spTgt>
+                                        </p:tgtEl>
+                                      </p:cBhvr>
+                                    </p:animEffect>
+                                  </p:childTnLst>
+                                </p:cTn>
+                              </p:par>
+                            </p:childTnLst>
+                          </p:cTn>
+                        </p:par>
+                      </p:childTnLst>
+                    </p:cTn>
+                  </p:par>
+                  <p:par>
+                    <p:cTn id="13" fill="hold">
+                      <p:stCondLst>
+                        <p:cond delay="indefinite"/>
+                      </p:stCondLst>
+                      <p:childTnLst>
+                        <p:par>
+                          <p:cTn id="14" fill="hold">
+                            <p:stCondLst>
+                              <p:cond delay="0"/>
+                            </p:stCondLst>
+                            <p:childTnLst>
+                              <p:par>
+                                <p:cTn id="15" presetID="10" presetClass="entr" presetSubtype="0" fill="hold" grpId="0" nodeType="clickEffect">
+                                  <p:stCondLst>
+                                    <p:cond delay="0"/>
+                                  </p:stCondLst>
+                                  <p:childTnLst>
+                                    <p:set>
+                                      <p:cBhvr>
+                                        <p:cTn id="16" dur="1" fill="hold">
+                                          <p:stCondLst>
+                                            <p:cond delay="0"/>
+                                          </p:stCondLst>
+                                        </p:cTn>
+                                        <p:tgtEl>
+                                          <p:spTgt spid="7"/>
+                                        </p:tgtEl>
+                                        <p:attrNameLst>
+                                          <p:attrName>style.visibility</p:attrName>
+                                        </p:attrNameLst>
+                                      </p:cBhvr>
+                                      <p:to>
+                                        <p:strVal val="visible"/>
+                                      </p:to>
+                                    </p:set>
+                                    <p:animEffect transition="in" filter="fade">
+                                      <p:cBhvr>
+                                        <p:cTn id="17" dur="500"/>
+                                        <p:tgtEl>
+                                          <p:spTgt spid="7"/>
+                                        </p:tgtEl>
+                                      </p:cBhvr>
+                                    </p:animEffect>
+                                  </p:childTnLst>
+                                </p:cTn>
+                              </p:par>
+                            </p:childTnLst>
+                          </p:cTn>
+                        </p:par>
+                      </p:childTnLst>
+                    </p:cTn>
+                  </p:par>
+                  <p:par>
+                    <p:cTn id="18" fill="hold">
+                      <p:stCondLst>
+                        <p:cond delay="indefinite"/>
+                      </p:stCondLst>
+                      <p:childTnLst>
+                        <p:par>
+                          <p:cTn id="19" fill="hold">
+                            <p:stCondLst>
+                              <p:cond delay="0"/>
+                            </p:stCondLst>
+                            <p:childTnLst>
+                              <p:par>
+                                <p:cTn id="20" presetID="10" presetClass="entr" presetSubtype="0" fill="hold" grpId="0" nodeType="clickEffect">
+                                  <p:stCondLst>
+                                    <p:cond delay="0"/>
+                                  </p:stCondLst>
+                                  <p:childTnLst>
+                                    <p:set>
+                                      <p:cBhvr>
+                                        <p:cTn id="21" dur="1" fill="hold">
+                                          <p:stCondLst>
+                                            <p:cond delay="0"/>
+                                          </p:stCondLst>
+                                        </p:cTn>
+                                        <p:tgtEl>
+                                          <p:spTgt spid="8"/>
+                                        </p:tgtEl>
+                                        <p:attrNameLst>
+                                          <p:attrName>style.visibility</p:attrName>
+                                        </p:attrNameLst>
+                                      </p:cBhvr>
+                                      <p:to>
+                                        <p:strVal val="visible"/>
+                                      </p:to>
+                                    </p:set>
+                                    <p:animEffect transition="in" filter="fade">
+                                      <p:cBhvr>
+                                        <p:cTn id="22" dur="500"/>
+                                        <p:tgtEl>
+                                          <p:spTgt spid="8"/>
+                                        </p:tgtEl>
+                                      </p:cBhvr>
+                                    </p:animEffect>
+                                  </p:childTnLst>
+                                </p:cTn>
+                              </p:par>
+                            </p:childTnLst>
+                          </p:cTn>
+                        </p:par>
+                      </p:childTnLst>
+                    </p:cTn>
+                  </p:par>
+                  <p:par>
+                    <p:cTn id="23" fill="hold">
+                      <p:stCondLst>
+                        <p:cond delay="indefinite"/>
+                      </p:stCondLst>
+                      <p:childTnLst>
+                        <p:par>
+                          <p:cTn id="24" fill="hold">
+                            <p:stCondLst>
+                              <p:cond delay="0"/>
+                            </p:stCondLst>
+                            <p:childTnLst>
+                              <p:par>
+                                <p:cTn id="25" presetID="10" presetClass="entr" presetSubtype="0" fill="hold" grpId="0" nodeType="clickEffect">
+                                  <p:stCondLst>
+                                    <p:cond delay="0"/>
+                                  </p:stCondLst>
+                                  <p:childTnLst>
+                                    <p:set>
+                                      <p:cBhvr>
+                                        <p:cTn id="26" dur="1" fill="hold">
+                                          <p:stCondLst>
+                                            <p:cond delay="0"/>
+                                          </p:stCondLst>
+                                        </p:cTn>
+                                        <p:tgtEl>
+                                          <p:spTgt spid="9"/>
+                                        </p:tgtEl>
+                                        <p:attrNameLst>
+                                          <p:attrName>style.visibility</p:attrName>
+                                        </p:attrNameLst>
+                                      </p:cBhvr>
+                                      <p:to>
+                                        <p:strVal val="visible"/>
+                                      </p:to>
+                                    </p:set>
+                                    <p:animEffect transition="in" filter="fade">
+                                      <p:cBhvr>
+                                        <p:cTn id="27" dur="500"/>
+                                        <p:tgtEl>
+                                          <p:spTgt spid="9"/>
+                                        </p:tgtEl>
+                                      </p:cBhvr>
+                                    </p:animEffect>
+                                  </p:childTnLst>
+                                </p:cTn>
+                              </p:par>
+                            </p:childTnLst>
+                          </p:cTn>
+                        </p:par>
+                      </p:childTnLst>
+                    </p:cTn>
+                  </p:par>
+                </p:childTnLst>
+              </p:cTn>
+              <p:prevCondLst>
+                <p:cond evt="onPrev" delay="0">
+                  <p:tgtEl>
+                    <p:sldTgt/>
+                  </p:tgtEl>
+                </p:cond>
+              </p:prevCondLst>
+              <p:nextCondLst>
+                <p:cond evt="onNext" delay="0">
+                  <p:tgtEl>
+                    <p:sldTgt/>
+                  </p:tgtEl>
+                </p:cond>
+              </p:nextCondLst>
+            </p:seq>
+          </p:childTnLst>
+        </p:cTn>
+      </p:par>
+    </p:tnLst>
+    <p:bldLst>
+      <p:bldP spid="7" grpId="0"/>
+      <p:bldP spid="8" grpId="0"/>
+      <p:bldP spid="9" grpId="0"/>
+    </p:bldLst>
+  </p:timing>
+</p:sld>
+</file>
+
+<file path=ppt/slides/slide31.xml><?xml version="1.0" encoding="utf-8"?>
+<p:sld xmlns:a="http://schemas.openxmlformats.org/drawingml/2006/main" xmlns:r="http://schemas.openxmlformats.org/officeDocument/2006/relationships" xmlns:p="http://schemas.openxmlformats.org/presentationml/2006/main">
+  <p:cSld>
+    <p:bg>
+      <p:bgPr>
+        <a:solidFill>
+          <a:srgbClr val="F5F5F5"/>
+        </a:solidFill>
+        <a:effectLst/>
+      </p:bgPr>
+    </p:bg>
+    <p:spTree>
+      <p:nvGrpSpPr>
+        <p:cNvPr id="1" name="">
+          <a:extLst>
+            <a:ext uri="{FF2B5EF4-FFF2-40B4-BE49-F238E27FC236}">
               <a16:creationId xmlns:a16="http://schemas.microsoft.com/office/drawing/2014/main" id="{B369858B-F974-765F-F62F-85B9F6673B57}"/>
             </a:ext>
           </a:extLst>
@@ -26855,7 +28081,7 @@
           <a:p>
             <a:fld id="{846B06B1-1179-491F-A487-8E0C403F7C13}" type="slidenum">
               <a:rPr lang="fr-CA" smtClean="0"/>
-              <a:t>30</a:t>
+              <a:t>31</a:t>
             </a:fld>
             <a:endParaRPr lang="fr-CA"/>
           </a:p>
@@ -29315,7 +30541,7 @@
 </p:sld>
 </file>
 
-<file path=ppt/slides/slide31.xml><?xml version="1.0" encoding="utf-8"?>
+<file path=ppt/slides/slide32.xml><?xml version="1.0" encoding="utf-8"?>
 <p:sld xmlns:a="http://schemas.openxmlformats.org/drawingml/2006/main" xmlns:r="http://schemas.openxmlformats.org/officeDocument/2006/relationships" xmlns:p="http://schemas.openxmlformats.org/presentationml/2006/main">
   <p:cSld>
     <p:bg>
@@ -29680,7 +30906,7 @@
           <a:p>
             <a:fld id="{846B06B1-1179-491F-A487-8E0C403F7C13}" type="slidenum">
               <a:rPr lang="fr-CA" smtClean="0"/>
-              <a:t>31</a:t>
+              <a:t>32</a:t>
             </a:fld>
             <a:endParaRPr lang="fr-CA"/>
           </a:p>
@@ -29699,7 +30925,7 @@
 </p:sld>
 </file>
 
-<file path=ppt/slides/slide32.xml><?xml version="1.0" encoding="utf-8"?>
+<file path=ppt/slides/slide33.xml><?xml version="1.0" encoding="utf-8"?>
 <p:sld xmlns:a="http://schemas.openxmlformats.org/drawingml/2006/main" xmlns:r="http://schemas.openxmlformats.org/officeDocument/2006/relationships" xmlns:p="http://schemas.openxmlformats.org/presentationml/2006/main">
   <p:cSld>
     <p:bg>
@@ -29798,7 +31024,7 @@
           <a:p>
             <a:fld id="{846B06B1-1179-491F-A487-8E0C403F7C13}" type="slidenum">
               <a:rPr lang="fr-CA" smtClean="0"/>
-              <a:t>32</a:t>
+              <a:t>33</a:t>
             </a:fld>
             <a:endParaRPr lang="fr-CA"/>
           </a:p>
@@ -31806,7 +33032,7 @@
 </p:sld>
 </file>
 
-<file path=ppt/slides/slide33.xml><?xml version="1.0" encoding="utf-8"?>
+<file path=ppt/slides/slide34.xml><?xml version="1.0" encoding="utf-8"?>
 <p:sld xmlns:a="http://schemas.openxmlformats.org/drawingml/2006/main" xmlns:r="http://schemas.openxmlformats.org/officeDocument/2006/relationships" xmlns:p="http://schemas.openxmlformats.org/presentationml/2006/main">
   <p:cSld>
     <p:bg>
@@ -32024,7 +33250,7 @@
           <a:p>
             <a:fld id="{846B06B1-1179-491F-A487-8E0C403F7C13}" type="slidenum">
               <a:rPr lang="fr-CA" smtClean="0"/>
-              <a:t>33</a:t>
+              <a:t>34</a:t>
             </a:fld>
             <a:endParaRPr lang="fr-CA"/>
           </a:p>
@@ -32300,7 +33526,7 @@
 </p:sld>
 </file>
 
-<file path=ppt/slides/slide34.xml><?xml version="1.0" encoding="utf-8"?>
+<file path=ppt/slides/slide35.xml><?xml version="1.0" encoding="utf-8"?>
 <p:sld xmlns:a="http://schemas.openxmlformats.org/drawingml/2006/main" xmlns:r="http://schemas.openxmlformats.org/officeDocument/2006/relationships" xmlns:p="http://schemas.openxmlformats.org/presentationml/2006/main">
   <p:cSld>
     <p:bg>
@@ -32746,7 +33972,7 @@
           <a:p>
             <a:fld id="{846B06B1-1179-491F-A487-8E0C403F7C13}" type="slidenum">
               <a:rPr lang="fr-CA" smtClean="0"/>
-              <a:t>34</a:t>
+              <a:t>35</a:t>
             </a:fld>
             <a:endParaRPr lang="fr-CA" dirty="0"/>
           </a:p>
@@ -33625,7 +34851,7 @@
 </p:sld>
 </file>
 
-<file path=ppt/slides/slide35.xml><?xml version="1.0" encoding="utf-8"?>
+<file path=ppt/slides/slide36.xml><?xml version="1.0" encoding="utf-8"?>
 <p:sld xmlns:a="http://schemas.openxmlformats.org/drawingml/2006/main" xmlns:r="http://schemas.openxmlformats.org/officeDocument/2006/relationships" xmlns:p="http://schemas.openxmlformats.org/presentationml/2006/main">
   <p:cSld>
     <p:bg>
@@ -34171,7 +35397,7 @@
           <a:p>
             <a:fld id="{846B06B1-1179-491F-A487-8E0C403F7C13}" type="slidenum">
               <a:rPr lang="fr-CA" smtClean="0"/>
-              <a:t>35</a:t>
+              <a:t>36</a:t>
             </a:fld>
             <a:endParaRPr lang="fr-CA"/>
           </a:p>
@@ -35196,7 +36422,7 @@
 </p:sld>
 </file>
 
-<file path=ppt/slides/slide36.xml><?xml version="1.0" encoding="utf-8"?>
+<file path=ppt/slides/slide37.xml><?xml version="1.0" encoding="utf-8"?>
 <p:sld xmlns:a="http://schemas.openxmlformats.org/drawingml/2006/main" xmlns:r="http://schemas.openxmlformats.org/officeDocument/2006/relationships" xmlns:p="http://schemas.openxmlformats.org/presentationml/2006/main">
   <p:cSld>
     <p:bg>
@@ -35637,7 +36863,7 @@
           <a:p>
             <a:fld id="{846B06B1-1179-491F-A487-8E0C403F7C13}" type="slidenum">
               <a:rPr lang="fr-CA" smtClean="0"/>
-              <a:t>36</a:t>
+              <a:t>37</a:t>
             </a:fld>
             <a:endParaRPr lang="fr-CA"/>
           </a:p>
@@ -39115,7 +40341,7 @@
                   <a:rPr lang="fr-CA" sz="1800" dirty="0">
                     <a:latin typeface="Consolas" panose="020B0609020204030204" pitchFamily="49" charset="0"/>
                   </a:rPr>
-                  <a:t>Dans la procédure principale nommée </a:t>
+                  <a:t>Dans la fonction </a:t>
                 </a:r>
                 <a:r>
                   <a:rPr lang="fr-CA" sz="1800" b="1" dirty="0">
@@ -39311,96 +40537,6 @@
     <p:bg>
       <p:bgPr>
         <a:solidFill>
-          <a:srgbClr val="FFFF00"/>
-        </a:solidFill>
-        <a:effectLst/>
-      </p:bgPr>
-    </p:bg>
-    <p:spTree>
-      <p:nvGrpSpPr>
-        <p:cNvPr id="1" name="">
-          <a:extLst>
-            <a:ext uri="{FF2B5EF4-FFF2-40B4-BE49-F238E27FC236}">
-              <a16:creationId xmlns:a16="http://schemas.microsoft.com/office/drawing/2014/main" id="{A79EE80B-5617-3AC9-1D3D-FF9406939B6B}"/>
-            </a:ext>
-          </a:extLst>
-        </p:cNvPr>
-        <p:cNvGrpSpPr/>
-        <p:nvPr/>
-      </p:nvGrpSpPr>
-      <p:grpSpPr>
-        <a:xfrm>
-          <a:off x="0" y="0"/>
-          <a:ext cx="0" cy="0"/>
-          <a:chOff x="0" y="0"/>
-          <a:chExt cx="0" cy="0"/>
-        </a:xfrm>
-      </p:grpSpPr>
-      <p:sp>
-        <p:nvSpPr>
-          <p:cNvPr id="15" name="Rectangle 14">
-            <a:extLst>
-              <a:ext uri="{FF2B5EF4-FFF2-40B4-BE49-F238E27FC236}">
-                <a16:creationId xmlns:a16="http://schemas.microsoft.com/office/drawing/2014/main" id="{AED2F8D1-AEB0-E659-5BE9-F91783BAB484}"/>
-              </a:ext>
-            </a:extLst>
-          </p:cNvPr>
-          <p:cNvSpPr/>
-          <p:nvPr/>
-        </p:nvSpPr>
-        <p:spPr>
-          <a:xfrm>
-            <a:off x="61649" y="3761964"/>
-            <a:ext cx="726332" cy="171230"/>
-          </a:xfrm>
-          <a:prstGeom prst="rect">
-            <a:avLst/>
-          </a:prstGeom>
-        </p:spPr>
-        <p:style>
-          <a:lnRef idx="2">
-            <a:schemeClr val="accent1">
-              <a:shade val="15000"/>
-            </a:schemeClr>
-          </a:lnRef>
-          <a:fillRef idx="1">
-            <a:schemeClr val="accent1"/>
-          </a:fillRef>
-          <a:effectRef idx="0">
-            <a:schemeClr val="accent1"/>
-          </a:effectRef>
-          <a:fontRef idx="minor">
-            <a:schemeClr val="lt1"/>
-          </a:fontRef>
-        </p:style>
-        <p:txBody>
-          <a:bodyPr rtlCol="0" anchor="ctr"/>
-          <a:lstStyle/>
-          <a:p>
-            <a:pPr algn="ctr"/>
-            <a:endParaRPr lang="fr-CA"/>
-          </a:p>
-        </p:txBody>
-      </p:sp>
-    </p:spTree>
-    <p:extLst>
-      <p:ext uri="{BB962C8B-B14F-4D97-AF65-F5344CB8AC3E}">
-        <p14:creationId xmlns:p14="http://schemas.microsoft.com/office/powerpoint/2010/main" val="2781789880"/>
-      </p:ext>
-    </p:extLst>
-  </p:cSld>
-  <p:clrMapOvr>
-    <a:masterClrMapping/>
-  </p:clrMapOvr>
-</p:sld>
-</file>
-
-<file path=ppt/slides/slide9.xml><?xml version="1.0" encoding="utf-8"?>
-<p:sld xmlns:a="http://schemas.openxmlformats.org/drawingml/2006/main" xmlns:r="http://schemas.openxmlformats.org/officeDocument/2006/relationships" xmlns:p="http://schemas.openxmlformats.org/presentationml/2006/main">
-  <p:cSld>
-    <p:bg>
-      <p:bgPr>
-        <a:solidFill>
           <a:srgbClr val="F5F5F5"/>
         </a:solidFill>
         <a:effectLst/>
@@ -39411,7 +40547,7 @@
         <p:cNvPr id="1" name="">
           <a:extLst>
             <a:ext uri="{FF2B5EF4-FFF2-40B4-BE49-F238E27FC236}">
-              <a16:creationId xmlns:a16="http://schemas.microsoft.com/office/drawing/2014/main" id="{87A9263D-4807-E836-9D35-A8E842603F50}"/>
+              <a16:creationId xmlns:a16="http://schemas.microsoft.com/office/drawing/2014/main" id="{93C5DEC3-7310-7337-7303-53B7A45EC2C6}"/>
             </a:ext>
           </a:extLst>
         </p:cNvPr>
@@ -39431,7 +40567,7 @@
           <p:cNvPr id="2" name="Title 1">
             <a:extLst>
               <a:ext uri="{FF2B5EF4-FFF2-40B4-BE49-F238E27FC236}">
-                <a16:creationId xmlns:a16="http://schemas.microsoft.com/office/drawing/2014/main" id="{40528DB6-96D7-8C66-AD82-44F79CA8B635}"/>
+                <a16:creationId xmlns:a16="http://schemas.microsoft.com/office/drawing/2014/main" id="{E054D4E1-4E28-BCF0-8CFA-27CCEFD62976}"/>
               </a:ext>
             </a:extLst>
           </p:cNvPr>
@@ -39448,10 +40584,16 @@
           <a:lstStyle/>
           <a:p>
             <a:r>
-              <a:rPr lang="en-US" dirty="0">
+              <a:rPr lang="en-US">
                 <a:latin typeface="Arial Rounded MT Bold" panose="020F0704030504030204" pitchFamily="34" charset="0"/>
               </a:rPr>
-              <a:t>  Tests: Assertions</a:t>
+              <a:t>Une toute petite </a:t>
+            </a:r>
+            <a:r>
+              <a:rPr lang="en-US" dirty="0" err="1">
+                <a:latin typeface="Arial Rounded MT Bold" panose="020F0704030504030204" pitchFamily="34" charset="0"/>
+              </a:rPr>
+              <a:t>classe</a:t>
             </a:r>
             <a:endParaRPr lang="fr-CA" dirty="0">
               <a:latin typeface="Arial Rounded MT Bold" panose="020F0704030504030204" pitchFamily="34" charset="0"/>
@@ -39459,554 +40601,230 @@
           </a:p>
         </p:txBody>
       </p:sp>
-      <mc:AlternateContent xmlns:mc="http://schemas.openxmlformats.org/markup-compatibility/2006" xmlns:a14="http://schemas.microsoft.com/office/drawing/2010/main">
-        <mc:Choice Requires="a14">
-          <p:sp>
-            <p:nvSpPr>
-              <p:cNvPr id="3" name="Content Placeholder 2">
-                <a:extLst>
-                  <a:ext uri="{FF2B5EF4-FFF2-40B4-BE49-F238E27FC236}">
-                    <a16:creationId xmlns:a16="http://schemas.microsoft.com/office/drawing/2014/main" id="{14A7F48A-C092-F259-986D-A7CD6ECB62B5}"/>
-                  </a:ext>
-                </a:extLst>
-              </p:cNvPr>
-              <p:cNvSpPr>
-                <a:spLocks noGrp="1"/>
-              </p:cNvSpPr>
-              <p:nvPr>
-                <p:ph idx="1"/>
-              </p:nvPr>
-            </p:nvSpPr>
-            <p:spPr/>
-            <p:txBody>
-              <a:bodyPr>
-                <a:normAutofit fontScale="92500"/>
-              </a:bodyPr>
-              <a:lstStyle/>
-              <a:p>
-                <a:pPr marL="0" indent="0" algn="just">
-                  <a:buNone/>
-                </a:pPr>
-                <a:r>
-                  <a:rPr lang="fr-CA" b="1" dirty="0">
-                    <a:latin typeface="Consolas" panose="020B0609020204030204" pitchFamily="49" charset="0"/>
-                  </a:rPr>
-                  <a:t>&gt;&gt;&gt; x = 10      	</a:t>
-                </a:r>
-                <a14:m>
-                  <m:oMath xmlns:m="http://schemas.openxmlformats.org/officeDocument/2006/math">
-                    <m:r>
-                      <a:rPr lang="fr-CA" i="1" smtClean="0">
-                        <a:latin typeface="Cambria Math" panose="02040503050406030204" pitchFamily="18" charset="0"/>
-                        <a:ea typeface="Cambria Math" panose="02040503050406030204" pitchFamily="18" charset="0"/>
-                      </a:rPr>
-                      <m:t>←</m:t>
-                    </m:r>
-                  </m:oMath>
-                </a14:m>
-                <a:r>
-                  <a:rPr lang="fr-CA" dirty="0">
-                    <a:latin typeface="Consolas" panose="020B0609020204030204" pitchFamily="49" charset="0"/>
-                  </a:rPr>
-                  <a:t> </a:t>
-                </a:r>
-                <a:r>
-                  <a:rPr lang="fr-CA" b="1" dirty="0">
-                    <a:solidFill>
-                      <a:srgbClr val="FF2500"/>
-                    </a:solidFill>
-                    <a:latin typeface="Consolas" panose="020B0609020204030204" pitchFamily="49" charset="0"/>
-                  </a:rPr>
-                  <a:t>d</a:t>
-                </a:r>
-                <a:r>
-                  <a:rPr lang="en-US" b="1" dirty="0">
-                    <a:solidFill>
-                      <a:srgbClr val="FF2500"/>
-                    </a:solidFill>
-                    <a:latin typeface="Consolas" panose="020B0609020204030204" pitchFamily="49" charset="0"/>
-                  </a:rPr>
-                  <a:t>éclaration</a:t>
-                </a:r>
-                <a:r>
-                  <a:rPr lang="en-US" b="1" dirty="0">
-                    <a:latin typeface="Consolas" panose="020B0609020204030204" pitchFamily="49" charset="0"/>
-                  </a:rPr>
-                  <a:t> </a:t>
-                </a:r>
-                <a:r>
-                  <a:rPr lang="en-US" dirty="0">
-                    <a:latin typeface="Consolas" panose="020B0609020204030204" pitchFamily="49" charset="0"/>
-                  </a:rPr>
-                  <a:t>+ </a:t>
-                </a:r>
-                <a:r>
-                  <a:rPr lang="en-US" b="1" dirty="0">
-                    <a:solidFill>
-                      <a:srgbClr val="FF2500"/>
-                    </a:solidFill>
-                    <a:latin typeface="Consolas" panose="020B0609020204030204" pitchFamily="49" charset="0"/>
-                  </a:rPr>
-                  <a:t>affectation</a:t>
-                </a:r>
-                <a:endParaRPr lang="fr-CA" b="1" dirty="0">
-                  <a:solidFill>
-                    <a:srgbClr val="FF2500"/>
-                  </a:solidFill>
-                  <a:latin typeface="Consolas" panose="020B0609020204030204" pitchFamily="49" charset="0"/>
-                </a:endParaRPr>
-              </a:p>
-              <a:p>
-                <a:pPr marL="0" indent="0" algn="just">
-                  <a:buNone/>
-                </a:pPr>
-                <a:r>
-                  <a:rPr lang="fr-CA" b="1" dirty="0">
-                    <a:latin typeface="Consolas" panose="020B0609020204030204" pitchFamily="49" charset="0"/>
-                  </a:rPr>
-                  <a:t>&gt;&gt;&gt; id(x)</a:t>
-                </a:r>
-                <a:r>
-                  <a:rPr lang="fr-CA" b="1" dirty="0">
-                    <a:ea typeface="Cambria Math" panose="02040503050406030204" pitchFamily="18" charset="0"/>
-                  </a:rPr>
-                  <a:t>                           	</a:t>
-                </a:r>
-                <a14:m>
-                  <m:oMath xmlns:m="http://schemas.openxmlformats.org/officeDocument/2006/math">
-                    <m:r>
-                      <a:rPr lang="fr-CA" i="1" smtClean="0">
-                        <a:latin typeface="Cambria Math" panose="02040503050406030204" pitchFamily="18" charset="0"/>
-                        <a:ea typeface="Cambria Math" panose="02040503050406030204" pitchFamily="18" charset="0"/>
-                      </a:rPr>
-                      <m:t>←</m:t>
-                    </m:r>
-                  </m:oMath>
-                </a14:m>
-                <a:r>
-                  <a:rPr lang="fr-CA" dirty="0">
-                    <a:latin typeface="Consolas" panose="020B0609020204030204" pitchFamily="49" charset="0"/>
-                  </a:rPr>
-                  <a:t> </a:t>
-                </a:r>
-                <a:r>
-                  <a:rPr lang="en-US" dirty="0">
-                    <a:latin typeface="Consolas" panose="020B0609020204030204" pitchFamily="49" charset="0"/>
-                  </a:rPr>
-                  <a:t>afficher l'</a:t>
-                </a:r>
-                <a:r>
-                  <a:rPr lang="en-US" b="1" dirty="0">
-                    <a:solidFill>
-                      <a:srgbClr val="FF2500"/>
-                    </a:solidFill>
-                    <a:latin typeface="Consolas" panose="020B0609020204030204" pitchFamily="49" charset="0"/>
-                  </a:rPr>
-                  <a:t>adresse</a:t>
-                </a:r>
-                <a:r>
-                  <a:rPr lang="en-US" b="1" dirty="0">
-                    <a:latin typeface="Consolas" panose="020B0609020204030204" pitchFamily="49" charset="0"/>
-                  </a:rPr>
-                  <a:t> </a:t>
-                </a:r>
-                <a:r>
-                  <a:rPr lang="en-US" b="1" dirty="0" err="1">
-                    <a:solidFill>
-                      <a:srgbClr val="FF2500"/>
-                    </a:solidFill>
-                    <a:latin typeface="Consolas" panose="020B0609020204030204" pitchFamily="49" charset="0"/>
-                  </a:rPr>
-                  <a:t>mémoire</a:t>
-                </a:r>
-                <a:r>
-                  <a:rPr lang="en-US" dirty="0">
-                    <a:latin typeface="Consolas" panose="020B0609020204030204" pitchFamily="49" charset="0"/>
-                  </a:rPr>
-                  <a:t> de </a:t>
-                </a:r>
-                <a14:m>
-                  <m:oMath xmlns:m="http://schemas.openxmlformats.org/officeDocument/2006/math">
-                    <m:r>
-                      <a:rPr lang="en-US" i="1" dirty="0" smtClean="0">
-                        <a:latin typeface="Cambria Math" panose="02040503050406030204" pitchFamily="18" charset="0"/>
-                      </a:rPr>
-                      <m:t>𝑥</m:t>
-                    </m:r>
-                  </m:oMath>
-                </a14:m>
-                <a:endParaRPr lang="fr-CA" dirty="0">
-                  <a:latin typeface="Consolas" panose="020B0609020204030204" pitchFamily="49" charset="0"/>
-                </a:endParaRPr>
-              </a:p>
-              <a:p>
-                <a:pPr marL="0" indent="0" algn="just">
-                  <a:buNone/>
-                </a:pPr>
-                <a:r>
-                  <a:rPr lang="fr-CA" dirty="0">
-                    <a:solidFill>
-                      <a:schemeClr val="bg1">
-                        <a:lumMod val="50000"/>
-                      </a:schemeClr>
-                    </a:solidFill>
-                    <a:latin typeface="Consolas" panose="020B0609020204030204" pitchFamily="49" charset="0"/>
-                  </a:rPr>
-                  <a:t>140737066136648</a:t>
-                </a:r>
-              </a:p>
-              <a:p>
-                <a:pPr marL="0" indent="0" algn="just">
-                  <a:buNone/>
-                </a:pPr>
-                <a:r>
-                  <a:rPr lang="fr-CA" b="1" dirty="0">
-                    <a:latin typeface="Consolas" panose="020B0609020204030204" pitchFamily="49" charset="0"/>
-                  </a:rPr>
-                  <a:t>&gt;&gt;&gt; type(x)</a:t>
-                </a:r>
-                <a:r>
-                  <a:rPr lang="fr-CA" b="1" dirty="0">
-                    <a:ea typeface="Cambria Math" panose="02040503050406030204" pitchFamily="18" charset="0"/>
-                  </a:rPr>
-                  <a:t>                      	</a:t>
-                </a:r>
-                <a14:m>
-                  <m:oMath xmlns:m="http://schemas.openxmlformats.org/officeDocument/2006/math">
-                    <m:r>
-                      <a:rPr lang="fr-CA" i="1" smtClean="0">
-                        <a:latin typeface="Cambria Math" panose="02040503050406030204" pitchFamily="18" charset="0"/>
-                        <a:ea typeface="Cambria Math" panose="02040503050406030204" pitchFamily="18" charset="0"/>
-                      </a:rPr>
-                      <m:t>←</m:t>
-                    </m:r>
-                  </m:oMath>
-                </a14:m>
-                <a:r>
-                  <a:rPr lang="fr-CA" dirty="0">
-                    <a:latin typeface="Consolas" panose="020B0609020204030204" pitchFamily="49" charset="0"/>
-                  </a:rPr>
-                  <a:t> </a:t>
-                </a:r>
-                <a:r>
-                  <a:rPr lang="en-US" dirty="0" err="1">
-                    <a:latin typeface="Consolas" panose="020B0609020204030204" pitchFamily="49" charset="0"/>
-                  </a:rPr>
-                  <a:t>afficher</a:t>
-                </a:r>
-                <a:r>
-                  <a:rPr lang="en-US" dirty="0">
-                    <a:latin typeface="Consolas" panose="020B0609020204030204" pitchFamily="49" charset="0"/>
-                  </a:rPr>
-                  <a:t> le </a:t>
-                </a:r>
-                <a:r>
-                  <a:rPr lang="en-US" b="1" dirty="0">
-                    <a:solidFill>
-                      <a:srgbClr val="FF2500"/>
-                    </a:solidFill>
-                    <a:latin typeface="Consolas" panose="020B0609020204030204" pitchFamily="49" charset="0"/>
-                  </a:rPr>
-                  <a:t>type</a:t>
-                </a:r>
-                <a:r>
-                  <a:rPr lang="en-US" dirty="0">
-                    <a:latin typeface="Consolas" panose="020B0609020204030204" pitchFamily="49" charset="0"/>
-                  </a:rPr>
-                  <a:t> de </a:t>
-                </a:r>
-                <a14:m>
-                  <m:oMath xmlns:m="http://schemas.openxmlformats.org/officeDocument/2006/math">
-                    <m:r>
-                      <a:rPr lang="en-US" i="1" dirty="0" smtClean="0">
-                        <a:latin typeface="Cambria Math" panose="02040503050406030204" pitchFamily="18" charset="0"/>
-                      </a:rPr>
-                      <m:t>𝑥</m:t>
-                    </m:r>
-                  </m:oMath>
-                </a14:m>
-                <a:endParaRPr lang="fr-CA" dirty="0">
-                  <a:latin typeface="Consolas" panose="020B0609020204030204" pitchFamily="49" charset="0"/>
-                </a:endParaRPr>
-              </a:p>
-              <a:p>
-                <a:pPr marL="0" indent="0" algn="just">
-                  <a:buNone/>
-                </a:pPr>
-                <a:r>
-                  <a:rPr lang="fr-CA" dirty="0">
-                    <a:solidFill>
-                      <a:schemeClr val="bg1">
-                        <a:lumMod val="50000"/>
-                      </a:schemeClr>
-                    </a:solidFill>
-                    <a:latin typeface="Consolas" panose="020B0609020204030204" pitchFamily="49" charset="0"/>
-                  </a:rPr>
-                  <a:t>&lt;class '</a:t>
-                </a:r>
-                <a:r>
-                  <a:rPr lang="fr-CA" dirty="0" err="1">
-                    <a:solidFill>
-                      <a:schemeClr val="bg1">
-                        <a:lumMod val="50000"/>
-                      </a:schemeClr>
-                    </a:solidFill>
-                    <a:latin typeface="Consolas" panose="020B0609020204030204" pitchFamily="49" charset="0"/>
-                  </a:rPr>
-                  <a:t>int</a:t>
-                </a:r>
-                <a:r>
-                  <a:rPr lang="fr-CA" dirty="0">
-                    <a:solidFill>
-                      <a:schemeClr val="bg1">
-                        <a:lumMod val="50000"/>
-                      </a:schemeClr>
-                    </a:solidFill>
-                    <a:latin typeface="Consolas" panose="020B0609020204030204" pitchFamily="49" charset="0"/>
-                  </a:rPr>
-                  <a:t>'&gt;</a:t>
-                </a:r>
-              </a:p>
-              <a:p>
-                <a:pPr marL="0" indent="0" algn="just">
-                  <a:buNone/>
-                </a:pPr>
-                <a:r>
-                  <a:rPr lang="en-CA" b="1" dirty="0">
-                    <a:latin typeface="Consolas" panose="020B0609020204030204" pitchFamily="49" charset="0"/>
-                  </a:rPr>
-                  <a:t>&gt;&gt;&gt; x = x / 2</a:t>
-                </a:r>
-                <a:r>
-                  <a:rPr lang="fr-CA" dirty="0">
-                    <a:ea typeface="Cambria Math" panose="02040503050406030204" pitchFamily="18" charset="0"/>
-                  </a:rPr>
-                  <a:t>		</a:t>
-                </a:r>
-                <a14:m>
-                  <m:oMath xmlns:m="http://schemas.openxmlformats.org/officeDocument/2006/math">
-                    <m:r>
-                      <a:rPr lang="fr-CA" i="1" smtClean="0">
-                        <a:latin typeface="Cambria Math" panose="02040503050406030204" pitchFamily="18" charset="0"/>
-                        <a:ea typeface="Cambria Math" panose="02040503050406030204" pitchFamily="18" charset="0"/>
-                      </a:rPr>
-                      <m:t>←</m:t>
-                    </m:r>
-                  </m:oMath>
-                </a14:m>
-                <a:r>
-                  <a:rPr lang="en-CA" b="1" dirty="0">
-                    <a:latin typeface="Consolas" panose="020B0609020204030204" pitchFamily="49" charset="0"/>
-                  </a:rPr>
-                  <a:t> </a:t>
-                </a:r>
-                <a:r>
-                  <a:rPr lang="en-CA" dirty="0">
-                    <a:latin typeface="Consolas" panose="020B0609020204030204" pitchFamily="49" charset="0"/>
-                  </a:rPr>
-                  <a:t>re</a:t>
-                </a:r>
-                <a:r>
-                  <a:rPr lang="fr-CA" dirty="0">
-                    <a:latin typeface="Consolas" panose="020B0609020204030204" pitchFamily="49" charset="0"/>
-                  </a:rPr>
-                  <a:t>-affectation (</a:t>
-                </a:r>
-                <a14:m>
-                  <m:oMath xmlns:m="http://schemas.openxmlformats.org/officeDocument/2006/math">
-                    <m:r>
-                      <a:rPr lang="fr-CA" b="0" i="1" smtClean="0">
-                        <a:latin typeface="Cambria Math" panose="02040503050406030204" pitchFamily="18" charset="0"/>
-                      </a:rPr>
-                      <m:t>≠</m:t>
-                    </m:r>
-                  </m:oMath>
-                </a14:m>
-                <a:r>
-                  <a:rPr lang="fr-CA" dirty="0">
-                    <a:latin typeface="Consolas" panose="020B0609020204030204" pitchFamily="49" charset="0"/>
-                  </a:rPr>
-                  <a:t> initialisation)</a:t>
-                </a:r>
-                <a:endParaRPr lang="en-CA" dirty="0">
-                  <a:latin typeface="Consolas" panose="020B0609020204030204" pitchFamily="49" charset="0"/>
-                </a:endParaRPr>
-              </a:p>
-              <a:p>
-                <a:pPr marL="0" indent="0" algn="just">
-                  <a:buNone/>
-                </a:pPr>
-                <a:r>
-                  <a:rPr lang="en-CA" b="1" dirty="0">
-                    <a:latin typeface="Consolas" panose="020B0609020204030204" pitchFamily="49" charset="0"/>
-                  </a:rPr>
-                  <a:t>&gt;&gt;&gt; type(x)</a:t>
-                </a:r>
-              </a:p>
-              <a:p>
-                <a:pPr marL="0" indent="0" algn="just">
-                  <a:buNone/>
-                </a:pPr>
-                <a:r>
-                  <a:rPr lang="fr-CA" dirty="0">
-                    <a:solidFill>
-                      <a:schemeClr val="bg1">
-                        <a:lumMod val="50000"/>
-                      </a:schemeClr>
-                    </a:solidFill>
-                    <a:latin typeface="Consolas" panose="020B0609020204030204" pitchFamily="49" charset="0"/>
-                  </a:rPr>
-                  <a:t>&lt;class '</a:t>
-                </a:r>
-                <a:r>
-                  <a:rPr lang="fr-CA" dirty="0" err="1">
-                    <a:solidFill>
-                      <a:schemeClr val="bg1">
-                        <a:lumMod val="50000"/>
-                      </a:schemeClr>
-                    </a:solidFill>
-                    <a:latin typeface="Consolas" panose="020B0609020204030204" pitchFamily="49" charset="0"/>
-                  </a:rPr>
-                  <a:t>float</a:t>
-                </a:r>
-                <a:r>
-                  <a:rPr lang="fr-CA" dirty="0">
-                    <a:solidFill>
-                      <a:schemeClr val="bg1">
-                        <a:lumMod val="50000"/>
-                      </a:schemeClr>
-                    </a:solidFill>
-                    <a:latin typeface="Consolas" panose="020B0609020204030204" pitchFamily="49" charset="0"/>
-                  </a:rPr>
-                  <a:t>'&gt;</a:t>
-                </a:r>
-                <a:r>
-                  <a:rPr lang="fr-CA" dirty="0">
-                    <a:ea typeface="Cambria Math" panose="02040503050406030204" pitchFamily="18" charset="0"/>
-                  </a:rPr>
-                  <a:t>		</a:t>
-                </a:r>
-                <a14:m>
-                  <m:oMath xmlns:m="http://schemas.openxmlformats.org/officeDocument/2006/math">
-                    <m:r>
-                      <a:rPr lang="fr-CA" i="1" smtClean="0">
-                        <a:latin typeface="Cambria Math" panose="02040503050406030204" pitchFamily="18" charset="0"/>
-                        <a:ea typeface="Cambria Math" panose="02040503050406030204" pitchFamily="18" charset="0"/>
-                      </a:rPr>
-                      <m:t>←</m:t>
-                    </m:r>
-                  </m:oMath>
-                </a14:m>
-                <a:r>
-                  <a:rPr lang="fr-CA" dirty="0">
-                    <a:latin typeface="Consolas" panose="020B0609020204030204" pitchFamily="49" charset="0"/>
-                  </a:rPr>
-                  <a:t> </a:t>
-                </a:r>
-                <a:r>
-                  <a:rPr lang="fr-CA" b="1" dirty="0">
-                    <a:solidFill>
-                      <a:srgbClr val="FF2500"/>
-                    </a:solidFill>
-                    <a:latin typeface="Consolas" panose="020B0609020204030204" pitchFamily="49" charset="0"/>
-                  </a:rPr>
-                  <a:t>typage dynamique</a:t>
-                </a:r>
-              </a:p>
-              <a:p>
-                <a:pPr marL="0" indent="0" algn="just">
-                  <a:buNone/>
-                </a:pPr>
-                <a:endParaRPr lang="fr-CA" dirty="0">
-                  <a:latin typeface="Consolas" panose="020B0609020204030204" pitchFamily="49" charset="0"/>
-                </a:endParaRPr>
-              </a:p>
-            </p:txBody>
-          </p:sp>
-        </mc:Choice>
-        <mc:Fallback xmlns="">
-          <p:sp>
-            <p:nvSpPr>
-              <p:cNvPr id="3" name="Content Placeholder 2">
-                <a:extLst>
-                  <a:ext uri="{FF2B5EF4-FFF2-40B4-BE49-F238E27FC236}">
-                    <a16:creationId xmlns:a16="http://schemas.microsoft.com/office/drawing/2014/main" id="{14A7F48A-C092-F259-986D-A7CD6ECB62B5}"/>
-                  </a:ext>
-                </a:extLst>
-              </p:cNvPr>
-              <p:cNvSpPr>
-                <a:spLocks noGrp="1" noRot="1" noChangeAspect="1" noMove="1" noResize="1" noEditPoints="1" noAdjustHandles="1" noChangeArrowheads="1" noChangeShapeType="1" noTextEdit="1"/>
-              </p:cNvSpPr>
-              <p:nvPr>
-                <p:ph idx="1"/>
-              </p:nvPr>
-            </p:nvSpPr>
-            <p:spPr>
-              <a:blipFill>
-                <a:blip r:embed="rId2"/>
-                <a:stretch>
-                  <a:fillRect l="-1043" t="-2101"/>
-                </a:stretch>
-              </a:blipFill>
-            </p:spPr>
-            <p:txBody>
-              <a:bodyPr/>
-              <a:lstStyle/>
-              <a:p>
-                <a:r>
-                  <a:rPr lang="fr-CA">
-                    <a:noFill/>
-                  </a:rPr>
-                  <a:t> </a:t>
-                </a:r>
-              </a:p>
-            </p:txBody>
-          </p:sp>
-        </mc:Fallback>
-      </mc:AlternateContent>
       <p:sp>
         <p:nvSpPr>
-          <p:cNvPr id="4" name="TextBox 3">
+          <p:cNvPr id="3" name="Content Placeholder 2">
             <a:extLst>
               <a:ext uri="{FF2B5EF4-FFF2-40B4-BE49-F238E27FC236}">
-                <a16:creationId xmlns:a16="http://schemas.microsoft.com/office/drawing/2014/main" id="{DAF4FBA2-0961-5626-9EB2-09EE5BBB250C}"/>
+                <a16:creationId xmlns:a16="http://schemas.microsoft.com/office/drawing/2014/main" id="{B267F79C-AE7A-D42E-495F-CB520C3C804A}"/>
               </a:ext>
             </a:extLst>
           </p:cNvPr>
-          <p:cNvSpPr txBox="1"/>
-          <p:nvPr/>
+          <p:cNvSpPr>
+            <a:spLocks noGrp="1"/>
+          </p:cNvSpPr>
+          <p:nvPr>
+            <p:ph idx="1"/>
+          </p:nvPr>
         </p:nvSpPr>
         <p:spPr>
           <a:xfrm>
-            <a:off x="838199" y="6176963"/>
-            <a:ext cx="10515599" cy="369332"/>
+            <a:off x="838200" y="1818566"/>
+            <a:ext cx="10515600" cy="4351338"/>
           </a:xfrm>
-          <a:prstGeom prst="rect">
-            <a:avLst/>
-          </a:prstGeom>
-          <a:noFill/>
         </p:spPr>
         <p:txBody>
-          <a:bodyPr wrap="square">
-            <a:spAutoFit/>
+          <a:bodyPr>
+            <a:normAutofit/>
           </a:bodyPr>
           <a:lstStyle/>
           <a:p>
-            <a:pPr algn="ctr"/>
-            <a:r>
-              <a:rPr lang="fr-CA" sz="1800" b="1" dirty="0">
-                <a:latin typeface="Consolas" panose="020B0609020204030204" pitchFamily="49" charset="0"/>
-              </a:rPr>
-              <a:t>SOURCE: </a:t>
-            </a:r>
-            <a:r>
-              <a:rPr lang="fr-CA" b="1" dirty="0">
-                <a:latin typeface="Consolas" panose="020B0609020204030204" pitchFamily="49" charset="0"/>
-                <a:hlinkClick r:id="rId3"/>
-              </a:rPr>
-              <a:t>https://docs.python.org/3/library/functions.html</a:t>
-            </a:r>
-            <a:endParaRPr lang="fr-CA" sz="1800" b="1" dirty="0">
+            <a:pPr algn="just">
+              <a:lnSpc>
+                <a:spcPct val="110000"/>
+              </a:lnSpc>
+            </a:pPr>
+            <a:r>
+              <a:rPr lang="fr-CA" sz="1600" dirty="0">
+                <a:latin typeface="Consolas" panose="020B0609020204030204" pitchFamily="49" charset="0"/>
+              </a:rPr>
+              <a:t>Implémenter ces propres types avec </a:t>
+            </a:r>
+            <a:r>
+              <a:rPr lang="fr-FR" sz="1600" b="1" dirty="0">
+                <a:solidFill>
+                  <a:srgbClr val="008800"/>
+                </a:solidFill>
+                <a:latin typeface="Consolas" panose="020B0609020204030204" pitchFamily="49" charset="0"/>
+              </a:rPr>
+              <a:t>class</a:t>
+            </a:r>
+            <a:endParaRPr lang="fr-CA" sz="1200" dirty="0">
+              <a:latin typeface="Consolas" panose="020B0609020204030204" pitchFamily="49" charset="0"/>
+            </a:endParaRPr>
+          </a:p>
+          <a:p>
+            <a:pPr algn="just">
+              <a:lnSpc>
+                <a:spcPct val="110000"/>
+              </a:lnSpc>
+            </a:pPr>
+            <a:r>
+              <a:rPr lang="fr-CA" sz="1600" dirty="0">
+                <a:latin typeface="Consolas" panose="020B0609020204030204" pitchFamily="49" charset="0"/>
+              </a:rPr>
+              <a:t>Hériter des attributs et de méthodes d'une classe de base avec l'héritage</a:t>
+            </a:r>
+          </a:p>
+          <a:p>
+            <a:pPr algn="just">
+              <a:lnSpc>
+                <a:spcPct val="110000"/>
+              </a:lnSpc>
+            </a:pPr>
+            <a:endParaRPr lang="fr-CA" sz="1600" dirty="0">
+              <a:latin typeface="Consolas" panose="020B0609020204030204" pitchFamily="49" charset="0"/>
+            </a:endParaRPr>
+          </a:p>
+          <a:p>
+            <a:pPr algn="just">
+              <a:lnSpc>
+                <a:spcPct val="110000"/>
+              </a:lnSpc>
+            </a:pPr>
+            <a:endParaRPr lang="fr-CA" sz="1600" dirty="0">
+              <a:latin typeface="Consolas" panose="020B0609020204030204" pitchFamily="49" charset="0"/>
+            </a:endParaRPr>
+          </a:p>
+          <a:p>
+            <a:pPr algn="just">
+              <a:lnSpc>
+                <a:spcPct val="110000"/>
+              </a:lnSpc>
+            </a:pPr>
+            <a:endParaRPr lang="fr-CA" sz="1600" dirty="0">
+              <a:latin typeface="Consolas" panose="020B0609020204030204" pitchFamily="49" charset="0"/>
+            </a:endParaRPr>
+          </a:p>
+          <a:p>
+            <a:pPr marL="0" indent="0" algn="just">
+              <a:lnSpc>
+                <a:spcPct val="110000"/>
+              </a:lnSpc>
+              <a:buNone/>
+            </a:pPr>
+            <a:endParaRPr lang="fr-CA" sz="1600" dirty="0">
+              <a:latin typeface="Consolas" panose="020B0609020204030204" pitchFamily="49" charset="0"/>
+            </a:endParaRPr>
+          </a:p>
+          <a:p>
+            <a:pPr algn="just">
+              <a:lnSpc>
+                <a:spcPct val="110000"/>
+              </a:lnSpc>
+            </a:pPr>
+            <a:r>
+              <a:rPr lang="fr-CA" sz="1600" dirty="0">
+                <a:latin typeface="Consolas" panose="020B0609020204030204" pitchFamily="49" charset="0"/>
+              </a:rPr>
+              <a:t>Le nom s'écrit en </a:t>
+            </a:r>
+            <a:r>
+              <a:rPr lang="fr-CA" sz="1600" b="1" dirty="0">
+                <a:latin typeface="Consolas" panose="020B0609020204030204" pitchFamily="49" charset="0"/>
+              </a:rPr>
+              <a:t>CamelCase</a:t>
+            </a:r>
+            <a:r>
+              <a:rPr lang="fr-CA" sz="1600" dirty="0">
+                <a:latin typeface="Consolas" panose="020B0609020204030204" pitchFamily="49" charset="0"/>
+              </a:rPr>
+              <a:t>: </a:t>
+            </a:r>
+            <a:r>
+              <a:rPr lang="fr-FR" sz="1600" b="1" dirty="0">
+                <a:solidFill>
+                  <a:srgbClr val="008800"/>
+                </a:solidFill>
+                <a:latin typeface="Consolas" panose="020B0609020204030204" pitchFamily="49" charset="0"/>
+              </a:rPr>
+              <a:t>class</a:t>
+            </a:r>
+            <a:r>
+              <a:rPr lang="fr-FR" sz="1600" dirty="0">
+                <a:solidFill>
+                  <a:srgbClr val="BBBBBB"/>
+                </a:solidFill>
+                <a:latin typeface="Consolas" panose="020B0609020204030204" pitchFamily="49" charset="0"/>
+              </a:rPr>
+              <a:t> </a:t>
+            </a:r>
+            <a:r>
+              <a:rPr lang="fr-FR" sz="1600" b="1" dirty="0" err="1">
+                <a:solidFill>
+                  <a:srgbClr val="BB0066"/>
+                </a:solidFill>
+                <a:latin typeface="Consolas" panose="020B0609020204030204" pitchFamily="49" charset="0"/>
+              </a:rPr>
+              <a:t>NomClasse</a:t>
+            </a:r>
+            <a:r>
+              <a:rPr lang="fr-FR" sz="1600" dirty="0">
+                <a:solidFill>
+                  <a:srgbClr val="333333"/>
+                </a:solidFill>
+                <a:latin typeface="Consolas" panose="020B0609020204030204" pitchFamily="49" charset="0"/>
+              </a:rPr>
+              <a:t>(</a:t>
+            </a:r>
+            <a:r>
+              <a:rPr lang="fr-FR" sz="1600" b="1" dirty="0" err="1">
+                <a:solidFill>
+                  <a:srgbClr val="FF0000"/>
+                </a:solidFill>
+                <a:latin typeface="Consolas" panose="020B0609020204030204" pitchFamily="49" charset="0"/>
+              </a:rPr>
+              <a:t>NomClasseBase</a:t>
+            </a:r>
+            <a:r>
+              <a:rPr lang="fr-FR" sz="1600" dirty="0">
+                <a:solidFill>
+                  <a:srgbClr val="333333"/>
+                </a:solidFill>
+                <a:latin typeface="Consolas" panose="020B0609020204030204" pitchFamily="49" charset="0"/>
+              </a:rPr>
+              <a:t>)</a:t>
+            </a:r>
+            <a:endParaRPr lang="fr-CA" sz="1600" dirty="0">
+              <a:latin typeface="Consolas" panose="020B0609020204030204" pitchFamily="49" charset="0"/>
+            </a:endParaRPr>
+          </a:p>
+          <a:p>
+            <a:pPr algn="just">
+              <a:lnSpc>
+                <a:spcPct val="110000"/>
+              </a:lnSpc>
+            </a:pPr>
+            <a:r>
+              <a:rPr lang="fr-CA" sz="1600" dirty="0">
+                <a:latin typeface="Consolas" panose="020B0609020204030204" pitchFamily="49" charset="0"/>
+              </a:rPr>
+              <a:t>Ici, </a:t>
+            </a:r>
+            <a:r>
+              <a:rPr lang="fr-FR" sz="1600" b="1" dirty="0" err="1">
+                <a:solidFill>
+                  <a:srgbClr val="008800"/>
+                </a:solidFill>
+                <a:latin typeface="Consolas" panose="020B0609020204030204" pitchFamily="49" charset="0"/>
+              </a:rPr>
+              <a:t>pass</a:t>
+            </a:r>
+            <a:r>
+              <a:rPr lang="fr-CA" sz="1600" dirty="0">
+                <a:latin typeface="Consolas" panose="020B0609020204030204" pitchFamily="49" charset="0"/>
+              </a:rPr>
+              <a:t> signifie que nous n'avons rien à ajouter à la classe de base</a:t>
+            </a:r>
+          </a:p>
+          <a:p>
+            <a:pPr marL="0" indent="0" algn="just">
+              <a:lnSpc>
+                <a:spcPct val="110000"/>
+              </a:lnSpc>
+              <a:buNone/>
+            </a:pPr>
+            <a:endParaRPr lang="fr-CA" sz="1600" dirty="0">
               <a:latin typeface="Consolas" panose="020B0609020204030204" pitchFamily="49" charset="0"/>
             </a:endParaRPr>
           </a:p>
@@ -40017,7 +40835,7 @@
           <p:cNvPr id="5" name="Slide Number Placeholder 4">
             <a:extLst>
               <a:ext uri="{FF2B5EF4-FFF2-40B4-BE49-F238E27FC236}">
-                <a16:creationId xmlns:a16="http://schemas.microsoft.com/office/drawing/2014/main" id="{4ECBB37B-8121-D232-E8C3-6CE634C1FC51}"/>
+                <a16:creationId xmlns:a16="http://schemas.microsoft.com/office/drawing/2014/main" id="{7E874379-A4EC-4900-B3B8-8571191A086D}"/>
               </a:ext>
             </a:extLst>
           </p:cNvPr>
@@ -40035,16 +40853,606 @@
           <a:p>
             <a:fld id="{846B06B1-1179-491F-A487-8E0C403F7C13}" type="slidenum">
               <a:rPr lang="fr-CA" smtClean="0"/>
-              <a:t>9</a:t>
+              <a:t>8</a:t>
             </a:fld>
-            <a:endParaRPr lang="fr-CA"/>
+            <a:endParaRPr lang="fr-CA" dirty="0"/>
           </a:p>
         </p:txBody>
       </p:sp>
+      <p:grpSp>
+        <p:nvGrpSpPr>
+          <p:cNvPr id="35" name="Google Shape;368;p19">
+            <a:extLst>
+              <a:ext uri="{FF2B5EF4-FFF2-40B4-BE49-F238E27FC236}">
+                <a16:creationId xmlns:a16="http://schemas.microsoft.com/office/drawing/2014/main" id="{9CD128A6-7E00-2F94-442B-0B8ADD9B17E9}"/>
+              </a:ext>
+            </a:extLst>
+          </p:cNvPr>
+          <p:cNvGrpSpPr/>
+          <p:nvPr/>
+        </p:nvGrpSpPr>
+        <p:grpSpPr>
+          <a:xfrm>
+            <a:off x="1664970" y="2775966"/>
+            <a:ext cx="6145530" cy="1260001"/>
+            <a:chOff x="6665982" y="3766183"/>
+            <a:chExt cx="6710373" cy="1800001"/>
+          </a:xfrm>
+        </p:grpSpPr>
+        <p:sp>
+          <p:nvSpPr>
+            <p:cNvPr id="36" name="Google Shape;369;p19">
+              <a:extLst>
+                <a:ext uri="{FF2B5EF4-FFF2-40B4-BE49-F238E27FC236}">
+                  <a16:creationId xmlns:a16="http://schemas.microsoft.com/office/drawing/2014/main" id="{E19B3265-5D5A-9EA9-1530-4319F78C9964}"/>
+                </a:ext>
+              </a:extLst>
+            </p:cNvPr>
+            <p:cNvSpPr/>
+            <p:nvPr/>
+          </p:nvSpPr>
+          <p:spPr>
+            <a:xfrm>
+              <a:off x="6665982" y="3766184"/>
+              <a:ext cx="180000" cy="1800000"/>
+            </a:xfrm>
+            <a:prstGeom prst="rect">
+              <a:avLst/>
+            </a:prstGeom>
+            <a:solidFill>
+              <a:srgbClr val="7F7F7F"/>
+            </a:solidFill>
+            <a:ln w="12700" cap="flat" cmpd="sng">
+              <a:solidFill>
+                <a:srgbClr val="7F7F7F"/>
+              </a:solidFill>
+              <a:prstDash val="solid"/>
+              <a:miter lim="800000"/>
+              <a:headEnd type="none" w="sm" len="sm"/>
+              <a:tailEnd type="none" w="sm" len="sm"/>
+            </a:ln>
+          </p:spPr>
+          <p:txBody>
+            <a:bodyPr spcFirstLastPara="1" wrap="square" lIns="91425" tIns="45700" rIns="91425" bIns="45700" anchor="ctr" anchorCtr="0">
+              <a:noAutofit/>
+            </a:bodyPr>
+            <a:lstStyle/>
+            <a:p>
+              <a:pPr marL="0" marR="0" lvl="0" indent="0" algn="ctr" rtl="0">
+                <a:spcBef>
+                  <a:spcPts val="0"/>
+                </a:spcBef>
+                <a:spcAft>
+                  <a:spcPts val="0"/>
+                </a:spcAft>
+                <a:buNone/>
+              </a:pPr>
+              <a:r>
+                <a:rPr lang="fr-CA" sz="1400" dirty="0">
+                  <a:solidFill>
+                    <a:schemeClr val="lt1"/>
+                  </a:solidFill>
+                  <a:latin typeface="Calibri"/>
+                  <a:ea typeface="Calibri"/>
+                  <a:cs typeface="Calibri"/>
+                  <a:sym typeface="Calibri"/>
+                </a:rPr>
+                <a:t>1</a:t>
+              </a:r>
+              <a:endParaRPr sz="1400" dirty="0">
+                <a:solidFill>
+                  <a:schemeClr val="lt1"/>
+                </a:solidFill>
+                <a:latin typeface="Calibri"/>
+                <a:ea typeface="Calibri"/>
+                <a:cs typeface="Calibri"/>
+                <a:sym typeface="Calibri"/>
+              </a:endParaRPr>
+            </a:p>
+            <a:p>
+              <a:pPr marL="0" marR="0" lvl="0" indent="0" algn="ctr" rtl="0">
+                <a:spcBef>
+                  <a:spcPts val="0"/>
+                </a:spcBef>
+                <a:spcAft>
+                  <a:spcPts val="0"/>
+                </a:spcAft>
+                <a:buNone/>
+              </a:pPr>
+              <a:r>
+                <a:rPr lang="fr-CA" sz="1400" dirty="0">
+                  <a:solidFill>
+                    <a:schemeClr val="lt1"/>
+                  </a:solidFill>
+                  <a:latin typeface="Calibri"/>
+                  <a:ea typeface="Calibri"/>
+                  <a:cs typeface="Calibri"/>
+                  <a:sym typeface="Calibri"/>
+                </a:rPr>
+                <a:t>2</a:t>
+              </a:r>
+              <a:endParaRPr sz="1400" dirty="0"/>
+            </a:p>
+            <a:p>
+              <a:pPr marL="0" marR="0" lvl="0" indent="0" algn="ctr" rtl="0">
+                <a:spcBef>
+                  <a:spcPts val="0"/>
+                </a:spcBef>
+                <a:spcAft>
+                  <a:spcPts val="0"/>
+                </a:spcAft>
+                <a:buNone/>
+              </a:pPr>
+              <a:r>
+                <a:rPr lang="fr-CA" sz="1400" dirty="0">
+                  <a:solidFill>
+                    <a:schemeClr val="lt1"/>
+                  </a:solidFill>
+                  <a:latin typeface="Calibri"/>
+                  <a:ea typeface="Calibri"/>
+                  <a:cs typeface="Calibri"/>
+                  <a:sym typeface="Calibri"/>
+                </a:rPr>
+                <a:t>3</a:t>
+              </a:r>
+            </a:p>
+            <a:p>
+              <a:pPr marL="0" marR="0" lvl="0" indent="0" algn="ctr" rtl="0">
+                <a:spcBef>
+                  <a:spcPts val="0"/>
+                </a:spcBef>
+                <a:spcAft>
+                  <a:spcPts val="0"/>
+                </a:spcAft>
+                <a:buNone/>
+              </a:pPr>
+              <a:r>
+                <a:rPr lang="fr-CA" sz="1400" dirty="0">
+                  <a:solidFill>
+                    <a:schemeClr val="lt1"/>
+                  </a:solidFill>
+                  <a:latin typeface="Calibri"/>
+                  <a:ea typeface="Calibri"/>
+                  <a:cs typeface="Calibri"/>
+                  <a:sym typeface="Calibri"/>
+                </a:rPr>
+                <a:t>4</a:t>
+              </a:r>
+            </a:p>
+            <a:p>
+              <a:pPr marL="0" marR="0" lvl="0" indent="0" algn="ctr" rtl="0">
+                <a:spcBef>
+                  <a:spcPts val="0"/>
+                </a:spcBef>
+                <a:spcAft>
+                  <a:spcPts val="0"/>
+                </a:spcAft>
+                <a:buNone/>
+              </a:pPr>
+              <a:r>
+                <a:rPr lang="fr-CA" sz="1400" dirty="0">
+                  <a:solidFill>
+                    <a:schemeClr val="lt1"/>
+                  </a:solidFill>
+                  <a:latin typeface="Calibri"/>
+                  <a:ea typeface="Calibri"/>
+                  <a:cs typeface="Calibri"/>
+                  <a:sym typeface="Calibri"/>
+                </a:rPr>
+                <a:t>5</a:t>
+              </a:r>
+            </a:p>
+          </p:txBody>
+        </p:sp>
+        <p:sp>
+          <p:nvSpPr>
+            <p:cNvPr id="37" name="Google Shape;370;p19">
+              <a:extLst>
+                <a:ext uri="{FF2B5EF4-FFF2-40B4-BE49-F238E27FC236}">
+                  <a16:creationId xmlns:a16="http://schemas.microsoft.com/office/drawing/2014/main" id="{8C65F73F-6C51-BE6F-0BD3-B321337B0518}"/>
+                </a:ext>
+              </a:extLst>
+            </p:cNvPr>
+            <p:cNvSpPr/>
+            <p:nvPr/>
+          </p:nvSpPr>
+          <p:spPr>
+            <a:xfrm>
+              <a:off x="6845982" y="3766183"/>
+              <a:ext cx="6530373" cy="1800000"/>
+            </a:xfrm>
+            <a:prstGeom prst="rect">
+              <a:avLst/>
+            </a:prstGeom>
+            <a:solidFill>
+              <a:srgbClr val="F2F2F2"/>
+            </a:solidFill>
+            <a:ln w="12700" cap="flat" cmpd="sng">
+              <a:solidFill>
+                <a:srgbClr val="7F7F7F"/>
+              </a:solidFill>
+              <a:prstDash val="solid"/>
+              <a:miter lim="800000"/>
+              <a:headEnd type="none" w="sm" len="sm"/>
+              <a:tailEnd type="none" w="sm" len="sm"/>
+            </a:ln>
+          </p:spPr>
+          <p:txBody>
+            <a:bodyPr spcFirstLastPara="1" wrap="square" lIns="91425" tIns="45700" rIns="91425" bIns="45700" anchor="ctr" anchorCtr="0">
+              <a:noAutofit/>
+            </a:bodyPr>
+            <a:lstStyle/>
+            <a:p>
+              <a:r>
+                <a:rPr lang="fr-FR" sz="1400" b="1" dirty="0">
+                  <a:solidFill>
+                    <a:srgbClr val="008800"/>
+                  </a:solidFill>
+                  <a:latin typeface="Consolas" panose="020B0609020204030204" pitchFamily="49" charset="0"/>
+                </a:rPr>
+                <a:t>class</a:t>
+              </a:r>
+              <a:r>
+                <a:rPr lang="fr-FR" sz="1400" dirty="0">
+                  <a:solidFill>
+                    <a:srgbClr val="BBBBBB"/>
+                  </a:solidFill>
+                  <a:latin typeface="Consolas" panose="020B0609020204030204" pitchFamily="49" charset="0"/>
+                </a:rPr>
+                <a:t> </a:t>
+              </a:r>
+              <a:r>
+                <a:rPr lang="fr-FR" sz="1400" b="1" dirty="0" err="1">
+                  <a:solidFill>
+                    <a:srgbClr val="BB0066"/>
+                  </a:solidFill>
+                  <a:latin typeface="Consolas" panose="020B0609020204030204" pitchFamily="49" charset="0"/>
+                </a:rPr>
+                <a:t>TresGrosseErreur</a:t>
+              </a:r>
+              <a:r>
+                <a:rPr lang="fr-FR" sz="1400" dirty="0">
+                  <a:solidFill>
+                    <a:srgbClr val="333333"/>
+                  </a:solidFill>
+                  <a:latin typeface="Consolas" panose="020B0609020204030204" pitchFamily="49" charset="0"/>
+                </a:rPr>
+                <a:t>(</a:t>
+              </a:r>
+              <a:r>
+                <a:rPr lang="fr-FR" sz="1400" b="1" dirty="0">
+                  <a:solidFill>
+                    <a:srgbClr val="FF0000"/>
+                  </a:solidFill>
+                  <a:latin typeface="Consolas" panose="020B0609020204030204" pitchFamily="49" charset="0"/>
+                </a:rPr>
+                <a:t>Exception</a:t>
+              </a:r>
+              <a:r>
+                <a:rPr lang="fr-FR" sz="1400" dirty="0">
+                  <a:solidFill>
+                    <a:srgbClr val="333333"/>
+                  </a:solidFill>
+                  <a:latin typeface="Consolas" panose="020B0609020204030204" pitchFamily="49" charset="0"/>
+                </a:rPr>
+                <a:t>):</a:t>
+              </a:r>
+            </a:p>
+            <a:p>
+              <a:r>
+                <a:rPr lang="fr-FR" sz="1400" dirty="0">
+                  <a:solidFill>
+                    <a:srgbClr val="BBBBBB"/>
+                  </a:solidFill>
+                  <a:latin typeface="Consolas" panose="020B0609020204030204" pitchFamily="49" charset="0"/>
+                </a:rPr>
+                <a:t>  </a:t>
+              </a:r>
+              <a:r>
+                <a:rPr lang="fr-FR" sz="1400" dirty="0">
+                  <a:solidFill>
+                    <a:srgbClr val="DD4422"/>
+                  </a:solidFill>
+                  <a:latin typeface="Consolas" panose="020B0609020204030204" pitchFamily="49" charset="0"/>
+                </a:rPr>
+                <a:t>"""</a:t>
+              </a:r>
+              <a:endParaRPr lang="fr-FR" sz="1400" dirty="0">
+                <a:solidFill>
+                  <a:srgbClr val="333333"/>
+                </a:solidFill>
+                <a:latin typeface="Consolas" panose="020B0609020204030204" pitchFamily="49" charset="0"/>
+              </a:endParaRPr>
+            </a:p>
+            <a:p>
+              <a:r>
+                <a:rPr lang="fr-FR" sz="1400" dirty="0">
+                  <a:solidFill>
+                    <a:srgbClr val="DD4422"/>
+                  </a:solidFill>
+                  <a:latin typeface="Consolas" panose="020B0609020204030204" pitchFamily="49" charset="0"/>
+                </a:rPr>
+                <a:t>  Erreur à lever lorsque Iannick écrit du code.</a:t>
+              </a:r>
+              <a:endParaRPr lang="fr-FR" sz="1400" dirty="0">
+                <a:solidFill>
+                  <a:srgbClr val="333333"/>
+                </a:solidFill>
+                <a:latin typeface="Consolas" panose="020B0609020204030204" pitchFamily="49" charset="0"/>
+              </a:endParaRPr>
+            </a:p>
+            <a:p>
+              <a:r>
+                <a:rPr lang="fr-FR" sz="1400" dirty="0">
+                  <a:solidFill>
+                    <a:srgbClr val="DD4422"/>
+                  </a:solidFill>
+                  <a:latin typeface="Consolas" panose="020B0609020204030204" pitchFamily="49" charset="0"/>
+                </a:rPr>
+                <a:t>  """</a:t>
+              </a:r>
+              <a:endParaRPr lang="fr-FR" sz="1400" dirty="0">
+                <a:solidFill>
+                  <a:srgbClr val="333333"/>
+                </a:solidFill>
+                <a:latin typeface="Consolas" panose="020B0609020204030204" pitchFamily="49" charset="0"/>
+              </a:endParaRPr>
+            </a:p>
+            <a:p>
+              <a:r>
+                <a:rPr lang="fr-FR" sz="1400" dirty="0">
+                  <a:solidFill>
+                    <a:srgbClr val="333333"/>
+                  </a:solidFill>
+                  <a:latin typeface="Consolas" panose="020B0609020204030204" pitchFamily="49" charset="0"/>
+                </a:rPr>
+                <a:t>  </a:t>
+              </a:r>
+              <a:r>
+                <a:rPr lang="fr-FR" sz="1400" b="1" dirty="0" err="1">
+                  <a:solidFill>
+                    <a:srgbClr val="008800"/>
+                  </a:solidFill>
+                  <a:latin typeface="Consolas" panose="020B0609020204030204" pitchFamily="49" charset="0"/>
+                </a:rPr>
+                <a:t>pass</a:t>
+              </a:r>
+              <a:endParaRPr lang="fr-FR" sz="1400" dirty="0">
+                <a:solidFill>
+                  <a:srgbClr val="333333"/>
+                </a:solidFill>
+                <a:latin typeface="Consolas" panose="020B0609020204030204" pitchFamily="49" charset="0"/>
+              </a:endParaRPr>
+            </a:p>
+          </p:txBody>
+        </p:sp>
+      </p:grpSp>
+      <p:grpSp>
+        <p:nvGrpSpPr>
+          <p:cNvPr id="7" name="Google Shape;354;p18">
+            <a:extLst>
+              <a:ext uri="{FF2B5EF4-FFF2-40B4-BE49-F238E27FC236}">
+                <a16:creationId xmlns:a16="http://schemas.microsoft.com/office/drawing/2014/main" id="{9D80F46C-6B9A-A37D-7B0C-4350F054BB42}"/>
+              </a:ext>
+            </a:extLst>
+          </p:cNvPr>
+          <p:cNvGrpSpPr/>
+          <p:nvPr/>
+        </p:nvGrpSpPr>
+        <p:grpSpPr>
+          <a:xfrm>
+            <a:off x="1664970" y="5196738"/>
+            <a:ext cx="6145530" cy="504002"/>
+            <a:chOff x="6682372" y="3766184"/>
+            <a:chExt cx="8984825" cy="230401"/>
+          </a:xfrm>
+        </p:grpSpPr>
+        <p:sp>
+          <p:nvSpPr>
+            <p:cNvPr id="8" name="Google Shape;355;p18">
+              <a:extLst>
+                <a:ext uri="{FF2B5EF4-FFF2-40B4-BE49-F238E27FC236}">
+                  <a16:creationId xmlns:a16="http://schemas.microsoft.com/office/drawing/2014/main" id="{5CE67615-B01F-90C1-BDB4-0700D0F64DC5}"/>
+                </a:ext>
+              </a:extLst>
+            </p:cNvPr>
+            <p:cNvSpPr/>
+            <p:nvPr/>
+          </p:nvSpPr>
+          <p:spPr>
+            <a:xfrm>
+              <a:off x="6682372" y="3766184"/>
+              <a:ext cx="256568" cy="230400"/>
+            </a:xfrm>
+            <a:prstGeom prst="rect">
+              <a:avLst/>
+            </a:prstGeom>
+            <a:solidFill>
+              <a:srgbClr val="7F7F7F"/>
+            </a:solidFill>
+            <a:ln w="12700" cap="flat" cmpd="sng">
+              <a:solidFill>
+                <a:schemeClr val="dk1"/>
+              </a:solidFill>
+              <a:prstDash val="solid"/>
+              <a:miter lim="800000"/>
+              <a:headEnd type="none" w="sm" len="sm"/>
+              <a:tailEnd type="none" w="sm" len="sm"/>
+            </a:ln>
+          </p:spPr>
+          <p:txBody>
+            <a:bodyPr spcFirstLastPara="1" wrap="square" lIns="91425" tIns="45700" rIns="91425" bIns="45700" anchor="ctr" anchorCtr="0">
+              <a:noAutofit/>
+            </a:bodyPr>
+            <a:lstStyle/>
+            <a:p>
+              <a:pPr marL="0" marR="0" lvl="0" indent="0" algn="ctr" rtl="0">
+                <a:spcBef>
+                  <a:spcPts val="0"/>
+                </a:spcBef>
+                <a:spcAft>
+                  <a:spcPts val="0"/>
+                </a:spcAft>
+                <a:buNone/>
+              </a:pPr>
+              <a:r>
+                <a:rPr lang="fr-CA" sz="1400" dirty="0">
+                  <a:solidFill>
+                    <a:schemeClr val="lt1"/>
+                  </a:solidFill>
+                  <a:latin typeface="Calibri"/>
+                  <a:ea typeface="Calibri"/>
+                  <a:cs typeface="Calibri"/>
+                  <a:sym typeface="Calibri"/>
+                </a:rPr>
+                <a:t>1</a:t>
+              </a:r>
+              <a:endParaRPr dirty="0"/>
+            </a:p>
+            <a:p>
+              <a:pPr marL="0" marR="0" lvl="0" indent="0" algn="ctr" rtl="0">
+                <a:spcBef>
+                  <a:spcPts val="0"/>
+                </a:spcBef>
+                <a:spcAft>
+                  <a:spcPts val="0"/>
+                </a:spcAft>
+                <a:buNone/>
+              </a:pPr>
+              <a:r>
+                <a:rPr lang="fr-CA" sz="1400" dirty="0">
+                  <a:solidFill>
+                    <a:schemeClr val="lt1"/>
+                  </a:solidFill>
+                  <a:latin typeface="Calibri"/>
+                  <a:ea typeface="Calibri"/>
+                  <a:cs typeface="Calibri"/>
+                  <a:sym typeface="Calibri"/>
+                </a:rPr>
+                <a:t>2</a:t>
+              </a:r>
+              <a:endParaRPr dirty="0"/>
+            </a:p>
+          </p:txBody>
+        </p:sp>
+        <p:sp>
+          <p:nvSpPr>
+            <p:cNvPr id="9" name="Google Shape;356;p18">
+              <a:extLst>
+                <a:ext uri="{FF2B5EF4-FFF2-40B4-BE49-F238E27FC236}">
+                  <a16:creationId xmlns:a16="http://schemas.microsoft.com/office/drawing/2014/main" id="{B8B7611B-9B69-FD9C-8863-68034416D44C}"/>
+                </a:ext>
+              </a:extLst>
+            </p:cNvPr>
+            <p:cNvSpPr/>
+            <p:nvPr/>
+          </p:nvSpPr>
+          <p:spPr>
+            <a:xfrm>
+              <a:off x="6938940" y="3766185"/>
+              <a:ext cx="8728257" cy="230400"/>
+            </a:xfrm>
+            <a:prstGeom prst="rect">
+              <a:avLst/>
+            </a:prstGeom>
+            <a:solidFill>
+              <a:schemeClr val="dk1"/>
+            </a:solidFill>
+            <a:ln w="12700" cap="flat" cmpd="sng">
+              <a:solidFill>
+                <a:schemeClr val="dk1"/>
+              </a:solidFill>
+              <a:prstDash val="solid"/>
+              <a:miter lim="800000"/>
+              <a:headEnd type="none" w="sm" len="sm"/>
+              <a:tailEnd type="none" w="sm" len="sm"/>
+            </a:ln>
+          </p:spPr>
+          <p:txBody>
+            <a:bodyPr spcFirstLastPara="1" wrap="square" lIns="91425" tIns="45700" rIns="91425" bIns="45700" anchor="ctr" anchorCtr="0">
+              <a:noAutofit/>
+            </a:bodyPr>
+            <a:lstStyle/>
+            <a:p>
+              <a:r>
+                <a:rPr lang="en-CA" sz="1400" b="1" dirty="0">
+                  <a:solidFill>
+                    <a:schemeClr val="bg1"/>
+                  </a:solidFill>
+                  <a:latin typeface="Consolas" panose="020B0609020204030204" pitchFamily="49" charset="0"/>
+                </a:rPr>
+                <a:t>&gt;&gt;&gt; raise </a:t>
+              </a:r>
+              <a:r>
+                <a:rPr lang="en-CA" sz="1400" b="1" dirty="0" err="1">
+                  <a:solidFill>
+                    <a:schemeClr val="bg1"/>
+                  </a:solidFill>
+                  <a:latin typeface="Consolas" panose="020B0609020204030204" pitchFamily="49" charset="0"/>
+                </a:rPr>
+                <a:t>TresGrosseErreur</a:t>
+              </a:r>
+              <a:r>
+                <a:rPr lang="en-CA" sz="1400" b="1" dirty="0">
+                  <a:solidFill>
+                    <a:schemeClr val="bg1"/>
+                  </a:solidFill>
+                  <a:latin typeface="Consolas" panose="020B0609020204030204" pitchFamily="49" charset="0"/>
+                </a:rPr>
+                <a:t>('Oops!')</a:t>
+              </a:r>
+            </a:p>
+            <a:p>
+              <a:r>
+                <a:rPr lang="fr-CA" sz="1400" b="1" dirty="0" err="1">
+                  <a:solidFill>
+                    <a:schemeClr val="bg1"/>
+                  </a:solidFill>
+                  <a:latin typeface="Consolas" panose="020B0609020204030204" pitchFamily="49" charset="0"/>
+                </a:rPr>
+                <a:t>TresGrosseErreur</a:t>
+              </a:r>
+              <a:r>
+                <a:rPr lang="fr-CA" sz="1400" b="1" dirty="0">
+                  <a:solidFill>
+                    <a:schemeClr val="bg1"/>
+                  </a:solidFill>
+                  <a:latin typeface="Consolas" panose="020B0609020204030204" pitchFamily="49" charset="0"/>
+                </a:rPr>
+                <a:t>: </a:t>
+              </a:r>
+              <a:r>
+                <a:rPr lang="fr-CA" sz="1400" b="1" dirty="0" err="1">
+                  <a:solidFill>
+                    <a:schemeClr val="bg1"/>
+                  </a:solidFill>
+                  <a:latin typeface="Consolas" panose="020B0609020204030204" pitchFamily="49" charset="0"/>
+                </a:rPr>
+                <a:t>Oops</a:t>
+              </a:r>
+              <a:r>
+                <a:rPr lang="fr-CA" sz="1400" b="1" dirty="0">
+                  <a:solidFill>
+                    <a:schemeClr val="bg1"/>
+                  </a:solidFill>
+                  <a:latin typeface="Consolas" panose="020B0609020204030204" pitchFamily="49" charset="0"/>
+                </a:rPr>
+                <a:t>!</a:t>
+              </a:r>
+              <a:endParaRPr lang="fr-CA" sz="1400" dirty="0">
+                <a:solidFill>
+                  <a:schemeClr val="bg1"/>
+                </a:solidFill>
+                <a:latin typeface="Consolas" panose="020B0609020204030204" pitchFamily="49" charset="0"/>
+              </a:endParaRPr>
+            </a:p>
+          </p:txBody>
+        </p:sp>
+      </p:grpSp>
     </p:spTree>
     <p:extLst>
       <p:ext uri="{BB962C8B-B14F-4D97-AF65-F5344CB8AC3E}">
-        <p14:creationId xmlns:p14="http://schemas.microsoft.com/office/powerpoint/2010/main" val="2272323523"/>
+        <p14:creationId xmlns:p14="http://schemas.microsoft.com/office/powerpoint/2010/main" val="2241426786"/>
       </p:ext>
     </p:extLst>
   </p:cSld>
@@ -40114,15 +41522,33 @@
                                   </p:childTnLst>
                                 </p:cTn>
                               </p:par>
+                            </p:childTnLst>
+                          </p:cTn>
+                        </p:par>
+                      </p:childTnLst>
+                    </p:cTn>
+                  </p:par>
+                  <p:par>
+                    <p:cTn id="8" fill="hold">
+                      <p:stCondLst>
+                        <p:cond delay="indefinite"/>
+                      </p:stCondLst>
+                      <p:childTnLst>
+                        <p:par>
+                          <p:cTn id="9" fill="hold">
+                            <p:stCondLst>
+                              <p:cond delay="0"/>
+                            </p:stCondLst>
+                            <p:childTnLst>
                               <p:par>
-                                <p:cTn id="8" presetID="10" presetClass="entr" presetSubtype="0" fill="hold" nodeType="withEffect">
+                                <p:cTn id="10" presetID="10" presetClass="entr" presetSubtype="0" fill="hold" nodeType="clickEffect">
                                   <p:stCondLst>
                                     <p:cond delay="0"/>
                                   </p:stCondLst>
                                   <p:childTnLst>
                                     <p:set>
                                       <p:cBhvr>
-                                        <p:cTn id="9" dur="1" fill="hold">
+                                        <p:cTn id="11" dur="1" fill="hold">
                                           <p:stCondLst>
                                             <p:cond delay="0"/>
                                           </p:stCondLst>
@@ -40144,7 +41570,7 @@
                                     </p:set>
                                     <p:animEffect transition="in" filter="fade">
                                       <p:cBhvr>
-                                        <p:cTn id="10" dur="500"/>
+                                        <p:cTn id="12" dur="500"/>
                                         <p:tgtEl>
                                           <p:spTgt spid="3">
                                             <p:txEl>
@@ -40164,36 +41590,32 @@
                     </p:cTn>
                   </p:par>
                   <p:par>
-                    <p:cTn id="11" fill="hold">
+                    <p:cTn id="13" fill="hold">
                       <p:stCondLst>
                         <p:cond delay="indefinite"/>
                       </p:stCondLst>
                       <p:childTnLst>
                         <p:par>
-                          <p:cTn id="12" fill="hold">
+                          <p:cTn id="14" fill="hold">
                             <p:stCondLst>
                               <p:cond delay="0"/>
                             </p:stCondLst>
                             <p:childTnLst>
                               <p:par>
-                                <p:cTn id="13" presetID="10" presetClass="entr" presetSubtype="0" fill="hold" nodeType="clickEffect">
+                                <p:cTn id="15" presetID="10" presetClass="entr" presetSubtype="0" fill="hold" nodeType="clickEffect">
                                   <p:stCondLst>
                                     <p:cond delay="0"/>
                                   </p:stCondLst>
                                   <p:childTnLst>
                                     <p:set>
                                       <p:cBhvr>
-                                        <p:cTn id="14" dur="1" fill="hold">
+                                        <p:cTn id="16" dur="1" fill="hold">
                                           <p:stCondLst>
                                             <p:cond delay="0"/>
                                           </p:stCondLst>
                                         </p:cTn>
                                         <p:tgtEl>
-                                          <p:spTgt spid="3">
-                                            <p:txEl>
-                                              <p:pRg st="2" end="2"/>
-                                            </p:txEl>
-                                          </p:spTgt>
+                                          <p:spTgt spid="35"/>
                                         </p:tgtEl>
                                         <p:attrNameLst>
                                           <p:attrName>style.visibility</p:attrName>
@@ -40205,13 +41627,9 @@
                                     </p:set>
                                     <p:animEffect transition="in" filter="fade">
                                       <p:cBhvr>
-                                        <p:cTn id="15" dur="500"/>
+                                        <p:cTn id="17" dur="500"/>
                                         <p:tgtEl>
-                                          <p:spTgt spid="3">
-                                            <p:txEl>
-                                              <p:pRg st="2" end="2"/>
-                                            </p:txEl>
-                                          </p:spTgt>
+                                          <p:spTgt spid="35"/>
                                         </p:tgtEl>
                                       </p:cBhvr>
                                     </p:animEffect>
@@ -40225,191 +41643,26 @@
                     </p:cTn>
                   </p:par>
                   <p:par>
-                    <p:cTn id="16" fill="hold">
+                    <p:cTn id="18" fill="hold">
                       <p:stCondLst>
                         <p:cond delay="indefinite"/>
                       </p:stCondLst>
                       <p:childTnLst>
                         <p:par>
-                          <p:cTn id="17" fill="hold">
+                          <p:cTn id="19" fill="hold">
                             <p:stCondLst>
                               <p:cond delay="0"/>
                             </p:stCondLst>
                             <p:childTnLst>
                               <p:par>
-                                <p:cTn id="18" presetID="10" presetClass="entr" presetSubtype="0" fill="hold" nodeType="clickEffect">
+                                <p:cTn id="20" presetID="10" presetClass="entr" presetSubtype="0" fill="hold" nodeType="clickEffect">
                                   <p:stCondLst>
                                     <p:cond delay="0"/>
                                   </p:stCondLst>
                                   <p:childTnLst>
                                     <p:set>
                                       <p:cBhvr>
-                                        <p:cTn id="19" dur="1" fill="hold">
-                                          <p:stCondLst>
-                                            <p:cond delay="0"/>
-                                          </p:stCondLst>
-                                        </p:cTn>
-                                        <p:tgtEl>
-                                          <p:spTgt spid="3">
-                                            <p:txEl>
-                                              <p:pRg st="3" end="3"/>
-                                            </p:txEl>
-                                          </p:spTgt>
-                                        </p:tgtEl>
-                                        <p:attrNameLst>
-                                          <p:attrName>style.visibility</p:attrName>
-                                        </p:attrNameLst>
-                                      </p:cBhvr>
-                                      <p:to>
-                                        <p:strVal val="visible"/>
-                                      </p:to>
-                                    </p:set>
-                                    <p:animEffect transition="in" filter="fade">
-                                      <p:cBhvr>
-                                        <p:cTn id="20" dur="500"/>
-                                        <p:tgtEl>
-                                          <p:spTgt spid="3">
-                                            <p:txEl>
-                                              <p:pRg st="3" end="3"/>
-                                            </p:txEl>
-                                          </p:spTgt>
-                                        </p:tgtEl>
-                                      </p:cBhvr>
-                                    </p:animEffect>
-                                  </p:childTnLst>
-                                </p:cTn>
-                              </p:par>
-                            </p:childTnLst>
-                          </p:cTn>
-                        </p:par>
-                      </p:childTnLst>
-                    </p:cTn>
-                  </p:par>
-                  <p:par>
-                    <p:cTn id="21" fill="hold">
-                      <p:stCondLst>
-                        <p:cond delay="indefinite"/>
-                      </p:stCondLst>
-                      <p:childTnLst>
-                        <p:par>
-                          <p:cTn id="22" fill="hold">
-                            <p:stCondLst>
-                              <p:cond delay="0"/>
-                            </p:stCondLst>
-                            <p:childTnLst>
-                              <p:par>
-                                <p:cTn id="23" presetID="10" presetClass="entr" presetSubtype="0" fill="hold" nodeType="clickEffect">
-                                  <p:stCondLst>
-                                    <p:cond delay="0"/>
-                                  </p:stCondLst>
-                                  <p:childTnLst>
-                                    <p:set>
-                                      <p:cBhvr>
-                                        <p:cTn id="24" dur="1" fill="hold">
-                                          <p:stCondLst>
-                                            <p:cond delay="0"/>
-                                          </p:stCondLst>
-                                        </p:cTn>
-                                        <p:tgtEl>
-                                          <p:spTgt spid="3">
-                                            <p:txEl>
-                                              <p:pRg st="4" end="4"/>
-                                            </p:txEl>
-                                          </p:spTgt>
-                                        </p:tgtEl>
-                                        <p:attrNameLst>
-                                          <p:attrName>style.visibility</p:attrName>
-                                        </p:attrNameLst>
-                                      </p:cBhvr>
-                                      <p:to>
-                                        <p:strVal val="visible"/>
-                                      </p:to>
-                                    </p:set>
-                                    <p:animEffect transition="in" filter="fade">
-                                      <p:cBhvr>
-                                        <p:cTn id="25" dur="500"/>
-                                        <p:tgtEl>
-                                          <p:spTgt spid="3">
-                                            <p:txEl>
-                                              <p:pRg st="4" end="4"/>
-                                            </p:txEl>
-                                          </p:spTgt>
-                                        </p:tgtEl>
-                                      </p:cBhvr>
-                                    </p:animEffect>
-                                  </p:childTnLst>
-                                </p:cTn>
-                              </p:par>
-                            </p:childTnLst>
-                          </p:cTn>
-                        </p:par>
-                      </p:childTnLst>
-                    </p:cTn>
-                  </p:par>
-                  <p:par>
-                    <p:cTn id="26" fill="hold">
-                      <p:stCondLst>
-                        <p:cond delay="indefinite"/>
-                      </p:stCondLst>
-                      <p:childTnLst>
-                        <p:par>
-                          <p:cTn id="27" fill="hold">
-                            <p:stCondLst>
-                              <p:cond delay="0"/>
-                            </p:stCondLst>
-                            <p:childTnLst>
-                              <p:par>
-                                <p:cTn id="28" presetID="10" presetClass="entr" presetSubtype="0" fill="hold" nodeType="clickEffect">
-                                  <p:stCondLst>
-                                    <p:cond delay="0"/>
-                                  </p:stCondLst>
-                                  <p:childTnLst>
-                                    <p:set>
-                                      <p:cBhvr>
-                                        <p:cTn id="29" dur="1" fill="hold">
-                                          <p:stCondLst>
-                                            <p:cond delay="0"/>
-                                          </p:stCondLst>
-                                        </p:cTn>
-                                        <p:tgtEl>
-                                          <p:spTgt spid="3">
-                                            <p:txEl>
-                                              <p:pRg st="5" end="5"/>
-                                            </p:txEl>
-                                          </p:spTgt>
-                                        </p:tgtEl>
-                                        <p:attrNameLst>
-                                          <p:attrName>style.visibility</p:attrName>
-                                        </p:attrNameLst>
-                                      </p:cBhvr>
-                                      <p:to>
-                                        <p:strVal val="visible"/>
-                                      </p:to>
-                                    </p:set>
-                                    <p:animEffect transition="in" filter="fade">
-                                      <p:cBhvr>
-                                        <p:cTn id="30" dur="500"/>
-                                        <p:tgtEl>
-                                          <p:spTgt spid="3">
-                                            <p:txEl>
-                                              <p:pRg st="5" end="5"/>
-                                            </p:txEl>
-                                          </p:spTgt>
-                                        </p:tgtEl>
-                                      </p:cBhvr>
-                                    </p:animEffect>
-                                  </p:childTnLst>
-                                </p:cTn>
-                              </p:par>
-                              <p:par>
-                                <p:cTn id="31" presetID="10" presetClass="entr" presetSubtype="0" fill="hold" nodeType="withEffect">
-                                  <p:stCondLst>
-                                    <p:cond delay="0"/>
-                                  </p:stCondLst>
-                                  <p:childTnLst>
-                                    <p:set>
-                                      <p:cBhvr>
-                                        <p:cTn id="32" dur="1" fill="hold">
+                                        <p:cTn id="21" dur="1" fill="hold">
                                           <p:stCondLst>
                                             <p:cond delay="0"/>
                                           </p:stCondLst>
@@ -40431,7 +41684,7 @@
                                     </p:set>
                                     <p:animEffect transition="in" filter="fade">
                                       <p:cBhvr>
-                                        <p:cTn id="33" dur="500"/>
+                                        <p:cTn id="22" dur="500"/>
                                         <p:tgtEl>
                                           <p:spTgt spid="3">
                                             <p:txEl>
@@ -40451,26 +41704,26 @@
                     </p:cTn>
                   </p:par>
                   <p:par>
-                    <p:cTn id="34" fill="hold">
+                    <p:cTn id="23" fill="hold">
                       <p:stCondLst>
                         <p:cond delay="indefinite"/>
                       </p:stCondLst>
                       <p:childTnLst>
                         <p:par>
-                          <p:cTn id="35" fill="hold">
+                          <p:cTn id="24" fill="hold">
                             <p:stCondLst>
                               <p:cond delay="0"/>
                             </p:stCondLst>
                             <p:childTnLst>
                               <p:par>
-                                <p:cTn id="36" presetID="10" presetClass="entr" presetSubtype="0" fill="hold" nodeType="clickEffect">
+                                <p:cTn id="25" presetID="10" presetClass="entr" presetSubtype="0" fill="hold" nodeType="clickEffect">
                                   <p:stCondLst>
                                     <p:cond delay="0"/>
                                   </p:stCondLst>
                                   <p:childTnLst>
                                     <p:set>
                                       <p:cBhvr>
-                                        <p:cTn id="37" dur="1" fill="hold">
+                                        <p:cTn id="26" dur="1" fill="hold">
                                           <p:stCondLst>
                                             <p:cond delay="0"/>
                                           </p:stCondLst>
@@ -40492,13 +41745,66 @@
                                     </p:set>
                                     <p:animEffect transition="in" filter="fade">
                                       <p:cBhvr>
-                                        <p:cTn id="38" dur="500"/>
+                                        <p:cTn id="27" dur="500"/>
                                         <p:tgtEl>
                                           <p:spTgt spid="3">
                                             <p:txEl>
                                               <p:pRg st="7" end="7"/>
                                             </p:txEl>
                                           </p:spTgt>
+                                        </p:tgtEl>
+                                      </p:cBhvr>
+                                    </p:animEffect>
+                                  </p:childTnLst>
+                                </p:cTn>
+                              </p:par>
+                            </p:childTnLst>
+                          </p:cTn>
+                        </p:par>
+                      </p:childTnLst>
+                    </p:cTn>
+                  </p:par>
+                  <p:par>
+                    <p:cTn id="28" fill="hold">
+                      <p:stCondLst>
+                        <p:cond delay="indefinite"/>
+                      </p:stCondLst>
+                      <p:childTnLst>
+                        <p:par>
+                          <p:cTn id="29" fill="hold">
+                            <p:stCondLst>
+                              <p:cond delay="0"/>
+                            </p:stCondLst>
+                            <p:childTnLst>
+                              <p:par>
+                                <p:cTn id="30" presetID="10" presetClass="entr" presetSubtype="0" fill="hold" nodeType="clickEffect">
+                                  <p:stCondLst>
+                                    <p:cond delay="0"/>
+                                  </p:stCondLst>
+                                  <p:childTnLst>
+                                    <p:set>
+                                      <p:cBhvr>
+                                        <p:cTn id="31" dur="1" fill="hold">
+                                          <p:stCondLst>
+                                            <p:cond delay="0"/>
+                                          </p:stCondLst>
+                                        </p:cTn>
+                                        <p:tgtEl>
+                                          <p:spTgt spid="7"/>
+                                        </p:tgtEl>
+                                        <p:attrNameLst>
+                                          <p:attrName>style.visibility</p:attrName>
+                                        </p:attrNameLst>
+                                      </p:cBhvr>
+                                      <p:to>
+                                        <p:strVal val="visible"/>
+                                      </p:to>
+                                    </p:set>
+                                    <p:animEffect transition="in" filter="fade">
+                                      <p:cBhvr>
+                                        <p:cTn id="32" dur="500"/>
+                                        <p:tgtEl>
+                                          <p:spTgt spid="7"/>
                                         </p:tgtEl>
                                       </p:cBhvr>
                                     </p:animEffect>
@@ -40533,6 +41839,96 @@
       </p:par>
     </p:tnLst>
   </p:timing>
+</p:sld>
+</file>
+
+<file path=ppt/slides/slide9.xml><?xml version="1.0" encoding="utf-8"?>
+<p:sld xmlns:a="http://schemas.openxmlformats.org/drawingml/2006/main" xmlns:r="http://schemas.openxmlformats.org/officeDocument/2006/relationships" xmlns:p="http://schemas.openxmlformats.org/presentationml/2006/main">
+  <p:cSld>
+    <p:bg>
+      <p:bgPr>
+        <a:solidFill>
+          <a:srgbClr val="FFFF00"/>
+        </a:solidFill>
+        <a:effectLst/>
+      </p:bgPr>
+    </p:bg>
+    <p:spTree>
+      <p:nvGrpSpPr>
+        <p:cNvPr id="1" name="">
+          <a:extLst>
+            <a:ext uri="{FF2B5EF4-FFF2-40B4-BE49-F238E27FC236}">
+              <a16:creationId xmlns:a16="http://schemas.microsoft.com/office/drawing/2014/main" id="{A79EE80B-5617-3AC9-1D3D-FF9406939B6B}"/>
+            </a:ext>
+          </a:extLst>
+        </p:cNvPr>
+        <p:cNvGrpSpPr/>
+        <p:nvPr/>
+      </p:nvGrpSpPr>
+      <p:grpSpPr>
+        <a:xfrm>
+          <a:off x="0" y="0"/>
+          <a:ext cx="0" cy="0"/>
+          <a:chOff x="0" y="0"/>
+          <a:chExt cx="0" cy="0"/>
+        </a:xfrm>
+      </p:grpSpPr>
+      <p:sp>
+        <p:nvSpPr>
+          <p:cNvPr id="15" name="Rectangle 14">
+            <a:extLst>
+              <a:ext uri="{FF2B5EF4-FFF2-40B4-BE49-F238E27FC236}">
+                <a16:creationId xmlns:a16="http://schemas.microsoft.com/office/drawing/2014/main" id="{AED2F8D1-AEB0-E659-5BE9-F91783BAB484}"/>
+              </a:ext>
+            </a:extLst>
+          </p:cNvPr>
+          <p:cNvSpPr/>
+          <p:nvPr/>
+        </p:nvSpPr>
+        <p:spPr>
+          <a:xfrm>
+            <a:off x="61649" y="3761964"/>
+            <a:ext cx="726332" cy="171230"/>
+          </a:xfrm>
+          <a:prstGeom prst="rect">
+            <a:avLst/>
+          </a:prstGeom>
+        </p:spPr>
+        <p:style>
+          <a:lnRef idx="2">
+            <a:schemeClr val="accent1">
+              <a:shade val="15000"/>
+            </a:schemeClr>
+          </a:lnRef>
+          <a:fillRef idx="1">
+            <a:schemeClr val="accent1"/>
+          </a:fillRef>
+          <a:effectRef idx="0">
+            <a:schemeClr val="accent1"/>
+          </a:effectRef>
+          <a:fontRef idx="minor">
+            <a:schemeClr val="lt1"/>
+          </a:fontRef>
+        </p:style>
+        <p:txBody>
+          <a:bodyPr rtlCol="0" anchor="ctr"/>
+          <a:lstStyle/>
+          <a:p>
+            <a:pPr algn="ctr"/>
+            <a:endParaRPr lang="fr-CA"/>
+          </a:p>
+        </p:txBody>
+      </p:sp>
+    </p:spTree>
+    <p:extLst>
+      <p:ext uri="{BB962C8B-B14F-4D97-AF65-F5344CB8AC3E}">
+        <p14:creationId xmlns:p14="http://schemas.microsoft.com/office/powerpoint/2010/main" val="2781789880"/>
+      </p:ext>
+    </p:extLst>
+  </p:cSld>
+  <p:clrMapOvr>
+    <a:masterClrMapping/>
+  </p:clrMapOvr>
 </p:sld>
 </file>
 

--- a/python_2/presentation_python_2.pptx
+++ b/python_2/presentation_python_2.pptx
@@ -5,7 +5,7 @@
     <p:sldMasterId id="2147483648" r:id="rId1"/>
   </p:sldMasterIdLst>
   <p:notesMasterIdLst>
-    <p:notesMasterId r:id="rId39"/>
+    <p:notesMasterId r:id="rId40"/>
   </p:notesMasterIdLst>
   <p:sldIdLst>
     <p:sldId id="256" r:id="rId2"/>
@@ -16,35 +16,36 @@
     <p:sldId id="300" r:id="rId7"/>
     <p:sldId id="301" r:id="rId8"/>
     <p:sldId id="302" r:id="rId9"/>
-    <p:sldId id="297" r:id="rId10"/>
-    <p:sldId id="294" r:id="rId11"/>
-    <p:sldId id="259" r:id="rId12"/>
-    <p:sldId id="263" r:id="rId13"/>
-    <p:sldId id="260" r:id="rId14"/>
-    <p:sldId id="261" r:id="rId15"/>
-    <p:sldId id="264" r:id="rId16"/>
-    <p:sldId id="265" r:id="rId17"/>
-    <p:sldId id="266" r:id="rId18"/>
-    <p:sldId id="268" r:id="rId19"/>
-    <p:sldId id="269" r:id="rId20"/>
-    <p:sldId id="271" r:id="rId21"/>
-    <p:sldId id="272" r:id="rId22"/>
-    <p:sldId id="273" r:id="rId23"/>
-    <p:sldId id="274" r:id="rId24"/>
-    <p:sldId id="275" r:id="rId25"/>
-    <p:sldId id="276" r:id="rId26"/>
-    <p:sldId id="277" r:id="rId27"/>
-    <p:sldId id="278" r:id="rId28"/>
-    <p:sldId id="282" r:id="rId29"/>
-    <p:sldId id="283" r:id="rId30"/>
-    <p:sldId id="280" r:id="rId31"/>
-    <p:sldId id="279" r:id="rId32"/>
-    <p:sldId id="288" r:id="rId33"/>
-    <p:sldId id="289" r:id="rId34"/>
-    <p:sldId id="292" r:id="rId35"/>
-    <p:sldId id="291" r:id="rId36"/>
-    <p:sldId id="281" r:id="rId37"/>
-    <p:sldId id="290" r:id="rId38"/>
+    <p:sldId id="303" r:id="rId10"/>
+    <p:sldId id="297" r:id="rId11"/>
+    <p:sldId id="294" r:id="rId12"/>
+    <p:sldId id="259" r:id="rId13"/>
+    <p:sldId id="263" r:id="rId14"/>
+    <p:sldId id="260" r:id="rId15"/>
+    <p:sldId id="261" r:id="rId16"/>
+    <p:sldId id="264" r:id="rId17"/>
+    <p:sldId id="265" r:id="rId18"/>
+    <p:sldId id="266" r:id="rId19"/>
+    <p:sldId id="268" r:id="rId20"/>
+    <p:sldId id="269" r:id="rId21"/>
+    <p:sldId id="271" r:id="rId22"/>
+    <p:sldId id="272" r:id="rId23"/>
+    <p:sldId id="273" r:id="rId24"/>
+    <p:sldId id="274" r:id="rId25"/>
+    <p:sldId id="275" r:id="rId26"/>
+    <p:sldId id="276" r:id="rId27"/>
+    <p:sldId id="277" r:id="rId28"/>
+    <p:sldId id="278" r:id="rId29"/>
+    <p:sldId id="282" r:id="rId30"/>
+    <p:sldId id="283" r:id="rId31"/>
+    <p:sldId id="280" r:id="rId32"/>
+    <p:sldId id="279" r:id="rId33"/>
+    <p:sldId id="288" r:id="rId34"/>
+    <p:sldId id="289" r:id="rId35"/>
+    <p:sldId id="292" r:id="rId36"/>
+    <p:sldId id="291" r:id="rId37"/>
+    <p:sldId id="281" r:id="rId38"/>
+    <p:sldId id="290" r:id="rId39"/>
   </p:sldIdLst>
   <p:sldSz cx="12192000" cy="6858000"/>
   <p:notesSz cx="6858000" cy="9144000"/>
@@ -604,6 +605,114 @@
     <p:extLst>
       <p:ext uri="{BB962C8B-B14F-4D97-AF65-F5344CB8AC3E}">
         <p14:creationId xmlns:p14="http://schemas.microsoft.com/office/powerpoint/2010/main" val="506805993"/>
+      </p:ext>
+    </p:extLst>
+  </p:cSld>
+  <p:clrMapOvr>
+    <a:masterClrMapping/>
+  </p:clrMapOvr>
+</p:notes>
+</file>
+
+<file path=ppt/notesSlides/notesSlide2.xml><?xml version="1.0" encoding="utf-8"?>
+<p:notes xmlns:a="http://schemas.openxmlformats.org/drawingml/2006/main" xmlns:r="http://schemas.openxmlformats.org/officeDocument/2006/relationships" xmlns:p="http://schemas.openxmlformats.org/presentationml/2006/main">
+  <p:cSld>
+    <p:spTree>
+      <p:nvGrpSpPr>
+        <p:cNvPr id="1" name="">
+          <a:extLst>
+            <a:ext uri="{FF2B5EF4-FFF2-40B4-BE49-F238E27FC236}">
+              <a16:creationId xmlns:a16="http://schemas.microsoft.com/office/drawing/2014/main" id="{8CBC4B78-5649-C20C-3173-F5A0CB4D37F3}"/>
+            </a:ext>
+          </a:extLst>
+        </p:cNvPr>
+        <p:cNvGrpSpPr/>
+        <p:nvPr/>
+      </p:nvGrpSpPr>
+      <p:grpSpPr>
+        <a:xfrm>
+          <a:off x="0" y="0"/>
+          <a:ext cx="0" cy="0"/>
+          <a:chOff x="0" y="0"/>
+          <a:chExt cx="0" cy="0"/>
+        </a:xfrm>
+      </p:grpSpPr>
+      <p:sp>
+        <p:nvSpPr>
+          <p:cNvPr id="2" name="Slide Image Placeholder 1">
+            <a:extLst>
+              <a:ext uri="{FF2B5EF4-FFF2-40B4-BE49-F238E27FC236}">
+                <a16:creationId xmlns:a16="http://schemas.microsoft.com/office/drawing/2014/main" id="{CD5BEF0D-7BAE-799A-AD9F-CCE04C84E889}"/>
+              </a:ext>
+            </a:extLst>
+          </p:cNvPr>
+          <p:cNvSpPr>
+            <a:spLocks noGrp="1" noRot="1" noChangeAspect="1"/>
+          </p:cNvSpPr>
+          <p:nvPr>
+            <p:ph type="sldImg"/>
+          </p:nvPr>
+        </p:nvSpPr>
+        <p:spPr/>
+      </p:sp>
+      <p:sp>
+        <p:nvSpPr>
+          <p:cNvPr id="3" name="Notes Placeholder 2">
+            <a:extLst>
+              <a:ext uri="{FF2B5EF4-FFF2-40B4-BE49-F238E27FC236}">
+                <a16:creationId xmlns:a16="http://schemas.microsoft.com/office/drawing/2014/main" id="{0ACB2F88-FD50-1F5A-EA21-AD6183804354}"/>
+              </a:ext>
+            </a:extLst>
+          </p:cNvPr>
+          <p:cNvSpPr>
+            <a:spLocks noGrp="1"/>
+          </p:cNvSpPr>
+          <p:nvPr>
+            <p:ph type="body" idx="1"/>
+          </p:nvPr>
+        </p:nvSpPr>
+        <p:spPr/>
+        <p:txBody>
+          <a:bodyPr/>
+          <a:lstStyle/>
+          <a:p>
+            <a:endParaRPr lang="fr-CA" dirty="0"/>
+          </a:p>
+        </p:txBody>
+      </p:sp>
+      <p:sp>
+        <p:nvSpPr>
+          <p:cNvPr id="4" name="Slide Number Placeholder 3">
+            <a:extLst>
+              <a:ext uri="{FF2B5EF4-FFF2-40B4-BE49-F238E27FC236}">
+                <a16:creationId xmlns:a16="http://schemas.microsoft.com/office/drawing/2014/main" id="{6DA482DF-DBEC-AABD-62F3-9198234F2D2F}"/>
+              </a:ext>
+            </a:extLst>
+          </p:cNvPr>
+          <p:cNvSpPr>
+            <a:spLocks noGrp="1"/>
+          </p:cNvSpPr>
+          <p:nvPr>
+            <p:ph type="sldNum" sz="quarter" idx="5"/>
+          </p:nvPr>
+        </p:nvSpPr>
+        <p:spPr/>
+        <p:txBody>
+          <a:bodyPr/>
+          <a:lstStyle/>
+          <a:p>
+            <a:fld id="{D755565A-1FEC-4FFE-8425-B731D92946D0}" type="slidenum">
+              <a:rPr lang="fr-CA" smtClean="0"/>
+              <a:t>9</a:t>
+            </a:fld>
+            <a:endParaRPr lang="fr-CA"/>
+          </a:p>
+        </p:txBody>
+      </p:sp>
+    </p:spTree>
+    <p:extLst>
+      <p:ext uri="{BB962C8B-B14F-4D97-AF65-F5344CB8AC3E}">
+        <p14:creationId xmlns:p14="http://schemas.microsoft.com/office/powerpoint/2010/main" val="1904747290"/>
       </p:ext>
     </p:extLst>
   </p:cSld>
@@ -4444,6 +4553,96 @@
 </file>
 
 <file path=ppt/slides/slide10.xml><?xml version="1.0" encoding="utf-8"?>
+<p:sld xmlns:a="http://schemas.openxmlformats.org/drawingml/2006/main" xmlns:r="http://schemas.openxmlformats.org/officeDocument/2006/relationships" xmlns:p="http://schemas.openxmlformats.org/presentationml/2006/main">
+  <p:cSld>
+    <p:bg>
+      <p:bgPr>
+        <a:solidFill>
+          <a:srgbClr val="FFFF00"/>
+        </a:solidFill>
+        <a:effectLst/>
+      </p:bgPr>
+    </p:bg>
+    <p:spTree>
+      <p:nvGrpSpPr>
+        <p:cNvPr id="1" name="">
+          <a:extLst>
+            <a:ext uri="{FF2B5EF4-FFF2-40B4-BE49-F238E27FC236}">
+              <a16:creationId xmlns:a16="http://schemas.microsoft.com/office/drawing/2014/main" id="{A79EE80B-5617-3AC9-1D3D-FF9406939B6B}"/>
+            </a:ext>
+          </a:extLst>
+        </p:cNvPr>
+        <p:cNvGrpSpPr/>
+        <p:nvPr/>
+      </p:nvGrpSpPr>
+      <p:grpSpPr>
+        <a:xfrm>
+          <a:off x="0" y="0"/>
+          <a:ext cx="0" cy="0"/>
+          <a:chOff x="0" y="0"/>
+          <a:chExt cx="0" cy="0"/>
+        </a:xfrm>
+      </p:grpSpPr>
+      <p:sp>
+        <p:nvSpPr>
+          <p:cNvPr id="15" name="Rectangle 14">
+            <a:extLst>
+              <a:ext uri="{FF2B5EF4-FFF2-40B4-BE49-F238E27FC236}">
+                <a16:creationId xmlns:a16="http://schemas.microsoft.com/office/drawing/2014/main" id="{AED2F8D1-AEB0-E659-5BE9-F91783BAB484}"/>
+              </a:ext>
+            </a:extLst>
+          </p:cNvPr>
+          <p:cNvSpPr/>
+          <p:nvPr/>
+        </p:nvSpPr>
+        <p:spPr>
+          <a:xfrm>
+            <a:off x="61649" y="3761964"/>
+            <a:ext cx="726332" cy="171230"/>
+          </a:xfrm>
+          <a:prstGeom prst="rect">
+            <a:avLst/>
+          </a:prstGeom>
+        </p:spPr>
+        <p:style>
+          <a:lnRef idx="2">
+            <a:schemeClr val="accent1">
+              <a:shade val="15000"/>
+            </a:schemeClr>
+          </a:lnRef>
+          <a:fillRef idx="1">
+            <a:schemeClr val="accent1"/>
+          </a:fillRef>
+          <a:effectRef idx="0">
+            <a:schemeClr val="accent1"/>
+          </a:effectRef>
+          <a:fontRef idx="minor">
+            <a:schemeClr val="lt1"/>
+          </a:fontRef>
+        </p:style>
+        <p:txBody>
+          <a:bodyPr rtlCol="0" anchor="ctr"/>
+          <a:lstStyle/>
+          <a:p>
+            <a:pPr algn="ctr"/>
+            <a:endParaRPr lang="fr-CA"/>
+          </a:p>
+        </p:txBody>
+      </p:sp>
+    </p:spTree>
+    <p:extLst>
+      <p:ext uri="{BB962C8B-B14F-4D97-AF65-F5344CB8AC3E}">
+        <p14:creationId xmlns:p14="http://schemas.microsoft.com/office/powerpoint/2010/main" val="2781789880"/>
+      </p:ext>
+    </p:extLst>
+  </p:cSld>
+  <p:clrMapOvr>
+    <a:masterClrMapping/>
+  </p:clrMapOvr>
+</p:sld>
+</file>
+
+<file path=ppt/slides/slide11.xml><?xml version="1.0" encoding="utf-8"?>
 <p:sld xmlns:a="http://schemas.openxmlformats.org/drawingml/2006/main" xmlns:r="http://schemas.openxmlformats.org/officeDocument/2006/relationships" xmlns:p="http://schemas.openxmlformats.org/presentationml/2006/main">
   <p:cSld>
     <p:bg>
@@ -5083,7 +5282,7 @@
           <a:p>
             <a:fld id="{846B06B1-1179-491F-A487-8E0C403F7C13}" type="slidenum">
               <a:rPr lang="fr-CA" smtClean="0"/>
-              <a:t>10</a:t>
+              <a:t>11</a:t>
             </a:fld>
             <a:endParaRPr lang="fr-CA"/>
           </a:p>
@@ -5584,7 +5783,7 @@
 </p:sld>
 </file>
 
-<file path=ppt/slides/slide11.xml><?xml version="1.0" encoding="utf-8"?>
+<file path=ppt/slides/slide12.xml><?xml version="1.0" encoding="utf-8"?>
 <p:sld xmlns:a="http://schemas.openxmlformats.org/drawingml/2006/main" xmlns:r="http://schemas.openxmlformats.org/officeDocument/2006/relationships" xmlns:p="http://schemas.openxmlformats.org/presentationml/2006/main">
   <p:cSld>
     <p:bg>
@@ -6074,7 +6273,7 @@
           <a:p>
             <a:fld id="{846B06B1-1179-491F-A487-8E0C403F7C13}" type="slidenum">
               <a:rPr lang="fr-CA" smtClean="0"/>
-              <a:t>11</a:t>
+              <a:t>12</a:t>
             </a:fld>
             <a:endParaRPr lang="fr-CA"/>
           </a:p>
@@ -6611,7 +6810,7 @@
 </p:sld>
 </file>
 
-<file path=ppt/slides/slide12.xml><?xml version="1.0" encoding="utf-8"?>
+<file path=ppt/slides/slide13.xml><?xml version="1.0" encoding="utf-8"?>
 <p:sld xmlns:a="http://schemas.openxmlformats.org/drawingml/2006/main" xmlns:r="http://schemas.openxmlformats.org/officeDocument/2006/relationships" xmlns:p="http://schemas.openxmlformats.org/presentationml/2006/main">
   <p:cSld>
     <p:bg>
@@ -6993,7 +7192,7 @@
           <a:p>
             <a:fld id="{846B06B1-1179-491F-A487-8E0C403F7C13}" type="slidenum">
               <a:rPr lang="fr-CA" smtClean="0"/>
-              <a:t>12</a:t>
+              <a:t>13</a:t>
             </a:fld>
             <a:endParaRPr lang="fr-CA"/>
           </a:p>
@@ -7372,7 +7571,7 @@
 </p:sld>
 </file>
 
-<file path=ppt/slides/slide13.xml><?xml version="1.0" encoding="utf-8"?>
+<file path=ppt/slides/slide14.xml><?xml version="1.0" encoding="utf-8"?>
 <p:sld xmlns:a="http://schemas.openxmlformats.org/drawingml/2006/main" xmlns:r="http://schemas.openxmlformats.org/officeDocument/2006/relationships" xmlns:p="http://schemas.openxmlformats.org/presentationml/2006/main">
   <p:cSld>
     <p:bg>
@@ -7839,7 +8038,7 @@
           <a:p>
             <a:fld id="{846B06B1-1179-491F-A487-8E0C403F7C13}" type="slidenum">
               <a:rPr lang="fr-CA" smtClean="0"/>
-              <a:t>13</a:t>
+              <a:t>14</a:t>
             </a:fld>
             <a:endParaRPr lang="fr-CA"/>
           </a:p>
@@ -8453,7 +8652,7 @@
 </p:sld>
 </file>
 
-<file path=ppt/slides/slide14.xml><?xml version="1.0" encoding="utf-8"?>
+<file path=ppt/slides/slide15.xml><?xml version="1.0" encoding="utf-8"?>
 <p:sld xmlns:a="http://schemas.openxmlformats.org/drawingml/2006/main" xmlns:r="http://schemas.openxmlformats.org/officeDocument/2006/relationships" xmlns:p="http://schemas.openxmlformats.org/presentationml/2006/main">
   <p:cSld>
     <p:bg>
@@ -9188,7 +9387,7 @@
           <a:p>
             <a:fld id="{846B06B1-1179-491F-A487-8E0C403F7C13}" type="slidenum">
               <a:rPr lang="fr-CA" smtClean="0"/>
-              <a:t>14</a:t>
+              <a:t>15</a:t>
             </a:fld>
             <a:endParaRPr lang="fr-CA"/>
           </a:p>
@@ -9207,7 +9406,7 @@
 </p:sld>
 </file>
 
-<file path=ppt/slides/slide15.xml><?xml version="1.0" encoding="utf-8"?>
+<file path=ppt/slides/slide16.xml><?xml version="1.0" encoding="utf-8"?>
 <p:sld xmlns:a="http://schemas.openxmlformats.org/drawingml/2006/main" xmlns:r="http://schemas.openxmlformats.org/officeDocument/2006/relationships" xmlns:p="http://schemas.openxmlformats.org/presentationml/2006/main">
   <p:cSld>
     <p:bg>
@@ -9315,7 +9514,7 @@
           <a:p>
             <a:fld id="{846B06B1-1179-491F-A487-8E0C403F7C13}" type="slidenum">
               <a:rPr lang="fr-CA" smtClean="0"/>
-              <a:t>15</a:t>
+              <a:t>16</a:t>
             </a:fld>
             <a:endParaRPr lang="fr-CA"/>
           </a:p>
@@ -9958,7 +10157,7 @@
 </p:sld>
 </file>
 
-<file path=ppt/slides/slide16.xml><?xml version="1.0" encoding="utf-8"?>
+<file path=ppt/slides/slide17.xml><?xml version="1.0" encoding="utf-8"?>
 <p:sld xmlns:a="http://schemas.openxmlformats.org/drawingml/2006/main" xmlns:r="http://schemas.openxmlformats.org/officeDocument/2006/relationships" xmlns:p="http://schemas.openxmlformats.org/presentationml/2006/main">
   <p:cSld>
     <p:bg>
@@ -10214,7 +10413,7 @@
           <a:p>
             <a:fld id="{846B06B1-1179-491F-A487-8E0C403F7C13}" type="slidenum">
               <a:rPr lang="fr-CA" smtClean="0"/>
-              <a:t>16</a:t>
+              <a:t>17</a:t>
             </a:fld>
             <a:endParaRPr lang="fr-CA"/>
           </a:p>
@@ -11239,7 +11438,7 @@
 </p:sld>
 </file>
 
-<file path=ppt/slides/slide17.xml><?xml version="1.0" encoding="utf-8"?>
+<file path=ppt/slides/slide18.xml><?xml version="1.0" encoding="utf-8"?>
 <p:sld xmlns:a="http://schemas.openxmlformats.org/drawingml/2006/main" xmlns:r="http://schemas.openxmlformats.org/officeDocument/2006/relationships" xmlns:p="http://schemas.openxmlformats.org/presentationml/2006/main">
   <p:cSld>
     <p:bg>
@@ -11506,7 +11705,7 @@
           <a:p>
             <a:fld id="{846B06B1-1179-491F-A487-8E0C403F7C13}" type="slidenum">
               <a:rPr lang="fr-CA" smtClean="0"/>
-              <a:t>17</a:t>
+              <a:t>18</a:t>
             </a:fld>
             <a:endParaRPr lang="fr-CA"/>
           </a:p>
@@ -12030,7 +12229,7 @@
 </p:sld>
 </file>
 
-<file path=ppt/slides/slide18.xml><?xml version="1.0" encoding="utf-8"?>
+<file path=ppt/slides/slide19.xml><?xml version="1.0" encoding="utf-8"?>
 <p:sld xmlns:a="http://schemas.openxmlformats.org/drawingml/2006/main" xmlns:r="http://schemas.openxmlformats.org/officeDocument/2006/relationships" xmlns:p="http://schemas.openxmlformats.org/presentationml/2006/main">
   <p:cSld>
     <p:bg>
@@ -12084,7 +12283,7 @@
           <a:p>
             <a:fld id="{846B06B1-1179-491F-A487-8E0C403F7C13}" type="slidenum">
               <a:rPr lang="fr-CA" smtClean="0"/>
-              <a:t>18</a:t>
+              <a:t>19</a:t>
             </a:fld>
             <a:endParaRPr lang="fr-CA"/>
           </a:p>
@@ -13136,1114 +13335,6 @@
     <p:bldLst>
       <p:bldP spid="5" grpId="0" animBg="1"/>
     </p:bldLst>
-  </p:timing>
-</p:sld>
-</file>
-
-<file path=ppt/slides/slide19.xml><?xml version="1.0" encoding="utf-8"?>
-<p:sld xmlns:a="http://schemas.openxmlformats.org/drawingml/2006/main" xmlns:r="http://schemas.openxmlformats.org/officeDocument/2006/relationships" xmlns:p="http://schemas.openxmlformats.org/presentationml/2006/main">
-  <p:cSld>
-    <p:bg>
-      <p:bgPr>
-        <a:solidFill>
-          <a:schemeClr val="bg1">
-            <a:lumMod val="95000"/>
-          </a:schemeClr>
-        </a:solidFill>
-        <a:effectLst/>
-      </p:bgPr>
-    </p:bg>
-    <p:spTree>
-      <p:nvGrpSpPr>
-        <p:cNvPr id="1" name="">
-          <a:extLst>
-            <a:ext uri="{FF2B5EF4-FFF2-40B4-BE49-F238E27FC236}">
-              <a16:creationId xmlns:a16="http://schemas.microsoft.com/office/drawing/2014/main" id="{E50DA199-7310-9B08-9BA1-3BABF9E8797A}"/>
-            </a:ext>
-          </a:extLst>
-        </p:cNvPr>
-        <p:cNvGrpSpPr/>
-        <p:nvPr/>
-      </p:nvGrpSpPr>
-      <p:grpSpPr>
-        <a:xfrm>
-          <a:off x="0" y="0"/>
-          <a:ext cx="0" cy="0"/>
-          <a:chOff x="0" y="0"/>
-          <a:chExt cx="0" cy="0"/>
-        </a:xfrm>
-      </p:grpSpPr>
-      <p:sp>
-        <p:nvSpPr>
-          <p:cNvPr id="2" name="Title 1">
-            <a:extLst>
-              <a:ext uri="{FF2B5EF4-FFF2-40B4-BE49-F238E27FC236}">
-                <a16:creationId xmlns:a16="http://schemas.microsoft.com/office/drawing/2014/main" id="{22AEDB48-CB7A-5393-D825-23C7518B2415}"/>
-              </a:ext>
-            </a:extLst>
-          </p:cNvPr>
-          <p:cNvSpPr>
-            <a:spLocks noGrp="1"/>
-          </p:cNvSpPr>
-          <p:nvPr>
-            <p:ph type="title"/>
-          </p:nvPr>
-        </p:nvSpPr>
-        <p:spPr/>
-        <p:txBody>
-          <a:bodyPr/>
-          <a:lstStyle/>
-          <a:p>
-            <a:r>
-              <a:rPr lang="en-US" dirty="0" err="1">
-                <a:latin typeface="Arial Rounded MT Bold" panose="020F0704030504030204" pitchFamily="34" charset="0"/>
-              </a:rPr>
-              <a:t>Commentaire</a:t>
-            </a:r>
-            <a:r>
-              <a:rPr lang="en-US" dirty="0">
-                <a:latin typeface="Arial Rounded MT Bold" panose="020F0704030504030204" pitchFamily="34" charset="0"/>
-              </a:rPr>
-              <a:t> </a:t>
-            </a:r>
-            <a:r>
-              <a:rPr lang="en-US" dirty="0" err="1">
-                <a:latin typeface="Arial Rounded MT Bold" panose="020F0704030504030204" pitchFamily="34" charset="0"/>
-              </a:rPr>
-              <a:t>d'en</a:t>
-            </a:r>
-            <a:r>
-              <a:rPr lang="en-US" dirty="0">
-                <a:latin typeface="Arial Rounded MT Bold" panose="020F0704030504030204" pitchFamily="34" charset="0"/>
-              </a:rPr>
-              <a:t>-tête (</a:t>
-            </a:r>
-            <a:r>
-              <a:rPr lang="en-US" dirty="0">
-                <a:solidFill>
-                  <a:srgbClr val="DD4422"/>
-                </a:solidFill>
-                <a:latin typeface="Arial Rounded MT Bold" panose="020F0704030504030204" pitchFamily="34" charset="0"/>
-                <a:ea typeface="+mn-ea"/>
-                <a:cs typeface="+mn-cs"/>
-              </a:rPr>
-              <a:t>docstring</a:t>
-            </a:r>
-            <a:r>
-              <a:rPr lang="en-US" dirty="0">
-                <a:latin typeface="Arial Rounded MT Bold" panose="020F0704030504030204" pitchFamily="34" charset="0"/>
-              </a:rPr>
-              <a:t>)</a:t>
-            </a:r>
-            <a:endParaRPr lang="fr-CA" dirty="0">
-              <a:latin typeface="Arial Rounded MT Bold" panose="020F0704030504030204" pitchFamily="34" charset="0"/>
-            </a:endParaRPr>
-          </a:p>
-        </p:txBody>
-      </p:sp>
-      <p:sp>
-        <p:nvSpPr>
-          <p:cNvPr id="11" name="Slide Number Placeholder 10">
-            <a:extLst>
-              <a:ext uri="{FF2B5EF4-FFF2-40B4-BE49-F238E27FC236}">
-                <a16:creationId xmlns:a16="http://schemas.microsoft.com/office/drawing/2014/main" id="{E95459C3-0A92-BED1-9691-7A97826951AE}"/>
-              </a:ext>
-            </a:extLst>
-          </p:cNvPr>
-          <p:cNvSpPr>
-            <a:spLocks noGrp="1"/>
-          </p:cNvSpPr>
-          <p:nvPr>
-            <p:ph type="sldNum" sz="quarter" idx="12"/>
-          </p:nvPr>
-        </p:nvSpPr>
-        <p:spPr/>
-        <p:txBody>
-          <a:bodyPr/>
-          <a:lstStyle/>
-          <a:p>
-            <a:fld id="{846B06B1-1179-491F-A487-8E0C403F7C13}" type="slidenum">
-              <a:rPr lang="fr-CA" smtClean="0"/>
-              <a:t>19</a:t>
-            </a:fld>
-            <a:endParaRPr lang="fr-CA"/>
-          </a:p>
-        </p:txBody>
-      </p:sp>
-      <p:sp>
-        <p:nvSpPr>
-          <p:cNvPr id="5" name="TextBox 4">
-            <a:extLst>
-              <a:ext uri="{FF2B5EF4-FFF2-40B4-BE49-F238E27FC236}">
-                <a16:creationId xmlns:a16="http://schemas.microsoft.com/office/drawing/2014/main" id="{0FF5A086-00CE-0086-99AB-93E60322E322}"/>
-              </a:ext>
-            </a:extLst>
-          </p:cNvPr>
-          <p:cNvSpPr txBox="1"/>
-          <p:nvPr/>
-        </p:nvSpPr>
-        <p:spPr>
-          <a:xfrm>
-            <a:off x="1463040" y="1690688"/>
-            <a:ext cx="5365777" cy="3970318"/>
-          </a:xfrm>
-          <a:prstGeom prst="rect">
-            <a:avLst/>
-          </a:prstGeom>
-          <a:solidFill>
-            <a:schemeClr val="bg1"/>
-          </a:solidFill>
-          <a:ln w="12700">
-            <a:solidFill>
-              <a:schemeClr val="tx1"/>
-            </a:solidFill>
-          </a:ln>
-        </p:spPr>
-        <p:txBody>
-          <a:bodyPr wrap="square">
-            <a:spAutoFit/>
-          </a:bodyPr>
-          <a:lstStyle/>
-          <a:p>
-            <a:pPr algn="l">
-              <a:buNone/>
-            </a:pPr>
-            <a:r>
-              <a:rPr lang="fr-FR" b="1" i="0" dirty="0" err="1">
-                <a:solidFill>
-                  <a:srgbClr val="008800"/>
-                </a:solidFill>
-                <a:effectLst/>
-                <a:latin typeface="Consolas" panose="020B0609020204030204" pitchFamily="49" charset="0"/>
-              </a:rPr>
-              <a:t>def</a:t>
-            </a:r>
-            <a:r>
-              <a:rPr lang="fr-FR" b="0" i="0" dirty="0">
-                <a:solidFill>
-                  <a:srgbClr val="BBBBBB"/>
-                </a:solidFill>
-                <a:effectLst/>
-                <a:latin typeface="Consolas" panose="020B0609020204030204" pitchFamily="49" charset="0"/>
-              </a:rPr>
-              <a:t> </a:t>
-            </a:r>
-            <a:r>
-              <a:rPr lang="fr-FR" b="1" i="0" dirty="0" err="1">
-                <a:solidFill>
-                  <a:srgbClr val="0066BB"/>
-                </a:solidFill>
-                <a:effectLst/>
-                <a:latin typeface="Consolas" panose="020B0609020204030204" pitchFamily="49" charset="0"/>
-              </a:rPr>
-              <a:t>calculer_afficher_racines</a:t>
-            </a:r>
-            <a:r>
-              <a:rPr lang="fr-FR" b="0" i="0" dirty="0">
-                <a:solidFill>
-                  <a:srgbClr val="333333"/>
-                </a:solidFill>
-                <a:effectLst/>
-                <a:latin typeface="Consolas" panose="020B0609020204030204" pitchFamily="49" charset="0"/>
-              </a:rPr>
-              <a:t>(a, b, c):</a:t>
-            </a:r>
-          </a:p>
-          <a:p>
-            <a:pPr algn="l">
-              <a:buNone/>
-            </a:pPr>
-            <a:r>
-              <a:rPr lang="fr-FR" b="0" i="0" dirty="0">
-                <a:solidFill>
-                  <a:srgbClr val="BBBBBB"/>
-                </a:solidFill>
-                <a:effectLst/>
-                <a:latin typeface="Consolas" panose="020B0609020204030204" pitchFamily="49" charset="0"/>
-              </a:rPr>
-              <a:t>  </a:t>
-            </a:r>
-            <a:r>
-              <a:rPr lang="fr-FR" b="0" i="0" dirty="0">
-                <a:solidFill>
-                  <a:srgbClr val="DD4422"/>
-                </a:solidFill>
-                <a:effectLst/>
-                <a:latin typeface="Consolas" panose="020B0609020204030204" pitchFamily="49" charset="0"/>
-              </a:rPr>
-              <a:t>"""</a:t>
-            </a:r>
-            <a:endParaRPr lang="fr-FR" b="0" i="0" dirty="0">
-              <a:solidFill>
-                <a:srgbClr val="333333"/>
-              </a:solidFill>
-              <a:effectLst/>
-              <a:latin typeface="Consolas" panose="020B0609020204030204" pitchFamily="49" charset="0"/>
-            </a:endParaRPr>
-          </a:p>
-          <a:p>
-            <a:pPr algn="l">
-              <a:buNone/>
-            </a:pPr>
-            <a:r>
-              <a:rPr lang="fr-FR" b="0" i="0" dirty="0">
-                <a:solidFill>
-                  <a:srgbClr val="DD4422"/>
-                </a:solidFill>
-                <a:effectLst/>
-                <a:latin typeface="Consolas" panose="020B0609020204030204" pitchFamily="49" charset="0"/>
-              </a:rPr>
-              <a:t>  Calcule et affiche les racines d'une </a:t>
-            </a:r>
-            <a:br>
-              <a:rPr lang="fr-FR" b="0" i="0" dirty="0">
-                <a:solidFill>
-                  <a:srgbClr val="DD4422"/>
-                </a:solidFill>
-                <a:effectLst/>
-                <a:latin typeface="Consolas" panose="020B0609020204030204" pitchFamily="49" charset="0"/>
-              </a:rPr>
-            </a:br>
-            <a:r>
-              <a:rPr lang="fr-FR" b="0" i="0" dirty="0">
-                <a:solidFill>
-                  <a:srgbClr val="DD4422"/>
-                </a:solidFill>
-                <a:effectLst/>
-                <a:latin typeface="Consolas" panose="020B0609020204030204" pitchFamily="49" charset="0"/>
-              </a:rPr>
-              <a:t>  quadratique.</a:t>
-            </a:r>
-            <a:endParaRPr lang="fr-FR" b="0" i="0" dirty="0">
-              <a:solidFill>
-                <a:srgbClr val="333333"/>
-              </a:solidFill>
-              <a:effectLst/>
-              <a:latin typeface="Consolas" panose="020B0609020204030204" pitchFamily="49" charset="0"/>
-            </a:endParaRPr>
-          </a:p>
-          <a:p>
-            <a:pPr algn="l">
-              <a:buNone/>
-            </a:pPr>
-            <a:endParaRPr lang="fr-FR" b="0" i="0" dirty="0">
-              <a:solidFill>
-                <a:srgbClr val="333333"/>
-              </a:solidFill>
-              <a:effectLst/>
-              <a:latin typeface="Consolas" panose="020B0609020204030204" pitchFamily="49" charset="0"/>
-            </a:endParaRPr>
-          </a:p>
-          <a:p>
-            <a:pPr algn="l">
-              <a:buNone/>
-            </a:pPr>
-            <a:r>
-              <a:rPr lang="fr-FR" b="0" i="0" dirty="0">
-                <a:solidFill>
-                  <a:srgbClr val="DD4422"/>
-                </a:solidFill>
-                <a:effectLst/>
-                <a:latin typeface="Consolas" panose="020B0609020204030204" pitchFamily="49" charset="0"/>
-              </a:rPr>
-              <a:t>  Arguments:</a:t>
-            </a:r>
-            <a:endParaRPr lang="fr-FR" b="0" i="0" dirty="0">
-              <a:solidFill>
-                <a:srgbClr val="333333"/>
-              </a:solidFill>
-              <a:effectLst/>
-              <a:latin typeface="Consolas" panose="020B0609020204030204" pitchFamily="49" charset="0"/>
-            </a:endParaRPr>
-          </a:p>
-          <a:p>
-            <a:pPr algn="l">
-              <a:buNone/>
-            </a:pPr>
-            <a:r>
-              <a:rPr lang="fr-FR" b="0" i="0" dirty="0">
-                <a:solidFill>
-                  <a:srgbClr val="DD4422"/>
-                </a:solidFill>
-                <a:effectLst/>
-                <a:latin typeface="Consolas" panose="020B0609020204030204" pitchFamily="49" charset="0"/>
-              </a:rPr>
-              <a:t>    a (</a:t>
-            </a:r>
-            <a:r>
-              <a:rPr lang="fr-FR" b="0" i="0" dirty="0" err="1">
-                <a:solidFill>
-                  <a:srgbClr val="DD4422"/>
-                </a:solidFill>
-                <a:effectLst/>
-                <a:latin typeface="Consolas" panose="020B0609020204030204" pitchFamily="49" charset="0"/>
-              </a:rPr>
-              <a:t>int</a:t>
-            </a:r>
-            <a:r>
-              <a:rPr lang="fr-FR" b="0" i="0" dirty="0">
-                <a:solidFill>
-                  <a:srgbClr val="DD4422"/>
-                </a:solidFill>
-                <a:effectLst/>
-                <a:latin typeface="Consolas" panose="020B0609020204030204" pitchFamily="49" charset="0"/>
-              </a:rPr>
-              <a:t>): Coefficient du terme x^2.</a:t>
-            </a:r>
-            <a:endParaRPr lang="fr-FR" b="0" i="0" dirty="0">
-              <a:solidFill>
-                <a:srgbClr val="333333"/>
-              </a:solidFill>
-              <a:effectLst/>
-              <a:latin typeface="Consolas" panose="020B0609020204030204" pitchFamily="49" charset="0"/>
-            </a:endParaRPr>
-          </a:p>
-          <a:p>
-            <a:pPr algn="l">
-              <a:buNone/>
-            </a:pPr>
-            <a:r>
-              <a:rPr lang="fr-FR" b="0" i="0" dirty="0">
-                <a:solidFill>
-                  <a:srgbClr val="DD4422"/>
-                </a:solidFill>
-                <a:effectLst/>
-                <a:latin typeface="Consolas" panose="020B0609020204030204" pitchFamily="49" charset="0"/>
-              </a:rPr>
-              <a:t>    b (</a:t>
-            </a:r>
-            <a:r>
-              <a:rPr lang="fr-FR" b="0" i="0" dirty="0" err="1">
-                <a:solidFill>
-                  <a:srgbClr val="DD4422"/>
-                </a:solidFill>
-                <a:effectLst/>
-                <a:latin typeface="Consolas" panose="020B0609020204030204" pitchFamily="49" charset="0"/>
-              </a:rPr>
-              <a:t>int</a:t>
-            </a:r>
-            <a:r>
-              <a:rPr lang="fr-FR" b="0" i="0" dirty="0">
-                <a:solidFill>
-                  <a:srgbClr val="DD4422"/>
-                </a:solidFill>
-                <a:effectLst/>
-                <a:latin typeface="Consolas" panose="020B0609020204030204" pitchFamily="49" charset="0"/>
-              </a:rPr>
-              <a:t>): Coefficient du terme x^1.</a:t>
-            </a:r>
-            <a:endParaRPr lang="fr-FR" b="0" i="0" dirty="0">
-              <a:solidFill>
-                <a:srgbClr val="333333"/>
-              </a:solidFill>
-              <a:effectLst/>
-              <a:latin typeface="Consolas" panose="020B0609020204030204" pitchFamily="49" charset="0"/>
-            </a:endParaRPr>
-          </a:p>
-          <a:p>
-            <a:pPr algn="l">
-              <a:buNone/>
-            </a:pPr>
-            <a:r>
-              <a:rPr lang="fr-FR" b="0" i="0" dirty="0">
-                <a:solidFill>
-                  <a:srgbClr val="DD4422"/>
-                </a:solidFill>
-                <a:effectLst/>
-                <a:latin typeface="Consolas" panose="020B0609020204030204" pitchFamily="49" charset="0"/>
-              </a:rPr>
-              <a:t>    c (</a:t>
-            </a:r>
-            <a:r>
-              <a:rPr lang="fr-FR" b="0" i="0" dirty="0" err="1">
-                <a:solidFill>
-                  <a:srgbClr val="DD4422"/>
-                </a:solidFill>
-                <a:effectLst/>
-                <a:latin typeface="Consolas" panose="020B0609020204030204" pitchFamily="49" charset="0"/>
-              </a:rPr>
-              <a:t>int</a:t>
-            </a:r>
-            <a:r>
-              <a:rPr lang="fr-FR" b="0" i="0" dirty="0">
-                <a:solidFill>
-                  <a:srgbClr val="DD4422"/>
-                </a:solidFill>
-                <a:effectLst/>
-                <a:latin typeface="Consolas" panose="020B0609020204030204" pitchFamily="49" charset="0"/>
-              </a:rPr>
-              <a:t>): Coefficient du terme x^0.</a:t>
-            </a:r>
-            <a:endParaRPr lang="fr-FR" b="0" i="0" dirty="0">
-              <a:solidFill>
-                <a:srgbClr val="333333"/>
-              </a:solidFill>
-              <a:effectLst/>
-              <a:latin typeface="Consolas" panose="020B0609020204030204" pitchFamily="49" charset="0"/>
-            </a:endParaRPr>
-          </a:p>
-          <a:p>
-            <a:pPr algn="l">
-              <a:buNone/>
-            </a:pPr>
-            <a:endParaRPr lang="fr-FR" b="0" i="0" dirty="0">
-              <a:solidFill>
-                <a:srgbClr val="333333"/>
-              </a:solidFill>
-              <a:effectLst/>
-              <a:latin typeface="Consolas" panose="020B0609020204030204" pitchFamily="49" charset="0"/>
-            </a:endParaRPr>
-          </a:p>
-          <a:p>
-            <a:pPr algn="l">
-              <a:buNone/>
-            </a:pPr>
-            <a:r>
-              <a:rPr lang="fr-FR" b="0" i="0" dirty="0">
-                <a:solidFill>
-                  <a:srgbClr val="DD4422"/>
-                </a:solidFill>
-                <a:effectLst/>
-                <a:latin typeface="Consolas" panose="020B0609020204030204" pitchFamily="49" charset="0"/>
-              </a:rPr>
-              <a:t>  Retourne:</a:t>
-            </a:r>
-            <a:endParaRPr lang="fr-FR" b="0" i="0" dirty="0">
-              <a:solidFill>
-                <a:srgbClr val="333333"/>
-              </a:solidFill>
-              <a:effectLst/>
-              <a:latin typeface="Consolas" panose="020B0609020204030204" pitchFamily="49" charset="0"/>
-            </a:endParaRPr>
-          </a:p>
-          <a:p>
-            <a:pPr algn="l">
-              <a:buNone/>
-            </a:pPr>
-            <a:r>
-              <a:rPr lang="fr-FR" b="0" i="0" dirty="0">
-                <a:solidFill>
-                  <a:srgbClr val="DD4422"/>
-                </a:solidFill>
-                <a:effectLst/>
-                <a:latin typeface="Consolas" panose="020B0609020204030204" pitchFamily="49" charset="0"/>
-              </a:rPr>
-              <a:t>    Rien.</a:t>
-            </a:r>
-            <a:endParaRPr lang="fr-FR" b="0" i="0" dirty="0">
-              <a:solidFill>
-                <a:srgbClr val="333333"/>
-              </a:solidFill>
-              <a:effectLst/>
-              <a:latin typeface="Consolas" panose="020B0609020204030204" pitchFamily="49" charset="0"/>
-            </a:endParaRPr>
-          </a:p>
-          <a:p>
-            <a:pPr algn="l">
-              <a:buNone/>
-            </a:pPr>
-            <a:r>
-              <a:rPr lang="fr-FR" b="0" i="0" dirty="0">
-                <a:solidFill>
-                  <a:srgbClr val="DD4422"/>
-                </a:solidFill>
-                <a:effectLst/>
-                <a:latin typeface="Consolas" panose="020B0609020204030204" pitchFamily="49" charset="0"/>
-              </a:rPr>
-              <a:t>  """</a:t>
-            </a:r>
-            <a:r>
-              <a:rPr lang="fr-FR" b="0" i="0" dirty="0">
-                <a:solidFill>
-                  <a:srgbClr val="333333"/>
-                </a:solidFill>
-                <a:effectLst/>
-                <a:latin typeface="Consolas" panose="020B0609020204030204" pitchFamily="49" charset="0"/>
-              </a:rPr>
-              <a:t>  </a:t>
-            </a:r>
-          </a:p>
-          <a:p>
-            <a:pPr algn="l">
-              <a:buNone/>
-            </a:pPr>
-            <a:r>
-              <a:rPr lang="fr-FR" b="0" i="0" dirty="0">
-                <a:solidFill>
-                  <a:srgbClr val="333333"/>
-                </a:solidFill>
-                <a:effectLst/>
-                <a:latin typeface="Consolas" panose="020B0609020204030204" pitchFamily="49" charset="0"/>
-              </a:rPr>
-              <a:t>  ...</a:t>
-            </a:r>
-          </a:p>
-        </p:txBody>
-      </p:sp>
-      <p:grpSp>
-        <p:nvGrpSpPr>
-          <p:cNvPr id="22" name="Group 21">
-            <a:extLst>
-              <a:ext uri="{FF2B5EF4-FFF2-40B4-BE49-F238E27FC236}">
-                <a16:creationId xmlns:a16="http://schemas.microsoft.com/office/drawing/2014/main" id="{8C6B12FC-9E65-03DE-B090-3B50F4029508}"/>
-              </a:ext>
-            </a:extLst>
-          </p:cNvPr>
-          <p:cNvGrpSpPr/>
-          <p:nvPr/>
-        </p:nvGrpSpPr>
-        <p:grpSpPr>
-          <a:xfrm>
-            <a:off x="6476100" y="3529022"/>
-            <a:ext cx="3084203" cy="369332"/>
-            <a:chOff x="6485106" y="3914378"/>
-            <a:chExt cx="3084203" cy="369332"/>
-          </a:xfrm>
-        </p:grpSpPr>
-        <p:sp>
-          <p:nvSpPr>
-            <p:cNvPr id="7" name="TextBox 6">
-              <a:extLst>
-                <a:ext uri="{FF2B5EF4-FFF2-40B4-BE49-F238E27FC236}">
-                  <a16:creationId xmlns:a16="http://schemas.microsoft.com/office/drawing/2014/main" id="{89B73522-44D2-9EB2-AE5F-62447DA5B08C}"/>
-                </a:ext>
-              </a:extLst>
-            </p:cNvPr>
-            <p:cNvSpPr txBox="1"/>
-            <p:nvPr/>
-          </p:nvSpPr>
-          <p:spPr>
-            <a:xfrm>
-              <a:off x="7309395" y="3914378"/>
-              <a:ext cx="2259914" cy="369332"/>
-            </a:xfrm>
-            <a:prstGeom prst="rect">
-              <a:avLst/>
-            </a:prstGeom>
-            <a:noFill/>
-          </p:spPr>
-          <p:txBody>
-            <a:bodyPr wrap="none" rtlCol="0">
-              <a:spAutoFit/>
-            </a:bodyPr>
-            <a:lstStyle/>
-            <a:p>
-              <a:r>
-                <a:rPr lang="en-US" b="1" dirty="0" err="1"/>
-                <a:t>Paramètres</a:t>
-              </a:r>
-              <a:r>
-                <a:rPr lang="en-US" dirty="0"/>
-                <a:t> et </a:t>
-              </a:r>
-              <a:r>
-                <a:rPr lang="en-US" b="1" dirty="0"/>
-                <a:t>types</a:t>
-              </a:r>
-              <a:endParaRPr lang="fr-CA" b="1" dirty="0"/>
-            </a:p>
-          </p:txBody>
-        </p:sp>
-        <p:cxnSp>
-          <p:nvCxnSpPr>
-            <p:cNvPr id="13" name="Straight Arrow Connector 12">
-              <a:extLst>
-                <a:ext uri="{FF2B5EF4-FFF2-40B4-BE49-F238E27FC236}">
-                  <a16:creationId xmlns:a16="http://schemas.microsoft.com/office/drawing/2014/main" id="{D95E8B3E-21D2-FA77-DFFE-D9AD598B9DDF}"/>
-                </a:ext>
-              </a:extLst>
-            </p:cNvPr>
-            <p:cNvCxnSpPr>
-              <a:cxnSpLocks/>
-            </p:cNvCxnSpPr>
-            <p:nvPr/>
-          </p:nvCxnSpPr>
-          <p:spPr>
-            <a:xfrm flipH="1">
-              <a:off x="6485106" y="4099044"/>
-              <a:ext cx="810000" cy="0"/>
-            </a:xfrm>
-            <a:prstGeom prst="straightConnector1">
-              <a:avLst/>
-            </a:prstGeom>
-            <a:ln>
-              <a:tailEnd type="triangle"/>
-            </a:ln>
-          </p:spPr>
-          <p:style>
-            <a:lnRef idx="2">
-              <a:schemeClr val="dk1"/>
-            </a:lnRef>
-            <a:fillRef idx="0">
-              <a:schemeClr val="dk1"/>
-            </a:fillRef>
-            <a:effectRef idx="1">
-              <a:schemeClr val="dk1"/>
-            </a:effectRef>
-            <a:fontRef idx="minor">
-              <a:schemeClr val="tx1"/>
-            </a:fontRef>
-          </p:style>
-        </p:cxnSp>
-      </p:grpSp>
-      <p:grpSp>
-        <p:nvGrpSpPr>
-          <p:cNvPr id="21" name="Group 20">
-            <a:extLst>
-              <a:ext uri="{FF2B5EF4-FFF2-40B4-BE49-F238E27FC236}">
-                <a16:creationId xmlns:a16="http://schemas.microsoft.com/office/drawing/2014/main" id="{4B567321-DF6A-F325-765B-9AD2C691237D}"/>
-              </a:ext>
-            </a:extLst>
-          </p:cNvPr>
-          <p:cNvGrpSpPr/>
-          <p:nvPr/>
-        </p:nvGrpSpPr>
-        <p:grpSpPr>
-          <a:xfrm>
-            <a:off x="6477056" y="2333014"/>
-            <a:ext cx="2584200" cy="369332"/>
-            <a:chOff x="6486062" y="2692430"/>
-            <a:chExt cx="2584200" cy="369332"/>
-          </a:xfrm>
-        </p:grpSpPr>
-        <p:sp>
-          <p:nvSpPr>
-            <p:cNvPr id="6" name="TextBox 5">
-              <a:extLst>
-                <a:ext uri="{FF2B5EF4-FFF2-40B4-BE49-F238E27FC236}">
-                  <a16:creationId xmlns:a16="http://schemas.microsoft.com/office/drawing/2014/main" id="{EE54A686-9704-982A-49AA-E24F61E31421}"/>
-                </a:ext>
-              </a:extLst>
-            </p:cNvPr>
-            <p:cNvSpPr txBox="1"/>
-            <p:nvPr/>
-          </p:nvSpPr>
-          <p:spPr>
-            <a:xfrm>
-              <a:off x="7309395" y="2692430"/>
-              <a:ext cx="1760867" cy="369332"/>
-            </a:xfrm>
-            <a:prstGeom prst="rect">
-              <a:avLst/>
-            </a:prstGeom>
-            <a:noFill/>
-          </p:spPr>
-          <p:txBody>
-            <a:bodyPr wrap="none" rtlCol="0">
-              <a:spAutoFit/>
-            </a:bodyPr>
-            <a:lstStyle/>
-            <a:p>
-              <a:r>
-                <a:rPr lang="en-US" b="1" dirty="0" err="1"/>
-                <a:t>Responsabilité</a:t>
-              </a:r>
-              <a:endParaRPr lang="fr-CA" dirty="0"/>
-            </a:p>
-          </p:txBody>
-        </p:sp>
-        <p:cxnSp>
-          <p:nvCxnSpPr>
-            <p:cNvPr id="16" name="Straight Arrow Connector 15">
-              <a:extLst>
-                <a:ext uri="{FF2B5EF4-FFF2-40B4-BE49-F238E27FC236}">
-                  <a16:creationId xmlns:a16="http://schemas.microsoft.com/office/drawing/2014/main" id="{2DE447F2-251C-0AF9-C60E-1AD9C25512B4}"/>
-                </a:ext>
-              </a:extLst>
-            </p:cNvPr>
-            <p:cNvCxnSpPr>
-              <a:cxnSpLocks/>
-            </p:cNvCxnSpPr>
-            <p:nvPr/>
-          </p:nvCxnSpPr>
-          <p:spPr>
-            <a:xfrm flipH="1" flipV="1">
-              <a:off x="6486062" y="2876748"/>
-              <a:ext cx="810000" cy="0"/>
-            </a:xfrm>
-            <a:prstGeom prst="straightConnector1">
-              <a:avLst/>
-            </a:prstGeom>
-            <a:ln>
-              <a:tailEnd type="triangle"/>
-            </a:ln>
-          </p:spPr>
-          <p:style>
-            <a:lnRef idx="2">
-              <a:schemeClr val="dk1"/>
-            </a:lnRef>
-            <a:fillRef idx="0">
-              <a:schemeClr val="dk1"/>
-            </a:fillRef>
-            <a:effectRef idx="1">
-              <a:schemeClr val="dk1"/>
-            </a:effectRef>
-            <a:fontRef idx="minor">
-              <a:schemeClr val="tx1"/>
-            </a:fontRef>
-          </p:style>
-        </p:cxnSp>
-      </p:grpSp>
-      <p:grpSp>
-        <p:nvGrpSpPr>
-          <p:cNvPr id="23" name="Group 22">
-            <a:extLst>
-              <a:ext uri="{FF2B5EF4-FFF2-40B4-BE49-F238E27FC236}">
-                <a16:creationId xmlns:a16="http://schemas.microsoft.com/office/drawing/2014/main" id="{B1CC6EB7-1F47-EDE2-B762-220670DA8FE2}"/>
-              </a:ext>
-            </a:extLst>
-          </p:cNvPr>
-          <p:cNvGrpSpPr/>
-          <p:nvPr/>
-        </p:nvGrpSpPr>
-        <p:grpSpPr>
-          <a:xfrm>
-            <a:off x="6476100" y="4599542"/>
-            <a:ext cx="3879100" cy="369332"/>
-            <a:chOff x="6485106" y="4913563"/>
-            <a:chExt cx="3879100" cy="369332"/>
-          </a:xfrm>
-        </p:grpSpPr>
-        <p:sp>
-          <p:nvSpPr>
-            <p:cNvPr id="8" name="TextBox 7">
-              <a:extLst>
-                <a:ext uri="{FF2B5EF4-FFF2-40B4-BE49-F238E27FC236}">
-                  <a16:creationId xmlns:a16="http://schemas.microsoft.com/office/drawing/2014/main" id="{E1C8391D-7588-CBCA-18B5-D77A6EF56D6D}"/>
-                </a:ext>
-              </a:extLst>
-            </p:cNvPr>
-            <p:cNvSpPr txBox="1"/>
-            <p:nvPr/>
-          </p:nvSpPr>
-          <p:spPr>
-            <a:xfrm>
-              <a:off x="7309395" y="4913563"/>
-              <a:ext cx="3054811" cy="369332"/>
-            </a:xfrm>
-            <a:prstGeom prst="rect">
-              <a:avLst/>
-            </a:prstGeom>
-            <a:noFill/>
-          </p:spPr>
-          <p:txBody>
-            <a:bodyPr wrap="none" rtlCol="0">
-              <a:spAutoFit/>
-            </a:bodyPr>
-            <a:lstStyle/>
-            <a:p>
-              <a:r>
-                <a:rPr lang="en-US" b="1" dirty="0"/>
-                <a:t>Ce qui est </a:t>
-              </a:r>
-              <a:r>
-                <a:rPr lang="en-US" b="1" dirty="0" err="1"/>
-                <a:t>retourné</a:t>
-              </a:r>
-              <a:r>
-                <a:rPr lang="en-US" b="1" dirty="0"/>
-                <a:t> (</a:t>
-              </a:r>
-              <a:r>
-                <a:rPr lang="en-US" b="1" dirty="0" err="1"/>
-                <a:t>ou</a:t>
-              </a:r>
-              <a:r>
-                <a:rPr lang="en-US" b="1" dirty="0"/>
-                <a:t> pas)</a:t>
-              </a:r>
-              <a:endParaRPr lang="fr-CA" b="1" dirty="0"/>
-            </a:p>
-          </p:txBody>
-        </p:sp>
-        <p:cxnSp>
-          <p:nvCxnSpPr>
-            <p:cNvPr id="17" name="Straight Arrow Connector 16">
-              <a:extLst>
-                <a:ext uri="{FF2B5EF4-FFF2-40B4-BE49-F238E27FC236}">
-                  <a16:creationId xmlns:a16="http://schemas.microsoft.com/office/drawing/2014/main" id="{7B19C0E5-42A8-78CD-8BC5-AA800ED6DF06}"/>
-                </a:ext>
-              </a:extLst>
-            </p:cNvPr>
-            <p:cNvCxnSpPr>
-              <a:cxnSpLocks/>
-            </p:cNvCxnSpPr>
-            <p:nvPr/>
-          </p:nvCxnSpPr>
-          <p:spPr>
-            <a:xfrm flipH="1">
-              <a:off x="6485106" y="5098230"/>
-              <a:ext cx="810000" cy="0"/>
-            </a:xfrm>
-            <a:prstGeom prst="straightConnector1">
-              <a:avLst/>
-            </a:prstGeom>
-            <a:ln>
-              <a:tailEnd type="triangle"/>
-            </a:ln>
-          </p:spPr>
-          <p:style>
-            <a:lnRef idx="2">
-              <a:schemeClr val="dk1"/>
-            </a:lnRef>
-            <a:fillRef idx="0">
-              <a:schemeClr val="dk1"/>
-            </a:fillRef>
-            <a:effectRef idx="1">
-              <a:schemeClr val="dk1"/>
-            </a:effectRef>
-            <a:fontRef idx="minor">
-              <a:schemeClr val="tx1"/>
-            </a:fontRef>
-          </p:style>
-        </p:cxnSp>
-      </p:grpSp>
-      <p:sp>
-        <p:nvSpPr>
-          <p:cNvPr id="24" name="TextBox 23">
-            <a:extLst>
-              <a:ext uri="{FF2B5EF4-FFF2-40B4-BE49-F238E27FC236}">
-                <a16:creationId xmlns:a16="http://schemas.microsoft.com/office/drawing/2014/main" id="{F6459D09-2D7D-E4F4-3612-99F8BBECAEE4}"/>
-              </a:ext>
-            </a:extLst>
-          </p:cNvPr>
-          <p:cNvSpPr txBox="1"/>
-          <p:nvPr/>
-        </p:nvSpPr>
-        <p:spPr>
-          <a:xfrm>
-            <a:off x="838199" y="6176963"/>
-            <a:ext cx="10515599" cy="369332"/>
-          </a:xfrm>
-          <a:prstGeom prst="rect">
-            <a:avLst/>
-          </a:prstGeom>
-          <a:noFill/>
-        </p:spPr>
-        <p:txBody>
-          <a:bodyPr wrap="square">
-            <a:spAutoFit/>
-          </a:bodyPr>
-          <a:lstStyle/>
-          <a:p>
-            <a:pPr algn="ctr"/>
-            <a:r>
-              <a:rPr lang="fr-CA" sz="1800" b="1" dirty="0">
-                <a:latin typeface="Consolas" panose="020B0609020204030204" pitchFamily="49" charset="0"/>
-              </a:rPr>
-              <a:t>SOURCE: </a:t>
-            </a:r>
-            <a:r>
-              <a:rPr lang="fr-CA" b="1" dirty="0">
-                <a:latin typeface="Consolas" panose="020B0609020204030204" pitchFamily="49" charset="0"/>
-                <a:hlinkClick r:id="rId2"/>
-              </a:rPr>
-              <a:t>https://google.github.io/styleguide/pyguide.html</a:t>
-            </a:r>
-            <a:endParaRPr lang="fr-CA" sz="1800" b="1" dirty="0">
-              <a:latin typeface="Consolas" panose="020B0609020204030204" pitchFamily="49" charset="0"/>
-            </a:endParaRPr>
-          </a:p>
-        </p:txBody>
-      </p:sp>
-    </p:spTree>
-    <p:extLst>
-      <p:ext uri="{BB962C8B-B14F-4D97-AF65-F5344CB8AC3E}">
-        <p14:creationId xmlns:p14="http://schemas.microsoft.com/office/powerpoint/2010/main" val="2337937901"/>
-      </p:ext>
-    </p:extLst>
-  </p:cSld>
-  <p:clrMapOvr>
-    <a:masterClrMapping/>
-  </p:clrMapOvr>
-  <p:timing>
-    <p:tnLst>
-      <p:par>
-        <p:cTn id="1" dur="indefinite" restart="never" nodeType="tmRoot">
-          <p:childTnLst>
-            <p:seq concurrent="1" nextAc="seek">
-              <p:cTn id="2" dur="indefinite" nodeType="mainSeq">
-                <p:childTnLst>
-                  <p:par>
-                    <p:cTn id="3" fill="hold">
-                      <p:stCondLst>
-                        <p:cond delay="indefinite"/>
-                      </p:stCondLst>
-                      <p:childTnLst>
-                        <p:par>
-                          <p:cTn id="4" fill="hold">
-                            <p:stCondLst>
-                              <p:cond delay="0"/>
-                            </p:stCondLst>
-                            <p:childTnLst>
-                              <p:par>
-                                <p:cTn id="5" presetID="10" presetClass="entr" presetSubtype="0" fill="hold" nodeType="clickEffect">
-                                  <p:stCondLst>
-                                    <p:cond delay="0"/>
-                                  </p:stCondLst>
-                                  <p:childTnLst>
-                                    <p:set>
-                                      <p:cBhvr>
-                                        <p:cTn id="6" dur="1" fill="hold">
-                                          <p:stCondLst>
-                                            <p:cond delay="0"/>
-                                          </p:stCondLst>
-                                        </p:cTn>
-                                        <p:tgtEl>
-                                          <p:spTgt spid="21"/>
-                                        </p:tgtEl>
-                                        <p:attrNameLst>
-                                          <p:attrName>style.visibility</p:attrName>
-                                        </p:attrNameLst>
-                                      </p:cBhvr>
-                                      <p:to>
-                                        <p:strVal val="visible"/>
-                                      </p:to>
-                                    </p:set>
-                                    <p:animEffect transition="in" filter="fade">
-                                      <p:cBhvr>
-                                        <p:cTn id="7" dur="500"/>
-                                        <p:tgtEl>
-                                          <p:spTgt spid="21"/>
-                                        </p:tgtEl>
-                                      </p:cBhvr>
-                                    </p:animEffect>
-                                  </p:childTnLst>
-                                </p:cTn>
-                              </p:par>
-                            </p:childTnLst>
-                          </p:cTn>
-                        </p:par>
-                      </p:childTnLst>
-                    </p:cTn>
-                  </p:par>
-                  <p:par>
-                    <p:cTn id="8" fill="hold">
-                      <p:stCondLst>
-                        <p:cond delay="indefinite"/>
-                      </p:stCondLst>
-                      <p:childTnLst>
-                        <p:par>
-                          <p:cTn id="9" fill="hold">
-                            <p:stCondLst>
-                              <p:cond delay="0"/>
-                            </p:stCondLst>
-                            <p:childTnLst>
-                              <p:par>
-                                <p:cTn id="10" presetID="10" presetClass="entr" presetSubtype="0" fill="hold" nodeType="clickEffect">
-                                  <p:stCondLst>
-                                    <p:cond delay="0"/>
-                                  </p:stCondLst>
-                                  <p:childTnLst>
-                                    <p:set>
-                                      <p:cBhvr>
-                                        <p:cTn id="11" dur="1" fill="hold">
-                                          <p:stCondLst>
-                                            <p:cond delay="0"/>
-                                          </p:stCondLst>
-                                        </p:cTn>
-                                        <p:tgtEl>
-                                          <p:spTgt spid="22"/>
-                                        </p:tgtEl>
-                                        <p:attrNameLst>
-                                          <p:attrName>style.visibility</p:attrName>
-                                        </p:attrNameLst>
-                                      </p:cBhvr>
-                                      <p:to>
-                                        <p:strVal val="visible"/>
-                                      </p:to>
-                                    </p:set>
-                                    <p:animEffect transition="in" filter="fade">
-                                      <p:cBhvr>
-                                        <p:cTn id="12" dur="500"/>
-                                        <p:tgtEl>
-                                          <p:spTgt spid="22"/>
-                                        </p:tgtEl>
-                                      </p:cBhvr>
-                                    </p:animEffect>
-                                  </p:childTnLst>
-                                </p:cTn>
-                              </p:par>
-                            </p:childTnLst>
-                          </p:cTn>
-                        </p:par>
-                      </p:childTnLst>
-                    </p:cTn>
-                  </p:par>
-                  <p:par>
-                    <p:cTn id="13" fill="hold">
-                      <p:stCondLst>
-                        <p:cond delay="indefinite"/>
-                      </p:stCondLst>
-                      <p:childTnLst>
-                        <p:par>
-                          <p:cTn id="14" fill="hold">
-                            <p:stCondLst>
-                              <p:cond delay="0"/>
-                            </p:stCondLst>
-                            <p:childTnLst>
-                              <p:par>
-                                <p:cTn id="15" presetID="10" presetClass="entr" presetSubtype="0" fill="hold" nodeType="clickEffect">
-                                  <p:stCondLst>
-                                    <p:cond delay="0"/>
-                                  </p:stCondLst>
-                                  <p:childTnLst>
-                                    <p:set>
-                                      <p:cBhvr>
-                                        <p:cTn id="16" dur="1" fill="hold">
-                                          <p:stCondLst>
-                                            <p:cond delay="0"/>
-                                          </p:stCondLst>
-                                        </p:cTn>
-                                        <p:tgtEl>
-                                          <p:spTgt spid="23"/>
-                                        </p:tgtEl>
-                                        <p:attrNameLst>
-                                          <p:attrName>style.visibility</p:attrName>
-                                        </p:attrNameLst>
-                                      </p:cBhvr>
-                                      <p:to>
-                                        <p:strVal val="visible"/>
-                                      </p:to>
-                                    </p:set>
-                                    <p:animEffect transition="in" filter="fade">
-                                      <p:cBhvr>
-                                        <p:cTn id="17" dur="500"/>
-                                        <p:tgtEl>
-                                          <p:spTgt spid="23"/>
-                                        </p:tgtEl>
-                                      </p:cBhvr>
-                                    </p:animEffect>
-                                  </p:childTnLst>
-                                </p:cTn>
-                              </p:par>
-                            </p:childTnLst>
-                          </p:cTn>
-                        </p:par>
-                      </p:childTnLst>
-                    </p:cTn>
-                  </p:par>
-                </p:childTnLst>
-              </p:cTn>
-              <p:prevCondLst>
-                <p:cond evt="onPrev" delay="0">
-                  <p:tgtEl>
-                    <p:sldTgt/>
-                  </p:tgtEl>
-                </p:cond>
-              </p:prevCondLst>
-              <p:nextCondLst>
-                <p:cond evt="onNext" delay="0">
-                  <p:tgtEl>
-                    <p:sldTgt/>
-                  </p:tgtEl>
-                </p:cond>
-              </p:nextCondLst>
-            </p:seq>
-          </p:childTnLst>
-        </p:cTn>
-      </p:par>
-    </p:tnLst>
   </p:timing>
 </p:sld>
 </file>
@@ -14727,6 +13818,1114 @@
         <p:cNvPr id="1" name="">
           <a:extLst>
             <a:ext uri="{FF2B5EF4-FFF2-40B4-BE49-F238E27FC236}">
+              <a16:creationId xmlns:a16="http://schemas.microsoft.com/office/drawing/2014/main" id="{E50DA199-7310-9B08-9BA1-3BABF9E8797A}"/>
+            </a:ext>
+          </a:extLst>
+        </p:cNvPr>
+        <p:cNvGrpSpPr/>
+        <p:nvPr/>
+      </p:nvGrpSpPr>
+      <p:grpSpPr>
+        <a:xfrm>
+          <a:off x="0" y="0"/>
+          <a:ext cx="0" cy="0"/>
+          <a:chOff x="0" y="0"/>
+          <a:chExt cx="0" cy="0"/>
+        </a:xfrm>
+      </p:grpSpPr>
+      <p:sp>
+        <p:nvSpPr>
+          <p:cNvPr id="2" name="Title 1">
+            <a:extLst>
+              <a:ext uri="{FF2B5EF4-FFF2-40B4-BE49-F238E27FC236}">
+                <a16:creationId xmlns:a16="http://schemas.microsoft.com/office/drawing/2014/main" id="{22AEDB48-CB7A-5393-D825-23C7518B2415}"/>
+              </a:ext>
+            </a:extLst>
+          </p:cNvPr>
+          <p:cNvSpPr>
+            <a:spLocks noGrp="1"/>
+          </p:cNvSpPr>
+          <p:nvPr>
+            <p:ph type="title"/>
+          </p:nvPr>
+        </p:nvSpPr>
+        <p:spPr/>
+        <p:txBody>
+          <a:bodyPr/>
+          <a:lstStyle/>
+          <a:p>
+            <a:r>
+              <a:rPr lang="en-US" dirty="0" err="1">
+                <a:latin typeface="Arial Rounded MT Bold" panose="020F0704030504030204" pitchFamily="34" charset="0"/>
+              </a:rPr>
+              <a:t>Commentaire</a:t>
+            </a:r>
+            <a:r>
+              <a:rPr lang="en-US" dirty="0">
+                <a:latin typeface="Arial Rounded MT Bold" panose="020F0704030504030204" pitchFamily="34" charset="0"/>
+              </a:rPr>
+              <a:t> </a:t>
+            </a:r>
+            <a:r>
+              <a:rPr lang="en-US" dirty="0" err="1">
+                <a:latin typeface="Arial Rounded MT Bold" panose="020F0704030504030204" pitchFamily="34" charset="0"/>
+              </a:rPr>
+              <a:t>d'en</a:t>
+            </a:r>
+            <a:r>
+              <a:rPr lang="en-US" dirty="0">
+                <a:latin typeface="Arial Rounded MT Bold" panose="020F0704030504030204" pitchFamily="34" charset="0"/>
+              </a:rPr>
+              <a:t>-tête (</a:t>
+            </a:r>
+            <a:r>
+              <a:rPr lang="en-US" dirty="0">
+                <a:solidFill>
+                  <a:srgbClr val="DD4422"/>
+                </a:solidFill>
+                <a:latin typeface="Arial Rounded MT Bold" panose="020F0704030504030204" pitchFamily="34" charset="0"/>
+                <a:ea typeface="+mn-ea"/>
+                <a:cs typeface="+mn-cs"/>
+              </a:rPr>
+              <a:t>docstring</a:t>
+            </a:r>
+            <a:r>
+              <a:rPr lang="en-US" dirty="0">
+                <a:latin typeface="Arial Rounded MT Bold" panose="020F0704030504030204" pitchFamily="34" charset="0"/>
+              </a:rPr>
+              <a:t>)</a:t>
+            </a:r>
+            <a:endParaRPr lang="fr-CA" dirty="0">
+              <a:latin typeface="Arial Rounded MT Bold" panose="020F0704030504030204" pitchFamily="34" charset="0"/>
+            </a:endParaRPr>
+          </a:p>
+        </p:txBody>
+      </p:sp>
+      <p:sp>
+        <p:nvSpPr>
+          <p:cNvPr id="11" name="Slide Number Placeholder 10">
+            <a:extLst>
+              <a:ext uri="{FF2B5EF4-FFF2-40B4-BE49-F238E27FC236}">
+                <a16:creationId xmlns:a16="http://schemas.microsoft.com/office/drawing/2014/main" id="{E95459C3-0A92-BED1-9691-7A97826951AE}"/>
+              </a:ext>
+            </a:extLst>
+          </p:cNvPr>
+          <p:cNvSpPr>
+            <a:spLocks noGrp="1"/>
+          </p:cNvSpPr>
+          <p:nvPr>
+            <p:ph type="sldNum" sz="quarter" idx="12"/>
+          </p:nvPr>
+        </p:nvSpPr>
+        <p:spPr/>
+        <p:txBody>
+          <a:bodyPr/>
+          <a:lstStyle/>
+          <a:p>
+            <a:fld id="{846B06B1-1179-491F-A487-8E0C403F7C13}" type="slidenum">
+              <a:rPr lang="fr-CA" smtClean="0"/>
+              <a:t>20</a:t>
+            </a:fld>
+            <a:endParaRPr lang="fr-CA"/>
+          </a:p>
+        </p:txBody>
+      </p:sp>
+      <p:sp>
+        <p:nvSpPr>
+          <p:cNvPr id="5" name="TextBox 4">
+            <a:extLst>
+              <a:ext uri="{FF2B5EF4-FFF2-40B4-BE49-F238E27FC236}">
+                <a16:creationId xmlns:a16="http://schemas.microsoft.com/office/drawing/2014/main" id="{0FF5A086-00CE-0086-99AB-93E60322E322}"/>
+              </a:ext>
+            </a:extLst>
+          </p:cNvPr>
+          <p:cNvSpPr txBox="1"/>
+          <p:nvPr/>
+        </p:nvSpPr>
+        <p:spPr>
+          <a:xfrm>
+            <a:off x="1463040" y="1690688"/>
+            <a:ext cx="5365777" cy="3970318"/>
+          </a:xfrm>
+          <a:prstGeom prst="rect">
+            <a:avLst/>
+          </a:prstGeom>
+          <a:solidFill>
+            <a:schemeClr val="bg1"/>
+          </a:solidFill>
+          <a:ln w="12700">
+            <a:solidFill>
+              <a:schemeClr val="tx1"/>
+            </a:solidFill>
+          </a:ln>
+        </p:spPr>
+        <p:txBody>
+          <a:bodyPr wrap="square">
+            <a:spAutoFit/>
+          </a:bodyPr>
+          <a:lstStyle/>
+          <a:p>
+            <a:pPr algn="l">
+              <a:buNone/>
+            </a:pPr>
+            <a:r>
+              <a:rPr lang="fr-FR" b="1" i="0" dirty="0" err="1">
+                <a:solidFill>
+                  <a:srgbClr val="008800"/>
+                </a:solidFill>
+                <a:effectLst/>
+                <a:latin typeface="Consolas" panose="020B0609020204030204" pitchFamily="49" charset="0"/>
+              </a:rPr>
+              <a:t>def</a:t>
+            </a:r>
+            <a:r>
+              <a:rPr lang="fr-FR" b="0" i="0" dirty="0">
+                <a:solidFill>
+                  <a:srgbClr val="BBBBBB"/>
+                </a:solidFill>
+                <a:effectLst/>
+                <a:latin typeface="Consolas" panose="020B0609020204030204" pitchFamily="49" charset="0"/>
+              </a:rPr>
+              <a:t> </a:t>
+            </a:r>
+            <a:r>
+              <a:rPr lang="fr-FR" b="1" i="0" dirty="0" err="1">
+                <a:solidFill>
+                  <a:srgbClr val="0066BB"/>
+                </a:solidFill>
+                <a:effectLst/>
+                <a:latin typeface="Consolas" panose="020B0609020204030204" pitchFamily="49" charset="0"/>
+              </a:rPr>
+              <a:t>calculer_afficher_racines</a:t>
+            </a:r>
+            <a:r>
+              <a:rPr lang="fr-FR" b="0" i="0" dirty="0">
+                <a:solidFill>
+                  <a:srgbClr val="333333"/>
+                </a:solidFill>
+                <a:effectLst/>
+                <a:latin typeface="Consolas" panose="020B0609020204030204" pitchFamily="49" charset="0"/>
+              </a:rPr>
+              <a:t>(a, b, c):</a:t>
+            </a:r>
+          </a:p>
+          <a:p>
+            <a:pPr algn="l">
+              <a:buNone/>
+            </a:pPr>
+            <a:r>
+              <a:rPr lang="fr-FR" b="0" i="0" dirty="0">
+                <a:solidFill>
+                  <a:srgbClr val="BBBBBB"/>
+                </a:solidFill>
+                <a:effectLst/>
+                <a:latin typeface="Consolas" panose="020B0609020204030204" pitchFamily="49" charset="0"/>
+              </a:rPr>
+              <a:t>  </a:t>
+            </a:r>
+            <a:r>
+              <a:rPr lang="fr-FR" b="0" i="0" dirty="0">
+                <a:solidFill>
+                  <a:srgbClr val="DD4422"/>
+                </a:solidFill>
+                <a:effectLst/>
+                <a:latin typeface="Consolas" panose="020B0609020204030204" pitchFamily="49" charset="0"/>
+              </a:rPr>
+              <a:t>"""</a:t>
+            </a:r>
+            <a:endParaRPr lang="fr-FR" b="0" i="0" dirty="0">
+              <a:solidFill>
+                <a:srgbClr val="333333"/>
+              </a:solidFill>
+              <a:effectLst/>
+              <a:latin typeface="Consolas" panose="020B0609020204030204" pitchFamily="49" charset="0"/>
+            </a:endParaRPr>
+          </a:p>
+          <a:p>
+            <a:pPr algn="l">
+              <a:buNone/>
+            </a:pPr>
+            <a:r>
+              <a:rPr lang="fr-FR" b="0" i="0" dirty="0">
+                <a:solidFill>
+                  <a:srgbClr val="DD4422"/>
+                </a:solidFill>
+                <a:effectLst/>
+                <a:latin typeface="Consolas" panose="020B0609020204030204" pitchFamily="49" charset="0"/>
+              </a:rPr>
+              <a:t>  Calcule et affiche les racines d'une </a:t>
+            </a:r>
+            <a:br>
+              <a:rPr lang="fr-FR" b="0" i="0" dirty="0">
+                <a:solidFill>
+                  <a:srgbClr val="DD4422"/>
+                </a:solidFill>
+                <a:effectLst/>
+                <a:latin typeface="Consolas" panose="020B0609020204030204" pitchFamily="49" charset="0"/>
+              </a:rPr>
+            </a:br>
+            <a:r>
+              <a:rPr lang="fr-FR" b="0" i="0" dirty="0">
+                <a:solidFill>
+                  <a:srgbClr val="DD4422"/>
+                </a:solidFill>
+                <a:effectLst/>
+                <a:latin typeface="Consolas" panose="020B0609020204030204" pitchFamily="49" charset="0"/>
+              </a:rPr>
+              <a:t>  quadratique.</a:t>
+            </a:r>
+            <a:endParaRPr lang="fr-FR" b="0" i="0" dirty="0">
+              <a:solidFill>
+                <a:srgbClr val="333333"/>
+              </a:solidFill>
+              <a:effectLst/>
+              <a:latin typeface="Consolas" panose="020B0609020204030204" pitchFamily="49" charset="0"/>
+            </a:endParaRPr>
+          </a:p>
+          <a:p>
+            <a:pPr algn="l">
+              <a:buNone/>
+            </a:pPr>
+            <a:endParaRPr lang="fr-FR" b="0" i="0" dirty="0">
+              <a:solidFill>
+                <a:srgbClr val="333333"/>
+              </a:solidFill>
+              <a:effectLst/>
+              <a:latin typeface="Consolas" panose="020B0609020204030204" pitchFamily="49" charset="0"/>
+            </a:endParaRPr>
+          </a:p>
+          <a:p>
+            <a:pPr algn="l">
+              <a:buNone/>
+            </a:pPr>
+            <a:r>
+              <a:rPr lang="fr-FR" b="0" i="0" dirty="0">
+                <a:solidFill>
+                  <a:srgbClr val="DD4422"/>
+                </a:solidFill>
+                <a:effectLst/>
+                <a:latin typeface="Consolas" panose="020B0609020204030204" pitchFamily="49" charset="0"/>
+              </a:rPr>
+              <a:t>  Arguments:</a:t>
+            </a:r>
+            <a:endParaRPr lang="fr-FR" b="0" i="0" dirty="0">
+              <a:solidFill>
+                <a:srgbClr val="333333"/>
+              </a:solidFill>
+              <a:effectLst/>
+              <a:latin typeface="Consolas" panose="020B0609020204030204" pitchFamily="49" charset="0"/>
+            </a:endParaRPr>
+          </a:p>
+          <a:p>
+            <a:pPr algn="l">
+              <a:buNone/>
+            </a:pPr>
+            <a:r>
+              <a:rPr lang="fr-FR" b="0" i="0" dirty="0">
+                <a:solidFill>
+                  <a:srgbClr val="DD4422"/>
+                </a:solidFill>
+                <a:effectLst/>
+                <a:latin typeface="Consolas" panose="020B0609020204030204" pitchFamily="49" charset="0"/>
+              </a:rPr>
+              <a:t>    a (</a:t>
+            </a:r>
+            <a:r>
+              <a:rPr lang="fr-FR" b="0" i="0" dirty="0" err="1">
+                <a:solidFill>
+                  <a:srgbClr val="DD4422"/>
+                </a:solidFill>
+                <a:effectLst/>
+                <a:latin typeface="Consolas" panose="020B0609020204030204" pitchFamily="49" charset="0"/>
+              </a:rPr>
+              <a:t>int</a:t>
+            </a:r>
+            <a:r>
+              <a:rPr lang="fr-FR" b="0" i="0" dirty="0">
+                <a:solidFill>
+                  <a:srgbClr val="DD4422"/>
+                </a:solidFill>
+                <a:effectLst/>
+                <a:latin typeface="Consolas" panose="020B0609020204030204" pitchFamily="49" charset="0"/>
+              </a:rPr>
+              <a:t>): Coefficient du terme x^2.</a:t>
+            </a:r>
+            <a:endParaRPr lang="fr-FR" b="0" i="0" dirty="0">
+              <a:solidFill>
+                <a:srgbClr val="333333"/>
+              </a:solidFill>
+              <a:effectLst/>
+              <a:latin typeface="Consolas" panose="020B0609020204030204" pitchFamily="49" charset="0"/>
+            </a:endParaRPr>
+          </a:p>
+          <a:p>
+            <a:pPr algn="l">
+              <a:buNone/>
+            </a:pPr>
+            <a:r>
+              <a:rPr lang="fr-FR" b="0" i="0" dirty="0">
+                <a:solidFill>
+                  <a:srgbClr val="DD4422"/>
+                </a:solidFill>
+                <a:effectLst/>
+                <a:latin typeface="Consolas" panose="020B0609020204030204" pitchFamily="49" charset="0"/>
+              </a:rPr>
+              <a:t>    b (</a:t>
+            </a:r>
+            <a:r>
+              <a:rPr lang="fr-FR" b="0" i="0" dirty="0" err="1">
+                <a:solidFill>
+                  <a:srgbClr val="DD4422"/>
+                </a:solidFill>
+                <a:effectLst/>
+                <a:latin typeface="Consolas" panose="020B0609020204030204" pitchFamily="49" charset="0"/>
+              </a:rPr>
+              <a:t>int</a:t>
+            </a:r>
+            <a:r>
+              <a:rPr lang="fr-FR" b="0" i="0" dirty="0">
+                <a:solidFill>
+                  <a:srgbClr val="DD4422"/>
+                </a:solidFill>
+                <a:effectLst/>
+                <a:latin typeface="Consolas" panose="020B0609020204030204" pitchFamily="49" charset="0"/>
+              </a:rPr>
+              <a:t>): Coefficient du terme x^1.</a:t>
+            </a:r>
+            <a:endParaRPr lang="fr-FR" b="0" i="0" dirty="0">
+              <a:solidFill>
+                <a:srgbClr val="333333"/>
+              </a:solidFill>
+              <a:effectLst/>
+              <a:latin typeface="Consolas" panose="020B0609020204030204" pitchFamily="49" charset="0"/>
+            </a:endParaRPr>
+          </a:p>
+          <a:p>
+            <a:pPr algn="l">
+              <a:buNone/>
+            </a:pPr>
+            <a:r>
+              <a:rPr lang="fr-FR" b="0" i="0" dirty="0">
+                <a:solidFill>
+                  <a:srgbClr val="DD4422"/>
+                </a:solidFill>
+                <a:effectLst/>
+                <a:latin typeface="Consolas" panose="020B0609020204030204" pitchFamily="49" charset="0"/>
+              </a:rPr>
+              <a:t>    c (</a:t>
+            </a:r>
+            <a:r>
+              <a:rPr lang="fr-FR" b="0" i="0" dirty="0" err="1">
+                <a:solidFill>
+                  <a:srgbClr val="DD4422"/>
+                </a:solidFill>
+                <a:effectLst/>
+                <a:latin typeface="Consolas" panose="020B0609020204030204" pitchFamily="49" charset="0"/>
+              </a:rPr>
+              <a:t>int</a:t>
+            </a:r>
+            <a:r>
+              <a:rPr lang="fr-FR" b="0" i="0" dirty="0">
+                <a:solidFill>
+                  <a:srgbClr val="DD4422"/>
+                </a:solidFill>
+                <a:effectLst/>
+                <a:latin typeface="Consolas" panose="020B0609020204030204" pitchFamily="49" charset="0"/>
+              </a:rPr>
+              <a:t>): Coefficient du terme x^0.</a:t>
+            </a:r>
+            <a:endParaRPr lang="fr-FR" b="0" i="0" dirty="0">
+              <a:solidFill>
+                <a:srgbClr val="333333"/>
+              </a:solidFill>
+              <a:effectLst/>
+              <a:latin typeface="Consolas" panose="020B0609020204030204" pitchFamily="49" charset="0"/>
+            </a:endParaRPr>
+          </a:p>
+          <a:p>
+            <a:pPr algn="l">
+              <a:buNone/>
+            </a:pPr>
+            <a:endParaRPr lang="fr-FR" b="0" i="0" dirty="0">
+              <a:solidFill>
+                <a:srgbClr val="333333"/>
+              </a:solidFill>
+              <a:effectLst/>
+              <a:latin typeface="Consolas" panose="020B0609020204030204" pitchFamily="49" charset="0"/>
+            </a:endParaRPr>
+          </a:p>
+          <a:p>
+            <a:pPr algn="l">
+              <a:buNone/>
+            </a:pPr>
+            <a:r>
+              <a:rPr lang="fr-FR" b="0" i="0" dirty="0">
+                <a:solidFill>
+                  <a:srgbClr val="DD4422"/>
+                </a:solidFill>
+                <a:effectLst/>
+                <a:latin typeface="Consolas" panose="020B0609020204030204" pitchFamily="49" charset="0"/>
+              </a:rPr>
+              <a:t>  Retourne:</a:t>
+            </a:r>
+            <a:endParaRPr lang="fr-FR" b="0" i="0" dirty="0">
+              <a:solidFill>
+                <a:srgbClr val="333333"/>
+              </a:solidFill>
+              <a:effectLst/>
+              <a:latin typeface="Consolas" panose="020B0609020204030204" pitchFamily="49" charset="0"/>
+            </a:endParaRPr>
+          </a:p>
+          <a:p>
+            <a:pPr algn="l">
+              <a:buNone/>
+            </a:pPr>
+            <a:r>
+              <a:rPr lang="fr-FR" b="0" i="0" dirty="0">
+                <a:solidFill>
+                  <a:srgbClr val="DD4422"/>
+                </a:solidFill>
+                <a:effectLst/>
+                <a:latin typeface="Consolas" panose="020B0609020204030204" pitchFamily="49" charset="0"/>
+              </a:rPr>
+              <a:t>    Rien.</a:t>
+            </a:r>
+            <a:endParaRPr lang="fr-FR" b="0" i="0" dirty="0">
+              <a:solidFill>
+                <a:srgbClr val="333333"/>
+              </a:solidFill>
+              <a:effectLst/>
+              <a:latin typeface="Consolas" panose="020B0609020204030204" pitchFamily="49" charset="0"/>
+            </a:endParaRPr>
+          </a:p>
+          <a:p>
+            <a:pPr algn="l">
+              <a:buNone/>
+            </a:pPr>
+            <a:r>
+              <a:rPr lang="fr-FR" b="0" i="0" dirty="0">
+                <a:solidFill>
+                  <a:srgbClr val="DD4422"/>
+                </a:solidFill>
+                <a:effectLst/>
+                <a:latin typeface="Consolas" panose="020B0609020204030204" pitchFamily="49" charset="0"/>
+              </a:rPr>
+              <a:t>  """</a:t>
+            </a:r>
+            <a:r>
+              <a:rPr lang="fr-FR" b="0" i="0" dirty="0">
+                <a:solidFill>
+                  <a:srgbClr val="333333"/>
+                </a:solidFill>
+                <a:effectLst/>
+                <a:latin typeface="Consolas" panose="020B0609020204030204" pitchFamily="49" charset="0"/>
+              </a:rPr>
+              <a:t>  </a:t>
+            </a:r>
+          </a:p>
+          <a:p>
+            <a:pPr algn="l">
+              <a:buNone/>
+            </a:pPr>
+            <a:r>
+              <a:rPr lang="fr-FR" b="0" i="0" dirty="0">
+                <a:solidFill>
+                  <a:srgbClr val="333333"/>
+                </a:solidFill>
+                <a:effectLst/>
+                <a:latin typeface="Consolas" panose="020B0609020204030204" pitchFamily="49" charset="0"/>
+              </a:rPr>
+              <a:t>  ...</a:t>
+            </a:r>
+          </a:p>
+        </p:txBody>
+      </p:sp>
+      <p:grpSp>
+        <p:nvGrpSpPr>
+          <p:cNvPr id="22" name="Group 21">
+            <a:extLst>
+              <a:ext uri="{FF2B5EF4-FFF2-40B4-BE49-F238E27FC236}">
+                <a16:creationId xmlns:a16="http://schemas.microsoft.com/office/drawing/2014/main" id="{8C6B12FC-9E65-03DE-B090-3B50F4029508}"/>
+              </a:ext>
+            </a:extLst>
+          </p:cNvPr>
+          <p:cNvGrpSpPr/>
+          <p:nvPr/>
+        </p:nvGrpSpPr>
+        <p:grpSpPr>
+          <a:xfrm>
+            <a:off x="6476100" y="3529022"/>
+            <a:ext cx="3084203" cy="369332"/>
+            <a:chOff x="6485106" y="3914378"/>
+            <a:chExt cx="3084203" cy="369332"/>
+          </a:xfrm>
+        </p:grpSpPr>
+        <p:sp>
+          <p:nvSpPr>
+            <p:cNvPr id="7" name="TextBox 6">
+              <a:extLst>
+                <a:ext uri="{FF2B5EF4-FFF2-40B4-BE49-F238E27FC236}">
+                  <a16:creationId xmlns:a16="http://schemas.microsoft.com/office/drawing/2014/main" id="{89B73522-44D2-9EB2-AE5F-62447DA5B08C}"/>
+                </a:ext>
+              </a:extLst>
+            </p:cNvPr>
+            <p:cNvSpPr txBox="1"/>
+            <p:nvPr/>
+          </p:nvSpPr>
+          <p:spPr>
+            <a:xfrm>
+              <a:off x="7309395" y="3914378"/>
+              <a:ext cx="2259914" cy="369332"/>
+            </a:xfrm>
+            <a:prstGeom prst="rect">
+              <a:avLst/>
+            </a:prstGeom>
+            <a:noFill/>
+          </p:spPr>
+          <p:txBody>
+            <a:bodyPr wrap="none" rtlCol="0">
+              <a:spAutoFit/>
+            </a:bodyPr>
+            <a:lstStyle/>
+            <a:p>
+              <a:r>
+                <a:rPr lang="en-US" b="1" dirty="0" err="1"/>
+                <a:t>Paramètres</a:t>
+              </a:r>
+              <a:r>
+                <a:rPr lang="en-US" dirty="0"/>
+                <a:t> et </a:t>
+              </a:r>
+              <a:r>
+                <a:rPr lang="en-US" b="1" dirty="0"/>
+                <a:t>types</a:t>
+              </a:r>
+              <a:endParaRPr lang="fr-CA" b="1" dirty="0"/>
+            </a:p>
+          </p:txBody>
+        </p:sp>
+        <p:cxnSp>
+          <p:nvCxnSpPr>
+            <p:cNvPr id="13" name="Straight Arrow Connector 12">
+              <a:extLst>
+                <a:ext uri="{FF2B5EF4-FFF2-40B4-BE49-F238E27FC236}">
+                  <a16:creationId xmlns:a16="http://schemas.microsoft.com/office/drawing/2014/main" id="{D95E8B3E-21D2-FA77-DFFE-D9AD598B9DDF}"/>
+                </a:ext>
+              </a:extLst>
+            </p:cNvPr>
+            <p:cNvCxnSpPr>
+              <a:cxnSpLocks/>
+            </p:cNvCxnSpPr>
+            <p:nvPr/>
+          </p:nvCxnSpPr>
+          <p:spPr>
+            <a:xfrm flipH="1">
+              <a:off x="6485106" y="4099044"/>
+              <a:ext cx="810000" cy="0"/>
+            </a:xfrm>
+            <a:prstGeom prst="straightConnector1">
+              <a:avLst/>
+            </a:prstGeom>
+            <a:ln>
+              <a:tailEnd type="triangle"/>
+            </a:ln>
+          </p:spPr>
+          <p:style>
+            <a:lnRef idx="2">
+              <a:schemeClr val="dk1"/>
+            </a:lnRef>
+            <a:fillRef idx="0">
+              <a:schemeClr val="dk1"/>
+            </a:fillRef>
+            <a:effectRef idx="1">
+              <a:schemeClr val="dk1"/>
+            </a:effectRef>
+            <a:fontRef idx="minor">
+              <a:schemeClr val="tx1"/>
+            </a:fontRef>
+          </p:style>
+        </p:cxnSp>
+      </p:grpSp>
+      <p:grpSp>
+        <p:nvGrpSpPr>
+          <p:cNvPr id="21" name="Group 20">
+            <a:extLst>
+              <a:ext uri="{FF2B5EF4-FFF2-40B4-BE49-F238E27FC236}">
+                <a16:creationId xmlns:a16="http://schemas.microsoft.com/office/drawing/2014/main" id="{4B567321-DF6A-F325-765B-9AD2C691237D}"/>
+              </a:ext>
+            </a:extLst>
+          </p:cNvPr>
+          <p:cNvGrpSpPr/>
+          <p:nvPr/>
+        </p:nvGrpSpPr>
+        <p:grpSpPr>
+          <a:xfrm>
+            <a:off x="6477056" y="2333014"/>
+            <a:ext cx="2584200" cy="369332"/>
+            <a:chOff x="6486062" y="2692430"/>
+            <a:chExt cx="2584200" cy="369332"/>
+          </a:xfrm>
+        </p:grpSpPr>
+        <p:sp>
+          <p:nvSpPr>
+            <p:cNvPr id="6" name="TextBox 5">
+              <a:extLst>
+                <a:ext uri="{FF2B5EF4-FFF2-40B4-BE49-F238E27FC236}">
+                  <a16:creationId xmlns:a16="http://schemas.microsoft.com/office/drawing/2014/main" id="{EE54A686-9704-982A-49AA-E24F61E31421}"/>
+                </a:ext>
+              </a:extLst>
+            </p:cNvPr>
+            <p:cNvSpPr txBox="1"/>
+            <p:nvPr/>
+          </p:nvSpPr>
+          <p:spPr>
+            <a:xfrm>
+              <a:off x="7309395" y="2692430"/>
+              <a:ext cx="1760867" cy="369332"/>
+            </a:xfrm>
+            <a:prstGeom prst="rect">
+              <a:avLst/>
+            </a:prstGeom>
+            <a:noFill/>
+          </p:spPr>
+          <p:txBody>
+            <a:bodyPr wrap="none" rtlCol="0">
+              <a:spAutoFit/>
+            </a:bodyPr>
+            <a:lstStyle/>
+            <a:p>
+              <a:r>
+                <a:rPr lang="en-US" b="1" dirty="0" err="1"/>
+                <a:t>Responsabilité</a:t>
+              </a:r>
+              <a:endParaRPr lang="fr-CA" dirty="0"/>
+            </a:p>
+          </p:txBody>
+        </p:sp>
+        <p:cxnSp>
+          <p:nvCxnSpPr>
+            <p:cNvPr id="16" name="Straight Arrow Connector 15">
+              <a:extLst>
+                <a:ext uri="{FF2B5EF4-FFF2-40B4-BE49-F238E27FC236}">
+                  <a16:creationId xmlns:a16="http://schemas.microsoft.com/office/drawing/2014/main" id="{2DE447F2-251C-0AF9-C60E-1AD9C25512B4}"/>
+                </a:ext>
+              </a:extLst>
+            </p:cNvPr>
+            <p:cNvCxnSpPr>
+              <a:cxnSpLocks/>
+            </p:cNvCxnSpPr>
+            <p:nvPr/>
+          </p:nvCxnSpPr>
+          <p:spPr>
+            <a:xfrm flipH="1" flipV="1">
+              <a:off x="6486062" y="2876748"/>
+              <a:ext cx="810000" cy="0"/>
+            </a:xfrm>
+            <a:prstGeom prst="straightConnector1">
+              <a:avLst/>
+            </a:prstGeom>
+            <a:ln>
+              <a:tailEnd type="triangle"/>
+            </a:ln>
+          </p:spPr>
+          <p:style>
+            <a:lnRef idx="2">
+              <a:schemeClr val="dk1"/>
+            </a:lnRef>
+            <a:fillRef idx="0">
+              <a:schemeClr val="dk1"/>
+            </a:fillRef>
+            <a:effectRef idx="1">
+              <a:schemeClr val="dk1"/>
+            </a:effectRef>
+            <a:fontRef idx="minor">
+              <a:schemeClr val="tx1"/>
+            </a:fontRef>
+          </p:style>
+        </p:cxnSp>
+      </p:grpSp>
+      <p:grpSp>
+        <p:nvGrpSpPr>
+          <p:cNvPr id="23" name="Group 22">
+            <a:extLst>
+              <a:ext uri="{FF2B5EF4-FFF2-40B4-BE49-F238E27FC236}">
+                <a16:creationId xmlns:a16="http://schemas.microsoft.com/office/drawing/2014/main" id="{B1CC6EB7-1F47-EDE2-B762-220670DA8FE2}"/>
+              </a:ext>
+            </a:extLst>
+          </p:cNvPr>
+          <p:cNvGrpSpPr/>
+          <p:nvPr/>
+        </p:nvGrpSpPr>
+        <p:grpSpPr>
+          <a:xfrm>
+            <a:off x="6476100" y="4599542"/>
+            <a:ext cx="3879100" cy="369332"/>
+            <a:chOff x="6485106" y="4913563"/>
+            <a:chExt cx="3879100" cy="369332"/>
+          </a:xfrm>
+        </p:grpSpPr>
+        <p:sp>
+          <p:nvSpPr>
+            <p:cNvPr id="8" name="TextBox 7">
+              <a:extLst>
+                <a:ext uri="{FF2B5EF4-FFF2-40B4-BE49-F238E27FC236}">
+                  <a16:creationId xmlns:a16="http://schemas.microsoft.com/office/drawing/2014/main" id="{E1C8391D-7588-CBCA-18B5-D77A6EF56D6D}"/>
+                </a:ext>
+              </a:extLst>
+            </p:cNvPr>
+            <p:cNvSpPr txBox="1"/>
+            <p:nvPr/>
+          </p:nvSpPr>
+          <p:spPr>
+            <a:xfrm>
+              <a:off x="7309395" y="4913563"/>
+              <a:ext cx="3054811" cy="369332"/>
+            </a:xfrm>
+            <a:prstGeom prst="rect">
+              <a:avLst/>
+            </a:prstGeom>
+            <a:noFill/>
+          </p:spPr>
+          <p:txBody>
+            <a:bodyPr wrap="none" rtlCol="0">
+              <a:spAutoFit/>
+            </a:bodyPr>
+            <a:lstStyle/>
+            <a:p>
+              <a:r>
+                <a:rPr lang="en-US" b="1" dirty="0"/>
+                <a:t>Ce qui est </a:t>
+              </a:r>
+              <a:r>
+                <a:rPr lang="en-US" b="1" dirty="0" err="1"/>
+                <a:t>retourné</a:t>
+              </a:r>
+              <a:r>
+                <a:rPr lang="en-US" b="1" dirty="0"/>
+                <a:t> (</a:t>
+              </a:r>
+              <a:r>
+                <a:rPr lang="en-US" b="1" dirty="0" err="1"/>
+                <a:t>ou</a:t>
+              </a:r>
+              <a:r>
+                <a:rPr lang="en-US" b="1" dirty="0"/>
+                <a:t> pas)</a:t>
+              </a:r>
+              <a:endParaRPr lang="fr-CA" b="1" dirty="0"/>
+            </a:p>
+          </p:txBody>
+        </p:sp>
+        <p:cxnSp>
+          <p:nvCxnSpPr>
+            <p:cNvPr id="17" name="Straight Arrow Connector 16">
+              <a:extLst>
+                <a:ext uri="{FF2B5EF4-FFF2-40B4-BE49-F238E27FC236}">
+                  <a16:creationId xmlns:a16="http://schemas.microsoft.com/office/drawing/2014/main" id="{7B19C0E5-42A8-78CD-8BC5-AA800ED6DF06}"/>
+                </a:ext>
+              </a:extLst>
+            </p:cNvPr>
+            <p:cNvCxnSpPr>
+              <a:cxnSpLocks/>
+            </p:cNvCxnSpPr>
+            <p:nvPr/>
+          </p:nvCxnSpPr>
+          <p:spPr>
+            <a:xfrm flipH="1">
+              <a:off x="6485106" y="5098230"/>
+              <a:ext cx="810000" cy="0"/>
+            </a:xfrm>
+            <a:prstGeom prst="straightConnector1">
+              <a:avLst/>
+            </a:prstGeom>
+            <a:ln>
+              <a:tailEnd type="triangle"/>
+            </a:ln>
+          </p:spPr>
+          <p:style>
+            <a:lnRef idx="2">
+              <a:schemeClr val="dk1"/>
+            </a:lnRef>
+            <a:fillRef idx="0">
+              <a:schemeClr val="dk1"/>
+            </a:fillRef>
+            <a:effectRef idx="1">
+              <a:schemeClr val="dk1"/>
+            </a:effectRef>
+            <a:fontRef idx="minor">
+              <a:schemeClr val="tx1"/>
+            </a:fontRef>
+          </p:style>
+        </p:cxnSp>
+      </p:grpSp>
+      <p:sp>
+        <p:nvSpPr>
+          <p:cNvPr id="24" name="TextBox 23">
+            <a:extLst>
+              <a:ext uri="{FF2B5EF4-FFF2-40B4-BE49-F238E27FC236}">
+                <a16:creationId xmlns:a16="http://schemas.microsoft.com/office/drawing/2014/main" id="{F6459D09-2D7D-E4F4-3612-99F8BBECAEE4}"/>
+              </a:ext>
+            </a:extLst>
+          </p:cNvPr>
+          <p:cNvSpPr txBox="1"/>
+          <p:nvPr/>
+        </p:nvSpPr>
+        <p:spPr>
+          <a:xfrm>
+            <a:off x="838199" y="6176963"/>
+            <a:ext cx="10515599" cy="369332"/>
+          </a:xfrm>
+          <a:prstGeom prst="rect">
+            <a:avLst/>
+          </a:prstGeom>
+          <a:noFill/>
+        </p:spPr>
+        <p:txBody>
+          <a:bodyPr wrap="square">
+            <a:spAutoFit/>
+          </a:bodyPr>
+          <a:lstStyle/>
+          <a:p>
+            <a:pPr algn="ctr"/>
+            <a:r>
+              <a:rPr lang="fr-CA" sz="1800" b="1" dirty="0">
+                <a:latin typeface="Consolas" panose="020B0609020204030204" pitchFamily="49" charset="0"/>
+              </a:rPr>
+              <a:t>SOURCE: </a:t>
+            </a:r>
+            <a:r>
+              <a:rPr lang="fr-CA" b="1" dirty="0">
+                <a:latin typeface="Consolas" panose="020B0609020204030204" pitchFamily="49" charset="0"/>
+                <a:hlinkClick r:id="rId2"/>
+              </a:rPr>
+              <a:t>https://google.github.io/styleguide/pyguide.html</a:t>
+            </a:r>
+            <a:endParaRPr lang="fr-CA" sz="1800" b="1" dirty="0">
+              <a:latin typeface="Consolas" panose="020B0609020204030204" pitchFamily="49" charset="0"/>
+            </a:endParaRPr>
+          </a:p>
+        </p:txBody>
+      </p:sp>
+    </p:spTree>
+    <p:extLst>
+      <p:ext uri="{BB962C8B-B14F-4D97-AF65-F5344CB8AC3E}">
+        <p14:creationId xmlns:p14="http://schemas.microsoft.com/office/powerpoint/2010/main" val="2337937901"/>
+      </p:ext>
+    </p:extLst>
+  </p:cSld>
+  <p:clrMapOvr>
+    <a:masterClrMapping/>
+  </p:clrMapOvr>
+  <p:timing>
+    <p:tnLst>
+      <p:par>
+        <p:cTn id="1" dur="indefinite" restart="never" nodeType="tmRoot">
+          <p:childTnLst>
+            <p:seq concurrent="1" nextAc="seek">
+              <p:cTn id="2" dur="indefinite" nodeType="mainSeq">
+                <p:childTnLst>
+                  <p:par>
+                    <p:cTn id="3" fill="hold">
+                      <p:stCondLst>
+                        <p:cond delay="indefinite"/>
+                      </p:stCondLst>
+                      <p:childTnLst>
+                        <p:par>
+                          <p:cTn id="4" fill="hold">
+                            <p:stCondLst>
+                              <p:cond delay="0"/>
+                            </p:stCondLst>
+                            <p:childTnLst>
+                              <p:par>
+                                <p:cTn id="5" presetID="10" presetClass="entr" presetSubtype="0" fill="hold" nodeType="clickEffect">
+                                  <p:stCondLst>
+                                    <p:cond delay="0"/>
+                                  </p:stCondLst>
+                                  <p:childTnLst>
+                                    <p:set>
+                                      <p:cBhvr>
+                                        <p:cTn id="6" dur="1" fill="hold">
+                                          <p:stCondLst>
+                                            <p:cond delay="0"/>
+                                          </p:stCondLst>
+                                        </p:cTn>
+                                        <p:tgtEl>
+                                          <p:spTgt spid="21"/>
+                                        </p:tgtEl>
+                                        <p:attrNameLst>
+                                          <p:attrName>style.visibility</p:attrName>
+                                        </p:attrNameLst>
+                                      </p:cBhvr>
+                                      <p:to>
+                                        <p:strVal val="visible"/>
+                                      </p:to>
+                                    </p:set>
+                                    <p:animEffect transition="in" filter="fade">
+                                      <p:cBhvr>
+                                        <p:cTn id="7" dur="500"/>
+                                        <p:tgtEl>
+                                          <p:spTgt spid="21"/>
+                                        </p:tgtEl>
+                                      </p:cBhvr>
+                                    </p:animEffect>
+                                  </p:childTnLst>
+                                </p:cTn>
+                              </p:par>
+                            </p:childTnLst>
+                          </p:cTn>
+                        </p:par>
+                      </p:childTnLst>
+                    </p:cTn>
+                  </p:par>
+                  <p:par>
+                    <p:cTn id="8" fill="hold">
+                      <p:stCondLst>
+                        <p:cond delay="indefinite"/>
+                      </p:stCondLst>
+                      <p:childTnLst>
+                        <p:par>
+                          <p:cTn id="9" fill="hold">
+                            <p:stCondLst>
+                              <p:cond delay="0"/>
+                            </p:stCondLst>
+                            <p:childTnLst>
+                              <p:par>
+                                <p:cTn id="10" presetID="10" presetClass="entr" presetSubtype="0" fill="hold" nodeType="clickEffect">
+                                  <p:stCondLst>
+                                    <p:cond delay="0"/>
+                                  </p:stCondLst>
+                                  <p:childTnLst>
+                                    <p:set>
+                                      <p:cBhvr>
+                                        <p:cTn id="11" dur="1" fill="hold">
+                                          <p:stCondLst>
+                                            <p:cond delay="0"/>
+                                          </p:stCondLst>
+                                        </p:cTn>
+                                        <p:tgtEl>
+                                          <p:spTgt spid="22"/>
+                                        </p:tgtEl>
+                                        <p:attrNameLst>
+                                          <p:attrName>style.visibility</p:attrName>
+                                        </p:attrNameLst>
+                                      </p:cBhvr>
+                                      <p:to>
+                                        <p:strVal val="visible"/>
+                                      </p:to>
+                                    </p:set>
+                                    <p:animEffect transition="in" filter="fade">
+                                      <p:cBhvr>
+                                        <p:cTn id="12" dur="500"/>
+                                        <p:tgtEl>
+                                          <p:spTgt spid="22"/>
+                                        </p:tgtEl>
+                                      </p:cBhvr>
+                                    </p:animEffect>
+                                  </p:childTnLst>
+                                </p:cTn>
+                              </p:par>
+                            </p:childTnLst>
+                          </p:cTn>
+                        </p:par>
+                      </p:childTnLst>
+                    </p:cTn>
+                  </p:par>
+                  <p:par>
+                    <p:cTn id="13" fill="hold">
+                      <p:stCondLst>
+                        <p:cond delay="indefinite"/>
+                      </p:stCondLst>
+                      <p:childTnLst>
+                        <p:par>
+                          <p:cTn id="14" fill="hold">
+                            <p:stCondLst>
+                              <p:cond delay="0"/>
+                            </p:stCondLst>
+                            <p:childTnLst>
+                              <p:par>
+                                <p:cTn id="15" presetID="10" presetClass="entr" presetSubtype="0" fill="hold" nodeType="clickEffect">
+                                  <p:stCondLst>
+                                    <p:cond delay="0"/>
+                                  </p:stCondLst>
+                                  <p:childTnLst>
+                                    <p:set>
+                                      <p:cBhvr>
+                                        <p:cTn id="16" dur="1" fill="hold">
+                                          <p:stCondLst>
+                                            <p:cond delay="0"/>
+                                          </p:stCondLst>
+                                        </p:cTn>
+                                        <p:tgtEl>
+                                          <p:spTgt spid="23"/>
+                                        </p:tgtEl>
+                                        <p:attrNameLst>
+                                          <p:attrName>style.visibility</p:attrName>
+                                        </p:attrNameLst>
+                                      </p:cBhvr>
+                                      <p:to>
+                                        <p:strVal val="visible"/>
+                                      </p:to>
+                                    </p:set>
+                                    <p:animEffect transition="in" filter="fade">
+                                      <p:cBhvr>
+                                        <p:cTn id="17" dur="500"/>
+                                        <p:tgtEl>
+                                          <p:spTgt spid="23"/>
+                                        </p:tgtEl>
+                                      </p:cBhvr>
+                                    </p:animEffect>
+                                  </p:childTnLst>
+                                </p:cTn>
+                              </p:par>
+                            </p:childTnLst>
+                          </p:cTn>
+                        </p:par>
+                      </p:childTnLst>
+                    </p:cTn>
+                  </p:par>
+                </p:childTnLst>
+              </p:cTn>
+              <p:prevCondLst>
+                <p:cond evt="onPrev" delay="0">
+                  <p:tgtEl>
+                    <p:sldTgt/>
+                  </p:tgtEl>
+                </p:cond>
+              </p:prevCondLst>
+              <p:nextCondLst>
+                <p:cond evt="onNext" delay="0">
+                  <p:tgtEl>
+                    <p:sldTgt/>
+                  </p:tgtEl>
+                </p:cond>
+              </p:nextCondLst>
+            </p:seq>
+          </p:childTnLst>
+        </p:cTn>
+      </p:par>
+    </p:tnLst>
+  </p:timing>
+</p:sld>
+</file>
+
+<file path=ppt/slides/slide21.xml><?xml version="1.0" encoding="utf-8"?>
+<p:sld xmlns:a="http://schemas.openxmlformats.org/drawingml/2006/main" xmlns:r="http://schemas.openxmlformats.org/officeDocument/2006/relationships" xmlns:p="http://schemas.openxmlformats.org/presentationml/2006/main">
+  <p:cSld>
+    <p:bg>
+      <p:bgPr>
+        <a:solidFill>
+          <a:schemeClr val="bg1">
+            <a:lumMod val="95000"/>
+          </a:schemeClr>
+        </a:solidFill>
+        <a:effectLst/>
+      </p:bgPr>
+    </p:bg>
+    <p:spTree>
+      <p:nvGrpSpPr>
+        <p:cNvPr id="1" name="">
+          <a:extLst>
+            <a:ext uri="{FF2B5EF4-FFF2-40B4-BE49-F238E27FC236}">
               <a16:creationId xmlns:a16="http://schemas.microsoft.com/office/drawing/2014/main" id="{FC4CFB3D-5C36-FB16-D869-DE8DB5E09B90}"/>
             </a:ext>
           </a:extLst>
@@ -14810,7 +15009,7 @@
           <a:p>
             <a:fld id="{846B06B1-1179-491F-A487-8E0C403F7C13}" type="slidenum">
               <a:rPr lang="fr-CA" smtClean="0"/>
-              <a:t>20</a:t>
+              <a:t>21</a:t>
             </a:fld>
             <a:endParaRPr lang="fr-CA"/>
           </a:p>
@@ -15783,7 +15982,7 @@
 </p:sld>
 </file>
 
-<file path=ppt/slides/slide21.xml><?xml version="1.0" encoding="utf-8"?>
+<file path=ppt/slides/slide22.xml><?xml version="1.0" encoding="utf-8"?>
 <p:sld xmlns:a="http://schemas.openxmlformats.org/drawingml/2006/main" xmlns:r="http://schemas.openxmlformats.org/officeDocument/2006/relationships" xmlns:p="http://schemas.openxmlformats.org/presentationml/2006/main">
   <p:cSld>
     <p:bg>
@@ -16232,7 +16431,7 @@
           <a:p>
             <a:fld id="{846B06B1-1179-491F-A487-8E0C403F7C13}" type="slidenum">
               <a:rPr lang="fr-CA" smtClean="0"/>
-              <a:t>21</a:t>
+              <a:t>22</a:t>
             </a:fld>
             <a:endParaRPr lang="fr-CA"/>
           </a:p>
@@ -16251,7 +16450,7 @@
 </p:sld>
 </file>
 
-<file path=ppt/slides/slide22.xml><?xml version="1.0" encoding="utf-8"?>
+<file path=ppt/slides/slide23.xml><?xml version="1.0" encoding="utf-8"?>
 <p:sld xmlns:a="http://schemas.openxmlformats.org/drawingml/2006/main" xmlns:r="http://schemas.openxmlformats.org/officeDocument/2006/relationships" xmlns:p="http://schemas.openxmlformats.org/presentationml/2006/main">
   <p:cSld>
     <p:bg>
@@ -16879,7 +17078,7 @@
           <a:p>
             <a:fld id="{846B06B1-1179-491F-A487-8E0C403F7C13}" type="slidenum">
               <a:rPr lang="fr-CA" smtClean="0"/>
-              <a:t>22</a:t>
+              <a:t>23</a:t>
             </a:fld>
             <a:endParaRPr lang="fr-CA"/>
           </a:p>
@@ -18139,7 +18338,7 @@
 </p:sld>
 </file>
 
-<file path=ppt/slides/slide23.xml><?xml version="1.0" encoding="utf-8"?>
+<file path=ppt/slides/slide24.xml><?xml version="1.0" encoding="utf-8"?>
 <p:sld xmlns:a="http://schemas.openxmlformats.org/drawingml/2006/main" xmlns:r="http://schemas.openxmlformats.org/officeDocument/2006/relationships" xmlns:p="http://schemas.openxmlformats.org/presentationml/2006/main">
   <p:cSld>
     <p:bg>
@@ -18580,7 +18779,7 @@
           <a:p>
             <a:fld id="{846B06B1-1179-491F-A487-8E0C403F7C13}" type="slidenum">
               <a:rPr lang="fr-CA" smtClean="0"/>
-              <a:t>23</a:t>
+              <a:t>24</a:t>
             </a:fld>
             <a:endParaRPr lang="fr-CA"/>
           </a:p>
@@ -19212,7 +19411,7 @@
 </p:sld>
 </file>
 
-<file path=ppt/slides/slide24.xml><?xml version="1.0" encoding="utf-8"?>
+<file path=ppt/slides/slide25.xml><?xml version="1.0" encoding="utf-8"?>
 <p:sld xmlns:a="http://schemas.openxmlformats.org/drawingml/2006/main" xmlns:r="http://schemas.openxmlformats.org/officeDocument/2006/relationships" xmlns:p="http://schemas.openxmlformats.org/presentationml/2006/main">
   <p:cSld>
     <p:bg>
@@ -19709,7 +19908,7 @@
           <a:p>
             <a:fld id="{846B06B1-1179-491F-A487-8E0C403F7C13}" type="slidenum">
               <a:rPr lang="fr-CA" smtClean="0"/>
-              <a:t>24</a:t>
+              <a:t>25</a:t>
             </a:fld>
             <a:endParaRPr lang="fr-CA"/>
           </a:p>
@@ -20124,7 +20323,7 @@
 </p:sld>
 </file>
 
-<file path=ppt/slides/slide25.xml><?xml version="1.0" encoding="utf-8"?>
+<file path=ppt/slides/slide26.xml><?xml version="1.0" encoding="utf-8"?>
 <p:sld xmlns:a="http://schemas.openxmlformats.org/drawingml/2006/main" xmlns:r="http://schemas.openxmlformats.org/officeDocument/2006/relationships" xmlns:p="http://schemas.openxmlformats.org/presentationml/2006/main">
   <p:cSld>
     <p:bg>
@@ -20702,7 +20901,7 @@
           <a:p>
             <a:fld id="{846B06B1-1179-491F-A487-8E0C403F7C13}" type="slidenum">
               <a:rPr lang="fr-CA" smtClean="0"/>
-              <a:t>25</a:t>
+              <a:t>26</a:t>
             </a:fld>
             <a:endParaRPr lang="fr-CA"/>
           </a:p>
@@ -21440,7 +21639,7 @@
 </p:sld>
 </file>
 
-<file path=ppt/slides/slide26.xml><?xml version="1.0" encoding="utf-8"?>
+<file path=ppt/slides/slide27.xml><?xml version="1.0" encoding="utf-8"?>
 <p:sld xmlns:a="http://schemas.openxmlformats.org/drawingml/2006/main" xmlns:r="http://schemas.openxmlformats.org/officeDocument/2006/relationships" xmlns:p="http://schemas.openxmlformats.org/presentationml/2006/main">
   <p:cSld>
     <p:bg>
@@ -21958,7 +22157,7 @@
           <a:p>
             <a:fld id="{846B06B1-1179-491F-A487-8E0C403F7C13}" type="slidenum">
               <a:rPr lang="fr-CA" smtClean="0"/>
-              <a:t>26</a:t>
+              <a:t>27</a:t>
             </a:fld>
             <a:endParaRPr lang="fr-CA"/>
           </a:p>
@@ -22672,7 +22871,7 @@
 </p:sld>
 </file>
 
-<file path=ppt/slides/slide27.xml><?xml version="1.0" encoding="utf-8"?>
+<file path=ppt/slides/slide28.xml><?xml version="1.0" encoding="utf-8"?>
 <p:sld xmlns:a="http://schemas.openxmlformats.org/drawingml/2006/main" xmlns:r="http://schemas.openxmlformats.org/officeDocument/2006/relationships" xmlns:p="http://schemas.openxmlformats.org/presentationml/2006/main">
   <p:cSld>
     <p:bg>
@@ -22954,7 +23153,7 @@
           <a:p>
             <a:fld id="{846B06B1-1179-491F-A487-8E0C403F7C13}" type="slidenum">
               <a:rPr lang="fr-CA" smtClean="0"/>
-              <a:t>27</a:t>
+              <a:t>28</a:t>
             </a:fld>
             <a:endParaRPr lang="fr-CA"/>
           </a:p>
@@ -23386,7 +23585,7 @@
 </p:sld>
 </file>
 
-<file path=ppt/slides/slide28.xml><?xml version="1.0" encoding="utf-8"?>
+<file path=ppt/slides/slide29.xml><?xml version="1.0" encoding="utf-8"?>
 <p:sld xmlns:a="http://schemas.openxmlformats.org/drawingml/2006/main" xmlns:r="http://schemas.openxmlformats.org/officeDocument/2006/relationships" xmlns:p="http://schemas.openxmlformats.org/presentationml/2006/main">
   <p:cSld>
     <p:bg>
@@ -24028,7 +24227,7 @@
           <a:p>
             <a:fld id="{846B06B1-1179-491F-A487-8E0C403F7C13}" type="slidenum">
               <a:rPr lang="fr-CA" smtClean="0"/>
-              <a:t>28</a:t>
+              <a:t>29</a:t>
             </a:fld>
             <a:endParaRPr lang="fr-CA"/>
           </a:p>
@@ -24590,469 +24789,6 @@
 </p:sld>
 </file>
 
-<file path=ppt/slides/slide29.xml><?xml version="1.0" encoding="utf-8"?>
-<p:sld xmlns:a="http://schemas.openxmlformats.org/drawingml/2006/main" xmlns:r="http://schemas.openxmlformats.org/officeDocument/2006/relationships" xmlns:p="http://schemas.openxmlformats.org/presentationml/2006/main">
-  <p:cSld>
-    <p:bg>
-      <p:bgPr>
-        <a:solidFill>
-          <a:schemeClr val="accent6">
-            <a:lumMod val="20000"/>
-            <a:lumOff val="80000"/>
-          </a:schemeClr>
-        </a:solidFill>
-        <a:effectLst/>
-      </p:bgPr>
-    </p:bg>
-    <p:spTree>
-      <p:nvGrpSpPr>
-        <p:cNvPr id="1" name="">
-          <a:extLst>
-            <a:ext uri="{FF2B5EF4-FFF2-40B4-BE49-F238E27FC236}">
-              <a16:creationId xmlns:a16="http://schemas.microsoft.com/office/drawing/2014/main" id="{2409169B-C89D-BDF5-18C1-65187867AAB2}"/>
-            </a:ext>
-          </a:extLst>
-        </p:cNvPr>
-        <p:cNvGrpSpPr/>
-        <p:nvPr/>
-      </p:nvGrpSpPr>
-      <p:grpSpPr>
-        <a:xfrm>
-          <a:off x="0" y="0"/>
-          <a:ext cx="0" cy="0"/>
-          <a:chOff x="0" y="0"/>
-          <a:chExt cx="0" cy="0"/>
-        </a:xfrm>
-      </p:grpSpPr>
-      <p:sp>
-        <p:nvSpPr>
-          <p:cNvPr id="2" name="Title 1">
-            <a:extLst>
-              <a:ext uri="{FF2B5EF4-FFF2-40B4-BE49-F238E27FC236}">
-                <a16:creationId xmlns:a16="http://schemas.microsoft.com/office/drawing/2014/main" id="{C652CB17-FE13-5B97-C01F-0344ECCCD1B7}"/>
-              </a:ext>
-            </a:extLst>
-          </p:cNvPr>
-          <p:cNvSpPr>
-            <a:spLocks noGrp="1"/>
-          </p:cNvSpPr>
-          <p:nvPr>
-            <p:ph type="title"/>
-          </p:nvPr>
-        </p:nvSpPr>
-        <p:spPr/>
-        <p:txBody>
-          <a:bodyPr/>
-          <a:lstStyle/>
-          <a:p>
-            <a:r>
-              <a:rPr lang="en-US" dirty="0">
-                <a:latin typeface="Arial Rounded MT Bold" panose="020F0704030504030204" pitchFamily="34" charset="0"/>
-              </a:rPr>
-              <a:t>XR6 – Morgane </a:t>
-            </a:r>
-            <a:r>
-              <a:rPr lang="en-US" dirty="0" err="1">
-                <a:latin typeface="Arial Rounded MT Bold" panose="020F0704030504030204" pitchFamily="34" charset="0"/>
-              </a:rPr>
-              <a:t>veut</a:t>
-            </a:r>
-            <a:r>
-              <a:rPr lang="en-US" dirty="0">
-                <a:latin typeface="Arial Rounded MT Bold" panose="020F0704030504030204" pitchFamily="34" charset="0"/>
-              </a:rPr>
-              <a:t> savoir ...</a:t>
-            </a:r>
-            <a:endParaRPr lang="fr-CA" dirty="0">
-              <a:latin typeface="Arial Rounded MT Bold" panose="020F0704030504030204" pitchFamily="34" charset="0"/>
-            </a:endParaRPr>
-          </a:p>
-        </p:txBody>
-      </p:sp>
-      <mc:AlternateContent xmlns:mc="http://schemas.openxmlformats.org/markup-compatibility/2006" xmlns:a14="http://schemas.microsoft.com/office/drawing/2010/main">
-        <mc:Choice Requires="a14">
-          <p:sp>
-            <p:nvSpPr>
-              <p:cNvPr id="3" name="Content Placeholder 2">
-                <a:extLst>
-                  <a:ext uri="{FF2B5EF4-FFF2-40B4-BE49-F238E27FC236}">
-                    <a16:creationId xmlns:a16="http://schemas.microsoft.com/office/drawing/2014/main" id="{F3B65A87-4326-B5C4-052F-1B528DFA8034}"/>
-                  </a:ext>
-                </a:extLst>
-              </p:cNvPr>
-              <p:cNvSpPr>
-                <a:spLocks noGrp="1"/>
-              </p:cNvSpPr>
-              <p:nvPr>
-                <p:ph idx="1"/>
-              </p:nvPr>
-            </p:nvSpPr>
-            <p:spPr/>
-            <p:txBody>
-              <a:bodyPr>
-                <a:normAutofit/>
-              </a:bodyPr>
-              <a:lstStyle/>
-              <a:p>
-                <a:pPr marL="0" indent="0">
-                  <a:buNone/>
-                </a:pPr>
-                <a:r>
-                  <a:rPr lang="en-US" sz="2000" dirty="0" err="1">
-                    <a:latin typeface="Consolas" panose="020B0609020204030204" pitchFamily="49" charset="0"/>
-                  </a:rPr>
-                  <a:t>laquelle</a:t>
-                </a:r>
-                <a:r>
-                  <a:rPr lang="en-US" sz="2000" dirty="0">
-                    <a:latin typeface="Consolas" panose="020B0609020204030204" pitchFamily="49" charset="0"/>
-                  </a:rPr>
-                  <a:t> de </a:t>
-                </a:r>
-                <a:r>
-                  <a:rPr lang="en-US" sz="2000" dirty="0" err="1">
-                    <a:latin typeface="Consolas" panose="020B0609020204030204" pitchFamily="49" charset="0"/>
-                  </a:rPr>
-                  <a:t>ces</a:t>
-                </a:r>
-                <a:r>
-                  <a:rPr lang="en-US" sz="2000" dirty="0">
-                    <a:latin typeface="Consolas" panose="020B0609020204030204" pitchFamily="49" charset="0"/>
-                  </a:rPr>
-                  <a:t> deux </a:t>
-                </a:r>
-                <a:r>
-                  <a:rPr lang="en-US" sz="2000" dirty="0" err="1">
-                    <a:latin typeface="Consolas" panose="020B0609020204030204" pitchFamily="49" charset="0"/>
-                  </a:rPr>
-                  <a:t>équations</a:t>
-                </a:r>
-                <a:r>
-                  <a:rPr lang="en-US" sz="2000" dirty="0">
-                    <a:latin typeface="Consolas" panose="020B0609020204030204" pitchFamily="49" charset="0"/>
-                  </a:rPr>
-                  <a:t> est </a:t>
-                </a:r>
-                <a:r>
-                  <a:rPr lang="en-US" sz="2000" dirty="0" err="1">
-                    <a:latin typeface="Consolas" panose="020B0609020204030204" pitchFamily="49" charset="0"/>
-                  </a:rPr>
-                  <a:t>vraie</a:t>
-                </a:r>
-                <a:r>
-                  <a:rPr lang="en-US" sz="2000" dirty="0">
-                    <a:latin typeface="Consolas" panose="020B0609020204030204" pitchFamily="49" charset="0"/>
-                  </a:rPr>
-                  <a:t>?</a:t>
-                </a:r>
-              </a:p>
-              <a:p>
-                <a:pPr marL="0" indent="0" algn="just">
-                  <a:buNone/>
-                </a:pPr>
-                <a:endParaRPr lang="en-CA" sz="100" b="0" i="1" dirty="0">
-                  <a:latin typeface="Cambria Math" panose="02040503050406030204" pitchFamily="18" charset="0"/>
-                </a:endParaRPr>
-              </a:p>
-              <a:p>
-                <a:pPr marL="0" indent="0" algn="ctr">
-                  <a:buNone/>
-                </a:pPr>
-                <a:r>
-                  <a:rPr lang="en-US" sz="2500" dirty="0">
-                    <a:latin typeface="Consolas" panose="020B0609020204030204" pitchFamily="49" charset="0"/>
-                  </a:rPr>
-                  <a:t>[1] </a:t>
-                </a:r>
-                <a14:m>
-                  <m:oMath xmlns:m="http://schemas.openxmlformats.org/officeDocument/2006/math">
-                    <m:bar>
-                      <m:barPr>
-                        <m:pos m:val="top"/>
-                        <m:ctrlPr>
-                          <a:rPr lang="en-CA" sz="2500" b="0" i="1" smtClean="0">
-                            <a:latin typeface="Cambria Math" panose="02040503050406030204" pitchFamily="18" charset="0"/>
-                          </a:rPr>
-                        </m:ctrlPr>
-                      </m:barPr>
-                      <m:e>
-                        <m:r>
-                          <a:rPr lang="en-CA" sz="2500" i="1">
-                            <a:latin typeface="Cambria Math" panose="02040503050406030204" pitchFamily="18" charset="0"/>
-                          </a:rPr>
-                          <m:t>𝐴</m:t>
-                        </m:r>
-                        <m:r>
-                          <a:rPr lang="en-CA" sz="2500" i="1">
-                            <a:latin typeface="Cambria Math" panose="02040503050406030204" pitchFamily="18" charset="0"/>
-                            <a:ea typeface="Cambria Math" panose="02040503050406030204" pitchFamily="18" charset="0"/>
-                          </a:rPr>
-                          <m:t>∪</m:t>
-                        </m:r>
-                        <m:r>
-                          <m:rPr>
-                            <m:sty m:val="p"/>
-                          </m:rPr>
-                          <a:rPr lang="en-CA" sz="2500" b="0" i="0" smtClean="0">
-                            <a:latin typeface="Cambria Math" panose="02040503050406030204" pitchFamily="18" charset="0"/>
-                            <a:ea typeface="Cambria Math" panose="02040503050406030204" pitchFamily="18" charset="0"/>
-                          </a:rPr>
-                          <m:t>B</m:t>
-                        </m:r>
-                      </m:e>
-                    </m:bar>
-                    <m:r>
-                      <a:rPr lang="en-CA" sz="2500" i="1">
-                        <a:latin typeface="Cambria Math" panose="02040503050406030204" pitchFamily="18" charset="0"/>
-                        <a:ea typeface="Cambria Math" panose="02040503050406030204" pitchFamily="18" charset="0"/>
-                      </a:rPr>
-                      <m:t>≡</m:t>
-                    </m:r>
-                    <m:bar>
-                      <m:barPr>
-                        <m:pos m:val="top"/>
-                        <m:ctrlPr>
-                          <a:rPr lang="en-CA" sz="2500" i="1">
-                            <a:latin typeface="Cambria Math" panose="02040503050406030204" pitchFamily="18" charset="0"/>
-                          </a:rPr>
-                        </m:ctrlPr>
-                      </m:barPr>
-                      <m:e>
-                        <m:r>
-                          <a:rPr lang="en-CA" sz="2500" i="1">
-                            <a:latin typeface="Cambria Math" panose="02040503050406030204" pitchFamily="18" charset="0"/>
-                          </a:rPr>
-                          <m:t>𝐴</m:t>
-                        </m:r>
-                      </m:e>
-                    </m:bar>
-                    <m:r>
-                      <a:rPr lang="en-CA" sz="2500" b="0" i="1" smtClean="0">
-                        <a:latin typeface="Cambria Math" panose="02040503050406030204" pitchFamily="18" charset="0"/>
-                        <a:ea typeface="Cambria Math" panose="02040503050406030204" pitchFamily="18" charset="0"/>
-                      </a:rPr>
-                      <m:t>∩</m:t>
-                    </m:r>
-                    <m:bar>
-                      <m:barPr>
-                        <m:pos m:val="top"/>
-                        <m:ctrlPr>
-                          <a:rPr lang="en-CA" sz="2500" i="1">
-                            <a:latin typeface="Cambria Math" panose="02040503050406030204" pitchFamily="18" charset="0"/>
-                          </a:rPr>
-                        </m:ctrlPr>
-                      </m:barPr>
-                      <m:e>
-                        <m:r>
-                          <a:rPr lang="en-CA" sz="2500" b="0" i="1" smtClean="0">
-                            <a:latin typeface="Cambria Math" panose="02040503050406030204" pitchFamily="18" charset="0"/>
-                          </a:rPr>
-                          <m:t>𝐵</m:t>
-                        </m:r>
-                      </m:e>
-                    </m:bar>
-                  </m:oMath>
-                </a14:m>
-                <a:endParaRPr lang="en-US" sz="2500" dirty="0">
-                  <a:latin typeface="Consolas" panose="020B0609020204030204" pitchFamily="49" charset="0"/>
-                </a:endParaRPr>
-              </a:p>
-              <a:p>
-                <a:pPr marL="0" indent="0" algn="ctr">
-                  <a:buNone/>
-                </a:pPr>
-                <a:endParaRPr lang="en-US" sz="100" dirty="0">
-                  <a:latin typeface="Consolas" panose="020B0609020204030204" pitchFamily="49" charset="0"/>
-                </a:endParaRPr>
-              </a:p>
-              <a:p>
-                <a:pPr marL="0" indent="0" algn="ctr">
-                  <a:buNone/>
-                </a:pPr>
-                <a:r>
-                  <a:rPr lang="en-US" sz="2500" dirty="0">
-                    <a:latin typeface="Consolas" panose="020B0609020204030204" pitchFamily="49" charset="0"/>
-                  </a:rPr>
-                  <a:t>[2] </a:t>
-                </a:r>
-                <a14:m>
-                  <m:oMath xmlns:m="http://schemas.openxmlformats.org/officeDocument/2006/math">
-                    <m:bar>
-                      <m:barPr>
-                        <m:pos m:val="top"/>
-                        <m:ctrlPr>
-                          <a:rPr lang="en-CA" sz="2500" i="1">
-                            <a:latin typeface="Cambria Math" panose="02040503050406030204" pitchFamily="18" charset="0"/>
-                          </a:rPr>
-                        </m:ctrlPr>
-                      </m:barPr>
-                      <m:e>
-                        <m:r>
-                          <a:rPr lang="en-CA" sz="2500" i="1">
-                            <a:latin typeface="Cambria Math" panose="02040503050406030204" pitchFamily="18" charset="0"/>
-                          </a:rPr>
-                          <m:t>𝐴</m:t>
-                        </m:r>
-                        <m:r>
-                          <a:rPr lang="en-CA" sz="2500" i="1">
-                            <a:latin typeface="Cambria Math" panose="02040503050406030204" pitchFamily="18" charset="0"/>
-                            <a:ea typeface="Cambria Math" panose="02040503050406030204" pitchFamily="18" charset="0"/>
-                          </a:rPr>
-                          <m:t>∪</m:t>
-                        </m:r>
-                        <m:r>
-                          <m:rPr>
-                            <m:sty m:val="p"/>
-                          </m:rPr>
-                          <a:rPr lang="en-CA" sz="2500">
-                            <a:latin typeface="Cambria Math" panose="02040503050406030204" pitchFamily="18" charset="0"/>
-                            <a:ea typeface="Cambria Math" panose="02040503050406030204" pitchFamily="18" charset="0"/>
-                          </a:rPr>
-                          <m:t>B</m:t>
-                        </m:r>
-                      </m:e>
-                    </m:bar>
-                    <m:r>
-                      <a:rPr lang="en-CA" sz="2500" i="1">
-                        <a:latin typeface="Cambria Math" panose="02040503050406030204" pitchFamily="18" charset="0"/>
-                        <a:ea typeface="Cambria Math" panose="02040503050406030204" pitchFamily="18" charset="0"/>
-                      </a:rPr>
-                      <m:t>≡</m:t>
-                    </m:r>
-                    <m:bar>
-                      <m:barPr>
-                        <m:pos m:val="top"/>
-                        <m:ctrlPr>
-                          <a:rPr lang="en-CA" sz="2500" i="1">
-                            <a:latin typeface="Cambria Math" panose="02040503050406030204" pitchFamily="18" charset="0"/>
-                          </a:rPr>
-                        </m:ctrlPr>
-                      </m:barPr>
-                      <m:e>
-                        <m:r>
-                          <a:rPr lang="en-CA" sz="2500" i="1">
-                            <a:latin typeface="Cambria Math" panose="02040503050406030204" pitchFamily="18" charset="0"/>
-                          </a:rPr>
-                          <m:t>𝐴</m:t>
-                        </m:r>
-                      </m:e>
-                    </m:bar>
-                    <m:r>
-                      <a:rPr lang="en-CA" sz="2500" i="1">
-                        <a:latin typeface="Cambria Math" panose="02040503050406030204" pitchFamily="18" charset="0"/>
-                        <a:ea typeface="Cambria Math" panose="02040503050406030204" pitchFamily="18" charset="0"/>
-                      </a:rPr>
-                      <m:t>∪</m:t>
-                    </m:r>
-                    <m:bar>
-                      <m:barPr>
-                        <m:pos m:val="top"/>
-                        <m:ctrlPr>
-                          <a:rPr lang="en-CA" sz="2500" i="1">
-                            <a:latin typeface="Cambria Math" panose="02040503050406030204" pitchFamily="18" charset="0"/>
-                          </a:rPr>
-                        </m:ctrlPr>
-                      </m:barPr>
-                      <m:e>
-                        <m:r>
-                          <a:rPr lang="en-CA" sz="2500" i="1">
-                            <a:latin typeface="Cambria Math" panose="02040503050406030204" pitchFamily="18" charset="0"/>
-                          </a:rPr>
-                          <m:t>𝐵</m:t>
-                        </m:r>
-                      </m:e>
-                    </m:bar>
-                  </m:oMath>
-                </a14:m>
-                <a:endParaRPr lang="en-US" sz="2500" dirty="0">
-                  <a:latin typeface="Consolas" panose="020B0609020204030204" pitchFamily="49" charset="0"/>
-                </a:endParaRPr>
-              </a:p>
-            </p:txBody>
-          </p:sp>
-        </mc:Choice>
-        <mc:Fallback xmlns="">
-          <p:sp>
-            <p:nvSpPr>
-              <p:cNvPr id="3" name="Content Placeholder 2">
-                <a:extLst>
-                  <a:ext uri="{FF2B5EF4-FFF2-40B4-BE49-F238E27FC236}">
-                    <a16:creationId xmlns:a16="http://schemas.microsoft.com/office/drawing/2014/main" id="{F3B65A87-4326-B5C4-052F-1B528DFA8034}"/>
-                  </a:ext>
-                </a:extLst>
-              </p:cNvPr>
-              <p:cNvSpPr>
-                <a:spLocks noGrp="1" noRot="1" noChangeAspect="1" noMove="1" noResize="1" noEditPoints="1" noAdjustHandles="1" noChangeArrowheads="1" noChangeShapeType="1" noTextEdit="1"/>
-              </p:cNvSpPr>
-              <p:nvPr>
-                <p:ph idx="1"/>
-              </p:nvPr>
-            </p:nvSpPr>
-            <p:spPr>
-              <a:blipFill>
-                <a:blip r:embed="rId2"/>
-                <a:stretch>
-                  <a:fillRect l="-638" t="-1401"/>
-                </a:stretch>
-              </a:blipFill>
-            </p:spPr>
-            <p:txBody>
-              <a:bodyPr/>
-              <a:lstStyle/>
-              <a:p>
-                <a:r>
-                  <a:rPr lang="fr-CA">
-                    <a:noFill/>
-                  </a:rPr>
-                  <a:t> </a:t>
-                </a:r>
-              </a:p>
-            </p:txBody>
-          </p:sp>
-        </mc:Fallback>
-      </mc:AlternateContent>
-      <p:sp>
-        <p:nvSpPr>
-          <p:cNvPr id="4" name="Slide Number Placeholder 3">
-            <a:extLst>
-              <a:ext uri="{FF2B5EF4-FFF2-40B4-BE49-F238E27FC236}">
-                <a16:creationId xmlns:a16="http://schemas.microsoft.com/office/drawing/2014/main" id="{2035F0E9-A4AF-2B26-AFD2-EBD36B54FEA7}"/>
-              </a:ext>
-            </a:extLst>
-          </p:cNvPr>
-          <p:cNvSpPr>
-            <a:spLocks noGrp="1"/>
-          </p:cNvSpPr>
-          <p:nvPr>
-            <p:ph type="sldNum" sz="quarter" idx="12"/>
-          </p:nvPr>
-        </p:nvSpPr>
-        <p:spPr/>
-        <p:txBody>
-          <a:bodyPr/>
-          <a:lstStyle/>
-          <a:p>
-            <a:fld id="{846B06B1-1179-491F-A487-8E0C403F7C13}" type="slidenum">
-              <a:rPr lang="fr-CA" smtClean="0"/>
-              <a:t>29</a:t>
-            </a:fld>
-            <a:endParaRPr lang="fr-CA"/>
-          </a:p>
-        </p:txBody>
-      </p:sp>
-    </p:spTree>
-    <p:extLst>
-      <p:ext uri="{BB962C8B-B14F-4D97-AF65-F5344CB8AC3E}">
-        <p14:creationId xmlns:p14="http://schemas.microsoft.com/office/powerpoint/2010/main" val="452085315"/>
-      </p:ext>
-    </p:extLst>
-  </p:cSld>
-  <p:clrMapOvr>
-    <a:masterClrMapping/>
-  </p:clrMapOvr>
-</p:sld>
-</file>
-
 <file path=ppt/slides/slide3.xml><?xml version="1.0" encoding="utf-8"?>
 <p:sld xmlns:a="http://schemas.openxmlformats.org/drawingml/2006/main" xmlns:r="http://schemas.openxmlformats.org/officeDocument/2006/relationships" xmlns:p="http://schemas.openxmlformats.org/presentationml/2006/main">
   <p:cSld>
@@ -26444,6 +26180,469 @@
     <p:bg>
       <p:bgPr>
         <a:solidFill>
+          <a:schemeClr val="accent6">
+            <a:lumMod val="20000"/>
+            <a:lumOff val="80000"/>
+          </a:schemeClr>
+        </a:solidFill>
+        <a:effectLst/>
+      </p:bgPr>
+    </p:bg>
+    <p:spTree>
+      <p:nvGrpSpPr>
+        <p:cNvPr id="1" name="">
+          <a:extLst>
+            <a:ext uri="{FF2B5EF4-FFF2-40B4-BE49-F238E27FC236}">
+              <a16:creationId xmlns:a16="http://schemas.microsoft.com/office/drawing/2014/main" id="{2409169B-C89D-BDF5-18C1-65187867AAB2}"/>
+            </a:ext>
+          </a:extLst>
+        </p:cNvPr>
+        <p:cNvGrpSpPr/>
+        <p:nvPr/>
+      </p:nvGrpSpPr>
+      <p:grpSpPr>
+        <a:xfrm>
+          <a:off x="0" y="0"/>
+          <a:ext cx="0" cy="0"/>
+          <a:chOff x="0" y="0"/>
+          <a:chExt cx="0" cy="0"/>
+        </a:xfrm>
+      </p:grpSpPr>
+      <p:sp>
+        <p:nvSpPr>
+          <p:cNvPr id="2" name="Title 1">
+            <a:extLst>
+              <a:ext uri="{FF2B5EF4-FFF2-40B4-BE49-F238E27FC236}">
+                <a16:creationId xmlns:a16="http://schemas.microsoft.com/office/drawing/2014/main" id="{C652CB17-FE13-5B97-C01F-0344ECCCD1B7}"/>
+              </a:ext>
+            </a:extLst>
+          </p:cNvPr>
+          <p:cNvSpPr>
+            <a:spLocks noGrp="1"/>
+          </p:cNvSpPr>
+          <p:nvPr>
+            <p:ph type="title"/>
+          </p:nvPr>
+        </p:nvSpPr>
+        <p:spPr/>
+        <p:txBody>
+          <a:bodyPr/>
+          <a:lstStyle/>
+          <a:p>
+            <a:r>
+              <a:rPr lang="en-US" dirty="0">
+                <a:latin typeface="Arial Rounded MT Bold" panose="020F0704030504030204" pitchFamily="34" charset="0"/>
+              </a:rPr>
+              <a:t>XR6 – Morgane </a:t>
+            </a:r>
+            <a:r>
+              <a:rPr lang="en-US" dirty="0" err="1">
+                <a:latin typeface="Arial Rounded MT Bold" panose="020F0704030504030204" pitchFamily="34" charset="0"/>
+              </a:rPr>
+              <a:t>veut</a:t>
+            </a:r>
+            <a:r>
+              <a:rPr lang="en-US" dirty="0">
+                <a:latin typeface="Arial Rounded MT Bold" panose="020F0704030504030204" pitchFamily="34" charset="0"/>
+              </a:rPr>
+              <a:t> savoir ...</a:t>
+            </a:r>
+            <a:endParaRPr lang="fr-CA" dirty="0">
+              <a:latin typeface="Arial Rounded MT Bold" panose="020F0704030504030204" pitchFamily="34" charset="0"/>
+            </a:endParaRPr>
+          </a:p>
+        </p:txBody>
+      </p:sp>
+      <mc:AlternateContent xmlns:mc="http://schemas.openxmlformats.org/markup-compatibility/2006" xmlns:a14="http://schemas.microsoft.com/office/drawing/2010/main">
+        <mc:Choice Requires="a14">
+          <p:sp>
+            <p:nvSpPr>
+              <p:cNvPr id="3" name="Content Placeholder 2">
+                <a:extLst>
+                  <a:ext uri="{FF2B5EF4-FFF2-40B4-BE49-F238E27FC236}">
+                    <a16:creationId xmlns:a16="http://schemas.microsoft.com/office/drawing/2014/main" id="{F3B65A87-4326-B5C4-052F-1B528DFA8034}"/>
+                  </a:ext>
+                </a:extLst>
+              </p:cNvPr>
+              <p:cNvSpPr>
+                <a:spLocks noGrp="1"/>
+              </p:cNvSpPr>
+              <p:nvPr>
+                <p:ph idx="1"/>
+              </p:nvPr>
+            </p:nvSpPr>
+            <p:spPr/>
+            <p:txBody>
+              <a:bodyPr>
+                <a:normAutofit/>
+              </a:bodyPr>
+              <a:lstStyle/>
+              <a:p>
+                <a:pPr marL="0" indent="0">
+                  <a:buNone/>
+                </a:pPr>
+                <a:r>
+                  <a:rPr lang="en-US" sz="2000" dirty="0" err="1">
+                    <a:latin typeface="Consolas" panose="020B0609020204030204" pitchFamily="49" charset="0"/>
+                  </a:rPr>
+                  <a:t>laquelle</a:t>
+                </a:r>
+                <a:r>
+                  <a:rPr lang="en-US" sz="2000" dirty="0">
+                    <a:latin typeface="Consolas" panose="020B0609020204030204" pitchFamily="49" charset="0"/>
+                  </a:rPr>
+                  <a:t> de </a:t>
+                </a:r>
+                <a:r>
+                  <a:rPr lang="en-US" sz="2000" dirty="0" err="1">
+                    <a:latin typeface="Consolas" panose="020B0609020204030204" pitchFamily="49" charset="0"/>
+                  </a:rPr>
+                  <a:t>ces</a:t>
+                </a:r>
+                <a:r>
+                  <a:rPr lang="en-US" sz="2000" dirty="0">
+                    <a:latin typeface="Consolas" panose="020B0609020204030204" pitchFamily="49" charset="0"/>
+                  </a:rPr>
+                  <a:t> deux </a:t>
+                </a:r>
+                <a:r>
+                  <a:rPr lang="en-US" sz="2000" dirty="0" err="1">
+                    <a:latin typeface="Consolas" panose="020B0609020204030204" pitchFamily="49" charset="0"/>
+                  </a:rPr>
+                  <a:t>équations</a:t>
+                </a:r>
+                <a:r>
+                  <a:rPr lang="en-US" sz="2000" dirty="0">
+                    <a:latin typeface="Consolas" panose="020B0609020204030204" pitchFamily="49" charset="0"/>
+                  </a:rPr>
+                  <a:t> est </a:t>
+                </a:r>
+                <a:r>
+                  <a:rPr lang="en-US" sz="2000" dirty="0" err="1">
+                    <a:latin typeface="Consolas" panose="020B0609020204030204" pitchFamily="49" charset="0"/>
+                  </a:rPr>
+                  <a:t>vraie</a:t>
+                </a:r>
+                <a:r>
+                  <a:rPr lang="en-US" sz="2000" dirty="0">
+                    <a:latin typeface="Consolas" panose="020B0609020204030204" pitchFamily="49" charset="0"/>
+                  </a:rPr>
+                  <a:t>?</a:t>
+                </a:r>
+              </a:p>
+              <a:p>
+                <a:pPr marL="0" indent="0" algn="just">
+                  <a:buNone/>
+                </a:pPr>
+                <a:endParaRPr lang="en-CA" sz="100" b="0" i="1" dirty="0">
+                  <a:latin typeface="Cambria Math" panose="02040503050406030204" pitchFamily="18" charset="0"/>
+                </a:endParaRPr>
+              </a:p>
+              <a:p>
+                <a:pPr marL="0" indent="0" algn="ctr">
+                  <a:buNone/>
+                </a:pPr>
+                <a:r>
+                  <a:rPr lang="en-US" sz="2500" dirty="0">
+                    <a:latin typeface="Consolas" panose="020B0609020204030204" pitchFamily="49" charset="0"/>
+                  </a:rPr>
+                  <a:t>[1] </a:t>
+                </a:r>
+                <a14:m>
+                  <m:oMath xmlns:m="http://schemas.openxmlformats.org/officeDocument/2006/math">
+                    <m:bar>
+                      <m:barPr>
+                        <m:pos m:val="top"/>
+                        <m:ctrlPr>
+                          <a:rPr lang="en-CA" sz="2500" b="0" i="1" smtClean="0">
+                            <a:latin typeface="Cambria Math" panose="02040503050406030204" pitchFamily="18" charset="0"/>
+                          </a:rPr>
+                        </m:ctrlPr>
+                      </m:barPr>
+                      <m:e>
+                        <m:r>
+                          <a:rPr lang="en-CA" sz="2500" i="1">
+                            <a:latin typeface="Cambria Math" panose="02040503050406030204" pitchFamily="18" charset="0"/>
+                          </a:rPr>
+                          <m:t>𝐴</m:t>
+                        </m:r>
+                        <m:r>
+                          <a:rPr lang="en-CA" sz="2500" i="1">
+                            <a:latin typeface="Cambria Math" panose="02040503050406030204" pitchFamily="18" charset="0"/>
+                            <a:ea typeface="Cambria Math" panose="02040503050406030204" pitchFamily="18" charset="0"/>
+                          </a:rPr>
+                          <m:t>∪</m:t>
+                        </m:r>
+                        <m:r>
+                          <m:rPr>
+                            <m:sty m:val="p"/>
+                          </m:rPr>
+                          <a:rPr lang="en-CA" sz="2500" b="0" i="0" smtClean="0">
+                            <a:latin typeface="Cambria Math" panose="02040503050406030204" pitchFamily="18" charset="0"/>
+                            <a:ea typeface="Cambria Math" panose="02040503050406030204" pitchFamily="18" charset="0"/>
+                          </a:rPr>
+                          <m:t>B</m:t>
+                        </m:r>
+                      </m:e>
+                    </m:bar>
+                    <m:r>
+                      <a:rPr lang="en-CA" sz="2500" i="1">
+                        <a:latin typeface="Cambria Math" panose="02040503050406030204" pitchFamily="18" charset="0"/>
+                        <a:ea typeface="Cambria Math" panose="02040503050406030204" pitchFamily="18" charset="0"/>
+                      </a:rPr>
+                      <m:t>≡</m:t>
+                    </m:r>
+                    <m:bar>
+                      <m:barPr>
+                        <m:pos m:val="top"/>
+                        <m:ctrlPr>
+                          <a:rPr lang="en-CA" sz="2500" i="1">
+                            <a:latin typeface="Cambria Math" panose="02040503050406030204" pitchFamily="18" charset="0"/>
+                          </a:rPr>
+                        </m:ctrlPr>
+                      </m:barPr>
+                      <m:e>
+                        <m:r>
+                          <a:rPr lang="en-CA" sz="2500" i="1">
+                            <a:latin typeface="Cambria Math" panose="02040503050406030204" pitchFamily="18" charset="0"/>
+                          </a:rPr>
+                          <m:t>𝐴</m:t>
+                        </m:r>
+                      </m:e>
+                    </m:bar>
+                    <m:r>
+                      <a:rPr lang="en-CA" sz="2500" b="0" i="1" smtClean="0">
+                        <a:latin typeface="Cambria Math" panose="02040503050406030204" pitchFamily="18" charset="0"/>
+                        <a:ea typeface="Cambria Math" panose="02040503050406030204" pitchFamily="18" charset="0"/>
+                      </a:rPr>
+                      <m:t>∩</m:t>
+                    </m:r>
+                    <m:bar>
+                      <m:barPr>
+                        <m:pos m:val="top"/>
+                        <m:ctrlPr>
+                          <a:rPr lang="en-CA" sz="2500" i="1">
+                            <a:latin typeface="Cambria Math" panose="02040503050406030204" pitchFamily="18" charset="0"/>
+                          </a:rPr>
+                        </m:ctrlPr>
+                      </m:barPr>
+                      <m:e>
+                        <m:r>
+                          <a:rPr lang="en-CA" sz="2500" b="0" i="1" smtClean="0">
+                            <a:latin typeface="Cambria Math" panose="02040503050406030204" pitchFamily="18" charset="0"/>
+                          </a:rPr>
+                          <m:t>𝐵</m:t>
+                        </m:r>
+                      </m:e>
+                    </m:bar>
+                  </m:oMath>
+                </a14:m>
+                <a:endParaRPr lang="en-US" sz="2500" dirty="0">
+                  <a:latin typeface="Consolas" panose="020B0609020204030204" pitchFamily="49" charset="0"/>
+                </a:endParaRPr>
+              </a:p>
+              <a:p>
+                <a:pPr marL="0" indent="0" algn="ctr">
+                  <a:buNone/>
+                </a:pPr>
+                <a:endParaRPr lang="en-US" sz="100" dirty="0">
+                  <a:latin typeface="Consolas" panose="020B0609020204030204" pitchFamily="49" charset="0"/>
+                </a:endParaRPr>
+              </a:p>
+              <a:p>
+                <a:pPr marL="0" indent="0" algn="ctr">
+                  <a:buNone/>
+                </a:pPr>
+                <a:r>
+                  <a:rPr lang="en-US" sz="2500" dirty="0">
+                    <a:latin typeface="Consolas" panose="020B0609020204030204" pitchFamily="49" charset="0"/>
+                  </a:rPr>
+                  <a:t>[2] </a:t>
+                </a:r>
+                <a14:m>
+                  <m:oMath xmlns:m="http://schemas.openxmlformats.org/officeDocument/2006/math">
+                    <m:bar>
+                      <m:barPr>
+                        <m:pos m:val="top"/>
+                        <m:ctrlPr>
+                          <a:rPr lang="en-CA" sz="2500" i="1">
+                            <a:latin typeface="Cambria Math" panose="02040503050406030204" pitchFamily="18" charset="0"/>
+                          </a:rPr>
+                        </m:ctrlPr>
+                      </m:barPr>
+                      <m:e>
+                        <m:r>
+                          <a:rPr lang="en-CA" sz="2500" i="1">
+                            <a:latin typeface="Cambria Math" panose="02040503050406030204" pitchFamily="18" charset="0"/>
+                          </a:rPr>
+                          <m:t>𝐴</m:t>
+                        </m:r>
+                        <m:r>
+                          <a:rPr lang="en-CA" sz="2500" i="1">
+                            <a:latin typeface="Cambria Math" panose="02040503050406030204" pitchFamily="18" charset="0"/>
+                            <a:ea typeface="Cambria Math" panose="02040503050406030204" pitchFamily="18" charset="0"/>
+                          </a:rPr>
+                          <m:t>∪</m:t>
+                        </m:r>
+                        <m:r>
+                          <m:rPr>
+                            <m:sty m:val="p"/>
+                          </m:rPr>
+                          <a:rPr lang="en-CA" sz="2500">
+                            <a:latin typeface="Cambria Math" panose="02040503050406030204" pitchFamily="18" charset="0"/>
+                            <a:ea typeface="Cambria Math" panose="02040503050406030204" pitchFamily="18" charset="0"/>
+                          </a:rPr>
+                          <m:t>B</m:t>
+                        </m:r>
+                      </m:e>
+                    </m:bar>
+                    <m:r>
+                      <a:rPr lang="en-CA" sz="2500" i="1">
+                        <a:latin typeface="Cambria Math" panose="02040503050406030204" pitchFamily="18" charset="0"/>
+                        <a:ea typeface="Cambria Math" panose="02040503050406030204" pitchFamily="18" charset="0"/>
+                      </a:rPr>
+                      <m:t>≡</m:t>
+                    </m:r>
+                    <m:bar>
+                      <m:barPr>
+                        <m:pos m:val="top"/>
+                        <m:ctrlPr>
+                          <a:rPr lang="en-CA" sz="2500" i="1">
+                            <a:latin typeface="Cambria Math" panose="02040503050406030204" pitchFamily="18" charset="0"/>
+                          </a:rPr>
+                        </m:ctrlPr>
+                      </m:barPr>
+                      <m:e>
+                        <m:r>
+                          <a:rPr lang="en-CA" sz="2500" i="1">
+                            <a:latin typeface="Cambria Math" panose="02040503050406030204" pitchFamily="18" charset="0"/>
+                          </a:rPr>
+                          <m:t>𝐴</m:t>
+                        </m:r>
+                      </m:e>
+                    </m:bar>
+                    <m:r>
+                      <a:rPr lang="en-CA" sz="2500" i="1">
+                        <a:latin typeface="Cambria Math" panose="02040503050406030204" pitchFamily="18" charset="0"/>
+                        <a:ea typeface="Cambria Math" panose="02040503050406030204" pitchFamily="18" charset="0"/>
+                      </a:rPr>
+                      <m:t>∪</m:t>
+                    </m:r>
+                    <m:bar>
+                      <m:barPr>
+                        <m:pos m:val="top"/>
+                        <m:ctrlPr>
+                          <a:rPr lang="en-CA" sz="2500" i="1">
+                            <a:latin typeface="Cambria Math" panose="02040503050406030204" pitchFamily="18" charset="0"/>
+                          </a:rPr>
+                        </m:ctrlPr>
+                      </m:barPr>
+                      <m:e>
+                        <m:r>
+                          <a:rPr lang="en-CA" sz="2500" i="1">
+                            <a:latin typeface="Cambria Math" panose="02040503050406030204" pitchFamily="18" charset="0"/>
+                          </a:rPr>
+                          <m:t>𝐵</m:t>
+                        </m:r>
+                      </m:e>
+                    </m:bar>
+                  </m:oMath>
+                </a14:m>
+                <a:endParaRPr lang="en-US" sz="2500" dirty="0">
+                  <a:latin typeface="Consolas" panose="020B0609020204030204" pitchFamily="49" charset="0"/>
+                </a:endParaRPr>
+              </a:p>
+            </p:txBody>
+          </p:sp>
+        </mc:Choice>
+        <mc:Fallback xmlns="">
+          <p:sp>
+            <p:nvSpPr>
+              <p:cNvPr id="3" name="Content Placeholder 2">
+                <a:extLst>
+                  <a:ext uri="{FF2B5EF4-FFF2-40B4-BE49-F238E27FC236}">
+                    <a16:creationId xmlns:a16="http://schemas.microsoft.com/office/drawing/2014/main" id="{F3B65A87-4326-B5C4-052F-1B528DFA8034}"/>
+                  </a:ext>
+                </a:extLst>
+              </p:cNvPr>
+              <p:cNvSpPr>
+                <a:spLocks noGrp="1" noRot="1" noChangeAspect="1" noMove="1" noResize="1" noEditPoints="1" noAdjustHandles="1" noChangeArrowheads="1" noChangeShapeType="1" noTextEdit="1"/>
+              </p:cNvSpPr>
+              <p:nvPr>
+                <p:ph idx="1"/>
+              </p:nvPr>
+            </p:nvSpPr>
+            <p:spPr>
+              <a:blipFill>
+                <a:blip r:embed="rId2"/>
+                <a:stretch>
+                  <a:fillRect l="-638" t="-1401"/>
+                </a:stretch>
+              </a:blipFill>
+            </p:spPr>
+            <p:txBody>
+              <a:bodyPr/>
+              <a:lstStyle/>
+              <a:p>
+                <a:r>
+                  <a:rPr lang="fr-CA">
+                    <a:noFill/>
+                  </a:rPr>
+                  <a:t> </a:t>
+                </a:r>
+              </a:p>
+            </p:txBody>
+          </p:sp>
+        </mc:Fallback>
+      </mc:AlternateContent>
+      <p:sp>
+        <p:nvSpPr>
+          <p:cNvPr id="4" name="Slide Number Placeholder 3">
+            <a:extLst>
+              <a:ext uri="{FF2B5EF4-FFF2-40B4-BE49-F238E27FC236}">
+                <a16:creationId xmlns:a16="http://schemas.microsoft.com/office/drawing/2014/main" id="{2035F0E9-A4AF-2B26-AFD2-EBD36B54FEA7}"/>
+              </a:ext>
+            </a:extLst>
+          </p:cNvPr>
+          <p:cNvSpPr>
+            <a:spLocks noGrp="1"/>
+          </p:cNvSpPr>
+          <p:nvPr>
+            <p:ph type="sldNum" sz="quarter" idx="12"/>
+          </p:nvPr>
+        </p:nvSpPr>
+        <p:spPr/>
+        <p:txBody>
+          <a:bodyPr/>
+          <a:lstStyle/>
+          <a:p>
+            <a:fld id="{846B06B1-1179-491F-A487-8E0C403F7C13}" type="slidenum">
+              <a:rPr lang="fr-CA" smtClean="0"/>
+              <a:t>30</a:t>
+            </a:fld>
+            <a:endParaRPr lang="fr-CA"/>
+          </a:p>
+        </p:txBody>
+      </p:sp>
+    </p:spTree>
+    <p:extLst>
+      <p:ext uri="{BB962C8B-B14F-4D97-AF65-F5344CB8AC3E}">
+        <p14:creationId xmlns:p14="http://schemas.microsoft.com/office/powerpoint/2010/main" val="452085315"/>
+      </p:ext>
+    </p:extLst>
+  </p:cSld>
+  <p:clrMapOvr>
+    <a:masterClrMapping/>
+  </p:clrMapOvr>
+</p:sld>
+</file>
+
+<file path=ppt/slides/slide31.xml><?xml version="1.0" encoding="utf-8"?>
+<p:sld xmlns:a="http://schemas.openxmlformats.org/drawingml/2006/main" xmlns:r="http://schemas.openxmlformats.org/officeDocument/2006/relationships" xmlns:p="http://schemas.openxmlformats.org/presentationml/2006/main">
+  <p:cSld>
+    <p:bg>
+      <p:bgPr>
+        <a:solidFill>
           <a:srgbClr val="F5F5F5"/>
         </a:solidFill>
         <a:effectLst/>
@@ -26739,7 +26938,7 @@
           <a:p>
             <a:fld id="{846B06B1-1179-491F-A487-8E0C403F7C13}" type="slidenum">
               <a:rPr lang="fr-CA" smtClean="0"/>
-              <a:t>30</a:t>
+              <a:t>31</a:t>
             </a:fld>
             <a:endParaRPr lang="fr-CA"/>
           </a:p>
@@ -27511,7 +27710,7 @@
 </p:sld>
 </file>
 
-<file path=ppt/slides/slide31.xml><?xml version="1.0" encoding="utf-8"?>
+<file path=ppt/slides/slide32.xml><?xml version="1.0" encoding="utf-8"?>
 <p:sld xmlns:a="http://schemas.openxmlformats.org/drawingml/2006/main" xmlns:r="http://schemas.openxmlformats.org/officeDocument/2006/relationships" xmlns:p="http://schemas.openxmlformats.org/presentationml/2006/main">
   <p:cSld>
     <p:bg>
@@ -28081,7 +28280,7 @@
           <a:p>
             <a:fld id="{846B06B1-1179-491F-A487-8E0C403F7C13}" type="slidenum">
               <a:rPr lang="fr-CA" smtClean="0"/>
-              <a:t>31</a:t>
+              <a:t>32</a:t>
             </a:fld>
             <a:endParaRPr lang="fr-CA"/>
           </a:p>
@@ -30541,7 +30740,7 @@
 </p:sld>
 </file>
 
-<file path=ppt/slides/slide32.xml><?xml version="1.0" encoding="utf-8"?>
+<file path=ppt/slides/slide33.xml><?xml version="1.0" encoding="utf-8"?>
 <p:sld xmlns:a="http://schemas.openxmlformats.org/drawingml/2006/main" xmlns:r="http://schemas.openxmlformats.org/officeDocument/2006/relationships" xmlns:p="http://schemas.openxmlformats.org/presentationml/2006/main">
   <p:cSld>
     <p:bg>
@@ -30906,7 +31105,7 @@
           <a:p>
             <a:fld id="{846B06B1-1179-491F-A487-8E0C403F7C13}" type="slidenum">
               <a:rPr lang="fr-CA" smtClean="0"/>
-              <a:t>32</a:t>
+              <a:t>33</a:t>
             </a:fld>
             <a:endParaRPr lang="fr-CA"/>
           </a:p>
@@ -30925,7 +31124,7 @@
 </p:sld>
 </file>
 
-<file path=ppt/slides/slide33.xml><?xml version="1.0" encoding="utf-8"?>
+<file path=ppt/slides/slide34.xml><?xml version="1.0" encoding="utf-8"?>
 <p:sld xmlns:a="http://schemas.openxmlformats.org/drawingml/2006/main" xmlns:r="http://schemas.openxmlformats.org/officeDocument/2006/relationships" xmlns:p="http://schemas.openxmlformats.org/presentationml/2006/main">
   <p:cSld>
     <p:bg>
@@ -31024,7 +31223,7 @@
           <a:p>
             <a:fld id="{846B06B1-1179-491F-A487-8E0C403F7C13}" type="slidenum">
               <a:rPr lang="fr-CA" smtClean="0"/>
-              <a:t>33</a:t>
+              <a:t>34</a:t>
             </a:fld>
             <a:endParaRPr lang="fr-CA"/>
           </a:p>
@@ -33032,7 +33231,7 @@
 </p:sld>
 </file>
 
-<file path=ppt/slides/slide34.xml><?xml version="1.0" encoding="utf-8"?>
+<file path=ppt/slides/slide35.xml><?xml version="1.0" encoding="utf-8"?>
 <p:sld xmlns:a="http://schemas.openxmlformats.org/drawingml/2006/main" xmlns:r="http://schemas.openxmlformats.org/officeDocument/2006/relationships" xmlns:p="http://schemas.openxmlformats.org/presentationml/2006/main">
   <p:cSld>
     <p:bg>
@@ -33250,7 +33449,7 @@
           <a:p>
             <a:fld id="{846B06B1-1179-491F-A487-8E0C403F7C13}" type="slidenum">
               <a:rPr lang="fr-CA" smtClean="0"/>
-              <a:t>34</a:t>
+              <a:t>35</a:t>
             </a:fld>
             <a:endParaRPr lang="fr-CA"/>
           </a:p>
@@ -33526,7 +33725,7 @@
 </p:sld>
 </file>
 
-<file path=ppt/slides/slide35.xml><?xml version="1.0" encoding="utf-8"?>
+<file path=ppt/slides/slide36.xml><?xml version="1.0" encoding="utf-8"?>
 <p:sld xmlns:a="http://schemas.openxmlformats.org/drawingml/2006/main" xmlns:r="http://schemas.openxmlformats.org/officeDocument/2006/relationships" xmlns:p="http://schemas.openxmlformats.org/presentationml/2006/main">
   <p:cSld>
     <p:bg>
@@ -33972,7 +34171,7 @@
           <a:p>
             <a:fld id="{846B06B1-1179-491F-A487-8E0C403F7C13}" type="slidenum">
               <a:rPr lang="fr-CA" smtClean="0"/>
-              <a:t>35</a:t>
+              <a:t>36</a:t>
             </a:fld>
             <a:endParaRPr lang="fr-CA" dirty="0"/>
           </a:p>
@@ -34851,7 +35050,7 @@
 </p:sld>
 </file>
 
-<file path=ppt/slides/slide36.xml><?xml version="1.0" encoding="utf-8"?>
+<file path=ppt/slides/slide37.xml><?xml version="1.0" encoding="utf-8"?>
 <p:sld xmlns:a="http://schemas.openxmlformats.org/drawingml/2006/main" xmlns:r="http://schemas.openxmlformats.org/officeDocument/2006/relationships" xmlns:p="http://schemas.openxmlformats.org/presentationml/2006/main">
   <p:cSld>
     <p:bg>
@@ -35397,7 +35596,7 @@
           <a:p>
             <a:fld id="{846B06B1-1179-491F-A487-8E0C403F7C13}" type="slidenum">
               <a:rPr lang="fr-CA" smtClean="0"/>
-              <a:t>36</a:t>
+              <a:t>37</a:t>
             </a:fld>
             <a:endParaRPr lang="fr-CA"/>
           </a:p>
@@ -36422,7 +36621,7 @@
 </p:sld>
 </file>
 
-<file path=ppt/slides/slide37.xml><?xml version="1.0" encoding="utf-8"?>
+<file path=ppt/slides/slide38.xml><?xml version="1.0" encoding="utf-8"?>
 <p:sld xmlns:a="http://schemas.openxmlformats.org/drawingml/2006/main" xmlns:r="http://schemas.openxmlformats.org/officeDocument/2006/relationships" xmlns:p="http://schemas.openxmlformats.org/presentationml/2006/main">
   <p:cSld>
     <p:bg>
@@ -36863,7 +37062,7 @@
           <a:p>
             <a:fld id="{846B06B1-1179-491F-A487-8E0C403F7C13}" type="slidenum">
               <a:rPr lang="fr-CA" smtClean="0"/>
-              <a:t>37</a:t>
+              <a:t>38</a:t>
             </a:fld>
             <a:endParaRPr lang="fr-CA"/>
           </a:p>
@@ -40248,8 +40447,8 @@
           </a:p>
         </p:txBody>
       </p:sp>
-      <mc:AlternateContent xmlns:mc="http://schemas.openxmlformats.org/markup-compatibility/2006">
-        <mc:Choice xmlns:a14="http://schemas.microsoft.com/office/drawing/2010/main" Requires="a14">
+      <mc:AlternateContent xmlns:mc="http://schemas.openxmlformats.org/markup-compatibility/2006" xmlns:a14="http://schemas.microsoft.com/office/drawing/2010/main">
+        <mc:Choice Requires="a14">
           <p:sp>
             <p:nvSpPr>
               <p:cNvPr id="3" name="Content Placeholder 2">
@@ -40449,7 +40648,7 @@
             </p:txBody>
           </p:sp>
         </mc:Choice>
-        <mc:Fallback>
+        <mc:Fallback xmlns="">
           <p:sp>
             <p:nvSpPr>
               <p:cNvPr id="3" name="Content Placeholder 2">
@@ -40663,7 +40862,13 @@
               <a:rPr lang="fr-CA" sz="1600" dirty="0">
                 <a:latin typeface="Consolas" panose="020B0609020204030204" pitchFamily="49" charset="0"/>
               </a:rPr>
-              <a:t>Hériter des attributs et de méthodes d'une classe de base avec l'héritage</a:t>
+              <a:t>Hériter des attributs et de méthodes d'une classe de base avec l'</a:t>
+            </a:r>
+            <a:r>
+              <a:rPr lang="fr-CA" sz="1600" b="1" dirty="0">
+                <a:latin typeface="Consolas" panose="020B0609020204030204" pitchFamily="49" charset="0"/>
+              </a:rPr>
+              <a:t>héritage</a:t>
             </a:r>
           </a:p>
           <a:p>
@@ -41845,20 +42050,12 @@
 <file path=ppt/slides/slide9.xml><?xml version="1.0" encoding="utf-8"?>
 <p:sld xmlns:a="http://schemas.openxmlformats.org/drawingml/2006/main" xmlns:r="http://schemas.openxmlformats.org/officeDocument/2006/relationships" xmlns:p="http://schemas.openxmlformats.org/presentationml/2006/main">
   <p:cSld>
-    <p:bg>
-      <p:bgPr>
-        <a:solidFill>
-          <a:srgbClr val="FFFF00"/>
-        </a:solidFill>
-        <a:effectLst/>
-      </p:bgPr>
-    </p:bg>
     <p:spTree>
       <p:nvGrpSpPr>
         <p:cNvPr id="1" name="">
           <a:extLst>
             <a:ext uri="{FF2B5EF4-FFF2-40B4-BE49-F238E27FC236}">
-              <a16:creationId xmlns:a16="http://schemas.microsoft.com/office/drawing/2014/main" id="{A79EE80B-5617-3AC9-1D3D-FF9406939B6B}"/>
+              <a16:creationId xmlns:a16="http://schemas.microsoft.com/office/drawing/2014/main" id="{7207CFF5-23F9-AB47-840A-8C68FB17784E}"/>
             </a:ext>
           </a:extLst>
         </p:cNvPr>
@@ -41875,60 +42072,1385 @@
       </p:grpSpPr>
       <p:sp>
         <p:nvSpPr>
-          <p:cNvPr id="15" name="Rectangle 14">
+          <p:cNvPr id="2" name="Title 1">
             <a:extLst>
               <a:ext uri="{FF2B5EF4-FFF2-40B4-BE49-F238E27FC236}">
-                <a16:creationId xmlns:a16="http://schemas.microsoft.com/office/drawing/2014/main" id="{AED2F8D1-AEB0-E659-5BE9-F91783BAB484}"/>
+                <a16:creationId xmlns:a16="http://schemas.microsoft.com/office/drawing/2014/main" id="{D51950A7-4E5D-4747-C531-3A02BA2518C7}"/>
               </a:ext>
             </a:extLst>
           </p:cNvPr>
-          <p:cNvSpPr/>
-          <p:nvPr/>
+          <p:cNvSpPr>
+            <a:spLocks noGrp="1"/>
+          </p:cNvSpPr>
+          <p:nvPr>
+            <p:ph type="title"/>
+          </p:nvPr>
         </p:nvSpPr>
-        <p:spPr>
-          <a:xfrm>
-            <a:off x="61649" y="3761964"/>
-            <a:ext cx="726332" cy="171230"/>
-          </a:xfrm>
-          <a:prstGeom prst="rect">
-            <a:avLst/>
-          </a:prstGeom>
-        </p:spPr>
-        <p:style>
-          <a:lnRef idx="2">
-            <a:schemeClr val="accent1">
-              <a:shade val="15000"/>
-            </a:schemeClr>
-          </a:lnRef>
-          <a:fillRef idx="1">
-            <a:schemeClr val="accent1"/>
-          </a:fillRef>
-          <a:effectRef idx="0">
-            <a:schemeClr val="accent1"/>
-          </a:effectRef>
-          <a:fontRef idx="minor">
-            <a:schemeClr val="lt1"/>
-          </a:fontRef>
-        </p:style>
+        <p:spPr/>
         <p:txBody>
-          <a:bodyPr rtlCol="0" anchor="ctr"/>
+          <a:bodyPr/>
           <a:lstStyle/>
           <a:p>
-            <a:pPr algn="ctr"/>
-            <a:endParaRPr lang="fr-CA"/>
+            <a:r>
+              <a:rPr lang="en-US" dirty="0">
+                <a:latin typeface="Arial Rounded MT Bold" panose="020F0704030504030204" pitchFamily="34" charset="0"/>
+              </a:rPr>
+              <a:t>Une </a:t>
+            </a:r>
+            <a:r>
+              <a:rPr lang="en-US" dirty="0" err="1">
+                <a:latin typeface="Arial Rounded MT Bold" panose="020F0704030504030204" pitchFamily="34" charset="0"/>
+              </a:rPr>
+              <a:t>classe-contenant</a:t>
+            </a:r>
+            <a:r>
+              <a:rPr lang="en-US" dirty="0">
+                <a:latin typeface="Arial Rounded MT Bold" panose="020F0704030504030204" pitchFamily="34" charset="0"/>
+              </a:rPr>
+              <a:t> (1/2)</a:t>
+            </a:r>
+            <a:endParaRPr lang="fr-CA" dirty="0">
+              <a:latin typeface="Arial Rounded MT Bold" panose="020F0704030504030204" pitchFamily="34" charset="0"/>
+            </a:endParaRPr>
           </a:p>
         </p:txBody>
       </p:sp>
+      <p:sp>
+        <p:nvSpPr>
+          <p:cNvPr id="5" name="Slide Number Placeholder 4">
+            <a:extLst>
+              <a:ext uri="{FF2B5EF4-FFF2-40B4-BE49-F238E27FC236}">
+                <a16:creationId xmlns:a16="http://schemas.microsoft.com/office/drawing/2014/main" id="{3B2755FD-F6AA-444E-D8A0-DD589238AFDF}"/>
+              </a:ext>
+            </a:extLst>
+          </p:cNvPr>
+          <p:cNvSpPr>
+            <a:spLocks noGrp="1"/>
+          </p:cNvSpPr>
+          <p:nvPr>
+            <p:ph type="sldNum" sz="quarter" idx="12"/>
+          </p:nvPr>
+        </p:nvSpPr>
+        <p:spPr/>
+        <p:txBody>
+          <a:bodyPr/>
+          <a:lstStyle/>
+          <a:p>
+            <a:fld id="{846B06B1-1179-491F-A487-8E0C403F7C13}" type="slidenum">
+              <a:rPr lang="fr-CA" smtClean="0"/>
+              <a:t>9</a:t>
+            </a:fld>
+            <a:endParaRPr lang="fr-CA" dirty="0"/>
+          </a:p>
+        </p:txBody>
+      </p:sp>
+      <p:grpSp>
+        <p:nvGrpSpPr>
+          <p:cNvPr id="35" name="Google Shape;368;p19">
+            <a:extLst>
+              <a:ext uri="{FF2B5EF4-FFF2-40B4-BE49-F238E27FC236}">
+                <a16:creationId xmlns:a16="http://schemas.microsoft.com/office/drawing/2014/main" id="{E2E77EC7-8B11-EF59-F188-DF537EBBCDEF}"/>
+              </a:ext>
+            </a:extLst>
+          </p:cNvPr>
+          <p:cNvGrpSpPr/>
+          <p:nvPr/>
+        </p:nvGrpSpPr>
+        <p:grpSpPr>
+          <a:xfrm>
+            <a:off x="1829819" y="1690688"/>
+            <a:ext cx="7930676" cy="3780000"/>
+            <a:chOff x="6413585" y="3766183"/>
+            <a:chExt cx="8659593" cy="5399999"/>
+          </a:xfrm>
+        </p:grpSpPr>
+        <p:sp>
+          <p:nvSpPr>
+            <p:cNvPr id="36" name="Google Shape;369;p19">
+              <a:extLst>
+                <a:ext uri="{FF2B5EF4-FFF2-40B4-BE49-F238E27FC236}">
+                  <a16:creationId xmlns:a16="http://schemas.microsoft.com/office/drawing/2014/main" id="{9EF9ACDA-F334-BD96-F652-E5DC09458A74}"/>
+                </a:ext>
+              </a:extLst>
+            </p:cNvPr>
+            <p:cNvSpPr/>
+            <p:nvPr/>
+          </p:nvSpPr>
+          <p:spPr>
+            <a:xfrm>
+              <a:off x="6413585" y="3766183"/>
+              <a:ext cx="432397" cy="5399999"/>
+            </a:xfrm>
+            <a:prstGeom prst="rect">
+              <a:avLst/>
+            </a:prstGeom>
+            <a:solidFill>
+              <a:srgbClr val="7F7F7F"/>
+            </a:solidFill>
+            <a:ln w="12700" cap="flat" cmpd="sng">
+              <a:solidFill>
+                <a:srgbClr val="7F7F7F"/>
+              </a:solidFill>
+              <a:prstDash val="solid"/>
+              <a:miter lim="800000"/>
+              <a:headEnd type="none" w="sm" len="sm"/>
+              <a:tailEnd type="none" w="sm" len="sm"/>
+            </a:ln>
+          </p:spPr>
+          <p:txBody>
+            <a:bodyPr spcFirstLastPara="1" wrap="square" lIns="91425" tIns="45700" rIns="91425" bIns="45700" anchor="ctr" anchorCtr="0">
+              <a:noAutofit/>
+            </a:bodyPr>
+            <a:lstStyle/>
+            <a:p>
+              <a:pPr marL="0" marR="0" lvl="0" indent="0" algn="ctr" rtl="0">
+                <a:spcBef>
+                  <a:spcPts val="0"/>
+                </a:spcBef>
+                <a:spcAft>
+                  <a:spcPts val="0"/>
+                </a:spcAft>
+                <a:buNone/>
+              </a:pPr>
+              <a:r>
+                <a:rPr lang="fr-CA" sz="1400" dirty="0">
+                  <a:solidFill>
+                    <a:schemeClr val="lt1"/>
+                  </a:solidFill>
+                  <a:latin typeface="Calibri"/>
+                  <a:ea typeface="Calibri"/>
+                  <a:cs typeface="Calibri"/>
+                  <a:sym typeface="Calibri"/>
+                </a:rPr>
+                <a:t>1</a:t>
+              </a:r>
+              <a:endParaRPr sz="1400" dirty="0">
+                <a:solidFill>
+                  <a:schemeClr val="lt1"/>
+                </a:solidFill>
+                <a:latin typeface="Calibri"/>
+                <a:ea typeface="Calibri"/>
+                <a:cs typeface="Calibri"/>
+                <a:sym typeface="Calibri"/>
+              </a:endParaRPr>
+            </a:p>
+            <a:p>
+              <a:pPr marL="0" marR="0" lvl="0" indent="0" algn="ctr" rtl="0">
+                <a:spcBef>
+                  <a:spcPts val="0"/>
+                </a:spcBef>
+                <a:spcAft>
+                  <a:spcPts val="0"/>
+                </a:spcAft>
+                <a:buNone/>
+              </a:pPr>
+              <a:r>
+                <a:rPr lang="fr-CA" sz="1400" dirty="0">
+                  <a:solidFill>
+                    <a:schemeClr val="lt1"/>
+                  </a:solidFill>
+                  <a:latin typeface="Calibri"/>
+                  <a:ea typeface="Calibri"/>
+                  <a:cs typeface="Calibri"/>
+                  <a:sym typeface="Calibri"/>
+                </a:rPr>
+                <a:t>2</a:t>
+              </a:r>
+              <a:endParaRPr sz="1400" dirty="0"/>
+            </a:p>
+            <a:p>
+              <a:pPr marL="0" marR="0" lvl="0" indent="0" algn="ctr" rtl="0">
+                <a:spcBef>
+                  <a:spcPts val="0"/>
+                </a:spcBef>
+                <a:spcAft>
+                  <a:spcPts val="0"/>
+                </a:spcAft>
+                <a:buNone/>
+              </a:pPr>
+              <a:r>
+                <a:rPr lang="fr-CA" sz="1400" dirty="0">
+                  <a:solidFill>
+                    <a:schemeClr val="lt1"/>
+                  </a:solidFill>
+                  <a:latin typeface="Calibri"/>
+                  <a:ea typeface="Calibri"/>
+                  <a:cs typeface="Calibri"/>
+                  <a:sym typeface="Calibri"/>
+                </a:rPr>
+                <a:t>3</a:t>
+              </a:r>
+            </a:p>
+            <a:p>
+              <a:pPr marL="0" marR="0" lvl="0" indent="0" algn="ctr" rtl="0">
+                <a:spcBef>
+                  <a:spcPts val="0"/>
+                </a:spcBef>
+                <a:spcAft>
+                  <a:spcPts val="0"/>
+                </a:spcAft>
+                <a:buNone/>
+              </a:pPr>
+              <a:r>
+                <a:rPr lang="fr-CA" sz="1400" dirty="0">
+                  <a:solidFill>
+                    <a:schemeClr val="lt1"/>
+                  </a:solidFill>
+                  <a:latin typeface="Calibri"/>
+                  <a:ea typeface="Calibri"/>
+                  <a:cs typeface="Calibri"/>
+                  <a:sym typeface="Calibri"/>
+                </a:rPr>
+                <a:t>4</a:t>
+              </a:r>
+            </a:p>
+            <a:p>
+              <a:pPr marL="0" marR="0" lvl="0" indent="0" algn="ctr" rtl="0">
+                <a:spcBef>
+                  <a:spcPts val="0"/>
+                </a:spcBef>
+                <a:spcAft>
+                  <a:spcPts val="0"/>
+                </a:spcAft>
+                <a:buNone/>
+              </a:pPr>
+              <a:r>
+                <a:rPr lang="fr-CA" sz="1400" dirty="0">
+                  <a:solidFill>
+                    <a:schemeClr val="lt1"/>
+                  </a:solidFill>
+                  <a:latin typeface="Calibri"/>
+                  <a:ea typeface="Calibri"/>
+                  <a:cs typeface="Calibri"/>
+                  <a:sym typeface="Calibri"/>
+                </a:rPr>
+                <a:t>5</a:t>
+              </a:r>
+            </a:p>
+            <a:p>
+              <a:pPr marL="0" marR="0" lvl="0" indent="0" algn="ctr" rtl="0">
+                <a:spcBef>
+                  <a:spcPts val="0"/>
+                </a:spcBef>
+                <a:spcAft>
+                  <a:spcPts val="0"/>
+                </a:spcAft>
+                <a:buNone/>
+              </a:pPr>
+              <a:r>
+                <a:rPr lang="fr-CA" sz="1400" dirty="0">
+                  <a:solidFill>
+                    <a:schemeClr val="lt1"/>
+                  </a:solidFill>
+                  <a:latin typeface="Calibri"/>
+                  <a:ea typeface="Calibri"/>
+                  <a:cs typeface="Calibri"/>
+                  <a:sym typeface="Calibri"/>
+                </a:rPr>
+                <a:t>6</a:t>
+              </a:r>
+            </a:p>
+            <a:p>
+              <a:pPr marL="0" marR="0" lvl="0" indent="0" algn="ctr" rtl="0">
+                <a:spcBef>
+                  <a:spcPts val="0"/>
+                </a:spcBef>
+                <a:spcAft>
+                  <a:spcPts val="0"/>
+                </a:spcAft>
+                <a:buNone/>
+              </a:pPr>
+              <a:r>
+                <a:rPr lang="fr-CA" sz="1400" dirty="0">
+                  <a:solidFill>
+                    <a:schemeClr val="lt1"/>
+                  </a:solidFill>
+                  <a:latin typeface="Calibri"/>
+                  <a:ea typeface="Calibri"/>
+                  <a:cs typeface="Calibri"/>
+                  <a:sym typeface="Calibri"/>
+                </a:rPr>
+                <a:t>7</a:t>
+              </a:r>
+            </a:p>
+            <a:p>
+              <a:pPr marL="0" marR="0" lvl="0" indent="0" algn="ctr" rtl="0">
+                <a:spcBef>
+                  <a:spcPts val="0"/>
+                </a:spcBef>
+                <a:spcAft>
+                  <a:spcPts val="0"/>
+                </a:spcAft>
+                <a:buNone/>
+              </a:pPr>
+              <a:r>
+                <a:rPr lang="fr-CA" sz="1400" dirty="0">
+                  <a:solidFill>
+                    <a:schemeClr val="lt1"/>
+                  </a:solidFill>
+                  <a:latin typeface="Calibri"/>
+                  <a:ea typeface="Calibri"/>
+                  <a:cs typeface="Calibri"/>
+                  <a:sym typeface="Calibri"/>
+                </a:rPr>
+                <a:t>8</a:t>
+              </a:r>
+            </a:p>
+            <a:p>
+              <a:pPr marL="0" marR="0" lvl="0" indent="0" algn="ctr" rtl="0">
+                <a:spcBef>
+                  <a:spcPts val="0"/>
+                </a:spcBef>
+                <a:spcAft>
+                  <a:spcPts val="0"/>
+                </a:spcAft>
+                <a:buNone/>
+              </a:pPr>
+              <a:r>
+                <a:rPr lang="fr-CA" sz="1400" dirty="0">
+                  <a:solidFill>
+                    <a:schemeClr val="lt1"/>
+                  </a:solidFill>
+                  <a:latin typeface="Calibri"/>
+                  <a:ea typeface="Calibri"/>
+                  <a:cs typeface="Calibri"/>
+                  <a:sym typeface="Calibri"/>
+                </a:rPr>
+                <a:t>9</a:t>
+              </a:r>
+            </a:p>
+            <a:p>
+              <a:pPr marL="0" marR="0" lvl="0" indent="0" algn="ctr" rtl="0">
+                <a:spcBef>
+                  <a:spcPts val="0"/>
+                </a:spcBef>
+                <a:spcAft>
+                  <a:spcPts val="0"/>
+                </a:spcAft>
+                <a:buNone/>
+              </a:pPr>
+              <a:r>
+                <a:rPr lang="fr-CA" sz="1400" dirty="0">
+                  <a:solidFill>
+                    <a:schemeClr val="lt1"/>
+                  </a:solidFill>
+                  <a:latin typeface="Calibri"/>
+                  <a:ea typeface="Calibri"/>
+                  <a:cs typeface="Calibri"/>
+                  <a:sym typeface="Calibri"/>
+                </a:rPr>
+                <a:t>10</a:t>
+              </a:r>
+            </a:p>
+            <a:p>
+              <a:pPr marL="0" marR="0" lvl="0" indent="0" algn="ctr" rtl="0">
+                <a:spcBef>
+                  <a:spcPts val="0"/>
+                </a:spcBef>
+                <a:spcAft>
+                  <a:spcPts val="0"/>
+                </a:spcAft>
+                <a:buNone/>
+              </a:pPr>
+              <a:r>
+                <a:rPr lang="fr-CA" sz="1400" dirty="0">
+                  <a:solidFill>
+                    <a:schemeClr val="lt1"/>
+                  </a:solidFill>
+                  <a:latin typeface="Calibri"/>
+                  <a:ea typeface="Calibri"/>
+                  <a:cs typeface="Calibri"/>
+                  <a:sym typeface="Calibri"/>
+                </a:rPr>
+                <a:t>11</a:t>
+              </a:r>
+            </a:p>
+            <a:p>
+              <a:pPr marL="0" marR="0" lvl="0" indent="0" algn="ctr" rtl="0">
+                <a:spcBef>
+                  <a:spcPts val="0"/>
+                </a:spcBef>
+                <a:spcAft>
+                  <a:spcPts val="0"/>
+                </a:spcAft>
+                <a:buNone/>
+              </a:pPr>
+              <a:r>
+                <a:rPr lang="fr-CA" sz="1400" dirty="0">
+                  <a:solidFill>
+                    <a:schemeClr val="lt1"/>
+                  </a:solidFill>
+                  <a:latin typeface="Calibri"/>
+                  <a:ea typeface="Calibri"/>
+                  <a:cs typeface="Calibri"/>
+                  <a:sym typeface="Calibri"/>
+                </a:rPr>
+                <a:t>12</a:t>
+              </a:r>
+            </a:p>
+            <a:p>
+              <a:pPr marL="0" marR="0" lvl="0" indent="0" algn="ctr" rtl="0">
+                <a:spcBef>
+                  <a:spcPts val="0"/>
+                </a:spcBef>
+                <a:spcAft>
+                  <a:spcPts val="0"/>
+                </a:spcAft>
+                <a:buNone/>
+              </a:pPr>
+              <a:r>
+                <a:rPr lang="fr-CA" sz="1400" dirty="0">
+                  <a:solidFill>
+                    <a:schemeClr val="lt1"/>
+                  </a:solidFill>
+                  <a:latin typeface="Calibri"/>
+                  <a:ea typeface="Calibri"/>
+                  <a:cs typeface="Calibri"/>
+                  <a:sym typeface="Calibri"/>
+                </a:rPr>
+                <a:t>13</a:t>
+              </a:r>
+            </a:p>
+            <a:p>
+              <a:pPr marL="0" marR="0" lvl="0" indent="0" algn="ctr" rtl="0">
+                <a:spcBef>
+                  <a:spcPts val="0"/>
+                </a:spcBef>
+                <a:spcAft>
+                  <a:spcPts val="0"/>
+                </a:spcAft>
+                <a:buNone/>
+              </a:pPr>
+              <a:r>
+                <a:rPr lang="fr-CA" sz="1400" dirty="0">
+                  <a:solidFill>
+                    <a:schemeClr val="lt1"/>
+                  </a:solidFill>
+                  <a:latin typeface="Calibri"/>
+                  <a:ea typeface="Calibri"/>
+                  <a:cs typeface="Calibri"/>
+                  <a:sym typeface="Calibri"/>
+                </a:rPr>
+                <a:t>14</a:t>
+              </a:r>
+            </a:p>
+            <a:p>
+              <a:pPr marL="0" marR="0" lvl="0" indent="0" algn="ctr" rtl="0">
+                <a:spcBef>
+                  <a:spcPts val="0"/>
+                </a:spcBef>
+                <a:spcAft>
+                  <a:spcPts val="0"/>
+                </a:spcAft>
+                <a:buNone/>
+              </a:pPr>
+              <a:r>
+                <a:rPr lang="fr-CA" sz="1400" dirty="0">
+                  <a:solidFill>
+                    <a:schemeClr val="lt1"/>
+                  </a:solidFill>
+                  <a:latin typeface="Calibri"/>
+                  <a:ea typeface="Calibri"/>
+                  <a:cs typeface="Calibri"/>
+                  <a:sym typeface="Calibri"/>
+                </a:rPr>
+                <a:t>15</a:t>
+              </a:r>
+            </a:p>
+          </p:txBody>
+        </p:sp>
+        <p:sp>
+          <p:nvSpPr>
+            <p:cNvPr id="37" name="Google Shape;370;p19">
+              <a:extLst>
+                <a:ext uri="{FF2B5EF4-FFF2-40B4-BE49-F238E27FC236}">
+                  <a16:creationId xmlns:a16="http://schemas.microsoft.com/office/drawing/2014/main" id="{00392628-7F4E-FFE2-1C6C-4292DF6E736D}"/>
+                </a:ext>
+              </a:extLst>
+            </p:cNvPr>
+            <p:cNvSpPr/>
+            <p:nvPr/>
+          </p:nvSpPr>
+          <p:spPr>
+            <a:xfrm>
+              <a:off x="6845982" y="3766183"/>
+              <a:ext cx="8227196" cy="5399999"/>
+            </a:xfrm>
+            <a:prstGeom prst="rect">
+              <a:avLst/>
+            </a:prstGeom>
+            <a:solidFill>
+              <a:srgbClr val="F2F2F2"/>
+            </a:solidFill>
+            <a:ln w="12700" cap="flat" cmpd="sng">
+              <a:solidFill>
+                <a:srgbClr val="7F7F7F"/>
+              </a:solidFill>
+              <a:prstDash val="solid"/>
+              <a:miter lim="800000"/>
+              <a:headEnd type="none" w="sm" len="sm"/>
+              <a:tailEnd type="none" w="sm" len="sm"/>
+            </a:ln>
+          </p:spPr>
+          <p:txBody>
+            <a:bodyPr spcFirstLastPara="1" wrap="square" lIns="91425" tIns="45700" rIns="91425" bIns="45700" anchor="ctr" anchorCtr="0">
+              <a:noAutofit/>
+            </a:bodyPr>
+            <a:lstStyle/>
+            <a:p>
+              <a:r>
+                <a:rPr lang="fr-FR" sz="1400" b="1" dirty="0" err="1">
+                  <a:solidFill>
+                    <a:srgbClr val="008800"/>
+                  </a:solidFill>
+                  <a:latin typeface="Consolas" panose="020B0609020204030204" pitchFamily="49" charset="0"/>
+                </a:rPr>
+                <a:t>from</a:t>
+              </a:r>
+              <a:r>
+                <a:rPr lang="fr-FR" sz="1400" dirty="0">
+                  <a:solidFill>
+                    <a:srgbClr val="BBBBBB"/>
+                  </a:solidFill>
+                  <a:latin typeface="Consolas" panose="020B0609020204030204" pitchFamily="49" charset="0"/>
+                </a:rPr>
+                <a:t> </a:t>
+              </a:r>
+              <a:r>
+                <a:rPr lang="fr-FR" sz="1400" b="1" dirty="0" err="1">
+                  <a:solidFill>
+                    <a:srgbClr val="0E84B5"/>
+                  </a:solidFill>
+                  <a:latin typeface="Consolas" panose="020B0609020204030204" pitchFamily="49" charset="0"/>
+                </a:rPr>
+                <a:t>dataclasses</a:t>
+              </a:r>
+              <a:r>
+                <a:rPr lang="fr-FR" sz="1400" dirty="0">
+                  <a:solidFill>
+                    <a:srgbClr val="BBBBBB"/>
+                  </a:solidFill>
+                  <a:latin typeface="Consolas" panose="020B0609020204030204" pitchFamily="49" charset="0"/>
+                </a:rPr>
+                <a:t> </a:t>
+              </a:r>
+              <a:r>
+                <a:rPr lang="fr-FR" sz="1400" b="1" dirty="0">
+                  <a:solidFill>
+                    <a:srgbClr val="008800"/>
+                  </a:solidFill>
+                  <a:latin typeface="Consolas" panose="020B0609020204030204" pitchFamily="49" charset="0"/>
+                </a:rPr>
+                <a:t>import</a:t>
+              </a:r>
+              <a:r>
+                <a:rPr lang="fr-FR" sz="1400" dirty="0">
+                  <a:solidFill>
+                    <a:srgbClr val="333333"/>
+                  </a:solidFill>
+                  <a:latin typeface="Consolas" panose="020B0609020204030204" pitchFamily="49" charset="0"/>
+                </a:rPr>
+                <a:t> </a:t>
+              </a:r>
+              <a:r>
+                <a:rPr lang="fr-FR" sz="1400" dirty="0" err="1">
+                  <a:solidFill>
+                    <a:srgbClr val="333333"/>
+                  </a:solidFill>
+                  <a:latin typeface="Consolas" panose="020B0609020204030204" pitchFamily="49" charset="0"/>
+                </a:rPr>
+                <a:t>dataclass</a:t>
+              </a:r>
+              <a:endParaRPr lang="fr-FR" sz="1400" dirty="0">
+                <a:solidFill>
+                  <a:srgbClr val="333333"/>
+                </a:solidFill>
+                <a:latin typeface="Consolas" panose="020B0609020204030204" pitchFamily="49" charset="0"/>
+              </a:endParaRPr>
+            </a:p>
+            <a:p>
+              <a:endParaRPr lang="fr-FR" sz="1400" dirty="0">
+                <a:solidFill>
+                  <a:srgbClr val="333333"/>
+                </a:solidFill>
+                <a:latin typeface="Consolas" panose="020B0609020204030204" pitchFamily="49" charset="0"/>
+              </a:endParaRPr>
+            </a:p>
+            <a:p>
+              <a:r>
+                <a:rPr lang="fr-FR" sz="1400" b="1" dirty="0">
+                  <a:solidFill>
+                    <a:srgbClr val="555555"/>
+                  </a:solidFill>
+                  <a:latin typeface="Consolas" panose="020B0609020204030204" pitchFamily="49" charset="0"/>
+                </a:rPr>
+                <a:t>@dataclass</a:t>
+              </a:r>
+              <a:endParaRPr lang="fr-FR" sz="1400" dirty="0">
+                <a:solidFill>
+                  <a:srgbClr val="333333"/>
+                </a:solidFill>
+                <a:latin typeface="Consolas" panose="020B0609020204030204" pitchFamily="49" charset="0"/>
+              </a:endParaRPr>
+            </a:p>
+            <a:p>
+              <a:r>
+                <a:rPr lang="fr-FR" sz="1400" b="1" dirty="0">
+                  <a:solidFill>
+                    <a:srgbClr val="008800"/>
+                  </a:solidFill>
+                  <a:latin typeface="Consolas" panose="020B0609020204030204" pitchFamily="49" charset="0"/>
+                </a:rPr>
+                <a:t>class</a:t>
+              </a:r>
+              <a:r>
+                <a:rPr lang="fr-FR" sz="1400" dirty="0">
+                  <a:solidFill>
+                    <a:srgbClr val="BBBBBB"/>
+                  </a:solidFill>
+                  <a:latin typeface="Consolas" panose="020B0609020204030204" pitchFamily="49" charset="0"/>
+                </a:rPr>
+                <a:t> </a:t>
+              </a:r>
+              <a:r>
+                <a:rPr lang="fr-FR" sz="1400" b="1" dirty="0">
+                  <a:solidFill>
+                    <a:srgbClr val="BB0066"/>
+                  </a:solidFill>
+                  <a:latin typeface="Consolas" panose="020B0609020204030204" pitchFamily="49" charset="0"/>
+                </a:rPr>
+                <a:t>Vecteur</a:t>
+              </a:r>
+              <a:r>
+                <a:rPr lang="fr-FR" sz="1400" dirty="0">
+                  <a:solidFill>
+                    <a:srgbClr val="333333"/>
+                  </a:solidFill>
+                  <a:latin typeface="Consolas" panose="020B0609020204030204" pitchFamily="49" charset="0"/>
+                </a:rPr>
+                <a:t>:</a:t>
+              </a:r>
+            </a:p>
+            <a:p>
+              <a:r>
+                <a:rPr lang="fr-FR" sz="1400" dirty="0">
+                  <a:solidFill>
+                    <a:srgbClr val="BBBBBB"/>
+                  </a:solidFill>
+                  <a:latin typeface="Consolas" panose="020B0609020204030204" pitchFamily="49" charset="0"/>
+                </a:rPr>
+                <a:t>  </a:t>
+              </a:r>
+              <a:r>
+                <a:rPr lang="fr-FR" sz="1400" dirty="0">
+                  <a:solidFill>
+                    <a:srgbClr val="DD4422"/>
+                  </a:solidFill>
+                  <a:latin typeface="Consolas" panose="020B0609020204030204" pitchFamily="49" charset="0"/>
+                </a:rPr>
+                <a:t>"""</a:t>
+              </a:r>
+              <a:endParaRPr lang="fr-FR" sz="1400" dirty="0">
+                <a:solidFill>
+                  <a:srgbClr val="333333"/>
+                </a:solidFill>
+                <a:latin typeface="Consolas" panose="020B0609020204030204" pitchFamily="49" charset="0"/>
+              </a:endParaRPr>
+            </a:p>
+            <a:p>
+              <a:r>
+                <a:rPr lang="fr-FR" sz="1400" dirty="0">
+                  <a:solidFill>
+                    <a:srgbClr val="DD4422"/>
+                  </a:solidFill>
+                  <a:latin typeface="Consolas" panose="020B0609020204030204" pitchFamily="49" charset="0"/>
+                </a:rPr>
+                <a:t>  Un vecteur en 1, 2 ou 3 dimensions.</a:t>
+              </a:r>
+              <a:endParaRPr lang="fr-FR" sz="1400" dirty="0">
+                <a:solidFill>
+                  <a:srgbClr val="333333"/>
+                </a:solidFill>
+                <a:latin typeface="Consolas" panose="020B0609020204030204" pitchFamily="49" charset="0"/>
+              </a:endParaRPr>
+            </a:p>
+            <a:p>
+              <a:endParaRPr lang="fr-FR" sz="1400" dirty="0">
+                <a:solidFill>
+                  <a:srgbClr val="333333"/>
+                </a:solidFill>
+                <a:latin typeface="Consolas" panose="020B0609020204030204" pitchFamily="49" charset="0"/>
+              </a:endParaRPr>
+            </a:p>
+            <a:p>
+              <a:r>
+                <a:rPr lang="fr-FR" sz="1400" dirty="0">
+                  <a:solidFill>
+                    <a:srgbClr val="DD4422"/>
+                  </a:solidFill>
+                  <a:latin typeface="Consolas" panose="020B0609020204030204" pitchFamily="49" charset="0"/>
+                </a:rPr>
+                <a:t>  Attributs:</a:t>
+              </a:r>
+              <a:endParaRPr lang="fr-FR" sz="1400" dirty="0">
+                <a:solidFill>
+                  <a:srgbClr val="333333"/>
+                </a:solidFill>
+                <a:latin typeface="Consolas" panose="020B0609020204030204" pitchFamily="49" charset="0"/>
+              </a:endParaRPr>
+            </a:p>
+            <a:p>
+              <a:r>
+                <a:rPr lang="fr-FR" sz="1400" dirty="0">
+                  <a:solidFill>
+                    <a:srgbClr val="DD4422"/>
+                  </a:solidFill>
+                  <a:latin typeface="Consolas" panose="020B0609020204030204" pitchFamily="49" charset="0"/>
+                </a:rPr>
+                <a:t>    dx (</a:t>
+              </a:r>
+              <a:r>
+                <a:rPr lang="fr-FR" sz="1400" dirty="0" err="1">
+                  <a:solidFill>
+                    <a:srgbClr val="DD4422"/>
+                  </a:solidFill>
+                  <a:latin typeface="Consolas" panose="020B0609020204030204" pitchFamily="49" charset="0"/>
+                </a:rPr>
+                <a:t>float</a:t>
+              </a:r>
+              <a:r>
+                <a:rPr lang="fr-FR" sz="1400" dirty="0">
+                  <a:solidFill>
+                    <a:srgbClr val="DD4422"/>
+                  </a:solidFill>
+                  <a:latin typeface="Consolas" panose="020B0609020204030204" pitchFamily="49" charset="0"/>
+                </a:rPr>
+                <a:t>): Le composant en x du vecteur. Valeur par défaut de 0.0.</a:t>
+              </a:r>
+              <a:endParaRPr lang="fr-FR" sz="1400" dirty="0">
+                <a:solidFill>
+                  <a:srgbClr val="333333"/>
+                </a:solidFill>
+                <a:latin typeface="Consolas" panose="020B0609020204030204" pitchFamily="49" charset="0"/>
+              </a:endParaRPr>
+            </a:p>
+            <a:p>
+              <a:r>
+                <a:rPr lang="fr-FR" sz="1400" dirty="0">
+                  <a:solidFill>
+                    <a:srgbClr val="DD4422"/>
+                  </a:solidFill>
+                  <a:latin typeface="Consolas" panose="020B0609020204030204" pitchFamily="49" charset="0"/>
+                </a:rPr>
+                <a:t>    </a:t>
+              </a:r>
+              <a:r>
+                <a:rPr lang="fr-FR" sz="1400" dirty="0" err="1">
+                  <a:solidFill>
+                    <a:srgbClr val="DD4422"/>
+                  </a:solidFill>
+                  <a:latin typeface="Consolas" panose="020B0609020204030204" pitchFamily="49" charset="0"/>
+                </a:rPr>
+                <a:t>dy</a:t>
+              </a:r>
+              <a:r>
+                <a:rPr lang="fr-FR" sz="1400" dirty="0">
+                  <a:solidFill>
+                    <a:srgbClr val="DD4422"/>
+                  </a:solidFill>
+                  <a:latin typeface="Consolas" panose="020B0609020204030204" pitchFamily="49" charset="0"/>
+                </a:rPr>
+                <a:t> (</a:t>
+              </a:r>
+              <a:r>
+                <a:rPr lang="fr-FR" sz="1400" dirty="0" err="1">
+                  <a:solidFill>
+                    <a:srgbClr val="DD4422"/>
+                  </a:solidFill>
+                  <a:latin typeface="Consolas" panose="020B0609020204030204" pitchFamily="49" charset="0"/>
+                </a:rPr>
+                <a:t>float</a:t>
+              </a:r>
+              <a:r>
+                <a:rPr lang="fr-FR" sz="1400" dirty="0">
+                  <a:solidFill>
+                    <a:srgbClr val="DD4422"/>
+                  </a:solidFill>
+                  <a:latin typeface="Consolas" panose="020B0609020204030204" pitchFamily="49" charset="0"/>
+                </a:rPr>
+                <a:t>): Le composant en y du vecteur. Valeur par défaut de 0.0.</a:t>
+              </a:r>
+              <a:endParaRPr lang="fr-FR" sz="1400" dirty="0">
+                <a:solidFill>
+                  <a:srgbClr val="333333"/>
+                </a:solidFill>
+                <a:latin typeface="Consolas" panose="020B0609020204030204" pitchFamily="49" charset="0"/>
+              </a:endParaRPr>
+            </a:p>
+            <a:p>
+              <a:r>
+                <a:rPr lang="fr-FR" sz="1400" dirty="0">
+                  <a:solidFill>
+                    <a:srgbClr val="DD4422"/>
+                  </a:solidFill>
+                  <a:latin typeface="Consolas" panose="020B0609020204030204" pitchFamily="49" charset="0"/>
+                </a:rPr>
+                <a:t>    dz (</a:t>
+              </a:r>
+              <a:r>
+                <a:rPr lang="fr-FR" sz="1400" dirty="0" err="1">
+                  <a:solidFill>
+                    <a:srgbClr val="DD4422"/>
+                  </a:solidFill>
+                  <a:latin typeface="Consolas" panose="020B0609020204030204" pitchFamily="49" charset="0"/>
+                </a:rPr>
+                <a:t>float</a:t>
+              </a:r>
+              <a:r>
+                <a:rPr lang="fr-FR" sz="1400" dirty="0">
+                  <a:solidFill>
+                    <a:srgbClr val="DD4422"/>
+                  </a:solidFill>
+                  <a:latin typeface="Consolas" panose="020B0609020204030204" pitchFamily="49" charset="0"/>
+                </a:rPr>
+                <a:t>): Le composant en z du vecteur. Valeur par défaut de 0.0.</a:t>
+              </a:r>
+              <a:endParaRPr lang="fr-FR" sz="1400" dirty="0">
+                <a:solidFill>
+                  <a:srgbClr val="333333"/>
+                </a:solidFill>
+                <a:latin typeface="Consolas" panose="020B0609020204030204" pitchFamily="49" charset="0"/>
+              </a:endParaRPr>
+            </a:p>
+            <a:p>
+              <a:r>
+                <a:rPr lang="fr-FR" sz="1400" dirty="0">
+                  <a:solidFill>
+                    <a:srgbClr val="DD4422"/>
+                  </a:solidFill>
+                  <a:latin typeface="Consolas" panose="020B0609020204030204" pitchFamily="49" charset="0"/>
+                </a:rPr>
+                <a:t>  """</a:t>
+              </a:r>
+              <a:endParaRPr lang="fr-FR" sz="1400" dirty="0">
+                <a:solidFill>
+                  <a:srgbClr val="333333"/>
+                </a:solidFill>
+                <a:latin typeface="Consolas" panose="020B0609020204030204" pitchFamily="49" charset="0"/>
+              </a:endParaRPr>
+            </a:p>
+            <a:p>
+              <a:r>
+                <a:rPr lang="fr-FR" sz="1400" dirty="0">
+                  <a:solidFill>
+                    <a:srgbClr val="333333"/>
+                  </a:solidFill>
+                  <a:latin typeface="Consolas" panose="020B0609020204030204" pitchFamily="49" charset="0"/>
+                </a:rPr>
+                <a:t>  dx: </a:t>
+              </a:r>
+              <a:r>
+                <a:rPr lang="fr-FR" sz="1400" dirty="0" err="1">
+                  <a:solidFill>
+                    <a:srgbClr val="007020"/>
+                  </a:solidFill>
+                  <a:latin typeface="Consolas" panose="020B0609020204030204" pitchFamily="49" charset="0"/>
+                </a:rPr>
+                <a:t>float</a:t>
+              </a:r>
+              <a:r>
+                <a:rPr lang="fr-FR" sz="1400" dirty="0">
+                  <a:solidFill>
+                    <a:srgbClr val="333333"/>
+                  </a:solidFill>
+                  <a:latin typeface="Consolas" panose="020B0609020204030204" pitchFamily="49" charset="0"/>
+                </a:rPr>
+                <a:t> = </a:t>
+              </a:r>
+              <a:r>
+                <a:rPr lang="fr-FR" sz="1400" b="1" dirty="0">
+                  <a:solidFill>
+                    <a:srgbClr val="6600EE"/>
+                  </a:solidFill>
+                  <a:latin typeface="Consolas" panose="020B0609020204030204" pitchFamily="49" charset="0"/>
+                </a:rPr>
+                <a:t>0.0</a:t>
+              </a:r>
+              <a:endParaRPr lang="fr-FR" sz="1400" dirty="0">
+                <a:solidFill>
+                  <a:srgbClr val="333333"/>
+                </a:solidFill>
+                <a:latin typeface="Consolas" panose="020B0609020204030204" pitchFamily="49" charset="0"/>
+              </a:endParaRPr>
+            </a:p>
+            <a:p>
+              <a:r>
+                <a:rPr lang="fr-FR" sz="1400" dirty="0">
+                  <a:solidFill>
+                    <a:srgbClr val="333333"/>
+                  </a:solidFill>
+                  <a:latin typeface="Consolas" panose="020B0609020204030204" pitchFamily="49" charset="0"/>
+                </a:rPr>
+                <a:t>  </a:t>
+              </a:r>
+              <a:r>
+                <a:rPr lang="fr-FR" sz="1400" dirty="0" err="1">
+                  <a:solidFill>
+                    <a:srgbClr val="333333"/>
+                  </a:solidFill>
+                  <a:latin typeface="Consolas" panose="020B0609020204030204" pitchFamily="49" charset="0"/>
+                </a:rPr>
+                <a:t>dy</a:t>
+              </a:r>
+              <a:r>
+                <a:rPr lang="fr-FR" sz="1400" dirty="0">
+                  <a:solidFill>
+                    <a:srgbClr val="333333"/>
+                  </a:solidFill>
+                  <a:latin typeface="Consolas" panose="020B0609020204030204" pitchFamily="49" charset="0"/>
+                </a:rPr>
+                <a:t>: </a:t>
+              </a:r>
+              <a:r>
+                <a:rPr lang="fr-FR" sz="1400" dirty="0" err="1">
+                  <a:solidFill>
+                    <a:srgbClr val="007020"/>
+                  </a:solidFill>
+                  <a:latin typeface="Consolas" panose="020B0609020204030204" pitchFamily="49" charset="0"/>
+                </a:rPr>
+                <a:t>float</a:t>
+              </a:r>
+              <a:r>
+                <a:rPr lang="fr-FR" sz="1400" dirty="0">
+                  <a:solidFill>
+                    <a:srgbClr val="333333"/>
+                  </a:solidFill>
+                  <a:latin typeface="Consolas" panose="020B0609020204030204" pitchFamily="49" charset="0"/>
+                </a:rPr>
+                <a:t> = </a:t>
+              </a:r>
+              <a:r>
+                <a:rPr lang="fr-FR" sz="1400" b="1" dirty="0">
+                  <a:solidFill>
+                    <a:srgbClr val="6600EE"/>
+                  </a:solidFill>
+                  <a:latin typeface="Consolas" panose="020B0609020204030204" pitchFamily="49" charset="0"/>
+                </a:rPr>
+                <a:t>0.0</a:t>
+              </a:r>
+              <a:endParaRPr lang="fr-FR" sz="1400" dirty="0">
+                <a:solidFill>
+                  <a:srgbClr val="333333"/>
+                </a:solidFill>
+                <a:latin typeface="Consolas" panose="020B0609020204030204" pitchFamily="49" charset="0"/>
+              </a:endParaRPr>
+            </a:p>
+            <a:p>
+              <a:r>
+                <a:rPr lang="fr-FR" sz="1400" dirty="0">
+                  <a:solidFill>
+                    <a:srgbClr val="333333"/>
+                  </a:solidFill>
+                  <a:latin typeface="Consolas" panose="020B0609020204030204" pitchFamily="49" charset="0"/>
+                </a:rPr>
+                <a:t>  dz: </a:t>
+              </a:r>
+              <a:r>
+                <a:rPr lang="fr-FR" sz="1400" dirty="0" err="1">
+                  <a:solidFill>
+                    <a:srgbClr val="007020"/>
+                  </a:solidFill>
+                  <a:latin typeface="Consolas" panose="020B0609020204030204" pitchFamily="49" charset="0"/>
+                </a:rPr>
+                <a:t>float</a:t>
+              </a:r>
+              <a:r>
+                <a:rPr lang="fr-FR" sz="1400" dirty="0">
+                  <a:solidFill>
+                    <a:srgbClr val="333333"/>
+                  </a:solidFill>
+                  <a:latin typeface="Consolas" panose="020B0609020204030204" pitchFamily="49" charset="0"/>
+                </a:rPr>
+                <a:t> = </a:t>
+              </a:r>
+              <a:r>
+                <a:rPr lang="fr-FR" sz="1400" b="1" dirty="0">
+                  <a:solidFill>
+                    <a:srgbClr val="6600EE"/>
+                  </a:solidFill>
+                  <a:latin typeface="Consolas" panose="020B0609020204030204" pitchFamily="49" charset="0"/>
+                </a:rPr>
+                <a:t>0.0</a:t>
+              </a:r>
+              <a:endParaRPr lang="fr-FR" sz="1400" dirty="0">
+                <a:solidFill>
+                  <a:srgbClr val="333333"/>
+                </a:solidFill>
+                <a:latin typeface="Consolas" panose="020B0609020204030204" pitchFamily="49" charset="0"/>
+              </a:endParaRPr>
+            </a:p>
+          </p:txBody>
+        </p:sp>
+      </p:grpSp>
+      <p:grpSp>
+        <p:nvGrpSpPr>
+          <p:cNvPr id="13" name="Google Shape;354;p18">
+            <a:extLst>
+              <a:ext uri="{FF2B5EF4-FFF2-40B4-BE49-F238E27FC236}">
+                <a16:creationId xmlns:a16="http://schemas.microsoft.com/office/drawing/2014/main" id="{44EF1B43-351C-F697-7718-3E75BC48FAB6}"/>
+              </a:ext>
+            </a:extLst>
+          </p:cNvPr>
+          <p:cNvGrpSpPr/>
+          <p:nvPr/>
+        </p:nvGrpSpPr>
+        <p:grpSpPr>
+          <a:xfrm>
+            <a:off x="1829819" y="5566392"/>
+            <a:ext cx="7930675" cy="504000"/>
+            <a:chOff x="6682372" y="3766184"/>
+            <a:chExt cx="11594725" cy="230400"/>
+          </a:xfrm>
+        </p:grpSpPr>
+        <p:sp>
+          <p:nvSpPr>
+            <p:cNvPr id="14" name="Google Shape;355;p18">
+              <a:extLst>
+                <a:ext uri="{FF2B5EF4-FFF2-40B4-BE49-F238E27FC236}">
+                  <a16:creationId xmlns:a16="http://schemas.microsoft.com/office/drawing/2014/main" id="{966FEEA5-3D9E-D723-11F7-16C07D0D3D39}"/>
+                </a:ext>
+              </a:extLst>
+            </p:cNvPr>
+            <p:cNvSpPr/>
+            <p:nvPr/>
+          </p:nvSpPr>
+          <p:spPr>
+            <a:xfrm>
+              <a:off x="6682372" y="3766184"/>
+              <a:ext cx="578953" cy="230400"/>
+            </a:xfrm>
+            <a:prstGeom prst="rect">
+              <a:avLst/>
+            </a:prstGeom>
+            <a:solidFill>
+              <a:srgbClr val="7F7F7F"/>
+            </a:solidFill>
+            <a:ln w="12700" cap="flat" cmpd="sng">
+              <a:solidFill>
+                <a:schemeClr val="dk1"/>
+              </a:solidFill>
+              <a:prstDash val="solid"/>
+              <a:miter lim="800000"/>
+              <a:headEnd type="none" w="sm" len="sm"/>
+              <a:tailEnd type="none" w="sm" len="sm"/>
+            </a:ln>
+          </p:spPr>
+          <p:txBody>
+            <a:bodyPr spcFirstLastPara="1" wrap="square" lIns="91425" tIns="45700" rIns="91425" bIns="45700" anchor="ctr" anchorCtr="0">
+              <a:noAutofit/>
+            </a:bodyPr>
+            <a:lstStyle/>
+            <a:p>
+              <a:pPr marL="0" marR="0" lvl="0" indent="0" algn="ctr" rtl="0">
+                <a:spcBef>
+                  <a:spcPts val="0"/>
+                </a:spcBef>
+                <a:spcAft>
+                  <a:spcPts val="0"/>
+                </a:spcAft>
+                <a:buNone/>
+              </a:pPr>
+              <a:r>
+                <a:rPr lang="fr-CA" sz="1400" dirty="0">
+                  <a:solidFill>
+                    <a:schemeClr val="lt1"/>
+                  </a:solidFill>
+                  <a:latin typeface="Calibri"/>
+                  <a:ea typeface="Calibri"/>
+                  <a:cs typeface="Calibri"/>
+                  <a:sym typeface="Calibri"/>
+                </a:rPr>
+                <a:t>1</a:t>
+              </a:r>
+              <a:endParaRPr dirty="0"/>
+            </a:p>
+            <a:p>
+              <a:pPr marL="0" marR="0" lvl="0" indent="0" algn="ctr" rtl="0">
+                <a:spcBef>
+                  <a:spcPts val="0"/>
+                </a:spcBef>
+                <a:spcAft>
+                  <a:spcPts val="0"/>
+                </a:spcAft>
+                <a:buNone/>
+              </a:pPr>
+              <a:r>
+                <a:rPr lang="fr-CA" sz="1400" dirty="0">
+                  <a:solidFill>
+                    <a:schemeClr val="lt1"/>
+                  </a:solidFill>
+                  <a:latin typeface="Calibri"/>
+                  <a:ea typeface="Calibri"/>
+                  <a:cs typeface="Calibri"/>
+                  <a:sym typeface="Calibri"/>
+                </a:rPr>
+                <a:t>2</a:t>
+              </a:r>
+              <a:endParaRPr dirty="0"/>
+            </a:p>
+          </p:txBody>
+        </p:sp>
+        <p:sp>
+          <p:nvSpPr>
+            <p:cNvPr id="15" name="Google Shape;356;p18">
+              <a:extLst>
+                <a:ext uri="{FF2B5EF4-FFF2-40B4-BE49-F238E27FC236}">
+                  <a16:creationId xmlns:a16="http://schemas.microsoft.com/office/drawing/2014/main" id="{0FB1896E-16AD-E563-0D61-390C6304C283}"/>
+                </a:ext>
+              </a:extLst>
+            </p:cNvPr>
+            <p:cNvSpPr/>
+            <p:nvPr/>
+          </p:nvSpPr>
+          <p:spPr>
+            <a:xfrm>
+              <a:off x="7261325" y="3766184"/>
+              <a:ext cx="11015772" cy="230400"/>
+            </a:xfrm>
+            <a:prstGeom prst="rect">
+              <a:avLst/>
+            </a:prstGeom>
+            <a:solidFill>
+              <a:schemeClr val="dk1"/>
+            </a:solidFill>
+            <a:ln w="12700" cap="flat" cmpd="sng">
+              <a:solidFill>
+                <a:schemeClr val="dk1"/>
+              </a:solidFill>
+              <a:prstDash val="solid"/>
+              <a:miter lim="800000"/>
+              <a:headEnd type="none" w="sm" len="sm"/>
+              <a:tailEnd type="none" w="sm" len="sm"/>
+            </a:ln>
+          </p:spPr>
+          <p:txBody>
+            <a:bodyPr spcFirstLastPara="1" wrap="square" lIns="91425" tIns="45700" rIns="91425" bIns="45700" anchor="ctr" anchorCtr="0">
+              <a:noAutofit/>
+            </a:bodyPr>
+            <a:lstStyle/>
+            <a:p>
+              <a:r>
+                <a:rPr lang="en-CA" sz="1400" b="1" dirty="0">
+                  <a:solidFill>
+                    <a:schemeClr val="bg1"/>
+                  </a:solidFill>
+                  <a:latin typeface="Consolas" panose="020B0609020204030204" pitchFamily="49" charset="0"/>
+                </a:rPr>
+                <a:t>&gt;&gt;&gt; </a:t>
+              </a:r>
+              <a:r>
+                <a:rPr lang="en-CA" sz="1400" b="1" dirty="0" err="1">
+                  <a:solidFill>
+                    <a:schemeClr val="bg1"/>
+                  </a:solidFill>
+                  <a:latin typeface="Consolas" panose="020B0609020204030204" pitchFamily="49" charset="0"/>
+                </a:rPr>
+                <a:t>Vecteur</a:t>
+              </a:r>
+              <a:r>
+                <a:rPr lang="en-CA" sz="1400" b="1" dirty="0">
+                  <a:solidFill>
+                    <a:schemeClr val="bg1"/>
+                  </a:solidFill>
+                  <a:latin typeface="Consolas" panose="020B0609020204030204" pitchFamily="49" charset="0"/>
+                </a:rPr>
+                <a:t>(1.0, 2.0)</a:t>
+              </a:r>
+            </a:p>
+            <a:p>
+              <a:r>
+                <a:rPr lang="fr-CA" sz="1400" b="1" dirty="0">
+                  <a:solidFill>
+                    <a:schemeClr val="bg1"/>
+                  </a:solidFill>
+                  <a:latin typeface="Consolas" panose="020B0609020204030204" pitchFamily="49" charset="0"/>
+                </a:rPr>
+                <a:t>Vecteur(dx=1.0, </a:t>
+              </a:r>
+              <a:r>
+                <a:rPr lang="fr-CA" sz="1400" b="1" dirty="0" err="1">
+                  <a:solidFill>
+                    <a:schemeClr val="bg1"/>
+                  </a:solidFill>
+                  <a:latin typeface="Consolas" panose="020B0609020204030204" pitchFamily="49" charset="0"/>
+                </a:rPr>
+                <a:t>dy</a:t>
+              </a:r>
+              <a:r>
+                <a:rPr lang="fr-CA" sz="1400" b="1" dirty="0">
+                  <a:solidFill>
+                    <a:schemeClr val="bg1"/>
+                  </a:solidFill>
+                  <a:latin typeface="Consolas" panose="020B0609020204030204" pitchFamily="49" charset="0"/>
+                </a:rPr>
+                <a:t>=2.0, dz=0.0)</a:t>
+              </a:r>
+              <a:endParaRPr lang="fr-CA" sz="1400" dirty="0">
+                <a:solidFill>
+                  <a:schemeClr val="bg1"/>
+                </a:solidFill>
+                <a:latin typeface="Consolas" panose="020B0609020204030204" pitchFamily="49" charset="0"/>
+              </a:endParaRPr>
+            </a:p>
+          </p:txBody>
+        </p:sp>
+      </p:grpSp>
     </p:spTree>
     <p:extLst>
       <p:ext uri="{BB962C8B-B14F-4D97-AF65-F5344CB8AC3E}">
-        <p14:creationId xmlns:p14="http://schemas.microsoft.com/office/powerpoint/2010/main" val="2781789880"/>
+        <p14:creationId xmlns:p14="http://schemas.microsoft.com/office/powerpoint/2010/main" val="1178660136"/>
       </p:ext>
     </p:extLst>
   </p:cSld>
   <p:clrMapOvr>
     <a:masterClrMapping/>
   </p:clrMapOvr>
+  <p:timing>
+    <p:tnLst>
+      <p:par>
+        <p:cTn id="1" dur="indefinite" restart="never" nodeType="tmRoot">
+          <p:childTnLst>
+            <p:seq concurrent="1" nextAc="seek">
+              <p:cTn id="2" dur="indefinite" nodeType="mainSeq">
+                <p:childTnLst>
+                  <p:par>
+                    <p:cTn id="3" fill="hold">
+                      <p:stCondLst>
+                        <p:cond delay="indefinite"/>
+                      </p:stCondLst>
+                      <p:childTnLst>
+                        <p:par>
+                          <p:cTn id="4" fill="hold">
+                            <p:stCondLst>
+                              <p:cond delay="0"/>
+                            </p:stCondLst>
+                            <p:childTnLst>
+                              <p:par>
+                                <p:cTn id="5" presetID="10" presetClass="entr" presetSubtype="0" fill="hold" nodeType="clickEffect">
+                                  <p:stCondLst>
+                                    <p:cond delay="0"/>
+                                  </p:stCondLst>
+                                  <p:childTnLst>
+                                    <p:set>
+                                      <p:cBhvr>
+                                        <p:cTn id="6" dur="1" fill="hold">
+                                          <p:stCondLst>
+                                            <p:cond delay="0"/>
+                                          </p:stCondLst>
+                                        </p:cTn>
+                                        <p:tgtEl>
+                                          <p:spTgt spid="35"/>
+                                        </p:tgtEl>
+                                        <p:attrNameLst>
+                                          <p:attrName>style.visibility</p:attrName>
+                                        </p:attrNameLst>
+                                      </p:cBhvr>
+                                      <p:to>
+                                        <p:strVal val="visible"/>
+                                      </p:to>
+                                    </p:set>
+                                    <p:animEffect transition="in" filter="fade">
+                                      <p:cBhvr>
+                                        <p:cTn id="7" dur="500"/>
+                                        <p:tgtEl>
+                                          <p:spTgt spid="35"/>
+                                        </p:tgtEl>
+                                      </p:cBhvr>
+                                    </p:animEffect>
+                                  </p:childTnLst>
+                                </p:cTn>
+                              </p:par>
+                            </p:childTnLst>
+                          </p:cTn>
+                        </p:par>
+                      </p:childTnLst>
+                    </p:cTn>
+                  </p:par>
+                  <p:par>
+                    <p:cTn id="8" fill="hold">
+                      <p:stCondLst>
+                        <p:cond delay="indefinite"/>
+                      </p:stCondLst>
+                      <p:childTnLst>
+                        <p:par>
+                          <p:cTn id="9" fill="hold">
+                            <p:stCondLst>
+                              <p:cond delay="0"/>
+                            </p:stCondLst>
+                            <p:childTnLst>
+                              <p:par>
+                                <p:cTn id="10" presetID="10" presetClass="entr" presetSubtype="0" fill="hold" nodeType="clickEffect">
+                                  <p:stCondLst>
+                                    <p:cond delay="0"/>
+                                  </p:stCondLst>
+                                  <p:childTnLst>
+                                    <p:set>
+                                      <p:cBhvr>
+                                        <p:cTn id="11" dur="1" fill="hold">
+                                          <p:stCondLst>
+                                            <p:cond delay="0"/>
+                                          </p:stCondLst>
+                                        </p:cTn>
+                                        <p:tgtEl>
+                                          <p:spTgt spid="13"/>
+                                        </p:tgtEl>
+                                        <p:attrNameLst>
+                                          <p:attrName>style.visibility</p:attrName>
+                                        </p:attrNameLst>
+                                      </p:cBhvr>
+                                      <p:to>
+                                        <p:strVal val="visible"/>
+                                      </p:to>
+                                    </p:set>
+                                    <p:animEffect transition="in" filter="fade">
+                                      <p:cBhvr>
+                                        <p:cTn id="12" dur="500"/>
+                                        <p:tgtEl>
+                                          <p:spTgt spid="13"/>
+                                        </p:tgtEl>
+                                      </p:cBhvr>
+                                    </p:animEffect>
+                                  </p:childTnLst>
+                                </p:cTn>
+                              </p:par>
+                            </p:childTnLst>
+                          </p:cTn>
+                        </p:par>
+                      </p:childTnLst>
+                    </p:cTn>
+                  </p:par>
+                </p:childTnLst>
+              </p:cTn>
+              <p:prevCondLst>
+                <p:cond evt="onPrev" delay="0">
+                  <p:tgtEl>
+                    <p:sldTgt/>
+                  </p:tgtEl>
+                </p:cond>
+              </p:prevCondLst>
+              <p:nextCondLst>
+                <p:cond evt="onNext" delay="0">
+                  <p:tgtEl>
+                    <p:sldTgt/>
+                  </p:tgtEl>
+                </p:cond>
+              </p:nextCondLst>
+            </p:seq>
+          </p:childTnLst>
+        </p:cTn>
+      </p:par>
+    </p:tnLst>
+  </p:timing>
 </p:sld>
 </file>
 

--- a/python_2/presentation_python_2.pptx
+++ b/python_2/presentation_python_2.pptx
@@ -5,7 +5,7 @@
     <p:sldMasterId id="2147483648" r:id="rId1"/>
   </p:sldMasterIdLst>
   <p:notesMasterIdLst>
-    <p:notesMasterId r:id="rId40"/>
+    <p:notesMasterId r:id="rId41"/>
   </p:notesMasterIdLst>
   <p:sldIdLst>
     <p:sldId id="256" r:id="rId2"/>
@@ -17,35 +17,36 @@
     <p:sldId id="301" r:id="rId8"/>
     <p:sldId id="302" r:id="rId9"/>
     <p:sldId id="303" r:id="rId10"/>
-    <p:sldId id="297" r:id="rId11"/>
-    <p:sldId id="294" r:id="rId12"/>
-    <p:sldId id="259" r:id="rId13"/>
-    <p:sldId id="263" r:id="rId14"/>
-    <p:sldId id="260" r:id="rId15"/>
-    <p:sldId id="261" r:id="rId16"/>
-    <p:sldId id="264" r:id="rId17"/>
-    <p:sldId id="265" r:id="rId18"/>
-    <p:sldId id="266" r:id="rId19"/>
-    <p:sldId id="268" r:id="rId20"/>
-    <p:sldId id="269" r:id="rId21"/>
-    <p:sldId id="271" r:id="rId22"/>
-    <p:sldId id="272" r:id="rId23"/>
-    <p:sldId id="273" r:id="rId24"/>
-    <p:sldId id="274" r:id="rId25"/>
-    <p:sldId id="275" r:id="rId26"/>
-    <p:sldId id="276" r:id="rId27"/>
-    <p:sldId id="277" r:id="rId28"/>
-    <p:sldId id="278" r:id="rId29"/>
-    <p:sldId id="282" r:id="rId30"/>
-    <p:sldId id="283" r:id="rId31"/>
-    <p:sldId id="280" r:id="rId32"/>
-    <p:sldId id="279" r:id="rId33"/>
-    <p:sldId id="288" r:id="rId34"/>
-    <p:sldId id="289" r:id="rId35"/>
-    <p:sldId id="292" r:id="rId36"/>
-    <p:sldId id="291" r:id="rId37"/>
-    <p:sldId id="281" r:id="rId38"/>
-    <p:sldId id="290" r:id="rId39"/>
+    <p:sldId id="304" r:id="rId11"/>
+    <p:sldId id="297" r:id="rId12"/>
+    <p:sldId id="294" r:id="rId13"/>
+    <p:sldId id="259" r:id="rId14"/>
+    <p:sldId id="263" r:id="rId15"/>
+    <p:sldId id="260" r:id="rId16"/>
+    <p:sldId id="261" r:id="rId17"/>
+    <p:sldId id="264" r:id="rId18"/>
+    <p:sldId id="265" r:id="rId19"/>
+    <p:sldId id="266" r:id="rId20"/>
+    <p:sldId id="268" r:id="rId21"/>
+    <p:sldId id="269" r:id="rId22"/>
+    <p:sldId id="271" r:id="rId23"/>
+    <p:sldId id="272" r:id="rId24"/>
+    <p:sldId id="273" r:id="rId25"/>
+    <p:sldId id="274" r:id="rId26"/>
+    <p:sldId id="275" r:id="rId27"/>
+    <p:sldId id="276" r:id="rId28"/>
+    <p:sldId id="277" r:id="rId29"/>
+    <p:sldId id="278" r:id="rId30"/>
+    <p:sldId id="282" r:id="rId31"/>
+    <p:sldId id="283" r:id="rId32"/>
+    <p:sldId id="280" r:id="rId33"/>
+    <p:sldId id="279" r:id="rId34"/>
+    <p:sldId id="288" r:id="rId35"/>
+    <p:sldId id="289" r:id="rId36"/>
+    <p:sldId id="292" r:id="rId37"/>
+    <p:sldId id="291" r:id="rId38"/>
+    <p:sldId id="281" r:id="rId39"/>
+    <p:sldId id="290" r:id="rId40"/>
   </p:sldIdLst>
   <p:sldSz cx="12192000" cy="6858000"/>
   <p:notesSz cx="6858000" cy="9144000"/>
@@ -713,6 +714,114 @@
     <p:extLst>
       <p:ext uri="{BB962C8B-B14F-4D97-AF65-F5344CB8AC3E}">
         <p14:creationId xmlns:p14="http://schemas.microsoft.com/office/powerpoint/2010/main" val="1904747290"/>
+      </p:ext>
+    </p:extLst>
+  </p:cSld>
+  <p:clrMapOvr>
+    <a:masterClrMapping/>
+  </p:clrMapOvr>
+</p:notes>
+</file>
+
+<file path=ppt/notesSlides/notesSlide3.xml><?xml version="1.0" encoding="utf-8"?>
+<p:notes xmlns:a="http://schemas.openxmlformats.org/drawingml/2006/main" xmlns:r="http://schemas.openxmlformats.org/officeDocument/2006/relationships" xmlns:p="http://schemas.openxmlformats.org/presentationml/2006/main">
+  <p:cSld>
+    <p:spTree>
+      <p:nvGrpSpPr>
+        <p:cNvPr id="1" name="">
+          <a:extLst>
+            <a:ext uri="{FF2B5EF4-FFF2-40B4-BE49-F238E27FC236}">
+              <a16:creationId xmlns:a16="http://schemas.microsoft.com/office/drawing/2014/main" id="{921465E3-3A60-AE2C-E624-71C02ED1C2F8}"/>
+            </a:ext>
+          </a:extLst>
+        </p:cNvPr>
+        <p:cNvGrpSpPr/>
+        <p:nvPr/>
+      </p:nvGrpSpPr>
+      <p:grpSpPr>
+        <a:xfrm>
+          <a:off x="0" y="0"/>
+          <a:ext cx="0" cy="0"/>
+          <a:chOff x="0" y="0"/>
+          <a:chExt cx="0" cy="0"/>
+        </a:xfrm>
+      </p:grpSpPr>
+      <p:sp>
+        <p:nvSpPr>
+          <p:cNvPr id="2" name="Slide Image Placeholder 1">
+            <a:extLst>
+              <a:ext uri="{FF2B5EF4-FFF2-40B4-BE49-F238E27FC236}">
+                <a16:creationId xmlns:a16="http://schemas.microsoft.com/office/drawing/2014/main" id="{F0B6037C-F4C8-C082-BAA2-64EBF95CDF4F}"/>
+              </a:ext>
+            </a:extLst>
+          </p:cNvPr>
+          <p:cNvSpPr>
+            <a:spLocks noGrp="1" noRot="1" noChangeAspect="1"/>
+          </p:cNvSpPr>
+          <p:nvPr>
+            <p:ph type="sldImg"/>
+          </p:nvPr>
+        </p:nvSpPr>
+        <p:spPr/>
+      </p:sp>
+      <p:sp>
+        <p:nvSpPr>
+          <p:cNvPr id="3" name="Notes Placeholder 2">
+            <a:extLst>
+              <a:ext uri="{FF2B5EF4-FFF2-40B4-BE49-F238E27FC236}">
+                <a16:creationId xmlns:a16="http://schemas.microsoft.com/office/drawing/2014/main" id="{CF2D1133-8ED4-F4F0-6E59-24D13E8540FC}"/>
+              </a:ext>
+            </a:extLst>
+          </p:cNvPr>
+          <p:cNvSpPr>
+            <a:spLocks noGrp="1"/>
+          </p:cNvSpPr>
+          <p:nvPr>
+            <p:ph type="body" idx="1"/>
+          </p:nvPr>
+        </p:nvSpPr>
+        <p:spPr/>
+        <p:txBody>
+          <a:bodyPr/>
+          <a:lstStyle/>
+          <a:p>
+            <a:endParaRPr lang="fr-CA" dirty="0"/>
+          </a:p>
+        </p:txBody>
+      </p:sp>
+      <p:sp>
+        <p:nvSpPr>
+          <p:cNvPr id="4" name="Slide Number Placeholder 3">
+            <a:extLst>
+              <a:ext uri="{FF2B5EF4-FFF2-40B4-BE49-F238E27FC236}">
+                <a16:creationId xmlns:a16="http://schemas.microsoft.com/office/drawing/2014/main" id="{6837A84C-3D22-BA69-F5BC-086BE49ECC9D}"/>
+              </a:ext>
+            </a:extLst>
+          </p:cNvPr>
+          <p:cNvSpPr>
+            <a:spLocks noGrp="1"/>
+          </p:cNvSpPr>
+          <p:nvPr>
+            <p:ph type="sldNum" sz="quarter" idx="5"/>
+          </p:nvPr>
+        </p:nvSpPr>
+        <p:spPr/>
+        <p:txBody>
+          <a:bodyPr/>
+          <a:lstStyle/>
+          <a:p>
+            <a:fld id="{D755565A-1FEC-4FFE-8425-B731D92946D0}" type="slidenum">
+              <a:rPr lang="fr-CA" smtClean="0"/>
+              <a:t>10</a:t>
+            </a:fld>
+            <a:endParaRPr lang="fr-CA"/>
+          </a:p>
+        </p:txBody>
+      </p:sp>
+    </p:spTree>
+    <p:extLst>
+      <p:ext uri="{BB962C8B-B14F-4D97-AF65-F5344CB8AC3E}">
+        <p14:creationId xmlns:p14="http://schemas.microsoft.com/office/powerpoint/2010/main" val="3236754325"/>
       </p:ext>
     </p:extLst>
   </p:cSld>
@@ -4555,6 +4664,1994 @@
 <file path=ppt/slides/slide10.xml><?xml version="1.0" encoding="utf-8"?>
 <p:sld xmlns:a="http://schemas.openxmlformats.org/drawingml/2006/main" xmlns:r="http://schemas.openxmlformats.org/officeDocument/2006/relationships" xmlns:p="http://schemas.openxmlformats.org/presentationml/2006/main">
   <p:cSld>
+    <p:spTree>
+      <p:nvGrpSpPr>
+        <p:cNvPr id="1" name="">
+          <a:extLst>
+            <a:ext uri="{FF2B5EF4-FFF2-40B4-BE49-F238E27FC236}">
+              <a16:creationId xmlns:a16="http://schemas.microsoft.com/office/drawing/2014/main" id="{B145315D-75E9-B2D9-9DCB-7A00B8CBACC3}"/>
+            </a:ext>
+          </a:extLst>
+        </p:cNvPr>
+        <p:cNvGrpSpPr/>
+        <p:nvPr/>
+      </p:nvGrpSpPr>
+      <p:grpSpPr>
+        <a:xfrm>
+          <a:off x="0" y="0"/>
+          <a:ext cx="0" cy="0"/>
+          <a:chOff x="0" y="0"/>
+          <a:chExt cx="0" cy="0"/>
+        </a:xfrm>
+      </p:grpSpPr>
+      <p:sp>
+        <p:nvSpPr>
+          <p:cNvPr id="2" name="Title 1">
+            <a:extLst>
+              <a:ext uri="{FF2B5EF4-FFF2-40B4-BE49-F238E27FC236}">
+                <a16:creationId xmlns:a16="http://schemas.microsoft.com/office/drawing/2014/main" id="{976D255B-ABDB-DD88-1020-807B5BA547FA}"/>
+              </a:ext>
+            </a:extLst>
+          </p:cNvPr>
+          <p:cNvSpPr>
+            <a:spLocks noGrp="1"/>
+          </p:cNvSpPr>
+          <p:nvPr>
+            <p:ph type="title"/>
+          </p:nvPr>
+        </p:nvSpPr>
+        <p:spPr/>
+        <p:txBody>
+          <a:bodyPr/>
+          <a:lstStyle/>
+          <a:p>
+            <a:r>
+              <a:rPr lang="en-US" dirty="0">
+                <a:latin typeface="Arial Rounded MT Bold" panose="020F0704030504030204" pitchFamily="34" charset="0"/>
+              </a:rPr>
+              <a:t>Une </a:t>
+            </a:r>
+            <a:r>
+              <a:rPr lang="en-US" dirty="0" err="1">
+                <a:latin typeface="Arial Rounded MT Bold" panose="020F0704030504030204" pitchFamily="34" charset="0"/>
+              </a:rPr>
+              <a:t>classe-contenant</a:t>
+            </a:r>
+            <a:r>
+              <a:rPr lang="en-US" dirty="0">
+                <a:latin typeface="Arial Rounded MT Bold" panose="020F0704030504030204" pitchFamily="34" charset="0"/>
+              </a:rPr>
+              <a:t> (1/2)</a:t>
+            </a:r>
+            <a:endParaRPr lang="fr-CA" dirty="0">
+              <a:latin typeface="Arial Rounded MT Bold" panose="020F0704030504030204" pitchFamily="34" charset="0"/>
+            </a:endParaRPr>
+          </a:p>
+        </p:txBody>
+      </p:sp>
+      <p:sp>
+        <p:nvSpPr>
+          <p:cNvPr id="5" name="Slide Number Placeholder 4">
+            <a:extLst>
+              <a:ext uri="{FF2B5EF4-FFF2-40B4-BE49-F238E27FC236}">
+                <a16:creationId xmlns:a16="http://schemas.microsoft.com/office/drawing/2014/main" id="{0A844E21-F706-ACE8-F05F-8558AAE82650}"/>
+              </a:ext>
+            </a:extLst>
+          </p:cNvPr>
+          <p:cNvSpPr>
+            <a:spLocks noGrp="1"/>
+          </p:cNvSpPr>
+          <p:nvPr>
+            <p:ph type="sldNum" sz="quarter" idx="12"/>
+          </p:nvPr>
+        </p:nvSpPr>
+        <p:spPr/>
+        <p:txBody>
+          <a:bodyPr/>
+          <a:lstStyle/>
+          <a:p>
+            <a:fld id="{846B06B1-1179-491F-A487-8E0C403F7C13}" type="slidenum">
+              <a:rPr lang="fr-CA" smtClean="0"/>
+              <a:t>10</a:t>
+            </a:fld>
+            <a:endParaRPr lang="fr-CA" dirty="0"/>
+          </a:p>
+        </p:txBody>
+      </p:sp>
+      <p:grpSp>
+        <p:nvGrpSpPr>
+          <p:cNvPr id="35" name="Google Shape;368;p19">
+            <a:extLst>
+              <a:ext uri="{FF2B5EF4-FFF2-40B4-BE49-F238E27FC236}">
+                <a16:creationId xmlns:a16="http://schemas.microsoft.com/office/drawing/2014/main" id="{89418C3B-B3D2-0AE4-171E-17C3368FEDA7}"/>
+              </a:ext>
+            </a:extLst>
+          </p:cNvPr>
+          <p:cNvGrpSpPr/>
+          <p:nvPr/>
+        </p:nvGrpSpPr>
+        <p:grpSpPr>
+          <a:xfrm>
+            <a:off x="1829819" y="1690688"/>
+            <a:ext cx="7930676" cy="4032000"/>
+            <a:chOff x="6413585" y="3766183"/>
+            <a:chExt cx="8659593" cy="5759999"/>
+          </a:xfrm>
+        </p:grpSpPr>
+        <p:sp>
+          <p:nvSpPr>
+            <p:cNvPr id="36" name="Google Shape;369;p19">
+              <a:extLst>
+                <a:ext uri="{FF2B5EF4-FFF2-40B4-BE49-F238E27FC236}">
+                  <a16:creationId xmlns:a16="http://schemas.microsoft.com/office/drawing/2014/main" id="{8573C08C-A5F3-DA17-E477-91FE9A95B070}"/>
+                </a:ext>
+              </a:extLst>
+            </p:cNvPr>
+            <p:cNvSpPr/>
+            <p:nvPr/>
+          </p:nvSpPr>
+          <p:spPr>
+            <a:xfrm>
+              <a:off x="6413585" y="3766183"/>
+              <a:ext cx="432397" cy="5759999"/>
+            </a:xfrm>
+            <a:prstGeom prst="rect">
+              <a:avLst/>
+            </a:prstGeom>
+            <a:solidFill>
+              <a:srgbClr val="7F7F7F"/>
+            </a:solidFill>
+            <a:ln w="12700" cap="flat" cmpd="sng">
+              <a:solidFill>
+                <a:srgbClr val="7F7F7F"/>
+              </a:solidFill>
+              <a:prstDash val="solid"/>
+              <a:miter lim="800000"/>
+              <a:headEnd type="none" w="sm" len="sm"/>
+              <a:tailEnd type="none" w="sm" len="sm"/>
+            </a:ln>
+          </p:spPr>
+          <p:txBody>
+            <a:bodyPr spcFirstLastPara="1" wrap="square" lIns="91425" tIns="45700" rIns="91425" bIns="45700" anchor="ctr" anchorCtr="0">
+              <a:noAutofit/>
+            </a:bodyPr>
+            <a:lstStyle/>
+            <a:p>
+              <a:pPr marL="0" marR="0" lvl="0" indent="0" algn="ctr" rtl="0">
+                <a:spcBef>
+                  <a:spcPts val="0"/>
+                </a:spcBef>
+                <a:spcAft>
+                  <a:spcPts val="0"/>
+                </a:spcAft>
+                <a:buNone/>
+              </a:pPr>
+              <a:r>
+                <a:rPr lang="fr-CA" sz="1400" dirty="0">
+                  <a:solidFill>
+                    <a:schemeClr val="lt1"/>
+                  </a:solidFill>
+                  <a:latin typeface="Calibri"/>
+                  <a:ea typeface="Calibri"/>
+                  <a:cs typeface="Calibri"/>
+                  <a:sym typeface="Calibri"/>
+                </a:rPr>
+                <a:t>1</a:t>
+              </a:r>
+              <a:endParaRPr sz="1400" dirty="0">
+                <a:solidFill>
+                  <a:schemeClr val="lt1"/>
+                </a:solidFill>
+                <a:latin typeface="Calibri"/>
+                <a:ea typeface="Calibri"/>
+                <a:cs typeface="Calibri"/>
+                <a:sym typeface="Calibri"/>
+              </a:endParaRPr>
+            </a:p>
+            <a:p>
+              <a:pPr marL="0" marR="0" lvl="0" indent="0" algn="ctr" rtl="0">
+                <a:spcBef>
+                  <a:spcPts val="0"/>
+                </a:spcBef>
+                <a:spcAft>
+                  <a:spcPts val="0"/>
+                </a:spcAft>
+                <a:buNone/>
+              </a:pPr>
+              <a:r>
+                <a:rPr lang="fr-CA" sz="1400" dirty="0">
+                  <a:solidFill>
+                    <a:schemeClr val="lt1"/>
+                  </a:solidFill>
+                  <a:latin typeface="Calibri"/>
+                  <a:ea typeface="Calibri"/>
+                  <a:cs typeface="Calibri"/>
+                  <a:sym typeface="Calibri"/>
+                </a:rPr>
+                <a:t>2</a:t>
+              </a:r>
+              <a:endParaRPr sz="1400" dirty="0"/>
+            </a:p>
+            <a:p>
+              <a:pPr marL="0" marR="0" lvl="0" indent="0" algn="ctr" rtl="0">
+                <a:spcBef>
+                  <a:spcPts val="0"/>
+                </a:spcBef>
+                <a:spcAft>
+                  <a:spcPts val="0"/>
+                </a:spcAft>
+                <a:buNone/>
+              </a:pPr>
+              <a:r>
+                <a:rPr lang="fr-CA" sz="1400" dirty="0">
+                  <a:solidFill>
+                    <a:schemeClr val="lt1"/>
+                  </a:solidFill>
+                  <a:latin typeface="Calibri"/>
+                  <a:ea typeface="Calibri"/>
+                  <a:cs typeface="Calibri"/>
+                  <a:sym typeface="Calibri"/>
+                </a:rPr>
+                <a:t>3</a:t>
+              </a:r>
+            </a:p>
+            <a:p>
+              <a:pPr marL="0" marR="0" lvl="0" indent="0" algn="ctr" rtl="0">
+                <a:spcBef>
+                  <a:spcPts val="0"/>
+                </a:spcBef>
+                <a:spcAft>
+                  <a:spcPts val="0"/>
+                </a:spcAft>
+                <a:buNone/>
+              </a:pPr>
+              <a:r>
+                <a:rPr lang="fr-CA" sz="1400" dirty="0">
+                  <a:solidFill>
+                    <a:schemeClr val="lt1"/>
+                  </a:solidFill>
+                  <a:latin typeface="Calibri"/>
+                  <a:ea typeface="Calibri"/>
+                  <a:cs typeface="Calibri"/>
+                  <a:sym typeface="Calibri"/>
+                </a:rPr>
+                <a:t>4</a:t>
+              </a:r>
+            </a:p>
+            <a:p>
+              <a:pPr marL="0" marR="0" lvl="0" indent="0" algn="ctr" rtl="0">
+                <a:spcBef>
+                  <a:spcPts val="0"/>
+                </a:spcBef>
+                <a:spcAft>
+                  <a:spcPts val="0"/>
+                </a:spcAft>
+                <a:buNone/>
+              </a:pPr>
+              <a:r>
+                <a:rPr lang="fr-CA" sz="1400" dirty="0">
+                  <a:solidFill>
+                    <a:schemeClr val="lt1"/>
+                  </a:solidFill>
+                  <a:latin typeface="Calibri"/>
+                  <a:ea typeface="Calibri"/>
+                  <a:cs typeface="Calibri"/>
+                  <a:sym typeface="Calibri"/>
+                </a:rPr>
+                <a:t>5</a:t>
+              </a:r>
+            </a:p>
+            <a:p>
+              <a:pPr marL="0" marR="0" lvl="0" indent="0" algn="ctr" rtl="0">
+                <a:spcBef>
+                  <a:spcPts val="0"/>
+                </a:spcBef>
+                <a:spcAft>
+                  <a:spcPts val="0"/>
+                </a:spcAft>
+                <a:buNone/>
+              </a:pPr>
+              <a:r>
+                <a:rPr lang="fr-CA" sz="1400" dirty="0">
+                  <a:solidFill>
+                    <a:schemeClr val="lt1"/>
+                  </a:solidFill>
+                  <a:latin typeface="Calibri"/>
+                  <a:ea typeface="Calibri"/>
+                  <a:cs typeface="Calibri"/>
+                  <a:sym typeface="Calibri"/>
+                </a:rPr>
+                <a:t>6</a:t>
+              </a:r>
+            </a:p>
+            <a:p>
+              <a:pPr marL="0" marR="0" lvl="0" indent="0" algn="ctr" rtl="0">
+                <a:spcBef>
+                  <a:spcPts val="0"/>
+                </a:spcBef>
+                <a:spcAft>
+                  <a:spcPts val="0"/>
+                </a:spcAft>
+                <a:buNone/>
+              </a:pPr>
+              <a:r>
+                <a:rPr lang="fr-CA" sz="1400" dirty="0">
+                  <a:solidFill>
+                    <a:schemeClr val="lt1"/>
+                  </a:solidFill>
+                  <a:latin typeface="Calibri"/>
+                  <a:ea typeface="Calibri"/>
+                  <a:cs typeface="Calibri"/>
+                  <a:sym typeface="Calibri"/>
+                </a:rPr>
+                <a:t>7</a:t>
+              </a:r>
+            </a:p>
+            <a:p>
+              <a:pPr marL="0" marR="0" lvl="0" indent="0" algn="ctr" rtl="0">
+                <a:spcBef>
+                  <a:spcPts val="0"/>
+                </a:spcBef>
+                <a:spcAft>
+                  <a:spcPts val="0"/>
+                </a:spcAft>
+                <a:buNone/>
+              </a:pPr>
+              <a:r>
+                <a:rPr lang="fr-CA" sz="1400" dirty="0">
+                  <a:solidFill>
+                    <a:schemeClr val="lt1"/>
+                  </a:solidFill>
+                  <a:latin typeface="Calibri"/>
+                  <a:ea typeface="Calibri"/>
+                  <a:cs typeface="Calibri"/>
+                  <a:sym typeface="Calibri"/>
+                </a:rPr>
+                <a:t>8</a:t>
+              </a:r>
+            </a:p>
+            <a:p>
+              <a:pPr marL="0" marR="0" lvl="0" indent="0" algn="ctr" rtl="0">
+                <a:spcBef>
+                  <a:spcPts val="0"/>
+                </a:spcBef>
+                <a:spcAft>
+                  <a:spcPts val="0"/>
+                </a:spcAft>
+                <a:buNone/>
+              </a:pPr>
+              <a:r>
+                <a:rPr lang="fr-CA" sz="1400" dirty="0">
+                  <a:solidFill>
+                    <a:schemeClr val="lt1"/>
+                  </a:solidFill>
+                  <a:latin typeface="Calibri"/>
+                  <a:ea typeface="Calibri"/>
+                  <a:cs typeface="Calibri"/>
+                  <a:sym typeface="Calibri"/>
+                </a:rPr>
+                <a:t>9</a:t>
+              </a:r>
+            </a:p>
+            <a:p>
+              <a:pPr marL="0" marR="0" lvl="0" indent="0" algn="ctr" rtl="0">
+                <a:spcBef>
+                  <a:spcPts val="0"/>
+                </a:spcBef>
+                <a:spcAft>
+                  <a:spcPts val="0"/>
+                </a:spcAft>
+                <a:buNone/>
+              </a:pPr>
+              <a:r>
+                <a:rPr lang="fr-CA" sz="1400" dirty="0">
+                  <a:solidFill>
+                    <a:schemeClr val="lt1"/>
+                  </a:solidFill>
+                  <a:latin typeface="Calibri"/>
+                  <a:ea typeface="Calibri"/>
+                  <a:cs typeface="Calibri"/>
+                  <a:sym typeface="Calibri"/>
+                </a:rPr>
+                <a:t>10</a:t>
+              </a:r>
+            </a:p>
+            <a:p>
+              <a:pPr marL="0" marR="0" lvl="0" indent="0" algn="ctr" rtl="0">
+                <a:spcBef>
+                  <a:spcPts val="0"/>
+                </a:spcBef>
+                <a:spcAft>
+                  <a:spcPts val="0"/>
+                </a:spcAft>
+                <a:buNone/>
+              </a:pPr>
+              <a:r>
+                <a:rPr lang="fr-CA" sz="1400" dirty="0">
+                  <a:solidFill>
+                    <a:schemeClr val="lt1"/>
+                  </a:solidFill>
+                  <a:latin typeface="Calibri"/>
+                  <a:ea typeface="Calibri"/>
+                  <a:cs typeface="Calibri"/>
+                  <a:sym typeface="Calibri"/>
+                </a:rPr>
+                <a:t>11</a:t>
+              </a:r>
+            </a:p>
+            <a:p>
+              <a:pPr marL="0" marR="0" lvl="0" indent="0" algn="ctr" rtl="0">
+                <a:spcBef>
+                  <a:spcPts val="0"/>
+                </a:spcBef>
+                <a:spcAft>
+                  <a:spcPts val="0"/>
+                </a:spcAft>
+                <a:buNone/>
+              </a:pPr>
+              <a:r>
+                <a:rPr lang="fr-CA" sz="1400" dirty="0">
+                  <a:solidFill>
+                    <a:schemeClr val="lt1"/>
+                  </a:solidFill>
+                  <a:latin typeface="Calibri"/>
+                  <a:ea typeface="Calibri"/>
+                  <a:cs typeface="Calibri"/>
+                  <a:sym typeface="Calibri"/>
+                </a:rPr>
+                <a:t>12</a:t>
+              </a:r>
+            </a:p>
+            <a:p>
+              <a:pPr marL="0" marR="0" lvl="0" indent="0" algn="ctr" rtl="0">
+                <a:spcBef>
+                  <a:spcPts val="0"/>
+                </a:spcBef>
+                <a:spcAft>
+                  <a:spcPts val="0"/>
+                </a:spcAft>
+                <a:buNone/>
+              </a:pPr>
+              <a:r>
+                <a:rPr lang="fr-CA" sz="1400" dirty="0">
+                  <a:solidFill>
+                    <a:schemeClr val="lt1"/>
+                  </a:solidFill>
+                  <a:latin typeface="Calibri"/>
+                  <a:ea typeface="Calibri"/>
+                  <a:cs typeface="Calibri"/>
+                  <a:sym typeface="Calibri"/>
+                </a:rPr>
+                <a:t>13</a:t>
+              </a:r>
+            </a:p>
+            <a:p>
+              <a:pPr marL="0" marR="0" lvl="0" indent="0" algn="ctr" rtl="0">
+                <a:spcBef>
+                  <a:spcPts val="0"/>
+                </a:spcBef>
+                <a:spcAft>
+                  <a:spcPts val="0"/>
+                </a:spcAft>
+                <a:buNone/>
+              </a:pPr>
+              <a:r>
+                <a:rPr lang="fr-CA" sz="1400" dirty="0">
+                  <a:solidFill>
+                    <a:schemeClr val="lt1"/>
+                  </a:solidFill>
+                  <a:latin typeface="Calibri"/>
+                  <a:ea typeface="Calibri"/>
+                  <a:cs typeface="Calibri"/>
+                  <a:sym typeface="Calibri"/>
+                </a:rPr>
+                <a:t>14</a:t>
+              </a:r>
+            </a:p>
+            <a:p>
+              <a:pPr marL="0" marR="0" lvl="0" indent="0" algn="ctr" rtl="0">
+                <a:spcBef>
+                  <a:spcPts val="0"/>
+                </a:spcBef>
+                <a:spcAft>
+                  <a:spcPts val="0"/>
+                </a:spcAft>
+                <a:buNone/>
+              </a:pPr>
+              <a:r>
+                <a:rPr lang="fr-CA" sz="1400" dirty="0">
+                  <a:solidFill>
+                    <a:schemeClr val="lt1"/>
+                  </a:solidFill>
+                  <a:latin typeface="Calibri"/>
+                  <a:ea typeface="Calibri"/>
+                  <a:cs typeface="Calibri"/>
+                  <a:sym typeface="Calibri"/>
+                </a:rPr>
+                <a:t>15</a:t>
+              </a:r>
+            </a:p>
+            <a:p>
+              <a:pPr marL="0" marR="0" lvl="0" indent="0" algn="ctr" rtl="0">
+                <a:spcBef>
+                  <a:spcPts val="0"/>
+                </a:spcBef>
+                <a:spcAft>
+                  <a:spcPts val="0"/>
+                </a:spcAft>
+                <a:buNone/>
+              </a:pPr>
+              <a:r>
+                <a:rPr lang="fr-CA" sz="1400" dirty="0">
+                  <a:solidFill>
+                    <a:schemeClr val="lt1"/>
+                  </a:solidFill>
+                  <a:latin typeface="Calibri"/>
+                  <a:ea typeface="Calibri"/>
+                  <a:cs typeface="Calibri"/>
+                  <a:sym typeface="Calibri"/>
+                </a:rPr>
+                <a:t>16</a:t>
+              </a:r>
+            </a:p>
+            <a:p>
+              <a:pPr marL="0" marR="0" lvl="0" indent="0" algn="ctr" rtl="0">
+                <a:spcBef>
+                  <a:spcPts val="0"/>
+                </a:spcBef>
+                <a:spcAft>
+                  <a:spcPts val="0"/>
+                </a:spcAft>
+                <a:buNone/>
+              </a:pPr>
+              <a:r>
+                <a:rPr lang="fr-CA" sz="1400" dirty="0">
+                  <a:solidFill>
+                    <a:schemeClr val="lt1"/>
+                  </a:solidFill>
+                  <a:latin typeface="Calibri"/>
+                  <a:ea typeface="Calibri"/>
+                  <a:cs typeface="Calibri"/>
+                  <a:sym typeface="Calibri"/>
+                </a:rPr>
+                <a:t>17</a:t>
+              </a:r>
+            </a:p>
+            <a:p>
+              <a:pPr marL="0" marR="0" lvl="0" indent="0" algn="ctr" rtl="0">
+                <a:spcBef>
+                  <a:spcPts val="0"/>
+                </a:spcBef>
+                <a:spcAft>
+                  <a:spcPts val="0"/>
+                </a:spcAft>
+                <a:buNone/>
+              </a:pPr>
+              <a:r>
+                <a:rPr lang="fr-CA" sz="1400" dirty="0">
+                  <a:solidFill>
+                    <a:schemeClr val="lt1"/>
+                  </a:solidFill>
+                  <a:latin typeface="Calibri"/>
+                  <a:ea typeface="Calibri"/>
+                  <a:cs typeface="Calibri"/>
+                  <a:sym typeface="Calibri"/>
+                </a:rPr>
+                <a:t>18</a:t>
+              </a:r>
+            </a:p>
+          </p:txBody>
+        </p:sp>
+        <p:sp>
+          <p:nvSpPr>
+            <p:cNvPr id="37" name="Google Shape;370;p19">
+              <a:extLst>
+                <a:ext uri="{FF2B5EF4-FFF2-40B4-BE49-F238E27FC236}">
+                  <a16:creationId xmlns:a16="http://schemas.microsoft.com/office/drawing/2014/main" id="{197CF319-1F86-8B87-B8A6-1D30CB69480C}"/>
+                </a:ext>
+              </a:extLst>
+            </p:cNvPr>
+            <p:cNvSpPr/>
+            <p:nvPr/>
+          </p:nvSpPr>
+          <p:spPr>
+            <a:xfrm>
+              <a:off x="6845982" y="3766183"/>
+              <a:ext cx="8227196" cy="5759999"/>
+            </a:xfrm>
+            <a:prstGeom prst="rect">
+              <a:avLst/>
+            </a:prstGeom>
+            <a:solidFill>
+              <a:srgbClr val="F2F2F2"/>
+            </a:solidFill>
+            <a:ln w="12700" cap="flat" cmpd="sng">
+              <a:solidFill>
+                <a:srgbClr val="7F7F7F"/>
+              </a:solidFill>
+              <a:prstDash val="solid"/>
+              <a:miter lim="800000"/>
+              <a:headEnd type="none" w="sm" len="sm"/>
+              <a:tailEnd type="none" w="sm" len="sm"/>
+            </a:ln>
+          </p:spPr>
+          <p:txBody>
+            <a:bodyPr spcFirstLastPara="1" wrap="square" lIns="91425" tIns="45700" rIns="91425" bIns="45700" anchor="ctr" anchorCtr="0">
+              <a:noAutofit/>
+            </a:bodyPr>
+            <a:lstStyle/>
+            <a:p>
+              <a:r>
+                <a:rPr lang="fr-FR" sz="1400" b="1" dirty="0" err="1">
+                  <a:solidFill>
+                    <a:srgbClr val="008800"/>
+                  </a:solidFill>
+                  <a:latin typeface="Consolas" panose="020B0609020204030204" pitchFamily="49" charset="0"/>
+                </a:rPr>
+                <a:t>from</a:t>
+              </a:r>
+              <a:r>
+                <a:rPr lang="fr-FR" sz="1400" dirty="0">
+                  <a:solidFill>
+                    <a:srgbClr val="BBBBBB"/>
+                  </a:solidFill>
+                  <a:latin typeface="Consolas" panose="020B0609020204030204" pitchFamily="49" charset="0"/>
+                </a:rPr>
+                <a:t> </a:t>
+              </a:r>
+              <a:r>
+                <a:rPr lang="fr-FR" sz="1400" b="1" dirty="0" err="1">
+                  <a:solidFill>
+                    <a:srgbClr val="0E84B5"/>
+                  </a:solidFill>
+                  <a:latin typeface="Consolas" panose="020B0609020204030204" pitchFamily="49" charset="0"/>
+                </a:rPr>
+                <a:t>dataclasses</a:t>
+              </a:r>
+              <a:r>
+                <a:rPr lang="fr-FR" sz="1400" dirty="0">
+                  <a:solidFill>
+                    <a:srgbClr val="BBBBBB"/>
+                  </a:solidFill>
+                  <a:latin typeface="Consolas" panose="020B0609020204030204" pitchFamily="49" charset="0"/>
+                </a:rPr>
+                <a:t> </a:t>
+              </a:r>
+              <a:r>
+                <a:rPr lang="fr-FR" sz="1400" b="1" dirty="0">
+                  <a:solidFill>
+                    <a:srgbClr val="008800"/>
+                  </a:solidFill>
+                  <a:latin typeface="Consolas" panose="020B0609020204030204" pitchFamily="49" charset="0"/>
+                </a:rPr>
+                <a:t>import</a:t>
+              </a:r>
+              <a:r>
+                <a:rPr lang="fr-FR" sz="1400" dirty="0">
+                  <a:solidFill>
+                    <a:srgbClr val="333333"/>
+                  </a:solidFill>
+                  <a:latin typeface="Consolas" panose="020B0609020204030204" pitchFamily="49" charset="0"/>
+                </a:rPr>
+                <a:t> </a:t>
+              </a:r>
+              <a:r>
+                <a:rPr lang="fr-FR" sz="1400" dirty="0" err="1">
+                  <a:solidFill>
+                    <a:srgbClr val="333333"/>
+                  </a:solidFill>
+                  <a:latin typeface="Consolas" panose="020B0609020204030204" pitchFamily="49" charset="0"/>
+                </a:rPr>
+                <a:t>dataclass</a:t>
+              </a:r>
+              <a:endParaRPr lang="fr-FR" sz="1400" dirty="0">
+                <a:solidFill>
+                  <a:srgbClr val="333333"/>
+                </a:solidFill>
+                <a:latin typeface="Consolas" panose="020B0609020204030204" pitchFamily="49" charset="0"/>
+              </a:endParaRPr>
+            </a:p>
+            <a:p>
+              <a:endParaRPr lang="fr-FR" sz="1400" dirty="0">
+                <a:solidFill>
+                  <a:srgbClr val="333333"/>
+                </a:solidFill>
+                <a:latin typeface="Consolas" panose="020B0609020204030204" pitchFamily="49" charset="0"/>
+              </a:endParaRPr>
+            </a:p>
+            <a:p>
+              <a:r>
+                <a:rPr lang="fr-FR" sz="1400" b="1" dirty="0">
+                  <a:solidFill>
+                    <a:srgbClr val="555555"/>
+                  </a:solidFill>
+                  <a:latin typeface="Consolas" panose="020B0609020204030204" pitchFamily="49" charset="0"/>
+                </a:rPr>
+                <a:t>@dataclass</a:t>
+              </a:r>
+              <a:endParaRPr lang="fr-FR" sz="1400" dirty="0">
+                <a:solidFill>
+                  <a:srgbClr val="333333"/>
+                </a:solidFill>
+                <a:latin typeface="Consolas" panose="020B0609020204030204" pitchFamily="49" charset="0"/>
+              </a:endParaRPr>
+            </a:p>
+            <a:p>
+              <a:r>
+                <a:rPr lang="fr-FR" sz="1400" b="1" dirty="0">
+                  <a:solidFill>
+                    <a:srgbClr val="008800"/>
+                  </a:solidFill>
+                  <a:latin typeface="Consolas" panose="020B0609020204030204" pitchFamily="49" charset="0"/>
+                </a:rPr>
+                <a:t>class</a:t>
+              </a:r>
+              <a:r>
+                <a:rPr lang="fr-FR" sz="1400" dirty="0">
+                  <a:solidFill>
+                    <a:srgbClr val="BBBBBB"/>
+                  </a:solidFill>
+                  <a:latin typeface="Consolas" panose="020B0609020204030204" pitchFamily="49" charset="0"/>
+                </a:rPr>
+                <a:t> </a:t>
+              </a:r>
+              <a:r>
+                <a:rPr lang="fr-FR" sz="1400" b="1" dirty="0">
+                  <a:solidFill>
+                    <a:srgbClr val="BB0066"/>
+                  </a:solidFill>
+                  <a:latin typeface="Consolas" panose="020B0609020204030204" pitchFamily="49" charset="0"/>
+                </a:rPr>
+                <a:t>Vecteur</a:t>
+              </a:r>
+              <a:r>
+                <a:rPr lang="fr-FR" sz="1400" dirty="0">
+                  <a:solidFill>
+                    <a:srgbClr val="333333"/>
+                  </a:solidFill>
+                  <a:latin typeface="Consolas" panose="020B0609020204030204" pitchFamily="49" charset="0"/>
+                </a:rPr>
+                <a:t>:</a:t>
+              </a:r>
+            </a:p>
+            <a:p>
+              <a:r>
+                <a:rPr lang="fr-FR" sz="1400" dirty="0">
+                  <a:solidFill>
+                    <a:srgbClr val="333333"/>
+                  </a:solidFill>
+                  <a:latin typeface="Consolas" panose="020B0609020204030204" pitchFamily="49" charset="0"/>
+                </a:rPr>
+                <a:t> </a:t>
+              </a:r>
+            </a:p>
+            <a:p>
+              <a:r>
+                <a:rPr lang="fr-FR" sz="1400" dirty="0">
+                  <a:solidFill>
+                    <a:srgbClr val="333333"/>
+                  </a:solidFill>
+                  <a:latin typeface="Consolas" panose="020B0609020204030204" pitchFamily="49" charset="0"/>
+                </a:rPr>
+                <a:t>  </a:t>
+              </a:r>
+              <a:r>
+                <a:rPr lang="fr-FR" sz="1400" dirty="0">
+                  <a:solidFill>
+                    <a:schemeClr val="bg1">
+                      <a:lumMod val="50000"/>
+                    </a:schemeClr>
+                  </a:solidFill>
+                  <a:latin typeface="Consolas" panose="020B0609020204030204" pitchFamily="49" charset="0"/>
+                </a:rPr>
+                <a:t>[...]</a:t>
+              </a:r>
+            </a:p>
+            <a:p>
+              <a:r>
+                <a:rPr lang="en-CA" sz="1400" dirty="0">
+                  <a:solidFill>
+                    <a:srgbClr val="333333"/>
+                  </a:solidFill>
+                  <a:latin typeface="Consolas" panose="020B0609020204030204" pitchFamily="49" charset="0"/>
+                </a:rPr>
+                <a:t> </a:t>
+              </a:r>
+            </a:p>
+            <a:p>
+              <a:r>
+                <a:rPr lang="en-CA" sz="1400" b="1" dirty="0">
+                  <a:solidFill>
+                    <a:srgbClr val="008800"/>
+                  </a:solidFill>
+                  <a:latin typeface="Consolas" panose="020B0609020204030204" pitchFamily="49" charset="0"/>
+                </a:rPr>
+                <a:t>  def</a:t>
+              </a:r>
+              <a:r>
+                <a:rPr lang="en-CA" sz="1400" dirty="0">
+                  <a:solidFill>
+                    <a:srgbClr val="BBBBBB"/>
+                  </a:solidFill>
+                  <a:latin typeface="Consolas" panose="020B0609020204030204" pitchFamily="49" charset="0"/>
+                </a:rPr>
+                <a:t> </a:t>
+              </a:r>
+              <a:r>
+                <a:rPr lang="en-CA" sz="1400" b="1" dirty="0" err="1">
+                  <a:solidFill>
+                    <a:srgbClr val="0066BB"/>
+                  </a:solidFill>
+                  <a:latin typeface="Consolas" panose="020B0609020204030204" pitchFamily="49" charset="0"/>
+                </a:rPr>
+                <a:t>calculer_norme</a:t>
+              </a:r>
+              <a:r>
+                <a:rPr lang="en-CA" sz="1400" dirty="0">
+                  <a:solidFill>
+                    <a:srgbClr val="333333"/>
+                  </a:solidFill>
+                  <a:latin typeface="Consolas" panose="020B0609020204030204" pitchFamily="49" charset="0"/>
+                </a:rPr>
+                <a:t>(</a:t>
+              </a:r>
+              <a:r>
+                <a:rPr lang="en-CA" sz="1400" dirty="0">
+                  <a:solidFill>
+                    <a:srgbClr val="007020"/>
+                  </a:solidFill>
+                  <a:latin typeface="Consolas" panose="020B0609020204030204" pitchFamily="49" charset="0"/>
+                </a:rPr>
+                <a:t>self</a:t>
+              </a:r>
+              <a:r>
+                <a:rPr lang="en-CA" sz="1400" dirty="0">
+                  <a:solidFill>
+                    <a:srgbClr val="333333"/>
+                  </a:solidFill>
+                  <a:latin typeface="Consolas" panose="020B0609020204030204" pitchFamily="49" charset="0"/>
+                </a:rPr>
+                <a:t>) -&gt; </a:t>
+              </a:r>
+              <a:r>
+                <a:rPr lang="en-CA" sz="1400" dirty="0">
+                  <a:solidFill>
+                    <a:srgbClr val="007020"/>
+                  </a:solidFill>
+                  <a:latin typeface="Consolas" panose="020B0609020204030204" pitchFamily="49" charset="0"/>
+                </a:rPr>
+                <a:t>float</a:t>
+              </a:r>
+              <a:r>
+                <a:rPr lang="en-CA" sz="1400" dirty="0">
+                  <a:solidFill>
+                    <a:srgbClr val="333333"/>
+                  </a:solidFill>
+                  <a:latin typeface="Consolas" panose="020B0609020204030204" pitchFamily="49" charset="0"/>
+                </a:rPr>
+                <a:t>:</a:t>
+              </a:r>
+            </a:p>
+            <a:p>
+              <a:r>
+                <a:rPr lang="en-CA" sz="1400" dirty="0">
+                  <a:solidFill>
+                    <a:srgbClr val="333333"/>
+                  </a:solidFill>
+                  <a:latin typeface="Consolas" panose="020B0609020204030204" pitchFamily="49" charset="0"/>
+                </a:rPr>
+                <a:t>    </a:t>
+              </a:r>
+              <a:r>
+                <a:rPr lang="en-CA" sz="1400" dirty="0">
+                  <a:solidFill>
+                    <a:srgbClr val="DD4422"/>
+                  </a:solidFill>
+                  <a:latin typeface="Consolas" panose="020B0609020204030204" pitchFamily="49" charset="0"/>
+                </a:rPr>
+                <a:t>"""</a:t>
+              </a:r>
+              <a:endParaRPr lang="en-CA" sz="1400" dirty="0">
+                <a:solidFill>
+                  <a:srgbClr val="333333"/>
+                </a:solidFill>
+                <a:latin typeface="Consolas" panose="020B0609020204030204" pitchFamily="49" charset="0"/>
+              </a:endParaRPr>
+            </a:p>
+            <a:p>
+              <a:r>
+                <a:rPr lang="en-CA" sz="1400" dirty="0">
+                  <a:solidFill>
+                    <a:srgbClr val="DD4422"/>
+                  </a:solidFill>
+                  <a:latin typeface="Consolas" panose="020B0609020204030204" pitchFamily="49" charset="0"/>
+                </a:rPr>
+                <a:t>    </a:t>
+              </a:r>
+              <a:r>
+                <a:rPr lang="en-CA" sz="1400" dirty="0" err="1">
+                  <a:solidFill>
+                    <a:srgbClr val="DD4422"/>
+                  </a:solidFill>
+                  <a:latin typeface="Consolas" panose="020B0609020204030204" pitchFamily="49" charset="0"/>
+                </a:rPr>
+                <a:t>Calcule</a:t>
+              </a:r>
+              <a:r>
+                <a:rPr lang="en-CA" sz="1400" dirty="0">
+                  <a:solidFill>
+                    <a:srgbClr val="DD4422"/>
+                  </a:solidFill>
+                  <a:latin typeface="Consolas" panose="020B0609020204030204" pitchFamily="49" charset="0"/>
+                </a:rPr>
+                <a:t> la </a:t>
+              </a:r>
+              <a:r>
+                <a:rPr lang="en-CA" sz="1400" dirty="0" err="1">
+                  <a:solidFill>
+                    <a:srgbClr val="DD4422"/>
+                  </a:solidFill>
+                  <a:latin typeface="Consolas" panose="020B0609020204030204" pitchFamily="49" charset="0"/>
+                </a:rPr>
+                <a:t>norme</a:t>
+              </a:r>
+              <a:r>
+                <a:rPr lang="en-CA" sz="1400" dirty="0">
+                  <a:solidFill>
+                    <a:srgbClr val="DD4422"/>
+                  </a:solidFill>
+                  <a:latin typeface="Consolas" panose="020B0609020204030204" pitchFamily="49" charset="0"/>
+                </a:rPr>
+                <a:t> </a:t>
+              </a:r>
+              <a:r>
+                <a:rPr lang="en-CA" sz="1400" dirty="0" err="1">
+                  <a:solidFill>
+                    <a:srgbClr val="DD4422"/>
+                  </a:solidFill>
+                  <a:latin typeface="Consolas" panose="020B0609020204030204" pitchFamily="49" charset="0"/>
+                </a:rPr>
+                <a:t>Euclidienne</a:t>
+              </a:r>
+              <a:r>
+                <a:rPr lang="en-CA" sz="1400" dirty="0">
+                  <a:solidFill>
+                    <a:srgbClr val="DD4422"/>
+                  </a:solidFill>
+                  <a:latin typeface="Consolas" panose="020B0609020204030204" pitchFamily="49" charset="0"/>
+                </a:rPr>
+                <a:t> du </a:t>
+              </a:r>
+              <a:r>
+                <a:rPr lang="en-CA" sz="1400" dirty="0" err="1">
+                  <a:solidFill>
+                    <a:srgbClr val="DD4422"/>
+                  </a:solidFill>
+                  <a:latin typeface="Consolas" panose="020B0609020204030204" pitchFamily="49" charset="0"/>
+                </a:rPr>
+                <a:t>vecteur</a:t>
+              </a:r>
+              <a:r>
+                <a:rPr lang="en-CA" sz="1400" dirty="0">
+                  <a:solidFill>
+                    <a:srgbClr val="DD4422"/>
+                  </a:solidFill>
+                  <a:latin typeface="Consolas" panose="020B0609020204030204" pitchFamily="49" charset="0"/>
+                </a:rPr>
+                <a:t>.</a:t>
+              </a:r>
+              <a:endParaRPr lang="en-CA" sz="1400" dirty="0">
+                <a:solidFill>
+                  <a:srgbClr val="333333"/>
+                </a:solidFill>
+                <a:latin typeface="Consolas" panose="020B0609020204030204" pitchFamily="49" charset="0"/>
+              </a:endParaRPr>
+            </a:p>
+            <a:p>
+              <a:endParaRPr lang="en-CA" sz="1400" dirty="0">
+                <a:solidFill>
+                  <a:srgbClr val="333333"/>
+                </a:solidFill>
+                <a:latin typeface="Consolas" panose="020B0609020204030204" pitchFamily="49" charset="0"/>
+              </a:endParaRPr>
+            </a:p>
+            <a:p>
+              <a:r>
+                <a:rPr lang="en-CA" sz="1400" dirty="0">
+                  <a:solidFill>
+                    <a:srgbClr val="DD4422"/>
+                  </a:solidFill>
+                  <a:latin typeface="Consolas" panose="020B0609020204030204" pitchFamily="49" charset="0"/>
+                </a:rPr>
+                <a:t>    </a:t>
+              </a:r>
+              <a:r>
+                <a:rPr lang="en-CA" sz="1400" dirty="0" err="1">
+                  <a:solidFill>
+                    <a:srgbClr val="DD4422"/>
+                  </a:solidFill>
+                  <a:latin typeface="Consolas" panose="020B0609020204030204" pitchFamily="49" charset="0"/>
+                </a:rPr>
+                <a:t>Args</a:t>
+              </a:r>
+              <a:r>
+                <a:rPr lang="en-CA" sz="1400" dirty="0">
+                  <a:solidFill>
+                    <a:srgbClr val="DD4422"/>
+                  </a:solidFill>
+                  <a:latin typeface="Consolas" panose="020B0609020204030204" pitchFamily="49" charset="0"/>
+                </a:rPr>
+                <a:t>:</a:t>
+              </a:r>
+              <a:endParaRPr lang="en-CA" sz="1400" dirty="0">
+                <a:solidFill>
+                  <a:srgbClr val="333333"/>
+                </a:solidFill>
+                <a:latin typeface="Consolas" panose="020B0609020204030204" pitchFamily="49" charset="0"/>
+              </a:endParaRPr>
+            </a:p>
+            <a:p>
+              <a:r>
+                <a:rPr lang="en-CA" sz="1400" dirty="0">
+                  <a:solidFill>
+                    <a:srgbClr val="DD4422"/>
+                  </a:solidFill>
+                  <a:latin typeface="Consolas" panose="020B0609020204030204" pitchFamily="49" charset="0"/>
+                </a:rPr>
+                <a:t>      </a:t>
+              </a:r>
+              <a:r>
+                <a:rPr lang="en-CA" sz="1400" dirty="0" err="1">
+                  <a:solidFill>
+                    <a:srgbClr val="DD4422"/>
+                  </a:solidFill>
+                  <a:latin typeface="Consolas" panose="020B0609020204030204" pitchFamily="49" charset="0"/>
+                </a:rPr>
+                <a:t>Aucuns</a:t>
+              </a:r>
+              <a:r>
+                <a:rPr lang="en-CA" sz="1400" dirty="0">
+                  <a:solidFill>
+                    <a:srgbClr val="DD4422"/>
+                  </a:solidFill>
+                  <a:latin typeface="Consolas" panose="020B0609020204030204" pitchFamily="49" charset="0"/>
+                </a:rPr>
+                <a:t>.</a:t>
+              </a:r>
+              <a:endParaRPr lang="en-CA" sz="1400" dirty="0">
+                <a:solidFill>
+                  <a:srgbClr val="333333"/>
+                </a:solidFill>
+                <a:latin typeface="Consolas" panose="020B0609020204030204" pitchFamily="49" charset="0"/>
+              </a:endParaRPr>
+            </a:p>
+            <a:p>
+              <a:endParaRPr lang="en-CA" sz="1400" dirty="0">
+                <a:solidFill>
+                  <a:srgbClr val="333333"/>
+                </a:solidFill>
+                <a:latin typeface="Consolas" panose="020B0609020204030204" pitchFamily="49" charset="0"/>
+              </a:endParaRPr>
+            </a:p>
+            <a:p>
+              <a:r>
+                <a:rPr lang="en-CA" sz="1400" dirty="0">
+                  <a:solidFill>
+                    <a:srgbClr val="DD4422"/>
+                  </a:solidFill>
+                  <a:latin typeface="Consolas" panose="020B0609020204030204" pitchFamily="49" charset="0"/>
+                </a:rPr>
+                <a:t>    </a:t>
+              </a:r>
+              <a:r>
+                <a:rPr lang="en-CA" sz="1400" dirty="0" err="1">
+                  <a:solidFill>
+                    <a:srgbClr val="DD4422"/>
+                  </a:solidFill>
+                  <a:latin typeface="Consolas" panose="020B0609020204030204" pitchFamily="49" charset="0"/>
+                </a:rPr>
+                <a:t>Retourne</a:t>
+              </a:r>
+              <a:r>
+                <a:rPr lang="en-CA" sz="1400" dirty="0">
+                  <a:solidFill>
+                    <a:srgbClr val="DD4422"/>
+                  </a:solidFill>
+                  <a:latin typeface="Consolas" panose="020B0609020204030204" pitchFamily="49" charset="0"/>
+                </a:rPr>
+                <a:t>:</a:t>
+              </a:r>
+              <a:endParaRPr lang="en-CA" sz="1400" dirty="0">
+                <a:solidFill>
+                  <a:srgbClr val="333333"/>
+                </a:solidFill>
+                <a:latin typeface="Consolas" panose="020B0609020204030204" pitchFamily="49" charset="0"/>
+              </a:endParaRPr>
+            </a:p>
+            <a:p>
+              <a:r>
+                <a:rPr lang="en-CA" sz="1400" dirty="0">
+                  <a:solidFill>
+                    <a:srgbClr val="DD4422"/>
+                  </a:solidFill>
+                  <a:latin typeface="Consolas" panose="020B0609020204030204" pitchFamily="49" charset="0"/>
+                </a:rPr>
+                <a:t>      float: La </a:t>
+              </a:r>
+              <a:r>
+                <a:rPr lang="en-CA" sz="1400" dirty="0" err="1">
+                  <a:solidFill>
+                    <a:srgbClr val="DD4422"/>
+                  </a:solidFill>
+                  <a:latin typeface="Consolas" panose="020B0609020204030204" pitchFamily="49" charset="0"/>
+                </a:rPr>
+                <a:t>norme</a:t>
+              </a:r>
+              <a:r>
+                <a:rPr lang="en-CA" sz="1400" dirty="0">
+                  <a:solidFill>
+                    <a:srgbClr val="DD4422"/>
+                  </a:solidFill>
+                  <a:latin typeface="Consolas" panose="020B0609020204030204" pitchFamily="49" charset="0"/>
+                </a:rPr>
+                <a:t> du </a:t>
+              </a:r>
+              <a:r>
+                <a:rPr lang="en-CA" sz="1400" dirty="0" err="1">
+                  <a:solidFill>
+                    <a:srgbClr val="DD4422"/>
+                  </a:solidFill>
+                  <a:latin typeface="Consolas" panose="020B0609020204030204" pitchFamily="49" charset="0"/>
+                </a:rPr>
+                <a:t>vecteur</a:t>
+              </a:r>
+              <a:r>
+                <a:rPr lang="en-CA" sz="1400" dirty="0">
+                  <a:solidFill>
+                    <a:srgbClr val="DD4422"/>
+                  </a:solidFill>
+                  <a:latin typeface="Consolas" panose="020B0609020204030204" pitchFamily="49" charset="0"/>
+                </a:rPr>
+                <a:t>.</a:t>
+              </a:r>
+              <a:endParaRPr lang="en-CA" sz="1400" dirty="0">
+                <a:solidFill>
+                  <a:srgbClr val="333333"/>
+                </a:solidFill>
+                <a:latin typeface="Consolas" panose="020B0609020204030204" pitchFamily="49" charset="0"/>
+              </a:endParaRPr>
+            </a:p>
+            <a:p>
+              <a:r>
+                <a:rPr lang="en-CA" sz="1400" dirty="0">
+                  <a:solidFill>
+                    <a:srgbClr val="DD4422"/>
+                  </a:solidFill>
+                  <a:latin typeface="Consolas" panose="020B0609020204030204" pitchFamily="49" charset="0"/>
+                </a:rPr>
+                <a:t>    """</a:t>
+              </a:r>
+              <a:endParaRPr lang="en-CA" sz="1400" dirty="0">
+                <a:solidFill>
+                  <a:srgbClr val="333333"/>
+                </a:solidFill>
+                <a:latin typeface="Consolas" panose="020B0609020204030204" pitchFamily="49" charset="0"/>
+              </a:endParaRPr>
+            </a:p>
+            <a:p>
+              <a:r>
+                <a:rPr lang="en-CA" sz="1400" dirty="0">
+                  <a:solidFill>
+                    <a:srgbClr val="333333"/>
+                  </a:solidFill>
+                  <a:latin typeface="Consolas" panose="020B0609020204030204" pitchFamily="49" charset="0"/>
+                </a:rPr>
+                <a:t>    </a:t>
+              </a:r>
+              <a:r>
+                <a:rPr lang="en-CA" sz="1400" b="1" dirty="0">
+                  <a:solidFill>
+                    <a:srgbClr val="008800"/>
+                  </a:solidFill>
+                  <a:latin typeface="Consolas" panose="020B0609020204030204" pitchFamily="49" charset="0"/>
+                </a:rPr>
+                <a:t>return</a:t>
+              </a:r>
+              <a:r>
+                <a:rPr lang="en-CA" sz="1400" dirty="0">
+                  <a:solidFill>
+                    <a:srgbClr val="333333"/>
+                  </a:solidFill>
+                  <a:latin typeface="Consolas" panose="020B0609020204030204" pitchFamily="49" charset="0"/>
+                </a:rPr>
+                <a:t> (</a:t>
+              </a:r>
+              <a:r>
+                <a:rPr lang="en-CA" sz="1400" dirty="0" err="1">
+                  <a:solidFill>
+                    <a:srgbClr val="007020"/>
+                  </a:solidFill>
+                  <a:latin typeface="Consolas" panose="020B0609020204030204" pitchFamily="49" charset="0"/>
+                </a:rPr>
+                <a:t>self</a:t>
+              </a:r>
+              <a:r>
+                <a:rPr lang="en-CA" sz="1400" dirty="0" err="1">
+                  <a:solidFill>
+                    <a:srgbClr val="333333"/>
+                  </a:solidFill>
+                  <a:latin typeface="Consolas" panose="020B0609020204030204" pitchFamily="49" charset="0"/>
+                </a:rPr>
+                <a:t>.dx</a:t>
+              </a:r>
+              <a:r>
+                <a:rPr lang="en-CA" sz="1400" dirty="0">
+                  <a:solidFill>
+                    <a:srgbClr val="333333"/>
+                  </a:solidFill>
+                  <a:latin typeface="Consolas" panose="020B0609020204030204" pitchFamily="49" charset="0"/>
+                </a:rPr>
+                <a:t> ** </a:t>
+              </a:r>
+              <a:r>
+                <a:rPr lang="en-CA" sz="1400" b="1" dirty="0">
+                  <a:solidFill>
+                    <a:srgbClr val="0000DD"/>
+                  </a:solidFill>
+                  <a:latin typeface="Consolas" panose="020B0609020204030204" pitchFamily="49" charset="0"/>
+                </a:rPr>
+                <a:t>2</a:t>
+              </a:r>
+              <a:r>
+                <a:rPr lang="en-CA" sz="1400" dirty="0">
+                  <a:solidFill>
+                    <a:srgbClr val="333333"/>
+                  </a:solidFill>
+                  <a:latin typeface="Consolas" panose="020B0609020204030204" pitchFamily="49" charset="0"/>
+                </a:rPr>
+                <a:t> + </a:t>
+              </a:r>
+              <a:r>
+                <a:rPr lang="en-CA" sz="1400" dirty="0" err="1">
+                  <a:solidFill>
+                    <a:srgbClr val="007020"/>
+                  </a:solidFill>
+                  <a:latin typeface="Consolas" panose="020B0609020204030204" pitchFamily="49" charset="0"/>
+                </a:rPr>
+                <a:t>self</a:t>
+              </a:r>
+              <a:r>
+                <a:rPr lang="en-CA" sz="1400" dirty="0" err="1">
+                  <a:solidFill>
+                    <a:srgbClr val="333333"/>
+                  </a:solidFill>
+                  <a:latin typeface="Consolas" panose="020B0609020204030204" pitchFamily="49" charset="0"/>
+                </a:rPr>
+                <a:t>.dy</a:t>
+              </a:r>
+              <a:r>
+                <a:rPr lang="en-CA" sz="1400" dirty="0">
+                  <a:solidFill>
+                    <a:srgbClr val="333333"/>
+                  </a:solidFill>
+                  <a:latin typeface="Consolas" panose="020B0609020204030204" pitchFamily="49" charset="0"/>
+                </a:rPr>
+                <a:t> ** </a:t>
+              </a:r>
+              <a:r>
+                <a:rPr lang="en-CA" sz="1400" b="1" dirty="0">
+                  <a:solidFill>
+                    <a:srgbClr val="0000DD"/>
+                  </a:solidFill>
+                  <a:latin typeface="Consolas" panose="020B0609020204030204" pitchFamily="49" charset="0"/>
+                </a:rPr>
+                <a:t>2</a:t>
+              </a:r>
+              <a:r>
+                <a:rPr lang="en-CA" sz="1400" dirty="0">
+                  <a:solidFill>
+                    <a:srgbClr val="333333"/>
+                  </a:solidFill>
+                  <a:latin typeface="Consolas" panose="020B0609020204030204" pitchFamily="49" charset="0"/>
+                </a:rPr>
+                <a:t> + </a:t>
+              </a:r>
+              <a:r>
+                <a:rPr lang="en-CA" sz="1400" dirty="0">
+                  <a:solidFill>
+                    <a:srgbClr val="007020"/>
+                  </a:solidFill>
+                  <a:latin typeface="Consolas" panose="020B0609020204030204" pitchFamily="49" charset="0"/>
+                </a:rPr>
+                <a:t>self</a:t>
+              </a:r>
+              <a:r>
+                <a:rPr lang="en-CA" sz="1400" dirty="0">
+                  <a:solidFill>
+                    <a:srgbClr val="333333"/>
+                  </a:solidFill>
+                  <a:latin typeface="Consolas" panose="020B0609020204030204" pitchFamily="49" charset="0"/>
+                </a:rPr>
+                <a:t>.dz ** </a:t>
+              </a:r>
+              <a:r>
+                <a:rPr lang="en-CA" sz="1400" b="1" dirty="0">
+                  <a:solidFill>
+                    <a:srgbClr val="0000DD"/>
+                  </a:solidFill>
+                  <a:latin typeface="Consolas" panose="020B0609020204030204" pitchFamily="49" charset="0"/>
+                </a:rPr>
+                <a:t>2</a:t>
+              </a:r>
+              <a:r>
+                <a:rPr lang="en-CA" sz="1400" dirty="0">
+                  <a:solidFill>
+                    <a:srgbClr val="333333"/>
+                  </a:solidFill>
+                  <a:latin typeface="Consolas" panose="020B0609020204030204" pitchFamily="49" charset="0"/>
+                </a:rPr>
+                <a:t>) ** </a:t>
+              </a:r>
+              <a:r>
+                <a:rPr lang="en-CA" sz="1400" b="1" dirty="0">
+                  <a:solidFill>
+                    <a:srgbClr val="6600EE"/>
+                  </a:solidFill>
+                  <a:latin typeface="Consolas" panose="020B0609020204030204" pitchFamily="49" charset="0"/>
+                </a:rPr>
+                <a:t>0.5</a:t>
+              </a:r>
+              <a:endParaRPr lang="fr-CA" sz="1400" dirty="0">
+                <a:latin typeface="Consolas" panose="020B0609020204030204" pitchFamily="49" charset="0"/>
+              </a:endParaRPr>
+            </a:p>
+          </p:txBody>
+        </p:sp>
+      </p:grpSp>
+      <p:grpSp>
+        <p:nvGrpSpPr>
+          <p:cNvPr id="13" name="Google Shape;354;p18">
+            <a:extLst>
+              <a:ext uri="{FF2B5EF4-FFF2-40B4-BE49-F238E27FC236}">
+                <a16:creationId xmlns:a16="http://schemas.microsoft.com/office/drawing/2014/main" id="{CF295D18-CA9D-B540-7553-E1EF84A8536D}"/>
+              </a:ext>
+            </a:extLst>
+          </p:cNvPr>
+          <p:cNvGrpSpPr/>
+          <p:nvPr/>
+        </p:nvGrpSpPr>
+        <p:grpSpPr>
+          <a:xfrm>
+            <a:off x="1829819" y="5893918"/>
+            <a:ext cx="7930675" cy="756000"/>
+            <a:chOff x="6682372" y="3766184"/>
+            <a:chExt cx="11594725" cy="230400"/>
+          </a:xfrm>
+        </p:grpSpPr>
+        <p:sp>
+          <p:nvSpPr>
+            <p:cNvPr id="14" name="Google Shape;355;p18">
+              <a:extLst>
+                <a:ext uri="{FF2B5EF4-FFF2-40B4-BE49-F238E27FC236}">
+                  <a16:creationId xmlns:a16="http://schemas.microsoft.com/office/drawing/2014/main" id="{CA2C613A-DC2F-699E-CDC8-DBB00BEA89F3}"/>
+                </a:ext>
+              </a:extLst>
+            </p:cNvPr>
+            <p:cNvSpPr/>
+            <p:nvPr/>
+          </p:nvSpPr>
+          <p:spPr>
+            <a:xfrm>
+              <a:off x="6682372" y="3766184"/>
+              <a:ext cx="578953" cy="230400"/>
+            </a:xfrm>
+            <a:prstGeom prst="rect">
+              <a:avLst/>
+            </a:prstGeom>
+            <a:solidFill>
+              <a:srgbClr val="7F7F7F"/>
+            </a:solidFill>
+            <a:ln w="12700" cap="flat" cmpd="sng">
+              <a:solidFill>
+                <a:schemeClr val="dk1"/>
+              </a:solidFill>
+              <a:prstDash val="solid"/>
+              <a:miter lim="800000"/>
+              <a:headEnd type="none" w="sm" len="sm"/>
+              <a:tailEnd type="none" w="sm" len="sm"/>
+            </a:ln>
+          </p:spPr>
+          <p:txBody>
+            <a:bodyPr spcFirstLastPara="1" wrap="square" lIns="91425" tIns="45700" rIns="91425" bIns="45700" anchor="ctr" anchorCtr="0">
+              <a:noAutofit/>
+            </a:bodyPr>
+            <a:lstStyle/>
+            <a:p>
+              <a:pPr marL="0" marR="0" lvl="0" indent="0" algn="ctr" rtl="0">
+                <a:spcBef>
+                  <a:spcPts val="0"/>
+                </a:spcBef>
+                <a:spcAft>
+                  <a:spcPts val="0"/>
+                </a:spcAft>
+                <a:buNone/>
+              </a:pPr>
+              <a:r>
+                <a:rPr lang="fr-CA" sz="1400" dirty="0">
+                  <a:solidFill>
+                    <a:schemeClr val="lt1"/>
+                  </a:solidFill>
+                  <a:latin typeface="Calibri"/>
+                  <a:ea typeface="Calibri"/>
+                  <a:cs typeface="Calibri"/>
+                  <a:sym typeface="Calibri"/>
+                </a:rPr>
+                <a:t>1</a:t>
+              </a:r>
+              <a:endParaRPr dirty="0"/>
+            </a:p>
+            <a:p>
+              <a:pPr marL="0" marR="0" lvl="0" indent="0" algn="ctr" rtl="0">
+                <a:spcBef>
+                  <a:spcPts val="0"/>
+                </a:spcBef>
+                <a:spcAft>
+                  <a:spcPts val="0"/>
+                </a:spcAft>
+                <a:buNone/>
+              </a:pPr>
+              <a:r>
+                <a:rPr lang="fr-CA" sz="1400" dirty="0">
+                  <a:solidFill>
+                    <a:schemeClr val="lt1"/>
+                  </a:solidFill>
+                  <a:latin typeface="Calibri"/>
+                  <a:ea typeface="Calibri"/>
+                  <a:cs typeface="Calibri"/>
+                  <a:sym typeface="Calibri"/>
+                </a:rPr>
+                <a:t>2</a:t>
+              </a:r>
+            </a:p>
+            <a:p>
+              <a:pPr marL="0" marR="0" lvl="0" indent="0" algn="ctr" rtl="0">
+                <a:spcBef>
+                  <a:spcPts val="0"/>
+                </a:spcBef>
+                <a:spcAft>
+                  <a:spcPts val="0"/>
+                </a:spcAft>
+                <a:buNone/>
+              </a:pPr>
+              <a:r>
+                <a:rPr lang="fr-CA" sz="1400" dirty="0">
+                  <a:solidFill>
+                    <a:schemeClr val="lt1"/>
+                  </a:solidFill>
+                  <a:latin typeface="Calibri"/>
+                  <a:ea typeface="Calibri"/>
+                  <a:cs typeface="Calibri"/>
+                  <a:sym typeface="Calibri"/>
+                </a:rPr>
+                <a:t>3</a:t>
+              </a:r>
+              <a:endParaRPr dirty="0"/>
+            </a:p>
+          </p:txBody>
+        </p:sp>
+        <p:sp>
+          <p:nvSpPr>
+            <p:cNvPr id="15" name="Google Shape;356;p18">
+              <a:extLst>
+                <a:ext uri="{FF2B5EF4-FFF2-40B4-BE49-F238E27FC236}">
+                  <a16:creationId xmlns:a16="http://schemas.microsoft.com/office/drawing/2014/main" id="{A34B436D-2615-CF78-243E-4A487DB6F676}"/>
+                </a:ext>
+              </a:extLst>
+            </p:cNvPr>
+            <p:cNvSpPr/>
+            <p:nvPr/>
+          </p:nvSpPr>
+          <p:spPr>
+            <a:xfrm>
+              <a:off x="7261325" y="3766184"/>
+              <a:ext cx="11015772" cy="230400"/>
+            </a:xfrm>
+            <a:prstGeom prst="rect">
+              <a:avLst/>
+            </a:prstGeom>
+            <a:solidFill>
+              <a:schemeClr val="dk1"/>
+            </a:solidFill>
+            <a:ln w="12700" cap="flat" cmpd="sng">
+              <a:solidFill>
+                <a:schemeClr val="dk1"/>
+              </a:solidFill>
+              <a:prstDash val="solid"/>
+              <a:miter lim="800000"/>
+              <a:headEnd type="none" w="sm" len="sm"/>
+              <a:tailEnd type="none" w="sm" len="sm"/>
+            </a:ln>
+          </p:spPr>
+          <p:txBody>
+            <a:bodyPr spcFirstLastPara="1" wrap="square" lIns="91425" tIns="45700" rIns="91425" bIns="45700" anchor="ctr" anchorCtr="0">
+              <a:noAutofit/>
+            </a:bodyPr>
+            <a:lstStyle/>
+            <a:p>
+              <a:r>
+                <a:rPr lang="en-CA" sz="1400" b="1" dirty="0">
+                  <a:solidFill>
+                    <a:schemeClr val="bg1"/>
+                  </a:solidFill>
+                  <a:latin typeface="Consolas" panose="020B0609020204030204" pitchFamily="49" charset="0"/>
+                </a:rPr>
+                <a:t>&gt;&gt;&gt; </a:t>
+              </a:r>
+              <a:r>
+                <a:rPr lang="en-CA" sz="1400" b="1" dirty="0" err="1">
+                  <a:solidFill>
+                    <a:schemeClr val="bg1"/>
+                  </a:solidFill>
+                  <a:latin typeface="Consolas" panose="020B0609020204030204" pitchFamily="49" charset="0"/>
+                </a:rPr>
+                <a:t>un_vecteur</a:t>
+              </a:r>
+              <a:r>
+                <a:rPr lang="en-CA" sz="1400" b="1" dirty="0">
+                  <a:solidFill>
+                    <a:schemeClr val="bg1"/>
+                  </a:solidFill>
+                  <a:latin typeface="Consolas" panose="020B0609020204030204" pitchFamily="49" charset="0"/>
+                </a:rPr>
+                <a:t> = </a:t>
+              </a:r>
+              <a:r>
+                <a:rPr lang="en-CA" sz="1400" b="1" dirty="0" err="1">
+                  <a:solidFill>
+                    <a:schemeClr val="bg1"/>
+                  </a:solidFill>
+                  <a:latin typeface="Consolas" panose="020B0609020204030204" pitchFamily="49" charset="0"/>
+                </a:rPr>
+                <a:t>Vecteur</a:t>
+              </a:r>
+              <a:r>
+                <a:rPr lang="en-CA" sz="1400" b="1" dirty="0">
+                  <a:solidFill>
+                    <a:schemeClr val="bg1"/>
+                  </a:solidFill>
+                  <a:latin typeface="Consolas" panose="020B0609020204030204" pitchFamily="49" charset="0"/>
+                </a:rPr>
+                <a:t>(1.0, 2.0)</a:t>
+              </a:r>
+            </a:p>
+            <a:p>
+              <a:r>
+                <a:rPr lang="en-CA" sz="1400" b="1" dirty="0">
+                  <a:solidFill>
+                    <a:schemeClr val="bg1"/>
+                  </a:solidFill>
+                  <a:latin typeface="Consolas" panose="020B0609020204030204" pitchFamily="49" charset="0"/>
+                </a:rPr>
+                <a:t>&gt;&gt;&gt; </a:t>
+              </a:r>
+              <a:r>
+                <a:rPr lang="en-CA" sz="1400" b="1" dirty="0" err="1">
+                  <a:solidFill>
+                    <a:schemeClr val="bg1"/>
+                  </a:solidFill>
+                  <a:latin typeface="Consolas" panose="020B0609020204030204" pitchFamily="49" charset="0"/>
+                </a:rPr>
+                <a:t>un_vecteur.calculer_norme</a:t>
+              </a:r>
+              <a:r>
+                <a:rPr lang="en-CA" sz="1400" b="1" dirty="0">
+                  <a:solidFill>
+                    <a:schemeClr val="bg1"/>
+                  </a:solidFill>
+                  <a:latin typeface="Consolas" panose="020B0609020204030204" pitchFamily="49" charset="0"/>
+                </a:rPr>
+                <a:t>()</a:t>
+              </a:r>
+            </a:p>
+            <a:p>
+              <a:r>
+                <a:rPr lang="en-CA" sz="1400" b="1" dirty="0">
+                  <a:solidFill>
+                    <a:schemeClr val="bg1"/>
+                  </a:solidFill>
+                  <a:latin typeface="Consolas" panose="020B0609020204030204" pitchFamily="49" charset="0"/>
+                </a:rPr>
+                <a:t>2.23606797749979</a:t>
+              </a:r>
+            </a:p>
+          </p:txBody>
+        </p:sp>
+      </p:grpSp>
+      <p:grpSp>
+        <p:nvGrpSpPr>
+          <p:cNvPr id="44" name="Group 43">
+            <a:extLst>
+              <a:ext uri="{FF2B5EF4-FFF2-40B4-BE49-F238E27FC236}">
+                <a16:creationId xmlns:a16="http://schemas.microsoft.com/office/drawing/2014/main" id="{3D1DA1BA-D77B-D6A7-7323-6F1D7B2DE8BC}"/>
+              </a:ext>
+            </a:extLst>
+          </p:cNvPr>
+          <p:cNvGrpSpPr/>
+          <p:nvPr/>
+        </p:nvGrpSpPr>
+        <p:grpSpPr>
+          <a:xfrm>
+            <a:off x="3636021" y="2787344"/>
+            <a:ext cx="2073003" cy="3494391"/>
+            <a:chOff x="3636021" y="2787344"/>
+            <a:chExt cx="2073003" cy="3494391"/>
+          </a:xfrm>
+        </p:grpSpPr>
+        <p:grpSp>
+          <p:nvGrpSpPr>
+            <p:cNvPr id="25" name="Group 24">
+              <a:extLst>
+                <a:ext uri="{FF2B5EF4-FFF2-40B4-BE49-F238E27FC236}">
+                  <a16:creationId xmlns:a16="http://schemas.microsoft.com/office/drawing/2014/main" id="{A3E48404-581F-4243-A6AE-3978238F01A3}"/>
+                </a:ext>
+              </a:extLst>
+            </p:cNvPr>
+            <p:cNvGrpSpPr/>
+            <p:nvPr/>
+          </p:nvGrpSpPr>
+          <p:grpSpPr>
+            <a:xfrm>
+              <a:off x="3636021" y="2787344"/>
+              <a:ext cx="2073003" cy="457813"/>
+              <a:chOff x="493738" y="5612639"/>
+              <a:chExt cx="2073003" cy="457813"/>
+            </a:xfrm>
+          </p:grpSpPr>
+          <p:sp>
+            <p:nvSpPr>
+              <p:cNvPr id="26" name="TextBox 25">
+                <a:extLst>
+                  <a:ext uri="{FF2B5EF4-FFF2-40B4-BE49-F238E27FC236}">
+                    <a16:creationId xmlns:a16="http://schemas.microsoft.com/office/drawing/2014/main" id="{E8B10E39-6565-6860-6139-DA262B4457D1}"/>
+                  </a:ext>
+                </a:extLst>
+              </p:cNvPr>
+              <p:cNvSpPr txBox="1"/>
+              <p:nvPr/>
+            </p:nvSpPr>
+            <p:spPr>
+              <a:xfrm>
+                <a:off x="493738" y="5612639"/>
+                <a:ext cx="2073003" cy="307777"/>
+              </a:xfrm>
+              <a:prstGeom prst="rect">
+                <a:avLst/>
+              </a:prstGeom>
+              <a:noFill/>
+            </p:spPr>
+            <p:txBody>
+              <a:bodyPr wrap="none" rtlCol="0">
+                <a:spAutoFit/>
+              </a:bodyPr>
+              <a:lstStyle/>
+              <a:p>
+                <a:r>
+                  <a:rPr lang="en-US" sz="1400" b="1" dirty="0">
+                    <a:latin typeface="Consolas" panose="020B0609020204030204" pitchFamily="49" charset="0"/>
+                  </a:rPr>
+                  <a:t>R</a:t>
+                </a:r>
+                <a:r>
+                  <a:rPr lang="fr-CA" sz="1400" b="1" dirty="0" err="1">
+                    <a:latin typeface="Consolas" panose="020B0609020204030204" pitchFamily="49" charset="0"/>
+                  </a:rPr>
+                  <a:t>éférence</a:t>
+                </a:r>
+                <a:r>
+                  <a:rPr lang="fr-CA" sz="1400" b="1" dirty="0">
+                    <a:latin typeface="Consolas" panose="020B0609020204030204" pitchFamily="49" charset="0"/>
+                  </a:rPr>
+                  <a:t> implicite</a:t>
+                </a:r>
+              </a:p>
+            </p:txBody>
+          </p:sp>
+          <p:cxnSp>
+            <p:nvCxnSpPr>
+              <p:cNvPr id="27" name="Straight Arrow Connector 26">
+                <a:extLst>
+                  <a:ext uri="{FF2B5EF4-FFF2-40B4-BE49-F238E27FC236}">
+                    <a16:creationId xmlns:a16="http://schemas.microsoft.com/office/drawing/2014/main" id="{4D46E769-B9C5-2056-D6A2-BBB9A1F4F214}"/>
+                  </a:ext>
+                </a:extLst>
+              </p:cNvPr>
+              <p:cNvCxnSpPr>
+                <a:cxnSpLocks/>
+              </p:cNvCxnSpPr>
+              <p:nvPr/>
+            </p:nvCxnSpPr>
+            <p:spPr>
+              <a:xfrm>
+                <a:off x="1430853" y="5890452"/>
+                <a:ext cx="0" cy="180000"/>
+              </a:xfrm>
+              <a:prstGeom prst="straightConnector1">
+                <a:avLst/>
+              </a:prstGeom>
+              <a:ln>
+                <a:tailEnd type="triangle"/>
+              </a:ln>
+            </p:spPr>
+            <p:style>
+              <a:lnRef idx="2">
+                <a:schemeClr val="dk1"/>
+              </a:lnRef>
+              <a:fillRef idx="0">
+                <a:schemeClr val="dk1"/>
+              </a:fillRef>
+              <a:effectRef idx="1">
+                <a:schemeClr val="dk1"/>
+              </a:effectRef>
+              <a:fontRef idx="minor">
+                <a:schemeClr val="tx1"/>
+              </a:fontRef>
+            </p:style>
+          </p:cxnSp>
+        </p:grpSp>
+        <p:cxnSp>
+          <p:nvCxnSpPr>
+            <p:cNvPr id="34" name="Connector: Elbow 33">
+              <a:extLst>
+                <a:ext uri="{FF2B5EF4-FFF2-40B4-BE49-F238E27FC236}">
+                  <a16:creationId xmlns:a16="http://schemas.microsoft.com/office/drawing/2014/main" id="{604B6C96-B30D-FD6A-1D7C-50FEC77CEABF}"/>
+                </a:ext>
+              </a:extLst>
+            </p:cNvPr>
+            <p:cNvCxnSpPr>
+              <a:cxnSpLocks/>
+              <a:stCxn id="26" idx="3"/>
+            </p:cNvCxnSpPr>
+            <p:nvPr/>
+          </p:nvCxnSpPr>
+          <p:spPr>
+            <a:xfrm flipH="1">
+              <a:off x="5429250" y="2941233"/>
+              <a:ext cx="279774" cy="3340502"/>
+            </a:xfrm>
+            <a:prstGeom prst="bentConnector4">
+              <a:avLst>
+                <a:gd name="adj1" fmla="val -81709"/>
+                <a:gd name="adj2" fmla="val 100063"/>
+              </a:avLst>
+            </a:prstGeom>
+            <a:ln>
+              <a:solidFill>
+                <a:srgbClr val="FF2500"/>
+              </a:solidFill>
+              <a:tailEnd type="triangle"/>
+            </a:ln>
+          </p:spPr>
+          <p:style>
+            <a:lnRef idx="2">
+              <a:schemeClr val="accent1"/>
+            </a:lnRef>
+            <a:fillRef idx="0">
+              <a:schemeClr val="accent1"/>
+            </a:fillRef>
+            <a:effectRef idx="1">
+              <a:schemeClr val="accent1"/>
+            </a:effectRef>
+            <a:fontRef idx="minor">
+              <a:schemeClr val="tx1"/>
+            </a:fontRef>
+          </p:style>
+        </p:cxnSp>
+      </p:grpSp>
+    </p:spTree>
+    <p:extLst>
+      <p:ext uri="{BB962C8B-B14F-4D97-AF65-F5344CB8AC3E}">
+        <p14:creationId xmlns:p14="http://schemas.microsoft.com/office/powerpoint/2010/main" val="3666254884"/>
+      </p:ext>
+    </p:extLst>
+  </p:cSld>
+  <p:clrMapOvr>
+    <a:masterClrMapping/>
+  </p:clrMapOvr>
+  <p:timing>
+    <p:tnLst>
+      <p:par>
+        <p:cTn id="1" dur="indefinite" restart="never" nodeType="tmRoot">
+          <p:childTnLst>
+            <p:seq concurrent="1" nextAc="seek">
+              <p:cTn id="2" dur="indefinite" nodeType="mainSeq">
+                <p:childTnLst>
+                  <p:par>
+                    <p:cTn id="3" fill="hold">
+                      <p:stCondLst>
+                        <p:cond delay="indefinite"/>
+                      </p:stCondLst>
+                      <p:childTnLst>
+                        <p:par>
+                          <p:cTn id="4" fill="hold">
+                            <p:stCondLst>
+                              <p:cond delay="0"/>
+                            </p:stCondLst>
+                            <p:childTnLst>
+                              <p:par>
+                                <p:cTn id="5" presetID="10" presetClass="entr" presetSubtype="0" fill="hold" nodeType="clickEffect">
+                                  <p:stCondLst>
+                                    <p:cond delay="0"/>
+                                  </p:stCondLst>
+                                  <p:childTnLst>
+                                    <p:set>
+                                      <p:cBhvr>
+                                        <p:cTn id="6" dur="1" fill="hold">
+                                          <p:stCondLst>
+                                            <p:cond delay="0"/>
+                                          </p:stCondLst>
+                                        </p:cTn>
+                                        <p:tgtEl>
+                                          <p:spTgt spid="35"/>
+                                        </p:tgtEl>
+                                        <p:attrNameLst>
+                                          <p:attrName>style.visibility</p:attrName>
+                                        </p:attrNameLst>
+                                      </p:cBhvr>
+                                      <p:to>
+                                        <p:strVal val="visible"/>
+                                      </p:to>
+                                    </p:set>
+                                    <p:animEffect transition="in" filter="fade">
+                                      <p:cBhvr>
+                                        <p:cTn id="7" dur="500"/>
+                                        <p:tgtEl>
+                                          <p:spTgt spid="35"/>
+                                        </p:tgtEl>
+                                      </p:cBhvr>
+                                    </p:animEffect>
+                                  </p:childTnLst>
+                                </p:cTn>
+                              </p:par>
+                            </p:childTnLst>
+                          </p:cTn>
+                        </p:par>
+                      </p:childTnLst>
+                    </p:cTn>
+                  </p:par>
+                  <p:par>
+                    <p:cTn id="8" fill="hold">
+                      <p:stCondLst>
+                        <p:cond delay="indefinite"/>
+                      </p:stCondLst>
+                      <p:childTnLst>
+                        <p:par>
+                          <p:cTn id="9" fill="hold">
+                            <p:stCondLst>
+                              <p:cond delay="0"/>
+                            </p:stCondLst>
+                            <p:childTnLst>
+                              <p:par>
+                                <p:cTn id="10" presetID="10" presetClass="entr" presetSubtype="0" fill="hold" nodeType="clickEffect">
+                                  <p:stCondLst>
+                                    <p:cond delay="0"/>
+                                  </p:stCondLst>
+                                  <p:childTnLst>
+                                    <p:set>
+                                      <p:cBhvr>
+                                        <p:cTn id="11" dur="1" fill="hold">
+                                          <p:stCondLst>
+                                            <p:cond delay="0"/>
+                                          </p:stCondLst>
+                                        </p:cTn>
+                                        <p:tgtEl>
+                                          <p:spTgt spid="13"/>
+                                        </p:tgtEl>
+                                        <p:attrNameLst>
+                                          <p:attrName>style.visibility</p:attrName>
+                                        </p:attrNameLst>
+                                      </p:cBhvr>
+                                      <p:to>
+                                        <p:strVal val="visible"/>
+                                      </p:to>
+                                    </p:set>
+                                    <p:animEffect transition="in" filter="fade">
+                                      <p:cBhvr>
+                                        <p:cTn id="12" dur="500"/>
+                                        <p:tgtEl>
+                                          <p:spTgt spid="13"/>
+                                        </p:tgtEl>
+                                      </p:cBhvr>
+                                    </p:animEffect>
+                                  </p:childTnLst>
+                                </p:cTn>
+                              </p:par>
+                            </p:childTnLst>
+                          </p:cTn>
+                        </p:par>
+                      </p:childTnLst>
+                    </p:cTn>
+                  </p:par>
+                  <p:par>
+                    <p:cTn id="13" fill="hold">
+                      <p:stCondLst>
+                        <p:cond delay="indefinite"/>
+                      </p:stCondLst>
+                      <p:childTnLst>
+                        <p:par>
+                          <p:cTn id="14" fill="hold">
+                            <p:stCondLst>
+                              <p:cond delay="0"/>
+                            </p:stCondLst>
+                            <p:childTnLst>
+                              <p:par>
+                                <p:cTn id="15" presetID="10" presetClass="entr" presetSubtype="0" fill="hold" nodeType="clickEffect">
+                                  <p:stCondLst>
+                                    <p:cond delay="0"/>
+                                  </p:stCondLst>
+                                  <p:childTnLst>
+                                    <p:set>
+                                      <p:cBhvr>
+                                        <p:cTn id="16" dur="1" fill="hold">
+                                          <p:stCondLst>
+                                            <p:cond delay="0"/>
+                                          </p:stCondLst>
+                                        </p:cTn>
+                                        <p:tgtEl>
+                                          <p:spTgt spid="44"/>
+                                        </p:tgtEl>
+                                        <p:attrNameLst>
+                                          <p:attrName>style.visibility</p:attrName>
+                                        </p:attrNameLst>
+                                      </p:cBhvr>
+                                      <p:to>
+                                        <p:strVal val="visible"/>
+                                      </p:to>
+                                    </p:set>
+                                    <p:animEffect transition="in" filter="fade">
+                                      <p:cBhvr>
+                                        <p:cTn id="17" dur="500"/>
+                                        <p:tgtEl>
+                                          <p:spTgt spid="44"/>
+                                        </p:tgtEl>
+                                      </p:cBhvr>
+                                    </p:animEffect>
+                                  </p:childTnLst>
+                                </p:cTn>
+                              </p:par>
+                            </p:childTnLst>
+                          </p:cTn>
+                        </p:par>
+                      </p:childTnLst>
+                    </p:cTn>
+                  </p:par>
+                </p:childTnLst>
+              </p:cTn>
+              <p:prevCondLst>
+                <p:cond evt="onPrev" delay="0">
+                  <p:tgtEl>
+                    <p:sldTgt/>
+                  </p:tgtEl>
+                </p:cond>
+              </p:prevCondLst>
+              <p:nextCondLst>
+                <p:cond evt="onNext" delay="0">
+                  <p:tgtEl>
+                    <p:sldTgt/>
+                  </p:tgtEl>
+                </p:cond>
+              </p:nextCondLst>
+            </p:seq>
+          </p:childTnLst>
+        </p:cTn>
+      </p:par>
+    </p:tnLst>
+  </p:timing>
+</p:sld>
+</file>
+
+<file path=ppt/slides/slide11.xml><?xml version="1.0" encoding="utf-8"?>
+<p:sld xmlns:a="http://schemas.openxmlformats.org/drawingml/2006/main" xmlns:r="http://schemas.openxmlformats.org/officeDocument/2006/relationships" xmlns:p="http://schemas.openxmlformats.org/presentationml/2006/main">
+  <p:cSld>
     <p:bg>
       <p:bgPr>
         <a:solidFill>
@@ -4642,7 +6739,7 @@
 </p:sld>
 </file>
 
-<file path=ppt/slides/slide11.xml><?xml version="1.0" encoding="utf-8"?>
+<file path=ppt/slides/slide12.xml><?xml version="1.0" encoding="utf-8"?>
 <p:sld xmlns:a="http://schemas.openxmlformats.org/drawingml/2006/main" xmlns:r="http://schemas.openxmlformats.org/officeDocument/2006/relationships" xmlns:p="http://schemas.openxmlformats.org/presentationml/2006/main">
   <p:cSld>
     <p:bg>
@@ -5282,7 +7379,7 @@
           <a:p>
             <a:fld id="{846B06B1-1179-491F-A487-8E0C403F7C13}" type="slidenum">
               <a:rPr lang="fr-CA" smtClean="0"/>
-              <a:t>11</a:t>
+              <a:t>12</a:t>
             </a:fld>
             <a:endParaRPr lang="fr-CA"/>
           </a:p>
@@ -5783,7 +7880,7 @@
 </p:sld>
 </file>
 
-<file path=ppt/slides/slide12.xml><?xml version="1.0" encoding="utf-8"?>
+<file path=ppt/slides/slide13.xml><?xml version="1.0" encoding="utf-8"?>
 <p:sld xmlns:a="http://schemas.openxmlformats.org/drawingml/2006/main" xmlns:r="http://schemas.openxmlformats.org/officeDocument/2006/relationships" xmlns:p="http://schemas.openxmlformats.org/presentationml/2006/main">
   <p:cSld>
     <p:bg>
@@ -6273,7 +8370,7 @@
           <a:p>
             <a:fld id="{846B06B1-1179-491F-A487-8E0C403F7C13}" type="slidenum">
               <a:rPr lang="fr-CA" smtClean="0"/>
-              <a:t>12</a:t>
+              <a:t>13</a:t>
             </a:fld>
             <a:endParaRPr lang="fr-CA"/>
           </a:p>
@@ -6810,7 +8907,7 @@
 </p:sld>
 </file>
 
-<file path=ppt/slides/slide13.xml><?xml version="1.0" encoding="utf-8"?>
+<file path=ppt/slides/slide14.xml><?xml version="1.0" encoding="utf-8"?>
 <p:sld xmlns:a="http://schemas.openxmlformats.org/drawingml/2006/main" xmlns:r="http://schemas.openxmlformats.org/officeDocument/2006/relationships" xmlns:p="http://schemas.openxmlformats.org/presentationml/2006/main">
   <p:cSld>
     <p:bg>
@@ -7192,7 +9289,7 @@
           <a:p>
             <a:fld id="{846B06B1-1179-491F-A487-8E0C403F7C13}" type="slidenum">
               <a:rPr lang="fr-CA" smtClean="0"/>
-              <a:t>13</a:t>
+              <a:t>14</a:t>
             </a:fld>
             <a:endParaRPr lang="fr-CA"/>
           </a:p>
@@ -7571,7 +9668,7 @@
 </p:sld>
 </file>
 
-<file path=ppt/slides/slide14.xml><?xml version="1.0" encoding="utf-8"?>
+<file path=ppt/slides/slide15.xml><?xml version="1.0" encoding="utf-8"?>
 <p:sld xmlns:a="http://schemas.openxmlformats.org/drawingml/2006/main" xmlns:r="http://schemas.openxmlformats.org/officeDocument/2006/relationships" xmlns:p="http://schemas.openxmlformats.org/presentationml/2006/main">
   <p:cSld>
     <p:bg>
@@ -8038,7 +10135,7 @@
           <a:p>
             <a:fld id="{846B06B1-1179-491F-A487-8E0C403F7C13}" type="slidenum">
               <a:rPr lang="fr-CA" smtClean="0"/>
-              <a:t>14</a:t>
+              <a:t>15</a:t>
             </a:fld>
             <a:endParaRPr lang="fr-CA"/>
           </a:p>
@@ -8652,7 +10749,7 @@
 </p:sld>
 </file>
 
-<file path=ppt/slides/slide15.xml><?xml version="1.0" encoding="utf-8"?>
+<file path=ppt/slides/slide16.xml><?xml version="1.0" encoding="utf-8"?>
 <p:sld xmlns:a="http://schemas.openxmlformats.org/drawingml/2006/main" xmlns:r="http://schemas.openxmlformats.org/officeDocument/2006/relationships" xmlns:p="http://schemas.openxmlformats.org/presentationml/2006/main">
   <p:cSld>
     <p:bg>
@@ -9387,7 +11484,7 @@
           <a:p>
             <a:fld id="{846B06B1-1179-491F-A487-8E0C403F7C13}" type="slidenum">
               <a:rPr lang="fr-CA" smtClean="0"/>
-              <a:t>15</a:t>
+              <a:t>16</a:t>
             </a:fld>
             <a:endParaRPr lang="fr-CA"/>
           </a:p>
@@ -9406,7 +11503,7 @@
 </p:sld>
 </file>
 
-<file path=ppt/slides/slide16.xml><?xml version="1.0" encoding="utf-8"?>
+<file path=ppt/slides/slide17.xml><?xml version="1.0" encoding="utf-8"?>
 <p:sld xmlns:a="http://schemas.openxmlformats.org/drawingml/2006/main" xmlns:r="http://schemas.openxmlformats.org/officeDocument/2006/relationships" xmlns:p="http://schemas.openxmlformats.org/presentationml/2006/main">
   <p:cSld>
     <p:bg>
@@ -9514,7 +11611,7 @@
           <a:p>
             <a:fld id="{846B06B1-1179-491F-A487-8E0C403F7C13}" type="slidenum">
               <a:rPr lang="fr-CA" smtClean="0"/>
-              <a:t>16</a:t>
+              <a:t>17</a:t>
             </a:fld>
             <a:endParaRPr lang="fr-CA"/>
           </a:p>
@@ -10157,7 +12254,7 @@
 </p:sld>
 </file>
 
-<file path=ppt/slides/slide17.xml><?xml version="1.0" encoding="utf-8"?>
+<file path=ppt/slides/slide18.xml><?xml version="1.0" encoding="utf-8"?>
 <p:sld xmlns:a="http://schemas.openxmlformats.org/drawingml/2006/main" xmlns:r="http://schemas.openxmlformats.org/officeDocument/2006/relationships" xmlns:p="http://schemas.openxmlformats.org/presentationml/2006/main">
   <p:cSld>
     <p:bg>
@@ -10413,7 +12510,7 @@
           <a:p>
             <a:fld id="{846B06B1-1179-491F-A487-8E0C403F7C13}" type="slidenum">
               <a:rPr lang="fr-CA" smtClean="0"/>
-              <a:t>17</a:t>
+              <a:t>18</a:t>
             </a:fld>
             <a:endParaRPr lang="fr-CA"/>
           </a:p>
@@ -11438,7 +13535,7 @@
 </p:sld>
 </file>
 
-<file path=ppt/slides/slide18.xml><?xml version="1.0" encoding="utf-8"?>
+<file path=ppt/slides/slide19.xml><?xml version="1.0" encoding="utf-8"?>
 <p:sld xmlns:a="http://schemas.openxmlformats.org/drawingml/2006/main" xmlns:r="http://schemas.openxmlformats.org/officeDocument/2006/relationships" xmlns:p="http://schemas.openxmlformats.org/presentationml/2006/main">
   <p:cSld>
     <p:bg>
@@ -11705,7 +13802,7 @@
           <a:p>
             <a:fld id="{846B06B1-1179-491F-A487-8E0C403F7C13}" type="slidenum">
               <a:rPr lang="fr-CA" smtClean="0"/>
-              <a:t>18</a:t>
+              <a:t>19</a:t>
             </a:fld>
             <a:endParaRPr lang="fr-CA"/>
           </a:p>
@@ -12229,1116 +14326,6 @@
 </p:sld>
 </file>
 
-<file path=ppt/slides/slide19.xml><?xml version="1.0" encoding="utf-8"?>
-<p:sld xmlns:a="http://schemas.openxmlformats.org/drawingml/2006/main" xmlns:r="http://schemas.openxmlformats.org/officeDocument/2006/relationships" xmlns:p="http://schemas.openxmlformats.org/presentationml/2006/main">
-  <p:cSld>
-    <p:bg>
-      <p:bgPr>
-        <a:solidFill>
-          <a:srgbClr val="F5F5F5"/>
-        </a:solidFill>
-        <a:effectLst/>
-      </p:bgPr>
-    </p:bg>
-    <p:spTree>
-      <p:nvGrpSpPr>
-        <p:cNvPr id="1" name="">
-          <a:extLst>
-            <a:ext uri="{FF2B5EF4-FFF2-40B4-BE49-F238E27FC236}">
-              <a16:creationId xmlns:a16="http://schemas.microsoft.com/office/drawing/2014/main" id="{35DBBA77-3CE2-6FB2-95ED-27624606806B}"/>
-            </a:ext>
-          </a:extLst>
-        </p:cNvPr>
-        <p:cNvGrpSpPr/>
-        <p:nvPr/>
-      </p:nvGrpSpPr>
-      <p:grpSpPr>
-        <a:xfrm>
-          <a:off x="0" y="0"/>
-          <a:ext cx="0" cy="0"/>
-          <a:chOff x="0" y="0"/>
-          <a:chExt cx="0" cy="0"/>
-        </a:xfrm>
-      </p:grpSpPr>
-      <p:sp>
-        <p:nvSpPr>
-          <p:cNvPr id="11" name="Slide Number Placeholder 10">
-            <a:extLst>
-              <a:ext uri="{FF2B5EF4-FFF2-40B4-BE49-F238E27FC236}">
-                <a16:creationId xmlns:a16="http://schemas.microsoft.com/office/drawing/2014/main" id="{1F04EBB7-22C3-A3B8-1E54-F6FF4BA31BED}"/>
-              </a:ext>
-            </a:extLst>
-          </p:cNvPr>
-          <p:cNvSpPr>
-            <a:spLocks noGrp="1"/>
-          </p:cNvSpPr>
-          <p:nvPr>
-            <p:ph type="sldNum" sz="quarter" idx="12"/>
-          </p:nvPr>
-        </p:nvSpPr>
-        <p:spPr/>
-        <p:txBody>
-          <a:bodyPr/>
-          <a:lstStyle/>
-          <a:p>
-            <a:fld id="{846B06B1-1179-491F-A487-8E0C403F7C13}" type="slidenum">
-              <a:rPr lang="fr-CA" smtClean="0"/>
-              <a:t>19</a:t>
-            </a:fld>
-            <a:endParaRPr lang="fr-CA"/>
-          </a:p>
-        </p:txBody>
-      </p:sp>
-      <p:sp>
-        <p:nvSpPr>
-          <p:cNvPr id="5" name="TextBox 4">
-            <a:extLst>
-              <a:ext uri="{FF2B5EF4-FFF2-40B4-BE49-F238E27FC236}">
-                <a16:creationId xmlns:a16="http://schemas.microsoft.com/office/drawing/2014/main" id="{120E3981-812B-DC08-663F-09F47E822397}"/>
-              </a:ext>
-            </a:extLst>
-          </p:cNvPr>
-          <p:cNvSpPr txBox="1"/>
-          <p:nvPr/>
-        </p:nvSpPr>
-        <p:spPr>
-          <a:xfrm>
-            <a:off x="2698481" y="2716450"/>
-            <a:ext cx="6795040" cy="2585323"/>
-          </a:xfrm>
-          <a:prstGeom prst="rect">
-            <a:avLst/>
-          </a:prstGeom>
-          <a:solidFill>
-            <a:schemeClr val="bg1"/>
-          </a:solidFill>
-          <a:ln w="12700">
-            <a:solidFill>
-              <a:schemeClr val="tx1"/>
-            </a:solidFill>
-          </a:ln>
-        </p:spPr>
-        <p:txBody>
-          <a:bodyPr wrap="square">
-            <a:spAutoFit/>
-          </a:bodyPr>
-          <a:lstStyle/>
-          <a:p>
-            <a:pPr algn="l">
-              <a:buNone/>
-            </a:pPr>
-            <a:r>
-              <a:rPr lang="en-CA" b="1" i="0" dirty="0">
-                <a:solidFill>
-                  <a:srgbClr val="008800"/>
-                </a:solidFill>
-                <a:effectLst/>
-                <a:latin typeface="Consolas" panose="020B0609020204030204" pitchFamily="49" charset="0"/>
-              </a:rPr>
-              <a:t>def</a:t>
-            </a:r>
-            <a:r>
-              <a:rPr lang="en-CA" b="0" i="0" dirty="0">
-                <a:solidFill>
-                  <a:srgbClr val="BBBBBB"/>
-                </a:solidFill>
-                <a:effectLst/>
-                <a:latin typeface="Consolas" panose="020B0609020204030204" pitchFamily="49" charset="0"/>
-              </a:rPr>
-              <a:t> </a:t>
-            </a:r>
-            <a:r>
-              <a:rPr lang="en-CA" b="1" i="0" dirty="0" err="1">
-                <a:solidFill>
-                  <a:srgbClr val="0066BB"/>
-                </a:solidFill>
-                <a:effectLst/>
-                <a:latin typeface="Consolas" panose="020B0609020204030204" pitchFamily="49" charset="0"/>
-              </a:rPr>
-              <a:t>calculer_afficher_racines</a:t>
-            </a:r>
-            <a:r>
-              <a:rPr lang="en-CA" b="0" i="0" dirty="0">
-                <a:solidFill>
-                  <a:srgbClr val="333333"/>
-                </a:solidFill>
-                <a:effectLst/>
-                <a:latin typeface="Consolas" panose="020B0609020204030204" pitchFamily="49" charset="0"/>
-              </a:rPr>
-              <a:t>(a, b, c):</a:t>
-            </a:r>
-          </a:p>
-          <a:p>
-            <a:pPr algn="l">
-              <a:buNone/>
-            </a:pPr>
-            <a:endParaRPr lang="en-CA" b="0" i="0" dirty="0">
-              <a:solidFill>
-                <a:srgbClr val="333333"/>
-              </a:solidFill>
-              <a:effectLst/>
-              <a:latin typeface="Consolas" panose="020B0609020204030204" pitchFamily="49" charset="0"/>
-            </a:endParaRPr>
-          </a:p>
-          <a:p>
-            <a:pPr algn="l">
-              <a:buNone/>
-            </a:pPr>
-            <a:r>
-              <a:rPr lang="en-CA" b="0" i="0" dirty="0">
-                <a:solidFill>
-                  <a:srgbClr val="333333"/>
-                </a:solidFill>
-                <a:effectLst/>
-                <a:latin typeface="Consolas" panose="020B0609020204030204" pitchFamily="49" charset="0"/>
-              </a:rPr>
-              <a:t>  </a:t>
-            </a:r>
-            <a:r>
-              <a:rPr lang="en-CA" b="0" i="0" dirty="0">
-                <a:solidFill>
-                  <a:srgbClr val="888888"/>
-                </a:solidFill>
-                <a:effectLst/>
-                <a:latin typeface="Consolas" panose="020B0609020204030204" pitchFamily="49" charset="0"/>
-              </a:rPr>
-              <a:t># </a:t>
-            </a:r>
-            <a:r>
-              <a:rPr lang="en-CA" b="0" i="0" dirty="0" err="1">
-                <a:solidFill>
-                  <a:srgbClr val="888888"/>
-                </a:solidFill>
-                <a:effectLst/>
-                <a:latin typeface="Consolas" panose="020B0609020204030204" pitchFamily="49" charset="0"/>
-              </a:rPr>
-              <a:t>Calcul</a:t>
-            </a:r>
-            <a:r>
-              <a:rPr lang="en-CA" b="0" i="0" dirty="0">
-                <a:solidFill>
-                  <a:srgbClr val="888888"/>
-                </a:solidFill>
-                <a:effectLst/>
-                <a:latin typeface="Consolas" panose="020B0609020204030204" pitchFamily="49" charset="0"/>
-              </a:rPr>
-              <a:t> des </a:t>
-            </a:r>
-            <a:r>
-              <a:rPr lang="en-CA" b="0" i="0" dirty="0" err="1">
-                <a:solidFill>
-                  <a:srgbClr val="888888"/>
-                </a:solidFill>
-                <a:effectLst/>
-                <a:latin typeface="Consolas" panose="020B0609020204030204" pitchFamily="49" charset="0"/>
-              </a:rPr>
-              <a:t>racines</a:t>
-            </a:r>
-            <a:endParaRPr lang="en-CA" b="0" i="0" dirty="0">
-              <a:solidFill>
-                <a:srgbClr val="333333"/>
-              </a:solidFill>
-              <a:effectLst/>
-              <a:latin typeface="Consolas" panose="020B0609020204030204" pitchFamily="49" charset="0"/>
-            </a:endParaRPr>
-          </a:p>
-          <a:p>
-            <a:pPr algn="l">
-              <a:buNone/>
-            </a:pPr>
-            <a:r>
-              <a:rPr lang="en-CA" b="0" i="0" dirty="0">
-                <a:solidFill>
-                  <a:srgbClr val="333333"/>
-                </a:solidFill>
-                <a:effectLst/>
-                <a:latin typeface="Consolas" panose="020B0609020204030204" pitchFamily="49" charset="0"/>
-              </a:rPr>
-              <a:t>  </a:t>
-            </a:r>
-            <a:r>
-              <a:rPr lang="en-CA" b="0" i="0" dirty="0" err="1">
-                <a:solidFill>
-                  <a:srgbClr val="333333"/>
-                </a:solidFill>
-                <a:effectLst/>
-                <a:latin typeface="Consolas" panose="020B0609020204030204" pitchFamily="49" charset="0"/>
-              </a:rPr>
-              <a:t>racine_discriminant</a:t>
-            </a:r>
-            <a:r>
-              <a:rPr lang="en-CA" b="0" i="0" dirty="0">
-                <a:solidFill>
-                  <a:srgbClr val="333333"/>
-                </a:solidFill>
-                <a:effectLst/>
-                <a:latin typeface="Consolas" panose="020B0609020204030204" pitchFamily="49" charset="0"/>
-              </a:rPr>
-              <a:t> = (b ** </a:t>
-            </a:r>
-            <a:r>
-              <a:rPr lang="en-CA" b="1" i="0" dirty="0">
-                <a:solidFill>
-                  <a:srgbClr val="0000DD"/>
-                </a:solidFill>
-                <a:effectLst/>
-                <a:latin typeface="Consolas" panose="020B0609020204030204" pitchFamily="49" charset="0"/>
-              </a:rPr>
-              <a:t>2</a:t>
-            </a:r>
-            <a:r>
-              <a:rPr lang="en-CA" b="0" i="0" dirty="0">
-                <a:solidFill>
-                  <a:srgbClr val="333333"/>
-                </a:solidFill>
-                <a:effectLst/>
-                <a:latin typeface="Consolas" panose="020B0609020204030204" pitchFamily="49" charset="0"/>
-              </a:rPr>
-              <a:t> - </a:t>
-            </a:r>
-            <a:r>
-              <a:rPr lang="en-CA" b="1" i="0" dirty="0">
-                <a:solidFill>
-                  <a:srgbClr val="0000DD"/>
-                </a:solidFill>
-                <a:effectLst/>
-                <a:latin typeface="Consolas" panose="020B0609020204030204" pitchFamily="49" charset="0"/>
-              </a:rPr>
-              <a:t>4</a:t>
-            </a:r>
-            <a:r>
-              <a:rPr lang="en-CA" b="0" i="0" dirty="0">
-                <a:solidFill>
-                  <a:srgbClr val="333333"/>
-                </a:solidFill>
-                <a:effectLst/>
-                <a:latin typeface="Consolas" panose="020B0609020204030204" pitchFamily="49" charset="0"/>
-              </a:rPr>
-              <a:t> * a * c) ** </a:t>
-            </a:r>
-            <a:r>
-              <a:rPr lang="en-CA" b="1" i="0" dirty="0">
-                <a:solidFill>
-                  <a:srgbClr val="6600EE"/>
-                </a:solidFill>
-                <a:effectLst/>
-                <a:latin typeface="Consolas" panose="020B0609020204030204" pitchFamily="49" charset="0"/>
-              </a:rPr>
-              <a:t>0.5</a:t>
-            </a:r>
-            <a:endParaRPr lang="en-CA" b="0" i="0" dirty="0">
-              <a:solidFill>
-                <a:srgbClr val="333333"/>
-              </a:solidFill>
-              <a:effectLst/>
-              <a:latin typeface="Consolas" panose="020B0609020204030204" pitchFamily="49" charset="0"/>
-            </a:endParaRPr>
-          </a:p>
-          <a:p>
-            <a:r>
-              <a:rPr lang="en-CA" b="0" i="0" dirty="0">
-                <a:solidFill>
-                  <a:srgbClr val="333333"/>
-                </a:solidFill>
-                <a:effectLst/>
-                <a:latin typeface="Consolas" panose="020B0609020204030204" pitchFamily="49" charset="0"/>
-              </a:rPr>
-              <a:t>  racine_1 = (-b </a:t>
-            </a:r>
-            <a:r>
-              <a:rPr lang="en-CA" dirty="0">
-                <a:solidFill>
-                  <a:srgbClr val="333333"/>
-                </a:solidFill>
-                <a:latin typeface="Consolas" panose="020B0609020204030204" pitchFamily="49" charset="0"/>
-              </a:rPr>
-              <a:t>- </a:t>
-            </a:r>
-            <a:r>
-              <a:rPr lang="en-CA" dirty="0" err="1">
-                <a:solidFill>
-                  <a:srgbClr val="333333"/>
-                </a:solidFill>
-                <a:latin typeface="Consolas" panose="020B0609020204030204" pitchFamily="49" charset="0"/>
-              </a:rPr>
-              <a:t>racine_discriminant</a:t>
-            </a:r>
-            <a:r>
-              <a:rPr lang="en-CA" dirty="0">
-                <a:solidFill>
-                  <a:srgbClr val="333333"/>
-                </a:solidFill>
-                <a:latin typeface="Consolas" panose="020B0609020204030204" pitchFamily="49" charset="0"/>
-              </a:rPr>
-              <a:t>) </a:t>
-            </a:r>
-            <a:r>
-              <a:rPr lang="en-CA" b="0" i="0" dirty="0">
-                <a:solidFill>
-                  <a:srgbClr val="333333"/>
-                </a:solidFill>
-                <a:effectLst/>
-                <a:latin typeface="Consolas" panose="020B0609020204030204" pitchFamily="49" charset="0"/>
-              </a:rPr>
-              <a:t>/ (</a:t>
-            </a:r>
-            <a:r>
-              <a:rPr lang="en-CA" b="1" i="0" dirty="0">
-                <a:solidFill>
-                  <a:srgbClr val="0000DD"/>
-                </a:solidFill>
-                <a:effectLst/>
-                <a:latin typeface="Consolas" panose="020B0609020204030204" pitchFamily="49" charset="0"/>
-              </a:rPr>
-              <a:t>2</a:t>
-            </a:r>
-            <a:r>
-              <a:rPr lang="en-CA" b="0" i="0" dirty="0">
-                <a:solidFill>
-                  <a:srgbClr val="333333"/>
-                </a:solidFill>
-                <a:effectLst/>
-                <a:latin typeface="Consolas" panose="020B0609020204030204" pitchFamily="49" charset="0"/>
-              </a:rPr>
-              <a:t> * a)</a:t>
-            </a:r>
-          </a:p>
-          <a:p>
-            <a:r>
-              <a:rPr lang="en-CA" b="0" i="0" dirty="0">
-                <a:solidFill>
-                  <a:srgbClr val="333333"/>
-                </a:solidFill>
-                <a:effectLst/>
-                <a:latin typeface="Consolas" panose="020B0609020204030204" pitchFamily="49" charset="0"/>
-              </a:rPr>
-              <a:t>  racine_2 = (-b </a:t>
-            </a:r>
-            <a:r>
-              <a:rPr lang="en-CA" dirty="0">
-                <a:solidFill>
-                  <a:srgbClr val="333333"/>
-                </a:solidFill>
-                <a:latin typeface="Consolas" panose="020B0609020204030204" pitchFamily="49" charset="0"/>
-              </a:rPr>
-              <a:t>+ </a:t>
-            </a:r>
-            <a:r>
-              <a:rPr lang="en-CA" dirty="0" err="1">
-                <a:solidFill>
-                  <a:srgbClr val="333333"/>
-                </a:solidFill>
-                <a:latin typeface="Consolas" panose="020B0609020204030204" pitchFamily="49" charset="0"/>
-              </a:rPr>
-              <a:t>racine_discriminant</a:t>
-            </a:r>
-            <a:r>
-              <a:rPr lang="en-CA" b="0" i="0" dirty="0">
-                <a:solidFill>
-                  <a:srgbClr val="333333"/>
-                </a:solidFill>
-                <a:effectLst/>
-                <a:latin typeface="Consolas" panose="020B0609020204030204" pitchFamily="49" charset="0"/>
-              </a:rPr>
-              <a:t>) / (</a:t>
-            </a:r>
-            <a:r>
-              <a:rPr lang="en-CA" b="1" i="0" dirty="0">
-                <a:solidFill>
-                  <a:srgbClr val="0000DD"/>
-                </a:solidFill>
-                <a:effectLst/>
-                <a:latin typeface="Consolas" panose="020B0609020204030204" pitchFamily="49" charset="0"/>
-              </a:rPr>
-              <a:t>2</a:t>
-            </a:r>
-            <a:r>
-              <a:rPr lang="en-CA" b="0" i="0" dirty="0">
-                <a:solidFill>
-                  <a:srgbClr val="333333"/>
-                </a:solidFill>
-                <a:effectLst/>
-                <a:latin typeface="Consolas" panose="020B0609020204030204" pitchFamily="49" charset="0"/>
-              </a:rPr>
-              <a:t> * a)</a:t>
-            </a:r>
-          </a:p>
-          <a:p>
-            <a:pPr algn="l">
-              <a:buNone/>
-            </a:pPr>
-            <a:endParaRPr lang="en-CA" b="0" i="0" dirty="0">
-              <a:solidFill>
-                <a:srgbClr val="333333"/>
-              </a:solidFill>
-              <a:effectLst/>
-              <a:latin typeface="Consolas" panose="020B0609020204030204" pitchFamily="49" charset="0"/>
-            </a:endParaRPr>
-          </a:p>
-          <a:p>
-            <a:pPr algn="l">
-              <a:buNone/>
-            </a:pPr>
-            <a:r>
-              <a:rPr lang="en-CA" b="0" i="0" dirty="0">
-                <a:solidFill>
-                  <a:srgbClr val="333333"/>
-                </a:solidFill>
-                <a:effectLst/>
-                <a:latin typeface="Consolas" panose="020B0609020204030204" pitchFamily="49" charset="0"/>
-              </a:rPr>
-              <a:t>  </a:t>
-            </a:r>
-            <a:r>
-              <a:rPr lang="en-CA" b="0" i="0" dirty="0">
-                <a:solidFill>
-                  <a:srgbClr val="888888"/>
-                </a:solidFill>
-                <a:effectLst/>
-                <a:latin typeface="Consolas" panose="020B0609020204030204" pitchFamily="49" charset="0"/>
-              </a:rPr>
-              <a:t># </a:t>
-            </a:r>
-            <a:r>
-              <a:rPr lang="en-CA" b="0" i="0" dirty="0" err="1">
-                <a:solidFill>
-                  <a:srgbClr val="888888"/>
-                </a:solidFill>
-                <a:effectLst/>
-                <a:latin typeface="Consolas" panose="020B0609020204030204" pitchFamily="49" charset="0"/>
-              </a:rPr>
-              <a:t>Affichage</a:t>
-            </a:r>
-            <a:endParaRPr lang="en-CA" b="0" i="0" dirty="0">
-              <a:solidFill>
-                <a:srgbClr val="333333"/>
-              </a:solidFill>
-              <a:effectLst/>
-              <a:latin typeface="Consolas" panose="020B0609020204030204" pitchFamily="49" charset="0"/>
-            </a:endParaRPr>
-          </a:p>
-          <a:p>
-            <a:pPr algn="l">
-              <a:buNone/>
-            </a:pPr>
-            <a:r>
-              <a:rPr lang="en-CA" b="0" i="0" dirty="0">
-                <a:solidFill>
-                  <a:srgbClr val="333333"/>
-                </a:solidFill>
-                <a:effectLst/>
-                <a:latin typeface="Consolas" panose="020B0609020204030204" pitchFamily="49" charset="0"/>
-              </a:rPr>
-              <a:t>  </a:t>
-            </a:r>
-            <a:r>
-              <a:rPr lang="en-CA" b="0" i="0" dirty="0">
-                <a:solidFill>
-                  <a:srgbClr val="007020"/>
-                </a:solidFill>
-                <a:effectLst/>
-                <a:latin typeface="Consolas" panose="020B0609020204030204" pitchFamily="49" charset="0"/>
-              </a:rPr>
-              <a:t>print</a:t>
-            </a:r>
-            <a:r>
-              <a:rPr lang="en-CA" b="0" i="0" dirty="0">
-                <a:solidFill>
-                  <a:srgbClr val="333333"/>
-                </a:solidFill>
-                <a:effectLst/>
-                <a:latin typeface="Consolas" panose="020B0609020204030204" pitchFamily="49" charset="0"/>
-              </a:rPr>
-              <a:t>('r1 = ', racine_1, 'r2 = ', racine_2)</a:t>
-            </a:r>
-          </a:p>
-        </p:txBody>
-      </p:sp>
-      <p:sp>
-        <p:nvSpPr>
-          <p:cNvPr id="9" name="TextBox 8">
-            <a:extLst>
-              <a:ext uri="{FF2B5EF4-FFF2-40B4-BE49-F238E27FC236}">
-                <a16:creationId xmlns:a16="http://schemas.microsoft.com/office/drawing/2014/main" id="{4AD4AE26-52B6-3BA1-237D-3BB53236247D}"/>
-              </a:ext>
-            </a:extLst>
-          </p:cNvPr>
-          <p:cNvSpPr txBox="1"/>
-          <p:nvPr/>
-        </p:nvSpPr>
-        <p:spPr>
-          <a:xfrm>
-            <a:off x="2698481" y="956062"/>
-            <a:ext cx="6795040" cy="1200329"/>
-          </a:xfrm>
-          <a:prstGeom prst="rect">
-            <a:avLst/>
-          </a:prstGeom>
-          <a:solidFill>
-            <a:schemeClr val="bg1"/>
-          </a:solidFill>
-          <a:ln w="12700">
-            <a:solidFill>
-              <a:schemeClr val="tx1"/>
-            </a:solidFill>
-          </a:ln>
-        </p:spPr>
-        <p:txBody>
-          <a:bodyPr wrap="square">
-            <a:spAutoFit/>
-          </a:bodyPr>
-          <a:lstStyle/>
-          <a:p>
-            <a:pPr algn="l">
-              <a:buNone/>
-            </a:pPr>
-            <a:r>
-              <a:rPr lang="en-CA" b="1" i="0" dirty="0">
-                <a:solidFill>
-                  <a:srgbClr val="008800"/>
-                </a:solidFill>
-                <a:effectLst/>
-                <a:latin typeface="Consolas" panose="020B0609020204030204" pitchFamily="49" charset="0"/>
-              </a:rPr>
-              <a:t>def</a:t>
-            </a:r>
-            <a:r>
-              <a:rPr lang="en-CA" b="0" i="0" dirty="0">
-                <a:solidFill>
-                  <a:srgbClr val="BBBBBB"/>
-                </a:solidFill>
-                <a:effectLst/>
-                <a:latin typeface="Consolas" panose="020B0609020204030204" pitchFamily="49" charset="0"/>
-              </a:rPr>
-              <a:t> </a:t>
-            </a:r>
-            <a:r>
-              <a:rPr lang="en-CA" b="1" i="0" dirty="0" err="1">
-                <a:solidFill>
-                  <a:srgbClr val="0066BB"/>
-                </a:solidFill>
-                <a:effectLst/>
-                <a:latin typeface="Consolas" panose="020B0609020204030204" pitchFamily="49" charset="0"/>
-              </a:rPr>
-              <a:t>rac</a:t>
-            </a:r>
-            <a:r>
-              <a:rPr lang="en-CA" b="0" i="0" dirty="0">
-                <a:solidFill>
-                  <a:srgbClr val="333333"/>
-                </a:solidFill>
-                <a:effectLst/>
-                <a:latin typeface="Consolas" panose="020B0609020204030204" pitchFamily="49" charset="0"/>
-              </a:rPr>
-              <a:t>(</a:t>
-            </a:r>
-            <a:r>
-              <a:rPr lang="en-CA" b="0" i="0" dirty="0" err="1">
-                <a:solidFill>
-                  <a:srgbClr val="333333"/>
-                </a:solidFill>
-                <a:effectLst/>
-                <a:latin typeface="Consolas" panose="020B0609020204030204" pitchFamily="49" charset="0"/>
-              </a:rPr>
-              <a:t>a,b,c</a:t>
-            </a:r>
-            <a:r>
-              <a:rPr lang="en-CA" b="0" i="0" dirty="0">
-                <a:solidFill>
-                  <a:srgbClr val="333333"/>
-                </a:solidFill>
-                <a:effectLst/>
-                <a:latin typeface="Consolas" panose="020B0609020204030204" pitchFamily="49" charset="0"/>
-              </a:rPr>
-              <a:t>):</a:t>
-            </a:r>
-          </a:p>
-          <a:p>
-            <a:pPr algn="l">
-              <a:buNone/>
-            </a:pPr>
-            <a:r>
-              <a:rPr lang="en-CA" b="0" i="0" dirty="0">
-                <a:solidFill>
-                  <a:srgbClr val="333333"/>
-                </a:solidFill>
-                <a:effectLst/>
-                <a:latin typeface="Consolas" panose="020B0609020204030204" pitchFamily="49" charset="0"/>
-              </a:rPr>
-              <a:t>  x = (-a2-(a2**</a:t>
-            </a:r>
-            <a:r>
-              <a:rPr lang="en-CA" b="1" i="0" dirty="0">
-                <a:solidFill>
-                  <a:srgbClr val="0000DD"/>
-                </a:solidFill>
-                <a:effectLst/>
-                <a:latin typeface="Consolas" panose="020B0609020204030204" pitchFamily="49" charset="0"/>
-              </a:rPr>
-              <a:t>2</a:t>
-            </a:r>
-            <a:r>
-              <a:rPr lang="en-CA" b="0" i="0" dirty="0">
-                <a:solidFill>
-                  <a:srgbClr val="333333"/>
-                </a:solidFill>
-                <a:effectLst/>
-                <a:latin typeface="Consolas" panose="020B0609020204030204" pitchFamily="49" charset="0"/>
-              </a:rPr>
-              <a:t>-</a:t>
-            </a:r>
-            <a:r>
-              <a:rPr lang="en-CA" b="1" i="0" dirty="0">
-                <a:solidFill>
-                  <a:srgbClr val="0000DD"/>
-                </a:solidFill>
-                <a:effectLst/>
-                <a:latin typeface="Consolas" panose="020B0609020204030204" pitchFamily="49" charset="0"/>
-              </a:rPr>
-              <a:t>4</a:t>
-            </a:r>
-            <a:r>
-              <a:rPr lang="en-CA" b="0" i="0" dirty="0">
-                <a:solidFill>
-                  <a:srgbClr val="333333"/>
-                </a:solidFill>
-                <a:effectLst/>
-                <a:latin typeface="Consolas" panose="020B0609020204030204" pitchFamily="49" charset="0"/>
-              </a:rPr>
-              <a:t>*a1*a3)**</a:t>
-            </a:r>
-            <a:r>
-              <a:rPr lang="en-CA" b="1" i="0" dirty="0">
-                <a:solidFill>
-                  <a:srgbClr val="6600EE"/>
-                </a:solidFill>
-                <a:effectLst/>
-                <a:latin typeface="Consolas" panose="020B0609020204030204" pitchFamily="49" charset="0"/>
-              </a:rPr>
-              <a:t>0.5</a:t>
-            </a:r>
-            <a:r>
-              <a:rPr lang="en-CA" b="0" i="0" dirty="0">
-                <a:solidFill>
-                  <a:srgbClr val="333333"/>
-                </a:solidFill>
-                <a:effectLst/>
-                <a:latin typeface="Consolas" panose="020B0609020204030204" pitchFamily="49" charset="0"/>
-              </a:rPr>
-              <a:t>)/(</a:t>
-            </a:r>
-            <a:r>
-              <a:rPr lang="en-CA" b="1" i="0" dirty="0">
-                <a:solidFill>
-                  <a:srgbClr val="0000DD"/>
-                </a:solidFill>
-                <a:effectLst/>
-                <a:latin typeface="Consolas" panose="020B0609020204030204" pitchFamily="49" charset="0"/>
-              </a:rPr>
-              <a:t>2</a:t>
-            </a:r>
-            <a:r>
-              <a:rPr lang="en-CA" b="0" i="0" dirty="0">
-                <a:solidFill>
-                  <a:srgbClr val="333333"/>
-                </a:solidFill>
-                <a:effectLst/>
-                <a:latin typeface="Consolas" panose="020B0609020204030204" pitchFamily="49" charset="0"/>
-              </a:rPr>
-              <a:t>*a1)</a:t>
-            </a:r>
-          </a:p>
-          <a:p>
-            <a:pPr algn="l">
-              <a:buNone/>
-            </a:pPr>
-            <a:r>
-              <a:rPr lang="en-CA" b="0" i="0" dirty="0">
-                <a:solidFill>
-                  <a:srgbClr val="333333"/>
-                </a:solidFill>
-                <a:effectLst/>
-                <a:latin typeface="Consolas" panose="020B0609020204030204" pitchFamily="49" charset="0"/>
-              </a:rPr>
-              <a:t>  y = (-a2+(a2**</a:t>
-            </a:r>
-            <a:r>
-              <a:rPr lang="en-CA" b="1" i="0" dirty="0">
-                <a:solidFill>
-                  <a:srgbClr val="0000DD"/>
-                </a:solidFill>
-                <a:effectLst/>
-                <a:latin typeface="Consolas" panose="020B0609020204030204" pitchFamily="49" charset="0"/>
-              </a:rPr>
-              <a:t>2</a:t>
-            </a:r>
-            <a:r>
-              <a:rPr lang="en-CA" b="0" i="0" dirty="0">
-                <a:solidFill>
-                  <a:srgbClr val="333333"/>
-                </a:solidFill>
-                <a:effectLst/>
-                <a:latin typeface="Consolas" panose="020B0609020204030204" pitchFamily="49" charset="0"/>
-              </a:rPr>
-              <a:t>-</a:t>
-            </a:r>
-            <a:r>
-              <a:rPr lang="en-CA" b="1" i="0" dirty="0">
-                <a:solidFill>
-                  <a:srgbClr val="0000DD"/>
-                </a:solidFill>
-                <a:effectLst/>
-                <a:latin typeface="Consolas" panose="020B0609020204030204" pitchFamily="49" charset="0"/>
-              </a:rPr>
-              <a:t>4</a:t>
-            </a:r>
-            <a:r>
-              <a:rPr lang="en-CA" b="0" i="0" dirty="0">
-                <a:solidFill>
-                  <a:srgbClr val="333333"/>
-                </a:solidFill>
-                <a:effectLst/>
-                <a:latin typeface="Consolas" panose="020B0609020204030204" pitchFamily="49" charset="0"/>
-              </a:rPr>
-              <a:t>*a2*a3)**</a:t>
-            </a:r>
-            <a:r>
-              <a:rPr lang="en-CA" b="1" i="0" dirty="0">
-                <a:solidFill>
-                  <a:srgbClr val="6600EE"/>
-                </a:solidFill>
-                <a:effectLst/>
-                <a:latin typeface="Consolas" panose="020B0609020204030204" pitchFamily="49" charset="0"/>
-              </a:rPr>
-              <a:t>0.5</a:t>
-            </a:r>
-            <a:r>
-              <a:rPr lang="en-CA" b="0" i="0" dirty="0">
-                <a:solidFill>
-                  <a:srgbClr val="333333"/>
-                </a:solidFill>
-                <a:effectLst/>
-                <a:latin typeface="Consolas" panose="020B0609020204030204" pitchFamily="49" charset="0"/>
-              </a:rPr>
-              <a:t>)/(</a:t>
-            </a:r>
-            <a:r>
-              <a:rPr lang="en-CA" b="1" i="0" dirty="0">
-                <a:solidFill>
-                  <a:srgbClr val="0000DD"/>
-                </a:solidFill>
-                <a:effectLst/>
-                <a:latin typeface="Consolas" panose="020B0609020204030204" pitchFamily="49" charset="0"/>
-              </a:rPr>
-              <a:t>2</a:t>
-            </a:r>
-            <a:r>
-              <a:rPr lang="en-CA" b="0" i="0" dirty="0">
-                <a:solidFill>
-                  <a:srgbClr val="333333"/>
-                </a:solidFill>
-                <a:effectLst/>
-                <a:latin typeface="Consolas" panose="020B0609020204030204" pitchFamily="49" charset="0"/>
-              </a:rPr>
-              <a:t>*a1)</a:t>
-            </a:r>
-          </a:p>
-          <a:p>
-            <a:pPr algn="l">
-              <a:buNone/>
-            </a:pPr>
-            <a:r>
-              <a:rPr lang="en-CA" b="0" i="0" dirty="0">
-                <a:solidFill>
-                  <a:srgbClr val="333333"/>
-                </a:solidFill>
-                <a:effectLst/>
-                <a:latin typeface="Consolas" panose="020B0609020204030204" pitchFamily="49" charset="0"/>
-              </a:rPr>
-              <a:t>  </a:t>
-            </a:r>
-            <a:r>
-              <a:rPr lang="en-CA" b="0" i="0" dirty="0">
-                <a:solidFill>
-                  <a:srgbClr val="007020"/>
-                </a:solidFill>
-                <a:effectLst/>
-                <a:latin typeface="Consolas" panose="020B0609020204030204" pitchFamily="49" charset="0"/>
-              </a:rPr>
-              <a:t>print</a:t>
-            </a:r>
-            <a:r>
-              <a:rPr lang="en-CA" b="0" i="0" dirty="0">
-                <a:solidFill>
-                  <a:srgbClr val="333333"/>
-                </a:solidFill>
-                <a:effectLst/>
-                <a:latin typeface="Consolas" panose="020B0609020204030204" pitchFamily="49" charset="0"/>
-              </a:rPr>
-              <a:t>(</a:t>
-            </a:r>
-            <a:r>
-              <a:rPr lang="en-CA" b="0" i="0" dirty="0" err="1">
-                <a:solidFill>
-                  <a:srgbClr val="333333"/>
-                </a:solidFill>
-                <a:effectLst/>
-                <a:latin typeface="Consolas" panose="020B0609020204030204" pitchFamily="49" charset="0"/>
-              </a:rPr>
-              <a:t>x,y</a:t>
-            </a:r>
-            <a:r>
-              <a:rPr lang="en-CA" b="0" i="0" dirty="0">
-                <a:solidFill>
-                  <a:srgbClr val="333333"/>
-                </a:solidFill>
-                <a:effectLst/>
-                <a:latin typeface="Consolas" panose="020B0609020204030204" pitchFamily="49" charset="0"/>
-              </a:rPr>
-              <a:t>)</a:t>
-            </a:r>
-          </a:p>
-        </p:txBody>
-      </p:sp>
-      <p:sp>
-        <p:nvSpPr>
-          <p:cNvPr id="10" name="TextBox 9">
-            <a:extLst>
-              <a:ext uri="{FF2B5EF4-FFF2-40B4-BE49-F238E27FC236}">
-                <a16:creationId xmlns:a16="http://schemas.microsoft.com/office/drawing/2014/main" id="{C113C40B-48F3-FE64-0458-4669C7230B81}"/>
-              </a:ext>
-            </a:extLst>
-          </p:cNvPr>
-          <p:cNvSpPr txBox="1"/>
-          <p:nvPr/>
-        </p:nvSpPr>
-        <p:spPr>
-          <a:xfrm>
-            <a:off x="838200" y="5968665"/>
-            <a:ext cx="10515599" cy="704360"/>
-          </a:xfrm>
-          <a:prstGeom prst="rect">
-            <a:avLst/>
-          </a:prstGeom>
-          <a:noFill/>
-        </p:spPr>
-        <p:txBody>
-          <a:bodyPr wrap="square">
-            <a:spAutoFit/>
-          </a:bodyPr>
-          <a:lstStyle/>
-          <a:p>
-            <a:pPr algn="ctr">
-              <a:lnSpc>
-                <a:spcPct val="114000"/>
-              </a:lnSpc>
-            </a:pPr>
-            <a:r>
-              <a:rPr lang="fr-CA" sz="1800" b="1" dirty="0">
-                <a:latin typeface="Consolas" panose="020B0609020204030204" pitchFamily="49" charset="0"/>
-              </a:rPr>
-              <a:t>Ce n'est que le début ...</a:t>
-            </a:r>
-            <a:br>
-              <a:rPr lang="fr-CA" sz="1800" b="1" dirty="0">
-                <a:latin typeface="Consolas" panose="020B0609020204030204" pitchFamily="49" charset="0"/>
-              </a:rPr>
-            </a:br>
-            <a:r>
-              <a:rPr lang="fr-CA" sz="1800" b="1" dirty="0">
-                <a:latin typeface="Consolas" panose="020B0609020204030204" pitchFamily="49" charset="0"/>
-              </a:rPr>
-              <a:t> </a:t>
-            </a:r>
-            <a:r>
-              <a:rPr lang="fr-CA" b="1" dirty="0">
-                <a:latin typeface="Consolas" panose="020B0609020204030204" pitchFamily="49" charset="0"/>
-                <a:hlinkClick r:id="rId2"/>
-              </a:rPr>
-              <a:t>https://kobzol.github.io/rust/python/2023/05/20/writing-python-like-its-rust.html</a:t>
-            </a:r>
-            <a:endParaRPr lang="fr-CA" b="1" dirty="0">
-              <a:latin typeface="Consolas" panose="020B0609020204030204" pitchFamily="49" charset="0"/>
-            </a:endParaRPr>
-          </a:p>
-        </p:txBody>
-      </p:sp>
-      <p:cxnSp>
-        <p:nvCxnSpPr>
-          <p:cNvPr id="3" name="Straight Arrow Connector 2">
-            <a:extLst>
-              <a:ext uri="{FF2B5EF4-FFF2-40B4-BE49-F238E27FC236}">
-                <a16:creationId xmlns:a16="http://schemas.microsoft.com/office/drawing/2014/main" id="{1C213A72-2EF7-99B1-1855-77C1EA1514C1}"/>
-              </a:ext>
-            </a:extLst>
-          </p:cNvPr>
-          <p:cNvCxnSpPr>
-            <a:stCxn id="9" idx="2"/>
-            <a:endCxn id="5" idx="0"/>
-          </p:cNvCxnSpPr>
-          <p:nvPr/>
-        </p:nvCxnSpPr>
-        <p:spPr>
-          <a:xfrm>
-            <a:off x="6096001" y="2156391"/>
-            <a:ext cx="0" cy="560059"/>
-          </a:xfrm>
-          <a:prstGeom prst="straightConnector1">
-            <a:avLst/>
-          </a:prstGeom>
-          <a:ln>
-            <a:tailEnd type="triangle"/>
-          </a:ln>
-        </p:spPr>
-        <p:style>
-          <a:lnRef idx="2">
-            <a:schemeClr val="dk1"/>
-          </a:lnRef>
-          <a:fillRef idx="0">
-            <a:schemeClr val="dk1"/>
-          </a:fillRef>
-          <a:effectRef idx="1">
-            <a:schemeClr val="dk1"/>
-          </a:effectRef>
-          <a:fontRef idx="minor">
-            <a:schemeClr val="tx1"/>
-          </a:fontRef>
-        </p:style>
-      </p:cxnSp>
-    </p:spTree>
-    <p:extLst>
-      <p:ext uri="{BB962C8B-B14F-4D97-AF65-F5344CB8AC3E}">
-        <p14:creationId xmlns:p14="http://schemas.microsoft.com/office/powerpoint/2010/main" val="1245927022"/>
-      </p:ext>
-    </p:extLst>
-  </p:cSld>
-  <p:clrMapOvr>
-    <a:masterClrMapping/>
-  </p:clrMapOvr>
-  <p:timing>
-    <p:tnLst>
-      <p:par>
-        <p:cTn id="1" dur="indefinite" restart="never" nodeType="tmRoot">
-          <p:childTnLst>
-            <p:seq concurrent="1" nextAc="seek">
-              <p:cTn id="2" dur="indefinite" nodeType="mainSeq">
-                <p:childTnLst>
-                  <p:par>
-                    <p:cTn id="3" fill="hold">
-                      <p:stCondLst>
-                        <p:cond delay="indefinite"/>
-                      </p:stCondLst>
-                      <p:childTnLst>
-                        <p:par>
-                          <p:cTn id="4" fill="hold">
-                            <p:stCondLst>
-                              <p:cond delay="0"/>
-                            </p:stCondLst>
-                            <p:childTnLst>
-                              <p:par>
-                                <p:cTn id="5" presetID="10" presetClass="entr" presetSubtype="0" fill="hold" nodeType="clickEffect">
-                                  <p:stCondLst>
-                                    <p:cond delay="0"/>
-                                  </p:stCondLst>
-                                  <p:childTnLst>
-                                    <p:set>
-                                      <p:cBhvr>
-                                        <p:cTn id="6" dur="1" fill="hold">
-                                          <p:stCondLst>
-                                            <p:cond delay="0"/>
-                                          </p:stCondLst>
-                                        </p:cTn>
-                                        <p:tgtEl>
-                                          <p:spTgt spid="3"/>
-                                        </p:tgtEl>
-                                        <p:attrNameLst>
-                                          <p:attrName>style.visibility</p:attrName>
-                                        </p:attrNameLst>
-                                      </p:cBhvr>
-                                      <p:to>
-                                        <p:strVal val="visible"/>
-                                      </p:to>
-                                    </p:set>
-                                    <p:animEffect transition="in" filter="fade">
-                                      <p:cBhvr>
-                                        <p:cTn id="7" dur="500"/>
-                                        <p:tgtEl>
-                                          <p:spTgt spid="3"/>
-                                        </p:tgtEl>
-                                      </p:cBhvr>
-                                    </p:animEffect>
-                                  </p:childTnLst>
-                                </p:cTn>
-                              </p:par>
-                              <p:par>
-                                <p:cTn id="8" presetID="10" presetClass="entr" presetSubtype="0" fill="hold" grpId="0" nodeType="withEffect">
-                                  <p:stCondLst>
-                                    <p:cond delay="0"/>
-                                  </p:stCondLst>
-                                  <p:childTnLst>
-                                    <p:set>
-                                      <p:cBhvr>
-                                        <p:cTn id="9" dur="1" fill="hold">
-                                          <p:stCondLst>
-                                            <p:cond delay="0"/>
-                                          </p:stCondLst>
-                                        </p:cTn>
-                                        <p:tgtEl>
-                                          <p:spTgt spid="5"/>
-                                        </p:tgtEl>
-                                        <p:attrNameLst>
-                                          <p:attrName>style.visibility</p:attrName>
-                                        </p:attrNameLst>
-                                      </p:cBhvr>
-                                      <p:to>
-                                        <p:strVal val="visible"/>
-                                      </p:to>
-                                    </p:set>
-                                    <p:animEffect transition="in" filter="fade">
-                                      <p:cBhvr>
-                                        <p:cTn id="10" dur="500"/>
-                                        <p:tgtEl>
-                                          <p:spTgt spid="5"/>
-                                        </p:tgtEl>
-                                      </p:cBhvr>
-                                    </p:animEffect>
-                                  </p:childTnLst>
-                                </p:cTn>
-                              </p:par>
-                            </p:childTnLst>
-                          </p:cTn>
-                        </p:par>
-                      </p:childTnLst>
-                    </p:cTn>
-                  </p:par>
-                </p:childTnLst>
-              </p:cTn>
-              <p:prevCondLst>
-                <p:cond evt="onPrev" delay="0">
-                  <p:tgtEl>
-                    <p:sldTgt/>
-                  </p:tgtEl>
-                </p:cond>
-              </p:prevCondLst>
-              <p:nextCondLst>
-                <p:cond evt="onNext" delay="0">
-                  <p:tgtEl>
-                    <p:sldTgt/>
-                  </p:tgtEl>
-                </p:cond>
-              </p:nextCondLst>
-            </p:seq>
-          </p:childTnLst>
-        </p:cTn>
-      </p:par>
-    </p:tnLst>
-    <p:bldLst>
-      <p:bldP spid="5" grpId="0" animBg="1"/>
-    </p:bldLst>
-  </p:timing>
-</p:sld>
-</file>
-
 <file path=ppt/slides/slide2.xml><?xml version="1.0" encoding="utf-8"?>
 <p:sld xmlns:a="http://schemas.openxmlformats.org/drawingml/2006/main" xmlns:r="http://schemas.openxmlformats.org/officeDocument/2006/relationships" xmlns:p="http://schemas.openxmlformats.org/presentationml/2006/main">
   <p:cSld>
@@ -13806,6 +14793,1116 @@
     <p:bg>
       <p:bgPr>
         <a:solidFill>
+          <a:srgbClr val="F5F5F5"/>
+        </a:solidFill>
+        <a:effectLst/>
+      </p:bgPr>
+    </p:bg>
+    <p:spTree>
+      <p:nvGrpSpPr>
+        <p:cNvPr id="1" name="">
+          <a:extLst>
+            <a:ext uri="{FF2B5EF4-FFF2-40B4-BE49-F238E27FC236}">
+              <a16:creationId xmlns:a16="http://schemas.microsoft.com/office/drawing/2014/main" id="{35DBBA77-3CE2-6FB2-95ED-27624606806B}"/>
+            </a:ext>
+          </a:extLst>
+        </p:cNvPr>
+        <p:cNvGrpSpPr/>
+        <p:nvPr/>
+      </p:nvGrpSpPr>
+      <p:grpSpPr>
+        <a:xfrm>
+          <a:off x="0" y="0"/>
+          <a:ext cx="0" cy="0"/>
+          <a:chOff x="0" y="0"/>
+          <a:chExt cx="0" cy="0"/>
+        </a:xfrm>
+      </p:grpSpPr>
+      <p:sp>
+        <p:nvSpPr>
+          <p:cNvPr id="11" name="Slide Number Placeholder 10">
+            <a:extLst>
+              <a:ext uri="{FF2B5EF4-FFF2-40B4-BE49-F238E27FC236}">
+                <a16:creationId xmlns:a16="http://schemas.microsoft.com/office/drawing/2014/main" id="{1F04EBB7-22C3-A3B8-1E54-F6FF4BA31BED}"/>
+              </a:ext>
+            </a:extLst>
+          </p:cNvPr>
+          <p:cNvSpPr>
+            <a:spLocks noGrp="1"/>
+          </p:cNvSpPr>
+          <p:nvPr>
+            <p:ph type="sldNum" sz="quarter" idx="12"/>
+          </p:nvPr>
+        </p:nvSpPr>
+        <p:spPr/>
+        <p:txBody>
+          <a:bodyPr/>
+          <a:lstStyle/>
+          <a:p>
+            <a:fld id="{846B06B1-1179-491F-A487-8E0C403F7C13}" type="slidenum">
+              <a:rPr lang="fr-CA" smtClean="0"/>
+              <a:t>20</a:t>
+            </a:fld>
+            <a:endParaRPr lang="fr-CA"/>
+          </a:p>
+        </p:txBody>
+      </p:sp>
+      <p:sp>
+        <p:nvSpPr>
+          <p:cNvPr id="5" name="TextBox 4">
+            <a:extLst>
+              <a:ext uri="{FF2B5EF4-FFF2-40B4-BE49-F238E27FC236}">
+                <a16:creationId xmlns:a16="http://schemas.microsoft.com/office/drawing/2014/main" id="{120E3981-812B-DC08-663F-09F47E822397}"/>
+              </a:ext>
+            </a:extLst>
+          </p:cNvPr>
+          <p:cNvSpPr txBox="1"/>
+          <p:nvPr/>
+        </p:nvSpPr>
+        <p:spPr>
+          <a:xfrm>
+            <a:off x="2698481" y="2716450"/>
+            <a:ext cx="6795040" cy="2585323"/>
+          </a:xfrm>
+          <a:prstGeom prst="rect">
+            <a:avLst/>
+          </a:prstGeom>
+          <a:solidFill>
+            <a:schemeClr val="bg1"/>
+          </a:solidFill>
+          <a:ln w="12700">
+            <a:solidFill>
+              <a:schemeClr val="tx1"/>
+            </a:solidFill>
+          </a:ln>
+        </p:spPr>
+        <p:txBody>
+          <a:bodyPr wrap="square">
+            <a:spAutoFit/>
+          </a:bodyPr>
+          <a:lstStyle/>
+          <a:p>
+            <a:pPr algn="l">
+              <a:buNone/>
+            </a:pPr>
+            <a:r>
+              <a:rPr lang="en-CA" b="1" i="0" dirty="0">
+                <a:solidFill>
+                  <a:srgbClr val="008800"/>
+                </a:solidFill>
+                <a:effectLst/>
+                <a:latin typeface="Consolas" panose="020B0609020204030204" pitchFamily="49" charset="0"/>
+              </a:rPr>
+              <a:t>def</a:t>
+            </a:r>
+            <a:r>
+              <a:rPr lang="en-CA" b="0" i="0" dirty="0">
+                <a:solidFill>
+                  <a:srgbClr val="BBBBBB"/>
+                </a:solidFill>
+                <a:effectLst/>
+                <a:latin typeface="Consolas" panose="020B0609020204030204" pitchFamily="49" charset="0"/>
+              </a:rPr>
+              <a:t> </a:t>
+            </a:r>
+            <a:r>
+              <a:rPr lang="en-CA" b="1" i="0" dirty="0" err="1">
+                <a:solidFill>
+                  <a:srgbClr val="0066BB"/>
+                </a:solidFill>
+                <a:effectLst/>
+                <a:latin typeface="Consolas" panose="020B0609020204030204" pitchFamily="49" charset="0"/>
+              </a:rPr>
+              <a:t>calculer_afficher_racines</a:t>
+            </a:r>
+            <a:r>
+              <a:rPr lang="en-CA" b="0" i="0" dirty="0">
+                <a:solidFill>
+                  <a:srgbClr val="333333"/>
+                </a:solidFill>
+                <a:effectLst/>
+                <a:latin typeface="Consolas" panose="020B0609020204030204" pitchFamily="49" charset="0"/>
+              </a:rPr>
+              <a:t>(a, b, c):</a:t>
+            </a:r>
+          </a:p>
+          <a:p>
+            <a:pPr algn="l">
+              <a:buNone/>
+            </a:pPr>
+            <a:endParaRPr lang="en-CA" b="0" i="0" dirty="0">
+              <a:solidFill>
+                <a:srgbClr val="333333"/>
+              </a:solidFill>
+              <a:effectLst/>
+              <a:latin typeface="Consolas" panose="020B0609020204030204" pitchFamily="49" charset="0"/>
+            </a:endParaRPr>
+          </a:p>
+          <a:p>
+            <a:pPr algn="l">
+              <a:buNone/>
+            </a:pPr>
+            <a:r>
+              <a:rPr lang="en-CA" b="0" i="0" dirty="0">
+                <a:solidFill>
+                  <a:srgbClr val="333333"/>
+                </a:solidFill>
+                <a:effectLst/>
+                <a:latin typeface="Consolas" panose="020B0609020204030204" pitchFamily="49" charset="0"/>
+              </a:rPr>
+              <a:t>  </a:t>
+            </a:r>
+            <a:r>
+              <a:rPr lang="en-CA" b="0" i="0" dirty="0">
+                <a:solidFill>
+                  <a:srgbClr val="888888"/>
+                </a:solidFill>
+                <a:effectLst/>
+                <a:latin typeface="Consolas" panose="020B0609020204030204" pitchFamily="49" charset="0"/>
+              </a:rPr>
+              <a:t># </a:t>
+            </a:r>
+            <a:r>
+              <a:rPr lang="en-CA" b="0" i="0" dirty="0" err="1">
+                <a:solidFill>
+                  <a:srgbClr val="888888"/>
+                </a:solidFill>
+                <a:effectLst/>
+                <a:latin typeface="Consolas" panose="020B0609020204030204" pitchFamily="49" charset="0"/>
+              </a:rPr>
+              <a:t>Calcul</a:t>
+            </a:r>
+            <a:r>
+              <a:rPr lang="en-CA" b="0" i="0" dirty="0">
+                <a:solidFill>
+                  <a:srgbClr val="888888"/>
+                </a:solidFill>
+                <a:effectLst/>
+                <a:latin typeface="Consolas" panose="020B0609020204030204" pitchFamily="49" charset="0"/>
+              </a:rPr>
+              <a:t> des </a:t>
+            </a:r>
+            <a:r>
+              <a:rPr lang="en-CA" b="0" i="0" dirty="0" err="1">
+                <a:solidFill>
+                  <a:srgbClr val="888888"/>
+                </a:solidFill>
+                <a:effectLst/>
+                <a:latin typeface="Consolas" panose="020B0609020204030204" pitchFamily="49" charset="0"/>
+              </a:rPr>
+              <a:t>racines</a:t>
+            </a:r>
+            <a:endParaRPr lang="en-CA" b="0" i="0" dirty="0">
+              <a:solidFill>
+                <a:srgbClr val="333333"/>
+              </a:solidFill>
+              <a:effectLst/>
+              <a:latin typeface="Consolas" panose="020B0609020204030204" pitchFamily="49" charset="0"/>
+            </a:endParaRPr>
+          </a:p>
+          <a:p>
+            <a:pPr algn="l">
+              <a:buNone/>
+            </a:pPr>
+            <a:r>
+              <a:rPr lang="en-CA" b="0" i="0" dirty="0">
+                <a:solidFill>
+                  <a:srgbClr val="333333"/>
+                </a:solidFill>
+                <a:effectLst/>
+                <a:latin typeface="Consolas" panose="020B0609020204030204" pitchFamily="49" charset="0"/>
+              </a:rPr>
+              <a:t>  </a:t>
+            </a:r>
+            <a:r>
+              <a:rPr lang="en-CA" b="0" i="0" dirty="0" err="1">
+                <a:solidFill>
+                  <a:srgbClr val="333333"/>
+                </a:solidFill>
+                <a:effectLst/>
+                <a:latin typeface="Consolas" panose="020B0609020204030204" pitchFamily="49" charset="0"/>
+              </a:rPr>
+              <a:t>racine_discriminant</a:t>
+            </a:r>
+            <a:r>
+              <a:rPr lang="en-CA" b="0" i="0" dirty="0">
+                <a:solidFill>
+                  <a:srgbClr val="333333"/>
+                </a:solidFill>
+                <a:effectLst/>
+                <a:latin typeface="Consolas" panose="020B0609020204030204" pitchFamily="49" charset="0"/>
+              </a:rPr>
+              <a:t> = (b ** </a:t>
+            </a:r>
+            <a:r>
+              <a:rPr lang="en-CA" b="1" i="0" dirty="0">
+                <a:solidFill>
+                  <a:srgbClr val="0000DD"/>
+                </a:solidFill>
+                <a:effectLst/>
+                <a:latin typeface="Consolas" panose="020B0609020204030204" pitchFamily="49" charset="0"/>
+              </a:rPr>
+              <a:t>2</a:t>
+            </a:r>
+            <a:r>
+              <a:rPr lang="en-CA" b="0" i="0" dirty="0">
+                <a:solidFill>
+                  <a:srgbClr val="333333"/>
+                </a:solidFill>
+                <a:effectLst/>
+                <a:latin typeface="Consolas" panose="020B0609020204030204" pitchFamily="49" charset="0"/>
+              </a:rPr>
+              <a:t> - </a:t>
+            </a:r>
+            <a:r>
+              <a:rPr lang="en-CA" b="1" i="0" dirty="0">
+                <a:solidFill>
+                  <a:srgbClr val="0000DD"/>
+                </a:solidFill>
+                <a:effectLst/>
+                <a:latin typeface="Consolas" panose="020B0609020204030204" pitchFamily="49" charset="0"/>
+              </a:rPr>
+              <a:t>4</a:t>
+            </a:r>
+            <a:r>
+              <a:rPr lang="en-CA" b="0" i="0" dirty="0">
+                <a:solidFill>
+                  <a:srgbClr val="333333"/>
+                </a:solidFill>
+                <a:effectLst/>
+                <a:latin typeface="Consolas" panose="020B0609020204030204" pitchFamily="49" charset="0"/>
+              </a:rPr>
+              <a:t> * a * c) ** </a:t>
+            </a:r>
+            <a:r>
+              <a:rPr lang="en-CA" b="1" i="0" dirty="0">
+                <a:solidFill>
+                  <a:srgbClr val="6600EE"/>
+                </a:solidFill>
+                <a:effectLst/>
+                <a:latin typeface="Consolas" panose="020B0609020204030204" pitchFamily="49" charset="0"/>
+              </a:rPr>
+              <a:t>0.5</a:t>
+            </a:r>
+            <a:endParaRPr lang="en-CA" b="0" i="0" dirty="0">
+              <a:solidFill>
+                <a:srgbClr val="333333"/>
+              </a:solidFill>
+              <a:effectLst/>
+              <a:latin typeface="Consolas" panose="020B0609020204030204" pitchFamily="49" charset="0"/>
+            </a:endParaRPr>
+          </a:p>
+          <a:p>
+            <a:r>
+              <a:rPr lang="en-CA" b="0" i="0" dirty="0">
+                <a:solidFill>
+                  <a:srgbClr val="333333"/>
+                </a:solidFill>
+                <a:effectLst/>
+                <a:latin typeface="Consolas" panose="020B0609020204030204" pitchFamily="49" charset="0"/>
+              </a:rPr>
+              <a:t>  racine_1 = (-b </a:t>
+            </a:r>
+            <a:r>
+              <a:rPr lang="en-CA" dirty="0">
+                <a:solidFill>
+                  <a:srgbClr val="333333"/>
+                </a:solidFill>
+                <a:latin typeface="Consolas" panose="020B0609020204030204" pitchFamily="49" charset="0"/>
+              </a:rPr>
+              <a:t>- </a:t>
+            </a:r>
+            <a:r>
+              <a:rPr lang="en-CA" dirty="0" err="1">
+                <a:solidFill>
+                  <a:srgbClr val="333333"/>
+                </a:solidFill>
+                <a:latin typeface="Consolas" panose="020B0609020204030204" pitchFamily="49" charset="0"/>
+              </a:rPr>
+              <a:t>racine_discriminant</a:t>
+            </a:r>
+            <a:r>
+              <a:rPr lang="en-CA" dirty="0">
+                <a:solidFill>
+                  <a:srgbClr val="333333"/>
+                </a:solidFill>
+                <a:latin typeface="Consolas" panose="020B0609020204030204" pitchFamily="49" charset="0"/>
+              </a:rPr>
+              <a:t>) </a:t>
+            </a:r>
+            <a:r>
+              <a:rPr lang="en-CA" b="0" i="0" dirty="0">
+                <a:solidFill>
+                  <a:srgbClr val="333333"/>
+                </a:solidFill>
+                <a:effectLst/>
+                <a:latin typeface="Consolas" panose="020B0609020204030204" pitchFamily="49" charset="0"/>
+              </a:rPr>
+              <a:t>/ (</a:t>
+            </a:r>
+            <a:r>
+              <a:rPr lang="en-CA" b="1" i="0" dirty="0">
+                <a:solidFill>
+                  <a:srgbClr val="0000DD"/>
+                </a:solidFill>
+                <a:effectLst/>
+                <a:latin typeface="Consolas" panose="020B0609020204030204" pitchFamily="49" charset="0"/>
+              </a:rPr>
+              <a:t>2</a:t>
+            </a:r>
+            <a:r>
+              <a:rPr lang="en-CA" b="0" i="0" dirty="0">
+                <a:solidFill>
+                  <a:srgbClr val="333333"/>
+                </a:solidFill>
+                <a:effectLst/>
+                <a:latin typeface="Consolas" panose="020B0609020204030204" pitchFamily="49" charset="0"/>
+              </a:rPr>
+              <a:t> * a)</a:t>
+            </a:r>
+          </a:p>
+          <a:p>
+            <a:r>
+              <a:rPr lang="en-CA" b="0" i="0" dirty="0">
+                <a:solidFill>
+                  <a:srgbClr val="333333"/>
+                </a:solidFill>
+                <a:effectLst/>
+                <a:latin typeface="Consolas" panose="020B0609020204030204" pitchFamily="49" charset="0"/>
+              </a:rPr>
+              <a:t>  racine_2 = (-b </a:t>
+            </a:r>
+            <a:r>
+              <a:rPr lang="en-CA" dirty="0">
+                <a:solidFill>
+                  <a:srgbClr val="333333"/>
+                </a:solidFill>
+                <a:latin typeface="Consolas" panose="020B0609020204030204" pitchFamily="49" charset="0"/>
+              </a:rPr>
+              <a:t>+ </a:t>
+            </a:r>
+            <a:r>
+              <a:rPr lang="en-CA" dirty="0" err="1">
+                <a:solidFill>
+                  <a:srgbClr val="333333"/>
+                </a:solidFill>
+                <a:latin typeface="Consolas" panose="020B0609020204030204" pitchFamily="49" charset="0"/>
+              </a:rPr>
+              <a:t>racine_discriminant</a:t>
+            </a:r>
+            <a:r>
+              <a:rPr lang="en-CA" b="0" i="0" dirty="0">
+                <a:solidFill>
+                  <a:srgbClr val="333333"/>
+                </a:solidFill>
+                <a:effectLst/>
+                <a:latin typeface="Consolas" panose="020B0609020204030204" pitchFamily="49" charset="0"/>
+              </a:rPr>
+              <a:t>) / (</a:t>
+            </a:r>
+            <a:r>
+              <a:rPr lang="en-CA" b="1" i="0" dirty="0">
+                <a:solidFill>
+                  <a:srgbClr val="0000DD"/>
+                </a:solidFill>
+                <a:effectLst/>
+                <a:latin typeface="Consolas" panose="020B0609020204030204" pitchFamily="49" charset="0"/>
+              </a:rPr>
+              <a:t>2</a:t>
+            </a:r>
+            <a:r>
+              <a:rPr lang="en-CA" b="0" i="0" dirty="0">
+                <a:solidFill>
+                  <a:srgbClr val="333333"/>
+                </a:solidFill>
+                <a:effectLst/>
+                <a:latin typeface="Consolas" panose="020B0609020204030204" pitchFamily="49" charset="0"/>
+              </a:rPr>
+              <a:t> * a)</a:t>
+            </a:r>
+          </a:p>
+          <a:p>
+            <a:pPr algn="l">
+              <a:buNone/>
+            </a:pPr>
+            <a:endParaRPr lang="en-CA" b="0" i="0" dirty="0">
+              <a:solidFill>
+                <a:srgbClr val="333333"/>
+              </a:solidFill>
+              <a:effectLst/>
+              <a:latin typeface="Consolas" panose="020B0609020204030204" pitchFamily="49" charset="0"/>
+            </a:endParaRPr>
+          </a:p>
+          <a:p>
+            <a:pPr algn="l">
+              <a:buNone/>
+            </a:pPr>
+            <a:r>
+              <a:rPr lang="en-CA" b="0" i="0" dirty="0">
+                <a:solidFill>
+                  <a:srgbClr val="333333"/>
+                </a:solidFill>
+                <a:effectLst/>
+                <a:latin typeface="Consolas" panose="020B0609020204030204" pitchFamily="49" charset="0"/>
+              </a:rPr>
+              <a:t>  </a:t>
+            </a:r>
+            <a:r>
+              <a:rPr lang="en-CA" b="0" i="0" dirty="0">
+                <a:solidFill>
+                  <a:srgbClr val="888888"/>
+                </a:solidFill>
+                <a:effectLst/>
+                <a:latin typeface="Consolas" panose="020B0609020204030204" pitchFamily="49" charset="0"/>
+              </a:rPr>
+              <a:t># </a:t>
+            </a:r>
+            <a:r>
+              <a:rPr lang="en-CA" b="0" i="0" dirty="0" err="1">
+                <a:solidFill>
+                  <a:srgbClr val="888888"/>
+                </a:solidFill>
+                <a:effectLst/>
+                <a:latin typeface="Consolas" panose="020B0609020204030204" pitchFamily="49" charset="0"/>
+              </a:rPr>
+              <a:t>Affichage</a:t>
+            </a:r>
+            <a:endParaRPr lang="en-CA" b="0" i="0" dirty="0">
+              <a:solidFill>
+                <a:srgbClr val="333333"/>
+              </a:solidFill>
+              <a:effectLst/>
+              <a:latin typeface="Consolas" panose="020B0609020204030204" pitchFamily="49" charset="0"/>
+            </a:endParaRPr>
+          </a:p>
+          <a:p>
+            <a:pPr algn="l">
+              <a:buNone/>
+            </a:pPr>
+            <a:r>
+              <a:rPr lang="en-CA" b="0" i="0" dirty="0">
+                <a:solidFill>
+                  <a:srgbClr val="333333"/>
+                </a:solidFill>
+                <a:effectLst/>
+                <a:latin typeface="Consolas" panose="020B0609020204030204" pitchFamily="49" charset="0"/>
+              </a:rPr>
+              <a:t>  </a:t>
+            </a:r>
+            <a:r>
+              <a:rPr lang="en-CA" b="0" i="0" dirty="0">
+                <a:solidFill>
+                  <a:srgbClr val="007020"/>
+                </a:solidFill>
+                <a:effectLst/>
+                <a:latin typeface="Consolas" panose="020B0609020204030204" pitchFamily="49" charset="0"/>
+              </a:rPr>
+              <a:t>print</a:t>
+            </a:r>
+            <a:r>
+              <a:rPr lang="en-CA" b="0" i="0" dirty="0">
+                <a:solidFill>
+                  <a:srgbClr val="333333"/>
+                </a:solidFill>
+                <a:effectLst/>
+                <a:latin typeface="Consolas" panose="020B0609020204030204" pitchFamily="49" charset="0"/>
+              </a:rPr>
+              <a:t>('r1 = ', racine_1, 'r2 = ', racine_2)</a:t>
+            </a:r>
+          </a:p>
+        </p:txBody>
+      </p:sp>
+      <p:sp>
+        <p:nvSpPr>
+          <p:cNvPr id="9" name="TextBox 8">
+            <a:extLst>
+              <a:ext uri="{FF2B5EF4-FFF2-40B4-BE49-F238E27FC236}">
+                <a16:creationId xmlns:a16="http://schemas.microsoft.com/office/drawing/2014/main" id="{4AD4AE26-52B6-3BA1-237D-3BB53236247D}"/>
+              </a:ext>
+            </a:extLst>
+          </p:cNvPr>
+          <p:cNvSpPr txBox="1"/>
+          <p:nvPr/>
+        </p:nvSpPr>
+        <p:spPr>
+          <a:xfrm>
+            <a:off x="2698481" y="956062"/>
+            <a:ext cx="6795040" cy="1200329"/>
+          </a:xfrm>
+          <a:prstGeom prst="rect">
+            <a:avLst/>
+          </a:prstGeom>
+          <a:solidFill>
+            <a:schemeClr val="bg1"/>
+          </a:solidFill>
+          <a:ln w="12700">
+            <a:solidFill>
+              <a:schemeClr val="tx1"/>
+            </a:solidFill>
+          </a:ln>
+        </p:spPr>
+        <p:txBody>
+          <a:bodyPr wrap="square">
+            <a:spAutoFit/>
+          </a:bodyPr>
+          <a:lstStyle/>
+          <a:p>
+            <a:pPr algn="l">
+              <a:buNone/>
+            </a:pPr>
+            <a:r>
+              <a:rPr lang="en-CA" b="1" i="0" dirty="0">
+                <a:solidFill>
+                  <a:srgbClr val="008800"/>
+                </a:solidFill>
+                <a:effectLst/>
+                <a:latin typeface="Consolas" panose="020B0609020204030204" pitchFamily="49" charset="0"/>
+              </a:rPr>
+              <a:t>def</a:t>
+            </a:r>
+            <a:r>
+              <a:rPr lang="en-CA" b="0" i="0" dirty="0">
+                <a:solidFill>
+                  <a:srgbClr val="BBBBBB"/>
+                </a:solidFill>
+                <a:effectLst/>
+                <a:latin typeface="Consolas" panose="020B0609020204030204" pitchFamily="49" charset="0"/>
+              </a:rPr>
+              <a:t> </a:t>
+            </a:r>
+            <a:r>
+              <a:rPr lang="en-CA" b="1" i="0" dirty="0" err="1">
+                <a:solidFill>
+                  <a:srgbClr val="0066BB"/>
+                </a:solidFill>
+                <a:effectLst/>
+                <a:latin typeface="Consolas" panose="020B0609020204030204" pitchFamily="49" charset="0"/>
+              </a:rPr>
+              <a:t>rac</a:t>
+            </a:r>
+            <a:r>
+              <a:rPr lang="en-CA" b="0" i="0" dirty="0">
+                <a:solidFill>
+                  <a:srgbClr val="333333"/>
+                </a:solidFill>
+                <a:effectLst/>
+                <a:latin typeface="Consolas" panose="020B0609020204030204" pitchFamily="49" charset="0"/>
+              </a:rPr>
+              <a:t>(</a:t>
+            </a:r>
+            <a:r>
+              <a:rPr lang="en-CA" b="0" i="0" dirty="0" err="1">
+                <a:solidFill>
+                  <a:srgbClr val="333333"/>
+                </a:solidFill>
+                <a:effectLst/>
+                <a:latin typeface="Consolas" panose="020B0609020204030204" pitchFamily="49" charset="0"/>
+              </a:rPr>
+              <a:t>a,b,c</a:t>
+            </a:r>
+            <a:r>
+              <a:rPr lang="en-CA" b="0" i="0" dirty="0">
+                <a:solidFill>
+                  <a:srgbClr val="333333"/>
+                </a:solidFill>
+                <a:effectLst/>
+                <a:latin typeface="Consolas" panose="020B0609020204030204" pitchFamily="49" charset="0"/>
+              </a:rPr>
+              <a:t>):</a:t>
+            </a:r>
+          </a:p>
+          <a:p>
+            <a:pPr algn="l">
+              <a:buNone/>
+            </a:pPr>
+            <a:r>
+              <a:rPr lang="en-CA" b="0" i="0" dirty="0">
+                <a:solidFill>
+                  <a:srgbClr val="333333"/>
+                </a:solidFill>
+                <a:effectLst/>
+                <a:latin typeface="Consolas" panose="020B0609020204030204" pitchFamily="49" charset="0"/>
+              </a:rPr>
+              <a:t>  x = (-a2-(a2**</a:t>
+            </a:r>
+            <a:r>
+              <a:rPr lang="en-CA" b="1" i="0" dirty="0">
+                <a:solidFill>
+                  <a:srgbClr val="0000DD"/>
+                </a:solidFill>
+                <a:effectLst/>
+                <a:latin typeface="Consolas" panose="020B0609020204030204" pitchFamily="49" charset="0"/>
+              </a:rPr>
+              <a:t>2</a:t>
+            </a:r>
+            <a:r>
+              <a:rPr lang="en-CA" b="0" i="0" dirty="0">
+                <a:solidFill>
+                  <a:srgbClr val="333333"/>
+                </a:solidFill>
+                <a:effectLst/>
+                <a:latin typeface="Consolas" panose="020B0609020204030204" pitchFamily="49" charset="0"/>
+              </a:rPr>
+              <a:t>-</a:t>
+            </a:r>
+            <a:r>
+              <a:rPr lang="en-CA" b="1" i="0" dirty="0">
+                <a:solidFill>
+                  <a:srgbClr val="0000DD"/>
+                </a:solidFill>
+                <a:effectLst/>
+                <a:latin typeface="Consolas" panose="020B0609020204030204" pitchFamily="49" charset="0"/>
+              </a:rPr>
+              <a:t>4</a:t>
+            </a:r>
+            <a:r>
+              <a:rPr lang="en-CA" b="0" i="0" dirty="0">
+                <a:solidFill>
+                  <a:srgbClr val="333333"/>
+                </a:solidFill>
+                <a:effectLst/>
+                <a:latin typeface="Consolas" panose="020B0609020204030204" pitchFamily="49" charset="0"/>
+              </a:rPr>
+              <a:t>*a1*a3)**</a:t>
+            </a:r>
+            <a:r>
+              <a:rPr lang="en-CA" b="1" i="0" dirty="0">
+                <a:solidFill>
+                  <a:srgbClr val="6600EE"/>
+                </a:solidFill>
+                <a:effectLst/>
+                <a:latin typeface="Consolas" panose="020B0609020204030204" pitchFamily="49" charset="0"/>
+              </a:rPr>
+              <a:t>0.5</a:t>
+            </a:r>
+            <a:r>
+              <a:rPr lang="en-CA" b="0" i="0" dirty="0">
+                <a:solidFill>
+                  <a:srgbClr val="333333"/>
+                </a:solidFill>
+                <a:effectLst/>
+                <a:latin typeface="Consolas" panose="020B0609020204030204" pitchFamily="49" charset="0"/>
+              </a:rPr>
+              <a:t>)/(</a:t>
+            </a:r>
+            <a:r>
+              <a:rPr lang="en-CA" b="1" i="0" dirty="0">
+                <a:solidFill>
+                  <a:srgbClr val="0000DD"/>
+                </a:solidFill>
+                <a:effectLst/>
+                <a:latin typeface="Consolas" panose="020B0609020204030204" pitchFamily="49" charset="0"/>
+              </a:rPr>
+              <a:t>2</a:t>
+            </a:r>
+            <a:r>
+              <a:rPr lang="en-CA" b="0" i="0" dirty="0">
+                <a:solidFill>
+                  <a:srgbClr val="333333"/>
+                </a:solidFill>
+                <a:effectLst/>
+                <a:latin typeface="Consolas" panose="020B0609020204030204" pitchFamily="49" charset="0"/>
+              </a:rPr>
+              <a:t>*a1)</a:t>
+            </a:r>
+          </a:p>
+          <a:p>
+            <a:pPr algn="l">
+              <a:buNone/>
+            </a:pPr>
+            <a:r>
+              <a:rPr lang="en-CA" b="0" i="0" dirty="0">
+                <a:solidFill>
+                  <a:srgbClr val="333333"/>
+                </a:solidFill>
+                <a:effectLst/>
+                <a:latin typeface="Consolas" panose="020B0609020204030204" pitchFamily="49" charset="0"/>
+              </a:rPr>
+              <a:t>  y = (-a2+(a2**</a:t>
+            </a:r>
+            <a:r>
+              <a:rPr lang="en-CA" b="1" i="0" dirty="0">
+                <a:solidFill>
+                  <a:srgbClr val="0000DD"/>
+                </a:solidFill>
+                <a:effectLst/>
+                <a:latin typeface="Consolas" panose="020B0609020204030204" pitchFamily="49" charset="0"/>
+              </a:rPr>
+              <a:t>2</a:t>
+            </a:r>
+            <a:r>
+              <a:rPr lang="en-CA" b="0" i="0" dirty="0">
+                <a:solidFill>
+                  <a:srgbClr val="333333"/>
+                </a:solidFill>
+                <a:effectLst/>
+                <a:latin typeface="Consolas" panose="020B0609020204030204" pitchFamily="49" charset="0"/>
+              </a:rPr>
+              <a:t>-</a:t>
+            </a:r>
+            <a:r>
+              <a:rPr lang="en-CA" b="1" i="0" dirty="0">
+                <a:solidFill>
+                  <a:srgbClr val="0000DD"/>
+                </a:solidFill>
+                <a:effectLst/>
+                <a:latin typeface="Consolas" panose="020B0609020204030204" pitchFamily="49" charset="0"/>
+              </a:rPr>
+              <a:t>4</a:t>
+            </a:r>
+            <a:r>
+              <a:rPr lang="en-CA" b="0" i="0" dirty="0">
+                <a:solidFill>
+                  <a:srgbClr val="333333"/>
+                </a:solidFill>
+                <a:effectLst/>
+                <a:latin typeface="Consolas" panose="020B0609020204030204" pitchFamily="49" charset="0"/>
+              </a:rPr>
+              <a:t>*a2*a3)**</a:t>
+            </a:r>
+            <a:r>
+              <a:rPr lang="en-CA" b="1" i="0" dirty="0">
+                <a:solidFill>
+                  <a:srgbClr val="6600EE"/>
+                </a:solidFill>
+                <a:effectLst/>
+                <a:latin typeface="Consolas" panose="020B0609020204030204" pitchFamily="49" charset="0"/>
+              </a:rPr>
+              <a:t>0.5</a:t>
+            </a:r>
+            <a:r>
+              <a:rPr lang="en-CA" b="0" i="0" dirty="0">
+                <a:solidFill>
+                  <a:srgbClr val="333333"/>
+                </a:solidFill>
+                <a:effectLst/>
+                <a:latin typeface="Consolas" panose="020B0609020204030204" pitchFamily="49" charset="0"/>
+              </a:rPr>
+              <a:t>)/(</a:t>
+            </a:r>
+            <a:r>
+              <a:rPr lang="en-CA" b="1" i="0" dirty="0">
+                <a:solidFill>
+                  <a:srgbClr val="0000DD"/>
+                </a:solidFill>
+                <a:effectLst/>
+                <a:latin typeface="Consolas" panose="020B0609020204030204" pitchFamily="49" charset="0"/>
+              </a:rPr>
+              <a:t>2</a:t>
+            </a:r>
+            <a:r>
+              <a:rPr lang="en-CA" b="0" i="0" dirty="0">
+                <a:solidFill>
+                  <a:srgbClr val="333333"/>
+                </a:solidFill>
+                <a:effectLst/>
+                <a:latin typeface="Consolas" panose="020B0609020204030204" pitchFamily="49" charset="0"/>
+              </a:rPr>
+              <a:t>*a1)</a:t>
+            </a:r>
+          </a:p>
+          <a:p>
+            <a:pPr algn="l">
+              <a:buNone/>
+            </a:pPr>
+            <a:r>
+              <a:rPr lang="en-CA" b="0" i="0" dirty="0">
+                <a:solidFill>
+                  <a:srgbClr val="333333"/>
+                </a:solidFill>
+                <a:effectLst/>
+                <a:latin typeface="Consolas" panose="020B0609020204030204" pitchFamily="49" charset="0"/>
+              </a:rPr>
+              <a:t>  </a:t>
+            </a:r>
+            <a:r>
+              <a:rPr lang="en-CA" b="0" i="0" dirty="0">
+                <a:solidFill>
+                  <a:srgbClr val="007020"/>
+                </a:solidFill>
+                <a:effectLst/>
+                <a:latin typeface="Consolas" panose="020B0609020204030204" pitchFamily="49" charset="0"/>
+              </a:rPr>
+              <a:t>print</a:t>
+            </a:r>
+            <a:r>
+              <a:rPr lang="en-CA" b="0" i="0" dirty="0">
+                <a:solidFill>
+                  <a:srgbClr val="333333"/>
+                </a:solidFill>
+                <a:effectLst/>
+                <a:latin typeface="Consolas" panose="020B0609020204030204" pitchFamily="49" charset="0"/>
+              </a:rPr>
+              <a:t>(</a:t>
+            </a:r>
+            <a:r>
+              <a:rPr lang="en-CA" b="0" i="0" dirty="0" err="1">
+                <a:solidFill>
+                  <a:srgbClr val="333333"/>
+                </a:solidFill>
+                <a:effectLst/>
+                <a:latin typeface="Consolas" panose="020B0609020204030204" pitchFamily="49" charset="0"/>
+              </a:rPr>
+              <a:t>x,y</a:t>
+            </a:r>
+            <a:r>
+              <a:rPr lang="en-CA" b="0" i="0" dirty="0">
+                <a:solidFill>
+                  <a:srgbClr val="333333"/>
+                </a:solidFill>
+                <a:effectLst/>
+                <a:latin typeface="Consolas" panose="020B0609020204030204" pitchFamily="49" charset="0"/>
+              </a:rPr>
+              <a:t>)</a:t>
+            </a:r>
+          </a:p>
+        </p:txBody>
+      </p:sp>
+      <p:sp>
+        <p:nvSpPr>
+          <p:cNvPr id="10" name="TextBox 9">
+            <a:extLst>
+              <a:ext uri="{FF2B5EF4-FFF2-40B4-BE49-F238E27FC236}">
+                <a16:creationId xmlns:a16="http://schemas.microsoft.com/office/drawing/2014/main" id="{C113C40B-48F3-FE64-0458-4669C7230B81}"/>
+              </a:ext>
+            </a:extLst>
+          </p:cNvPr>
+          <p:cNvSpPr txBox="1"/>
+          <p:nvPr/>
+        </p:nvSpPr>
+        <p:spPr>
+          <a:xfrm>
+            <a:off x="838200" y="5968665"/>
+            <a:ext cx="10515599" cy="704360"/>
+          </a:xfrm>
+          <a:prstGeom prst="rect">
+            <a:avLst/>
+          </a:prstGeom>
+          <a:noFill/>
+        </p:spPr>
+        <p:txBody>
+          <a:bodyPr wrap="square">
+            <a:spAutoFit/>
+          </a:bodyPr>
+          <a:lstStyle/>
+          <a:p>
+            <a:pPr algn="ctr">
+              <a:lnSpc>
+                <a:spcPct val="114000"/>
+              </a:lnSpc>
+            </a:pPr>
+            <a:r>
+              <a:rPr lang="fr-CA" sz="1800" b="1" dirty="0">
+                <a:latin typeface="Consolas" panose="020B0609020204030204" pitchFamily="49" charset="0"/>
+              </a:rPr>
+              <a:t>Ce n'est que le début ...</a:t>
+            </a:r>
+            <a:br>
+              <a:rPr lang="fr-CA" sz="1800" b="1" dirty="0">
+                <a:latin typeface="Consolas" panose="020B0609020204030204" pitchFamily="49" charset="0"/>
+              </a:rPr>
+            </a:br>
+            <a:r>
+              <a:rPr lang="fr-CA" sz="1800" b="1" dirty="0">
+                <a:latin typeface="Consolas" panose="020B0609020204030204" pitchFamily="49" charset="0"/>
+              </a:rPr>
+              <a:t> </a:t>
+            </a:r>
+            <a:r>
+              <a:rPr lang="fr-CA" b="1" dirty="0">
+                <a:latin typeface="Consolas" panose="020B0609020204030204" pitchFamily="49" charset="0"/>
+                <a:hlinkClick r:id="rId2"/>
+              </a:rPr>
+              <a:t>https://kobzol.github.io/rust/python/2023/05/20/writing-python-like-its-rust.html</a:t>
+            </a:r>
+            <a:endParaRPr lang="fr-CA" b="1" dirty="0">
+              <a:latin typeface="Consolas" panose="020B0609020204030204" pitchFamily="49" charset="0"/>
+            </a:endParaRPr>
+          </a:p>
+        </p:txBody>
+      </p:sp>
+      <p:cxnSp>
+        <p:nvCxnSpPr>
+          <p:cNvPr id="3" name="Straight Arrow Connector 2">
+            <a:extLst>
+              <a:ext uri="{FF2B5EF4-FFF2-40B4-BE49-F238E27FC236}">
+                <a16:creationId xmlns:a16="http://schemas.microsoft.com/office/drawing/2014/main" id="{1C213A72-2EF7-99B1-1855-77C1EA1514C1}"/>
+              </a:ext>
+            </a:extLst>
+          </p:cNvPr>
+          <p:cNvCxnSpPr>
+            <a:stCxn id="9" idx="2"/>
+            <a:endCxn id="5" idx="0"/>
+          </p:cNvCxnSpPr>
+          <p:nvPr/>
+        </p:nvCxnSpPr>
+        <p:spPr>
+          <a:xfrm>
+            <a:off x="6096001" y="2156391"/>
+            <a:ext cx="0" cy="560059"/>
+          </a:xfrm>
+          <a:prstGeom prst="straightConnector1">
+            <a:avLst/>
+          </a:prstGeom>
+          <a:ln>
+            <a:tailEnd type="triangle"/>
+          </a:ln>
+        </p:spPr>
+        <p:style>
+          <a:lnRef idx="2">
+            <a:schemeClr val="dk1"/>
+          </a:lnRef>
+          <a:fillRef idx="0">
+            <a:schemeClr val="dk1"/>
+          </a:fillRef>
+          <a:effectRef idx="1">
+            <a:schemeClr val="dk1"/>
+          </a:effectRef>
+          <a:fontRef idx="minor">
+            <a:schemeClr val="tx1"/>
+          </a:fontRef>
+        </p:style>
+      </p:cxnSp>
+    </p:spTree>
+    <p:extLst>
+      <p:ext uri="{BB962C8B-B14F-4D97-AF65-F5344CB8AC3E}">
+        <p14:creationId xmlns:p14="http://schemas.microsoft.com/office/powerpoint/2010/main" val="1245927022"/>
+      </p:ext>
+    </p:extLst>
+  </p:cSld>
+  <p:clrMapOvr>
+    <a:masterClrMapping/>
+  </p:clrMapOvr>
+  <p:timing>
+    <p:tnLst>
+      <p:par>
+        <p:cTn id="1" dur="indefinite" restart="never" nodeType="tmRoot">
+          <p:childTnLst>
+            <p:seq concurrent="1" nextAc="seek">
+              <p:cTn id="2" dur="indefinite" nodeType="mainSeq">
+                <p:childTnLst>
+                  <p:par>
+                    <p:cTn id="3" fill="hold">
+                      <p:stCondLst>
+                        <p:cond delay="indefinite"/>
+                      </p:stCondLst>
+                      <p:childTnLst>
+                        <p:par>
+                          <p:cTn id="4" fill="hold">
+                            <p:stCondLst>
+                              <p:cond delay="0"/>
+                            </p:stCondLst>
+                            <p:childTnLst>
+                              <p:par>
+                                <p:cTn id="5" presetID="10" presetClass="entr" presetSubtype="0" fill="hold" nodeType="clickEffect">
+                                  <p:stCondLst>
+                                    <p:cond delay="0"/>
+                                  </p:stCondLst>
+                                  <p:childTnLst>
+                                    <p:set>
+                                      <p:cBhvr>
+                                        <p:cTn id="6" dur="1" fill="hold">
+                                          <p:stCondLst>
+                                            <p:cond delay="0"/>
+                                          </p:stCondLst>
+                                        </p:cTn>
+                                        <p:tgtEl>
+                                          <p:spTgt spid="3"/>
+                                        </p:tgtEl>
+                                        <p:attrNameLst>
+                                          <p:attrName>style.visibility</p:attrName>
+                                        </p:attrNameLst>
+                                      </p:cBhvr>
+                                      <p:to>
+                                        <p:strVal val="visible"/>
+                                      </p:to>
+                                    </p:set>
+                                    <p:animEffect transition="in" filter="fade">
+                                      <p:cBhvr>
+                                        <p:cTn id="7" dur="500"/>
+                                        <p:tgtEl>
+                                          <p:spTgt spid="3"/>
+                                        </p:tgtEl>
+                                      </p:cBhvr>
+                                    </p:animEffect>
+                                  </p:childTnLst>
+                                </p:cTn>
+                              </p:par>
+                              <p:par>
+                                <p:cTn id="8" presetID="10" presetClass="entr" presetSubtype="0" fill="hold" grpId="0" nodeType="withEffect">
+                                  <p:stCondLst>
+                                    <p:cond delay="0"/>
+                                  </p:stCondLst>
+                                  <p:childTnLst>
+                                    <p:set>
+                                      <p:cBhvr>
+                                        <p:cTn id="9" dur="1" fill="hold">
+                                          <p:stCondLst>
+                                            <p:cond delay="0"/>
+                                          </p:stCondLst>
+                                        </p:cTn>
+                                        <p:tgtEl>
+                                          <p:spTgt spid="5"/>
+                                        </p:tgtEl>
+                                        <p:attrNameLst>
+                                          <p:attrName>style.visibility</p:attrName>
+                                        </p:attrNameLst>
+                                      </p:cBhvr>
+                                      <p:to>
+                                        <p:strVal val="visible"/>
+                                      </p:to>
+                                    </p:set>
+                                    <p:animEffect transition="in" filter="fade">
+                                      <p:cBhvr>
+                                        <p:cTn id="10" dur="500"/>
+                                        <p:tgtEl>
+                                          <p:spTgt spid="5"/>
+                                        </p:tgtEl>
+                                      </p:cBhvr>
+                                    </p:animEffect>
+                                  </p:childTnLst>
+                                </p:cTn>
+                              </p:par>
+                            </p:childTnLst>
+                          </p:cTn>
+                        </p:par>
+                      </p:childTnLst>
+                    </p:cTn>
+                  </p:par>
+                </p:childTnLst>
+              </p:cTn>
+              <p:prevCondLst>
+                <p:cond evt="onPrev" delay="0">
+                  <p:tgtEl>
+                    <p:sldTgt/>
+                  </p:tgtEl>
+                </p:cond>
+              </p:prevCondLst>
+              <p:nextCondLst>
+                <p:cond evt="onNext" delay="0">
+                  <p:tgtEl>
+                    <p:sldTgt/>
+                  </p:tgtEl>
+                </p:cond>
+              </p:nextCondLst>
+            </p:seq>
+          </p:childTnLst>
+        </p:cTn>
+      </p:par>
+    </p:tnLst>
+    <p:bldLst>
+      <p:bldP spid="5" grpId="0" animBg="1"/>
+    </p:bldLst>
+  </p:timing>
+</p:sld>
+</file>
+
+<file path=ppt/slides/slide21.xml><?xml version="1.0" encoding="utf-8"?>
+<p:sld xmlns:a="http://schemas.openxmlformats.org/drawingml/2006/main" xmlns:r="http://schemas.openxmlformats.org/officeDocument/2006/relationships" xmlns:p="http://schemas.openxmlformats.org/presentationml/2006/main">
+  <p:cSld>
+    <p:bg>
+      <p:bgPr>
+        <a:solidFill>
           <a:schemeClr val="bg1">
             <a:lumMod val="95000"/>
           </a:schemeClr>
@@ -13924,7 +16021,7 @@
           <a:p>
             <a:fld id="{846B06B1-1179-491F-A487-8E0C403F7C13}" type="slidenum">
               <a:rPr lang="fr-CA" smtClean="0"/>
-              <a:t>20</a:t>
+              <a:t>21</a:t>
             </a:fld>
             <a:endParaRPr lang="fr-CA"/>
           </a:p>
@@ -14908,7 +17005,7 @@
 </p:sld>
 </file>
 
-<file path=ppt/slides/slide21.xml><?xml version="1.0" encoding="utf-8"?>
+<file path=ppt/slides/slide22.xml><?xml version="1.0" encoding="utf-8"?>
 <p:sld xmlns:a="http://schemas.openxmlformats.org/drawingml/2006/main" xmlns:r="http://schemas.openxmlformats.org/officeDocument/2006/relationships" xmlns:p="http://schemas.openxmlformats.org/presentationml/2006/main">
   <p:cSld>
     <p:bg>
@@ -15009,7 +17106,7 @@
           <a:p>
             <a:fld id="{846B06B1-1179-491F-A487-8E0C403F7C13}" type="slidenum">
               <a:rPr lang="fr-CA" smtClean="0"/>
-              <a:t>21</a:t>
+              <a:t>22</a:t>
             </a:fld>
             <a:endParaRPr lang="fr-CA"/>
           </a:p>
@@ -15982,7 +18079,7 @@
 </p:sld>
 </file>
 
-<file path=ppt/slides/slide22.xml><?xml version="1.0" encoding="utf-8"?>
+<file path=ppt/slides/slide23.xml><?xml version="1.0" encoding="utf-8"?>
 <p:sld xmlns:a="http://schemas.openxmlformats.org/drawingml/2006/main" xmlns:r="http://schemas.openxmlformats.org/officeDocument/2006/relationships" xmlns:p="http://schemas.openxmlformats.org/presentationml/2006/main">
   <p:cSld>
     <p:bg>
@@ -16431,7 +18528,7 @@
           <a:p>
             <a:fld id="{846B06B1-1179-491F-A487-8E0C403F7C13}" type="slidenum">
               <a:rPr lang="fr-CA" smtClean="0"/>
-              <a:t>22</a:t>
+              <a:t>23</a:t>
             </a:fld>
             <a:endParaRPr lang="fr-CA"/>
           </a:p>
@@ -16450,7 +18547,7 @@
 </p:sld>
 </file>
 
-<file path=ppt/slides/slide23.xml><?xml version="1.0" encoding="utf-8"?>
+<file path=ppt/slides/slide24.xml><?xml version="1.0" encoding="utf-8"?>
 <p:sld xmlns:a="http://schemas.openxmlformats.org/drawingml/2006/main" xmlns:r="http://schemas.openxmlformats.org/officeDocument/2006/relationships" xmlns:p="http://schemas.openxmlformats.org/presentationml/2006/main">
   <p:cSld>
     <p:bg>
@@ -17078,7 +19175,7 @@
           <a:p>
             <a:fld id="{846B06B1-1179-491F-A487-8E0C403F7C13}" type="slidenum">
               <a:rPr lang="fr-CA" smtClean="0"/>
-              <a:t>23</a:t>
+              <a:t>24</a:t>
             </a:fld>
             <a:endParaRPr lang="fr-CA"/>
           </a:p>
@@ -18338,7 +20435,7 @@
 </p:sld>
 </file>
 
-<file path=ppt/slides/slide24.xml><?xml version="1.0" encoding="utf-8"?>
+<file path=ppt/slides/slide25.xml><?xml version="1.0" encoding="utf-8"?>
 <p:sld xmlns:a="http://schemas.openxmlformats.org/drawingml/2006/main" xmlns:r="http://schemas.openxmlformats.org/officeDocument/2006/relationships" xmlns:p="http://schemas.openxmlformats.org/presentationml/2006/main">
   <p:cSld>
     <p:bg>
@@ -18779,7 +20876,7 @@
           <a:p>
             <a:fld id="{846B06B1-1179-491F-A487-8E0C403F7C13}" type="slidenum">
               <a:rPr lang="fr-CA" smtClean="0"/>
-              <a:t>24</a:t>
+              <a:t>25</a:t>
             </a:fld>
             <a:endParaRPr lang="fr-CA"/>
           </a:p>
@@ -19411,7 +21508,7 @@
 </p:sld>
 </file>
 
-<file path=ppt/slides/slide25.xml><?xml version="1.0" encoding="utf-8"?>
+<file path=ppt/slides/slide26.xml><?xml version="1.0" encoding="utf-8"?>
 <p:sld xmlns:a="http://schemas.openxmlformats.org/drawingml/2006/main" xmlns:r="http://schemas.openxmlformats.org/officeDocument/2006/relationships" xmlns:p="http://schemas.openxmlformats.org/presentationml/2006/main">
   <p:cSld>
     <p:bg>
@@ -19908,7 +22005,7 @@
           <a:p>
             <a:fld id="{846B06B1-1179-491F-A487-8E0C403F7C13}" type="slidenum">
               <a:rPr lang="fr-CA" smtClean="0"/>
-              <a:t>25</a:t>
+              <a:t>26</a:t>
             </a:fld>
             <a:endParaRPr lang="fr-CA"/>
           </a:p>
@@ -20323,7 +22420,7 @@
 </p:sld>
 </file>
 
-<file path=ppt/slides/slide26.xml><?xml version="1.0" encoding="utf-8"?>
+<file path=ppt/slides/slide27.xml><?xml version="1.0" encoding="utf-8"?>
 <p:sld xmlns:a="http://schemas.openxmlformats.org/drawingml/2006/main" xmlns:r="http://schemas.openxmlformats.org/officeDocument/2006/relationships" xmlns:p="http://schemas.openxmlformats.org/presentationml/2006/main">
   <p:cSld>
     <p:bg>
@@ -20901,7 +22998,7 @@
           <a:p>
             <a:fld id="{846B06B1-1179-491F-A487-8E0C403F7C13}" type="slidenum">
               <a:rPr lang="fr-CA" smtClean="0"/>
-              <a:t>26</a:t>
+              <a:t>27</a:t>
             </a:fld>
             <a:endParaRPr lang="fr-CA"/>
           </a:p>
@@ -21639,7 +23736,7 @@
 </p:sld>
 </file>
 
-<file path=ppt/slides/slide27.xml><?xml version="1.0" encoding="utf-8"?>
+<file path=ppt/slides/slide28.xml><?xml version="1.0" encoding="utf-8"?>
 <p:sld xmlns:a="http://schemas.openxmlformats.org/drawingml/2006/main" xmlns:r="http://schemas.openxmlformats.org/officeDocument/2006/relationships" xmlns:p="http://schemas.openxmlformats.org/presentationml/2006/main">
   <p:cSld>
     <p:bg>
@@ -22157,7 +24254,7 @@
           <a:p>
             <a:fld id="{846B06B1-1179-491F-A487-8E0C403F7C13}" type="slidenum">
               <a:rPr lang="fr-CA" smtClean="0"/>
-              <a:t>27</a:t>
+              <a:t>28</a:t>
             </a:fld>
             <a:endParaRPr lang="fr-CA"/>
           </a:p>
@@ -22871,7 +24968,7 @@
 </p:sld>
 </file>
 
-<file path=ppt/slides/slide28.xml><?xml version="1.0" encoding="utf-8"?>
+<file path=ppt/slides/slide29.xml><?xml version="1.0" encoding="utf-8"?>
 <p:sld xmlns:a="http://schemas.openxmlformats.org/drawingml/2006/main" xmlns:r="http://schemas.openxmlformats.org/officeDocument/2006/relationships" xmlns:p="http://schemas.openxmlformats.org/presentationml/2006/main">
   <p:cSld>
     <p:bg>
@@ -23153,7 +25250,7 @@
           <a:p>
             <a:fld id="{846B06B1-1179-491F-A487-8E0C403F7C13}" type="slidenum">
               <a:rPr lang="fr-CA" smtClean="0"/>
-              <a:t>28</a:t>
+              <a:t>29</a:t>
             </a:fld>
             <a:endParaRPr lang="fr-CA"/>
           </a:p>
@@ -23585,7 +25682,1392 @@
 </p:sld>
 </file>
 
-<file path=ppt/slides/slide29.xml><?xml version="1.0" encoding="utf-8"?>
+<file path=ppt/slides/slide3.xml><?xml version="1.0" encoding="utf-8"?>
+<p:sld xmlns:a="http://schemas.openxmlformats.org/drawingml/2006/main" xmlns:r="http://schemas.openxmlformats.org/officeDocument/2006/relationships" xmlns:p="http://schemas.openxmlformats.org/presentationml/2006/main">
+  <p:cSld>
+    <p:bg>
+      <p:bgPr>
+        <a:solidFill>
+          <a:srgbClr val="F5F5F5"/>
+        </a:solidFill>
+        <a:effectLst/>
+      </p:bgPr>
+    </p:bg>
+    <p:spTree>
+      <p:nvGrpSpPr>
+        <p:cNvPr id="1" name="">
+          <a:extLst>
+            <a:ext uri="{FF2B5EF4-FFF2-40B4-BE49-F238E27FC236}">
+              <a16:creationId xmlns:a16="http://schemas.microsoft.com/office/drawing/2014/main" id="{7AE562C1-DEBE-120A-68B7-9B3CEE9F8CF7}"/>
+            </a:ext>
+          </a:extLst>
+        </p:cNvPr>
+        <p:cNvGrpSpPr/>
+        <p:nvPr/>
+      </p:nvGrpSpPr>
+      <p:grpSpPr>
+        <a:xfrm>
+          <a:off x="0" y="0"/>
+          <a:ext cx="0" cy="0"/>
+          <a:chOff x="0" y="0"/>
+          <a:chExt cx="0" cy="0"/>
+        </a:xfrm>
+      </p:grpSpPr>
+      <p:sp>
+        <p:nvSpPr>
+          <p:cNvPr id="2" name="Title 1">
+            <a:extLst>
+              <a:ext uri="{FF2B5EF4-FFF2-40B4-BE49-F238E27FC236}">
+                <a16:creationId xmlns:a16="http://schemas.microsoft.com/office/drawing/2014/main" id="{9DD94D18-8A9D-0F83-56A0-3E229B4F30F4}"/>
+              </a:ext>
+            </a:extLst>
+          </p:cNvPr>
+          <p:cNvSpPr>
+            <a:spLocks noGrp="1"/>
+          </p:cNvSpPr>
+          <p:nvPr>
+            <p:ph type="title"/>
+          </p:nvPr>
+        </p:nvSpPr>
+        <p:spPr/>
+        <p:txBody>
+          <a:bodyPr/>
+          <a:lstStyle/>
+          <a:p>
+            <a:r>
+              <a:rPr lang="en-US" dirty="0">
+                <a:latin typeface="Arial Rounded MT Bold" panose="020F0704030504030204" pitchFamily="34" charset="0"/>
+              </a:rPr>
+              <a:t>Tests: Assertions</a:t>
+            </a:r>
+            <a:endParaRPr lang="fr-CA" dirty="0">
+              <a:latin typeface="Arial Rounded MT Bold" panose="020F0704030504030204" pitchFamily="34" charset="0"/>
+            </a:endParaRPr>
+          </a:p>
+        </p:txBody>
+      </p:sp>
+      <p:sp>
+        <p:nvSpPr>
+          <p:cNvPr id="3" name="Content Placeholder 2">
+            <a:extLst>
+              <a:ext uri="{FF2B5EF4-FFF2-40B4-BE49-F238E27FC236}">
+                <a16:creationId xmlns:a16="http://schemas.microsoft.com/office/drawing/2014/main" id="{4CF6E5EC-3D7E-2CEA-1F5C-3BC34F96A110}"/>
+              </a:ext>
+            </a:extLst>
+          </p:cNvPr>
+          <p:cNvSpPr>
+            <a:spLocks noGrp="1"/>
+          </p:cNvSpPr>
+          <p:nvPr>
+            <p:ph idx="1"/>
+          </p:nvPr>
+        </p:nvSpPr>
+        <p:spPr/>
+        <p:txBody>
+          <a:bodyPr>
+            <a:normAutofit/>
+          </a:bodyPr>
+          <a:lstStyle/>
+          <a:p>
+            <a:pPr algn="just"/>
+            <a:br>
+              <a:rPr lang="fr-CA" sz="1600" dirty="0">
+                <a:latin typeface="Consolas" panose="020B0609020204030204" pitchFamily="49" charset="0"/>
+              </a:rPr>
+            </a:br>
+            <a:endParaRPr lang="fr-CA" sz="1600" dirty="0">
+              <a:latin typeface="Consolas" panose="020B0609020204030204" pitchFamily="49" charset="0"/>
+            </a:endParaRPr>
+          </a:p>
+          <a:p>
+            <a:pPr algn="just">
+              <a:lnSpc>
+                <a:spcPct val="110000"/>
+              </a:lnSpc>
+            </a:pPr>
+            <a:r>
+              <a:rPr lang="fr-CA" sz="1600" dirty="0">
+                <a:latin typeface="Consolas" panose="020B0609020204030204" pitchFamily="49" charset="0"/>
+              </a:rPr>
+              <a:t>Lance une erreur (</a:t>
+            </a:r>
+            <a:r>
+              <a:rPr lang="fr-CA" sz="1600" dirty="0" err="1">
+                <a:latin typeface="Consolas" panose="020B0609020204030204" pitchFamily="49" charset="0"/>
+              </a:rPr>
+              <a:t>AssertionError</a:t>
+            </a:r>
+            <a:r>
+              <a:rPr lang="fr-CA" sz="1600" dirty="0">
+                <a:latin typeface="Consolas" panose="020B0609020204030204" pitchFamily="49" charset="0"/>
+              </a:rPr>
+              <a:t>) lorsqu'une condition est fausse</a:t>
+            </a:r>
+          </a:p>
+          <a:p>
+            <a:pPr lvl="1" algn="just">
+              <a:lnSpc>
+                <a:spcPct val="110000"/>
+              </a:lnSpc>
+            </a:pPr>
+            <a:r>
+              <a:rPr lang="fr-CA" sz="1600" dirty="0">
+                <a:latin typeface="Consolas" panose="020B0609020204030204" pitchFamily="49" charset="0"/>
+              </a:rPr>
+              <a:t>Modèle mental: </a:t>
+            </a:r>
+            <a:r>
+              <a:rPr lang="fr-CA" sz="1600" b="1" dirty="0">
+                <a:latin typeface="Consolas" panose="020B0609020204030204" pitchFamily="49" charset="0"/>
+              </a:rPr>
+              <a:t>Lorsqu'un test échoue</a:t>
+            </a:r>
+          </a:p>
+          <a:p>
+            <a:pPr algn="just">
+              <a:lnSpc>
+                <a:spcPct val="160000"/>
+              </a:lnSpc>
+            </a:pPr>
+            <a:r>
+              <a:rPr lang="fr-CA" sz="1600" dirty="0">
+                <a:latin typeface="Consolas" panose="020B0609020204030204" pitchFamily="49" charset="0"/>
+              </a:rPr>
+              <a:t>Pour </a:t>
+            </a:r>
+            <a:r>
+              <a:rPr lang="fr-CA" sz="1600" b="1" dirty="0">
+                <a:latin typeface="Consolas" panose="020B0609020204030204" pitchFamily="49" charset="0"/>
+              </a:rPr>
+              <a:t>ce qui doit absolument être vrai</a:t>
+            </a:r>
+            <a:endParaRPr lang="fr-CA" sz="1600" dirty="0">
+              <a:latin typeface="Consolas" panose="020B0609020204030204" pitchFamily="49" charset="0"/>
+            </a:endParaRPr>
+          </a:p>
+          <a:p>
+            <a:pPr algn="just">
+              <a:lnSpc>
+                <a:spcPct val="150000"/>
+              </a:lnSpc>
+            </a:pPr>
+            <a:r>
+              <a:rPr lang="fr-CA" sz="1600" dirty="0">
+                <a:latin typeface="Consolas" panose="020B0609020204030204" pitchFamily="49" charset="0"/>
+              </a:rPr>
+              <a:t>Peut être désactivé à l'exécution (</a:t>
+            </a:r>
+            <a:r>
+              <a:rPr lang="fr-CA" sz="1600" b="1" dirty="0">
+                <a:latin typeface="Consolas" panose="020B0609020204030204" pitchFamily="49" charset="0"/>
+              </a:rPr>
+              <a:t>python -O</a:t>
+            </a:r>
+            <a:r>
+              <a:rPr lang="fr-CA" sz="1600" dirty="0">
+                <a:latin typeface="Consolas" panose="020B0609020204030204" pitchFamily="49" charset="0"/>
+              </a:rPr>
+              <a:t>) ... sauf pour la NASA</a:t>
+            </a:r>
+          </a:p>
+          <a:p>
+            <a:pPr marL="0" indent="0" algn="ctr">
+              <a:buNone/>
+            </a:pPr>
+            <a:r>
+              <a:rPr lang="fr-CA" sz="1400" dirty="0">
+                <a:latin typeface="Consolas" panose="020B0609020204030204" pitchFamily="49" charset="0"/>
+                <a:hlinkClick r:id="rId2"/>
+              </a:rPr>
+              <a:t>https://fr.wikipedia.org/wiki/The_Power_of_10:_Rules_for_Developing_Safety-Critical_Code</a:t>
+            </a:r>
+            <a:endParaRPr lang="fr-CA" sz="1400" dirty="0">
+              <a:latin typeface="Consolas" panose="020B0609020204030204" pitchFamily="49" charset="0"/>
+            </a:endParaRPr>
+          </a:p>
+        </p:txBody>
+      </p:sp>
+      <p:sp>
+        <p:nvSpPr>
+          <p:cNvPr id="5" name="Slide Number Placeholder 4">
+            <a:extLst>
+              <a:ext uri="{FF2B5EF4-FFF2-40B4-BE49-F238E27FC236}">
+                <a16:creationId xmlns:a16="http://schemas.microsoft.com/office/drawing/2014/main" id="{1FA2DB27-CAC8-7766-F85F-45770DF3095A}"/>
+              </a:ext>
+            </a:extLst>
+          </p:cNvPr>
+          <p:cNvSpPr>
+            <a:spLocks noGrp="1"/>
+          </p:cNvSpPr>
+          <p:nvPr>
+            <p:ph type="sldNum" sz="quarter" idx="12"/>
+          </p:nvPr>
+        </p:nvSpPr>
+        <p:spPr/>
+        <p:txBody>
+          <a:bodyPr/>
+          <a:lstStyle/>
+          <a:p>
+            <a:fld id="{846B06B1-1179-491F-A487-8E0C403F7C13}" type="slidenum">
+              <a:rPr lang="fr-CA" smtClean="0"/>
+              <a:t>3</a:t>
+            </a:fld>
+            <a:endParaRPr lang="fr-CA" dirty="0"/>
+          </a:p>
+        </p:txBody>
+      </p:sp>
+      <p:sp>
+        <p:nvSpPr>
+          <p:cNvPr id="4" name="TextBox 3">
+            <a:extLst>
+              <a:ext uri="{FF2B5EF4-FFF2-40B4-BE49-F238E27FC236}">
+                <a16:creationId xmlns:a16="http://schemas.microsoft.com/office/drawing/2014/main" id="{57A8D393-74C1-0C40-F408-06525D65E091}"/>
+              </a:ext>
+            </a:extLst>
+          </p:cNvPr>
+          <p:cNvSpPr txBox="1"/>
+          <p:nvPr/>
+        </p:nvSpPr>
+        <p:spPr>
+          <a:xfrm>
+            <a:off x="2230873" y="1728788"/>
+            <a:ext cx="7730249" cy="442630"/>
+          </a:xfrm>
+          <a:prstGeom prst="roundRect">
+            <a:avLst/>
+          </a:prstGeom>
+          <a:solidFill>
+            <a:srgbClr val="FFF2CC">
+              <a:alpha val="49803"/>
+            </a:srgbClr>
+          </a:solidFill>
+          <a:ln w="9525" cap="flat" cmpd="sng">
+            <a:solidFill>
+              <a:schemeClr val="dk1"/>
+            </a:solidFill>
+            <a:prstDash val="solid"/>
+            <a:round/>
+            <a:headEnd type="none" w="sm" len="sm"/>
+            <a:tailEnd type="none" w="sm" len="sm"/>
+          </a:ln>
+        </p:spPr>
+        <p:txBody>
+          <a:bodyPr spcFirstLastPara="1" wrap="square" lIns="91425" tIns="45700" rIns="91425" bIns="45700" anchor="t" anchorCtr="0">
+            <a:spAutoFit/>
+          </a:bodyPr>
+          <a:lstStyle>
+            <a:defPPr>
+              <a:defRPr lang="en-US"/>
+            </a:defPPr>
+            <a:lvl1pPr marR="0" lvl="0" indent="0" algn="ctr">
+              <a:lnSpc>
+                <a:spcPct val="100000"/>
+              </a:lnSpc>
+              <a:spcBef>
+                <a:spcPts val="0"/>
+              </a:spcBef>
+              <a:spcAft>
+                <a:spcPts val="0"/>
+              </a:spcAft>
+              <a:buClr>
+                <a:srgbClr val="000000"/>
+              </a:buClr>
+              <a:buSzPts val="1400"/>
+              <a:buFont typeface="Consolas"/>
+              <a:buNone/>
+              <a:defRPr sz="2800" b="1" i="0" u="none" strike="noStrike" cap="none">
+                <a:solidFill>
+                  <a:srgbClr val="000000"/>
+                </a:solidFill>
+                <a:latin typeface="Consolas"/>
+                <a:ea typeface="Consolas"/>
+                <a:cs typeface="Consolas"/>
+              </a:defRPr>
+            </a:lvl1pPr>
+          </a:lstStyle>
+          <a:p>
+            <a:r>
+              <a:rPr lang="en-US" sz="2000" dirty="0"/>
+              <a:t>assert </a:t>
+            </a:r>
+            <a:r>
+              <a:rPr lang="en-US" sz="2000" dirty="0" err="1"/>
+              <a:t>expression_booleenne</a:t>
+            </a:r>
+            <a:r>
+              <a:rPr lang="en-US" sz="2000" dirty="0"/>
+              <a:t>, </a:t>
+            </a:r>
+            <a:r>
+              <a:rPr lang="en-US" sz="2000" dirty="0" err="1"/>
+              <a:t>message_si_faux</a:t>
+            </a:r>
+            <a:endParaRPr lang="en-US" sz="2000" dirty="0"/>
+          </a:p>
+        </p:txBody>
+      </p:sp>
+      <p:grpSp>
+        <p:nvGrpSpPr>
+          <p:cNvPr id="6" name="Google Shape;354;p18">
+            <a:extLst>
+              <a:ext uri="{FF2B5EF4-FFF2-40B4-BE49-F238E27FC236}">
+                <a16:creationId xmlns:a16="http://schemas.microsoft.com/office/drawing/2014/main" id="{530A920A-ECA4-8FCD-A08E-677BC9DD3228}"/>
+              </a:ext>
+            </a:extLst>
+          </p:cNvPr>
+          <p:cNvGrpSpPr/>
+          <p:nvPr/>
+        </p:nvGrpSpPr>
+        <p:grpSpPr>
+          <a:xfrm>
+            <a:off x="2306240" y="4664961"/>
+            <a:ext cx="7579514" cy="1512002"/>
+            <a:chOff x="6682372" y="3766184"/>
+            <a:chExt cx="8984825" cy="691201"/>
+          </a:xfrm>
+        </p:grpSpPr>
+        <p:sp>
+          <p:nvSpPr>
+            <p:cNvPr id="7" name="Google Shape;355;p18">
+              <a:extLst>
+                <a:ext uri="{FF2B5EF4-FFF2-40B4-BE49-F238E27FC236}">
+                  <a16:creationId xmlns:a16="http://schemas.microsoft.com/office/drawing/2014/main" id="{87D4FF6B-A94D-24FE-EF28-D0E429EA4110}"/>
+                </a:ext>
+              </a:extLst>
+            </p:cNvPr>
+            <p:cNvSpPr/>
+            <p:nvPr/>
+          </p:nvSpPr>
+          <p:spPr>
+            <a:xfrm>
+              <a:off x="6682372" y="3766184"/>
+              <a:ext cx="256567" cy="691200"/>
+            </a:xfrm>
+            <a:prstGeom prst="rect">
+              <a:avLst/>
+            </a:prstGeom>
+            <a:solidFill>
+              <a:srgbClr val="7F7F7F"/>
+            </a:solidFill>
+            <a:ln w="12700" cap="flat" cmpd="sng">
+              <a:solidFill>
+                <a:schemeClr val="dk1"/>
+              </a:solidFill>
+              <a:prstDash val="solid"/>
+              <a:miter lim="800000"/>
+              <a:headEnd type="none" w="sm" len="sm"/>
+              <a:tailEnd type="none" w="sm" len="sm"/>
+            </a:ln>
+          </p:spPr>
+          <p:txBody>
+            <a:bodyPr spcFirstLastPara="1" wrap="square" lIns="91425" tIns="45700" rIns="91425" bIns="45700" anchor="ctr" anchorCtr="0">
+              <a:noAutofit/>
+            </a:bodyPr>
+            <a:lstStyle/>
+            <a:p>
+              <a:pPr marL="0" marR="0" lvl="0" indent="0" algn="ctr" rtl="0">
+                <a:spcBef>
+                  <a:spcPts val="0"/>
+                </a:spcBef>
+                <a:spcAft>
+                  <a:spcPts val="0"/>
+                </a:spcAft>
+                <a:buNone/>
+              </a:pPr>
+              <a:r>
+                <a:rPr lang="fr-CA" sz="1400" dirty="0">
+                  <a:solidFill>
+                    <a:schemeClr val="lt1"/>
+                  </a:solidFill>
+                  <a:latin typeface="Calibri"/>
+                  <a:ea typeface="Calibri"/>
+                  <a:cs typeface="Calibri"/>
+                  <a:sym typeface="Calibri"/>
+                </a:rPr>
+                <a:t>1</a:t>
+              </a:r>
+              <a:endParaRPr dirty="0"/>
+            </a:p>
+            <a:p>
+              <a:pPr marL="0" marR="0" lvl="0" indent="0" algn="ctr" rtl="0">
+                <a:spcBef>
+                  <a:spcPts val="0"/>
+                </a:spcBef>
+                <a:spcAft>
+                  <a:spcPts val="0"/>
+                </a:spcAft>
+                <a:buNone/>
+              </a:pPr>
+              <a:r>
+                <a:rPr lang="fr-CA" sz="1400" dirty="0">
+                  <a:solidFill>
+                    <a:schemeClr val="lt1"/>
+                  </a:solidFill>
+                  <a:latin typeface="Calibri"/>
+                  <a:ea typeface="Calibri"/>
+                  <a:cs typeface="Calibri"/>
+                  <a:sym typeface="Calibri"/>
+                </a:rPr>
+                <a:t>23</a:t>
+              </a:r>
+              <a:endParaRPr dirty="0"/>
+            </a:p>
+            <a:p>
+              <a:pPr marL="0" marR="0" lvl="0" indent="0" algn="ctr" rtl="0">
+                <a:spcBef>
+                  <a:spcPts val="0"/>
+                </a:spcBef>
+                <a:spcAft>
+                  <a:spcPts val="0"/>
+                </a:spcAft>
+                <a:buNone/>
+              </a:pPr>
+              <a:r>
+                <a:rPr lang="fr-CA" sz="1400" dirty="0">
+                  <a:solidFill>
+                    <a:schemeClr val="lt1"/>
+                  </a:solidFill>
+                  <a:latin typeface="Calibri"/>
+                  <a:ea typeface="Calibri"/>
+                  <a:cs typeface="Calibri"/>
+                  <a:sym typeface="Calibri"/>
+                </a:rPr>
+                <a:t>4</a:t>
+              </a:r>
+              <a:endParaRPr dirty="0"/>
+            </a:p>
+            <a:p>
+              <a:pPr marL="0" marR="0" lvl="0" indent="0" algn="ctr" rtl="0">
+                <a:spcBef>
+                  <a:spcPts val="0"/>
+                </a:spcBef>
+                <a:spcAft>
+                  <a:spcPts val="0"/>
+                </a:spcAft>
+                <a:buNone/>
+              </a:pPr>
+              <a:r>
+                <a:rPr lang="fr-CA" sz="1400" dirty="0">
+                  <a:solidFill>
+                    <a:schemeClr val="lt1"/>
+                  </a:solidFill>
+                  <a:latin typeface="Calibri"/>
+                  <a:ea typeface="Calibri"/>
+                  <a:cs typeface="Calibri"/>
+                  <a:sym typeface="Calibri"/>
+                </a:rPr>
+                <a:t>5</a:t>
+              </a:r>
+            </a:p>
+            <a:p>
+              <a:pPr marL="0" marR="0" lvl="0" indent="0" algn="ctr" rtl="0">
+                <a:spcBef>
+                  <a:spcPts val="0"/>
+                </a:spcBef>
+                <a:spcAft>
+                  <a:spcPts val="0"/>
+                </a:spcAft>
+                <a:buNone/>
+              </a:pPr>
+              <a:r>
+                <a:rPr lang="fr-CA" sz="1400" dirty="0">
+                  <a:solidFill>
+                    <a:schemeClr val="lt1"/>
+                  </a:solidFill>
+                  <a:latin typeface="Calibri"/>
+                  <a:ea typeface="Calibri"/>
+                  <a:cs typeface="Calibri"/>
+                  <a:sym typeface="Calibri"/>
+                </a:rPr>
+                <a:t>6</a:t>
+              </a:r>
+              <a:endParaRPr dirty="0"/>
+            </a:p>
+          </p:txBody>
+        </p:sp>
+        <p:sp>
+          <p:nvSpPr>
+            <p:cNvPr id="8" name="Google Shape;356;p18">
+              <a:extLst>
+                <a:ext uri="{FF2B5EF4-FFF2-40B4-BE49-F238E27FC236}">
+                  <a16:creationId xmlns:a16="http://schemas.microsoft.com/office/drawing/2014/main" id="{4C789759-180C-72BA-D687-8BF5005AF9F0}"/>
+                </a:ext>
+              </a:extLst>
+            </p:cNvPr>
+            <p:cNvSpPr/>
+            <p:nvPr/>
+          </p:nvSpPr>
+          <p:spPr>
+            <a:xfrm>
+              <a:off x="6938939" y="3766185"/>
+              <a:ext cx="8728258" cy="691200"/>
+            </a:xfrm>
+            <a:prstGeom prst="rect">
+              <a:avLst/>
+            </a:prstGeom>
+            <a:solidFill>
+              <a:schemeClr val="dk1"/>
+            </a:solidFill>
+            <a:ln w="12700" cap="flat" cmpd="sng">
+              <a:solidFill>
+                <a:schemeClr val="dk1"/>
+              </a:solidFill>
+              <a:prstDash val="solid"/>
+              <a:miter lim="800000"/>
+              <a:headEnd type="none" w="sm" len="sm"/>
+              <a:tailEnd type="none" w="sm" len="sm"/>
+            </a:ln>
+          </p:spPr>
+          <p:txBody>
+            <a:bodyPr spcFirstLastPara="1" wrap="square" lIns="91425" tIns="45700" rIns="91425" bIns="45700" anchor="ctr" anchorCtr="0">
+              <a:noAutofit/>
+            </a:bodyPr>
+            <a:lstStyle/>
+            <a:p>
+              <a:r>
+                <a:rPr lang="en-CA" sz="1400" b="1" dirty="0">
+                  <a:solidFill>
+                    <a:schemeClr val="bg1"/>
+                  </a:solidFill>
+                  <a:latin typeface="Consolas" panose="020B0609020204030204" pitchFamily="49" charset="0"/>
+                </a:rPr>
+                <a:t>&gt;&gt;&gt; valeur_1 = int(input('</a:t>
+              </a:r>
+              <a:r>
+                <a:rPr lang="en-CA" sz="1400" b="1" dirty="0" err="1">
+                  <a:solidFill>
+                    <a:schemeClr val="bg1"/>
+                  </a:solidFill>
+                  <a:latin typeface="Consolas" panose="020B0609020204030204" pitchFamily="49" charset="0"/>
+                </a:rPr>
+                <a:t>Saisir</a:t>
+              </a:r>
+              <a:r>
+                <a:rPr lang="en-CA" sz="1400" b="1" dirty="0">
+                  <a:solidFill>
+                    <a:schemeClr val="bg1"/>
+                  </a:solidFill>
+                  <a:latin typeface="Consolas" panose="020B0609020204030204" pitchFamily="49" charset="0"/>
+                </a:rPr>
+                <a:t> un </a:t>
+              </a:r>
+              <a:r>
+                <a:rPr lang="en-CA" sz="1400" b="1" dirty="0" err="1">
+                  <a:solidFill>
+                    <a:schemeClr val="bg1"/>
+                  </a:solidFill>
+                  <a:latin typeface="Consolas" panose="020B0609020204030204" pitchFamily="49" charset="0"/>
+                </a:rPr>
+                <a:t>entier</a:t>
+              </a:r>
+              <a:r>
+                <a:rPr lang="en-CA" sz="1400" b="1" dirty="0">
+                  <a:solidFill>
+                    <a:schemeClr val="bg1"/>
+                  </a:solidFill>
+                  <a:latin typeface="Consolas" panose="020B0609020204030204" pitchFamily="49" charset="0"/>
+                </a:rPr>
+                <a:t>: '))</a:t>
+              </a:r>
+            </a:p>
+            <a:p>
+              <a:r>
+                <a:rPr lang="en-CA" sz="1400" b="1" dirty="0" err="1">
+                  <a:solidFill>
+                    <a:schemeClr val="bg1"/>
+                  </a:solidFill>
+                  <a:latin typeface="Consolas" panose="020B0609020204030204" pitchFamily="49" charset="0"/>
+                </a:rPr>
+                <a:t>Saisir</a:t>
+              </a:r>
+              <a:r>
+                <a:rPr lang="en-CA" sz="1400" b="1" dirty="0">
+                  <a:solidFill>
+                    <a:schemeClr val="bg1"/>
+                  </a:solidFill>
+                  <a:latin typeface="Consolas" panose="020B0609020204030204" pitchFamily="49" charset="0"/>
+                </a:rPr>
+                <a:t> un </a:t>
+              </a:r>
+              <a:r>
+                <a:rPr lang="en-CA" sz="1400" b="1" dirty="0" err="1">
+                  <a:solidFill>
+                    <a:schemeClr val="bg1"/>
+                  </a:solidFill>
+                  <a:latin typeface="Consolas" panose="020B0609020204030204" pitchFamily="49" charset="0"/>
+                </a:rPr>
+                <a:t>entier</a:t>
+              </a:r>
+              <a:r>
+                <a:rPr lang="en-CA" sz="1400" b="1" dirty="0">
+                  <a:solidFill>
+                    <a:schemeClr val="bg1"/>
+                  </a:solidFill>
+                  <a:latin typeface="Consolas" panose="020B0609020204030204" pitchFamily="49" charset="0"/>
+                </a:rPr>
+                <a:t>: 1</a:t>
+              </a:r>
+            </a:p>
+            <a:p>
+              <a:r>
+                <a:rPr lang="en-CA" sz="1400" b="1" dirty="0">
+                  <a:solidFill>
+                    <a:schemeClr val="bg1"/>
+                  </a:solidFill>
+                  <a:latin typeface="Consolas" panose="020B0609020204030204" pitchFamily="49" charset="0"/>
+                </a:rPr>
+                <a:t>&gt;&gt;&gt; valeur_2 = int(input('</a:t>
+              </a:r>
+              <a:r>
+                <a:rPr lang="en-CA" sz="1400" b="1" dirty="0" err="1">
+                  <a:solidFill>
+                    <a:schemeClr val="bg1"/>
+                  </a:solidFill>
+                  <a:latin typeface="Consolas" panose="020B0609020204030204" pitchFamily="49" charset="0"/>
+                </a:rPr>
+                <a:t>Saisir</a:t>
+              </a:r>
+              <a:r>
+                <a:rPr lang="en-CA" sz="1400" b="1" dirty="0">
+                  <a:solidFill>
+                    <a:schemeClr val="bg1"/>
+                  </a:solidFill>
+                  <a:latin typeface="Consolas" panose="020B0609020204030204" pitchFamily="49" charset="0"/>
+                </a:rPr>
+                <a:t> un </a:t>
+              </a:r>
+              <a:r>
+                <a:rPr lang="en-CA" sz="1400" b="1" dirty="0" err="1">
+                  <a:solidFill>
+                    <a:schemeClr val="bg1"/>
+                  </a:solidFill>
+                  <a:latin typeface="Consolas" panose="020B0609020204030204" pitchFamily="49" charset="0"/>
+                </a:rPr>
+                <a:t>entier</a:t>
+              </a:r>
+              <a:r>
+                <a:rPr lang="en-CA" sz="1400" b="1" dirty="0">
+                  <a:solidFill>
+                    <a:schemeClr val="bg1"/>
+                  </a:solidFill>
+                  <a:latin typeface="Consolas" panose="020B0609020204030204" pitchFamily="49" charset="0"/>
+                </a:rPr>
+                <a:t> diff</a:t>
+              </a:r>
+              <a:r>
+                <a:rPr lang="fr-CA" sz="1400" b="1" dirty="0" err="1">
+                  <a:solidFill>
+                    <a:schemeClr val="bg1"/>
+                  </a:solidFill>
+                  <a:latin typeface="Consolas" panose="020B0609020204030204" pitchFamily="49" charset="0"/>
+                </a:rPr>
+                <a:t>érent</a:t>
+              </a:r>
+              <a:r>
+                <a:rPr lang="fr-CA" sz="1400" b="1" dirty="0">
+                  <a:solidFill>
+                    <a:schemeClr val="bg1"/>
+                  </a:solidFill>
+                  <a:latin typeface="Consolas" panose="020B0609020204030204" pitchFamily="49" charset="0"/>
+                </a:rPr>
+                <a:t>: '))</a:t>
+              </a:r>
+            </a:p>
+            <a:p>
+              <a:r>
+                <a:rPr lang="en-CA" sz="1400" b="1" dirty="0" err="1">
+                  <a:solidFill>
+                    <a:schemeClr val="bg1"/>
+                  </a:solidFill>
+                  <a:latin typeface="Consolas" panose="020B0609020204030204" pitchFamily="49" charset="0"/>
+                </a:rPr>
+                <a:t>Saisir</a:t>
+              </a:r>
+              <a:r>
+                <a:rPr lang="en-CA" sz="1400" b="1" dirty="0">
+                  <a:solidFill>
+                    <a:schemeClr val="bg1"/>
+                  </a:solidFill>
+                  <a:latin typeface="Consolas" panose="020B0609020204030204" pitchFamily="49" charset="0"/>
+                </a:rPr>
+                <a:t> un </a:t>
+              </a:r>
+              <a:r>
+                <a:rPr lang="en-CA" sz="1400" b="1" dirty="0" err="1">
+                  <a:solidFill>
+                    <a:schemeClr val="bg1"/>
+                  </a:solidFill>
+                  <a:latin typeface="Consolas" panose="020B0609020204030204" pitchFamily="49" charset="0"/>
+                </a:rPr>
+                <a:t>entier</a:t>
+              </a:r>
+              <a:r>
+                <a:rPr lang="en-CA" sz="1400" b="1" dirty="0">
+                  <a:solidFill>
+                    <a:schemeClr val="bg1"/>
+                  </a:solidFill>
+                  <a:latin typeface="Consolas" panose="020B0609020204030204" pitchFamily="49" charset="0"/>
+                </a:rPr>
+                <a:t> diff</a:t>
+              </a:r>
+              <a:r>
+                <a:rPr lang="fr-CA" sz="1400" b="1" dirty="0" err="1">
+                  <a:solidFill>
+                    <a:schemeClr val="bg1"/>
+                  </a:solidFill>
+                  <a:latin typeface="Consolas" panose="020B0609020204030204" pitchFamily="49" charset="0"/>
+                </a:rPr>
+                <a:t>érent</a:t>
+              </a:r>
+              <a:r>
+                <a:rPr lang="fr-CA" sz="1400" b="1" dirty="0">
+                  <a:solidFill>
+                    <a:schemeClr val="bg1"/>
+                  </a:solidFill>
+                  <a:latin typeface="Consolas" panose="020B0609020204030204" pitchFamily="49" charset="0"/>
+                </a:rPr>
+                <a:t>: 1</a:t>
+              </a:r>
+            </a:p>
+            <a:p>
+              <a:r>
+                <a:rPr lang="en-CA" sz="1400" b="1" dirty="0">
+                  <a:solidFill>
+                    <a:schemeClr val="bg1"/>
+                  </a:solidFill>
+                  <a:latin typeface="Consolas" panose="020B0609020204030204" pitchFamily="49" charset="0"/>
+                </a:rPr>
+                <a:t>&gt;&gt;&gt; </a:t>
+              </a:r>
+              <a:r>
+                <a:rPr lang="en-CA" sz="1400" b="1" dirty="0">
+                  <a:solidFill>
+                    <a:srgbClr val="FF2500"/>
+                  </a:solidFill>
+                  <a:latin typeface="Consolas" panose="020B0609020204030204" pitchFamily="49" charset="0"/>
+                </a:rPr>
+                <a:t>assert</a:t>
+              </a:r>
+              <a:r>
+                <a:rPr lang="en-CA" sz="1400" b="1" dirty="0">
+                  <a:solidFill>
+                    <a:schemeClr val="bg1"/>
+                  </a:solidFill>
+                  <a:latin typeface="Consolas" panose="020B0609020204030204" pitchFamily="49" charset="0"/>
+                </a:rPr>
+                <a:t> valeur_1 != valeur_2, 'Les </a:t>
+              </a:r>
+              <a:r>
+                <a:rPr lang="en-CA" sz="1400" b="1" dirty="0" err="1">
+                  <a:solidFill>
+                    <a:schemeClr val="bg1"/>
+                  </a:solidFill>
+                  <a:latin typeface="Consolas" panose="020B0609020204030204" pitchFamily="49" charset="0"/>
+                </a:rPr>
+                <a:t>valeurs</a:t>
+              </a:r>
+              <a:r>
+                <a:rPr lang="en-CA" sz="1400" b="1" dirty="0">
+                  <a:solidFill>
+                    <a:schemeClr val="bg1"/>
+                  </a:solidFill>
+                  <a:latin typeface="Consolas" panose="020B0609020204030204" pitchFamily="49" charset="0"/>
+                </a:rPr>
+                <a:t> </a:t>
+              </a:r>
+              <a:r>
+                <a:rPr lang="en-CA" sz="1400" b="1" dirty="0" err="1">
+                  <a:solidFill>
+                    <a:schemeClr val="bg1"/>
+                  </a:solidFill>
+                  <a:latin typeface="Consolas" panose="020B0609020204030204" pitchFamily="49" charset="0"/>
+                </a:rPr>
+                <a:t>doivent</a:t>
+              </a:r>
+              <a:r>
+                <a:rPr lang="en-CA" sz="1400" b="1" dirty="0">
+                  <a:solidFill>
+                    <a:schemeClr val="bg1"/>
+                  </a:solidFill>
+                  <a:latin typeface="Consolas" panose="020B0609020204030204" pitchFamily="49" charset="0"/>
+                </a:rPr>
+                <a:t> </a:t>
+              </a:r>
+              <a:r>
+                <a:rPr lang="en-CA" sz="1400" b="1" dirty="0" err="1">
+                  <a:solidFill>
+                    <a:schemeClr val="bg1"/>
+                  </a:solidFill>
+                  <a:latin typeface="Consolas" panose="020B0609020204030204" pitchFamily="49" charset="0"/>
+                </a:rPr>
+                <a:t>être</a:t>
+              </a:r>
+              <a:r>
+                <a:rPr lang="en-CA" sz="1400" b="1" dirty="0">
+                  <a:solidFill>
+                    <a:schemeClr val="bg1"/>
+                  </a:solidFill>
+                  <a:latin typeface="Consolas" panose="020B0609020204030204" pitchFamily="49" charset="0"/>
+                </a:rPr>
+                <a:t> </a:t>
+              </a:r>
+              <a:r>
+                <a:rPr lang="en-CA" sz="1400" b="1" dirty="0" err="1">
+                  <a:solidFill>
+                    <a:schemeClr val="bg1"/>
+                  </a:solidFill>
+                  <a:latin typeface="Consolas" panose="020B0609020204030204" pitchFamily="49" charset="0"/>
+                </a:rPr>
+                <a:t>différentes</a:t>
+              </a:r>
+              <a:r>
+                <a:rPr lang="en-CA" sz="1400" b="1" dirty="0">
+                  <a:solidFill>
+                    <a:schemeClr val="bg1"/>
+                  </a:solidFill>
+                  <a:latin typeface="Consolas" panose="020B0609020204030204" pitchFamily="49" charset="0"/>
+                </a:rPr>
+                <a:t>'</a:t>
+              </a:r>
+            </a:p>
+            <a:p>
+              <a:pPr algn="just"/>
+              <a:r>
+                <a:rPr lang="en-CA" sz="1400" b="1" dirty="0" err="1">
+                  <a:solidFill>
+                    <a:schemeClr val="bg1"/>
+                  </a:solidFill>
+                  <a:latin typeface="Consolas" panose="020B0609020204030204" pitchFamily="49" charset="0"/>
+                </a:rPr>
+                <a:t>AssertionError</a:t>
+              </a:r>
+              <a:r>
+                <a:rPr lang="en-CA" sz="1400" b="1" dirty="0">
+                  <a:solidFill>
+                    <a:schemeClr val="bg1"/>
+                  </a:solidFill>
+                  <a:latin typeface="Consolas" panose="020B0609020204030204" pitchFamily="49" charset="0"/>
+                </a:rPr>
+                <a:t>: Les </a:t>
+              </a:r>
+              <a:r>
+                <a:rPr lang="en-CA" sz="1400" b="1" dirty="0" err="1">
+                  <a:solidFill>
+                    <a:schemeClr val="bg1"/>
+                  </a:solidFill>
+                  <a:latin typeface="Consolas" panose="020B0609020204030204" pitchFamily="49" charset="0"/>
+                </a:rPr>
+                <a:t>valeurs</a:t>
+              </a:r>
+              <a:r>
+                <a:rPr lang="en-CA" sz="1400" b="1" dirty="0">
+                  <a:solidFill>
+                    <a:schemeClr val="bg1"/>
+                  </a:solidFill>
+                  <a:latin typeface="Consolas" panose="020B0609020204030204" pitchFamily="49" charset="0"/>
+                </a:rPr>
+                <a:t> </a:t>
+              </a:r>
+              <a:r>
+                <a:rPr lang="en-CA" sz="1400" b="1" dirty="0" err="1">
+                  <a:solidFill>
+                    <a:schemeClr val="bg1"/>
+                  </a:solidFill>
+                  <a:latin typeface="Consolas" panose="020B0609020204030204" pitchFamily="49" charset="0"/>
+                </a:rPr>
+                <a:t>doivent</a:t>
+              </a:r>
+              <a:r>
+                <a:rPr lang="en-CA" sz="1400" b="1" dirty="0">
+                  <a:solidFill>
+                    <a:schemeClr val="bg1"/>
+                  </a:solidFill>
+                  <a:latin typeface="Consolas" panose="020B0609020204030204" pitchFamily="49" charset="0"/>
+                </a:rPr>
+                <a:t> </a:t>
+              </a:r>
+              <a:r>
+                <a:rPr lang="en-CA" sz="1400" b="1" dirty="0" err="1">
+                  <a:solidFill>
+                    <a:schemeClr val="bg1"/>
+                  </a:solidFill>
+                  <a:latin typeface="Consolas" panose="020B0609020204030204" pitchFamily="49" charset="0"/>
+                </a:rPr>
+                <a:t>être</a:t>
+              </a:r>
+              <a:r>
+                <a:rPr lang="en-CA" sz="1400" b="1" dirty="0">
+                  <a:solidFill>
+                    <a:schemeClr val="bg1"/>
+                  </a:solidFill>
+                  <a:latin typeface="Consolas" panose="020B0609020204030204" pitchFamily="49" charset="0"/>
+                </a:rPr>
+                <a:t> </a:t>
+              </a:r>
+              <a:r>
+                <a:rPr lang="en-CA" sz="1400" b="1" dirty="0" err="1">
+                  <a:solidFill>
+                    <a:schemeClr val="bg1"/>
+                  </a:solidFill>
+                  <a:latin typeface="Consolas" panose="020B0609020204030204" pitchFamily="49" charset="0"/>
+                </a:rPr>
+                <a:t>différentes</a:t>
+              </a:r>
+              <a:endParaRPr lang="fr-CA" sz="1400" dirty="0">
+                <a:solidFill>
+                  <a:schemeClr val="bg1"/>
+                </a:solidFill>
+                <a:latin typeface="Consolas" panose="020B0609020204030204" pitchFamily="49" charset="0"/>
+              </a:endParaRPr>
+            </a:p>
+          </p:txBody>
+        </p:sp>
+      </p:grpSp>
+    </p:spTree>
+    <p:extLst>
+      <p:ext uri="{BB962C8B-B14F-4D97-AF65-F5344CB8AC3E}">
+        <p14:creationId xmlns:p14="http://schemas.microsoft.com/office/powerpoint/2010/main" val="3696665868"/>
+      </p:ext>
+    </p:extLst>
+  </p:cSld>
+  <p:clrMapOvr>
+    <a:masterClrMapping/>
+  </p:clrMapOvr>
+  <p:timing>
+    <p:tnLst>
+      <p:par>
+        <p:cTn id="1" dur="indefinite" restart="never" nodeType="tmRoot">
+          <p:childTnLst>
+            <p:seq concurrent="1" nextAc="seek">
+              <p:cTn id="2" dur="indefinite" nodeType="mainSeq">
+                <p:childTnLst>
+                  <p:par>
+                    <p:cTn id="3" fill="hold">
+                      <p:stCondLst>
+                        <p:cond delay="indefinite"/>
+                      </p:stCondLst>
+                      <p:childTnLst>
+                        <p:par>
+                          <p:cTn id="4" fill="hold">
+                            <p:stCondLst>
+                              <p:cond delay="0"/>
+                            </p:stCondLst>
+                            <p:childTnLst>
+                              <p:par>
+                                <p:cTn id="5" presetID="10" presetClass="entr" presetSubtype="0" fill="hold" nodeType="clickEffect">
+                                  <p:stCondLst>
+                                    <p:cond delay="0"/>
+                                  </p:stCondLst>
+                                  <p:childTnLst>
+                                    <p:set>
+                                      <p:cBhvr>
+                                        <p:cTn id="6" dur="1" fill="hold">
+                                          <p:stCondLst>
+                                            <p:cond delay="0"/>
+                                          </p:stCondLst>
+                                        </p:cTn>
+                                        <p:tgtEl>
+                                          <p:spTgt spid="3">
+                                            <p:txEl>
+                                              <p:pRg st="0" end="0"/>
+                                            </p:txEl>
+                                          </p:spTgt>
+                                        </p:tgtEl>
+                                        <p:attrNameLst>
+                                          <p:attrName>style.visibility</p:attrName>
+                                        </p:attrNameLst>
+                                      </p:cBhvr>
+                                      <p:to>
+                                        <p:strVal val="visible"/>
+                                      </p:to>
+                                    </p:set>
+                                    <p:animEffect transition="in" filter="fade">
+                                      <p:cBhvr>
+                                        <p:cTn id="7" dur="500"/>
+                                        <p:tgtEl>
+                                          <p:spTgt spid="3">
+                                            <p:txEl>
+                                              <p:pRg st="0" end="0"/>
+                                            </p:txEl>
+                                          </p:spTgt>
+                                        </p:tgtEl>
+                                      </p:cBhvr>
+                                    </p:animEffect>
+                                  </p:childTnLst>
+                                </p:cTn>
+                              </p:par>
+                            </p:childTnLst>
+                          </p:cTn>
+                        </p:par>
+                      </p:childTnLst>
+                    </p:cTn>
+                  </p:par>
+                  <p:par>
+                    <p:cTn id="8" fill="hold">
+                      <p:stCondLst>
+                        <p:cond delay="indefinite"/>
+                      </p:stCondLst>
+                      <p:childTnLst>
+                        <p:par>
+                          <p:cTn id="9" fill="hold">
+                            <p:stCondLst>
+                              <p:cond delay="0"/>
+                            </p:stCondLst>
+                            <p:childTnLst>
+                              <p:par>
+                                <p:cTn id="10" presetID="10" presetClass="entr" presetSubtype="0" fill="hold" nodeType="clickEffect">
+                                  <p:stCondLst>
+                                    <p:cond delay="0"/>
+                                  </p:stCondLst>
+                                  <p:childTnLst>
+                                    <p:set>
+                                      <p:cBhvr>
+                                        <p:cTn id="11" dur="1" fill="hold">
+                                          <p:stCondLst>
+                                            <p:cond delay="0"/>
+                                          </p:stCondLst>
+                                        </p:cTn>
+                                        <p:tgtEl>
+                                          <p:spTgt spid="3">
+                                            <p:txEl>
+                                              <p:pRg st="1" end="1"/>
+                                            </p:txEl>
+                                          </p:spTgt>
+                                        </p:tgtEl>
+                                        <p:attrNameLst>
+                                          <p:attrName>style.visibility</p:attrName>
+                                        </p:attrNameLst>
+                                      </p:cBhvr>
+                                      <p:to>
+                                        <p:strVal val="visible"/>
+                                      </p:to>
+                                    </p:set>
+                                    <p:animEffect transition="in" filter="fade">
+                                      <p:cBhvr>
+                                        <p:cTn id="12" dur="500"/>
+                                        <p:tgtEl>
+                                          <p:spTgt spid="3">
+                                            <p:txEl>
+                                              <p:pRg st="1" end="1"/>
+                                            </p:txEl>
+                                          </p:spTgt>
+                                        </p:tgtEl>
+                                      </p:cBhvr>
+                                    </p:animEffect>
+                                  </p:childTnLst>
+                                </p:cTn>
+                              </p:par>
+                            </p:childTnLst>
+                          </p:cTn>
+                        </p:par>
+                      </p:childTnLst>
+                    </p:cTn>
+                  </p:par>
+                  <p:par>
+                    <p:cTn id="13" fill="hold">
+                      <p:stCondLst>
+                        <p:cond delay="indefinite"/>
+                      </p:stCondLst>
+                      <p:childTnLst>
+                        <p:par>
+                          <p:cTn id="14" fill="hold">
+                            <p:stCondLst>
+                              <p:cond delay="0"/>
+                            </p:stCondLst>
+                            <p:childTnLst>
+                              <p:par>
+                                <p:cTn id="15" presetID="10" presetClass="entr" presetSubtype="0" fill="hold" nodeType="clickEffect">
+                                  <p:stCondLst>
+                                    <p:cond delay="0"/>
+                                  </p:stCondLst>
+                                  <p:childTnLst>
+                                    <p:set>
+                                      <p:cBhvr>
+                                        <p:cTn id="16" dur="1" fill="hold">
+                                          <p:stCondLst>
+                                            <p:cond delay="0"/>
+                                          </p:stCondLst>
+                                        </p:cTn>
+                                        <p:tgtEl>
+                                          <p:spTgt spid="3">
+                                            <p:txEl>
+                                              <p:pRg st="2" end="2"/>
+                                            </p:txEl>
+                                          </p:spTgt>
+                                        </p:tgtEl>
+                                        <p:attrNameLst>
+                                          <p:attrName>style.visibility</p:attrName>
+                                        </p:attrNameLst>
+                                      </p:cBhvr>
+                                      <p:to>
+                                        <p:strVal val="visible"/>
+                                      </p:to>
+                                    </p:set>
+                                    <p:animEffect transition="in" filter="fade">
+                                      <p:cBhvr>
+                                        <p:cTn id="17" dur="500"/>
+                                        <p:tgtEl>
+                                          <p:spTgt spid="3">
+                                            <p:txEl>
+                                              <p:pRg st="2" end="2"/>
+                                            </p:txEl>
+                                          </p:spTgt>
+                                        </p:tgtEl>
+                                      </p:cBhvr>
+                                    </p:animEffect>
+                                  </p:childTnLst>
+                                </p:cTn>
+                              </p:par>
+                            </p:childTnLst>
+                          </p:cTn>
+                        </p:par>
+                      </p:childTnLst>
+                    </p:cTn>
+                  </p:par>
+                  <p:par>
+                    <p:cTn id="18" fill="hold">
+                      <p:stCondLst>
+                        <p:cond delay="indefinite"/>
+                      </p:stCondLst>
+                      <p:childTnLst>
+                        <p:par>
+                          <p:cTn id="19" fill="hold">
+                            <p:stCondLst>
+                              <p:cond delay="0"/>
+                            </p:stCondLst>
+                            <p:childTnLst>
+                              <p:par>
+                                <p:cTn id="20" presetID="10" presetClass="entr" presetSubtype="0" fill="hold" nodeType="clickEffect">
+                                  <p:stCondLst>
+                                    <p:cond delay="0"/>
+                                  </p:stCondLst>
+                                  <p:childTnLst>
+                                    <p:set>
+                                      <p:cBhvr>
+                                        <p:cTn id="21" dur="1" fill="hold">
+                                          <p:stCondLst>
+                                            <p:cond delay="0"/>
+                                          </p:stCondLst>
+                                        </p:cTn>
+                                        <p:tgtEl>
+                                          <p:spTgt spid="3">
+                                            <p:txEl>
+                                              <p:pRg st="3" end="3"/>
+                                            </p:txEl>
+                                          </p:spTgt>
+                                        </p:tgtEl>
+                                        <p:attrNameLst>
+                                          <p:attrName>style.visibility</p:attrName>
+                                        </p:attrNameLst>
+                                      </p:cBhvr>
+                                      <p:to>
+                                        <p:strVal val="visible"/>
+                                      </p:to>
+                                    </p:set>
+                                    <p:animEffect transition="in" filter="fade">
+                                      <p:cBhvr>
+                                        <p:cTn id="22" dur="500"/>
+                                        <p:tgtEl>
+                                          <p:spTgt spid="3">
+                                            <p:txEl>
+                                              <p:pRg st="3" end="3"/>
+                                            </p:txEl>
+                                          </p:spTgt>
+                                        </p:tgtEl>
+                                      </p:cBhvr>
+                                    </p:animEffect>
+                                  </p:childTnLst>
+                                </p:cTn>
+                              </p:par>
+                            </p:childTnLst>
+                          </p:cTn>
+                        </p:par>
+                      </p:childTnLst>
+                    </p:cTn>
+                  </p:par>
+                  <p:par>
+                    <p:cTn id="23" fill="hold">
+                      <p:stCondLst>
+                        <p:cond delay="indefinite"/>
+                      </p:stCondLst>
+                      <p:childTnLst>
+                        <p:par>
+                          <p:cTn id="24" fill="hold">
+                            <p:stCondLst>
+                              <p:cond delay="0"/>
+                            </p:stCondLst>
+                            <p:childTnLst>
+                              <p:par>
+                                <p:cTn id="25" presetID="10" presetClass="entr" presetSubtype="0" fill="hold" nodeType="clickEffect">
+                                  <p:stCondLst>
+                                    <p:cond delay="0"/>
+                                  </p:stCondLst>
+                                  <p:childTnLst>
+                                    <p:set>
+                                      <p:cBhvr>
+                                        <p:cTn id="26" dur="1" fill="hold">
+                                          <p:stCondLst>
+                                            <p:cond delay="0"/>
+                                          </p:stCondLst>
+                                        </p:cTn>
+                                        <p:tgtEl>
+                                          <p:spTgt spid="3">
+                                            <p:txEl>
+                                              <p:pRg st="4" end="4"/>
+                                            </p:txEl>
+                                          </p:spTgt>
+                                        </p:tgtEl>
+                                        <p:attrNameLst>
+                                          <p:attrName>style.visibility</p:attrName>
+                                        </p:attrNameLst>
+                                      </p:cBhvr>
+                                      <p:to>
+                                        <p:strVal val="visible"/>
+                                      </p:to>
+                                    </p:set>
+                                    <p:animEffect transition="in" filter="fade">
+                                      <p:cBhvr>
+                                        <p:cTn id="27" dur="500"/>
+                                        <p:tgtEl>
+                                          <p:spTgt spid="3">
+                                            <p:txEl>
+                                              <p:pRg st="4" end="4"/>
+                                            </p:txEl>
+                                          </p:spTgt>
+                                        </p:tgtEl>
+                                      </p:cBhvr>
+                                    </p:animEffect>
+                                  </p:childTnLst>
+                                </p:cTn>
+                              </p:par>
+                              <p:par>
+                                <p:cTn id="28" presetID="10" presetClass="entr" presetSubtype="0" fill="hold" nodeType="withEffect">
+                                  <p:stCondLst>
+                                    <p:cond delay="0"/>
+                                  </p:stCondLst>
+                                  <p:childTnLst>
+                                    <p:set>
+                                      <p:cBhvr>
+                                        <p:cTn id="29" dur="1" fill="hold">
+                                          <p:stCondLst>
+                                            <p:cond delay="0"/>
+                                          </p:stCondLst>
+                                        </p:cTn>
+                                        <p:tgtEl>
+                                          <p:spTgt spid="3">
+                                            <p:txEl>
+                                              <p:pRg st="5" end="5"/>
+                                            </p:txEl>
+                                          </p:spTgt>
+                                        </p:tgtEl>
+                                        <p:attrNameLst>
+                                          <p:attrName>style.visibility</p:attrName>
+                                        </p:attrNameLst>
+                                      </p:cBhvr>
+                                      <p:to>
+                                        <p:strVal val="visible"/>
+                                      </p:to>
+                                    </p:set>
+                                    <p:animEffect transition="in" filter="fade">
+                                      <p:cBhvr>
+                                        <p:cTn id="30" dur="500"/>
+                                        <p:tgtEl>
+                                          <p:spTgt spid="3">
+                                            <p:txEl>
+                                              <p:pRg st="5" end="5"/>
+                                            </p:txEl>
+                                          </p:spTgt>
+                                        </p:tgtEl>
+                                      </p:cBhvr>
+                                    </p:animEffect>
+                                  </p:childTnLst>
+                                </p:cTn>
+                              </p:par>
+                            </p:childTnLst>
+                          </p:cTn>
+                        </p:par>
+                      </p:childTnLst>
+                    </p:cTn>
+                  </p:par>
+                  <p:par>
+                    <p:cTn id="31" fill="hold">
+                      <p:stCondLst>
+                        <p:cond delay="indefinite"/>
+                      </p:stCondLst>
+                      <p:childTnLst>
+                        <p:par>
+                          <p:cTn id="32" fill="hold">
+                            <p:stCondLst>
+                              <p:cond delay="0"/>
+                            </p:stCondLst>
+                            <p:childTnLst>
+                              <p:par>
+                                <p:cTn id="33" presetID="10" presetClass="entr" presetSubtype="0" fill="hold" nodeType="clickEffect">
+                                  <p:stCondLst>
+                                    <p:cond delay="0"/>
+                                  </p:stCondLst>
+                                  <p:childTnLst>
+                                    <p:set>
+                                      <p:cBhvr>
+                                        <p:cTn id="34" dur="1" fill="hold">
+                                          <p:stCondLst>
+                                            <p:cond delay="0"/>
+                                          </p:stCondLst>
+                                        </p:cTn>
+                                        <p:tgtEl>
+                                          <p:spTgt spid="6"/>
+                                        </p:tgtEl>
+                                        <p:attrNameLst>
+                                          <p:attrName>style.visibility</p:attrName>
+                                        </p:attrNameLst>
+                                      </p:cBhvr>
+                                      <p:to>
+                                        <p:strVal val="visible"/>
+                                      </p:to>
+                                    </p:set>
+                                    <p:animEffect transition="in" filter="fade">
+                                      <p:cBhvr>
+                                        <p:cTn id="35" dur="500"/>
+                                        <p:tgtEl>
+                                          <p:spTgt spid="6"/>
+                                        </p:tgtEl>
+                                      </p:cBhvr>
+                                    </p:animEffect>
+                                  </p:childTnLst>
+                                </p:cTn>
+                              </p:par>
+                            </p:childTnLst>
+                          </p:cTn>
+                        </p:par>
+                      </p:childTnLst>
+                    </p:cTn>
+                  </p:par>
+                </p:childTnLst>
+              </p:cTn>
+              <p:prevCondLst>
+                <p:cond evt="onPrev" delay="0">
+                  <p:tgtEl>
+                    <p:sldTgt/>
+                  </p:tgtEl>
+                </p:cond>
+              </p:prevCondLst>
+              <p:nextCondLst>
+                <p:cond evt="onNext" delay="0">
+                  <p:tgtEl>
+                    <p:sldTgt/>
+                  </p:tgtEl>
+                </p:cond>
+              </p:nextCondLst>
+            </p:seq>
+          </p:childTnLst>
+        </p:cTn>
+      </p:par>
+    </p:tnLst>
+  </p:timing>
+</p:sld>
+</file>
+
+<file path=ppt/slides/slide30.xml><?xml version="1.0" encoding="utf-8"?>
 <p:sld xmlns:a="http://schemas.openxmlformats.org/drawingml/2006/main" xmlns:r="http://schemas.openxmlformats.org/officeDocument/2006/relationships" xmlns:p="http://schemas.openxmlformats.org/presentationml/2006/main">
   <p:cSld>
     <p:bg>
@@ -24227,7 +27709,7 @@
           <a:p>
             <a:fld id="{846B06B1-1179-491F-A487-8E0C403F7C13}" type="slidenum">
               <a:rPr lang="fr-CA" smtClean="0"/>
-              <a:t>29</a:t>
+              <a:t>30</a:t>
             </a:fld>
             <a:endParaRPr lang="fr-CA"/>
           </a:p>
@@ -24789,1392 +28271,7 @@
 </p:sld>
 </file>
 
-<file path=ppt/slides/slide3.xml><?xml version="1.0" encoding="utf-8"?>
-<p:sld xmlns:a="http://schemas.openxmlformats.org/drawingml/2006/main" xmlns:r="http://schemas.openxmlformats.org/officeDocument/2006/relationships" xmlns:p="http://schemas.openxmlformats.org/presentationml/2006/main">
-  <p:cSld>
-    <p:bg>
-      <p:bgPr>
-        <a:solidFill>
-          <a:srgbClr val="F5F5F5"/>
-        </a:solidFill>
-        <a:effectLst/>
-      </p:bgPr>
-    </p:bg>
-    <p:spTree>
-      <p:nvGrpSpPr>
-        <p:cNvPr id="1" name="">
-          <a:extLst>
-            <a:ext uri="{FF2B5EF4-FFF2-40B4-BE49-F238E27FC236}">
-              <a16:creationId xmlns:a16="http://schemas.microsoft.com/office/drawing/2014/main" id="{7AE562C1-DEBE-120A-68B7-9B3CEE9F8CF7}"/>
-            </a:ext>
-          </a:extLst>
-        </p:cNvPr>
-        <p:cNvGrpSpPr/>
-        <p:nvPr/>
-      </p:nvGrpSpPr>
-      <p:grpSpPr>
-        <a:xfrm>
-          <a:off x="0" y="0"/>
-          <a:ext cx="0" cy="0"/>
-          <a:chOff x="0" y="0"/>
-          <a:chExt cx="0" cy="0"/>
-        </a:xfrm>
-      </p:grpSpPr>
-      <p:sp>
-        <p:nvSpPr>
-          <p:cNvPr id="2" name="Title 1">
-            <a:extLst>
-              <a:ext uri="{FF2B5EF4-FFF2-40B4-BE49-F238E27FC236}">
-                <a16:creationId xmlns:a16="http://schemas.microsoft.com/office/drawing/2014/main" id="{9DD94D18-8A9D-0F83-56A0-3E229B4F30F4}"/>
-              </a:ext>
-            </a:extLst>
-          </p:cNvPr>
-          <p:cNvSpPr>
-            <a:spLocks noGrp="1"/>
-          </p:cNvSpPr>
-          <p:nvPr>
-            <p:ph type="title"/>
-          </p:nvPr>
-        </p:nvSpPr>
-        <p:spPr/>
-        <p:txBody>
-          <a:bodyPr/>
-          <a:lstStyle/>
-          <a:p>
-            <a:r>
-              <a:rPr lang="en-US" dirty="0">
-                <a:latin typeface="Arial Rounded MT Bold" panose="020F0704030504030204" pitchFamily="34" charset="0"/>
-              </a:rPr>
-              <a:t>Tests: Assertions</a:t>
-            </a:r>
-            <a:endParaRPr lang="fr-CA" dirty="0">
-              <a:latin typeface="Arial Rounded MT Bold" panose="020F0704030504030204" pitchFamily="34" charset="0"/>
-            </a:endParaRPr>
-          </a:p>
-        </p:txBody>
-      </p:sp>
-      <p:sp>
-        <p:nvSpPr>
-          <p:cNvPr id="3" name="Content Placeholder 2">
-            <a:extLst>
-              <a:ext uri="{FF2B5EF4-FFF2-40B4-BE49-F238E27FC236}">
-                <a16:creationId xmlns:a16="http://schemas.microsoft.com/office/drawing/2014/main" id="{4CF6E5EC-3D7E-2CEA-1F5C-3BC34F96A110}"/>
-              </a:ext>
-            </a:extLst>
-          </p:cNvPr>
-          <p:cNvSpPr>
-            <a:spLocks noGrp="1"/>
-          </p:cNvSpPr>
-          <p:nvPr>
-            <p:ph idx="1"/>
-          </p:nvPr>
-        </p:nvSpPr>
-        <p:spPr/>
-        <p:txBody>
-          <a:bodyPr>
-            <a:normAutofit/>
-          </a:bodyPr>
-          <a:lstStyle/>
-          <a:p>
-            <a:pPr algn="just"/>
-            <a:br>
-              <a:rPr lang="fr-CA" sz="1600" dirty="0">
-                <a:latin typeface="Consolas" panose="020B0609020204030204" pitchFamily="49" charset="0"/>
-              </a:rPr>
-            </a:br>
-            <a:endParaRPr lang="fr-CA" sz="1600" dirty="0">
-              <a:latin typeface="Consolas" panose="020B0609020204030204" pitchFamily="49" charset="0"/>
-            </a:endParaRPr>
-          </a:p>
-          <a:p>
-            <a:pPr algn="just">
-              <a:lnSpc>
-                <a:spcPct val="110000"/>
-              </a:lnSpc>
-            </a:pPr>
-            <a:r>
-              <a:rPr lang="fr-CA" sz="1600" dirty="0">
-                <a:latin typeface="Consolas" panose="020B0609020204030204" pitchFamily="49" charset="0"/>
-              </a:rPr>
-              <a:t>Lance une erreur (</a:t>
-            </a:r>
-            <a:r>
-              <a:rPr lang="fr-CA" sz="1600" dirty="0" err="1">
-                <a:latin typeface="Consolas" panose="020B0609020204030204" pitchFamily="49" charset="0"/>
-              </a:rPr>
-              <a:t>AssertionError</a:t>
-            </a:r>
-            <a:r>
-              <a:rPr lang="fr-CA" sz="1600" dirty="0">
-                <a:latin typeface="Consolas" panose="020B0609020204030204" pitchFamily="49" charset="0"/>
-              </a:rPr>
-              <a:t>) lorsqu'une condition est fausse</a:t>
-            </a:r>
-          </a:p>
-          <a:p>
-            <a:pPr lvl="1" algn="just">
-              <a:lnSpc>
-                <a:spcPct val="110000"/>
-              </a:lnSpc>
-            </a:pPr>
-            <a:r>
-              <a:rPr lang="fr-CA" sz="1600" dirty="0">
-                <a:latin typeface="Consolas" panose="020B0609020204030204" pitchFamily="49" charset="0"/>
-              </a:rPr>
-              <a:t>Modèle mental: </a:t>
-            </a:r>
-            <a:r>
-              <a:rPr lang="fr-CA" sz="1600" b="1" dirty="0">
-                <a:latin typeface="Consolas" panose="020B0609020204030204" pitchFamily="49" charset="0"/>
-              </a:rPr>
-              <a:t>Lorsqu'un test échoue</a:t>
-            </a:r>
-          </a:p>
-          <a:p>
-            <a:pPr algn="just">
-              <a:lnSpc>
-                <a:spcPct val="160000"/>
-              </a:lnSpc>
-            </a:pPr>
-            <a:r>
-              <a:rPr lang="fr-CA" sz="1600" dirty="0">
-                <a:latin typeface="Consolas" panose="020B0609020204030204" pitchFamily="49" charset="0"/>
-              </a:rPr>
-              <a:t>Pour </a:t>
-            </a:r>
-            <a:r>
-              <a:rPr lang="fr-CA" sz="1600" b="1" dirty="0">
-                <a:latin typeface="Consolas" panose="020B0609020204030204" pitchFamily="49" charset="0"/>
-              </a:rPr>
-              <a:t>ce qui doit absolument être vrai</a:t>
-            </a:r>
-            <a:endParaRPr lang="fr-CA" sz="1600" dirty="0">
-              <a:latin typeface="Consolas" panose="020B0609020204030204" pitchFamily="49" charset="0"/>
-            </a:endParaRPr>
-          </a:p>
-          <a:p>
-            <a:pPr algn="just">
-              <a:lnSpc>
-                <a:spcPct val="150000"/>
-              </a:lnSpc>
-            </a:pPr>
-            <a:r>
-              <a:rPr lang="fr-CA" sz="1600" dirty="0">
-                <a:latin typeface="Consolas" panose="020B0609020204030204" pitchFamily="49" charset="0"/>
-              </a:rPr>
-              <a:t>Peut être désactivé à l'exécution (</a:t>
-            </a:r>
-            <a:r>
-              <a:rPr lang="fr-CA" sz="1600" b="1" dirty="0">
-                <a:latin typeface="Consolas" panose="020B0609020204030204" pitchFamily="49" charset="0"/>
-              </a:rPr>
-              <a:t>python -O</a:t>
-            </a:r>
-            <a:r>
-              <a:rPr lang="fr-CA" sz="1600" dirty="0">
-                <a:latin typeface="Consolas" panose="020B0609020204030204" pitchFamily="49" charset="0"/>
-              </a:rPr>
-              <a:t>) ... sauf pour la NASA</a:t>
-            </a:r>
-          </a:p>
-          <a:p>
-            <a:pPr marL="0" indent="0" algn="ctr">
-              <a:buNone/>
-            </a:pPr>
-            <a:r>
-              <a:rPr lang="fr-CA" sz="1400" dirty="0">
-                <a:latin typeface="Consolas" panose="020B0609020204030204" pitchFamily="49" charset="0"/>
-                <a:hlinkClick r:id="rId2"/>
-              </a:rPr>
-              <a:t>https://fr.wikipedia.org/wiki/The_Power_of_10:_Rules_for_Developing_Safety-Critical_Code</a:t>
-            </a:r>
-            <a:endParaRPr lang="fr-CA" sz="1400" dirty="0">
-              <a:latin typeface="Consolas" panose="020B0609020204030204" pitchFamily="49" charset="0"/>
-            </a:endParaRPr>
-          </a:p>
-        </p:txBody>
-      </p:sp>
-      <p:sp>
-        <p:nvSpPr>
-          <p:cNvPr id="5" name="Slide Number Placeholder 4">
-            <a:extLst>
-              <a:ext uri="{FF2B5EF4-FFF2-40B4-BE49-F238E27FC236}">
-                <a16:creationId xmlns:a16="http://schemas.microsoft.com/office/drawing/2014/main" id="{1FA2DB27-CAC8-7766-F85F-45770DF3095A}"/>
-              </a:ext>
-            </a:extLst>
-          </p:cNvPr>
-          <p:cNvSpPr>
-            <a:spLocks noGrp="1"/>
-          </p:cNvSpPr>
-          <p:nvPr>
-            <p:ph type="sldNum" sz="quarter" idx="12"/>
-          </p:nvPr>
-        </p:nvSpPr>
-        <p:spPr/>
-        <p:txBody>
-          <a:bodyPr/>
-          <a:lstStyle/>
-          <a:p>
-            <a:fld id="{846B06B1-1179-491F-A487-8E0C403F7C13}" type="slidenum">
-              <a:rPr lang="fr-CA" smtClean="0"/>
-              <a:t>3</a:t>
-            </a:fld>
-            <a:endParaRPr lang="fr-CA" dirty="0"/>
-          </a:p>
-        </p:txBody>
-      </p:sp>
-      <p:sp>
-        <p:nvSpPr>
-          <p:cNvPr id="4" name="TextBox 3">
-            <a:extLst>
-              <a:ext uri="{FF2B5EF4-FFF2-40B4-BE49-F238E27FC236}">
-                <a16:creationId xmlns:a16="http://schemas.microsoft.com/office/drawing/2014/main" id="{57A8D393-74C1-0C40-F408-06525D65E091}"/>
-              </a:ext>
-            </a:extLst>
-          </p:cNvPr>
-          <p:cNvSpPr txBox="1"/>
-          <p:nvPr/>
-        </p:nvSpPr>
-        <p:spPr>
-          <a:xfrm>
-            <a:off x="2230873" y="1728788"/>
-            <a:ext cx="7730249" cy="442630"/>
-          </a:xfrm>
-          <a:prstGeom prst="roundRect">
-            <a:avLst/>
-          </a:prstGeom>
-          <a:solidFill>
-            <a:srgbClr val="FFF2CC">
-              <a:alpha val="49803"/>
-            </a:srgbClr>
-          </a:solidFill>
-          <a:ln w="9525" cap="flat" cmpd="sng">
-            <a:solidFill>
-              <a:schemeClr val="dk1"/>
-            </a:solidFill>
-            <a:prstDash val="solid"/>
-            <a:round/>
-            <a:headEnd type="none" w="sm" len="sm"/>
-            <a:tailEnd type="none" w="sm" len="sm"/>
-          </a:ln>
-        </p:spPr>
-        <p:txBody>
-          <a:bodyPr spcFirstLastPara="1" wrap="square" lIns="91425" tIns="45700" rIns="91425" bIns="45700" anchor="t" anchorCtr="0">
-            <a:spAutoFit/>
-          </a:bodyPr>
-          <a:lstStyle>
-            <a:defPPr>
-              <a:defRPr lang="en-US"/>
-            </a:defPPr>
-            <a:lvl1pPr marR="0" lvl="0" indent="0" algn="ctr">
-              <a:lnSpc>
-                <a:spcPct val="100000"/>
-              </a:lnSpc>
-              <a:spcBef>
-                <a:spcPts val="0"/>
-              </a:spcBef>
-              <a:spcAft>
-                <a:spcPts val="0"/>
-              </a:spcAft>
-              <a:buClr>
-                <a:srgbClr val="000000"/>
-              </a:buClr>
-              <a:buSzPts val="1400"/>
-              <a:buFont typeface="Consolas"/>
-              <a:buNone/>
-              <a:defRPr sz="2800" b="1" i="0" u="none" strike="noStrike" cap="none">
-                <a:solidFill>
-                  <a:srgbClr val="000000"/>
-                </a:solidFill>
-                <a:latin typeface="Consolas"/>
-                <a:ea typeface="Consolas"/>
-                <a:cs typeface="Consolas"/>
-              </a:defRPr>
-            </a:lvl1pPr>
-          </a:lstStyle>
-          <a:p>
-            <a:r>
-              <a:rPr lang="en-US" sz="2000" dirty="0"/>
-              <a:t>assert </a:t>
-            </a:r>
-            <a:r>
-              <a:rPr lang="en-US" sz="2000" dirty="0" err="1"/>
-              <a:t>expression_booleenne</a:t>
-            </a:r>
-            <a:r>
-              <a:rPr lang="en-US" sz="2000" dirty="0"/>
-              <a:t>, </a:t>
-            </a:r>
-            <a:r>
-              <a:rPr lang="en-US" sz="2000" dirty="0" err="1"/>
-              <a:t>message_si_faux</a:t>
-            </a:r>
-            <a:endParaRPr lang="en-US" sz="2000" dirty="0"/>
-          </a:p>
-        </p:txBody>
-      </p:sp>
-      <p:grpSp>
-        <p:nvGrpSpPr>
-          <p:cNvPr id="6" name="Google Shape;354;p18">
-            <a:extLst>
-              <a:ext uri="{FF2B5EF4-FFF2-40B4-BE49-F238E27FC236}">
-                <a16:creationId xmlns:a16="http://schemas.microsoft.com/office/drawing/2014/main" id="{530A920A-ECA4-8FCD-A08E-677BC9DD3228}"/>
-              </a:ext>
-            </a:extLst>
-          </p:cNvPr>
-          <p:cNvGrpSpPr/>
-          <p:nvPr/>
-        </p:nvGrpSpPr>
-        <p:grpSpPr>
-          <a:xfrm>
-            <a:off x="2306240" y="4664961"/>
-            <a:ext cx="7579514" cy="1512002"/>
-            <a:chOff x="6682372" y="3766184"/>
-            <a:chExt cx="8984825" cy="691201"/>
-          </a:xfrm>
-        </p:grpSpPr>
-        <p:sp>
-          <p:nvSpPr>
-            <p:cNvPr id="7" name="Google Shape;355;p18">
-              <a:extLst>
-                <a:ext uri="{FF2B5EF4-FFF2-40B4-BE49-F238E27FC236}">
-                  <a16:creationId xmlns:a16="http://schemas.microsoft.com/office/drawing/2014/main" id="{87D4FF6B-A94D-24FE-EF28-D0E429EA4110}"/>
-                </a:ext>
-              </a:extLst>
-            </p:cNvPr>
-            <p:cNvSpPr/>
-            <p:nvPr/>
-          </p:nvSpPr>
-          <p:spPr>
-            <a:xfrm>
-              <a:off x="6682372" y="3766184"/>
-              <a:ext cx="256567" cy="691200"/>
-            </a:xfrm>
-            <a:prstGeom prst="rect">
-              <a:avLst/>
-            </a:prstGeom>
-            <a:solidFill>
-              <a:srgbClr val="7F7F7F"/>
-            </a:solidFill>
-            <a:ln w="12700" cap="flat" cmpd="sng">
-              <a:solidFill>
-                <a:schemeClr val="dk1"/>
-              </a:solidFill>
-              <a:prstDash val="solid"/>
-              <a:miter lim="800000"/>
-              <a:headEnd type="none" w="sm" len="sm"/>
-              <a:tailEnd type="none" w="sm" len="sm"/>
-            </a:ln>
-          </p:spPr>
-          <p:txBody>
-            <a:bodyPr spcFirstLastPara="1" wrap="square" lIns="91425" tIns="45700" rIns="91425" bIns="45700" anchor="ctr" anchorCtr="0">
-              <a:noAutofit/>
-            </a:bodyPr>
-            <a:lstStyle/>
-            <a:p>
-              <a:pPr marL="0" marR="0" lvl="0" indent="0" algn="ctr" rtl="0">
-                <a:spcBef>
-                  <a:spcPts val="0"/>
-                </a:spcBef>
-                <a:spcAft>
-                  <a:spcPts val="0"/>
-                </a:spcAft>
-                <a:buNone/>
-              </a:pPr>
-              <a:r>
-                <a:rPr lang="fr-CA" sz="1400" dirty="0">
-                  <a:solidFill>
-                    <a:schemeClr val="lt1"/>
-                  </a:solidFill>
-                  <a:latin typeface="Calibri"/>
-                  <a:ea typeface="Calibri"/>
-                  <a:cs typeface="Calibri"/>
-                  <a:sym typeface="Calibri"/>
-                </a:rPr>
-                <a:t>1</a:t>
-              </a:r>
-              <a:endParaRPr dirty="0"/>
-            </a:p>
-            <a:p>
-              <a:pPr marL="0" marR="0" lvl="0" indent="0" algn="ctr" rtl="0">
-                <a:spcBef>
-                  <a:spcPts val="0"/>
-                </a:spcBef>
-                <a:spcAft>
-                  <a:spcPts val="0"/>
-                </a:spcAft>
-                <a:buNone/>
-              </a:pPr>
-              <a:r>
-                <a:rPr lang="fr-CA" sz="1400" dirty="0">
-                  <a:solidFill>
-                    <a:schemeClr val="lt1"/>
-                  </a:solidFill>
-                  <a:latin typeface="Calibri"/>
-                  <a:ea typeface="Calibri"/>
-                  <a:cs typeface="Calibri"/>
-                  <a:sym typeface="Calibri"/>
-                </a:rPr>
-                <a:t>23</a:t>
-              </a:r>
-              <a:endParaRPr dirty="0"/>
-            </a:p>
-            <a:p>
-              <a:pPr marL="0" marR="0" lvl="0" indent="0" algn="ctr" rtl="0">
-                <a:spcBef>
-                  <a:spcPts val="0"/>
-                </a:spcBef>
-                <a:spcAft>
-                  <a:spcPts val="0"/>
-                </a:spcAft>
-                <a:buNone/>
-              </a:pPr>
-              <a:r>
-                <a:rPr lang="fr-CA" sz="1400" dirty="0">
-                  <a:solidFill>
-                    <a:schemeClr val="lt1"/>
-                  </a:solidFill>
-                  <a:latin typeface="Calibri"/>
-                  <a:ea typeface="Calibri"/>
-                  <a:cs typeface="Calibri"/>
-                  <a:sym typeface="Calibri"/>
-                </a:rPr>
-                <a:t>4</a:t>
-              </a:r>
-              <a:endParaRPr dirty="0"/>
-            </a:p>
-            <a:p>
-              <a:pPr marL="0" marR="0" lvl="0" indent="0" algn="ctr" rtl="0">
-                <a:spcBef>
-                  <a:spcPts val="0"/>
-                </a:spcBef>
-                <a:spcAft>
-                  <a:spcPts val="0"/>
-                </a:spcAft>
-                <a:buNone/>
-              </a:pPr>
-              <a:r>
-                <a:rPr lang="fr-CA" sz="1400" dirty="0">
-                  <a:solidFill>
-                    <a:schemeClr val="lt1"/>
-                  </a:solidFill>
-                  <a:latin typeface="Calibri"/>
-                  <a:ea typeface="Calibri"/>
-                  <a:cs typeface="Calibri"/>
-                  <a:sym typeface="Calibri"/>
-                </a:rPr>
-                <a:t>5</a:t>
-              </a:r>
-            </a:p>
-            <a:p>
-              <a:pPr marL="0" marR="0" lvl="0" indent="0" algn="ctr" rtl="0">
-                <a:spcBef>
-                  <a:spcPts val="0"/>
-                </a:spcBef>
-                <a:spcAft>
-                  <a:spcPts val="0"/>
-                </a:spcAft>
-                <a:buNone/>
-              </a:pPr>
-              <a:r>
-                <a:rPr lang="fr-CA" sz="1400" dirty="0">
-                  <a:solidFill>
-                    <a:schemeClr val="lt1"/>
-                  </a:solidFill>
-                  <a:latin typeface="Calibri"/>
-                  <a:ea typeface="Calibri"/>
-                  <a:cs typeface="Calibri"/>
-                  <a:sym typeface="Calibri"/>
-                </a:rPr>
-                <a:t>6</a:t>
-              </a:r>
-              <a:endParaRPr dirty="0"/>
-            </a:p>
-          </p:txBody>
-        </p:sp>
-        <p:sp>
-          <p:nvSpPr>
-            <p:cNvPr id="8" name="Google Shape;356;p18">
-              <a:extLst>
-                <a:ext uri="{FF2B5EF4-FFF2-40B4-BE49-F238E27FC236}">
-                  <a16:creationId xmlns:a16="http://schemas.microsoft.com/office/drawing/2014/main" id="{4C789759-180C-72BA-D687-8BF5005AF9F0}"/>
-                </a:ext>
-              </a:extLst>
-            </p:cNvPr>
-            <p:cNvSpPr/>
-            <p:nvPr/>
-          </p:nvSpPr>
-          <p:spPr>
-            <a:xfrm>
-              <a:off x="6938939" y="3766185"/>
-              <a:ext cx="8728258" cy="691200"/>
-            </a:xfrm>
-            <a:prstGeom prst="rect">
-              <a:avLst/>
-            </a:prstGeom>
-            <a:solidFill>
-              <a:schemeClr val="dk1"/>
-            </a:solidFill>
-            <a:ln w="12700" cap="flat" cmpd="sng">
-              <a:solidFill>
-                <a:schemeClr val="dk1"/>
-              </a:solidFill>
-              <a:prstDash val="solid"/>
-              <a:miter lim="800000"/>
-              <a:headEnd type="none" w="sm" len="sm"/>
-              <a:tailEnd type="none" w="sm" len="sm"/>
-            </a:ln>
-          </p:spPr>
-          <p:txBody>
-            <a:bodyPr spcFirstLastPara="1" wrap="square" lIns="91425" tIns="45700" rIns="91425" bIns="45700" anchor="ctr" anchorCtr="0">
-              <a:noAutofit/>
-            </a:bodyPr>
-            <a:lstStyle/>
-            <a:p>
-              <a:r>
-                <a:rPr lang="en-CA" sz="1400" b="1" dirty="0">
-                  <a:solidFill>
-                    <a:schemeClr val="bg1"/>
-                  </a:solidFill>
-                  <a:latin typeface="Consolas" panose="020B0609020204030204" pitchFamily="49" charset="0"/>
-                </a:rPr>
-                <a:t>&gt;&gt;&gt; valeur_1 = int(input('</a:t>
-              </a:r>
-              <a:r>
-                <a:rPr lang="en-CA" sz="1400" b="1" dirty="0" err="1">
-                  <a:solidFill>
-                    <a:schemeClr val="bg1"/>
-                  </a:solidFill>
-                  <a:latin typeface="Consolas" panose="020B0609020204030204" pitchFamily="49" charset="0"/>
-                </a:rPr>
-                <a:t>Saisir</a:t>
-              </a:r>
-              <a:r>
-                <a:rPr lang="en-CA" sz="1400" b="1" dirty="0">
-                  <a:solidFill>
-                    <a:schemeClr val="bg1"/>
-                  </a:solidFill>
-                  <a:latin typeface="Consolas" panose="020B0609020204030204" pitchFamily="49" charset="0"/>
-                </a:rPr>
-                <a:t> un </a:t>
-              </a:r>
-              <a:r>
-                <a:rPr lang="en-CA" sz="1400" b="1" dirty="0" err="1">
-                  <a:solidFill>
-                    <a:schemeClr val="bg1"/>
-                  </a:solidFill>
-                  <a:latin typeface="Consolas" panose="020B0609020204030204" pitchFamily="49" charset="0"/>
-                </a:rPr>
-                <a:t>entier</a:t>
-              </a:r>
-              <a:r>
-                <a:rPr lang="en-CA" sz="1400" b="1" dirty="0">
-                  <a:solidFill>
-                    <a:schemeClr val="bg1"/>
-                  </a:solidFill>
-                  <a:latin typeface="Consolas" panose="020B0609020204030204" pitchFamily="49" charset="0"/>
-                </a:rPr>
-                <a:t>: '))</a:t>
-              </a:r>
-            </a:p>
-            <a:p>
-              <a:r>
-                <a:rPr lang="en-CA" sz="1400" b="1" dirty="0" err="1">
-                  <a:solidFill>
-                    <a:schemeClr val="bg1"/>
-                  </a:solidFill>
-                  <a:latin typeface="Consolas" panose="020B0609020204030204" pitchFamily="49" charset="0"/>
-                </a:rPr>
-                <a:t>Saisir</a:t>
-              </a:r>
-              <a:r>
-                <a:rPr lang="en-CA" sz="1400" b="1" dirty="0">
-                  <a:solidFill>
-                    <a:schemeClr val="bg1"/>
-                  </a:solidFill>
-                  <a:latin typeface="Consolas" panose="020B0609020204030204" pitchFamily="49" charset="0"/>
-                </a:rPr>
-                <a:t> un </a:t>
-              </a:r>
-              <a:r>
-                <a:rPr lang="en-CA" sz="1400" b="1" dirty="0" err="1">
-                  <a:solidFill>
-                    <a:schemeClr val="bg1"/>
-                  </a:solidFill>
-                  <a:latin typeface="Consolas" panose="020B0609020204030204" pitchFamily="49" charset="0"/>
-                </a:rPr>
-                <a:t>entier</a:t>
-              </a:r>
-              <a:r>
-                <a:rPr lang="en-CA" sz="1400" b="1" dirty="0">
-                  <a:solidFill>
-                    <a:schemeClr val="bg1"/>
-                  </a:solidFill>
-                  <a:latin typeface="Consolas" panose="020B0609020204030204" pitchFamily="49" charset="0"/>
-                </a:rPr>
-                <a:t>: 1</a:t>
-              </a:r>
-            </a:p>
-            <a:p>
-              <a:r>
-                <a:rPr lang="en-CA" sz="1400" b="1" dirty="0">
-                  <a:solidFill>
-                    <a:schemeClr val="bg1"/>
-                  </a:solidFill>
-                  <a:latin typeface="Consolas" panose="020B0609020204030204" pitchFamily="49" charset="0"/>
-                </a:rPr>
-                <a:t>&gt;&gt;&gt; valeur_2 = int(input('</a:t>
-              </a:r>
-              <a:r>
-                <a:rPr lang="en-CA" sz="1400" b="1" dirty="0" err="1">
-                  <a:solidFill>
-                    <a:schemeClr val="bg1"/>
-                  </a:solidFill>
-                  <a:latin typeface="Consolas" panose="020B0609020204030204" pitchFamily="49" charset="0"/>
-                </a:rPr>
-                <a:t>Saisir</a:t>
-              </a:r>
-              <a:r>
-                <a:rPr lang="en-CA" sz="1400" b="1" dirty="0">
-                  <a:solidFill>
-                    <a:schemeClr val="bg1"/>
-                  </a:solidFill>
-                  <a:latin typeface="Consolas" panose="020B0609020204030204" pitchFamily="49" charset="0"/>
-                </a:rPr>
-                <a:t> un </a:t>
-              </a:r>
-              <a:r>
-                <a:rPr lang="en-CA" sz="1400" b="1" dirty="0" err="1">
-                  <a:solidFill>
-                    <a:schemeClr val="bg1"/>
-                  </a:solidFill>
-                  <a:latin typeface="Consolas" panose="020B0609020204030204" pitchFamily="49" charset="0"/>
-                </a:rPr>
-                <a:t>entier</a:t>
-              </a:r>
-              <a:r>
-                <a:rPr lang="en-CA" sz="1400" b="1" dirty="0">
-                  <a:solidFill>
-                    <a:schemeClr val="bg1"/>
-                  </a:solidFill>
-                  <a:latin typeface="Consolas" panose="020B0609020204030204" pitchFamily="49" charset="0"/>
-                </a:rPr>
-                <a:t> diff</a:t>
-              </a:r>
-              <a:r>
-                <a:rPr lang="fr-CA" sz="1400" b="1" dirty="0" err="1">
-                  <a:solidFill>
-                    <a:schemeClr val="bg1"/>
-                  </a:solidFill>
-                  <a:latin typeface="Consolas" panose="020B0609020204030204" pitchFamily="49" charset="0"/>
-                </a:rPr>
-                <a:t>érent</a:t>
-              </a:r>
-              <a:r>
-                <a:rPr lang="fr-CA" sz="1400" b="1" dirty="0">
-                  <a:solidFill>
-                    <a:schemeClr val="bg1"/>
-                  </a:solidFill>
-                  <a:latin typeface="Consolas" panose="020B0609020204030204" pitchFamily="49" charset="0"/>
-                </a:rPr>
-                <a:t>: '))</a:t>
-              </a:r>
-            </a:p>
-            <a:p>
-              <a:r>
-                <a:rPr lang="en-CA" sz="1400" b="1" dirty="0" err="1">
-                  <a:solidFill>
-                    <a:schemeClr val="bg1"/>
-                  </a:solidFill>
-                  <a:latin typeface="Consolas" panose="020B0609020204030204" pitchFamily="49" charset="0"/>
-                </a:rPr>
-                <a:t>Saisir</a:t>
-              </a:r>
-              <a:r>
-                <a:rPr lang="en-CA" sz="1400" b="1" dirty="0">
-                  <a:solidFill>
-                    <a:schemeClr val="bg1"/>
-                  </a:solidFill>
-                  <a:latin typeface="Consolas" panose="020B0609020204030204" pitchFamily="49" charset="0"/>
-                </a:rPr>
-                <a:t> un </a:t>
-              </a:r>
-              <a:r>
-                <a:rPr lang="en-CA" sz="1400" b="1" dirty="0" err="1">
-                  <a:solidFill>
-                    <a:schemeClr val="bg1"/>
-                  </a:solidFill>
-                  <a:latin typeface="Consolas" panose="020B0609020204030204" pitchFamily="49" charset="0"/>
-                </a:rPr>
-                <a:t>entier</a:t>
-              </a:r>
-              <a:r>
-                <a:rPr lang="en-CA" sz="1400" b="1" dirty="0">
-                  <a:solidFill>
-                    <a:schemeClr val="bg1"/>
-                  </a:solidFill>
-                  <a:latin typeface="Consolas" panose="020B0609020204030204" pitchFamily="49" charset="0"/>
-                </a:rPr>
-                <a:t> diff</a:t>
-              </a:r>
-              <a:r>
-                <a:rPr lang="fr-CA" sz="1400" b="1" dirty="0" err="1">
-                  <a:solidFill>
-                    <a:schemeClr val="bg1"/>
-                  </a:solidFill>
-                  <a:latin typeface="Consolas" panose="020B0609020204030204" pitchFamily="49" charset="0"/>
-                </a:rPr>
-                <a:t>érent</a:t>
-              </a:r>
-              <a:r>
-                <a:rPr lang="fr-CA" sz="1400" b="1" dirty="0">
-                  <a:solidFill>
-                    <a:schemeClr val="bg1"/>
-                  </a:solidFill>
-                  <a:latin typeface="Consolas" panose="020B0609020204030204" pitchFamily="49" charset="0"/>
-                </a:rPr>
-                <a:t>: 1</a:t>
-              </a:r>
-            </a:p>
-            <a:p>
-              <a:r>
-                <a:rPr lang="en-CA" sz="1400" b="1" dirty="0">
-                  <a:solidFill>
-                    <a:schemeClr val="bg1"/>
-                  </a:solidFill>
-                  <a:latin typeface="Consolas" panose="020B0609020204030204" pitchFamily="49" charset="0"/>
-                </a:rPr>
-                <a:t>&gt;&gt;&gt; </a:t>
-              </a:r>
-              <a:r>
-                <a:rPr lang="en-CA" sz="1400" b="1" dirty="0">
-                  <a:solidFill>
-                    <a:srgbClr val="FF2500"/>
-                  </a:solidFill>
-                  <a:latin typeface="Consolas" panose="020B0609020204030204" pitchFamily="49" charset="0"/>
-                </a:rPr>
-                <a:t>assert</a:t>
-              </a:r>
-              <a:r>
-                <a:rPr lang="en-CA" sz="1400" b="1" dirty="0">
-                  <a:solidFill>
-                    <a:schemeClr val="bg1"/>
-                  </a:solidFill>
-                  <a:latin typeface="Consolas" panose="020B0609020204030204" pitchFamily="49" charset="0"/>
-                </a:rPr>
-                <a:t> valeur_1 != valeur_2, 'Les </a:t>
-              </a:r>
-              <a:r>
-                <a:rPr lang="en-CA" sz="1400" b="1" dirty="0" err="1">
-                  <a:solidFill>
-                    <a:schemeClr val="bg1"/>
-                  </a:solidFill>
-                  <a:latin typeface="Consolas" panose="020B0609020204030204" pitchFamily="49" charset="0"/>
-                </a:rPr>
-                <a:t>valeurs</a:t>
-              </a:r>
-              <a:r>
-                <a:rPr lang="en-CA" sz="1400" b="1" dirty="0">
-                  <a:solidFill>
-                    <a:schemeClr val="bg1"/>
-                  </a:solidFill>
-                  <a:latin typeface="Consolas" panose="020B0609020204030204" pitchFamily="49" charset="0"/>
-                </a:rPr>
-                <a:t> </a:t>
-              </a:r>
-              <a:r>
-                <a:rPr lang="en-CA" sz="1400" b="1" dirty="0" err="1">
-                  <a:solidFill>
-                    <a:schemeClr val="bg1"/>
-                  </a:solidFill>
-                  <a:latin typeface="Consolas" panose="020B0609020204030204" pitchFamily="49" charset="0"/>
-                </a:rPr>
-                <a:t>doivent</a:t>
-              </a:r>
-              <a:r>
-                <a:rPr lang="en-CA" sz="1400" b="1" dirty="0">
-                  <a:solidFill>
-                    <a:schemeClr val="bg1"/>
-                  </a:solidFill>
-                  <a:latin typeface="Consolas" panose="020B0609020204030204" pitchFamily="49" charset="0"/>
-                </a:rPr>
-                <a:t> </a:t>
-              </a:r>
-              <a:r>
-                <a:rPr lang="en-CA" sz="1400" b="1" dirty="0" err="1">
-                  <a:solidFill>
-                    <a:schemeClr val="bg1"/>
-                  </a:solidFill>
-                  <a:latin typeface="Consolas" panose="020B0609020204030204" pitchFamily="49" charset="0"/>
-                </a:rPr>
-                <a:t>être</a:t>
-              </a:r>
-              <a:r>
-                <a:rPr lang="en-CA" sz="1400" b="1" dirty="0">
-                  <a:solidFill>
-                    <a:schemeClr val="bg1"/>
-                  </a:solidFill>
-                  <a:latin typeface="Consolas" panose="020B0609020204030204" pitchFamily="49" charset="0"/>
-                </a:rPr>
-                <a:t> </a:t>
-              </a:r>
-              <a:r>
-                <a:rPr lang="en-CA" sz="1400" b="1" dirty="0" err="1">
-                  <a:solidFill>
-                    <a:schemeClr val="bg1"/>
-                  </a:solidFill>
-                  <a:latin typeface="Consolas" panose="020B0609020204030204" pitchFamily="49" charset="0"/>
-                </a:rPr>
-                <a:t>différentes</a:t>
-              </a:r>
-              <a:r>
-                <a:rPr lang="en-CA" sz="1400" b="1" dirty="0">
-                  <a:solidFill>
-                    <a:schemeClr val="bg1"/>
-                  </a:solidFill>
-                  <a:latin typeface="Consolas" panose="020B0609020204030204" pitchFamily="49" charset="0"/>
-                </a:rPr>
-                <a:t>'</a:t>
-              </a:r>
-            </a:p>
-            <a:p>
-              <a:pPr algn="just"/>
-              <a:r>
-                <a:rPr lang="en-CA" sz="1400" b="1" dirty="0" err="1">
-                  <a:solidFill>
-                    <a:schemeClr val="bg1"/>
-                  </a:solidFill>
-                  <a:latin typeface="Consolas" panose="020B0609020204030204" pitchFamily="49" charset="0"/>
-                </a:rPr>
-                <a:t>AssertionError</a:t>
-              </a:r>
-              <a:r>
-                <a:rPr lang="en-CA" sz="1400" b="1" dirty="0">
-                  <a:solidFill>
-                    <a:schemeClr val="bg1"/>
-                  </a:solidFill>
-                  <a:latin typeface="Consolas" panose="020B0609020204030204" pitchFamily="49" charset="0"/>
-                </a:rPr>
-                <a:t>: Les </a:t>
-              </a:r>
-              <a:r>
-                <a:rPr lang="en-CA" sz="1400" b="1" dirty="0" err="1">
-                  <a:solidFill>
-                    <a:schemeClr val="bg1"/>
-                  </a:solidFill>
-                  <a:latin typeface="Consolas" panose="020B0609020204030204" pitchFamily="49" charset="0"/>
-                </a:rPr>
-                <a:t>valeurs</a:t>
-              </a:r>
-              <a:r>
-                <a:rPr lang="en-CA" sz="1400" b="1" dirty="0">
-                  <a:solidFill>
-                    <a:schemeClr val="bg1"/>
-                  </a:solidFill>
-                  <a:latin typeface="Consolas" panose="020B0609020204030204" pitchFamily="49" charset="0"/>
-                </a:rPr>
-                <a:t> </a:t>
-              </a:r>
-              <a:r>
-                <a:rPr lang="en-CA" sz="1400" b="1" dirty="0" err="1">
-                  <a:solidFill>
-                    <a:schemeClr val="bg1"/>
-                  </a:solidFill>
-                  <a:latin typeface="Consolas" panose="020B0609020204030204" pitchFamily="49" charset="0"/>
-                </a:rPr>
-                <a:t>doivent</a:t>
-              </a:r>
-              <a:r>
-                <a:rPr lang="en-CA" sz="1400" b="1" dirty="0">
-                  <a:solidFill>
-                    <a:schemeClr val="bg1"/>
-                  </a:solidFill>
-                  <a:latin typeface="Consolas" panose="020B0609020204030204" pitchFamily="49" charset="0"/>
-                </a:rPr>
-                <a:t> </a:t>
-              </a:r>
-              <a:r>
-                <a:rPr lang="en-CA" sz="1400" b="1" dirty="0" err="1">
-                  <a:solidFill>
-                    <a:schemeClr val="bg1"/>
-                  </a:solidFill>
-                  <a:latin typeface="Consolas" panose="020B0609020204030204" pitchFamily="49" charset="0"/>
-                </a:rPr>
-                <a:t>être</a:t>
-              </a:r>
-              <a:r>
-                <a:rPr lang="en-CA" sz="1400" b="1" dirty="0">
-                  <a:solidFill>
-                    <a:schemeClr val="bg1"/>
-                  </a:solidFill>
-                  <a:latin typeface="Consolas" panose="020B0609020204030204" pitchFamily="49" charset="0"/>
-                </a:rPr>
-                <a:t> </a:t>
-              </a:r>
-              <a:r>
-                <a:rPr lang="en-CA" sz="1400" b="1" dirty="0" err="1">
-                  <a:solidFill>
-                    <a:schemeClr val="bg1"/>
-                  </a:solidFill>
-                  <a:latin typeface="Consolas" panose="020B0609020204030204" pitchFamily="49" charset="0"/>
-                </a:rPr>
-                <a:t>différentes</a:t>
-              </a:r>
-              <a:endParaRPr lang="fr-CA" sz="1400" dirty="0">
-                <a:solidFill>
-                  <a:schemeClr val="bg1"/>
-                </a:solidFill>
-                <a:latin typeface="Consolas" panose="020B0609020204030204" pitchFamily="49" charset="0"/>
-              </a:endParaRPr>
-            </a:p>
-          </p:txBody>
-        </p:sp>
-      </p:grpSp>
-    </p:spTree>
-    <p:extLst>
-      <p:ext uri="{BB962C8B-B14F-4D97-AF65-F5344CB8AC3E}">
-        <p14:creationId xmlns:p14="http://schemas.microsoft.com/office/powerpoint/2010/main" val="3696665868"/>
-      </p:ext>
-    </p:extLst>
-  </p:cSld>
-  <p:clrMapOvr>
-    <a:masterClrMapping/>
-  </p:clrMapOvr>
-  <p:timing>
-    <p:tnLst>
-      <p:par>
-        <p:cTn id="1" dur="indefinite" restart="never" nodeType="tmRoot">
-          <p:childTnLst>
-            <p:seq concurrent="1" nextAc="seek">
-              <p:cTn id="2" dur="indefinite" nodeType="mainSeq">
-                <p:childTnLst>
-                  <p:par>
-                    <p:cTn id="3" fill="hold">
-                      <p:stCondLst>
-                        <p:cond delay="indefinite"/>
-                      </p:stCondLst>
-                      <p:childTnLst>
-                        <p:par>
-                          <p:cTn id="4" fill="hold">
-                            <p:stCondLst>
-                              <p:cond delay="0"/>
-                            </p:stCondLst>
-                            <p:childTnLst>
-                              <p:par>
-                                <p:cTn id="5" presetID="10" presetClass="entr" presetSubtype="0" fill="hold" nodeType="clickEffect">
-                                  <p:stCondLst>
-                                    <p:cond delay="0"/>
-                                  </p:stCondLst>
-                                  <p:childTnLst>
-                                    <p:set>
-                                      <p:cBhvr>
-                                        <p:cTn id="6" dur="1" fill="hold">
-                                          <p:stCondLst>
-                                            <p:cond delay="0"/>
-                                          </p:stCondLst>
-                                        </p:cTn>
-                                        <p:tgtEl>
-                                          <p:spTgt spid="3">
-                                            <p:txEl>
-                                              <p:pRg st="0" end="0"/>
-                                            </p:txEl>
-                                          </p:spTgt>
-                                        </p:tgtEl>
-                                        <p:attrNameLst>
-                                          <p:attrName>style.visibility</p:attrName>
-                                        </p:attrNameLst>
-                                      </p:cBhvr>
-                                      <p:to>
-                                        <p:strVal val="visible"/>
-                                      </p:to>
-                                    </p:set>
-                                    <p:animEffect transition="in" filter="fade">
-                                      <p:cBhvr>
-                                        <p:cTn id="7" dur="500"/>
-                                        <p:tgtEl>
-                                          <p:spTgt spid="3">
-                                            <p:txEl>
-                                              <p:pRg st="0" end="0"/>
-                                            </p:txEl>
-                                          </p:spTgt>
-                                        </p:tgtEl>
-                                      </p:cBhvr>
-                                    </p:animEffect>
-                                  </p:childTnLst>
-                                </p:cTn>
-                              </p:par>
-                            </p:childTnLst>
-                          </p:cTn>
-                        </p:par>
-                      </p:childTnLst>
-                    </p:cTn>
-                  </p:par>
-                  <p:par>
-                    <p:cTn id="8" fill="hold">
-                      <p:stCondLst>
-                        <p:cond delay="indefinite"/>
-                      </p:stCondLst>
-                      <p:childTnLst>
-                        <p:par>
-                          <p:cTn id="9" fill="hold">
-                            <p:stCondLst>
-                              <p:cond delay="0"/>
-                            </p:stCondLst>
-                            <p:childTnLst>
-                              <p:par>
-                                <p:cTn id="10" presetID="10" presetClass="entr" presetSubtype="0" fill="hold" nodeType="clickEffect">
-                                  <p:stCondLst>
-                                    <p:cond delay="0"/>
-                                  </p:stCondLst>
-                                  <p:childTnLst>
-                                    <p:set>
-                                      <p:cBhvr>
-                                        <p:cTn id="11" dur="1" fill="hold">
-                                          <p:stCondLst>
-                                            <p:cond delay="0"/>
-                                          </p:stCondLst>
-                                        </p:cTn>
-                                        <p:tgtEl>
-                                          <p:spTgt spid="3">
-                                            <p:txEl>
-                                              <p:pRg st="1" end="1"/>
-                                            </p:txEl>
-                                          </p:spTgt>
-                                        </p:tgtEl>
-                                        <p:attrNameLst>
-                                          <p:attrName>style.visibility</p:attrName>
-                                        </p:attrNameLst>
-                                      </p:cBhvr>
-                                      <p:to>
-                                        <p:strVal val="visible"/>
-                                      </p:to>
-                                    </p:set>
-                                    <p:animEffect transition="in" filter="fade">
-                                      <p:cBhvr>
-                                        <p:cTn id="12" dur="500"/>
-                                        <p:tgtEl>
-                                          <p:spTgt spid="3">
-                                            <p:txEl>
-                                              <p:pRg st="1" end="1"/>
-                                            </p:txEl>
-                                          </p:spTgt>
-                                        </p:tgtEl>
-                                      </p:cBhvr>
-                                    </p:animEffect>
-                                  </p:childTnLst>
-                                </p:cTn>
-                              </p:par>
-                            </p:childTnLst>
-                          </p:cTn>
-                        </p:par>
-                      </p:childTnLst>
-                    </p:cTn>
-                  </p:par>
-                  <p:par>
-                    <p:cTn id="13" fill="hold">
-                      <p:stCondLst>
-                        <p:cond delay="indefinite"/>
-                      </p:stCondLst>
-                      <p:childTnLst>
-                        <p:par>
-                          <p:cTn id="14" fill="hold">
-                            <p:stCondLst>
-                              <p:cond delay="0"/>
-                            </p:stCondLst>
-                            <p:childTnLst>
-                              <p:par>
-                                <p:cTn id="15" presetID="10" presetClass="entr" presetSubtype="0" fill="hold" nodeType="clickEffect">
-                                  <p:stCondLst>
-                                    <p:cond delay="0"/>
-                                  </p:stCondLst>
-                                  <p:childTnLst>
-                                    <p:set>
-                                      <p:cBhvr>
-                                        <p:cTn id="16" dur="1" fill="hold">
-                                          <p:stCondLst>
-                                            <p:cond delay="0"/>
-                                          </p:stCondLst>
-                                        </p:cTn>
-                                        <p:tgtEl>
-                                          <p:spTgt spid="3">
-                                            <p:txEl>
-                                              <p:pRg st="2" end="2"/>
-                                            </p:txEl>
-                                          </p:spTgt>
-                                        </p:tgtEl>
-                                        <p:attrNameLst>
-                                          <p:attrName>style.visibility</p:attrName>
-                                        </p:attrNameLst>
-                                      </p:cBhvr>
-                                      <p:to>
-                                        <p:strVal val="visible"/>
-                                      </p:to>
-                                    </p:set>
-                                    <p:animEffect transition="in" filter="fade">
-                                      <p:cBhvr>
-                                        <p:cTn id="17" dur="500"/>
-                                        <p:tgtEl>
-                                          <p:spTgt spid="3">
-                                            <p:txEl>
-                                              <p:pRg st="2" end="2"/>
-                                            </p:txEl>
-                                          </p:spTgt>
-                                        </p:tgtEl>
-                                      </p:cBhvr>
-                                    </p:animEffect>
-                                  </p:childTnLst>
-                                </p:cTn>
-                              </p:par>
-                            </p:childTnLst>
-                          </p:cTn>
-                        </p:par>
-                      </p:childTnLst>
-                    </p:cTn>
-                  </p:par>
-                  <p:par>
-                    <p:cTn id="18" fill="hold">
-                      <p:stCondLst>
-                        <p:cond delay="indefinite"/>
-                      </p:stCondLst>
-                      <p:childTnLst>
-                        <p:par>
-                          <p:cTn id="19" fill="hold">
-                            <p:stCondLst>
-                              <p:cond delay="0"/>
-                            </p:stCondLst>
-                            <p:childTnLst>
-                              <p:par>
-                                <p:cTn id="20" presetID="10" presetClass="entr" presetSubtype="0" fill="hold" nodeType="clickEffect">
-                                  <p:stCondLst>
-                                    <p:cond delay="0"/>
-                                  </p:stCondLst>
-                                  <p:childTnLst>
-                                    <p:set>
-                                      <p:cBhvr>
-                                        <p:cTn id="21" dur="1" fill="hold">
-                                          <p:stCondLst>
-                                            <p:cond delay="0"/>
-                                          </p:stCondLst>
-                                        </p:cTn>
-                                        <p:tgtEl>
-                                          <p:spTgt spid="3">
-                                            <p:txEl>
-                                              <p:pRg st="3" end="3"/>
-                                            </p:txEl>
-                                          </p:spTgt>
-                                        </p:tgtEl>
-                                        <p:attrNameLst>
-                                          <p:attrName>style.visibility</p:attrName>
-                                        </p:attrNameLst>
-                                      </p:cBhvr>
-                                      <p:to>
-                                        <p:strVal val="visible"/>
-                                      </p:to>
-                                    </p:set>
-                                    <p:animEffect transition="in" filter="fade">
-                                      <p:cBhvr>
-                                        <p:cTn id="22" dur="500"/>
-                                        <p:tgtEl>
-                                          <p:spTgt spid="3">
-                                            <p:txEl>
-                                              <p:pRg st="3" end="3"/>
-                                            </p:txEl>
-                                          </p:spTgt>
-                                        </p:tgtEl>
-                                      </p:cBhvr>
-                                    </p:animEffect>
-                                  </p:childTnLst>
-                                </p:cTn>
-                              </p:par>
-                            </p:childTnLst>
-                          </p:cTn>
-                        </p:par>
-                      </p:childTnLst>
-                    </p:cTn>
-                  </p:par>
-                  <p:par>
-                    <p:cTn id="23" fill="hold">
-                      <p:stCondLst>
-                        <p:cond delay="indefinite"/>
-                      </p:stCondLst>
-                      <p:childTnLst>
-                        <p:par>
-                          <p:cTn id="24" fill="hold">
-                            <p:stCondLst>
-                              <p:cond delay="0"/>
-                            </p:stCondLst>
-                            <p:childTnLst>
-                              <p:par>
-                                <p:cTn id="25" presetID="10" presetClass="entr" presetSubtype="0" fill="hold" nodeType="clickEffect">
-                                  <p:stCondLst>
-                                    <p:cond delay="0"/>
-                                  </p:stCondLst>
-                                  <p:childTnLst>
-                                    <p:set>
-                                      <p:cBhvr>
-                                        <p:cTn id="26" dur="1" fill="hold">
-                                          <p:stCondLst>
-                                            <p:cond delay="0"/>
-                                          </p:stCondLst>
-                                        </p:cTn>
-                                        <p:tgtEl>
-                                          <p:spTgt spid="3">
-                                            <p:txEl>
-                                              <p:pRg st="4" end="4"/>
-                                            </p:txEl>
-                                          </p:spTgt>
-                                        </p:tgtEl>
-                                        <p:attrNameLst>
-                                          <p:attrName>style.visibility</p:attrName>
-                                        </p:attrNameLst>
-                                      </p:cBhvr>
-                                      <p:to>
-                                        <p:strVal val="visible"/>
-                                      </p:to>
-                                    </p:set>
-                                    <p:animEffect transition="in" filter="fade">
-                                      <p:cBhvr>
-                                        <p:cTn id="27" dur="500"/>
-                                        <p:tgtEl>
-                                          <p:spTgt spid="3">
-                                            <p:txEl>
-                                              <p:pRg st="4" end="4"/>
-                                            </p:txEl>
-                                          </p:spTgt>
-                                        </p:tgtEl>
-                                      </p:cBhvr>
-                                    </p:animEffect>
-                                  </p:childTnLst>
-                                </p:cTn>
-                              </p:par>
-                              <p:par>
-                                <p:cTn id="28" presetID="10" presetClass="entr" presetSubtype="0" fill="hold" nodeType="withEffect">
-                                  <p:stCondLst>
-                                    <p:cond delay="0"/>
-                                  </p:stCondLst>
-                                  <p:childTnLst>
-                                    <p:set>
-                                      <p:cBhvr>
-                                        <p:cTn id="29" dur="1" fill="hold">
-                                          <p:stCondLst>
-                                            <p:cond delay="0"/>
-                                          </p:stCondLst>
-                                        </p:cTn>
-                                        <p:tgtEl>
-                                          <p:spTgt spid="3">
-                                            <p:txEl>
-                                              <p:pRg st="5" end="5"/>
-                                            </p:txEl>
-                                          </p:spTgt>
-                                        </p:tgtEl>
-                                        <p:attrNameLst>
-                                          <p:attrName>style.visibility</p:attrName>
-                                        </p:attrNameLst>
-                                      </p:cBhvr>
-                                      <p:to>
-                                        <p:strVal val="visible"/>
-                                      </p:to>
-                                    </p:set>
-                                    <p:animEffect transition="in" filter="fade">
-                                      <p:cBhvr>
-                                        <p:cTn id="30" dur="500"/>
-                                        <p:tgtEl>
-                                          <p:spTgt spid="3">
-                                            <p:txEl>
-                                              <p:pRg st="5" end="5"/>
-                                            </p:txEl>
-                                          </p:spTgt>
-                                        </p:tgtEl>
-                                      </p:cBhvr>
-                                    </p:animEffect>
-                                  </p:childTnLst>
-                                </p:cTn>
-                              </p:par>
-                            </p:childTnLst>
-                          </p:cTn>
-                        </p:par>
-                      </p:childTnLst>
-                    </p:cTn>
-                  </p:par>
-                  <p:par>
-                    <p:cTn id="31" fill="hold">
-                      <p:stCondLst>
-                        <p:cond delay="indefinite"/>
-                      </p:stCondLst>
-                      <p:childTnLst>
-                        <p:par>
-                          <p:cTn id="32" fill="hold">
-                            <p:stCondLst>
-                              <p:cond delay="0"/>
-                            </p:stCondLst>
-                            <p:childTnLst>
-                              <p:par>
-                                <p:cTn id="33" presetID="10" presetClass="entr" presetSubtype="0" fill="hold" nodeType="clickEffect">
-                                  <p:stCondLst>
-                                    <p:cond delay="0"/>
-                                  </p:stCondLst>
-                                  <p:childTnLst>
-                                    <p:set>
-                                      <p:cBhvr>
-                                        <p:cTn id="34" dur="1" fill="hold">
-                                          <p:stCondLst>
-                                            <p:cond delay="0"/>
-                                          </p:stCondLst>
-                                        </p:cTn>
-                                        <p:tgtEl>
-                                          <p:spTgt spid="6"/>
-                                        </p:tgtEl>
-                                        <p:attrNameLst>
-                                          <p:attrName>style.visibility</p:attrName>
-                                        </p:attrNameLst>
-                                      </p:cBhvr>
-                                      <p:to>
-                                        <p:strVal val="visible"/>
-                                      </p:to>
-                                    </p:set>
-                                    <p:animEffect transition="in" filter="fade">
-                                      <p:cBhvr>
-                                        <p:cTn id="35" dur="500"/>
-                                        <p:tgtEl>
-                                          <p:spTgt spid="6"/>
-                                        </p:tgtEl>
-                                      </p:cBhvr>
-                                    </p:animEffect>
-                                  </p:childTnLst>
-                                </p:cTn>
-                              </p:par>
-                            </p:childTnLst>
-                          </p:cTn>
-                        </p:par>
-                      </p:childTnLst>
-                    </p:cTn>
-                  </p:par>
-                </p:childTnLst>
-              </p:cTn>
-              <p:prevCondLst>
-                <p:cond evt="onPrev" delay="0">
-                  <p:tgtEl>
-                    <p:sldTgt/>
-                  </p:tgtEl>
-                </p:cond>
-              </p:prevCondLst>
-              <p:nextCondLst>
-                <p:cond evt="onNext" delay="0">
-                  <p:tgtEl>
-                    <p:sldTgt/>
-                  </p:tgtEl>
-                </p:cond>
-              </p:nextCondLst>
-            </p:seq>
-          </p:childTnLst>
-        </p:cTn>
-      </p:par>
-    </p:tnLst>
-  </p:timing>
-</p:sld>
-</file>
-
-<file path=ppt/slides/slide30.xml><?xml version="1.0" encoding="utf-8"?>
+<file path=ppt/slides/slide31.xml><?xml version="1.0" encoding="utf-8"?>
 <p:sld xmlns:a="http://schemas.openxmlformats.org/drawingml/2006/main" xmlns:r="http://schemas.openxmlformats.org/officeDocument/2006/relationships" xmlns:p="http://schemas.openxmlformats.org/presentationml/2006/main">
   <p:cSld>
     <p:bg>
@@ -26618,7 +28715,7 @@
           <a:p>
             <a:fld id="{846B06B1-1179-491F-A487-8E0C403F7C13}" type="slidenum">
               <a:rPr lang="fr-CA" smtClean="0"/>
-              <a:t>30</a:t>
+              <a:t>31</a:t>
             </a:fld>
             <a:endParaRPr lang="fr-CA"/>
           </a:p>
@@ -26637,7 +28734,7 @@
 </p:sld>
 </file>
 
-<file path=ppt/slides/slide31.xml><?xml version="1.0" encoding="utf-8"?>
+<file path=ppt/slides/slide32.xml><?xml version="1.0" encoding="utf-8"?>
 <p:sld xmlns:a="http://schemas.openxmlformats.org/drawingml/2006/main" xmlns:r="http://schemas.openxmlformats.org/officeDocument/2006/relationships" xmlns:p="http://schemas.openxmlformats.org/presentationml/2006/main">
   <p:cSld>
     <p:bg>
@@ -26938,7 +29035,7 @@
           <a:p>
             <a:fld id="{846B06B1-1179-491F-A487-8E0C403F7C13}" type="slidenum">
               <a:rPr lang="fr-CA" smtClean="0"/>
-              <a:t>31</a:t>
+              <a:t>32</a:t>
             </a:fld>
             <a:endParaRPr lang="fr-CA"/>
           </a:p>
@@ -27710,7 +29807,7 @@
 </p:sld>
 </file>
 
-<file path=ppt/slides/slide32.xml><?xml version="1.0" encoding="utf-8"?>
+<file path=ppt/slides/slide33.xml><?xml version="1.0" encoding="utf-8"?>
 <p:sld xmlns:a="http://schemas.openxmlformats.org/drawingml/2006/main" xmlns:r="http://schemas.openxmlformats.org/officeDocument/2006/relationships" xmlns:p="http://schemas.openxmlformats.org/presentationml/2006/main">
   <p:cSld>
     <p:bg>
@@ -28280,7 +30377,7 @@
           <a:p>
             <a:fld id="{846B06B1-1179-491F-A487-8E0C403F7C13}" type="slidenum">
               <a:rPr lang="fr-CA" smtClean="0"/>
-              <a:t>32</a:t>
+              <a:t>33</a:t>
             </a:fld>
             <a:endParaRPr lang="fr-CA"/>
           </a:p>
@@ -30740,7 +32837,7 @@
 </p:sld>
 </file>
 
-<file path=ppt/slides/slide33.xml><?xml version="1.0" encoding="utf-8"?>
+<file path=ppt/slides/slide34.xml><?xml version="1.0" encoding="utf-8"?>
 <p:sld xmlns:a="http://schemas.openxmlformats.org/drawingml/2006/main" xmlns:r="http://schemas.openxmlformats.org/officeDocument/2006/relationships" xmlns:p="http://schemas.openxmlformats.org/presentationml/2006/main">
   <p:cSld>
     <p:bg>
@@ -31105,7 +33202,7 @@
           <a:p>
             <a:fld id="{846B06B1-1179-491F-A487-8E0C403F7C13}" type="slidenum">
               <a:rPr lang="fr-CA" smtClean="0"/>
-              <a:t>33</a:t>
+              <a:t>34</a:t>
             </a:fld>
             <a:endParaRPr lang="fr-CA"/>
           </a:p>
@@ -31124,7 +33221,7 @@
 </p:sld>
 </file>
 
-<file path=ppt/slides/slide34.xml><?xml version="1.0" encoding="utf-8"?>
+<file path=ppt/slides/slide35.xml><?xml version="1.0" encoding="utf-8"?>
 <p:sld xmlns:a="http://schemas.openxmlformats.org/drawingml/2006/main" xmlns:r="http://schemas.openxmlformats.org/officeDocument/2006/relationships" xmlns:p="http://schemas.openxmlformats.org/presentationml/2006/main">
   <p:cSld>
     <p:bg>
@@ -31223,7 +33320,7 @@
           <a:p>
             <a:fld id="{846B06B1-1179-491F-A487-8E0C403F7C13}" type="slidenum">
               <a:rPr lang="fr-CA" smtClean="0"/>
-              <a:t>34</a:t>
+              <a:t>35</a:t>
             </a:fld>
             <a:endParaRPr lang="fr-CA"/>
           </a:p>
@@ -33231,7 +35328,7 @@
 </p:sld>
 </file>
 
-<file path=ppt/slides/slide35.xml><?xml version="1.0" encoding="utf-8"?>
+<file path=ppt/slides/slide36.xml><?xml version="1.0" encoding="utf-8"?>
 <p:sld xmlns:a="http://schemas.openxmlformats.org/drawingml/2006/main" xmlns:r="http://schemas.openxmlformats.org/officeDocument/2006/relationships" xmlns:p="http://schemas.openxmlformats.org/presentationml/2006/main">
   <p:cSld>
     <p:bg>
@@ -33449,7 +35546,7 @@
           <a:p>
             <a:fld id="{846B06B1-1179-491F-A487-8E0C403F7C13}" type="slidenum">
               <a:rPr lang="fr-CA" smtClean="0"/>
-              <a:t>35</a:t>
+              <a:t>36</a:t>
             </a:fld>
             <a:endParaRPr lang="fr-CA"/>
           </a:p>
@@ -33725,7 +35822,7 @@
 </p:sld>
 </file>
 
-<file path=ppt/slides/slide36.xml><?xml version="1.0" encoding="utf-8"?>
+<file path=ppt/slides/slide37.xml><?xml version="1.0" encoding="utf-8"?>
 <p:sld xmlns:a="http://schemas.openxmlformats.org/drawingml/2006/main" xmlns:r="http://schemas.openxmlformats.org/officeDocument/2006/relationships" xmlns:p="http://schemas.openxmlformats.org/presentationml/2006/main">
   <p:cSld>
     <p:bg>
@@ -34171,7 +36268,7 @@
           <a:p>
             <a:fld id="{846B06B1-1179-491F-A487-8E0C403F7C13}" type="slidenum">
               <a:rPr lang="fr-CA" smtClean="0"/>
-              <a:t>36</a:t>
+              <a:t>37</a:t>
             </a:fld>
             <a:endParaRPr lang="fr-CA" dirty="0"/>
           </a:p>
@@ -35050,7 +37147,7 @@
 </p:sld>
 </file>
 
-<file path=ppt/slides/slide37.xml><?xml version="1.0" encoding="utf-8"?>
+<file path=ppt/slides/slide38.xml><?xml version="1.0" encoding="utf-8"?>
 <p:sld xmlns:a="http://schemas.openxmlformats.org/drawingml/2006/main" xmlns:r="http://schemas.openxmlformats.org/officeDocument/2006/relationships" xmlns:p="http://schemas.openxmlformats.org/presentationml/2006/main">
   <p:cSld>
     <p:bg>
@@ -35596,7 +37693,7 @@
           <a:p>
             <a:fld id="{846B06B1-1179-491F-A487-8E0C403F7C13}" type="slidenum">
               <a:rPr lang="fr-CA" smtClean="0"/>
-              <a:t>37</a:t>
+              <a:t>38</a:t>
             </a:fld>
             <a:endParaRPr lang="fr-CA"/>
           </a:p>
@@ -36621,7 +38718,7 @@
 </p:sld>
 </file>
 
-<file path=ppt/slides/slide38.xml><?xml version="1.0" encoding="utf-8"?>
+<file path=ppt/slides/slide39.xml><?xml version="1.0" encoding="utf-8"?>
 <p:sld xmlns:a="http://schemas.openxmlformats.org/drawingml/2006/main" xmlns:r="http://schemas.openxmlformats.org/officeDocument/2006/relationships" xmlns:p="http://schemas.openxmlformats.org/presentationml/2006/main">
   <p:cSld>
     <p:bg>
@@ -37062,7 +39159,7 @@
           <a:p>
             <a:fld id="{846B06B1-1179-491F-A487-8E0C403F7C13}" type="slidenum">
               <a:rPr lang="fr-CA" smtClean="0"/>
-              <a:t>38</a:t>
+              <a:t>39</a:t>
             </a:fld>
             <a:endParaRPr lang="fr-CA"/>
           </a:p>
@@ -43305,6 +45402,388 @@
           </p:txBody>
         </p:sp>
       </p:grpSp>
+      <p:grpSp>
+        <p:nvGrpSpPr>
+          <p:cNvPr id="3" name="Group 2">
+            <a:extLst>
+              <a:ext uri="{FF2B5EF4-FFF2-40B4-BE49-F238E27FC236}">
+                <a16:creationId xmlns:a16="http://schemas.microsoft.com/office/drawing/2014/main" id="{4A021BA9-A375-EB08-5DEF-A083DF73892F}"/>
+              </a:ext>
+            </a:extLst>
+          </p:cNvPr>
+          <p:cNvGrpSpPr/>
+          <p:nvPr/>
+        </p:nvGrpSpPr>
+        <p:grpSpPr>
+          <a:xfrm>
+            <a:off x="4209715" y="6169092"/>
+            <a:ext cx="1874231" cy="475580"/>
+            <a:chOff x="493738" y="5444836"/>
+            <a:chExt cx="1874231" cy="475580"/>
+          </a:xfrm>
+        </p:grpSpPr>
+        <p:sp>
+          <p:nvSpPr>
+            <p:cNvPr id="4" name="TextBox 3">
+              <a:extLst>
+                <a:ext uri="{FF2B5EF4-FFF2-40B4-BE49-F238E27FC236}">
+                  <a16:creationId xmlns:a16="http://schemas.microsoft.com/office/drawing/2014/main" id="{3D97ACFE-70E7-282D-806C-C19C08985A5F}"/>
+                </a:ext>
+              </a:extLst>
+            </p:cNvPr>
+            <p:cNvSpPr txBox="1"/>
+            <p:nvPr/>
+          </p:nvSpPr>
+          <p:spPr>
+            <a:xfrm>
+              <a:off x="493738" y="5612639"/>
+              <a:ext cx="1874231" cy="307777"/>
+            </a:xfrm>
+            <a:prstGeom prst="rect">
+              <a:avLst/>
+            </a:prstGeom>
+            <a:noFill/>
+          </p:spPr>
+          <p:txBody>
+            <a:bodyPr wrap="none" rtlCol="0">
+              <a:spAutoFit/>
+            </a:bodyPr>
+            <a:lstStyle/>
+            <a:p>
+              <a:r>
+                <a:rPr lang="en-US" sz="1400" b="1" dirty="0">
+                  <a:latin typeface="Consolas" panose="020B0609020204030204" pitchFamily="49" charset="0"/>
+                </a:rPr>
+                <a:t>Valeur par </a:t>
+              </a:r>
+              <a:r>
+                <a:rPr lang="en-US" sz="1400" b="1" dirty="0" err="1">
+                  <a:latin typeface="Consolas" panose="020B0609020204030204" pitchFamily="49" charset="0"/>
+                </a:rPr>
+                <a:t>défaut</a:t>
+              </a:r>
+              <a:endParaRPr lang="fr-CA" sz="1400" b="1" dirty="0">
+                <a:latin typeface="Consolas" panose="020B0609020204030204" pitchFamily="49" charset="0"/>
+              </a:endParaRPr>
+            </a:p>
+          </p:txBody>
+        </p:sp>
+        <p:cxnSp>
+          <p:nvCxnSpPr>
+            <p:cNvPr id="6" name="Straight Arrow Connector 5">
+              <a:extLst>
+                <a:ext uri="{FF2B5EF4-FFF2-40B4-BE49-F238E27FC236}">
+                  <a16:creationId xmlns:a16="http://schemas.microsoft.com/office/drawing/2014/main" id="{54D4BF87-FE54-9C03-43B4-6C385E9CAAEC}"/>
+                </a:ext>
+              </a:extLst>
+            </p:cNvPr>
+            <p:cNvCxnSpPr>
+              <a:cxnSpLocks/>
+            </p:cNvCxnSpPr>
+            <p:nvPr/>
+          </p:nvCxnSpPr>
+          <p:spPr>
+            <a:xfrm flipV="1">
+              <a:off x="1427695" y="5444836"/>
+              <a:ext cx="0" cy="167803"/>
+            </a:xfrm>
+            <a:prstGeom prst="straightConnector1">
+              <a:avLst/>
+            </a:prstGeom>
+            <a:ln>
+              <a:tailEnd type="triangle"/>
+            </a:ln>
+          </p:spPr>
+          <p:style>
+            <a:lnRef idx="2">
+              <a:schemeClr val="dk1"/>
+            </a:lnRef>
+            <a:fillRef idx="0">
+              <a:schemeClr val="dk1"/>
+            </a:fillRef>
+            <a:effectRef idx="1">
+              <a:schemeClr val="dk1"/>
+            </a:effectRef>
+            <a:fontRef idx="minor">
+              <a:schemeClr val="tx1"/>
+            </a:fontRef>
+          </p:style>
+        </p:cxnSp>
+      </p:grpSp>
+      <p:grpSp>
+        <p:nvGrpSpPr>
+          <p:cNvPr id="9" name="Group 8">
+            <a:extLst>
+              <a:ext uri="{FF2B5EF4-FFF2-40B4-BE49-F238E27FC236}">
+                <a16:creationId xmlns:a16="http://schemas.microsoft.com/office/drawing/2014/main" id="{8F584661-9E1E-8066-9561-B576BDFD4247}"/>
+              </a:ext>
+            </a:extLst>
+          </p:cNvPr>
+          <p:cNvGrpSpPr/>
+          <p:nvPr/>
+        </p:nvGrpSpPr>
+        <p:grpSpPr>
+          <a:xfrm>
+            <a:off x="1191241" y="2089927"/>
+            <a:ext cx="557719" cy="444230"/>
+            <a:chOff x="2451370" y="2613498"/>
+            <a:chExt cx="557719" cy="444230"/>
+          </a:xfrm>
+        </p:grpSpPr>
+        <p:cxnSp>
+          <p:nvCxnSpPr>
+            <p:cNvPr id="10" name="Straight Arrow Connector 9">
+              <a:extLst>
+                <a:ext uri="{FF2B5EF4-FFF2-40B4-BE49-F238E27FC236}">
+                  <a16:creationId xmlns:a16="http://schemas.microsoft.com/office/drawing/2014/main" id="{ECE231CC-1E9E-38DD-77AD-FC837678C131}"/>
+                </a:ext>
+              </a:extLst>
+            </p:cNvPr>
+            <p:cNvCxnSpPr/>
+            <p:nvPr/>
+          </p:nvCxnSpPr>
+          <p:spPr>
+            <a:xfrm>
+              <a:off x="2451370" y="2618261"/>
+              <a:ext cx="557719" cy="0"/>
+            </a:xfrm>
+            <a:prstGeom prst="straightConnector1">
+              <a:avLst/>
+            </a:prstGeom>
+            <a:ln>
+              <a:tailEnd type="triangle"/>
+            </a:ln>
+          </p:spPr>
+          <p:style>
+            <a:lnRef idx="2">
+              <a:schemeClr val="dk1"/>
+            </a:lnRef>
+            <a:fillRef idx="0">
+              <a:schemeClr val="dk1"/>
+            </a:fillRef>
+            <a:effectRef idx="1">
+              <a:schemeClr val="dk1"/>
+            </a:effectRef>
+            <a:fontRef idx="minor">
+              <a:schemeClr val="tx1"/>
+            </a:fontRef>
+          </p:style>
+        </p:cxnSp>
+        <p:cxnSp>
+          <p:nvCxnSpPr>
+            <p:cNvPr id="11" name="Straight Arrow Connector 10">
+              <a:extLst>
+                <a:ext uri="{FF2B5EF4-FFF2-40B4-BE49-F238E27FC236}">
+                  <a16:creationId xmlns:a16="http://schemas.microsoft.com/office/drawing/2014/main" id="{F16B7EE2-CF01-517D-337D-3CD5C95CDACC}"/>
+                </a:ext>
+              </a:extLst>
+            </p:cNvPr>
+            <p:cNvCxnSpPr/>
+            <p:nvPr/>
+          </p:nvCxnSpPr>
+          <p:spPr>
+            <a:xfrm>
+              <a:off x="2451370" y="3052965"/>
+              <a:ext cx="557719" cy="0"/>
+            </a:xfrm>
+            <a:prstGeom prst="straightConnector1">
+              <a:avLst/>
+            </a:prstGeom>
+            <a:ln>
+              <a:tailEnd type="triangle"/>
+            </a:ln>
+          </p:spPr>
+          <p:style>
+            <a:lnRef idx="2">
+              <a:schemeClr val="dk1"/>
+            </a:lnRef>
+            <a:fillRef idx="0">
+              <a:schemeClr val="dk1"/>
+            </a:fillRef>
+            <a:effectRef idx="1">
+              <a:schemeClr val="dk1"/>
+            </a:effectRef>
+            <a:fontRef idx="minor">
+              <a:schemeClr val="tx1"/>
+            </a:fontRef>
+          </p:style>
+        </p:cxnSp>
+        <p:cxnSp>
+          <p:nvCxnSpPr>
+            <p:cNvPr id="16" name="Straight Connector 15">
+              <a:extLst>
+                <a:ext uri="{FF2B5EF4-FFF2-40B4-BE49-F238E27FC236}">
+                  <a16:creationId xmlns:a16="http://schemas.microsoft.com/office/drawing/2014/main" id="{479765DA-5FD3-2463-7A23-F8F058343B35}"/>
+                </a:ext>
+              </a:extLst>
+            </p:cNvPr>
+            <p:cNvCxnSpPr>
+              <a:cxnSpLocks/>
+            </p:cNvCxnSpPr>
+            <p:nvPr/>
+          </p:nvCxnSpPr>
+          <p:spPr>
+            <a:xfrm>
+              <a:off x="2451370" y="2613498"/>
+              <a:ext cx="0" cy="444230"/>
+            </a:xfrm>
+            <a:prstGeom prst="line">
+              <a:avLst/>
+            </a:prstGeom>
+          </p:spPr>
+          <p:style>
+            <a:lnRef idx="2">
+              <a:schemeClr val="dk1"/>
+            </a:lnRef>
+            <a:fillRef idx="0">
+              <a:schemeClr val="dk1"/>
+            </a:fillRef>
+            <a:effectRef idx="1">
+              <a:schemeClr val="dk1"/>
+            </a:effectRef>
+            <a:fontRef idx="minor">
+              <a:schemeClr val="tx1"/>
+            </a:fontRef>
+          </p:style>
+        </p:cxnSp>
+      </p:grpSp>
+      <p:grpSp>
+        <p:nvGrpSpPr>
+          <p:cNvPr id="18" name="Group 17">
+            <a:extLst>
+              <a:ext uri="{FF2B5EF4-FFF2-40B4-BE49-F238E27FC236}">
+                <a16:creationId xmlns:a16="http://schemas.microsoft.com/office/drawing/2014/main" id="{8E81175D-E36D-59FC-97A4-5A0BC8B33D29}"/>
+              </a:ext>
+            </a:extLst>
+          </p:cNvPr>
+          <p:cNvGrpSpPr/>
+          <p:nvPr/>
+        </p:nvGrpSpPr>
+        <p:grpSpPr>
+          <a:xfrm>
+            <a:off x="1191241" y="3587038"/>
+            <a:ext cx="557719" cy="1057005"/>
+            <a:chOff x="2451370" y="2613498"/>
+            <a:chExt cx="557719" cy="1057005"/>
+          </a:xfrm>
+        </p:grpSpPr>
+        <p:cxnSp>
+          <p:nvCxnSpPr>
+            <p:cNvPr id="19" name="Straight Arrow Connector 18">
+              <a:extLst>
+                <a:ext uri="{FF2B5EF4-FFF2-40B4-BE49-F238E27FC236}">
+                  <a16:creationId xmlns:a16="http://schemas.microsoft.com/office/drawing/2014/main" id="{26AD2959-3382-1122-37B1-262BBCFC96D0}"/>
+                </a:ext>
+              </a:extLst>
+            </p:cNvPr>
+            <p:cNvCxnSpPr/>
+            <p:nvPr/>
+          </p:nvCxnSpPr>
+          <p:spPr>
+            <a:xfrm>
+              <a:off x="2451370" y="2618261"/>
+              <a:ext cx="557719" cy="0"/>
+            </a:xfrm>
+            <a:prstGeom prst="straightConnector1">
+              <a:avLst/>
+            </a:prstGeom>
+            <a:ln>
+              <a:tailEnd type="triangle"/>
+            </a:ln>
+          </p:spPr>
+          <p:style>
+            <a:lnRef idx="2">
+              <a:schemeClr val="dk1"/>
+            </a:lnRef>
+            <a:fillRef idx="0">
+              <a:schemeClr val="dk1"/>
+            </a:fillRef>
+            <a:effectRef idx="1">
+              <a:schemeClr val="dk1"/>
+            </a:effectRef>
+            <a:fontRef idx="minor">
+              <a:schemeClr val="tx1"/>
+            </a:fontRef>
+          </p:style>
+        </p:cxnSp>
+        <p:cxnSp>
+          <p:nvCxnSpPr>
+            <p:cNvPr id="20" name="Straight Arrow Connector 19">
+              <a:extLst>
+                <a:ext uri="{FF2B5EF4-FFF2-40B4-BE49-F238E27FC236}">
+                  <a16:creationId xmlns:a16="http://schemas.microsoft.com/office/drawing/2014/main" id="{1DF0B33E-87A0-705A-1685-D8D6FED5AFB2}"/>
+                </a:ext>
+              </a:extLst>
+            </p:cNvPr>
+            <p:cNvCxnSpPr/>
+            <p:nvPr/>
+          </p:nvCxnSpPr>
+          <p:spPr>
+            <a:xfrm>
+              <a:off x="2451370" y="3664153"/>
+              <a:ext cx="557719" cy="0"/>
+            </a:xfrm>
+            <a:prstGeom prst="straightConnector1">
+              <a:avLst/>
+            </a:prstGeom>
+            <a:ln>
+              <a:tailEnd type="triangle"/>
+            </a:ln>
+          </p:spPr>
+          <p:style>
+            <a:lnRef idx="2">
+              <a:schemeClr val="dk1"/>
+            </a:lnRef>
+            <a:fillRef idx="0">
+              <a:schemeClr val="dk1"/>
+            </a:fillRef>
+            <a:effectRef idx="1">
+              <a:schemeClr val="dk1"/>
+            </a:effectRef>
+            <a:fontRef idx="minor">
+              <a:schemeClr val="tx1"/>
+            </a:fontRef>
+          </p:style>
+        </p:cxnSp>
+        <p:cxnSp>
+          <p:nvCxnSpPr>
+            <p:cNvPr id="21" name="Straight Connector 20">
+              <a:extLst>
+                <a:ext uri="{FF2B5EF4-FFF2-40B4-BE49-F238E27FC236}">
+                  <a16:creationId xmlns:a16="http://schemas.microsoft.com/office/drawing/2014/main" id="{07E93E41-7060-F5CD-5E9C-7BAEB6E268AC}"/>
+                </a:ext>
+              </a:extLst>
+            </p:cNvPr>
+            <p:cNvCxnSpPr>
+              <a:cxnSpLocks/>
+            </p:cNvCxnSpPr>
+            <p:nvPr/>
+          </p:nvCxnSpPr>
+          <p:spPr>
+            <a:xfrm>
+              <a:off x="2451370" y="2613498"/>
+              <a:ext cx="0" cy="1057005"/>
+            </a:xfrm>
+            <a:prstGeom prst="line">
+              <a:avLst/>
+            </a:prstGeom>
+          </p:spPr>
+          <p:style>
+            <a:lnRef idx="2">
+              <a:schemeClr val="dk1"/>
+            </a:lnRef>
+            <a:fillRef idx="0">
+              <a:schemeClr val="dk1"/>
+            </a:fillRef>
+            <a:effectRef idx="1">
+              <a:schemeClr val="dk1"/>
+            </a:effectRef>
+            <a:fontRef idx="minor">
+              <a:schemeClr val="tx1"/>
+            </a:fontRef>
+          </p:style>
+        </p:cxnSp>
+      </p:grpSp>
     </p:spTree>
     <p:extLst>
       <p:ext uri="{BB962C8B-B14F-4D97-AF65-F5344CB8AC3E}">
@@ -43402,7 +45881,7 @@
                                           </p:stCondLst>
                                         </p:cTn>
                                         <p:tgtEl>
-                                          <p:spTgt spid="13"/>
+                                          <p:spTgt spid="9"/>
                                         </p:tgtEl>
                                         <p:attrNameLst>
                                           <p:attrName>style.visibility</p:attrName>
@@ -43416,7 +45895,166 @@
                                       <p:cBhvr>
                                         <p:cTn id="12" dur="500"/>
                                         <p:tgtEl>
+                                          <p:spTgt spid="9"/>
+                                        </p:tgtEl>
+                                      </p:cBhvr>
+                                    </p:animEffect>
+                                  </p:childTnLst>
+                                </p:cTn>
+                              </p:par>
+                            </p:childTnLst>
+                          </p:cTn>
+                        </p:par>
+                      </p:childTnLst>
+                    </p:cTn>
+                  </p:par>
+                  <p:par>
+                    <p:cTn id="13" fill="hold">
+                      <p:stCondLst>
+                        <p:cond delay="indefinite"/>
+                      </p:stCondLst>
+                      <p:childTnLst>
+                        <p:par>
+                          <p:cTn id="14" fill="hold">
+                            <p:stCondLst>
+                              <p:cond delay="0"/>
+                            </p:stCondLst>
+                            <p:childTnLst>
+                              <p:par>
+                                <p:cTn id="15" presetID="10" presetClass="entr" presetSubtype="0" fill="hold" nodeType="clickEffect">
+                                  <p:stCondLst>
+                                    <p:cond delay="0"/>
+                                  </p:stCondLst>
+                                  <p:childTnLst>
+                                    <p:set>
+                                      <p:cBhvr>
+                                        <p:cTn id="16" dur="1" fill="hold">
+                                          <p:stCondLst>
+                                            <p:cond delay="0"/>
+                                          </p:stCondLst>
+                                        </p:cTn>
+                                        <p:tgtEl>
+                                          <p:spTgt spid="18"/>
+                                        </p:tgtEl>
+                                        <p:attrNameLst>
+                                          <p:attrName>style.visibility</p:attrName>
+                                        </p:attrNameLst>
+                                      </p:cBhvr>
+                                      <p:to>
+                                        <p:strVal val="visible"/>
+                                      </p:to>
+                                    </p:set>
+                                    <p:animEffect transition="in" filter="fade">
+                                      <p:cBhvr>
+                                        <p:cTn id="17" dur="500"/>
+                                        <p:tgtEl>
+                                          <p:spTgt spid="18"/>
+                                        </p:tgtEl>
+                                      </p:cBhvr>
+                                    </p:animEffect>
+                                  </p:childTnLst>
+                                </p:cTn>
+                              </p:par>
+                            </p:childTnLst>
+                          </p:cTn>
+                        </p:par>
+                      </p:childTnLst>
+                    </p:cTn>
+                  </p:par>
+                  <p:par>
+                    <p:cTn id="18" fill="hold">
+                      <p:stCondLst>
+                        <p:cond delay="indefinite"/>
+                      </p:stCondLst>
+                      <p:childTnLst>
+                        <p:par>
+                          <p:cTn id="19" fill="hold">
+                            <p:stCondLst>
+                              <p:cond delay="0"/>
+                            </p:stCondLst>
+                            <p:childTnLst>
+                              <p:par>
+                                <p:cTn id="20" presetID="10" presetClass="entr" presetSubtype="0" fill="hold" nodeType="clickEffect">
+                                  <p:stCondLst>
+                                    <p:cond delay="0"/>
+                                  </p:stCondLst>
+                                  <p:childTnLst>
+                                    <p:set>
+                                      <p:cBhvr>
+                                        <p:cTn id="21" dur="1" fill="hold">
+                                          <p:stCondLst>
+                                            <p:cond delay="0"/>
+                                          </p:stCondLst>
+                                        </p:cTn>
+                                        <p:tgtEl>
                                           <p:spTgt spid="13"/>
+                                        </p:tgtEl>
+                                        <p:attrNameLst>
+                                          <p:attrName>style.visibility</p:attrName>
+                                        </p:attrNameLst>
+                                      </p:cBhvr>
+                                      <p:to>
+                                        <p:strVal val="visible"/>
+                                      </p:to>
+                                    </p:set>
+                                    <p:animEffect transition="in" filter="fade">
+                                      <p:cBhvr>
+                                        <p:cTn id="22" dur="500"/>
+                                        <p:tgtEl>
+                                          <p:spTgt spid="13"/>
+                                        </p:tgtEl>
+                                      </p:cBhvr>
+                                    </p:animEffect>
+                                  </p:childTnLst>
+                                </p:cTn>
+                              </p:par>
+                            </p:childTnLst>
+                          </p:cTn>
+                        </p:par>
+                      </p:childTnLst>
+                    </p:cTn>
+                  </p:par>
+                  <p:par>
+                    <p:cTn id="23" fill="hold">
+                      <p:stCondLst>
+                        <p:cond delay="indefinite"/>
+                      </p:stCondLst>
+                      <p:childTnLst>
+                        <p:par>
+                          <p:cTn id="24" fill="hold">
+                            <p:stCondLst>
+                              <p:cond delay="0"/>
+                            </p:stCondLst>
+                            <p:childTnLst>
+                              <p:par>
+                                <p:cTn id="25" presetID="10" presetClass="entr" presetSubtype="0" fill="hold" nodeType="clickEffect">
+                                  <p:stCondLst>
+                                    <p:cond delay="0"/>
+                                  </p:stCondLst>
+                                  <p:childTnLst>
+                                    <p:set>
+                                      <p:cBhvr>
+                                        <p:cTn id="26" dur="1" fill="hold">
+                                          <p:stCondLst>
+                                            <p:cond delay="0"/>
+                                          </p:stCondLst>
+                                        </p:cTn>
+                                        <p:tgtEl>
+                                          <p:spTgt spid="3"/>
+                                        </p:tgtEl>
+                                        <p:attrNameLst>
+                                          <p:attrName>style.visibility</p:attrName>
+                                        </p:attrNameLst>
+                                      </p:cBhvr>
+                                      <p:to>
+                                        <p:strVal val="visible"/>
+                                      </p:to>
+                                    </p:set>
+                                    <p:animEffect transition="in" filter="fade">
+                                      <p:cBhvr>
+                                        <p:cTn id="27" dur="500"/>
+                                        <p:tgtEl>
+                                          <p:spTgt spid="3"/>
                                         </p:tgtEl>
                                       </p:cBhvr>
                                     </p:animEffect>

--- a/python_2/presentation_python_2.pptx
+++ b/python_2/presentation_python_2.pptx
@@ -5,7 +5,7 @@
     <p:sldMasterId id="2147483648" r:id="rId1"/>
   </p:sldMasterIdLst>
   <p:notesMasterIdLst>
-    <p:notesMasterId r:id="rId41"/>
+    <p:notesMasterId r:id="rId42"/>
   </p:notesMasterIdLst>
   <p:sldIdLst>
     <p:sldId id="256" r:id="rId2"/>
@@ -18,35 +18,36 @@
     <p:sldId id="302" r:id="rId9"/>
     <p:sldId id="303" r:id="rId10"/>
     <p:sldId id="304" r:id="rId11"/>
-    <p:sldId id="297" r:id="rId12"/>
-    <p:sldId id="294" r:id="rId13"/>
-    <p:sldId id="259" r:id="rId14"/>
-    <p:sldId id="263" r:id="rId15"/>
-    <p:sldId id="260" r:id="rId16"/>
-    <p:sldId id="261" r:id="rId17"/>
-    <p:sldId id="264" r:id="rId18"/>
-    <p:sldId id="265" r:id="rId19"/>
-    <p:sldId id="266" r:id="rId20"/>
-    <p:sldId id="268" r:id="rId21"/>
-    <p:sldId id="269" r:id="rId22"/>
-    <p:sldId id="271" r:id="rId23"/>
-    <p:sldId id="272" r:id="rId24"/>
-    <p:sldId id="273" r:id="rId25"/>
-    <p:sldId id="274" r:id="rId26"/>
-    <p:sldId id="275" r:id="rId27"/>
-    <p:sldId id="276" r:id="rId28"/>
-    <p:sldId id="277" r:id="rId29"/>
-    <p:sldId id="278" r:id="rId30"/>
-    <p:sldId id="282" r:id="rId31"/>
-    <p:sldId id="283" r:id="rId32"/>
-    <p:sldId id="280" r:id="rId33"/>
-    <p:sldId id="279" r:id="rId34"/>
-    <p:sldId id="288" r:id="rId35"/>
-    <p:sldId id="289" r:id="rId36"/>
-    <p:sldId id="292" r:id="rId37"/>
-    <p:sldId id="291" r:id="rId38"/>
-    <p:sldId id="281" r:id="rId39"/>
-    <p:sldId id="290" r:id="rId40"/>
+    <p:sldId id="305" r:id="rId12"/>
+    <p:sldId id="297" r:id="rId13"/>
+    <p:sldId id="294" r:id="rId14"/>
+    <p:sldId id="259" r:id="rId15"/>
+    <p:sldId id="263" r:id="rId16"/>
+    <p:sldId id="260" r:id="rId17"/>
+    <p:sldId id="261" r:id="rId18"/>
+    <p:sldId id="264" r:id="rId19"/>
+    <p:sldId id="265" r:id="rId20"/>
+    <p:sldId id="266" r:id="rId21"/>
+    <p:sldId id="268" r:id="rId22"/>
+    <p:sldId id="269" r:id="rId23"/>
+    <p:sldId id="271" r:id="rId24"/>
+    <p:sldId id="272" r:id="rId25"/>
+    <p:sldId id="273" r:id="rId26"/>
+    <p:sldId id="274" r:id="rId27"/>
+    <p:sldId id="275" r:id="rId28"/>
+    <p:sldId id="276" r:id="rId29"/>
+    <p:sldId id="277" r:id="rId30"/>
+    <p:sldId id="278" r:id="rId31"/>
+    <p:sldId id="282" r:id="rId32"/>
+    <p:sldId id="283" r:id="rId33"/>
+    <p:sldId id="280" r:id="rId34"/>
+    <p:sldId id="279" r:id="rId35"/>
+    <p:sldId id="288" r:id="rId36"/>
+    <p:sldId id="289" r:id="rId37"/>
+    <p:sldId id="292" r:id="rId38"/>
+    <p:sldId id="291" r:id="rId39"/>
+    <p:sldId id="281" r:id="rId40"/>
+    <p:sldId id="290" r:id="rId41"/>
   </p:sldIdLst>
   <p:sldSz cx="12192000" cy="6858000"/>
   <p:notesSz cx="6858000" cy="9144000"/>
@@ -4721,7 +4722,7 @@
               <a:rPr lang="en-US" dirty="0">
                 <a:latin typeface="Arial Rounded MT Bold" panose="020F0704030504030204" pitchFamily="34" charset="0"/>
               </a:rPr>
-              <a:t> (1/2)</a:t>
+              <a:t> (2/2)</a:t>
             </a:r>
             <a:endParaRPr lang="fr-CA" dirty="0">
               <a:latin typeface="Arial Rounded MT Bold" panose="020F0704030504030204" pitchFamily="34" charset="0"/>
@@ -6655,6 +6656,810 @@
     <p:bg>
       <p:bgPr>
         <a:solidFill>
+          <a:schemeClr val="accent6">
+            <a:lumMod val="20000"/>
+            <a:lumOff val="80000"/>
+          </a:schemeClr>
+        </a:solidFill>
+        <a:effectLst/>
+      </p:bgPr>
+    </p:bg>
+    <p:spTree>
+      <p:nvGrpSpPr>
+        <p:cNvPr id="1" name="">
+          <a:extLst>
+            <a:ext uri="{FF2B5EF4-FFF2-40B4-BE49-F238E27FC236}">
+              <a16:creationId xmlns:a16="http://schemas.microsoft.com/office/drawing/2014/main" id="{8D06BF4E-BBD2-F9E1-3E81-966407441DFF}"/>
+            </a:ext>
+          </a:extLst>
+        </p:cNvPr>
+        <p:cNvGrpSpPr/>
+        <p:nvPr/>
+      </p:nvGrpSpPr>
+      <p:grpSpPr>
+        <a:xfrm>
+          <a:off x="0" y="0"/>
+          <a:ext cx="0" cy="0"/>
+          <a:chOff x="0" y="0"/>
+          <a:chExt cx="0" cy="0"/>
+        </a:xfrm>
+      </p:grpSpPr>
+      <p:sp>
+        <p:nvSpPr>
+          <p:cNvPr id="2" name="Title 1">
+            <a:extLst>
+              <a:ext uri="{FF2B5EF4-FFF2-40B4-BE49-F238E27FC236}">
+                <a16:creationId xmlns:a16="http://schemas.microsoft.com/office/drawing/2014/main" id="{AFFB914A-2C50-CA49-E38B-A080F05C7693}"/>
+              </a:ext>
+            </a:extLst>
+          </p:cNvPr>
+          <p:cNvSpPr>
+            <a:spLocks noGrp="1"/>
+          </p:cNvSpPr>
+          <p:nvPr>
+            <p:ph type="title"/>
+          </p:nvPr>
+        </p:nvSpPr>
+        <p:spPr/>
+        <p:txBody>
+          <a:bodyPr/>
+          <a:lstStyle/>
+          <a:p>
+            <a:r>
+              <a:rPr lang="en-US" dirty="0">
+                <a:latin typeface="Arial Rounded MT Bold" panose="020F0704030504030204" pitchFamily="34" charset="0"/>
+              </a:rPr>
+              <a:t>XR6 – </a:t>
+            </a:r>
+            <a:r>
+              <a:rPr lang="fr-CA" dirty="0">
+                <a:latin typeface="Arial Rounded MT Bold" panose="020F0704030504030204" pitchFamily="34" charset="0"/>
+              </a:rPr>
+              <a:t>Vecteur direction</a:t>
+            </a:r>
+          </a:p>
+        </p:txBody>
+      </p:sp>
+      <mc:AlternateContent xmlns:mc="http://schemas.openxmlformats.org/markup-compatibility/2006">
+        <mc:Choice xmlns:a14="http://schemas.microsoft.com/office/drawing/2010/main" Requires="a14">
+          <p:sp>
+            <p:nvSpPr>
+              <p:cNvPr id="3" name="Content Placeholder 2">
+                <a:extLst>
+                  <a:ext uri="{FF2B5EF4-FFF2-40B4-BE49-F238E27FC236}">
+                    <a16:creationId xmlns:a16="http://schemas.microsoft.com/office/drawing/2014/main" id="{B05F3990-4E4A-E9D2-9105-6733A061A3E1}"/>
+                  </a:ext>
+                </a:extLst>
+              </p:cNvPr>
+              <p:cNvSpPr>
+                <a:spLocks noGrp="1"/>
+              </p:cNvSpPr>
+              <p:nvPr>
+                <p:ph idx="1"/>
+              </p:nvPr>
+            </p:nvSpPr>
+            <p:spPr/>
+            <p:txBody>
+              <a:bodyPr>
+                <a:normAutofit lnSpcReduction="10000"/>
+              </a:bodyPr>
+              <a:lstStyle/>
+              <a:p>
+                <a:pPr marL="342900" indent="-342900" algn="just">
+                  <a:lnSpc>
+                    <a:spcPct val="150000"/>
+                  </a:lnSpc>
+                  <a:buAutoNum type="arabicPeriod"/>
+                </a:pPr>
+                <a:r>
+                  <a:rPr lang="fr-CA" sz="1800" dirty="0">
+                    <a:latin typeface="Consolas" panose="020B0609020204030204" pitchFamily="49" charset="0"/>
+                  </a:rPr>
+                  <a:t>Créez une classe-exception nommée </a:t>
+                </a:r>
+                <a:r>
+                  <a:rPr lang="fr-CA" sz="1800" b="1" dirty="0" err="1">
+                    <a:latin typeface="Consolas" panose="020B0609020204030204" pitchFamily="49" charset="0"/>
+                  </a:rPr>
+                  <a:t>NullNormError</a:t>
+                </a:r>
+                <a:r>
+                  <a:rPr lang="fr-CA" sz="1800" dirty="0">
+                    <a:latin typeface="Consolas" panose="020B0609020204030204" pitchFamily="49" charset="0"/>
+                  </a:rPr>
+                  <a:t>.</a:t>
+                </a:r>
+              </a:p>
+              <a:p>
+                <a:pPr marL="342900" indent="-342900" algn="just">
+                  <a:lnSpc>
+                    <a:spcPct val="150000"/>
+                  </a:lnSpc>
+                  <a:buAutoNum type="arabicPeriod"/>
+                </a:pPr>
+                <a:r>
+                  <a:rPr lang="fr-CA" sz="1800" dirty="0">
+                    <a:latin typeface="Consolas" panose="020B0609020204030204" pitchFamily="49" charset="0"/>
+                  </a:rPr>
+                  <a:t>Ajoutez une méthode nommée </a:t>
+                </a:r>
+                <a:r>
+                  <a:rPr lang="fr-CA" sz="1800" b="1" dirty="0" err="1">
+                    <a:latin typeface="Consolas" panose="020B0609020204030204" pitchFamily="49" charset="0"/>
+                  </a:rPr>
+                  <a:t>calculer_vecteur_direction</a:t>
+                </a:r>
+                <a:r>
+                  <a:rPr lang="fr-CA" sz="1800" b="1" dirty="0">
+                    <a:latin typeface="Consolas" panose="020B0609020204030204" pitchFamily="49" charset="0"/>
+                  </a:rPr>
+                  <a:t>()</a:t>
+                </a:r>
+                <a:r>
+                  <a:rPr lang="fr-CA" sz="1800" dirty="0">
+                    <a:latin typeface="Consolas" panose="020B0609020204030204" pitchFamily="49" charset="0"/>
+                  </a:rPr>
+                  <a:t> à la classe Vecteur qui retourne un nouveau vecteur unitaire (</a:t>
+                </a:r>
+                <a14:m>
+                  <m:oMath xmlns:m="http://schemas.openxmlformats.org/officeDocument/2006/math">
+                    <m:acc>
+                      <m:accPr>
+                        <m:chr m:val="̂"/>
+                        <m:ctrlPr>
+                          <a:rPr lang="fr-CA" sz="1800" i="1">
+                            <a:latin typeface="Cambria Math" panose="02040503050406030204" pitchFamily="18" charset="0"/>
+                          </a:rPr>
+                        </m:ctrlPr>
+                      </m:accPr>
+                      <m:e>
+                        <m:r>
+                          <a:rPr lang="fr-CA" sz="1800" i="1">
+                            <a:latin typeface="Cambria Math" panose="02040503050406030204" pitchFamily="18" charset="0"/>
+                          </a:rPr>
+                          <m:t>𝑣</m:t>
+                        </m:r>
+                      </m:e>
+                    </m:acc>
+                  </m:oMath>
+                </a14:m>
+                <a:r>
+                  <a:rPr lang="fr-CA" sz="1800" dirty="0">
+                    <a:latin typeface="Consolas" panose="020B0609020204030204" pitchFamily="49" charset="0"/>
+                  </a:rPr>
+                  <a:t>) dans la direction de ce dernier.</a:t>
+                </a:r>
+              </a:p>
+              <a:p>
+                <a:pPr marL="800100" lvl="1" indent="-342900" algn="just">
+                  <a:lnSpc>
+                    <a:spcPct val="150000"/>
+                  </a:lnSpc>
+                  <a:buAutoNum type="arabicPeriod"/>
+                </a:pPr>
+                <a:r>
+                  <a:rPr lang="fr-CA" sz="1400" dirty="0">
+                    <a:latin typeface="Consolas" panose="020B0609020204030204" pitchFamily="49" charset="0"/>
+                  </a:rPr>
+                  <a:t>Levez une erreur de type </a:t>
+                </a:r>
+                <a:r>
+                  <a:rPr lang="fr-CA" sz="1400" b="1" dirty="0" err="1">
+                    <a:latin typeface="Consolas" panose="020B0609020204030204" pitchFamily="49" charset="0"/>
+                  </a:rPr>
+                  <a:t>NullNormError</a:t>
+                </a:r>
+                <a:r>
+                  <a:rPr lang="fr-CA" sz="1400" dirty="0">
+                    <a:latin typeface="Consolas" panose="020B0609020204030204" pitchFamily="49" charset="0"/>
+                  </a:rPr>
+                  <a:t> si la norme du vecteur est nulle.</a:t>
+                </a:r>
+              </a:p>
+              <a:p>
+                <a:pPr marL="800100" lvl="1" indent="-342900" algn="just">
+                  <a:lnSpc>
+                    <a:spcPct val="150000"/>
+                  </a:lnSpc>
+                  <a:buAutoNum type="arabicPeriod"/>
+                </a:pPr>
+                <a:r>
+                  <a:rPr lang="fr-CA" sz="1400" dirty="0">
+                    <a:latin typeface="Consolas" panose="020B0609020204030204" pitchFamily="49" charset="0"/>
+                  </a:rPr>
+                  <a:t>Utilisez la fonction </a:t>
+                </a:r>
+                <a:r>
+                  <a:rPr lang="fr-CA" sz="1400" b="1" dirty="0">
+                    <a:latin typeface="Consolas" panose="020B0609020204030204" pitchFamily="49" charset="0"/>
+                  </a:rPr>
+                  <a:t>approx</a:t>
+                </a:r>
+                <a:r>
+                  <a:rPr lang="fr-CA" sz="1400" dirty="0">
+                    <a:latin typeface="Consolas" panose="020B0609020204030204" pitchFamily="49" charset="0"/>
+                  </a:rPr>
+                  <a:t> de </a:t>
+                </a:r>
+                <a:r>
+                  <a:rPr lang="fr-CA" sz="1400" b="1" dirty="0" err="1">
+                    <a:latin typeface="Consolas" panose="020B0609020204030204" pitchFamily="49" charset="0"/>
+                  </a:rPr>
+                  <a:t>pytest</a:t>
+                </a:r>
+                <a:r>
+                  <a:rPr lang="fr-CA" sz="1400" dirty="0">
+                    <a:latin typeface="Consolas" panose="020B0609020204030204" pitchFamily="49" charset="0"/>
+                  </a:rPr>
+                  <a:t> pour le test d'égalité de manière que l'erreur soit levée lorsque </a:t>
+                </a:r>
+                <a14:m>
+                  <m:oMath xmlns:m="http://schemas.openxmlformats.org/officeDocument/2006/math">
+                    <m:d>
+                      <m:dPr>
+                        <m:begChr m:val="‖"/>
+                        <m:endChr m:val="‖"/>
+                        <m:ctrlPr>
+                          <a:rPr lang="fr-CA" sz="1400" i="1">
+                            <a:latin typeface="Cambria Math" panose="02040503050406030204" pitchFamily="18" charset="0"/>
+                          </a:rPr>
+                        </m:ctrlPr>
+                      </m:dPr>
+                      <m:e>
+                        <m:acc>
+                          <m:accPr>
+                            <m:chr m:val="⃗"/>
+                            <m:ctrlPr>
+                              <a:rPr lang="fr-CA" sz="1400" i="1">
+                                <a:latin typeface="Cambria Math" panose="02040503050406030204" pitchFamily="18" charset="0"/>
+                              </a:rPr>
+                            </m:ctrlPr>
+                          </m:accPr>
+                          <m:e>
+                            <m:r>
+                              <a:rPr lang="fr-CA" sz="1400" i="1">
+                                <a:latin typeface="Cambria Math" panose="02040503050406030204" pitchFamily="18" charset="0"/>
+                              </a:rPr>
+                              <m:t>𝑣</m:t>
+                            </m:r>
+                          </m:e>
+                        </m:acc>
+                      </m:e>
+                    </m:d>
+                    <m:r>
+                      <a:rPr lang="en-CA" sz="1400" b="0" i="0" smtClean="0">
+                        <a:latin typeface="Cambria Math" panose="02040503050406030204" pitchFamily="18" charset="0"/>
+                      </a:rPr>
+                      <m:t>&lt;</m:t>
+                    </m:r>
+                    <m:sSup>
+                      <m:sSupPr>
+                        <m:ctrlPr>
+                          <a:rPr lang="en-CA" sz="1400" b="0" i="0" smtClean="0">
+                            <a:latin typeface="Cambria Math" panose="02040503050406030204" pitchFamily="18" charset="0"/>
+                          </a:rPr>
+                        </m:ctrlPr>
+                      </m:sSupPr>
+                      <m:e>
+                        <m:r>
+                          <a:rPr lang="en-CA" sz="1400" b="0" i="0" smtClean="0">
+                            <a:latin typeface="Cambria Math" panose="02040503050406030204" pitchFamily="18" charset="0"/>
+                          </a:rPr>
+                          <m:t>10</m:t>
+                        </m:r>
+                      </m:e>
+                      <m:sup>
+                        <m:r>
+                          <a:rPr lang="en-CA" sz="1400" b="0" i="0" smtClean="0">
+                            <a:latin typeface="Cambria Math" panose="02040503050406030204" pitchFamily="18" charset="0"/>
+                          </a:rPr>
+                          <m:t>−12</m:t>
+                        </m:r>
+                      </m:sup>
+                    </m:sSup>
+                  </m:oMath>
+                </a14:m>
+                <a:r>
+                  <a:rPr lang="fr-CA" sz="1400" dirty="0">
+                    <a:latin typeface="Consolas" panose="020B0609020204030204" pitchFamily="49" charset="0"/>
+                  </a:rPr>
+                  <a:t>, qui est la tolérance par défaut de </a:t>
+                </a:r>
+                <a:r>
+                  <a:rPr lang="fr-CA" sz="1400" b="1" dirty="0">
+                    <a:latin typeface="Consolas" panose="020B0609020204030204" pitchFamily="49" charset="0"/>
+                  </a:rPr>
+                  <a:t>approx()</a:t>
+                </a:r>
+                <a:r>
+                  <a:rPr lang="fr-CA" sz="1400" dirty="0">
+                    <a:latin typeface="Consolas" panose="020B0609020204030204" pitchFamily="49" charset="0"/>
+                  </a:rPr>
+                  <a:t>.</a:t>
+                </a:r>
+              </a:p>
+              <a:p>
+                <a:pPr marL="0" indent="0" algn="just">
+                  <a:lnSpc>
+                    <a:spcPct val="100000"/>
+                  </a:lnSpc>
+                  <a:buNone/>
+                </a:pPr>
+                <a:endParaRPr lang="fr-CA" sz="1800" dirty="0">
+                  <a:latin typeface="Consolas" panose="020B0609020204030204" pitchFamily="49" charset="0"/>
+                </a:endParaRPr>
+              </a:p>
+              <a:p>
+                <a:pPr marL="0" indent="0" algn="just">
+                  <a:lnSpc>
+                    <a:spcPct val="100000"/>
+                  </a:lnSpc>
+                  <a:buNone/>
+                </a:pPr>
+                <a:r>
+                  <a:rPr lang="fr-CA" sz="1800" dirty="0">
+                    <a:latin typeface="Consolas" panose="020B0609020204030204" pitchFamily="49" charset="0"/>
+                  </a:rPr>
+                  <a:t>Le vecteur direction se calcule comme suit:</a:t>
+                </a:r>
+              </a:p>
+              <a:p>
+                <a:pPr marL="0" indent="0" algn="just">
+                  <a:lnSpc>
+                    <a:spcPct val="100000"/>
+                  </a:lnSpc>
+                  <a:buNone/>
+                </a:pPr>
+                <a:endParaRPr lang="fr-CA" sz="1800" dirty="0">
+                  <a:latin typeface="Consolas" panose="020B0609020204030204" pitchFamily="49" charset="0"/>
+                </a:endParaRPr>
+              </a:p>
+              <a:p>
+                <a:pPr marL="0" indent="0" algn="just">
+                  <a:lnSpc>
+                    <a:spcPct val="100000"/>
+                  </a:lnSpc>
+                  <a:buNone/>
+                </a:pPr>
+                <a14:m>
+                  <m:oMathPara xmlns:m="http://schemas.openxmlformats.org/officeDocument/2006/math">
+                    <m:oMathParaPr>
+                      <m:jc m:val="centerGroup"/>
+                    </m:oMathParaPr>
+                    <m:oMath xmlns:m="http://schemas.openxmlformats.org/officeDocument/2006/math">
+                      <m:acc>
+                        <m:accPr>
+                          <m:chr m:val="̂"/>
+                          <m:ctrlPr>
+                            <a:rPr lang="fr-CA" sz="1800" b="0" i="1" smtClean="0">
+                              <a:latin typeface="Cambria Math" panose="02040503050406030204" pitchFamily="18" charset="0"/>
+                            </a:rPr>
+                          </m:ctrlPr>
+                        </m:accPr>
+                        <m:e>
+                          <m:r>
+                            <a:rPr lang="fr-CA" sz="1800" b="0" i="1" smtClean="0">
+                              <a:latin typeface="Cambria Math" panose="02040503050406030204" pitchFamily="18" charset="0"/>
+                            </a:rPr>
+                            <m:t>𝑣</m:t>
+                          </m:r>
+                        </m:e>
+                      </m:acc>
+                      <m:r>
+                        <a:rPr lang="fr-CA" sz="1800" b="0" i="1" smtClean="0">
+                          <a:latin typeface="Cambria Math" panose="02040503050406030204" pitchFamily="18" charset="0"/>
+                        </a:rPr>
+                        <m:t>=</m:t>
+                      </m:r>
+                      <m:f>
+                        <m:fPr>
+                          <m:ctrlPr>
+                            <a:rPr lang="fr-CA" sz="1800" b="0" i="1" smtClean="0">
+                              <a:latin typeface="Cambria Math" panose="02040503050406030204" pitchFamily="18" charset="0"/>
+                            </a:rPr>
+                          </m:ctrlPr>
+                        </m:fPr>
+                        <m:num>
+                          <m:acc>
+                            <m:accPr>
+                              <m:chr m:val="⃗"/>
+                              <m:ctrlPr>
+                                <a:rPr lang="fr-CA" sz="1800" b="0" i="1" smtClean="0">
+                                  <a:latin typeface="Cambria Math" panose="02040503050406030204" pitchFamily="18" charset="0"/>
+                                </a:rPr>
+                              </m:ctrlPr>
+                            </m:accPr>
+                            <m:e>
+                              <m:r>
+                                <a:rPr lang="fr-CA" sz="1800" i="1">
+                                  <a:latin typeface="Cambria Math" panose="02040503050406030204" pitchFamily="18" charset="0"/>
+                                </a:rPr>
+                                <m:t>𝑣</m:t>
+                              </m:r>
+                            </m:e>
+                          </m:acc>
+                        </m:num>
+                        <m:den>
+                          <m:d>
+                            <m:dPr>
+                              <m:begChr m:val="‖"/>
+                              <m:endChr m:val="‖"/>
+                              <m:ctrlPr>
+                                <a:rPr lang="fr-CA" sz="1800" b="0" i="1" smtClean="0">
+                                  <a:latin typeface="Cambria Math" panose="02040503050406030204" pitchFamily="18" charset="0"/>
+                                </a:rPr>
+                              </m:ctrlPr>
+                            </m:dPr>
+                            <m:e>
+                              <m:acc>
+                                <m:accPr>
+                                  <m:chr m:val="⃗"/>
+                                  <m:ctrlPr>
+                                    <a:rPr lang="fr-CA" sz="1800" i="1">
+                                      <a:latin typeface="Cambria Math" panose="02040503050406030204" pitchFamily="18" charset="0"/>
+                                    </a:rPr>
+                                  </m:ctrlPr>
+                                </m:accPr>
+                                <m:e>
+                                  <m:r>
+                                    <a:rPr lang="fr-CA" sz="1800" i="1">
+                                      <a:latin typeface="Cambria Math" panose="02040503050406030204" pitchFamily="18" charset="0"/>
+                                    </a:rPr>
+                                    <m:t>𝑣</m:t>
+                                  </m:r>
+                                </m:e>
+                              </m:acc>
+                            </m:e>
+                          </m:d>
+                        </m:den>
+                      </m:f>
+                      <m:r>
+                        <a:rPr lang="fr-CA" sz="1800" b="0" i="1" smtClean="0">
+                          <a:latin typeface="Cambria Math" panose="02040503050406030204" pitchFamily="18" charset="0"/>
+                        </a:rPr>
+                        <m:t>=</m:t>
+                      </m:r>
+                      <m:d>
+                        <m:dPr>
+                          <m:begChr m:val="⟨"/>
+                          <m:endChr m:val="⟩"/>
+                          <m:ctrlPr>
+                            <a:rPr lang="fr-CA" sz="1800" b="0" i="1" smtClean="0">
+                              <a:latin typeface="Cambria Math" panose="02040503050406030204" pitchFamily="18" charset="0"/>
+                            </a:rPr>
+                          </m:ctrlPr>
+                        </m:dPr>
+                        <m:e>
+                          <m:f>
+                            <m:fPr>
+                              <m:ctrlPr>
+                                <a:rPr lang="fr-CA" sz="1800" b="0" i="1" smtClean="0">
+                                  <a:latin typeface="Cambria Math" panose="02040503050406030204" pitchFamily="18" charset="0"/>
+                                </a:rPr>
+                              </m:ctrlPr>
+                            </m:fPr>
+                            <m:num>
+                              <m:sSub>
+                                <m:sSubPr>
+                                  <m:ctrlPr>
+                                    <a:rPr lang="fr-CA" sz="1800" b="0" i="1" smtClean="0">
+                                      <a:latin typeface="Cambria Math" panose="02040503050406030204" pitchFamily="18" charset="0"/>
+                                    </a:rPr>
+                                  </m:ctrlPr>
+                                </m:sSubPr>
+                                <m:e>
+                                  <m:r>
+                                    <a:rPr lang="fr-CA" sz="1800" b="0" i="1" smtClean="0">
+                                      <a:latin typeface="Cambria Math" panose="02040503050406030204" pitchFamily="18" charset="0"/>
+                                    </a:rPr>
+                                    <m:t>𝑣</m:t>
+                                  </m:r>
+                                </m:e>
+                                <m:sub>
+                                  <m:r>
+                                    <a:rPr lang="fr-CA" sz="1800" b="0" i="1" smtClean="0">
+                                      <a:latin typeface="Cambria Math" panose="02040503050406030204" pitchFamily="18" charset="0"/>
+                                    </a:rPr>
+                                    <m:t>𝑥</m:t>
+                                  </m:r>
+                                </m:sub>
+                              </m:sSub>
+                            </m:num>
+                            <m:den>
+                              <m:d>
+                                <m:dPr>
+                                  <m:begChr m:val="‖"/>
+                                  <m:endChr m:val="‖"/>
+                                  <m:ctrlPr>
+                                    <a:rPr lang="fr-CA" sz="1800" i="1">
+                                      <a:latin typeface="Cambria Math" panose="02040503050406030204" pitchFamily="18" charset="0"/>
+                                    </a:rPr>
+                                  </m:ctrlPr>
+                                </m:dPr>
+                                <m:e>
+                                  <m:acc>
+                                    <m:accPr>
+                                      <m:chr m:val="⃗"/>
+                                      <m:ctrlPr>
+                                        <a:rPr lang="fr-CA" sz="1800" i="1">
+                                          <a:latin typeface="Cambria Math" panose="02040503050406030204" pitchFamily="18" charset="0"/>
+                                        </a:rPr>
+                                      </m:ctrlPr>
+                                    </m:accPr>
+                                    <m:e>
+                                      <m:r>
+                                        <a:rPr lang="fr-CA" sz="1800" i="1">
+                                          <a:latin typeface="Cambria Math" panose="02040503050406030204" pitchFamily="18" charset="0"/>
+                                        </a:rPr>
+                                        <m:t>𝑣</m:t>
+                                      </m:r>
+                                    </m:e>
+                                  </m:acc>
+                                </m:e>
+                              </m:d>
+                            </m:den>
+                          </m:f>
+                          <m:r>
+                            <a:rPr lang="fr-CA" sz="1800" b="0" i="1" smtClean="0">
+                              <a:latin typeface="Cambria Math" panose="02040503050406030204" pitchFamily="18" charset="0"/>
+                            </a:rPr>
+                            <m:t>,</m:t>
+                          </m:r>
+                          <m:f>
+                            <m:fPr>
+                              <m:ctrlPr>
+                                <a:rPr lang="fr-CA" sz="1800" i="1">
+                                  <a:latin typeface="Cambria Math" panose="02040503050406030204" pitchFamily="18" charset="0"/>
+                                </a:rPr>
+                              </m:ctrlPr>
+                            </m:fPr>
+                            <m:num>
+                              <m:sSub>
+                                <m:sSubPr>
+                                  <m:ctrlPr>
+                                    <a:rPr lang="fr-CA" sz="1800" i="1">
+                                      <a:latin typeface="Cambria Math" panose="02040503050406030204" pitchFamily="18" charset="0"/>
+                                    </a:rPr>
+                                  </m:ctrlPr>
+                                </m:sSubPr>
+                                <m:e>
+                                  <m:r>
+                                    <a:rPr lang="fr-CA" sz="1800" i="1">
+                                      <a:latin typeface="Cambria Math" panose="02040503050406030204" pitchFamily="18" charset="0"/>
+                                    </a:rPr>
+                                    <m:t>𝑣</m:t>
+                                  </m:r>
+                                </m:e>
+                                <m:sub>
+                                  <m:r>
+                                    <a:rPr lang="fr-CA" sz="1800" b="0" i="1" smtClean="0">
+                                      <a:latin typeface="Cambria Math" panose="02040503050406030204" pitchFamily="18" charset="0"/>
+                                    </a:rPr>
+                                    <m:t>𝑦</m:t>
+                                  </m:r>
+                                </m:sub>
+                              </m:sSub>
+                            </m:num>
+                            <m:den>
+                              <m:d>
+                                <m:dPr>
+                                  <m:begChr m:val="‖"/>
+                                  <m:endChr m:val="‖"/>
+                                  <m:ctrlPr>
+                                    <a:rPr lang="fr-CA" sz="1800" i="1">
+                                      <a:latin typeface="Cambria Math" panose="02040503050406030204" pitchFamily="18" charset="0"/>
+                                    </a:rPr>
+                                  </m:ctrlPr>
+                                </m:dPr>
+                                <m:e>
+                                  <m:acc>
+                                    <m:accPr>
+                                      <m:chr m:val="⃗"/>
+                                      <m:ctrlPr>
+                                        <a:rPr lang="fr-CA" sz="1800" i="1">
+                                          <a:latin typeface="Cambria Math" panose="02040503050406030204" pitchFamily="18" charset="0"/>
+                                        </a:rPr>
+                                      </m:ctrlPr>
+                                    </m:accPr>
+                                    <m:e>
+                                      <m:r>
+                                        <a:rPr lang="fr-CA" sz="1800" i="1">
+                                          <a:latin typeface="Cambria Math" panose="02040503050406030204" pitchFamily="18" charset="0"/>
+                                        </a:rPr>
+                                        <m:t>𝑣</m:t>
+                                      </m:r>
+                                    </m:e>
+                                  </m:acc>
+                                </m:e>
+                              </m:d>
+                            </m:den>
+                          </m:f>
+                          <m:r>
+                            <a:rPr lang="fr-CA" sz="1800" b="0" i="1" smtClean="0">
+                              <a:latin typeface="Cambria Math" panose="02040503050406030204" pitchFamily="18" charset="0"/>
+                            </a:rPr>
+                            <m:t>,</m:t>
+                          </m:r>
+                          <m:f>
+                            <m:fPr>
+                              <m:ctrlPr>
+                                <a:rPr lang="fr-CA" sz="1800" i="1">
+                                  <a:latin typeface="Cambria Math" panose="02040503050406030204" pitchFamily="18" charset="0"/>
+                                </a:rPr>
+                              </m:ctrlPr>
+                            </m:fPr>
+                            <m:num>
+                              <m:sSub>
+                                <m:sSubPr>
+                                  <m:ctrlPr>
+                                    <a:rPr lang="fr-CA" sz="1800" i="1">
+                                      <a:latin typeface="Cambria Math" panose="02040503050406030204" pitchFamily="18" charset="0"/>
+                                    </a:rPr>
+                                  </m:ctrlPr>
+                                </m:sSubPr>
+                                <m:e>
+                                  <m:r>
+                                    <a:rPr lang="fr-CA" sz="1800" i="1">
+                                      <a:latin typeface="Cambria Math" panose="02040503050406030204" pitchFamily="18" charset="0"/>
+                                    </a:rPr>
+                                    <m:t>𝑣</m:t>
+                                  </m:r>
+                                </m:e>
+                                <m:sub>
+                                  <m:r>
+                                    <a:rPr lang="fr-CA" sz="1800" b="0" i="1" smtClean="0">
+                                      <a:latin typeface="Cambria Math" panose="02040503050406030204" pitchFamily="18" charset="0"/>
+                                    </a:rPr>
+                                    <m:t>𝑧</m:t>
+                                  </m:r>
+                                </m:sub>
+                              </m:sSub>
+                            </m:num>
+                            <m:den>
+                              <m:d>
+                                <m:dPr>
+                                  <m:begChr m:val="‖"/>
+                                  <m:endChr m:val="‖"/>
+                                  <m:ctrlPr>
+                                    <a:rPr lang="fr-CA" sz="1800" i="1">
+                                      <a:latin typeface="Cambria Math" panose="02040503050406030204" pitchFamily="18" charset="0"/>
+                                    </a:rPr>
+                                  </m:ctrlPr>
+                                </m:dPr>
+                                <m:e>
+                                  <m:acc>
+                                    <m:accPr>
+                                      <m:chr m:val="⃗"/>
+                                      <m:ctrlPr>
+                                        <a:rPr lang="fr-CA" sz="1800" i="1">
+                                          <a:latin typeface="Cambria Math" panose="02040503050406030204" pitchFamily="18" charset="0"/>
+                                        </a:rPr>
+                                      </m:ctrlPr>
+                                    </m:accPr>
+                                    <m:e>
+                                      <m:r>
+                                        <a:rPr lang="fr-CA" sz="1800" i="1">
+                                          <a:latin typeface="Cambria Math" panose="02040503050406030204" pitchFamily="18" charset="0"/>
+                                        </a:rPr>
+                                        <m:t>𝑣</m:t>
+                                      </m:r>
+                                    </m:e>
+                                  </m:acc>
+                                </m:e>
+                              </m:d>
+                            </m:den>
+                          </m:f>
+                        </m:e>
+                      </m:d>
+                    </m:oMath>
+                  </m:oMathPara>
+                </a14:m>
+                <a:endParaRPr lang="fr-CA" sz="1800" dirty="0">
+                  <a:latin typeface="Consolas" panose="020B0609020204030204" pitchFamily="49" charset="0"/>
+                </a:endParaRPr>
+              </a:p>
+              <a:p>
+                <a:pPr marL="0" indent="0" algn="just">
+                  <a:lnSpc>
+                    <a:spcPct val="100000"/>
+                  </a:lnSpc>
+                  <a:buNone/>
+                </a:pPr>
+                <a:endParaRPr lang="fr-CA" sz="1800" dirty="0">
+                  <a:latin typeface="Consolas" panose="020B0609020204030204" pitchFamily="49" charset="0"/>
+                </a:endParaRPr>
+              </a:p>
+            </p:txBody>
+          </p:sp>
+        </mc:Choice>
+        <mc:Fallback>
+          <p:sp>
+            <p:nvSpPr>
+              <p:cNvPr id="3" name="Content Placeholder 2">
+                <a:extLst>
+                  <a:ext uri="{FF2B5EF4-FFF2-40B4-BE49-F238E27FC236}">
+                    <a16:creationId xmlns:a16="http://schemas.microsoft.com/office/drawing/2014/main" id="{B05F3990-4E4A-E9D2-9105-6733A061A3E1}"/>
+                  </a:ext>
+                </a:extLst>
+              </p:cNvPr>
+              <p:cNvSpPr>
+                <a:spLocks noGrp="1" noRot="1" noChangeAspect="1" noMove="1" noResize="1" noEditPoints="1" noAdjustHandles="1" noChangeArrowheads="1" noChangeShapeType="1" noTextEdit="1"/>
+              </p:cNvSpPr>
+              <p:nvPr>
+                <p:ph idx="1"/>
+              </p:nvPr>
+            </p:nvSpPr>
+            <p:spPr>
+              <a:blipFill>
+                <a:blip r:embed="rId2"/>
+                <a:stretch>
+                  <a:fillRect l="-522" r="-464"/>
+                </a:stretch>
+              </a:blipFill>
+            </p:spPr>
+            <p:txBody>
+              <a:bodyPr/>
+              <a:lstStyle/>
+              <a:p>
+                <a:r>
+                  <a:rPr lang="fr-CA">
+                    <a:noFill/>
+                  </a:rPr>
+                  <a:t> </a:t>
+                </a:r>
+              </a:p>
+            </p:txBody>
+          </p:sp>
+        </mc:Fallback>
+      </mc:AlternateContent>
+      <p:sp>
+        <p:nvSpPr>
+          <p:cNvPr id="4" name="Slide Number Placeholder 3">
+            <a:extLst>
+              <a:ext uri="{FF2B5EF4-FFF2-40B4-BE49-F238E27FC236}">
+                <a16:creationId xmlns:a16="http://schemas.microsoft.com/office/drawing/2014/main" id="{FA9069FD-7467-A109-B4AE-393F75C0955C}"/>
+              </a:ext>
+            </a:extLst>
+          </p:cNvPr>
+          <p:cNvSpPr>
+            <a:spLocks noGrp="1"/>
+          </p:cNvSpPr>
+          <p:nvPr>
+            <p:ph type="sldNum" sz="quarter" idx="12"/>
+          </p:nvPr>
+        </p:nvSpPr>
+        <p:spPr/>
+        <p:txBody>
+          <a:bodyPr/>
+          <a:lstStyle/>
+          <a:p>
+            <a:fld id="{846B06B1-1179-491F-A487-8E0C403F7C13}" type="slidenum">
+              <a:rPr lang="fr-CA" smtClean="0"/>
+              <a:t>11</a:t>
+            </a:fld>
+            <a:endParaRPr lang="fr-CA"/>
+          </a:p>
+        </p:txBody>
+      </p:sp>
+    </p:spTree>
+    <p:extLst>
+      <p:ext uri="{BB962C8B-B14F-4D97-AF65-F5344CB8AC3E}">
+        <p14:creationId xmlns:p14="http://schemas.microsoft.com/office/powerpoint/2010/main" val="2262892210"/>
+      </p:ext>
+    </p:extLst>
+  </p:cSld>
+  <p:clrMapOvr>
+    <a:masterClrMapping/>
+  </p:clrMapOvr>
+</p:sld>
+</file>
+
+<file path=ppt/slides/slide12.xml><?xml version="1.0" encoding="utf-8"?>
+<p:sld xmlns:a="http://schemas.openxmlformats.org/drawingml/2006/main" xmlns:r="http://schemas.openxmlformats.org/officeDocument/2006/relationships" xmlns:p="http://schemas.openxmlformats.org/presentationml/2006/main">
+  <p:cSld>
+    <p:bg>
+      <p:bgPr>
+        <a:solidFill>
           <a:srgbClr val="FFFF00"/>
         </a:solidFill>
         <a:effectLst/>
@@ -6739,7 +7544,7 @@
 </p:sld>
 </file>
 
-<file path=ppt/slides/slide12.xml><?xml version="1.0" encoding="utf-8"?>
+<file path=ppt/slides/slide13.xml><?xml version="1.0" encoding="utf-8"?>
 <p:sld xmlns:a="http://schemas.openxmlformats.org/drawingml/2006/main" xmlns:r="http://schemas.openxmlformats.org/officeDocument/2006/relationships" xmlns:p="http://schemas.openxmlformats.org/presentationml/2006/main">
   <p:cSld>
     <p:bg>
@@ -7379,7 +8184,7 @@
           <a:p>
             <a:fld id="{846B06B1-1179-491F-A487-8E0C403F7C13}" type="slidenum">
               <a:rPr lang="fr-CA" smtClean="0"/>
-              <a:t>12</a:t>
+              <a:t>13</a:t>
             </a:fld>
             <a:endParaRPr lang="fr-CA"/>
           </a:p>
@@ -7880,7 +8685,7 @@
 </p:sld>
 </file>
 
-<file path=ppt/slides/slide13.xml><?xml version="1.0" encoding="utf-8"?>
+<file path=ppt/slides/slide14.xml><?xml version="1.0" encoding="utf-8"?>
 <p:sld xmlns:a="http://schemas.openxmlformats.org/drawingml/2006/main" xmlns:r="http://schemas.openxmlformats.org/officeDocument/2006/relationships" xmlns:p="http://schemas.openxmlformats.org/presentationml/2006/main">
   <p:cSld>
     <p:bg>
@@ -8370,7 +9175,7 @@
           <a:p>
             <a:fld id="{846B06B1-1179-491F-A487-8E0C403F7C13}" type="slidenum">
               <a:rPr lang="fr-CA" smtClean="0"/>
-              <a:t>13</a:t>
+              <a:t>14</a:t>
             </a:fld>
             <a:endParaRPr lang="fr-CA"/>
           </a:p>
@@ -8907,7 +9712,7 @@
 </p:sld>
 </file>
 
-<file path=ppt/slides/slide14.xml><?xml version="1.0" encoding="utf-8"?>
+<file path=ppt/slides/slide15.xml><?xml version="1.0" encoding="utf-8"?>
 <p:sld xmlns:a="http://schemas.openxmlformats.org/drawingml/2006/main" xmlns:r="http://schemas.openxmlformats.org/officeDocument/2006/relationships" xmlns:p="http://schemas.openxmlformats.org/presentationml/2006/main">
   <p:cSld>
     <p:bg>
@@ -9289,7 +10094,7 @@
           <a:p>
             <a:fld id="{846B06B1-1179-491F-A487-8E0C403F7C13}" type="slidenum">
               <a:rPr lang="fr-CA" smtClean="0"/>
-              <a:t>14</a:t>
+              <a:t>15</a:t>
             </a:fld>
             <a:endParaRPr lang="fr-CA"/>
           </a:p>
@@ -9668,7 +10473,7 @@
 </p:sld>
 </file>
 
-<file path=ppt/slides/slide15.xml><?xml version="1.0" encoding="utf-8"?>
+<file path=ppt/slides/slide16.xml><?xml version="1.0" encoding="utf-8"?>
 <p:sld xmlns:a="http://schemas.openxmlformats.org/drawingml/2006/main" xmlns:r="http://schemas.openxmlformats.org/officeDocument/2006/relationships" xmlns:p="http://schemas.openxmlformats.org/presentationml/2006/main">
   <p:cSld>
     <p:bg>
@@ -10135,7 +10940,7 @@
           <a:p>
             <a:fld id="{846B06B1-1179-491F-A487-8E0C403F7C13}" type="slidenum">
               <a:rPr lang="fr-CA" smtClean="0"/>
-              <a:t>15</a:t>
+              <a:t>16</a:t>
             </a:fld>
             <a:endParaRPr lang="fr-CA"/>
           </a:p>
@@ -10749,7 +11554,7 @@
 </p:sld>
 </file>
 
-<file path=ppt/slides/slide16.xml><?xml version="1.0" encoding="utf-8"?>
+<file path=ppt/slides/slide17.xml><?xml version="1.0" encoding="utf-8"?>
 <p:sld xmlns:a="http://schemas.openxmlformats.org/drawingml/2006/main" xmlns:r="http://schemas.openxmlformats.org/officeDocument/2006/relationships" xmlns:p="http://schemas.openxmlformats.org/presentationml/2006/main">
   <p:cSld>
     <p:bg>
@@ -11484,7 +12289,7 @@
           <a:p>
             <a:fld id="{846B06B1-1179-491F-A487-8E0C403F7C13}" type="slidenum">
               <a:rPr lang="fr-CA" smtClean="0"/>
-              <a:t>16</a:t>
+              <a:t>17</a:t>
             </a:fld>
             <a:endParaRPr lang="fr-CA"/>
           </a:p>
@@ -11503,7 +12308,7 @@
 </p:sld>
 </file>
 
-<file path=ppt/slides/slide17.xml><?xml version="1.0" encoding="utf-8"?>
+<file path=ppt/slides/slide18.xml><?xml version="1.0" encoding="utf-8"?>
 <p:sld xmlns:a="http://schemas.openxmlformats.org/drawingml/2006/main" xmlns:r="http://schemas.openxmlformats.org/officeDocument/2006/relationships" xmlns:p="http://schemas.openxmlformats.org/presentationml/2006/main">
   <p:cSld>
     <p:bg>
@@ -11611,7 +12416,7 @@
           <a:p>
             <a:fld id="{846B06B1-1179-491F-A487-8E0C403F7C13}" type="slidenum">
               <a:rPr lang="fr-CA" smtClean="0"/>
-              <a:t>17</a:t>
+              <a:t>18</a:t>
             </a:fld>
             <a:endParaRPr lang="fr-CA"/>
           </a:p>
@@ -12254,7 +13059,7 @@
 </p:sld>
 </file>
 
-<file path=ppt/slides/slide18.xml><?xml version="1.0" encoding="utf-8"?>
+<file path=ppt/slides/slide19.xml><?xml version="1.0" encoding="utf-8"?>
 <p:sld xmlns:a="http://schemas.openxmlformats.org/drawingml/2006/main" xmlns:r="http://schemas.openxmlformats.org/officeDocument/2006/relationships" xmlns:p="http://schemas.openxmlformats.org/presentationml/2006/main">
   <p:cSld>
     <p:bg>
@@ -12510,7 +13315,7 @@
           <a:p>
             <a:fld id="{846B06B1-1179-491F-A487-8E0C403F7C13}" type="slidenum">
               <a:rPr lang="fr-CA" smtClean="0"/>
-              <a:t>18</a:t>
+              <a:t>19</a:t>
             </a:fld>
             <a:endParaRPr lang="fr-CA"/>
           </a:p>
@@ -13535,7 +14340,468 @@
 </p:sld>
 </file>
 
-<file path=ppt/slides/slide19.xml><?xml version="1.0" encoding="utf-8"?>
+<file path=ppt/slides/slide2.xml><?xml version="1.0" encoding="utf-8"?>
+<p:sld xmlns:a="http://schemas.openxmlformats.org/drawingml/2006/main" xmlns:r="http://schemas.openxmlformats.org/officeDocument/2006/relationships" xmlns:p="http://schemas.openxmlformats.org/presentationml/2006/main">
+  <p:cSld>
+    <p:bg>
+      <p:bgPr>
+        <a:solidFill>
+          <a:srgbClr val="F5F5F5"/>
+        </a:solidFill>
+        <a:effectLst/>
+      </p:bgPr>
+    </p:bg>
+    <p:spTree>
+      <p:nvGrpSpPr>
+        <p:cNvPr id="1" name="">
+          <a:extLst>
+            <a:ext uri="{FF2B5EF4-FFF2-40B4-BE49-F238E27FC236}">
+              <a16:creationId xmlns:a16="http://schemas.microsoft.com/office/drawing/2014/main" id="{9787BE08-8E87-BDAC-AA37-B1440F99BBB3}"/>
+            </a:ext>
+          </a:extLst>
+        </p:cNvPr>
+        <p:cNvGrpSpPr/>
+        <p:nvPr/>
+      </p:nvGrpSpPr>
+      <p:grpSpPr>
+        <a:xfrm>
+          <a:off x="0" y="0"/>
+          <a:ext cx="0" cy="0"/>
+          <a:chOff x="0" y="0"/>
+          <a:chExt cx="0" cy="0"/>
+        </a:xfrm>
+      </p:grpSpPr>
+      <p:sp>
+        <p:nvSpPr>
+          <p:cNvPr id="2" name="Title 1">
+            <a:extLst>
+              <a:ext uri="{FF2B5EF4-FFF2-40B4-BE49-F238E27FC236}">
+                <a16:creationId xmlns:a16="http://schemas.microsoft.com/office/drawing/2014/main" id="{2539027E-795E-A7E7-3EF9-F5DE694B487D}"/>
+              </a:ext>
+            </a:extLst>
+          </p:cNvPr>
+          <p:cNvSpPr>
+            <a:spLocks noGrp="1"/>
+          </p:cNvSpPr>
+          <p:nvPr>
+            <p:ph type="title"/>
+          </p:nvPr>
+        </p:nvSpPr>
+        <p:spPr/>
+        <p:txBody>
+          <a:bodyPr/>
+          <a:lstStyle/>
+          <a:p>
+            <a:r>
+              <a:rPr lang="en-US" dirty="0">
+                <a:latin typeface="Arial Rounded MT Bold" panose="020F0704030504030204" pitchFamily="34" charset="0"/>
+              </a:rPr>
+              <a:t>Plan</a:t>
+            </a:r>
+            <a:endParaRPr lang="fr-CA" dirty="0">
+              <a:latin typeface="Arial Rounded MT Bold" panose="020F0704030504030204" pitchFamily="34" charset="0"/>
+            </a:endParaRPr>
+          </a:p>
+        </p:txBody>
+      </p:sp>
+      <p:sp>
+        <p:nvSpPr>
+          <p:cNvPr id="3" name="Content Placeholder 2">
+            <a:extLst>
+              <a:ext uri="{FF2B5EF4-FFF2-40B4-BE49-F238E27FC236}">
+                <a16:creationId xmlns:a16="http://schemas.microsoft.com/office/drawing/2014/main" id="{1A2C692D-48DA-2C5B-C433-961FD8C3D9A4}"/>
+              </a:ext>
+            </a:extLst>
+          </p:cNvPr>
+          <p:cNvSpPr>
+            <a:spLocks noGrp="1"/>
+          </p:cNvSpPr>
+          <p:nvPr>
+            <p:ph idx="1"/>
+          </p:nvPr>
+        </p:nvSpPr>
+        <p:spPr/>
+        <p:txBody>
+          <a:bodyPr>
+            <a:normAutofit/>
+          </a:bodyPr>
+          <a:lstStyle/>
+          <a:p>
+            <a:pPr algn="just"/>
+            <a:r>
+              <a:rPr lang="en-US" sz="2000" dirty="0">
+                <a:latin typeface="Consolas" panose="020B0609020204030204" pitchFamily="49" charset="0"/>
+              </a:rPr>
+              <a:t>Notions </a:t>
+            </a:r>
+            <a:r>
+              <a:rPr lang="en-US" sz="2000" dirty="0" err="1">
+                <a:latin typeface="Consolas" panose="020B0609020204030204" pitchFamily="49" charset="0"/>
+              </a:rPr>
+              <a:t>intermédiaires</a:t>
+            </a:r>
+            <a:endParaRPr lang="en-US" sz="2000" dirty="0">
+              <a:latin typeface="Consolas" panose="020B0609020204030204" pitchFamily="49" charset="0"/>
+            </a:endParaRPr>
+          </a:p>
+          <a:p>
+            <a:pPr algn="just"/>
+            <a:r>
+              <a:rPr lang="fr-CA" sz="2000" dirty="0">
+                <a:latin typeface="Consolas" panose="020B0609020204030204" pitchFamily="49" charset="0"/>
+              </a:rPr>
+              <a:t>É</a:t>
+            </a:r>
+            <a:r>
+              <a:rPr lang="en-US" sz="2000" dirty="0" err="1">
+                <a:latin typeface="Consolas" panose="020B0609020204030204" pitchFamily="49" charset="0"/>
+              </a:rPr>
+              <a:t>crire</a:t>
+            </a:r>
+            <a:r>
+              <a:rPr lang="en-US" sz="2000" dirty="0">
+                <a:latin typeface="Consolas" panose="020B0609020204030204" pitchFamily="49" charset="0"/>
+              </a:rPr>
+              <a:t> du</a:t>
+            </a:r>
+            <a:r>
+              <a:rPr lang="fr-CA" sz="2000" dirty="0">
+                <a:latin typeface="Consolas" panose="020B0609020204030204" pitchFamily="49" charset="0"/>
+              </a:rPr>
+              <a:t> "vrai"</a:t>
+            </a:r>
+            <a:r>
+              <a:rPr lang="en-US" sz="2000" i="1" dirty="0">
+                <a:latin typeface="Consolas" panose="020B0609020204030204" pitchFamily="49" charset="0"/>
+              </a:rPr>
+              <a:t> </a:t>
+            </a:r>
+            <a:r>
+              <a:rPr lang="en-US" sz="2000" dirty="0">
+                <a:latin typeface="Consolas" panose="020B0609020204030204" pitchFamily="49" charset="0"/>
+              </a:rPr>
+              <a:t>code</a:t>
+            </a:r>
+          </a:p>
+          <a:p>
+            <a:pPr algn="just"/>
+            <a:r>
+              <a:rPr lang="fr-CA" sz="2000" dirty="0">
+                <a:latin typeface="Consolas" panose="020B0609020204030204" pitchFamily="49" charset="0"/>
+              </a:rPr>
+              <a:t>S'amuser</a:t>
+            </a:r>
+          </a:p>
+        </p:txBody>
+      </p:sp>
+      <p:sp>
+        <p:nvSpPr>
+          <p:cNvPr id="5" name="Slide Number Placeholder 4">
+            <a:extLst>
+              <a:ext uri="{FF2B5EF4-FFF2-40B4-BE49-F238E27FC236}">
+                <a16:creationId xmlns:a16="http://schemas.microsoft.com/office/drawing/2014/main" id="{30A9ACC9-0207-BF8C-83A4-76A47041FF41}"/>
+              </a:ext>
+            </a:extLst>
+          </p:cNvPr>
+          <p:cNvSpPr>
+            <a:spLocks noGrp="1"/>
+          </p:cNvSpPr>
+          <p:nvPr>
+            <p:ph type="sldNum" sz="quarter" idx="12"/>
+          </p:nvPr>
+        </p:nvSpPr>
+        <p:spPr/>
+        <p:txBody>
+          <a:bodyPr/>
+          <a:lstStyle/>
+          <a:p>
+            <a:fld id="{846B06B1-1179-491F-A487-8E0C403F7C13}" type="slidenum">
+              <a:rPr lang="fr-CA" smtClean="0"/>
+              <a:t>2</a:t>
+            </a:fld>
+            <a:endParaRPr lang="fr-CA" dirty="0"/>
+          </a:p>
+        </p:txBody>
+      </p:sp>
+      <p:pic>
+        <p:nvPicPr>
+          <p:cNvPr id="6" name="Picture 2" descr="Generated QR Image">
+            <a:extLst>
+              <a:ext uri="{FF2B5EF4-FFF2-40B4-BE49-F238E27FC236}">
+                <a16:creationId xmlns:a16="http://schemas.microsoft.com/office/drawing/2014/main" id="{55503CE9-4B4C-6B08-7AE7-D706357A15F7}"/>
+              </a:ext>
+            </a:extLst>
+          </p:cNvPr>
+          <p:cNvPicPr>
+            <a:picLocks noChangeAspect="1" noChangeArrowheads="1"/>
+          </p:cNvPicPr>
+          <p:nvPr/>
+        </p:nvPicPr>
+        <p:blipFill>
+          <a:blip r:embed="rId3">
+            <a:extLst>
+              <a:ext uri="{28A0092B-C50C-407E-A947-70E740481C1C}">
+                <a14:useLocalDpi xmlns:a14="http://schemas.microsoft.com/office/drawing/2010/main" val="0"/>
+              </a:ext>
+            </a:extLst>
+          </a:blip>
+          <a:srcRect/>
+          <a:stretch>
+            <a:fillRect/>
+          </a:stretch>
+        </p:blipFill>
+        <p:spPr bwMode="auto">
+          <a:xfrm>
+            <a:off x="6095999" y="1825625"/>
+            <a:ext cx="4105275" cy="4105275"/>
+          </a:xfrm>
+          <a:prstGeom prst="rect">
+            <a:avLst/>
+          </a:prstGeom>
+          <a:noFill/>
+          <a:extLst>
+            <a:ext uri="{909E8E84-426E-40DD-AFC4-6F175D3DCCD1}">
+              <a14:hiddenFill xmlns:a14="http://schemas.microsoft.com/office/drawing/2010/main">
+                <a:solidFill>
+                  <a:srgbClr val="FFFFFF"/>
+                </a:solidFill>
+              </a14:hiddenFill>
+            </a:ext>
+          </a:extLst>
+        </p:spPr>
+      </p:pic>
+    </p:spTree>
+    <p:extLst>
+      <p:ext uri="{BB962C8B-B14F-4D97-AF65-F5344CB8AC3E}">
+        <p14:creationId xmlns:p14="http://schemas.microsoft.com/office/powerpoint/2010/main" val="1707187834"/>
+      </p:ext>
+    </p:extLst>
+  </p:cSld>
+  <p:clrMapOvr>
+    <a:masterClrMapping/>
+  </p:clrMapOvr>
+  <p:timing>
+    <p:tnLst>
+      <p:par>
+        <p:cTn id="1" dur="indefinite" restart="never" nodeType="tmRoot">
+          <p:childTnLst>
+            <p:seq concurrent="1" nextAc="seek">
+              <p:cTn id="2" dur="indefinite" nodeType="mainSeq">
+                <p:childTnLst>
+                  <p:par>
+                    <p:cTn id="3" fill="hold">
+                      <p:stCondLst>
+                        <p:cond delay="indefinite"/>
+                      </p:stCondLst>
+                      <p:childTnLst>
+                        <p:par>
+                          <p:cTn id="4" fill="hold">
+                            <p:stCondLst>
+                              <p:cond delay="0"/>
+                            </p:stCondLst>
+                            <p:childTnLst>
+                              <p:par>
+                                <p:cTn id="5" presetID="10" presetClass="entr" presetSubtype="0" fill="hold" nodeType="clickEffect">
+                                  <p:stCondLst>
+                                    <p:cond delay="0"/>
+                                  </p:stCondLst>
+                                  <p:childTnLst>
+                                    <p:set>
+                                      <p:cBhvr>
+                                        <p:cTn id="6" dur="1" fill="hold">
+                                          <p:stCondLst>
+                                            <p:cond delay="0"/>
+                                          </p:stCondLst>
+                                        </p:cTn>
+                                        <p:tgtEl>
+                                          <p:spTgt spid="3">
+                                            <p:txEl>
+                                              <p:pRg st="0" end="0"/>
+                                            </p:txEl>
+                                          </p:spTgt>
+                                        </p:tgtEl>
+                                        <p:attrNameLst>
+                                          <p:attrName>style.visibility</p:attrName>
+                                        </p:attrNameLst>
+                                      </p:cBhvr>
+                                      <p:to>
+                                        <p:strVal val="visible"/>
+                                      </p:to>
+                                    </p:set>
+                                    <p:animEffect transition="in" filter="fade">
+                                      <p:cBhvr>
+                                        <p:cTn id="7" dur="500"/>
+                                        <p:tgtEl>
+                                          <p:spTgt spid="3">
+                                            <p:txEl>
+                                              <p:pRg st="0" end="0"/>
+                                            </p:txEl>
+                                          </p:spTgt>
+                                        </p:tgtEl>
+                                      </p:cBhvr>
+                                    </p:animEffect>
+                                  </p:childTnLst>
+                                </p:cTn>
+                              </p:par>
+                            </p:childTnLst>
+                          </p:cTn>
+                        </p:par>
+                      </p:childTnLst>
+                    </p:cTn>
+                  </p:par>
+                  <p:par>
+                    <p:cTn id="8" fill="hold">
+                      <p:stCondLst>
+                        <p:cond delay="indefinite"/>
+                      </p:stCondLst>
+                      <p:childTnLst>
+                        <p:par>
+                          <p:cTn id="9" fill="hold">
+                            <p:stCondLst>
+                              <p:cond delay="0"/>
+                            </p:stCondLst>
+                            <p:childTnLst>
+                              <p:par>
+                                <p:cTn id="10" presetID="10" presetClass="entr" presetSubtype="0" fill="hold" nodeType="clickEffect">
+                                  <p:stCondLst>
+                                    <p:cond delay="0"/>
+                                  </p:stCondLst>
+                                  <p:childTnLst>
+                                    <p:set>
+                                      <p:cBhvr>
+                                        <p:cTn id="11" dur="1" fill="hold">
+                                          <p:stCondLst>
+                                            <p:cond delay="0"/>
+                                          </p:stCondLst>
+                                        </p:cTn>
+                                        <p:tgtEl>
+                                          <p:spTgt spid="3">
+                                            <p:txEl>
+                                              <p:pRg st="1" end="1"/>
+                                            </p:txEl>
+                                          </p:spTgt>
+                                        </p:tgtEl>
+                                        <p:attrNameLst>
+                                          <p:attrName>style.visibility</p:attrName>
+                                        </p:attrNameLst>
+                                      </p:cBhvr>
+                                      <p:to>
+                                        <p:strVal val="visible"/>
+                                      </p:to>
+                                    </p:set>
+                                    <p:animEffect transition="in" filter="fade">
+                                      <p:cBhvr>
+                                        <p:cTn id="12" dur="500"/>
+                                        <p:tgtEl>
+                                          <p:spTgt spid="3">
+                                            <p:txEl>
+                                              <p:pRg st="1" end="1"/>
+                                            </p:txEl>
+                                          </p:spTgt>
+                                        </p:tgtEl>
+                                      </p:cBhvr>
+                                    </p:animEffect>
+                                  </p:childTnLst>
+                                </p:cTn>
+                              </p:par>
+                            </p:childTnLst>
+                          </p:cTn>
+                        </p:par>
+                      </p:childTnLst>
+                    </p:cTn>
+                  </p:par>
+                  <p:par>
+                    <p:cTn id="13" fill="hold">
+                      <p:stCondLst>
+                        <p:cond delay="indefinite"/>
+                      </p:stCondLst>
+                      <p:childTnLst>
+                        <p:par>
+                          <p:cTn id="14" fill="hold">
+                            <p:stCondLst>
+                              <p:cond delay="0"/>
+                            </p:stCondLst>
+                            <p:childTnLst>
+                              <p:par>
+                                <p:cTn id="15" presetID="10" presetClass="entr" presetSubtype="0" fill="hold" nodeType="clickEffect">
+                                  <p:stCondLst>
+                                    <p:cond delay="0"/>
+                                  </p:stCondLst>
+                                  <p:childTnLst>
+                                    <p:set>
+                                      <p:cBhvr>
+                                        <p:cTn id="16" dur="1" fill="hold">
+                                          <p:stCondLst>
+                                            <p:cond delay="0"/>
+                                          </p:stCondLst>
+                                        </p:cTn>
+                                        <p:tgtEl>
+                                          <p:spTgt spid="3">
+                                            <p:txEl>
+                                              <p:pRg st="2" end="2"/>
+                                            </p:txEl>
+                                          </p:spTgt>
+                                        </p:tgtEl>
+                                        <p:attrNameLst>
+                                          <p:attrName>style.visibility</p:attrName>
+                                        </p:attrNameLst>
+                                      </p:cBhvr>
+                                      <p:to>
+                                        <p:strVal val="visible"/>
+                                      </p:to>
+                                    </p:set>
+                                    <p:animEffect transition="in" filter="fade">
+                                      <p:cBhvr>
+                                        <p:cTn id="17" dur="500"/>
+                                        <p:tgtEl>
+                                          <p:spTgt spid="3">
+                                            <p:txEl>
+                                              <p:pRg st="2" end="2"/>
+                                            </p:txEl>
+                                          </p:spTgt>
+                                        </p:tgtEl>
+                                      </p:cBhvr>
+                                    </p:animEffect>
+                                  </p:childTnLst>
+                                </p:cTn>
+                              </p:par>
+                            </p:childTnLst>
+                          </p:cTn>
+                        </p:par>
+                      </p:childTnLst>
+                    </p:cTn>
+                  </p:par>
+                </p:childTnLst>
+              </p:cTn>
+              <p:prevCondLst>
+                <p:cond evt="onPrev" delay="0">
+                  <p:tgtEl>
+                    <p:sldTgt/>
+                  </p:tgtEl>
+                </p:cond>
+              </p:prevCondLst>
+              <p:nextCondLst>
+                <p:cond evt="onNext" delay="0">
+                  <p:tgtEl>
+                    <p:sldTgt/>
+                  </p:tgtEl>
+                </p:cond>
+              </p:nextCondLst>
+            </p:seq>
+          </p:childTnLst>
+        </p:cTn>
+      </p:par>
+    </p:tnLst>
+  </p:timing>
+  <p:extLst>
+    <p:ext uri="{6950BFC3-D8DA-4A85-94F7-54DA5524770B}">
+      <p188:commentRel xmlns:p188="http://schemas.microsoft.com/office/powerpoint/2018/8/main" r:id="rId2"/>
+    </p:ext>
+  </p:extLst>
+</p:sld>
+</file>
+
+<file path=ppt/slides/slide20.xml><?xml version="1.0" encoding="utf-8"?>
 <p:sld xmlns:a="http://schemas.openxmlformats.org/drawingml/2006/main" xmlns:r="http://schemas.openxmlformats.org/officeDocument/2006/relationships" xmlns:p="http://schemas.openxmlformats.org/presentationml/2006/main">
   <p:cSld>
     <p:bg>
@@ -13802,7 +15068,7 @@
           <a:p>
             <a:fld id="{846B06B1-1179-491F-A487-8E0C403F7C13}" type="slidenum">
               <a:rPr lang="fr-CA" smtClean="0"/>
-              <a:t>19</a:t>
+              <a:t>20</a:t>
             </a:fld>
             <a:endParaRPr lang="fr-CA"/>
           </a:p>
@@ -14326,468 +15592,7 @@
 </p:sld>
 </file>
 
-<file path=ppt/slides/slide2.xml><?xml version="1.0" encoding="utf-8"?>
-<p:sld xmlns:a="http://schemas.openxmlformats.org/drawingml/2006/main" xmlns:r="http://schemas.openxmlformats.org/officeDocument/2006/relationships" xmlns:p="http://schemas.openxmlformats.org/presentationml/2006/main">
-  <p:cSld>
-    <p:bg>
-      <p:bgPr>
-        <a:solidFill>
-          <a:srgbClr val="F5F5F5"/>
-        </a:solidFill>
-        <a:effectLst/>
-      </p:bgPr>
-    </p:bg>
-    <p:spTree>
-      <p:nvGrpSpPr>
-        <p:cNvPr id="1" name="">
-          <a:extLst>
-            <a:ext uri="{FF2B5EF4-FFF2-40B4-BE49-F238E27FC236}">
-              <a16:creationId xmlns:a16="http://schemas.microsoft.com/office/drawing/2014/main" id="{9787BE08-8E87-BDAC-AA37-B1440F99BBB3}"/>
-            </a:ext>
-          </a:extLst>
-        </p:cNvPr>
-        <p:cNvGrpSpPr/>
-        <p:nvPr/>
-      </p:nvGrpSpPr>
-      <p:grpSpPr>
-        <a:xfrm>
-          <a:off x="0" y="0"/>
-          <a:ext cx="0" cy="0"/>
-          <a:chOff x="0" y="0"/>
-          <a:chExt cx="0" cy="0"/>
-        </a:xfrm>
-      </p:grpSpPr>
-      <p:sp>
-        <p:nvSpPr>
-          <p:cNvPr id="2" name="Title 1">
-            <a:extLst>
-              <a:ext uri="{FF2B5EF4-FFF2-40B4-BE49-F238E27FC236}">
-                <a16:creationId xmlns:a16="http://schemas.microsoft.com/office/drawing/2014/main" id="{2539027E-795E-A7E7-3EF9-F5DE694B487D}"/>
-              </a:ext>
-            </a:extLst>
-          </p:cNvPr>
-          <p:cNvSpPr>
-            <a:spLocks noGrp="1"/>
-          </p:cNvSpPr>
-          <p:nvPr>
-            <p:ph type="title"/>
-          </p:nvPr>
-        </p:nvSpPr>
-        <p:spPr/>
-        <p:txBody>
-          <a:bodyPr/>
-          <a:lstStyle/>
-          <a:p>
-            <a:r>
-              <a:rPr lang="en-US" dirty="0">
-                <a:latin typeface="Arial Rounded MT Bold" panose="020F0704030504030204" pitchFamily="34" charset="0"/>
-              </a:rPr>
-              <a:t>Plan</a:t>
-            </a:r>
-            <a:endParaRPr lang="fr-CA" dirty="0">
-              <a:latin typeface="Arial Rounded MT Bold" panose="020F0704030504030204" pitchFamily="34" charset="0"/>
-            </a:endParaRPr>
-          </a:p>
-        </p:txBody>
-      </p:sp>
-      <p:sp>
-        <p:nvSpPr>
-          <p:cNvPr id="3" name="Content Placeholder 2">
-            <a:extLst>
-              <a:ext uri="{FF2B5EF4-FFF2-40B4-BE49-F238E27FC236}">
-                <a16:creationId xmlns:a16="http://schemas.microsoft.com/office/drawing/2014/main" id="{1A2C692D-48DA-2C5B-C433-961FD8C3D9A4}"/>
-              </a:ext>
-            </a:extLst>
-          </p:cNvPr>
-          <p:cNvSpPr>
-            <a:spLocks noGrp="1"/>
-          </p:cNvSpPr>
-          <p:nvPr>
-            <p:ph idx="1"/>
-          </p:nvPr>
-        </p:nvSpPr>
-        <p:spPr/>
-        <p:txBody>
-          <a:bodyPr>
-            <a:normAutofit/>
-          </a:bodyPr>
-          <a:lstStyle/>
-          <a:p>
-            <a:pPr algn="just"/>
-            <a:r>
-              <a:rPr lang="en-US" sz="2000" dirty="0">
-                <a:latin typeface="Consolas" panose="020B0609020204030204" pitchFamily="49" charset="0"/>
-              </a:rPr>
-              <a:t>Notions </a:t>
-            </a:r>
-            <a:r>
-              <a:rPr lang="en-US" sz="2000" dirty="0" err="1">
-                <a:latin typeface="Consolas" panose="020B0609020204030204" pitchFamily="49" charset="0"/>
-              </a:rPr>
-              <a:t>intermédiaires</a:t>
-            </a:r>
-            <a:endParaRPr lang="en-US" sz="2000" dirty="0">
-              <a:latin typeface="Consolas" panose="020B0609020204030204" pitchFamily="49" charset="0"/>
-            </a:endParaRPr>
-          </a:p>
-          <a:p>
-            <a:pPr algn="just"/>
-            <a:r>
-              <a:rPr lang="fr-CA" sz="2000" dirty="0">
-                <a:latin typeface="Consolas" panose="020B0609020204030204" pitchFamily="49" charset="0"/>
-              </a:rPr>
-              <a:t>É</a:t>
-            </a:r>
-            <a:r>
-              <a:rPr lang="en-US" sz="2000" dirty="0" err="1">
-                <a:latin typeface="Consolas" panose="020B0609020204030204" pitchFamily="49" charset="0"/>
-              </a:rPr>
-              <a:t>crire</a:t>
-            </a:r>
-            <a:r>
-              <a:rPr lang="en-US" sz="2000" dirty="0">
-                <a:latin typeface="Consolas" panose="020B0609020204030204" pitchFamily="49" charset="0"/>
-              </a:rPr>
-              <a:t> du</a:t>
-            </a:r>
-            <a:r>
-              <a:rPr lang="fr-CA" sz="2000" dirty="0">
-                <a:latin typeface="Consolas" panose="020B0609020204030204" pitchFamily="49" charset="0"/>
-              </a:rPr>
-              <a:t> "vrai"</a:t>
-            </a:r>
-            <a:r>
-              <a:rPr lang="en-US" sz="2000" i="1" dirty="0">
-                <a:latin typeface="Consolas" panose="020B0609020204030204" pitchFamily="49" charset="0"/>
-              </a:rPr>
-              <a:t> </a:t>
-            </a:r>
-            <a:r>
-              <a:rPr lang="en-US" sz="2000" dirty="0">
-                <a:latin typeface="Consolas" panose="020B0609020204030204" pitchFamily="49" charset="0"/>
-              </a:rPr>
-              <a:t>code</a:t>
-            </a:r>
-          </a:p>
-          <a:p>
-            <a:pPr algn="just"/>
-            <a:r>
-              <a:rPr lang="fr-CA" sz="2000" dirty="0">
-                <a:latin typeface="Consolas" panose="020B0609020204030204" pitchFamily="49" charset="0"/>
-              </a:rPr>
-              <a:t>S'amuser</a:t>
-            </a:r>
-          </a:p>
-        </p:txBody>
-      </p:sp>
-      <p:sp>
-        <p:nvSpPr>
-          <p:cNvPr id="5" name="Slide Number Placeholder 4">
-            <a:extLst>
-              <a:ext uri="{FF2B5EF4-FFF2-40B4-BE49-F238E27FC236}">
-                <a16:creationId xmlns:a16="http://schemas.microsoft.com/office/drawing/2014/main" id="{30A9ACC9-0207-BF8C-83A4-76A47041FF41}"/>
-              </a:ext>
-            </a:extLst>
-          </p:cNvPr>
-          <p:cNvSpPr>
-            <a:spLocks noGrp="1"/>
-          </p:cNvSpPr>
-          <p:nvPr>
-            <p:ph type="sldNum" sz="quarter" idx="12"/>
-          </p:nvPr>
-        </p:nvSpPr>
-        <p:spPr/>
-        <p:txBody>
-          <a:bodyPr/>
-          <a:lstStyle/>
-          <a:p>
-            <a:fld id="{846B06B1-1179-491F-A487-8E0C403F7C13}" type="slidenum">
-              <a:rPr lang="fr-CA" smtClean="0"/>
-              <a:t>2</a:t>
-            </a:fld>
-            <a:endParaRPr lang="fr-CA" dirty="0"/>
-          </a:p>
-        </p:txBody>
-      </p:sp>
-      <p:pic>
-        <p:nvPicPr>
-          <p:cNvPr id="6" name="Picture 2" descr="Generated QR Image">
-            <a:extLst>
-              <a:ext uri="{FF2B5EF4-FFF2-40B4-BE49-F238E27FC236}">
-                <a16:creationId xmlns:a16="http://schemas.microsoft.com/office/drawing/2014/main" id="{55503CE9-4B4C-6B08-7AE7-D706357A15F7}"/>
-              </a:ext>
-            </a:extLst>
-          </p:cNvPr>
-          <p:cNvPicPr>
-            <a:picLocks noChangeAspect="1" noChangeArrowheads="1"/>
-          </p:cNvPicPr>
-          <p:nvPr/>
-        </p:nvPicPr>
-        <p:blipFill>
-          <a:blip r:embed="rId3">
-            <a:extLst>
-              <a:ext uri="{28A0092B-C50C-407E-A947-70E740481C1C}">
-                <a14:useLocalDpi xmlns:a14="http://schemas.microsoft.com/office/drawing/2010/main" val="0"/>
-              </a:ext>
-            </a:extLst>
-          </a:blip>
-          <a:srcRect/>
-          <a:stretch>
-            <a:fillRect/>
-          </a:stretch>
-        </p:blipFill>
-        <p:spPr bwMode="auto">
-          <a:xfrm>
-            <a:off x="6095999" y="1825625"/>
-            <a:ext cx="4105275" cy="4105275"/>
-          </a:xfrm>
-          <a:prstGeom prst="rect">
-            <a:avLst/>
-          </a:prstGeom>
-          <a:noFill/>
-          <a:extLst>
-            <a:ext uri="{909E8E84-426E-40DD-AFC4-6F175D3DCCD1}">
-              <a14:hiddenFill xmlns:a14="http://schemas.microsoft.com/office/drawing/2010/main">
-                <a:solidFill>
-                  <a:srgbClr val="FFFFFF"/>
-                </a:solidFill>
-              </a14:hiddenFill>
-            </a:ext>
-          </a:extLst>
-        </p:spPr>
-      </p:pic>
-    </p:spTree>
-    <p:extLst>
-      <p:ext uri="{BB962C8B-B14F-4D97-AF65-F5344CB8AC3E}">
-        <p14:creationId xmlns:p14="http://schemas.microsoft.com/office/powerpoint/2010/main" val="1707187834"/>
-      </p:ext>
-    </p:extLst>
-  </p:cSld>
-  <p:clrMapOvr>
-    <a:masterClrMapping/>
-  </p:clrMapOvr>
-  <p:timing>
-    <p:tnLst>
-      <p:par>
-        <p:cTn id="1" dur="indefinite" restart="never" nodeType="tmRoot">
-          <p:childTnLst>
-            <p:seq concurrent="1" nextAc="seek">
-              <p:cTn id="2" dur="indefinite" nodeType="mainSeq">
-                <p:childTnLst>
-                  <p:par>
-                    <p:cTn id="3" fill="hold">
-                      <p:stCondLst>
-                        <p:cond delay="indefinite"/>
-                      </p:stCondLst>
-                      <p:childTnLst>
-                        <p:par>
-                          <p:cTn id="4" fill="hold">
-                            <p:stCondLst>
-                              <p:cond delay="0"/>
-                            </p:stCondLst>
-                            <p:childTnLst>
-                              <p:par>
-                                <p:cTn id="5" presetID="10" presetClass="entr" presetSubtype="0" fill="hold" nodeType="clickEffect">
-                                  <p:stCondLst>
-                                    <p:cond delay="0"/>
-                                  </p:stCondLst>
-                                  <p:childTnLst>
-                                    <p:set>
-                                      <p:cBhvr>
-                                        <p:cTn id="6" dur="1" fill="hold">
-                                          <p:stCondLst>
-                                            <p:cond delay="0"/>
-                                          </p:stCondLst>
-                                        </p:cTn>
-                                        <p:tgtEl>
-                                          <p:spTgt spid="3">
-                                            <p:txEl>
-                                              <p:pRg st="0" end="0"/>
-                                            </p:txEl>
-                                          </p:spTgt>
-                                        </p:tgtEl>
-                                        <p:attrNameLst>
-                                          <p:attrName>style.visibility</p:attrName>
-                                        </p:attrNameLst>
-                                      </p:cBhvr>
-                                      <p:to>
-                                        <p:strVal val="visible"/>
-                                      </p:to>
-                                    </p:set>
-                                    <p:animEffect transition="in" filter="fade">
-                                      <p:cBhvr>
-                                        <p:cTn id="7" dur="500"/>
-                                        <p:tgtEl>
-                                          <p:spTgt spid="3">
-                                            <p:txEl>
-                                              <p:pRg st="0" end="0"/>
-                                            </p:txEl>
-                                          </p:spTgt>
-                                        </p:tgtEl>
-                                      </p:cBhvr>
-                                    </p:animEffect>
-                                  </p:childTnLst>
-                                </p:cTn>
-                              </p:par>
-                            </p:childTnLst>
-                          </p:cTn>
-                        </p:par>
-                      </p:childTnLst>
-                    </p:cTn>
-                  </p:par>
-                  <p:par>
-                    <p:cTn id="8" fill="hold">
-                      <p:stCondLst>
-                        <p:cond delay="indefinite"/>
-                      </p:stCondLst>
-                      <p:childTnLst>
-                        <p:par>
-                          <p:cTn id="9" fill="hold">
-                            <p:stCondLst>
-                              <p:cond delay="0"/>
-                            </p:stCondLst>
-                            <p:childTnLst>
-                              <p:par>
-                                <p:cTn id="10" presetID="10" presetClass="entr" presetSubtype="0" fill="hold" nodeType="clickEffect">
-                                  <p:stCondLst>
-                                    <p:cond delay="0"/>
-                                  </p:stCondLst>
-                                  <p:childTnLst>
-                                    <p:set>
-                                      <p:cBhvr>
-                                        <p:cTn id="11" dur="1" fill="hold">
-                                          <p:stCondLst>
-                                            <p:cond delay="0"/>
-                                          </p:stCondLst>
-                                        </p:cTn>
-                                        <p:tgtEl>
-                                          <p:spTgt spid="3">
-                                            <p:txEl>
-                                              <p:pRg st="1" end="1"/>
-                                            </p:txEl>
-                                          </p:spTgt>
-                                        </p:tgtEl>
-                                        <p:attrNameLst>
-                                          <p:attrName>style.visibility</p:attrName>
-                                        </p:attrNameLst>
-                                      </p:cBhvr>
-                                      <p:to>
-                                        <p:strVal val="visible"/>
-                                      </p:to>
-                                    </p:set>
-                                    <p:animEffect transition="in" filter="fade">
-                                      <p:cBhvr>
-                                        <p:cTn id="12" dur="500"/>
-                                        <p:tgtEl>
-                                          <p:spTgt spid="3">
-                                            <p:txEl>
-                                              <p:pRg st="1" end="1"/>
-                                            </p:txEl>
-                                          </p:spTgt>
-                                        </p:tgtEl>
-                                      </p:cBhvr>
-                                    </p:animEffect>
-                                  </p:childTnLst>
-                                </p:cTn>
-                              </p:par>
-                            </p:childTnLst>
-                          </p:cTn>
-                        </p:par>
-                      </p:childTnLst>
-                    </p:cTn>
-                  </p:par>
-                  <p:par>
-                    <p:cTn id="13" fill="hold">
-                      <p:stCondLst>
-                        <p:cond delay="indefinite"/>
-                      </p:stCondLst>
-                      <p:childTnLst>
-                        <p:par>
-                          <p:cTn id="14" fill="hold">
-                            <p:stCondLst>
-                              <p:cond delay="0"/>
-                            </p:stCondLst>
-                            <p:childTnLst>
-                              <p:par>
-                                <p:cTn id="15" presetID="10" presetClass="entr" presetSubtype="0" fill="hold" nodeType="clickEffect">
-                                  <p:stCondLst>
-                                    <p:cond delay="0"/>
-                                  </p:stCondLst>
-                                  <p:childTnLst>
-                                    <p:set>
-                                      <p:cBhvr>
-                                        <p:cTn id="16" dur="1" fill="hold">
-                                          <p:stCondLst>
-                                            <p:cond delay="0"/>
-                                          </p:stCondLst>
-                                        </p:cTn>
-                                        <p:tgtEl>
-                                          <p:spTgt spid="3">
-                                            <p:txEl>
-                                              <p:pRg st="2" end="2"/>
-                                            </p:txEl>
-                                          </p:spTgt>
-                                        </p:tgtEl>
-                                        <p:attrNameLst>
-                                          <p:attrName>style.visibility</p:attrName>
-                                        </p:attrNameLst>
-                                      </p:cBhvr>
-                                      <p:to>
-                                        <p:strVal val="visible"/>
-                                      </p:to>
-                                    </p:set>
-                                    <p:animEffect transition="in" filter="fade">
-                                      <p:cBhvr>
-                                        <p:cTn id="17" dur="500"/>
-                                        <p:tgtEl>
-                                          <p:spTgt spid="3">
-                                            <p:txEl>
-                                              <p:pRg st="2" end="2"/>
-                                            </p:txEl>
-                                          </p:spTgt>
-                                        </p:tgtEl>
-                                      </p:cBhvr>
-                                    </p:animEffect>
-                                  </p:childTnLst>
-                                </p:cTn>
-                              </p:par>
-                            </p:childTnLst>
-                          </p:cTn>
-                        </p:par>
-                      </p:childTnLst>
-                    </p:cTn>
-                  </p:par>
-                </p:childTnLst>
-              </p:cTn>
-              <p:prevCondLst>
-                <p:cond evt="onPrev" delay="0">
-                  <p:tgtEl>
-                    <p:sldTgt/>
-                  </p:tgtEl>
-                </p:cond>
-              </p:prevCondLst>
-              <p:nextCondLst>
-                <p:cond evt="onNext" delay="0">
-                  <p:tgtEl>
-                    <p:sldTgt/>
-                  </p:tgtEl>
-                </p:cond>
-              </p:nextCondLst>
-            </p:seq>
-          </p:childTnLst>
-        </p:cTn>
-      </p:par>
-    </p:tnLst>
-  </p:timing>
-  <p:extLst>
-    <p:ext uri="{6950BFC3-D8DA-4A85-94F7-54DA5524770B}">
-      <p188:commentRel xmlns:p188="http://schemas.microsoft.com/office/powerpoint/2018/8/main" r:id="rId2"/>
-    </p:ext>
-  </p:extLst>
-</p:sld>
-</file>
-
-<file path=ppt/slides/slide20.xml><?xml version="1.0" encoding="utf-8"?>
+<file path=ppt/slides/slide21.xml><?xml version="1.0" encoding="utf-8"?>
 <p:sld xmlns:a="http://schemas.openxmlformats.org/drawingml/2006/main" xmlns:r="http://schemas.openxmlformats.org/officeDocument/2006/relationships" xmlns:p="http://schemas.openxmlformats.org/presentationml/2006/main">
   <p:cSld>
     <p:bg>
@@ -14841,7 +15646,7 @@
           <a:p>
             <a:fld id="{846B06B1-1179-491F-A487-8E0C403F7C13}" type="slidenum">
               <a:rPr lang="fr-CA" smtClean="0"/>
-              <a:t>20</a:t>
+              <a:t>21</a:t>
             </a:fld>
             <a:endParaRPr lang="fr-CA"/>
           </a:p>
@@ -15897,7 +16702,7 @@
 </p:sld>
 </file>
 
-<file path=ppt/slides/slide21.xml><?xml version="1.0" encoding="utf-8"?>
+<file path=ppt/slides/slide22.xml><?xml version="1.0" encoding="utf-8"?>
 <p:sld xmlns:a="http://schemas.openxmlformats.org/drawingml/2006/main" xmlns:r="http://schemas.openxmlformats.org/officeDocument/2006/relationships" xmlns:p="http://schemas.openxmlformats.org/presentationml/2006/main">
   <p:cSld>
     <p:bg>
@@ -16021,7 +16826,7 @@
           <a:p>
             <a:fld id="{846B06B1-1179-491F-A487-8E0C403F7C13}" type="slidenum">
               <a:rPr lang="fr-CA" smtClean="0"/>
-              <a:t>21</a:t>
+              <a:t>22</a:t>
             </a:fld>
             <a:endParaRPr lang="fr-CA"/>
           </a:p>
@@ -17005,7 +17810,7 @@
 </p:sld>
 </file>
 
-<file path=ppt/slides/slide22.xml><?xml version="1.0" encoding="utf-8"?>
+<file path=ppt/slides/slide23.xml><?xml version="1.0" encoding="utf-8"?>
 <p:sld xmlns:a="http://schemas.openxmlformats.org/drawingml/2006/main" xmlns:r="http://schemas.openxmlformats.org/officeDocument/2006/relationships" xmlns:p="http://schemas.openxmlformats.org/presentationml/2006/main">
   <p:cSld>
     <p:bg>
@@ -17106,7 +17911,7 @@
           <a:p>
             <a:fld id="{846B06B1-1179-491F-A487-8E0C403F7C13}" type="slidenum">
               <a:rPr lang="fr-CA" smtClean="0"/>
-              <a:t>22</a:t>
+              <a:t>23</a:t>
             </a:fld>
             <a:endParaRPr lang="fr-CA"/>
           </a:p>
@@ -18079,7 +18884,7 @@
 </p:sld>
 </file>
 
-<file path=ppt/slides/slide23.xml><?xml version="1.0" encoding="utf-8"?>
+<file path=ppt/slides/slide24.xml><?xml version="1.0" encoding="utf-8"?>
 <p:sld xmlns:a="http://schemas.openxmlformats.org/drawingml/2006/main" xmlns:r="http://schemas.openxmlformats.org/officeDocument/2006/relationships" xmlns:p="http://schemas.openxmlformats.org/presentationml/2006/main">
   <p:cSld>
     <p:bg>
@@ -18528,7 +19333,7 @@
           <a:p>
             <a:fld id="{846B06B1-1179-491F-A487-8E0C403F7C13}" type="slidenum">
               <a:rPr lang="fr-CA" smtClean="0"/>
-              <a:t>23</a:t>
+              <a:t>24</a:t>
             </a:fld>
             <a:endParaRPr lang="fr-CA"/>
           </a:p>
@@ -18547,7 +19352,7 @@
 </p:sld>
 </file>
 
-<file path=ppt/slides/slide24.xml><?xml version="1.0" encoding="utf-8"?>
+<file path=ppt/slides/slide25.xml><?xml version="1.0" encoding="utf-8"?>
 <p:sld xmlns:a="http://schemas.openxmlformats.org/drawingml/2006/main" xmlns:r="http://schemas.openxmlformats.org/officeDocument/2006/relationships" xmlns:p="http://schemas.openxmlformats.org/presentationml/2006/main">
   <p:cSld>
     <p:bg>
@@ -19175,7 +19980,7 @@
           <a:p>
             <a:fld id="{846B06B1-1179-491F-A487-8E0C403F7C13}" type="slidenum">
               <a:rPr lang="fr-CA" smtClean="0"/>
-              <a:t>24</a:t>
+              <a:t>25</a:t>
             </a:fld>
             <a:endParaRPr lang="fr-CA"/>
           </a:p>
@@ -20435,7 +21240,7 @@
 </p:sld>
 </file>
 
-<file path=ppt/slides/slide25.xml><?xml version="1.0" encoding="utf-8"?>
+<file path=ppt/slides/slide26.xml><?xml version="1.0" encoding="utf-8"?>
 <p:sld xmlns:a="http://schemas.openxmlformats.org/drawingml/2006/main" xmlns:r="http://schemas.openxmlformats.org/officeDocument/2006/relationships" xmlns:p="http://schemas.openxmlformats.org/presentationml/2006/main">
   <p:cSld>
     <p:bg>
@@ -20876,7 +21681,7 @@
           <a:p>
             <a:fld id="{846B06B1-1179-491F-A487-8E0C403F7C13}" type="slidenum">
               <a:rPr lang="fr-CA" smtClean="0"/>
-              <a:t>25</a:t>
+              <a:t>26</a:t>
             </a:fld>
             <a:endParaRPr lang="fr-CA"/>
           </a:p>
@@ -21508,7 +22313,7 @@
 </p:sld>
 </file>
 
-<file path=ppt/slides/slide26.xml><?xml version="1.0" encoding="utf-8"?>
+<file path=ppt/slides/slide27.xml><?xml version="1.0" encoding="utf-8"?>
 <p:sld xmlns:a="http://schemas.openxmlformats.org/drawingml/2006/main" xmlns:r="http://schemas.openxmlformats.org/officeDocument/2006/relationships" xmlns:p="http://schemas.openxmlformats.org/presentationml/2006/main">
   <p:cSld>
     <p:bg>
@@ -22005,7 +22810,7 @@
           <a:p>
             <a:fld id="{846B06B1-1179-491F-A487-8E0C403F7C13}" type="slidenum">
               <a:rPr lang="fr-CA" smtClean="0"/>
-              <a:t>26</a:t>
+              <a:t>27</a:t>
             </a:fld>
             <a:endParaRPr lang="fr-CA"/>
           </a:p>
@@ -22420,7 +23225,7 @@
 </p:sld>
 </file>
 
-<file path=ppt/slides/slide27.xml><?xml version="1.0" encoding="utf-8"?>
+<file path=ppt/slides/slide28.xml><?xml version="1.0" encoding="utf-8"?>
 <p:sld xmlns:a="http://schemas.openxmlformats.org/drawingml/2006/main" xmlns:r="http://schemas.openxmlformats.org/officeDocument/2006/relationships" xmlns:p="http://schemas.openxmlformats.org/presentationml/2006/main">
   <p:cSld>
     <p:bg>
@@ -22998,7 +23803,7 @@
           <a:p>
             <a:fld id="{846B06B1-1179-491F-A487-8E0C403F7C13}" type="slidenum">
               <a:rPr lang="fr-CA" smtClean="0"/>
-              <a:t>27</a:t>
+              <a:t>28</a:t>
             </a:fld>
             <a:endParaRPr lang="fr-CA"/>
           </a:p>
@@ -23736,7 +24541,7 @@
 </p:sld>
 </file>
 
-<file path=ppt/slides/slide28.xml><?xml version="1.0" encoding="utf-8"?>
+<file path=ppt/slides/slide29.xml><?xml version="1.0" encoding="utf-8"?>
 <p:sld xmlns:a="http://schemas.openxmlformats.org/drawingml/2006/main" xmlns:r="http://schemas.openxmlformats.org/officeDocument/2006/relationships" xmlns:p="http://schemas.openxmlformats.org/presentationml/2006/main">
   <p:cSld>
     <p:bg>
@@ -24254,7 +25059,7 @@
           <a:p>
             <a:fld id="{846B06B1-1179-491F-A487-8E0C403F7C13}" type="slidenum">
               <a:rPr lang="fr-CA" smtClean="0"/>
-              <a:t>28</a:t>
+              <a:t>29</a:t>
             </a:fld>
             <a:endParaRPr lang="fr-CA"/>
           </a:p>
@@ -24968,720 +25773,6 @@
 </p:sld>
 </file>
 
-<file path=ppt/slides/slide29.xml><?xml version="1.0" encoding="utf-8"?>
-<p:sld xmlns:a="http://schemas.openxmlformats.org/drawingml/2006/main" xmlns:r="http://schemas.openxmlformats.org/officeDocument/2006/relationships" xmlns:p="http://schemas.openxmlformats.org/presentationml/2006/main">
-  <p:cSld>
-    <p:bg>
-      <p:bgPr>
-        <a:solidFill>
-          <a:schemeClr val="accent6">
-            <a:lumMod val="20000"/>
-            <a:lumOff val="80000"/>
-          </a:schemeClr>
-        </a:solidFill>
-        <a:effectLst/>
-      </p:bgPr>
-    </p:bg>
-    <p:spTree>
-      <p:nvGrpSpPr>
-        <p:cNvPr id="1" name="">
-          <a:extLst>
-            <a:ext uri="{FF2B5EF4-FFF2-40B4-BE49-F238E27FC236}">
-              <a16:creationId xmlns:a16="http://schemas.microsoft.com/office/drawing/2014/main" id="{12B613ED-4C20-B810-736E-08E5068F9C51}"/>
-            </a:ext>
-          </a:extLst>
-        </p:cNvPr>
-        <p:cNvGrpSpPr/>
-        <p:nvPr/>
-      </p:nvGrpSpPr>
-      <p:grpSpPr>
-        <a:xfrm>
-          <a:off x="0" y="0"/>
-          <a:ext cx="0" cy="0"/>
-          <a:chOff x="0" y="0"/>
-          <a:chExt cx="0" cy="0"/>
-        </a:xfrm>
-      </p:grpSpPr>
-      <p:sp>
-        <p:nvSpPr>
-          <p:cNvPr id="2" name="Title 1">
-            <a:extLst>
-              <a:ext uri="{FF2B5EF4-FFF2-40B4-BE49-F238E27FC236}">
-                <a16:creationId xmlns:a16="http://schemas.microsoft.com/office/drawing/2014/main" id="{01CEAD93-2D28-3BC9-2E9D-896F6B4181BB}"/>
-              </a:ext>
-            </a:extLst>
-          </p:cNvPr>
-          <p:cNvSpPr>
-            <a:spLocks noGrp="1"/>
-          </p:cNvSpPr>
-          <p:nvPr>
-            <p:ph type="title"/>
-          </p:nvPr>
-        </p:nvSpPr>
-        <p:spPr/>
-        <p:txBody>
-          <a:bodyPr/>
-          <a:lstStyle/>
-          <a:p>
-            <a:r>
-              <a:rPr lang="en-US" dirty="0">
-                <a:latin typeface="Arial Rounded MT Bold" panose="020F0704030504030204" pitchFamily="34" charset="0"/>
-              </a:rPr>
-              <a:t>XR6 – Lecture </a:t>
-            </a:r>
-            <a:r>
-              <a:rPr lang="en-US" dirty="0" err="1">
-                <a:latin typeface="Arial Rounded MT Bold" panose="020F0704030504030204" pitchFamily="34" charset="0"/>
-              </a:rPr>
-              <a:t>dirigée</a:t>
-            </a:r>
-            <a:endParaRPr lang="fr-CA" dirty="0">
-              <a:latin typeface="Arial Rounded MT Bold" panose="020F0704030504030204" pitchFamily="34" charset="0"/>
-            </a:endParaRPr>
-          </a:p>
-        </p:txBody>
-      </p:sp>
-      <p:sp>
-        <p:nvSpPr>
-          <p:cNvPr id="3" name="Content Placeholder 2">
-            <a:extLst>
-              <a:ext uri="{FF2B5EF4-FFF2-40B4-BE49-F238E27FC236}">
-                <a16:creationId xmlns:a16="http://schemas.microsoft.com/office/drawing/2014/main" id="{209ABF4A-28F0-C642-B07B-85B4C439D074}"/>
-              </a:ext>
-            </a:extLst>
-          </p:cNvPr>
-          <p:cNvSpPr>
-            <a:spLocks noGrp="1"/>
-          </p:cNvSpPr>
-          <p:nvPr>
-            <p:ph idx="1"/>
-          </p:nvPr>
-        </p:nvSpPr>
-        <p:spPr/>
-        <p:txBody>
-          <a:bodyPr>
-            <a:normAutofit/>
-          </a:bodyPr>
-          <a:lstStyle/>
-          <a:p>
-            <a:pPr marL="0" indent="0" algn="just">
-              <a:lnSpc>
-                <a:spcPct val="100000"/>
-              </a:lnSpc>
-              <a:buNone/>
-            </a:pPr>
-            <a:r>
-              <a:rPr lang="en-US" sz="2000" dirty="0" err="1">
-                <a:latin typeface="Consolas" panose="020B0609020204030204" pitchFamily="49" charset="0"/>
-              </a:rPr>
-              <a:t>Décrivez</a:t>
-            </a:r>
-            <a:r>
-              <a:rPr lang="en-US" sz="2000" dirty="0">
-                <a:latin typeface="Consolas" panose="020B0609020204030204" pitchFamily="49" charset="0"/>
-              </a:rPr>
-              <a:t> la </a:t>
-            </a:r>
-            <a:r>
-              <a:rPr lang="en-US" sz="2000" dirty="0" err="1">
-                <a:latin typeface="Consolas" panose="020B0609020204030204" pitchFamily="49" charset="0"/>
-              </a:rPr>
-              <a:t>fonction</a:t>
-            </a:r>
-            <a:r>
-              <a:rPr lang="en-US" sz="2000" dirty="0">
-                <a:latin typeface="Consolas" panose="020B0609020204030204" pitchFamily="49" charset="0"/>
-              </a:rPr>
-              <a:t> </a:t>
-            </a:r>
-            <a:r>
-              <a:rPr lang="en-US" sz="2000" dirty="0" err="1">
-                <a:latin typeface="Consolas" panose="020B0609020204030204" pitchFamily="49" charset="0"/>
-              </a:rPr>
-              <a:t>suivante</a:t>
-            </a:r>
-            <a:r>
-              <a:rPr lang="en-US" sz="2000" dirty="0">
-                <a:latin typeface="Consolas" panose="020B0609020204030204" pitchFamily="49" charset="0"/>
-              </a:rPr>
-              <a:t> à </a:t>
-            </a:r>
-            <a:r>
-              <a:rPr lang="en-US" sz="2000" dirty="0" err="1">
-                <a:latin typeface="Consolas" panose="020B0609020204030204" pitchFamily="49" charset="0"/>
-              </a:rPr>
-              <a:t>partir</a:t>
-            </a:r>
-            <a:r>
-              <a:rPr lang="en-US" sz="2000" dirty="0">
-                <a:latin typeface="Consolas" panose="020B0609020204030204" pitchFamily="49" charset="0"/>
-              </a:rPr>
-              <a:t> de la documentation: </a:t>
-            </a:r>
-          </a:p>
-          <a:p>
-            <a:pPr marL="0" indent="0" algn="just">
-              <a:lnSpc>
-                <a:spcPct val="100000"/>
-              </a:lnSpc>
-              <a:buNone/>
-            </a:pPr>
-            <a:endParaRPr lang="en-US" sz="100" dirty="0">
-              <a:latin typeface="Consolas" panose="020B0609020204030204" pitchFamily="49" charset="0"/>
-            </a:endParaRPr>
-          </a:p>
-          <a:p>
-            <a:pPr lvl="1" algn="just">
-              <a:lnSpc>
-                <a:spcPct val="150000"/>
-              </a:lnSpc>
-            </a:pPr>
-            <a:r>
-              <a:rPr lang="en-US" sz="1400" dirty="0">
-                <a:latin typeface="Consolas" panose="020B0609020204030204" pitchFamily="49" charset="0"/>
-                <a:hlinkClick r:id="rId2"/>
-              </a:rPr>
-              <a:t>https://docs.python.org/fr/3.14/reference/compound_stmts.html#the-for-statement</a:t>
-            </a:r>
-            <a:endParaRPr lang="en-US" sz="1400" dirty="0">
-              <a:latin typeface="Consolas" panose="020B0609020204030204" pitchFamily="49" charset="0"/>
-            </a:endParaRPr>
-          </a:p>
-          <a:p>
-            <a:pPr lvl="1" algn="just">
-              <a:lnSpc>
-                <a:spcPct val="150000"/>
-              </a:lnSpc>
-            </a:pPr>
-            <a:r>
-              <a:rPr lang="en-US" sz="1400" dirty="0">
-                <a:latin typeface="Consolas" panose="020B0609020204030204" pitchFamily="49" charset="0"/>
-                <a:hlinkClick r:id="rId3"/>
-              </a:rPr>
-              <a:t>https://docs.python.org/fr/3.14/reference/expressions.html#slicings</a:t>
-            </a:r>
-          </a:p>
-          <a:p>
-            <a:pPr lvl="1" algn="just">
-              <a:lnSpc>
-                <a:spcPct val="150000"/>
-              </a:lnSpc>
-            </a:pPr>
-            <a:r>
-              <a:rPr lang="en-US" sz="1400" dirty="0">
-                <a:latin typeface="Consolas" panose="020B0609020204030204" pitchFamily="49" charset="0"/>
-                <a:hlinkClick r:id="rId3"/>
-              </a:rPr>
-              <a:t>https://docs.python.org/fr/3.14/reference/simple_stmts.html#augmented-assignment-statements</a:t>
-            </a:r>
-            <a:endParaRPr lang="en-US" sz="1400" dirty="0">
-              <a:latin typeface="Consolas" panose="020B0609020204030204" pitchFamily="49" charset="0"/>
-            </a:endParaRPr>
-          </a:p>
-          <a:p>
-            <a:pPr lvl="1" algn="just">
-              <a:lnSpc>
-                <a:spcPct val="150000"/>
-              </a:lnSpc>
-            </a:pPr>
-            <a:r>
-              <a:rPr lang="en-US" sz="1400" dirty="0">
-                <a:latin typeface="Consolas" panose="020B0609020204030204" pitchFamily="49" charset="0"/>
-                <a:hlinkClick r:id="rId4"/>
-              </a:rPr>
-              <a:t>https://docs.python.org/fr/3.14/library/stdtypes.html#str</a:t>
-            </a:r>
-            <a:endParaRPr lang="en-US" sz="1400" dirty="0">
-              <a:latin typeface="Consolas" panose="020B0609020204030204" pitchFamily="49" charset="0"/>
-            </a:endParaRPr>
-          </a:p>
-          <a:p>
-            <a:pPr algn="just"/>
-            <a:endParaRPr lang="en-US" sz="2000" dirty="0">
-              <a:latin typeface="Consolas" panose="020B0609020204030204" pitchFamily="49" charset="0"/>
-            </a:endParaRPr>
-          </a:p>
-          <a:p>
-            <a:pPr marL="0" indent="0" algn="just">
-              <a:buNone/>
-            </a:pPr>
-            <a:endParaRPr lang="en-US" sz="2000" dirty="0">
-              <a:latin typeface="Consolas" panose="020B0609020204030204" pitchFamily="49" charset="0"/>
-            </a:endParaRPr>
-          </a:p>
-          <a:p>
-            <a:pPr marL="0" indent="0" algn="just">
-              <a:buNone/>
-            </a:pPr>
-            <a:endParaRPr lang="en-US" sz="2000" dirty="0">
-              <a:latin typeface="Consolas" panose="020B0609020204030204" pitchFamily="49" charset="0"/>
-            </a:endParaRPr>
-          </a:p>
-          <a:p>
-            <a:pPr marL="0" indent="0" algn="just">
-              <a:buNone/>
-            </a:pPr>
-            <a:endParaRPr lang="en-US" sz="2000" dirty="0">
-              <a:latin typeface="Consolas" panose="020B0609020204030204" pitchFamily="49" charset="0"/>
-            </a:endParaRPr>
-          </a:p>
-        </p:txBody>
-      </p:sp>
-      <p:sp>
-        <p:nvSpPr>
-          <p:cNvPr id="4" name="Slide Number Placeholder 3">
-            <a:extLst>
-              <a:ext uri="{FF2B5EF4-FFF2-40B4-BE49-F238E27FC236}">
-                <a16:creationId xmlns:a16="http://schemas.microsoft.com/office/drawing/2014/main" id="{06432649-ACCF-C494-8C4D-BD60A1909A70}"/>
-              </a:ext>
-            </a:extLst>
-          </p:cNvPr>
-          <p:cNvSpPr>
-            <a:spLocks noGrp="1"/>
-          </p:cNvSpPr>
-          <p:nvPr>
-            <p:ph type="sldNum" sz="quarter" idx="12"/>
-          </p:nvPr>
-        </p:nvSpPr>
-        <p:spPr/>
-        <p:txBody>
-          <a:bodyPr/>
-          <a:lstStyle/>
-          <a:p>
-            <a:fld id="{846B06B1-1179-491F-A487-8E0C403F7C13}" type="slidenum">
-              <a:rPr lang="fr-CA" smtClean="0"/>
-              <a:t>29</a:t>
-            </a:fld>
-            <a:endParaRPr lang="fr-CA"/>
-          </a:p>
-        </p:txBody>
-      </p:sp>
-      <p:sp>
-        <p:nvSpPr>
-          <p:cNvPr id="6" name="TextBox 5">
-            <a:extLst>
-              <a:ext uri="{FF2B5EF4-FFF2-40B4-BE49-F238E27FC236}">
-                <a16:creationId xmlns:a16="http://schemas.microsoft.com/office/drawing/2014/main" id="{101C41D6-9989-63BC-E338-ED604AF40B76}"/>
-              </a:ext>
-            </a:extLst>
-          </p:cNvPr>
-          <p:cNvSpPr txBox="1"/>
-          <p:nvPr/>
-        </p:nvSpPr>
-        <p:spPr>
-          <a:xfrm>
-            <a:off x="3538857" y="4422636"/>
-            <a:ext cx="5114285" cy="1754326"/>
-          </a:xfrm>
-          <a:prstGeom prst="rect">
-            <a:avLst/>
-          </a:prstGeom>
-          <a:solidFill>
-            <a:schemeClr val="bg1"/>
-          </a:solidFill>
-          <a:ln w="19050">
-            <a:solidFill>
-              <a:schemeClr val="tx1"/>
-            </a:solidFill>
-          </a:ln>
-        </p:spPr>
-        <p:txBody>
-          <a:bodyPr wrap="square" anchor="ctr">
-            <a:spAutoFit/>
-          </a:bodyPr>
-          <a:lstStyle/>
-          <a:p>
-            <a:pPr algn="just">
-              <a:buNone/>
-            </a:pPr>
-            <a:r>
-              <a:rPr lang="en-CA" b="1" i="0" dirty="0">
-                <a:solidFill>
-                  <a:srgbClr val="008800"/>
-                </a:solidFill>
-                <a:effectLst/>
-                <a:latin typeface="Consolas" panose="020B0609020204030204" pitchFamily="49" charset="0"/>
-              </a:rPr>
-              <a:t>def</a:t>
-            </a:r>
-            <a:r>
-              <a:rPr lang="en-CA" b="0" i="0" dirty="0">
-                <a:solidFill>
-                  <a:srgbClr val="BBBBBB"/>
-                </a:solidFill>
-                <a:effectLst/>
-                <a:latin typeface="Consolas" panose="020B0609020204030204" pitchFamily="49" charset="0"/>
-              </a:rPr>
-              <a:t> </a:t>
-            </a:r>
-            <a:r>
-              <a:rPr lang="en-CA" b="1" i="0" dirty="0" err="1">
-                <a:solidFill>
-                  <a:srgbClr val="0066BB"/>
-                </a:solidFill>
-                <a:effectLst/>
-                <a:latin typeface="Consolas" panose="020B0609020204030204" pitchFamily="49" charset="0"/>
-              </a:rPr>
-              <a:t>souder</a:t>
-            </a:r>
-            <a:r>
-              <a:rPr lang="en-CA" b="0" i="0" dirty="0">
-                <a:solidFill>
-                  <a:srgbClr val="333333"/>
-                </a:solidFill>
-                <a:effectLst/>
-                <a:latin typeface="Consolas" panose="020B0609020204030204" pitchFamily="49" charset="0"/>
-              </a:rPr>
-              <a:t>(*</a:t>
-            </a:r>
-            <a:r>
-              <a:rPr lang="en-CA" b="0" i="0" dirty="0" err="1">
-                <a:solidFill>
-                  <a:srgbClr val="333333"/>
-                </a:solidFill>
-                <a:effectLst/>
-                <a:latin typeface="Consolas" panose="020B0609020204030204" pitchFamily="49" charset="0"/>
-              </a:rPr>
-              <a:t>objets</a:t>
-            </a:r>
-            <a:r>
-              <a:rPr lang="en-CA" b="0" i="0" dirty="0">
-                <a:solidFill>
-                  <a:srgbClr val="333333"/>
-                </a:solidFill>
-                <a:effectLst/>
-                <a:latin typeface="Consolas" panose="020B0609020204030204" pitchFamily="49" charset="0"/>
-              </a:rPr>
-              <a:t>, </a:t>
-            </a:r>
-            <a:r>
-              <a:rPr lang="en-CA" b="0" i="0" dirty="0" err="1">
-                <a:solidFill>
-                  <a:srgbClr val="333333"/>
-                </a:solidFill>
-                <a:effectLst/>
-                <a:latin typeface="Consolas" panose="020B0609020204030204" pitchFamily="49" charset="0"/>
-              </a:rPr>
-              <a:t>sep</a:t>
-            </a:r>
-            <a:r>
-              <a:rPr lang="en-CA" b="0" i="0" dirty="0">
-                <a:solidFill>
-                  <a:srgbClr val="333333"/>
-                </a:solidFill>
-                <a:effectLst/>
-                <a:latin typeface="Consolas" panose="020B0609020204030204" pitchFamily="49" charset="0"/>
-              </a:rPr>
-              <a:t>=' ', end='</a:t>
-            </a:r>
-            <a:r>
-              <a:rPr lang="en-CA" b="1" i="0" dirty="0">
-                <a:solidFill>
-                  <a:srgbClr val="666666"/>
-                </a:solidFill>
-                <a:effectLst/>
-                <a:latin typeface="Consolas" panose="020B0609020204030204" pitchFamily="49" charset="0"/>
-              </a:rPr>
-              <a:t>\n</a:t>
-            </a:r>
-            <a:r>
-              <a:rPr lang="en-CA" b="0" i="0" dirty="0">
-                <a:solidFill>
-                  <a:srgbClr val="333333"/>
-                </a:solidFill>
-                <a:effectLst/>
-                <a:latin typeface="Consolas" panose="020B0609020204030204" pitchFamily="49" charset="0"/>
-              </a:rPr>
-              <a:t>'):</a:t>
-            </a:r>
-          </a:p>
-          <a:p>
-            <a:pPr algn="just">
-              <a:buNone/>
-            </a:pPr>
-            <a:r>
-              <a:rPr lang="en-CA" b="0" i="0" dirty="0">
-                <a:solidFill>
-                  <a:srgbClr val="333333"/>
-                </a:solidFill>
-                <a:effectLst/>
-                <a:latin typeface="Consolas" panose="020B0609020204030204" pitchFamily="49" charset="0"/>
-              </a:rPr>
-              <a:t>  buffer = ''</a:t>
-            </a:r>
-          </a:p>
-          <a:p>
-            <a:pPr algn="just">
-              <a:buNone/>
-            </a:pPr>
-            <a:r>
-              <a:rPr lang="en-CA" b="0" i="0" dirty="0">
-                <a:solidFill>
-                  <a:srgbClr val="333333"/>
-                </a:solidFill>
-                <a:effectLst/>
-                <a:latin typeface="Consolas" panose="020B0609020204030204" pitchFamily="49" charset="0"/>
-              </a:rPr>
-              <a:t>  </a:t>
-            </a:r>
-            <a:r>
-              <a:rPr lang="en-CA" b="1" i="0" dirty="0">
-                <a:solidFill>
-                  <a:srgbClr val="008800"/>
-                </a:solidFill>
-                <a:effectLst/>
-                <a:latin typeface="Consolas" panose="020B0609020204030204" pitchFamily="49" charset="0"/>
-              </a:rPr>
-              <a:t>for</a:t>
-            </a:r>
-            <a:r>
-              <a:rPr lang="en-CA" b="0" i="0" dirty="0">
-                <a:solidFill>
-                  <a:srgbClr val="333333"/>
-                </a:solidFill>
-                <a:effectLst/>
-                <a:latin typeface="Consolas" panose="020B0609020204030204" pitchFamily="49" charset="0"/>
-              </a:rPr>
-              <a:t> obj </a:t>
-            </a:r>
-            <a:r>
-              <a:rPr lang="en-CA" b="1" i="0" dirty="0">
-                <a:solidFill>
-                  <a:srgbClr val="000000"/>
-                </a:solidFill>
-                <a:effectLst/>
-                <a:latin typeface="Consolas" panose="020B0609020204030204" pitchFamily="49" charset="0"/>
-              </a:rPr>
-              <a:t>in</a:t>
-            </a:r>
-            <a:r>
-              <a:rPr lang="en-CA" b="0" i="0" dirty="0">
-                <a:solidFill>
-                  <a:srgbClr val="333333"/>
-                </a:solidFill>
-                <a:effectLst/>
-                <a:latin typeface="Consolas" panose="020B0609020204030204" pitchFamily="49" charset="0"/>
-              </a:rPr>
-              <a:t> </a:t>
-            </a:r>
-            <a:r>
-              <a:rPr lang="en-CA" b="0" i="0" dirty="0" err="1">
-                <a:solidFill>
-                  <a:srgbClr val="333333"/>
-                </a:solidFill>
-                <a:effectLst/>
-                <a:latin typeface="Consolas" panose="020B0609020204030204" pitchFamily="49" charset="0"/>
-              </a:rPr>
-              <a:t>objets</a:t>
-            </a:r>
-            <a:r>
-              <a:rPr lang="en-CA" b="0" i="0" dirty="0">
-                <a:solidFill>
-                  <a:srgbClr val="333333"/>
-                </a:solidFill>
-                <a:effectLst/>
-                <a:latin typeface="Consolas" panose="020B0609020204030204" pitchFamily="49" charset="0"/>
-              </a:rPr>
-              <a:t>[:-</a:t>
-            </a:r>
-            <a:r>
-              <a:rPr lang="en-CA" b="1" i="0" dirty="0">
-                <a:solidFill>
-                  <a:srgbClr val="0000DD"/>
-                </a:solidFill>
-                <a:effectLst/>
-                <a:latin typeface="Consolas" panose="020B0609020204030204" pitchFamily="49" charset="0"/>
-              </a:rPr>
-              <a:t>1</a:t>
-            </a:r>
-            <a:r>
-              <a:rPr lang="en-CA" b="0" i="0" dirty="0">
-                <a:solidFill>
-                  <a:srgbClr val="333333"/>
-                </a:solidFill>
-                <a:effectLst/>
-                <a:latin typeface="Consolas" panose="020B0609020204030204" pitchFamily="49" charset="0"/>
-              </a:rPr>
-              <a:t>]:</a:t>
-            </a:r>
-          </a:p>
-          <a:p>
-            <a:pPr algn="just">
-              <a:buNone/>
-            </a:pPr>
-            <a:r>
-              <a:rPr lang="en-CA" b="0" i="0" dirty="0">
-                <a:solidFill>
-                  <a:srgbClr val="333333"/>
-                </a:solidFill>
-                <a:effectLst/>
-                <a:latin typeface="Consolas" panose="020B0609020204030204" pitchFamily="49" charset="0"/>
-              </a:rPr>
-              <a:t>    buffer += </a:t>
-            </a:r>
-            <a:r>
-              <a:rPr lang="en-CA" b="0" i="0" dirty="0">
-                <a:solidFill>
-                  <a:srgbClr val="007020"/>
-                </a:solidFill>
-                <a:effectLst/>
-                <a:latin typeface="Consolas" panose="020B0609020204030204" pitchFamily="49" charset="0"/>
-              </a:rPr>
-              <a:t>str</a:t>
-            </a:r>
-            <a:r>
-              <a:rPr lang="en-CA" b="0" i="0" dirty="0">
-                <a:solidFill>
-                  <a:srgbClr val="333333"/>
-                </a:solidFill>
-                <a:effectLst/>
-                <a:latin typeface="Consolas" panose="020B0609020204030204" pitchFamily="49" charset="0"/>
-              </a:rPr>
-              <a:t>(obj) + </a:t>
-            </a:r>
-            <a:r>
-              <a:rPr lang="en-CA" b="0" i="0" dirty="0" err="1">
-                <a:solidFill>
-                  <a:srgbClr val="333333"/>
-                </a:solidFill>
-                <a:effectLst/>
-                <a:latin typeface="Consolas" panose="020B0609020204030204" pitchFamily="49" charset="0"/>
-              </a:rPr>
-              <a:t>sep</a:t>
-            </a:r>
-            <a:endParaRPr lang="en-CA" b="0" i="0" dirty="0">
-              <a:solidFill>
-                <a:srgbClr val="333333"/>
-              </a:solidFill>
-              <a:effectLst/>
-              <a:latin typeface="Consolas" panose="020B0609020204030204" pitchFamily="49" charset="0"/>
-            </a:endParaRPr>
-          </a:p>
-          <a:p>
-            <a:pPr algn="just">
-              <a:buNone/>
-            </a:pPr>
-            <a:r>
-              <a:rPr lang="en-CA" b="0" i="0" dirty="0">
-                <a:solidFill>
-                  <a:srgbClr val="333333"/>
-                </a:solidFill>
-                <a:effectLst/>
-                <a:latin typeface="Consolas" panose="020B0609020204030204" pitchFamily="49" charset="0"/>
-              </a:rPr>
-              <a:t>  buffer += </a:t>
-            </a:r>
-            <a:r>
-              <a:rPr lang="en-CA" b="0" i="0" dirty="0">
-                <a:solidFill>
-                  <a:srgbClr val="007020"/>
-                </a:solidFill>
-                <a:effectLst/>
-                <a:latin typeface="Consolas" panose="020B0609020204030204" pitchFamily="49" charset="0"/>
-              </a:rPr>
-              <a:t>str</a:t>
-            </a:r>
-            <a:r>
-              <a:rPr lang="en-CA" b="0" i="0" dirty="0">
-                <a:solidFill>
-                  <a:srgbClr val="333333"/>
-                </a:solidFill>
-                <a:effectLst/>
-                <a:latin typeface="Consolas" panose="020B0609020204030204" pitchFamily="49" charset="0"/>
-              </a:rPr>
-              <a:t>(</a:t>
-            </a:r>
-            <a:r>
-              <a:rPr lang="en-CA" b="0" i="0" dirty="0" err="1">
-                <a:solidFill>
-                  <a:srgbClr val="333333"/>
-                </a:solidFill>
-                <a:effectLst/>
-                <a:latin typeface="Consolas" panose="020B0609020204030204" pitchFamily="49" charset="0"/>
-              </a:rPr>
-              <a:t>objets</a:t>
-            </a:r>
-            <a:r>
-              <a:rPr lang="en-CA" b="0" i="0" dirty="0">
-                <a:solidFill>
-                  <a:srgbClr val="333333"/>
-                </a:solidFill>
-                <a:effectLst/>
-                <a:latin typeface="Consolas" panose="020B0609020204030204" pitchFamily="49" charset="0"/>
-              </a:rPr>
-              <a:t>[-</a:t>
-            </a:r>
-            <a:r>
-              <a:rPr lang="en-CA" b="1" i="0" dirty="0">
-                <a:solidFill>
-                  <a:srgbClr val="0000DD"/>
-                </a:solidFill>
-                <a:effectLst/>
-                <a:latin typeface="Consolas" panose="020B0609020204030204" pitchFamily="49" charset="0"/>
-              </a:rPr>
-              <a:t>1</a:t>
-            </a:r>
-            <a:r>
-              <a:rPr lang="en-CA" b="0" i="0" dirty="0">
-                <a:solidFill>
-                  <a:srgbClr val="333333"/>
-                </a:solidFill>
-                <a:effectLst/>
-                <a:latin typeface="Consolas" panose="020B0609020204030204" pitchFamily="49" charset="0"/>
-              </a:rPr>
-              <a:t>]) + end</a:t>
-            </a:r>
-          </a:p>
-          <a:p>
-            <a:pPr algn="just">
-              <a:buNone/>
-            </a:pPr>
-            <a:r>
-              <a:rPr lang="en-CA" b="0" i="0" dirty="0">
-                <a:solidFill>
-                  <a:srgbClr val="333333"/>
-                </a:solidFill>
-                <a:effectLst/>
-                <a:latin typeface="Consolas" panose="020B0609020204030204" pitchFamily="49" charset="0"/>
-              </a:rPr>
-              <a:t>  </a:t>
-            </a:r>
-            <a:r>
-              <a:rPr lang="en-CA" b="1" i="0" dirty="0">
-                <a:solidFill>
-                  <a:srgbClr val="008800"/>
-                </a:solidFill>
-                <a:effectLst/>
-                <a:latin typeface="Consolas" panose="020B0609020204030204" pitchFamily="49" charset="0"/>
-              </a:rPr>
-              <a:t>return</a:t>
-            </a:r>
-            <a:r>
-              <a:rPr lang="en-CA" b="0" i="0" dirty="0">
-                <a:solidFill>
-                  <a:srgbClr val="333333"/>
-                </a:solidFill>
-                <a:effectLst/>
-                <a:latin typeface="Consolas" panose="020B0609020204030204" pitchFamily="49" charset="0"/>
-              </a:rPr>
-              <a:t> buffer</a:t>
-            </a:r>
-          </a:p>
-        </p:txBody>
-      </p:sp>
-    </p:spTree>
-    <p:extLst>
-      <p:ext uri="{BB962C8B-B14F-4D97-AF65-F5344CB8AC3E}">
-        <p14:creationId xmlns:p14="http://schemas.microsoft.com/office/powerpoint/2010/main" val="2824829369"/>
-      </p:ext>
-    </p:extLst>
-  </p:cSld>
-  <p:clrMapOvr>
-    <a:masterClrMapping/>
-  </p:clrMapOvr>
-</p:sld>
-</file>
-
 <file path=ppt/slides/slide3.xml><?xml version="1.0" encoding="utf-8"?>
 <p:sld xmlns:a="http://schemas.openxmlformats.org/drawingml/2006/main" xmlns:r="http://schemas.openxmlformats.org/officeDocument/2006/relationships" xmlns:p="http://schemas.openxmlformats.org/presentationml/2006/main">
   <p:cSld>
@@ -27068,6 +27159,720 @@
 </file>
 
 <file path=ppt/slides/slide30.xml><?xml version="1.0" encoding="utf-8"?>
+<p:sld xmlns:a="http://schemas.openxmlformats.org/drawingml/2006/main" xmlns:r="http://schemas.openxmlformats.org/officeDocument/2006/relationships" xmlns:p="http://schemas.openxmlformats.org/presentationml/2006/main">
+  <p:cSld>
+    <p:bg>
+      <p:bgPr>
+        <a:solidFill>
+          <a:schemeClr val="accent6">
+            <a:lumMod val="20000"/>
+            <a:lumOff val="80000"/>
+          </a:schemeClr>
+        </a:solidFill>
+        <a:effectLst/>
+      </p:bgPr>
+    </p:bg>
+    <p:spTree>
+      <p:nvGrpSpPr>
+        <p:cNvPr id="1" name="">
+          <a:extLst>
+            <a:ext uri="{FF2B5EF4-FFF2-40B4-BE49-F238E27FC236}">
+              <a16:creationId xmlns:a16="http://schemas.microsoft.com/office/drawing/2014/main" id="{12B613ED-4C20-B810-736E-08E5068F9C51}"/>
+            </a:ext>
+          </a:extLst>
+        </p:cNvPr>
+        <p:cNvGrpSpPr/>
+        <p:nvPr/>
+      </p:nvGrpSpPr>
+      <p:grpSpPr>
+        <a:xfrm>
+          <a:off x="0" y="0"/>
+          <a:ext cx="0" cy="0"/>
+          <a:chOff x="0" y="0"/>
+          <a:chExt cx="0" cy="0"/>
+        </a:xfrm>
+      </p:grpSpPr>
+      <p:sp>
+        <p:nvSpPr>
+          <p:cNvPr id="2" name="Title 1">
+            <a:extLst>
+              <a:ext uri="{FF2B5EF4-FFF2-40B4-BE49-F238E27FC236}">
+                <a16:creationId xmlns:a16="http://schemas.microsoft.com/office/drawing/2014/main" id="{01CEAD93-2D28-3BC9-2E9D-896F6B4181BB}"/>
+              </a:ext>
+            </a:extLst>
+          </p:cNvPr>
+          <p:cNvSpPr>
+            <a:spLocks noGrp="1"/>
+          </p:cNvSpPr>
+          <p:nvPr>
+            <p:ph type="title"/>
+          </p:nvPr>
+        </p:nvSpPr>
+        <p:spPr/>
+        <p:txBody>
+          <a:bodyPr/>
+          <a:lstStyle/>
+          <a:p>
+            <a:r>
+              <a:rPr lang="en-US" dirty="0">
+                <a:latin typeface="Arial Rounded MT Bold" panose="020F0704030504030204" pitchFamily="34" charset="0"/>
+              </a:rPr>
+              <a:t>XR6 – Lecture </a:t>
+            </a:r>
+            <a:r>
+              <a:rPr lang="en-US" dirty="0" err="1">
+                <a:latin typeface="Arial Rounded MT Bold" panose="020F0704030504030204" pitchFamily="34" charset="0"/>
+              </a:rPr>
+              <a:t>dirigée</a:t>
+            </a:r>
+            <a:endParaRPr lang="fr-CA" dirty="0">
+              <a:latin typeface="Arial Rounded MT Bold" panose="020F0704030504030204" pitchFamily="34" charset="0"/>
+            </a:endParaRPr>
+          </a:p>
+        </p:txBody>
+      </p:sp>
+      <p:sp>
+        <p:nvSpPr>
+          <p:cNvPr id="3" name="Content Placeholder 2">
+            <a:extLst>
+              <a:ext uri="{FF2B5EF4-FFF2-40B4-BE49-F238E27FC236}">
+                <a16:creationId xmlns:a16="http://schemas.microsoft.com/office/drawing/2014/main" id="{209ABF4A-28F0-C642-B07B-85B4C439D074}"/>
+              </a:ext>
+            </a:extLst>
+          </p:cNvPr>
+          <p:cNvSpPr>
+            <a:spLocks noGrp="1"/>
+          </p:cNvSpPr>
+          <p:nvPr>
+            <p:ph idx="1"/>
+          </p:nvPr>
+        </p:nvSpPr>
+        <p:spPr/>
+        <p:txBody>
+          <a:bodyPr>
+            <a:normAutofit/>
+          </a:bodyPr>
+          <a:lstStyle/>
+          <a:p>
+            <a:pPr marL="0" indent="0" algn="just">
+              <a:lnSpc>
+                <a:spcPct val="100000"/>
+              </a:lnSpc>
+              <a:buNone/>
+            </a:pPr>
+            <a:r>
+              <a:rPr lang="en-US" sz="2000" dirty="0" err="1">
+                <a:latin typeface="Consolas" panose="020B0609020204030204" pitchFamily="49" charset="0"/>
+              </a:rPr>
+              <a:t>Décrivez</a:t>
+            </a:r>
+            <a:r>
+              <a:rPr lang="en-US" sz="2000" dirty="0">
+                <a:latin typeface="Consolas" panose="020B0609020204030204" pitchFamily="49" charset="0"/>
+              </a:rPr>
+              <a:t> la </a:t>
+            </a:r>
+            <a:r>
+              <a:rPr lang="en-US" sz="2000" dirty="0" err="1">
+                <a:latin typeface="Consolas" panose="020B0609020204030204" pitchFamily="49" charset="0"/>
+              </a:rPr>
+              <a:t>fonction</a:t>
+            </a:r>
+            <a:r>
+              <a:rPr lang="en-US" sz="2000" dirty="0">
+                <a:latin typeface="Consolas" panose="020B0609020204030204" pitchFamily="49" charset="0"/>
+              </a:rPr>
+              <a:t> </a:t>
+            </a:r>
+            <a:r>
+              <a:rPr lang="en-US" sz="2000" dirty="0" err="1">
+                <a:latin typeface="Consolas" panose="020B0609020204030204" pitchFamily="49" charset="0"/>
+              </a:rPr>
+              <a:t>suivante</a:t>
+            </a:r>
+            <a:r>
+              <a:rPr lang="en-US" sz="2000" dirty="0">
+                <a:latin typeface="Consolas" panose="020B0609020204030204" pitchFamily="49" charset="0"/>
+              </a:rPr>
+              <a:t> à </a:t>
+            </a:r>
+            <a:r>
+              <a:rPr lang="en-US" sz="2000" dirty="0" err="1">
+                <a:latin typeface="Consolas" panose="020B0609020204030204" pitchFamily="49" charset="0"/>
+              </a:rPr>
+              <a:t>partir</a:t>
+            </a:r>
+            <a:r>
+              <a:rPr lang="en-US" sz="2000" dirty="0">
+                <a:latin typeface="Consolas" panose="020B0609020204030204" pitchFamily="49" charset="0"/>
+              </a:rPr>
+              <a:t> de la documentation: </a:t>
+            </a:r>
+          </a:p>
+          <a:p>
+            <a:pPr marL="0" indent="0" algn="just">
+              <a:lnSpc>
+                <a:spcPct val="100000"/>
+              </a:lnSpc>
+              <a:buNone/>
+            </a:pPr>
+            <a:endParaRPr lang="en-US" sz="100" dirty="0">
+              <a:latin typeface="Consolas" panose="020B0609020204030204" pitchFamily="49" charset="0"/>
+            </a:endParaRPr>
+          </a:p>
+          <a:p>
+            <a:pPr lvl="1" algn="just">
+              <a:lnSpc>
+                <a:spcPct val="150000"/>
+              </a:lnSpc>
+            </a:pPr>
+            <a:r>
+              <a:rPr lang="en-US" sz="1400" dirty="0">
+                <a:latin typeface="Consolas" panose="020B0609020204030204" pitchFamily="49" charset="0"/>
+                <a:hlinkClick r:id="rId2"/>
+              </a:rPr>
+              <a:t>https://docs.python.org/fr/3.14/reference/compound_stmts.html#the-for-statement</a:t>
+            </a:r>
+            <a:endParaRPr lang="en-US" sz="1400" dirty="0">
+              <a:latin typeface="Consolas" panose="020B0609020204030204" pitchFamily="49" charset="0"/>
+            </a:endParaRPr>
+          </a:p>
+          <a:p>
+            <a:pPr lvl="1" algn="just">
+              <a:lnSpc>
+                <a:spcPct val="150000"/>
+              </a:lnSpc>
+            </a:pPr>
+            <a:r>
+              <a:rPr lang="en-US" sz="1400" dirty="0">
+                <a:latin typeface="Consolas" panose="020B0609020204030204" pitchFamily="49" charset="0"/>
+                <a:hlinkClick r:id="rId3"/>
+              </a:rPr>
+              <a:t>https://docs.python.org/fr/3.14/reference/expressions.html#slicings</a:t>
+            </a:r>
+          </a:p>
+          <a:p>
+            <a:pPr lvl="1" algn="just">
+              <a:lnSpc>
+                <a:spcPct val="150000"/>
+              </a:lnSpc>
+            </a:pPr>
+            <a:r>
+              <a:rPr lang="en-US" sz="1400" dirty="0">
+                <a:latin typeface="Consolas" panose="020B0609020204030204" pitchFamily="49" charset="0"/>
+                <a:hlinkClick r:id="rId3"/>
+              </a:rPr>
+              <a:t>https://docs.python.org/fr/3.14/reference/simple_stmts.html#augmented-assignment-statements</a:t>
+            </a:r>
+            <a:endParaRPr lang="en-US" sz="1400" dirty="0">
+              <a:latin typeface="Consolas" panose="020B0609020204030204" pitchFamily="49" charset="0"/>
+            </a:endParaRPr>
+          </a:p>
+          <a:p>
+            <a:pPr lvl="1" algn="just">
+              <a:lnSpc>
+                <a:spcPct val="150000"/>
+              </a:lnSpc>
+            </a:pPr>
+            <a:r>
+              <a:rPr lang="en-US" sz="1400" dirty="0">
+                <a:latin typeface="Consolas" panose="020B0609020204030204" pitchFamily="49" charset="0"/>
+                <a:hlinkClick r:id="rId4"/>
+              </a:rPr>
+              <a:t>https://docs.python.org/fr/3.14/library/stdtypes.html#str</a:t>
+            </a:r>
+            <a:endParaRPr lang="en-US" sz="1400" dirty="0">
+              <a:latin typeface="Consolas" panose="020B0609020204030204" pitchFamily="49" charset="0"/>
+            </a:endParaRPr>
+          </a:p>
+          <a:p>
+            <a:pPr algn="just"/>
+            <a:endParaRPr lang="en-US" sz="2000" dirty="0">
+              <a:latin typeface="Consolas" panose="020B0609020204030204" pitchFamily="49" charset="0"/>
+            </a:endParaRPr>
+          </a:p>
+          <a:p>
+            <a:pPr marL="0" indent="0" algn="just">
+              <a:buNone/>
+            </a:pPr>
+            <a:endParaRPr lang="en-US" sz="2000" dirty="0">
+              <a:latin typeface="Consolas" panose="020B0609020204030204" pitchFamily="49" charset="0"/>
+            </a:endParaRPr>
+          </a:p>
+          <a:p>
+            <a:pPr marL="0" indent="0" algn="just">
+              <a:buNone/>
+            </a:pPr>
+            <a:endParaRPr lang="en-US" sz="2000" dirty="0">
+              <a:latin typeface="Consolas" panose="020B0609020204030204" pitchFamily="49" charset="0"/>
+            </a:endParaRPr>
+          </a:p>
+          <a:p>
+            <a:pPr marL="0" indent="0" algn="just">
+              <a:buNone/>
+            </a:pPr>
+            <a:endParaRPr lang="en-US" sz="2000" dirty="0">
+              <a:latin typeface="Consolas" panose="020B0609020204030204" pitchFamily="49" charset="0"/>
+            </a:endParaRPr>
+          </a:p>
+        </p:txBody>
+      </p:sp>
+      <p:sp>
+        <p:nvSpPr>
+          <p:cNvPr id="4" name="Slide Number Placeholder 3">
+            <a:extLst>
+              <a:ext uri="{FF2B5EF4-FFF2-40B4-BE49-F238E27FC236}">
+                <a16:creationId xmlns:a16="http://schemas.microsoft.com/office/drawing/2014/main" id="{06432649-ACCF-C494-8C4D-BD60A1909A70}"/>
+              </a:ext>
+            </a:extLst>
+          </p:cNvPr>
+          <p:cNvSpPr>
+            <a:spLocks noGrp="1"/>
+          </p:cNvSpPr>
+          <p:nvPr>
+            <p:ph type="sldNum" sz="quarter" idx="12"/>
+          </p:nvPr>
+        </p:nvSpPr>
+        <p:spPr/>
+        <p:txBody>
+          <a:bodyPr/>
+          <a:lstStyle/>
+          <a:p>
+            <a:fld id="{846B06B1-1179-491F-A487-8E0C403F7C13}" type="slidenum">
+              <a:rPr lang="fr-CA" smtClean="0"/>
+              <a:t>30</a:t>
+            </a:fld>
+            <a:endParaRPr lang="fr-CA"/>
+          </a:p>
+        </p:txBody>
+      </p:sp>
+      <p:sp>
+        <p:nvSpPr>
+          <p:cNvPr id="6" name="TextBox 5">
+            <a:extLst>
+              <a:ext uri="{FF2B5EF4-FFF2-40B4-BE49-F238E27FC236}">
+                <a16:creationId xmlns:a16="http://schemas.microsoft.com/office/drawing/2014/main" id="{101C41D6-9989-63BC-E338-ED604AF40B76}"/>
+              </a:ext>
+            </a:extLst>
+          </p:cNvPr>
+          <p:cNvSpPr txBox="1"/>
+          <p:nvPr/>
+        </p:nvSpPr>
+        <p:spPr>
+          <a:xfrm>
+            <a:off x="3538857" y="4422636"/>
+            <a:ext cx="5114285" cy="1754326"/>
+          </a:xfrm>
+          <a:prstGeom prst="rect">
+            <a:avLst/>
+          </a:prstGeom>
+          <a:solidFill>
+            <a:schemeClr val="bg1"/>
+          </a:solidFill>
+          <a:ln w="19050">
+            <a:solidFill>
+              <a:schemeClr val="tx1"/>
+            </a:solidFill>
+          </a:ln>
+        </p:spPr>
+        <p:txBody>
+          <a:bodyPr wrap="square" anchor="ctr">
+            <a:spAutoFit/>
+          </a:bodyPr>
+          <a:lstStyle/>
+          <a:p>
+            <a:pPr algn="just">
+              <a:buNone/>
+            </a:pPr>
+            <a:r>
+              <a:rPr lang="en-CA" b="1" i="0" dirty="0">
+                <a:solidFill>
+                  <a:srgbClr val="008800"/>
+                </a:solidFill>
+                <a:effectLst/>
+                <a:latin typeface="Consolas" panose="020B0609020204030204" pitchFamily="49" charset="0"/>
+              </a:rPr>
+              <a:t>def</a:t>
+            </a:r>
+            <a:r>
+              <a:rPr lang="en-CA" b="0" i="0" dirty="0">
+                <a:solidFill>
+                  <a:srgbClr val="BBBBBB"/>
+                </a:solidFill>
+                <a:effectLst/>
+                <a:latin typeface="Consolas" panose="020B0609020204030204" pitchFamily="49" charset="0"/>
+              </a:rPr>
+              <a:t> </a:t>
+            </a:r>
+            <a:r>
+              <a:rPr lang="en-CA" b="1" i="0" dirty="0" err="1">
+                <a:solidFill>
+                  <a:srgbClr val="0066BB"/>
+                </a:solidFill>
+                <a:effectLst/>
+                <a:latin typeface="Consolas" panose="020B0609020204030204" pitchFamily="49" charset="0"/>
+              </a:rPr>
+              <a:t>souder</a:t>
+            </a:r>
+            <a:r>
+              <a:rPr lang="en-CA" b="0" i="0" dirty="0">
+                <a:solidFill>
+                  <a:srgbClr val="333333"/>
+                </a:solidFill>
+                <a:effectLst/>
+                <a:latin typeface="Consolas" panose="020B0609020204030204" pitchFamily="49" charset="0"/>
+              </a:rPr>
+              <a:t>(*</a:t>
+            </a:r>
+            <a:r>
+              <a:rPr lang="en-CA" b="0" i="0" dirty="0" err="1">
+                <a:solidFill>
+                  <a:srgbClr val="333333"/>
+                </a:solidFill>
+                <a:effectLst/>
+                <a:latin typeface="Consolas" panose="020B0609020204030204" pitchFamily="49" charset="0"/>
+              </a:rPr>
+              <a:t>objets</a:t>
+            </a:r>
+            <a:r>
+              <a:rPr lang="en-CA" b="0" i="0" dirty="0">
+                <a:solidFill>
+                  <a:srgbClr val="333333"/>
+                </a:solidFill>
+                <a:effectLst/>
+                <a:latin typeface="Consolas" panose="020B0609020204030204" pitchFamily="49" charset="0"/>
+              </a:rPr>
+              <a:t>, </a:t>
+            </a:r>
+            <a:r>
+              <a:rPr lang="en-CA" b="0" i="0" dirty="0" err="1">
+                <a:solidFill>
+                  <a:srgbClr val="333333"/>
+                </a:solidFill>
+                <a:effectLst/>
+                <a:latin typeface="Consolas" panose="020B0609020204030204" pitchFamily="49" charset="0"/>
+              </a:rPr>
+              <a:t>sep</a:t>
+            </a:r>
+            <a:r>
+              <a:rPr lang="en-CA" b="0" i="0" dirty="0">
+                <a:solidFill>
+                  <a:srgbClr val="333333"/>
+                </a:solidFill>
+                <a:effectLst/>
+                <a:latin typeface="Consolas" panose="020B0609020204030204" pitchFamily="49" charset="0"/>
+              </a:rPr>
+              <a:t>=' ', end='</a:t>
+            </a:r>
+            <a:r>
+              <a:rPr lang="en-CA" b="1" i="0" dirty="0">
+                <a:solidFill>
+                  <a:srgbClr val="666666"/>
+                </a:solidFill>
+                <a:effectLst/>
+                <a:latin typeface="Consolas" panose="020B0609020204030204" pitchFamily="49" charset="0"/>
+              </a:rPr>
+              <a:t>\n</a:t>
+            </a:r>
+            <a:r>
+              <a:rPr lang="en-CA" b="0" i="0" dirty="0">
+                <a:solidFill>
+                  <a:srgbClr val="333333"/>
+                </a:solidFill>
+                <a:effectLst/>
+                <a:latin typeface="Consolas" panose="020B0609020204030204" pitchFamily="49" charset="0"/>
+              </a:rPr>
+              <a:t>'):</a:t>
+            </a:r>
+          </a:p>
+          <a:p>
+            <a:pPr algn="just">
+              <a:buNone/>
+            </a:pPr>
+            <a:r>
+              <a:rPr lang="en-CA" b="0" i="0" dirty="0">
+                <a:solidFill>
+                  <a:srgbClr val="333333"/>
+                </a:solidFill>
+                <a:effectLst/>
+                <a:latin typeface="Consolas" panose="020B0609020204030204" pitchFamily="49" charset="0"/>
+              </a:rPr>
+              <a:t>  buffer = ''</a:t>
+            </a:r>
+          </a:p>
+          <a:p>
+            <a:pPr algn="just">
+              <a:buNone/>
+            </a:pPr>
+            <a:r>
+              <a:rPr lang="en-CA" b="0" i="0" dirty="0">
+                <a:solidFill>
+                  <a:srgbClr val="333333"/>
+                </a:solidFill>
+                <a:effectLst/>
+                <a:latin typeface="Consolas" panose="020B0609020204030204" pitchFamily="49" charset="0"/>
+              </a:rPr>
+              <a:t>  </a:t>
+            </a:r>
+            <a:r>
+              <a:rPr lang="en-CA" b="1" i="0" dirty="0">
+                <a:solidFill>
+                  <a:srgbClr val="008800"/>
+                </a:solidFill>
+                <a:effectLst/>
+                <a:latin typeface="Consolas" panose="020B0609020204030204" pitchFamily="49" charset="0"/>
+              </a:rPr>
+              <a:t>for</a:t>
+            </a:r>
+            <a:r>
+              <a:rPr lang="en-CA" b="0" i="0" dirty="0">
+                <a:solidFill>
+                  <a:srgbClr val="333333"/>
+                </a:solidFill>
+                <a:effectLst/>
+                <a:latin typeface="Consolas" panose="020B0609020204030204" pitchFamily="49" charset="0"/>
+              </a:rPr>
+              <a:t> obj </a:t>
+            </a:r>
+            <a:r>
+              <a:rPr lang="en-CA" b="1" i="0" dirty="0">
+                <a:solidFill>
+                  <a:srgbClr val="000000"/>
+                </a:solidFill>
+                <a:effectLst/>
+                <a:latin typeface="Consolas" panose="020B0609020204030204" pitchFamily="49" charset="0"/>
+              </a:rPr>
+              <a:t>in</a:t>
+            </a:r>
+            <a:r>
+              <a:rPr lang="en-CA" b="0" i="0" dirty="0">
+                <a:solidFill>
+                  <a:srgbClr val="333333"/>
+                </a:solidFill>
+                <a:effectLst/>
+                <a:latin typeface="Consolas" panose="020B0609020204030204" pitchFamily="49" charset="0"/>
+              </a:rPr>
+              <a:t> </a:t>
+            </a:r>
+            <a:r>
+              <a:rPr lang="en-CA" b="0" i="0" dirty="0" err="1">
+                <a:solidFill>
+                  <a:srgbClr val="333333"/>
+                </a:solidFill>
+                <a:effectLst/>
+                <a:latin typeface="Consolas" panose="020B0609020204030204" pitchFamily="49" charset="0"/>
+              </a:rPr>
+              <a:t>objets</a:t>
+            </a:r>
+            <a:r>
+              <a:rPr lang="en-CA" b="0" i="0" dirty="0">
+                <a:solidFill>
+                  <a:srgbClr val="333333"/>
+                </a:solidFill>
+                <a:effectLst/>
+                <a:latin typeface="Consolas" panose="020B0609020204030204" pitchFamily="49" charset="0"/>
+              </a:rPr>
+              <a:t>[:-</a:t>
+            </a:r>
+            <a:r>
+              <a:rPr lang="en-CA" b="1" i="0" dirty="0">
+                <a:solidFill>
+                  <a:srgbClr val="0000DD"/>
+                </a:solidFill>
+                <a:effectLst/>
+                <a:latin typeface="Consolas" panose="020B0609020204030204" pitchFamily="49" charset="0"/>
+              </a:rPr>
+              <a:t>1</a:t>
+            </a:r>
+            <a:r>
+              <a:rPr lang="en-CA" b="0" i="0" dirty="0">
+                <a:solidFill>
+                  <a:srgbClr val="333333"/>
+                </a:solidFill>
+                <a:effectLst/>
+                <a:latin typeface="Consolas" panose="020B0609020204030204" pitchFamily="49" charset="0"/>
+              </a:rPr>
+              <a:t>]:</a:t>
+            </a:r>
+          </a:p>
+          <a:p>
+            <a:pPr algn="just">
+              <a:buNone/>
+            </a:pPr>
+            <a:r>
+              <a:rPr lang="en-CA" b="0" i="0" dirty="0">
+                <a:solidFill>
+                  <a:srgbClr val="333333"/>
+                </a:solidFill>
+                <a:effectLst/>
+                <a:latin typeface="Consolas" panose="020B0609020204030204" pitchFamily="49" charset="0"/>
+              </a:rPr>
+              <a:t>    buffer += </a:t>
+            </a:r>
+            <a:r>
+              <a:rPr lang="en-CA" b="0" i="0" dirty="0">
+                <a:solidFill>
+                  <a:srgbClr val="007020"/>
+                </a:solidFill>
+                <a:effectLst/>
+                <a:latin typeface="Consolas" panose="020B0609020204030204" pitchFamily="49" charset="0"/>
+              </a:rPr>
+              <a:t>str</a:t>
+            </a:r>
+            <a:r>
+              <a:rPr lang="en-CA" b="0" i="0" dirty="0">
+                <a:solidFill>
+                  <a:srgbClr val="333333"/>
+                </a:solidFill>
+                <a:effectLst/>
+                <a:latin typeface="Consolas" panose="020B0609020204030204" pitchFamily="49" charset="0"/>
+              </a:rPr>
+              <a:t>(obj) + </a:t>
+            </a:r>
+            <a:r>
+              <a:rPr lang="en-CA" b="0" i="0" dirty="0" err="1">
+                <a:solidFill>
+                  <a:srgbClr val="333333"/>
+                </a:solidFill>
+                <a:effectLst/>
+                <a:latin typeface="Consolas" panose="020B0609020204030204" pitchFamily="49" charset="0"/>
+              </a:rPr>
+              <a:t>sep</a:t>
+            </a:r>
+            <a:endParaRPr lang="en-CA" b="0" i="0" dirty="0">
+              <a:solidFill>
+                <a:srgbClr val="333333"/>
+              </a:solidFill>
+              <a:effectLst/>
+              <a:latin typeface="Consolas" panose="020B0609020204030204" pitchFamily="49" charset="0"/>
+            </a:endParaRPr>
+          </a:p>
+          <a:p>
+            <a:pPr algn="just">
+              <a:buNone/>
+            </a:pPr>
+            <a:r>
+              <a:rPr lang="en-CA" b="0" i="0" dirty="0">
+                <a:solidFill>
+                  <a:srgbClr val="333333"/>
+                </a:solidFill>
+                <a:effectLst/>
+                <a:latin typeface="Consolas" panose="020B0609020204030204" pitchFamily="49" charset="0"/>
+              </a:rPr>
+              <a:t>  buffer += </a:t>
+            </a:r>
+            <a:r>
+              <a:rPr lang="en-CA" b="0" i="0" dirty="0">
+                <a:solidFill>
+                  <a:srgbClr val="007020"/>
+                </a:solidFill>
+                <a:effectLst/>
+                <a:latin typeface="Consolas" panose="020B0609020204030204" pitchFamily="49" charset="0"/>
+              </a:rPr>
+              <a:t>str</a:t>
+            </a:r>
+            <a:r>
+              <a:rPr lang="en-CA" b="0" i="0" dirty="0">
+                <a:solidFill>
+                  <a:srgbClr val="333333"/>
+                </a:solidFill>
+                <a:effectLst/>
+                <a:latin typeface="Consolas" panose="020B0609020204030204" pitchFamily="49" charset="0"/>
+              </a:rPr>
+              <a:t>(</a:t>
+            </a:r>
+            <a:r>
+              <a:rPr lang="en-CA" b="0" i="0" dirty="0" err="1">
+                <a:solidFill>
+                  <a:srgbClr val="333333"/>
+                </a:solidFill>
+                <a:effectLst/>
+                <a:latin typeface="Consolas" panose="020B0609020204030204" pitchFamily="49" charset="0"/>
+              </a:rPr>
+              <a:t>objets</a:t>
+            </a:r>
+            <a:r>
+              <a:rPr lang="en-CA" b="0" i="0" dirty="0">
+                <a:solidFill>
+                  <a:srgbClr val="333333"/>
+                </a:solidFill>
+                <a:effectLst/>
+                <a:latin typeface="Consolas" panose="020B0609020204030204" pitchFamily="49" charset="0"/>
+              </a:rPr>
+              <a:t>[-</a:t>
+            </a:r>
+            <a:r>
+              <a:rPr lang="en-CA" b="1" i="0" dirty="0">
+                <a:solidFill>
+                  <a:srgbClr val="0000DD"/>
+                </a:solidFill>
+                <a:effectLst/>
+                <a:latin typeface="Consolas" panose="020B0609020204030204" pitchFamily="49" charset="0"/>
+              </a:rPr>
+              <a:t>1</a:t>
+            </a:r>
+            <a:r>
+              <a:rPr lang="en-CA" b="0" i="0" dirty="0">
+                <a:solidFill>
+                  <a:srgbClr val="333333"/>
+                </a:solidFill>
+                <a:effectLst/>
+                <a:latin typeface="Consolas" panose="020B0609020204030204" pitchFamily="49" charset="0"/>
+              </a:rPr>
+              <a:t>]) + end</a:t>
+            </a:r>
+          </a:p>
+          <a:p>
+            <a:pPr algn="just">
+              <a:buNone/>
+            </a:pPr>
+            <a:r>
+              <a:rPr lang="en-CA" b="0" i="0" dirty="0">
+                <a:solidFill>
+                  <a:srgbClr val="333333"/>
+                </a:solidFill>
+                <a:effectLst/>
+                <a:latin typeface="Consolas" panose="020B0609020204030204" pitchFamily="49" charset="0"/>
+              </a:rPr>
+              <a:t>  </a:t>
+            </a:r>
+            <a:r>
+              <a:rPr lang="en-CA" b="1" i="0" dirty="0">
+                <a:solidFill>
+                  <a:srgbClr val="008800"/>
+                </a:solidFill>
+                <a:effectLst/>
+                <a:latin typeface="Consolas" panose="020B0609020204030204" pitchFamily="49" charset="0"/>
+              </a:rPr>
+              <a:t>return</a:t>
+            </a:r>
+            <a:r>
+              <a:rPr lang="en-CA" b="0" i="0" dirty="0">
+                <a:solidFill>
+                  <a:srgbClr val="333333"/>
+                </a:solidFill>
+                <a:effectLst/>
+                <a:latin typeface="Consolas" panose="020B0609020204030204" pitchFamily="49" charset="0"/>
+              </a:rPr>
+              <a:t> buffer</a:t>
+            </a:r>
+          </a:p>
+        </p:txBody>
+      </p:sp>
+    </p:spTree>
+    <p:extLst>
+      <p:ext uri="{BB962C8B-B14F-4D97-AF65-F5344CB8AC3E}">
+        <p14:creationId xmlns:p14="http://schemas.microsoft.com/office/powerpoint/2010/main" val="2824829369"/>
+      </p:ext>
+    </p:extLst>
+  </p:cSld>
+  <p:clrMapOvr>
+    <a:masterClrMapping/>
+  </p:clrMapOvr>
+</p:sld>
+</file>
+
+<file path=ppt/slides/slide31.xml><?xml version="1.0" encoding="utf-8"?>
 <p:sld xmlns:a="http://schemas.openxmlformats.org/drawingml/2006/main" xmlns:r="http://schemas.openxmlformats.org/officeDocument/2006/relationships" xmlns:p="http://schemas.openxmlformats.org/presentationml/2006/main">
   <p:cSld>
     <p:bg>
@@ -27709,7 +28514,7 @@
           <a:p>
             <a:fld id="{846B06B1-1179-491F-A487-8E0C403F7C13}" type="slidenum">
               <a:rPr lang="fr-CA" smtClean="0"/>
-              <a:t>30</a:t>
+              <a:t>31</a:t>
             </a:fld>
             <a:endParaRPr lang="fr-CA"/>
           </a:p>
@@ -28271,7 +29076,7 @@
 </p:sld>
 </file>
 
-<file path=ppt/slides/slide31.xml><?xml version="1.0" encoding="utf-8"?>
+<file path=ppt/slides/slide32.xml><?xml version="1.0" encoding="utf-8"?>
 <p:sld xmlns:a="http://schemas.openxmlformats.org/drawingml/2006/main" xmlns:r="http://schemas.openxmlformats.org/officeDocument/2006/relationships" xmlns:p="http://schemas.openxmlformats.org/presentationml/2006/main">
   <p:cSld>
     <p:bg>
@@ -28715,7 +29520,7 @@
           <a:p>
             <a:fld id="{846B06B1-1179-491F-A487-8E0C403F7C13}" type="slidenum">
               <a:rPr lang="fr-CA" smtClean="0"/>
-              <a:t>31</a:t>
+              <a:t>32</a:t>
             </a:fld>
             <a:endParaRPr lang="fr-CA"/>
           </a:p>
@@ -28734,7 +29539,7 @@
 </p:sld>
 </file>
 
-<file path=ppt/slides/slide32.xml><?xml version="1.0" encoding="utf-8"?>
+<file path=ppt/slides/slide33.xml><?xml version="1.0" encoding="utf-8"?>
 <p:sld xmlns:a="http://schemas.openxmlformats.org/drawingml/2006/main" xmlns:r="http://schemas.openxmlformats.org/officeDocument/2006/relationships" xmlns:p="http://schemas.openxmlformats.org/presentationml/2006/main">
   <p:cSld>
     <p:bg>
@@ -29035,7 +29840,7 @@
           <a:p>
             <a:fld id="{846B06B1-1179-491F-A487-8E0C403F7C13}" type="slidenum">
               <a:rPr lang="fr-CA" smtClean="0"/>
-              <a:t>32</a:t>
+              <a:t>33</a:t>
             </a:fld>
             <a:endParaRPr lang="fr-CA"/>
           </a:p>
@@ -29807,7 +30612,7 @@
 </p:sld>
 </file>
 
-<file path=ppt/slides/slide33.xml><?xml version="1.0" encoding="utf-8"?>
+<file path=ppt/slides/slide34.xml><?xml version="1.0" encoding="utf-8"?>
 <p:sld xmlns:a="http://schemas.openxmlformats.org/drawingml/2006/main" xmlns:r="http://schemas.openxmlformats.org/officeDocument/2006/relationships" xmlns:p="http://schemas.openxmlformats.org/presentationml/2006/main">
   <p:cSld>
     <p:bg>
@@ -30377,7 +31182,7 @@
           <a:p>
             <a:fld id="{846B06B1-1179-491F-A487-8E0C403F7C13}" type="slidenum">
               <a:rPr lang="fr-CA" smtClean="0"/>
-              <a:t>33</a:t>
+              <a:t>34</a:t>
             </a:fld>
             <a:endParaRPr lang="fr-CA"/>
           </a:p>
@@ -32837,7 +33642,7 @@
 </p:sld>
 </file>
 
-<file path=ppt/slides/slide34.xml><?xml version="1.0" encoding="utf-8"?>
+<file path=ppt/slides/slide35.xml><?xml version="1.0" encoding="utf-8"?>
 <p:sld xmlns:a="http://schemas.openxmlformats.org/drawingml/2006/main" xmlns:r="http://schemas.openxmlformats.org/officeDocument/2006/relationships" xmlns:p="http://schemas.openxmlformats.org/presentationml/2006/main">
   <p:cSld>
     <p:bg>
@@ -33202,7 +34007,7 @@
           <a:p>
             <a:fld id="{846B06B1-1179-491F-A487-8E0C403F7C13}" type="slidenum">
               <a:rPr lang="fr-CA" smtClean="0"/>
-              <a:t>34</a:t>
+              <a:t>35</a:t>
             </a:fld>
             <a:endParaRPr lang="fr-CA"/>
           </a:p>
@@ -33221,7 +34026,7 @@
 </p:sld>
 </file>
 
-<file path=ppt/slides/slide35.xml><?xml version="1.0" encoding="utf-8"?>
+<file path=ppt/slides/slide36.xml><?xml version="1.0" encoding="utf-8"?>
 <p:sld xmlns:a="http://schemas.openxmlformats.org/drawingml/2006/main" xmlns:r="http://schemas.openxmlformats.org/officeDocument/2006/relationships" xmlns:p="http://schemas.openxmlformats.org/presentationml/2006/main">
   <p:cSld>
     <p:bg>
@@ -33320,7 +34125,7 @@
           <a:p>
             <a:fld id="{846B06B1-1179-491F-A487-8E0C403F7C13}" type="slidenum">
               <a:rPr lang="fr-CA" smtClean="0"/>
-              <a:t>35</a:t>
+              <a:t>36</a:t>
             </a:fld>
             <a:endParaRPr lang="fr-CA"/>
           </a:p>
@@ -35328,7 +36133,7 @@
 </p:sld>
 </file>
 
-<file path=ppt/slides/slide36.xml><?xml version="1.0" encoding="utf-8"?>
+<file path=ppt/slides/slide37.xml><?xml version="1.0" encoding="utf-8"?>
 <p:sld xmlns:a="http://schemas.openxmlformats.org/drawingml/2006/main" xmlns:r="http://schemas.openxmlformats.org/officeDocument/2006/relationships" xmlns:p="http://schemas.openxmlformats.org/presentationml/2006/main">
   <p:cSld>
     <p:bg>
@@ -35546,7 +36351,7 @@
           <a:p>
             <a:fld id="{846B06B1-1179-491F-A487-8E0C403F7C13}" type="slidenum">
               <a:rPr lang="fr-CA" smtClean="0"/>
-              <a:t>36</a:t>
+              <a:t>37</a:t>
             </a:fld>
             <a:endParaRPr lang="fr-CA"/>
           </a:p>
@@ -35822,7 +36627,7 @@
 </p:sld>
 </file>
 
-<file path=ppt/slides/slide37.xml><?xml version="1.0" encoding="utf-8"?>
+<file path=ppt/slides/slide38.xml><?xml version="1.0" encoding="utf-8"?>
 <p:sld xmlns:a="http://schemas.openxmlformats.org/drawingml/2006/main" xmlns:r="http://schemas.openxmlformats.org/officeDocument/2006/relationships" xmlns:p="http://schemas.openxmlformats.org/presentationml/2006/main">
   <p:cSld>
     <p:bg>
@@ -36268,7 +37073,7 @@
           <a:p>
             <a:fld id="{846B06B1-1179-491F-A487-8E0C403F7C13}" type="slidenum">
               <a:rPr lang="fr-CA" smtClean="0"/>
-              <a:t>37</a:t>
+              <a:t>38</a:t>
             </a:fld>
             <a:endParaRPr lang="fr-CA" dirty="0"/>
           </a:p>
@@ -37147,7 +37952,7 @@
 </p:sld>
 </file>
 
-<file path=ppt/slides/slide38.xml><?xml version="1.0" encoding="utf-8"?>
+<file path=ppt/slides/slide39.xml><?xml version="1.0" encoding="utf-8"?>
 <p:sld xmlns:a="http://schemas.openxmlformats.org/drawingml/2006/main" xmlns:r="http://schemas.openxmlformats.org/officeDocument/2006/relationships" xmlns:p="http://schemas.openxmlformats.org/presentationml/2006/main">
   <p:cSld>
     <p:bg>
@@ -37693,7 +38498,7 @@
           <a:p>
             <a:fld id="{846B06B1-1179-491F-A487-8E0C403F7C13}" type="slidenum">
               <a:rPr lang="fr-CA" smtClean="0"/>
-              <a:t>38</a:t>
+              <a:t>39</a:t>
             </a:fld>
             <a:endParaRPr lang="fr-CA"/>
           </a:p>
@@ -38715,466 +39520,6 @@
       <p:bldP spid="8" grpId="0" animBg="1"/>
     </p:bldLst>
   </p:timing>
-</p:sld>
-</file>
-
-<file path=ppt/slides/slide39.xml><?xml version="1.0" encoding="utf-8"?>
-<p:sld xmlns:a="http://schemas.openxmlformats.org/drawingml/2006/main" xmlns:r="http://schemas.openxmlformats.org/officeDocument/2006/relationships" xmlns:p="http://schemas.openxmlformats.org/presentationml/2006/main">
-  <p:cSld>
-    <p:bg>
-      <p:bgPr>
-        <a:solidFill>
-          <a:schemeClr val="accent6">
-            <a:lumMod val="20000"/>
-            <a:lumOff val="80000"/>
-          </a:schemeClr>
-        </a:solidFill>
-        <a:effectLst/>
-      </p:bgPr>
-    </p:bg>
-    <p:spTree>
-      <p:nvGrpSpPr>
-        <p:cNvPr id="1" name="">
-          <a:extLst>
-            <a:ext uri="{FF2B5EF4-FFF2-40B4-BE49-F238E27FC236}">
-              <a16:creationId xmlns:a16="http://schemas.microsoft.com/office/drawing/2014/main" id="{808E75C2-6E05-D4AE-5915-518C66CDFFB4}"/>
-            </a:ext>
-          </a:extLst>
-        </p:cNvPr>
-        <p:cNvGrpSpPr/>
-        <p:nvPr/>
-      </p:nvGrpSpPr>
-      <p:grpSpPr>
-        <a:xfrm>
-          <a:off x="0" y="0"/>
-          <a:ext cx="0" cy="0"/>
-          <a:chOff x="0" y="0"/>
-          <a:chExt cx="0" cy="0"/>
-        </a:xfrm>
-      </p:grpSpPr>
-      <p:sp>
-        <p:nvSpPr>
-          <p:cNvPr id="2" name="Title 1">
-            <a:extLst>
-              <a:ext uri="{FF2B5EF4-FFF2-40B4-BE49-F238E27FC236}">
-                <a16:creationId xmlns:a16="http://schemas.microsoft.com/office/drawing/2014/main" id="{DFCE78E3-6E2F-2513-0701-01EE22E72B4D}"/>
-              </a:ext>
-            </a:extLst>
-          </p:cNvPr>
-          <p:cNvSpPr>
-            <a:spLocks noGrp="1"/>
-          </p:cNvSpPr>
-          <p:nvPr>
-            <p:ph type="title"/>
-          </p:nvPr>
-        </p:nvSpPr>
-        <p:spPr/>
-        <p:txBody>
-          <a:bodyPr/>
-          <a:lstStyle/>
-          <a:p>
-            <a:r>
-              <a:rPr lang="en-US" dirty="0">
-                <a:latin typeface="Arial Rounded MT Bold" panose="020F0704030504030204" pitchFamily="34" charset="0"/>
-              </a:rPr>
-              <a:t>XR6 – Moyenne et </a:t>
-            </a:r>
-            <a:r>
-              <a:rPr lang="en-US" dirty="0" err="1">
-                <a:latin typeface="Arial Rounded MT Bold" panose="020F0704030504030204" pitchFamily="34" charset="0"/>
-              </a:rPr>
-              <a:t>écart</a:t>
-            </a:r>
-            <a:r>
-              <a:rPr lang="en-US" dirty="0">
-                <a:latin typeface="Arial Rounded MT Bold" panose="020F0704030504030204" pitchFamily="34" charset="0"/>
-              </a:rPr>
-              <a:t>-type</a:t>
-            </a:r>
-            <a:endParaRPr lang="fr-CA" dirty="0">
-              <a:latin typeface="Arial Rounded MT Bold" panose="020F0704030504030204" pitchFamily="34" charset="0"/>
-            </a:endParaRPr>
-          </a:p>
-        </p:txBody>
-      </p:sp>
-      <p:sp>
-        <p:nvSpPr>
-          <p:cNvPr id="3" name="Content Placeholder 2">
-            <a:extLst>
-              <a:ext uri="{FF2B5EF4-FFF2-40B4-BE49-F238E27FC236}">
-                <a16:creationId xmlns:a16="http://schemas.microsoft.com/office/drawing/2014/main" id="{E5BFA73A-5F16-C1DB-89AE-EB491A024297}"/>
-              </a:ext>
-            </a:extLst>
-          </p:cNvPr>
-          <p:cNvSpPr>
-            <a:spLocks noGrp="1"/>
-          </p:cNvSpPr>
-          <p:nvPr>
-            <p:ph idx="1"/>
-          </p:nvPr>
-        </p:nvSpPr>
-        <p:spPr/>
-        <p:txBody>
-          <a:bodyPr>
-            <a:normAutofit/>
-          </a:bodyPr>
-          <a:lstStyle/>
-          <a:p>
-            <a:pPr marL="0" indent="0" algn="just">
-              <a:lnSpc>
-                <a:spcPct val="100000"/>
-              </a:lnSpc>
-              <a:buNone/>
-            </a:pPr>
-            <a:r>
-              <a:rPr lang="en-US" sz="2200" dirty="0" err="1">
-                <a:latin typeface="Consolas" panose="020B0609020204030204" pitchFamily="49" charset="0"/>
-              </a:rPr>
-              <a:t>Implémentez</a:t>
-            </a:r>
-            <a:r>
-              <a:rPr lang="en-US" sz="2200" dirty="0">
-                <a:latin typeface="Consolas" panose="020B0609020204030204" pitchFamily="49" charset="0"/>
-              </a:rPr>
-              <a:t> la function </a:t>
-            </a:r>
-            <a:r>
-              <a:rPr lang="en-US" sz="2200" b="1" dirty="0" err="1">
-                <a:latin typeface="Consolas" panose="020B0609020204030204" pitchFamily="49" charset="0"/>
-              </a:rPr>
-              <a:t>afficher_moyenne_ecart_type</a:t>
-            </a:r>
-            <a:r>
-              <a:rPr lang="en-US" sz="2200" b="1" dirty="0">
-                <a:latin typeface="Consolas" panose="020B0609020204030204" pitchFamily="49" charset="0"/>
-              </a:rPr>
-              <a:t> </a:t>
-            </a:r>
-            <a:r>
-              <a:rPr lang="en-US" sz="2200" dirty="0">
-                <a:latin typeface="Consolas" panose="020B0609020204030204" pitchFamily="49" charset="0"/>
-              </a:rPr>
-              <a:t>qui suit:</a:t>
-            </a:r>
-          </a:p>
-          <a:p>
-            <a:pPr marL="0" indent="0" algn="just">
-              <a:lnSpc>
-                <a:spcPct val="100000"/>
-              </a:lnSpc>
-              <a:buNone/>
-            </a:pPr>
-            <a:endParaRPr lang="en-US" sz="200" dirty="0">
-              <a:latin typeface="Consolas" panose="020B0609020204030204" pitchFamily="49" charset="0"/>
-            </a:endParaRPr>
-          </a:p>
-          <a:p>
-            <a:pPr marL="457200" lvl="1" indent="0" algn="just">
-              <a:lnSpc>
-                <a:spcPct val="100000"/>
-              </a:lnSpc>
-              <a:buNone/>
-            </a:pPr>
-            <a:r>
-              <a:rPr lang="fr-CA" sz="2000" b="1" dirty="0">
-                <a:latin typeface="Consolas" panose="020B0609020204030204" pitchFamily="49" charset="0"/>
-              </a:rPr>
-              <a:t>&gt;&gt;&gt; </a:t>
-            </a:r>
-            <a:r>
-              <a:rPr lang="fr-CA" sz="2000" b="1" dirty="0" err="1">
-                <a:latin typeface="Consolas" panose="020B0609020204030204" pitchFamily="49" charset="0"/>
-              </a:rPr>
-              <a:t>afficher_moyenne_ecart_type</a:t>
-            </a:r>
-            <a:r>
-              <a:rPr lang="fr-CA" sz="2000" b="1">
-                <a:latin typeface="Consolas" panose="020B0609020204030204" pitchFamily="49" charset="0"/>
-              </a:rPr>
-              <a:t>()</a:t>
-            </a:r>
-            <a:endParaRPr lang="fr-CA" sz="2000" b="1" dirty="0">
-              <a:latin typeface="Consolas" panose="020B0609020204030204" pitchFamily="49" charset="0"/>
-            </a:endParaRPr>
-          </a:p>
-          <a:p>
-            <a:pPr marL="457200" lvl="1" indent="0" algn="just">
-              <a:lnSpc>
-                <a:spcPct val="100000"/>
-              </a:lnSpc>
-              <a:buNone/>
-            </a:pPr>
-            <a:r>
-              <a:rPr lang="fr-CA" sz="2000" dirty="0" err="1">
-                <a:solidFill>
-                  <a:schemeClr val="bg1">
-                    <a:lumMod val="50000"/>
-                  </a:schemeClr>
-                </a:solidFill>
-                <a:latin typeface="Consolas" panose="020B0609020204030204" pitchFamily="49" charset="0"/>
-              </a:rPr>
-              <a:t>Saissez</a:t>
-            </a:r>
-            <a:r>
-              <a:rPr lang="fr-CA" sz="2000" dirty="0">
-                <a:solidFill>
-                  <a:schemeClr val="bg1">
-                    <a:lumMod val="50000"/>
-                  </a:schemeClr>
-                </a:solidFill>
-                <a:latin typeface="Consolas" panose="020B0609020204030204" pitchFamily="49" charset="0"/>
-              </a:rPr>
-              <a:t> une valeur (rien pour quitter): 1</a:t>
-            </a:r>
-          </a:p>
-          <a:p>
-            <a:pPr marL="457200" lvl="1" indent="0" algn="just">
-              <a:lnSpc>
-                <a:spcPct val="100000"/>
-              </a:lnSpc>
-              <a:buNone/>
-            </a:pPr>
-            <a:r>
-              <a:rPr lang="fr-CA" sz="2000" dirty="0" err="1">
-                <a:solidFill>
-                  <a:schemeClr val="bg1">
-                    <a:lumMod val="50000"/>
-                  </a:schemeClr>
-                </a:solidFill>
-                <a:latin typeface="Consolas" panose="020B0609020204030204" pitchFamily="49" charset="0"/>
-              </a:rPr>
-              <a:t>Saissez</a:t>
-            </a:r>
-            <a:r>
-              <a:rPr lang="fr-CA" sz="2000" dirty="0">
-                <a:solidFill>
-                  <a:schemeClr val="bg1">
-                    <a:lumMod val="50000"/>
-                  </a:schemeClr>
-                </a:solidFill>
-                <a:latin typeface="Consolas" panose="020B0609020204030204" pitchFamily="49" charset="0"/>
-              </a:rPr>
-              <a:t> une valeur (rien pour quitter): 2</a:t>
-            </a:r>
-          </a:p>
-          <a:p>
-            <a:pPr marL="457200" lvl="1" indent="0" algn="just">
-              <a:lnSpc>
-                <a:spcPct val="100000"/>
-              </a:lnSpc>
-              <a:buNone/>
-            </a:pPr>
-            <a:r>
-              <a:rPr lang="fr-CA" sz="2000" dirty="0" err="1">
-                <a:solidFill>
-                  <a:schemeClr val="bg1">
-                    <a:lumMod val="50000"/>
-                  </a:schemeClr>
-                </a:solidFill>
-                <a:latin typeface="Consolas" panose="020B0609020204030204" pitchFamily="49" charset="0"/>
-              </a:rPr>
-              <a:t>Saissez</a:t>
-            </a:r>
-            <a:r>
-              <a:rPr lang="fr-CA" sz="2000" dirty="0">
-                <a:solidFill>
-                  <a:schemeClr val="bg1">
-                    <a:lumMod val="50000"/>
-                  </a:schemeClr>
-                </a:solidFill>
-                <a:latin typeface="Consolas" panose="020B0609020204030204" pitchFamily="49" charset="0"/>
-              </a:rPr>
-              <a:t> une valeur (rien pour quitter): 3</a:t>
-            </a:r>
-          </a:p>
-          <a:p>
-            <a:pPr marL="457200" lvl="1" indent="0" algn="just">
-              <a:lnSpc>
-                <a:spcPct val="100000"/>
-              </a:lnSpc>
-              <a:buNone/>
-            </a:pPr>
-            <a:r>
-              <a:rPr lang="fr-CA" sz="2000" dirty="0" err="1">
-                <a:solidFill>
-                  <a:schemeClr val="bg1">
-                    <a:lumMod val="50000"/>
-                  </a:schemeClr>
-                </a:solidFill>
-                <a:latin typeface="Consolas" panose="020B0609020204030204" pitchFamily="49" charset="0"/>
-              </a:rPr>
-              <a:t>Saissez</a:t>
-            </a:r>
-            <a:r>
-              <a:rPr lang="fr-CA" sz="2000" dirty="0">
-                <a:solidFill>
-                  <a:schemeClr val="bg1">
-                    <a:lumMod val="50000"/>
-                  </a:schemeClr>
-                </a:solidFill>
-                <a:latin typeface="Consolas" panose="020B0609020204030204" pitchFamily="49" charset="0"/>
-              </a:rPr>
-              <a:t> une valeur (rien pour quitter): 4</a:t>
-            </a:r>
-          </a:p>
-          <a:p>
-            <a:pPr marL="457200" lvl="1" indent="0" algn="just">
-              <a:lnSpc>
-                <a:spcPct val="100000"/>
-              </a:lnSpc>
-              <a:buNone/>
-            </a:pPr>
-            <a:r>
-              <a:rPr lang="fr-CA" sz="2000" dirty="0" err="1">
-                <a:solidFill>
-                  <a:schemeClr val="bg1">
-                    <a:lumMod val="50000"/>
-                  </a:schemeClr>
-                </a:solidFill>
-                <a:latin typeface="Consolas" panose="020B0609020204030204" pitchFamily="49" charset="0"/>
-              </a:rPr>
-              <a:t>Saissez</a:t>
-            </a:r>
-            <a:r>
-              <a:rPr lang="fr-CA" sz="2000" dirty="0">
-                <a:solidFill>
-                  <a:schemeClr val="bg1">
-                    <a:lumMod val="50000"/>
-                  </a:schemeClr>
-                </a:solidFill>
-                <a:latin typeface="Consolas" panose="020B0609020204030204" pitchFamily="49" charset="0"/>
-              </a:rPr>
-              <a:t> une valeur (rien pour quitter): 5</a:t>
-            </a:r>
-          </a:p>
-          <a:p>
-            <a:pPr marL="457200" lvl="1" indent="0" algn="just">
-              <a:lnSpc>
-                <a:spcPct val="100000"/>
-              </a:lnSpc>
-              <a:buNone/>
-            </a:pPr>
-            <a:r>
-              <a:rPr lang="fr-CA" sz="2000" dirty="0" err="1">
-                <a:solidFill>
-                  <a:schemeClr val="bg1">
-                    <a:lumMod val="50000"/>
-                  </a:schemeClr>
-                </a:solidFill>
-                <a:latin typeface="Consolas" panose="020B0609020204030204" pitchFamily="49" charset="0"/>
-              </a:rPr>
-              <a:t>Saissez</a:t>
-            </a:r>
-            <a:r>
-              <a:rPr lang="fr-CA" sz="2000" dirty="0">
-                <a:solidFill>
-                  <a:schemeClr val="bg1">
-                    <a:lumMod val="50000"/>
-                  </a:schemeClr>
-                </a:solidFill>
-                <a:latin typeface="Consolas" panose="020B0609020204030204" pitchFamily="49" charset="0"/>
-              </a:rPr>
-              <a:t> une valeur (rien pour quitter): </a:t>
-            </a:r>
-          </a:p>
-          <a:p>
-            <a:pPr marL="457200" lvl="1" indent="0" algn="just">
-              <a:lnSpc>
-                <a:spcPct val="100000"/>
-              </a:lnSpc>
-              <a:buNone/>
-            </a:pPr>
-            <a:r>
-              <a:rPr lang="fr-CA" sz="2000" dirty="0">
-                <a:solidFill>
-                  <a:schemeClr val="bg1">
-                    <a:lumMod val="50000"/>
-                  </a:schemeClr>
-                </a:solidFill>
-                <a:latin typeface="Consolas" panose="020B0609020204030204" pitchFamily="49" charset="0"/>
-              </a:rPr>
-              <a:t>Moyenne    : 3.0</a:t>
-            </a:r>
-          </a:p>
-          <a:p>
-            <a:pPr marL="457200" lvl="1" indent="0" algn="just">
-              <a:lnSpc>
-                <a:spcPct val="100000"/>
-              </a:lnSpc>
-              <a:buNone/>
-            </a:pPr>
-            <a:r>
-              <a:rPr lang="en-US" sz="2000" dirty="0" err="1">
-                <a:solidFill>
-                  <a:schemeClr val="bg1">
-                    <a:lumMod val="50000"/>
-                  </a:schemeClr>
-                </a:solidFill>
-                <a:latin typeface="Consolas" panose="020B0609020204030204" pitchFamily="49" charset="0"/>
-              </a:rPr>
-              <a:t>Écart</a:t>
-            </a:r>
-            <a:r>
-              <a:rPr lang="en-US" sz="2000" dirty="0">
-                <a:solidFill>
-                  <a:schemeClr val="bg1">
-                    <a:lumMod val="50000"/>
-                  </a:schemeClr>
-                </a:solidFill>
-                <a:latin typeface="Consolas" panose="020B0609020204030204" pitchFamily="49" charset="0"/>
-              </a:rPr>
-              <a:t>-type : 1.41420135623730951</a:t>
-            </a:r>
-            <a:endParaRPr lang="fr-CA" sz="2000" dirty="0">
-              <a:solidFill>
-                <a:schemeClr val="bg1">
-                  <a:lumMod val="50000"/>
-                </a:schemeClr>
-              </a:solidFill>
-              <a:latin typeface="Consolas" panose="020B0609020204030204" pitchFamily="49" charset="0"/>
-            </a:endParaRPr>
-          </a:p>
-        </p:txBody>
-      </p:sp>
-      <p:sp>
-        <p:nvSpPr>
-          <p:cNvPr id="4" name="Slide Number Placeholder 3">
-            <a:extLst>
-              <a:ext uri="{FF2B5EF4-FFF2-40B4-BE49-F238E27FC236}">
-                <a16:creationId xmlns:a16="http://schemas.microsoft.com/office/drawing/2014/main" id="{C73E7699-9260-2B26-4E4F-F82743E2161A}"/>
-              </a:ext>
-            </a:extLst>
-          </p:cNvPr>
-          <p:cNvSpPr>
-            <a:spLocks noGrp="1"/>
-          </p:cNvSpPr>
-          <p:nvPr>
-            <p:ph type="sldNum" sz="quarter" idx="12"/>
-          </p:nvPr>
-        </p:nvSpPr>
-        <p:spPr/>
-        <p:txBody>
-          <a:bodyPr/>
-          <a:lstStyle/>
-          <a:p>
-            <a:fld id="{846B06B1-1179-491F-A487-8E0C403F7C13}" type="slidenum">
-              <a:rPr lang="fr-CA" smtClean="0"/>
-              <a:t>39</a:t>
-            </a:fld>
-            <a:endParaRPr lang="fr-CA"/>
-          </a:p>
-        </p:txBody>
-      </p:sp>
-    </p:spTree>
-    <p:extLst>
-      <p:ext uri="{BB962C8B-B14F-4D97-AF65-F5344CB8AC3E}">
-        <p14:creationId xmlns:p14="http://schemas.microsoft.com/office/powerpoint/2010/main" val="1553947036"/>
-      </p:ext>
-    </p:extLst>
-  </p:cSld>
-  <p:clrMapOvr>
-    <a:masterClrMapping/>
-  </p:clrMapOvr>
 </p:sld>
 </file>
 
@@ -39698,6 +40043,466 @@
     <p:extLst>
       <p:ext uri="{BB962C8B-B14F-4D97-AF65-F5344CB8AC3E}">
         <p14:creationId xmlns:p14="http://schemas.microsoft.com/office/powerpoint/2010/main" val="947172890"/>
+      </p:ext>
+    </p:extLst>
+  </p:cSld>
+  <p:clrMapOvr>
+    <a:masterClrMapping/>
+  </p:clrMapOvr>
+</p:sld>
+</file>
+
+<file path=ppt/slides/slide40.xml><?xml version="1.0" encoding="utf-8"?>
+<p:sld xmlns:a="http://schemas.openxmlformats.org/drawingml/2006/main" xmlns:r="http://schemas.openxmlformats.org/officeDocument/2006/relationships" xmlns:p="http://schemas.openxmlformats.org/presentationml/2006/main">
+  <p:cSld>
+    <p:bg>
+      <p:bgPr>
+        <a:solidFill>
+          <a:schemeClr val="accent6">
+            <a:lumMod val="20000"/>
+            <a:lumOff val="80000"/>
+          </a:schemeClr>
+        </a:solidFill>
+        <a:effectLst/>
+      </p:bgPr>
+    </p:bg>
+    <p:spTree>
+      <p:nvGrpSpPr>
+        <p:cNvPr id="1" name="">
+          <a:extLst>
+            <a:ext uri="{FF2B5EF4-FFF2-40B4-BE49-F238E27FC236}">
+              <a16:creationId xmlns:a16="http://schemas.microsoft.com/office/drawing/2014/main" id="{808E75C2-6E05-D4AE-5915-518C66CDFFB4}"/>
+            </a:ext>
+          </a:extLst>
+        </p:cNvPr>
+        <p:cNvGrpSpPr/>
+        <p:nvPr/>
+      </p:nvGrpSpPr>
+      <p:grpSpPr>
+        <a:xfrm>
+          <a:off x="0" y="0"/>
+          <a:ext cx="0" cy="0"/>
+          <a:chOff x="0" y="0"/>
+          <a:chExt cx="0" cy="0"/>
+        </a:xfrm>
+      </p:grpSpPr>
+      <p:sp>
+        <p:nvSpPr>
+          <p:cNvPr id="2" name="Title 1">
+            <a:extLst>
+              <a:ext uri="{FF2B5EF4-FFF2-40B4-BE49-F238E27FC236}">
+                <a16:creationId xmlns:a16="http://schemas.microsoft.com/office/drawing/2014/main" id="{DFCE78E3-6E2F-2513-0701-01EE22E72B4D}"/>
+              </a:ext>
+            </a:extLst>
+          </p:cNvPr>
+          <p:cNvSpPr>
+            <a:spLocks noGrp="1"/>
+          </p:cNvSpPr>
+          <p:nvPr>
+            <p:ph type="title"/>
+          </p:nvPr>
+        </p:nvSpPr>
+        <p:spPr/>
+        <p:txBody>
+          <a:bodyPr/>
+          <a:lstStyle/>
+          <a:p>
+            <a:r>
+              <a:rPr lang="en-US" dirty="0">
+                <a:latin typeface="Arial Rounded MT Bold" panose="020F0704030504030204" pitchFamily="34" charset="0"/>
+              </a:rPr>
+              <a:t>XR6 – Moyenne et </a:t>
+            </a:r>
+            <a:r>
+              <a:rPr lang="en-US" dirty="0" err="1">
+                <a:latin typeface="Arial Rounded MT Bold" panose="020F0704030504030204" pitchFamily="34" charset="0"/>
+              </a:rPr>
+              <a:t>écart</a:t>
+            </a:r>
+            <a:r>
+              <a:rPr lang="en-US" dirty="0">
+                <a:latin typeface="Arial Rounded MT Bold" panose="020F0704030504030204" pitchFamily="34" charset="0"/>
+              </a:rPr>
+              <a:t>-type</a:t>
+            </a:r>
+            <a:endParaRPr lang="fr-CA" dirty="0">
+              <a:latin typeface="Arial Rounded MT Bold" panose="020F0704030504030204" pitchFamily="34" charset="0"/>
+            </a:endParaRPr>
+          </a:p>
+        </p:txBody>
+      </p:sp>
+      <p:sp>
+        <p:nvSpPr>
+          <p:cNvPr id="3" name="Content Placeholder 2">
+            <a:extLst>
+              <a:ext uri="{FF2B5EF4-FFF2-40B4-BE49-F238E27FC236}">
+                <a16:creationId xmlns:a16="http://schemas.microsoft.com/office/drawing/2014/main" id="{E5BFA73A-5F16-C1DB-89AE-EB491A024297}"/>
+              </a:ext>
+            </a:extLst>
+          </p:cNvPr>
+          <p:cNvSpPr>
+            <a:spLocks noGrp="1"/>
+          </p:cNvSpPr>
+          <p:nvPr>
+            <p:ph idx="1"/>
+          </p:nvPr>
+        </p:nvSpPr>
+        <p:spPr/>
+        <p:txBody>
+          <a:bodyPr>
+            <a:normAutofit/>
+          </a:bodyPr>
+          <a:lstStyle/>
+          <a:p>
+            <a:pPr marL="0" indent="0" algn="just">
+              <a:lnSpc>
+                <a:spcPct val="100000"/>
+              </a:lnSpc>
+              <a:buNone/>
+            </a:pPr>
+            <a:r>
+              <a:rPr lang="en-US" sz="2200" dirty="0" err="1">
+                <a:latin typeface="Consolas" panose="020B0609020204030204" pitchFamily="49" charset="0"/>
+              </a:rPr>
+              <a:t>Implémentez</a:t>
+            </a:r>
+            <a:r>
+              <a:rPr lang="en-US" sz="2200" dirty="0">
+                <a:latin typeface="Consolas" panose="020B0609020204030204" pitchFamily="49" charset="0"/>
+              </a:rPr>
+              <a:t> la function </a:t>
+            </a:r>
+            <a:r>
+              <a:rPr lang="en-US" sz="2200" b="1" dirty="0" err="1">
+                <a:latin typeface="Consolas" panose="020B0609020204030204" pitchFamily="49" charset="0"/>
+              </a:rPr>
+              <a:t>afficher_moyenne_ecart_type</a:t>
+            </a:r>
+            <a:r>
+              <a:rPr lang="en-US" sz="2200" b="1" dirty="0">
+                <a:latin typeface="Consolas" panose="020B0609020204030204" pitchFamily="49" charset="0"/>
+              </a:rPr>
+              <a:t> </a:t>
+            </a:r>
+            <a:r>
+              <a:rPr lang="en-US" sz="2200" dirty="0">
+                <a:latin typeface="Consolas" panose="020B0609020204030204" pitchFamily="49" charset="0"/>
+              </a:rPr>
+              <a:t>qui suit:</a:t>
+            </a:r>
+          </a:p>
+          <a:p>
+            <a:pPr marL="0" indent="0" algn="just">
+              <a:lnSpc>
+                <a:spcPct val="100000"/>
+              </a:lnSpc>
+              <a:buNone/>
+            </a:pPr>
+            <a:endParaRPr lang="en-US" sz="200" dirty="0">
+              <a:latin typeface="Consolas" panose="020B0609020204030204" pitchFamily="49" charset="0"/>
+            </a:endParaRPr>
+          </a:p>
+          <a:p>
+            <a:pPr marL="457200" lvl="1" indent="0" algn="just">
+              <a:lnSpc>
+                <a:spcPct val="100000"/>
+              </a:lnSpc>
+              <a:buNone/>
+            </a:pPr>
+            <a:r>
+              <a:rPr lang="fr-CA" sz="2000" b="1" dirty="0">
+                <a:latin typeface="Consolas" panose="020B0609020204030204" pitchFamily="49" charset="0"/>
+              </a:rPr>
+              <a:t>&gt;&gt;&gt; </a:t>
+            </a:r>
+            <a:r>
+              <a:rPr lang="fr-CA" sz="2000" b="1" dirty="0" err="1">
+                <a:latin typeface="Consolas" panose="020B0609020204030204" pitchFamily="49" charset="0"/>
+              </a:rPr>
+              <a:t>afficher_moyenne_ecart_type</a:t>
+            </a:r>
+            <a:r>
+              <a:rPr lang="fr-CA" sz="2000" b="1">
+                <a:latin typeface="Consolas" panose="020B0609020204030204" pitchFamily="49" charset="0"/>
+              </a:rPr>
+              <a:t>()</a:t>
+            </a:r>
+            <a:endParaRPr lang="fr-CA" sz="2000" b="1" dirty="0">
+              <a:latin typeface="Consolas" panose="020B0609020204030204" pitchFamily="49" charset="0"/>
+            </a:endParaRPr>
+          </a:p>
+          <a:p>
+            <a:pPr marL="457200" lvl="1" indent="0" algn="just">
+              <a:lnSpc>
+                <a:spcPct val="100000"/>
+              </a:lnSpc>
+              <a:buNone/>
+            </a:pPr>
+            <a:r>
+              <a:rPr lang="fr-CA" sz="2000" dirty="0" err="1">
+                <a:solidFill>
+                  <a:schemeClr val="bg1">
+                    <a:lumMod val="50000"/>
+                  </a:schemeClr>
+                </a:solidFill>
+                <a:latin typeface="Consolas" panose="020B0609020204030204" pitchFamily="49" charset="0"/>
+              </a:rPr>
+              <a:t>Saissez</a:t>
+            </a:r>
+            <a:r>
+              <a:rPr lang="fr-CA" sz="2000" dirty="0">
+                <a:solidFill>
+                  <a:schemeClr val="bg1">
+                    <a:lumMod val="50000"/>
+                  </a:schemeClr>
+                </a:solidFill>
+                <a:latin typeface="Consolas" panose="020B0609020204030204" pitchFamily="49" charset="0"/>
+              </a:rPr>
+              <a:t> une valeur (rien pour quitter): 1</a:t>
+            </a:r>
+          </a:p>
+          <a:p>
+            <a:pPr marL="457200" lvl="1" indent="0" algn="just">
+              <a:lnSpc>
+                <a:spcPct val="100000"/>
+              </a:lnSpc>
+              <a:buNone/>
+            </a:pPr>
+            <a:r>
+              <a:rPr lang="fr-CA" sz="2000" dirty="0" err="1">
+                <a:solidFill>
+                  <a:schemeClr val="bg1">
+                    <a:lumMod val="50000"/>
+                  </a:schemeClr>
+                </a:solidFill>
+                <a:latin typeface="Consolas" panose="020B0609020204030204" pitchFamily="49" charset="0"/>
+              </a:rPr>
+              <a:t>Saissez</a:t>
+            </a:r>
+            <a:r>
+              <a:rPr lang="fr-CA" sz="2000" dirty="0">
+                <a:solidFill>
+                  <a:schemeClr val="bg1">
+                    <a:lumMod val="50000"/>
+                  </a:schemeClr>
+                </a:solidFill>
+                <a:latin typeface="Consolas" panose="020B0609020204030204" pitchFamily="49" charset="0"/>
+              </a:rPr>
+              <a:t> une valeur (rien pour quitter): 2</a:t>
+            </a:r>
+          </a:p>
+          <a:p>
+            <a:pPr marL="457200" lvl="1" indent="0" algn="just">
+              <a:lnSpc>
+                <a:spcPct val="100000"/>
+              </a:lnSpc>
+              <a:buNone/>
+            </a:pPr>
+            <a:r>
+              <a:rPr lang="fr-CA" sz="2000" dirty="0" err="1">
+                <a:solidFill>
+                  <a:schemeClr val="bg1">
+                    <a:lumMod val="50000"/>
+                  </a:schemeClr>
+                </a:solidFill>
+                <a:latin typeface="Consolas" panose="020B0609020204030204" pitchFamily="49" charset="0"/>
+              </a:rPr>
+              <a:t>Saissez</a:t>
+            </a:r>
+            <a:r>
+              <a:rPr lang="fr-CA" sz="2000" dirty="0">
+                <a:solidFill>
+                  <a:schemeClr val="bg1">
+                    <a:lumMod val="50000"/>
+                  </a:schemeClr>
+                </a:solidFill>
+                <a:latin typeface="Consolas" panose="020B0609020204030204" pitchFamily="49" charset="0"/>
+              </a:rPr>
+              <a:t> une valeur (rien pour quitter): 3</a:t>
+            </a:r>
+          </a:p>
+          <a:p>
+            <a:pPr marL="457200" lvl="1" indent="0" algn="just">
+              <a:lnSpc>
+                <a:spcPct val="100000"/>
+              </a:lnSpc>
+              <a:buNone/>
+            </a:pPr>
+            <a:r>
+              <a:rPr lang="fr-CA" sz="2000" dirty="0" err="1">
+                <a:solidFill>
+                  <a:schemeClr val="bg1">
+                    <a:lumMod val="50000"/>
+                  </a:schemeClr>
+                </a:solidFill>
+                <a:latin typeface="Consolas" panose="020B0609020204030204" pitchFamily="49" charset="0"/>
+              </a:rPr>
+              <a:t>Saissez</a:t>
+            </a:r>
+            <a:r>
+              <a:rPr lang="fr-CA" sz="2000" dirty="0">
+                <a:solidFill>
+                  <a:schemeClr val="bg1">
+                    <a:lumMod val="50000"/>
+                  </a:schemeClr>
+                </a:solidFill>
+                <a:latin typeface="Consolas" panose="020B0609020204030204" pitchFamily="49" charset="0"/>
+              </a:rPr>
+              <a:t> une valeur (rien pour quitter): 4</a:t>
+            </a:r>
+          </a:p>
+          <a:p>
+            <a:pPr marL="457200" lvl="1" indent="0" algn="just">
+              <a:lnSpc>
+                <a:spcPct val="100000"/>
+              </a:lnSpc>
+              <a:buNone/>
+            </a:pPr>
+            <a:r>
+              <a:rPr lang="fr-CA" sz="2000" dirty="0" err="1">
+                <a:solidFill>
+                  <a:schemeClr val="bg1">
+                    <a:lumMod val="50000"/>
+                  </a:schemeClr>
+                </a:solidFill>
+                <a:latin typeface="Consolas" panose="020B0609020204030204" pitchFamily="49" charset="0"/>
+              </a:rPr>
+              <a:t>Saissez</a:t>
+            </a:r>
+            <a:r>
+              <a:rPr lang="fr-CA" sz="2000" dirty="0">
+                <a:solidFill>
+                  <a:schemeClr val="bg1">
+                    <a:lumMod val="50000"/>
+                  </a:schemeClr>
+                </a:solidFill>
+                <a:latin typeface="Consolas" panose="020B0609020204030204" pitchFamily="49" charset="0"/>
+              </a:rPr>
+              <a:t> une valeur (rien pour quitter): 5</a:t>
+            </a:r>
+          </a:p>
+          <a:p>
+            <a:pPr marL="457200" lvl="1" indent="0" algn="just">
+              <a:lnSpc>
+                <a:spcPct val="100000"/>
+              </a:lnSpc>
+              <a:buNone/>
+            </a:pPr>
+            <a:r>
+              <a:rPr lang="fr-CA" sz="2000" dirty="0" err="1">
+                <a:solidFill>
+                  <a:schemeClr val="bg1">
+                    <a:lumMod val="50000"/>
+                  </a:schemeClr>
+                </a:solidFill>
+                <a:latin typeface="Consolas" panose="020B0609020204030204" pitchFamily="49" charset="0"/>
+              </a:rPr>
+              <a:t>Saissez</a:t>
+            </a:r>
+            <a:r>
+              <a:rPr lang="fr-CA" sz="2000" dirty="0">
+                <a:solidFill>
+                  <a:schemeClr val="bg1">
+                    <a:lumMod val="50000"/>
+                  </a:schemeClr>
+                </a:solidFill>
+                <a:latin typeface="Consolas" panose="020B0609020204030204" pitchFamily="49" charset="0"/>
+              </a:rPr>
+              <a:t> une valeur (rien pour quitter): </a:t>
+            </a:r>
+          </a:p>
+          <a:p>
+            <a:pPr marL="457200" lvl="1" indent="0" algn="just">
+              <a:lnSpc>
+                <a:spcPct val="100000"/>
+              </a:lnSpc>
+              <a:buNone/>
+            </a:pPr>
+            <a:r>
+              <a:rPr lang="fr-CA" sz="2000" dirty="0">
+                <a:solidFill>
+                  <a:schemeClr val="bg1">
+                    <a:lumMod val="50000"/>
+                  </a:schemeClr>
+                </a:solidFill>
+                <a:latin typeface="Consolas" panose="020B0609020204030204" pitchFamily="49" charset="0"/>
+              </a:rPr>
+              <a:t>Moyenne    : 3.0</a:t>
+            </a:r>
+          </a:p>
+          <a:p>
+            <a:pPr marL="457200" lvl="1" indent="0" algn="just">
+              <a:lnSpc>
+                <a:spcPct val="100000"/>
+              </a:lnSpc>
+              <a:buNone/>
+            </a:pPr>
+            <a:r>
+              <a:rPr lang="en-US" sz="2000" dirty="0" err="1">
+                <a:solidFill>
+                  <a:schemeClr val="bg1">
+                    <a:lumMod val="50000"/>
+                  </a:schemeClr>
+                </a:solidFill>
+                <a:latin typeface="Consolas" panose="020B0609020204030204" pitchFamily="49" charset="0"/>
+              </a:rPr>
+              <a:t>Écart</a:t>
+            </a:r>
+            <a:r>
+              <a:rPr lang="en-US" sz="2000" dirty="0">
+                <a:solidFill>
+                  <a:schemeClr val="bg1">
+                    <a:lumMod val="50000"/>
+                  </a:schemeClr>
+                </a:solidFill>
+                <a:latin typeface="Consolas" panose="020B0609020204030204" pitchFamily="49" charset="0"/>
+              </a:rPr>
+              <a:t>-type : 1.41420135623730951</a:t>
+            </a:r>
+            <a:endParaRPr lang="fr-CA" sz="2000" dirty="0">
+              <a:solidFill>
+                <a:schemeClr val="bg1">
+                  <a:lumMod val="50000"/>
+                </a:schemeClr>
+              </a:solidFill>
+              <a:latin typeface="Consolas" panose="020B0609020204030204" pitchFamily="49" charset="0"/>
+            </a:endParaRPr>
+          </a:p>
+        </p:txBody>
+      </p:sp>
+      <p:sp>
+        <p:nvSpPr>
+          <p:cNvPr id="4" name="Slide Number Placeholder 3">
+            <a:extLst>
+              <a:ext uri="{FF2B5EF4-FFF2-40B4-BE49-F238E27FC236}">
+                <a16:creationId xmlns:a16="http://schemas.microsoft.com/office/drawing/2014/main" id="{C73E7699-9260-2B26-4E4F-F82743E2161A}"/>
+              </a:ext>
+            </a:extLst>
+          </p:cNvPr>
+          <p:cNvSpPr>
+            <a:spLocks noGrp="1"/>
+          </p:cNvSpPr>
+          <p:nvPr>
+            <p:ph type="sldNum" sz="quarter" idx="12"/>
+          </p:nvPr>
+        </p:nvSpPr>
+        <p:spPr/>
+        <p:txBody>
+          <a:bodyPr/>
+          <a:lstStyle/>
+          <a:p>
+            <a:fld id="{846B06B1-1179-491F-A487-8E0C403F7C13}" type="slidenum">
+              <a:rPr lang="fr-CA" smtClean="0"/>
+              <a:t>40</a:t>
+            </a:fld>
+            <a:endParaRPr lang="fr-CA"/>
+          </a:p>
+        </p:txBody>
+      </p:sp>
+    </p:spTree>
+    <p:extLst>
+      <p:ext uri="{BB962C8B-B14F-4D97-AF65-F5344CB8AC3E}">
+        <p14:creationId xmlns:p14="http://schemas.microsoft.com/office/powerpoint/2010/main" val="1553947036"/>
       </p:ext>
     </p:extLst>
   </p:cSld>
@@ -42544,8 +43349,8 @@
           </a:p>
         </p:txBody>
       </p:sp>
-      <mc:AlternateContent xmlns:mc="http://schemas.openxmlformats.org/markup-compatibility/2006" xmlns:a14="http://schemas.microsoft.com/office/drawing/2010/main">
-        <mc:Choice Requires="a14">
+      <mc:AlternateContent xmlns:mc="http://schemas.openxmlformats.org/markup-compatibility/2006">
+        <mc:Choice xmlns:a14="http://schemas.microsoft.com/office/drawing/2010/main" Requires="a14">
           <p:sp>
             <p:nvSpPr>
               <p:cNvPr id="3" name="Content Placeholder 2">
@@ -42571,7 +43376,7 @@
               <a:p>
                 <a:pPr algn="just">
                   <a:lnSpc>
-                    <a:spcPct val="100000"/>
+                    <a:spcPct val="150000"/>
                   </a:lnSpc>
                 </a:pPr>
                 <a:r>
@@ -42630,7 +43435,7 @@
               <a:p>
                 <a:pPr algn="just">
                   <a:lnSpc>
-                    <a:spcPct val="100000"/>
+                    <a:spcPct val="150000"/>
                   </a:lnSpc>
                 </a:pPr>
                 <a:r>
@@ -42707,7 +43512,7 @@
               <a:p>
                 <a:pPr lvl="1" algn="just">
                   <a:lnSpc>
-                    <a:spcPct val="100000"/>
+                    <a:spcPct val="150000"/>
                   </a:lnSpc>
                 </a:pPr>
                 <a:r>
@@ -42732,7 +43537,7 @@
               <a:p>
                 <a:pPr lvl="1" algn="just">
                   <a:lnSpc>
-                    <a:spcPct val="100000"/>
+                    <a:spcPct val="150000"/>
                   </a:lnSpc>
                 </a:pPr>
                 <a:r>
@@ -42745,7 +43550,7 @@
             </p:txBody>
           </p:sp>
         </mc:Choice>
-        <mc:Fallback xmlns="">
+        <mc:Fallback>
           <p:sp>
             <p:nvSpPr>
               <p:cNvPr id="3" name="Content Placeholder 2">
@@ -42766,7 +43571,7 @@
               <a:blipFill>
                 <a:blip r:embed="rId2"/>
                 <a:stretch>
-                  <a:fillRect l="-406" t="-700" r="-464"/>
+                  <a:fillRect l="-406" r="-464"/>
                 </a:stretch>
               </a:blipFill>
             </p:spPr>

--- a/python_2/presentation_python_2.pptx
+++ b/python_2/presentation_python_2.pptx
@@ -5,7 +5,7 @@
     <p:sldMasterId id="2147483648" r:id="rId1"/>
   </p:sldMasterIdLst>
   <p:notesMasterIdLst>
-    <p:notesMasterId r:id="rId42"/>
+    <p:notesMasterId r:id="rId43"/>
   </p:notesMasterIdLst>
   <p:sldIdLst>
     <p:sldId id="256" r:id="rId2"/>
@@ -19,35 +19,36 @@
     <p:sldId id="303" r:id="rId10"/>
     <p:sldId id="304" r:id="rId11"/>
     <p:sldId id="305" r:id="rId12"/>
-    <p:sldId id="297" r:id="rId13"/>
-    <p:sldId id="294" r:id="rId14"/>
-    <p:sldId id="259" r:id="rId15"/>
-    <p:sldId id="263" r:id="rId16"/>
-    <p:sldId id="260" r:id="rId17"/>
-    <p:sldId id="261" r:id="rId18"/>
-    <p:sldId id="264" r:id="rId19"/>
-    <p:sldId id="265" r:id="rId20"/>
-    <p:sldId id="266" r:id="rId21"/>
-    <p:sldId id="268" r:id="rId22"/>
-    <p:sldId id="269" r:id="rId23"/>
-    <p:sldId id="271" r:id="rId24"/>
-    <p:sldId id="272" r:id="rId25"/>
-    <p:sldId id="273" r:id="rId26"/>
-    <p:sldId id="274" r:id="rId27"/>
-    <p:sldId id="275" r:id="rId28"/>
-    <p:sldId id="276" r:id="rId29"/>
-    <p:sldId id="277" r:id="rId30"/>
-    <p:sldId id="278" r:id="rId31"/>
-    <p:sldId id="282" r:id="rId32"/>
-    <p:sldId id="283" r:id="rId33"/>
-    <p:sldId id="280" r:id="rId34"/>
-    <p:sldId id="279" r:id="rId35"/>
-    <p:sldId id="288" r:id="rId36"/>
-    <p:sldId id="289" r:id="rId37"/>
-    <p:sldId id="292" r:id="rId38"/>
-    <p:sldId id="291" r:id="rId39"/>
-    <p:sldId id="281" r:id="rId40"/>
-    <p:sldId id="290" r:id="rId41"/>
+    <p:sldId id="306" r:id="rId13"/>
+    <p:sldId id="297" r:id="rId14"/>
+    <p:sldId id="294" r:id="rId15"/>
+    <p:sldId id="259" r:id="rId16"/>
+    <p:sldId id="263" r:id="rId17"/>
+    <p:sldId id="260" r:id="rId18"/>
+    <p:sldId id="261" r:id="rId19"/>
+    <p:sldId id="264" r:id="rId20"/>
+    <p:sldId id="265" r:id="rId21"/>
+    <p:sldId id="266" r:id="rId22"/>
+    <p:sldId id="268" r:id="rId23"/>
+    <p:sldId id="269" r:id="rId24"/>
+    <p:sldId id="271" r:id="rId25"/>
+    <p:sldId id="272" r:id="rId26"/>
+    <p:sldId id="273" r:id="rId27"/>
+    <p:sldId id="274" r:id="rId28"/>
+    <p:sldId id="275" r:id="rId29"/>
+    <p:sldId id="276" r:id="rId30"/>
+    <p:sldId id="277" r:id="rId31"/>
+    <p:sldId id="278" r:id="rId32"/>
+    <p:sldId id="282" r:id="rId33"/>
+    <p:sldId id="283" r:id="rId34"/>
+    <p:sldId id="280" r:id="rId35"/>
+    <p:sldId id="279" r:id="rId36"/>
+    <p:sldId id="288" r:id="rId37"/>
+    <p:sldId id="289" r:id="rId38"/>
+    <p:sldId id="292" r:id="rId39"/>
+    <p:sldId id="291" r:id="rId40"/>
+    <p:sldId id="281" r:id="rId41"/>
+    <p:sldId id="290" r:id="rId42"/>
   </p:sldIdLst>
   <p:sldSz cx="12192000" cy="6858000"/>
   <p:notesSz cx="6858000" cy="9144000"/>
@@ -823,6 +824,114 @@
     <p:extLst>
       <p:ext uri="{BB962C8B-B14F-4D97-AF65-F5344CB8AC3E}">
         <p14:creationId xmlns:p14="http://schemas.microsoft.com/office/powerpoint/2010/main" val="3236754325"/>
+      </p:ext>
+    </p:extLst>
+  </p:cSld>
+  <p:clrMapOvr>
+    <a:masterClrMapping/>
+  </p:clrMapOvr>
+</p:notes>
+</file>
+
+<file path=ppt/notesSlides/notesSlide4.xml><?xml version="1.0" encoding="utf-8"?>
+<p:notes xmlns:a="http://schemas.openxmlformats.org/drawingml/2006/main" xmlns:r="http://schemas.openxmlformats.org/officeDocument/2006/relationships" xmlns:p="http://schemas.openxmlformats.org/presentationml/2006/main">
+  <p:cSld>
+    <p:spTree>
+      <p:nvGrpSpPr>
+        <p:cNvPr id="1" name="">
+          <a:extLst>
+            <a:ext uri="{FF2B5EF4-FFF2-40B4-BE49-F238E27FC236}">
+              <a16:creationId xmlns:a16="http://schemas.microsoft.com/office/drawing/2014/main" id="{CF3D79F3-63E5-B2D6-5D89-59E61457B5BD}"/>
+            </a:ext>
+          </a:extLst>
+        </p:cNvPr>
+        <p:cNvGrpSpPr/>
+        <p:nvPr/>
+      </p:nvGrpSpPr>
+      <p:grpSpPr>
+        <a:xfrm>
+          <a:off x="0" y="0"/>
+          <a:ext cx="0" cy="0"/>
+          <a:chOff x="0" y="0"/>
+          <a:chExt cx="0" cy="0"/>
+        </a:xfrm>
+      </p:grpSpPr>
+      <p:sp>
+        <p:nvSpPr>
+          <p:cNvPr id="2" name="Slide Image Placeholder 1">
+            <a:extLst>
+              <a:ext uri="{FF2B5EF4-FFF2-40B4-BE49-F238E27FC236}">
+                <a16:creationId xmlns:a16="http://schemas.microsoft.com/office/drawing/2014/main" id="{83862951-762D-0BE9-75FA-6BF557626458}"/>
+              </a:ext>
+            </a:extLst>
+          </p:cNvPr>
+          <p:cNvSpPr>
+            <a:spLocks noGrp="1" noRot="1" noChangeAspect="1"/>
+          </p:cNvSpPr>
+          <p:nvPr>
+            <p:ph type="sldImg"/>
+          </p:nvPr>
+        </p:nvSpPr>
+        <p:spPr/>
+      </p:sp>
+      <p:sp>
+        <p:nvSpPr>
+          <p:cNvPr id="3" name="Notes Placeholder 2">
+            <a:extLst>
+              <a:ext uri="{FF2B5EF4-FFF2-40B4-BE49-F238E27FC236}">
+                <a16:creationId xmlns:a16="http://schemas.microsoft.com/office/drawing/2014/main" id="{90B919DA-030B-1C72-489E-77CC7EFF8512}"/>
+              </a:ext>
+            </a:extLst>
+          </p:cNvPr>
+          <p:cNvSpPr>
+            <a:spLocks noGrp="1"/>
+          </p:cNvSpPr>
+          <p:nvPr>
+            <p:ph type="body" idx="1"/>
+          </p:nvPr>
+        </p:nvSpPr>
+        <p:spPr/>
+        <p:txBody>
+          <a:bodyPr/>
+          <a:lstStyle/>
+          <a:p>
+            <a:endParaRPr lang="fr-CA" dirty="0"/>
+          </a:p>
+        </p:txBody>
+      </p:sp>
+      <p:sp>
+        <p:nvSpPr>
+          <p:cNvPr id="4" name="Slide Number Placeholder 3">
+            <a:extLst>
+              <a:ext uri="{FF2B5EF4-FFF2-40B4-BE49-F238E27FC236}">
+                <a16:creationId xmlns:a16="http://schemas.microsoft.com/office/drawing/2014/main" id="{1F543874-E567-7413-F27D-CAAEFA4A0474}"/>
+              </a:ext>
+            </a:extLst>
+          </p:cNvPr>
+          <p:cNvSpPr>
+            <a:spLocks noGrp="1"/>
+          </p:cNvSpPr>
+          <p:nvPr>
+            <p:ph type="sldNum" sz="quarter" idx="5"/>
+          </p:nvPr>
+        </p:nvSpPr>
+        <p:spPr/>
+        <p:txBody>
+          <a:bodyPr/>
+          <a:lstStyle/>
+          <a:p>
+            <a:fld id="{D755565A-1FEC-4FFE-8425-B731D92946D0}" type="slidenum">
+              <a:rPr lang="fr-CA" smtClean="0"/>
+              <a:t>12</a:t>
+            </a:fld>
+            <a:endParaRPr lang="fr-CA"/>
+          </a:p>
+        </p:txBody>
+      </p:sp>
+    </p:spTree>
+    <p:extLst>
+      <p:ext uri="{BB962C8B-B14F-4D97-AF65-F5344CB8AC3E}">
+        <p14:creationId xmlns:p14="http://schemas.microsoft.com/office/powerpoint/2010/main" val="746518704"/>
       </p:ext>
     </p:extLst>
   </p:cSld>
@@ -4707,22 +4816,46 @@
           <a:lstStyle/>
           <a:p>
             <a:r>
+              <a:rPr lang="en-US" dirty="0" err="1">
+                <a:latin typeface="Arial Rounded MT Bold" panose="020F0704030504030204" pitchFamily="34" charset="0"/>
+              </a:rPr>
+              <a:t>Ajouter</a:t>
+            </a:r>
+            <a:r>
               <a:rPr lang="en-US" dirty="0">
                 <a:latin typeface="Arial Rounded MT Bold" panose="020F0704030504030204" pitchFamily="34" charset="0"/>
               </a:rPr>
-              <a:t>Une </a:t>
+              <a:t> </a:t>
             </a:r>
             <a:r>
               <a:rPr lang="en-US" dirty="0" err="1">
                 <a:latin typeface="Arial Rounded MT Bold" panose="020F0704030504030204" pitchFamily="34" charset="0"/>
               </a:rPr>
-              <a:t>classe-contenant</a:t>
+              <a:t>une</a:t>
             </a:r>
             <a:r>
               <a:rPr lang="en-US" dirty="0">
                 <a:latin typeface="Arial Rounded MT Bold" panose="020F0704030504030204" pitchFamily="34" charset="0"/>
               </a:rPr>
-              <a:t> (2/2)</a:t>
+              <a:t> </a:t>
+            </a:r>
+            <a:r>
+              <a:rPr lang="en-US" dirty="0" err="1">
+                <a:latin typeface="Arial Rounded MT Bold" panose="020F0704030504030204" pitchFamily="34" charset="0"/>
+              </a:rPr>
+              <a:t>méthode</a:t>
+            </a:r>
+            <a:r>
+              <a:rPr lang="en-US" dirty="0">
+                <a:latin typeface="Arial Rounded MT Bold" panose="020F0704030504030204" pitchFamily="34" charset="0"/>
+              </a:rPr>
+              <a:t> </a:t>
+            </a:r>
+            <a:r>
+              <a:rPr lang="en-US" dirty="0" err="1">
+                <a:latin typeface="Arial Rounded MT Bold" panose="020F0704030504030204" pitchFamily="34" charset="0"/>
+              </a:rPr>
+              <a:t>publique</a:t>
             </a:r>
             <a:endParaRPr lang="fr-CA" dirty="0">
               <a:latin typeface="Arial Rounded MT Bold" panose="020F0704030504030204" pitchFamily="34" charset="0"/>
@@ -7460,6 +7593,1518 @@
     <p:bg>
       <p:bgPr>
         <a:solidFill>
+          <a:srgbClr val="F5F5F5"/>
+        </a:solidFill>
+        <a:effectLst/>
+      </p:bgPr>
+    </p:bg>
+    <p:spTree>
+      <p:nvGrpSpPr>
+        <p:cNvPr id="1" name="">
+          <a:extLst>
+            <a:ext uri="{FF2B5EF4-FFF2-40B4-BE49-F238E27FC236}">
+              <a16:creationId xmlns:a16="http://schemas.microsoft.com/office/drawing/2014/main" id="{349B0D3D-3AC9-09BB-1137-2151F4F45B5F}"/>
+            </a:ext>
+          </a:extLst>
+        </p:cNvPr>
+        <p:cNvGrpSpPr/>
+        <p:nvPr/>
+      </p:nvGrpSpPr>
+      <p:grpSpPr>
+        <a:xfrm>
+          <a:off x="0" y="0"/>
+          <a:ext cx="0" cy="0"/>
+          <a:chOff x="0" y="0"/>
+          <a:chExt cx="0" cy="0"/>
+        </a:xfrm>
+      </p:grpSpPr>
+      <p:sp>
+        <p:nvSpPr>
+          <p:cNvPr id="2" name="Title 1">
+            <a:extLst>
+              <a:ext uri="{FF2B5EF4-FFF2-40B4-BE49-F238E27FC236}">
+                <a16:creationId xmlns:a16="http://schemas.microsoft.com/office/drawing/2014/main" id="{26305D18-A601-129B-338A-6864F520C9A0}"/>
+              </a:ext>
+            </a:extLst>
+          </p:cNvPr>
+          <p:cNvSpPr>
+            <a:spLocks noGrp="1"/>
+          </p:cNvSpPr>
+          <p:nvPr>
+            <p:ph type="title"/>
+          </p:nvPr>
+        </p:nvSpPr>
+        <p:spPr/>
+        <p:txBody>
+          <a:bodyPr/>
+          <a:lstStyle/>
+          <a:p>
+            <a:r>
+              <a:rPr lang="en-US" dirty="0">
+                <a:latin typeface="Arial Rounded MT Bold" panose="020F0704030504030204" pitchFamily="34" charset="0"/>
+              </a:rPr>
+              <a:t> Objectif: </a:t>
+            </a:r>
+            <a:r>
+              <a:rPr lang="en-US" dirty="0" err="1">
+                <a:latin typeface="Arial Rounded MT Bold" panose="020F0704030504030204" pitchFamily="34" charset="0"/>
+              </a:rPr>
+              <a:t>Sérialisation</a:t>
+            </a:r>
+            <a:endParaRPr lang="fr-CA" dirty="0">
+              <a:latin typeface="Arial Rounded MT Bold" panose="020F0704030504030204" pitchFamily="34" charset="0"/>
+            </a:endParaRPr>
+          </a:p>
+        </p:txBody>
+      </p:sp>
+      <p:sp>
+        <p:nvSpPr>
+          <p:cNvPr id="3" name="Content Placeholder 2">
+            <a:extLst>
+              <a:ext uri="{FF2B5EF4-FFF2-40B4-BE49-F238E27FC236}">
+                <a16:creationId xmlns:a16="http://schemas.microsoft.com/office/drawing/2014/main" id="{325ACC13-074B-BA79-C892-C8B818D3509E}"/>
+              </a:ext>
+            </a:extLst>
+          </p:cNvPr>
+          <p:cNvSpPr>
+            <a:spLocks noGrp="1"/>
+          </p:cNvSpPr>
+          <p:nvPr>
+            <p:ph idx="1"/>
+          </p:nvPr>
+        </p:nvSpPr>
+        <p:spPr>
+          <a:xfrm>
+            <a:off x="838200" y="1818566"/>
+            <a:ext cx="10515600" cy="4351338"/>
+          </a:xfrm>
+        </p:spPr>
+        <p:txBody>
+          <a:bodyPr>
+            <a:normAutofit/>
+          </a:bodyPr>
+          <a:lstStyle/>
+          <a:p>
+            <a:pPr algn="just">
+              <a:lnSpc>
+                <a:spcPct val="110000"/>
+              </a:lnSpc>
+            </a:pPr>
+            <a:r>
+              <a:rPr lang="fr-CA" sz="1600" dirty="0">
+                <a:latin typeface="Consolas" panose="020B0609020204030204" pitchFamily="49" charset="0"/>
+              </a:rPr>
+              <a:t>Transformer une donnée en un format qui peut être </a:t>
+            </a:r>
+            <a:r>
+              <a:rPr lang="fr-CA" sz="1600" b="1" dirty="0">
+                <a:latin typeface="Consolas" panose="020B0609020204030204" pitchFamily="49" charset="0"/>
+              </a:rPr>
+              <a:t>stocké</a:t>
+            </a:r>
+            <a:r>
+              <a:rPr lang="fr-CA" sz="1600" dirty="0">
+                <a:latin typeface="Consolas" panose="020B0609020204030204" pitchFamily="49" charset="0"/>
+              </a:rPr>
+              <a:t>,</a:t>
+            </a:r>
+            <a:r>
+              <a:rPr lang="fr-CA" sz="1600" b="1" dirty="0">
+                <a:latin typeface="Consolas" panose="020B0609020204030204" pitchFamily="49" charset="0"/>
+              </a:rPr>
+              <a:t> lu</a:t>
+            </a:r>
+            <a:r>
+              <a:rPr lang="fr-CA" sz="1600" dirty="0">
+                <a:latin typeface="Consolas" panose="020B0609020204030204" pitchFamily="49" charset="0"/>
+              </a:rPr>
+              <a:t>,</a:t>
+            </a:r>
+            <a:r>
+              <a:rPr lang="fr-CA" sz="1600" b="1" dirty="0">
+                <a:latin typeface="Consolas" panose="020B0609020204030204" pitchFamily="49" charset="0"/>
+              </a:rPr>
+              <a:t> </a:t>
+            </a:r>
+            <a:r>
+              <a:rPr lang="fr-CA" sz="1600" dirty="0">
+                <a:latin typeface="Consolas" panose="020B0609020204030204" pitchFamily="49" charset="0"/>
+              </a:rPr>
+              <a:t>ou transmis.</a:t>
+            </a:r>
+            <a:endParaRPr lang="fr-CA" sz="1600" b="1" dirty="0">
+              <a:latin typeface="Consolas" panose="020B0609020204030204" pitchFamily="49" charset="0"/>
+            </a:endParaRPr>
+          </a:p>
+          <a:p>
+            <a:pPr algn="just">
+              <a:lnSpc>
+                <a:spcPct val="110000"/>
+              </a:lnSpc>
+            </a:pPr>
+            <a:endParaRPr lang="fr-CA" sz="1600" dirty="0">
+              <a:latin typeface="Consolas" panose="020B0609020204030204" pitchFamily="49" charset="0"/>
+            </a:endParaRPr>
+          </a:p>
+          <a:p>
+            <a:pPr algn="just">
+              <a:lnSpc>
+                <a:spcPct val="110000"/>
+              </a:lnSpc>
+            </a:pPr>
+            <a:endParaRPr lang="fr-CA" sz="1600" dirty="0">
+              <a:latin typeface="Consolas" panose="020B0609020204030204" pitchFamily="49" charset="0"/>
+            </a:endParaRPr>
+          </a:p>
+          <a:p>
+            <a:pPr algn="just">
+              <a:lnSpc>
+                <a:spcPct val="110000"/>
+              </a:lnSpc>
+            </a:pPr>
+            <a:endParaRPr lang="fr-CA" sz="1600" dirty="0">
+              <a:latin typeface="Consolas" panose="020B0609020204030204" pitchFamily="49" charset="0"/>
+            </a:endParaRPr>
+          </a:p>
+          <a:p>
+            <a:pPr marL="0" indent="0" algn="just">
+              <a:lnSpc>
+                <a:spcPct val="110000"/>
+              </a:lnSpc>
+              <a:buNone/>
+            </a:pPr>
+            <a:endParaRPr lang="fr-CA" sz="1600" dirty="0">
+              <a:latin typeface="Consolas" panose="020B0609020204030204" pitchFamily="49" charset="0"/>
+            </a:endParaRPr>
+          </a:p>
+          <a:p>
+            <a:pPr marL="0" indent="0" algn="just">
+              <a:lnSpc>
+                <a:spcPct val="110000"/>
+              </a:lnSpc>
+              <a:buNone/>
+            </a:pPr>
+            <a:endParaRPr lang="fr-CA" sz="1600" dirty="0">
+              <a:latin typeface="Consolas" panose="020B0609020204030204" pitchFamily="49" charset="0"/>
+            </a:endParaRPr>
+          </a:p>
+        </p:txBody>
+      </p:sp>
+      <p:sp>
+        <p:nvSpPr>
+          <p:cNvPr id="5" name="Slide Number Placeholder 4">
+            <a:extLst>
+              <a:ext uri="{FF2B5EF4-FFF2-40B4-BE49-F238E27FC236}">
+                <a16:creationId xmlns:a16="http://schemas.microsoft.com/office/drawing/2014/main" id="{2AAEFC53-61DD-074A-8C2C-EE22E3D2AB5A}"/>
+              </a:ext>
+            </a:extLst>
+          </p:cNvPr>
+          <p:cNvSpPr>
+            <a:spLocks noGrp="1"/>
+          </p:cNvSpPr>
+          <p:nvPr>
+            <p:ph type="sldNum" sz="quarter" idx="12"/>
+          </p:nvPr>
+        </p:nvSpPr>
+        <p:spPr/>
+        <p:txBody>
+          <a:bodyPr/>
+          <a:lstStyle/>
+          <a:p>
+            <a:fld id="{846B06B1-1179-491F-A487-8E0C403F7C13}" type="slidenum">
+              <a:rPr lang="fr-CA" smtClean="0"/>
+              <a:t>12</a:t>
+            </a:fld>
+            <a:endParaRPr lang="fr-CA" dirty="0"/>
+          </a:p>
+        </p:txBody>
+      </p:sp>
+      <p:grpSp>
+        <p:nvGrpSpPr>
+          <p:cNvPr id="7" name="Google Shape;354;p18">
+            <a:extLst>
+              <a:ext uri="{FF2B5EF4-FFF2-40B4-BE49-F238E27FC236}">
+                <a16:creationId xmlns:a16="http://schemas.microsoft.com/office/drawing/2014/main" id="{8825023E-43B5-5A8A-C41F-BE8F9889F402}"/>
+              </a:ext>
+            </a:extLst>
+          </p:cNvPr>
+          <p:cNvGrpSpPr/>
+          <p:nvPr/>
+        </p:nvGrpSpPr>
+        <p:grpSpPr>
+          <a:xfrm>
+            <a:off x="2769870" y="2777388"/>
+            <a:ext cx="6145530" cy="504002"/>
+            <a:chOff x="6682372" y="3766184"/>
+            <a:chExt cx="8984825" cy="230401"/>
+          </a:xfrm>
+        </p:grpSpPr>
+        <p:sp>
+          <p:nvSpPr>
+            <p:cNvPr id="8" name="Google Shape;355;p18">
+              <a:extLst>
+                <a:ext uri="{FF2B5EF4-FFF2-40B4-BE49-F238E27FC236}">
+                  <a16:creationId xmlns:a16="http://schemas.microsoft.com/office/drawing/2014/main" id="{89254535-9FE8-E261-4D96-E2078631ACC3}"/>
+                </a:ext>
+              </a:extLst>
+            </p:cNvPr>
+            <p:cNvSpPr/>
+            <p:nvPr/>
+          </p:nvSpPr>
+          <p:spPr>
+            <a:xfrm>
+              <a:off x="6682372" y="3766184"/>
+              <a:ext cx="256568" cy="230400"/>
+            </a:xfrm>
+            <a:prstGeom prst="rect">
+              <a:avLst/>
+            </a:prstGeom>
+            <a:solidFill>
+              <a:srgbClr val="7F7F7F"/>
+            </a:solidFill>
+            <a:ln w="12700" cap="flat" cmpd="sng">
+              <a:solidFill>
+                <a:schemeClr val="dk1"/>
+              </a:solidFill>
+              <a:prstDash val="solid"/>
+              <a:miter lim="800000"/>
+              <a:headEnd type="none" w="sm" len="sm"/>
+              <a:tailEnd type="none" w="sm" len="sm"/>
+            </a:ln>
+          </p:spPr>
+          <p:txBody>
+            <a:bodyPr spcFirstLastPara="1" wrap="square" lIns="91425" tIns="45700" rIns="91425" bIns="45700" anchor="ctr" anchorCtr="0">
+              <a:noAutofit/>
+            </a:bodyPr>
+            <a:lstStyle/>
+            <a:p>
+              <a:pPr marL="0" marR="0" lvl="0" indent="0" algn="ctr" rtl="0">
+                <a:spcBef>
+                  <a:spcPts val="0"/>
+                </a:spcBef>
+                <a:spcAft>
+                  <a:spcPts val="0"/>
+                </a:spcAft>
+                <a:buNone/>
+              </a:pPr>
+              <a:r>
+                <a:rPr lang="fr-CA" sz="1400" dirty="0">
+                  <a:solidFill>
+                    <a:schemeClr val="lt1"/>
+                  </a:solidFill>
+                  <a:latin typeface="Calibri"/>
+                  <a:ea typeface="Calibri"/>
+                  <a:cs typeface="Calibri"/>
+                  <a:sym typeface="Calibri"/>
+                </a:rPr>
+                <a:t>1</a:t>
+              </a:r>
+              <a:endParaRPr dirty="0"/>
+            </a:p>
+            <a:p>
+              <a:pPr marL="0" marR="0" lvl="0" indent="0" algn="ctr" rtl="0">
+                <a:spcBef>
+                  <a:spcPts val="0"/>
+                </a:spcBef>
+                <a:spcAft>
+                  <a:spcPts val="0"/>
+                </a:spcAft>
+                <a:buNone/>
+              </a:pPr>
+              <a:r>
+                <a:rPr lang="fr-CA" sz="1400" dirty="0">
+                  <a:solidFill>
+                    <a:schemeClr val="lt1"/>
+                  </a:solidFill>
+                  <a:latin typeface="Calibri"/>
+                  <a:ea typeface="Calibri"/>
+                  <a:cs typeface="Calibri"/>
+                  <a:sym typeface="Calibri"/>
+                </a:rPr>
+                <a:t>2</a:t>
+              </a:r>
+              <a:endParaRPr dirty="0"/>
+            </a:p>
+          </p:txBody>
+        </p:sp>
+        <p:sp>
+          <p:nvSpPr>
+            <p:cNvPr id="9" name="Google Shape;356;p18">
+              <a:extLst>
+                <a:ext uri="{FF2B5EF4-FFF2-40B4-BE49-F238E27FC236}">
+                  <a16:creationId xmlns:a16="http://schemas.microsoft.com/office/drawing/2014/main" id="{19CD6A01-5AEE-FA0D-B23B-0D32955A455B}"/>
+                </a:ext>
+              </a:extLst>
+            </p:cNvPr>
+            <p:cNvSpPr/>
+            <p:nvPr/>
+          </p:nvSpPr>
+          <p:spPr>
+            <a:xfrm>
+              <a:off x="6938940" y="3766185"/>
+              <a:ext cx="8728257" cy="230400"/>
+            </a:xfrm>
+            <a:prstGeom prst="rect">
+              <a:avLst/>
+            </a:prstGeom>
+            <a:solidFill>
+              <a:schemeClr val="dk1"/>
+            </a:solidFill>
+            <a:ln w="12700" cap="flat" cmpd="sng">
+              <a:solidFill>
+                <a:schemeClr val="dk1"/>
+              </a:solidFill>
+              <a:prstDash val="solid"/>
+              <a:miter lim="800000"/>
+              <a:headEnd type="none" w="sm" len="sm"/>
+              <a:tailEnd type="none" w="sm" len="sm"/>
+            </a:ln>
+          </p:spPr>
+          <p:txBody>
+            <a:bodyPr spcFirstLastPara="1" wrap="square" lIns="91425" tIns="45700" rIns="91425" bIns="45700" anchor="ctr" anchorCtr="0">
+              <a:noAutofit/>
+            </a:bodyPr>
+            <a:lstStyle/>
+            <a:p>
+              <a:r>
+                <a:rPr lang="en-CA" sz="1400" b="1" dirty="0">
+                  <a:solidFill>
+                    <a:schemeClr val="bg1"/>
+                  </a:solidFill>
+                  <a:latin typeface="Consolas" panose="020B0609020204030204" pitchFamily="49" charset="0"/>
+                </a:rPr>
+                <a:t>&gt;&gt;&gt; </a:t>
+              </a:r>
+              <a:r>
+                <a:rPr lang="en-CA" sz="1400" b="1" dirty="0" err="1">
+                  <a:solidFill>
+                    <a:schemeClr val="bg1"/>
+                  </a:solidFill>
+                  <a:latin typeface="Consolas" panose="020B0609020204030204" pitchFamily="49" charset="0"/>
+                </a:rPr>
+                <a:t>vecteur</a:t>
+              </a:r>
+              <a:r>
+                <a:rPr lang="en-CA" sz="1400" b="1" dirty="0">
+                  <a:solidFill>
+                    <a:schemeClr val="bg1"/>
+                  </a:solidFill>
+                  <a:latin typeface="Consolas" panose="020B0609020204030204" pitchFamily="49" charset="0"/>
+                </a:rPr>
+                <a:t> = </a:t>
+              </a:r>
+              <a:r>
+                <a:rPr lang="en-CA" sz="1400" b="1" dirty="0" err="1">
+                  <a:solidFill>
+                    <a:schemeClr val="bg1"/>
+                  </a:solidFill>
+                  <a:latin typeface="Consolas" panose="020B0609020204030204" pitchFamily="49" charset="0"/>
+                </a:rPr>
+                <a:t>Vecteur</a:t>
+              </a:r>
+              <a:r>
+                <a:rPr lang="en-CA" sz="1400" b="1" dirty="0">
+                  <a:solidFill>
+                    <a:schemeClr val="bg1"/>
+                  </a:solidFill>
+                  <a:latin typeface="Consolas" panose="020B0609020204030204" pitchFamily="49" charset="0"/>
+                </a:rPr>
+                <a:t>(1.0, 2.0, 3.0)</a:t>
+              </a:r>
+            </a:p>
+            <a:p>
+              <a:r>
+                <a:rPr lang="en-CA" sz="1400" b="1" dirty="0">
+                  <a:solidFill>
+                    <a:schemeClr val="bg1"/>
+                  </a:solidFill>
+                  <a:latin typeface="Consolas" panose="020B0609020204030204" pitchFamily="49" charset="0"/>
+                </a:rPr>
+                <a:t>&gt;&gt;&gt; </a:t>
+              </a:r>
+              <a:r>
+                <a:rPr lang="en-CA" sz="1400" b="1" dirty="0" err="1">
+                  <a:solidFill>
+                    <a:schemeClr val="bg1"/>
+                  </a:solidFill>
+                  <a:latin typeface="Consolas" panose="020B0609020204030204" pitchFamily="49" charset="0"/>
+                </a:rPr>
+                <a:t>vecteur.sauvegarder_txt</a:t>
+              </a:r>
+              <a:r>
+                <a:rPr lang="en-CA" sz="1400" b="1" dirty="0">
+                  <a:solidFill>
+                    <a:schemeClr val="bg1"/>
+                  </a:solidFill>
+                  <a:latin typeface="Consolas" panose="020B0609020204030204" pitchFamily="49" charset="0"/>
+                </a:rPr>
+                <a:t>('vecteur.txt')</a:t>
+              </a:r>
+              <a:endParaRPr lang="fr-CA" sz="1400" dirty="0">
+                <a:solidFill>
+                  <a:schemeClr val="bg1"/>
+                </a:solidFill>
+                <a:latin typeface="Consolas" panose="020B0609020204030204" pitchFamily="49" charset="0"/>
+              </a:endParaRPr>
+            </a:p>
+          </p:txBody>
+        </p:sp>
+      </p:grpSp>
+      <p:grpSp>
+        <p:nvGrpSpPr>
+          <p:cNvPr id="11" name="Group 10">
+            <a:extLst>
+              <a:ext uri="{FF2B5EF4-FFF2-40B4-BE49-F238E27FC236}">
+                <a16:creationId xmlns:a16="http://schemas.microsoft.com/office/drawing/2014/main" id="{E79A8146-A2F5-7F99-56AD-FC2942F02837}"/>
+              </a:ext>
+            </a:extLst>
+          </p:cNvPr>
+          <p:cNvGrpSpPr/>
+          <p:nvPr/>
+        </p:nvGrpSpPr>
+        <p:grpSpPr>
+          <a:xfrm>
+            <a:off x="2769870" y="3719159"/>
+            <a:ext cx="7856730" cy="369332"/>
+            <a:chOff x="2769870" y="3935569"/>
+            <a:chExt cx="7856730" cy="369332"/>
+          </a:xfrm>
+        </p:grpSpPr>
+        <p:grpSp>
+          <p:nvGrpSpPr>
+            <p:cNvPr id="35" name="Google Shape;368;p19">
+              <a:extLst>
+                <a:ext uri="{FF2B5EF4-FFF2-40B4-BE49-F238E27FC236}">
+                  <a16:creationId xmlns:a16="http://schemas.microsoft.com/office/drawing/2014/main" id="{3FA57D26-E172-7EBE-DCFF-4A8EF83A7843}"/>
+                </a:ext>
+              </a:extLst>
+            </p:cNvPr>
+            <p:cNvGrpSpPr/>
+            <p:nvPr/>
+          </p:nvGrpSpPr>
+          <p:grpSpPr>
+            <a:xfrm>
+              <a:off x="2769870" y="3994235"/>
+              <a:ext cx="6145530" cy="252000"/>
+              <a:chOff x="6665982" y="3766184"/>
+              <a:chExt cx="6710373" cy="1800000"/>
+            </a:xfrm>
+          </p:grpSpPr>
+          <p:sp>
+            <p:nvSpPr>
+              <p:cNvPr id="36" name="Google Shape;369;p19">
+                <a:extLst>
+                  <a:ext uri="{FF2B5EF4-FFF2-40B4-BE49-F238E27FC236}">
+                    <a16:creationId xmlns:a16="http://schemas.microsoft.com/office/drawing/2014/main" id="{587428AE-8C9B-89AF-9873-15F2825FEAD1}"/>
+                  </a:ext>
+                </a:extLst>
+              </p:cNvPr>
+              <p:cNvSpPr/>
+              <p:nvPr/>
+            </p:nvSpPr>
+            <p:spPr>
+              <a:xfrm>
+                <a:off x="6665982" y="3766184"/>
+                <a:ext cx="180000" cy="1800000"/>
+              </a:xfrm>
+              <a:prstGeom prst="rect">
+                <a:avLst/>
+              </a:prstGeom>
+              <a:solidFill>
+                <a:srgbClr val="7F7F7F"/>
+              </a:solidFill>
+              <a:ln w="12700" cap="flat" cmpd="sng">
+                <a:solidFill>
+                  <a:srgbClr val="7F7F7F"/>
+                </a:solidFill>
+                <a:prstDash val="solid"/>
+                <a:miter lim="800000"/>
+                <a:headEnd type="none" w="sm" len="sm"/>
+                <a:tailEnd type="none" w="sm" len="sm"/>
+              </a:ln>
+            </p:spPr>
+            <p:txBody>
+              <a:bodyPr spcFirstLastPara="1" wrap="square" lIns="91425" tIns="45700" rIns="91425" bIns="45700" anchor="ctr" anchorCtr="0">
+                <a:noAutofit/>
+              </a:bodyPr>
+              <a:lstStyle/>
+              <a:p>
+                <a:pPr marL="0" marR="0" lvl="0" indent="0" algn="ctr" rtl="0">
+                  <a:spcBef>
+                    <a:spcPts val="0"/>
+                  </a:spcBef>
+                  <a:spcAft>
+                    <a:spcPts val="0"/>
+                  </a:spcAft>
+                  <a:buNone/>
+                </a:pPr>
+                <a:r>
+                  <a:rPr lang="fr-CA" sz="1400" dirty="0">
+                    <a:solidFill>
+                      <a:schemeClr val="lt1"/>
+                    </a:solidFill>
+                    <a:latin typeface="Calibri"/>
+                    <a:ea typeface="Calibri"/>
+                    <a:cs typeface="Calibri"/>
+                    <a:sym typeface="Calibri"/>
+                  </a:rPr>
+                  <a:t>1</a:t>
+                </a:r>
+                <a:endParaRPr sz="1400" dirty="0">
+                  <a:solidFill>
+                    <a:schemeClr val="lt1"/>
+                  </a:solidFill>
+                  <a:latin typeface="Calibri"/>
+                  <a:ea typeface="Calibri"/>
+                  <a:cs typeface="Calibri"/>
+                  <a:sym typeface="Calibri"/>
+                </a:endParaRPr>
+              </a:p>
+            </p:txBody>
+          </p:sp>
+          <p:sp>
+            <p:nvSpPr>
+              <p:cNvPr id="37" name="Google Shape;370;p19">
+                <a:extLst>
+                  <a:ext uri="{FF2B5EF4-FFF2-40B4-BE49-F238E27FC236}">
+                    <a16:creationId xmlns:a16="http://schemas.microsoft.com/office/drawing/2014/main" id="{3B9BAC14-252C-A779-1104-0A37A53264BD}"/>
+                  </a:ext>
+                </a:extLst>
+              </p:cNvPr>
+              <p:cNvSpPr/>
+              <p:nvPr/>
+            </p:nvSpPr>
+            <p:spPr>
+              <a:xfrm>
+                <a:off x="6845982" y="3766184"/>
+                <a:ext cx="6530373" cy="1800000"/>
+              </a:xfrm>
+              <a:prstGeom prst="rect">
+                <a:avLst/>
+              </a:prstGeom>
+              <a:solidFill>
+                <a:schemeClr val="bg1"/>
+              </a:solidFill>
+              <a:ln w="12700" cap="flat" cmpd="sng">
+                <a:solidFill>
+                  <a:srgbClr val="7F7F7F"/>
+                </a:solidFill>
+                <a:prstDash val="solid"/>
+                <a:miter lim="800000"/>
+                <a:headEnd type="none" w="sm" len="sm"/>
+                <a:tailEnd type="none" w="sm" len="sm"/>
+              </a:ln>
+            </p:spPr>
+            <p:txBody>
+              <a:bodyPr spcFirstLastPara="1" wrap="square" lIns="91425" tIns="45700" rIns="91425" bIns="45700" anchor="ctr" anchorCtr="0">
+                <a:noAutofit/>
+              </a:bodyPr>
+              <a:lstStyle/>
+              <a:p>
+                <a:r>
+                  <a:rPr lang="fr-FR" sz="1400" b="1" dirty="0">
+                    <a:latin typeface="Consolas" panose="020B0609020204030204" pitchFamily="49" charset="0"/>
+                  </a:rPr>
+                  <a:t>1.0,2.0,3.0</a:t>
+                </a:r>
+                <a:endParaRPr lang="fr-FR" sz="1400" dirty="0">
+                  <a:latin typeface="Consolas" panose="020B0609020204030204" pitchFamily="49" charset="0"/>
+                </a:endParaRPr>
+              </a:p>
+            </p:txBody>
+          </p:sp>
+        </p:grpSp>
+        <p:sp>
+          <p:nvSpPr>
+            <p:cNvPr id="6" name="TextBox 5">
+              <a:extLst>
+                <a:ext uri="{FF2B5EF4-FFF2-40B4-BE49-F238E27FC236}">
+                  <a16:creationId xmlns:a16="http://schemas.microsoft.com/office/drawing/2014/main" id="{CEE8EA18-9871-4A22-D9BD-D44ACCF5BFB7}"/>
+                </a:ext>
+              </a:extLst>
+            </p:cNvPr>
+            <p:cNvSpPr txBox="1"/>
+            <p:nvPr/>
+          </p:nvSpPr>
+          <p:spPr>
+            <a:xfrm>
+              <a:off x="8915400" y="3935569"/>
+              <a:ext cx="1711200" cy="369332"/>
+            </a:xfrm>
+            <a:prstGeom prst="rect">
+              <a:avLst/>
+            </a:prstGeom>
+            <a:noFill/>
+          </p:spPr>
+          <p:txBody>
+            <a:bodyPr wrap="square">
+              <a:spAutoFit/>
+            </a:bodyPr>
+            <a:lstStyle/>
+            <a:p>
+              <a:pPr algn="ctr"/>
+              <a:r>
+                <a:rPr lang="fr-CA" sz="1800" dirty="0">
+                  <a:latin typeface="Consolas" panose="020B0609020204030204" pitchFamily="49" charset="0"/>
+                </a:rPr>
+                <a:t>vecteur.txt</a:t>
+              </a:r>
+              <a:endParaRPr lang="fr-CA" dirty="0"/>
+            </a:p>
+          </p:txBody>
+        </p:sp>
+      </p:grpSp>
+      <p:cxnSp>
+        <p:nvCxnSpPr>
+          <p:cNvPr id="13" name="Straight Arrow Connector 12">
+            <a:extLst>
+              <a:ext uri="{FF2B5EF4-FFF2-40B4-BE49-F238E27FC236}">
+                <a16:creationId xmlns:a16="http://schemas.microsoft.com/office/drawing/2014/main" id="{4F72EF7E-C6F5-509E-5E99-C70AE26DAD25}"/>
+              </a:ext>
+            </a:extLst>
+          </p:cNvPr>
+          <p:cNvCxnSpPr>
+            <a:cxnSpLocks/>
+            <a:endCxn id="37" idx="0"/>
+          </p:cNvCxnSpPr>
+          <p:nvPr/>
+        </p:nvCxnSpPr>
+        <p:spPr>
+          <a:xfrm>
+            <a:off x="5925060" y="3281388"/>
+            <a:ext cx="0" cy="496437"/>
+          </a:xfrm>
+          <a:prstGeom prst="straightConnector1">
+            <a:avLst/>
+          </a:prstGeom>
+          <a:ln>
+            <a:tailEnd type="triangle"/>
+          </a:ln>
+        </p:spPr>
+        <p:style>
+          <a:lnRef idx="2">
+            <a:schemeClr val="dk1"/>
+          </a:lnRef>
+          <a:fillRef idx="0">
+            <a:schemeClr val="dk1"/>
+          </a:fillRef>
+          <a:effectRef idx="1">
+            <a:schemeClr val="dk1"/>
+          </a:effectRef>
+          <a:fontRef idx="minor">
+            <a:schemeClr val="tx1"/>
+          </a:fontRef>
+        </p:style>
+      </p:cxnSp>
+      <p:grpSp>
+        <p:nvGrpSpPr>
+          <p:cNvPr id="15" name="Google Shape;354;p18">
+            <a:extLst>
+              <a:ext uri="{FF2B5EF4-FFF2-40B4-BE49-F238E27FC236}">
+                <a16:creationId xmlns:a16="http://schemas.microsoft.com/office/drawing/2014/main" id="{23309580-07F5-6712-8CA2-17519CB4F5E1}"/>
+              </a:ext>
+            </a:extLst>
+          </p:cNvPr>
+          <p:cNvGrpSpPr/>
+          <p:nvPr/>
+        </p:nvGrpSpPr>
+        <p:grpSpPr>
+          <a:xfrm>
+            <a:off x="2769870" y="4584926"/>
+            <a:ext cx="6145530" cy="756000"/>
+            <a:chOff x="6682372" y="3766184"/>
+            <a:chExt cx="8984825" cy="230401"/>
+          </a:xfrm>
+        </p:grpSpPr>
+        <p:sp>
+          <p:nvSpPr>
+            <p:cNvPr id="16" name="Google Shape;355;p18">
+              <a:extLst>
+                <a:ext uri="{FF2B5EF4-FFF2-40B4-BE49-F238E27FC236}">
+                  <a16:creationId xmlns:a16="http://schemas.microsoft.com/office/drawing/2014/main" id="{2C81BAD6-7410-EDDC-C4F3-E10AFD7095C1}"/>
+                </a:ext>
+              </a:extLst>
+            </p:cNvPr>
+            <p:cNvSpPr/>
+            <p:nvPr/>
+          </p:nvSpPr>
+          <p:spPr>
+            <a:xfrm>
+              <a:off x="6682372" y="3766184"/>
+              <a:ext cx="256568" cy="230400"/>
+            </a:xfrm>
+            <a:prstGeom prst="rect">
+              <a:avLst/>
+            </a:prstGeom>
+            <a:solidFill>
+              <a:srgbClr val="7F7F7F"/>
+            </a:solidFill>
+            <a:ln w="12700" cap="flat" cmpd="sng">
+              <a:solidFill>
+                <a:schemeClr val="dk1"/>
+              </a:solidFill>
+              <a:prstDash val="solid"/>
+              <a:miter lim="800000"/>
+              <a:headEnd type="none" w="sm" len="sm"/>
+              <a:tailEnd type="none" w="sm" len="sm"/>
+            </a:ln>
+          </p:spPr>
+          <p:txBody>
+            <a:bodyPr spcFirstLastPara="1" wrap="square" lIns="91425" tIns="45700" rIns="91425" bIns="45700" anchor="ctr" anchorCtr="0">
+              <a:noAutofit/>
+            </a:bodyPr>
+            <a:lstStyle/>
+            <a:p>
+              <a:pPr marL="0" marR="0" lvl="0" indent="0" algn="ctr" rtl="0">
+                <a:spcBef>
+                  <a:spcPts val="0"/>
+                </a:spcBef>
+                <a:spcAft>
+                  <a:spcPts val="0"/>
+                </a:spcAft>
+                <a:buNone/>
+              </a:pPr>
+              <a:r>
+                <a:rPr lang="fr-CA" sz="1400" dirty="0">
+                  <a:solidFill>
+                    <a:schemeClr val="lt1"/>
+                  </a:solidFill>
+                  <a:latin typeface="Calibri"/>
+                  <a:ea typeface="Calibri"/>
+                  <a:cs typeface="Calibri"/>
+                  <a:sym typeface="Calibri"/>
+                </a:rPr>
+                <a:t>1</a:t>
+              </a:r>
+              <a:endParaRPr dirty="0"/>
+            </a:p>
+            <a:p>
+              <a:pPr marL="0" marR="0" lvl="0" indent="0" algn="ctr" rtl="0">
+                <a:spcBef>
+                  <a:spcPts val="0"/>
+                </a:spcBef>
+                <a:spcAft>
+                  <a:spcPts val="0"/>
+                </a:spcAft>
+                <a:buNone/>
+              </a:pPr>
+              <a:r>
+                <a:rPr lang="fr-CA" sz="1400" dirty="0">
+                  <a:solidFill>
+                    <a:schemeClr val="lt1"/>
+                  </a:solidFill>
+                  <a:latin typeface="Calibri"/>
+                  <a:ea typeface="Calibri"/>
+                  <a:cs typeface="Calibri"/>
+                  <a:sym typeface="Calibri"/>
+                </a:rPr>
+                <a:t>2</a:t>
+              </a:r>
+            </a:p>
+            <a:p>
+              <a:pPr marL="0" marR="0" lvl="0" indent="0" algn="ctr" rtl="0">
+                <a:spcBef>
+                  <a:spcPts val="0"/>
+                </a:spcBef>
+                <a:spcAft>
+                  <a:spcPts val="0"/>
+                </a:spcAft>
+                <a:buNone/>
+              </a:pPr>
+              <a:r>
+                <a:rPr lang="fr-CA" sz="1400" dirty="0">
+                  <a:solidFill>
+                    <a:schemeClr val="lt1"/>
+                  </a:solidFill>
+                  <a:latin typeface="Calibri"/>
+                  <a:ea typeface="Calibri"/>
+                  <a:cs typeface="Calibri"/>
+                  <a:sym typeface="Calibri"/>
+                </a:rPr>
+                <a:t>3</a:t>
+              </a:r>
+              <a:endParaRPr dirty="0"/>
+            </a:p>
+          </p:txBody>
+        </p:sp>
+        <p:sp>
+          <p:nvSpPr>
+            <p:cNvPr id="17" name="Google Shape;356;p18">
+              <a:extLst>
+                <a:ext uri="{FF2B5EF4-FFF2-40B4-BE49-F238E27FC236}">
+                  <a16:creationId xmlns:a16="http://schemas.microsoft.com/office/drawing/2014/main" id="{937A62C6-8793-BE32-5A0D-118A1CDAC240}"/>
+                </a:ext>
+              </a:extLst>
+            </p:cNvPr>
+            <p:cNvSpPr/>
+            <p:nvPr/>
+          </p:nvSpPr>
+          <p:spPr>
+            <a:xfrm>
+              <a:off x="6938940" y="3766185"/>
+              <a:ext cx="8728257" cy="230400"/>
+            </a:xfrm>
+            <a:prstGeom prst="rect">
+              <a:avLst/>
+            </a:prstGeom>
+            <a:solidFill>
+              <a:schemeClr val="dk1"/>
+            </a:solidFill>
+            <a:ln w="12700" cap="flat" cmpd="sng">
+              <a:solidFill>
+                <a:schemeClr val="dk1"/>
+              </a:solidFill>
+              <a:prstDash val="solid"/>
+              <a:miter lim="800000"/>
+              <a:headEnd type="none" w="sm" len="sm"/>
+              <a:tailEnd type="none" w="sm" len="sm"/>
+            </a:ln>
+          </p:spPr>
+          <p:txBody>
+            <a:bodyPr spcFirstLastPara="1" wrap="square" lIns="91425" tIns="45700" rIns="91425" bIns="45700" anchor="ctr" anchorCtr="0">
+              <a:noAutofit/>
+            </a:bodyPr>
+            <a:lstStyle/>
+            <a:p>
+              <a:r>
+                <a:rPr lang="en-CA" sz="1400" b="1" dirty="0">
+                  <a:solidFill>
+                    <a:schemeClr val="bg1"/>
+                  </a:solidFill>
+                  <a:latin typeface="Consolas" panose="020B0609020204030204" pitchFamily="49" charset="0"/>
+                </a:rPr>
+                <a:t>&gt;&gt;&gt; </a:t>
+              </a:r>
+              <a:r>
+                <a:rPr lang="en-CA" sz="1400" b="1" dirty="0" err="1">
+                  <a:solidFill>
+                    <a:schemeClr val="bg1"/>
+                  </a:solidFill>
+                  <a:latin typeface="Consolas" panose="020B0609020204030204" pitchFamily="49" charset="0"/>
+                </a:rPr>
+                <a:t>vecteur_charge</a:t>
+              </a:r>
+              <a:r>
+                <a:rPr lang="en-CA" sz="1400" b="1" dirty="0">
+                  <a:solidFill>
+                    <a:schemeClr val="bg1"/>
+                  </a:solidFill>
+                  <a:latin typeface="Consolas" panose="020B0609020204030204" pitchFamily="49" charset="0"/>
+                </a:rPr>
+                <a:t> = </a:t>
+              </a:r>
+              <a:r>
+                <a:rPr lang="en-CA" sz="1400" b="1" dirty="0" err="1">
+                  <a:solidFill>
+                    <a:schemeClr val="bg1"/>
+                  </a:solidFill>
+                  <a:latin typeface="Consolas" panose="020B0609020204030204" pitchFamily="49" charset="0"/>
+                </a:rPr>
+                <a:t>Vecteur.charger_txt</a:t>
+              </a:r>
+              <a:r>
+                <a:rPr lang="en-CA" sz="1400" b="1" dirty="0">
+                  <a:solidFill>
+                    <a:schemeClr val="bg1"/>
+                  </a:solidFill>
+                  <a:latin typeface="Consolas" panose="020B0609020204030204" pitchFamily="49" charset="0"/>
+                </a:rPr>
+                <a:t>('vecteur.txt')</a:t>
+              </a:r>
+            </a:p>
+            <a:p>
+              <a:r>
+                <a:rPr lang="en-CA" sz="1400" b="1" dirty="0">
+                  <a:solidFill>
+                    <a:schemeClr val="bg1"/>
+                  </a:solidFill>
+                  <a:latin typeface="Consolas" panose="020B0609020204030204" pitchFamily="49" charset="0"/>
+                </a:rPr>
+                <a:t>&gt;&gt;&gt; print(</a:t>
+              </a:r>
+              <a:r>
+                <a:rPr lang="en-CA" sz="1400" b="1" dirty="0" err="1">
+                  <a:solidFill>
+                    <a:schemeClr val="bg1"/>
+                  </a:solidFill>
+                  <a:latin typeface="Consolas" panose="020B0609020204030204" pitchFamily="49" charset="0"/>
+                </a:rPr>
+                <a:t>vecteur_charge</a:t>
+              </a:r>
+              <a:r>
+                <a:rPr lang="en-CA" sz="1400" b="1" dirty="0">
+                  <a:solidFill>
+                    <a:schemeClr val="bg1"/>
+                  </a:solidFill>
+                  <a:latin typeface="Consolas" panose="020B0609020204030204" pitchFamily="49" charset="0"/>
+                </a:rPr>
+                <a:t>)</a:t>
+              </a:r>
+            </a:p>
+            <a:p>
+              <a:r>
+                <a:rPr lang="fr-CA" sz="1400" b="1" dirty="0">
+                  <a:solidFill>
+                    <a:schemeClr val="bg1"/>
+                  </a:solidFill>
+                  <a:latin typeface="Consolas" panose="020B0609020204030204" pitchFamily="49" charset="0"/>
+                </a:rPr>
+                <a:t>Vecteur(dx=1.0, </a:t>
+              </a:r>
+              <a:r>
+                <a:rPr lang="fr-CA" sz="1400" b="1" dirty="0" err="1">
+                  <a:solidFill>
+                    <a:schemeClr val="bg1"/>
+                  </a:solidFill>
+                  <a:latin typeface="Consolas" panose="020B0609020204030204" pitchFamily="49" charset="0"/>
+                </a:rPr>
+                <a:t>dy</a:t>
+              </a:r>
+              <a:r>
+                <a:rPr lang="fr-CA" sz="1400" b="1" dirty="0">
+                  <a:solidFill>
+                    <a:schemeClr val="bg1"/>
+                  </a:solidFill>
+                  <a:latin typeface="Consolas" panose="020B0609020204030204" pitchFamily="49" charset="0"/>
+                </a:rPr>
+                <a:t>=2.0, dz=3.0)</a:t>
+              </a:r>
+            </a:p>
+          </p:txBody>
+        </p:sp>
+      </p:grpSp>
+      <p:cxnSp>
+        <p:nvCxnSpPr>
+          <p:cNvPr id="19" name="Straight Arrow Connector 18">
+            <a:extLst>
+              <a:ext uri="{FF2B5EF4-FFF2-40B4-BE49-F238E27FC236}">
+                <a16:creationId xmlns:a16="http://schemas.microsoft.com/office/drawing/2014/main" id="{35E6BE22-DE0A-982F-D16A-C10C08DB9D43}"/>
+              </a:ext>
+            </a:extLst>
+          </p:cNvPr>
+          <p:cNvCxnSpPr>
+            <a:cxnSpLocks/>
+            <a:stCxn id="17" idx="0"/>
+            <a:endCxn id="37" idx="2"/>
+          </p:cNvCxnSpPr>
+          <p:nvPr/>
+        </p:nvCxnSpPr>
+        <p:spPr>
+          <a:xfrm flipH="1" flipV="1">
+            <a:off x="5925060" y="4029825"/>
+            <a:ext cx="5320" cy="555104"/>
+          </a:xfrm>
+          <a:prstGeom prst="straightConnector1">
+            <a:avLst/>
+          </a:prstGeom>
+          <a:ln>
+            <a:tailEnd type="triangle"/>
+          </a:ln>
+        </p:spPr>
+        <p:style>
+          <a:lnRef idx="2">
+            <a:schemeClr val="dk1"/>
+          </a:lnRef>
+          <a:fillRef idx="0">
+            <a:schemeClr val="dk1"/>
+          </a:fillRef>
+          <a:effectRef idx="1">
+            <a:schemeClr val="dk1"/>
+          </a:effectRef>
+          <a:fontRef idx="minor">
+            <a:schemeClr val="tx1"/>
+          </a:fontRef>
+        </p:style>
+      </p:cxnSp>
+      <p:sp>
+        <p:nvSpPr>
+          <p:cNvPr id="22" name="TextBox 21">
+            <a:extLst>
+              <a:ext uri="{FF2B5EF4-FFF2-40B4-BE49-F238E27FC236}">
+                <a16:creationId xmlns:a16="http://schemas.microsoft.com/office/drawing/2014/main" id="{FC5913BA-02A1-010F-DB8B-567B2E2465FC}"/>
+              </a:ext>
+            </a:extLst>
+          </p:cNvPr>
+          <p:cNvSpPr txBox="1"/>
+          <p:nvPr/>
+        </p:nvSpPr>
+        <p:spPr>
+          <a:xfrm>
+            <a:off x="5925059" y="3339698"/>
+            <a:ext cx="1325290" cy="369332"/>
+          </a:xfrm>
+          <a:prstGeom prst="rect">
+            <a:avLst/>
+          </a:prstGeom>
+          <a:noFill/>
+        </p:spPr>
+        <p:txBody>
+          <a:bodyPr wrap="square">
+            <a:spAutoFit/>
+          </a:bodyPr>
+          <a:lstStyle/>
+          <a:p>
+            <a:r>
+              <a:rPr lang="fr-CA" sz="1800" i="1" dirty="0">
+                <a:latin typeface="Consolas" panose="020B0609020204030204" pitchFamily="49" charset="0"/>
+              </a:rPr>
+              <a:t> écriture</a:t>
+            </a:r>
+            <a:endParaRPr lang="fr-CA" i="1" dirty="0"/>
+          </a:p>
+        </p:txBody>
+      </p:sp>
+      <p:sp>
+        <p:nvSpPr>
+          <p:cNvPr id="23" name="TextBox 22">
+            <a:extLst>
+              <a:ext uri="{FF2B5EF4-FFF2-40B4-BE49-F238E27FC236}">
+                <a16:creationId xmlns:a16="http://schemas.microsoft.com/office/drawing/2014/main" id="{80042855-602B-8286-7B61-227B8EA4098C}"/>
+              </a:ext>
+            </a:extLst>
+          </p:cNvPr>
+          <p:cNvSpPr txBox="1"/>
+          <p:nvPr/>
+        </p:nvSpPr>
+        <p:spPr>
+          <a:xfrm>
+            <a:off x="5925059" y="4119098"/>
+            <a:ext cx="1319970" cy="369332"/>
+          </a:xfrm>
+          <a:prstGeom prst="rect">
+            <a:avLst/>
+          </a:prstGeom>
+          <a:noFill/>
+        </p:spPr>
+        <p:txBody>
+          <a:bodyPr wrap="square">
+            <a:spAutoFit/>
+          </a:bodyPr>
+          <a:lstStyle/>
+          <a:p>
+            <a:r>
+              <a:rPr lang="fr-CA" sz="1800" i="1" dirty="0">
+                <a:latin typeface="Consolas" panose="020B0609020204030204" pitchFamily="49" charset="0"/>
+              </a:rPr>
+              <a:t> lecture</a:t>
+            </a:r>
+            <a:endParaRPr lang="fr-CA" i="1" dirty="0"/>
+          </a:p>
+        </p:txBody>
+      </p:sp>
+    </p:spTree>
+    <p:extLst>
+      <p:ext uri="{BB962C8B-B14F-4D97-AF65-F5344CB8AC3E}">
+        <p14:creationId xmlns:p14="http://schemas.microsoft.com/office/powerpoint/2010/main" val="2130172738"/>
+      </p:ext>
+    </p:extLst>
+  </p:cSld>
+  <p:clrMapOvr>
+    <a:masterClrMapping/>
+  </p:clrMapOvr>
+  <p:timing>
+    <p:tnLst>
+      <p:par>
+        <p:cTn id="1" dur="indefinite" restart="never" nodeType="tmRoot">
+          <p:childTnLst>
+            <p:seq concurrent="1" nextAc="seek">
+              <p:cTn id="2" dur="indefinite" nodeType="mainSeq">
+                <p:childTnLst>
+                  <p:par>
+                    <p:cTn id="3" fill="hold">
+                      <p:stCondLst>
+                        <p:cond delay="indefinite"/>
+                      </p:stCondLst>
+                      <p:childTnLst>
+                        <p:par>
+                          <p:cTn id="4" fill="hold">
+                            <p:stCondLst>
+                              <p:cond delay="0"/>
+                            </p:stCondLst>
+                            <p:childTnLst>
+                              <p:par>
+                                <p:cTn id="5" presetID="10" presetClass="entr" presetSubtype="0" fill="hold" nodeType="clickEffect">
+                                  <p:stCondLst>
+                                    <p:cond delay="0"/>
+                                  </p:stCondLst>
+                                  <p:childTnLst>
+                                    <p:set>
+                                      <p:cBhvr>
+                                        <p:cTn id="6" dur="1" fill="hold">
+                                          <p:stCondLst>
+                                            <p:cond delay="0"/>
+                                          </p:stCondLst>
+                                        </p:cTn>
+                                        <p:tgtEl>
+                                          <p:spTgt spid="3">
+                                            <p:txEl>
+                                              <p:pRg st="0" end="0"/>
+                                            </p:txEl>
+                                          </p:spTgt>
+                                        </p:tgtEl>
+                                        <p:attrNameLst>
+                                          <p:attrName>style.visibility</p:attrName>
+                                        </p:attrNameLst>
+                                      </p:cBhvr>
+                                      <p:to>
+                                        <p:strVal val="visible"/>
+                                      </p:to>
+                                    </p:set>
+                                    <p:animEffect transition="in" filter="fade">
+                                      <p:cBhvr>
+                                        <p:cTn id="7" dur="500"/>
+                                        <p:tgtEl>
+                                          <p:spTgt spid="3">
+                                            <p:txEl>
+                                              <p:pRg st="0" end="0"/>
+                                            </p:txEl>
+                                          </p:spTgt>
+                                        </p:tgtEl>
+                                      </p:cBhvr>
+                                    </p:animEffect>
+                                  </p:childTnLst>
+                                </p:cTn>
+                              </p:par>
+                            </p:childTnLst>
+                          </p:cTn>
+                        </p:par>
+                      </p:childTnLst>
+                    </p:cTn>
+                  </p:par>
+                  <p:par>
+                    <p:cTn id="8" fill="hold">
+                      <p:stCondLst>
+                        <p:cond delay="indefinite"/>
+                      </p:stCondLst>
+                      <p:childTnLst>
+                        <p:par>
+                          <p:cTn id="9" fill="hold">
+                            <p:stCondLst>
+                              <p:cond delay="0"/>
+                            </p:stCondLst>
+                            <p:childTnLst>
+                              <p:par>
+                                <p:cTn id="10" presetID="10" presetClass="entr" presetSubtype="0" fill="hold" nodeType="clickEffect">
+                                  <p:stCondLst>
+                                    <p:cond delay="0"/>
+                                  </p:stCondLst>
+                                  <p:childTnLst>
+                                    <p:set>
+                                      <p:cBhvr>
+                                        <p:cTn id="11" dur="1" fill="hold">
+                                          <p:stCondLst>
+                                            <p:cond delay="0"/>
+                                          </p:stCondLst>
+                                        </p:cTn>
+                                        <p:tgtEl>
+                                          <p:spTgt spid="7"/>
+                                        </p:tgtEl>
+                                        <p:attrNameLst>
+                                          <p:attrName>style.visibility</p:attrName>
+                                        </p:attrNameLst>
+                                      </p:cBhvr>
+                                      <p:to>
+                                        <p:strVal val="visible"/>
+                                      </p:to>
+                                    </p:set>
+                                    <p:animEffect transition="in" filter="fade">
+                                      <p:cBhvr>
+                                        <p:cTn id="12" dur="500"/>
+                                        <p:tgtEl>
+                                          <p:spTgt spid="7"/>
+                                        </p:tgtEl>
+                                      </p:cBhvr>
+                                    </p:animEffect>
+                                  </p:childTnLst>
+                                </p:cTn>
+                              </p:par>
+                            </p:childTnLst>
+                          </p:cTn>
+                        </p:par>
+                      </p:childTnLst>
+                    </p:cTn>
+                  </p:par>
+                  <p:par>
+                    <p:cTn id="13" fill="hold">
+                      <p:stCondLst>
+                        <p:cond delay="indefinite"/>
+                      </p:stCondLst>
+                      <p:childTnLst>
+                        <p:par>
+                          <p:cTn id="14" fill="hold">
+                            <p:stCondLst>
+                              <p:cond delay="0"/>
+                            </p:stCondLst>
+                            <p:childTnLst>
+                              <p:par>
+                                <p:cTn id="15" presetID="10" presetClass="entr" presetSubtype="0" fill="hold" nodeType="clickEffect">
+                                  <p:stCondLst>
+                                    <p:cond delay="0"/>
+                                  </p:stCondLst>
+                                  <p:childTnLst>
+                                    <p:set>
+                                      <p:cBhvr>
+                                        <p:cTn id="16" dur="1" fill="hold">
+                                          <p:stCondLst>
+                                            <p:cond delay="0"/>
+                                          </p:stCondLst>
+                                        </p:cTn>
+                                        <p:tgtEl>
+                                          <p:spTgt spid="11"/>
+                                        </p:tgtEl>
+                                        <p:attrNameLst>
+                                          <p:attrName>style.visibility</p:attrName>
+                                        </p:attrNameLst>
+                                      </p:cBhvr>
+                                      <p:to>
+                                        <p:strVal val="visible"/>
+                                      </p:to>
+                                    </p:set>
+                                    <p:animEffect transition="in" filter="fade">
+                                      <p:cBhvr>
+                                        <p:cTn id="17" dur="500"/>
+                                        <p:tgtEl>
+                                          <p:spTgt spid="11"/>
+                                        </p:tgtEl>
+                                      </p:cBhvr>
+                                    </p:animEffect>
+                                  </p:childTnLst>
+                                </p:cTn>
+                              </p:par>
+                              <p:par>
+                                <p:cTn id="18" presetID="10" presetClass="entr" presetSubtype="0" fill="hold" nodeType="withEffect">
+                                  <p:stCondLst>
+                                    <p:cond delay="0"/>
+                                  </p:stCondLst>
+                                  <p:childTnLst>
+                                    <p:set>
+                                      <p:cBhvr>
+                                        <p:cTn id="19" dur="1" fill="hold">
+                                          <p:stCondLst>
+                                            <p:cond delay="0"/>
+                                          </p:stCondLst>
+                                        </p:cTn>
+                                        <p:tgtEl>
+                                          <p:spTgt spid="13"/>
+                                        </p:tgtEl>
+                                        <p:attrNameLst>
+                                          <p:attrName>style.visibility</p:attrName>
+                                        </p:attrNameLst>
+                                      </p:cBhvr>
+                                      <p:to>
+                                        <p:strVal val="visible"/>
+                                      </p:to>
+                                    </p:set>
+                                    <p:animEffect transition="in" filter="fade">
+                                      <p:cBhvr>
+                                        <p:cTn id="20" dur="500"/>
+                                        <p:tgtEl>
+                                          <p:spTgt spid="13"/>
+                                        </p:tgtEl>
+                                      </p:cBhvr>
+                                    </p:animEffect>
+                                  </p:childTnLst>
+                                </p:cTn>
+                              </p:par>
+                              <p:par>
+                                <p:cTn id="21" presetID="10" presetClass="entr" presetSubtype="0" fill="hold" grpId="0" nodeType="withEffect">
+                                  <p:stCondLst>
+                                    <p:cond delay="0"/>
+                                  </p:stCondLst>
+                                  <p:childTnLst>
+                                    <p:set>
+                                      <p:cBhvr>
+                                        <p:cTn id="22" dur="1" fill="hold">
+                                          <p:stCondLst>
+                                            <p:cond delay="0"/>
+                                          </p:stCondLst>
+                                        </p:cTn>
+                                        <p:tgtEl>
+                                          <p:spTgt spid="22"/>
+                                        </p:tgtEl>
+                                        <p:attrNameLst>
+                                          <p:attrName>style.visibility</p:attrName>
+                                        </p:attrNameLst>
+                                      </p:cBhvr>
+                                      <p:to>
+                                        <p:strVal val="visible"/>
+                                      </p:to>
+                                    </p:set>
+                                    <p:animEffect transition="in" filter="fade">
+                                      <p:cBhvr>
+                                        <p:cTn id="23" dur="500"/>
+                                        <p:tgtEl>
+                                          <p:spTgt spid="22"/>
+                                        </p:tgtEl>
+                                      </p:cBhvr>
+                                    </p:animEffect>
+                                  </p:childTnLst>
+                                </p:cTn>
+                              </p:par>
+                            </p:childTnLst>
+                          </p:cTn>
+                        </p:par>
+                      </p:childTnLst>
+                    </p:cTn>
+                  </p:par>
+                  <p:par>
+                    <p:cTn id="24" fill="hold">
+                      <p:stCondLst>
+                        <p:cond delay="indefinite"/>
+                      </p:stCondLst>
+                      <p:childTnLst>
+                        <p:par>
+                          <p:cTn id="25" fill="hold">
+                            <p:stCondLst>
+                              <p:cond delay="0"/>
+                            </p:stCondLst>
+                            <p:childTnLst>
+                              <p:par>
+                                <p:cTn id="26" presetID="10" presetClass="entr" presetSubtype="0" fill="hold" nodeType="clickEffect">
+                                  <p:stCondLst>
+                                    <p:cond delay="0"/>
+                                  </p:stCondLst>
+                                  <p:childTnLst>
+                                    <p:set>
+                                      <p:cBhvr>
+                                        <p:cTn id="27" dur="1" fill="hold">
+                                          <p:stCondLst>
+                                            <p:cond delay="0"/>
+                                          </p:stCondLst>
+                                        </p:cTn>
+                                        <p:tgtEl>
+                                          <p:spTgt spid="15"/>
+                                        </p:tgtEl>
+                                        <p:attrNameLst>
+                                          <p:attrName>style.visibility</p:attrName>
+                                        </p:attrNameLst>
+                                      </p:cBhvr>
+                                      <p:to>
+                                        <p:strVal val="visible"/>
+                                      </p:to>
+                                    </p:set>
+                                    <p:animEffect transition="in" filter="fade">
+                                      <p:cBhvr>
+                                        <p:cTn id="28" dur="500"/>
+                                        <p:tgtEl>
+                                          <p:spTgt spid="15"/>
+                                        </p:tgtEl>
+                                      </p:cBhvr>
+                                    </p:animEffect>
+                                  </p:childTnLst>
+                                </p:cTn>
+                              </p:par>
+                              <p:par>
+                                <p:cTn id="29" presetID="10" presetClass="entr" presetSubtype="0" fill="hold" nodeType="withEffect">
+                                  <p:stCondLst>
+                                    <p:cond delay="0"/>
+                                  </p:stCondLst>
+                                  <p:childTnLst>
+                                    <p:set>
+                                      <p:cBhvr>
+                                        <p:cTn id="30" dur="1" fill="hold">
+                                          <p:stCondLst>
+                                            <p:cond delay="0"/>
+                                          </p:stCondLst>
+                                        </p:cTn>
+                                        <p:tgtEl>
+                                          <p:spTgt spid="19"/>
+                                        </p:tgtEl>
+                                        <p:attrNameLst>
+                                          <p:attrName>style.visibility</p:attrName>
+                                        </p:attrNameLst>
+                                      </p:cBhvr>
+                                      <p:to>
+                                        <p:strVal val="visible"/>
+                                      </p:to>
+                                    </p:set>
+                                    <p:animEffect transition="in" filter="fade">
+                                      <p:cBhvr>
+                                        <p:cTn id="31" dur="500"/>
+                                        <p:tgtEl>
+                                          <p:spTgt spid="19"/>
+                                        </p:tgtEl>
+                                      </p:cBhvr>
+                                    </p:animEffect>
+                                  </p:childTnLst>
+                                </p:cTn>
+                              </p:par>
+                              <p:par>
+                                <p:cTn id="32" presetID="10" presetClass="entr" presetSubtype="0" fill="hold" grpId="0" nodeType="withEffect">
+                                  <p:stCondLst>
+                                    <p:cond delay="0"/>
+                                  </p:stCondLst>
+                                  <p:childTnLst>
+                                    <p:set>
+                                      <p:cBhvr>
+                                        <p:cTn id="33" dur="1" fill="hold">
+                                          <p:stCondLst>
+                                            <p:cond delay="0"/>
+                                          </p:stCondLst>
+                                        </p:cTn>
+                                        <p:tgtEl>
+                                          <p:spTgt spid="23"/>
+                                        </p:tgtEl>
+                                        <p:attrNameLst>
+                                          <p:attrName>style.visibility</p:attrName>
+                                        </p:attrNameLst>
+                                      </p:cBhvr>
+                                      <p:to>
+                                        <p:strVal val="visible"/>
+                                      </p:to>
+                                    </p:set>
+                                    <p:animEffect transition="in" filter="fade">
+                                      <p:cBhvr>
+                                        <p:cTn id="34" dur="500"/>
+                                        <p:tgtEl>
+                                          <p:spTgt spid="23"/>
+                                        </p:tgtEl>
+                                      </p:cBhvr>
+                                    </p:animEffect>
+                                  </p:childTnLst>
+                                </p:cTn>
+                              </p:par>
+                            </p:childTnLst>
+                          </p:cTn>
+                        </p:par>
+                      </p:childTnLst>
+                    </p:cTn>
+                  </p:par>
+                </p:childTnLst>
+              </p:cTn>
+              <p:prevCondLst>
+                <p:cond evt="onPrev" delay="0">
+                  <p:tgtEl>
+                    <p:sldTgt/>
+                  </p:tgtEl>
+                </p:cond>
+              </p:prevCondLst>
+              <p:nextCondLst>
+                <p:cond evt="onNext" delay="0">
+                  <p:tgtEl>
+                    <p:sldTgt/>
+                  </p:tgtEl>
+                </p:cond>
+              </p:nextCondLst>
+            </p:seq>
+          </p:childTnLst>
+        </p:cTn>
+      </p:par>
+    </p:tnLst>
+    <p:bldLst>
+      <p:bldP spid="22" grpId="0"/>
+      <p:bldP spid="23" grpId="0"/>
+    </p:bldLst>
+  </p:timing>
+</p:sld>
+</file>
+
+<file path=ppt/slides/slide13.xml><?xml version="1.0" encoding="utf-8"?>
+<p:sld xmlns:a="http://schemas.openxmlformats.org/drawingml/2006/main" xmlns:r="http://schemas.openxmlformats.org/officeDocument/2006/relationships" xmlns:p="http://schemas.openxmlformats.org/presentationml/2006/main">
+  <p:cSld>
+    <p:bg>
+      <p:bgPr>
+        <a:solidFill>
           <a:srgbClr val="FFFF00"/>
         </a:solidFill>
         <a:effectLst/>
@@ -7544,7 +9189,7 @@
 </p:sld>
 </file>
 
-<file path=ppt/slides/slide13.xml><?xml version="1.0" encoding="utf-8"?>
+<file path=ppt/slides/slide14.xml><?xml version="1.0" encoding="utf-8"?>
 <p:sld xmlns:a="http://schemas.openxmlformats.org/drawingml/2006/main" xmlns:r="http://schemas.openxmlformats.org/officeDocument/2006/relationships" xmlns:p="http://schemas.openxmlformats.org/presentationml/2006/main">
   <p:cSld>
     <p:bg>
@@ -8184,7 +9829,7 @@
           <a:p>
             <a:fld id="{846B06B1-1179-491F-A487-8E0C403F7C13}" type="slidenum">
               <a:rPr lang="fr-CA" smtClean="0"/>
-              <a:t>13</a:t>
+              <a:t>14</a:t>
             </a:fld>
             <a:endParaRPr lang="fr-CA"/>
           </a:p>
@@ -8685,7 +10330,7 @@
 </p:sld>
 </file>
 
-<file path=ppt/slides/slide14.xml><?xml version="1.0" encoding="utf-8"?>
+<file path=ppt/slides/slide15.xml><?xml version="1.0" encoding="utf-8"?>
 <p:sld xmlns:a="http://schemas.openxmlformats.org/drawingml/2006/main" xmlns:r="http://schemas.openxmlformats.org/officeDocument/2006/relationships" xmlns:p="http://schemas.openxmlformats.org/presentationml/2006/main">
   <p:cSld>
     <p:bg>
@@ -9175,7 +10820,7 @@
           <a:p>
             <a:fld id="{846B06B1-1179-491F-A487-8E0C403F7C13}" type="slidenum">
               <a:rPr lang="fr-CA" smtClean="0"/>
-              <a:t>14</a:t>
+              <a:t>15</a:t>
             </a:fld>
             <a:endParaRPr lang="fr-CA"/>
           </a:p>
@@ -9712,7 +11357,7 @@
 </p:sld>
 </file>
 
-<file path=ppt/slides/slide15.xml><?xml version="1.0" encoding="utf-8"?>
+<file path=ppt/slides/slide16.xml><?xml version="1.0" encoding="utf-8"?>
 <p:sld xmlns:a="http://schemas.openxmlformats.org/drawingml/2006/main" xmlns:r="http://schemas.openxmlformats.org/officeDocument/2006/relationships" xmlns:p="http://schemas.openxmlformats.org/presentationml/2006/main">
   <p:cSld>
     <p:bg>
@@ -10094,7 +11739,7 @@
           <a:p>
             <a:fld id="{846B06B1-1179-491F-A487-8E0C403F7C13}" type="slidenum">
               <a:rPr lang="fr-CA" smtClean="0"/>
-              <a:t>15</a:t>
+              <a:t>16</a:t>
             </a:fld>
             <a:endParaRPr lang="fr-CA"/>
           </a:p>
@@ -10473,7 +12118,7 @@
 </p:sld>
 </file>
 
-<file path=ppt/slides/slide16.xml><?xml version="1.0" encoding="utf-8"?>
+<file path=ppt/slides/slide17.xml><?xml version="1.0" encoding="utf-8"?>
 <p:sld xmlns:a="http://schemas.openxmlformats.org/drawingml/2006/main" xmlns:r="http://schemas.openxmlformats.org/officeDocument/2006/relationships" xmlns:p="http://schemas.openxmlformats.org/presentationml/2006/main">
   <p:cSld>
     <p:bg>
@@ -10940,7 +12585,7 @@
           <a:p>
             <a:fld id="{846B06B1-1179-491F-A487-8E0C403F7C13}" type="slidenum">
               <a:rPr lang="fr-CA" smtClean="0"/>
-              <a:t>16</a:t>
+              <a:t>17</a:t>
             </a:fld>
             <a:endParaRPr lang="fr-CA"/>
           </a:p>
@@ -11554,7 +13199,7 @@
 </p:sld>
 </file>
 
-<file path=ppt/slides/slide17.xml><?xml version="1.0" encoding="utf-8"?>
+<file path=ppt/slides/slide18.xml><?xml version="1.0" encoding="utf-8"?>
 <p:sld xmlns:a="http://schemas.openxmlformats.org/drawingml/2006/main" xmlns:r="http://schemas.openxmlformats.org/officeDocument/2006/relationships" xmlns:p="http://schemas.openxmlformats.org/presentationml/2006/main">
   <p:cSld>
     <p:bg>
@@ -12289,7 +13934,7 @@
           <a:p>
             <a:fld id="{846B06B1-1179-491F-A487-8E0C403F7C13}" type="slidenum">
               <a:rPr lang="fr-CA" smtClean="0"/>
-              <a:t>17</a:t>
+              <a:t>18</a:t>
             </a:fld>
             <a:endParaRPr lang="fr-CA"/>
           </a:p>
@@ -12308,7 +13953,7 @@
 </p:sld>
 </file>
 
-<file path=ppt/slides/slide18.xml><?xml version="1.0" encoding="utf-8"?>
+<file path=ppt/slides/slide19.xml><?xml version="1.0" encoding="utf-8"?>
 <p:sld xmlns:a="http://schemas.openxmlformats.org/drawingml/2006/main" xmlns:r="http://schemas.openxmlformats.org/officeDocument/2006/relationships" xmlns:p="http://schemas.openxmlformats.org/presentationml/2006/main">
   <p:cSld>
     <p:bg>
@@ -12416,7 +14061,7 @@
           <a:p>
             <a:fld id="{846B06B1-1179-491F-A487-8E0C403F7C13}" type="slidenum">
               <a:rPr lang="fr-CA" smtClean="0"/>
-              <a:t>18</a:t>
+              <a:t>19</a:t>
             </a:fld>
             <a:endParaRPr lang="fr-CA"/>
           </a:p>
@@ -13059,7 +14704,468 @@
 </p:sld>
 </file>
 
-<file path=ppt/slides/slide19.xml><?xml version="1.0" encoding="utf-8"?>
+<file path=ppt/slides/slide2.xml><?xml version="1.0" encoding="utf-8"?>
+<p:sld xmlns:a="http://schemas.openxmlformats.org/drawingml/2006/main" xmlns:r="http://schemas.openxmlformats.org/officeDocument/2006/relationships" xmlns:p="http://schemas.openxmlformats.org/presentationml/2006/main">
+  <p:cSld>
+    <p:bg>
+      <p:bgPr>
+        <a:solidFill>
+          <a:srgbClr val="F5F5F5"/>
+        </a:solidFill>
+        <a:effectLst/>
+      </p:bgPr>
+    </p:bg>
+    <p:spTree>
+      <p:nvGrpSpPr>
+        <p:cNvPr id="1" name="">
+          <a:extLst>
+            <a:ext uri="{FF2B5EF4-FFF2-40B4-BE49-F238E27FC236}">
+              <a16:creationId xmlns:a16="http://schemas.microsoft.com/office/drawing/2014/main" id="{9787BE08-8E87-BDAC-AA37-B1440F99BBB3}"/>
+            </a:ext>
+          </a:extLst>
+        </p:cNvPr>
+        <p:cNvGrpSpPr/>
+        <p:nvPr/>
+      </p:nvGrpSpPr>
+      <p:grpSpPr>
+        <a:xfrm>
+          <a:off x="0" y="0"/>
+          <a:ext cx="0" cy="0"/>
+          <a:chOff x="0" y="0"/>
+          <a:chExt cx="0" cy="0"/>
+        </a:xfrm>
+      </p:grpSpPr>
+      <p:sp>
+        <p:nvSpPr>
+          <p:cNvPr id="2" name="Title 1">
+            <a:extLst>
+              <a:ext uri="{FF2B5EF4-FFF2-40B4-BE49-F238E27FC236}">
+                <a16:creationId xmlns:a16="http://schemas.microsoft.com/office/drawing/2014/main" id="{2539027E-795E-A7E7-3EF9-F5DE694B487D}"/>
+              </a:ext>
+            </a:extLst>
+          </p:cNvPr>
+          <p:cNvSpPr>
+            <a:spLocks noGrp="1"/>
+          </p:cNvSpPr>
+          <p:nvPr>
+            <p:ph type="title"/>
+          </p:nvPr>
+        </p:nvSpPr>
+        <p:spPr/>
+        <p:txBody>
+          <a:bodyPr/>
+          <a:lstStyle/>
+          <a:p>
+            <a:r>
+              <a:rPr lang="en-US" dirty="0">
+                <a:latin typeface="Arial Rounded MT Bold" panose="020F0704030504030204" pitchFamily="34" charset="0"/>
+              </a:rPr>
+              <a:t>Plan</a:t>
+            </a:r>
+            <a:endParaRPr lang="fr-CA" dirty="0">
+              <a:latin typeface="Arial Rounded MT Bold" panose="020F0704030504030204" pitchFamily="34" charset="0"/>
+            </a:endParaRPr>
+          </a:p>
+        </p:txBody>
+      </p:sp>
+      <p:sp>
+        <p:nvSpPr>
+          <p:cNvPr id="3" name="Content Placeholder 2">
+            <a:extLst>
+              <a:ext uri="{FF2B5EF4-FFF2-40B4-BE49-F238E27FC236}">
+                <a16:creationId xmlns:a16="http://schemas.microsoft.com/office/drawing/2014/main" id="{1A2C692D-48DA-2C5B-C433-961FD8C3D9A4}"/>
+              </a:ext>
+            </a:extLst>
+          </p:cNvPr>
+          <p:cNvSpPr>
+            <a:spLocks noGrp="1"/>
+          </p:cNvSpPr>
+          <p:nvPr>
+            <p:ph idx="1"/>
+          </p:nvPr>
+        </p:nvSpPr>
+        <p:spPr/>
+        <p:txBody>
+          <a:bodyPr>
+            <a:normAutofit/>
+          </a:bodyPr>
+          <a:lstStyle/>
+          <a:p>
+            <a:pPr algn="just"/>
+            <a:r>
+              <a:rPr lang="en-US" sz="2000" dirty="0">
+                <a:latin typeface="Consolas" panose="020B0609020204030204" pitchFamily="49" charset="0"/>
+              </a:rPr>
+              <a:t>Notions </a:t>
+            </a:r>
+            <a:r>
+              <a:rPr lang="en-US" sz="2000" dirty="0" err="1">
+                <a:latin typeface="Consolas" panose="020B0609020204030204" pitchFamily="49" charset="0"/>
+              </a:rPr>
+              <a:t>intermédiaires</a:t>
+            </a:r>
+            <a:endParaRPr lang="en-US" sz="2000" dirty="0">
+              <a:latin typeface="Consolas" panose="020B0609020204030204" pitchFamily="49" charset="0"/>
+            </a:endParaRPr>
+          </a:p>
+          <a:p>
+            <a:pPr algn="just"/>
+            <a:r>
+              <a:rPr lang="fr-CA" sz="2000" dirty="0">
+                <a:latin typeface="Consolas" panose="020B0609020204030204" pitchFamily="49" charset="0"/>
+              </a:rPr>
+              <a:t>É</a:t>
+            </a:r>
+            <a:r>
+              <a:rPr lang="en-US" sz="2000" dirty="0" err="1">
+                <a:latin typeface="Consolas" panose="020B0609020204030204" pitchFamily="49" charset="0"/>
+              </a:rPr>
+              <a:t>crire</a:t>
+            </a:r>
+            <a:r>
+              <a:rPr lang="en-US" sz="2000" dirty="0">
+                <a:latin typeface="Consolas" panose="020B0609020204030204" pitchFamily="49" charset="0"/>
+              </a:rPr>
+              <a:t> du</a:t>
+            </a:r>
+            <a:r>
+              <a:rPr lang="fr-CA" sz="2000" dirty="0">
+                <a:latin typeface="Consolas" panose="020B0609020204030204" pitchFamily="49" charset="0"/>
+              </a:rPr>
+              <a:t> "vrai"</a:t>
+            </a:r>
+            <a:r>
+              <a:rPr lang="en-US" sz="2000" i="1" dirty="0">
+                <a:latin typeface="Consolas" panose="020B0609020204030204" pitchFamily="49" charset="0"/>
+              </a:rPr>
+              <a:t> </a:t>
+            </a:r>
+            <a:r>
+              <a:rPr lang="en-US" sz="2000" dirty="0">
+                <a:latin typeface="Consolas" panose="020B0609020204030204" pitchFamily="49" charset="0"/>
+              </a:rPr>
+              <a:t>code</a:t>
+            </a:r>
+          </a:p>
+          <a:p>
+            <a:pPr algn="just"/>
+            <a:r>
+              <a:rPr lang="fr-CA" sz="2000" dirty="0">
+                <a:latin typeface="Consolas" panose="020B0609020204030204" pitchFamily="49" charset="0"/>
+              </a:rPr>
+              <a:t>S'amuser</a:t>
+            </a:r>
+          </a:p>
+        </p:txBody>
+      </p:sp>
+      <p:sp>
+        <p:nvSpPr>
+          <p:cNvPr id="5" name="Slide Number Placeholder 4">
+            <a:extLst>
+              <a:ext uri="{FF2B5EF4-FFF2-40B4-BE49-F238E27FC236}">
+                <a16:creationId xmlns:a16="http://schemas.microsoft.com/office/drawing/2014/main" id="{30A9ACC9-0207-BF8C-83A4-76A47041FF41}"/>
+              </a:ext>
+            </a:extLst>
+          </p:cNvPr>
+          <p:cNvSpPr>
+            <a:spLocks noGrp="1"/>
+          </p:cNvSpPr>
+          <p:nvPr>
+            <p:ph type="sldNum" sz="quarter" idx="12"/>
+          </p:nvPr>
+        </p:nvSpPr>
+        <p:spPr/>
+        <p:txBody>
+          <a:bodyPr/>
+          <a:lstStyle/>
+          <a:p>
+            <a:fld id="{846B06B1-1179-491F-A487-8E0C403F7C13}" type="slidenum">
+              <a:rPr lang="fr-CA" smtClean="0"/>
+              <a:t>2</a:t>
+            </a:fld>
+            <a:endParaRPr lang="fr-CA" dirty="0"/>
+          </a:p>
+        </p:txBody>
+      </p:sp>
+      <p:pic>
+        <p:nvPicPr>
+          <p:cNvPr id="6" name="Picture 2" descr="Generated QR Image">
+            <a:extLst>
+              <a:ext uri="{FF2B5EF4-FFF2-40B4-BE49-F238E27FC236}">
+                <a16:creationId xmlns:a16="http://schemas.microsoft.com/office/drawing/2014/main" id="{55503CE9-4B4C-6B08-7AE7-D706357A15F7}"/>
+              </a:ext>
+            </a:extLst>
+          </p:cNvPr>
+          <p:cNvPicPr>
+            <a:picLocks noChangeAspect="1" noChangeArrowheads="1"/>
+          </p:cNvPicPr>
+          <p:nvPr/>
+        </p:nvPicPr>
+        <p:blipFill>
+          <a:blip r:embed="rId3">
+            <a:extLst>
+              <a:ext uri="{28A0092B-C50C-407E-A947-70E740481C1C}">
+                <a14:useLocalDpi xmlns:a14="http://schemas.microsoft.com/office/drawing/2010/main" val="0"/>
+              </a:ext>
+            </a:extLst>
+          </a:blip>
+          <a:srcRect/>
+          <a:stretch>
+            <a:fillRect/>
+          </a:stretch>
+        </p:blipFill>
+        <p:spPr bwMode="auto">
+          <a:xfrm>
+            <a:off x="6095999" y="1825625"/>
+            <a:ext cx="4105275" cy="4105275"/>
+          </a:xfrm>
+          <a:prstGeom prst="rect">
+            <a:avLst/>
+          </a:prstGeom>
+          <a:noFill/>
+          <a:extLst>
+            <a:ext uri="{909E8E84-426E-40DD-AFC4-6F175D3DCCD1}">
+              <a14:hiddenFill xmlns:a14="http://schemas.microsoft.com/office/drawing/2010/main">
+                <a:solidFill>
+                  <a:srgbClr val="FFFFFF"/>
+                </a:solidFill>
+              </a14:hiddenFill>
+            </a:ext>
+          </a:extLst>
+        </p:spPr>
+      </p:pic>
+    </p:spTree>
+    <p:extLst>
+      <p:ext uri="{BB962C8B-B14F-4D97-AF65-F5344CB8AC3E}">
+        <p14:creationId xmlns:p14="http://schemas.microsoft.com/office/powerpoint/2010/main" val="1707187834"/>
+      </p:ext>
+    </p:extLst>
+  </p:cSld>
+  <p:clrMapOvr>
+    <a:masterClrMapping/>
+  </p:clrMapOvr>
+  <p:timing>
+    <p:tnLst>
+      <p:par>
+        <p:cTn id="1" dur="indefinite" restart="never" nodeType="tmRoot">
+          <p:childTnLst>
+            <p:seq concurrent="1" nextAc="seek">
+              <p:cTn id="2" dur="indefinite" nodeType="mainSeq">
+                <p:childTnLst>
+                  <p:par>
+                    <p:cTn id="3" fill="hold">
+                      <p:stCondLst>
+                        <p:cond delay="indefinite"/>
+                      </p:stCondLst>
+                      <p:childTnLst>
+                        <p:par>
+                          <p:cTn id="4" fill="hold">
+                            <p:stCondLst>
+                              <p:cond delay="0"/>
+                            </p:stCondLst>
+                            <p:childTnLst>
+                              <p:par>
+                                <p:cTn id="5" presetID="10" presetClass="entr" presetSubtype="0" fill="hold" nodeType="clickEffect">
+                                  <p:stCondLst>
+                                    <p:cond delay="0"/>
+                                  </p:stCondLst>
+                                  <p:childTnLst>
+                                    <p:set>
+                                      <p:cBhvr>
+                                        <p:cTn id="6" dur="1" fill="hold">
+                                          <p:stCondLst>
+                                            <p:cond delay="0"/>
+                                          </p:stCondLst>
+                                        </p:cTn>
+                                        <p:tgtEl>
+                                          <p:spTgt spid="3">
+                                            <p:txEl>
+                                              <p:pRg st="0" end="0"/>
+                                            </p:txEl>
+                                          </p:spTgt>
+                                        </p:tgtEl>
+                                        <p:attrNameLst>
+                                          <p:attrName>style.visibility</p:attrName>
+                                        </p:attrNameLst>
+                                      </p:cBhvr>
+                                      <p:to>
+                                        <p:strVal val="visible"/>
+                                      </p:to>
+                                    </p:set>
+                                    <p:animEffect transition="in" filter="fade">
+                                      <p:cBhvr>
+                                        <p:cTn id="7" dur="500"/>
+                                        <p:tgtEl>
+                                          <p:spTgt spid="3">
+                                            <p:txEl>
+                                              <p:pRg st="0" end="0"/>
+                                            </p:txEl>
+                                          </p:spTgt>
+                                        </p:tgtEl>
+                                      </p:cBhvr>
+                                    </p:animEffect>
+                                  </p:childTnLst>
+                                </p:cTn>
+                              </p:par>
+                            </p:childTnLst>
+                          </p:cTn>
+                        </p:par>
+                      </p:childTnLst>
+                    </p:cTn>
+                  </p:par>
+                  <p:par>
+                    <p:cTn id="8" fill="hold">
+                      <p:stCondLst>
+                        <p:cond delay="indefinite"/>
+                      </p:stCondLst>
+                      <p:childTnLst>
+                        <p:par>
+                          <p:cTn id="9" fill="hold">
+                            <p:stCondLst>
+                              <p:cond delay="0"/>
+                            </p:stCondLst>
+                            <p:childTnLst>
+                              <p:par>
+                                <p:cTn id="10" presetID="10" presetClass="entr" presetSubtype="0" fill="hold" nodeType="clickEffect">
+                                  <p:stCondLst>
+                                    <p:cond delay="0"/>
+                                  </p:stCondLst>
+                                  <p:childTnLst>
+                                    <p:set>
+                                      <p:cBhvr>
+                                        <p:cTn id="11" dur="1" fill="hold">
+                                          <p:stCondLst>
+                                            <p:cond delay="0"/>
+                                          </p:stCondLst>
+                                        </p:cTn>
+                                        <p:tgtEl>
+                                          <p:spTgt spid="3">
+                                            <p:txEl>
+                                              <p:pRg st="1" end="1"/>
+                                            </p:txEl>
+                                          </p:spTgt>
+                                        </p:tgtEl>
+                                        <p:attrNameLst>
+                                          <p:attrName>style.visibility</p:attrName>
+                                        </p:attrNameLst>
+                                      </p:cBhvr>
+                                      <p:to>
+                                        <p:strVal val="visible"/>
+                                      </p:to>
+                                    </p:set>
+                                    <p:animEffect transition="in" filter="fade">
+                                      <p:cBhvr>
+                                        <p:cTn id="12" dur="500"/>
+                                        <p:tgtEl>
+                                          <p:spTgt spid="3">
+                                            <p:txEl>
+                                              <p:pRg st="1" end="1"/>
+                                            </p:txEl>
+                                          </p:spTgt>
+                                        </p:tgtEl>
+                                      </p:cBhvr>
+                                    </p:animEffect>
+                                  </p:childTnLst>
+                                </p:cTn>
+                              </p:par>
+                            </p:childTnLst>
+                          </p:cTn>
+                        </p:par>
+                      </p:childTnLst>
+                    </p:cTn>
+                  </p:par>
+                  <p:par>
+                    <p:cTn id="13" fill="hold">
+                      <p:stCondLst>
+                        <p:cond delay="indefinite"/>
+                      </p:stCondLst>
+                      <p:childTnLst>
+                        <p:par>
+                          <p:cTn id="14" fill="hold">
+                            <p:stCondLst>
+                              <p:cond delay="0"/>
+                            </p:stCondLst>
+                            <p:childTnLst>
+                              <p:par>
+                                <p:cTn id="15" presetID="10" presetClass="entr" presetSubtype="0" fill="hold" nodeType="clickEffect">
+                                  <p:stCondLst>
+                                    <p:cond delay="0"/>
+                                  </p:stCondLst>
+                                  <p:childTnLst>
+                                    <p:set>
+                                      <p:cBhvr>
+                                        <p:cTn id="16" dur="1" fill="hold">
+                                          <p:stCondLst>
+                                            <p:cond delay="0"/>
+                                          </p:stCondLst>
+                                        </p:cTn>
+                                        <p:tgtEl>
+                                          <p:spTgt spid="3">
+                                            <p:txEl>
+                                              <p:pRg st="2" end="2"/>
+                                            </p:txEl>
+                                          </p:spTgt>
+                                        </p:tgtEl>
+                                        <p:attrNameLst>
+                                          <p:attrName>style.visibility</p:attrName>
+                                        </p:attrNameLst>
+                                      </p:cBhvr>
+                                      <p:to>
+                                        <p:strVal val="visible"/>
+                                      </p:to>
+                                    </p:set>
+                                    <p:animEffect transition="in" filter="fade">
+                                      <p:cBhvr>
+                                        <p:cTn id="17" dur="500"/>
+                                        <p:tgtEl>
+                                          <p:spTgt spid="3">
+                                            <p:txEl>
+                                              <p:pRg st="2" end="2"/>
+                                            </p:txEl>
+                                          </p:spTgt>
+                                        </p:tgtEl>
+                                      </p:cBhvr>
+                                    </p:animEffect>
+                                  </p:childTnLst>
+                                </p:cTn>
+                              </p:par>
+                            </p:childTnLst>
+                          </p:cTn>
+                        </p:par>
+                      </p:childTnLst>
+                    </p:cTn>
+                  </p:par>
+                </p:childTnLst>
+              </p:cTn>
+              <p:prevCondLst>
+                <p:cond evt="onPrev" delay="0">
+                  <p:tgtEl>
+                    <p:sldTgt/>
+                  </p:tgtEl>
+                </p:cond>
+              </p:prevCondLst>
+              <p:nextCondLst>
+                <p:cond evt="onNext" delay="0">
+                  <p:tgtEl>
+                    <p:sldTgt/>
+                  </p:tgtEl>
+                </p:cond>
+              </p:nextCondLst>
+            </p:seq>
+          </p:childTnLst>
+        </p:cTn>
+      </p:par>
+    </p:tnLst>
+  </p:timing>
+  <p:extLst>
+    <p:ext uri="{6950BFC3-D8DA-4A85-94F7-54DA5524770B}">
+      <p188:commentRel xmlns:p188="http://schemas.microsoft.com/office/powerpoint/2018/8/main" r:id="rId2"/>
+    </p:ext>
+  </p:extLst>
+</p:sld>
+</file>
+
+<file path=ppt/slides/slide20.xml><?xml version="1.0" encoding="utf-8"?>
 <p:sld xmlns:a="http://schemas.openxmlformats.org/drawingml/2006/main" xmlns:r="http://schemas.openxmlformats.org/officeDocument/2006/relationships" xmlns:p="http://schemas.openxmlformats.org/presentationml/2006/main">
   <p:cSld>
     <p:bg>
@@ -13315,7 +15421,7 @@
           <a:p>
             <a:fld id="{846B06B1-1179-491F-A487-8E0C403F7C13}" type="slidenum">
               <a:rPr lang="fr-CA" smtClean="0"/>
-              <a:t>19</a:t>
+              <a:t>20</a:t>
             </a:fld>
             <a:endParaRPr lang="fr-CA"/>
           </a:p>
@@ -14340,468 +16446,7 @@
 </p:sld>
 </file>
 
-<file path=ppt/slides/slide2.xml><?xml version="1.0" encoding="utf-8"?>
-<p:sld xmlns:a="http://schemas.openxmlformats.org/drawingml/2006/main" xmlns:r="http://schemas.openxmlformats.org/officeDocument/2006/relationships" xmlns:p="http://schemas.openxmlformats.org/presentationml/2006/main">
-  <p:cSld>
-    <p:bg>
-      <p:bgPr>
-        <a:solidFill>
-          <a:srgbClr val="F5F5F5"/>
-        </a:solidFill>
-        <a:effectLst/>
-      </p:bgPr>
-    </p:bg>
-    <p:spTree>
-      <p:nvGrpSpPr>
-        <p:cNvPr id="1" name="">
-          <a:extLst>
-            <a:ext uri="{FF2B5EF4-FFF2-40B4-BE49-F238E27FC236}">
-              <a16:creationId xmlns:a16="http://schemas.microsoft.com/office/drawing/2014/main" id="{9787BE08-8E87-BDAC-AA37-B1440F99BBB3}"/>
-            </a:ext>
-          </a:extLst>
-        </p:cNvPr>
-        <p:cNvGrpSpPr/>
-        <p:nvPr/>
-      </p:nvGrpSpPr>
-      <p:grpSpPr>
-        <a:xfrm>
-          <a:off x="0" y="0"/>
-          <a:ext cx="0" cy="0"/>
-          <a:chOff x="0" y="0"/>
-          <a:chExt cx="0" cy="0"/>
-        </a:xfrm>
-      </p:grpSpPr>
-      <p:sp>
-        <p:nvSpPr>
-          <p:cNvPr id="2" name="Title 1">
-            <a:extLst>
-              <a:ext uri="{FF2B5EF4-FFF2-40B4-BE49-F238E27FC236}">
-                <a16:creationId xmlns:a16="http://schemas.microsoft.com/office/drawing/2014/main" id="{2539027E-795E-A7E7-3EF9-F5DE694B487D}"/>
-              </a:ext>
-            </a:extLst>
-          </p:cNvPr>
-          <p:cNvSpPr>
-            <a:spLocks noGrp="1"/>
-          </p:cNvSpPr>
-          <p:nvPr>
-            <p:ph type="title"/>
-          </p:nvPr>
-        </p:nvSpPr>
-        <p:spPr/>
-        <p:txBody>
-          <a:bodyPr/>
-          <a:lstStyle/>
-          <a:p>
-            <a:r>
-              <a:rPr lang="en-US" dirty="0">
-                <a:latin typeface="Arial Rounded MT Bold" panose="020F0704030504030204" pitchFamily="34" charset="0"/>
-              </a:rPr>
-              <a:t>Plan</a:t>
-            </a:r>
-            <a:endParaRPr lang="fr-CA" dirty="0">
-              <a:latin typeface="Arial Rounded MT Bold" panose="020F0704030504030204" pitchFamily="34" charset="0"/>
-            </a:endParaRPr>
-          </a:p>
-        </p:txBody>
-      </p:sp>
-      <p:sp>
-        <p:nvSpPr>
-          <p:cNvPr id="3" name="Content Placeholder 2">
-            <a:extLst>
-              <a:ext uri="{FF2B5EF4-FFF2-40B4-BE49-F238E27FC236}">
-                <a16:creationId xmlns:a16="http://schemas.microsoft.com/office/drawing/2014/main" id="{1A2C692D-48DA-2C5B-C433-961FD8C3D9A4}"/>
-              </a:ext>
-            </a:extLst>
-          </p:cNvPr>
-          <p:cNvSpPr>
-            <a:spLocks noGrp="1"/>
-          </p:cNvSpPr>
-          <p:nvPr>
-            <p:ph idx="1"/>
-          </p:nvPr>
-        </p:nvSpPr>
-        <p:spPr/>
-        <p:txBody>
-          <a:bodyPr>
-            <a:normAutofit/>
-          </a:bodyPr>
-          <a:lstStyle/>
-          <a:p>
-            <a:pPr algn="just"/>
-            <a:r>
-              <a:rPr lang="en-US" sz="2000" dirty="0">
-                <a:latin typeface="Consolas" panose="020B0609020204030204" pitchFamily="49" charset="0"/>
-              </a:rPr>
-              <a:t>Notions </a:t>
-            </a:r>
-            <a:r>
-              <a:rPr lang="en-US" sz="2000" dirty="0" err="1">
-                <a:latin typeface="Consolas" panose="020B0609020204030204" pitchFamily="49" charset="0"/>
-              </a:rPr>
-              <a:t>intermédiaires</a:t>
-            </a:r>
-            <a:endParaRPr lang="en-US" sz="2000" dirty="0">
-              <a:latin typeface="Consolas" panose="020B0609020204030204" pitchFamily="49" charset="0"/>
-            </a:endParaRPr>
-          </a:p>
-          <a:p>
-            <a:pPr algn="just"/>
-            <a:r>
-              <a:rPr lang="fr-CA" sz="2000" dirty="0">
-                <a:latin typeface="Consolas" panose="020B0609020204030204" pitchFamily="49" charset="0"/>
-              </a:rPr>
-              <a:t>É</a:t>
-            </a:r>
-            <a:r>
-              <a:rPr lang="en-US" sz="2000" dirty="0" err="1">
-                <a:latin typeface="Consolas" panose="020B0609020204030204" pitchFamily="49" charset="0"/>
-              </a:rPr>
-              <a:t>crire</a:t>
-            </a:r>
-            <a:r>
-              <a:rPr lang="en-US" sz="2000" dirty="0">
-                <a:latin typeface="Consolas" panose="020B0609020204030204" pitchFamily="49" charset="0"/>
-              </a:rPr>
-              <a:t> du</a:t>
-            </a:r>
-            <a:r>
-              <a:rPr lang="fr-CA" sz="2000" dirty="0">
-                <a:latin typeface="Consolas" panose="020B0609020204030204" pitchFamily="49" charset="0"/>
-              </a:rPr>
-              <a:t> "vrai"</a:t>
-            </a:r>
-            <a:r>
-              <a:rPr lang="en-US" sz="2000" i="1" dirty="0">
-                <a:latin typeface="Consolas" panose="020B0609020204030204" pitchFamily="49" charset="0"/>
-              </a:rPr>
-              <a:t> </a:t>
-            </a:r>
-            <a:r>
-              <a:rPr lang="en-US" sz="2000" dirty="0">
-                <a:latin typeface="Consolas" panose="020B0609020204030204" pitchFamily="49" charset="0"/>
-              </a:rPr>
-              <a:t>code</a:t>
-            </a:r>
-          </a:p>
-          <a:p>
-            <a:pPr algn="just"/>
-            <a:r>
-              <a:rPr lang="fr-CA" sz="2000" dirty="0">
-                <a:latin typeface="Consolas" panose="020B0609020204030204" pitchFamily="49" charset="0"/>
-              </a:rPr>
-              <a:t>S'amuser</a:t>
-            </a:r>
-          </a:p>
-        </p:txBody>
-      </p:sp>
-      <p:sp>
-        <p:nvSpPr>
-          <p:cNvPr id="5" name="Slide Number Placeholder 4">
-            <a:extLst>
-              <a:ext uri="{FF2B5EF4-FFF2-40B4-BE49-F238E27FC236}">
-                <a16:creationId xmlns:a16="http://schemas.microsoft.com/office/drawing/2014/main" id="{30A9ACC9-0207-BF8C-83A4-76A47041FF41}"/>
-              </a:ext>
-            </a:extLst>
-          </p:cNvPr>
-          <p:cNvSpPr>
-            <a:spLocks noGrp="1"/>
-          </p:cNvSpPr>
-          <p:nvPr>
-            <p:ph type="sldNum" sz="quarter" idx="12"/>
-          </p:nvPr>
-        </p:nvSpPr>
-        <p:spPr/>
-        <p:txBody>
-          <a:bodyPr/>
-          <a:lstStyle/>
-          <a:p>
-            <a:fld id="{846B06B1-1179-491F-A487-8E0C403F7C13}" type="slidenum">
-              <a:rPr lang="fr-CA" smtClean="0"/>
-              <a:t>2</a:t>
-            </a:fld>
-            <a:endParaRPr lang="fr-CA" dirty="0"/>
-          </a:p>
-        </p:txBody>
-      </p:sp>
-      <p:pic>
-        <p:nvPicPr>
-          <p:cNvPr id="6" name="Picture 2" descr="Generated QR Image">
-            <a:extLst>
-              <a:ext uri="{FF2B5EF4-FFF2-40B4-BE49-F238E27FC236}">
-                <a16:creationId xmlns:a16="http://schemas.microsoft.com/office/drawing/2014/main" id="{55503CE9-4B4C-6B08-7AE7-D706357A15F7}"/>
-              </a:ext>
-            </a:extLst>
-          </p:cNvPr>
-          <p:cNvPicPr>
-            <a:picLocks noChangeAspect="1" noChangeArrowheads="1"/>
-          </p:cNvPicPr>
-          <p:nvPr/>
-        </p:nvPicPr>
-        <p:blipFill>
-          <a:blip r:embed="rId3">
-            <a:extLst>
-              <a:ext uri="{28A0092B-C50C-407E-A947-70E740481C1C}">
-                <a14:useLocalDpi xmlns:a14="http://schemas.microsoft.com/office/drawing/2010/main" val="0"/>
-              </a:ext>
-            </a:extLst>
-          </a:blip>
-          <a:srcRect/>
-          <a:stretch>
-            <a:fillRect/>
-          </a:stretch>
-        </p:blipFill>
-        <p:spPr bwMode="auto">
-          <a:xfrm>
-            <a:off x="6095999" y="1825625"/>
-            <a:ext cx="4105275" cy="4105275"/>
-          </a:xfrm>
-          <a:prstGeom prst="rect">
-            <a:avLst/>
-          </a:prstGeom>
-          <a:noFill/>
-          <a:extLst>
-            <a:ext uri="{909E8E84-426E-40DD-AFC4-6F175D3DCCD1}">
-              <a14:hiddenFill xmlns:a14="http://schemas.microsoft.com/office/drawing/2010/main">
-                <a:solidFill>
-                  <a:srgbClr val="FFFFFF"/>
-                </a:solidFill>
-              </a14:hiddenFill>
-            </a:ext>
-          </a:extLst>
-        </p:spPr>
-      </p:pic>
-    </p:spTree>
-    <p:extLst>
-      <p:ext uri="{BB962C8B-B14F-4D97-AF65-F5344CB8AC3E}">
-        <p14:creationId xmlns:p14="http://schemas.microsoft.com/office/powerpoint/2010/main" val="1707187834"/>
-      </p:ext>
-    </p:extLst>
-  </p:cSld>
-  <p:clrMapOvr>
-    <a:masterClrMapping/>
-  </p:clrMapOvr>
-  <p:timing>
-    <p:tnLst>
-      <p:par>
-        <p:cTn id="1" dur="indefinite" restart="never" nodeType="tmRoot">
-          <p:childTnLst>
-            <p:seq concurrent="1" nextAc="seek">
-              <p:cTn id="2" dur="indefinite" nodeType="mainSeq">
-                <p:childTnLst>
-                  <p:par>
-                    <p:cTn id="3" fill="hold">
-                      <p:stCondLst>
-                        <p:cond delay="indefinite"/>
-                      </p:stCondLst>
-                      <p:childTnLst>
-                        <p:par>
-                          <p:cTn id="4" fill="hold">
-                            <p:stCondLst>
-                              <p:cond delay="0"/>
-                            </p:stCondLst>
-                            <p:childTnLst>
-                              <p:par>
-                                <p:cTn id="5" presetID="10" presetClass="entr" presetSubtype="0" fill="hold" nodeType="clickEffect">
-                                  <p:stCondLst>
-                                    <p:cond delay="0"/>
-                                  </p:stCondLst>
-                                  <p:childTnLst>
-                                    <p:set>
-                                      <p:cBhvr>
-                                        <p:cTn id="6" dur="1" fill="hold">
-                                          <p:stCondLst>
-                                            <p:cond delay="0"/>
-                                          </p:stCondLst>
-                                        </p:cTn>
-                                        <p:tgtEl>
-                                          <p:spTgt spid="3">
-                                            <p:txEl>
-                                              <p:pRg st="0" end="0"/>
-                                            </p:txEl>
-                                          </p:spTgt>
-                                        </p:tgtEl>
-                                        <p:attrNameLst>
-                                          <p:attrName>style.visibility</p:attrName>
-                                        </p:attrNameLst>
-                                      </p:cBhvr>
-                                      <p:to>
-                                        <p:strVal val="visible"/>
-                                      </p:to>
-                                    </p:set>
-                                    <p:animEffect transition="in" filter="fade">
-                                      <p:cBhvr>
-                                        <p:cTn id="7" dur="500"/>
-                                        <p:tgtEl>
-                                          <p:spTgt spid="3">
-                                            <p:txEl>
-                                              <p:pRg st="0" end="0"/>
-                                            </p:txEl>
-                                          </p:spTgt>
-                                        </p:tgtEl>
-                                      </p:cBhvr>
-                                    </p:animEffect>
-                                  </p:childTnLst>
-                                </p:cTn>
-                              </p:par>
-                            </p:childTnLst>
-                          </p:cTn>
-                        </p:par>
-                      </p:childTnLst>
-                    </p:cTn>
-                  </p:par>
-                  <p:par>
-                    <p:cTn id="8" fill="hold">
-                      <p:stCondLst>
-                        <p:cond delay="indefinite"/>
-                      </p:stCondLst>
-                      <p:childTnLst>
-                        <p:par>
-                          <p:cTn id="9" fill="hold">
-                            <p:stCondLst>
-                              <p:cond delay="0"/>
-                            </p:stCondLst>
-                            <p:childTnLst>
-                              <p:par>
-                                <p:cTn id="10" presetID="10" presetClass="entr" presetSubtype="0" fill="hold" nodeType="clickEffect">
-                                  <p:stCondLst>
-                                    <p:cond delay="0"/>
-                                  </p:stCondLst>
-                                  <p:childTnLst>
-                                    <p:set>
-                                      <p:cBhvr>
-                                        <p:cTn id="11" dur="1" fill="hold">
-                                          <p:stCondLst>
-                                            <p:cond delay="0"/>
-                                          </p:stCondLst>
-                                        </p:cTn>
-                                        <p:tgtEl>
-                                          <p:spTgt spid="3">
-                                            <p:txEl>
-                                              <p:pRg st="1" end="1"/>
-                                            </p:txEl>
-                                          </p:spTgt>
-                                        </p:tgtEl>
-                                        <p:attrNameLst>
-                                          <p:attrName>style.visibility</p:attrName>
-                                        </p:attrNameLst>
-                                      </p:cBhvr>
-                                      <p:to>
-                                        <p:strVal val="visible"/>
-                                      </p:to>
-                                    </p:set>
-                                    <p:animEffect transition="in" filter="fade">
-                                      <p:cBhvr>
-                                        <p:cTn id="12" dur="500"/>
-                                        <p:tgtEl>
-                                          <p:spTgt spid="3">
-                                            <p:txEl>
-                                              <p:pRg st="1" end="1"/>
-                                            </p:txEl>
-                                          </p:spTgt>
-                                        </p:tgtEl>
-                                      </p:cBhvr>
-                                    </p:animEffect>
-                                  </p:childTnLst>
-                                </p:cTn>
-                              </p:par>
-                            </p:childTnLst>
-                          </p:cTn>
-                        </p:par>
-                      </p:childTnLst>
-                    </p:cTn>
-                  </p:par>
-                  <p:par>
-                    <p:cTn id="13" fill="hold">
-                      <p:stCondLst>
-                        <p:cond delay="indefinite"/>
-                      </p:stCondLst>
-                      <p:childTnLst>
-                        <p:par>
-                          <p:cTn id="14" fill="hold">
-                            <p:stCondLst>
-                              <p:cond delay="0"/>
-                            </p:stCondLst>
-                            <p:childTnLst>
-                              <p:par>
-                                <p:cTn id="15" presetID="10" presetClass="entr" presetSubtype="0" fill="hold" nodeType="clickEffect">
-                                  <p:stCondLst>
-                                    <p:cond delay="0"/>
-                                  </p:stCondLst>
-                                  <p:childTnLst>
-                                    <p:set>
-                                      <p:cBhvr>
-                                        <p:cTn id="16" dur="1" fill="hold">
-                                          <p:stCondLst>
-                                            <p:cond delay="0"/>
-                                          </p:stCondLst>
-                                        </p:cTn>
-                                        <p:tgtEl>
-                                          <p:spTgt spid="3">
-                                            <p:txEl>
-                                              <p:pRg st="2" end="2"/>
-                                            </p:txEl>
-                                          </p:spTgt>
-                                        </p:tgtEl>
-                                        <p:attrNameLst>
-                                          <p:attrName>style.visibility</p:attrName>
-                                        </p:attrNameLst>
-                                      </p:cBhvr>
-                                      <p:to>
-                                        <p:strVal val="visible"/>
-                                      </p:to>
-                                    </p:set>
-                                    <p:animEffect transition="in" filter="fade">
-                                      <p:cBhvr>
-                                        <p:cTn id="17" dur="500"/>
-                                        <p:tgtEl>
-                                          <p:spTgt spid="3">
-                                            <p:txEl>
-                                              <p:pRg st="2" end="2"/>
-                                            </p:txEl>
-                                          </p:spTgt>
-                                        </p:tgtEl>
-                                      </p:cBhvr>
-                                    </p:animEffect>
-                                  </p:childTnLst>
-                                </p:cTn>
-                              </p:par>
-                            </p:childTnLst>
-                          </p:cTn>
-                        </p:par>
-                      </p:childTnLst>
-                    </p:cTn>
-                  </p:par>
-                </p:childTnLst>
-              </p:cTn>
-              <p:prevCondLst>
-                <p:cond evt="onPrev" delay="0">
-                  <p:tgtEl>
-                    <p:sldTgt/>
-                  </p:tgtEl>
-                </p:cond>
-              </p:prevCondLst>
-              <p:nextCondLst>
-                <p:cond evt="onNext" delay="0">
-                  <p:tgtEl>
-                    <p:sldTgt/>
-                  </p:tgtEl>
-                </p:cond>
-              </p:nextCondLst>
-            </p:seq>
-          </p:childTnLst>
-        </p:cTn>
-      </p:par>
-    </p:tnLst>
-  </p:timing>
-  <p:extLst>
-    <p:ext uri="{6950BFC3-D8DA-4A85-94F7-54DA5524770B}">
-      <p188:commentRel xmlns:p188="http://schemas.microsoft.com/office/powerpoint/2018/8/main" r:id="rId2"/>
-    </p:ext>
-  </p:extLst>
-</p:sld>
-</file>
-
-<file path=ppt/slides/slide20.xml><?xml version="1.0" encoding="utf-8"?>
+<file path=ppt/slides/slide21.xml><?xml version="1.0" encoding="utf-8"?>
 <p:sld xmlns:a="http://schemas.openxmlformats.org/drawingml/2006/main" xmlns:r="http://schemas.openxmlformats.org/officeDocument/2006/relationships" xmlns:p="http://schemas.openxmlformats.org/presentationml/2006/main">
   <p:cSld>
     <p:bg>
@@ -15068,7 +16713,7 @@
           <a:p>
             <a:fld id="{846B06B1-1179-491F-A487-8E0C403F7C13}" type="slidenum">
               <a:rPr lang="fr-CA" smtClean="0"/>
-              <a:t>20</a:t>
+              <a:t>21</a:t>
             </a:fld>
             <a:endParaRPr lang="fr-CA"/>
           </a:p>
@@ -15592,7 +17237,7 @@
 </p:sld>
 </file>
 
-<file path=ppt/slides/slide21.xml><?xml version="1.0" encoding="utf-8"?>
+<file path=ppt/slides/slide22.xml><?xml version="1.0" encoding="utf-8"?>
 <p:sld xmlns:a="http://schemas.openxmlformats.org/drawingml/2006/main" xmlns:r="http://schemas.openxmlformats.org/officeDocument/2006/relationships" xmlns:p="http://schemas.openxmlformats.org/presentationml/2006/main">
   <p:cSld>
     <p:bg>
@@ -15646,7 +17291,7 @@
           <a:p>
             <a:fld id="{846B06B1-1179-491F-A487-8E0C403F7C13}" type="slidenum">
               <a:rPr lang="fr-CA" smtClean="0"/>
-              <a:t>21</a:t>
+              <a:t>22</a:t>
             </a:fld>
             <a:endParaRPr lang="fr-CA"/>
           </a:p>
@@ -16702,7 +18347,7 @@
 </p:sld>
 </file>
 
-<file path=ppt/slides/slide22.xml><?xml version="1.0" encoding="utf-8"?>
+<file path=ppt/slides/slide23.xml><?xml version="1.0" encoding="utf-8"?>
 <p:sld xmlns:a="http://schemas.openxmlformats.org/drawingml/2006/main" xmlns:r="http://schemas.openxmlformats.org/officeDocument/2006/relationships" xmlns:p="http://schemas.openxmlformats.org/presentationml/2006/main">
   <p:cSld>
     <p:bg>
@@ -16826,7 +18471,7 @@
           <a:p>
             <a:fld id="{846B06B1-1179-491F-A487-8E0C403F7C13}" type="slidenum">
               <a:rPr lang="fr-CA" smtClean="0"/>
-              <a:t>22</a:t>
+              <a:t>23</a:t>
             </a:fld>
             <a:endParaRPr lang="fr-CA"/>
           </a:p>
@@ -17810,7 +19455,7 @@
 </p:sld>
 </file>
 
-<file path=ppt/slides/slide23.xml><?xml version="1.0" encoding="utf-8"?>
+<file path=ppt/slides/slide24.xml><?xml version="1.0" encoding="utf-8"?>
 <p:sld xmlns:a="http://schemas.openxmlformats.org/drawingml/2006/main" xmlns:r="http://schemas.openxmlformats.org/officeDocument/2006/relationships" xmlns:p="http://schemas.openxmlformats.org/presentationml/2006/main">
   <p:cSld>
     <p:bg>
@@ -17911,7 +19556,7 @@
           <a:p>
             <a:fld id="{846B06B1-1179-491F-A487-8E0C403F7C13}" type="slidenum">
               <a:rPr lang="fr-CA" smtClean="0"/>
-              <a:t>23</a:t>
+              <a:t>24</a:t>
             </a:fld>
             <a:endParaRPr lang="fr-CA"/>
           </a:p>
@@ -18884,7 +20529,7 @@
 </p:sld>
 </file>
 
-<file path=ppt/slides/slide24.xml><?xml version="1.0" encoding="utf-8"?>
+<file path=ppt/slides/slide25.xml><?xml version="1.0" encoding="utf-8"?>
 <p:sld xmlns:a="http://schemas.openxmlformats.org/drawingml/2006/main" xmlns:r="http://schemas.openxmlformats.org/officeDocument/2006/relationships" xmlns:p="http://schemas.openxmlformats.org/presentationml/2006/main">
   <p:cSld>
     <p:bg>
@@ -19333,7 +20978,7 @@
           <a:p>
             <a:fld id="{846B06B1-1179-491F-A487-8E0C403F7C13}" type="slidenum">
               <a:rPr lang="fr-CA" smtClean="0"/>
-              <a:t>24</a:t>
+              <a:t>25</a:t>
             </a:fld>
             <a:endParaRPr lang="fr-CA"/>
           </a:p>
@@ -19352,7 +20997,7 @@
 </p:sld>
 </file>
 
-<file path=ppt/slides/slide25.xml><?xml version="1.0" encoding="utf-8"?>
+<file path=ppt/slides/slide26.xml><?xml version="1.0" encoding="utf-8"?>
 <p:sld xmlns:a="http://schemas.openxmlformats.org/drawingml/2006/main" xmlns:r="http://schemas.openxmlformats.org/officeDocument/2006/relationships" xmlns:p="http://schemas.openxmlformats.org/presentationml/2006/main">
   <p:cSld>
     <p:bg>
@@ -19980,7 +21625,7 @@
           <a:p>
             <a:fld id="{846B06B1-1179-491F-A487-8E0C403F7C13}" type="slidenum">
               <a:rPr lang="fr-CA" smtClean="0"/>
-              <a:t>25</a:t>
+              <a:t>26</a:t>
             </a:fld>
             <a:endParaRPr lang="fr-CA"/>
           </a:p>
@@ -21240,7 +22885,7 @@
 </p:sld>
 </file>
 
-<file path=ppt/slides/slide26.xml><?xml version="1.0" encoding="utf-8"?>
+<file path=ppt/slides/slide27.xml><?xml version="1.0" encoding="utf-8"?>
 <p:sld xmlns:a="http://schemas.openxmlformats.org/drawingml/2006/main" xmlns:r="http://schemas.openxmlformats.org/officeDocument/2006/relationships" xmlns:p="http://schemas.openxmlformats.org/presentationml/2006/main">
   <p:cSld>
     <p:bg>
@@ -21681,7 +23326,7 @@
           <a:p>
             <a:fld id="{846B06B1-1179-491F-A487-8E0C403F7C13}" type="slidenum">
               <a:rPr lang="fr-CA" smtClean="0"/>
-              <a:t>26</a:t>
+              <a:t>27</a:t>
             </a:fld>
             <a:endParaRPr lang="fr-CA"/>
           </a:p>
@@ -22313,7 +23958,7 @@
 </p:sld>
 </file>
 
-<file path=ppt/slides/slide27.xml><?xml version="1.0" encoding="utf-8"?>
+<file path=ppt/slides/slide28.xml><?xml version="1.0" encoding="utf-8"?>
 <p:sld xmlns:a="http://schemas.openxmlformats.org/drawingml/2006/main" xmlns:r="http://schemas.openxmlformats.org/officeDocument/2006/relationships" xmlns:p="http://schemas.openxmlformats.org/presentationml/2006/main">
   <p:cSld>
     <p:bg>
@@ -22810,7 +24455,7 @@
           <a:p>
             <a:fld id="{846B06B1-1179-491F-A487-8E0C403F7C13}" type="slidenum">
               <a:rPr lang="fr-CA" smtClean="0"/>
-              <a:t>27</a:t>
+              <a:t>28</a:t>
             </a:fld>
             <a:endParaRPr lang="fr-CA"/>
           </a:p>
@@ -23225,7 +24870,7 @@
 </p:sld>
 </file>
 
-<file path=ppt/slides/slide28.xml><?xml version="1.0" encoding="utf-8"?>
+<file path=ppt/slides/slide29.xml><?xml version="1.0" encoding="utf-8"?>
 <p:sld xmlns:a="http://schemas.openxmlformats.org/drawingml/2006/main" xmlns:r="http://schemas.openxmlformats.org/officeDocument/2006/relationships" xmlns:p="http://schemas.openxmlformats.org/presentationml/2006/main">
   <p:cSld>
     <p:bg>
@@ -23803,7 +25448,7 @@
           <a:p>
             <a:fld id="{846B06B1-1179-491F-A487-8E0C403F7C13}" type="slidenum">
               <a:rPr lang="fr-CA" smtClean="0"/>
-              <a:t>28</a:t>
+              <a:t>29</a:t>
             </a:fld>
             <a:endParaRPr lang="fr-CA"/>
           </a:p>
@@ -24541,7 +26186,1392 @@
 </p:sld>
 </file>
 
-<file path=ppt/slides/slide29.xml><?xml version="1.0" encoding="utf-8"?>
+<file path=ppt/slides/slide3.xml><?xml version="1.0" encoding="utf-8"?>
+<p:sld xmlns:a="http://schemas.openxmlformats.org/drawingml/2006/main" xmlns:r="http://schemas.openxmlformats.org/officeDocument/2006/relationships" xmlns:p="http://schemas.openxmlformats.org/presentationml/2006/main">
+  <p:cSld>
+    <p:bg>
+      <p:bgPr>
+        <a:solidFill>
+          <a:srgbClr val="F5F5F5"/>
+        </a:solidFill>
+        <a:effectLst/>
+      </p:bgPr>
+    </p:bg>
+    <p:spTree>
+      <p:nvGrpSpPr>
+        <p:cNvPr id="1" name="">
+          <a:extLst>
+            <a:ext uri="{FF2B5EF4-FFF2-40B4-BE49-F238E27FC236}">
+              <a16:creationId xmlns:a16="http://schemas.microsoft.com/office/drawing/2014/main" id="{7AE562C1-DEBE-120A-68B7-9B3CEE9F8CF7}"/>
+            </a:ext>
+          </a:extLst>
+        </p:cNvPr>
+        <p:cNvGrpSpPr/>
+        <p:nvPr/>
+      </p:nvGrpSpPr>
+      <p:grpSpPr>
+        <a:xfrm>
+          <a:off x="0" y="0"/>
+          <a:ext cx="0" cy="0"/>
+          <a:chOff x="0" y="0"/>
+          <a:chExt cx="0" cy="0"/>
+        </a:xfrm>
+      </p:grpSpPr>
+      <p:sp>
+        <p:nvSpPr>
+          <p:cNvPr id="2" name="Title 1">
+            <a:extLst>
+              <a:ext uri="{FF2B5EF4-FFF2-40B4-BE49-F238E27FC236}">
+                <a16:creationId xmlns:a16="http://schemas.microsoft.com/office/drawing/2014/main" id="{9DD94D18-8A9D-0F83-56A0-3E229B4F30F4}"/>
+              </a:ext>
+            </a:extLst>
+          </p:cNvPr>
+          <p:cNvSpPr>
+            <a:spLocks noGrp="1"/>
+          </p:cNvSpPr>
+          <p:nvPr>
+            <p:ph type="title"/>
+          </p:nvPr>
+        </p:nvSpPr>
+        <p:spPr/>
+        <p:txBody>
+          <a:bodyPr/>
+          <a:lstStyle/>
+          <a:p>
+            <a:r>
+              <a:rPr lang="en-US" dirty="0">
+                <a:latin typeface="Arial Rounded MT Bold" panose="020F0704030504030204" pitchFamily="34" charset="0"/>
+              </a:rPr>
+              <a:t>Tests: Assertions</a:t>
+            </a:r>
+            <a:endParaRPr lang="fr-CA" dirty="0">
+              <a:latin typeface="Arial Rounded MT Bold" panose="020F0704030504030204" pitchFamily="34" charset="0"/>
+            </a:endParaRPr>
+          </a:p>
+        </p:txBody>
+      </p:sp>
+      <p:sp>
+        <p:nvSpPr>
+          <p:cNvPr id="3" name="Content Placeholder 2">
+            <a:extLst>
+              <a:ext uri="{FF2B5EF4-FFF2-40B4-BE49-F238E27FC236}">
+                <a16:creationId xmlns:a16="http://schemas.microsoft.com/office/drawing/2014/main" id="{4CF6E5EC-3D7E-2CEA-1F5C-3BC34F96A110}"/>
+              </a:ext>
+            </a:extLst>
+          </p:cNvPr>
+          <p:cNvSpPr>
+            <a:spLocks noGrp="1"/>
+          </p:cNvSpPr>
+          <p:nvPr>
+            <p:ph idx="1"/>
+          </p:nvPr>
+        </p:nvSpPr>
+        <p:spPr/>
+        <p:txBody>
+          <a:bodyPr>
+            <a:normAutofit/>
+          </a:bodyPr>
+          <a:lstStyle/>
+          <a:p>
+            <a:pPr algn="just"/>
+            <a:br>
+              <a:rPr lang="fr-CA" sz="1600" dirty="0">
+                <a:latin typeface="Consolas" panose="020B0609020204030204" pitchFamily="49" charset="0"/>
+              </a:rPr>
+            </a:br>
+            <a:endParaRPr lang="fr-CA" sz="1600" dirty="0">
+              <a:latin typeface="Consolas" panose="020B0609020204030204" pitchFamily="49" charset="0"/>
+            </a:endParaRPr>
+          </a:p>
+          <a:p>
+            <a:pPr algn="just">
+              <a:lnSpc>
+                <a:spcPct val="110000"/>
+              </a:lnSpc>
+            </a:pPr>
+            <a:r>
+              <a:rPr lang="fr-CA" sz="1600" dirty="0">
+                <a:latin typeface="Consolas" panose="020B0609020204030204" pitchFamily="49" charset="0"/>
+              </a:rPr>
+              <a:t>Lance une erreur (</a:t>
+            </a:r>
+            <a:r>
+              <a:rPr lang="fr-CA" sz="1600" dirty="0" err="1">
+                <a:latin typeface="Consolas" panose="020B0609020204030204" pitchFamily="49" charset="0"/>
+              </a:rPr>
+              <a:t>AssertionError</a:t>
+            </a:r>
+            <a:r>
+              <a:rPr lang="fr-CA" sz="1600" dirty="0">
+                <a:latin typeface="Consolas" panose="020B0609020204030204" pitchFamily="49" charset="0"/>
+              </a:rPr>
+              <a:t>) lorsqu'une condition est fausse</a:t>
+            </a:r>
+          </a:p>
+          <a:p>
+            <a:pPr lvl="1" algn="just">
+              <a:lnSpc>
+                <a:spcPct val="110000"/>
+              </a:lnSpc>
+            </a:pPr>
+            <a:r>
+              <a:rPr lang="fr-CA" sz="1600" dirty="0">
+                <a:latin typeface="Consolas" panose="020B0609020204030204" pitchFamily="49" charset="0"/>
+              </a:rPr>
+              <a:t>Modèle mental: </a:t>
+            </a:r>
+            <a:r>
+              <a:rPr lang="fr-CA" sz="1600" b="1" dirty="0">
+                <a:latin typeface="Consolas" panose="020B0609020204030204" pitchFamily="49" charset="0"/>
+              </a:rPr>
+              <a:t>Lorsqu'un test échoue</a:t>
+            </a:r>
+          </a:p>
+          <a:p>
+            <a:pPr algn="just">
+              <a:lnSpc>
+                <a:spcPct val="160000"/>
+              </a:lnSpc>
+            </a:pPr>
+            <a:r>
+              <a:rPr lang="fr-CA" sz="1600" dirty="0">
+                <a:latin typeface="Consolas" panose="020B0609020204030204" pitchFamily="49" charset="0"/>
+              </a:rPr>
+              <a:t>Pour </a:t>
+            </a:r>
+            <a:r>
+              <a:rPr lang="fr-CA" sz="1600" b="1" dirty="0">
+                <a:latin typeface="Consolas" panose="020B0609020204030204" pitchFamily="49" charset="0"/>
+              </a:rPr>
+              <a:t>ce qui doit absolument être vrai</a:t>
+            </a:r>
+            <a:endParaRPr lang="fr-CA" sz="1600" dirty="0">
+              <a:latin typeface="Consolas" panose="020B0609020204030204" pitchFamily="49" charset="0"/>
+            </a:endParaRPr>
+          </a:p>
+          <a:p>
+            <a:pPr algn="just">
+              <a:lnSpc>
+                <a:spcPct val="150000"/>
+              </a:lnSpc>
+            </a:pPr>
+            <a:r>
+              <a:rPr lang="fr-CA" sz="1600" dirty="0">
+                <a:latin typeface="Consolas" panose="020B0609020204030204" pitchFamily="49" charset="0"/>
+              </a:rPr>
+              <a:t>Peut être désactivé à l'exécution (</a:t>
+            </a:r>
+            <a:r>
+              <a:rPr lang="fr-CA" sz="1600" b="1" dirty="0">
+                <a:latin typeface="Consolas" panose="020B0609020204030204" pitchFamily="49" charset="0"/>
+              </a:rPr>
+              <a:t>python -O</a:t>
+            </a:r>
+            <a:r>
+              <a:rPr lang="fr-CA" sz="1600" dirty="0">
+                <a:latin typeface="Consolas" panose="020B0609020204030204" pitchFamily="49" charset="0"/>
+              </a:rPr>
+              <a:t>) ... sauf pour la NASA</a:t>
+            </a:r>
+          </a:p>
+          <a:p>
+            <a:pPr marL="0" indent="0" algn="ctr">
+              <a:buNone/>
+            </a:pPr>
+            <a:r>
+              <a:rPr lang="fr-CA" sz="1400" dirty="0">
+                <a:latin typeface="Consolas" panose="020B0609020204030204" pitchFamily="49" charset="0"/>
+                <a:hlinkClick r:id="rId2"/>
+              </a:rPr>
+              <a:t>https://fr.wikipedia.org/wiki/The_Power_of_10:_Rules_for_Developing_Safety-Critical_Code</a:t>
+            </a:r>
+            <a:endParaRPr lang="fr-CA" sz="1400" dirty="0">
+              <a:latin typeface="Consolas" panose="020B0609020204030204" pitchFamily="49" charset="0"/>
+            </a:endParaRPr>
+          </a:p>
+        </p:txBody>
+      </p:sp>
+      <p:sp>
+        <p:nvSpPr>
+          <p:cNvPr id="5" name="Slide Number Placeholder 4">
+            <a:extLst>
+              <a:ext uri="{FF2B5EF4-FFF2-40B4-BE49-F238E27FC236}">
+                <a16:creationId xmlns:a16="http://schemas.microsoft.com/office/drawing/2014/main" id="{1FA2DB27-CAC8-7766-F85F-45770DF3095A}"/>
+              </a:ext>
+            </a:extLst>
+          </p:cNvPr>
+          <p:cNvSpPr>
+            <a:spLocks noGrp="1"/>
+          </p:cNvSpPr>
+          <p:nvPr>
+            <p:ph type="sldNum" sz="quarter" idx="12"/>
+          </p:nvPr>
+        </p:nvSpPr>
+        <p:spPr/>
+        <p:txBody>
+          <a:bodyPr/>
+          <a:lstStyle/>
+          <a:p>
+            <a:fld id="{846B06B1-1179-491F-A487-8E0C403F7C13}" type="slidenum">
+              <a:rPr lang="fr-CA" smtClean="0"/>
+              <a:t>3</a:t>
+            </a:fld>
+            <a:endParaRPr lang="fr-CA" dirty="0"/>
+          </a:p>
+        </p:txBody>
+      </p:sp>
+      <p:sp>
+        <p:nvSpPr>
+          <p:cNvPr id="4" name="TextBox 3">
+            <a:extLst>
+              <a:ext uri="{FF2B5EF4-FFF2-40B4-BE49-F238E27FC236}">
+                <a16:creationId xmlns:a16="http://schemas.microsoft.com/office/drawing/2014/main" id="{57A8D393-74C1-0C40-F408-06525D65E091}"/>
+              </a:ext>
+            </a:extLst>
+          </p:cNvPr>
+          <p:cNvSpPr txBox="1"/>
+          <p:nvPr/>
+        </p:nvSpPr>
+        <p:spPr>
+          <a:xfrm>
+            <a:off x="2230873" y="1728788"/>
+            <a:ext cx="7730249" cy="442630"/>
+          </a:xfrm>
+          <a:prstGeom prst="roundRect">
+            <a:avLst/>
+          </a:prstGeom>
+          <a:solidFill>
+            <a:srgbClr val="FFF2CC">
+              <a:alpha val="49803"/>
+            </a:srgbClr>
+          </a:solidFill>
+          <a:ln w="9525" cap="flat" cmpd="sng">
+            <a:solidFill>
+              <a:schemeClr val="dk1"/>
+            </a:solidFill>
+            <a:prstDash val="solid"/>
+            <a:round/>
+            <a:headEnd type="none" w="sm" len="sm"/>
+            <a:tailEnd type="none" w="sm" len="sm"/>
+          </a:ln>
+        </p:spPr>
+        <p:txBody>
+          <a:bodyPr spcFirstLastPara="1" wrap="square" lIns="91425" tIns="45700" rIns="91425" bIns="45700" anchor="t" anchorCtr="0">
+            <a:spAutoFit/>
+          </a:bodyPr>
+          <a:lstStyle>
+            <a:defPPr>
+              <a:defRPr lang="en-US"/>
+            </a:defPPr>
+            <a:lvl1pPr marR="0" lvl="0" indent="0" algn="ctr">
+              <a:lnSpc>
+                <a:spcPct val="100000"/>
+              </a:lnSpc>
+              <a:spcBef>
+                <a:spcPts val="0"/>
+              </a:spcBef>
+              <a:spcAft>
+                <a:spcPts val="0"/>
+              </a:spcAft>
+              <a:buClr>
+                <a:srgbClr val="000000"/>
+              </a:buClr>
+              <a:buSzPts val="1400"/>
+              <a:buFont typeface="Consolas"/>
+              <a:buNone/>
+              <a:defRPr sz="2800" b="1" i="0" u="none" strike="noStrike" cap="none">
+                <a:solidFill>
+                  <a:srgbClr val="000000"/>
+                </a:solidFill>
+                <a:latin typeface="Consolas"/>
+                <a:ea typeface="Consolas"/>
+                <a:cs typeface="Consolas"/>
+              </a:defRPr>
+            </a:lvl1pPr>
+          </a:lstStyle>
+          <a:p>
+            <a:r>
+              <a:rPr lang="en-US" sz="2000" dirty="0"/>
+              <a:t>assert </a:t>
+            </a:r>
+            <a:r>
+              <a:rPr lang="en-US" sz="2000" dirty="0" err="1"/>
+              <a:t>expression_booleenne</a:t>
+            </a:r>
+            <a:r>
+              <a:rPr lang="en-US" sz="2000" dirty="0"/>
+              <a:t>, </a:t>
+            </a:r>
+            <a:r>
+              <a:rPr lang="en-US" sz="2000" dirty="0" err="1"/>
+              <a:t>message_si_faux</a:t>
+            </a:r>
+            <a:endParaRPr lang="en-US" sz="2000" dirty="0"/>
+          </a:p>
+        </p:txBody>
+      </p:sp>
+      <p:grpSp>
+        <p:nvGrpSpPr>
+          <p:cNvPr id="6" name="Google Shape;354;p18">
+            <a:extLst>
+              <a:ext uri="{FF2B5EF4-FFF2-40B4-BE49-F238E27FC236}">
+                <a16:creationId xmlns:a16="http://schemas.microsoft.com/office/drawing/2014/main" id="{530A920A-ECA4-8FCD-A08E-677BC9DD3228}"/>
+              </a:ext>
+            </a:extLst>
+          </p:cNvPr>
+          <p:cNvGrpSpPr/>
+          <p:nvPr/>
+        </p:nvGrpSpPr>
+        <p:grpSpPr>
+          <a:xfrm>
+            <a:off x="2306240" y="4664961"/>
+            <a:ext cx="7579514" cy="1512002"/>
+            <a:chOff x="6682372" y="3766184"/>
+            <a:chExt cx="8984825" cy="691201"/>
+          </a:xfrm>
+        </p:grpSpPr>
+        <p:sp>
+          <p:nvSpPr>
+            <p:cNvPr id="7" name="Google Shape;355;p18">
+              <a:extLst>
+                <a:ext uri="{FF2B5EF4-FFF2-40B4-BE49-F238E27FC236}">
+                  <a16:creationId xmlns:a16="http://schemas.microsoft.com/office/drawing/2014/main" id="{87D4FF6B-A94D-24FE-EF28-D0E429EA4110}"/>
+                </a:ext>
+              </a:extLst>
+            </p:cNvPr>
+            <p:cNvSpPr/>
+            <p:nvPr/>
+          </p:nvSpPr>
+          <p:spPr>
+            <a:xfrm>
+              <a:off x="6682372" y="3766184"/>
+              <a:ext cx="256567" cy="691200"/>
+            </a:xfrm>
+            <a:prstGeom prst="rect">
+              <a:avLst/>
+            </a:prstGeom>
+            <a:solidFill>
+              <a:srgbClr val="7F7F7F"/>
+            </a:solidFill>
+            <a:ln w="12700" cap="flat" cmpd="sng">
+              <a:solidFill>
+                <a:schemeClr val="dk1"/>
+              </a:solidFill>
+              <a:prstDash val="solid"/>
+              <a:miter lim="800000"/>
+              <a:headEnd type="none" w="sm" len="sm"/>
+              <a:tailEnd type="none" w="sm" len="sm"/>
+            </a:ln>
+          </p:spPr>
+          <p:txBody>
+            <a:bodyPr spcFirstLastPara="1" wrap="square" lIns="91425" tIns="45700" rIns="91425" bIns="45700" anchor="ctr" anchorCtr="0">
+              <a:noAutofit/>
+            </a:bodyPr>
+            <a:lstStyle/>
+            <a:p>
+              <a:pPr marL="0" marR="0" lvl="0" indent="0" algn="ctr" rtl="0">
+                <a:spcBef>
+                  <a:spcPts val="0"/>
+                </a:spcBef>
+                <a:spcAft>
+                  <a:spcPts val="0"/>
+                </a:spcAft>
+                <a:buNone/>
+              </a:pPr>
+              <a:r>
+                <a:rPr lang="fr-CA" sz="1400" dirty="0">
+                  <a:solidFill>
+                    <a:schemeClr val="lt1"/>
+                  </a:solidFill>
+                  <a:latin typeface="Calibri"/>
+                  <a:ea typeface="Calibri"/>
+                  <a:cs typeface="Calibri"/>
+                  <a:sym typeface="Calibri"/>
+                </a:rPr>
+                <a:t>1</a:t>
+              </a:r>
+              <a:endParaRPr dirty="0"/>
+            </a:p>
+            <a:p>
+              <a:pPr marL="0" marR="0" lvl="0" indent="0" algn="ctr" rtl="0">
+                <a:spcBef>
+                  <a:spcPts val="0"/>
+                </a:spcBef>
+                <a:spcAft>
+                  <a:spcPts val="0"/>
+                </a:spcAft>
+                <a:buNone/>
+              </a:pPr>
+              <a:r>
+                <a:rPr lang="fr-CA" sz="1400" dirty="0">
+                  <a:solidFill>
+                    <a:schemeClr val="lt1"/>
+                  </a:solidFill>
+                  <a:latin typeface="Calibri"/>
+                  <a:ea typeface="Calibri"/>
+                  <a:cs typeface="Calibri"/>
+                  <a:sym typeface="Calibri"/>
+                </a:rPr>
+                <a:t>23</a:t>
+              </a:r>
+              <a:endParaRPr dirty="0"/>
+            </a:p>
+            <a:p>
+              <a:pPr marL="0" marR="0" lvl="0" indent="0" algn="ctr" rtl="0">
+                <a:spcBef>
+                  <a:spcPts val="0"/>
+                </a:spcBef>
+                <a:spcAft>
+                  <a:spcPts val="0"/>
+                </a:spcAft>
+                <a:buNone/>
+              </a:pPr>
+              <a:r>
+                <a:rPr lang="fr-CA" sz="1400" dirty="0">
+                  <a:solidFill>
+                    <a:schemeClr val="lt1"/>
+                  </a:solidFill>
+                  <a:latin typeface="Calibri"/>
+                  <a:ea typeface="Calibri"/>
+                  <a:cs typeface="Calibri"/>
+                  <a:sym typeface="Calibri"/>
+                </a:rPr>
+                <a:t>4</a:t>
+              </a:r>
+              <a:endParaRPr dirty="0"/>
+            </a:p>
+            <a:p>
+              <a:pPr marL="0" marR="0" lvl="0" indent="0" algn="ctr" rtl="0">
+                <a:spcBef>
+                  <a:spcPts val="0"/>
+                </a:spcBef>
+                <a:spcAft>
+                  <a:spcPts val="0"/>
+                </a:spcAft>
+                <a:buNone/>
+              </a:pPr>
+              <a:r>
+                <a:rPr lang="fr-CA" sz="1400" dirty="0">
+                  <a:solidFill>
+                    <a:schemeClr val="lt1"/>
+                  </a:solidFill>
+                  <a:latin typeface="Calibri"/>
+                  <a:ea typeface="Calibri"/>
+                  <a:cs typeface="Calibri"/>
+                  <a:sym typeface="Calibri"/>
+                </a:rPr>
+                <a:t>5</a:t>
+              </a:r>
+            </a:p>
+            <a:p>
+              <a:pPr marL="0" marR="0" lvl="0" indent="0" algn="ctr" rtl="0">
+                <a:spcBef>
+                  <a:spcPts val="0"/>
+                </a:spcBef>
+                <a:spcAft>
+                  <a:spcPts val="0"/>
+                </a:spcAft>
+                <a:buNone/>
+              </a:pPr>
+              <a:r>
+                <a:rPr lang="fr-CA" sz="1400" dirty="0">
+                  <a:solidFill>
+                    <a:schemeClr val="lt1"/>
+                  </a:solidFill>
+                  <a:latin typeface="Calibri"/>
+                  <a:ea typeface="Calibri"/>
+                  <a:cs typeface="Calibri"/>
+                  <a:sym typeface="Calibri"/>
+                </a:rPr>
+                <a:t>6</a:t>
+              </a:r>
+              <a:endParaRPr dirty="0"/>
+            </a:p>
+          </p:txBody>
+        </p:sp>
+        <p:sp>
+          <p:nvSpPr>
+            <p:cNvPr id="8" name="Google Shape;356;p18">
+              <a:extLst>
+                <a:ext uri="{FF2B5EF4-FFF2-40B4-BE49-F238E27FC236}">
+                  <a16:creationId xmlns:a16="http://schemas.microsoft.com/office/drawing/2014/main" id="{4C789759-180C-72BA-D687-8BF5005AF9F0}"/>
+                </a:ext>
+              </a:extLst>
+            </p:cNvPr>
+            <p:cNvSpPr/>
+            <p:nvPr/>
+          </p:nvSpPr>
+          <p:spPr>
+            <a:xfrm>
+              <a:off x="6938939" y="3766185"/>
+              <a:ext cx="8728258" cy="691200"/>
+            </a:xfrm>
+            <a:prstGeom prst="rect">
+              <a:avLst/>
+            </a:prstGeom>
+            <a:solidFill>
+              <a:schemeClr val="dk1"/>
+            </a:solidFill>
+            <a:ln w="12700" cap="flat" cmpd="sng">
+              <a:solidFill>
+                <a:schemeClr val="dk1"/>
+              </a:solidFill>
+              <a:prstDash val="solid"/>
+              <a:miter lim="800000"/>
+              <a:headEnd type="none" w="sm" len="sm"/>
+              <a:tailEnd type="none" w="sm" len="sm"/>
+            </a:ln>
+          </p:spPr>
+          <p:txBody>
+            <a:bodyPr spcFirstLastPara="1" wrap="square" lIns="91425" tIns="45700" rIns="91425" bIns="45700" anchor="ctr" anchorCtr="0">
+              <a:noAutofit/>
+            </a:bodyPr>
+            <a:lstStyle/>
+            <a:p>
+              <a:r>
+                <a:rPr lang="en-CA" sz="1400" b="1" dirty="0">
+                  <a:solidFill>
+                    <a:schemeClr val="bg1"/>
+                  </a:solidFill>
+                  <a:latin typeface="Consolas" panose="020B0609020204030204" pitchFamily="49" charset="0"/>
+                </a:rPr>
+                <a:t>&gt;&gt;&gt; valeur_1 = int(input('</a:t>
+              </a:r>
+              <a:r>
+                <a:rPr lang="en-CA" sz="1400" b="1" dirty="0" err="1">
+                  <a:solidFill>
+                    <a:schemeClr val="bg1"/>
+                  </a:solidFill>
+                  <a:latin typeface="Consolas" panose="020B0609020204030204" pitchFamily="49" charset="0"/>
+                </a:rPr>
+                <a:t>Saisir</a:t>
+              </a:r>
+              <a:r>
+                <a:rPr lang="en-CA" sz="1400" b="1" dirty="0">
+                  <a:solidFill>
+                    <a:schemeClr val="bg1"/>
+                  </a:solidFill>
+                  <a:latin typeface="Consolas" panose="020B0609020204030204" pitchFamily="49" charset="0"/>
+                </a:rPr>
+                <a:t> un </a:t>
+              </a:r>
+              <a:r>
+                <a:rPr lang="en-CA" sz="1400" b="1" dirty="0" err="1">
+                  <a:solidFill>
+                    <a:schemeClr val="bg1"/>
+                  </a:solidFill>
+                  <a:latin typeface="Consolas" panose="020B0609020204030204" pitchFamily="49" charset="0"/>
+                </a:rPr>
+                <a:t>entier</a:t>
+              </a:r>
+              <a:r>
+                <a:rPr lang="en-CA" sz="1400" b="1" dirty="0">
+                  <a:solidFill>
+                    <a:schemeClr val="bg1"/>
+                  </a:solidFill>
+                  <a:latin typeface="Consolas" panose="020B0609020204030204" pitchFamily="49" charset="0"/>
+                </a:rPr>
+                <a:t>: '))</a:t>
+              </a:r>
+            </a:p>
+            <a:p>
+              <a:r>
+                <a:rPr lang="en-CA" sz="1400" b="1" dirty="0" err="1">
+                  <a:solidFill>
+                    <a:schemeClr val="bg1"/>
+                  </a:solidFill>
+                  <a:latin typeface="Consolas" panose="020B0609020204030204" pitchFamily="49" charset="0"/>
+                </a:rPr>
+                <a:t>Saisir</a:t>
+              </a:r>
+              <a:r>
+                <a:rPr lang="en-CA" sz="1400" b="1" dirty="0">
+                  <a:solidFill>
+                    <a:schemeClr val="bg1"/>
+                  </a:solidFill>
+                  <a:latin typeface="Consolas" panose="020B0609020204030204" pitchFamily="49" charset="0"/>
+                </a:rPr>
+                <a:t> un </a:t>
+              </a:r>
+              <a:r>
+                <a:rPr lang="en-CA" sz="1400" b="1" dirty="0" err="1">
+                  <a:solidFill>
+                    <a:schemeClr val="bg1"/>
+                  </a:solidFill>
+                  <a:latin typeface="Consolas" panose="020B0609020204030204" pitchFamily="49" charset="0"/>
+                </a:rPr>
+                <a:t>entier</a:t>
+              </a:r>
+              <a:r>
+                <a:rPr lang="en-CA" sz="1400" b="1" dirty="0">
+                  <a:solidFill>
+                    <a:schemeClr val="bg1"/>
+                  </a:solidFill>
+                  <a:latin typeface="Consolas" panose="020B0609020204030204" pitchFamily="49" charset="0"/>
+                </a:rPr>
+                <a:t>: 1</a:t>
+              </a:r>
+            </a:p>
+            <a:p>
+              <a:r>
+                <a:rPr lang="en-CA" sz="1400" b="1" dirty="0">
+                  <a:solidFill>
+                    <a:schemeClr val="bg1"/>
+                  </a:solidFill>
+                  <a:latin typeface="Consolas" panose="020B0609020204030204" pitchFamily="49" charset="0"/>
+                </a:rPr>
+                <a:t>&gt;&gt;&gt; valeur_2 = int(input('</a:t>
+              </a:r>
+              <a:r>
+                <a:rPr lang="en-CA" sz="1400" b="1" dirty="0" err="1">
+                  <a:solidFill>
+                    <a:schemeClr val="bg1"/>
+                  </a:solidFill>
+                  <a:latin typeface="Consolas" panose="020B0609020204030204" pitchFamily="49" charset="0"/>
+                </a:rPr>
+                <a:t>Saisir</a:t>
+              </a:r>
+              <a:r>
+                <a:rPr lang="en-CA" sz="1400" b="1" dirty="0">
+                  <a:solidFill>
+                    <a:schemeClr val="bg1"/>
+                  </a:solidFill>
+                  <a:latin typeface="Consolas" panose="020B0609020204030204" pitchFamily="49" charset="0"/>
+                </a:rPr>
+                <a:t> un </a:t>
+              </a:r>
+              <a:r>
+                <a:rPr lang="en-CA" sz="1400" b="1" dirty="0" err="1">
+                  <a:solidFill>
+                    <a:schemeClr val="bg1"/>
+                  </a:solidFill>
+                  <a:latin typeface="Consolas" panose="020B0609020204030204" pitchFamily="49" charset="0"/>
+                </a:rPr>
+                <a:t>entier</a:t>
+              </a:r>
+              <a:r>
+                <a:rPr lang="en-CA" sz="1400" b="1" dirty="0">
+                  <a:solidFill>
+                    <a:schemeClr val="bg1"/>
+                  </a:solidFill>
+                  <a:latin typeface="Consolas" panose="020B0609020204030204" pitchFamily="49" charset="0"/>
+                </a:rPr>
+                <a:t> diff</a:t>
+              </a:r>
+              <a:r>
+                <a:rPr lang="fr-CA" sz="1400" b="1" dirty="0" err="1">
+                  <a:solidFill>
+                    <a:schemeClr val="bg1"/>
+                  </a:solidFill>
+                  <a:latin typeface="Consolas" panose="020B0609020204030204" pitchFamily="49" charset="0"/>
+                </a:rPr>
+                <a:t>érent</a:t>
+              </a:r>
+              <a:r>
+                <a:rPr lang="fr-CA" sz="1400" b="1" dirty="0">
+                  <a:solidFill>
+                    <a:schemeClr val="bg1"/>
+                  </a:solidFill>
+                  <a:latin typeface="Consolas" panose="020B0609020204030204" pitchFamily="49" charset="0"/>
+                </a:rPr>
+                <a:t>: '))</a:t>
+              </a:r>
+            </a:p>
+            <a:p>
+              <a:r>
+                <a:rPr lang="en-CA" sz="1400" b="1" dirty="0" err="1">
+                  <a:solidFill>
+                    <a:schemeClr val="bg1"/>
+                  </a:solidFill>
+                  <a:latin typeface="Consolas" panose="020B0609020204030204" pitchFamily="49" charset="0"/>
+                </a:rPr>
+                <a:t>Saisir</a:t>
+              </a:r>
+              <a:r>
+                <a:rPr lang="en-CA" sz="1400" b="1" dirty="0">
+                  <a:solidFill>
+                    <a:schemeClr val="bg1"/>
+                  </a:solidFill>
+                  <a:latin typeface="Consolas" panose="020B0609020204030204" pitchFamily="49" charset="0"/>
+                </a:rPr>
+                <a:t> un </a:t>
+              </a:r>
+              <a:r>
+                <a:rPr lang="en-CA" sz="1400" b="1" dirty="0" err="1">
+                  <a:solidFill>
+                    <a:schemeClr val="bg1"/>
+                  </a:solidFill>
+                  <a:latin typeface="Consolas" panose="020B0609020204030204" pitchFamily="49" charset="0"/>
+                </a:rPr>
+                <a:t>entier</a:t>
+              </a:r>
+              <a:r>
+                <a:rPr lang="en-CA" sz="1400" b="1" dirty="0">
+                  <a:solidFill>
+                    <a:schemeClr val="bg1"/>
+                  </a:solidFill>
+                  <a:latin typeface="Consolas" panose="020B0609020204030204" pitchFamily="49" charset="0"/>
+                </a:rPr>
+                <a:t> diff</a:t>
+              </a:r>
+              <a:r>
+                <a:rPr lang="fr-CA" sz="1400" b="1" dirty="0" err="1">
+                  <a:solidFill>
+                    <a:schemeClr val="bg1"/>
+                  </a:solidFill>
+                  <a:latin typeface="Consolas" panose="020B0609020204030204" pitchFamily="49" charset="0"/>
+                </a:rPr>
+                <a:t>érent</a:t>
+              </a:r>
+              <a:r>
+                <a:rPr lang="fr-CA" sz="1400" b="1" dirty="0">
+                  <a:solidFill>
+                    <a:schemeClr val="bg1"/>
+                  </a:solidFill>
+                  <a:latin typeface="Consolas" panose="020B0609020204030204" pitchFamily="49" charset="0"/>
+                </a:rPr>
+                <a:t>: 1</a:t>
+              </a:r>
+            </a:p>
+            <a:p>
+              <a:r>
+                <a:rPr lang="en-CA" sz="1400" b="1" dirty="0">
+                  <a:solidFill>
+                    <a:schemeClr val="bg1"/>
+                  </a:solidFill>
+                  <a:latin typeface="Consolas" panose="020B0609020204030204" pitchFamily="49" charset="0"/>
+                </a:rPr>
+                <a:t>&gt;&gt;&gt; </a:t>
+              </a:r>
+              <a:r>
+                <a:rPr lang="en-CA" sz="1400" b="1" dirty="0">
+                  <a:solidFill>
+                    <a:srgbClr val="FF2500"/>
+                  </a:solidFill>
+                  <a:latin typeface="Consolas" panose="020B0609020204030204" pitchFamily="49" charset="0"/>
+                </a:rPr>
+                <a:t>assert</a:t>
+              </a:r>
+              <a:r>
+                <a:rPr lang="en-CA" sz="1400" b="1" dirty="0">
+                  <a:solidFill>
+                    <a:schemeClr val="bg1"/>
+                  </a:solidFill>
+                  <a:latin typeface="Consolas" panose="020B0609020204030204" pitchFamily="49" charset="0"/>
+                </a:rPr>
+                <a:t> valeur_1 != valeur_2, 'Les </a:t>
+              </a:r>
+              <a:r>
+                <a:rPr lang="en-CA" sz="1400" b="1" dirty="0" err="1">
+                  <a:solidFill>
+                    <a:schemeClr val="bg1"/>
+                  </a:solidFill>
+                  <a:latin typeface="Consolas" panose="020B0609020204030204" pitchFamily="49" charset="0"/>
+                </a:rPr>
+                <a:t>valeurs</a:t>
+              </a:r>
+              <a:r>
+                <a:rPr lang="en-CA" sz="1400" b="1" dirty="0">
+                  <a:solidFill>
+                    <a:schemeClr val="bg1"/>
+                  </a:solidFill>
+                  <a:latin typeface="Consolas" panose="020B0609020204030204" pitchFamily="49" charset="0"/>
+                </a:rPr>
+                <a:t> </a:t>
+              </a:r>
+              <a:r>
+                <a:rPr lang="en-CA" sz="1400" b="1" dirty="0" err="1">
+                  <a:solidFill>
+                    <a:schemeClr val="bg1"/>
+                  </a:solidFill>
+                  <a:latin typeface="Consolas" panose="020B0609020204030204" pitchFamily="49" charset="0"/>
+                </a:rPr>
+                <a:t>doivent</a:t>
+              </a:r>
+              <a:r>
+                <a:rPr lang="en-CA" sz="1400" b="1" dirty="0">
+                  <a:solidFill>
+                    <a:schemeClr val="bg1"/>
+                  </a:solidFill>
+                  <a:latin typeface="Consolas" panose="020B0609020204030204" pitchFamily="49" charset="0"/>
+                </a:rPr>
+                <a:t> </a:t>
+              </a:r>
+              <a:r>
+                <a:rPr lang="en-CA" sz="1400" b="1" dirty="0" err="1">
+                  <a:solidFill>
+                    <a:schemeClr val="bg1"/>
+                  </a:solidFill>
+                  <a:latin typeface="Consolas" panose="020B0609020204030204" pitchFamily="49" charset="0"/>
+                </a:rPr>
+                <a:t>être</a:t>
+              </a:r>
+              <a:r>
+                <a:rPr lang="en-CA" sz="1400" b="1" dirty="0">
+                  <a:solidFill>
+                    <a:schemeClr val="bg1"/>
+                  </a:solidFill>
+                  <a:latin typeface="Consolas" panose="020B0609020204030204" pitchFamily="49" charset="0"/>
+                </a:rPr>
+                <a:t> </a:t>
+              </a:r>
+              <a:r>
+                <a:rPr lang="en-CA" sz="1400" b="1" dirty="0" err="1">
+                  <a:solidFill>
+                    <a:schemeClr val="bg1"/>
+                  </a:solidFill>
+                  <a:latin typeface="Consolas" panose="020B0609020204030204" pitchFamily="49" charset="0"/>
+                </a:rPr>
+                <a:t>différentes</a:t>
+              </a:r>
+              <a:r>
+                <a:rPr lang="en-CA" sz="1400" b="1" dirty="0">
+                  <a:solidFill>
+                    <a:schemeClr val="bg1"/>
+                  </a:solidFill>
+                  <a:latin typeface="Consolas" panose="020B0609020204030204" pitchFamily="49" charset="0"/>
+                </a:rPr>
+                <a:t>'</a:t>
+              </a:r>
+            </a:p>
+            <a:p>
+              <a:pPr algn="just"/>
+              <a:r>
+                <a:rPr lang="en-CA" sz="1400" b="1" dirty="0" err="1">
+                  <a:solidFill>
+                    <a:schemeClr val="bg1"/>
+                  </a:solidFill>
+                  <a:latin typeface="Consolas" panose="020B0609020204030204" pitchFamily="49" charset="0"/>
+                </a:rPr>
+                <a:t>AssertionError</a:t>
+              </a:r>
+              <a:r>
+                <a:rPr lang="en-CA" sz="1400" b="1" dirty="0">
+                  <a:solidFill>
+                    <a:schemeClr val="bg1"/>
+                  </a:solidFill>
+                  <a:latin typeface="Consolas" panose="020B0609020204030204" pitchFamily="49" charset="0"/>
+                </a:rPr>
+                <a:t>: Les </a:t>
+              </a:r>
+              <a:r>
+                <a:rPr lang="en-CA" sz="1400" b="1" dirty="0" err="1">
+                  <a:solidFill>
+                    <a:schemeClr val="bg1"/>
+                  </a:solidFill>
+                  <a:latin typeface="Consolas" panose="020B0609020204030204" pitchFamily="49" charset="0"/>
+                </a:rPr>
+                <a:t>valeurs</a:t>
+              </a:r>
+              <a:r>
+                <a:rPr lang="en-CA" sz="1400" b="1" dirty="0">
+                  <a:solidFill>
+                    <a:schemeClr val="bg1"/>
+                  </a:solidFill>
+                  <a:latin typeface="Consolas" panose="020B0609020204030204" pitchFamily="49" charset="0"/>
+                </a:rPr>
+                <a:t> </a:t>
+              </a:r>
+              <a:r>
+                <a:rPr lang="en-CA" sz="1400" b="1" dirty="0" err="1">
+                  <a:solidFill>
+                    <a:schemeClr val="bg1"/>
+                  </a:solidFill>
+                  <a:latin typeface="Consolas" panose="020B0609020204030204" pitchFamily="49" charset="0"/>
+                </a:rPr>
+                <a:t>doivent</a:t>
+              </a:r>
+              <a:r>
+                <a:rPr lang="en-CA" sz="1400" b="1" dirty="0">
+                  <a:solidFill>
+                    <a:schemeClr val="bg1"/>
+                  </a:solidFill>
+                  <a:latin typeface="Consolas" panose="020B0609020204030204" pitchFamily="49" charset="0"/>
+                </a:rPr>
+                <a:t> </a:t>
+              </a:r>
+              <a:r>
+                <a:rPr lang="en-CA" sz="1400" b="1" dirty="0" err="1">
+                  <a:solidFill>
+                    <a:schemeClr val="bg1"/>
+                  </a:solidFill>
+                  <a:latin typeface="Consolas" panose="020B0609020204030204" pitchFamily="49" charset="0"/>
+                </a:rPr>
+                <a:t>être</a:t>
+              </a:r>
+              <a:r>
+                <a:rPr lang="en-CA" sz="1400" b="1" dirty="0">
+                  <a:solidFill>
+                    <a:schemeClr val="bg1"/>
+                  </a:solidFill>
+                  <a:latin typeface="Consolas" panose="020B0609020204030204" pitchFamily="49" charset="0"/>
+                </a:rPr>
+                <a:t> </a:t>
+              </a:r>
+              <a:r>
+                <a:rPr lang="en-CA" sz="1400" b="1" dirty="0" err="1">
+                  <a:solidFill>
+                    <a:schemeClr val="bg1"/>
+                  </a:solidFill>
+                  <a:latin typeface="Consolas" panose="020B0609020204030204" pitchFamily="49" charset="0"/>
+                </a:rPr>
+                <a:t>différentes</a:t>
+              </a:r>
+              <a:endParaRPr lang="fr-CA" sz="1400" dirty="0">
+                <a:solidFill>
+                  <a:schemeClr val="bg1"/>
+                </a:solidFill>
+                <a:latin typeface="Consolas" panose="020B0609020204030204" pitchFamily="49" charset="0"/>
+              </a:endParaRPr>
+            </a:p>
+          </p:txBody>
+        </p:sp>
+      </p:grpSp>
+    </p:spTree>
+    <p:extLst>
+      <p:ext uri="{BB962C8B-B14F-4D97-AF65-F5344CB8AC3E}">
+        <p14:creationId xmlns:p14="http://schemas.microsoft.com/office/powerpoint/2010/main" val="3696665868"/>
+      </p:ext>
+    </p:extLst>
+  </p:cSld>
+  <p:clrMapOvr>
+    <a:masterClrMapping/>
+  </p:clrMapOvr>
+  <p:timing>
+    <p:tnLst>
+      <p:par>
+        <p:cTn id="1" dur="indefinite" restart="never" nodeType="tmRoot">
+          <p:childTnLst>
+            <p:seq concurrent="1" nextAc="seek">
+              <p:cTn id="2" dur="indefinite" nodeType="mainSeq">
+                <p:childTnLst>
+                  <p:par>
+                    <p:cTn id="3" fill="hold">
+                      <p:stCondLst>
+                        <p:cond delay="indefinite"/>
+                      </p:stCondLst>
+                      <p:childTnLst>
+                        <p:par>
+                          <p:cTn id="4" fill="hold">
+                            <p:stCondLst>
+                              <p:cond delay="0"/>
+                            </p:stCondLst>
+                            <p:childTnLst>
+                              <p:par>
+                                <p:cTn id="5" presetID="10" presetClass="entr" presetSubtype="0" fill="hold" nodeType="clickEffect">
+                                  <p:stCondLst>
+                                    <p:cond delay="0"/>
+                                  </p:stCondLst>
+                                  <p:childTnLst>
+                                    <p:set>
+                                      <p:cBhvr>
+                                        <p:cTn id="6" dur="1" fill="hold">
+                                          <p:stCondLst>
+                                            <p:cond delay="0"/>
+                                          </p:stCondLst>
+                                        </p:cTn>
+                                        <p:tgtEl>
+                                          <p:spTgt spid="3">
+                                            <p:txEl>
+                                              <p:pRg st="0" end="0"/>
+                                            </p:txEl>
+                                          </p:spTgt>
+                                        </p:tgtEl>
+                                        <p:attrNameLst>
+                                          <p:attrName>style.visibility</p:attrName>
+                                        </p:attrNameLst>
+                                      </p:cBhvr>
+                                      <p:to>
+                                        <p:strVal val="visible"/>
+                                      </p:to>
+                                    </p:set>
+                                    <p:animEffect transition="in" filter="fade">
+                                      <p:cBhvr>
+                                        <p:cTn id="7" dur="500"/>
+                                        <p:tgtEl>
+                                          <p:spTgt spid="3">
+                                            <p:txEl>
+                                              <p:pRg st="0" end="0"/>
+                                            </p:txEl>
+                                          </p:spTgt>
+                                        </p:tgtEl>
+                                      </p:cBhvr>
+                                    </p:animEffect>
+                                  </p:childTnLst>
+                                </p:cTn>
+                              </p:par>
+                            </p:childTnLst>
+                          </p:cTn>
+                        </p:par>
+                      </p:childTnLst>
+                    </p:cTn>
+                  </p:par>
+                  <p:par>
+                    <p:cTn id="8" fill="hold">
+                      <p:stCondLst>
+                        <p:cond delay="indefinite"/>
+                      </p:stCondLst>
+                      <p:childTnLst>
+                        <p:par>
+                          <p:cTn id="9" fill="hold">
+                            <p:stCondLst>
+                              <p:cond delay="0"/>
+                            </p:stCondLst>
+                            <p:childTnLst>
+                              <p:par>
+                                <p:cTn id="10" presetID="10" presetClass="entr" presetSubtype="0" fill="hold" nodeType="clickEffect">
+                                  <p:stCondLst>
+                                    <p:cond delay="0"/>
+                                  </p:stCondLst>
+                                  <p:childTnLst>
+                                    <p:set>
+                                      <p:cBhvr>
+                                        <p:cTn id="11" dur="1" fill="hold">
+                                          <p:stCondLst>
+                                            <p:cond delay="0"/>
+                                          </p:stCondLst>
+                                        </p:cTn>
+                                        <p:tgtEl>
+                                          <p:spTgt spid="3">
+                                            <p:txEl>
+                                              <p:pRg st="1" end="1"/>
+                                            </p:txEl>
+                                          </p:spTgt>
+                                        </p:tgtEl>
+                                        <p:attrNameLst>
+                                          <p:attrName>style.visibility</p:attrName>
+                                        </p:attrNameLst>
+                                      </p:cBhvr>
+                                      <p:to>
+                                        <p:strVal val="visible"/>
+                                      </p:to>
+                                    </p:set>
+                                    <p:animEffect transition="in" filter="fade">
+                                      <p:cBhvr>
+                                        <p:cTn id="12" dur="500"/>
+                                        <p:tgtEl>
+                                          <p:spTgt spid="3">
+                                            <p:txEl>
+                                              <p:pRg st="1" end="1"/>
+                                            </p:txEl>
+                                          </p:spTgt>
+                                        </p:tgtEl>
+                                      </p:cBhvr>
+                                    </p:animEffect>
+                                  </p:childTnLst>
+                                </p:cTn>
+                              </p:par>
+                            </p:childTnLst>
+                          </p:cTn>
+                        </p:par>
+                      </p:childTnLst>
+                    </p:cTn>
+                  </p:par>
+                  <p:par>
+                    <p:cTn id="13" fill="hold">
+                      <p:stCondLst>
+                        <p:cond delay="indefinite"/>
+                      </p:stCondLst>
+                      <p:childTnLst>
+                        <p:par>
+                          <p:cTn id="14" fill="hold">
+                            <p:stCondLst>
+                              <p:cond delay="0"/>
+                            </p:stCondLst>
+                            <p:childTnLst>
+                              <p:par>
+                                <p:cTn id="15" presetID="10" presetClass="entr" presetSubtype="0" fill="hold" nodeType="clickEffect">
+                                  <p:stCondLst>
+                                    <p:cond delay="0"/>
+                                  </p:stCondLst>
+                                  <p:childTnLst>
+                                    <p:set>
+                                      <p:cBhvr>
+                                        <p:cTn id="16" dur="1" fill="hold">
+                                          <p:stCondLst>
+                                            <p:cond delay="0"/>
+                                          </p:stCondLst>
+                                        </p:cTn>
+                                        <p:tgtEl>
+                                          <p:spTgt spid="3">
+                                            <p:txEl>
+                                              <p:pRg st="2" end="2"/>
+                                            </p:txEl>
+                                          </p:spTgt>
+                                        </p:tgtEl>
+                                        <p:attrNameLst>
+                                          <p:attrName>style.visibility</p:attrName>
+                                        </p:attrNameLst>
+                                      </p:cBhvr>
+                                      <p:to>
+                                        <p:strVal val="visible"/>
+                                      </p:to>
+                                    </p:set>
+                                    <p:animEffect transition="in" filter="fade">
+                                      <p:cBhvr>
+                                        <p:cTn id="17" dur="500"/>
+                                        <p:tgtEl>
+                                          <p:spTgt spid="3">
+                                            <p:txEl>
+                                              <p:pRg st="2" end="2"/>
+                                            </p:txEl>
+                                          </p:spTgt>
+                                        </p:tgtEl>
+                                      </p:cBhvr>
+                                    </p:animEffect>
+                                  </p:childTnLst>
+                                </p:cTn>
+                              </p:par>
+                            </p:childTnLst>
+                          </p:cTn>
+                        </p:par>
+                      </p:childTnLst>
+                    </p:cTn>
+                  </p:par>
+                  <p:par>
+                    <p:cTn id="18" fill="hold">
+                      <p:stCondLst>
+                        <p:cond delay="indefinite"/>
+                      </p:stCondLst>
+                      <p:childTnLst>
+                        <p:par>
+                          <p:cTn id="19" fill="hold">
+                            <p:stCondLst>
+                              <p:cond delay="0"/>
+                            </p:stCondLst>
+                            <p:childTnLst>
+                              <p:par>
+                                <p:cTn id="20" presetID="10" presetClass="entr" presetSubtype="0" fill="hold" nodeType="clickEffect">
+                                  <p:stCondLst>
+                                    <p:cond delay="0"/>
+                                  </p:stCondLst>
+                                  <p:childTnLst>
+                                    <p:set>
+                                      <p:cBhvr>
+                                        <p:cTn id="21" dur="1" fill="hold">
+                                          <p:stCondLst>
+                                            <p:cond delay="0"/>
+                                          </p:stCondLst>
+                                        </p:cTn>
+                                        <p:tgtEl>
+                                          <p:spTgt spid="3">
+                                            <p:txEl>
+                                              <p:pRg st="3" end="3"/>
+                                            </p:txEl>
+                                          </p:spTgt>
+                                        </p:tgtEl>
+                                        <p:attrNameLst>
+                                          <p:attrName>style.visibility</p:attrName>
+                                        </p:attrNameLst>
+                                      </p:cBhvr>
+                                      <p:to>
+                                        <p:strVal val="visible"/>
+                                      </p:to>
+                                    </p:set>
+                                    <p:animEffect transition="in" filter="fade">
+                                      <p:cBhvr>
+                                        <p:cTn id="22" dur="500"/>
+                                        <p:tgtEl>
+                                          <p:spTgt spid="3">
+                                            <p:txEl>
+                                              <p:pRg st="3" end="3"/>
+                                            </p:txEl>
+                                          </p:spTgt>
+                                        </p:tgtEl>
+                                      </p:cBhvr>
+                                    </p:animEffect>
+                                  </p:childTnLst>
+                                </p:cTn>
+                              </p:par>
+                            </p:childTnLst>
+                          </p:cTn>
+                        </p:par>
+                      </p:childTnLst>
+                    </p:cTn>
+                  </p:par>
+                  <p:par>
+                    <p:cTn id="23" fill="hold">
+                      <p:stCondLst>
+                        <p:cond delay="indefinite"/>
+                      </p:stCondLst>
+                      <p:childTnLst>
+                        <p:par>
+                          <p:cTn id="24" fill="hold">
+                            <p:stCondLst>
+                              <p:cond delay="0"/>
+                            </p:stCondLst>
+                            <p:childTnLst>
+                              <p:par>
+                                <p:cTn id="25" presetID="10" presetClass="entr" presetSubtype="0" fill="hold" nodeType="clickEffect">
+                                  <p:stCondLst>
+                                    <p:cond delay="0"/>
+                                  </p:stCondLst>
+                                  <p:childTnLst>
+                                    <p:set>
+                                      <p:cBhvr>
+                                        <p:cTn id="26" dur="1" fill="hold">
+                                          <p:stCondLst>
+                                            <p:cond delay="0"/>
+                                          </p:stCondLst>
+                                        </p:cTn>
+                                        <p:tgtEl>
+                                          <p:spTgt spid="3">
+                                            <p:txEl>
+                                              <p:pRg st="4" end="4"/>
+                                            </p:txEl>
+                                          </p:spTgt>
+                                        </p:tgtEl>
+                                        <p:attrNameLst>
+                                          <p:attrName>style.visibility</p:attrName>
+                                        </p:attrNameLst>
+                                      </p:cBhvr>
+                                      <p:to>
+                                        <p:strVal val="visible"/>
+                                      </p:to>
+                                    </p:set>
+                                    <p:animEffect transition="in" filter="fade">
+                                      <p:cBhvr>
+                                        <p:cTn id="27" dur="500"/>
+                                        <p:tgtEl>
+                                          <p:spTgt spid="3">
+                                            <p:txEl>
+                                              <p:pRg st="4" end="4"/>
+                                            </p:txEl>
+                                          </p:spTgt>
+                                        </p:tgtEl>
+                                      </p:cBhvr>
+                                    </p:animEffect>
+                                  </p:childTnLst>
+                                </p:cTn>
+                              </p:par>
+                              <p:par>
+                                <p:cTn id="28" presetID="10" presetClass="entr" presetSubtype="0" fill="hold" nodeType="withEffect">
+                                  <p:stCondLst>
+                                    <p:cond delay="0"/>
+                                  </p:stCondLst>
+                                  <p:childTnLst>
+                                    <p:set>
+                                      <p:cBhvr>
+                                        <p:cTn id="29" dur="1" fill="hold">
+                                          <p:stCondLst>
+                                            <p:cond delay="0"/>
+                                          </p:stCondLst>
+                                        </p:cTn>
+                                        <p:tgtEl>
+                                          <p:spTgt spid="3">
+                                            <p:txEl>
+                                              <p:pRg st="5" end="5"/>
+                                            </p:txEl>
+                                          </p:spTgt>
+                                        </p:tgtEl>
+                                        <p:attrNameLst>
+                                          <p:attrName>style.visibility</p:attrName>
+                                        </p:attrNameLst>
+                                      </p:cBhvr>
+                                      <p:to>
+                                        <p:strVal val="visible"/>
+                                      </p:to>
+                                    </p:set>
+                                    <p:animEffect transition="in" filter="fade">
+                                      <p:cBhvr>
+                                        <p:cTn id="30" dur="500"/>
+                                        <p:tgtEl>
+                                          <p:spTgt spid="3">
+                                            <p:txEl>
+                                              <p:pRg st="5" end="5"/>
+                                            </p:txEl>
+                                          </p:spTgt>
+                                        </p:tgtEl>
+                                      </p:cBhvr>
+                                    </p:animEffect>
+                                  </p:childTnLst>
+                                </p:cTn>
+                              </p:par>
+                            </p:childTnLst>
+                          </p:cTn>
+                        </p:par>
+                      </p:childTnLst>
+                    </p:cTn>
+                  </p:par>
+                  <p:par>
+                    <p:cTn id="31" fill="hold">
+                      <p:stCondLst>
+                        <p:cond delay="indefinite"/>
+                      </p:stCondLst>
+                      <p:childTnLst>
+                        <p:par>
+                          <p:cTn id="32" fill="hold">
+                            <p:stCondLst>
+                              <p:cond delay="0"/>
+                            </p:stCondLst>
+                            <p:childTnLst>
+                              <p:par>
+                                <p:cTn id="33" presetID="10" presetClass="entr" presetSubtype="0" fill="hold" nodeType="clickEffect">
+                                  <p:stCondLst>
+                                    <p:cond delay="0"/>
+                                  </p:stCondLst>
+                                  <p:childTnLst>
+                                    <p:set>
+                                      <p:cBhvr>
+                                        <p:cTn id="34" dur="1" fill="hold">
+                                          <p:stCondLst>
+                                            <p:cond delay="0"/>
+                                          </p:stCondLst>
+                                        </p:cTn>
+                                        <p:tgtEl>
+                                          <p:spTgt spid="6"/>
+                                        </p:tgtEl>
+                                        <p:attrNameLst>
+                                          <p:attrName>style.visibility</p:attrName>
+                                        </p:attrNameLst>
+                                      </p:cBhvr>
+                                      <p:to>
+                                        <p:strVal val="visible"/>
+                                      </p:to>
+                                    </p:set>
+                                    <p:animEffect transition="in" filter="fade">
+                                      <p:cBhvr>
+                                        <p:cTn id="35" dur="500"/>
+                                        <p:tgtEl>
+                                          <p:spTgt spid="6"/>
+                                        </p:tgtEl>
+                                      </p:cBhvr>
+                                    </p:animEffect>
+                                  </p:childTnLst>
+                                </p:cTn>
+                              </p:par>
+                            </p:childTnLst>
+                          </p:cTn>
+                        </p:par>
+                      </p:childTnLst>
+                    </p:cTn>
+                  </p:par>
+                </p:childTnLst>
+              </p:cTn>
+              <p:prevCondLst>
+                <p:cond evt="onPrev" delay="0">
+                  <p:tgtEl>
+                    <p:sldTgt/>
+                  </p:tgtEl>
+                </p:cond>
+              </p:prevCondLst>
+              <p:nextCondLst>
+                <p:cond evt="onNext" delay="0">
+                  <p:tgtEl>
+                    <p:sldTgt/>
+                  </p:tgtEl>
+                </p:cond>
+              </p:nextCondLst>
+            </p:seq>
+          </p:childTnLst>
+        </p:cTn>
+      </p:par>
+    </p:tnLst>
+  </p:timing>
+</p:sld>
+</file>
+
+<file path=ppt/slides/slide30.xml><?xml version="1.0" encoding="utf-8"?>
 <p:sld xmlns:a="http://schemas.openxmlformats.org/drawingml/2006/main" xmlns:r="http://schemas.openxmlformats.org/officeDocument/2006/relationships" xmlns:p="http://schemas.openxmlformats.org/presentationml/2006/main">
   <p:cSld>
     <p:bg>
@@ -25059,7 +28089,7 @@
           <a:p>
             <a:fld id="{846B06B1-1179-491F-A487-8E0C403F7C13}" type="slidenum">
               <a:rPr lang="fr-CA" smtClean="0"/>
-              <a:t>29</a:t>
+              <a:t>30</a:t>
             </a:fld>
             <a:endParaRPr lang="fr-CA"/>
           </a:p>
@@ -25773,1392 +28803,7 @@
 </p:sld>
 </file>
 
-<file path=ppt/slides/slide3.xml><?xml version="1.0" encoding="utf-8"?>
-<p:sld xmlns:a="http://schemas.openxmlformats.org/drawingml/2006/main" xmlns:r="http://schemas.openxmlformats.org/officeDocument/2006/relationships" xmlns:p="http://schemas.openxmlformats.org/presentationml/2006/main">
-  <p:cSld>
-    <p:bg>
-      <p:bgPr>
-        <a:solidFill>
-          <a:srgbClr val="F5F5F5"/>
-        </a:solidFill>
-        <a:effectLst/>
-      </p:bgPr>
-    </p:bg>
-    <p:spTree>
-      <p:nvGrpSpPr>
-        <p:cNvPr id="1" name="">
-          <a:extLst>
-            <a:ext uri="{FF2B5EF4-FFF2-40B4-BE49-F238E27FC236}">
-              <a16:creationId xmlns:a16="http://schemas.microsoft.com/office/drawing/2014/main" id="{7AE562C1-DEBE-120A-68B7-9B3CEE9F8CF7}"/>
-            </a:ext>
-          </a:extLst>
-        </p:cNvPr>
-        <p:cNvGrpSpPr/>
-        <p:nvPr/>
-      </p:nvGrpSpPr>
-      <p:grpSpPr>
-        <a:xfrm>
-          <a:off x="0" y="0"/>
-          <a:ext cx="0" cy="0"/>
-          <a:chOff x="0" y="0"/>
-          <a:chExt cx="0" cy="0"/>
-        </a:xfrm>
-      </p:grpSpPr>
-      <p:sp>
-        <p:nvSpPr>
-          <p:cNvPr id="2" name="Title 1">
-            <a:extLst>
-              <a:ext uri="{FF2B5EF4-FFF2-40B4-BE49-F238E27FC236}">
-                <a16:creationId xmlns:a16="http://schemas.microsoft.com/office/drawing/2014/main" id="{9DD94D18-8A9D-0F83-56A0-3E229B4F30F4}"/>
-              </a:ext>
-            </a:extLst>
-          </p:cNvPr>
-          <p:cNvSpPr>
-            <a:spLocks noGrp="1"/>
-          </p:cNvSpPr>
-          <p:nvPr>
-            <p:ph type="title"/>
-          </p:nvPr>
-        </p:nvSpPr>
-        <p:spPr/>
-        <p:txBody>
-          <a:bodyPr/>
-          <a:lstStyle/>
-          <a:p>
-            <a:r>
-              <a:rPr lang="en-US" dirty="0">
-                <a:latin typeface="Arial Rounded MT Bold" panose="020F0704030504030204" pitchFamily="34" charset="0"/>
-              </a:rPr>
-              <a:t>Tests: Assertions</a:t>
-            </a:r>
-            <a:endParaRPr lang="fr-CA" dirty="0">
-              <a:latin typeface="Arial Rounded MT Bold" panose="020F0704030504030204" pitchFamily="34" charset="0"/>
-            </a:endParaRPr>
-          </a:p>
-        </p:txBody>
-      </p:sp>
-      <p:sp>
-        <p:nvSpPr>
-          <p:cNvPr id="3" name="Content Placeholder 2">
-            <a:extLst>
-              <a:ext uri="{FF2B5EF4-FFF2-40B4-BE49-F238E27FC236}">
-                <a16:creationId xmlns:a16="http://schemas.microsoft.com/office/drawing/2014/main" id="{4CF6E5EC-3D7E-2CEA-1F5C-3BC34F96A110}"/>
-              </a:ext>
-            </a:extLst>
-          </p:cNvPr>
-          <p:cNvSpPr>
-            <a:spLocks noGrp="1"/>
-          </p:cNvSpPr>
-          <p:nvPr>
-            <p:ph idx="1"/>
-          </p:nvPr>
-        </p:nvSpPr>
-        <p:spPr/>
-        <p:txBody>
-          <a:bodyPr>
-            <a:normAutofit/>
-          </a:bodyPr>
-          <a:lstStyle/>
-          <a:p>
-            <a:pPr algn="just"/>
-            <a:br>
-              <a:rPr lang="fr-CA" sz="1600" dirty="0">
-                <a:latin typeface="Consolas" panose="020B0609020204030204" pitchFamily="49" charset="0"/>
-              </a:rPr>
-            </a:br>
-            <a:endParaRPr lang="fr-CA" sz="1600" dirty="0">
-              <a:latin typeface="Consolas" panose="020B0609020204030204" pitchFamily="49" charset="0"/>
-            </a:endParaRPr>
-          </a:p>
-          <a:p>
-            <a:pPr algn="just">
-              <a:lnSpc>
-                <a:spcPct val="110000"/>
-              </a:lnSpc>
-            </a:pPr>
-            <a:r>
-              <a:rPr lang="fr-CA" sz="1600" dirty="0">
-                <a:latin typeface="Consolas" panose="020B0609020204030204" pitchFamily="49" charset="0"/>
-              </a:rPr>
-              <a:t>Lance une erreur (</a:t>
-            </a:r>
-            <a:r>
-              <a:rPr lang="fr-CA" sz="1600" dirty="0" err="1">
-                <a:latin typeface="Consolas" panose="020B0609020204030204" pitchFamily="49" charset="0"/>
-              </a:rPr>
-              <a:t>AssertionError</a:t>
-            </a:r>
-            <a:r>
-              <a:rPr lang="fr-CA" sz="1600" dirty="0">
-                <a:latin typeface="Consolas" panose="020B0609020204030204" pitchFamily="49" charset="0"/>
-              </a:rPr>
-              <a:t>) lorsqu'une condition est fausse</a:t>
-            </a:r>
-          </a:p>
-          <a:p>
-            <a:pPr lvl="1" algn="just">
-              <a:lnSpc>
-                <a:spcPct val="110000"/>
-              </a:lnSpc>
-            </a:pPr>
-            <a:r>
-              <a:rPr lang="fr-CA" sz="1600" dirty="0">
-                <a:latin typeface="Consolas" panose="020B0609020204030204" pitchFamily="49" charset="0"/>
-              </a:rPr>
-              <a:t>Modèle mental: </a:t>
-            </a:r>
-            <a:r>
-              <a:rPr lang="fr-CA" sz="1600" b="1" dirty="0">
-                <a:latin typeface="Consolas" panose="020B0609020204030204" pitchFamily="49" charset="0"/>
-              </a:rPr>
-              <a:t>Lorsqu'un test échoue</a:t>
-            </a:r>
-          </a:p>
-          <a:p>
-            <a:pPr algn="just">
-              <a:lnSpc>
-                <a:spcPct val="160000"/>
-              </a:lnSpc>
-            </a:pPr>
-            <a:r>
-              <a:rPr lang="fr-CA" sz="1600" dirty="0">
-                <a:latin typeface="Consolas" panose="020B0609020204030204" pitchFamily="49" charset="0"/>
-              </a:rPr>
-              <a:t>Pour </a:t>
-            </a:r>
-            <a:r>
-              <a:rPr lang="fr-CA" sz="1600" b="1" dirty="0">
-                <a:latin typeface="Consolas" panose="020B0609020204030204" pitchFamily="49" charset="0"/>
-              </a:rPr>
-              <a:t>ce qui doit absolument être vrai</a:t>
-            </a:r>
-            <a:endParaRPr lang="fr-CA" sz="1600" dirty="0">
-              <a:latin typeface="Consolas" panose="020B0609020204030204" pitchFamily="49" charset="0"/>
-            </a:endParaRPr>
-          </a:p>
-          <a:p>
-            <a:pPr algn="just">
-              <a:lnSpc>
-                <a:spcPct val="150000"/>
-              </a:lnSpc>
-            </a:pPr>
-            <a:r>
-              <a:rPr lang="fr-CA" sz="1600" dirty="0">
-                <a:latin typeface="Consolas" panose="020B0609020204030204" pitchFamily="49" charset="0"/>
-              </a:rPr>
-              <a:t>Peut être désactivé à l'exécution (</a:t>
-            </a:r>
-            <a:r>
-              <a:rPr lang="fr-CA" sz="1600" b="1" dirty="0">
-                <a:latin typeface="Consolas" panose="020B0609020204030204" pitchFamily="49" charset="0"/>
-              </a:rPr>
-              <a:t>python -O</a:t>
-            </a:r>
-            <a:r>
-              <a:rPr lang="fr-CA" sz="1600" dirty="0">
-                <a:latin typeface="Consolas" panose="020B0609020204030204" pitchFamily="49" charset="0"/>
-              </a:rPr>
-              <a:t>) ... sauf pour la NASA</a:t>
-            </a:r>
-          </a:p>
-          <a:p>
-            <a:pPr marL="0" indent="0" algn="ctr">
-              <a:buNone/>
-            </a:pPr>
-            <a:r>
-              <a:rPr lang="fr-CA" sz="1400" dirty="0">
-                <a:latin typeface="Consolas" panose="020B0609020204030204" pitchFamily="49" charset="0"/>
-                <a:hlinkClick r:id="rId2"/>
-              </a:rPr>
-              <a:t>https://fr.wikipedia.org/wiki/The_Power_of_10:_Rules_for_Developing_Safety-Critical_Code</a:t>
-            </a:r>
-            <a:endParaRPr lang="fr-CA" sz="1400" dirty="0">
-              <a:latin typeface="Consolas" panose="020B0609020204030204" pitchFamily="49" charset="0"/>
-            </a:endParaRPr>
-          </a:p>
-        </p:txBody>
-      </p:sp>
-      <p:sp>
-        <p:nvSpPr>
-          <p:cNvPr id="5" name="Slide Number Placeholder 4">
-            <a:extLst>
-              <a:ext uri="{FF2B5EF4-FFF2-40B4-BE49-F238E27FC236}">
-                <a16:creationId xmlns:a16="http://schemas.microsoft.com/office/drawing/2014/main" id="{1FA2DB27-CAC8-7766-F85F-45770DF3095A}"/>
-              </a:ext>
-            </a:extLst>
-          </p:cNvPr>
-          <p:cNvSpPr>
-            <a:spLocks noGrp="1"/>
-          </p:cNvSpPr>
-          <p:nvPr>
-            <p:ph type="sldNum" sz="quarter" idx="12"/>
-          </p:nvPr>
-        </p:nvSpPr>
-        <p:spPr/>
-        <p:txBody>
-          <a:bodyPr/>
-          <a:lstStyle/>
-          <a:p>
-            <a:fld id="{846B06B1-1179-491F-A487-8E0C403F7C13}" type="slidenum">
-              <a:rPr lang="fr-CA" smtClean="0"/>
-              <a:t>3</a:t>
-            </a:fld>
-            <a:endParaRPr lang="fr-CA" dirty="0"/>
-          </a:p>
-        </p:txBody>
-      </p:sp>
-      <p:sp>
-        <p:nvSpPr>
-          <p:cNvPr id="4" name="TextBox 3">
-            <a:extLst>
-              <a:ext uri="{FF2B5EF4-FFF2-40B4-BE49-F238E27FC236}">
-                <a16:creationId xmlns:a16="http://schemas.microsoft.com/office/drawing/2014/main" id="{57A8D393-74C1-0C40-F408-06525D65E091}"/>
-              </a:ext>
-            </a:extLst>
-          </p:cNvPr>
-          <p:cNvSpPr txBox="1"/>
-          <p:nvPr/>
-        </p:nvSpPr>
-        <p:spPr>
-          <a:xfrm>
-            <a:off x="2230873" y="1728788"/>
-            <a:ext cx="7730249" cy="442630"/>
-          </a:xfrm>
-          <a:prstGeom prst="roundRect">
-            <a:avLst/>
-          </a:prstGeom>
-          <a:solidFill>
-            <a:srgbClr val="FFF2CC">
-              <a:alpha val="49803"/>
-            </a:srgbClr>
-          </a:solidFill>
-          <a:ln w="9525" cap="flat" cmpd="sng">
-            <a:solidFill>
-              <a:schemeClr val="dk1"/>
-            </a:solidFill>
-            <a:prstDash val="solid"/>
-            <a:round/>
-            <a:headEnd type="none" w="sm" len="sm"/>
-            <a:tailEnd type="none" w="sm" len="sm"/>
-          </a:ln>
-        </p:spPr>
-        <p:txBody>
-          <a:bodyPr spcFirstLastPara="1" wrap="square" lIns="91425" tIns="45700" rIns="91425" bIns="45700" anchor="t" anchorCtr="0">
-            <a:spAutoFit/>
-          </a:bodyPr>
-          <a:lstStyle>
-            <a:defPPr>
-              <a:defRPr lang="en-US"/>
-            </a:defPPr>
-            <a:lvl1pPr marR="0" lvl="0" indent="0" algn="ctr">
-              <a:lnSpc>
-                <a:spcPct val="100000"/>
-              </a:lnSpc>
-              <a:spcBef>
-                <a:spcPts val="0"/>
-              </a:spcBef>
-              <a:spcAft>
-                <a:spcPts val="0"/>
-              </a:spcAft>
-              <a:buClr>
-                <a:srgbClr val="000000"/>
-              </a:buClr>
-              <a:buSzPts val="1400"/>
-              <a:buFont typeface="Consolas"/>
-              <a:buNone/>
-              <a:defRPr sz="2800" b="1" i="0" u="none" strike="noStrike" cap="none">
-                <a:solidFill>
-                  <a:srgbClr val="000000"/>
-                </a:solidFill>
-                <a:latin typeface="Consolas"/>
-                <a:ea typeface="Consolas"/>
-                <a:cs typeface="Consolas"/>
-              </a:defRPr>
-            </a:lvl1pPr>
-          </a:lstStyle>
-          <a:p>
-            <a:r>
-              <a:rPr lang="en-US" sz="2000" dirty="0"/>
-              <a:t>assert </a:t>
-            </a:r>
-            <a:r>
-              <a:rPr lang="en-US" sz="2000" dirty="0" err="1"/>
-              <a:t>expression_booleenne</a:t>
-            </a:r>
-            <a:r>
-              <a:rPr lang="en-US" sz="2000" dirty="0"/>
-              <a:t>, </a:t>
-            </a:r>
-            <a:r>
-              <a:rPr lang="en-US" sz="2000" dirty="0" err="1"/>
-              <a:t>message_si_faux</a:t>
-            </a:r>
-            <a:endParaRPr lang="en-US" sz="2000" dirty="0"/>
-          </a:p>
-        </p:txBody>
-      </p:sp>
-      <p:grpSp>
-        <p:nvGrpSpPr>
-          <p:cNvPr id="6" name="Google Shape;354;p18">
-            <a:extLst>
-              <a:ext uri="{FF2B5EF4-FFF2-40B4-BE49-F238E27FC236}">
-                <a16:creationId xmlns:a16="http://schemas.microsoft.com/office/drawing/2014/main" id="{530A920A-ECA4-8FCD-A08E-677BC9DD3228}"/>
-              </a:ext>
-            </a:extLst>
-          </p:cNvPr>
-          <p:cNvGrpSpPr/>
-          <p:nvPr/>
-        </p:nvGrpSpPr>
-        <p:grpSpPr>
-          <a:xfrm>
-            <a:off x="2306240" y="4664961"/>
-            <a:ext cx="7579514" cy="1512002"/>
-            <a:chOff x="6682372" y="3766184"/>
-            <a:chExt cx="8984825" cy="691201"/>
-          </a:xfrm>
-        </p:grpSpPr>
-        <p:sp>
-          <p:nvSpPr>
-            <p:cNvPr id="7" name="Google Shape;355;p18">
-              <a:extLst>
-                <a:ext uri="{FF2B5EF4-FFF2-40B4-BE49-F238E27FC236}">
-                  <a16:creationId xmlns:a16="http://schemas.microsoft.com/office/drawing/2014/main" id="{87D4FF6B-A94D-24FE-EF28-D0E429EA4110}"/>
-                </a:ext>
-              </a:extLst>
-            </p:cNvPr>
-            <p:cNvSpPr/>
-            <p:nvPr/>
-          </p:nvSpPr>
-          <p:spPr>
-            <a:xfrm>
-              <a:off x="6682372" y="3766184"/>
-              <a:ext cx="256567" cy="691200"/>
-            </a:xfrm>
-            <a:prstGeom prst="rect">
-              <a:avLst/>
-            </a:prstGeom>
-            <a:solidFill>
-              <a:srgbClr val="7F7F7F"/>
-            </a:solidFill>
-            <a:ln w="12700" cap="flat" cmpd="sng">
-              <a:solidFill>
-                <a:schemeClr val="dk1"/>
-              </a:solidFill>
-              <a:prstDash val="solid"/>
-              <a:miter lim="800000"/>
-              <a:headEnd type="none" w="sm" len="sm"/>
-              <a:tailEnd type="none" w="sm" len="sm"/>
-            </a:ln>
-          </p:spPr>
-          <p:txBody>
-            <a:bodyPr spcFirstLastPara="1" wrap="square" lIns="91425" tIns="45700" rIns="91425" bIns="45700" anchor="ctr" anchorCtr="0">
-              <a:noAutofit/>
-            </a:bodyPr>
-            <a:lstStyle/>
-            <a:p>
-              <a:pPr marL="0" marR="0" lvl="0" indent="0" algn="ctr" rtl="0">
-                <a:spcBef>
-                  <a:spcPts val="0"/>
-                </a:spcBef>
-                <a:spcAft>
-                  <a:spcPts val="0"/>
-                </a:spcAft>
-                <a:buNone/>
-              </a:pPr>
-              <a:r>
-                <a:rPr lang="fr-CA" sz="1400" dirty="0">
-                  <a:solidFill>
-                    <a:schemeClr val="lt1"/>
-                  </a:solidFill>
-                  <a:latin typeface="Calibri"/>
-                  <a:ea typeface="Calibri"/>
-                  <a:cs typeface="Calibri"/>
-                  <a:sym typeface="Calibri"/>
-                </a:rPr>
-                <a:t>1</a:t>
-              </a:r>
-              <a:endParaRPr dirty="0"/>
-            </a:p>
-            <a:p>
-              <a:pPr marL="0" marR="0" lvl="0" indent="0" algn="ctr" rtl="0">
-                <a:spcBef>
-                  <a:spcPts val="0"/>
-                </a:spcBef>
-                <a:spcAft>
-                  <a:spcPts val="0"/>
-                </a:spcAft>
-                <a:buNone/>
-              </a:pPr>
-              <a:r>
-                <a:rPr lang="fr-CA" sz="1400" dirty="0">
-                  <a:solidFill>
-                    <a:schemeClr val="lt1"/>
-                  </a:solidFill>
-                  <a:latin typeface="Calibri"/>
-                  <a:ea typeface="Calibri"/>
-                  <a:cs typeface="Calibri"/>
-                  <a:sym typeface="Calibri"/>
-                </a:rPr>
-                <a:t>23</a:t>
-              </a:r>
-              <a:endParaRPr dirty="0"/>
-            </a:p>
-            <a:p>
-              <a:pPr marL="0" marR="0" lvl="0" indent="0" algn="ctr" rtl="0">
-                <a:spcBef>
-                  <a:spcPts val="0"/>
-                </a:spcBef>
-                <a:spcAft>
-                  <a:spcPts val="0"/>
-                </a:spcAft>
-                <a:buNone/>
-              </a:pPr>
-              <a:r>
-                <a:rPr lang="fr-CA" sz="1400" dirty="0">
-                  <a:solidFill>
-                    <a:schemeClr val="lt1"/>
-                  </a:solidFill>
-                  <a:latin typeface="Calibri"/>
-                  <a:ea typeface="Calibri"/>
-                  <a:cs typeface="Calibri"/>
-                  <a:sym typeface="Calibri"/>
-                </a:rPr>
-                <a:t>4</a:t>
-              </a:r>
-              <a:endParaRPr dirty="0"/>
-            </a:p>
-            <a:p>
-              <a:pPr marL="0" marR="0" lvl="0" indent="0" algn="ctr" rtl="0">
-                <a:spcBef>
-                  <a:spcPts val="0"/>
-                </a:spcBef>
-                <a:spcAft>
-                  <a:spcPts val="0"/>
-                </a:spcAft>
-                <a:buNone/>
-              </a:pPr>
-              <a:r>
-                <a:rPr lang="fr-CA" sz="1400" dirty="0">
-                  <a:solidFill>
-                    <a:schemeClr val="lt1"/>
-                  </a:solidFill>
-                  <a:latin typeface="Calibri"/>
-                  <a:ea typeface="Calibri"/>
-                  <a:cs typeface="Calibri"/>
-                  <a:sym typeface="Calibri"/>
-                </a:rPr>
-                <a:t>5</a:t>
-              </a:r>
-            </a:p>
-            <a:p>
-              <a:pPr marL="0" marR="0" lvl="0" indent="0" algn="ctr" rtl="0">
-                <a:spcBef>
-                  <a:spcPts val="0"/>
-                </a:spcBef>
-                <a:spcAft>
-                  <a:spcPts val="0"/>
-                </a:spcAft>
-                <a:buNone/>
-              </a:pPr>
-              <a:r>
-                <a:rPr lang="fr-CA" sz="1400" dirty="0">
-                  <a:solidFill>
-                    <a:schemeClr val="lt1"/>
-                  </a:solidFill>
-                  <a:latin typeface="Calibri"/>
-                  <a:ea typeface="Calibri"/>
-                  <a:cs typeface="Calibri"/>
-                  <a:sym typeface="Calibri"/>
-                </a:rPr>
-                <a:t>6</a:t>
-              </a:r>
-              <a:endParaRPr dirty="0"/>
-            </a:p>
-          </p:txBody>
-        </p:sp>
-        <p:sp>
-          <p:nvSpPr>
-            <p:cNvPr id="8" name="Google Shape;356;p18">
-              <a:extLst>
-                <a:ext uri="{FF2B5EF4-FFF2-40B4-BE49-F238E27FC236}">
-                  <a16:creationId xmlns:a16="http://schemas.microsoft.com/office/drawing/2014/main" id="{4C789759-180C-72BA-D687-8BF5005AF9F0}"/>
-                </a:ext>
-              </a:extLst>
-            </p:cNvPr>
-            <p:cNvSpPr/>
-            <p:nvPr/>
-          </p:nvSpPr>
-          <p:spPr>
-            <a:xfrm>
-              <a:off x="6938939" y="3766185"/>
-              <a:ext cx="8728258" cy="691200"/>
-            </a:xfrm>
-            <a:prstGeom prst="rect">
-              <a:avLst/>
-            </a:prstGeom>
-            <a:solidFill>
-              <a:schemeClr val="dk1"/>
-            </a:solidFill>
-            <a:ln w="12700" cap="flat" cmpd="sng">
-              <a:solidFill>
-                <a:schemeClr val="dk1"/>
-              </a:solidFill>
-              <a:prstDash val="solid"/>
-              <a:miter lim="800000"/>
-              <a:headEnd type="none" w="sm" len="sm"/>
-              <a:tailEnd type="none" w="sm" len="sm"/>
-            </a:ln>
-          </p:spPr>
-          <p:txBody>
-            <a:bodyPr spcFirstLastPara="1" wrap="square" lIns="91425" tIns="45700" rIns="91425" bIns="45700" anchor="ctr" anchorCtr="0">
-              <a:noAutofit/>
-            </a:bodyPr>
-            <a:lstStyle/>
-            <a:p>
-              <a:r>
-                <a:rPr lang="en-CA" sz="1400" b="1" dirty="0">
-                  <a:solidFill>
-                    <a:schemeClr val="bg1"/>
-                  </a:solidFill>
-                  <a:latin typeface="Consolas" panose="020B0609020204030204" pitchFamily="49" charset="0"/>
-                </a:rPr>
-                <a:t>&gt;&gt;&gt; valeur_1 = int(input('</a:t>
-              </a:r>
-              <a:r>
-                <a:rPr lang="en-CA" sz="1400" b="1" dirty="0" err="1">
-                  <a:solidFill>
-                    <a:schemeClr val="bg1"/>
-                  </a:solidFill>
-                  <a:latin typeface="Consolas" panose="020B0609020204030204" pitchFamily="49" charset="0"/>
-                </a:rPr>
-                <a:t>Saisir</a:t>
-              </a:r>
-              <a:r>
-                <a:rPr lang="en-CA" sz="1400" b="1" dirty="0">
-                  <a:solidFill>
-                    <a:schemeClr val="bg1"/>
-                  </a:solidFill>
-                  <a:latin typeface="Consolas" panose="020B0609020204030204" pitchFamily="49" charset="0"/>
-                </a:rPr>
-                <a:t> un </a:t>
-              </a:r>
-              <a:r>
-                <a:rPr lang="en-CA" sz="1400" b="1" dirty="0" err="1">
-                  <a:solidFill>
-                    <a:schemeClr val="bg1"/>
-                  </a:solidFill>
-                  <a:latin typeface="Consolas" panose="020B0609020204030204" pitchFamily="49" charset="0"/>
-                </a:rPr>
-                <a:t>entier</a:t>
-              </a:r>
-              <a:r>
-                <a:rPr lang="en-CA" sz="1400" b="1" dirty="0">
-                  <a:solidFill>
-                    <a:schemeClr val="bg1"/>
-                  </a:solidFill>
-                  <a:latin typeface="Consolas" panose="020B0609020204030204" pitchFamily="49" charset="0"/>
-                </a:rPr>
-                <a:t>: '))</a:t>
-              </a:r>
-            </a:p>
-            <a:p>
-              <a:r>
-                <a:rPr lang="en-CA" sz="1400" b="1" dirty="0" err="1">
-                  <a:solidFill>
-                    <a:schemeClr val="bg1"/>
-                  </a:solidFill>
-                  <a:latin typeface="Consolas" panose="020B0609020204030204" pitchFamily="49" charset="0"/>
-                </a:rPr>
-                <a:t>Saisir</a:t>
-              </a:r>
-              <a:r>
-                <a:rPr lang="en-CA" sz="1400" b="1" dirty="0">
-                  <a:solidFill>
-                    <a:schemeClr val="bg1"/>
-                  </a:solidFill>
-                  <a:latin typeface="Consolas" panose="020B0609020204030204" pitchFamily="49" charset="0"/>
-                </a:rPr>
-                <a:t> un </a:t>
-              </a:r>
-              <a:r>
-                <a:rPr lang="en-CA" sz="1400" b="1" dirty="0" err="1">
-                  <a:solidFill>
-                    <a:schemeClr val="bg1"/>
-                  </a:solidFill>
-                  <a:latin typeface="Consolas" panose="020B0609020204030204" pitchFamily="49" charset="0"/>
-                </a:rPr>
-                <a:t>entier</a:t>
-              </a:r>
-              <a:r>
-                <a:rPr lang="en-CA" sz="1400" b="1" dirty="0">
-                  <a:solidFill>
-                    <a:schemeClr val="bg1"/>
-                  </a:solidFill>
-                  <a:latin typeface="Consolas" panose="020B0609020204030204" pitchFamily="49" charset="0"/>
-                </a:rPr>
-                <a:t>: 1</a:t>
-              </a:r>
-            </a:p>
-            <a:p>
-              <a:r>
-                <a:rPr lang="en-CA" sz="1400" b="1" dirty="0">
-                  <a:solidFill>
-                    <a:schemeClr val="bg1"/>
-                  </a:solidFill>
-                  <a:latin typeface="Consolas" panose="020B0609020204030204" pitchFamily="49" charset="0"/>
-                </a:rPr>
-                <a:t>&gt;&gt;&gt; valeur_2 = int(input('</a:t>
-              </a:r>
-              <a:r>
-                <a:rPr lang="en-CA" sz="1400" b="1" dirty="0" err="1">
-                  <a:solidFill>
-                    <a:schemeClr val="bg1"/>
-                  </a:solidFill>
-                  <a:latin typeface="Consolas" panose="020B0609020204030204" pitchFamily="49" charset="0"/>
-                </a:rPr>
-                <a:t>Saisir</a:t>
-              </a:r>
-              <a:r>
-                <a:rPr lang="en-CA" sz="1400" b="1" dirty="0">
-                  <a:solidFill>
-                    <a:schemeClr val="bg1"/>
-                  </a:solidFill>
-                  <a:latin typeface="Consolas" panose="020B0609020204030204" pitchFamily="49" charset="0"/>
-                </a:rPr>
-                <a:t> un </a:t>
-              </a:r>
-              <a:r>
-                <a:rPr lang="en-CA" sz="1400" b="1" dirty="0" err="1">
-                  <a:solidFill>
-                    <a:schemeClr val="bg1"/>
-                  </a:solidFill>
-                  <a:latin typeface="Consolas" panose="020B0609020204030204" pitchFamily="49" charset="0"/>
-                </a:rPr>
-                <a:t>entier</a:t>
-              </a:r>
-              <a:r>
-                <a:rPr lang="en-CA" sz="1400" b="1" dirty="0">
-                  <a:solidFill>
-                    <a:schemeClr val="bg1"/>
-                  </a:solidFill>
-                  <a:latin typeface="Consolas" panose="020B0609020204030204" pitchFamily="49" charset="0"/>
-                </a:rPr>
-                <a:t> diff</a:t>
-              </a:r>
-              <a:r>
-                <a:rPr lang="fr-CA" sz="1400" b="1" dirty="0" err="1">
-                  <a:solidFill>
-                    <a:schemeClr val="bg1"/>
-                  </a:solidFill>
-                  <a:latin typeface="Consolas" panose="020B0609020204030204" pitchFamily="49" charset="0"/>
-                </a:rPr>
-                <a:t>érent</a:t>
-              </a:r>
-              <a:r>
-                <a:rPr lang="fr-CA" sz="1400" b="1" dirty="0">
-                  <a:solidFill>
-                    <a:schemeClr val="bg1"/>
-                  </a:solidFill>
-                  <a:latin typeface="Consolas" panose="020B0609020204030204" pitchFamily="49" charset="0"/>
-                </a:rPr>
-                <a:t>: '))</a:t>
-              </a:r>
-            </a:p>
-            <a:p>
-              <a:r>
-                <a:rPr lang="en-CA" sz="1400" b="1" dirty="0" err="1">
-                  <a:solidFill>
-                    <a:schemeClr val="bg1"/>
-                  </a:solidFill>
-                  <a:latin typeface="Consolas" panose="020B0609020204030204" pitchFamily="49" charset="0"/>
-                </a:rPr>
-                <a:t>Saisir</a:t>
-              </a:r>
-              <a:r>
-                <a:rPr lang="en-CA" sz="1400" b="1" dirty="0">
-                  <a:solidFill>
-                    <a:schemeClr val="bg1"/>
-                  </a:solidFill>
-                  <a:latin typeface="Consolas" panose="020B0609020204030204" pitchFamily="49" charset="0"/>
-                </a:rPr>
-                <a:t> un </a:t>
-              </a:r>
-              <a:r>
-                <a:rPr lang="en-CA" sz="1400" b="1" dirty="0" err="1">
-                  <a:solidFill>
-                    <a:schemeClr val="bg1"/>
-                  </a:solidFill>
-                  <a:latin typeface="Consolas" panose="020B0609020204030204" pitchFamily="49" charset="0"/>
-                </a:rPr>
-                <a:t>entier</a:t>
-              </a:r>
-              <a:r>
-                <a:rPr lang="en-CA" sz="1400" b="1" dirty="0">
-                  <a:solidFill>
-                    <a:schemeClr val="bg1"/>
-                  </a:solidFill>
-                  <a:latin typeface="Consolas" panose="020B0609020204030204" pitchFamily="49" charset="0"/>
-                </a:rPr>
-                <a:t> diff</a:t>
-              </a:r>
-              <a:r>
-                <a:rPr lang="fr-CA" sz="1400" b="1" dirty="0" err="1">
-                  <a:solidFill>
-                    <a:schemeClr val="bg1"/>
-                  </a:solidFill>
-                  <a:latin typeface="Consolas" panose="020B0609020204030204" pitchFamily="49" charset="0"/>
-                </a:rPr>
-                <a:t>érent</a:t>
-              </a:r>
-              <a:r>
-                <a:rPr lang="fr-CA" sz="1400" b="1" dirty="0">
-                  <a:solidFill>
-                    <a:schemeClr val="bg1"/>
-                  </a:solidFill>
-                  <a:latin typeface="Consolas" panose="020B0609020204030204" pitchFamily="49" charset="0"/>
-                </a:rPr>
-                <a:t>: 1</a:t>
-              </a:r>
-            </a:p>
-            <a:p>
-              <a:r>
-                <a:rPr lang="en-CA" sz="1400" b="1" dirty="0">
-                  <a:solidFill>
-                    <a:schemeClr val="bg1"/>
-                  </a:solidFill>
-                  <a:latin typeface="Consolas" panose="020B0609020204030204" pitchFamily="49" charset="0"/>
-                </a:rPr>
-                <a:t>&gt;&gt;&gt; </a:t>
-              </a:r>
-              <a:r>
-                <a:rPr lang="en-CA" sz="1400" b="1" dirty="0">
-                  <a:solidFill>
-                    <a:srgbClr val="FF2500"/>
-                  </a:solidFill>
-                  <a:latin typeface="Consolas" panose="020B0609020204030204" pitchFamily="49" charset="0"/>
-                </a:rPr>
-                <a:t>assert</a:t>
-              </a:r>
-              <a:r>
-                <a:rPr lang="en-CA" sz="1400" b="1" dirty="0">
-                  <a:solidFill>
-                    <a:schemeClr val="bg1"/>
-                  </a:solidFill>
-                  <a:latin typeface="Consolas" panose="020B0609020204030204" pitchFamily="49" charset="0"/>
-                </a:rPr>
-                <a:t> valeur_1 != valeur_2, 'Les </a:t>
-              </a:r>
-              <a:r>
-                <a:rPr lang="en-CA" sz="1400" b="1" dirty="0" err="1">
-                  <a:solidFill>
-                    <a:schemeClr val="bg1"/>
-                  </a:solidFill>
-                  <a:latin typeface="Consolas" panose="020B0609020204030204" pitchFamily="49" charset="0"/>
-                </a:rPr>
-                <a:t>valeurs</a:t>
-              </a:r>
-              <a:r>
-                <a:rPr lang="en-CA" sz="1400" b="1" dirty="0">
-                  <a:solidFill>
-                    <a:schemeClr val="bg1"/>
-                  </a:solidFill>
-                  <a:latin typeface="Consolas" panose="020B0609020204030204" pitchFamily="49" charset="0"/>
-                </a:rPr>
-                <a:t> </a:t>
-              </a:r>
-              <a:r>
-                <a:rPr lang="en-CA" sz="1400" b="1" dirty="0" err="1">
-                  <a:solidFill>
-                    <a:schemeClr val="bg1"/>
-                  </a:solidFill>
-                  <a:latin typeface="Consolas" panose="020B0609020204030204" pitchFamily="49" charset="0"/>
-                </a:rPr>
-                <a:t>doivent</a:t>
-              </a:r>
-              <a:r>
-                <a:rPr lang="en-CA" sz="1400" b="1" dirty="0">
-                  <a:solidFill>
-                    <a:schemeClr val="bg1"/>
-                  </a:solidFill>
-                  <a:latin typeface="Consolas" panose="020B0609020204030204" pitchFamily="49" charset="0"/>
-                </a:rPr>
-                <a:t> </a:t>
-              </a:r>
-              <a:r>
-                <a:rPr lang="en-CA" sz="1400" b="1" dirty="0" err="1">
-                  <a:solidFill>
-                    <a:schemeClr val="bg1"/>
-                  </a:solidFill>
-                  <a:latin typeface="Consolas" panose="020B0609020204030204" pitchFamily="49" charset="0"/>
-                </a:rPr>
-                <a:t>être</a:t>
-              </a:r>
-              <a:r>
-                <a:rPr lang="en-CA" sz="1400" b="1" dirty="0">
-                  <a:solidFill>
-                    <a:schemeClr val="bg1"/>
-                  </a:solidFill>
-                  <a:latin typeface="Consolas" panose="020B0609020204030204" pitchFamily="49" charset="0"/>
-                </a:rPr>
-                <a:t> </a:t>
-              </a:r>
-              <a:r>
-                <a:rPr lang="en-CA" sz="1400" b="1" dirty="0" err="1">
-                  <a:solidFill>
-                    <a:schemeClr val="bg1"/>
-                  </a:solidFill>
-                  <a:latin typeface="Consolas" panose="020B0609020204030204" pitchFamily="49" charset="0"/>
-                </a:rPr>
-                <a:t>différentes</a:t>
-              </a:r>
-              <a:r>
-                <a:rPr lang="en-CA" sz="1400" b="1" dirty="0">
-                  <a:solidFill>
-                    <a:schemeClr val="bg1"/>
-                  </a:solidFill>
-                  <a:latin typeface="Consolas" panose="020B0609020204030204" pitchFamily="49" charset="0"/>
-                </a:rPr>
-                <a:t>'</a:t>
-              </a:r>
-            </a:p>
-            <a:p>
-              <a:pPr algn="just"/>
-              <a:r>
-                <a:rPr lang="en-CA" sz="1400" b="1" dirty="0" err="1">
-                  <a:solidFill>
-                    <a:schemeClr val="bg1"/>
-                  </a:solidFill>
-                  <a:latin typeface="Consolas" panose="020B0609020204030204" pitchFamily="49" charset="0"/>
-                </a:rPr>
-                <a:t>AssertionError</a:t>
-              </a:r>
-              <a:r>
-                <a:rPr lang="en-CA" sz="1400" b="1" dirty="0">
-                  <a:solidFill>
-                    <a:schemeClr val="bg1"/>
-                  </a:solidFill>
-                  <a:latin typeface="Consolas" panose="020B0609020204030204" pitchFamily="49" charset="0"/>
-                </a:rPr>
-                <a:t>: Les </a:t>
-              </a:r>
-              <a:r>
-                <a:rPr lang="en-CA" sz="1400" b="1" dirty="0" err="1">
-                  <a:solidFill>
-                    <a:schemeClr val="bg1"/>
-                  </a:solidFill>
-                  <a:latin typeface="Consolas" panose="020B0609020204030204" pitchFamily="49" charset="0"/>
-                </a:rPr>
-                <a:t>valeurs</a:t>
-              </a:r>
-              <a:r>
-                <a:rPr lang="en-CA" sz="1400" b="1" dirty="0">
-                  <a:solidFill>
-                    <a:schemeClr val="bg1"/>
-                  </a:solidFill>
-                  <a:latin typeface="Consolas" panose="020B0609020204030204" pitchFamily="49" charset="0"/>
-                </a:rPr>
-                <a:t> </a:t>
-              </a:r>
-              <a:r>
-                <a:rPr lang="en-CA" sz="1400" b="1" dirty="0" err="1">
-                  <a:solidFill>
-                    <a:schemeClr val="bg1"/>
-                  </a:solidFill>
-                  <a:latin typeface="Consolas" panose="020B0609020204030204" pitchFamily="49" charset="0"/>
-                </a:rPr>
-                <a:t>doivent</a:t>
-              </a:r>
-              <a:r>
-                <a:rPr lang="en-CA" sz="1400" b="1" dirty="0">
-                  <a:solidFill>
-                    <a:schemeClr val="bg1"/>
-                  </a:solidFill>
-                  <a:latin typeface="Consolas" panose="020B0609020204030204" pitchFamily="49" charset="0"/>
-                </a:rPr>
-                <a:t> </a:t>
-              </a:r>
-              <a:r>
-                <a:rPr lang="en-CA" sz="1400" b="1" dirty="0" err="1">
-                  <a:solidFill>
-                    <a:schemeClr val="bg1"/>
-                  </a:solidFill>
-                  <a:latin typeface="Consolas" panose="020B0609020204030204" pitchFamily="49" charset="0"/>
-                </a:rPr>
-                <a:t>être</a:t>
-              </a:r>
-              <a:r>
-                <a:rPr lang="en-CA" sz="1400" b="1" dirty="0">
-                  <a:solidFill>
-                    <a:schemeClr val="bg1"/>
-                  </a:solidFill>
-                  <a:latin typeface="Consolas" panose="020B0609020204030204" pitchFamily="49" charset="0"/>
-                </a:rPr>
-                <a:t> </a:t>
-              </a:r>
-              <a:r>
-                <a:rPr lang="en-CA" sz="1400" b="1" dirty="0" err="1">
-                  <a:solidFill>
-                    <a:schemeClr val="bg1"/>
-                  </a:solidFill>
-                  <a:latin typeface="Consolas" panose="020B0609020204030204" pitchFamily="49" charset="0"/>
-                </a:rPr>
-                <a:t>différentes</a:t>
-              </a:r>
-              <a:endParaRPr lang="fr-CA" sz="1400" dirty="0">
-                <a:solidFill>
-                  <a:schemeClr val="bg1"/>
-                </a:solidFill>
-                <a:latin typeface="Consolas" panose="020B0609020204030204" pitchFamily="49" charset="0"/>
-              </a:endParaRPr>
-            </a:p>
-          </p:txBody>
-        </p:sp>
-      </p:grpSp>
-    </p:spTree>
-    <p:extLst>
-      <p:ext uri="{BB962C8B-B14F-4D97-AF65-F5344CB8AC3E}">
-        <p14:creationId xmlns:p14="http://schemas.microsoft.com/office/powerpoint/2010/main" val="3696665868"/>
-      </p:ext>
-    </p:extLst>
-  </p:cSld>
-  <p:clrMapOvr>
-    <a:masterClrMapping/>
-  </p:clrMapOvr>
-  <p:timing>
-    <p:tnLst>
-      <p:par>
-        <p:cTn id="1" dur="indefinite" restart="never" nodeType="tmRoot">
-          <p:childTnLst>
-            <p:seq concurrent="1" nextAc="seek">
-              <p:cTn id="2" dur="indefinite" nodeType="mainSeq">
-                <p:childTnLst>
-                  <p:par>
-                    <p:cTn id="3" fill="hold">
-                      <p:stCondLst>
-                        <p:cond delay="indefinite"/>
-                      </p:stCondLst>
-                      <p:childTnLst>
-                        <p:par>
-                          <p:cTn id="4" fill="hold">
-                            <p:stCondLst>
-                              <p:cond delay="0"/>
-                            </p:stCondLst>
-                            <p:childTnLst>
-                              <p:par>
-                                <p:cTn id="5" presetID="10" presetClass="entr" presetSubtype="0" fill="hold" nodeType="clickEffect">
-                                  <p:stCondLst>
-                                    <p:cond delay="0"/>
-                                  </p:stCondLst>
-                                  <p:childTnLst>
-                                    <p:set>
-                                      <p:cBhvr>
-                                        <p:cTn id="6" dur="1" fill="hold">
-                                          <p:stCondLst>
-                                            <p:cond delay="0"/>
-                                          </p:stCondLst>
-                                        </p:cTn>
-                                        <p:tgtEl>
-                                          <p:spTgt spid="3">
-                                            <p:txEl>
-                                              <p:pRg st="0" end="0"/>
-                                            </p:txEl>
-                                          </p:spTgt>
-                                        </p:tgtEl>
-                                        <p:attrNameLst>
-                                          <p:attrName>style.visibility</p:attrName>
-                                        </p:attrNameLst>
-                                      </p:cBhvr>
-                                      <p:to>
-                                        <p:strVal val="visible"/>
-                                      </p:to>
-                                    </p:set>
-                                    <p:animEffect transition="in" filter="fade">
-                                      <p:cBhvr>
-                                        <p:cTn id="7" dur="500"/>
-                                        <p:tgtEl>
-                                          <p:spTgt spid="3">
-                                            <p:txEl>
-                                              <p:pRg st="0" end="0"/>
-                                            </p:txEl>
-                                          </p:spTgt>
-                                        </p:tgtEl>
-                                      </p:cBhvr>
-                                    </p:animEffect>
-                                  </p:childTnLst>
-                                </p:cTn>
-                              </p:par>
-                            </p:childTnLst>
-                          </p:cTn>
-                        </p:par>
-                      </p:childTnLst>
-                    </p:cTn>
-                  </p:par>
-                  <p:par>
-                    <p:cTn id="8" fill="hold">
-                      <p:stCondLst>
-                        <p:cond delay="indefinite"/>
-                      </p:stCondLst>
-                      <p:childTnLst>
-                        <p:par>
-                          <p:cTn id="9" fill="hold">
-                            <p:stCondLst>
-                              <p:cond delay="0"/>
-                            </p:stCondLst>
-                            <p:childTnLst>
-                              <p:par>
-                                <p:cTn id="10" presetID="10" presetClass="entr" presetSubtype="0" fill="hold" nodeType="clickEffect">
-                                  <p:stCondLst>
-                                    <p:cond delay="0"/>
-                                  </p:stCondLst>
-                                  <p:childTnLst>
-                                    <p:set>
-                                      <p:cBhvr>
-                                        <p:cTn id="11" dur="1" fill="hold">
-                                          <p:stCondLst>
-                                            <p:cond delay="0"/>
-                                          </p:stCondLst>
-                                        </p:cTn>
-                                        <p:tgtEl>
-                                          <p:spTgt spid="3">
-                                            <p:txEl>
-                                              <p:pRg st="1" end="1"/>
-                                            </p:txEl>
-                                          </p:spTgt>
-                                        </p:tgtEl>
-                                        <p:attrNameLst>
-                                          <p:attrName>style.visibility</p:attrName>
-                                        </p:attrNameLst>
-                                      </p:cBhvr>
-                                      <p:to>
-                                        <p:strVal val="visible"/>
-                                      </p:to>
-                                    </p:set>
-                                    <p:animEffect transition="in" filter="fade">
-                                      <p:cBhvr>
-                                        <p:cTn id="12" dur="500"/>
-                                        <p:tgtEl>
-                                          <p:spTgt spid="3">
-                                            <p:txEl>
-                                              <p:pRg st="1" end="1"/>
-                                            </p:txEl>
-                                          </p:spTgt>
-                                        </p:tgtEl>
-                                      </p:cBhvr>
-                                    </p:animEffect>
-                                  </p:childTnLst>
-                                </p:cTn>
-                              </p:par>
-                            </p:childTnLst>
-                          </p:cTn>
-                        </p:par>
-                      </p:childTnLst>
-                    </p:cTn>
-                  </p:par>
-                  <p:par>
-                    <p:cTn id="13" fill="hold">
-                      <p:stCondLst>
-                        <p:cond delay="indefinite"/>
-                      </p:stCondLst>
-                      <p:childTnLst>
-                        <p:par>
-                          <p:cTn id="14" fill="hold">
-                            <p:stCondLst>
-                              <p:cond delay="0"/>
-                            </p:stCondLst>
-                            <p:childTnLst>
-                              <p:par>
-                                <p:cTn id="15" presetID="10" presetClass="entr" presetSubtype="0" fill="hold" nodeType="clickEffect">
-                                  <p:stCondLst>
-                                    <p:cond delay="0"/>
-                                  </p:stCondLst>
-                                  <p:childTnLst>
-                                    <p:set>
-                                      <p:cBhvr>
-                                        <p:cTn id="16" dur="1" fill="hold">
-                                          <p:stCondLst>
-                                            <p:cond delay="0"/>
-                                          </p:stCondLst>
-                                        </p:cTn>
-                                        <p:tgtEl>
-                                          <p:spTgt spid="3">
-                                            <p:txEl>
-                                              <p:pRg st="2" end="2"/>
-                                            </p:txEl>
-                                          </p:spTgt>
-                                        </p:tgtEl>
-                                        <p:attrNameLst>
-                                          <p:attrName>style.visibility</p:attrName>
-                                        </p:attrNameLst>
-                                      </p:cBhvr>
-                                      <p:to>
-                                        <p:strVal val="visible"/>
-                                      </p:to>
-                                    </p:set>
-                                    <p:animEffect transition="in" filter="fade">
-                                      <p:cBhvr>
-                                        <p:cTn id="17" dur="500"/>
-                                        <p:tgtEl>
-                                          <p:spTgt spid="3">
-                                            <p:txEl>
-                                              <p:pRg st="2" end="2"/>
-                                            </p:txEl>
-                                          </p:spTgt>
-                                        </p:tgtEl>
-                                      </p:cBhvr>
-                                    </p:animEffect>
-                                  </p:childTnLst>
-                                </p:cTn>
-                              </p:par>
-                            </p:childTnLst>
-                          </p:cTn>
-                        </p:par>
-                      </p:childTnLst>
-                    </p:cTn>
-                  </p:par>
-                  <p:par>
-                    <p:cTn id="18" fill="hold">
-                      <p:stCondLst>
-                        <p:cond delay="indefinite"/>
-                      </p:stCondLst>
-                      <p:childTnLst>
-                        <p:par>
-                          <p:cTn id="19" fill="hold">
-                            <p:stCondLst>
-                              <p:cond delay="0"/>
-                            </p:stCondLst>
-                            <p:childTnLst>
-                              <p:par>
-                                <p:cTn id="20" presetID="10" presetClass="entr" presetSubtype="0" fill="hold" nodeType="clickEffect">
-                                  <p:stCondLst>
-                                    <p:cond delay="0"/>
-                                  </p:stCondLst>
-                                  <p:childTnLst>
-                                    <p:set>
-                                      <p:cBhvr>
-                                        <p:cTn id="21" dur="1" fill="hold">
-                                          <p:stCondLst>
-                                            <p:cond delay="0"/>
-                                          </p:stCondLst>
-                                        </p:cTn>
-                                        <p:tgtEl>
-                                          <p:spTgt spid="3">
-                                            <p:txEl>
-                                              <p:pRg st="3" end="3"/>
-                                            </p:txEl>
-                                          </p:spTgt>
-                                        </p:tgtEl>
-                                        <p:attrNameLst>
-                                          <p:attrName>style.visibility</p:attrName>
-                                        </p:attrNameLst>
-                                      </p:cBhvr>
-                                      <p:to>
-                                        <p:strVal val="visible"/>
-                                      </p:to>
-                                    </p:set>
-                                    <p:animEffect transition="in" filter="fade">
-                                      <p:cBhvr>
-                                        <p:cTn id="22" dur="500"/>
-                                        <p:tgtEl>
-                                          <p:spTgt spid="3">
-                                            <p:txEl>
-                                              <p:pRg st="3" end="3"/>
-                                            </p:txEl>
-                                          </p:spTgt>
-                                        </p:tgtEl>
-                                      </p:cBhvr>
-                                    </p:animEffect>
-                                  </p:childTnLst>
-                                </p:cTn>
-                              </p:par>
-                            </p:childTnLst>
-                          </p:cTn>
-                        </p:par>
-                      </p:childTnLst>
-                    </p:cTn>
-                  </p:par>
-                  <p:par>
-                    <p:cTn id="23" fill="hold">
-                      <p:stCondLst>
-                        <p:cond delay="indefinite"/>
-                      </p:stCondLst>
-                      <p:childTnLst>
-                        <p:par>
-                          <p:cTn id="24" fill="hold">
-                            <p:stCondLst>
-                              <p:cond delay="0"/>
-                            </p:stCondLst>
-                            <p:childTnLst>
-                              <p:par>
-                                <p:cTn id="25" presetID="10" presetClass="entr" presetSubtype="0" fill="hold" nodeType="clickEffect">
-                                  <p:stCondLst>
-                                    <p:cond delay="0"/>
-                                  </p:stCondLst>
-                                  <p:childTnLst>
-                                    <p:set>
-                                      <p:cBhvr>
-                                        <p:cTn id="26" dur="1" fill="hold">
-                                          <p:stCondLst>
-                                            <p:cond delay="0"/>
-                                          </p:stCondLst>
-                                        </p:cTn>
-                                        <p:tgtEl>
-                                          <p:spTgt spid="3">
-                                            <p:txEl>
-                                              <p:pRg st="4" end="4"/>
-                                            </p:txEl>
-                                          </p:spTgt>
-                                        </p:tgtEl>
-                                        <p:attrNameLst>
-                                          <p:attrName>style.visibility</p:attrName>
-                                        </p:attrNameLst>
-                                      </p:cBhvr>
-                                      <p:to>
-                                        <p:strVal val="visible"/>
-                                      </p:to>
-                                    </p:set>
-                                    <p:animEffect transition="in" filter="fade">
-                                      <p:cBhvr>
-                                        <p:cTn id="27" dur="500"/>
-                                        <p:tgtEl>
-                                          <p:spTgt spid="3">
-                                            <p:txEl>
-                                              <p:pRg st="4" end="4"/>
-                                            </p:txEl>
-                                          </p:spTgt>
-                                        </p:tgtEl>
-                                      </p:cBhvr>
-                                    </p:animEffect>
-                                  </p:childTnLst>
-                                </p:cTn>
-                              </p:par>
-                              <p:par>
-                                <p:cTn id="28" presetID="10" presetClass="entr" presetSubtype="0" fill="hold" nodeType="withEffect">
-                                  <p:stCondLst>
-                                    <p:cond delay="0"/>
-                                  </p:stCondLst>
-                                  <p:childTnLst>
-                                    <p:set>
-                                      <p:cBhvr>
-                                        <p:cTn id="29" dur="1" fill="hold">
-                                          <p:stCondLst>
-                                            <p:cond delay="0"/>
-                                          </p:stCondLst>
-                                        </p:cTn>
-                                        <p:tgtEl>
-                                          <p:spTgt spid="3">
-                                            <p:txEl>
-                                              <p:pRg st="5" end="5"/>
-                                            </p:txEl>
-                                          </p:spTgt>
-                                        </p:tgtEl>
-                                        <p:attrNameLst>
-                                          <p:attrName>style.visibility</p:attrName>
-                                        </p:attrNameLst>
-                                      </p:cBhvr>
-                                      <p:to>
-                                        <p:strVal val="visible"/>
-                                      </p:to>
-                                    </p:set>
-                                    <p:animEffect transition="in" filter="fade">
-                                      <p:cBhvr>
-                                        <p:cTn id="30" dur="500"/>
-                                        <p:tgtEl>
-                                          <p:spTgt spid="3">
-                                            <p:txEl>
-                                              <p:pRg st="5" end="5"/>
-                                            </p:txEl>
-                                          </p:spTgt>
-                                        </p:tgtEl>
-                                      </p:cBhvr>
-                                    </p:animEffect>
-                                  </p:childTnLst>
-                                </p:cTn>
-                              </p:par>
-                            </p:childTnLst>
-                          </p:cTn>
-                        </p:par>
-                      </p:childTnLst>
-                    </p:cTn>
-                  </p:par>
-                  <p:par>
-                    <p:cTn id="31" fill="hold">
-                      <p:stCondLst>
-                        <p:cond delay="indefinite"/>
-                      </p:stCondLst>
-                      <p:childTnLst>
-                        <p:par>
-                          <p:cTn id="32" fill="hold">
-                            <p:stCondLst>
-                              <p:cond delay="0"/>
-                            </p:stCondLst>
-                            <p:childTnLst>
-                              <p:par>
-                                <p:cTn id="33" presetID="10" presetClass="entr" presetSubtype="0" fill="hold" nodeType="clickEffect">
-                                  <p:stCondLst>
-                                    <p:cond delay="0"/>
-                                  </p:stCondLst>
-                                  <p:childTnLst>
-                                    <p:set>
-                                      <p:cBhvr>
-                                        <p:cTn id="34" dur="1" fill="hold">
-                                          <p:stCondLst>
-                                            <p:cond delay="0"/>
-                                          </p:stCondLst>
-                                        </p:cTn>
-                                        <p:tgtEl>
-                                          <p:spTgt spid="6"/>
-                                        </p:tgtEl>
-                                        <p:attrNameLst>
-                                          <p:attrName>style.visibility</p:attrName>
-                                        </p:attrNameLst>
-                                      </p:cBhvr>
-                                      <p:to>
-                                        <p:strVal val="visible"/>
-                                      </p:to>
-                                    </p:set>
-                                    <p:animEffect transition="in" filter="fade">
-                                      <p:cBhvr>
-                                        <p:cTn id="35" dur="500"/>
-                                        <p:tgtEl>
-                                          <p:spTgt spid="6"/>
-                                        </p:tgtEl>
-                                      </p:cBhvr>
-                                    </p:animEffect>
-                                  </p:childTnLst>
-                                </p:cTn>
-                              </p:par>
-                            </p:childTnLst>
-                          </p:cTn>
-                        </p:par>
-                      </p:childTnLst>
-                    </p:cTn>
-                  </p:par>
-                </p:childTnLst>
-              </p:cTn>
-              <p:prevCondLst>
-                <p:cond evt="onPrev" delay="0">
-                  <p:tgtEl>
-                    <p:sldTgt/>
-                  </p:tgtEl>
-                </p:cond>
-              </p:prevCondLst>
-              <p:nextCondLst>
-                <p:cond evt="onNext" delay="0">
-                  <p:tgtEl>
-                    <p:sldTgt/>
-                  </p:tgtEl>
-                </p:cond>
-              </p:nextCondLst>
-            </p:seq>
-          </p:childTnLst>
-        </p:cTn>
-      </p:par>
-    </p:tnLst>
-  </p:timing>
-</p:sld>
-</file>
-
-<file path=ppt/slides/slide30.xml><?xml version="1.0" encoding="utf-8"?>
+<file path=ppt/slides/slide31.xml><?xml version="1.0" encoding="utf-8"?>
 <p:sld xmlns:a="http://schemas.openxmlformats.org/drawingml/2006/main" xmlns:r="http://schemas.openxmlformats.org/officeDocument/2006/relationships" xmlns:p="http://schemas.openxmlformats.org/presentationml/2006/main">
   <p:cSld>
     <p:bg>
@@ -27440,7 +29085,7 @@
           <a:p>
             <a:fld id="{846B06B1-1179-491F-A487-8E0C403F7C13}" type="slidenum">
               <a:rPr lang="fr-CA" smtClean="0"/>
-              <a:t>30</a:t>
+              <a:t>31</a:t>
             </a:fld>
             <a:endParaRPr lang="fr-CA"/>
           </a:p>
@@ -27872,7 +29517,7 @@
 </p:sld>
 </file>
 
-<file path=ppt/slides/slide31.xml><?xml version="1.0" encoding="utf-8"?>
+<file path=ppt/slides/slide32.xml><?xml version="1.0" encoding="utf-8"?>
 <p:sld xmlns:a="http://schemas.openxmlformats.org/drawingml/2006/main" xmlns:r="http://schemas.openxmlformats.org/officeDocument/2006/relationships" xmlns:p="http://schemas.openxmlformats.org/presentationml/2006/main">
   <p:cSld>
     <p:bg>
@@ -28514,7 +30159,7 @@
           <a:p>
             <a:fld id="{846B06B1-1179-491F-A487-8E0C403F7C13}" type="slidenum">
               <a:rPr lang="fr-CA" smtClean="0"/>
-              <a:t>31</a:t>
+              <a:t>32</a:t>
             </a:fld>
             <a:endParaRPr lang="fr-CA"/>
           </a:p>
@@ -29076,7 +30721,7 @@
 </p:sld>
 </file>
 
-<file path=ppt/slides/slide32.xml><?xml version="1.0" encoding="utf-8"?>
+<file path=ppt/slides/slide33.xml><?xml version="1.0" encoding="utf-8"?>
 <p:sld xmlns:a="http://schemas.openxmlformats.org/drawingml/2006/main" xmlns:r="http://schemas.openxmlformats.org/officeDocument/2006/relationships" xmlns:p="http://schemas.openxmlformats.org/presentationml/2006/main">
   <p:cSld>
     <p:bg>
@@ -29520,7 +31165,7 @@
           <a:p>
             <a:fld id="{846B06B1-1179-491F-A487-8E0C403F7C13}" type="slidenum">
               <a:rPr lang="fr-CA" smtClean="0"/>
-              <a:t>32</a:t>
+              <a:t>33</a:t>
             </a:fld>
             <a:endParaRPr lang="fr-CA"/>
           </a:p>
@@ -29539,7 +31184,7 @@
 </p:sld>
 </file>
 
-<file path=ppt/slides/slide33.xml><?xml version="1.0" encoding="utf-8"?>
+<file path=ppt/slides/slide34.xml><?xml version="1.0" encoding="utf-8"?>
 <p:sld xmlns:a="http://schemas.openxmlformats.org/drawingml/2006/main" xmlns:r="http://schemas.openxmlformats.org/officeDocument/2006/relationships" xmlns:p="http://schemas.openxmlformats.org/presentationml/2006/main">
   <p:cSld>
     <p:bg>
@@ -29840,7 +31485,7 @@
           <a:p>
             <a:fld id="{846B06B1-1179-491F-A487-8E0C403F7C13}" type="slidenum">
               <a:rPr lang="fr-CA" smtClean="0"/>
-              <a:t>33</a:t>
+              <a:t>34</a:t>
             </a:fld>
             <a:endParaRPr lang="fr-CA"/>
           </a:p>
@@ -30612,7 +32257,7 @@
 </p:sld>
 </file>
 
-<file path=ppt/slides/slide34.xml><?xml version="1.0" encoding="utf-8"?>
+<file path=ppt/slides/slide35.xml><?xml version="1.0" encoding="utf-8"?>
 <p:sld xmlns:a="http://schemas.openxmlformats.org/drawingml/2006/main" xmlns:r="http://schemas.openxmlformats.org/officeDocument/2006/relationships" xmlns:p="http://schemas.openxmlformats.org/presentationml/2006/main">
   <p:cSld>
     <p:bg>
@@ -31182,7 +32827,7 @@
           <a:p>
             <a:fld id="{846B06B1-1179-491F-A487-8E0C403F7C13}" type="slidenum">
               <a:rPr lang="fr-CA" smtClean="0"/>
-              <a:t>34</a:t>
+              <a:t>35</a:t>
             </a:fld>
             <a:endParaRPr lang="fr-CA"/>
           </a:p>
@@ -33642,7 +35287,7 @@
 </p:sld>
 </file>
 
-<file path=ppt/slides/slide35.xml><?xml version="1.0" encoding="utf-8"?>
+<file path=ppt/slides/slide36.xml><?xml version="1.0" encoding="utf-8"?>
 <p:sld xmlns:a="http://schemas.openxmlformats.org/drawingml/2006/main" xmlns:r="http://schemas.openxmlformats.org/officeDocument/2006/relationships" xmlns:p="http://schemas.openxmlformats.org/presentationml/2006/main">
   <p:cSld>
     <p:bg>
@@ -34007,7 +35652,7 @@
           <a:p>
             <a:fld id="{846B06B1-1179-491F-A487-8E0C403F7C13}" type="slidenum">
               <a:rPr lang="fr-CA" smtClean="0"/>
-              <a:t>35</a:t>
+              <a:t>36</a:t>
             </a:fld>
             <a:endParaRPr lang="fr-CA"/>
           </a:p>
@@ -34026,7 +35671,7 @@
 </p:sld>
 </file>
 
-<file path=ppt/slides/slide36.xml><?xml version="1.0" encoding="utf-8"?>
+<file path=ppt/slides/slide37.xml><?xml version="1.0" encoding="utf-8"?>
 <p:sld xmlns:a="http://schemas.openxmlformats.org/drawingml/2006/main" xmlns:r="http://schemas.openxmlformats.org/officeDocument/2006/relationships" xmlns:p="http://schemas.openxmlformats.org/presentationml/2006/main">
   <p:cSld>
     <p:bg>
@@ -34125,7 +35770,7 @@
           <a:p>
             <a:fld id="{846B06B1-1179-491F-A487-8E0C403F7C13}" type="slidenum">
               <a:rPr lang="fr-CA" smtClean="0"/>
-              <a:t>36</a:t>
+              <a:t>37</a:t>
             </a:fld>
             <a:endParaRPr lang="fr-CA"/>
           </a:p>
@@ -36133,7 +37778,7 @@
 </p:sld>
 </file>
 
-<file path=ppt/slides/slide37.xml><?xml version="1.0" encoding="utf-8"?>
+<file path=ppt/slides/slide38.xml><?xml version="1.0" encoding="utf-8"?>
 <p:sld xmlns:a="http://schemas.openxmlformats.org/drawingml/2006/main" xmlns:r="http://schemas.openxmlformats.org/officeDocument/2006/relationships" xmlns:p="http://schemas.openxmlformats.org/presentationml/2006/main">
   <p:cSld>
     <p:bg>
@@ -36351,7 +37996,7 @@
           <a:p>
             <a:fld id="{846B06B1-1179-491F-A487-8E0C403F7C13}" type="slidenum">
               <a:rPr lang="fr-CA" smtClean="0"/>
-              <a:t>37</a:t>
+              <a:t>38</a:t>
             </a:fld>
             <a:endParaRPr lang="fr-CA"/>
           </a:p>
@@ -36627,7 +38272,7 @@
 </p:sld>
 </file>
 
-<file path=ppt/slides/slide38.xml><?xml version="1.0" encoding="utf-8"?>
+<file path=ppt/slides/slide39.xml><?xml version="1.0" encoding="utf-8"?>
 <p:sld xmlns:a="http://schemas.openxmlformats.org/drawingml/2006/main" xmlns:r="http://schemas.openxmlformats.org/officeDocument/2006/relationships" xmlns:p="http://schemas.openxmlformats.org/presentationml/2006/main">
   <p:cSld>
     <p:bg>
@@ -37073,7 +38718,7 @@
           <a:p>
             <a:fld id="{846B06B1-1179-491F-A487-8E0C403F7C13}" type="slidenum">
               <a:rPr lang="fr-CA" smtClean="0"/>
-              <a:t>38</a:t>
+              <a:t>39</a:t>
             </a:fld>
             <a:endParaRPr lang="fr-CA" dirty="0"/>
           </a:p>
@@ -37948,1577 +39593,6 @@
         </p:cTn>
       </p:par>
     </p:tnLst>
-  </p:timing>
-</p:sld>
-</file>
-
-<file path=ppt/slides/slide39.xml><?xml version="1.0" encoding="utf-8"?>
-<p:sld xmlns:a="http://schemas.openxmlformats.org/drawingml/2006/main" xmlns:r="http://schemas.openxmlformats.org/officeDocument/2006/relationships" xmlns:p="http://schemas.openxmlformats.org/presentationml/2006/main">
-  <p:cSld>
-    <p:bg>
-      <p:bgPr>
-        <a:solidFill>
-          <a:srgbClr val="F5F5F5"/>
-        </a:solidFill>
-        <a:effectLst/>
-      </p:bgPr>
-    </p:bg>
-    <p:spTree>
-      <p:nvGrpSpPr>
-        <p:cNvPr id="1" name="">
-          <a:extLst>
-            <a:ext uri="{FF2B5EF4-FFF2-40B4-BE49-F238E27FC236}">
-              <a16:creationId xmlns:a16="http://schemas.microsoft.com/office/drawing/2014/main" id="{19DE56A2-CF0B-DCDE-18F0-DF8D05157518}"/>
-            </a:ext>
-          </a:extLst>
-        </p:cNvPr>
-        <p:cNvGrpSpPr/>
-        <p:nvPr/>
-      </p:nvGrpSpPr>
-      <p:grpSpPr>
-        <a:xfrm>
-          <a:off x="0" y="0"/>
-          <a:ext cx="0" cy="0"/>
-          <a:chOff x="0" y="0"/>
-          <a:chExt cx="0" cy="0"/>
-        </a:xfrm>
-      </p:grpSpPr>
-      <p:sp>
-        <p:nvSpPr>
-          <p:cNvPr id="2" name="Title 1">
-            <a:extLst>
-              <a:ext uri="{FF2B5EF4-FFF2-40B4-BE49-F238E27FC236}">
-                <a16:creationId xmlns:a16="http://schemas.microsoft.com/office/drawing/2014/main" id="{E7B2A86D-85D1-03C2-AE7A-9DF4A0AD6A39}"/>
-              </a:ext>
-            </a:extLst>
-          </p:cNvPr>
-          <p:cNvSpPr>
-            <a:spLocks noGrp="1"/>
-          </p:cNvSpPr>
-          <p:nvPr>
-            <p:ph type="title"/>
-          </p:nvPr>
-        </p:nvSpPr>
-        <p:spPr/>
-        <p:txBody>
-          <a:bodyPr/>
-          <a:lstStyle/>
-          <a:p>
-            <a:r>
-              <a:rPr lang="en-US" dirty="0" err="1">
-                <a:latin typeface="Arial Rounded MT Bold" panose="020F0704030504030204" pitchFamily="34" charset="0"/>
-              </a:rPr>
-              <a:t>Objets</a:t>
-            </a:r>
-            <a:r>
-              <a:rPr lang="en-US" dirty="0">
-                <a:latin typeface="Arial Rounded MT Bold" panose="020F0704030504030204" pitchFamily="34" charset="0"/>
-              </a:rPr>
-              <a:t> (2/2)</a:t>
-            </a:r>
-            <a:endParaRPr lang="fr-CA" dirty="0">
-              <a:latin typeface="Arial Rounded MT Bold" panose="020F0704030504030204" pitchFamily="34" charset="0"/>
-            </a:endParaRPr>
-          </a:p>
-        </p:txBody>
-      </p:sp>
-      <p:sp>
-        <p:nvSpPr>
-          <p:cNvPr id="3" name="Content Placeholder 2">
-            <a:extLst>
-              <a:ext uri="{FF2B5EF4-FFF2-40B4-BE49-F238E27FC236}">
-                <a16:creationId xmlns:a16="http://schemas.microsoft.com/office/drawing/2014/main" id="{668F765D-E029-D26F-4935-E44A7019A184}"/>
-              </a:ext>
-            </a:extLst>
-          </p:cNvPr>
-          <p:cNvSpPr>
-            <a:spLocks noGrp="1"/>
-          </p:cNvSpPr>
-          <p:nvPr>
-            <p:ph idx="1"/>
-          </p:nvPr>
-        </p:nvSpPr>
-        <p:spPr/>
-        <p:txBody>
-          <a:bodyPr>
-            <a:normAutofit/>
-          </a:bodyPr>
-          <a:lstStyle/>
-          <a:p>
-            <a:pPr algn="just">
-              <a:lnSpc>
-                <a:spcPct val="100000"/>
-              </a:lnSpc>
-            </a:pPr>
-            <a:r>
-              <a:rPr lang="en-US" sz="1800" dirty="0">
-                <a:latin typeface="Consolas" panose="020B0609020204030204" pitchFamily="49" charset="0"/>
-              </a:rPr>
-              <a:t>Pour </a:t>
-            </a:r>
-            <a:r>
-              <a:rPr lang="en-US" sz="1800" dirty="0" err="1">
-                <a:latin typeface="Consolas" panose="020B0609020204030204" pitchFamily="49" charset="0"/>
-              </a:rPr>
-              <a:t>accéder</a:t>
-            </a:r>
-            <a:r>
-              <a:rPr lang="en-US" sz="1800" dirty="0">
-                <a:latin typeface="Consolas" panose="020B0609020204030204" pitchFamily="49" charset="0"/>
-              </a:rPr>
-              <a:t> à un </a:t>
-            </a:r>
-            <a:r>
-              <a:rPr lang="en-US" sz="1800" dirty="0" err="1">
-                <a:latin typeface="Consolas" panose="020B0609020204030204" pitchFamily="49" charset="0"/>
-              </a:rPr>
-              <a:t>attribut</a:t>
-            </a:r>
-            <a:r>
-              <a:rPr lang="en-US" sz="1800" dirty="0">
-                <a:latin typeface="Consolas" panose="020B0609020204030204" pitchFamily="49" charset="0"/>
-              </a:rPr>
-              <a:t> </a:t>
-            </a:r>
-            <a:r>
-              <a:rPr lang="en-US" sz="1800" dirty="0" err="1">
-                <a:latin typeface="Consolas" panose="020B0609020204030204" pitchFamily="49" charset="0"/>
-              </a:rPr>
-              <a:t>ou</a:t>
-            </a:r>
-            <a:r>
-              <a:rPr lang="en-US" sz="1800" dirty="0">
-                <a:latin typeface="Consolas" panose="020B0609020204030204" pitchFamily="49" charset="0"/>
-              </a:rPr>
-              <a:t> </a:t>
-            </a:r>
-            <a:r>
-              <a:rPr lang="en-US" sz="1800" dirty="0" err="1">
-                <a:latin typeface="Consolas" panose="020B0609020204030204" pitchFamily="49" charset="0"/>
-              </a:rPr>
-              <a:t>une</a:t>
-            </a:r>
-            <a:r>
-              <a:rPr lang="en-US" sz="1800" dirty="0">
-                <a:latin typeface="Consolas" panose="020B0609020204030204" pitchFamily="49" charset="0"/>
-              </a:rPr>
-              <a:t> </a:t>
-            </a:r>
-            <a:r>
-              <a:rPr lang="en-US" sz="1800" dirty="0" err="1">
-                <a:latin typeface="Consolas" panose="020B0609020204030204" pitchFamily="49" charset="0"/>
-              </a:rPr>
-              <a:t>méthode</a:t>
-            </a:r>
-            <a:r>
-              <a:rPr lang="en-US" sz="1800" dirty="0">
-                <a:latin typeface="Consolas" panose="020B0609020204030204" pitchFamily="49" charset="0"/>
-              </a:rPr>
-              <a:t> d'un </a:t>
-            </a:r>
-            <a:r>
-              <a:rPr lang="en-US" sz="1800" dirty="0" err="1">
-                <a:latin typeface="Consolas" panose="020B0609020204030204" pitchFamily="49" charset="0"/>
-              </a:rPr>
-              <a:t>objet</a:t>
-            </a:r>
-            <a:r>
-              <a:rPr lang="en-US" sz="1800" dirty="0">
-                <a:latin typeface="Consolas" panose="020B0609020204030204" pitchFamily="49" charset="0"/>
-              </a:rPr>
-              <a:t>, nous </a:t>
-            </a:r>
-            <a:r>
-              <a:rPr lang="en-US" sz="1800" dirty="0" err="1">
-                <a:latin typeface="Consolas" panose="020B0609020204030204" pitchFamily="49" charset="0"/>
-              </a:rPr>
-              <a:t>utilisons</a:t>
-            </a:r>
-            <a:r>
-              <a:rPr lang="en-US" sz="1800" dirty="0">
-                <a:latin typeface="Consolas" panose="020B0609020204030204" pitchFamily="49" charset="0"/>
-              </a:rPr>
-              <a:t> </a:t>
-            </a:r>
-            <a:r>
-              <a:rPr lang="en-US" sz="1800" b="1" dirty="0" err="1">
-                <a:latin typeface="Consolas" panose="020B0609020204030204" pitchFamily="49" charset="0"/>
-              </a:rPr>
-              <a:t>l'opérateur</a:t>
-            </a:r>
-            <a:r>
-              <a:rPr lang="en-US" sz="1800" b="1" dirty="0">
-                <a:latin typeface="Consolas" panose="020B0609020204030204" pitchFamily="49" charset="0"/>
-              </a:rPr>
-              <a:t> </a:t>
-            </a:r>
-            <a:r>
-              <a:rPr lang="en-US" sz="1800" b="1" dirty="0" err="1">
-                <a:latin typeface="Consolas" panose="020B0609020204030204" pitchFamily="49" charset="0"/>
-              </a:rPr>
-              <a:t>d'accès</a:t>
-            </a:r>
-            <a:r>
-              <a:rPr lang="en-US" sz="1800" dirty="0">
-                <a:latin typeface="Consolas" panose="020B0609020204030204" pitchFamily="49" charset="0"/>
-              </a:rPr>
-              <a:t> qui correspond à un </a:t>
-            </a:r>
-            <a:r>
-              <a:rPr lang="en-US" sz="1800" b="1" dirty="0">
-                <a:latin typeface="Consolas" panose="020B0609020204030204" pitchFamily="49" charset="0"/>
-              </a:rPr>
-              <a:t>point</a:t>
-            </a:r>
-            <a:r>
-              <a:rPr lang="en-US" sz="1800" dirty="0">
-                <a:latin typeface="Consolas" panose="020B0609020204030204" pitchFamily="49" charset="0"/>
-              </a:rPr>
-              <a:t> entre le nom de </a:t>
-            </a:r>
-            <a:r>
-              <a:rPr lang="en-US" sz="1800" dirty="0" err="1">
-                <a:latin typeface="Consolas" panose="020B0609020204030204" pitchFamily="49" charset="0"/>
-              </a:rPr>
-              <a:t>l'instance</a:t>
-            </a:r>
-            <a:r>
-              <a:rPr lang="en-US" sz="1800" dirty="0">
-                <a:latin typeface="Consolas" panose="020B0609020204030204" pitchFamily="49" charset="0"/>
-              </a:rPr>
-              <a:t> et de la </a:t>
-            </a:r>
-            <a:r>
-              <a:rPr lang="en-US" sz="1800" dirty="0" err="1">
-                <a:latin typeface="Consolas" panose="020B0609020204030204" pitchFamily="49" charset="0"/>
-              </a:rPr>
-              <a:t>méthode</a:t>
-            </a:r>
-            <a:r>
-              <a:rPr lang="en-US" sz="1800" dirty="0">
-                <a:latin typeface="Consolas" panose="020B0609020204030204" pitchFamily="49" charset="0"/>
-              </a:rPr>
-              <a:t> :</a:t>
-            </a:r>
-          </a:p>
-          <a:p>
-            <a:pPr algn="just">
-              <a:lnSpc>
-                <a:spcPct val="100000"/>
-              </a:lnSpc>
-            </a:pPr>
-            <a:endParaRPr lang="en-US" sz="1800" dirty="0">
-              <a:latin typeface="Consolas" panose="020B0609020204030204" pitchFamily="49" charset="0"/>
-            </a:endParaRPr>
-          </a:p>
-          <a:p>
-            <a:pPr algn="just">
-              <a:lnSpc>
-                <a:spcPct val="100000"/>
-              </a:lnSpc>
-            </a:pPr>
-            <a:endParaRPr lang="en-US" sz="1800" dirty="0">
-              <a:latin typeface="Consolas" panose="020B0609020204030204" pitchFamily="49" charset="0"/>
-            </a:endParaRPr>
-          </a:p>
-          <a:p>
-            <a:pPr algn="just">
-              <a:lnSpc>
-                <a:spcPct val="100000"/>
-              </a:lnSpc>
-            </a:pPr>
-            <a:endParaRPr lang="en-US" sz="1800" dirty="0">
-              <a:latin typeface="Consolas" panose="020B0609020204030204" pitchFamily="49" charset="0"/>
-            </a:endParaRPr>
-          </a:p>
-          <a:p>
-            <a:pPr algn="just">
-              <a:lnSpc>
-                <a:spcPct val="100000"/>
-              </a:lnSpc>
-            </a:pPr>
-            <a:endParaRPr lang="en-US" sz="1800" dirty="0">
-              <a:latin typeface="Consolas" panose="020B0609020204030204" pitchFamily="49" charset="0"/>
-            </a:endParaRPr>
-          </a:p>
-          <a:p>
-            <a:pPr algn="just">
-              <a:lnSpc>
-                <a:spcPct val="100000"/>
-              </a:lnSpc>
-            </a:pPr>
-            <a:endParaRPr lang="en-US" sz="1800" dirty="0">
-              <a:latin typeface="Consolas" panose="020B0609020204030204" pitchFamily="49" charset="0"/>
-            </a:endParaRPr>
-          </a:p>
-          <a:p>
-            <a:pPr algn="just">
-              <a:lnSpc>
-                <a:spcPct val="100000"/>
-              </a:lnSpc>
-            </a:pPr>
-            <a:endParaRPr lang="en-US" sz="1800" dirty="0">
-              <a:latin typeface="Consolas" panose="020B0609020204030204" pitchFamily="49" charset="0"/>
-            </a:endParaRPr>
-          </a:p>
-          <a:p>
-            <a:pPr algn="just">
-              <a:lnSpc>
-                <a:spcPct val="100000"/>
-              </a:lnSpc>
-            </a:pPr>
-            <a:r>
-              <a:rPr lang="fr-FR" sz="1800" b="1" dirty="0">
-                <a:solidFill>
-                  <a:srgbClr val="000000"/>
-                </a:solidFill>
-                <a:latin typeface="Consolas"/>
-                <a:ea typeface="Consolas"/>
-                <a:cs typeface="Consolas"/>
-                <a:sym typeface="Consolas"/>
-              </a:rPr>
-              <a:t>En mots:</a:t>
-            </a:r>
-            <a:r>
-              <a:rPr lang="fr-FR" sz="1800" dirty="0">
-                <a:solidFill>
-                  <a:srgbClr val="000000"/>
-                </a:solidFill>
-                <a:latin typeface="Consolas"/>
-                <a:ea typeface="Consolas"/>
-                <a:cs typeface="Consolas"/>
-                <a:sym typeface="Consolas"/>
-              </a:rPr>
-              <a:t> Nous avons créé une </a:t>
-            </a:r>
-            <a:r>
-              <a:rPr lang="fr-FR" sz="1800" b="1" dirty="0">
-                <a:solidFill>
-                  <a:srgbClr val="000000"/>
-                </a:solidFill>
-                <a:latin typeface="Consolas"/>
-                <a:ea typeface="Consolas"/>
-                <a:cs typeface="Consolas"/>
-                <a:sym typeface="Consolas"/>
-              </a:rPr>
-              <a:t>instance</a:t>
-            </a:r>
-            <a:r>
-              <a:rPr lang="fr-FR" sz="1800" dirty="0">
-                <a:solidFill>
-                  <a:srgbClr val="000000"/>
-                </a:solidFill>
-                <a:latin typeface="Consolas"/>
-                <a:ea typeface="Consolas"/>
-                <a:cs typeface="Consolas"/>
-                <a:sym typeface="Consolas"/>
-              </a:rPr>
-              <a:t> de la </a:t>
-            </a:r>
-            <a:r>
-              <a:rPr lang="fr-FR" sz="1800" b="1" dirty="0">
-                <a:solidFill>
-                  <a:srgbClr val="000000"/>
-                </a:solidFill>
-                <a:latin typeface="Consolas"/>
-                <a:ea typeface="Consolas"/>
-                <a:cs typeface="Consolas"/>
-                <a:sym typeface="Consolas"/>
-              </a:rPr>
-              <a:t>classe</a:t>
-            </a:r>
-            <a:r>
-              <a:rPr lang="fr-FR" sz="1800" dirty="0">
-                <a:solidFill>
-                  <a:srgbClr val="000000"/>
-                </a:solidFill>
-                <a:latin typeface="Consolas"/>
-                <a:ea typeface="Consolas"/>
-                <a:cs typeface="Consolas"/>
-                <a:sym typeface="Consolas"/>
-              </a:rPr>
-              <a:t> </a:t>
-            </a:r>
-            <a:r>
-              <a:rPr lang="fr-FR" sz="1800" dirty="0" err="1">
-                <a:latin typeface="Consolas"/>
-                <a:ea typeface="Consolas"/>
-                <a:cs typeface="Consolas"/>
-                <a:sym typeface="Consolas"/>
-              </a:rPr>
-              <a:t>list</a:t>
-            </a:r>
-            <a:r>
-              <a:rPr lang="fr-FR" sz="1800" dirty="0">
-                <a:solidFill>
-                  <a:srgbClr val="000000"/>
-                </a:solidFill>
-                <a:latin typeface="Consolas"/>
-                <a:ea typeface="Consolas"/>
-                <a:cs typeface="Consolas"/>
-                <a:sym typeface="Consolas"/>
-              </a:rPr>
-              <a:t> et avons appelé la </a:t>
-            </a:r>
-            <a:r>
-              <a:rPr lang="fr-FR" sz="1800" b="1" dirty="0">
-                <a:solidFill>
-                  <a:srgbClr val="000000"/>
-                </a:solidFill>
-                <a:latin typeface="Consolas"/>
-                <a:ea typeface="Consolas"/>
-                <a:cs typeface="Consolas"/>
-                <a:sym typeface="Consolas"/>
-              </a:rPr>
-              <a:t>méthode</a:t>
-            </a:r>
-            <a:r>
-              <a:rPr lang="fr-FR" sz="1800" dirty="0">
-                <a:solidFill>
-                  <a:srgbClr val="000000"/>
-                </a:solidFill>
-                <a:latin typeface="Consolas"/>
-                <a:ea typeface="Consolas"/>
-                <a:cs typeface="Consolas"/>
-                <a:sym typeface="Consolas"/>
-              </a:rPr>
-              <a:t> .</a:t>
-            </a:r>
-            <a:r>
-              <a:rPr lang="fr-FR" sz="1800" dirty="0" err="1">
-                <a:solidFill>
-                  <a:srgbClr val="000000"/>
-                </a:solidFill>
-                <a:latin typeface="Consolas"/>
-                <a:ea typeface="Consolas"/>
-                <a:cs typeface="Consolas"/>
-                <a:sym typeface="Consolas"/>
-              </a:rPr>
-              <a:t>extend</a:t>
-            </a:r>
-            <a:r>
-              <a:rPr lang="fr-FR" sz="1800" dirty="0">
-                <a:solidFill>
-                  <a:srgbClr val="000000"/>
-                </a:solidFill>
-                <a:latin typeface="Consolas"/>
-                <a:ea typeface="Consolas"/>
-                <a:cs typeface="Consolas"/>
-                <a:sym typeface="Consolas"/>
-              </a:rPr>
-              <a:t>().</a:t>
-            </a:r>
-          </a:p>
-          <a:p>
-            <a:pPr marL="0" indent="0" algn="just">
-              <a:lnSpc>
-                <a:spcPct val="100000"/>
-              </a:lnSpc>
-              <a:buNone/>
-            </a:pPr>
-            <a:endParaRPr lang="fr-FR" sz="100" dirty="0">
-              <a:solidFill>
-                <a:srgbClr val="000000"/>
-              </a:solidFill>
-              <a:latin typeface="Consolas"/>
-              <a:sym typeface="Consolas"/>
-            </a:endParaRPr>
-          </a:p>
-          <a:p>
-            <a:pPr marL="0" indent="0" algn="ctr">
-              <a:lnSpc>
-                <a:spcPct val="100000"/>
-              </a:lnSpc>
-              <a:buNone/>
-            </a:pPr>
-            <a:r>
-              <a:rPr lang="fr-FR" sz="1800" b="1" dirty="0">
-                <a:solidFill>
-                  <a:srgbClr val="000000"/>
-                </a:solidFill>
-                <a:latin typeface="Consolas"/>
-                <a:sym typeface="Consolas"/>
-              </a:rPr>
-              <a:t>REMARQUE: </a:t>
-            </a:r>
-            <a:r>
-              <a:rPr lang="fr-FR" sz="1800" dirty="0">
-                <a:solidFill>
-                  <a:srgbClr val="000000"/>
-                </a:solidFill>
-                <a:latin typeface="Consolas"/>
-                <a:sym typeface="Consolas"/>
-              </a:rPr>
-              <a:t>En Python, </a:t>
-            </a:r>
-            <a:r>
-              <a:rPr lang="fr-FR" sz="1800" b="1" dirty="0">
-                <a:solidFill>
-                  <a:srgbClr val="000000"/>
-                </a:solidFill>
-                <a:latin typeface="Consolas"/>
-                <a:sym typeface="Consolas"/>
-              </a:rPr>
-              <a:t>tout est un objet</a:t>
-            </a:r>
-            <a:r>
-              <a:rPr lang="fr-FR" sz="1800" dirty="0">
-                <a:solidFill>
-                  <a:srgbClr val="000000"/>
-                </a:solidFill>
-                <a:latin typeface="Consolas"/>
-                <a:sym typeface="Consolas"/>
-              </a:rPr>
-              <a:t>.</a:t>
-            </a:r>
-            <a:endParaRPr lang="fr-FR" sz="1800" dirty="0"/>
-          </a:p>
-        </p:txBody>
-      </p:sp>
-      <p:sp>
-        <p:nvSpPr>
-          <p:cNvPr id="5" name="Slide Number Placeholder 4">
-            <a:extLst>
-              <a:ext uri="{FF2B5EF4-FFF2-40B4-BE49-F238E27FC236}">
-                <a16:creationId xmlns:a16="http://schemas.microsoft.com/office/drawing/2014/main" id="{3F111B6A-C575-3556-2AB2-775B93FBBD08}"/>
-              </a:ext>
-            </a:extLst>
-          </p:cNvPr>
-          <p:cNvSpPr>
-            <a:spLocks noGrp="1"/>
-          </p:cNvSpPr>
-          <p:nvPr>
-            <p:ph type="sldNum" sz="quarter" idx="12"/>
-          </p:nvPr>
-        </p:nvSpPr>
-        <p:spPr/>
-        <p:txBody>
-          <a:bodyPr/>
-          <a:lstStyle/>
-          <a:p>
-            <a:fld id="{846B06B1-1179-491F-A487-8E0C403F7C13}" type="slidenum">
-              <a:rPr lang="fr-CA" smtClean="0"/>
-              <a:t>39</a:t>
-            </a:fld>
-            <a:endParaRPr lang="fr-CA"/>
-          </a:p>
-        </p:txBody>
-      </p:sp>
-      <p:sp>
-        <p:nvSpPr>
-          <p:cNvPr id="9" name="Content Placeholder 2">
-            <a:extLst>
-              <a:ext uri="{FF2B5EF4-FFF2-40B4-BE49-F238E27FC236}">
-                <a16:creationId xmlns:a16="http://schemas.microsoft.com/office/drawing/2014/main" id="{1A2F112F-7482-62CD-3247-F489CD4469F8}"/>
-              </a:ext>
-            </a:extLst>
-          </p:cNvPr>
-          <p:cNvSpPr txBox="1">
-            <a:spLocks/>
-          </p:cNvSpPr>
-          <p:nvPr/>
-        </p:nvSpPr>
-        <p:spPr>
-          <a:xfrm>
-            <a:off x="990600" y="1978025"/>
-            <a:ext cx="10515600" cy="4351338"/>
-          </a:xfrm>
-          <a:prstGeom prst="rect">
-            <a:avLst/>
-          </a:prstGeom>
-        </p:spPr>
-        <p:txBody>
-          <a:bodyPr vert="horz" lIns="91440" tIns="45720" rIns="91440" bIns="45720" rtlCol="0">
-            <a:normAutofit/>
-          </a:bodyPr>
-          <a:lstStyle>
-            <a:lvl1pPr marL="228600" indent="-228600" algn="l" defTabSz="914400" rtl="0" eaLnBrk="1" latinLnBrk="0" hangingPunct="1">
-              <a:lnSpc>
-                <a:spcPct val="90000"/>
-              </a:lnSpc>
-              <a:spcBef>
-                <a:spcPts val="1000"/>
-              </a:spcBef>
-              <a:buFont typeface="Arial" panose="020B0604020202020204" pitchFamily="34" charset="0"/>
-              <a:buChar char="•"/>
-              <a:defRPr sz="2800" kern="1200">
-                <a:solidFill>
-                  <a:schemeClr val="tx1"/>
-                </a:solidFill>
-                <a:latin typeface="+mn-lt"/>
-                <a:ea typeface="+mn-ea"/>
-                <a:cs typeface="+mn-cs"/>
-              </a:defRPr>
-            </a:lvl1pPr>
-            <a:lvl2pPr marL="685800" indent="-228600" algn="l" defTabSz="914400" rtl="0" eaLnBrk="1" latinLnBrk="0" hangingPunct="1">
-              <a:lnSpc>
-                <a:spcPct val="90000"/>
-              </a:lnSpc>
-              <a:spcBef>
-                <a:spcPts val="500"/>
-              </a:spcBef>
-              <a:buFont typeface="Arial" panose="020B0604020202020204" pitchFamily="34" charset="0"/>
-              <a:buChar char="•"/>
-              <a:defRPr sz="2400" kern="1200">
-                <a:solidFill>
-                  <a:schemeClr val="tx1"/>
-                </a:solidFill>
-                <a:latin typeface="+mn-lt"/>
-                <a:ea typeface="+mn-ea"/>
-                <a:cs typeface="+mn-cs"/>
-              </a:defRPr>
-            </a:lvl2pPr>
-            <a:lvl3pPr marL="1143000" indent="-228600" algn="l" defTabSz="914400" rtl="0" eaLnBrk="1" latinLnBrk="0" hangingPunct="1">
-              <a:lnSpc>
-                <a:spcPct val="90000"/>
-              </a:lnSpc>
-              <a:spcBef>
-                <a:spcPts val="500"/>
-              </a:spcBef>
-              <a:buFont typeface="Arial" panose="020B0604020202020204" pitchFamily="34" charset="0"/>
-              <a:buChar char="•"/>
-              <a:defRPr sz="2000" kern="1200">
-                <a:solidFill>
-                  <a:schemeClr val="tx1"/>
-                </a:solidFill>
-                <a:latin typeface="+mn-lt"/>
-                <a:ea typeface="+mn-ea"/>
-                <a:cs typeface="+mn-cs"/>
-              </a:defRPr>
-            </a:lvl3pPr>
-            <a:lvl4pPr marL="1600200" indent="-228600" algn="l" defTabSz="914400" rtl="0" eaLnBrk="1" latinLnBrk="0" hangingPunct="1">
-              <a:lnSpc>
-                <a:spcPct val="90000"/>
-              </a:lnSpc>
-              <a:spcBef>
-                <a:spcPts val="500"/>
-              </a:spcBef>
-              <a:buFont typeface="Arial" panose="020B0604020202020204" pitchFamily="34" charset="0"/>
-              <a:buChar char="•"/>
-              <a:defRPr sz="1800" kern="1200">
-                <a:solidFill>
-                  <a:schemeClr val="tx1"/>
-                </a:solidFill>
-                <a:latin typeface="+mn-lt"/>
-                <a:ea typeface="+mn-ea"/>
-                <a:cs typeface="+mn-cs"/>
-              </a:defRPr>
-            </a:lvl4pPr>
-            <a:lvl5pPr marL="2057400" indent="-228600" algn="l" defTabSz="914400" rtl="0" eaLnBrk="1" latinLnBrk="0" hangingPunct="1">
-              <a:lnSpc>
-                <a:spcPct val="90000"/>
-              </a:lnSpc>
-              <a:spcBef>
-                <a:spcPts val="500"/>
-              </a:spcBef>
-              <a:buFont typeface="Arial" panose="020B0604020202020204" pitchFamily="34" charset="0"/>
-              <a:buChar char="•"/>
-              <a:defRPr sz="1800" kern="1200">
-                <a:solidFill>
-                  <a:schemeClr val="tx1"/>
-                </a:solidFill>
-                <a:latin typeface="+mn-lt"/>
-                <a:ea typeface="+mn-ea"/>
-                <a:cs typeface="+mn-cs"/>
-              </a:defRPr>
-            </a:lvl5pPr>
-            <a:lvl6pPr marL="2514600" indent="-228600" algn="l" defTabSz="914400" rtl="0" eaLnBrk="1" latinLnBrk="0" hangingPunct="1">
-              <a:lnSpc>
-                <a:spcPct val="90000"/>
-              </a:lnSpc>
-              <a:spcBef>
-                <a:spcPts val="500"/>
-              </a:spcBef>
-              <a:buFont typeface="Arial" panose="020B0604020202020204" pitchFamily="34" charset="0"/>
-              <a:buChar char="•"/>
-              <a:defRPr sz="1800" kern="1200">
-                <a:solidFill>
-                  <a:schemeClr val="tx1"/>
-                </a:solidFill>
-                <a:latin typeface="+mn-lt"/>
-                <a:ea typeface="+mn-ea"/>
-                <a:cs typeface="+mn-cs"/>
-              </a:defRPr>
-            </a:lvl6pPr>
-            <a:lvl7pPr marL="2971800" indent="-228600" algn="l" defTabSz="914400" rtl="0" eaLnBrk="1" latinLnBrk="0" hangingPunct="1">
-              <a:lnSpc>
-                <a:spcPct val="90000"/>
-              </a:lnSpc>
-              <a:spcBef>
-                <a:spcPts val="500"/>
-              </a:spcBef>
-              <a:buFont typeface="Arial" panose="020B0604020202020204" pitchFamily="34" charset="0"/>
-              <a:buChar char="•"/>
-              <a:defRPr sz="1800" kern="1200">
-                <a:solidFill>
-                  <a:schemeClr val="tx1"/>
-                </a:solidFill>
-                <a:latin typeface="+mn-lt"/>
-                <a:ea typeface="+mn-ea"/>
-                <a:cs typeface="+mn-cs"/>
-              </a:defRPr>
-            </a:lvl7pPr>
-            <a:lvl8pPr marL="3429000" indent="-228600" algn="l" defTabSz="914400" rtl="0" eaLnBrk="1" latinLnBrk="0" hangingPunct="1">
-              <a:lnSpc>
-                <a:spcPct val="90000"/>
-              </a:lnSpc>
-              <a:spcBef>
-                <a:spcPts val="500"/>
-              </a:spcBef>
-              <a:buFont typeface="Arial" panose="020B0604020202020204" pitchFamily="34" charset="0"/>
-              <a:buChar char="•"/>
-              <a:defRPr sz="1800" kern="1200">
-                <a:solidFill>
-                  <a:schemeClr val="tx1"/>
-                </a:solidFill>
-                <a:latin typeface="+mn-lt"/>
-                <a:ea typeface="+mn-ea"/>
-                <a:cs typeface="+mn-cs"/>
-              </a:defRPr>
-            </a:lvl8pPr>
-            <a:lvl9pPr marL="3886200" indent="-228600" algn="l" defTabSz="914400" rtl="0" eaLnBrk="1" latinLnBrk="0" hangingPunct="1">
-              <a:lnSpc>
-                <a:spcPct val="90000"/>
-              </a:lnSpc>
-              <a:spcBef>
-                <a:spcPts val="500"/>
-              </a:spcBef>
-              <a:buFont typeface="Arial" panose="020B0604020202020204" pitchFamily="34" charset="0"/>
-              <a:buChar char="•"/>
-              <a:defRPr sz="1800" kern="1200">
-                <a:solidFill>
-                  <a:schemeClr val="tx1"/>
-                </a:solidFill>
-                <a:latin typeface="+mn-lt"/>
-                <a:ea typeface="+mn-ea"/>
-                <a:cs typeface="+mn-cs"/>
-              </a:defRPr>
-            </a:lvl9pPr>
-          </a:lstStyle>
-          <a:p>
-            <a:pPr marL="457200" lvl="1" indent="0" algn="just">
-              <a:lnSpc>
-                <a:spcPct val="150000"/>
-              </a:lnSpc>
-              <a:buNone/>
-            </a:pPr>
-            <a:endParaRPr lang="en-US" sz="1800" b="1" dirty="0">
-              <a:latin typeface="Consolas" panose="020B0609020204030204" pitchFamily="49" charset="0"/>
-            </a:endParaRPr>
-          </a:p>
-        </p:txBody>
-      </p:sp>
-      <p:sp>
-        <p:nvSpPr>
-          <p:cNvPr id="8" name="Google Shape;472;p25">
-            <a:extLst>
-              <a:ext uri="{FF2B5EF4-FFF2-40B4-BE49-F238E27FC236}">
-                <a16:creationId xmlns:a16="http://schemas.microsoft.com/office/drawing/2014/main" id="{F03C41BE-D096-D76D-222C-0BBF0E3BAF89}"/>
-              </a:ext>
-            </a:extLst>
-          </p:cNvPr>
-          <p:cNvSpPr/>
-          <p:nvPr/>
-        </p:nvSpPr>
-        <p:spPr>
-          <a:xfrm>
-            <a:off x="3434814" y="2809139"/>
-            <a:ext cx="6024654" cy="442630"/>
-          </a:xfrm>
-          <a:prstGeom prst="roundRect">
-            <a:avLst>
-              <a:gd name="adj" fmla="val 16667"/>
-            </a:avLst>
-          </a:prstGeom>
-          <a:solidFill>
-            <a:srgbClr val="FFF2CC">
-              <a:alpha val="49803"/>
-            </a:srgbClr>
-          </a:solidFill>
-          <a:ln w="9525" cap="flat" cmpd="sng">
-            <a:solidFill>
-              <a:schemeClr val="dk1"/>
-            </a:solidFill>
-            <a:prstDash val="solid"/>
-            <a:round/>
-            <a:headEnd type="none" w="sm" len="sm"/>
-            <a:tailEnd type="none" w="sm" len="sm"/>
-          </a:ln>
-        </p:spPr>
-        <p:txBody>
-          <a:bodyPr spcFirstLastPara="1" wrap="square" lIns="91425" tIns="45700" rIns="91425" bIns="45700" anchor="t" anchorCtr="0">
-            <a:spAutoFit/>
-          </a:bodyPr>
-          <a:lstStyle/>
-          <a:p>
-            <a:pPr marL="0" marR="0" lvl="0" indent="0" algn="ctr" rtl="0">
-              <a:lnSpc>
-                <a:spcPct val="100000"/>
-              </a:lnSpc>
-              <a:spcBef>
-                <a:spcPts val="0"/>
-              </a:spcBef>
-              <a:spcAft>
-                <a:spcPts val="0"/>
-              </a:spcAft>
-              <a:buClr>
-                <a:srgbClr val="000000"/>
-              </a:buClr>
-              <a:buSzPts val="1400"/>
-              <a:buFont typeface="Consolas"/>
-              <a:buNone/>
-            </a:pPr>
-            <a:r>
-              <a:rPr lang="fr-CA" sz="2000" b="0" i="0" u="none" strike="noStrike" cap="none" dirty="0" err="1">
-                <a:solidFill>
-                  <a:srgbClr val="000000"/>
-                </a:solidFill>
-                <a:latin typeface="Consolas"/>
-                <a:ea typeface="Consolas"/>
-                <a:cs typeface="Consolas"/>
-                <a:sym typeface="Consolas"/>
-              </a:rPr>
-              <a:t>un_objet.nom_methode</a:t>
-            </a:r>
-            <a:r>
-              <a:rPr lang="fr-CA" sz="2000" b="0" i="1" u="none" strike="noStrike" cap="none" dirty="0">
-                <a:solidFill>
-                  <a:srgbClr val="000000"/>
-                </a:solidFill>
-                <a:latin typeface="Consolas"/>
-                <a:ea typeface="Consolas"/>
-                <a:cs typeface="Consolas"/>
-                <a:sym typeface="Consolas"/>
-              </a:rPr>
-              <a:t>(</a:t>
-            </a:r>
-            <a:r>
-              <a:rPr lang="fr-CA" sz="2000" b="0" i="0" u="none" strike="noStrike" cap="none" dirty="0">
-                <a:solidFill>
-                  <a:srgbClr val="000000"/>
-                </a:solidFill>
-                <a:latin typeface="Consolas"/>
-                <a:ea typeface="Consolas"/>
-                <a:cs typeface="Consolas"/>
-                <a:sym typeface="Consolas"/>
-              </a:rPr>
-              <a:t>...)</a:t>
-            </a:r>
-            <a:endParaRPr sz="2000" b="0" i="0" u="none" strike="noStrike" cap="none" dirty="0">
-              <a:solidFill>
-                <a:srgbClr val="000000"/>
-              </a:solidFill>
-              <a:latin typeface="Consolas"/>
-              <a:ea typeface="Consolas"/>
-              <a:cs typeface="Consolas"/>
-              <a:sym typeface="Consolas"/>
-            </a:endParaRPr>
-          </a:p>
-        </p:txBody>
-      </p:sp>
-      <p:grpSp>
-        <p:nvGrpSpPr>
-          <p:cNvPr id="10" name="Google Shape;473;p25">
-            <a:extLst>
-              <a:ext uri="{FF2B5EF4-FFF2-40B4-BE49-F238E27FC236}">
-                <a16:creationId xmlns:a16="http://schemas.microsoft.com/office/drawing/2014/main" id="{E17461B0-5594-C95C-7F83-9B0F010A8D99}"/>
-              </a:ext>
-            </a:extLst>
-          </p:cNvPr>
-          <p:cNvGrpSpPr/>
-          <p:nvPr/>
-        </p:nvGrpSpPr>
-        <p:grpSpPr>
-          <a:xfrm>
-            <a:off x="3434814" y="3519113"/>
-            <a:ext cx="6024654" cy="1008000"/>
-            <a:chOff x="6682372" y="3766184"/>
-            <a:chExt cx="6801271" cy="768000"/>
-          </a:xfrm>
-        </p:grpSpPr>
-        <p:sp>
-          <p:nvSpPr>
-            <p:cNvPr id="11" name="Google Shape;474;p25">
-              <a:extLst>
-                <a:ext uri="{FF2B5EF4-FFF2-40B4-BE49-F238E27FC236}">
-                  <a16:creationId xmlns:a16="http://schemas.microsoft.com/office/drawing/2014/main" id="{96E484D9-60F1-5B05-2B10-DCB2ADAD2AC3}"/>
-                </a:ext>
-              </a:extLst>
-            </p:cNvPr>
-            <p:cNvSpPr/>
-            <p:nvPr/>
-          </p:nvSpPr>
-          <p:spPr>
-            <a:xfrm>
-              <a:off x="6682372" y="3766184"/>
-              <a:ext cx="256567" cy="768000"/>
-            </a:xfrm>
-            <a:prstGeom prst="rect">
-              <a:avLst/>
-            </a:prstGeom>
-            <a:solidFill>
-              <a:srgbClr val="7F7F7F"/>
-            </a:solidFill>
-            <a:ln w="12700" cap="flat" cmpd="sng">
-              <a:solidFill>
-                <a:schemeClr val="dk1"/>
-              </a:solidFill>
-              <a:prstDash val="solid"/>
-              <a:miter lim="800000"/>
-              <a:headEnd type="none" w="sm" len="sm"/>
-              <a:tailEnd type="none" w="sm" len="sm"/>
-            </a:ln>
-          </p:spPr>
-          <p:txBody>
-            <a:bodyPr spcFirstLastPara="1" wrap="square" lIns="91425" tIns="45700" rIns="91425" bIns="45700" anchor="ctr" anchorCtr="0">
-              <a:noAutofit/>
-            </a:bodyPr>
-            <a:lstStyle/>
-            <a:p>
-              <a:pPr marL="0" marR="0" lvl="0" indent="0" algn="ctr" rtl="0">
-                <a:lnSpc>
-                  <a:spcPct val="100000"/>
-                </a:lnSpc>
-                <a:spcBef>
-                  <a:spcPts val="0"/>
-                </a:spcBef>
-                <a:spcAft>
-                  <a:spcPts val="0"/>
-                </a:spcAft>
-                <a:buClr>
-                  <a:srgbClr val="FFFFFF"/>
-                </a:buClr>
-                <a:buSzPts val="1400"/>
-                <a:buFont typeface="Calibri"/>
-                <a:buNone/>
-              </a:pPr>
-              <a:r>
-                <a:rPr lang="fr-CA" sz="1400" b="0" i="0" u="none" strike="noStrike" cap="none" dirty="0">
-                  <a:solidFill>
-                    <a:srgbClr val="FFFFFF"/>
-                  </a:solidFill>
-                  <a:latin typeface="Calibri"/>
-                  <a:ea typeface="Calibri"/>
-                  <a:cs typeface="Calibri"/>
-                  <a:sym typeface="Calibri"/>
-                </a:rPr>
-                <a:t>1</a:t>
-              </a:r>
-              <a:endParaRPr dirty="0"/>
-            </a:p>
-            <a:p>
-              <a:pPr marL="0" marR="0" lvl="0" indent="0" algn="ctr" rtl="0">
-                <a:lnSpc>
-                  <a:spcPct val="100000"/>
-                </a:lnSpc>
-                <a:spcBef>
-                  <a:spcPts val="0"/>
-                </a:spcBef>
-                <a:spcAft>
-                  <a:spcPts val="0"/>
-                </a:spcAft>
-                <a:buClr>
-                  <a:srgbClr val="FFFFFF"/>
-                </a:buClr>
-                <a:buSzPts val="1400"/>
-                <a:buFont typeface="Calibri"/>
-                <a:buNone/>
-              </a:pPr>
-              <a:r>
-                <a:rPr lang="fr-CA" sz="1400" b="0" i="0" u="none" strike="noStrike" cap="none" dirty="0">
-                  <a:solidFill>
-                    <a:srgbClr val="FFFFFF"/>
-                  </a:solidFill>
-                  <a:latin typeface="Calibri"/>
-                  <a:ea typeface="Calibri"/>
-                  <a:cs typeface="Calibri"/>
-                  <a:sym typeface="Calibri"/>
-                </a:rPr>
-                <a:t>23</a:t>
-              </a:r>
-              <a:endParaRPr dirty="0"/>
-            </a:p>
-            <a:p>
-              <a:pPr marL="0" marR="0" lvl="0" indent="0" algn="ctr" rtl="0">
-                <a:lnSpc>
-                  <a:spcPct val="100000"/>
-                </a:lnSpc>
-                <a:spcBef>
-                  <a:spcPts val="0"/>
-                </a:spcBef>
-                <a:spcAft>
-                  <a:spcPts val="0"/>
-                </a:spcAft>
-                <a:buClr>
-                  <a:srgbClr val="FFFFFF"/>
-                </a:buClr>
-                <a:buSzPts val="1400"/>
-                <a:buFont typeface="Calibri"/>
-                <a:buNone/>
-              </a:pPr>
-              <a:r>
-                <a:rPr lang="fr-CA" sz="1400" b="0" i="0" u="none" strike="noStrike" cap="none" dirty="0">
-                  <a:solidFill>
-                    <a:srgbClr val="FFFFFF"/>
-                  </a:solidFill>
-                  <a:latin typeface="Calibri"/>
-                  <a:ea typeface="Calibri"/>
-                  <a:cs typeface="Calibri"/>
-                  <a:sym typeface="Calibri"/>
-                </a:rPr>
-                <a:t>4</a:t>
-              </a:r>
-              <a:endParaRPr dirty="0"/>
-            </a:p>
-          </p:txBody>
-        </p:sp>
-        <p:sp>
-          <p:nvSpPr>
-            <p:cNvPr id="12" name="Google Shape;475;p25">
-              <a:extLst>
-                <a:ext uri="{FF2B5EF4-FFF2-40B4-BE49-F238E27FC236}">
-                  <a16:creationId xmlns:a16="http://schemas.microsoft.com/office/drawing/2014/main" id="{CAE3BACC-FEBF-97CA-3FD8-53E3009361F3}"/>
-                </a:ext>
-              </a:extLst>
-            </p:cNvPr>
-            <p:cNvSpPr/>
-            <p:nvPr/>
-          </p:nvSpPr>
-          <p:spPr>
-            <a:xfrm>
-              <a:off x="6938939" y="3766184"/>
-              <a:ext cx="6544704" cy="768000"/>
-            </a:xfrm>
-            <a:prstGeom prst="rect">
-              <a:avLst/>
-            </a:prstGeom>
-            <a:solidFill>
-              <a:schemeClr val="dk1"/>
-            </a:solidFill>
-            <a:ln w="12700" cap="flat" cmpd="sng">
-              <a:solidFill>
-                <a:schemeClr val="dk1"/>
-              </a:solidFill>
-              <a:prstDash val="solid"/>
-              <a:miter lim="800000"/>
-              <a:headEnd type="none" w="sm" len="sm"/>
-              <a:tailEnd type="none" w="sm" len="sm"/>
-            </a:ln>
-          </p:spPr>
-          <p:txBody>
-            <a:bodyPr spcFirstLastPara="1" wrap="square" lIns="91425" tIns="45700" rIns="91425" bIns="45700" anchor="ctr" anchorCtr="0">
-              <a:noAutofit/>
-            </a:bodyPr>
-            <a:lstStyle/>
-            <a:p>
-              <a:pPr marL="0" marR="0" lvl="0" indent="0" algn="l" rtl="0">
-                <a:lnSpc>
-                  <a:spcPct val="100000"/>
-                </a:lnSpc>
-                <a:spcBef>
-                  <a:spcPts val="0"/>
-                </a:spcBef>
-                <a:spcAft>
-                  <a:spcPts val="0"/>
-                </a:spcAft>
-                <a:buClr>
-                  <a:srgbClr val="FFFFFF"/>
-                </a:buClr>
-                <a:buSzPts val="1400"/>
-                <a:buFont typeface="Consolas"/>
-                <a:buNone/>
-              </a:pPr>
-              <a:r>
-                <a:rPr lang="fr-CA" sz="1400" b="0" i="0" u="none" strike="noStrike" cap="none" dirty="0">
-                  <a:solidFill>
-                    <a:srgbClr val="FFFFFF"/>
-                  </a:solidFill>
-                  <a:latin typeface="Consolas"/>
-                  <a:ea typeface="Consolas"/>
-                  <a:cs typeface="Consolas"/>
-                  <a:sym typeface="Consolas"/>
-                </a:rPr>
-                <a:t>&gt;&gt;&gt; liste = [1, 2]</a:t>
-              </a:r>
-              <a:endParaRPr dirty="0"/>
-            </a:p>
-            <a:p>
-              <a:pPr marL="0" marR="0" lvl="0" indent="0" algn="l" rtl="0">
-                <a:lnSpc>
-                  <a:spcPct val="100000"/>
-                </a:lnSpc>
-                <a:spcBef>
-                  <a:spcPts val="0"/>
-                </a:spcBef>
-                <a:spcAft>
-                  <a:spcPts val="0"/>
-                </a:spcAft>
-                <a:buClr>
-                  <a:srgbClr val="FFFFFF"/>
-                </a:buClr>
-                <a:buSzPts val="1400"/>
-                <a:buFont typeface="Consolas"/>
-                <a:buNone/>
-              </a:pPr>
-              <a:r>
-                <a:rPr lang="fr-CA" sz="1400" b="0" i="0" u="none" strike="noStrike" cap="none" dirty="0">
-                  <a:solidFill>
-                    <a:srgbClr val="FFFFFF"/>
-                  </a:solidFill>
-                  <a:latin typeface="Consolas"/>
-                  <a:ea typeface="Consolas"/>
-                  <a:cs typeface="Consolas"/>
-                  <a:sym typeface="Consolas"/>
-                </a:rPr>
-                <a:t>&gt;&gt;&gt; </a:t>
-              </a:r>
-              <a:r>
-                <a:rPr lang="fr-CA" sz="1400" b="0" i="0" u="none" strike="noStrike" cap="none" dirty="0" err="1">
-                  <a:solidFill>
-                    <a:srgbClr val="FFFFFF"/>
-                  </a:solidFill>
-                  <a:latin typeface="Consolas"/>
-                  <a:ea typeface="Consolas"/>
-                  <a:cs typeface="Consolas"/>
-                  <a:sym typeface="Consolas"/>
-                </a:rPr>
-                <a:t>liste.extend</a:t>
-              </a:r>
-              <a:r>
-                <a:rPr lang="fr-CA" sz="1400" b="0" i="0" u="none" strike="noStrike" cap="none" dirty="0">
-                  <a:solidFill>
-                    <a:srgbClr val="FFFFFF"/>
-                  </a:solidFill>
-                  <a:latin typeface="Consolas"/>
-                  <a:ea typeface="Consolas"/>
-                  <a:cs typeface="Consolas"/>
-                  <a:sym typeface="Consolas"/>
-                </a:rPr>
-                <a:t>([3, 4])</a:t>
-              </a:r>
-              <a:endParaRPr dirty="0"/>
-            </a:p>
-            <a:p>
-              <a:pPr marL="0" marR="0" lvl="0" indent="0" algn="l" rtl="0">
-                <a:lnSpc>
-                  <a:spcPct val="100000"/>
-                </a:lnSpc>
-                <a:spcBef>
-                  <a:spcPts val="0"/>
-                </a:spcBef>
-                <a:spcAft>
-                  <a:spcPts val="0"/>
-                </a:spcAft>
-                <a:buClr>
-                  <a:srgbClr val="FFFFFF"/>
-                </a:buClr>
-                <a:buSzPts val="1400"/>
-                <a:buFont typeface="Consolas"/>
-                <a:buNone/>
-              </a:pPr>
-              <a:r>
-                <a:rPr lang="fr-CA" sz="1400" b="0" i="0" u="none" strike="noStrike" cap="none" dirty="0">
-                  <a:solidFill>
-                    <a:srgbClr val="FFFFFF"/>
-                  </a:solidFill>
-                  <a:latin typeface="Consolas"/>
-                  <a:ea typeface="Consolas"/>
-                  <a:cs typeface="Consolas"/>
-                  <a:sym typeface="Consolas"/>
-                </a:rPr>
-                <a:t>&gt;&gt;&gt; </a:t>
-              </a:r>
-              <a:r>
-                <a:rPr lang="fr-CA" sz="1400" b="0" i="0" u="none" strike="noStrike" cap="none" dirty="0" err="1">
-                  <a:solidFill>
-                    <a:srgbClr val="FFFFFF"/>
-                  </a:solidFill>
-                  <a:latin typeface="Consolas"/>
-                  <a:ea typeface="Consolas"/>
-                  <a:cs typeface="Consolas"/>
-                  <a:sym typeface="Consolas"/>
-                </a:rPr>
-                <a:t>print</a:t>
-              </a:r>
-              <a:r>
-                <a:rPr lang="fr-CA" sz="1400" b="0" i="0" u="none" strike="noStrike" cap="none" dirty="0">
-                  <a:solidFill>
-                    <a:srgbClr val="FFFFFF"/>
-                  </a:solidFill>
-                  <a:latin typeface="Consolas"/>
-                  <a:ea typeface="Consolas"/>
-                  <a:cs typeface="Consolas"/>
-                  <a:sym typeface="Consolas"/>
-                </a:rPr>
-                <a:t>(liste)</a:t>
-              </a:r>
-              <a:br>
-                <a:rPr lang="fr-CA" sz="1400" b="0" i="0" u="none" strike="noStrike" cap="none" dirty="0">
-                  <a:solidFill>
-                    <a:srgbClr val="FFFFFF"/>
-                  </a:solidFill>
-                  <a:latin typeface="Consolas"/>
-                  <a:ea typeface="Consolas"/>
-                  <a:cs typeface="Consolas"/>
-                  <a:sym typeface="Consolas"/>
-                </a:rPr>
-              </a:br>
-              <a:r>
-                <a:rPr lang="fr-CA" sz="1400" b="0" i="0" u="none" strike="noStrike" cap="none" dirty="0">
-                  <a:solidFill>
-                    <a:srgbClr val="FFFFFF"/>
-                  </a:solidFill>
-                  <a:latin typeface="Consolas"/>
-                  <a:ea typeface="Consolas"/>
-                  <a:cs typeface="Consolas"/>
-                  <a:sym typeface="Consolas"/>
-                </a:rPr>
-                <a:t>[1, 2, 3, 4]</a:t>
-              </a:r>
-              <a:endParaRPr sz="1400" b="0" i="0" u="none" strike="noStrike" cap="none" dirty="0">
-                <a:solidFill>
-                  <a:srgbClr val="FFFFFF"/>
-                </a:solidFill>
-                <a:latin typeface="Consolas"/>
-                <a:ea typeface="Consolas"/>
-                <a:cs typeface="Consolas"/>
-                <a:sym typeface="Consolas"/>
-              </a:endParaRPr>
-            </a:p>
-          </p:txBody>
-        </p:sp>
-      </p:grpSp>
-    </p:spTree>
-    <p:extLst>
-      <p:ext uri="{BB962C8B-B14F-4D97-AF65-F5344CB8AC3E}">
-        <p14:creationId xmlns:p14="http://schemas.microsoft.com/office/powerpoint/2010/main" val="3179990299"/>
-      </p:ext>
-    </p:extLst>
-  </p:cSld>
-  <p:clrMapOvr>
-    <a:masterClrMapping/>
-  </p:clrMapOvr>
-  <p:timing>
-    <p:tnLst>
-      <p:par>
-        <p:cTn id="1" dur="indefinite" restart="never" nodeType="tmRoot">
-          <p:childTnLst>
-            <p:seq concurrent="1" nextAc="seek">
-              <p:cTn id="2" dur="indefinite" nodeType="mainSeq">
-                <p:childTnLst>
-                  <p:par>
-                    <p:cTn id="3" fill="hold">
-                      <p:stCondLst>
-                        <p:cond delay="indefinite"/>
-                      </p:stCondLst>
-                      <p:childTnLst>
-                        <p:par>
-                          <p:cTn id="4" fill="hold">
-                            <p:stCondLst>
-                              <p:cond delay="0"/>
-                            </p:stCondLst>
-                            <p:childTnLst>
-                              <p:par>
-                                <p:cTn id="5" presetID="10" presetClass="entr" presetSubtype="0" fill="hold" nodeType="clickEffect">
-                                  <p:stCondLst>
-                                    <p:cond delay="0"/>
-                                  </p:stCondLst>
-                                  <p:childTnLst>
-                                    <p:set>
-                                      <p:cBhvr>
-                                        <p:cTn id="6" dur="1" fill="hold">
-                                          <p:stCondLst>
-                                            <p:cond delay="0"/>
-                                          </p:stCondLst>
-                                        </p:cTn>
-                                        <p:tgtEl>
-                                          <p:spTgt spid="3">
-                                            <p:txEl>
-                                              <p:pRg st="0" end="0"/>
-                                            </p:txEl>
-                                          </p:spTgt>
-                                        </p:tgtEl>
-                                        <p:attrNameLst>
-                                          <p:attrName>style.visibility</p:attrName>
-                                        </p:attrNameLst>
-                                      </p:cBhvr>
-                                      <p:to>
-                                        <p:strVal val="visible"/>
-                                      </p:to>
-                                    </p:set>
-                                    <p:animEffect transition="in" filter="fade">
-                                      <p:cBhvr>
-                                        <p:cTn id="7" dur="500"/>
-                                        <p:tgtEl>
-                                          <p:spTgt spid="3">
-                                            <p:txEl>
-                                              <p:pRg st="0" end="0"/>
-                                            </p:txEl>
-                                          </p:spTgt>
-                                        </p:tgtEl>
-                                      </p:cBhvr>
-                                    </p:animEffect>
-                                  </p:childTnLst>
-                                </p:cTn>
-                              </p:par>
-                            </p:childTnLst>
-                          </p:cTn>
-                        </p:par>
-                      </p:childTnLst>
-                    </p:cTn>
-                  </p:par>
-                  <p:par>
-                    <p:cTn id="8" fill="hold">
-                      <p:stCondLst>
-                        <p:cond delay="indefinite"/>
-                      </p:stCondLst>
-                      <p:childTnLst>
-                        <p:par>
-                          <p:cTn id="9" fill="hold">
-                            <p:stCondLst>
-                              <p:cond delay="0"/>
-                            </p:stCondLst>
-                            <p:childTnLst>
-                              <p:par>
-                                <p:cTn id="10" presetID="10" presetClass="entr" presetSubtype="0" fill="hold" grpId="0" nodeType="clickEffect">
-                                  <p:stCondLst>
-                                    <p:cond delay="0"/>
-                                  </p:stCondLst>
-                                  <p:childTnLst>
-                                    <p:set>
-                                      <p:cBhvr>
-                                        <p:cTn id="11" dur="1" fill="hold">
-                                          <p:stCondLst>
-                                            <p:cond delay="0"/>
-                                          </p:stCondLst>
-                                        </p:cTn>
-                                        <p:tgtEl>
-                                          <p:spTgt spid="8"/>
-                                        </p:tgtEl>
-                                        <p:attrNameLst>
-                                          <p:attrName>style.visibility</p:attrName>
-                                        </p:attrNameLst>
-                                      </p:cBhvr>
-                                      <p:to>
-                                        <p:strVal val="visible"/>
-                                      </p:to>
-                                    </p:set>
-                                    <p:animEffect transition="in" filter="fade">
-                                      <p:cBhvr>
-                                        <p:cTn id="12" dur="500"/>
-                                        <p:tgtEl>
-                                          <p:spTgt spid="8"/>
-                                        </p:tgtEl>
-                                      </p:cBhvr>
-                                    </p:animEffect>
-                                  </p:childTnLst>
-                                </p:cTn>
-                              </p:par>
-                            </p:childTnLst>
-                          </p:cTn>
-                        </p:par>
-                      </p:childTnLst>
-                    </p:cTn>
-                  </p:par>
-                  <p:par>
-                    <p:cTn id="13" fill="hold">
-                      <p:stCondLst>
-                        <p:cond delay="indefinite"/>
-                      </p:stCondLst>
-                      <p:childTnLst>
-                        <p:par>
-                          <p:cTn id="14" fill="hold">
-                            <p:stCondLst>
-                              <p:cond delay="0"/>
-                            </p:stCondLst>
-                            <p:childTnLst>
-                              <p:par>
-                                <p:cTn id="15" presetID="10" presetClass="entr" presetSubtype="0" fill="hold" nodeType="clickEffect">
-                                  <p:stCondLst>
-                                    <p:cond delay="0"/>
-                                  </p:stCondLst>
-                                  <p:childTnLst>
-                                    <p:set>
-                                      <p:cBhvr>
-                                        <p:cTn id="16" dur="1" fill="hold">
-                                          <p:stCondLst>
-                                            <p:cond delay="0"/>
-                                          </p:stCondLst>
-                                        </p:cTn>
-                                        <p:tgtEl>
-                                          <p:spTgt spid="10"/>
-                                        </p:tgtEl>
-                                        <p:attrNameLst>
-                                          <p:attrName>style.visibility</p:attrName>
-                                        </p:attrNameLst>
-                                      </p:cBhvr>
-                                      <p:to>
-                                        <p:strVal val="visible"/>
-                                      </p:to>
-                                    </p:set>
-                                    <p:animEffect transition="in" filter="fade">
-                                      <p:cBhvr>
-                                        <p:cTn id="17" dur="500"/>
-                                        <p:tgtEl>
-                                          <p:spTgt spid="10"/>
-                                        </p:tgtEl>
-                                      </p:cBhvr>
-                                    </p:animEffect>
-                                  </p:childTnLst>
-                                </p:cTn>
-                              </p:par>
-                            </p:childTnLst>
-                          </p:cTn>
-                        </p:par>
-                      </p:childTnLst>
-                    </p:cTn>
-                  </p:par>
-                  <p:par>
-                    <p:cTn id="18" fill="hold">
-                      <p:stCondLst>
-                        <p:cond delay="indefinite"/>
-                      </p:stCondLst>
-                      <p:childTnLst>
-                        <p:par>
-                          <p:cTn id="19" fill="hold">
-                            <p:stCondLst>
-                              <p:cond delay="0"/>
-                            </p:stCondLst>
-                            <p:childTnLst>
-                              <p:par>
-                                <p:cTn id="20" presetID="10" presetClass="entr" presetSubtype="0" fill="hold" nodeType="clickEffect">
-                                  <p:stCondLst>
-                                    <p:cond delay="0"/>
-                                  </p:stCondLst>
-                                  <p:childTnLst>
-                                    <p:set>
-                                      <p:cBhvr>
-                                        <p:cTn id="21" dur="1" fill="hold">
-                                          <p:stCondLst>
-                                            <p:cond delay="0"/>
-                                          </p:stCondLst>
-                                        </p:cTn>
-                                        <p:tgtEl>
-                                          <p:spTgt spid="3">
-                                            <p:txEl>
-                                              <p:pRg st="7" end="7"/>
-                                            </p:txEl>
-                                          </p:spTgt>
-                                        </p:tgtEl>
-                                        <p:attrNameLst>
-                                          <p:attrName>style.visibility</p:attrName>
-                                        </p:attrNameLst>
-                                      </p:cBhvr>
-                                      <p:to>
-                                        <p:strVal val="visible"/>
-                                      </p:to>
-                                    </p:set>
-                                    <p:animEffect transition="in" filter="fade">
-                                      <p:cBhvr>
-                                        <p:cTn id="22" dur="500"/>
-                                        <p:tgtEl>
-                                          <p:spTgt spid="3">
-                                            <p:txEl>
-                                              <p:pRg st="7" end="7"/>
-                                            </p:txEl>
-                                          </p:spTgt>
-                                        </p:tgtEl>
-                                      </p:cBhvr>
-                                    </p:animEffect>
-                                  </p:childTnLst>
-                                </p:cTn>
-                              </p:par>
-                            </p:childTnLst>
-                          </p:cTn>
-                        </p:par>
-                      </p:childTnLst>
-                    </p:cTn>
-                  </p:par>
-                  <p:par>
-                    <p:cTn id="23" fill="hold">
-                      <p:stCondLst>
-                        <p:cond delay="indefinite"/>
-                      </p:stCondLst>
-                      <p:childTnLst>
-                        <p:par>
-                          <p:cTn id="24" fill="hold">
-                            <p:stCondLst>
-                              <p:cond delay="0"/>
-                            </p:stCondLst>
-                            <p:childTnLst>
-                              <p:par>
-                                <p:cTn id="25" presetID="10" presetClass="entr" presetSubtype="0" fill="hold" nodeType="clickEffect">
-                                  <p:stCondLst>
-                                    <p:cond delay="0"/>
-                                  </p:stCondLst>
-                                  <p:childTnLst>
-                                    <p:set>
-                                      <p:cBhvr>
-                                        <p:cTn id="26" dur="1" fill="hold">
-                                          <p:stCondLst>
-                                            <p:cond delay="0"/>
-                                          </p:stCondLst>
-                                        </p:cTn>
-                                        <p:tgtEl>
-                                          <p:spTgt spid="3">
-                                            <p:txEl>
-                                              <p:pRg st="9" end="9"/>
-                                            </p:txEl>
-                                          </p:spTgt>
-                                        </p:tgtEl>
-                                        <p:attrNameLst>
-                                          <p:attrName>style.visibility</p:attrName>
-                                        </p:attrNameLst>
-                                      </p:cBhvr>
-                                      <p:to>
-                                        <p:strVal val="visible"/>
-                                      </p:to>
-                                    </p:set>
-                                    <p:animEffect transition="in" filter="fade">
-                                      <p:cBhvr>
-                                        <p:cTn id="27" dur="500"/>
-                                        <p:tgtEl>
-                                          <p:spTgt spid="3">
-                                            <p:txEl>
-                                              <p:pRg st="9" end="9"/>
-                                            </p:txEl>
-                                          </p:spTgt>
-                                        </p:tgtEl>
-                                      </p:cBhvr>
-                                    </p:animEffect>
-                                  </p:childTnLst>
-                                </p:cTn>
-                              </p:par>
-                            </p:childTnLst>
-                          </p:cTn>
-                        </p:par>
-                      </p:childTnLst>
-                    </p:cTn>
-                  </p:par>
-                </p:childTnLst>
-              </p:cTn>
-              <p:prevCondLst>
-                <p:cond evt="onPrev" delay="0">
-                  <p:tgtEl>
-                    <p:sldTgt/>
-                  </p:tgtEl>
-                </p:cond>
-              </p:prevCondLst>
-              <p:nextCondLst>
-                <p:cond evt="onNext" delay="0">
-                  <p:tgtEl>
-                    <p:sldTgt/>
-                  </p:tgtEl>
-                </p:cond>
-              </p:nextCondLst>
-            </p:seq>
-          </p:childTnLst>
-        </p:cTn>
-      </p:par>
-    </p:tnLst>
-    <p:bldLst>
-      <p:bldP spid="8" grpId="0" animBg="1"/>
-    </p:bldLst>
   </p:timing>
 </p:sld>
 </file>
@@ -40058,6 +40132,1577 @@
     <p:bg>
       <p:bgPr>
         <a:solidFill>
+          <a:srgbClr val="F5F5F5"/>
+        </a:solidFill>
+        <a:effectLst/>
+      </p:bgPr>
+    </p:bg>
+    <p:spTree>
+      <p:nvGrpSpPr>
+        <p:cNvPr id="1" name="">
+          <a:extLst>
+            <a:ext uri="{FF2B5EF4-FFF2-40B4-BE49-F238E27FC236}">
+              <a16:creationId xmlns:a16="http://schemas.microsoft.com/office/drawing/2014/main" id="{19DE56A2-CF0B-DCDE-18F0-DF8D05157518}"/>
+            </a:ext>
+          </a:extLst>
+        </p:cNvPr>
+        <p:cNvGrpSpPr/>
+        <p:nvPr/>
+      </p:nvGrpSpPr>
+      <p:grpSpPr>
+        <a:xfrm>
+          <a:off x="0" y="0"/>
+          <a:ext cx="0" cy="0"/>
+          <a:chOff x="0" y="0"/>
+          <a:chExt cx="0" cy="0"/>
+        </a:xfrm>
+      </p:grpSpPr>
+      <p:sp>
+        <p:nvSpPr>
+          <p:cNvPr id="2" name="Title 1">
+            <a:extLst>
+              <a:ext uri="{FF2B5EF4-FFF2-40B4-BE49-F238E27FC236}">
+                <a16:creationId xmlns:a16="http://schemas.microsoft.com/office/drawing/2014/main" id="{E7B2A86D-85D1-03C2-AE7A-9DF4A0AD6A39}"/>
+              </a:ext>
+            </a:extLst>
+          </p:cNvPr>
+          <p:cNvSpPr>
+            <a:spLocks noGrp="1"/>
+          </p:cNvSpPr>
+          <p:nvPr>
+            <p:ph type="title"/>
+          </p:nvPr>
+        </p:nvSpPr>
+        <p:spPr/>
+        <p:txBody>
+          <a:bodyPr/>
+          <a:lstStyle/>
+          <a:p>
+            <a:r>
+              <a:rPr lang="en-US" dirty="0" err="1">
+                <a:latin typeface="Arial Rounded MT Bold" panose="020F0704030504030204" pitchFamily="34" charset="0"/>
+              </a:rPr>
+              <a:t>Objets</a:t>
+            </a:r>
+            <a:r>
+              <a:rPr lang="en-US" dirty="0">
+                <a:latin typeface="Arial Rounded MT Bold" panose="020F0704030504030204" pitchFamily="34" charset="0"/>
+              </a:rPr>
+              <a:t> (2/2)</a:t>
+            </a:r>
+            <a:endParaRPr lang="fr-CA" dirty="0">
+              <a:latin typeface="Arial Rounded MT Bold" panose="020F0704030504030204" pitchFamily="34" charset="0"/>
+            </a:endParaRPr>
+          </a:p>
+        </p:txBody>
+      </p:sp>
+      <p:sp>
+        <p:nvSpPr>
+          <p:cNvPr id="3" name="Content Placeholder 2">
+            <a:extLst>
+              <a:ext uri="{FF2B5EF4-FFF2-40B4-BE49-F238E27FC236}">
+                <a16:creationId xmlns:a16="http://schemas.microsoft.com/office/drawing/2014/main" id="{668F765D-E029-D26F-4935-E44A7019A184}"/>
+              </a:ext>
+            </a:extLst>
+          </p:cNvPr>
+          <p:cNvSpPr>
+            <a:spLocks noGrp="1"/>
+          </p:cNvSpPr>
+          <p:nvPr>
+            <p:ph idx="1"/>
+          </p:nvPr>
+        </p:nvSpPr>
+        <p:spPr/>
+        <p:txBody>
+          <a:bodyPr>
+            <a:normAutofit/>
+          </a:bodyPr>
+          <a:lstStyle/>
+          <a:p>
+            <a:pPr algn="just">
+              <a:lnSpc>
+                <a:spcPct val="100000"/>
+              </a:lnSpc>
+            </a:pPr>
+            <a:r>
+              <a:rPr lang="en-US" sz="1800" dirty="0">
+                <a:latin typeface="Consolas" panose="020B0609020204030204" pitchFamily="49" charset="0"/>
+              </a:rPr>
+              <a:t>Pour </a:t>
+            </a:r>
+            <a:r>
+              <a:rPr lang="en-US" sz="1800" dirty="0" err="1">
+                <a:latin typeface="Consolas" panose="020B0609020204030204" pitchFamily="49" charset="0"/>
+              </a:rPr>
+              <a:t>accéder</a:t>
+            </a:r>
+            <a:r>
+              <a:rPr lang="en-US" sz="1800" dirty="0">
+                <a:latin typeface="Consolas" panose="020B0609020204030204" pitchFamily="49" charset="0"/>
+              </a:rPr>
+              <a:t> à un </a:t>
+            </a:r>
+            <a:r>
+              <a:rPr lang="en-US" sz="1800" dirty="0" err="1">
+                <a:latin typeface="Consolas" panose="020B0609020204030204" pitchFamily="49" charset="0"/>
+              </a:rPr>
+              <a:t>attribut</a:t>
+            </a:r>
+            <a:r>
+              <a:rPr lang="en-US" sz="1800" dirty="0">
+                <a:latin typeface="Consolas" panose="020B0609020204030204" pitchFamily="49" charset="0"/>
+              </a:rPr>
+              <a:t> </a:t>
+            </a:r>
+            <a:r>
+              <a:rPr lang="en-US" sz="1800" dirty="0" err="1">
+                <a:latin typeface="Consolas" panose="020B0609020204030204" pitchFamily="49" charset="0"/>
+              </a:rPr>
+              <a:t>ou</a:t>
+            </a:r>
+            <a:r>
+              <a:rPr lang="en-US" sz="1800" dirty="0">
+                <a:latin typeface="Consolas" panose="020B0609020204030204" pitchFamily="49" charset="0"/>
+              </a:rPr>
+              <a:t> </a:t>
+            </a:r>
+            <a:r>
+              <a:rPr lang="en-US" sz="1800" dirty="0" err="1">
+                <a:latin typeface="Consolas" panose="020B0609020204030204" pitchFamily="49" charset="0"/>
+              </a:rPr>
+              <a:t>une</a:t>
+            </a:r>
+            <a:r>
+              <a:rPr lang="en-US" sz="1800" dirty="0">
+                <a:latin typeface="Consolas" panose="020B0609020204030204" pitchFamily="49" charset="0"/>
+              </a:rPr>
+              <a:t> </a:t>
+            </a:r>
+            <a:r>
+              <a:rPr lang="en-US" sz="1800" dirty="0" err="1">
+                <a:latin typeface="Consolas" panose="020B0609020204030204" pitchFamily="49" charset="0"/>
+              </a:rPr>
+              <a:t>méthode</a:t>
+            </a:r>
+            <a:r>
+              <a:rPr lang="en-US" sz="1800" dirty="0">
+                <a:latin typeface="Consolas" panose="020B0609020204030204" pitchFamily="49" charset="0"/>
+              </a:rPr>
+              <a:t> d'un </a:t>
+            </a:r>
+            <a:r>
+              <a:rPr lang="en-US" sz="1800" dirty="0" err="1">
+                <a:latin typeface="Consolas" panose="020B0609020204030204" pitchFamily="49" charset="0"/>
+              </a:rPr>
+              <a:t>objet</a:t>
+            </a:r>
+            <a:r>
+              <a:rPr lang="en-US" sz="1800" dirty="0">
+                <a:latin typeface="Consolas" panose="020B0609020204030204" pitchFamily="49" charset="0"/>
+              </a:rPr>
+              <a:t>, nous </a:t>
+            </a:r>
+            <a:r>
+              <a:rPr lang="en-US" sz="1800" dirty="0" err="1">
+                <a:latin typeface="Consolas" panose="020B0609020204030204" pitchFamily="49" charset="0"/>
+              </a:rPr>
+              <a:t>utilisons</a:t>
+            </a:r>
+            <a:r>
+              <a:rPr lang="en-US" sz="1800" dirty="0">
+                <a:latin typeface="Consolas" panose="020B0609020204030204" pitchFamily="49" charset="0"/>
+              </a:rPr>
+              <a:t> </a:t>
+            </a:r>
+            <a:r>
+              <a:rPr lang="en-US" sz="1800" b="1" dirty="0" err="1">
+                <a:latin typeface="Consolas" panose="020B0609020204030204" pitchFamily="49" charset="0"/>
+              </a:rPr>
+              <a:t>l'opérateur</a:t>
+            </a:r>
+            <a:r>
+              <a:rPr lang="en-US" sz="1800" b="1" dirty="0">
+                <a:latin typeface="Consolas" panose="020B0609020204030204" pitchFamily="49" charset="0"/>
+              </a:rPr>
+              <a:t> </a:t>
+            </a:r>
+            <a:r>
+              <a:rPr lang="en-US" sz="1800" b="1" dirty="0" err="1">
+                <a:latin typeface="Consolas" panose="020B0609020204030204" pitchFamily="49" charset="0"/>
+              </a:rPr>
+              <a:t>d'accès</a:t>
+            </a:r>
+            <a:r>
+              <a:rPr lang="en-US" sz="1800" dirty="0">
+                <a:latin typeface="Consolas" panose="020B0609020204030204" pitchFamily="49" charset="0"/>
+              </a:rPr>
+              <a:t> qui correspond à un </a:t>
+            </a:r>
+            <a:r>
+              <a:rPr lang="en-US" sz="1800" b="1" dirty="0">
+                <a:latin typeface="Consolas" panose="020B0609020204030204" pitchFamily="49" charset="0"/>
+              </a:rPr>
+              <a:t>point</a:t>
+            </a:r>
+            <a:r>
+              <a:rPr lang="en-US" sz="1800" dirty="0">
+                <a:latin typeface="Consolas" panose="020B0609020204030204" pitchFamily="49" charset="0"/>
+              </a:rPr>
+              <a:t> entre le nom de </a:t>
+            </a:r>
+            <a:r>
+              <a:rPr lang="en-US" sz="1800" dirty="0" err="1">
+                <a:latin typeface="Consolas" panose="020B0609020204030204" pitchFamily="49" charset="0"/>
+              </a:rPr>
+              <a:t>l'instance</a:t>
+            </a:r>
+            <a:r>
+              <a:rPr lang="en-US" sz="1800" dirty="0">
+                <a:latin typeface="Consolas" panose="020B0609020204030204" pitchFamily="49" charset="0"/>
+              </a:rPr>
+              <a:t> et de la </a:t>
+            </a:r>
+            <a:r>
+              <a:rPr lang="en-US" sz="1800" dirty="0" err="1">
+                <a:latin typeface="Consolas" panose="020B0609020204030204" pitchFamily="49" charset="0"/>
+              </a:rPr>
+              <a:t>méthode</a:t>
+            </a:r>
+            <a:r>
+              <a:rPr lang="en-US" sz="1800" dirty="0">
+                <a:latin typeface="Consolas" panose="020B0609020204030204" pitchFamily="49" charset="0"/>
+              </a:rPr>
+              <a:t> :</a:t>
+            </a:r>
+          </a:p>
+          <a:p>
+            <a:pPr algn="just">
+              <a:lnSpc>
+                <a:spcPct val="100000"/>
+              </a:lnSpc>
+            </a:pPr>
+            <a:endParaRPr lang="en-US" sz="1800" dirty="0">
+              <a:latin typeface="Consolas" panose="020B0609020204030204" pitchFamily="49" charset="0"/>
+            </a:endParaRPr>
+          </a:p>
+          <a:p>
+            <a:pPr algn="just">
+              <a:lnSpc>
+                <a:spcPct val="100000"/>
+              </a:lnSpc>
+            </a:pPr>
+            <a:endParaRPr lang="en-US" sz="1800" dirty="0">
+              <a:latin typeface="Consolas" panose="020B0609020204030204" pitchFamily="49" charset="0"/>
+            </a:endParaRPr>
+          </a:p>
+          <a:p>
+            <a:pPr algn="just">
+              <a:lnSpc>
+                <a:spcPct val="100000"/>
+              </a:lnSpc>
+            </a:pPr>
+            <a:endParaRPr lang="en-US" sz="1800" dirty="0">
+              <a:latin typeface="Consolas" panose="020B0609020204030204" pitchFamily="49" charset="0"/>
+            </a:endParaRPr>
+          </a:p>
+          <a:p>
+            <a:pPr algn="just">
+              <a:lnSpc>
+                <a:spcPct val="100000"/>
+              </a:lnSpc>
+            </a:pPr>
+            <a:endParaRPr lang="en-US" sz="1800" dirty="0">
+              <a:latin typeface="Consolas" panose="020B0609020204030204" pitchFamily="49" charset="0"/>
+            </a:endParaRPr>
+          </a:p>
+          <a:p>
+            <a:pPr algn="just">
+              <a:lnSpc>
+                <a:spcPct val="100000"/>
+              </a:lnSpc>
+            </a:pPr>
+            <a:endParaRPr lang="en-US" sz="1800" dirty="0">
+              <a:latin typeface="Consolas" panose="020B0609020204030204" pitchFamily="49" charset="0"/>
+            </a:endParaRPr>
+          </a:p>
+          <a:p>
+            <a:pPr algn="just">
+              <a:lnSpc>
+                <a:spcPct val="100000"/>
+              </a:lnSpc>
+            </a:pPr>
+            <a:endParaRPr lang="en-US" sz="1800" dirty="0">
+              <a:latin typeface="Consolas" panose="020B0609020204030204" pitchFamily="49" charset="0"/>
+            </a:endParaRPr>
+          </a:p>
+          <a:p>
+            <a:pPr algn="just">
+              <a:lnSpc>
+                <a:spcPct val="100000"/>
+              </a:lnSpc>
+            </a:pPr>
+            <a:r>
+              <a:rPr lang="fr-FR" sz="1800" b="1" dirty="0">
+                <a:solidFill>
+                  <a:srgbClr val="000000"/>
+                </a:solidFill>
+                <a:latin typeface="Consolas"/>
+                <a:ea typeface="Consolas"/>
+                <a:cs typeface="Consolas"/>
+                <a:sym typeface="Consolas"/>
+              </a:rPr>
+              <a:t>En mots:</a:t>
+            </a:r>
+            <a:r>
+              <a:rPr lang="fr-FR" sz="1800" dirty="0">
+                <a:solidFill>
+                  <a:srgbClr val="000000"/>
+                </a:solidFill>
+                <a:latin typeface="Consolas"/>
+                <a:ea typeface="Consolas"/>
+                <a:cs typeface="Consolas"/>
+                <a:sym typeface="Consolas"/>
+              </a:rPr>
+              <a:t> Nous avons créé une </a:t>
+            </a:r>
+            <a:r>
+              <a:rPr lang="fr-FR" sz="1800" b="1" dirty="0">
+                <a:solidFill>
+                  <a:srgbClr val="000000"/>
+                </a:solidFill>
+                <a:latin typeface="Consolas"/>
+                <a:ea typeface="Consolas"/>
+                <a:cs typeface="Consolas"/>
+                <a:sym typeface="Consolas"/>
+              </a:rPr>
+              <a:t>instance</a:t>
+            </a:r>
+            <a:r>
+              <a:rPr lang="fr-FR" sz="1800" dirty="0">
+                <a:solidFill>
+                  <a:srgbClr val="000000"/>
+                </a:solidFill>
+                <a:latin typeface="Consolas"/>
+                <a:ea typeface="Consolas"/>
+                <a:cs typeface="Consolas"/>
+                <a:sym typeface="Consolas"/>
+              </a:rPr>
+              <a:t> de la </a:t>
+            </a:r>
+            <a:r>
+              <a:rPr lang="fr-FR" sz="1800" b="1" dirty="0">
+                <a:solidFill>
+                  <a:srgbClr val="000000"/>
+                </a:solidFill>
+                <a:latin typeface="Consolas"/>
+                <a:ea typeface="Consolas"/>
+                <a:cs typeface="Consolas"/>
+                <a:sym typeface="Consolas"/>
+              </a:rPr>
+              <a:t>classe</a:t>
+            </a:r>
+            <a:r>
+              <a:rPr lang="fr-FR" sz="1800" dirty="0">
+                <a:solidFill>
+                  <a:srgbClr val="000000"/>
+                </a:solidFill>
+                <a:latin typeface="Consolas"/>
+                <a:ea typeface="Consolas"/>
+                <a:cs typeface="Consolas"/>
+                <a:sym typeface="Consolas"/>
+              </a:rPr>
+              <a:t> </a:t>
+            </a:r>
+            <a:r>
+              <a:rPr lang="fr-FR" sz="1800" dirty="0" err="1">
+                <a:latin typeface="Consolas"/>
+                <a:ea typeface="Consolas"/>
+                <a:cs typeface="Consolas"/>
+                <a:sym typeface="Consolas"/>
+              </a:rPr>
+              <a:t>list</a:t>
+            </a:r>
+            <a:r>
+              <a:rPr lang="fr-FR" sz="1800" dirty="0">
+                <a:solidFill>
+                  <a:srgbClr val="000000"/>
+                </a:solidFill>
+                <a:latin typeface="Consolas"/>
+                <a:ea typeface="Consolas"/>
+                <a:cs typeface="Consolas"/>
+                <a:sym typeface="Consolas"/>
+              </a:rPr>
+              <a:t> et avons appelé la </a:t>
+            </a:r>
+            <a:r>
+              <a:rPr lang="fr-FR" sz="1800" b="1" dirty="0">
+                <a:solidFill>
+                  <a:srgbClr val="000000"/>
+                </a:solidFill>
+                <a:latin typeface="Consolas"/>
+                <a:ea typeface="Consolas"/>
+                <a:cs typeface="Consolas"/>
+                <a:sym typeface="Consolas"/>
+              </a:rPr>
+              <a:t>méthode</a:t>
+            </a:r>
+            <a:r>
+              <a:rPr lang="fr-FR" sz="1800" dirty="0">
+                <a:solidFill>
+                  <a:srgbClr val="000000"/>
+                </a:solidFill>
+                <a:latin typeface="Consolas"/>
+                <a:ea typeface="Consolas"/>
+                <a:cs typeface="Consolas"/>
+                <a:sym typeface="Consolas"/>
+              </a:rPr>
+              <a:t> .</a:t>
+            </a:r>
+            <a:r>
+              <a:rPr lang="fr-FR" sz="1800" dirty="0" err="1">
+                <a:solidFill>
+                  <a:srgbClr val="000000"/>
+                </a:solidFill>
+                <a:latin typeface="Consolas"/>
+                <a:ea typeface="Consolas"/>
+                <a:cs typeface="Consolas"/>
+                <a:sym typeface="Consolas"/>
+              </a:rPr>
+              <a:t>extend</a:t>
+            </a:r>
+            <a:r>
+              <a:rPr lang="fr-FR" sz="1800" dirty="0">
+                <a:solidFill>
+                  <a:srgbClr val="000000"/>
+                </a:solidFill>
+                <a:latin typeface="Consolas"/>
+                <a:ea typeface="Consolas"/>
+                <a:cs typeface="Consolas"/>
+                <a:sym typeface="Consolas"/>
+              </a:rPr>
+              <a:t>().</a:t>
+            </a:r>
+          </a:p>
+          <a:p>
+            <a:pPr marL="0" indent="0" algn="just">
+              <a:lnSpc>
+                <a:spcPct val="100000"/>
+              </a:lnSpc>
+              <a:buNone/>
+            </a:pPr>
+            <a:endParaRPr lang="fr-FR" sz="100" dirty="0">
+              <a:solidFill>
+                <a:srgbClr val="000000"/>
+              </a:solidFill>
+              <a:latin typeface="Consolas"/>
+              <a:sym typeface="Consolas"/>
+            </a:endParaRPr>
+          </a:p>
+          <a:p>
+            <a:pPr marL="0" indent="0" algn="ctr">
+              <a:lnSpc>
+                <a:spcPct val="100000"/>
+              </a:lnSpc>
+              <a:buNone/>
+            </a:pPr>
+            <a:r>
+              <a:rPr lang="fr-FR" sz="1800" b="1" dirty="0">
+                <a:solidFill>
+                  <a:srgbClr val="000000"/>
+                </a:solidFill>
+                <a:latin typeface="Consolas"/>
+                <a:sym typeface="Consolas"/>
+              </a:rPr>
+              <a:t>REMARQUE: </a:t>
+            </a:r>
+            <a:r>
+              <a:rPr lang="fr-FR" sz="1800" dirty="0">
+                <a:solidFill>
+                  <a:srgbClr val="000000"/>
+                </a:solidFill>
+                <a:latin typeface="Consolas"/>
+                <a:sym typeface="Consolas"/>
+              </a:rPr>
+              <a:t>En Python, </a:t>
+            </a:r>
+            <a:r>
+              <a:rPr lang="fr-FR" sz="1800" b="1" dirty="0">
+                <a:solidFill>
+                  <a:srgbClr val="000000"/>
+                </a:solidFill>
+                <a:latin typeface="Consolas"/>
+                <a:sym typeface="Consolas"/>
+              </a:rPr>
+              <a:t>tout est un objet</a:t>
+            </a:r>
+            <a:r>
+              <a:rPr lang="fr-FR" sz="1800" dirty="0">
+                <a:solidFill>
+                  <a:srgbClr val="000000"/>
+                </a:solidFill>
+                <a:latin typeface="Consolas"/>
+                <a:sym typeface="Consolas"/>
+              </a:rPr>
+              <a:t>.</a:t>
+            </a:r>
+            <a:endParaRPr lang="fr-FR" sz="1800" dirty="0"/>
+          </a:p>
+        </p:txBody>
+      </p:sp>
+      <p:sp>
+        <p:nvSpPr>
+          <p:cNvPr id="5" name="Slide Number Placeholder 4">
+            <a:extLst>
+              <a:ext uri="{FF2B5EF4-FFF2-40B4-BE49-F238E27FC236}">
+                <a16:creationId xmlns:a16="http://schemas.microsoft.com/office/drawing/2014/main" id="{3F111B6A-C575-3556-2AB2-775B93FBBD08}"/>
+              </a:ext>
+            </a:extLst>
+          </p:cNvPr>
+          <p:cNvSpPr>
+            <a:spLocks noGrp="1"/>
+          </p:cNvSpPr>
+          <p:nvPr>
+            <p:ph type="sldNum" sz="quarter" idx="12"/>
+          </p:nvPr>
+        </p:nvSpPr>
+        <p:spPr/>
+        <p:txBody>
+          <a:bodyPr/>
+          <a:lstStyle/>
+          <a:p>
+            <a:fld id="{846B06B1-1179-491F-A487-8E0C403F7C13}" type="slidenum">
+              <a:rPr lang="fr-CA" smtClean="0"/>
+              <a:t>40</a:t>
+            </a:fld>
+            <a:endParaRPr lang="fr-CA"/>
+          </a:p>
+        </p:txBody>
+      </p:sp>
+      <p:sp>
+        <p:nvSpPr>
+          <p:cNvPr id="9" name="Content Placeholder 2">
+            <a:extLst>
+              <a:ext uri="{FF2B5EF4-FFF2-40B4-BE49-F238E27FC236}">
+                <a16:creationId xmlns:a16="http://schemas.microsoft.com/office/drawing/2014/main" id="{1A2F112F-7482-62CD-3247-F489CD4469F8}"/>
+              </a:ext>
+            </a:extLst>
+          </p:cNvPr>
+          <p:cNvSpPr txBox="1">
+            <a:spLocks/>
+          </p:cNvSpPr>
+          <p:nvPr/>
+        </p:nvSpPr>
+        <p:spPr>
+          <a:xfrm>
+            <a:off x="990600" y="1978025"/>
+            <a:ext cx="10515600" cy="4351338"/>
+          </a:xfrm>
+          <a:prstGeom prst="rect">
+            <a:avLst/>
+          </a:prstGeom>
+        </p:spPr>
+        <p:txBody>
+          <a:bodyPr vert="horz" lIns="91440" tIns="45720" rIns="91440" bIns="45720" rtlCol="0">
+            <a:normAutofit/>
+          </a:bodyPr>
+          <a:lstStyle>
+            <a:lvl1pPr marL="228600" indent="-228600" algn="l" defTabSz="914400" rtl="0" eaLnBrk="1" latinLnBrk="0" hangingPunct="1">
+              <a:lnSpc>
+                <a:spcPct val="90000"/>
+              </a:lnSpc>
+              <a:spcBef>
+                <a:spcPts val="1000"/>
+              </a:spcBef>
+              <a:buFont typeface="Arial" panose="020B0604020202020204" pitchFamily="34" charset="0"/>
+              <a:buChar char="•"/>
+              <a:defRPr sz="2800" kern="1200">
+                <a:solidFill>
+                  <a:schemeClr val="tx1"/>
+                </a:solidFill>
+                <a:latin typeface="+mn-lt"/>
+                <a:ea typeface="+mn-ea"/>
+                <a:cs typeface="+mn-cs"/>
+              </a:defRPr>
+            </a:lvl1pPr>
+            <a:lvl2pPr marL="685800" indent="-228600" algn="l" defTabSz="914400" rtl="0" eaLnBrk="1" latinLnBrk="0" hangingPunct="1">
+              <a:lnSpc>
+                <a:spcPct val="90000"/>
+              </a:lnSpc>
+              <a:spcBef>
+                <a:spcPts val="500"/>
+              </a:spcBef>
+              <a:buFont typeface="Arial" panose="020B0604020202020204" pitchFamily="34" charset="0"/>
+              <a:buChar char="•"/>
+              <a:defRPr sz="2400" kern="1200">
+                <a:solidFill>
+                  <a:schemeClr val="tx1"/>
+                </a:solidFill>
+                <a:latin typeface="+mn-lt"/>
+                <a:ea typeface="+mn-ea"/>
+                <a:cs typeface="+mn-cs"/>
+              </a:defRPr>
+            </a:lvl2pPr>
+            <a:lvl3pPr marL="1143000" indent="-228600" algn="l" defTabSz="914400" rtl="0" eaLnBrk="1" latinLnBrk="0" hangingPunct="1">
+              <a:lnSpc>
+                <a:spcPct val="90000"/>
+              </a:lnSpc>
+              <a:spcBef>
+                <a:spcPts val="500"/>
+              </a:spcBef>
+              <a:buFont typeface="Arial" panose="020B0604020202020204" pitchFamily="34" charset="0"/>
+              <a:buChar char="•"/>
+              <a:defRPr sz="2000" kern="1200">
+                <a:solidFill>
+                  <a:schemeClr val="tx1"/>
+                </a:solidFill>
+                <a:latin typeface="+mn-lt"/>
+                <a:ea typeface="+mn-ea"/>
+                <a:cs typeface="+mn-cs"/>
+              </a:defRPr>
+            </a:lvl3pPr>
+            <a:lvl4pPr marL="1600200" indent="-228600" algn="l" defTabSz="914400" rtl="0" eaLnBrk="1" latinLnBrk="0" hangingPunct="1">
+              <a:lnSpc>
+                <a:spcPct val="90000"/>
+              </a:lnSpc>
+              <a:spcBef>
+                <a:spcPts val="500"/>
+              </a:spcBef>
+              <a:buFont typeface="Arial" panose="020B0604020202020204" pitchFamily="34" charset="0"/>
+              <a:buChar char="•"/>
+              <a:defRPr sz="1800" kern="1200">
+                <a:solidFill>
+                  <a:schemeClr val="tx1"/>
+                </a:solidFill>
+                <a:latin typeface="+mn-lt"/>
+                <a:ea typeface="+mn-ea"/>
+                <a:cs typeface="+mn-cs"/>
+              </a:defRPr>
+            </a:lvl4pPr>
+            <a:lvl5pPr marL="2057400" indent="-228600" algn="l" defTabSz="914400" rtl="0" eaLnBrk="1" latinLnBrk="0" hangingPunct="1">
+              <a:lnSpc>
+                <a:spcPct val="90000"/>
+              </a:lnSpc>
+              <a:spcBef>
+                <a:spcPts val="500"/>
+              </a:spcBef>
+              <a:buFont typeface="Arial" panose="020B0604020202020204" pitchFamily="34" charset="0"/>
+              <a:buChar char="•"/>
+              <a:defRPr sz="1800" kern="1200">
+                <a:solidFill>
+                  <a:schemeClr val="tx1"/>
+                </a:solidFill>
+                <a:latin typeface="+mn-lt"/>
+                <a:ea typeface="+mn-ea"/>
+                <a:cs typeface="+mn-cs"/>
+              </a:defRPr>
+            </a:lvl5pPr>
+            <a:lvl6pPr marL="2514600" indent="-228600" algn="l" defTabSz="914400" rtl="0" eaLnBrk="1" latinLnBrk="0" hangingPunct="1">
+              <a:lnSpc>
+                <a:spcPct val="90000"/>
+              </a:lnSpc>
+              <a:spcBef>
+                <a:spcPts val="500"/>
+              </a:spcBef>
+              <a:buFont typeface="Arial" panose="020B0604020202020204" pitchFamily="34" charset="0"/>
+              <a:buChar char="•"/>
+              <a:defRPr sz="1800" kern="1200">
+                <a:solidFill>
+                  <a:schemeClr val="tx1"/>
+                </a:solidFill>
+                <a:latin typeface="+mn-lt"/>
+                <a:ea typeface="+mn-ea"/>
+                <a:cs typeface="+mn-cs"/>
+              </a:defRPr>
+            </a:lvl6pPr>
+            <a:lvl7pPr marL="2971800" indent="-228600" algn="l" defTabSz="914400" rtl="0" eaLnBrk="1" latinLnBrk="0" hangingPunct="1">
+              <a:lnSpc>
+                <a:spcPct val="90000"/>
+              </a:lnSpc>
+              <a:spcBef>
+                <a:spcPts val="500"/>
+              </a:spcBef>
+              <a:buFont typeface="Arial" panose="020B0604020202020204" pitchFamily="34" charset="0"/>
+              <a:buChar char="•"/>
+              <a:defRPr sz="1800" kern="1200">
+                <a:solidFill>
+                  <a:schemeClr val="tx1"/>
+                </a:solidFill>
+                <a:latin typeface="+mn-lt"/>
+                <a:ea typeface="+mn-ea"/>
+                <a:cs typeface="+mn-cs"/>
+              </a:defRPr>
+            </a:lvl7pPr>
+            <a:lvl8pPr marL="3429000" indent="-228600" algn="l" defTabSz="914400" rtl="0" eaLnBrk="1" latinLnBrk="0" hangingPunct="1">
+              <a:lnSpc>
+                <a:spcPct val="90000"/>
+              </a:lnSpc>
+              <a:spcBef>
+                <a:spcPts val="500"/>
+              </a:spcBef>
+              <a:buFont typeface="Arial" panose="020B0604020202020204" pitchFamily="34" charset="0"/>
+              <a:buChar char="•"/>
+              <a:defRPr sz="1800" kern="1200">
+                <a:solidFill>
+                  <a:schemeClr val="tx1"/>
+                </a:solidFill>
+                <a:latin typeface="+mn-lt"/>
+                <a:ea typeface="+mn-ea"/>
+                <a:cs typeface="+mn-cs"/>
+              </a:defRPr>
+            </a:lvl8pPr>
+            <a:lvl9pPr marL="3886200" indent="-228600" algn="l" defTabSz="914400" rtl="0" eaLnBrk="1" latinLnBrk="0" hangingPunct="1">
+              <a:lnSpc>
+                <a:spcPct val="90000"/>
+              </a:lnSpc>
+              <a:spcBef>
+                <a:spcPts val="500"/>
+              </a:spcBef>
+              <a:buFont typeface="Arial" panose="020B0604020202020204" pitchFamily="34" charset="0"/>
+              <a:buChar char="•"/>
+              <a:defRPr sz="1800" kern="1200">
+                <a:solidFill>
+                  <a:schemeClr val="tx1"/>
+                </a:solidFill>
+                <a:latin typeface="+mn-lt"/>
+                <a:ea typeface="+mn-ea"/>
+                <a:cs typeface="+mn-cs"/>
+              </a:defRPr>
+            </a:lvl9pPr>
+          </a:lstStyle>
+          <a:p>
+            <a:pPr marL="457200" lvl="1" indent="0" algn="just">
+              <a:lnSpc>
+                <a:spcPct val="150000"/>
+              </a:lnSpc>
+              <a:buNone/>
+            </a:pPr>
+            <a:endParaRPr lang="en-US" sz="1800" b="1" dirty="0">
+              <a:latin typeface="Consolas" panose="020B0609020204030204" pitchFamily="49" charset="0"/>
+            </a:endParaRPr>
+          </a:p>
+        </p:txBody>
+      </p:sp>
+      <p:sp>
+        <p:nvSpPr>
+          <p:cNvPr id="8" name="Google Shape;472;p25">
+            <a:extLst>
+              <a:ext uri="{FF2B5EF4-FFF2-40B4-BE49-F238E27FC236}">
+                <a16:creationId xmlns:a16="http://schemas.microsoft.com/office/drawing/2014/main" id="{F03C41BE-D096-D76D-222C-0BBF0E3BAF89}"/>
+              </a:ext>
+            </a:extLst>
+          </p:cNvPr>
+          <p:cNvSpPr/>
+          <p:nvPr/>
+        </p:nvSpPr>
+        <p:spPr>
+          <a:xfrm>
+            <a:off x="3434814" y="2809139"/>
+            <a:ext cx="6024654" cy="442630"/>
+          </a:xfrm>
+          <a:prstGeom prst="roundRect">
+            <a:avLst>
+              <a:gd name="adj" fmla="val 16667"/>
+            </a:avLst>
+          </a:prstGeom>
+          <a:solidFill>
+            <a:srgbClr val="FFF2CC">
+              <a:alpha val="49803"/>
+            </a:srgbClr>
+          </a:solidFill>
+          <a:ln w="9525" cap="flat" cmpd="sng">
+            <a:solidFill>
+              <a:schemeClr val="dk1"/>
+            </a:solidFill>
+            <a:prstDash val="solid"/>
+            <a:round/>
+            <a:headEnd type="none" w="sm" len="sm"/>
+            <a:tailEnd type="none" w="sm" len="sm"/>
+          </a:ln>
+        </p:spPr>
+        <p:txBody>
+          <a:bodyPr spcFirstLastPara="1" wrap="square" lIns="91425" tIns="45700" rIns="91425" bIns="45700" anchor="t" anchorCtr="0">
+            <a:spAutoFit/>
+          </a:bodyPr>
+          <a:lstStyle/>
+          <a:p>
+            <a:pPr marL="0" marR="0" lvl="0" indent="0" algn="ctr" rtl="0">
+              <a:lnSpc>
+                <a:spcPct val="100000"/>
+              </a:lnSpc>
+              <a:spcBef>
+                <a:spcPts val="0"/>
+              </a:spcBef>
+              <a:spcAft>
+                <a:spcPts val="0"/>
+              </a:spcAft>
+              <a:buClr>
+                <a:srgbClr val="000000"/>
+              </a:buClr>
+              <a:buSzPts val="1400"/>
+              <a:buFont typeface="Consolas"/>
+              <a:buNone/>
+            </a:pPr>
+            <a:r>
+              <a:rPr lang="fr-CA" sz="2000" b="0" i="0" u="none" strike="noStrike" cap="none" dirty="0" err="1">
+                <a:solidFill>
+                  <a:srgbClr val="000000"/>
+                </a:solidFill>
+                <a:latin typeface="Consolas"/>
+                <a:ea typeface="Consolas"/>
+                <a:cs typeface="Consolas"/>
+                <a:sym typeface="Consolas"/>
+              </a:rPr>
+              <a:t>un_objet.nom_methode</a:t>
+            </a:r>
+            <a:r>
+              <a:rPr lang="fr-CA" sz="2000" b="0" i="1" u="none" strike="noStrike" cap="none" dirty="0">
+                <a:solidFill>
+                  <a:srgbClr val="000000"/>
+                </a:solidFill>
+                <a:latin typeface="Consolas"/>
+                <a:ea typeface="Consolas"/>
+                <a:cs typeface="Consolas"/>
+                <a:sym typeface="Consolas"/>
+              </a:rPr>
+              <a:t>(</a:t>
+            </a:r>
+            <a:r>
+              <a:rPr lang="fr-CA" sz="2000" b="0" i="0" u="none" strike="noStrike" cap="none" dirty="0">
+                <a:solidFill>
+                  <a:srgbClr val="000000"/>
+                </a:solidFill>
+                <a:latin typeface="Consolas"/>
+                <a:ea typeface="Consolas"/>
+                <a:cs typeface="Consolas"/>
+                <a:sym typeface="Consolas"/>
+              </a:rPr>
+              <a:t>...)</a:t>
+            </a:r>
+            <a:endParaRPr sz="2000" b="0" i="0" u="none" strike="noStrike" cap="none" dirty="0">
+              <a:solidFill>
+                <a:srgbClr val="000000"/>
+              </a:solidFill>
+              <a:latin typeface="Consolas"/>
+              <a:ea typeface="Consolas"/>
+              <a:cs typeface="Consolas"/>
+              <a:sym typeface="Consolas"/>
+            </a:endParaRPr>
+          </a:p>
+        </p:txBody>
+      </p:sp>
+      <p:grpSp>
+        <p:nvGrpSpPr>
+          <p:cNvPr id="10" name="Google Shape;473;p25">
+            <a:extLst>
+              <a:ext uri="{FF2B5EF4-FFF2-40B4-BE49-F238E27FC236}">
+                <a16:creationId xmlns:a16="http://schemas.microsoft.com/office/drawing/2014/main" id="{E17461B0-5594-C95C-7F83-9B0F010A8D99}"/>
+              </a:ext>
+            </a:extLst>
+          </p:cNvPr>
+          <p:cNvGrpSpPr/>
+          <p:nvPr/>
+        </p:nvGrpSpPr>
+        <p:grpSpPr>
+          <a:xfrm>
+            <a:off x="3434814" y="3519113"/>
+            <a:ext cx="6024654" cy="1008000"/>
+            <a:chOff x="6682372" y="3766184"/>
+            <a:chExt cx="6801271" cy="768000"/>
+          </a:xfrm>
+        </p:grpSpPr>
+        <p:sp>
+          <p:nvSpPr>
+            <p:cNvPr id="11" name="Google Shape;474;p25">
+              <a:extLst>
+                <a:ext uri="{FF2B5EF4-FFF2-40B4-BE49-F238E27FC236}">
+                  <a16:creationId xmlns:a16="http://schemas.microsoft.com/office/drawing/2014/main" id="{96E484D9-60F1-5B05-2B10-DCB2ADAD2AC3}"/>
+                </a:ext>
+              </a:extLst>
+            </p:cNvPr>
+            <p:cNvSpPr/>
+            <p:nvPr/>
+          </p:nvSpPr>
+          <p:spPr>
+            <a:xfrm>
+              <a:off x="6682372" y="3766184"/>
+              <a:ext cx="256567" cy="768000"/>
+            </a:xfrm>
+            <a:prstGeom prst="rect">
+              <a:avLst/>
+            </a:prstGeom>
+            <a:solidFill>
+              <a:srgbClr val="7F7F7F"/>
+            </a:solidFill>
+            <a:ln w="12700" cap="flat" cmpd="sng">
+              <a:solidFill>
+                <a:schemeClr val="dk1"/>
+              </a:solidFill>
+              <a:prstDash val="solid"/>
+              <a:miter lim="800000"/>
+              <a:headEnd type="none" w="sm" len="sm"/>
+              <a:tailEnd type="none" w="sm" len="sm"/>
+            </a:ln>
+          </p:spPr>
+          <p:txBody>
+            <a:bodyPr spcFirstLastPara="1" wrap="square" lIns="91425" tIns="45700" rIns="91425" bIns="45700" anchor="ctr" anchorCtr="0">
+              <a:noAutofit/>
+            </a:bodyPr>
+            <a:lstStyle/>
+            <a:p>
+              <a:pPr marL="0" marR="0" lvl="0" indent="0" algn="ctr" rtl="0">
+                <a:lnSpc>
+                  <a:spcPct val="100000"/>
+                </a:lnSpc>
+                <a:spcBef>
+                  <a:spcPts val="0"/>
+                </a:spcBef>
+                <a:spcAft>
+                  <a:spcPts val="0"/>
+                </a:spcAft>
+                <a:buClr>
+                  <a:srgbClr val="FFFFFF"/>
+                </a:buClr>
+                <a:buSzPts val="1400"/>
+                <a:buFont typeface="Calibri"/>
+                <a:buNone/>
+              </a:pPr>
+              <a:r>
+                <a:rPr lang="fr-CA" sz="1400" b="0" i="0" u="none" strike="noStrike" cap="none" dirty="0">
+                  <a:solidFill>
+                    <a:srgbClr val="FFFFFF"/>
+                  </a:solidFill>
+                  <a:latin typeface="Calibri"/>
+                  <a:ea typeface="Calibri"/>
+                  <a:cs typeface="Calibri"/>
+                  <a:sym typeface="Calibri"/>
+                </a:rPr>
+                <a:t>1</a:t>
+              </a:r>
+              <a:endParaRPr dirty="0"/>
+            </a:p>
+            <a:p>
+              <a:pPr marL="0" marR="0" lvl="0" indent="0" algn="ctr" rtl="0">
+                <a:lnSpc>
+                  <a:spcPct val="100000"/>
+                </a:lnSpc>
+                <a:spcBef>
+                  <a:spcPts val="0"/>
+                </a:spcBef>
+                <a:spcAft>
+                  <a:spcPts val="0"/>
+                </a:spcAft>
+                <a:buClr>
+                  <a:srgbClr val="FFFFFF"/>
+                </a:buClr>
+                <a:buSzPts val="1400"/>
+                <a:buFont typeface="Calibri"/>
+                <a:buNone/>
+              </a:pPr>
+              <a:r>
+                <a:rPr lang="fr-CA" sz="1400" b="0" i="0" u="none" strike="noStrike" cap="none" dirty="0">
+                  <a:solidFill>
+                    <a:srgbClr val="FFFFFF"/>
+                  </a:solidFill>
+                  <a:latin typeface="Calibri"/>
+                  <a:ea typeface="Calibri"/>
+                  <a:cs typeface="Calibri"/>
+                  <a:sym typeface="Calibri"/>
+                </a:rPr>
+                <a:t>23</a:t>
+              </a:r>
+              <a:endParaRPr dirty="0"/>
+            </a:p>
+            <a:p>
+              <a:pPr marL="0" marR="0" lvl="0" indent="0" algn="ctr" rtl="0">
+                <a:lnSpc>
+                  <a:spcPct val="100000"/>
+                </a:lnSpc>
+                <a:spcBef>
+                  <a:spcPts val="0"/>
+                </a:spcBef>
+                <a:spcAft>
+                  <a:spcPts val="0"/>
+                </a:spcAft>
+                <a:buClr>
+                  <a:srgbClr val="FFFFFF"/>
+                </a:buClr>
+                <a:buSzPts val="1400"/>
+                <a:buFont typeface="Calibri"/>
+                <a:buNone/>
+              </a:pPr>
+              <a:r>
+                <a:rPr lang="fr-CA" sz="1400" b="0" i="0" u="none" strike="noStrike" cap="none" dirty="0">
+                  <a:solidFill>
+                    <a:srgbClr val="FFFFFF"/>
+                  </a:solidFill>
+                  <a:latin typeface="Calibri"/>
+                  <a:ea typeface="Calibri"/>
+                  <a:cs typeface="Calibri"/>
+                  <a:sym typeface="Calibri"/>
+                </a:rPr>
+                <a:t>4</a:t>
+              </a:r>
+              <a:endParaRPr dirty="0"/>
+            </a:p>
+          </p:txBody>
+        </p:sp>
+        <p:sp>
+          <p:nvSpPr>
+            <p:cNvPr id="12" name="Google Shape;475;p25">
+              <a:extLst>
+                <a:ext uri="{FF2B5EF4-FFF2-40B4-BE49-F238E27FC236}">
+                  <a16:creationId xmlns:a16="http://schemas.microsoft.com/office/drawing/2014/main" id="{CAE3BACC-FEBF-97CA-3FD8-53E3009361F3}"/>
+                </a:ext>
+              </a:extLst>
+            </p:cNvPr>
+            <p:cNvSpPr/>
+            <p:nvPr/>
+          </p:nvSpPr>
+          <p:spPr>
+            <a:xfrm>
+              <a:off x="6938939" y="3766184"/>
+              <a:ext cx="6544704" cy="768000"/>
+            </a:xfrm>
+            <a:prstGeom prst="rect">
+              <a:avLst/>
+            </a:prstGeom>
+            <a:solidFill>
+              <a:schemeClr val="dk1"/>
+            </a:solidFill>
+            <a:ln w="12700" cap="flat" cmpd="sng">
+              <a:solidFill>
+                <a:schemeClr val="dk1"/>
+              </a:solidFill>
+              <a:prstDash val="solid"/>
+              <a:miter lim="800000"/>
+              <a:headEnd type="none" w="sm" len="sm"/>
+              <a:tailEnd type="none" w="sm" len="sm"/>
+            </a:ln>
+          </p:spPr>
+          <p:txBody>
+            <a:bodyPr spcFirstLastPara="1" wrap="square" lIns="91425" tIns="45700" rIns="91425" bIns="45700" anchor="ctr" anchorCtr="0">
+              <a:noAutofit/>
+            </a:bodyPr>
+            <a:lstStyle/>
+            <a:p>
+              <a:pPr marL="0" marR="0" lvl="0" indent="0" algn="l" rtl="0">
+                <a:lnSpc>
+                  <a:spcPct val="100000"/>
+                </a:lnSpc>
+                <a:spcBef>
+                  <a:spcPts val="0"/>
+                </a:spcBef>
+                <a:spcAft>
+                  <a:spcPts val="0"/>
+                </a:spcAft>
+                <a:buClr>
+                  <a:srgbClr val="FFFFFF"/>
+                </a:buClr>
+                <a:buSzPts val="1400"/>
+                <a:buFont typeface="Consolas"/>
+                <a:buNone/>
+              </a:pPr>
+              <a:r>
+                <a:rPr lang="fr-CA" sz="1400" b="0" i="0" u="none" strike="noStrike" cap="none" dirty="0">
+                  <a:solidFill>
+                    <a:srgbClr val="FFFFFF"/>
+                  </a:solidFill>
+                  <a:latin typeface="Consolas"/>
+                  <a:ea typeface="Consolas"/>
+                  <a:cs typeface="Consolas"/>
+                  <a:sym typeface="Consolas"/>
+                </a:rPr>
+                <a:t>&gt;&gt;&gt; liste = [1, 2]</a:t>
+              </a:r>
+              <a:endParaRPr dirty="0"/>
+            </a:p>
+            <a:p>
+              <a:pPr marL="0" marR="0" lvl="0" indent="0" algn="l" rtl="0">
+                <a:lnSpc>
+                  <a:spcPct val="100000"/>
+                </a:lnSpc>
+                <a:spcBef>
+                  <a:spcPts val="0"/>
+                </a:spcBef>
+                <a:spcAft>
+                  <a:spcPts val="0"/>
+                </a:spcAft>
+                <a:buClr>
+                  <a:srgbClr val="FFFFFF"/>
+                </a:buClr>
+                <a:buSzPts val="1400"/>
+                <a:buFont typeface="Consolas"/>
+                <a:buNone/>
+              </a:pPr>
+              <a:r>
+                <a:rPr lang="fr-CA" sz="1400" b="0" i="0" u="none" strike="noStrike" cap="none" dirty="0">
+                  <a:solidFill>
+                    <a:srgbClr val="FFFFFF"/>
+                  </a:solidFill>
+                  <a:latin typeface="Consolas"/>
+                  <a:ea typeface="Consolas"/>
+                  <a:cs typeface="Consolas"/>
+                  <a:sym typeface="Consolas"/>
+                </a:rPr>
+                <a:t>&gt;&gt;&gt; </a:t>
+              </a:r>
+              <a:r>
+                <a:rPr lang="fr-CA" sz="1400" b="0" i="0" u="none" strike="noStrike" cap="none" dirty="0" err="1">
+                  <a:solidFill>
+                    <a:srgbClr val="FFFFFF"/>
+                  </a:solidFill>
+                  <a:latin typeface="Consolas"/>
+                  <a:ea typeface="Consolas"/>
+                  <a:cs typeface="Consolas"/>
+                  <a:sym typeface="Consolas"/>
+                </a:rPr>
+                <a:t>liste.extend</a:t>
+              </a:r>
+              <a:r>
+                <a:rPr lang="fr-CA" sz="1400" b="0" i="0" u="none" strike="noStrike" cap="none" dirty="0">
+                  <a:solidFill>
+                    <a:srgbClr val="FFFFFF"/>
+                  </a:solidFill>
+                  <a:latin typeface="Consolas"/>
+                  <a:ea typeface="Consolas"/>
+                  <a:cs typeface="Consolas"/>
+                  <a:sym typeface="Consolas"/>
+                </a:rPr>
+                <a:t>([3, 4])</a:t>
+              </a:r>
+              <a:endParaRPr dirty="0"/>
+            </a:p>
+            <a:p>
+              <a:pPr marL="0" marR="0" lvl="0" indent="0" algn="l" rtl="0">
+                <a:lnSpc>
+                  <a:spcPct val="100000"/>
+                </a:lnSpc>
+                <a:spcBef>
+                  <a:spcPts val="0"/>
+                </a:spcBef>
+                <a:spcAft>
+                  <a:spcPts val="0"/>
+                </a:spcAft>
+                <a:buClr>
+                  <a:srgbClr val="FFFFFF"/>
+                </a:buClr>
+                <a:buSzPts val="1400"/>
+                <a:buFont typeface="Consolas"/>
+                <a:buNone/>
+              </a:pPr>
+              <a:r>
+                <a:rPr lang="fr-CA" sz="1400" b="0" i="0" u="none" strike="noStrike" cap="none" dirty="0">
+                  <a:solidFill>
+                    <a:srgbClr val="FFFFFF"/>
+                  </a:solidFill>
+                  <a:latin typeface="Consolas"/>
+                  <a:ea typeface="Consolas"/>
+                  <a:cs typeface="Consolas"/>
+                  <a:sym typeface="Consolas"/>
+                </a:rPr>
+                <a:t>&gt;&gt;&gt; </a:t>
+              </a:r>
+              <a:r>
+                <a:rPr lang="fr-CA" sz="1400" b="0" i="0" u="none" strike="noStrike" cap="none" dirty="0" err="1">
+                  <a:solidFill>
+                    <a:srgbClr val="FFFFFF"/>
+                  </a:solidFill>
+                  <a:latin typeface="Consolas"/>
+                  <a:ea typeface="Consolas"/>
+                  <a:cs typeface="Consolas"/>
+                  <a:sym typeface="Consolas"/>
+                </a:rPr>
+                <a:t>print</a:t>
+              </a:r>
+              <a:r>
+                <a:rPr lang="fr-CA" sz="1400" b="0" i="0" u="none" strike="noStrike" cap="none" dirty="0">
+                  <a:solidFill>
+                    <a:srgbClr val="FFFFFF"/>
+                  </a:solidFill>
+                  <a:latin typeface="Consolas"/>
+                  <a:ea typeface="Consolas"/>
+                  <a:cs typeface="Consolas"/>
+                  <a:sym typeface="Consolas"/>
+                </a:rPr>
+                <a:t>(liste)</a:t>
+              </a:r>
+              <a:br>
+                <a:rPr lang="fr-CA" sz="1400" b="0" i="0" u="none" strike="noStrike" cap="none" dirty="0">
+                  <a:solidFill>
+                    <a:srgbClr val="FFFFFF"/>
+                  </a:solidFill>
+                  <a:latin typeface="Consolas"/>
+                  <a:ea typeface="Consolas"/>
+                  <a:cs typeface="Consolas"/>
+                  <a:sym typeface="Consolas"/>
+                </a:rPr>
+              </a:br>
+              <a:r>
+                <a:rPr lang="fr-CA" sz="1400" b="0" i="0" u="none" strike="noStrike" cap="none" dirty="0">
+                  <a:solidFill>
+                    <a:srgbClr val="FFFFFF"/>
+                  </a:solidFill>
+                  <a:latin typeface="Consolas"/>
+                  <a:ea typeface="Consolas"/>
+                  <a:cs typeface="Consolas"/>
+                  <a:sym typeface="Consolas"/>
+                </a:rPr>
+                <a:t>[1, 2, 3, 4]</a:t>
+              </a:r>
+              <a:endParaRPr sz="1400" b="0" i="0" u="none" strike="noStrike" cap="none" dirty="0">
+                <a:solidFill>
+                  <a:srgbClr val="FFFFFF"/>
+                </a:solidFill>
+                <a:latin typeface="Consolas"/>
+                <a:ea typeface="Consolas"/>
+                <a:cs typeface="Consolas"/>
+                <a:sym typeface="Consolas"/>
+              </a:endParaRPr>
+            </a:p>
+          </p:txBody>
+        </p:sp>
+      </p:grpSp>
+    </p:spTree>
+    <p:extLst>
+      <p:ext uri="{BB962C8B-B14F-4D97-AF65-F5344CB8AC3E}">
+        <p14:creationId xmlns:p14="http://schemas.microsoft.com/office/powerpoint/2010/main" val="3179990299"/>
+      </p:ext>
+    </p:extLst>
+  </p:cSld>
+  <p:clrMapOvr>
+    <a:masterClrMapping/>
+  </p:clrMapOvr>
+  <p:timing>
+    <p:tnLst>
+      <p:par>
+        <p:cTn id="1" dur="indefinite" restart="never" nodeType="tmRoot">
+          <p:childTnLst>
+            <p:seq concurrent="1" nextAc="seek">
+              <p:cTn id="2" dur="indefinite" nodeType="mainSeq">
+                <p:childTnLst>
+                  <p:par>
+                    <p:cTn id="3" fill="hold">
+                      <p:stCondLst>
+                        <p:cond delay="indefinite"/>
+                      </p:stCondLst>
+                      <p:childTnLst>
+                        <p:par>
+                          <p:cTn id="4" fill="hold">
+                            <p:stCondLst>
+                              <p:cond delay="0"/>
+                            </p:stCondLst>
+                            <p:childTnLst>
+                              <p:par>
+                                <p:cTn id="5" presetID="10" presetClass="entr" presetSubtype="0" fill="hold" nodeType="clickEffect">
+                                  <p:stCondLst>
+                                    <p:cond delay="0"/>
+                                  </p:stCondLst>
+                                  <p:childTnLst>
+                                    <p:set>
+                                      <p:cBhvr>
+                                        <p:cTn id="6" dur="1" fill="hold">
+                                          <p:stCondLst>
+                                            <p:cond delay="0"/>
+                                          </p:stCondLst>
+                                        </p:cTn>
+                                        <p:tgtEl>
+                                          <p:spTgt spid="3">
+                                            <p:txEl>
+                                              <p:pRg st="0" end="0"/>
+                                            </p:txEl>
+                                          </p:spTgt>
+                                        </p:tgtEl>
+                                        <p:attrNameLst>
+                                          <p:attrName>style.visibility</p:attrName>
+                                        </p:attrNameLst>
+                                      </p:cBhvr>
+                                      <p:to>
+                                        <p:strVal val="visible"/>
+                                      </p:to>
+                                    </p:set>
+                                    <p:animEffect transition="in" filter="fade">
+                                      <p:cBhvr>
+                                        <p:cTn id="7" dur="500"/>
+                                        <p:tgtEl>
+                                          <p:spTgt spid="3">
+                                            <p:txEl>
+                                              <p:pRg st="0" end="0"/>
+                                            </p:txEl>
+                                          </p:spTgt>
+                                        </p:tgtEl>
+                                      </p:cBhvr>
+                                    </p:animEffect>
+                                  </p:childTnLst>
+                                </p:cTn>
+                              </p:par>
+                            </p:childTnLst>
+                          </p:cTn>
+                        </p:par>
+                      </p:childTnLst>
+                    </p:cTn>
+                  </p:par>
+                  <p:par>
+                    <p:cTn id="8" fill="hold">
+                      <p:stCondLst>
+                        <p:cond delay="indefinite"/>
+                      </p:stCondLst>
+                      <p:childTnLst>
+                        <p:par>
+                          <p:cTn id="9" fill="hold">
+                            <p:stCondLst>
+                              <p:cond delay="0"/>
+                            </p:stCondLst>
+                            <p:childTnLst>
+                              <p:par>
+                                <p:cTn id="10" presetID="10" presetClass="entr" presetSubtype="0" fill="hold" grpId="0" nodeType="clickEffect">
+                                  <p:stCondLst>
+                                    <p:cond delay="0"/>
+                                  </p:stCondLst>
+                                  <p:childTnLst>
+                                    <p:set>
+                                      <p:cBhvr>
+                                        <p:cTn id="11" dur="1" fill="hold">
+                                          <p:stCondLst>
+                                            <p:cond delay="0"/>
+                                          </p:stCondLst>
+                                        </p:cTn>
+                                        <p:tgtEl>
+                                          <p:spTgt spid="8"/>
+                                        </p:tgtEl>
+                                        <p:attrNameLst>
+                                          <p:attrName>style.visibility</p:attrName>
+                                        </p:attrNameLst>
+                                      </p:cBhvr>
+                                      <p:to>
+                                        <p:strVal val="visible"/>
+                                      </p:to>
+                                    </p:set>
+                                    <p:animEffect transition="in" filter="fade">
+                                      <p:cBhvr>
+                                        <p:cTn id="12" dur="500"/>
+                                        <p:tgtEl>
+                                          <p:spTgt spid="8"/>
+                                        </p:tgtEl>
+                                      </p:cBhvr>
+                                    </p:animEffect>
+                                  </p:childTnLst>
+                                </p:cTn>
+                              </p:par>
+                            </p:childTnLst>
+                          </p:cTn>
+                        </p:par>
+                      </p:childTnLst>
+                    </p:cTn>
+                  </p:par>
+                  <p:par>
+                    <p:cTn id="13" fill="hold">
+                      <p:stCondLst>
+                        <p:cond delay="indefinite"/>
+                      </p:stCondLst>
+                      <p:childTnLst>
+                        <p:par>
+                          <p:cTn id="14" fill="hold">
+                            <p:stCondLst>
+                              <p:cond delay="0"/>
+                            </p:stCondLst>
+                            <p:childTnLst>
+                              <p:par>
+                                <p:cTn id="15" presetID="10" presetClass="entr" presetSubtype="0" fill="hold" nodeType="clickEffect">
+                                  <p:stCondLst>
+                                    <p:cond delay="0"/>
+                                  </p:stCondLst>
+                                  <p:childTnLst>
+                                    <p:set>
+                                      <p:cBhvr>
+                                        <p:cTn id="16" dur="1" fill="hold">
+                                          <p:stCondLst>
+                                            <p:cond delay="0"/>
+                                          </p:stCondLst>
+                                        </p:cTn>
+                                        <p:tgtEl>
+                                          <p:spTgt spid="10"/>
+                                        </p:tgtEl>
+                                        <p:attrNameLst>
+                                          <p:attrName>style.visibility</p:attrName>
+                                        </p:attrNameLst>
+                                      </p:cBhvr>
+                                      <p:to>
+                                        <p:strVal val="visible"/>
+                                      </p:to>
+                                    </p:set>
+                                    <p:animEffect transition="in" filter="fade">
+                                      <p:cBhvr>
+                                        <p:cTn id="17" dur="500"/>
+                                        <p:tgtEl>
+                                          <p:spTgt spid="10"/>
+                                        </p:tgtEl>
+                                      </p:cBhvr>
+                                    </p:animEffect>
+                                  </p:childTnLst>
+                                </p:cTn>
+                              </p:par>
+                            </p:childTnLst>
+                          </p:cTn>
+                        </p:par>
+                      </p:childTnLst>
+                    </p:cTn>
+                  </p:par>
+                  <p:par>
+                    <p:cTn id="18" fill="hold">
+                      <p:stCondLst>
+                        <p:cond delay="indefinite"/>
+                      </p:stCondLst>
+                      <p:childTnLst>
+                        <p:par>
+                          <p:cTn id="19" fill="hold">
+                            <p:stCondLst>
+                              <p:cond delay="0"/>
+                            </p:stCondLst>
+                            <p:childTnLst>
+                              <p:par>
+                                <p:cTn id="20" presetID="10" presetClass="entr" presetSubtype="0" fill="hold" nodeType="clickEffect">
+                                  <p:stCondLst>
+                                    <p:cond delay="0"/>
+                                  </p:stCondLst>
+                                  <p:childTnLst>
+                                    <p:set>
+                                      <p:cBhvr>
+                                        <p:cTn id="21" dur="1" fill="hold">
+                                          <p:stCondLst>
+                                            <p:cond delay="0"/>
+                                          </p:stCondLst>
+                                        </p:cTn>
+                                        <p:tgtEl>
+                                          <p:spTgt spid="3">
+                                            <p:txEl>
+                                              <p:pRg st="7" end="7"/>
+                                            </p:txEl>
+                                          </p:spTgt>
+                                        </p:tgtEl>
+                                        <p:attrNameLst>
+                                          <p:attrName>style.visibility</p:attrName>
+                                        </p:attrNameLst>
+                                      </p:cBhvr>
+                                      <p:to>
+                                        <p:strVal val="visible"/>
+                                      </p:to>
+                                    </p:set>
+                                    <p:animEffect transition="in" filter="fade">
+                                      <p:cBhvr>
+                                        <p:cTn id="22" dur="500"/>
+                                        <p:tgtEl>
+                                          <p:spTgt spid="3">
+                                            <p:txEl>
+                                              <p:pRg st="7" end="7"/>
+                                            </p:txEl>
+                                          </p:spTgt>
+                                        </p:tgtEl>
+                                      </p:cBhvr>
+                                    </p:animEffect>
+                                  </p:childTnLst>
+                                </p:cTn>
+                              </p:par>
+                            </p:childTnLst>
+                          </p:cTn>
+                        </p:par>
+                      </p:childTnLst>
+                    </p:cTn>
+                  </p:par>
+                  <p:par>
+                    <p:cTn id="23" fill="hold">
+                      <p:stCondLst>
+                        <p:cond delay="indefinite"/>
+                      </p:stCondLst>
+                      <p:childTnLst>
+                        <p:par>
+                          <p:cTn id="24" fill="hold">
+                            <p:stCondLst>
+                              <p:cond delay="0"/>
+                            </p:stCondLst>
+                            <p:childTnLst>
+                              <p:par>
+                                <p:cTn id="25" presetID="10" presetClass="entr" presetSubtype="0" fill="hold" nodeType="clickEffect">
+                                  <p:stCondLst>
+                                    <p:cond delay="0"/>
+                                  </p:stCondLst>
+                                  <p:childTnLst>
+                                    <p:set>
+                                      <p:cBhvr>
+                                        <p:cTn id="26" dur="1" fill="hold">
+                                          <p:stCondLst>
+                                            <p:cond delay="0"/>
+                                          </p:stCondLst>
+                                        </p:cTn>
+                                        <p:tgtEl>
+                                          <p:spTgt spid="3">
+                                            <p:txEl>
+                                              <p:pRg st="9" end="9"/>
+                                            </p:txEl>
+                                          </p:spTgt>
+                                        </p:tgtEl>
+                                        <p:attrNameLst>
+                                          <p:attrName>style.visibility</p:attrName>
+                                        </p:attrNameLst>
+                                      </p:cBhvr>
+                                      <p:to>
+                                        <p:strVal val="visible"/>
+                                      </p:to>
+                                    </p:set>
+                                    <p:animEffect transition="in" filter="fade">
+                                      <p:cBhvr>
+                                        <p:cTn id="27" dur="500"/>
+                                        <p:tgtEl>
+                                          <p:spTgt spid="3">
+                                            <p:txEl>
+                                              <p:pRg st="9" end="9"/>
+                                            </p:txEl>
+                                          </p:spTgt>
+                                        </p:tgtEl>
+                                      </p:cBhvr>
+                                    </p:animEffect>
+                                  </p:childTnLst>
+                                </p:cTn>
+                              </p:par>
+                            </p:childTnLst>
+                          </p:cTn>
+                        </p:par>
+                      </p:childTnLst>
+                    </p:cTn>
+                  </p:par>
+                </p:childTnLst>
+              </p:cTn>
+              <p:prevCondLst>
+                <p:cond evt="onPrev" delay="0">
+                  <p:tgtEl>
+                    <p:sldTgt/>
+                  </p:tgtEl>
+                </p:cond>
+              </p:prevCondLst>
+              <p:nextCondLst>
+                <p:cond evt="onNext" delay="0">
+                  <p:tgtEl>
+                    <p:sldTgt/>
+                  </p:tgtEl>
+                </p:cond>
+              </p:nextCondLst>
+            </p:seq>
+          </p:childTnLst>
+        </p:cTn>
+      </p:par>
+    </p:tnLst>
+    <p:bldLst>
+      <p:bldP spid="8" grpId="0" animBg="1"/>
+    </p:bldLst>
+  </p:timing>
+</p:sld>
+</file>
+
+<file path=ppt/slides/slide41.xml><?xml version="1.0" encoding="utf-8"?>
+<p:sld xmlns:a="http://schemas.openxmlformats.org/drawingml/2006/main" xmlns:r="http://schemas.openxmlformats.org/officeDocument/2006/relationships" xmlns:p="http://schemas.openxmlformats.org/presentationml/2006/main">
+  <p:cSld>
+    <p:bg>
+      <p:bgPr>
+        <a:solidFill>
           <a:schemeClr val="accent6">
             <a:lumMod val="20000"/>
             <a:lumOff val="80000"/>
@@ -40493,7 +42138,7 @@
           <a:p>
             <a:fld id="{846B06B1-1179-491F-A487-8E0C403F7C13}" type="slidenum">
               <a:rPr lang="fr-CA" smtClean="0"/>
-              <a:t>40</a:t>
+              <a:t>41</a:t>
             </a:fld>
             <a:endParaRPr lang="fr-CA"/>
           </a:p>
@@ -45004,12 +46649,6 @@
                 <a:latin typeface="Arial Rounded MT Bold" panose="020F0704030504030204" pitchFamily="34" charset="0"/>
               </a:rPr>
               <a:t>classe-contenant</a:t>
-            </a:r>
-            <a:r>
-              <a:rPr lang="en-US" dirty="0">
-                <a:latin typeface="Arial Rounded MT Bold" panose="020F0704030504030204" pitchFamily="34" charset="0"/>
-              </a:rPr>
-              <a:t> (1/2)</a:t>
             </a:r>
             <a:endParaRPr lang="fr-CA" dirty="0">
               <a:latin typeface="Arial Rounded MT Bold" panose="020F0704030504030204" pitchFamily="34" charset="0"/>

--- a/python_2/presentation_python_2.pptx
+++ b/python_2/presentation_python_2.pptx
@@ -5,7 +5,7 @@
     <p:sldMasterId id="2147483648" r:id="rId1"/>
   </p:sldMasterIdLst>
   <p:notesMasterIdLst>
-    <p:notesMasterId r:id="rId20"/>
+    <p:notesMasterId r:id="rId21"/>
   </p:notesMasterIdLst>
   <p:sldIdLst>
     <p:sldId id="256" r:id="rId2"/>
@@ -25,7 +25,8 @@
     <p:sldId id="309" r:id="rId16"/>
     <p:sldId id="311" r:id="rId17"/>
     <p:sldId id="312" r:id="rId18"/>
-    <p:sldId id="297" r:id="rId19"/>
+    <p:sldId id="313" r:id="rId19"/>
+    <p:sldId id="297" r:id="rId20"/>
   </p:sldIdLst>
   <p:sldSz cx="12192000" cy="6858000"/>
   <p:notesSz cx="6858000" cy="9144000"/>
@@ -585,6 +586,114 @@
     <p:extLst>
       <p:ext uri="{BB962C8B-B14F-4D97-AF65-F5344CB8AC3E}">
         <p14:creationId xmlns:p14="http://schemas.microsoft.com/office/powerpoint/2010/main" val="506805993"/>
+      </p:ext>
+    </p:extLst>
+  </p:cSld>
+  <p:clrMapOvr>
+    <a:masterClrMapping/>
+  </p:clrMapOvr>
+</p:notes>
+</file>
+
+<file path=ppt/notesSlides/notesSlide10.xml><?xml version="1.0" encoding="utf-8"?>
+<p:notes xmlns:a="http://schemas.openxmlformats.org/drawingml/2006/main" xmlns:r="http://schemas.openxmlformats.org/officeDocument/2006/relationships" xmlns:p="http://schemas.openxmlformats.org/presentationml/2006/main">
+  <p:cSld>
+    <p:spTree>
+      <p:nvGrpSpPr>
+        <p:cNvPr id="1" name="">
+          <a:extLst>
+            <a:ext uri="{FF2B5EF4-FFF2-40B4-BE49-F238E27FC236}">
+              <a16:creationId xmlns:a16="http://schemas.microsoft.com/office/drawing/2014/main" id="{294D5604-FDBC-D681-9D03-26299CC1D5AD}"/>
+            </a:ext>
+          </a:extLst>
+        </p:cNvPr>
+        <p:cNvGrpSpPr/>
+        <p:nvPr/>
+      </p:nvGrpSpPr>
+      <p:grpSpPr>
+        <a:xfrm>
+          <a:off x="0" y="0"/>
+          <a:ext cx="0" cy="0"/>
+          <a:chOff x="0" y="0"/>
+          <a:chExt cx="0" cy="0"/>
+        </a:xfrm>
+      </p:grpSpPr>
+      <p:sp>
+        <p:nvSpPr>
+          <p:cNvPr id="2" name="Slide Image Placeholder 1">
+            <a:extLst>
+              <a:ext uri="{FF2B5EF4-FFF2-40B4-BE49-F238E27FC236}">
+                <a16:creationId xmlns:a16="http://schemas.microsoft.com/office/drawing/2014/main" id="{B958D57B-86F9-B4FC-58C0-36FB265AAC54}"/>
+              </a:ext>
+            </a:extLst>
+          </p:cNvPr>
+          <p:cNvSpPr>
+            <a:spLocks noGrp="1" noRot="1" noChangeAspect="1"/>
+          </p:cNvSpPr>
+          <p:nvPr>
+            <p:ph type="sldImg"/>
+          </p:nvPr>
+        </p:nvSpPr>
+        <p:spPr/>
+      </p:sp>
+      <p:sp>
+        <p:nvSpPr>
+          <p:cNvPr id="3" name="Notes Placeholder 2">
+            <a:extLst>
+              <a:ext uri="{FF2B5EF4-FFF2-40B4-BE49-F238E27FC236}">
+                <a16:creationId xmlns:a16="http://schemas.microsoft.com/office/drawing/2014/main" id="{2C797C78-4AE3-669F-6455-49774B313E08}"/>
+              </a:ext>
+            </a:extLst>
+          </p:cNvPr>
+          <p:cNvSpPr>
+            <a:spLocks noGrp="1"/>
+          </p:cNvSpPr>
+          <p:nvPr>
+            <p:ph type="body" idx="1"/>
+          </p:nvPr>
+        </p:nvSpPr>
+        <p:spPr/>
+        <p:txBody>
+          <a:bodyPr/>
+          <a:lstStyle/>
+          <a:p>
+            <a:endParaRPr lang="fr-CA" dirty="0"/>
+          </a:p>
+        </p:txBody>
+      </p:sp>
+      <p:sp>
+        <p:nvSpPr>
+          <p:cNvPr id="4" name="Slide Number Placeholder 3">
+            <a:extLst>
+              <a:ext uri="{FF2B5EF4-FFF2-40B4-BE49-F238E27FC236}">
+                <a16:creationId xmlns:a16="http://schemas.microsoft.com/office/drawing/2014/main" id="{64CA70F8-DE3F-87B6-731B-AA8031C2A88B}"/>
+              </a:ext>
+            </a:extLst>
+          </p:cNvPr>
+          <p:cNvSpPr>
+            <a:spLocks noGrp="1"/>
+          </p:cNvSpPr>
+          <p:nvPr>
+            <p:ph type="sldNum" sz="quarter" idx="5"/>
+          </p:nvPr>
+        </p:nvSpPr>
+        <p:spPr/>
+        <p:txBody>
+          <a:bodyPr/>
+          <a:lstStyle/>
+          <a:p>
+            <a:fld id="{D755565A-1FEC-4FFE-8425-B731D92946D0}" type="slidenum">
+              <a:rPr lang="fr-CA" smtClean="0"/>
+              <a:t>18</a:t>
+            </a:fld>
+            <a:endParaRPr lang="fr-CA"/>
+          </a:p>
+        </p:txBody>
+      </p:sp>
+    </p:spTree>
+    <p:extLst>
+      <p:ext uri="{BB962C8B-B14F-4D97-AF65-F5344CB8AC3E}">
+        <p14:creationId xmlns:p14="http://schemas.microsoft.com/office/powerpoint/2010/main" val="1204014661"/>
       </p:ext>
     </p:extLst>
   </p:cSld>
@@ -13438,6 +13547,16 @@
             </a:r>
           </a:p>
           <a:p>
+            <a:pPr algn="just">
+              <a:lnSpc>
+                <a:spcPct val="110000"/>
+              </a:lnSpc>
+            </a:pPr>
+            <a:endParaRPr lang="fr-CA" sz="100" dirty="0">
+              <a:latin typeface="Consolas" panose="020B0609020204030204" pitchFamily="49" charset="0"/>
+            </a:endParaRPr>
+          </a:p>
+          <a:p>
             <a:pPr lvl="1" algn="just">
               <a:lnSpc>
                 <a:spcPct val="110000"/>
@@ -13746,7 +13865,7 @@
                                         <p:tgtEl>
                                           <p:spTgt spid="3">
                                             <p:txEl>
-                                              <p:pRg st="1" end="1"/>
+                                              <p:pRg st="2" end="2"/>
                                             </p:txEl>
                                           </p:spTgt>
                                         </p:tgtEl>
@@ -13764,7 +13883,7 @@
                                         <p:tgtEl>
                                           <p:spTgt spid="3">
                                             <p:txEl>
-                                              <p:pRg st="1" end="1"/>
+                                              <p:pRg st="2" end="2"/>
                                             </p:txEl>
                                           </p:spTgt>
                                         </p:tgtEl>
@@ -13807,7 +13926,7 @@
                                         <p:tgtEl>
                                           <p:spTgt spid="3">
                                             <p:txEl>
-                                              <p:pRg st="2" end="2"/>
+                                              <p:pRg st="3" end="3"/>
                                             </p:txEl>
                                           </p:spTgt>
                                         </p:tgtEl>
@@ -13825,7 +13944,7 @@
                                         <p:tgtEl>
                                           <p:spTgt spid="3">
                                             <p:txEl>
-                                              <p:pRg st="2" end="2"/>
+                                              <p:pRg st="3" end="3"/>
                                             </p:txEl>
                                           </p:spTgt>
                                         </p:tgtEl>
@@ -13868,7 +13987,7 @@
                                         <p:tgtEl>
                                           <p:spTgt spid="3">
                                             <p:txEl>
-                                              <p:pRg st="3" end="3"/>
+                                              <p:pRg st="4" end="4"/>
                                             </p:txEl>
                                           </p:spTgt>
                                         </p:tgtEl>
@@ -13886,7 +14005,7 @@
                                         <p:tgtEl>
                                           <p:spTgt spid="3">
                                             <p:txEl>
-                                              <p:pRg st="3" end="3"/>
+                                              <p:pRg st="4" end="4"/>
                                             </p:txEl>
                                           </p:spTgt>
                                         </p:tgtEl>
@@ -13929,7 +14048,7 @@
                                         <p:tgtEl>
                                           <p:spTgt spid="3">
                                             <p:txEl>
-                                              <p:pRg st="4" end="4"/>
+                                              <p:pRg st="5" end="5"/>
                                             </p:txEl>
                                           </p:spTgt>
                                         </p:tgtEl>
@@ -13947,7 +14066,7 @@
                                         <p:tgtEl>
                                           <p:spTgt spid="3">
                                             <p:txEl>
-                                              <p:pRg st="4" end="4"/>
+                                              <p:pRg st="5" end="5"/>
                                             </p:txEl>
                                           </p:spTgt>
                                         </p:tgtEl>
@@ -13990,7 +14109,7 @@
                                         <p:tgtEl>
                                           <p:spTgt spid="3">
                                             <p:txEl>
-                                              <p:pRg st="5" end="5"/>
+                                              <p:pRg st="6" end="6"/>
                                             </p:txEl>
                                           </p:spTgt>
                                         </p:tgtEl>
@@ -14008,7 +14127,7 @@
                                         <p:tgtEl>
                                           <p:spTgt spid="3">
                                             <p:txEl>
-                                              <p:pRg st="5" end="5"/>
+                                              <p:pRg st="6" end="6"/>
                                             </p:txEl>
                                           </p:spTgt>
                                         </p:tgtEl>
@@ -14051,7 +14170,7 @@
                                         <p:tgtEl>
                                           <p:spTgt spid="3">
                                             <p:txEl>
-                                              <p:pRg st="7" end="7"/>
+                                              <p:pRg st="8" end="8"/>
                                             </p:txEl>
                                           </p:spTgt>
                                         </p:tgtEl>
@@ -14069,7 +14188,7 @@
                                         <p:tgtEl>
                                           <p:spTgt spid="3">
                                             <p:txEl>
-                                              <p:pRg st="7" end="7"/>
+                                              <p:pRg st="8" end="8"/>
                                             </p:txEl>
                                           </p:spTgt>
                                         </p:tgtEl>
@@ -14110,6 +14229,408 @@
 </file>
 
 <file path=ppt/slides/slide18.xml><?xml version="1.0" encoding="utf-8"?>
+<p:sld xmlns:a="http://schemas.openxmlformats.org/drawingml/2006/main" xmlns:r="http://schemas.openxmlformats.org/officeDocument/2006/relationships" xmlns:p="http://schemas.openxmlformats.org/presentationml/2006/main">
+  <p:cSld>
+    <p:bg>
+      <p:bgPr>
+        <a:solidFill>
+          <a:schemeClr val="bg1"/>
+        </a:solidFill>
+        <a:effectLst/>
+      </p:bgPr>
+    </p:bg>
+    <p:spTree>
+      <p:nvGrpSpPr>
+        <p:cNvPr id="1" name="">
+          <a:extLst>
+            <a:ext uri="{FF2B5EF4-FFF2-40B4-BE49-F238E27FC236}">
+              <a16:creationId xmlns:a16="http://schemas.microsoft.com/office/drawing/2014/main" id="{157999F6-E167-AC13-9C13-B4B6B300C870}"/>
+            </a:ext>
+          </a:extLst>
+        </p:cNvPr>
+        <p:cNvGrpSpPr/>
+        <p:nvPr/>
+      </p:nvGrpSpPr>
+      <p:grpSpPr>
+        <a:xfrm>
+          <a:off x="0" y="0"/>
+          <a:ext cx="0" cy="0"/>
+          <a:chOff x="0" y="0"/>
+          <a:chExt cx="0" cy="0"/>
+        </a:xfrm>
+      </p:grpSpPr>
+      <p:sp>
+        <p:nvSpPr>
+          <p:cNvPr id="5" name="Slide Number Placeholder 4">
+            <a:extLst>
+              <a:ext uri="{FF2B5EF4-FFF2-40B4-BE49-F238E27FC236}">
+                <a16:creationId xmlns:a16="http://schemas.microsoft.com/office/drawing/2014/main" id="{7D1EAE46-18C1-3274-151E-4580ADFDDAA6}"/>
+              </a:ext>
+            </a:extLst>
+          </p:cNvPr>
+          <p:cNvSpPr>
+            <a:spLocks noGrp="1"/>
+          </p:cNvSpPr>
+          <p:nvPr>
+            <p:ph type="sldNum" sz="quarter" idx="12"/>
+          </p:nvPr>
+        </p:nvSpPr>
+        <p:spPr/>
+        <p:txBody>
+          <a:bodyPr/>
+          <a:lstStyle/>
+          <a:p>
+            <a:fld id="{846B06B1-1179-491F-A487-8E0C403F7C13}" type="slidenum">
+              <a:rPr lang="fr-CA" smtClean="0"/>
+              <a:t>18</a:t>
+            </a:fld>
+            <a:endParaRPr lang="fr-CA" dirty="0"/>
+          </a:p>
+        </p:txBody>
+      </p:sp>
+      <p:pic>
+        <p:nvPicPr>
+          <p:cNvPr id="7" name="Graphique 16">
+            <a:extLst>
+              <a:ext uri="{FF2B5EF4-FFF2-40B4-BE49-F238E27FC236}">
+                <a16:creationId xmlns:a16="http://schemas.microsoft.com/office/drawing/2014/main" id="{DFCF3A4C-CEF0-9DDE-5CA4-335E5236FA5E}"/>
+              </a:ext>
+            </a:extLst>
+          </p:cNvPr>
+          <p:cNvPicPr>
+            <a:picLocks noChangeAspect="1"/>
+          </p:cNvPicPr>
+          <p:nvPr/>
+        </p:nvPicPr>
+        <p:blipFill>
+          <a:blip>
+            <a:extLst>
+              <a:ext uri="{28A0092B-C50C-407E-A947-70E740481C1C}">
+                <a14:useLocalDpi xmlns:a14="http://schemas.microsoft.com/office/drawing/2010/main" val="0"/>
+              </a:ext>
+              <a:ext uri="{96DAC541-7B7A-43D3-8B79-37D633B846F1}">
+                <asvg:svgBlip xmlns:asvg="http://schemas.microsoft.com/office/drawing/2016/SVG/main" r:embed="rId3"/>
+              </a:ext>
+            </a:extLst>
+          </a:blip>
+          <a:stretch>
+            <a:fillRect/>
+          </a:stretch>
+        </p:blipFill>
+        <p:spPr>
+          <a:xfrm>
+            <a:off x="3036000" y="372875"/>
+            <a:ext cx="6120000" cy="6120000"/>
+          </a:xfrm>
+          <a:prstGeom prst="rect">
+            <a:avLst/>
+          </a:prstGeom>
+        </p:spPr>
+      </p:pic>
+      <p:pic>
+        <p:nvPicPr>
+          <p:cNvPr id="1026" name="Picture 2" descr="Comic Book Woman Images – Browse 393,037 Stock Photos, Vectors, and Video |  Adobe Stock">
+            <a:extLst>
+              <a:ext uri="{FF2B5EF4-FFF2-40B4-BE49-F238E27FC236}">
+                <a16:creationId xmlns:a16="http://schemas.microsoft.com/office/drawing/2014/main" id="{E197B27B-9941-45BE-B66E-D5E071D6F8F3}"/>
+              </a:ext>
+            </a:extLst>
+          </p:cNvPr>
+          <p:cNvPicPr>
+            <a:picLocks noChangeAspect="1" noChangeArrowheads="1"/>
+          </p:cNvPicPr>
+          <p:nvPr/>
+        </p:nvPicPr>
+        <p:blipFill>
+          <a:blip r:embed="rId4">
+            <a:extLst>
+              <a:ext uri="{28A0092B-C50C-407E-A947-70E740481C1C}">
+                <a14:useLocalDpi xmlns:a14="http://schemas.microsoft.com/office/drawing/2010/main" val="0"/>
+              </a:ext>
+            </a:extLst>
+          </a:blip>
+          <a:srcRect/>
+          <a:stretch>
+            <a:fillRect/>
+          </a:stretch>
+        </p:blipFill>
+        <p:spPr bwMode="auto">
+          <a:xfrm>
+            <a:off x="457403" y="5058000"/>
+            <a:ext cx="2250000" cy="1800000"/>
+          </a:xfrm>
+          <a:prstGeom prst="rect">
+            <a:avLst/>
+          </a:prstGeom>
+          <a:noFill/>
+          <a:extLst>
+            <a:ext uri="{909E8E84-426E-40DD-AFC4-6F175D3DCCD1}">
+              <a14:hiddenFill xmlns:a14="http://schemas.microsoft.com/office/drawing/2010/main">
+                <a:solidFill>
+                  <a:srgbClr val="FFFFFF"/>
+                </a:solidFill>
+              </a14:hiddenFill>
+            </a:ext>
+          </a:extLst>
+        </p:spPr>
+      </p:pic>
+      <p:grpSp>
+        <p:nvGrpSpPr>
+          <p:cNvPr id="10" name="Group 9">
+            <a:extLst>
+              <a:ext uri="{FF2B5EF4-FFF2-40B4-BE49-F238E27FC236}">
+                <a16:creationId xmlns:a16="http://schemas.microsoft.com/office/drawing/2014/main" id="{988D3726-AAF0-638A-6969-5B2A7B82B318}"/>
+              </a:ext>
+            </a:extLst>
+          </p:cNvPr>
+          <p:cNvGrpSpPr/>
+          <p:nvPr/>
+        </p:nvGrpSpPr>
+        <p:grpSpPr>
+          <a:xfrm>
+            <a:off x="8610600" y="2967335"/>
+            <a:ext cx="3147499" cy="923330"/>
+            <a:chOff x="6485106" y="3637379"/>
+            <a:chExt cx="3147499" cy="923330"/>
+          </a:xfrm>
+        </p:grpSpPr>
+        <p:sp>
+          <p:nvSpPr>
+            <p:cNvPr id="11" name="TextBox 10">
+              <a:extLst>
+                <a:ext uri="{FF2B5EF4-FFF2-40B4-BE49-F238E27FC236}">
+                  <a16:creationId xmlns:a16="http://schemas.microsoft.com/office/drawing/2014/main" id="{F9FE82D0-EEE0-A2B1-3805-6163F4EEF85C}"/>
+                </a:ext>
+              </a:extLst>
+            </p:cNvPr>
+            <p:cNvSpPr txBox="1"/>
+            <p:nvPr/>
+          </p:nvSpPr>
+          <p:spPr>
+            <a:xfrm>
+              <a:off x="7295106" y="3637379"/>
+              <a:ext cx="2337499" cy="923330"/>
+            </a:xfrm>
+            <a:prstGeom prst="rect">
+              <a:avLst/>
+            </a:prstGeom>
+            <a:noFill/>
+          </p:spPr>
+          <p:txBody>
+            <a:bodyPr wrap="none" rtlCol="0">
+              <a:spAutoFit/>
+            </a:bodyPr>
+            <a:lstStyle/>
+            <a:p>
+              <a:r>
+                <a:rPr lang="en-US" dirty="0">
+                  <a:latin typeface="Consolas" panose="020B0609020204030204" pitchFamily="49" charset="0"/>
+                </a:rPr>
+                <a:t>Le </a:t>
+              </a:r>
+              <a:r>
+                <a:rPr lang="en-US" dirty="0" err="1">
+                  <a:latin typeface="Consolas" panose="020B0609020204030204" pitchFamily="49" charset="0"/>
+                </a:rPr>
+                <a:t>graphique</a:t>
+              </a:r>
+              <a:r>
+                <a:rPr lang="en-US" dirty="0">
+                  <a:latin typeface="Consolas" panose="020B0609020204030204" pitchFamily="49" charset="0"/>
+                </a:rPr>
+                <a:t> est </a:t>
+              </a:r>
+            </a:p>
+            <a:p>
+              <a:r>
+                <a:rPr lang="en-US" dirty="0">
+                  <a:latin typeface="Consolas" panose="020B0609020204030204" pitchFamily="49" charset="0"/>
+                </a:rPr>
+                <a:t>un </a:t>
+              </a:r>
+              <a:r>
+                <a:rPr lang="en-US" dirty="0" err="1">
+                  <a:latin typeface="Consolas" panose="020B0609020204030204" pitchFamily="49" charset="0"/>
+                </a:rPr>
+                <a:t>objet</a:t>
+              </a:r>
+              <a:r>
+                <a:rPr lang="en-US" dirty="0">
+                  <a:latin typeface="Consolas" panose="020B0609020204030204" pitchFamily="49" charset="0"/>
+                </a:rPr>
+                <a:t> </a:t>
+              </a:r>
+              <a:r>
+                <a:rPr lang="en-US" dirty="0" err="1">
+                  <a:latin typeface="Consolas" panose="020B0609020204030204" pitchFamily="49" charset="0"/>
+                </a:rPr>
+                <a:t>composé</a:t>
+              </a:r>
+              <a:r>
+                <a:rPr lang="en-US" dirty="0">
+                  <a:latin typeface="Consolas" panose="020B0609020204030204" pitchFamily="49" charset="0"/>
+                </a:rPr>
+                <a:t> </a:t>
+              </a:r>
+            </a:p>
+            <a:p>
+              <a:r>
+                <a:rPr lang="en-US" dirty="0" err="1">
+                  <a:latin typeface="Consolas" panose="020B0609020204030204" pitchFamily="49" charset="0"/>
+                </a:rPr>
+                <a:t>d'objets</a:t>
+              </a:r>
+              <a:r>
+                <a:rPr lang="en-US" dirty="0">
+                  <a:latin typeface="Consolas" panose="020B0609020204030204" pitchFamily="49" charset="0"/>
+                </a:rPr>
+                <a:t> ...</a:t>
+              </a:r>
+              <a:endParaRPr lang="fr-CA" dirty="0">
+                <a:latin typeface="Consolas" panose="020B0609020204030204" pitchFamily="49" charset="0"/>
+              </a:endParaRPr>
+            </a:p>
+          </p:txBody>
+        </p:sp>
+        <p:cxnSp>
+          <p:nvCxnSpPr>
+            <p:cNvPr id="12" name="Straight Arrow Connector 11">
+              <a:extLst>
+                <a:ext uri="{FF2B5EF4-FFF2-40B4-BE49-F238E27FC236}">
+                  <a16:creationId xmlns:a16="http://schemas.microsoft.com/office/drawing/2014/main" id="{4B239757-BB95-EC61-34EC-012AF76F984F}"/>
+                </a:ext>
+              </a:extLst>
+            </p:cNvPr>
+            <p:cNvCxnSpPr>
+              <a:cxnSpLocks/>
+            </p:cNvCxnSpPr>
+            <p:nvPr/>
+          </p:nvCxnSpPr>
+          <p:spPr>
+            <a:xfrm flipH="1">
+              <a:off x="6485106" y="4099044"/>
+              <a:ext cx="810000" cy="0"/>
+            </a:xfrm>
+            <a:prstGeom prst="straightConnector1">
+              <a:avLst/>
+            </a:prstGeom>
+            <a:ln>
+              <a:tailEnd type="triangle"/>
+            </a:ln>
+          </p:spPr>
+          <p:style>
+            <a:lnRef idx="2">
+              <a:schemeClr val="dk1"/>
+            </a:lnRef>
+            <a:fillRef idx="0">
+              <a:schemeClr val="dk1"/>
+            </a:fillRef>
+            <a:effectRef idx="1">
+              <a:schemeClr val="dk1"/>
+            </a:effectRef>
+            <a:fontRef idx="minor">
+              <a:schemeClr val="tx1"/>
+            </a:fontRef>
+          </p:style>
+        </p:cxnSp>
+      </p:grpSp>
+    </p:spTree>
+    <p:extLst>
+      <p:ext uri="{BB962C8B-B14F-4D97-AF65-F5344CB8AC3E}">
+        <p14:creationId xmlns:p14="http://schemas.microsoft.com/office/powerpoint/2010/main" val="4154210216"/>
+      </p:ext>
+    </p:extLst>
+  </p:cSld>
+  <p:clrMapOvr>
+    <a:masterClrMapping/>
+  </p:clrMapOvr>
+  <p:timing>
+    <p:tnLst>
+      <p:par>
+        <p:cTn id="1" dur="indefinite" restart="never" nodeType="tmRoot">
+          <p:childTnLst>
+            <p:seq concurrent="1" nextAc="seek">
+              <p:cTn id="2" dur="indefinite" nodeType="mainSeq">
+                <p:childTnLst>
+                  <p:par>
+                    <p:cTn id="3" fill="hold">
+                      <p:stCondLst>
+                        <p:cond delay="indefinite"/>
+                      </p:stCondLst>
+                      <p:childTnLst>
+                        <p:par>
+                          <p:cTn id="4" fill="hold">
+                            <p:stCondLst>
+                              <p:cond delay="0"/>
+                            </p:stCondLst>
+                            <p:childTnLst>
+                              <p:par>
+                                <p:cTn id="5" presetID="10" presetClass="entr" presetSubtype="0" fill="hold" nodeType="clickEffect">
+                                  <p:stCondLst>
+                                    <p:cond delay="0"/>
+                                  </p:stCondLst>
+                                  <p:childTnLst>
+                                    <p:set>
+                                      <p:cBhvr>
+                                        <p:cTn id="6" dur="1" fill="hold">
+                                          <p:stCondLst>
+                                            <p:cond delay="0"/>
+                                          </p:stCondLst>
+                                        </p:cTn>
+                                        <p:tgtEl>
+                                          <p:spTgt spid="10"/>
+                                        </p:tgtEl>
+                                        <p:attrNameLst>
+                                          <p:attrName>style.visibility</p:attrName>
+                                        </p:attrNameLst>
+                                      </p:cBhvr>
+                                      <p:to>
+                                        <p:strVal val="visible"/>
+                                      </p:to>
+                                    </p:set>
+                                    <p:animEffect transition="in" filter="fade">
+                                      <p:cBhvr>
+                                        <p:cTn id="7" dur="500"/>
+                                        <p:tgtEl>
+                                          <p:spTgt spid="10"/>
+                                        </p:tgtEl>
+                                      </p:cBhvr>
+                                    </p:animEffect>
+                                  </p:childTnLst>
+                                </p:cTn>
+                              </p:par>
+                            </p:childTnLst>
+                          </p:cTn>
+                        </p:par>
+                      </p:childTnLst>
+                    </p:cTn>
+                  </p:par>
+                </p:childTnLst>
+              </p:cTn>
+              <p:prevCondLst>
+                <p:cond evt="onPrev" delay="0">
+                  <p:tgtEl>
+                    <p:sldTgt/>
+                  </p:tgtEl>
+                </p:cond>
+              </p:prevCondLst>
+              <p:nextCondLst>
+                <p:cond evt="onNext" delay="0">
+                  <p:tgtEl>
+                    <p:sldTgt/>
+                  </p:tgtEl>
+                </p:cond>
+              </p:nextCondLst>
+            </p:seq>
+          </p:childTnLst>
+        </p:cTn>
+      </p:par>
+    </p:tnLst>
+  </p:timing>
+</p:sld>
+</file>
+
+<file path=ppt/slides/slide19.xml><?xml version="1.0" encoding="utf-8"?>
 <p:sld xmlns:a="http://schemas.openxmlformats.org/drawingml/2006/main" xmlns:r="http://schemas.openxmlformats.org/officeDocument/2006/relationships" xmlns:p="http://schemas.openxmlformats.org/presentationml/2006/main">
   <p:cSld>
     <p:bg>

--- a/python_2/presentation_python_2.pptx
+++ b/python_2/presentation_python_2.pptx
@@ -5,7 +5,7 @@
     <p:sldMasterId id="2147483648" r:id="rId1"/>
   </p:sldMasterIdLst>
   <p:notesMasterIdLst>
-    <p:notesMasterId r:id="rId21"/>
+    <p:notesMasterId r:id="rId24"/>
   </p:notesMasterIdLst>
   <p:sldIdLst>
     <p:sldId id="256" r:id="rId2"/>
@@ -22,11 +22,14 @@
     <p:sldId id="306" r:id="rId13"/>
     <p:sldId id="307" r:id="rId14"/>
     <p:sldId id="308" r:id="rId15"/>
-    <p:sldId id="309" r:id="rId16"/>
+    <p:sldId id="317" r:id="rId16"/>
     <p:sldId id="311" r:id="rId17"/>
     <p:sldId id="312" r:id="rId18"/>
     <p:sldId id="313" r:id="rId19"/>
-    <p:sldId id="297" r:id="rId20"/>
+    <p:sldId id="314" r:id="rId20"/>
+    <p:sldId id="315" r:id="rId21"/>
+    <p:sldId id="309" r:id="rId22"/>
+    <p:sldId id="297" r:id="rId23"/>
   </p:sldIdLst>
   <p:sldSz cx="12192000" cy="6858000"/>
   <p:notesSz cx="6858000" cy="9144000"/>
@@ -694,6 +697,330 @@
     <p:extLst>
       <p:ext uri="{BB962C8B-B14F-4D97-AF65-F5344CB8AC3E}">
         <p14:creationId xmlns:p14="http://schemas.microsoft.com/office/powerpoint/2010/main" val="1204014661"/>
+      </p:ext>
+    </p:extLst>
+  </p:cSld>
+  <p:clrMapOvr>
+    <a:masterClrMapping/>
+  </p:clrMapOvr>
+</p:notes>
+</file>
+
+<file path=ppt/notesSlides/notesSlide11.xml><?xml version="1.0" encoding="utf-8"?>
+<p:notes xmlns:a="http://schemas.openxmlformats.org/drawingml/2006/main" xmlns:r="http://schemas.openxmlformats.org/officeDocument/2006/relationships" xmlns:p="http://schemas.openxmlformats.org/presentationml/2006/main">
+  <p:cSld>
+    <p:spTree>
+      <p:nvGrpSpPr>
+        <p:cNvPr id="1" name="">
+          <a:extLst>
+            <a:ext uri="{FF2B5EF4-FFF2-40B4-BE49-F238E27FC236}">
+              <a16:creationId xmlns:a16="http://schemas.microsoft.com/office/drawing/2014/main" id="{E56A9BC3-6A7B-0C4A-710A-B2763BE81D11}"/>
+            </a:ext>
+          </a:extLst>
+        </p:cNvPr>
+        <p:cNvGrpSpPr/>
+        <p:nvPr/>
+      </p:nvGrpSpPr>
+      <p:grpSpPr>
+        <a:xfrm>
+          <a:off x="0" y="0"/>
+          <a:ext cx="0" cy="0"/>
+          <a:chOff x="0" y="0"/>
+          <a:chExt cx="0" cy="0"/>
+        </a:xfrm>
+      </p:grpSpPr>
+      <p:sp>
+        <p:nvSpPr>
+          <p:cNvPr id="2" name="Slide Image Placeholder 1">
+            <a:extLst>
+              <a:ext uri="{FF2B5EF4-FFF2-40B4-BE49-F238E27FC236}">
+                <a16:creationId xmlns:a16="http://schemas.microsoft.com/office/drawing/2014/main" id="{AD75CD3A-A9AB-2F05-78C0-6F07C8EEDFA2}"/>
+              </a:ext>
+            </a:extLst>
+          </p:cNvPr>
+          <p:cNvSpPr>
+            <a:spLocks noGrp="1" noRot="1" noChangeAspect="1"/>
+          </p:cNvSpPr>
+          <p:nvPr>
+            <p:ph type="sldImg"/>
+          </p:nvPr>
+        </p:nvSpPr>
+        <p:spPr/>
+      </p:sp>
+      <p:sp>
+        <p:nvSpPr>
+          <p:cNvPr id="3" name="Notes Placeholder 2">
+            <a:extLst>
+              <a:ext uri="{FF2B5EF4-FFF2-40B4-BE49-F238E27FC236}">
+                <a16:creationId xmlns:a16="http://schemas.microsoft.com/office/drawing/2014/main" id="{3E9C536A-70FD-B5D0-6452-DC57CDA73149}"/>
+              </a:ext>
+            </a:extLst>
+          </p:cNvPr>
+          <p:cNvSpPr>
+            <a:spLocks noGrp="1"/>
+          </p:cNvSpPr>
+          <p:nvPr>
+            <p:ph type="body" idx="1"/>
+          </p:nvPr>
+        </p:nvSpPr>
+        <p:spPr/>
+        <p:txBody>
+          <a:bodyPr/>
+          <a:lstStyle/>
+          <a:p>
+            <a:endParaRPr lang="fr-CA" dirty="0"/>
+          </a:p>
+        </p:txBody>
+      </p:sp>
+      <p:sp>
+        <p:nvSpPr>
+          <p:cNvPr id="4" name="Slide Number Placeholder 3">
+            <a:extLst>
+              <a:ext uri="{FF2B5EF4-FFF2-40B4-BE49-F238E27FC236}">
+                <a16:creationId xmlns:a16="http://schemas.microsoft.com/office/drawing/2014/main" id="{F38425FA-5FF2-2300-7796-CB3F147C0F7B}"/>
+              </a:ext>
+            </a:extLst>
+          </p:cNvPr>
+          <p:cNvSpPr>
+            <a:spLocks noGrp="1"/>
+          </p:cNvSpPr>
+          <p:nvPr>
+            <p:ph type="sldNum" sz="quarter" idx="5"/>
+          </p:nvPr>
+        </p:nvSpPr>
+        <p:spPr/>
+        <p:txBody>
+          <a:bodyPr/>
+          <a:lstStyle/>
+          <a:p>
+            <a:fld id="{D755565A-1FEC-4FFE-8425-B731D92946D0}" type="slidenum">
+              <a:rPr lang="fr-CA" smtClean="0"/>
+              <a:t>19</a:t>
+            </a:fld>
+            <a:endParaRPr lang="fr-CA"/>
+          </a:p>
+        </p:txBody>
+      </p:sp>
+    </p:spTree>
+    <p:extLst>
+      <p:ext uri="{BB962C8B-B14F-4D97-AF65-F5344CB8AC3E}">
+        <p14:creationId xmlns:p14="http://schemas.microsoft.com/office/powerpoint/2010/main" val="4027214688"/>
+      </p:ext>
+    </p:extLst>
+  </p:cSld>
+  <p:clrMapOvr>
+    <a:masterClrMapping/>
+  </p:clrMapOvr>
+</p:notes>
+</file>
+
+<file path=ppt/notesSlides/notesSlide12.xml><?xml version="1.0" encoding="utf-8"?>
+<p:notes xmlns:a="http://schemas.openxmlformats.org/drawingml/2006/main" xmlns:r="http://schemas.openxmlformats.org/officeDocument/2006/relationships" xmlns:p="http://schemas.openxmlformats.org/presentationml/2006/main">
+  <p:cSld>
+    <p:spTree>
+      <p:nvGrpSpPr>
+        <p:cNvPr id="1" name="">
+          <a:extLst>
+            <a:ext uri="{FF2B5EF4-FFF2-40B4-BE49-F238E27FC236}">
+              <a16:creationId xmlns:a16="http://schemas.microsoft.com/office/drawing/2014/main" id="{F16C23B7-3E11-AFE0-D01E-55DFEE75A999}"/>
+            </a:ext>
+          </a:extLst>
+        </p:cNvPr>
+        <p:cNvGrpSpPr/>
+        <p:nvPr/>
+      </p:nvGrpSpPr>
+      <p:grpSpPr>
+        <a:xfrm>
+          <a:off x="0" y="0"/>
+          <a:ext cx="0" cy="0"/>
+          <a:chOff x="0" y="0"/>
+          <a:chExt cx="0" cy="0"/>
+        </a:xfrm>
+      </p:grpSpPr>
+      <p:sp>
+        <p:nvSpPr>
+          <p:cNvPr id="2" name="Slide Image Placeholder 1">
+            <a:extLst>
+              <a:ext uri="{FF2B5EF4-FFF2-40B4-BE49-F238E27FC236}">
+                <a16:creationId xmlns:a16="http://schemas.microsoft.com/office/drawing/2014/main" id="{BE081753-A90E-A99E-15D9-4D4141A829B4}"/>
+              </a:ext>
+            </a:extLst>
+          </p:cNvPr>
+          <p:cNvSpPr>
+            <a:spLocks noGrp="1" noRot="1" noChangeAspect="1"/>
+          </p:cNvSpPr>
+          <p:nvPr>
+            <p:ph type="sldImg"/>
+          </p:nvPr>
+        </p:nvSpPr>
+        <p:spPr/>
+      </p:sp>
+      <p:sp>
+        <p:nvSpPr>
+          <p:cNvPr id="3" name="Notes Placeholder 2">
+            <a:extLst>
+              <a:ext uri="{FF2B5EF4-FFF2-40B4-BE49-F238E27FC236}">
+                <a16:creationId xmlns:a16="http://schemas.microsoft.com/office/drawing/2014/main" id="{736839BE-8798-7938-1440-40ED0144FC4F}"/>
+              </a:ext>
+            </a:extLst>
+          </p:cNvPr>
+          <p:cNvSpPr>
+            <a:spLocks noGrp="1"/>
+          </p:cNvSpPr>
+          <p:nvPr>
+            <p:ph type="body" idx="1"/>
+          </p:nvPr>
+        </p:nvSpPr>
+        <p:spPr/>
+        <p:txBody>
+          <a:bodyPr/>
+          <a:lstStyle/>
+          <a:p>
+            <a:endParaRPr lang="fr-CA" dirty="0"/>
+          </a:p>
+        </p:txBody>
+      </p:sp>
+      <p:sp>
+        <p:nvSpPr>
+          <p:cNvPr id="4" name="Slide Number Placeholder 3">
+            <a:extLst>
+              <a:ext uri="{FF2B5EF4-FFF2-40B4-BE49-F238E27FC236}">
+                <a16:creationId xmlns:a16="http://schemas.microsoft.com/office/drawing/2014/main" id="{4110DF33-330B-C07A-CBEC-0961FBA1A07A}"/>
+              </a:ext>
+            </a:extLst>
+          </p:cNvPr>
+          <p:cNvSpPr>
+            <a:spLocks noGrp="1"/>
+          </p:cNvSpPr>
+          <p:nvPr>
+            <p:ph type="sldNum" sz="quarter" idx="5"/>
+          </p:nvPr>
+        </p:nvSpPr>
+        <p:spPr/>
+        <p:txBody>
+          <a:bodyPr/>
+          <a:lstStyle/>
+          <a:p>
+            <a:fld id="{D755565A-1FEC-4FFE-8425-B731D92946D0}" type="slidenum">
+              <a:rPr lang="fr-CA" smtClean="0"/>
+              <a:t>20</a:t>
+            </a:fld>
+            <a:endParaRPr lang="fr-CA"/>
+          </a:p>
+        </p:txBody>
+      </p:sp>
+    </p:spTree>
+    <p:extLst>
+      <p:ext uri="{BB962C8B-B14F-4D97-AF65-F5344CB8AC3E}">
+        <p14:creationId xmlns:p14="http://schemas.microsoft.com/office/powerpoint/2010/main" val="1001525891"/>
+      </p:ext>
+    </p:extLst>
+  </p:cSld>
+  <p:clrMapOvr>
+    <a:masterClrMapping/>
+  </p:clrMapOvr>
+</p:notes>
+</file>
+
+<file path=ppt/notesSlides/notesSlide13.xml><?xml version="1.0" encoding="utf-8"?>
+<p:notes xmlns:a="http://schemas.openxmlformats.org/drawingml/2006/main" xmlns:r="http://schemas.openxmlformats.org/officeDocument/2006/relationships" xmlns:p="http://schemas.openxmlformats.org/presentationml/2006/main">
+  <p:cSld>
+    <p:spTree>
+      <p:nvGrpSpPr>
+        <p:cNvPr id="1" name="">
+          <a:extLst>
+            <a:ext uri="{FF2B5EF4-FFF2-40B4-BE49-F238E27FC236}">
+              <a16:creationId xmlns:a16="http://schemas.microsoft.com/office/drawing/2014/main" id="{E743B822-925C-566B-0957-2C896F3D4F51}"/>
+            </a:ext>
+          </a:extLst>
+        </p:cNvPr>
+        <p:cNvGrpSpPr/>
+        <p:nvPr/>
+      </p:nvGrpSpPr>
+      <p:grpSpPr>
+        <a:xfrm>
+          <a:off x="0" y="0"/>
+          <a:ext cx="0" cy="0"/>
+          <a:chOff x="0" y="0"/>
+          <a:chExt cx="0" cy="0"/>
+        </a:xfrm>
+      </p:grpSpPr>
+      <p:sp>
+        <p:nvSpPr>
+          <p:cNvPr id="2" name="Slide Image Placeholder 1">
+            <a:extLst>
+              <a:ext uri="{FF2B5EF4-FFF2-40B4-BE49-F238E27FC236}">
+                <a16:creationId xmlns:a16="http://schemas.microsoft.com/office/drawing/2014/main" id="{43C3F3D0-483A-9F6F-63B3-5E0BECDE09AA}"/>
+              </a:ext>
+            </a:extLst>
+          </p:cNvPr>
+          <p:cNvSpPr>
+            <a:spLocks noGrp="1" noRot="1" noChangeAspect="1"/>
+          </p:cNvSpPr>
+          <p:nvPr>
+            <p:ph type="sldImg"/>
+          </p:nvPr>
+        </p:nvSpPr>
+        <p:spPr/>
+      </p:sp>
+      <p:sp>
+        <p:nvSpPr>
+          <p:cNvPr id="3" name="Notes Placeholder 2">
+            <a:extLst>
+              <a:ext uri="{FF2B5EF4-FFF2-40B4-BE49-F238E27FC236}">
+                <a16:creationId xmlns:a16="http://schemas.microsoft.com/office/drawing/2014/main" id="{B6519F0A-F632-39D8-6EAE-7A38DB481D0F}"/>
+              </a:ext>
+            </a:extLst>
+          </p:cNvPr>
+          <p:cNvSpPr>
+            <a:spLocks noGrp="1"/>
+          </p:cNvSpPr>
+          <p:nvPr>
+            <p:ph type="body" idx="1"/>
+          </p:nvPr>
+        </p:nvSpPr>
+        <p:spPr/>
+        <p:txBody>
+          <a:bodyPr/>
+          <a:lstStyle/>
+          <a:p>
+            <a:endParaRPr lang="fr-CA" dirty="0"/>
+          </a:p>
+        </p:txBody>
+      </p:sp>
+      <p:sp>
+        <p:nvSpPr>
+          <p:cNvPr id="4" name="Slide Number Placeholder 3">
+            <a:extLst>
+              <a:ext uri="{FF2B5EF4-FFF2-40B4-BE49-F238E27FC236}">
+                <a16:creationId xmlns:a16="http://schemas.microsoft.com/office/drawing/2014/main" id="{C4AF9893-46BB-9232-3E05-47C984B70904}"/>
+              </a:ext>
+            </a:extLst>
+          </p:cNvPr>
+          <p:cNvSpPr>
+            <a:spLocks noGrp="1"/>
+          </p:cNvSpPr>
+          <p:nvPr>
+            <p:ph type="sldNum" sz="quarter" idx="5"/>
+          </p:nvPr>
+        </p:nvSpPr>
+        <p:spPr/>
+        <p:txBody>
+          <a:bodyPr/>
+          <a:lstStyle/>
+          <a:p>
+            <a:fld id="{D755565A-1FEC-4FFE-8425-B731D92946D0}" type="slidenum">
+              <a:rPr lang="fr-CA" smtClean="0"/>
+              <a:t>21</a:t>
+            </a:fld>
+            <a:endParaRPr lang="fr-CA"/>
+          </a:p>
+        </p:txBody>
+      </p:sp>
+    </p:spTree>
+    <p:extLst>
+      <p:ext uri="{BB962C8B-B14F-4D97-AF65-F5344CB8AC3E}">
+        <p14:creationId xmlns:p14="http://schemas.microsoft.com/office/powerpoint/2010/main" val="567433994"/>
       </p:ext>
     </p:extLst>
   </p:cSld>
@@ -10194,37 +10521,61 @@
           <a:p>
             <a:pPr algn="l"/>
             <a:r>
+              <a:rPr lang="en-US" sz="1800" b="0" dirty="0"/>
+              <a:t>  </a:t>
+            </a:r>
+            <a:r>
               <a:rPr lang="en-US" sz="1800" dirty="0"/>
-              <a:t>  with open(</a:t>
-            </a:r>
-            <a:r>
-              <a:rPr lang="en-US" sz="1800" dirty="0" err="1"/>
+              <a:t>with</a:t>
+            </a:r>
+            <a:r>
+              <a:rPr lang="en-US" sz="1800" b="0" dirty="0"/>
+              <a:t> </a:t>
+            </a:r>
+            <a:r>
+              <a:rPr lang="en-US" sz="1800" dirty="0"/>
+              <a:t>open</a:t>
+            </a:r>
+            <a:r>
+              <a:rPr lang="en-US" sz="1800" b="0" dirty="0"/>
+              <a:t>(</a:t>
+            </a:r>
+            <a:r>
+              <a:rPr lang="en-US" sz="1800" b="0" dirty="0" err="1"/>
               <a:t>nom_fichier</a:t>
             </a:r>
             <a:r>
-              <a:rPr lang="en-US" sz="1800" dirty="0"/>
+              <a:rPr lang="en-US" sz="1800" b="0" dirty="0"/>
               <a:t> </a:t>
             </a:r>
             <a:r>
+              <a:rPr lang="en-CA" sz="1800" b="0" dirty="0"/>
+              <a:t>[, mode='r']) </a:t>
+            </a:r>
+            <a:r>
               <a:rPr lang="en-CA" sz="1800" dirty="0"/>
-              <a:t>[, mode='r']) as </a:t>
-            </a:r>
-            <a:r>
-              <a:rPr lang="en-CA" sz="1800" dirty="0" err="1"/>
+              <a:t>as</a:t>
+            </a:r>
+            <a:r>
+              <a:rPr lang="en-CA" sz="1800" b="0" dirty="0"/>
+              <a:t> </a:t>
+            </a:r>
+            <a:r>
+              <a:rPr lang="en-CA" sz="1800" b="0" dirty="0" err="1"/>
               <a:t>fichier</a:t>
             </a:r>
             <a:r>
-              <a:rPr lang="en-CA" sz="1800" dirty="0"/>
+              <a:rPr lang="en-CA" sz="1800" b="0" dirty="0"/>
               <a:t>:</a:t>
             </a:r>
           </a:p>
           <a:p>
             <a:pPr algn="l"/>
             <a:r>
-              <a:rPr lang="en-CA" sz="1800" dirty="0"/>
+              <a:rPr lang="en-CA" sz="1800" b="0" dirty="0"/>
               <a:t>    ...</a:t>
             </a:r>
-            <a:endParaRPr lang="en-US" sz="1800" dirty="0"/>
+            <a:endParaRPr lang="en-US" sz="1800" b="0" dirty="0"/>
           </a:p>
         </p:txBody>
       </p:sp>
@@ -11845,7 +12196,9 @@
     <p:bg>
       <p:bgPr>
         <a:solidFill>
-          <a:srgbClr val="F5F5F5"/>
+          <a:schemeClr val="bg1">
+            <a:lumMod val="95000"/>
+          </a:schemeClr>
         </a:solidFill>
         <a:effectLst/>
       </p:bgPr>
@@ -13064,7 +13417,7 @@
     </p:spTree>
     <p:extLst>
       <p:ext uri="{BB962C8B-B14F-4D97-AF65-F5344CB8AC3E}">
-        <p14:creationId xmlns:p14="http://schemas.microsoft.com/office/powerpoint/2010/main" val="4472728"/>
+        <p14:creationId xmlns:p14="http://schemas.microsoft.com/office/powerpoint/2010/main" val="428461038"/>
       </p:ext>
     </p:extLst>
   </p:cSld>
@@ -14389,9 +14742,9 @@
         <p:grpSpPr>
           <a:xfrm>
             <a:off x="8610600" y="2967335"/>
-            <a:ext cx="3147499" cy="923330"/>
+            <a:ext cx="2882899" cy="923330"/>
             <a:chOff x="6485106" y="3637379"/>
-            <a:chExt cx="3147499" cy="923330"/>
+            <a:chExt cx="2882899" cy="923330"/>
           </a:xfrm>
         </p:grpSpPr>
         <p:sp>
@@ -14408,7 +14761,7 @@
           </p:nvSpPr>
           <p:spPr>
             <a:xfrm>
-              <a:off x="7295106" y="3637379"/>
+              <a:off x="7030506" y="3637379"/>
               <a:ext cx="2337499" cy="923330"/>
             </a:xfrm>
             <a:prstGeom prst="rect">
@@ -14426,7 +14779,7 @@
                 <a:rPr lang="en-US" dirty="0">
                   <a:latin typeface="Consolas" panose="020B0609020204030204" pitchFamily="49" charset="0"/>
                 </a:rPr>
-                <a:t>Le </a:t>
+                <a:t>Un </a:t>
               </a:r>
               <a:r>
                 <a:rPr lang="en-US" dirty="0" err="1">
@@ -14509,7 +14862,7 @@
           <p:spPr>
             <a:xfrm flipH="1">
               <a:off x="6485106" y="4099044"/>
-              <a:ext cx="810000" cy="0"/>
+              <a:ext cx="545400" cy="0"/>
             </a:xfrm>
             <a:prstGeom prst="straightConnector1">
               <a:avLst/>
@@ -14636,7 +14989,7 @@
     <p:bg>
       <p:bgPr>
         <a:solidFill>
-          <a:srgbClr val="FFFF00"/>
+          <a:srgbClr val="F5F5F5"/>
         </a:solidFill>
         <a:effectLst/>
       </p:bgPr>
@@ -14646,7 +14999,7 @@
         <p:cNvPr id="1" name="">
           <a:extLst>
             <a:ext uri="{FF2B5EF4-FFF2-40B4-BE49-F238E27FC236}">
-              <a16:creationId xmlns:a16="http://schemas.microsoft.com/office/drawing/2014/main" id="{A79EE80B-5617-3AC9-1D3D-FF9406939B6B}"/>
+              <a16:creationId xmlns:a16="http://schemas.microsoft.com/office/drawing/2014/main" id="{E1818D54-B850-2B08-EF83-0642E57872E5}"/>
             </a:ext>
           </a:extLst>
         </p:cNvPr>
@@ -14663,106 +15016,873 @@
       </p:grpSpPr>
       <p:sp>
         <p:nvSpPr>
-          <p:cNvPr id="15" name="Rectangle 14">
+          <p:cNvPr id="2" name="Title 1">
             <a:extLst>
               <a:ext uri="{FF2B5EF4-FFF2-40B4-BE49-F238E27FC236}">
-                <a16:creationId xmlns:a16="http://schemas.microsoft.com/office/drawing/2014/main" id="{AED2F8D1-AEB0-E659-5BE9-F91783BAB484}"/>
+                <a16:creationId xmlns:a16="http://schemas.microsoft.com/office/drawing/2014/main" id="{5B9237F8-B3FD-2D73-B1F8-B777BF3CB58C}"/>
               </a:ext>
             </a:extLst>
           </p:cNvPr>
-          <p:cNvSpPr/>
+          <p:cNvSpPr>
+            <a:spLocks noGrp="1"/>
+          </p:cNvSpPr>
+          <p:nvPr>
+            <p:ph type="title"/>
+          </p:nvPr>
+        </p:nvSpPr>
+        <p:spPr/>
+        <p:txBody>
+          <a:bodyPr/>
+          <a:lstStyle/>
+          <a:p>
+            <a:r>
+              <a:rPr lang="fr-CA" dirty="0">
+                <a:latin typeface="Arial Rounded MT Bold" panose="020F0704030504030204" pitchFamily="34" charset="0"/>
+              </a:rPr>
+              <a:t>Graphique point-ligne</a:t>
+            </a:r>
+          </a:p>
+        </p:txBody>
+      </p:sp>
+      <p:sp>
+        <p:nvSpPr>
+          <p:cNvPr id="3" name="Content Placeholder 2">
+            <a:extLst>
+              <a:ext uri="{FF2B5EF4-FFF2-40B4-BE49-F238E27FC236}">
+                <a16:creationId xmlns:a16="http://schemas.microsoft.com/office/drawing/2014/main" id="{8443651F-5C09-E884-282C-2593EC19E811}"/>
+              </a:ext>
+            </a:extLst>
+          </p:cNvPr>
+          <p:cNvSpPr>
+            <a:spLocks noGrp="1"/>
+          </p:cNvSpPr>
+          <p:nvPr>
+            <p:ph idx="1"/>
+          </p:nvPr>
+        </p:nvSpPr>
+        <p:spPr>
+          <a:xfrm>
+            <a:off x="838200" y="1818566"/>
+            <a:ext cx="10515600" cy="4351338"/>
+          </a:xfrm>
+        </p:spPr>
+        <p:txBody>
+          <a:bodyPr>
+            <a:normAutofit/>
+          </a:bodyPr>
+          <a:lstStyle/>
+          <a:p>
+            <a:pPr algn="just">
+              <a:lnSpc>
+                <a:spcPct val="110000"/>
+              </a:lnSpc>
+            </a:pPr>
+            <a:r>
+              <a:rPr lang="fr-CA" sz="1600" dirty="0">
+                <a:latin typeface="Consolas" panose="020B0609020204030204" pitchFamily="49" charset="0"/>
+              </a:rPr>
+              <a:t>Importer l'interface </a:t>
+            </a:r>
+            <a:r>
+              <a:rPr lang="fr-CA" sz="1600" b="1" dirty="0" err="1">
+                <a:latin typeface="Consolas" panose="020B0609020204030204" pitchFamily="49" charset="0"/>
+              </a:rPr>
+              <a:t>pyplot</a:t>
+            </a:r>
+            <a:r>
+              <a:rPr lang="fr-CA" sz="1600" dirty="0">
+                <a:latin typeface="Consolas" panose="020B0609020204030204" pitchFamily="49" charset="0"/>
+              </a:rPr>
+              <a:t> de </a:t>
+            </a:r>
+            <a:r>
+              <a:rPr lang="fr-CA" sz="1600" b="1" dirty="0" err="1">
+                <a:latin typeface="Consolas" panose="020B0609020204030204" pitchFamily="49" charset="0"/>
+              </a:rPr>
+              <a:t>matploblib</a:t>
+            </a:r>
+            <a:r>
+              <a:rPr lang="fr-CA" sz="1600" b="1" dirty="0">
+                <a:latin typeface="Consolas" panose="020B0609020204030204" pitchFamily="49" charset="0"/>
+              </a:rPr>
+              <a:t> </a:t>
+            </a:r>
+            <a:r>
+              <a:rPr lang="fr-CA" sz="1600" dirty="0">
+                <a:latin typeface="Consolas" panose="020B0609020204030204" pitchFamily="49" charset="0"/>
+              </a:rPr>
+              <a:t>(inspirée de MATLAB)</a:t>
+            </a:r>
+          </a:p>
+          <a:p>
+            <a:pPr algn="just">
+              <a:lnSpc>
+                <a:spcPct val="110000"/>
+              </a:lnSpc>
+            </a:pPr>
+            <a:endParaRPr lang="fr-CA" sz="1600" b="1" dirty="0">
+              <a:latin typeface="Consolas" panose="020B0609020204030204" pitchFamily="49" charset="0"/>
+            </a:endParaRPr>
+          </a:p>
+          <a:p>
+            <a:pPr algn="just">
+              <a:lnSpc>
+                <a:spcPct val="110000"/>
+              </a:lnSpc>
+            </a:pPr>
+            <a:endParaRPr lang="fr-CA" sz="1600" b="1" dirty="0">
+              <a:latin typeface="Consolas" panose="020B0609020204030204" pitchFamily="49" charset="0"/>
+            </a:endParaRPr>
+          </a:p>
+          <a:p>
+            <a:pPr algn="just">
+              <a:lnSpc>
+                <a:spcPct val="110000"/>
+              </a:lnSpc>
+            </a:pPr>
+            <a:r>
+              <a:rPr lang="fr-CA" sz="1600" dirty="0">
+                <a:latin typeface="Consolas" panose="020B0609020204030204" pitchFamily="49" charset="0"/>
+              </a:rPr>
+              <a:t>Tracer un graphique</a:t>
+            </a:r>
+          </a:p>
+          <a:p>
+            <a:pPr algn="just">
+              <a:lnSpc>
+                <a:spcPct val="110000"/>
+              </a:lnSpc>
+            </a:pPr>
+            <a:endParaRPr lang="fr-CA" sz="1600" b="1" dirty="0">
+              <a:latin typeface="Consolas" panose="020B0609020204030204" pitchFamily="49" charset="0"/>
+            </a:endParaRPr>
+          </a:p>
+          <a:p>
+            <a:pPr algn="just">
+              <a:lnSpc>
+                <a:spcPct val="110000"/>
+              </a:lnSpc>
+            </a:pPr>
+            <a:endParaRPr lang="fr-CA" sz="1600" b="1" dirty="0">
+              <a:latin typeface="Consolas" panose="020B0609020204030204" pitchFamily="49" charset="0"/>
+            </a:endParaRPr>
+          </a:p>
+          <a:p>
+            <a:pPr algn="just">
+              <a:lnSpc>
+                <a:spcPct val="110000"/>
+              </a:lnSpc>
+            </a:pPr>
+            <a:r>
+              <a:rPr lang="fr-CA" sz="1600" dirty="0">
+                <a:latin typeface="Consolas" panose="020B0609020204030204" pitchFamily="49" charset="0"/>
+              </a:rPr>
+              <a:t>Afficher le graphique en mode non-interactif</a:t>
+            </a:r>
+          </a:p>
+        </p:txBody>
+      </p:sp>
+      <p:sp>
+        <p:nvSpPr>
+          <p:cNvPr id="5" name="Slide Number Placeholder 4">
+            <a:extLst>
+              <a:ext uri="{FF2B5EF4-FFF2-40B4-BE49-F238E27FC236}">
+                <a16:creationId xmlns:a16="http://schemas.microsoft.com/office/drawing/2014/main" id="{41F3DE03-26F2-0534-91A6-9EA304DF0B80}"/>
+              </a:ext>
+            </a:extLst>
+          </p:cNvPr>
+          <p:cNvSpPr>
+            <a:spLocks noGrp="1"/>
+          </p:cNvSpPr>
+          <p:nvPr>
+            <p:ph type="sldNum" sz="quarter" idx="12"/>
+          </p:nvPr>
+        </p:nvSpPr>
+        <p:spPr/>
+        <p:txBody>
+          <a:bodyPr/>
+          <a:lstStyle/>
+          <a:p>
+            <a:fld id="{846B06B1-1179-491F-A487-8E0C403F7C13}" type="slidenum">
+              <a:rPr lang="fr-CA" smtClean="0"/>
+              <a:t>19</a:t>
+            </a:fld>
+            <a:endParaRPr lang="fr-CA" dirty="0"/>
+          </a:p>
+        </p:txBody>
+      </p:sp>
+      <p:sp>
+        <p:nvSpPr>
+          <p:cNvPr id="7" name="TextBox 6">
+            <a:extLst>
+              <a:ext uri="{FF2B5EF4-FFF2-40B4-BE49-F238E27FC236}">
+                <a16:creationId xmlns:a16="http://schemas.microsoft.com/office/drawing/2014/main" id="{9B3825A8-77E9-B87E-CCE8-4906B1D5318E}"/>
+              </a:ext>
+            </a:extLst>
+          </p:cNvPr>
+          <p:cNvSpPr txBox="1"/>
           <p:nvPr/>
         </p:nvSpPr>
         <p:spPr>
           <a:xfrm>
-            <a:off x="5732834" y="3357820"/>
-            <a:ext cx="726332" cy="142360"/>
+            <a:off x="2230874" y="3587358"/>
+            <a:ext cx="7730249" cy="408578"/>
           </a:xfrm>
-          <a:prstGeom prst="rect">
+          <a:prstGeom prst="roundRect">
             <a:avLst/>
           </a:prstGeom>
+          <a:solidFill>
+            <a:srgbClr val="FFF2CC">
+              <a:alpha val="49803"/>
+            </a:srgbClr>
+          </a:solidFill>
+          <a:ln w="9525" cap="flat" cmpd="sng">
+            <a:solidFill>
+              <a:schemeClr val="dk1"/>
+            </a:solidFill>
+            <a:prstDash val="solid"/>
+            <a:round/>
+            <a:headEnd type="none" w="sm" len="sm"/>
+            <a:tailEnd type="none" w="sm" len="sm"/>
+          </a:ln>
         </p:spPr>
-        <p:style>
-          <a:lnRef idx="2">
-            <a:schemeClr val="accent1">
-              <a:shade val="15000"/>
-            </a:schemeClr>
-          </a:lnRef>
-          <a:fillRef idx="1">
-            <a:schemeClr val="accent1"/>
-          </a:fillRef>
-          <a:effectRef idx="0">
-            <a:schemeClr val="accent1"/>
-          </a:effectRef>
-          <a:fontRef idx="minor">
-            <a:schemeClr val="lt1"/>
-          </a:fontRef>
-        </p:style>
         <p:txBody>
-          <a:bodyPr rtlCol="0" anchor="ctr"/>
-          <a:lstStyle/>
-          <a:p>
-            <a:pPr algn="ctr"/>
-            <a:endParaRPr lang="fr-CA"/>
+          <a:bodyPr spcFirstLastPara="1" wrap="square" lIns="91425" tIns="45700" rIns="91425" bIns="45700" anchor="t" anchorCtr="0">
+            <a:spAutoFit/>
+          </a:bodyPr>
+          <a:lstStyle>
+            <a:defPPr>
+              <a:defRPr lang="en-US"/>
+            </a:defPPr>
+            <a:lvl1pPr marR="0" lvl="0" indent="0" algn="ctr">
+              <a:lnSpc>
+                <a:spcPct val="100000"/>
+              </a:lnSpc>
+              <a:spcBef>
+                <a:spcPts val="0"/>
+              </a:spcBef>
+              <a:spcAft>
+                <a:spcPts val="0"/>
+              </a:spcAft>
+              <a:buClr>
+                <a:srgbClr val="000000"/>
+              </a:buClr>
+              <a:buSzPts val="1400"/>
+              <a:buFont typeface="Consolas"/>
+              <a:buNone/>
+              <a:defRPr sz="2800" b="1" i="0" u="none" strike="noStrike" cap="none">
+                <a:solidFill>
+                  <a:srgbClr val="000000"/>
+                </a:solidFill>
+                <a:latin typeface="Consolas"/>
+                <a:ea typeface="Consolas"/>
+                <a:cs typeface="Consolas"/>
+              </a:defRPr>
+            </a:lvl1pPr>
+          </a:lstStyle>
+          <a:p>
+            <a:pPr lvl="0">
+              <a:buClrTx/>
+              <a:buSzTx/>
+              <a:defRPr/>
+            </a:pPr>
+            <a:r>
+              <a:rPr lang="fr-CA" sz="1800" b="0" dirty="0">
+                <a:latin typeface="Consolas" panose="020B0609020204030204" pitchFamily="49" charset="0"/>
+              </a:rPr>
+              <a:t>[figure =] </a:t>
+            </a:r>
+            <a:r>
+              <a:rPr lang="fr-CA" sz="1800" dirty="0" err="1">
+                <a:latin typeface="Consolas" panose="020B0609020204030204" pitchFamily="49" charset="0"/>
+              </a:rPr>
+              <a:t>plt.plot</a:t>
+            </a:r>
+            <a:r>
+              <a:rPr lang="fr-CA" sz="1800" b="0" dirty="0">
+                <a:latin typeface="Consolas" panose="020B0609020204030204" pitchFamily="49" charset="0"/>
+              </a:rPr>
+              <a:t>(</a:t>
+            </a:r>
+            <a:r>
+              <a:rPr lang="fr-CA" sz="1800" b="0" i="1" dirty="0">
+                <a:latin typeface="Consolas" panose="020B0609020204030204" pitchFamily="49" charset="0"/>
+              </a:rPr>
+              <a:t>x</a:t>
+            </a:r>
+            <a:r>
+              <a:rPr lang="fr-CA" sz="1800" b="0" dirty="0">
+                <a:latin typeface="Consolas" panose="020B0609020204030204" pitchFamily="49" charset="0"/>
+              </a:rPr>
+              <a:t>, </a:t>
+            </a:r>
+            <a:r>
+              <a:rPr lang="fr-CA" sz="1800" b="0" i="1" dirty="0">
+                <a:latin typeface="Consolas" panose="020B0609020204030204" pitchFamily="49" charset="0"/>
+              </a:rPr>
+              <a:t>y</a:t>
+            </a:r>
+            <a:r>
+              <a:rPr lang="fr-CA" sz="1800" b="0" dirty="0">
+                <a:latin typeface="Consolas" panose="020B0609020204030204" pitchFamily="49" charset="0"/>
+              </a:rPr>
+              <a:t>, [</a:t>
+            </a:r>
+            <a:r>
+              <a:rPr lang="fr-CA" sz="1800" b="0" i="1" dirty="0">
+                <a:latin typeface="Consolas" panose="020B0609020204030204" pitchFamily="49" charset="0"/>
+              </a:rPr>
+              <a:t>format</a:t>
+            </a:r>
+            <a:r>
+              <a:rPr lang="fr-CA" sz="1800" b="0" dirty="0">
+                <a:latin typeface="Consolas" panose="020B0609020204030204" pitchFamily="49" charset="0"/>
+              </a:rPr>
+              <a:t>])</a:t>
+            </a:r>
           </a:p>
         </p:txBody>
       </p:sp>
       <p:sp>
         <p:nvSpPr>
-          <p:cNvPr id="2" name="Rectangle 1">
+          <p:cNvPr id="8" name="TextBox 7">
             <a:extLst>
               <a:ext uri="{FF2B5EF4-FFF2-40B4-BE49-F238E27FC236}">
-                <a16:creationId xmlns:a16="http://schemas.microsoft.com/office/drawing/2014/main" id="{DF179609-0D20-7919-F3E7-E44EC67D7DAF}"/>
+                <a16:creationId xmlns:a16="http://schemas.microsoft.com/office/drawing/2014/main" id="{5EF8B224-0CEC-D3FB-624E-C39CFC428A6F}"/>
               </a:ext>
             </a:extLst>
           </p:cNvPr>
-          <p:cNvSpPr/>
+          <p:cNvSpPr txBox="1"/>
           <p:nvPr/>
         </p:nvSpPr>
         <p:spPr>
           <a:xfrm>
-            <a:off x="5732834" y="3665863"/>
-            <a:ext cx="726332" cy="360000"/>
+            <a:off x="2230875" y="2427023"/>
+            <a:ext cx="7730249" cy="408578"/>
           </a:xfrm>
-          <a:prstGeom prst="rect">
+          <a:prstGeom prst="roundRect">
             <a:avLst/>
           </a:prstGeom>
+          <a:solidFill>
+            <a:srgbClr val="FFF2CC">
+              <a:alpha val="49803"/>
+            </a:srgbClr>
+          </a:solidFill>
+          <a:ln w="9525" cap="flat" cmpd="sng">
+            <a:solidFill>
+              <a:schemeClr val="dk1"/>
+            </a:solidFill>
+            <a:prstDash val="solid"/>
+            <a:round/>
+            <a:headEnd type="none" w="sm" len="sm"/>
+            <a:tailEnd type="none" w="sm" len="sm"/>
+          </a:ln>
         </p:spPr>
-        <p:style>
-          <a:lnRef idx="2">
-            <a:schemeClr val="accent1">
-              <a:shade val="15000"/>
-            </a:schemeClr>
-          </a:lnRef>
-          <a:fillRef idx="1">
-            <a:schemeClr val="accent1"/>
-          </a:fillRef>
-          <a:effectRef idx="0">
-            <a:schemeClr val="accent1"/>
-          </a:effectRef>
-          <a:fontRef idx="minor">
-            <a:schemeClr val="lt1"/>
-          </a:fontRef>
-        </p:style>
         <p:txBody>
-          <a:bodyPr rtlCol="0" anchor="ctr"/>
-          <a:lstStyle/>
-          <a:p>
-            <a:pPr algn="ctr"/>
-            <a:endParaRPr lang="fr-CA"/>
+          <a:bodyPr spcFirstLastPara="1" wrap="square" lIns="91425" tIns="45700" rIns="91425" bIns="45700" anchor="t" anchorCtr="0">
+            <a:spAutoFit/>
+          </a:bodyPr>
+          <a:lstStyle>
+            <a:defPPr>
+              <a:defRPr lang="en-US"/>
+            </a:defPPr>
+            <a:lvl1pPr marR="0" lvl="0" indent="0" algn="ctr">
+              <a:lnSpc>
+                <a:spcPct val="100000"/>
+              </a:lnSpc>
+              <a:spcBef>
+                <a:spcPts val="0"/>
+              </a:spcBef>
+              <a:spcAft>
+                <a:spcPts val="0"/>
+              </a:spcAft>
+              <a:buClr>
+                <a:srgbClr val="000000"/>
+              </a:buClr>
+              <a:buSzPts val="1400"/>
+              <a:buFont typeface="Consolas"/>
+              <a:buNone/>
+              <a:defRPr sz="2800" b="1" i="0" u="none" strike="noStrike" cap="none">
+                <a:solidFill>
+                  <a:srgbClr val="000000"/>
+                </a:solidFill>
+                <a:latin typeface="Consolas"/>
+                <a:ea typeface="Consolas"/>
+                <a:cs typeface="Consolas"/>
+              </a:defRPr>
+            </a:lvl1pPr>
+          </a:lstStyle>
+          <a:p>
+            <a:pPr lvl="0">
+              <a:buClrTx/>
+              <a:buSzTx/>
+              <a:defRPr/>
+            </a:pPr>
+            <a:r>
+              <a:rPr lang="fr-CA" sz="1800" dirty="0">
+                <a:latin typeface="Consolas" panose="020B0609020204030204" pitchFamily="49" charset="0"/>
+              </a:rPr>
+              <a:t>import </a:t>
+            </a:r>
+            <a:r>
+              <a:rPr lang="fr-CA" sz="1800" dirty="0" err="1">
+                <a:latin typeface="Consolas" panose="020B0609020204030204" pitchFamily="49" charset="0"/>
+              </a:rPr>
+              <a:t>matploblib.pyplot</a:t>
+            </a:r>
+            <a:r>
+              <a:rPr lang="fr-CA" sz="1800" dirty="0">
+                <a:latin typeface="Consolas" panose="020B0609020204030204" pitchFamily="49" charset="0"/>
+              </a:rPr>
+              <a:t> as </a:t>
+            </a:r>
+            <a:r>
+              <a:rPr lang="fr-CA" sz="1800" dirty="0" err="1">
+                <a:latin typeface="Consolas" panose="020B0609020204030204" pitchFamily="49" charset="0"/>
+              </a:rPr>
+              <a:t>plt</a:t>
+            </a:r>
+            <a:endParaRPr lang="fr-CA" sz="1800" b="0" dirty="0">
+              <a:latin typeface="Consolas" panose="020B0609020204030204" pitchFamily="49" charset="0"/>
+            </a:endParaRPr>
+          </a:p>
+        </p:txBody>
+      </p:sp>
+      <p:sp>
+        <p:nvSpPr>
+          <p:cNvPr id="9" name="TextBox 8">
+            <a:extLst>
+              <a:ext uri="{FF2B5EF4-FFF2-40B4-BE49-F238E27FC236}">
+                <a16:creationId xmlns:a16="http://schemas.microsoft.com/office/drawing/2014/main" id="{017A8126-F090-5C31-651B-61F48E46B957}"/>
+              </a:ext>
+            </a:extLst>
+          </p:cNvPr>
+          <p:cNvSpPr txBox="1"/>
+          <p:nvPr/>
+        </p:nvSpPr>
+        <p:spPr>
+          <a:xfrm>
+            <a:off x="2230873" y="4747693"/>
+            <a:ext cx="7730249" cy="408578"/>
+          </a:xfrm>
+          <a:prstGeom prst="roundRect">
+            <a:avLst/>
+          </a:prstGeom>
+          <a:solidFill>
+            <a:srgbClr val="FFF2CC">
+              <a:alpha val="49803"/>
+            </a:srgbClr>
+          </a:solidFill>
+          <a:ln w="9525" cap="flat" cmpd="sng">
+            <a:solidFill>
+              <a:schemeClr val="dk1"/>
+            </a:solidFill>
+            <a:prstDash val="solid"/>
+            <a:round/>
+            <a:headEnd type="none" w="sm" len="sm"/>
+            <a:tailEnd type="none" w="sm" len="sm"/>
+          </a:ln>
+        </p:spPr>
+        <p:txBody>
+          <a:bodyPr spcFirstLastPara="1" wrap="square" lIns="91425" tIns="45700" rIns="91425" bIns="45700" anchor="t" anchorCtr="0">
+            <a:spAutoFit/>
+          </a:bodyPr>
+          <a:lstStyle>
+            <a:defPPr>
+              <a:defRPr lang="en-US"/>
+            </a:defPPr>
+            <a:lvl1pPr marR="0" lvl="0" indent="0" algn="ctr">
+              <a:lnSpc>
+                <a:spcPct val="100000"/>
+              </a:lnSpc>
+              <a:spcBef>
+                <a:spcPts val="0"/>
+              </a:spcBef>
+              <a:spcAft>
+                <a:spcPts val="0"/>
+              </a:spcAft>
+              <a:buClr>
+                <a:srgbClr val="000000"/>
+              </a:buClr>
+              <a:buSzPts val="1400"/>
+              <a:buFont typeface="Consolas"/>
+              <a:buNone/>
+              <a:defRPr sz="2800" b="1" i="0" u="none" strike="noStrike" cap="none">
+                <a:solidFill>
+                  <a:srgbClr val="000000"/>
+                </a:solidFill>
+                <a:latin typeface="Consolas"/>
+                <a:ea typeface="Consolas"/>
+                <a:cs typeface="Consolas"/>
+              </a:defRPr>
+            </a:lvl1pPr>
+          </a:lstStyle>
+          <a:p>
+            <a:pPr lvl="0">
+              <a:buClrTx/>
+              <a:buSzTx/>
+              <a:defRPr/>
+            </a:pPr>
+            <a:r>
+              <a:rPr lang="fr-CA" sz="1800" dirty="0" err="1">
+                <a:latin typeface="Consolas" panose="020B0609020204030204" pitchFamily="49" charset="0"/>
+              </a:rPr>
+              <a:t>plt.show</a:t>
+            </a:r>
+            <a:r>
+              <a:rPr lang="fr-CA" sz="1800" b="0" dirty="0">
+                <a:latin typeface="Consolas" panose="020B0609020204030204" pitchFamily="49" charset="0"/>
+              </a:rPr>
+              <a:t>([</a:t>
+            </a:r>
+            <a:r>
+              <a:rPr lang="fr-CA" sz="1800" b="0" i="1" dirty="0">
+                <a:latin typeface="Consolas" panose="020B0609020204030204" pitchFamily="49" charset="0"/>
+              </a:rPr>
+              <a:t>figure</a:t>
+            </a:r>
+            <a:r>
+              <a:rPr lang="fr-CA" sz="1800" b="0" dirty="0">
+                <a:latin typeface="Consolas" panose="020B0609020204030204" pitchFamily="49" charset="0"/>
+              </a:rPr>
+              <a:t>])</a:t>
+            </a:r>
           </a:p>
         </p:txBody>
       </p:sp>
     </p:spTree>
     <p:extLst>
       <p:ext uri="{BB962C8B-B14F-4D97-AF65-F5344CB8AC3E}">
-        <p14:creationId xmlns:p14="http://schemas.microsoft.com/office/powerpoint/2010/main" val="2781789880"/>
+        <p14:creationId xmlns:p14="http://schemas.microsoft.com/office/powerpoint/2010/main" val="2101291111"/>
       </p:ext>
     </p:extLst>
   </p:cSld>
   <p:clrMapOvr>
     <a:masterClrMapping/>
   </p:clrMapOvr>
+  <p:timing>
+    <p:tnLst>
+      <p:par>
+        <p:cTn id="1" dur="indefinite" restart="never" nodeType="tmRoot">
+          <p:childTnLst>
+            <p:seq concurrent="1" nextAc="seek">
+              <p:cTn id="2" dur="indefinite" nodeType="mainSeq">
+                <p:childTnLst>
+                  <p:par>
+                    <p:cTn id="3" fill="hold">
+                      <p:stCondLst>
+                        <p:cond delay="indefinite"/>
+                      </p:stCondLst>
+                      <p:childTnLst>
+                        <p:par>
+                          <p:cTn id="4" fill="hold">
+                            <p:stCondLst>
+                              <p:cond delay="0"/>
+                            </p:stCondLst>
+                            <p:childTnLst>
+                              <p:par>
+                                <p:cTn id="5" presetID="10" presetClass="entr" presetSubtype="0" fill="hold" nodeType="clickEffect">
+                                  <p:stCondLst>
+                                    <p:cond delay="0"/>
+                                  </p:stCondLst>
+                                  <p:childTnLst>
+                                    <p:set>
+                                      <p:cBhvr>
+                                        <p:cTn id="6" dur="1" fill="hold">
+                                          <p:stCondLst>
+                                            <p:cond delay="0"/>
+                                          </p:stCondLst>
+                                        </p:cTn>
+                                        <p:tgtEl>
+                                          <p:spTgt spid="3">
+                                            <p:txEl>
+                                              <p:pRg st="0" end="0"/>
+                                            </p:txEl>
+                                          </p:spTgt>
+                                        </p:tgtEl>
+                                        <p:attrNameLst>
+                                          <p:attrName>style.visibility</p:attrName>
+                                        </p:attrNameLst>
+                                      </p:cBhvr>
+                                      <p:to>
+                                        <p:strVal val="visible"/>
+                                      </p:to>
+                                    </p:set>
+                                    <p:animEffect transition="in" filter="fade">
+                                      <p:cBhvr>
+                                        <p:cTn id="7" dur="500"/>
+                                        <p:tgtEl>
+                                          <p:spTgt spid="3">
+                                            <p:txEl>
+                                              <p:pRg st="0" end="0"/>
+                                            </p:txEl>
+                                          </p:spTgt>
+                                        </p:tgtEl>
+                                      </p:cBhvr>
+                                    </p:animEffect>
+                                  </p:childTnLst>
+                                </p:cTn>
+                              </p:par>
+                              <p:par>
+                                <p:cTn id="8" presetID="10" presetClass="entr" presetSubtype="0" fill="hold" grpId="0" nodeType="withEffect">
+                                  <p:stCondLst>
+                                    <p:cond delay="0"/>
+                                  </p:stCondLst>
+                                  <p:childTnLst>
+                                    <p:set>
+                                      <p:cBhvr>
+                                        <p:cTn id="9" dur="1" fill="hold">
+                                          <p:stCondLst>
+                                            <p:cond delay="0"/>
+                                          </p:stCondLst>
+                                        </p:cTn>
+                                        <p:tgtEl>
+                                          <p:spTgt spid="8"/>
+                                        </p:tgtEl>
+                                        <p:attrNameLst>
+                                          <p:attrName>style.visibility</p:attrName>
+                                        </p:attrNameLst>
+                                      </p:cBhvr>
+                                      <p:to>
+                                        <p:strVal val="visible"/>
+                                      </p:to>
+                                    </p:set>
+                                    <p:animEffect transition="in" filter="fade">
+                                      <p:cBhvr>
+                                        <p:cTn id="10" dur="500"/>
+                                        <p:tgtEl>
+                                          <p:spTgt spid="8"/>
+                                        </p:tgtEl>
+                                      </p:cBhvr>
+                                    </p:animEffect>
+                                  </p:childTnLst>
+                                </p:cTn>
+                              </p:par>
+                            </p:childTnLst>
+                          </p:cTn>
+                        </p:par>
+                      </p:childTnLst>
+                    </p:cTn>
+                  </p:par>
+                  <p:par>
+                    <p:cTn id="11" fill="hold">
+                      <p:stCondLst>
+                        <p:cond delay="indefinite"/>
+                      </p:stCondLst>
+                      <p:childTnLst>
+                        <p:par>
+                          <p:cTn id="12" fill="hold">
+                            <p:stCondLst>
+                              <p:cond delay="0"/>
+                            </p:stCondLst>
+                            <p:childTnLst>
+                              <p:par>
+                                <p:cTn id="13" presetID="10" presetClass="entr" presetSubtype="0" fill="hold" nodeType="clickEffect">
+                                  <p:stCondLst>
+                                    <p:cond delay="0"/>
+                                  </p:stCondLst>
+                                  <p:childTnLst>
+                                    <p:set>
+                                      <p:cBhvr>
+                                        <p:cTn id="14" dur="1" fill="hold">
+                                          <p:stCondLst>
+                                            <p:cond delay="0"/>
+                                          </p:stCondLst>
+                                        </p:cTn>
+                                        <p:tgtEl>
+                                          <p:spTgt spid="3">
+                                            <p:txEl>
+                                              <p:pRg st="3" end="3"/>
+                                            </p:txEl>
+                                          </p:spTgt>
+                                        </p:tgtEl>
+                                        <p:attrNameLst>
+                                          <p:attrName>style.visibility</p:attrName>
+                                        </p:attrNameLst>
+                                      </p:cBhvr>
+                                      <p:to>
+                                        <p:strVal val="visible"/>
+                                      </p:to>
+                                    </p:set>
+                                    <p:animEffect transition="in" filter="fade">
+                                      <p:cBhvr>
+                                        <p:cTn id="15" dur="500"/>
+                                        <p:tgtEl>
+                                          <p:spTgt spid="3">
+                                            <p:txEl>
+                                              <p:pRg st="3" end="3"/>
+                                            </p:txEl>
+                                          </p:spTgt>
+                                        </p:tgtEl>
+                                      </p:cBhvr>
+                                    </p:animEffect>
+                                  </p:childTnLst>
+                                </p:cTn>
+                              </p:par>
+                              <p:par>
+                                <p:cTn id="16" presetID="10" presetClass="entr" presetSubtype="0" fill="hold" grpId="0" nodeType="withEffect">
+                                  <p:stCondLst>
+                                    <p:cond delay="0"/>
+                                  </p:stCondLst>
+                                  <p:childTnLst>
+                                    <p:set>
+                                      <p:cBhvr>
+                                        <p:cTn id="17" dur="1" fill="hold">
+                                          <p:stCondLst>
+                                            <p:cond delay="0"/>
+                                          </p:stCondLst>
+                                        </p:cTn>
+                                        <p:tgtEl>
+                                          <p:spTgt spid="7"/>
+                                        </p:tgtEl>
+                                        <p:attrNameLst>
+                                          <p:attrName>style.visibility</p:attrName>
+                                        </p:attrNameLst>
+                                      </p:cBhvr>
+                                      <p:to>
+                                        <p:strVal val="visible"/>
+                                      </p:to>
+                                    </p:set>
+                                    <p:animEffect transition="in" filter="fade">
+                                      <p:cBhvr>
+                                        <p:cTn id="18" dur="500"/>
+                                        <p:tgtEl>
+                                          <p:spTgt spid="7"/>
+                                        </p:tgtEl>
+                                      </p:cBhvr>
+                                    </p:animEffect>
+                                  </p:childTnLst>
+                                </p:cTn>
+                              </p:par>
+                            </p:childTnLst>
+                          </p:cTn>
+                        </p:par>
+                      </p:childTnLst>
+                    </p:cTn>
+                  </p:par>
+                  <p:par>
+                    <p:cTn id="19" fill="hold">
+                      <p:stCondLst>
+                        <p:cond delay="indefinite"/>
+                      </p:stCondLst>
+                      <p:childTnLst>
+                        <p:par>
+                          <p:cTn id="20" fill="hold">
+                            <p:stCondLst>
+                              <p:cond delay="0"/>
+                            </p:stCondLst>
+                            <p:childTnLst>
+                              <p:par>
+                                <p:cTn id="21" presetID="10" presetClass="entr" presetSubtype="0" fill="hold" nodeType="clickEffect">
+                                  <p:stCondLst>
+                                    <p:cond delay="0"/>
+                                  </p:stCondLst>
+                                  <p:childTnLst>
+                                    <p:set>
+                                      <p:cBhvr>
+                                        <p:cTn id="22" dur="1" fill="hold">
+                                          <p:stCondLst>
+                                            <p:cond delay="0"/>
+                                          </p:stCondLst>
+                                        </p:cTn>
+                                        <p:tgtEl>
+                                          <p:spTgt spid="3">
+                                            <p:txEl>
+                                              <p:pRg st="6" end="6"/>
+                                            </p:txEl>
+                                          </p:spTgt>
+                                        </p:tgtEl>
+                                        <p:attrNameLst>
+                                          <p:attrName>style.visibility</p:attrName>
+                                        </p:attrNameLst>
+                                      </p:cBhvr>
+                                      <p:to>
+                                        <p:strVal val="visible"/>
+                                      </p:to>
+                                    </p:set>
+                                    <p:animEffect transition="in" filter="fade">
+                                      <p:cBhvr>
+                                        <p:cTn id="23" dur="500"/>
+                                        <p:tgtEl>
+                                          <p:spTgt spid="3">
+                                            <p:txEl>
+                                              <p:pRg st="6" end="6"/>
+                                            </p:txEl>
+                                          </p:spTgt>
+                                        </p:tgtEl>
+                                      </p:cBhvr>
+                                    </p:animEffect>
+                                  </p:childTnLst>
+                                </p:cTn>
+                              </p:par>
+                              <p:par>
+                                <p:cTn id="24" presetID="10" presetClass="entr" presetSubtype="0" fill="hold" grpId="0" nodeType="withEffect">
+                                  <p:stCondLst>
+                                    <p:cond delay="0"/>
+                                  </p:stCondLst>
+                                  <p:childTnLst>
+                                    <p:set>
+                                      <p:cBhvr>
+                                        <p:cTn id="25" dur="1" fill="hold">
+                                          <p:stCondLst>
+                                            <p:cond delay="0"/>
+                                          </p:stCondLst>
+                                        </p:cTn>
+                                        <p:tgtEl>
+                                          <p:spTgt spid="9"/>
+                                        </p:tgtEl>
+                                        <p:attrNameLst>
+                                          <p:attrName>style.visibility</p:attrName>
+                                        </p:attrNameLst>
+                                      </p:cBhvr>
+                                      <p:to>
+                                        <p:strVal val="visible"/>
+                                      </p:to>
+                                    </p:set>
+                                    <p:animEffect transition="in" filter="fade">
+                                      <p:cBhvr>
+                                        <p:cTn id="26" dur="500"/>
+                                        <p:tgtEl>
+                                          <p:spTgt spid="9"/>
+                                        </p:tgtEl>
+                                      </p:cBhvr>
+                                    </p:animEffect>
+                                  </p:childTnLst>
+                                </p:cTn>
+                              </p:par>
+                            </p:childTnLst>
+                          </p:cTn>
+                        </p:par>
+                      </p:childTnLst>
+                    </p:cTn>
+                  </p:par>
+                </p:childTnLst>
+              </p:cTn>
+              <p:prevCondLst>
+                <p:cond evt="onPrev" delay="0">
+                  <p:tgtEl>
+                    <p:sldTgt/>
+                  </p:tgtEl>
+                </p:cond>
+              </p:prevCondLst>
+              <p:nextCondLst>
+                <p:cond evt="onNext" delay="0">
+                  <p:tgtEl>
+                    <p:sldTgt/>
+                  </p:tgtEl>
+                </p:cond>
+              </p:nextCondLst>
+            </p:seq>
+          </p:childTnLst>
+        </p:cTn>
+      </p:par>
+    </p:tnLst>
+    <p:bldLst>
+      <p:bldP spid="7" grpId="0" animBg="1"/>
+      <p:bldP spid="8" grpId="0" animBg="1"/>
+      <p:bldP spid="9" grpId="0" animBg="1"/>
+    </p:bldLst>
+  </p:timing>
 </p:sld>
 </file>
 
@@ -15224,6 +16344,2673 @@
       <p188:commentRel xmlns:p188="http://schemas.microsoft.com/office/powerpoint/2018/8/main" r:id="rId2"/>
     </p:ext>
   </p:extLst>
+</p:sld>
+</file>
+
+<file path=ppt/slides/slide20.xml><?xml version="1.0" encoding="utf-8"?>
+<p:sld xmlns:a="http://schemas.openxmlformats.org/drawingml/2006/main" xmlns:r="http://schemas.openxmlformats.org/officeDocument/2006/relationships" xmlns:p="http://schemas.openxmlformats.org/presentationml/2006/main">
+  <p:cSld>
+    <p:bg>
+      <p:bgPr>
+        <a:solidFill>
+          <a:srgbClr val="F5F5F5"/>
+        </a:solidFill>
+        <a:effectLst/>
+      </p:bgPr>
+    </p:bg>
+    <p:spTree>
+      <p:nvGrpSpPr>
+        <p:cNvPr id="1" name="">
+          <a:extLst>
+            <a:ext uri="{FF2B5EF4-FFF2-40B4-BE49-F238E27FC236}">
+              <a16:creationId xmlns:a16="http://schemas.microsoft.com/office/drawing/2014/main" id="{884CAF91-7A77-4F86-A486-1761D3C626E8}"/>
+            </a:ext>
+          </a:extLst>
+        </p:cNvPr>
+        <p:cNvGrpSpPr/>
+        <p:nvPr/>
+      </p:nvGrpSpPr>
+      <p:grpSpPr>
+        <a:xfrm>
+          <a:off x="0" y="0"/>
+          <a:ext cx="0" cy="0"/>
+          <a:chOff x="0" y="0"/>
+          <a:chExt cx="0" cy="0"/>
+        </a:xfrm>
+      </p:grpSpPr>
+      <p:sp>
+        <p:nvSpPr>
+          <p:cNvPr id="2" name="Title 1">
+            <a:extLst>
+              <a:ext uri="{FF2B5EF4-FFF2-40B4-BE49-F238E27FC236}">
+                <a16:creationId xmlns:a16="http://schemas.microsoft.com/office/drawing/2014/main" id="{A652F66B-0182-A922-9599-58D470B11C40}"/>
+              </a:ext>
+            </a:extLst>
+          </p:cNvPr>
+          <p:cNvSpPr>
+            <a:spLocks noGrp="1"/>
+          </p:cNvSpPr>
+          <p:nvPr>
+            <p:ph type="title"/>
+          </p:nvPr>
+        </p:nvSpPr>
+        <p:spPr/>
+        <p:txBody>
+          <a:bodyPr/>
+          <a:lstStyle/>
+          <a:p>
+            <a:r>
+              <a:rPr lang="fr-CA" dirty="0">
+                <a:latin typeface="Arial Rounded MT Bold" panose="020F0704030504030204" pitchFamily="34" charset="0"/>
+              </a:rPr>
+              <a:t>Notation en compréhension</a:t>
+            </a:r>
+          </a:p>
+        </p:txBody>
+      </p:sp>
+      <mc:AlternateContent xmlns:mc="http://schemas.openxmlformats.org/markup-compatibility/2006">
+        <mc:Choice xmlns:a14="http://schemas.microsoft.com/office/drawing/2010/main" Requires="a14">
+          <p:sp>
+            <p:nvSpPr>
+              <p:cNvPr id="3" name="Content Placeholder 2">
+                <a:extLst>
+                  <a:ext uri="{FF2B5EF4-FFF2-40B4-BE49-F238E27FC236}">
+                    <a16:creationId xmlns:a16="http://schemas.microsoft.com/office/drawing/2014/main" id="{9B1FA108-C450-01DE-4435-AF0F17B0A919}"/>
+                  </a:ext>
+                </a:extLst>
+              </p:cNvPr>
+              <p:cNvSpPr>
+                <a:spLocks noGrp="1"/>
+              </p:cNvSpPr>
+              <p:nvPr>
+                <p:ph idx="1"/>
+              </p:nvPr>
+            </p:nvSpPr>
+            <p:spPr>
+              <a:xfrm>
+                <a:off x="838200" y="1818566"/>
+                <a:ext cx="10515600" cy="4351338"/>
+              </a:xfrm>
+            </p:spPr>
+            <p:txBody>
+              <a:bodyPr>
+                <a:normAutofit/>
+              </a:bodyPr>
+              <a:lstStyle/>
+              <a:p>
+                <a:pPr algn="just">
+                  <a:lnSpc>
+                    <a:spcPct val="150000"/>
+                  </a:lnSpc>
+                </a:pPr>
+                <a:r>
+                  <a:rPr lang="fr-CA" sz="1600" dirty="0">
+                    <a:latin typeface="Consolas" panose="020B0609020204030204" pitchFamily="49" charset="0"/>
+                  </a:rPr>
+                  <a:t>En maths </a:t>
+                </a:r>
+                <a:r>
+                  <a:rPr lang="fr-CA" sz="1600" i="1" dirty="0">
+                    <a:latin typeface="Consolas" panose="020B0609020204030204" pitchFamily="49" charset="0"/>
+                  </a:rPr>
+                  <a:t>(</a:t>
+                </a:r>
+                <a:r>
+                  <a:rPr lang="fr-CA" sz="1600" dirty="0">
+                    <a:latin typeface="Consolas" panose="020B0609020204030204" pitchFamily="49" charset="0"/>
+                  </a:rPr>
+                  <a:t>angl.</a:t>
+                </a:r>
+                <a:r>
+                  <a:rPr lang="fr-CA" sz="1600" i="1" dirty="0">
+                    <a:latin typeface="Consolas" panose="020B0609020204030204" pitchFamily="49" charset="0"/>
+                  </a:rPr>
+                  <a:t> </a:t>
+                </a:r>
+                <a:r>
+                  <a:rPr lang="fr-CA" sz="1600" b="1" i="1" dirty="0">
+                    <a:latin typeface="Consolas" panose="020B0609020204030204" pitchFamily="49" charset="0"/>
+                  </a:rPr>
+                  <a:t>set-</a:t>
+                </a:r>
+                <a:r>
+                  <a:rPr lang="fr-CA" sz="1600" b="1" i="1" dirty="0" err="1">
+                    <a:latin typeface="Consolas" panose="020B0609020204030204" pitchFamily="49" charset="0"/>
+                  </a:rPr>
+                  <a:t>builder</a:t>
+                </a:r>
+                <a:r>
+                  <a:rPr lang="fr-CA" sz="1600" b="1" i="1" dirty="0">
+                    <a:latin typeface="Consolas" panose="020B0609020204030204" pitchFamily="49" charset="0"/>
+                  </a:rPr>
+                  <a:t> notation</a:t>
+                </a:r>
+                <a:r>
+                  <a:rPr lang="fr-CA" sz="1600" i="1" dirty="0">
+                    <a:latin typeface="Consolas" panose="020B0609020204030204" pitchFamily="49" charset="0"/>
+                  </a:rPr>
+                  <a:t>):</a:t>
+                </a:r>
+              </a:p>
+              <a:p>
+                <a:pPr algn="just">
+                  <a:lnSpc>
+                    <a:spcPct val="150000"/>
+                  </a:lnSpc>
+                </a:pPr>
+                <a:endParaRPr lang="fr-CA" sz="100" i="1" dirty="0">
+                  <a:latin typeface="Consolas" panose="020B0609020204030204" pitchFamily="49" charset="0"/>
+                </a:endParaRPr>
+              </a:p>
+              <a:p>
+                <a:pPr marL="0" indent="0" algn="just">
+                  <a:lnSpc>
+                    <a:spcPct val="150000"/>
+                  </a:lnSpc>
+                  <a:buNone/>
+                </a:pPr>
+                <a14:m>
+                  <m:oMathPara xmlns:m="http://schemas.openxmlformats.org/officeDocument/2006/math">
+                    <m:oMathParaPr>
+                      <m:jc m:val="centerGroup"/>
+                    </m:oMathParaPr>
+                    <m:oMath xmlns:m="http://schemas.openxmlformats.org/officeDocument/2006/math">
+                      <m:d>
+                        <m:dPr>
+                          <m:begChr m:val="{"/>
+                          <m:endChr m:val="}"/>
+                          <m:ctrlPr>
+                            <a:rPr lang="en-CA" sz="1600" smtClean="0">
+                              <a:latin typeface="Cambria Math" panose="02040503050406030204" pitchFamily="18" charset="0"/>
+                            </a:rPr>
+                          </m:ctrlPr>
+                        </m:dPr>
+                        <m:e>
+                          <m:sSup>
+                            <m:sSupPr>
+                              <m:ctrlPr>
+                                <a:rPr lang="en-CA" sz="1600" smtClean="0">
+                                  <a:latin typeface="Cambria Math" panose="02040503050406030204" pitchFamily="18" charset="0"/>
+                                </a:rPr>
+                              </m:ctrlPr>
+                            </m:sSupPr>
+                            <m:e>
+                              <m:r>
+                                <a:rPr lang="en-CA" sz="1600" b="0" i="1" smtClean="0">
+                                  <a:latin typeface="Cambria Math" panose="02040503050406030204" pitchFamily="18" charset="0"/>
+                                </a:rPr>
+                                <m:t>𝑥</m:t>
+                              </m:r>
+                            </m:e>
+                            <m:sup>
+                              <m:r>
+                                <a:rPr lang="en-CA" sz="1600" b="0" i="0" smtClean="0">
+                                  <a:latin typeface="Cambria Math" panose="02040503050406030204" pitchFamily="18" charset="0"/>
+                                </a:rPr>
+                                <m:t>2</m:t>
+                              </m:r>
+                            </m:sup>
+                          </m:sSup>
+                          <m:r>
+                            <a:rPr lang="en-CA" sz="1600" b="0" i="0" smtClean="0">
+                              <a:latin typeface="Cambria Math" panose="02040503050406030204" pitchFamily="18" charset="0"/>
+                            </a:rPr>
+                            <m:t>|</m:t>
+                          </m:r>
+                          <m:r>
+                            <a:rPr lang="en-CA" sz="1600" b="0" i="1" smtClean="0">
+                              <a:latin typeface="Cambria Math" panose="02040503050406030204" pitchFamily="18" charset="0"/>
+                            </a:rPr>
+                            <m:t>𝑥</m:t>
+                          </m:r>
+                          <m:r>
+                            <a:rPr lang="en-CA" sz="1600" b="0" i="0" smtClean="0">
+                              <a:latin typeface="Cambria Math" panose="02040503050406030204" pitchFamily="18" charset="0"/>
+                              <a:ea typeface="Cambria Math" panose="02040503050406030204" pitchFamily="18" charset="0"/>
+                            </a:rPr>
+                            <m:t>∈</m:t>
+                          </m:r>
+                          <m:r>
+                            <a:rPr lang="en-CA" sz="1600" b="0" i="0" smtClean="0">
+                              <a:latin typeface="Cambria Math" panose="02040503050406030204" pitchFamily="18" charset="0"/>
+                              <a:ea typeface="Cambria Math" panose="02040503050406030204" pitchFamily="18" charset="0"/>
+                            </a:rPr>
+                            <m:t>ℕ</m:t>
+                          </m:r>
+                          <m:r>
+                            <a:rPr lang="en-CA" sz="1600" b="0" i="0" smtClean="0">
+                              <a:latin typeface="Cambria Math" panose="02040503050406030204" pitchFamily="18" charset="0"/>
+                              <a:ea typeface="Cambria Math" panose="02040503050406030204" pitchFamily="18" charset="0"/>
+                            </a:rPr>
+                            <m:t>, </m:t>
+                          </m:r>
+                          <m:r>
+                            <a:rPr lang="en-CA" sz="1600" b="0" i="1" smtClean="0">
+                              <a:latin typeface="Cambria Math" panose="02040503050406030204" pitchFamily="18" charset="0"/>
+                              <a:ea typeface="Cambria Math" panose="02040503050406030204" pitchFamily="18" charset="0"/>
+                            </a:rPr>
+                            <m:t>𝑥</m:t>
+                          </m:r>
+                          <m:r>
+                            <a:rPr lang="en-CA" sz="1600" b="0" i="0" smtClean="0">
+                              <a:latin typeface="Cambria Math" panose="02040503050406030204" pitchFamily="18" charset="0"/>
+                              <a:ea typeface="Cambria Math" panose="02040503050406030204" pitchFamily="18" charset="0"/>
+                            </a:rPr>
+                            <m:t> </m:t>
+                          </m:r>
+                          <m:r>
+                            <m:rPr>
+                              <m:sty m:val="p"/>
+                            </m:rPr>
+                            <a:rPr lang="en-CA" sz="1600" b="0" i="0" smtClean="0">
+                              <a:latin typeface="Cambria Math" panose="02040503050406030204" pitchFamily="18" charset="0"/>
+                              <a:ea typeface="Cambria Math" panose="02040503050406030204" pitchFamily="18" charset="0"/>
+                            </a:rPr>
+                            <m:t>est</m:t>
+                          </m:r>
+                          <m:r>
+                            <a:rPr lang="en-CA" sz="1600" b="0" i="0" smtClean="0">
+                              <a:latin typeface="Cambria Math" panose="02040503050406030204" pitchFamily="18" charset="0"/>
+                              <a:ea typeface="Cambria Math" panose="02040503050406030204" pitchFamily="18" charset="0"/>
+                            </a:rPr>
+                            <m:t> </m:t>
+                          </m:r>
+                          <m:r>
+                            <m:rPr>
+                              <m:sty m:val="p"/>
+                            </m:rPr>
+                            <a:rPr lang="en-CA" sz="1600" b="0" i="0" smtClean="0">
+                              <a:latin typeface="Cambria Math" panose="02040503050406030204" pitchFamily="18" charset="0"/>
+                              <a:ea typeface="Cambria Math" panose="02040503050406030204" pitchFamily="18" charset="0"/>
+                            </a:rPr>
+                            <m:t>pair</m:t>
+                          </m:r>
+                          <m:r>
+                            <a:rPr lang="en-CA" sz="1600" b="0" i="0" smtClean="0">
+                              <a:latin typeface="Cambria Math" panose="02040503050406030204" pitchFamily="18" charset="0"/>
+                              <a:ea typeface="Cambria Math" panose="02040503050406030204" pitchFamily="18" charset="0"/>
+                            </a:rPr>
+                            <m:t>, </m:t>
+                          </m:r>
+                          <m:r>
+                            <a:rPr lang="en-CA" sz="1600" b="0" i="1" smtClean="0">
+                              <a:latin typeface="Cambria Math" panose="02040503050406030204" pitchFamily="18" charset="0"/>
+                              <a:ea typeface="Cambria Math" panose="02040503050406030204" pitchFamily="18" charset="0"/>
+                            </a:rPr>
+                            <m:t>𝑥</m:t>
+                          </m:r>
+                          <m:r>
+                            <a:rPr lang="en-CA" sz="1600" b="0" i="0" smtClean="0">
+                              <a:latin typeface="Cambria Math" panose="02040503050406030204" pitchFamily="18" charset="0"/>
+                              <a:ea typeface="Cambria Math" panose="02040503050406030204" pitchFamily="18" charset="0"/>
+                            </a:rPr>
+                            <m:t>≤10</m:t>
+                          </m:r>
+                        </m:e>
+                      </m:d>
+                    </m:oMath>
+                  </m:oMathPara>
+                </a14:m>
+                <a:endParaRPr lang="fr-CA" sz="1600" dirty="0">
+                  <a:latin typeface="Consolas" panose="020B0609020204030204" pitchFamily="49" charset="0"/>
+                </a:endParaRPr>
+              </a:p>
+              <a:p>
+                <a:pPr marL="0" indent="0" algn="just">
+                  <a:lnSpc>
+                    <a:spcPct val="150000"/>
+                  </a:lnSpc>
+                  <a:buNone/>
+                </a:pPr>
+                <a14:m>
+                  <m:oMathPara xmlns:m="http://schemas.openxmlformats.org/officeDocument/2006/math">
+                    <m:oMathParaPr>
+                      <m:jc m:val="centerGroup"/>
+                    </m:oMathParaPr>
+                    <m:oMath xmlns:m="http://schemas.openxmlformats.org/officeDocument/2006/math">
+                      <m:r>
+                        <a:rPr lang="fr-CA" sz="1600" i="1" smtClean="0">
+                          <a:latin typeface="Cambria Math" panose="02040503050406030204" pitchFamily="18" charset="0"/>
+                          <a:ea typeface="Cambria Math" panose="02040503050406030204" pitchFamily="18" charset="0"/>
+                        </a:rPr>
+                        <m:t>↓</m:t>
+                      </m:r>
+                    </m:oMath>
+                  </m:oMathPara>
+                </a14:m>
+                <a:endParaRPr lang="fr-CA" sz="1600" dirty="0">
+                  <a:latin typeface="Consolas" panose="020B0609020204030204" pitchFamily="49" charset="0"/>
+                </a:endParaRPr>
+              </a:p>
+              <a:p>
+                <a:pPr marL="0" indent="0" algn="just">
+                  <a:lnSpc>
+                    <a:spcPct val="150000"/>
+                  </a:lnSpc>
+                  <a:buNone/>
+                </a:pPr>
+                <a14:m>
+                  <m:oMathPara xmlns:m="http://schemas.openxmlformats.org/officeDocument/2006/math">
+                    <m:oMathParaPr>
+                      <m:jc m:val="centerGroup"/>
+                    </m:oMathParaPr>
+                    <m:oMath xmlns:m="http://schemas.openxmlformats.org/officeDocument/2006/math">
+                      <m:r>
+                        <a:rPr lang="en-CA" sz="1600" b="0" i="1" smtClean="0">
+                          <a:latin typeface="Cambria Math" panose="02040503050406030204" pitchFamily="18" charset="0"/>
+                        </a:rPr>
+                        <m:t>{0, 2, 4, 6, 8, 10}</m:t>
+                      </m:r>
+                    </m:oMath>
+                  </m:oMathPara>
+                </a14:m>
+                <a:endParaRPr lang="fr-CA" sz="1600" dirty="0">
+                  <a:latin typeface="Consolas" panose="020B0609020204030204" pitchFamily="49" charset="0"/>
+                </a:endParaRPr>
+              </a:p>
+              <a:p>
+                <a:pPr marL="0" indent="0" algn="just">
+                  <a:lnSpc>
+                    <a:spcPct val="150000"/>
+                  </a:lnSpc>
+                  <a:buNone/>
+                </a:pPr>
+                <a:endParaRPr lang="fr-CA" sz="100" b="1" dirty="0">
+                  <a:latin typeface="Consolas" panose="020B0609020204030204" pitchFamily="49" charset="0"/>
+                </a:endParaRPr>
+              </a:p>
+              <a:p>
+                <a:pPr algn="just">
+                  <a:lnSpc>
+                    <a:spcPct val="110000"/>
+                  </a:lnSpc>
+                </a:pPr>
+                <a:r>
+                  <a:rPr lang="fr-CA" sz="1600" dirty="0">
+                    <a:latin typeface="Consolas" panose="020B0609020204030204" pitchFamily="49" charset="0"/>
+                  </a:rPr>
+                  <a:t>En Python:</a:t>
+                </a:r>
+              </a:p>
+              <a:p>
+                <a:pPr algn="just">
+                  <a:lnSpc>
+                    <a:spcPct val="110000"/>
+                  </a:lnSpc>
+                </a:pPr>
+                <a:endParaRPr lang="fr-CA" sz="100" dirty="0">
+                  <a:latin typeface="Consolas" panose="020B0609020204030204" pitchFamily="49" charset="0"/>
+                </a:endParaRPr>
+              </a:p>
+              <a:p>
+                <a:pPr marL="457200" lvl="1" indent="0" algn="just">
+                  <a:lnSpc>
+                    <a:spcPct val="110000"/>
+                  </a:lnSpc>
+                  <a:buNone/>
+                </a:pPr>
+                <a:r>
+                  <a:rPr lang="fr-CA" sz="1600" b="1" dirty="0">
+                    <a:latin typeface="Consolas" panose="020B0609020204030204" pitchFamily="49" charset="0"/>
+                  </a:rPr>
+                  <a:t>&gt;&gt;&gt; [x for x in range(11) if x % 2 == 0 and &lt;= 10]</a:t>
+                </a:r>
+              </a:p>
+              <a:p>
+                <a:pPr marL="457200" lvl="1" indent="0" algn="just">
+                  <a:lnSpc>
+                    <a:spcPct val="110000"/>
+                  </a:lnSpc>
+                  <a:buNone/>
+                </a:pPr>
+                <a:r>
+                  <a:rPr lang="fr-CA" sz="1600" dirty="0">
+                    <a:solidFill>
+                      <a:schemeClr val="bg1">
+                        <a:lumMod val="50000"/>
+                      </a:schemeClr>
+                    </a:solidFill>
+                    <a:latin typeface="Consolas" panose="020B0609020204030204" pitchFamily="49" charset="0"/>
+                  </a:rPr>
+                  <a:t>[0, 2, 4, 6, 8, 10]</a:t>
+                </a:r>
+              </a:p>
+              <a:p>
+                <a:pPr marL="0" indent="0" algn="just">
+                  <a:lnSpc>
+                    <a:spcPct val="110000"/>
+                  </a:lnSpc>
+                  <a:buNone/>
+                </a:pPr>
+                <a:endParaRPr lang="fr-CA" sz="100" dirty="0">
+                  <a:solidFill>
+                    <a:schemeClr val="bg1">
+                      <a:lumMod val="50000"/>
+                    </a:schemeClr>
+                  </a:solidFill>
+                  <a:latin typeface="Consolas" panose="020B0609020204030204" pitchFamily="49" charset="0"/>
+                </a:endParaRPr>
+              </a:p>
+              <a:p>
+                <a:pPr algn="just">
+                  <a:lnSpc>
+                    <a:spcPct val="110000"/>
+                  </a:lnSpc>
+                </a:pPr>
+                <a:r>
+                  <a:rPr lang="fr-CA" sz="1600" dirty="0">
+                    <a:latin typeface="Consolas" panose="020B0609020204030204" pitchFamily="49" charset="0"/>
+                  </a:rPr>
+                  <a:t>S'applique aux liste, tuples ... et même aux dictionnaires!</a:t>
+                </a:r>
+              </a:p>
+              <a:p>
+                <a:pPr marL="0" indent="0" algn="just">
+                  <a:lnSpc>
+                    <a:spcPct val="110000"/>
+                  </a:lnSpc>
+                  <a:buNone/>
+                </a:pPr>
+                <a:endParaRPr lang="fr-CA" sz="2000" dirty="0">
+                  <a:latin typeface="Consolas" panose="020B0609020204030204" pitchFamily="49" charset="0"/>
+                </a:endParaRPr>
+              </a:p>
+            </p:txBody>
+          </p:sp>
+        </mc:Choice>
+        <mc:Fallback>
+          <p:sp>
+            <p:nvSpPr>
+              <p:cNvPr id="3" name="Content Placeholder 2">
+                <a:extLst>
+                  <a:ext uri="{FF2B5EF4-FFF2-40B4-BE49-F238E27FC236}">
+                    <a16:creationId xmlns:a16="http://schemas.microsoft.com/office/drawing/2014/main" id="{9B1FA108-C450-01DE-4435-AF0F17B0A919}"/>
+                  </a:ext>
+                </a:extLst>
+              </p:cNvPr>
+              <p:cNvSpPr>
+                <a:spLocks noGrp="1" noRot="1" noChangeAspect="1" noMove="1" noResize="1" noEditPoints="1" noAdjustHandles="1" noChangeArrowheads="1" noChangeShapeType="1" noTextEdit="1"/>
+              </p:cNvSpPr>
+              <p:nvPr>
+                <p:ph idx="1"/>
+              </p:nvPr>
+            </p:nvSpPr>
+            <p:spPr>
+              <a:xfrm>
+                <a:off x="838200" y="1818566"/>
+                <a:ext cx="10515600" cy="4351338"/>
+              </a:xfrm>
+              <a:blipFill>
+                <a:blip r:embed="rId3"/>
+                <a:stretch>
+                  <a:fillRect l="-232"/>
+                </a:stretch>
+              </a:blipFill>
+            </p:spPr>
+            <p:txBody>
+              <a:bodyPr/>
+              <a:lstStyle/>
+              <a:p>
+                <a:r>
+                  <a:rPr lang="fr-CA">
+                    <a:noFill/>
+                  </a:rPr>
+                  <a:t> </a:t>
+                </a:r>
+              </a:p>
+            </p:txBody>
+          </p:sp>
+        </mc:Fallback>
+      </mc:AlternateContent>
+      <p:sp>
+        <p:nvSpPr>
+          <p:cNvPr id="5" name="Slide Number Placeholder 4">
+            <a:extLst>
+              <a:ext uri="{FF2B5EF4-FFF2-40B4-BE49-F238E27FC236}">
+                <a16:creationId xmlns:a16="http://schemas.microsoft.com/office/drawing/2014/main" id="{DCED0CA0-E074-C43C-9D26-75707CD290C7}"/>
+              </a:ext>
+            </a:extLst>
+          </p:cNvPr>
+          <p:cNvSpPr>
+            <a:spLocks noGrp="1"/>
+          </p:cNvSpPr>
+          <p:nvPr>
+            <p:ph type="sldNum" sz="quarter" idx="12"/>
+          </p:nvPr>
+        </p:nvSpPr>
+        <p:spPr/>
+        <p:txBody>
+          <a:bodyPr/>
+          <a:lstStyle/>
+          <a:p>
+            <a:fld id="{846B06B1-1179-491F-A487-8E0C403F7C13}" type="slidenum">
+              <a:rPr lang="fr-CA" smtClean="0"/>
+              <a:t>20</a:t>
+            </a:fld>
+            <a:endParaRPr lang="fr-CA" dirty="0"/>
+          </a:p>
+        </p:txBody>
+      </p:sp>
+    </p:spTree>
+    <p:extLst>
+      <p:ext uri="{BB962C8B-B14F-4D97-AF65-F5344CB8AC3E}">
+        <p14:creationId xmlns:p14="http://schemas.microsoft.com/office/powerpoint/2010/main" val="1119906317"/>
+      </p:ext>
+    </p:extLst>
+  </p:cSld>
+  <p:clrMapOvr>
+    <a:masterClrMapping/>
+  </p:clrMapOvr>
+  <p:timing>
+    <p:tnLst>
+      <p:par>
+        <p:cTn id="1" dur="indefinite" restart="never" nodeType="tmRoot">
+          <p:childTnLst>
+            <p:seq concurrent="1" nextAc="seek">
+              <p:cTn id="2" dur="indefinite" nodeType="mainSeq">
+                <p:childTnLst>
+                  <p:par>
+                    <p:cTn id="3" fill="hold">
+                      <p:stCondLst>
+                        <p:cond delay="indefinite"/>
+                      </p:stCondLst>
+                      <p:childTnLst>
+                        <p:par>
+                          <p:cTn id="4" fill="hold">
+                            <p:stCondLst>
+                              <p:cond delay="0"/>
+                            </p:stCondLst>
+                            <p:childTnLst>
+                              <p:par>
+                                <p:cTn id="5" presetID="10" presetClass="entr" presetSubtype="0" fill="hold" nodeType="clickEffect">
+                                  <p:stCondLst>
+                                    <p:cond delay="0"/>
+                                  </p:stCondLst>
+                                  <p:childTnLst>
+                                    <p:set>
+                                      <p:cBhvr>
+                                        <p:cTn id="6" dur="1" fill="hold">
+                                          <p:stCondLst>
+                                            <p:cond delay="0"/>
+                                          </p:stCondLst>
+                                        </p:cTn>
+                                        <p:tgtEl>
+                                          <p:spTgt spid="3">
+                                            <p:txEl>
+                                              <p:pRg st="0" end="0"/>
+                                            </p:txEl>
+                                          </p:spTgt>
+                                        </p:tgtEl>
+                                        <p:attrNameLst>
+                                          <p:attrName>style.visibility</p:attrName>
+                                        </p:attrNameLst>
+                                      </p:cBhvr>
+                                      <p:to>
+                                        <p:strVal val="visible"/>
+                                      </p:to>
+                                    </p:set>
+                                    <p:animEffect transition="in" filter="fade">
+                                      <p:cBhvr>
+                                        <p:cTn id="7" dur="500"/>
+                                        <p:tgtEl>
+                                          <p:spTgt spid="3">
+                                            <p:txEl>
+                                              <p:pRg st="0" end="0"/>
+                                            </p:txEl>
+                                          </p:spTgt>
+                                        </p:tgtEl>
+                                      </p:cBhvr>
+                                    </p:animEffect>
+                                  </p:childTnLst>
+                                </p:cTn>
+                              </p:par>
+                            </p:childTnLst>
+                          </p:cTn>
+                        </p:par>
+                      </p:childTnLst>
+                    </p:cTn>
+                  </p:par>
+                  <p:par>
+                    <p:cTn id="8" fill="hold">
+                      <p:stCondLst>
+                        <p:cond delay="indefinite"/>
+                      </p:stCondLst>
+                      <p:childTnLst>
+                        <p:par>
+                          <p:cTn id="9" fill="hold">
+                            <p:stCondLst>
+                              <p:cond delay="0"/>
+                            </p:stCondLst>
+                            <p:childTnLst>
+                              <p:par>
+                                <p:cTn id="10" presetID="10" presetClass="entr" presetSubtype="0" fill="hold" nodeType="clickEffect">
+                                  <p:stCondLst>
+                                    <p:cond delay="0"/>
+                                  </p:stCondLst>
+                                  <p:childTnLst>
+                                    <p:set>
+                                      <p:cBhvr>
+                                        <p:cTn id="11" dur="1" fill="hold">
+                                          <p:stCondLst>
+                                            <p:cond delay="0"/>
+                                          </p:stCondLst>
+                                        </p:cTn>
+                                        <p:tgtEl>
+                                          <p:spTgt spid="3">
+                                            <p:txEl>
+                                              <p:pRg st="2" end="2"/>
+                                            </p:txEl>
+                                          </p:spTgt>
+                                        </p:tgtEl>
+                                        <p:attrNameLst>
+                                          <p:attrName>style.visibility</p:attrName>
+                                        </p:attrNameLst>
+                                      </p:cBhvr>
+                                      <p:to>
+                                        <p:strVal val="visible"/>
+                                      </p:to>
+                                    </p:set>
+                                    <p:animEffect transition="in" filter="fade">
+                                      <p:cBhvr>
+                                        <p:cTn id="12" dur="500"/>
+                                        <p:tgtEl>
+                                          <p:spTgt spid="3">
+                                            <p:txEl>
+                                              <p:pRg st="2" end="2"/>
+                                            </p:txEl>
+                                          </p:spTgt>
+                                        </p:tgtEl>
+                                      </p:cBhvr>
+                                    </p:animEffect>
+                                  </p:childTnLst>
+                                </p:cTn>
+                              </p:par>
+                            </p:childTnLst>
+                          </p:cTn>
+                        </p:par>
+                      </p:childTnLst>
+                    </p:cTn>
+                  </p:par>
+                  <p:par>
+                    <p:cTn id="13" fill="hold">
+                      <p:stCondLst>
+                        <p:cond delay="indefinite"/>
+                      </p:stCondLst>
+                      <p:childTnLst>
+                        <p:par>
+                          <p:cTn id="14" fill="hold">
+                            <p:stCondLst>
+                              <p:cond delay="0"/>
+                            </p:stCondLst>
+                            <p:childTnLst>
+                              <p:par>
+                                <p:cTn id="15" presetID="10" presetClass="entr" presetSubtype="0" fill="hold" nodeType="clickEffect">
+                                  <p:stCondLst>
+                                    <p:cond delay="0"/>
+                                  </p:stCondLst>
+                                  <p:childTnLst>
+                                    <p:set>
+                                      <p:cBhvr>
+                                        <p:cTn id="16" dur="1" fill="hold">
+                                          <p:stCondLst>
+                                            <p:cond delay="0"/>
+                                          </p:stCondLst>
+                                        </p:cTn>
+                                        <p:tgtEl>
+                                          <p:spTgt spid="3">
+                                            <p:txEl>
+                                              <p:pRg st="3" end="3"/>
+                                            </p:txEl>
+                                          </p:spTgt>
+                                        </p:tgtEl>
+                                        <p:attrNameLst>
+                                          <p:attrName>style.visibility</p:attrName>
+                                        </p:attrNameLst>
+                                      </p:cBhvr>
+                                      <p:to>
+                                        <p:strVal val="visible"/>
+                                      </p:to>
+                                    </p:set>
+                                    <p:animEffect transition="in" filter="fade">
+                                      <p:cBhvr>
+                                        <p:cTn id="17" dur="500"/>
+                                        <p:tgtEl>
+                                          <p:spTgt spid="3">
+                                            <p:txEl>
+                                              <p:pRg st="3" end="3"/>
+                                            </p:txEl>
+                                          </p:spTgt>
+                                        </p:tgtEl>
+                                      </p:cBhvr>
+                                    </p:animEffect>
+                                  </p:childTnLst>
+                                </p:cTn>
+                              </p:par>
+                              <p:par>
+                                <p:cTn id="18" presetID="10" presetClass="entr" presetSubtype="0" fill="hold" nodeType="withEffect">
+                                  <p:stCondLst>
+                                    <p:cond delay="0"/>
+                                  </p:stCondLst>
+                                  <p:childTnLst>
+                                    <p:set>
+                                      <p:cBhvr>
+                                        <p:cTn id="19" dur="1" fill="hold">
+                                          <p:stCondLst>
+                                            <p:cond delay="0"/>
+                                          </p:stCondLst>
+                                        </p:cTn>
+                                        <p:tgtEl>
+                                          <p:spTgt spid="3">
+                                            <p:txEl>
+                                              <p:pRg st="4" end="4"/>
+                                            </p:txEl>
+                                          </p:spTgt>
+                                        </p:tgtEl>
+                                        <p:attrNameLst>
+                                          <p:attrName>style.visibility</p:attrName>
+                                        </p:attrNameLst>
+                                      </p:cBhvr>
+                                      <p:to>
+                                        <p:strVal val="visible"/>
+                                      </p:to>
+                                    </p:set>
+                                    <p:animEffect transition="in" filter="fade">
+                                      <p:cBhvr>
+                                        <p:cTn id="20" dur="500"/>
+                                        <p:tgtEl>
+                                          <p:spTgt spid="3">
+                                            <p:txEl>
+                                              <p:pRg st="4" end="4"/>
+                                            </p:txEl>
+                                          </p:spTgt>
+                                        </p:tgtEl>
+                                      </p:cBhvr>
+                                    </p:animEffect>
+                                  </p:childTnLst>
+                                </p:cTn>
+                              </p:par>
+                            </p:childTnLst>
+                          </p:cTn>
+                        </p:par>
+                      </p:childTnLst>
+                    </p:cTn>
+                  </p:par>
+                  <p:par>
+                    <p:cTn id="21" fill="hold">
+                      <p:stCondLst>
+                        <p:cond delay="indefinite"/>
+                      </p:stCondLst>
+                      <p:childTnLst>
+                        <p:par>
+                          <p:cTn id="22" fill="hold">
+                            <p:stCondLst>
+                              <p:cond delay="0"/>
+                            </p:stCondLst>
+                            <p:childTnLst>
+                              <p:par>
+                                <p:cTn id="23" presetID="10" presetClass="entr" presetSubtype="0" fill="hold" nodeType="clickEffect">
+                                  <p:stCondLst>
+                                    <p:cond delay="0"/>
+                                  </p:stCondLst>
+                                  <p:childTnLst>
+                                    <p:set>
+                                      <p:cBhvr>
+                                        <p:cTn id="24" dur="1" fill="hold">
+                                          <p:stCondLst>
+                                            <p:cond delay="0"/>
+                                          </p:stCondLst>
+                                        </p:cTn>
+                                        <p:tgtEl>
+                                          <p:spTgt spid="3">
+                                            <p:txEl>
+                                              <p:pRg st="6" end="6"/>
+                                            </p:txEl>
+                                          </p:spTgt>
+                                        </p:tgtEl>
+                                        <p:attrNameLst>
+                                          <p:attrName>style.visibility</p:attrName>
+                                        </p:attrNameLst>
+                                      </p:cBhvr>
+                                      <p:to>
+                                        <p:strVal val="visible"/>
+                                      </p:to>
+                                    </p:set>
+                                    <p:animEffect transition="in" filter="fade">
+                                      <p:cBhvr>
+                                        <p:cTn id="25" dur="500"/>
+                                        <p:tgtEl>
+                                          <p:spTgt spid="3">
+                                            <p:txEl>
+                                              <p:pRg st="6" end="6"/>
+                                            </p:txEl>
+                                          </p:spTgt>
+                                        </p:tgtEl>
+                                      </p:cBhvr>
+                                    </p:animEffect>
+                                  </p:childTnLst>
+                                </p:cTn>
+                              </p:par>
+                              <p:par>
+                                <p:cTn id="26" presetID="10" presetClass="entr" presetSubtype="0" fill="hold" nodeType="withEffect">
+                                  <p:stCondLst>
+                                    <p:cond delay="0"/>
+                                  </p:stCondLst>
+                                  <p:childTnLst>
+                                    <p:set>
+                                      <p:cBhvr>
+                                        <p:cTn id="27" dur="1" fill="hold">
+                                          <p:stCondLst>
+                                            <p:cond delay="0"/>
+                                          </p:stCondLst>
+                                        </p:cTn>
+                                        <p:tgtEl>
+                                          <p:spTgt spid="3">
+                                            <p:txEl>
+                                              <p:pRg st="8" end="8"/>
+                                            </p:txEl>
+                                          </p:spTgt>
+                                        </p:tgtEl>
+                                        <p:attrNameLst>
+                                          <p:attrName>style.visibility</p:attrName>
+                                        </p:attrNameLst>
+                                      </p:cBhvr>
+                                      <p:to>
+                                        <p:strVal val="visible"/>
+                                      </p:to>
+                                    </p:set>
+                                    <p:animEffect transition="in" filter="fade">
+                                      <p:cBhvr>
+                                        <p:cTn id="28" dur="500"/>
+                                        <p:tgtEl>
+                                          <p:spTgt spid="3">
+                                            <p:txEl>
+                                              <p:pRg st="8" end="8"/>
+                                            </p:txEl>
+                                          </p:spTgt>
+                                        </p:tgtEl>
+                                      </p:cBhvr>
+                                    </p:animEffect>
+                                  </p:childTnLst>
+                                </p:cTn>
+                              </p:par>
+                            </p:childTnLst>
+                          </p:cTn>
+                        </p:par>
+                      </p:childTnLst>
+                    </p:cTn>
+                  </p:par>
+                  <p:par>
+                    <p:cTn id="29" fill="hold">
+                      <p:stCondLst>
+                        <p:cond delay="indefinite"/>
+                      </p:stCondLst>
+                      <p:childTnLst>
+                        <p:par>
+                          <p:cTn id="30" fill="hold">
+                            <p:stCondLst>
+                              <p:cond delay="0"/>
+                            </p:stCondLst>
+                            <p:childTnLst>
+                              <p:par>
+                                <p:cTn id="31" presetID="10" presetClass="entr" presetSubtype="0" fill="hold" nodeType="clickEffect">
+                                  <p:stCondLst>
+                                    <p:cond delay="0"/>
+                                  </p:stCondLst>
+                                  <p:childTnLst>
+                                    <p:set>
+                                      <p:cBhvr>
+                                        <p:cTn id="32" dur="1" fill="hold">
+                                          <p:stCondLst>
+                                            <p:cond delay="0"/>
+                                          </p:stCondLst>
+                                        </p:cTn>
+                                        <p:tgtEl>
+                                          <p:spTgt spid="3">
+                                            <p:txEl>
+                                              <p:pRg st="9" end="9"/>
+                                            </p:txEl>
+                                          </p:spTgt>
+                                        </p:tgtEl>
+                                        <p:attrNameLst>
+                                          <p:attrName>style.visibility</p:attrName>
+                                        </p:attrNameLst>
+                                      </p:cBhvr>
+                                      <p:to>
+                                        <p:strVal val="visible"/>
+                                      </p:to>
+                                    </p:set>
+                                    <p:animEffect transition="in" filter="fade">
+                                      <p:cBhvr>
+                                        <p:cTn id="33" dur="500"/>
+                                        <p:tgtEl>
+                                          <p:spTgt spid="3">
+                                            <p:txEl>
+                                              <p:pRg st="9" end="9"/>
+                                            </p:txEl>
+                                          </p:spTgt>
+                                        </p:tgtEl>
+                                      </p:cBhvr>
+                                    </p:animEffect>
+                                  </p:childTnLst>
+                                </p:cTn>
+                              </p:par>
+                            </p:childTnLst>
+                          </p:cTn>
+                        </p:par>
+                      </p:childTnLst>
+                    </p:cTn>
+                  </p:par>
+                  <p:par>
+                    <p:cTn id="34" fill="hold">
+                      <p:stCondLst>
+                        <p:cond delay="indefinite"/>
+                      </p:stCondLst>
+                      <p:childTnLst>
+                        <p:par>
+                          <p:cTn id="35" fill="hold">
+                            <p:stCondLst>
+                              <p:cond delay="0"/>
+                            </p:stCondLst>
+                            <p:childTnLst>
+                              <p:par>
+                                <p:cTn id="36" presetID="10" presetClass="entr" presetSubtype="0" fill="hold" nodeType="clickEffect">
+                                  <p:stCondLst>
+                                    <p:cond delay="0"/>
+                                  </p:stCondLst>
+                                  <p:childTnLst>
+                                    <p:set>
+                                      <p:cBhvr>
+                                        <p:cTn id="37" dur="1" fill="hold">
+                                          <p:stCondLst>
+                                            <p:cond delay="0"/>
+                                          </p:stCondLst>
+                                        </p:cTn>
+                                        <p:tgtEl>
+                                          <p:spTgt spid="3">
+                                            <p:txEl>
+                                              <p:pRg st="11" end="11"/>
+                                            </p:txEl>
+                                          </p:spTgt>
+                                        </p:tgtEl>
+                                        <p:attrNameLst>
+                                          <p:attrName>style.visibility</p:attrName>
+                                        </p:attrNameLst>
+                                      </p:cBhvr>
+                                      <p:to>
+                                        <p:strVal val="visible"/>
+                                      </p:to>
+                                    </p:set>
+                                    <p:animEffect transition="in" filter="fade">
+                                      <p:cBhvr>
+                                        <p:cTn id="38" dur="500"/>
+                                        <p:tgtEl>
+                                          <p:spTgt spid="3">
+                                            <p:txEl>
+                                              <p:pRg st="11" end="11"/>
+                                            </p:txEl>
+                                          </p:spTgt>
+                                        </p:tgtEl>
+                                      </p:cBhvr>
+                                    </p:animEffect>
+                                  </p:childTnLst>
+                                </p:cTn>
+                              </p:par>
+                            </p:childTnLst>
+                          </p:cTn>
+                        </p:par>
+                      </p:childTnLst>
+                    </p:cTn>
+                  </p:par>
+                </p:childTnLst>
+              </p:cTn>
+              <p:prevCondLst>
+                <p:cond evt="onPrev" delay="0">
+                  <p:tgtEl>
+                    <p:sldTgt/>
+                  </p:tgtEl>
+                </p:cond>
+              </p:prevCondLst>
+              <p:nextCondLst>
+                <p:cond evt="onNext" delay="0">
+                  <p:tgtEl>
+                    <p:sldTgt/>
+                  </p:tgtEl>
+                </p:cond>
+              </p:nextCondLst>
+            </p:seq>
+          </p:childTnLst>
+        </p:cTn>
+      </p:par>
+    </p:tnLst>
+  </p:timing>
+</p:sld>
+</file>
+
+<file path=ppt/slides/slide21.xml><?xml version="1.0" encoding="utf-8"?>
+<p:sld xmlns:a="http://schemas.openxmlformats.org/drawingml/2006/main" xmlns:r="http://schemas.openxmlformats.org/officeDocument/2006/relationships" xmlns:p="http://schemas.openxmlformats.org/presentationml/2006/main">
+  <p:cSld>
+    <p:bg>
+      <p:bgPr>
+        <a:solidFill>
+          <a:srgbClr val="F5F5F5"/>
+        </a:solidFill>
+        <a:effectLst/>
+      </p:bgPr>
+    </p:bg>
+    <p:spTree>
+      <p:nvGrpSpPr>
+        <p:cNvPr id="1" name="">
+          <a:extLst>
+            <a:ext uri="{FF2B5EF4-FFF2-40B4-BE49-F238E27FC236}">
+              <a16:creationId xmlns:a16="http://schemas.microsoft.com/office/drawing/2014/main" id="{BD475687-C77D-9BC1-3EE8-0643FE733560}"/>
+            </a:ext>
+          </a:extLst>
+        </p:cNvPr>
+        <p:cNvGrpSpPr/>
+        <p:nvPr/>
+      </p:nvGrpSpPr>
+      <p:grpSpPr>
+        <a:xfrm>
+          <a:off x="0" y="0"/>
+          <a:ext cx="0" cy="0"/>
+          <a:chOff x="0" y="0"/>
+          <a:chExt cx="0" cy="0"/>
+        </a:xfrm>
+      </p:grpSpPr>
+      <p:sp>
+        <p:nvSpPr>
+          <p:cNvPr id="24" name="Title 1">
+            <a:extLst>
+              <a:ext uri="{FF2B5EF4-FFF2-40B4-BE49-F238E27FC236}">
+                <a16:creationId xmlns:a16="http://schemas.microsoft.com/office/drawing/2014/main" id="{31858485-360D-9BCF-CCDE-22ABAF6439C8}"/>
+              </a:ext>
+            </a:extLst>
+          </p:cNvPr>
+          <p:cNvSpPr>
+            <a:spLocks noGrp="1"/>
+          </p:cNvSpPr>
+          <p:nvPr>
+            <p:ph type="title"/>
+          </p:nvPr>
+        </p:nvSpPr>
+        <p:spPr>
+          <a:xfrm>
+            <a:off x="838200" y="365125"/>
+            <a:ext cx="10515600" cy="1325563"/>
+          </a:xfrm>
+        </p:spPr>
+        <p:txBody>
+          <a:bodyPr/>
+          <a:lstStyle/>
+          <a:p>
+            <a:r>
+              <a:rPr lang="fr-CA" dirty="0">
+                <a:latin typeface="Arial Rounded MT Bold" panose="020F0704030504030204" pitchFamily="34" charset="0"/>
+              </a:rPr>
+              <a:t>Exemple</a:t>
+            </a:r>
+          </a:p>
+        </p:txBody>
+      </p:sp>
+      <p:sp>
+        <p:nvSpPr>
+          <p:cNvPr id="25" name="Content Placeholder 2">
+            <a:extLst>
+              <a:ext uri="{FF2B5EF4-FFF2-40B4-BE49-F238E27FC236}">
+                <a16:creationId xmlns:a16="http://schemas.microsoft.com/office/drawing/2014/main" id="{90C38B7A-DA25-55D2-5B22-583FD211581E}"/>
+              </a:ext>
+            </a:extLst>
+          </p:cNvPr>
+          <p:cNvSpPr>
+            <a:spLocks noGrp="1"/>
+          </p:cNvSpPr>
+          <p:nvPr>
+            <p:ph idx="1"/>
+          </p:nvPr>
+        </p:nvSpPr>
+        <p:spPr>
+          <a:xfrm>
+            <a:off x="838200" y="1818566"/>
+            <a:ext cx="10515600" cy="4351338"/>
+          </a:xfrm>
+        </p:spPr>
+        <p:txBody>
+          <a:bodyPr>
+            <a:normAutofit/>
+          </a:bodyPr>
+          <a:lstStyle/>
+          <a:p>
+            <a:pPr marL="0" indent="0" algn="just">
+              <a:lnSpc>
+                <a:spcPct val="110000"/>
+              </a:lnSpc>
+              <a:buNone/>
+            </a:pPr>
+            <a:endParaRPr lang="fr-CA" sz="1600" dirty="0">
+              <a:latin typeface="Consolas" panose="020B0609020204030204" pitchFamily="49" charset="0"/>
+            </a:endParaRPr>
+          </a:p>
+          <a:p>
+            <a:pPr algn="just">
+              <a:lnSpc>
+                <a:spcPct val="110000"/>
+              </a:lnSpc>
+            </a:pPr>
+            <a:endParaRPr lang="fr-CA" sz="1600" dirty="0">
+              <a:latin typeface="Consolas" panose="020B0609020204030204" pitchFamily="49" charset="0"/>
+            </a:endParaRPr>
+          </a:p>
+          <a:p>
+            <a:pPr algn="just">
+              <a:lnSpc>
+                <a:spcPct val="110000"/>
+              </a:lnSpc>
+            </a:pPr>
+            <a:endParaRPr lang="fr-CA" sz="1600" dirty="0">
+              <a:latin typeface="Consolas" panose="020B0609020204030204" pitchFamily="49" charset="0"/>
+            </a:endParaRPr>
+          </a:p>
+          <a:p>
+            <a:pPr marL="0" indent="0" algn="just">
+              <a:lnSpc>
+                <a:spcPct val="110000"/>
+              </a:lnSpc>
+              <a:buNone/>
+            </a:pPr>
+            <a:endParaRPr lang="fr-CA" sz="1600" dirty="0">
+              <a:latin typeface="Consolas" panose="020B0609020204030204" pitchFamily="49" charset="0"/>
+            </a:endParaRPr>
+          </a:p>
+          <a:p>
+            <a:pPr marL="0" indent="0" algn="just">
+              <a:lnSpc>
+                <a:spcPct val="110000"/>
+              </a:lnSpc>
+              <a:buNone/>
+            </a:pPr>
+            <a:endParaRPr lang="fr-CA" sz="1600" dirty="0">
+              <a:latin typeface="Consolas" panose="020B0609020204030204" pitchFamily="49" charset="0"/>
+            </a:endParaRPr>
+          </a:p>
+        </p:txBody>
+      </p:sp>
+      <p:sp>
+        <p:nvSpPr>
+          <p:cNvPr id="26" name="Slide Number Placeholder 4">
+            <a:extLst>
+              <a:ext uri="{FF2B5EF4-FFF2-40B4-BE49-F238E27FC236}">
+                <a16:creationId xmlns:a16="http://schemas.microsoft.com/office/drawing/2014/main" id="{CFD92060-FD02-4B49-2EDE-70AB65A8DD19}"/>
+              </a:ext>
+            </a:extLst>
+          </p:cNvPr>
+          <p:cNvSpPr>
+            <a:spLocks noGrp="1"/>
+          </p:cNvSpPr>
+          <p:nvPr>
+            <p:ph type="sldNum" sz="quarter" idx="12"/>
+          </p:nvPr>
+        </p:nvSpPr>
+        <p:spPr>
+          <a:xfrm>
+            <a:off x="8610600" y="6356350"/>
+            <a:ext cx="2743200" cy="365125"/>
+          </a:xfrm>
+        </p:spPr>
+        <p:txBody>
+          <a:bodyPr/>
+          <a:lstStyle/>
+          <a:p>
+            <a:fld id="{846B06B1-1179-491F-A487-8E0C403F7C13}" type="slidenum">
+              <a:rPr lang="fr-CA" smtClean="0"/>
+              <a:t>21</a:t>
+            </a:fld>
+            <a:endParaRPr lang="fr-CA" dirty="0"/>
+          </a:p>
+        </p:txBody>
+      </p:sp>
+      <p:grpSp>
+        <p:nvGrpSpPr>
+          <p:cNvPr id="27" name="Google Shape;368;p19">
+            <a:extLst>
+              <a:ext uri="{FF2B5EF4-FFF2-40B4-BE49-F238E27FC236}">
+                <a16:creationId xmlns:a16="http://schemas.microsoft.com/office/drawing/2014/main" id="{3AD048B7-F697-2F0D-73EF-2FC8438DF40E}"/>
+              </a:ext>
+            </a:extLst>
+          </p:cNvPr>
+          <p:cNvGrpSpPr/>
+          <p:nvPr/>
+        </p:nvGrpSpPr>
+        <p:grpSpPr>
+          <a:xfrm>
+            <a:off x="907409" y="2131235"/>
+            <a:ext cx="5588641" cy="3726000"/>
+            <a:chOff x="6413585" y="3766183"/>
+            <a:chExt cx="6102299" cy="3000002"/>
+          </a:xfrm>
+        </p:grpSpPr>
+        <p:sp>
+          <p:nvSpPr>
+            <p:cNvPr id="28" name="Google Shape;369;p19">
+              <a:extLst>
+                <a:ext uri="{FF2B5EF4-FFF2-40B4-BE49-F238E27FC236}">
+                  <a16:creationId xmlns:a16="http://schemas.microsoft.com/office/drawing/2014/main" id="{D86DB69A-8151-95AD-8D51-9917C0ADA8AF}"/>
+                </a:ext>
+              </a:extLst>
+            </p:cNvPr>
+            <p:cNvSpPr/>
+            <p:nvPr/>
+          </p:nvSpPr>
+          <p:spPr>
+            <a:xfrm>
+              <a:off x="6413585" y="3766183"/>
+              <a:ext cx="432397" cy="3000002"/>
+            </a:xfrm>
+            <a:prstGeom prst="rect">
+              <a:avLst/>
+            </a:prstGeom>
+            <a:solidFill>
+              <a:srgbClr val="7F7F7F"/>
+            </a:solidFill>
+            <a:ln w="12700" cap="flat" cmpd="sng">
+              <a:solidFill>
+                <a:srgbClr val="7F7F7F"/>
+              </a:solidFill>
+              <a:prstDash val="solid"/>
+              <a:miter lim="800000"/>
+              <a:headEnd type="none" w="sm" len="sm"/>
+              <a:tailEnd type="none" w="sm" len="sm"/>
+            </a:ln>
+          </p:spPr>
+          <p:txBody>
+            <a:bodyPr spcFirstLastPara="1" wrap="square" lIns="91425" tIns="45700" rIns="91425" bIns="45700" anchor="ctr" anchorCtr="0">
+              <a:noAutofit/>
+            </a:bodyPr>
+            <a:lstStyle/>
+            <a:p>
+              <a:pPr marL="0" marR="0" lvl="0" indent="0" algn="ctr" rtl="0">
+                <a:spcBef>
+                  <a:spcPts val="0"/>
+                </a:spcBef>
+                <a:spcAft>
+                  <a:spcPts val="0"/>
+                </a:spcAft>
+                <a:buNone/>
+              </a:pPr>
+              <a:r>
+                <a:rPr lang="fr-CA" sz="1400" dirty="0">
+                  <a:solidFill>
+                    <a:schemeClr val="lt1"/>
+                  </a:solidFill>
+                  <a:latin typeface="Calibri"/>
+                  <a:ea typeface="Calibri"/>
+                  <a:cs typeface="Calibri"/>
+                  <a:sym typeface="Calibri"/>
+                </a:rPr>
+                <a:t>1</a:t>
+              </a:r>
+              <a:endParaRPr sz="1400" dirty="0">
+                <a:solidFill>
+                  <a:schemeClr val="lt1"/>
+                </a:solidFill>
+                <a:latin typeface="Calibri"/>
+                <a:ea typeface="Calibri"/>
+                <a:cs typeface="Calibri"/>
+                <a:sym typeface="Calibri"/>
+              </a:endParaRPr>
+            </a:p>
+            <a:p>
+              <a:pPr marL="0" marR="0" lvl="0" indent="0" algn="ctr" rtl="0">
+                <a:spcBef>
+                  <a:spcPts val="0"/>
+                </a:spcBef>
+                <a:spcAft>
+                  <a:spcPts val="0"/>
+                </a:spcAft>
+                <a:buNone/>
+              </a:pPr>
+              <a:r>
+                <a:rPr lang="fr-CA" sz="1400" dirty="0">
+                  <a:solidFill>
+                    <a:schemeClr val="lt1"/>
+                  </a:solidFill>
+                  <a:latin typeface="Calibri"/>
+                  <a:ea typeface="Calibri"/>
+                  <a:cs typeface="Calibri"/>
+                  <a:sym typeface="Calibri"/>
+                </a:rPr>
+                <a:t>2</a:t>
+              </a:r>
+              <a:endParaRPr sz="1400" dirty="0"/>
+            </a:p>
+            <a:p>
+              <a:pPr marL="0" marR="0" lvl="0" indent="0" algn="ctr" rtl="0">
+                <a:spcBef>
+                  <a:spcPts val="0"/>
+                </a:spcBef>
+                <a:spcAft>
+                  <a:spcPts val="0"/>
+                </a:spcAft>
+                <a:buNone/>
+              </a:pPr>
+              <a:r>
+                <a:rPr lang="fr-CA" sz="1400" dirty="0">
+                  <a:solidFill>
+                    <a:schemeClr val="lt1"/>
+                  </a:solidFill>
+                  <a:latin typeface="Calibri"/>
+                  <a:ea typeface="Calibri"/>
+                  <a:cs typeface="Calibri"/>
+                  <a:sym typeface="Calibri"/>
+                </a:rPr>
+                <a:t>3</a:t>
+              </a:r>
+            </a:p>
+            <a:p>
+              <a:pPr marL="0" marR="0" lvl="0" indent="0" algn="ctr" rtl="0">
+                <a:spcBef>
+                  <a:spcPts val="0"/>
+                </a:spcBef>
+                <a:spcAft>
+                  <a:spcPts val="0"/>
+                </a:spcAft>
+                <a:buNone/>
+              </a:pPr>
+              <a:r>
+                <a:rPr lang="fr-CA" sz="1400" dirty="0">
+                  <a:solidFill>
+                    <a:schemeClr val="lt1"/>
+                  </a:solidFill>
+                  <a:latin typeface="Calibri"/>
+                  <a:ea typeface="Calibri"/>
+                  <a:cs typeface="Calibri"/>
+                  <a:sym typeface="Calibri"/>
+                </a:rPr>
+                <a:t>4</a:t>
+              </a:r>
+            </a:p>
+            <a:p>
+              <a:pPr marL="0" marR="0" lvl="0" indent="0" algn="ctr" rtl="0">
+                <a:spcBef>
+                  <a:spcPts val="0"/>
+                </a:spcBef>
+                <a:spcAft>
+                  <a:spcPts val="0"/>
+                </a:spcAft>
+                <a:buNone/>
+              </a:pPr>
+              <a:r>
+                <a:rPr lang="fr-CA" sz="1400" dirty="0">
+                  <a:solidFill>
+                    <a:schemeClr val="lt1"/>
+                  </a:solidFill>
+                  <a:latin typeface="Calibri"/>
+                  <a:ea typeface="Calibri"/>
+                  <a:cs typeface="Calibri"/>
+                  <a:sym typeface="Calibri"/>
+                </a:rPr>
+                <a:t>5</a:t>
+              </a:r>
+            </a:p>
+            <a:p>
+              <a:pPr marL="0" marR="0" lvl="0" indent="0" algn="ctr" rtl="0">
+                <a:spcBef>
+                  <a:spcPts val="0"/>
+                </a:spcBef>
+                <a:spcAft>
+                  <a:spcPts val="0"/>
+                </a:spcAft>
+                <a:buNone/>
+              </a:pPr>
+              <a:r>
+                <a:rPr lang="fr-CA" sz="1400" dirty="0">
+                  <a:solidFill>
+                    <a:schemeClr val="lt1"/>
+                  </a:solidFill>
+                  <a:latin typeface="Calibri"/>
+                  <a:ea typeface="Calibri"/>
+                  <a:cs typeface="Calibri"/>
+                  <a:sym typeface="Calibri"/>
+                </a:rPr>
+                <a:t>6</a:t>
+              </a:r>
+            </a:p>
+            <a:p>
+              <a:pPr marL="0" marR="0" lvl="0" indent="0" algn="ctr" rtl="0">
+                <a:spcB